--- a/demo_session/deck_gauges.pptx
+++ b/demo_session/deck_gauges.pptx
@@ -39,6 +39,7 @@
     <p:sldId id="287" r:id="rId38"/>
     <p:sldId id="288" r:id="rId39"/>
     <p:sldId id="289" r:id="rId40"/>
+    <p:sldId id="290" r:id="rId41"/>
   </p:sldIdLst>
   <p:sldSz cx="12191695" cy="6858000" type="screen4x3"/>
   <p:notesSz cx="6858000" cy="9144000"/>
@@ -3219,7 +3220,7 @@
                 </a:solidFill>
                 <a:latin typeface="Arial"/>
               </a:rPr>
-              <a:t>DRAFT — pending review.  Every number here comes from a committed run of one shared, parameterized model (MACOS, mmacos); the run tags are on the provenance slide.</a:t>
+              <a:t>DRAFT — pending review.  Every number here comes from a committed run of one shared, parameterized model (MACOS, mmacos); the run tags are on the provenance slide.  Bench geometry under revision (2026-09-15): the record's 7° splitter is not buildable; the layouts show the proposed 30° geometry, and the substrates and camera are being added to the model.</a:t>
             </a:r>
           </a:p>
         </p:txBody>
@@ -3462,7 +3463,7 @@
                 </a:solidFill>
                 <a:latin typeface="Arial"/>
               </a:rPr>
-              <a:t>Drawn by pdi_run from the emitted deck (pdi_layout.png in pdi_dm96); the whole train is on the front-end slide.</a:t>
+              <a:t>Drawn by pdi_run from the emitted deck (pdi_layout.png in pdi_dm96); the whole train is on the front-end slide.  The pinhole plate is drawn as a surface and the camera as a plane; the next model round draws the 2-3 mm substrate and the 13 mm sensor.</a:t>
             </a:r>
           </a:p>
         </p:txBody>
@@ -15872,7 +15873,7 @@
                 </a:solidFill>
                 <a:latin typeface="Arial"/>
               </a:rPr>
-              <a:t>Everything shares the front end: a filtered HeNe, a collimator, a 7° plate splitter, a 700 mm leg to the mirror, a focuser to an internal focus, a field lens to a camera at the pupil image</a:t>
+              <a:t>Everything shares the front end: a filtered HeNe, a collimator, a plate splitter at 30°, a 700 mm leg to the mirror, a focuser to an internal focus, a field lens to a camera at the pupil image</a:t>
             </a:r>
           </a:p>
         </p:txBody>
@@ -15923,7 +15924,7 @@
       </p:sp>
       <p:pic>
         <p:nvPicPr>
-          <p:cNvPr id="4" name="Picture 3" descr="crop_lens_vlayout_train.png"/>
+          <p:cNvPr id="4" name="Picture 3" descr="crop_bench_bs30_train.png"/>
           <p:cNvPicPr>
             <a:picLocks noChangeAspect="1"/>
           </p:cNvPicPr>
@@ -15937,8 +15938,8 @@
         </p:blipFill>
         <p:spPr>
           <a:xfrm>
-            <a:off x="2841221" y="1298448"/>
-            <a:ext cx="6509251" cy="1617472"/>
+            <a:off x="4302204" y="1298448"/>
+            <a:ext cx="3587286" cy="2183892"/>
           </a:xfrm>
           <a:prstGeom prst="rect">
             <a:avLst/>
@@ -15953,8 +15954,8 @@
         </p:nvSpPr>
         <p:spPr>
           <a:xfrm>
-            <a:off x="411480" y="2934208"/>
-            <a:ext cx="11368735" cy="394208"/>
+            <a:off x="411480" y="3500628"/>
+            <a:ext cx="11368735" cy="559307"/>
           </a:xfrm>
           <a:prstGeom prst="rect">
             <a:avLst/>
@@ -15979,7 +15980,7 @@
                 </a:solidFill>
                 <a:latin typeface="Arial"/>
               </a:rPr>
-              <a:t>The shared front end as traced by the engine, seen from above: source at left, collimator L1, the 7° plate splitter, the 96 mm mirror on its 700 mm leg (blue), the reference arm and its flat (orange, the interferometer only), the focuser L2 toward the internal focus.  The mask seat at that focus is where the four sensing methods differ.</a:t>
+              <a:t>The shared front end as traced by the engine, seen from above, at the proposed 30° splitter: source at left, collimator L1, the splitter, the 96 mm mirror on its 700 mm leg (blue), the reference arm and its flat (orange, the interferometer only), the focuser L2 toward the internal focus.  The mask seat at that focus is where the four sensing methods differ.</a:t>
             </a:r>
           </a:p>
         </p:txBody>
@@ -15993,8 +15994,8 @@
           <p:nvPr/>
         </p:nvGraphicFramePr>
         <p:xfrm>
-          <a:off x="411480" y="3364992"/>
-          <a:ext cx="5806439" cy="1400175"/>
+          <a:off x="411480" y="4096512"/>
+          <a:ext cx="5806439" cy="1965960"/>
         </p:xfrm>
         <a:graphic>
           <a:graphicData uri="http://schemas.openxmlformats.org/drawingml/2006/table">
@@ -16003,8 +16004,8 @@
                 <a:tableStyleId>{5C22544A-7EE6-4342-B048-85BDC9FD1C3A}</a:tableStyleId>
               </a:tblPr>
               <a:tblGrid>
-                <a:gridCol w="1281941"/>
-                <a:gridCol w="4524498"/>
+                <a:gridCol w="796044"/>
+                <a:gridCol w="5010395"/>
               </a:tblGrid>
               <a:tr h="280035">
                 <a:tc>
@@ -16098,7 +16099,7 @@
                   </a:tcPr>
                 </a:tc>
               </a:tr>
-              <a:tr h="280035">
+              <a:tr h="468630">
                 <a:tc>
                   <a:txBody>
                     <a:bodyPr wrap="square"/>
@@ -16144,7 +16145,7 @@
                   </a:tcPr>
                 </a:tc>
               </a:tr>
-              <a:tr h="280035">
+              <a:tr h="468630">
                 <a:tc>
                   <a:txBody>
                     <a:bodyPr wrap="square"/>
@@ -16179,7 +16180,7 @@
                           </a:solidFill>
                           <a:latin typeface="Arial"/>
                         </a:rPr>
-                        <a:t>7° incidence, 2.6 mm thick, 50/50; compensator plate matched</a:t>
+                        <a:t>30° incidence (proposed; the record's 7° does not clear the node), 2.6 mm thick, 50/50; compensator matched</a:t>
                       </a:r>
                     </a:p>
                   </a:txBody>
@@ -16190,7 +16191,7 @@
                   </a:tcPr>
                 </a:tc>
               </a:tr>
-              <a:tr h="280035">
+              <a:tr h="468630">
                 <a:tc>
                   <a:txBody>
                     <a:bodyPr wrap="square"/>
@@ -16249,8 +16250,8 @@
           <p:nvPr/>
         </p:nvGraphicFramePr>
         <p:xfrm>
-          <a:off x="6400800" y="3364992"/>
-          <a:ext cx="5394960" cy="1314450"/>
+          <a:off x="6400800" y="4096512"/>
+          <a:ext cx="5394960" cy="1485900"/>
         </p:xfrm>
         <a:graphic>
           <a:graphicData uri="http://schemas.openxmlformats.org/drawingml/2006/table">
@@ -16400,7 +16401,7 @@
                   </a:tcPr>
                 </a:tc>
               </a:tr>
-              <a:tr h="262890">
+              <a:tr h="434340">
                 <a:tc>
                   <a:txBody>
                     <a:bodyPr wrap="square"/>
@@ -16435,7 +16436,7 @@
                           </a:solidFill>
                           <a:latin typeface="Arial"/>
                         </a:rPr>
-                        <a:t>385 pixels across the pupil (1 Mpix class), 5 pixels per actuator</a:t>
+                        <a:t>pupil image 9.4 mm: a 6.5 µm sCMOS puts 1450 pixels across it, binned 4 to the modeled 385 (5 per actuator)</a:t>
                       </a:r>
                     </a:p>
                   </a:txBody>
@@ -16504,7 +16505,7 @@
         </p:nvSpPr>
         <p:spPr>
           <a:xfrm>
-            <a:off x="6400800" y="4825746"/>
+            <a:off x="6400800" y="5728716"/>
             <a:ext cx="5394960" cy="274320"/>
           </a:xfrm>
           <a:prstGeom prst="rect">
@@ -16530,7 +16531,7 @@
                 </a:solidFill>
                 <a:latin typeface="Arial"/>
               </a:rPr>
-              <a:t>The reference arm (a 103 mm flat on a piezo stage, 564 mm leg) is the interferometer's; shuttered, the same bench is every other sensor.  Lenses, not off-axis mirrors: the choice is priced on the lenses-versus-mirrors slide.</a:t>
+              <a:t>The reference arm (a 103 mm flat on a piezo stage, 564 mm leg) is the interferometer's; shuttered, the same bench is every other sensor.  Lenses, not off-axis mirrors: the choice is priced on the lenses-versus-mirrors slide.  Why 30°: the backup slide on clearance.</a:t>
             </a:r>
           </a:p>
         </p:txBody>
@@ -19456,7 +19457,7 @@
                 </a:solidFill>
                 <a:latin typeface="Arial"/>
               </a:rPr>
-              <a:t>Backup: provenance</a:t>
+              <a:t>Backup: why the splitter moves from 7° to 30°</a:t>
             </a:r>
           </a:p>
           <a:p>
@@ -19472,7 +19473,7 @@
                 </a:solidFill>
                 <a:latin typeface="Arial"/>
               </a:rPr>
-              <a:t>Every number in this deck has a run tag in a committed run directory of the shared model; the three lane reports carry the full tables</a:t>
+              <a:t>The record's clearance solve cleared the mirror, flat and camera bodies at the leg ends and never looked at the node; two 103 mm beams 2θ apart clear a part at distance d only if d·sin 2θ exceeds about 111 mm</a:t>
             </a:r>
           </a:p>
         </p:txBody>
@@ -19521,6 +19522,710 @@
           </a:p>
         </p:txBody>
       </p:sp>
+      <p:graphicFrame>
+        <p:nvGraphicFramePr>
+          <p:cNvPr id="4" name="Table 3"/>
+          <p:cNvGraphicFramePr>
+            <a:graphicFrameLocks noGrp="1"/>
+          </p:cNvGraphicFramePr>
+          <p:nvPr/>
+        </p:nvGraphicFramePr>
+        <p:xfrm>
+          <a:off x="411480" y="1298448"/>
+          <a:ext cx="5806439" cy="2154555"/>
+        </p:xfrm>
+        <a:graphic>
+          <a:graphicData uri="http://schemas.openxmlformats.org/drawingml/2006/table">
+            <a:tbl>
+              <a:tblPr firstRow="1" bandRow="1">
+                <a:tableStyleId>{5C22544A-7EE6-4342-B048-85BDC9FD1C3A}</a:tableStyleId>
+              </a:tblPr>
+              <a:tblGrid>
+                <a:gridCol w="1235964"/>
+                <a:gridCol w="862353"/>
+                <a:gridCol w="3708122"/>
+              </a:tblGrid>
+              <a:tr h="280035">
+                <a:tc>
+                  <a:txBody>
+                    <a:bodyPr wrap="square"/>
+                    <a:lstStyle/>
+                    <a:p>
+                      <a:r>
+                        <a:rPr sz="1100" b="1">
+                          <a:solidFill>
+                            <a:srgbClr val="FFFFFF"/>
+                          </a:solidFill>
+                          <a:latin typeface="Arial"/>
+                        </a:rPr>
+                        <a:t>splitter</a:t>
+                      </a:r>
+                    </a:p>
+                  </a:txBody>
+                  <a:tcPr marL="54864" marR="54864" marT="18288" marB="18288">
+                    <a:solidFill>
+                      <a:srgbClr val="1F4E79"/>
+                    </a:solidFill>
+                  </a:tcPr>
+                </a:tc>
+                <a:tc>
+                  <a:txBody>
+                    <a:bodyPr wrap="square"/>
+                    <a:lstStyle/>
+                    <a:p>
+                      <a:r>
+                        <a:rPr sz="1100" b="1">
+                          <a:solidFill>
+                            <a:srgbClr val="FFFFFF"/>
+                          </a:solidFill>
+                          <a:latin typeface="Arial"/>
+                        </a:rPr>
+                        <a:t>worst part</a:t>
+                      </a:r>
+                    </a:p>
+                  </a:txBody>
+                  <a:tcPr marL="54864" marR="54864" marT="18288" marB="18288">
+                    <a:solidFill>
+                      <a:srgbClr val="1F4E79"/>
+                    </a:solidFill>
+                  </a:tcPr>
+                </a:tc>
+                <a:tc>
+                  <a:txBody>
+                    <a:bodyPr wrap="square"/>
+                    <a:lstStyle/>
+                    <a:p>
+                      <a:r>
+                        <a:rPr sz="1100" b="1">
+                          <a:solidFill>
+                            <a:srgbClr val="FFFFFF"/>
+                          </a:solidFill>
+                          <a:latin typeface="Arial"/>
+                        </a:rPr>
+                        <a:t>others</a:t>
+                      </a:r>
+                    </a:p>
+                  </a:txBody>
+                  <a:tcPr marL="54864" marR="54864" marT="18288" marB="18288">
+                    <a:solidFill>
+                      <a:srgbClr val="1F4E79"/>
+                    </a:solidFill>
+                  </a:tcPr>
+                </a:tc>
+              </a:tr>
+              <a:tr h="468630">
+                <a:tc>
+                  <a:txBody>
+                    <a:bodyPr wrap="square"/>
+                    <a:lstStyle/>
+                    <a:p>
+                      <a:r>
+                        <a:rPr sz="1100" b="0">
+                          <a:solidFill>
+                            <a:srgbClr val="282828"/>
+                          </a:solidFill>
+                          <a:latin typeface="Arial"/>
+                        </a:rPr>
+                        <a:t>7° (the record)</a:t>
+                      </a:r>
+                    </a:p>
+                  </a:txBody>
+                  <a:tcPr marL="54864" marR="54864" marT="18288" marB="18288">
+                    <a:solidFill>
+                      <a:srgbClr val="FFFFFF"/>
+                    </a:solidFill>
+                  </a:tcPr>
+                </a:tc>
+                <a:tc>
+                  <a:txBody>
+                    <a:bodyPr wrap="square"/>
+                    <a:lstStyle/>
+                    <a:p>
+                      <a:r>
+                        <a:rPr sz="1100" b="0">
+                          <a:solidFill>
+                            <a:srgbClr val="282828"/>
+                          </a:solidFill>
+                          <a:latin typeface="Arial"/>
+                        </a:rPr>
+                        <a:t>output plate −109 mm</a:t>
+                      </a:r>
+                    </a:p>
+                  </a:txBody>
+                  <a:tcPr marL="54864" marR="54864" marT="18288" marB="18288">
+                    <a:solidFill>
+                      <a:srgbClr val="FFFFFF"/>
+                    </a:solidFill>
+                  </a:tcPr>
+                </a:tc>
+                <a:tc>
+                  <a:txBody>
+                    <a:bodyPr wrap="square"/>
+                    <a:lstStyle/>
+                    <a:p>
+                      <a:r>
+                        <a:rPr sz="1100" b="0">
+                          <a:solidFill>
+                            <a:srgbClr val="282828"/>
+                          </a:solidFill>
+                          <a:latin typeface="Arial"/>
+                        </a:rPr>
+                        <a:t>eight parts in another beam: reference plate, analyzer, compensator, L2, polarizer, L1</a:t>
+                      </a:r>
+                    </a:p>
+                  </a:txBody>
+                  <a:tcPr marL="54864" marR="54864" marT="18288" marB="18288">
+                    <a:solidFill>
+                      <a:srgbClr val="FFFFFF"/>
+                    </a:solidFill>
+                  </a:tcPr>
+                </a:tc>
+              </a:tr>
+              <a:tr h="468630">
+                <a:tc>
+                  <a:txBody>
+                    <a:bodyPr wrap="square"/>
+                    <a:lstStyle/>
+                    <a:p>
+                      <a:r>
+                        <a:rPr sz="1100" b="0">
+                          <a:solidFill>
+                            <a:srgbClr val="282828"/>
+                          </a:solidFill>
+                          <a:latin typeface="Arial"/>
+                        </a:rPr>
+                        <a:t>15°</a:t>
+                      </a:r>
+                    </a:p>
+                  </a:txBody>
+                  <a:tcPr marL="54864" marR="54864" marT="18288" marB="18288">
+                    <a:solidFill>
+                      <a:srgbClr val="ECF1F6"/>
+                    </a:solidFill>
+                  </a:tcPr>
+                </a:tc>
+                <a:tc>
+                  <a:txBody>
+                    <a:bodyPr wrap="square"/>
+                    <a:lstStyle/>
+                    <a:p>
+                      <a:r>
+                        <a:rPr sz="1100" b="0">
+                          <a:solidFill>
+                            <a:srgbClr val="282828"/>
+                          </a:solidFill>
+                          <a:latin typeface="Arial"/>
+                        </a:rPr>
+                        <a:t>compensator −27 mm</a:t>
+                      </a:r>
+                    </a:p>
+                  </a:txBody>
+                  <a:tcPr marL="54864" marR="54864" marT="18288" marB="18288">
+                    <a:solidFill>
+                      <a:srgbClr val="ECF1F6"/>
+                    </a:solidFill>
+                  </a:tcPr>
+                </a:tc>
+                <a:tc>
+                  <a:txBody>
+                    <a:bodyPr wrap="square"/>
+                    <a:lstStyle/>
+                    <a:p>
+                      <a:r>
+                        <a:rPr sz="1100" b="0">
+                          <a:solidFill>
+                            <a:srgbClr val="282828"/>
+                          </a:solidFill>
+                          <a:latin typeface="Arial"/>
+                        </a:rPr>
+                        <a:t>output plate −17, analyzer −11, L2 +10</a:t>
+                      </a:r>
+                    </a:p>
+                  </a:txBody>
+                  <a:tcPr marL="54864" marR="54864" marT="18288" marB="18288">
+                    <a:solidFill>
+                      <a:srgbClr val="ECF1F6"/>
+                    </a:solidFill>
+                  </a:tcPr>
+                </a:tc>
+              </a:tr>
+              <a:tr h="468630">
+                <a:tc>
+                  <a:txBody>
+                    <a:bodyPr wrap="square"/>
+                    <a:lstStyle/>
+                    <a:p>
+                      <a:r>
+                        <a:rPr sz="1100" b="0">
+                          <a:solidFill>
+                            <a:srgbClr val="282828"/>
+                          </a:solidFill>
+                          <a:latin typeface="Arial"/>
+                        </a:rPr>
+                        <a:t>22.5°</a:t>
+                      </a:r>
+                    </a:p>
+                  </a:txBody>
+                  <a:tcPr marL="54864" marR="54864" marT="18288" marB="18288">
+                    <a:solidFill>
+                      <a:srgbClr val="FFFFFF"/>
+                    </a:solidFill>
+                  </a:tcPr>
+                </a:tc>
+                <a:tc>
+                  <a:txBody>
+                    <a:bodyPr wrap="square"/>
+                    <a:lstStyle/>
+                    <a:p>
+                      <a:r>
+                        <a:rPr sz="1100" b="0">
+                          <a:solidFill>
+                            <a:srgbClr val="282828"/>
+                          </a:solidFill>
+                          <a:latin typeface="Arial"/>
+                        </a:rPr>
+                        <a:t>compensator +16 mm</a:t>
+                      </a:r>
+                    </a:p>
+                  </a:txBody>
+                  <a:tcPr marL="54864" marR="54864" marT="18288" marB="18288">
+                    <a:solidFill>
+                      <a:srgbClr val="FFFFFF"/>
+                    </a:solidFill>
+                  </a:tcPr>
+                </a:tc>
+                <a:tc>
+                  <a:txBody>
+                    <a:bodyPr wrap="square"/>
+                    <a:lstStyle/>
+                    <a:p>
+                      <a:r>
+                        <a:rPr sz="1100" b="0">
+                          <a:solidFill>
+                            <a:srgbClr val="282828"/>
+                          </a:solidFill>
+                          <a:latin typeface="Arial"/>
+                        </a:rPr>
+                        <a:t>output plate +55, analyzer +65, L2 +100, L1 +153</a:t>
+                      </a:r>
+                    </a:p>
+                  </a:txBody>
+                  <a:tcPr marL="54864" marR="54864" marT="18288" marB="18288">
+                    <a:solidFill>
+                      <a:srgbClr val="FFFFFF"/>
+                    </a:solidFill>
+                  </a:tcPr>
+                </a:tc>
+              </a:tr>
+              <a:tr h="468630">
+                <a:tc>
+                  <a:txBody>
+                    <a:bodyPr wrap="square"/>
+                    <a:lstStyle/>
+                    <a:p>
+                      <a:r>
+                        <a:rPr sz="1100" b="0">
+                          <a:solidFill>
+                            <a:srgbClr val="282828"/>
+                          </a:solidFill>
+                          <a:latin typeface="Arial"/>
+                        </a:rPr>
+                        <a:t>30°</a:t>
+                      </a:r>
+                    </a:p>
+                  </a:txBody>
+                  <a:tcPr marL="54864" marR="54864" marT="18288" marB="18288">
+                    <a:solidFill>
+                      <a:srgbClr val="ECF1F6"/>
+                    </a:solidFill>
+                  </a:tcPr>
+                </a:tc>
+                <a:tc>
+                  <a:txBody>
+                    <a:bodyPr wrap="square"/>
+                    <a:lstStyle/>
+                    <a:p>
+                      <a:r>
+                        <a:rPr sz="1100" b="0">
+                          <a:solidFill>
+                            <a:srgbClr val="282828"/>
+                          </a:solidFill>
+                          <a:latin typeface="Arial"/>
+                        </a:rPr>
+                        <a:t>compensator +57 mm</a:t>
+                      </a:r>
+                    </a:p>
+                  </a:txBody>
+                  <a:tcPr marL="54864" marR="54864" marT="18288" marB="18288">
+                    <a:solidFill>
+                      <a:srgbClr val="ECF1F6"/>
+                    </a:solidFill>
+                  </a:tcPr>
+                </a:tc>
+                <a:tc>
+                  <a:txBody>
+                    <a:bodyPr wrap="square"/>
+                    <a:lstStyle/>
+                    <a:p>
+                      <a:r>
+                        <a:rPr sz="1100" b="0">
+                          <a:solidFill>
+                            <a:srgbClr val="282828"/>
+                          </a:solidFill>
+                          <a:latin typeface="Arial"/>
+                        </a:rPr>
+                        <a:t>output plate +178, analyzer +196, L2 +257, L1 +350</a:t>
+                      </a:r>
+                    </a:p>
+                  </a:txBody>
+                  <a:tcPr marL="54864" marR="54864" marT="18288" marB="18288">
+                    <a:solidFill>
+                      <a:srgbClr val="ECF1F6"/>
+                    </a:solidFill>
+                  </a:tcPr>
+                </a:tc>
+              </a:tr>
+            </a:tbl>
+          </a:graphicData>
+        </a:graphic>
+      </p:graphicFrame>
+      <p:sp>
+        <p:nvSpPr>
+          <p:cNvPr id="5" name="TextBox 4"/>
+          <p:cNvSpPr txBox="1"/>
+          <p:nvPr/>
+        </p:nvSpPr>
+        <p:spPr>
+          <a:xfrm>
+            <a:off x="411480" y="3599307"/>
+            <a:ext cx="5806440" cy="274320"/>
+          </a:xfrm>
+          <a:prstGeom prst="rect">
+            <a:avLst/>
+          </a:prstGeom>
+          <a:noFill/>
+        </p:spPr>
+        <p:txBody>
+          <a:bodyPr wrap="square">
+            <a:spAutoFit/>
+          </a:bodyPr>
+          <a:lstStyle/>
+          <a:p>
+            <a:pPr>
+              <a:spcAft>
+                <a:spcPts val="600"/>
+              </a:spcAft>
+            </a:pPr>
+            <a:r>
+              <a:rPr sz="1200" b="0">
+                <a:solidFill>
+                  <a:srgbClr val="282828"/>
+                </a:solidFill>
+                <a:latin typeface="Arial"/>
+              </a:rPr>
+              <a:t>•  What moves: the output plate and analyzer from 17 and 27 mm behind the splitter to 160 and 170 mm, just ahead of the focuser at 207 mm; nothing else, so the tuned tail is untouched.</a:t>
+            </a:r>
+          </a:p>
+          <a:p>
+            <a:pPr>
+              <a:spcAft>
+                <a:spcPts val="600"/>
+              </a:spcAft>
+            </a:pPr>
+            <a:r>
+              <a:rPr sz="1200" b="0">
+                <a:solidFill>
+                  <a:srgbClr val="282828"/>
+                </a:solidFill>
+                <a:latin typeface="Arial"/>
+              </a:rPr>
+              <a:t>•  What it costs the sensors: nothing.  At 30° the Zernike rows reproduce (0.9943 / 5 pm against 0.9942 / 5), the mask gates pass, and the arm's channel phase difference is 1.69 mrad against 1.63; the plate's diattenuation rises to 10% but uniformly, a non-term with the laser on its eigenaxis.</a:t>
+            </a:r>
+          </a:p>
+        </p:txBody>
+      </p:sp>
+      <p:pic>
+        <p:nvPicPr>
+          <p:cNvPr id="6" name="Picture 5" descr="crop_bench_bs22_node.png"/>
+          <p:cNvPicPr>
+            <a:picLocks noChangeAspect="1"/>
+          </p:cNvPicPr>
+          <p:nvPr/>
+        </p:nvPicPr>
+        <p:blipFill>
+          <a:blip r:embed="rId2"/>
+          <a:stretch>
+            <a:fillRect/>
+          </a:stretch>
+        </p:blipFill>
+        <p:spPr>
+          <a:xfrm>
+            <a:off x="7496678" y="1298448"/>
+            <a:ext cx="3203203" cy="1965451"/>
+          </a:xfrm>
+          <a:prstGeom prst="rect">
+            <a:avLst/>
+          </a:prstGeom>
+        </p:spPr>
+      </p:pic>
+      <p:sp>
+        <p:nvSpPr>
+          <p:cNvPr id="7" name="TextBox 6"/>
+          <p:cNvSpPr txBox="1"/>
+          <p:nvPr/>
+        </p:nvSpPr>
+        <p:spPr>
+          <a:xfrm>
+            <a:off x="6400800" y="3282188"/>
+            <a:ext cx="5394960" cy="229107"/>
+          </a:xfrm>
+          <a:prstGeom prst="rect">
+            <a:avLst/>
+          </a:prstGeom>
+          <a:noFill/>
+        </p:spPr>
+        <p:txBody>
+          <a:bodyPr wrap="square">
+            <a:spAutoFit/>
+          </a:bodyPr>
+          <a:lstStyle/>
+          <a:p>
+            <a:pPr algn="ctr">
+              <a:spcAft>
+                <a:spcPts val="0"/>
+              </a:spcAft>
+            </a:pPr>
+            <a:r>
+              <a:rPr sz="1000" b="0">
+                <a:solidFill>
+                  <a:srgbClr val="6E6E6E"/>
+                </a:solidFill>
+                <a:latin typeface="Arial"/>
+              </a:rPr>
+              <a:t>The node at 22.5°, the alternative: every part clears, the compensator by 16 mm.</a:t>
+            </a:r>
+          </a:p>
+        </p:txBody>
+      </p:sp>
+      <p:pic>
+        <p:nvPicPr>
+          <p:cNvPr id="8" name="Picture 7" descr="crop_bench_bs7_node.png"/>
+          <p:cNvPicPr>
+            <a:picLocks noChangeAspect="1"/>
+          </p:cNvPicPr>
+          <p:nvPr/>
+        </p:nvPicPr>
+        <p:blipFill>
+          <a:blip r:embed="rId3"/>
+          <a:stretch>
+            <a:fillRect/>
+          </a:stretch>
+        </p:blipFill>
+        <p:spPr>
+          <a:xfrm>
+            <a:off x="7414234" y="3547872"/>
+            <a:ext cx="3368090" cy="1965451"/>
+          </a:xfrm>
+          <a:prstGeom prst="rect">
+            <a:avLst/>
+          </a:prstGeom>
+        </p:spPr>
+      </p:pic>
+      <p:sp>
+        <p:nvSpPr>
+          <p:cNvPr id="9" name="TextBox 8"/>
+          <p:cNvSpPr txBox="1"/>
+          <p:nvPr/>
+        </p:nvSpPr>
+        <p:spPr>
+          <a:xfrm>
+            <a:off x="6400800" y="5531611"/>
+            <a:ext cx="5394960" cy="229107"/>
+          </a:xfrm>
+          <a:prstGeom prst="rect">
+            <a:avLst/>
+          </a:prstGeom>
+          <a:noFill/>
+        </p:spPr>
+        <p:txBody>
+          <a:bodyPr wrap="square">
+            <a:spAutoFit/>
+          </a:bodyPr>
+          <a:lstStyle/>
+          <a:p>
+            <a:pPr algn="ctr">
+              <a:spcAft>
+                <a:spcPts val="0"/>
+              </a:spcAft>
+            </a:pPr>
+            <a:r>
+              <a:rPr sz="1000" b="0">
+                <a:solidFill>
+                  <a:srgbClr val="6E6E6E"/>
+                </a:solidFill>
+                <a:latin typeface="Arial"/>
+              </a:rPr>
+              <a:t>The record's node at 7°: eight parts sit in another beam.</a:t>
+            </a:r>
+          </a:p>
+        </p:txBody>
+      </p:sp>
+      <p:sp>
+        <p:nvSpPr>
+          <p:cNvPr id="10" name="TextBox 9"/>
+          <p:cNvSpPr txBox="1"/>
+          <p:nvPr/>
+        </p:nvSpPr>
+        <p:spPr>
+          <a:xfrm>
+            <a:off x="6400800" y="5797295"/>
+            <a:ext cx="5394960" cy="274320"/>
+          </a:xfrm>
+          <a:prstGeom prst="rect">
+            <a:avLst/>
+          </a:prstGeom>
+          <a:noFill/>
+        </p:spPr>
+        <p:txBody>
+          <a:bodyPr wrap="square">
+            <a:spAutoFit/>
+          </a:bodyPr>
+          <a:lstStyle/>
+          <a:p>
+            <a:pPr>
+              <a:spcAft>
+                <a:spcPts val="600"/>
+              </a:spcAft>
+            </a:pPr>
+            <a:r>
+              <a:rPr sz="1050" b="0">
+                <a:solidFill>
+                  <a:srgbClr val="6E6E6E"/>
+                </a:solidFill>
+                <a:latin typeface="Arial"/>
+              </a:rPr>
+              <a:t>Clearance = lateral distance of a beam's chief where it crosses the part's plane, minus the beam radius (51 mm) and the part's radius plus an 8 mm mount.  Tool dmg_bench_clearance; run tag bs30_dev.  The interferometer's snapshot form feels the angle through the plate's polarization; its numbers re-run at the chosen angle.</a:t>
+            </a:r>
+          </a:p>
+        </p:txBody>
+      </p:sp>
+    </p:spTree>
+  </p:cSld>
+  <p:clrMapOvr>
+    <a:masterClrMapping/>
+  </p:clrMapOvr>
+</p:sld>
+</file>
+
+<file path=ppt/slides/slide35.xml><?xml version="1.0" encoding="utf-8"?>
+<p:sld xmlns:a="http://schemas.openxmlformats.org/drawingml/2006/main" xmlns:p="http://schemas.openxmlformats.org/presentationml/2006/main" xmlns:r="http://schemas.openxmlformats.org/officeDocument/2006/relationships">
+  <p:cSld>
+    <p:spTree>
+      <p:nvGrpSpPr>
+        <p:cNvPr id="1" name=""/>
+        <p:cNvGrpSpPr/>
+        <p:nvPr/>
+      </p:nvGrpSpPr>
+      <p:grpSpPr/>
+      <p:sp>
+        <p:nvSpPr>
+          <p:cNvPr id="2" name="TextBox 1"/>
+          <p:cNvSpPr txBox="1"/>
+          <p:nvPr/>
+        </p:nvSpPr>
+        <p:spPr>
+          <a:xfrm>
+            <a:off x="411480" y="201168"/>
+            <a:ext cx="11368735" cy="914400"/>
+          </a:xfrm>
+          <a:prstGeom prst="rect">
+            <a:avLst/>
+          </a:prstGeom>
+          <a:noFill/>
+        </p:spPr>
+        <p:txBody>
+          <a:bodyPr wrap="square">
+            <a:spAutoFit/>
+          </a:bodyPr>
+          <a:lstStyle/>
+          <a:p>
+            <a:pPr>
+              <a:spcAft>
+                <a:spcPts val="400"/>
+              </a:spcAft>
+            </a:pPr>
+            <a:r>
+              <a:rPr sz="2400" b="1">
+                <a:solidFill>
+                  <a:srgbClr val="1F4E79"/>
+                </a:solidFill>
+                <a:latin typeface="Arial"/>
+              </a:rPr>
+              <a:t>Backup: provenance</a:t>
+            </a:r>
+          </a:p>
+          <a:p>
+            <a:pPr>
+              <a:spcAft>
+                <a:spcPts val="0"/>
+              </a:spcAft>
+            </a:pPr>
+            <a:r>
+              <a:rPr sz="1250" b="0">
+                <a:solidFill>
+                  <a:srgbClr val="6E6E6E"/>
+                </a:solidFill>
+                <a:latin typeface="Arial"/>
+              </a:rPr>
+              <a:t>Every number in this deck has a run tag in a committed run directory of the shared model; the three lane reports carry the full tables</a:t>
+            </a:r>
+          </a:p>
+        </p:txBody>
+      </p:sp>
+      <p:sp>
+        <p:nvSpPr>
+          <p:cNvPr id="3" name="Rectangle 2"/>
+          <p:cNvSpPr/>
+          <p:nvPr/>
+        </p:nvSpPr>
+        <p:spPr>
+          <a:xfrm>
+            <a:off x="411480" y="1133856"/>
+            <a:ext cx="11368735" cy="20320"/>
+          </a:xfrm>
+          <a:prstGeom prst="rect">
+            <a:avLst/>
+          </a:prstGeom>
+          <a:solidFill>
+            <a:srgbClr val="B8C6D4"/>
+          </a:solidFill>
+          <a:ln>
+            <a:noFill/>
+          </a:ln>
+          <a:effectLst/>
+        </p:spPr>
+        <p:style>
+          <a:lnRef idx="1">
+            <a:schemeClr val="accent1"/>
+          </a:lnRef>
+          <a:fillRef idx="3">
+            <a:schemeClr val="accent1"/>
+          </a:fillRef>
+          <a:effectRef idx="2">
+            <a:schemeClr val="accent1"/>
+          </a:effectRef>
+          <a:fontRef idx="minor">
+            <a:schemeClr val="lt1"/>
+          </a:fontRef>
+        </p:style>
+        <p:txBody>
+          <a:bodyPr rtlCol="0" anchor="ctr"/>
+          <a:lstStyle/>
+          <a:p>
+            <a:pPr algn="ctr"/>
+          </a:p>
+        </p:txBody>
+      </p:sp>
       <p:sp>
         <p:nvSpPr>
           <p:cNvPr id="4" name="TextBox 3"/>
@@ -19861,7 +20566,7 @@
         </p:nvGraphicFramePr>
         <p:xfrm>
           <a:off x="6400800" y="1298448"/>
-          <a:ext cx="5394960" cy="1828800"/>
+          <a:ext cx="5394959" cy="1828800"/>
         </p:xfrm>
         <a:graphic>
           <a:graphicData uri="http://schemas.openxmlformats.org/drawingml/2006/table">
@@ -19870,8 +20575,8 @@
                 <a:tableStyleId>{5C22544A-7EE6-4342-B048-85BDC9FD1C3A}</a:tableStyleId>
               </a:tblPr>
               <a:tblGrid>
-                <a:gridCol w="3596640"/>
-                <a:gridCol w="1798320"/>
+                <a:gridCol w="2861415"/>
+                <a:gridCol w="2533544"/>
               </a:tblGrid>
               <a:tr h="262890">
                 <a:tc>
@@ -19919,7 +20624,7 @@
                   </a:tcPr>
                 </a:tc>
               </a:tr>
-              <a:tr h="434340">
+              <a:tr h="262890">
                 <a:tc>
                   <a:txBody>
                     <a:bodyPr wrap="square"/>
@@ -20011,7 +20716,7 @@
                   </a:tcPr>
                 </a:tc>
               </a:tr>
-              <a:tr h="434340">
+              <a:tr h="605790">
                 <a:tc>
                   <a:txBody>
                     <a:bodyPr wrap="square"/>
@@ -20046,7 +20751,7 @@
                           </a:solidFill>
                           <a:latin typeface="Arial"/>
                         </a:rPr>
-                        <a:t>zero-order plates; azimuths 45 / 0 / 45 / 0 / 0°</a:t>
+                        <a:t>zero-order plates on 2-3 mm substrates (to be modeled); azimuths 45 / 0 / 45 / 0 / 0°</a:t>
                       </a:r>
                     </a:p>
                   </a:txBody>
@@ -20198,7 +20903,7 @@
                 </a:solidFill>
                 <a:latin typeface="Arial"/>
               </a:rPr>
-              <a:t>Interferometer: the layout</a:t>
+              <a:t>Interferometer: the node, at the proposed 30°</a:t>
             </a:r>
           </a:p>
           <a:p>
@@ -20214,7 +20919,7 @@
                 </a:solidFill>
                 <a:latin typeface="Arial"/>
               </a:rPr>
-              <a:t>The splitter node from above, with the compensator, the recombination, and the snapshot form's polarization optics; the whole train is on the front-end slide</a:t>
+              <a:t>Every part clears every beam it is not in by at least 57 mm: the collimator and input polarizer on the source leg, the compensator on the mirror leg, the output plate and analyzer moved to 160 mm behind the splitter ahead of the focuser</a:t>
             </a:r>
           </a:p>
         </p:txBody>
@@ -20265,7 +20970,7 @@
       </p:sp>
       <p:pic>
         <p:nvPicPr>
-          <p:cNvPr id="4" name="Picture 3" descr="crop_lens_vlayout_node.png"/>
+          <p:cNvPr id="4" name="Picture 3" descr="crop_bench_bs30_node.png"/>
           <p:cNvPicPr>
             <a:picLocks noChangeAspect="1"/>
           </p:cNvPicPr>
@@ -20279,8 +20984,8 @@
         </p:blipFill>
         <p:spPr>
           <a:xfrm>
-            <a:off x="2438406" y="1298448"/>
-            <a:ext cx="7314882" cy="3812032"/>
+            <a:off x="3198559" y="1298448"/>
+            <a:ext cx="5794577" cy="3555492"/>
           </a:xfrm>
           <a:prstGeom prst="rect">
             <a:avLst/>
@@ -20295,8 +21000,8 @@
         </p:nvSpPr>
         <p:spPr>
           <a:xfrm>
-            <a:off x="411480" y="5128767"/>
-            <a:ext cx="11368735" cy="394208"/>
+            <a:off x="411480" y="4872228"/>
+            <a:ext cx="11368735" cy="559307"/>
           </a:xfrm>
           <a:prstGeom prst="rect">
             <a:avLst/>
@@ -20321,7 +21026,7 @@
                 </a:solidFill>
                 <a:latin typeface="Arial"/>
               </a:rPr>
-              <a:t>The reference arm's node, from above, as traced: the input polarizer, the plate splitter and its compensator, the recombination, the output quarter-wave plate and analyzer (snapshot form); test arm blue, reference arm orange.  Axes in bench millimeters.</a:t>
+              <a:t>The splitter node from above, as traced at 30°, ±320 mm about the splitter: L1 and the input polarizer, the splitter, the compensator on the mirror leg, the output quarter-wave plate and analyzer just ahead of the focuser L2; test arm blue, reference arm orange.  The two "QWP" labels at the node mark builder placements; the physical plates sit at the mirror and the flat.</a:t>
             </a:r>
           </a:p>
         </p:txBody>
@@ -20334,7 +21039,7 @@
         </p:nvSpPr>
         <p:spPr>
           <a:xfrm>
-            <a:off x="411480" y="5559551"/>
+            <a:off x="411480" y="5468112"/>
             <a:ext cx="11368735" cy="274320"/>
           </a:xfrm>
           <a:prstGeom prst="rect">
@@ -20360,7 +21065,7 @@
                 </a:solidFill>
                 <a:latin typeface="Arial"/>
               </a:rPr>
-              <a:t>Drawn by tg96_run from the emitted deck (lens_vlayout.png in tg_psi_dm96_oap); the detector tail beyond the focuser is the same as the sensors'.</a:t>
+              <a:t>The plates here (polarizer, quarter-wave plates, analyzer) are drawn as ideal surfaces; the next model round gives each a 2-3 mm substrate, which in these collimated legs adds path only.  Drawn by dmg_bench_clearance.</a:t>
             </a:r>
           </a:p>
         </p:txBody>
@@ -20650,7 +21355,7 @@
                 </a:solidFill>
                 <a:latin typeface="Arial"/>
               </a:rPr>
-              <a:t>Added to the front end: one fused-silica plate with a 3×3 array of etched spots (one in the beam at a time; the 346 nm etch is a quarter wave at 632.8 nm), on a translation stage.  Nothing else.  Run tags matbase, matbase385, loop193.</a:t>
+              <a:t>Added to the front end: one fused-silica plate, 2-3 mm thick, with a 3×3 array of etched spots (one in the beam at a time; the 346 nm etch is a quarter wave at 632.8 nm), on a translation stage.  Nothing else.  The plate's thickness in the F/4.2 beam is 0.03 wave of spherical aberration and a 0.7 mm focus shift the tail absorbs (to be modeled).  Run tags matbase, matbase385, loop193.</a:t>
             </a:r>
           </a:p>
         </p:txBody>
@@ -20853,7 +21558,7 @@
         </p:nvGraphicFramePr>
         <p:xfrm>
           <a:off x="6400800" y="1298448"/>
-          <a:ext cx="5394959" cy="2434590"/>
+          <a:ext cx="5394960" cy="3120390"/>
         </p:xfrm>
         <a:graphic>
           <a:graphicData uri="http://schemas.openxmlformats.org/drawingml/2006/table">
@@ -20862,10 +21567,10 @@
                 <a:tableStyleId>{5C22544A-7EE6-4342-B048-85BDC9FD1C3A}</a:tableStyleId>
               </a:tblPr>
               <a:tblGrid>
-                <a:gridCol w="912993"/>
-                <a:gridCol w="4481966"/>
+                <a:gridCol w="670560"/>
+                <a:gridCol w="4724400"/>
               </a:tblGrid>
-              <a:tr h="434340">
+              <a:tr h="605790">
                 <a:tc>
                   <a:txBody>
                     <a:bodyPr wrap="square"/>
@@ -20957,7 +21662,7 @@
                   </a:tcPr>
                 </a:tc>
               </a:tr>
-              <a:tr h="434340">
+              <a:tr h="605790">
                 <a:tc>
                   <a:txBody>
                     <a:bodyPr wrap="square"/>
@@ -20992,7 +21697,7 @@
                           </a:solidFill>
                           <a:latin typeface="Arial"/>
                         </a:rPr>
-                        <a:t>zero order, fast axis at 45° between the cube's s and p; spec λ/300</a:t>
+                        <a:t>zero order on a 2 mm substrate (0.05 wave of spherical aberration in the F/3.6 leg, to be modeled), fast axis at 45° between the cube's s and p; spec λ/300</a:t>
                       </a:r>
                     </a:p>
                   </a:txBody>
@@ -21049,7 +21754,7 @@
                   </a:tcPr>
                 </a:tc>
               </a:tr>
-              <a:tr h="262890">
+              <a:tr h="434340">
                 <a:tc>
                   <a:txBody>
                     <a:bodyPr wrap="square"/>
@@ -21084,7 +21789,7 @@
                           </a:solidFill>
                           <a:latin typeface="Arial"/>
                         </a:rPr>
-                        <a:t>two, both 20.7 mm behind the cube at the pupil image</a:t>
+                        <a:t>two, both 20.7 mm behind the cube at the 9.4 mm pupil image; a 6.5 µm sCMOS (13 mm sensor) binned 4</a:t>
                       </a:r>
                     </a:p>
                   </a:txBody>
@@ -21095,7 +21800,7 @@
                   </a:tcPr>
                 </a:tc>
               </a:tr>
-              <a:tr h="434340">
+              <a:tr h="605790">
                 <a:tc>
                   <a:txBody>
                     <a:bodyPr wrap="square"/>
@@ -21153,7 +21858,7 @@
         </p:nvSpPr>
         <p:spPr>
           <a:xfrm>
-            <a:off x="6400800" y="3879341"/>
+            <a:off x="6400800" y="4565142"/>
             <a:ext cx="5394960" cy="274320"/>
           </a:xfrm>
           <a:prstGeom prst="rect">
@@ -21398,7 +22103,7 @@
                 </a:solidFill>
                 <a:latin typeface="Arial"/>
               </a:rPr>
-              <a:t>Drawn by zwfs_vlayout.m from the two emitted decks (the engine does not split rays); the whole train is on the front-end slide.</a:t>
+              <a:t>Drawn by zwfs_vlayout.m from the two emitted decks (the engine does not split rays); the whole train is on the front-end slide.  The metasurface and the plate are drawn as ideal surfaces and the cameras as planes; the next model round draws the substrates and the 13 mm sensors.</a:t>
             </a:r>
           </a:p>
         </p:txBody>
@@ -21610,8 +22315,8 @@
                 <a:tableStyleId>{5C22544A-7EE6-4342-B048-85BDC9FD1C3A}</a:tableStyleId>
               </a:tblPr>
               <a:tblGrid>
-                <a:gridCol w="1249359"/>
-                <a:gridCol w="4145600"/>
+                <a:gridCol w="1141241"/>
+                <a:gridCol w="4253718"/>
               </a:tblGrid>
               <a:tr h="434340">
                 <a:tc>
@@ -21694,7 +22399,7 @@
                           </a:solidFill>
                           <a:latin typeface="Arial"/>
                         </a:rPr>
-                        <a:t>fused silica in the mask seat; pinhole 5.27 µm (2.0 λF/D at F/4.2), clear</a:t>
+                        <a:t>fused silica, 2-3 mm, in the mask seat; pinhole 5.27 µm (2.0 λF/D at F/4.2), clear</a:t>
                       </a:r>
                     </a:p>
                   </a:txBody>

--- a/demo_session/deck_gauges.pptx
+++ b/demo_session/deck_gauges.pptx
@@ -40,6 +40,7 @@
     <p:sldId id="288" r:id="rId39"/>
     <p:sldId id="289" r:id="rId40"/>
     <p:sldId id="290" r:id="rId41"/>
+    <p:sldId id="291" r:id="rId42"/>
   </p:sldIdLst>
   <p:sldSz cx="12191695" cy="6858000" type="screen4x3"/>
   <p:notesSz cx="6858000" cy="9144000"/>
@@ -3220,7 +3221,7 @@
                 </a:solidFill>
                 <a:latin typeface="Arial"/>
               </a:rPr>
-              <a:t>DRAFT — pending review.  Every number here comes from a committed run of one shared, parameterized model (MACOS, mmacos); the run tags are on the provenance slide.  Bench geometry under revision (2026-09-15): the record's 7° splitter is not buildable; the layouts show the proposed 30° geometry, and the substrates and camera are being added to the model.</a:t>
+              <a:t>DRAFT — pending review.  Every number here comes from a committed run of one shared, parameterized model (MACOS, mmacos); the run tags are on the provenance slide.  Bench geometry under revision (2026-09-15): the record's 7° splitter is not buildable; the splitter goes to 22.5° (ruled 2026-09-15; the layouts show it), and the substrates, part thicknesses and camera are being added to the model.</a:t>
             </a:r>
           </a:p>
         </p:txBody>
@@ -3301,6 +3302,489 @@
                 </a:solidFill>
                 <a:latin typeface="Arial"/>
               </a:rPr>
+              <a:t>Point-diffraction sensor: a stepped pinhole with a shutter frame</a:t>
+            </a:r>
+          </a:p>
+          <a:p>
+            <a:pPr>
+              <a:spcAft>
+                <a:spcPts val="0"/>
+              </a:spcAft>
+            </a:pPr>
+            <a:r>
+              <a:rPr sz="1250" b="0">
+                <a:solidFill>
+                  <a:srgbClr val="6E6E6E"/>
+                </a:solidFill>
+                <a:latin typeface="Arial"/>
+              </a:rPr>
+              <a:t>The best common-path form: a 5.3 µm pinhole with an attenuated surround at the focus, five phase steps of the substrate, plus one pinhole-only frame per state that keeps the calibration honest far from null</a:t>
+            </a:r>
+          </a:p>
+        </p:txBody>
+      </p:sp>
+      <p:sp>
+        <p:nvSpPr>
+          <p:cNvPr id="3" name="Rectangle 2"/>
+          <p:cNvSpPr/>
+          <p:nvPr/>
+        </p:nvSpPr>
+        <p:spPr>
+          <a:xfrm>
+            <a:off x="411480" y="1133856"/>
+            <a:ext cx="11368735" cy="20320"/>
+          </a:xfrm>
+          <a:prstGeom prst="rect">
+            <a:avLst/>
+          </a:prstGeom>
+          <a:solidFill>
+            <a:srgbClr val="B8C6D4"/>
+          </a:solidFill>
+          <a:ln>
+            <a:noFill/>
+          </a:ln>
+          <a:effectLst/>
+        </p:spPr>
+        <p:style>
+          <a:lnRef idx="1">
+            <a:schemeClr val="accent1"/>
+          </a:lnRef>
+          <a:fillRef idx="3">
+            <a:schemeClr val="accent1"/>
+          </a:fillRef>
+          <a:effectRef idx="2">
+            <a:schemeClr val="accent1"/>
+          </a:effectRef>
+          <a:fontRef idx="minor">
+            <a:schemeClr val="lt1"/>
+          </a:fontRef>
+        </p:style>
+        <p:txBody>
+          <a:bodyPr rtlCol="0" anchor="ctr"/>
+          <a:lstStyle/>
+          <a:p>
+            <a:pPr algn="ctr"/>
+          </a:p>
+        </p:txBody>
+      </p:sp>
+      <p:sp>
+        <p:nvSpPr>
+          <p:cNvPr id="4" name="TextBox 3"/>
+          <p:cNvSpPr txBox="1"/>
+          <p:nvPr/>
+        </p:nvSpPr>
+        <p:spPr>
+          <a:xfrm>
+            <a:off x="411480" y="1298448"/>
+            <a:ext cx="5806440" cy="274320"/>
+          </a:xfrm>
+          <a:prstGeom prst="rect">
+            <a:avLst/>
+          </a:prstGeom>
+          <a:noFill/>
+        </p:spPr>
+        <p:txBody>
+          <a:bodyPr wrap="square">
+            <a:spAutoFit/>
+          </a:bodyPr>
+          <a:lstStyle/>
+          <a:p>
+            <a:pPr>
+              <a:spcAft>
+                <a:spcPts val="600"/>
+              </a:spcAft>
+            </a:pPr>
+            <a:r>
+              <a:rPr sz="1200" b="0">
+                <a:solidFill>
+                  <a:srgbClr val="282828"/>
+                </a:solidFill>
+                <a:latin typeface="Arial"/>
+              </a:rPr>
+              <a:t>•  How it reads: the pinhole passes the core of the focal spot as the reference; the surround, attenuated to 0.72 in amplitude, passes the rest.  The substrate steps the surround's phase through five frames (the Schwider-Hariharan scan, insensitive to step error); a sixth frame with the surround shuttered measures the reference by itself.</a:t>
+            </a:r>
+          </a:p>
+          <a:p>
+            <a:pPr>
+              <a:spcAft>
+                <a:spcPts val="600"/>
+              </a:spcAft>
+            </a:pPr>
+            <a:r>
+              <a:rPr sz="1200" b="0">
+                <a:solidFill>
+                  <a:srgbClr val="282828"/>
+                </a:solidFill>
+                <a:latin typeface="Arial"/>
+              </a:rPr>
+              <a:t>•  On the 30 nm surface, matrix measured on it: 10 nm on one actuator 0.9935 / 4 pm / SNR 2790; 1 nm on 47 sites 0.9992 / 3 pm; dense 10 nm 0.9985, 338 pm.</a:t>
+            </a:r>
+          </a:p>
+          <a:p>
+            <a:pPr>
+              <a:spcAft>
+                <a:spcPts val="600"/>
+              </a:spcAft>
+            </a:pPr>
+            <a:r>
+              <a:rPr sz="1200" b="0">
+                <a:solidFill>
+                  <a:srgbClr val="282828"/>
+                </a:solidFill>
+                <a:latin typeface="Arial"/>
+              </a:rPr>
+              <a:t>•  Servo: 3 pm from 2.3e12 photons per cycle noise only, 7.0e12 under the walk; no fixed error.  The shutter frame is what lets it read to 480 nm of surface (next slides).</a:t>
+            </a:r>
+          </a:p>
+        </p:txBody>
+      </p:sp>
+      <p:graphicFrame>
+        <p:nvGraphicFramePr>
+          <p:cNvPr id="5" name="Table 4"/>
+          <p:cNvGraphicFramePr>
+            <a:graphicFrameLocks noGrp="1"/>
+          </p:cNvGraphicFramePr>
+          <p:nvPr/>
+        </p:nvGraphicFramePr>
+        <p:xfrm>
+          <a:off x="6400800" y="1298448"/>
+          <a:ext cx="5394959" cy="2000250"/>
+        </p:xfrm>
+        <a:graphic>
+          <a:graphicData uri="http://schemas.openxmlformats.org/drawingml/2006/table">
+            <a:tbl>
+              <a:tblPr firstRow="1" bandRow="1">
+                <a:tableStyleId>{5C22544A-7EE6-4342-B048-85BDC9FD1C3A}</a:tableStyleId>
+              </a:tblPr>
+              <a:tblGrid>
+                <a:gridCol w="1141241"/>
+                <a:gridCol w="4253718"/>
+              </a:tblGrid>
+              <a:tr h="434340">
+                <a:tc>
+                  <a:txBody>
+                    <a:bodyPr wrap="square"/>
+                    <a:lstStyle/>
+                    <a:p>
+                      <a:r>
+                        <a:rPr sz="1000" b="1">
+                          <a:solidFill>
+                            <a:srgbClr val="FFFFFF"/>
+                          </a:solidFill>
+                          <a:latin typeface="Arial"/>
+                        </a:rPr>
+                        <a:t>added to the front end</a:t>
+                      </a:r>
+                    </a:p>
+                  </a:txBody>
+                  <a:tcPr marL="54864" marR="54864" marT="18288" marB="18288">
+                    <a:solidFill>
+                      <a:srgbClr val="1F4E79"/>
+                    </a:solidFill>
+                  </a:tcPr>
+                </a:tc>
+                <a:tc>
+                  <a:txBody>
+                    <a:bodyPr wrap="square"/>
+                    <a:lstStyle/>
+                    <a:p>
+                      <a:r>
+                        <a:rPr sz="1000" b="1">
+                          <a:solidFill>
+                            <a:srgbClr val="FFFFFF"/>
+                          </a:solidFill>
+                          <a:latin typeface="Arial"/>
+                        </a:rPr>
+                        <a:t>value</a:t>
+                      </a:r>
+                    </a:p>
+                  </a:txBody>
+                  <a:tcPr marL="54864" marR="54864" marT="18288" marB="18288">
+                    <a:solidFill>
+                      <a:srgbClr val="1F4E79"/>
+                    </a:solidFill>
+                  </a:tcPr>
+                </a:tc>
+              </a:tr>
+              <a:tr h="434340">
+                <a:tc>
+                  <a:txBody>
+                    <a:bodyPr wrap="square"/>
+                    <a:lstStyle/>
+                    <a:p>
+                      <a:r>
+                        <a:rPr sz="1000" b="0">
+                          <a:solidFill>
+                            <a:srgbClr val="282828"/>
+                          </a:solidFill>
+                          <a:latin typeface="Arial"/>
+                        </a:rPr>
+                        <a:t>pinhole substrate</a:t>
+                      </a:r>
+                    </a:p>
+                  </a:txBody>
+                  <a:tcPr marL="54864" marR="54864" marT="18288" marB="18288">
+                    <a:solidFill>
+                      <a:srgbClr val="FFFFFF"/>
+                    </a:solidFill>
+                  </a:tcPr>
+                </a:tc>
+                <a:tc>
+                  <a:txBody>
+                    <a:bodyPr wrap="square"/>
+                    <a:lstStyle/>
+                    <a:p>
+                      <a:r>
+                        <a:rPr sz="1000" b="0">
+                          <a:solidFill>
+                            <a:srgbClr val="282828"/>
+                          </a:solidFill>
+                          <a:latin typeface="Arial"/>
+                        </a:rPr>
+                        <a:t>fused silica, 2-3 mm, in the mask seat; pinhole 5.27 µm (2.0 λF/D at F/4.2), clear</a:t>
+                      </a:r>
+                    </a:p>
+                  </a:txBody>
+                  <a:tcPr marL="54864" marR="54864" marT="18288" marB="18288">
+                    <a:solidFill>
+                      <a:srgbClr val="FFFFFF"/>
+                    </a:solidFill>
+                  </a:tcPr>
+                </a:tc>
+              </a:tr>
+              <a:tr h="434340">
+                <a:tc>
+                  <a:txBody>
+                    <a:bodyPr wrap="square"/>
+                    <a:lstStyle/>
+                    <a:p>
+                      <a:r>
+                        <a:rPr sz="1000" b="0">
+                          <a:solidFill>
+                            <a:srgbClr val="282828"/>
+                          </a:solidFill>
+                          <a:latin typeface="Arial"/>
+                        </a:rPr>
+                        <a:t>surround</a:t>
+                      </a:r>
+                    </a:p>
+                  </a:txBody>
+                  <a:tcPr marL="54864" marR="54864" marT="18288" marB="18288">
+                    <a:solidFill>
+                      <a:srgbClr val="ECF1F6"/>
+                    </a:solidFill>
+                  </a:tcPr>
+                </a:tc>
+                <a:tc>
+                  <a:txBody>
+                    <a:bodyPr wrap="square"/>
+                    <a:lstStyle/>
+                    <a:p>
+                      <a:r>
+                        <a:rPr sz="1000" b="0">
+                          <a:solidFill>
+                            <a:srgbClr val="282828"/>
+                          </a:solidFill>
+                          <a:latin typeface="Arial"/>
+                        </a:rPr>
+                        <a:t>attenuated to 0.72 in amplitude (0.52 in power), phase-stepped on a stage</a:t>
+                      </a:r>
+                    </a:p>
+                  </a:txBody>
+                  <a:tcPr marL="54864" marR="54864" marT="18288" marB="18288">
+                    <a:solidFill>
+                      <a:srgbClr val="ECF1F6"/>
+                    </a:solidFill>
+                  </a:tcPr>
+                </a:tc>
+              </a:tr>
+              <a:tr h="262890">
+                <a:tc>
+                  <a:txBody>
+                    <a:bodyPr wrap="square"/>
+                    <a:lstStyle/>
+                    <a:p>
+                      <a:r>
+                        <a:rPr sz="1000" b="0">
+                          <a:solidFill>
+                            <a:srgbClr val="282828"/>
+                          </a:solidFill>
+                          <a:latin typeface="Arial"/>
+                        </a:rPr>
+                        <a:t>shutter</a:t>
+                      </a:r>
+                    </a:p>
+                  </a:txBody>
+                  <a:tcPr marL="54864" marR="54864" marT="18288" marB="18288">
+                    <a:solidFill>
+                      <a:srgbClr val="FFFFFF"/>
+                    </a:solidFill>
+                  </a:tcPr>
+                </a:tc>
+                <a:tc>
+                  <a:txBody>
+                    <a:bodyPr wrap="square"/>
+                    <a:lstStyle/>
+                    <a:p>
+                      <a:r>
+                        <a:rPr sz="1000" b="0">
+                          <a:solidFill>
+                            <a:srgbClr val="282828"/>
+                          </a:solidFill>
+                          <a:latin typeface="Arial"/>
+                        </a:rPr>
+                        <a:t>over the surround: one pinhole-only frame per state</a:t>
+                      </a:r>
+                    </a:p>
+                  </a:txBody>
+                  <a:tcPr marL="54864" marR="54864" marT="18288" marB="18288">
+                    <a:solidFill>
+                      <a:srgbClr val="FFFFFF"/>
+                    </a:solidFill>
+                  </a:tcPr>
+                </a:tc>
+              </a:tr>
+              <a:tr h="434340">
+                <a:tc>
+                  <a:txBody>
+                    <a:bodyPr wrap="square"/>
+                    <a:lstStyle/>
+                    <a:p>
+                      <a:r>
+                        <a:rPr sz="1000" b="0">
+                          <a:solidFill>
+                            <a:srgbClr val="282828"/>
+                          </a:solidFill>
+                          <a:latin typeface="Arial"/>
+                        </a:rPr>
+                        <a:t>frames per measurement</a:t>
+                      </a:r>
+                    </a:p>
+                  </a:txBody>
+                  <a:tcPr marL="54864" marR="54864" marT="18288" marB="18288">
+                    <a:solidFill>
+                      <a:srgbClr val="ECF1F6"/>
+                    </a:solidFill>
+                  </a:tcPr>
+                </a:tc>
+                <a:tc>
+                  <a:txBody>
+                    <a:bodyPr wrap="square"/>
+                    <a:lstStyle/>
+                    <a:p>
+                      <a:r>
+                        <a:rPr sz="1000" b="0">
+                          <a:solidFill>
+                            <a:srgbClr val="282828"/>
+                          </a:solidFill>
+                          <a:latin typeface="Arial"/>
+                        </a:rPr>
+                        <a:t>6: the five-step scan plus the shutter frame</a:t>
+                      </a:r>
+                    </a:p>
+                  </a:txBody>
+                  <a:tcPr marL="54864" marR="54864" marT="18288" marB="18288">
+                    <a:solidFill>
+                      <a:srgbClr val="ECF1F6"/>
+                    </a:solidFill>
+                  </a:tcPr>
+                </a:tc>
+              </a:tr>
+            </a:tbl>
+          </a:graphicData>
+        </a:graphic>
+      </p:graphicFrame>
+      <p:sp>
+        <p:nvSpPr>
+          <p:cNvPr id="6" name="TextBox 5"/>
+          <p:cNvSpPr txBox="1"/>
+          <p:nvPr/>
+        </p:nvSpPr>
+        <p:spPr>
+          <a:xfrm>
+            <a:off x="6400800" y="3445002"/>
+            <a:ext cx="5394960" cy="274320"/>
+          </a:xfrm>
+          <a:prstGeom prst="rect">
+            <a:avLst/>
+          </a:prstGeom>
+          <a:noFill/>
+        </p:spPr>
+        <p:txBody>
+          <a:bodyPr wrap="square">
+            <a:spAutoFit/>
+          </a:bodyPr>
+          <a:lstStyle/>
+          <a:p>
+            <a:pPr>
+              <a:spcAft>
+                <a:spcPts val="600"/>
+              </a:spcAft>
+            </a:pPr>
+            <a:r>
+              <a:rPr sz="1050" b="0">
+                <a:solidFill>
+                  <a:srgbClr val="6E6E6E"/>
+                </a:solidFill>
+                <a:latin typeface="Arial"/>
+              </a:rPr>
+              <a:t>The two-arm form of this sensor (the P/SRI: a pickoff, a reference lens, a 3.7 µm pinhole feeding a single-mode waveguide with a photonic phase shifter, a recombiner) is a capture instrument here; its trade is in backup.  Run tags pdi193fbase, ploop193, pdi193state.</a:t>
+            </a:r>
+          </a:p>
+        </p:txBody>
+      </p:sp>
+    </p:spTree>
+  </p:cSld>
+  <p:clrMapOvr>
+    <a:masterClrMapping/>
+  </p:clrMapOvr>
+</p:sld>
+</file>
+
+<file path=ppt/slides/slide11.xml><?xml version="1.0" encoding="utf-8"?>
+<p:sld xmlns:a="http://schemas.openxmlformats.org/drawingml/2006/main" xmlns:p="http://schemas.openxmlformats.org/presentationml/2006/main" xmlns:r="http://schemas.openxmlformats.org/officeDocument/2006/relationships">
+  <p:cSld>
+    <p:spTree>
+      <p:nvGrpSpPr>
+        <p:cNvPr id="1" name=""/>
+        <p:cNvGrpSpPr/>
+        <p:nvPr/>
+      </p:nvGrpSpPr>
+      <p:grpSpPr/>
+      <p:sp>
+        <p:nvSpPr>
+          <p:cNvPr id="2" name="TextBox 1"/>
+          <p:cNvSpPr txBox="1"/>
+          <p:nvPr/>
+        </p:nvSpPr>
+        <p:spPr>
+          <a:xfrm>
+            <a:off x="411480" y="201168"/>
+            <a:ext cx="11368735" cy="914400"/>
+          </a:xfrm>
+          <a:prstGeom prst="rect">
+            <a:avLst/>
+          </a:prstGeom>
+          <a:noFill/>
+        </p:spPr>
+        <p:txBody>
+          <a:bodyPr wrap="square">
+            <a:spAutoFit/>
+          </a:bodyPr>
+          <a:lstStyle/>
+          <a:p>
+            <a:pPr>
+              <a:spcAft>
+                <a:spcPts val="400"/>
+              </a:spcAft>
+            </a:pPr>
+            <a:r>
+              <a:rPr sz="2400" b="1">
+                <a:solidFill>
+                  <a:srgbClr val="1F4E79"/>
+                </a:solidFill>
+                <a:latin typeface="Arial"/>
+              </a:rPr>
               <a:t>Point-diffraction sensor: the layout</a:t>
             </a:r>
           </a:p>
@@ -3476,7 +3960,7 @@
 </p:sld>
 </file>
 
-<file path=ppt/slides/slide11.xml><?xml version="1.0" encoding="utf-8"?>
+<file path=ppt/slides/slide12.xml><?xml version="1.0" encoding="utf-8"?>
 <p:sld xmlns:a="http://schemas.openxmlformats.org/drawingml/2006/main" xmlns:p="http://schemas.openxmlformats.org/presentationml/2006/main" xmlns:r="http://schemas.openxmlformats.org/officeDocument/2006/relationships">
   <p:cSld>
     <p:spTree>
@@ -4525,7 +5009,7 @@
 </p:sld>
 </file>
 
-<file path=ppt/slides/slide12.xml><?xml version="1.0" encoding="utf-8"?>
+<file path=ppt/slides/slide13.xml><?xml version="1.0" encoding="utf-8"?>
 <p:sld xmlns:a="http://schemas.openxmlformats.org/drawingml/2006/main" xmlns:p="http://schemas.openxmlformats.org/presentationml/2006/main" xmlns:r="http://schemas.openxmlformats.org/officeDocument/2006/relationships">
   <p:cSld>
     <p:spTree>
@@ -5192,7 +5676,7 @@
 </p:sld>
 </file>
 
-<file path=ppt/slides/slide13.xml><?xml version="1.0" encoding="utf-8"?>
+<file path=ppt/slides/slide14.xml><?xml version="1.0" encoding="utf-8"?>
 <p:sld xmlns:a="http://schemas.openxmlformats.org/drawingml/2006/main" xmlns:p="http://schemas.openxmlformats.org/presentationml/2006/main" xmlns:r="http://schemas.openxmlformats.org/officeDocument/2006/relationships">
   <p:cSld>
     <p:spTree>
@@ -5958,7 +6442,7 @@
 </p:sld>
 </file>
 
-<file path=ppt/slides/slide14.xml><?xml version="1.0" encoding="utf-8"?>
+<file path=ppt/slides/slide15.xml><?xml version="1.0" encoding="utf-8"?>
 <p:sld xmlns:a="http://schemas.openxmlformats.org/drawingml/2006/main" xmlns:p="http://schemas.openxmlformats.org/presentationml/2006/main" xmlns:r="http://schemas.openxmlformats.org/officeDocument/2006/relationships">
   <p:cSld>
     <p:spTree>
@@ -6748,7 +7232,7 @@
 </p:sld>
 </file>
 
-<file path=ppt/slides/slide15.xml><?xml version="1.0" encoding="utf-8"?>
+<file path=ppt/slides/slide16.xml><?xml version="1.0" encoding="utf-8"?>
 <p:sld xmlns:a="http://schemas.openxmlformats.org/drawingml/2006/main" xmlns:p="http://schemas.openxmlformats.org/presentationml/2006/main" xmlns:r="http://schemas.openxmlformats.org/officeDocument/2006/relationships">
   <p:cSld>
     <p:spTree>
@@ -7892,7 +8376,7 @@
 </p:sld>
 </file>
 
-<file path=ppt/slides/slide16.xml><?xml version="1.0" encoding="utf-8"?>
+<file path=ppt/slides/slide17.xml><?xml version="1.0" encoding="utf-8"?>
 <p:sld xmlns:a="http://schemas.openxmlformats.org/drawingml/2006/main" xmlns:p="http://schemas.openxmlformats.org/presentationml/2006/main" xmlns:r="http://schemas.openxmlformats.org/officeDocument/2006/relationships">
   <p:cSld>
     <p:spTree>
@@ -8690,7 +9174,7 @@
 </p:sld>
 </file>
 
-<file path=ppt/slides/slide17.xml><?xml version="1.0" encoding="utf-8"?>
+<file path=ppt/slides/slide18.xml><?xml version="1.0" encoding="utf-8"?>
 <p:sld xmlns:a="http://schemas.openxmlformats.org/drawingml/2006/main" xmlns:p="http://schemas.openxmlformats.org/presentationml/2006/main" xmlns:r="http://schemas.openxmlformats.org/officeDocument/2006/relationships">
   <p:cSld>
     <p:spTree>
@@ -9682,7 +10166,7 @@
 </p:sld>
 </file>
 
-<file path=ppt/slides/slide18.xml><?xml version="1.0" encoding="utf-8"?>
+<file path=ppt/slides/slide19.xml><?xml version="1.0" encoding="utf-8"?>
 <p:sld xmlns:a="http://schemas.openxmlformats.org/drawingml/2006/main" xmlns:p="http://schemas.openxmlformats.org/presentationml/2006/main" xmlns:r="http://schemas.openxmlformats.org/officeDocument/2006/relationships">
   <p:cSld>
     <p:spTree>
@@ -10856,7 +11340,7 @@
 </p:sld>
 </file>
 
-<file path=ppt/slides/slide19.xml><?xml version="1.0" encoding="utf-8"?>
+<file path=ppt/slides/slide2.xml><?xml version="1.0" encoding="utf-8"?>
 <p:sld xmlns:a="http://schemas.openxmlformats.org/drawingml/2006/main" xmlns:p="http://schemas.openxmlformats.org/presentationml/2006/main" xmlns:r="http://schemas.openxmlformats.org/officeDocument/2006/relationships">
   <p:cSld>
     <p:spTree>
@@ -10900,7 +11384,7 @@
                 </a:solidFill>
                 <a:latin typeface="Arial"/>
               </a:rPr>
-              <a:t>Recommendation</a:t>
+              <a:t>The two jobs, and how each is scored</a:t>
             </a:r>
           </a:p>
           <a:p>
@@ -10916,7 +11400,7 @@
                 </a:solidFill>
                 <a:latin typeface="Arial"/>
               </a:rPr>
-              <a:t>Hold with the vector Zernike sensor; capture with the interferometer, or with the stepped pinhole's shutter frame if a second arm is not wanted; build on lenses; build one bench that switches</a:t>
+              <a:t>Hold the surface to picometers in a servo; capture its post-launch shape, 100-200 nm of wavefront, and bring it into the servo's reach</a:t>
             </a:r>
           </a:p>
         </p:txBody>
@@ -10999,7 +11483,7 @@
                 </a:solidFill>
                 <a:latin typeface="Arial"/>
               </a:rPr>
-              <a:t>•  Hold: the polarized dimple is the best reading on every line — 3 pm from 1.5e12 photons per cycle, two frames taken at once, no stepping, no fold, no fixed error, and every systematic we modeled calibrated by the matrix measured through it.  The stepped scalar dimple is the fallback with no polarization optics, at 1.7× the light.</a:t>
+              <a:t>•  The mirror: 96×96 actuators on a 1 mm pitch, 96 mm across.  On orbit its surface must stay constant to well under 10 pm, measured often and held by a closed loop.  The working surface during every test is a random 30 nm rms shape, not a flat: the gauge never operates at null.</a:t>
             </a:r>
           </a:p>
           <a:p>
@@ -11015,7 +11499,7 @@
                 </a:solidFill>
                 <a:latin typeface="Arial"/>
               </a:rPr>
-              <a:t>•  Capture: the interferometer takes 100-600 nm of wavefront to 2 pm in tens of cycles with unwrapping alone.  In the common path, the stepped pinhole with a shutter frame captures 200 nm of wavefront with unwrapping and three recalibrations.  A second color is the sensors' own route (future work).</a:t>
+              <a:t>•  Hold: a change of 10 nm on one actuator, or 1 nm on 47 actuators, or a dense random 10 nm pattern, read on the 30 nm surface with the response matrix measured on it.  Then the servo: the light per cycle that holds 3 pm rms.</a:t>
             </a:r>
           </a:p>
           <a:p>
@@ -11031,20 +11515,368 @@
                 </a:solidFill>
                 <a:latin typeface="Arial"/>
               </a:rPr>
-              <a:t>•  Front end: lenses.  The mirror rig's fold coma walls the servo and breaks the pinhole.</a:t>
+              <a:t>•  Capture: the largest starting surface the servo brings to 3 pm; every phase reading wraps at ±158 nm of surface (±π at 632.8 nm, double pass), so this is a wrapping problem before it is a noise problem.</a:t>
             </a:r>
           </a:p>
         </p:txBody>
       </p:sp>
+      <p:graphicFrame>
+        <p:nvGraphicFramePr>
+          <p:cNvPr id="5" name="Table 4"/>
+          <p:cNvGraphicFramePr>
+            <a:graphicFrameLocks noGrp="1"/>
+          </p:cNvGraphicFramePr>
+          <p:nvPr/>
+        </p:nvGraphicFramePr>
+        <p:xfrm>
+          <a:off x="6400800" y="1298448"/>
+          <a:ext cx="5394959" cy="2526030"/>
+        </p:xfrm>
+        <a:graphic>
+          <a:graphicData uri="http://schemas.openxmlformats.org/drawingml/2006/table">
+            <a:tbl>
+              <a:tblPr firstRow="1" bandRow="1">
+                <a:tableStyleId>{5C22544A-7EE6-4342-B048-85BDC9FD1C3A}</a:tableStyleId>
+              </a:tblPr>
+              <a:tblGrid>
+                <a:gridCol w="844109"/>
+                <a:gridCol w="4550850"/>
+              </a:tblGrid>
+              <a:tr h="262890">
+                <a:tc>
+                  <a:txBody>
+                    <a:bodyPr wrap="square"/>
+                    <a:lstStyle/>
+                    <a:p>
+                      <a:r>
+                        <a:rPr sz="1000" b="1">
+                          <a:solidFill>
+                            <a:srgbClr val="FFFFFF"/>
+                          </a:solidFill>
+                          <a:latin typeface="Arial"/>
+                        </a:rPr>
+                        <a:t>score</a:t>
+                      </a:r>
+                    </a:p>
+                  </a:txBody>
+                  <a:tcPr marL="54864" marR="54864" marT="18288" marB="18288">
+                    <a:solidFill>
+                      <a:srgbClr val="1F4E79"/>
+                    </a:solidFill>
+                  </a:tcPr>
+                </a:tc>
+                <a:tc>
+                  <a:txBody>
+                    <a:bodyPr wrap="square"/>
+                    <a:lstStyle/>
+                    <a:p>
+                      <a:r>
+                        <a:rPr sz="1000" b="1">
+                          <a:solidFill>
+                            <a:srgbClr val="FFFFFF"/>
+                          </a:solidFill>
+                          <a:latin typeface="Arial"/>
+                        </a:rPr>
+                        <a:t>meaning</a:t>
+                      </a:r>
+                    </a:p>
+                  </a:txBody>
+                  <a:tcPr marL="54864" marR="54864" marT="18288" marB="18288">
+                    <a:solidFill>
+                      <a:srgbClr val="1F4E79"/>
+                    </a:solidFill>
+                  </a:tcPr>
+                </a:tc>
+              </a:tr>
+              <a:tr h="434340">
+                <a:tc>
+                  <a:txBody>
+                    <a:bodyPr wrap="square"/>
+                    <a:lstStyle/>
+                    <a:p>
+                      <a:r>
+                        <a:rPr sz="1000" b="0">
+                          <a:solidFill>
+                            <a:srgbClr val="282828"/>
+                          </a:solidFill>
+                          <a:latin typeface="Arial"/>
+                        </a:rPr>
+                        <a:t>gain</a:t>
+                      </a:r>
+                    </a:p>
+                  </a:txBody>
+                  <a:tcPr marL="54864" marR="54864" marT="18288" marB="18288">
+                    <a:solidFill>
+                      <a:srgbClr val="FFFFFF"/>
+                    </a:solidFill>
+                  </a:tcPr>
+                </a:tc>
+                <a:tc>
+                  <a:txBody>
+                    <a:bodyPr wrap="square"/>
+                    <a:lstStyle/>
+                    <a:p>
+                      <a:r>
+                        <a:rPr sz="1000" b="0">
+                          <a:solidFill>
+                            <a:srgbClr val="282828"/>
+                          </a:solidFill>
+                          <a:latin typeface="Arial"/>
+                        </a:rPr>
+                        <a:t>recovered change ÷ true change; 1.0 is perfect; quoted after calibration</a:t>
+                      </a:r>
+                    </a:p>
+                  </a:txBody>
+                  <a:tcPr marL="54864" marR="54864" marT="18288" marB="18288">
+                    <a:solidFill>
+                      <a:srgbClr val="FFFFFF"/>
+                    </a:solidFill>
+                  </a:tcPr>
+                </a:tc>
+              </a:tr>
+              <a:tr h="262890">
+                <a:tc>
+                  <a:txBody>
+                    <a:bodyPr wrap="square"/>
+                    <a:lstStyle/>
+                    <a:p>
+                      <a:r>
+                        <a:rPr sz="1000" b="0">
+                          <a:solidFill>
+                            <a:srgbClr val="282828"/>
+                          </a:solidFill>
+                          <a:latin typeface="Arial"/>
+                        </a:rPr>
+                        <a:t>floor</a:t>
+                      </a:r>
+                    </a:p>
+                  </a:txBody>
+                  <a:tcPr marL="54864" marR="54864" marT="18288" marB="18288">
+                    <a:solidFill>
+                      <a:srgbClr val="ECF1F6"/>
+                    </a:solidFill>
+                  </a:tcPr>
+                </a:tc>
+                <a:tc>
+                  <a:txBody>
+                    <a:bodyPr wrap="square"/>
+                    <a:lstStyle/>
+                    <a:p>
+                      <a:r>
+                        <a:rPr sz="1000" b="0">
+                          <a:solidFill>
+                            <a:srgbClr val="282828"/>
+                          </a:solidFill>
+                          <a:latin typeface="Arial"/>
+                        </a:rPr>
+                        <a:t>rms of the actuators that were not changed, in picometers</a:t>
+                      </a:r>
+                    </a:p>
+                  </a:txBody>
+                  <a:tcPr marL="54864" marR="54864" marT="18288" marB="18288">
+                    <a:solidFill>
+                      <a:srgbClr val="ECF1F6"/>
+                    </a:solidFill>
+                  </a:tcPr>
+                </a:tc>
+              </a:tr>
+              <a:tr h="262890">
+                <a:tc>
+                  <a:txBody>
+                    <a:bodyPr wrap="square"/>
+                    <a:lstStyle/>
+                    <a:p>
+                      <a:r>
+                        <a:rPr sz="1000" b="0">
+                          <a:solidFill>
+                            <a:srgbClr val="282828"/>
+                          </a:solidFill>
+                          <a:latin typeface="Arial"/>
+                        </a:rPr>
+                        <a:t>SNR</a:t>
+                      </a:r>
+                    </a:p>
+                  </a:txBody>
+                  <a:tcPr marL="54864" marR="54864" marT="18288" marB="18288">
+                    <a:solidFill>
+                      <a:srgbClr val="FFFFFF"/>
+                    </a:solidFill>
+                  </a:tcPr>
+                </a:tc>
+                <a:tc>
+                  <a:txBody>
+                    <a:bodyPr wrap="square"/>
+                    <a:lstStyle/>
+                    <a:p>
+                      <a:r>
+                        <a:rPr sz="1000" b="0">
+                          <a:solidFill>
+                            <a:srgbClr val="282828"/>
+                          </a:solidFill>
+                          <a:latin typeface="Arial"/>
+                        </a:rPr>
+                        <a:t>recovered change ÷ floor; above 5 counts as detected</a:t>
+                      </a:r>
+                    </a:p>
+                  </a:txBody>
+                  <a:tcPr marL="54864" marR="54864" marT="18288" marB="18288">
+                    <a:solidFill>
+                      <a:srgbClr val="FFFFFF"/>
+                    </a:solidFill>
+                  </a:tcPr>
+                </a:tc>
+              </a:tr>
+              <a:tr h="434340">
+                <a:tc>
+                  <a:txBody>
+                    <a:bodyPr wrap="square"/>
+                    <a:lstStyle/>
+                    <a:p>
+                      <a:r>
+                        <a:rPr sz="1000" b="0">
+                          <a:solidFill>
+                            <a:srgbClr val="282828"/>
+                          </a:solidFill>
+                          <a:latin typeface="Arial"/>
+                        </a:rPr>
+                        <a:t>photons per measurement</a:t>
+                      </a:r>
+                    </a:p>
+                  </a:txBody>
+                  <a:tcPr marL="54864" marR="54864" marT="18288" marB="18288">
+                    <a:solidFill>
+                      <a:srgbClr val="ECF1F6"/>
+                    </a:solidFill>
+                  </a:tcPr>
+                </a:tc>
+                <a:tc>
+                  <a:txBody>
+                    <a:bodyPr wrap="square"/>
+                    <a:lstStyle/>
+                    <a:p>
+                      <a:r>
+                        <a:rPr sz="1000" b="0">
+                          <a:solidFill>
+                            <a:srgbClr val="282828"/>
+                          </a:solidFill>
+                          <a:latin typeface="Arial"/>
+                        </a:rPr>
+                        <a:t>all frames of one measurement summed; 1e14 photons at 633 nm = 31 µJ = 0.13 s of a 1 mW laser at 25% throughput</a:t>
+                      </a:r>
+                    </a:p>
+                  </a:txBody>
+                  <a:tcPr marL="54864" marR="54864" marT="18288" marB="18288">
+                    <a:solidFill>
+                      <a:srgbClr val="ECF1F6"/>
+                    </a:solidFill>
+                  </a:tcPr>
+                </a:tc>
+              </a:tr>
+              <a:tr h="434340">
+                <a:tc>
+                  <a:txBody>
+                    <a:bodyPr wrap="square"/>
+                    <a:lstStyle/>
+                    <a:p>
+                      <a:r>
+                        <a:rPr sz="1000" b="0">
+                          <a:solidFill>
+                            <a:srgbClr val="282828"/>
+                          </a:solidFill>
+                          <a:latin typeface="Arial"/>
+                        </a:rPr>
+                        <a:t>capture range to 10%</a:t>
+                      </a:r>
+                    </a:p>
+                  </a:txBody>
+                  <a:tcPr marL="54864" marR="54864" marT="18288" marB="18288">
+                    <a:solidFill>
+                      <a:srgbClr val="FFFFFF"/>
+                    </a:solidFill>
+                  </a:tcPr>
+                </a:tc>
+                <a:tc>
+                  <a:txBody>
+                    <a:bodyPr wrap="square"/>
+                    <a:lstStyle/>
+                    <a:p>
+                      <a:r>
+                        <a:rPr sz="1000" b="0">
+                          <a:solidFill>
+                            <a:srgbClr val="282828"/>
+                          </a:solidFill>
+                          <a:latin typeface="Arial"/>
+                        </a:rPr>
+                        <a:t>the largest working surface at which a 10 nm change on the 47 sites reads within 10%, the matrix left as calibrated at 30 nm</a:t>
+                      </a:r>
+                    </a:p>
+                  </a:txBody>
+                  <a:tcPr marL="54864" marR="54864" marT="18288" marB="18288">
+                    <a:solidFill>
+                      <a:srgbClr val="FFFFFF"/>
+                    </a:solidFill>
+                  </a:tcPr>
+                </a:tc>
+              </a:tr>
+              <a:tr h="434340">
+                <a:tc>
+                  <a:txBody>
+                    <a:bodyPr wrap="square"/>
+                    <a:lstStyle/>
+                    <a:p>
+                      <a:r>
+                        <a:rPr sz="1000" b="0">
+                          <a:solidFill>
+                            <a:srgbClr val="282828"/>
+                          </a:solidFill>
+                          <a:latin typeface="Arial"/>
+                        </a:rPr>
+                        <a:t>hold, one number</a:t>
+                      </a:r>
+                    </a:p>
+                  </a:txBody>
+                  <a:tcPr marL="54864" marR="54864" marT="18288" marB="18288">
+                    <a:solidFill>
+                      <a:srgbClr val="ECF1F6"/>
+                    </a:solidFill>
+                  </a:tcPr>
+                </a:tc>
+                <a:tc>
+                  <a:txBody>
+                    <a:bodyPr wrap="square"/>
+                    <a:lstStyle/>
+                    <a:p>
+                      <a:r>
+                        <a:rPr sz="1000" b="0">
+                          <a:solidFill>
+                            <a:srgbClr val="282828"/>
+                          </a:solidFill>
+                          <a:latin typeface="Arial"/>
+                        </a:rPr>
+                        <a:t>photons per cycle that hold 3 pm rms in a 60-cycle loop at gain 0.5</a:t>
+                      </a:r>
+                    </a:p>
+                  </a:txBody>
+                  <a:tcPr marL="54864" marR="54864" marT="18288" marB="18288">
+                    <a:solidFill>
+                      <a:srgbClr val="ECF1F6"/>
+                    </a:solidFill>
+                  </a:tcPr>
+                </a:tc>
+              </a:tr>
+            </a:tbl>
+          </a:graphicData>
+        </a:graphic>
+      </p:graphicFrame>
       <p:sp>
         <p:nvSpPr>
-          <p:cNvPr id="5" name="TextBox 4"/>
+          <p:cNvPr id="6" name="TextBox 5"/>
           <p:cNvSpPr txBox="1"/>
           <p:nvPr/>
         </p:nvSpPr>
         <p:spPr>
           <a:xfrm>
-            <a:off x="6400800" y="1298448"/>
+            <a:off x="6400800" y="3970781"/>
             <a:ext cx="5394960" cy="274320"/>
           </a:xfrm>
           <a:prstGeom prst="rect">
@@ -11064,68 +11896,13 @@
               </a:spcAft>
             </a:pPr>
             <a:r>
-              <a:rPr sz="1200" b="0">
-                <a:solidFill>
-                  <a:srgbClr val="282828"/>
-                </a:solidFill>
-                <a:latin typeface="Arial"/>
-              </a:rPr>
-              <a:t>•  The bench: one layout with the reference arm shuttered, the mask seat translated, the quarter-wave plate in or out, and the P/SRI arm behind a flip-in plate (the one-bench slide).  Capture with the interferometer, hand off inside the sensor's 60 nm reach, hold with the sensor at a third of the light.</a:t>
-            </a:r>
-          </a:p>
-          <a:p>
-            <a:pPr>
-              <a:spcAft>
-                <a:spcPts val="600"/>
-              </a:spcAft>
-            </a:pPr>
-            <a:r>
-              <a:rPr sz="1200" b="0">
-                <a:solidFill>
-                  <a:srgbClr val="282828"/>
-                </a:solidFill>
-                <a:latin typeface="Arial"/>
-              </a:rPr>
-              <a:t>•  What the numbers do not decide: the pinhole and the vector dimple tie on the working surface (0.9935 / 4 pm both); the dimple wins the servo by 1.5×, the pinhole wins capture range for one extra frame.  A bench that carries both costs one substrate.</a:t>
-            </a:r>
-          </a:p>
-        </p:txBody>
-      </p:sp>
-      <p:sp>
-        <p:nvSpPr>
-          <p:cNvPr id="6" name="TextBox 5"/>
-          <p:cNvSpPr txBox="1"/>
-          <p:nvPr/>
-        </p:nvSpPr>
-        <p:spPr>
-          <a:xfrm>
-            <a:off x="6400800" y="3398519"/>
-            <a:ext cx="5394960" cy="274320"/>
-          </a:xfrm>
-          <a:prstGeom prst="rect">
-            <a:avLst/>
-          </a:prstGeom>
-          <a:noFill/>
-        </p:spPr>
-        <p:txBody>
-          <a:bodyPr wrap="square">
-            <a:spAutoFit/>
-          </a:bodyPr>
-          <a:lstStyle/>
-          <a:p>
-            <a:pPr>
-              <a:spcAft>
-                <a:spcPts val="600"/>
-              </a:spcAft>
-            </a:pPr>
-            <a:r>
               <a:rPr sz="1050" b="0">
                 <a:solidFill>
                   <a:srgbClr val="6E6E6E"/>
                 </a:solidFill>
                 <a:latin typeface="Arial"/>
               </a:rPr>
-              <a:t>Draft stance approved 2026-09-13; the wording is for review.</a:t>
+              <a:t>Measuring a change costs two measurements.  The 96×96 at 385 detector pixels per pupil is the flight-like sampling; most rows here are at 193 pixels, which the sampling study showed reads the same numbers.</a:t>
             </a:r>
           </a:p>
         </p:txBody>
@@ -11138,7 +11915,7 @@
 </p:sld>
 </file>
 
-<file path=ppt/slides/slide2.xml><?xml version="1.0" encoding="utf-8"?>
+<file path=ppt/slides/slide20.xml><?xml version="1.0" encoding="utf-8"?>
 <p:sld xmlns:a="http://schemas.openxmlformats.org/drawingml/2006/main" xmlns:p="http://schemas.openxmlformats.org/presentationml/2006/main" xmlns:r="http://schemas.openxmlformats.org/officeDocument/2006/relationships">
   <p:cSld>
     <p:spTree>
@@ -11182,7 +11959,7 @@
                 </a:solidFill>
                 <a:latin typeface="Arial"/>
               </a:rPr>
-              <a:t>The two jobs, and how each is scored</a:t>
+              <a:t>Recommendation</a:t>
             </a:r>
           </a:p>
           <a:p>
@@ -11198,7 +11975,7 @@
                 </a:solidFill>
                 <a:latin typeface="Arial"/>
               </a:rPr>
-              <a:t>Hold the surface to picometers in a servo; capture its post-launch shape, 100-200 nm of wavefront, and bring it into the servo's reach</a:t>
+              <a:t>Hold with the vector Zernike sensor; capture with the interferometer, or with the stepped pinhole's shutter frame if a second arm is not wanted; build on lenses; build one bench that switches</a:t>
             </a:r>
           </a:p>
         </p:txBody>
@@ -11281,7 +12058,7 @@
                 </a:solidFill>
                 <a:latin typeface="Arial"/>
               </a:rPr>
-              <a:t>•  The mirror: 96×96 actuators on a 1 mm pitch, 96 mm across.  On orbit its surface must stay constant to well under 10 pm, measured often and held by a closed loop.  The working surface during every test is a random 30 nm rms shape, not a flat: the gauge never operates at null.</a:t>
+              <a:t>•  Hold: the polarized dimple is the best reading on every line — 3 pm from 1.5e12 photons per cycle, two frames taken at once, no stepping, no fold, no fixed error, and every systematic we modeled calibrated by the matrix measured through it.  The stepped scalar dimple is the fallback with no polarization optics, at 1.7× the light.</a:t>
             </a:r>
           </a:p>
           <a:p>
@@ -11297,7 +12074,7 @@
                 </a:solidFill>
                 <a:latin typeface="Arial"/>
               </a:rPr>
-              <a:t>•  Hold: a change of 10 nm on one actuator, or 1 nm on 47 actuators, or a dense random 10 nm pattern, read on the 30 nm surface with the response matrix measured on it.  Then the servo: the light per cycle that holds 3 pm rms.</a:t>
+              <a:t>•  Capture: the interferometer takes 100-600 nm of wavefront to 2 pm in tens of cycles with unwrapping alone.  In the common path, the stepped pinhole with a shutter frame captures 200 nm of wavefront with unwrapping and three recalibrations.  A second color is the sensors' own route (future work).</a:t>
             </a:r>
           </a:p>
           <a:p>
@@ -11313,368 +12090,20 @@
                 </a:solidFill>
                 <a:latin typeface="Arial"/>
               </a:rPr>
-              <a:t>•  Capture: the largest starting surface the servo brings to 3 pm; every phase reading wraps at ±158 nm of surface (±π at 632.8 nm, double pass), so this is a wrapping problem before it is a noise problem.</a:t>
+              <a:t>•  Front end: lenses.  The mirror rig's fold coma walls the servo and breaks the pinhole.</a:t>
             </a:r>
           </a:p>
         </p:txBody>
       </p:sp>
-      <p:graphicFrame>
-        <p:nvGraphicFramePr>
-          <p:cNvPr id="5" name="Table 4"/>
-          <p:cNvGraphicFramePr>
-            <a:graphicFrameLocks noGrp="1"/>
-          </p:cNvGraphicFramePr>
-          <p:nvPr/>
-        </p:nvGraphicFramePr>
-        <p:xfrm>
-          <a:off x="6400800" y="1298448"/>
-          <a:ext cx="5394959" cy="2526030"/>
-        </p:xfrm>
-        <a:graphic>
-          <a:graphicData uri="http://schemas.openxmlformats.org/drawingml/2006/table">
-            <a:tbl>
-              <a:tblPr firstRow="1" bandRow="1">
-                <a:tableStyleId>{5C22544A-7EE6-4342-B048-85BDC9FD1C3A}</a:tableStyleId>
-              </a:tblPr>
-              <a:tblGrid>
-                <a:gridCol w="844109"/>
-                <a:gridCol w="4550850"/>
-              </a:tblGrid>
-              <a:tr h="262890">
-                <a:tc>
-                  <a:txBody>
-                    <a:bodyPr wrap="square"/>
-                    <a:lstStyle/>
-                    <a:p>
-                      <a:r>
-                        <a:rPr sz="1000" b="1">
-                          <a:solidFill>
-                            <a:srgbClr val="FFFFFF"/>
-                          </a:solidFill>
-                          <a:latin typeface="Arial"/>
-                        </a:rPr>
-                        <a:t>score</a:t>
-                      </a:r>
-                    </a:p>
-                  </a:txBody>
-                  <a:tcPr marL="54864" marR="54864" marT="18288" marB="18288">
-                    <a:solidFill>
-                      <a:srgbClr val="1F4E79"/>
-                    </a:solidFill>
-                  </a:tcPr>
-                </a:tc>
-                <a:tc>
-                  <a:txBody>
-                    <a:bodyPr wrap="square"/>
-                    <a:lstStyle/>
-                    <a:p>
-                      <a:r>
-                        <a:rPr sz="1000" b="1">
-                          <a:solidFill>
-                            <a:srgbClr val="FFFFFF"/>
-                          </a:solidFill>
-                          <a:latin typeface="Arial"/>
-                        </a:rPr>
-                        <a:t>meaning</a:t>
-                      </a:r>
-                    </a:p>
-                  </a:txBody>
-                  <a:tcPr marL="54864" marR="54864" marT="18288" marB="18288">
-                    <a:solidFill>
-                      <a:srgbClr val="1F4E79"/>
-                    </a:solidFill>
-                  </a:tcPr>
-                </a:tc>
-              </a:tr>
-              <a:tr h="434340">
-                <a:tc>
-                  <a:txBody>
-                    <a:bodyPr wrap="square"/>
-                    <a:lstStyle/>
-                    <a:p>
-                      <a:r>
-                        <a:rPr sz="1000" b="0">
-                          <a:solidFill>
-                            <a:srgbClr val="282828"/>
-                          </a:solidFill>
-                          <a:latin typeface="Arial"/>
-                        </a:rPr>
-                        <a:t>gain</a:t>
-                      </a:r>
-                    </a:p>
-                  </a:txBody>
-                  <a:tcPr marL="54864" marR="54864" marT="18288" marB="18288">
-                    <a:solidFill>
-                      <a:srgbClr val="FFFFFF"/>
-                    </a:solidFill>
-                  </a:tcPr>
-                </a:tc>
-                <a:tc>
-                  <a:txBody>
-                    <a:bodyPr wrap="square"/>
-                    <a:lstStyle/>
-                    <a:p>
-                      <a:r>
-                        <a:rPr sz="1000" b="0">
-                          <a:solidFill>
-                            <a:srgbClr val="282828"/>
-                          </a:solidFill>
-                          <a:latin typeface="Arial"/>
-                        </a:rPr>
-                        <a:t>recovered change ÷ true change; 1.0 is perfect; quoted after calibration</a:t>
-                      </a:r>
-                    </a:p>
-                  </a:txBody>
-                  <a:tcPr marL="54864" marR="54864" marT="18288" marB="18288">
-                    <a:solidFill>
-                      <a:srgbClr val="FFFFFF"/>
-                    </a:solidFill>
-                  </a:tcPr>
-                </a:tc>
-              </a:tr>
-              <a:tr h="262890">
-                <a:tc>
-                  <a:txBody>
-                    <a:bodyPr wrap="square"/>
-                    <a:lstStyle/>
-                    <a:p>
-                      <a:r>
-                        <a:rPr sz="1000" b="0">
-                          <a:solidFill>
-                            <a:srgbClr val="282828"/>
-                          </a:solidFill>
-                          <a:latin typeface="Arial"/>
-                        </a:rPr>
-                        <a:t>floor</a:t>
-                      </a:r>
-                    </a:p>
-                  </a:txBody>
-                  <a:tcPr marL="54864" marR="54864" marT="18288" marB="18288">
-                    <a:solidFill>
-                      <a:srgbClr val="ECF1F6"/>
-                    </a:solidFill>
-                  </a:tcPr>
-                </a:tc>
-                <a:tc>
-                  <a:txBody>
-                    <a:bodyPr wrap="square"/>
-                    <a:lstStyle/>
-                    <a:p>
-                      <a:r>
-                        <a:rPr sz="1000" b="0">
-                          <a:solidFill>
-                            <a:srgbClr val="282828"/>
-                          </a:solidFill>
-                          <a:latin typeface="Arial"/>
-                        </a:rPr>
-                        <a:t>rms of the actuators that were not changed, in picometers</a:t>
-                      </a:r>
-                    </a:p>
-                  </a:txBody>
-                  <a:tcPr marL="54864" marR="54864" marT="18288" marB="18288">
-                    <a:solidFill>
-                      <a:srgbClr val="ECF1F6"/>
-                    </a:solidFill>
-                  </a:tcPr>
-                </a:tc>
-              </a:tr>
-              <a:tr h="262890">
-                <a:tc>
-                  <a:txBody>
-                    <a:bodyPr wrap="square"/>
-                    <a:lstStyle/>
-                    <a:p>
-                      <a:r>
-                        <a:rPr sz="1000" b="0">
-                          <a:solidFill>
-                            <a:srgbClr val="282828"/>
-                          </a:solidFill>
-                          <a:latin typeface="Arial"/>
-                        </a:rPr>
-                        <a:t>SNR</a:t>
-                      </a:r>
-                    </a:p>
-                  </a:txBody>
-                  <a:tcPr marL="54864" marR="54864" marT="18288" marB="18288">
-                    <a:solidFill>
-                      <a:srgbClr val="FFFFFF"/>
-                    </a:solidFill>
-                  </a:tcPr>
-                </a:tc>
-                <a:tc>
-                  <a:txBody>
-                    <a:bodyPr wrap="square"/>
-                    <a:lstStyle/>
-                    <a:p>
-                      <a:r>
-                        <a:rPr sz="1000" b="0">
-                          <a:solidFill>
-                            <a:srgbClr val="282828"/>
-                          </a:solidFill>
-                          <a:latin typeface="Arial"/>
-                        </a:rPr>
-                        <a:t>recovered change ÷ floor; above 5 counts as detected</a:t>
-                      </a:r>
-                    </a:p>
-                  </a:txBody>
-                  <a:tcPr marL="54864" marR="54864" marT="18288" marB="18288">
-                    <a:solidFill>
-                      <a:srgbClr val="FFFFFF"/>
-                    </a:solidFill>
-                  </a:tcPr>
-                </a:tc>
-              </a:tr>
-              <a:tr h="434340">
-                <a:tc>
-                  <a:txBody>
-                    <a:bodyPr wrap="square"/>
-                    <a:lstStyle/>
-                    <a:p>
-                      <a:r>
-                        <a:rPr sz="1000" b="0">
-                          <a:solidFill>
-                            <a:srgbClr val="282828"/>
-                          </a:solidFill>
-                          <a:latin typeface="Arial"/>
-                        </a:rPr>
-                        <a:t>photons per measurement</a:t>
-                      </a:r>
-                    </a:p>
-                  </a:txBody>
-                  <a:tcPr marL="54864" marR="54864" marT="18288" marB="18288">
-                    <a:solidFill>
-                      <a:srgbClr val="ECF1F6"/>
-                    </a:solidFill>
-                  </a:tcPr>
-                </a:tc>
-                <a:tc>
-                  <a:txBody>
-                    <a:bodyPr wrap="square"/>
-                    <a:lstStyle/>
-                    <a:p>
-                      <a:r>
-                        <a:rPr sz="1000" b="0">
-                          <a:solidFill>
-                            <a:srgbClr val="282828"/>
-                          </a:solidFill>
-                          <a:latin typeface="Arial"/>
-                        </a:rPr>
-                        <a:t>all frames of one measurement summed; 1e14 photons at 633 nm = 31 µJ = 0.13 s of a 1 mW laser at 25% throughput</a:t>
-                      </a:r>
-                    </a:p>
-                  </a:txBody>
-                  <a:tcPr marL="54864" marR="54864" marT="18288" marB="18288">
-                    <a:solidFill>
-                      <a:srgbClr val="ECF1F6"/>
-                    </a:solidFill>
-                  </a:tcPr>
-                </a:tc>
-              </a:tr>
-              <a:tr h="434340">
-                <a:tc>
-                  <a:txBody>
-                    <a:bodyPr wrap="square"/>
-                    <a:lstStyle/>
-                    <a:p>
-                      <a:r>
-                        <a:rPr sz="1000" b="0">
-                          <a:solidFill>
-                            <a:srgbClr val="282828"/>
-                          </a:solidFill>
-                          <a:latin typeface="Arial"/>
-                        </a:rPr>
-                        <a:t>capture range to 10%</a:t>
-                      </a:r>
-                    </a:p>
-                  </a:txBody>
-                  <a:tcPr marL="54864" marR="54864" marT="18288" marB="18288">
-                    <a:solidFill>
-                      <a:srgbClr val="FFFFFF"/>
-                    </a:solidFill>
-                  </a:tcPr>
-                </a:tc>
-                <a:tc>
-                  <a:txBody>
-                    <a:bodyPr wrap="square"/>
-                    <a:lstStyle/>
-                    <a:p>
-                      <a:r>
-                        <a:rPr sz="1000" b="0">
-                          <a:solidFill>
-                            <a:srgbClr val="282828"/>
-                          </a:solidFill>
-                          <a:latin typeface="Arial"/>
-                        </a:rPr>
-                        <a:t>the largest working surface at which a 10 nm change on the 47 sites reads within 10%, the matrix left as calibrated at 30 nm</a:t>
-                      </a:r>
-                    </a:p>
-                  </a:txBody>
-                  <a:tcPr marL="54864" marR="54864" marT="18288" marB="18288">
-                    <a:solidFill>
-                      <a:srgbClr val="FFFFFF"/>
-                    </a:solidFill>
-                  </a:tcPr>
-                </a:tc>
-              </a:tr>
-              <a:tr h="434340">
-                <a:tc>
-                  <a:txBody>
-                    <a:bodyPr wrap="square"/>
-                    <a:lstStyle/>
-                    <a:p>
-                      <a:r>
-                        <a:rPr sz="1000" b="0">
-                          <a:solidFill>
-                            <a:srgbClr val="282828"/>
-                          </a:solidFill>
-                          <a:latin typeface="Arial"/>
-                        </a:rPr>
-                        <a:t>hold, one number</a:t>
-                      </a:r>
-                    </a:p>
-                  </a:txBody>
-                  <a:tcPr marL="54864" marR="54864" marT="18288" marB="18288">
-                    <a:solidFill>
-                      <a:srgbClr val="ECF1F6"/>
-                    </a:solidFill>
-                  </a:tcPr>
-                </a:tc>
-                <a:tc>
-                  <a:txBody>
-                    <a:bodyPr wrap="square"/>
-                    <a:lstStyle/>
-                    <a:p>
-                      <a:r>
-                        <a:rPr sz="1000" b="0">
-                          <a:solidFill>
-                            <a:srgbClr val="282828"/>
-                          </a:solidFill>
-                          <a:latin typeface="Arial"/>
-                        </a:rPr>
-                        <a:t>photons per cycle that hold 3 pm rms in a 60-cycle loop at gain 0.5</a:t>
-                      </a:r>
-                    </a:p>
-                  </a:txBody>
-                  <a:tcPr marL="54864" marR="54864" marT="18288" marB="18288">
-                    <a:solidFill>
-                      <a:srgbClr val="ECF1F6"/>
-                    </a:solidFill>
-                  </a:tcPr>
-                </a:tc>
-              </a:tr>
-            </a:tbl>
-          </a:graphicData>
-        </a:graphic>
-      </p:graphicFrame>
       <p:sp>
         <p:nvSpPr>
-          <p:cNvPr id="6" name="TextBox 5"/>
+          <p:cNvPr id="5" name="TextBox 4"/>
           <p:cNvSpPr txBox="1"/>
           <p:nvPr/>
         </p:nvSpPr>
         <p:spPr>
           <a:xfrm>
-            <a:off x="6400800" y="3970781"/>
+            <a:off x="6400800" y="1298448"/>
             <a:ext cx="5394960" cy="274320"/>
           </a:xfrm>
           <a:prstGeom prst="rect">
@@ -11694,13 +12123,68 @@
               </a:spcAft>
             </a:pPr>
             <a:r>
+              <a:rPr sz="1200" b="0">
+                <a:solidFill>
+                  <a:srgbClr val="282828"/>
+                </a:solidFill>
+                <a:latin typeface="Arial"/>
+              </a:rPr>
+              <a:t>•  The bench: one layout with the reference arm shuttered, the mask seat translated, the quarter-wave plate in or out, and the P/SRI arm behind a flip-in plate (the one-bench slide).  Capture with the interferometer, hand off inside the sensor's 60 nm reach, hold with the sensor at a third of the light.</a:t>
+            </a:r>
+          </a:p>
+          <a:p>
+            <a:pPr>
+              <a:spcAft>
+                <a:spcPts val="600"/>
+              </a:spcAft>
+            </a:pPr>
+            <a:r>
+              <a:rPr sz="1200" b="0">
+                <a:solidFill>
+                  <a:srgbClr val="282828"/>
+                </a:solidFill>
+                <a:latin typeface="Arial"/>
+              </a:rPr>
+              <a:t>•  What the numbers do not decide: the pinhole and the vector dimple tie on the working surface (0.9935 / 4 pm both); the dimple wins the servo by 1.5×, the pinhole wins capture range for one extra frame.  A bench that carries both costs one substrate.</a:t>
+            </a:r>
+          </a:p>
+        </p:txBody>
+      </p:sp>
+      <p:sp>
+        <p:nvSpPr>
+          <p:cNvPr id="6" name="TextBox 5"/>
+          <p:cNvSpPr txBox="1"/>
+          <p:nvPr/>
+        </p:nvSpPr>
+        <p:spPr>
+          <a:xfrm>
+            <a:off x="6400800" y="3398519"/>
+            <a:ext cx="5394960" cy="274320"/>
+          </a:xfrm>
+          <a:prstGeom prst="rect">
+            <a:avLst/>
+          </a:prstGeom>
+          <a:noFill/>
+        </p:spPr>
+        <p:txBody>
+          <a:bodyPr wrap="square">
+            <a:spAutoFit/>
+          </a:bodyPr>
+          <a:lstStyle/>
+          <a:p>
+            <a:pPr>
+              <a:spcAft>
+                <a:spcPts val="600"/>
+              </a:spcAft>
+            </a:pPr>
+            <a:r>
               <a:rPr sz="1050" b="0">
                 <a:solidFill>
                   <a:srgbClr val="6E6E6E"/>
                 </a:solidFill>
                 <a:latin typeface="Arial"/>
               </a:rPr>
-              <a:t>Measuring a change costs two measurements.  The 96×96 at 385 detector pixels per pupil is the flight-like sampling; most rows here are at 193 pixels, which the sampling study showed reads the same numbers.</a:t>
+              <a:t>Draft stance approved 2026-09-13; the wording is for review.</a:t>
             </a:r>
           </a:p>
         </p:txBody>
@@ -11713,7 +12197,7 @@
 </p:sld>
 </file>
 
-<file path=ppt/slides/slide20.xml><?xml version="1.0" encoding="utf-8"?>
+<file path=ppt/slides/slide21.xml><?xml version="1.0" encoding="utf-8"?>
 <p:sld xmlns:a="http://schemas.openxmlformats.org/drawingml/2006/main" xmlns:p="http://schemas.openxmlformats.org/presentationml/2006/main" xmlns:r="http://schemas.openxmlformats.org/officeDocument/2006/relationships">
   <p:cSld>
     <p:spTree>
@@ -11932,7 +12416,7 @@
 </p:sld>
 </file>
 
-<file path=ppt/slides/slide21.xml><?xml version="1.0" encoding="utf-8"?>
+<file path=ppt/slides/slide22.xml><?xml version="1.0" encoding="utf-8"?>
 <p:sld xmlns:a="http://schemas.openxmlformats.org/drawingml/2006/main" xmlns:p="http://schemas.openxmlformats.org/presentationml/2006/main" xmlns:r="http://schemas.openxmlformats.org/officeDocument/2006/relationships">
   <p:cSld>
     <p:spTree>
@@ -12578,7 +13062,7 @@
 </p:sld>
 </file>
 
-<file path=ppt/slides/slide22.xml><?xml version="1.0" encoding="utf-8"?>
+<file path=ppt/slides/slide23.xml><?xml version="1.0" encoding="utf-8"?>
 <p:sld xmlns:a="http://schemas.openxmlformats.org/drawingml/2006/main" xmlns:p="http://schemas.openxmlformats.org/presentationml/2006/main" xmlns:r="http://schemas.openxmlformats.org/officeDocument/2006/relationships">
   <p:cSld>
     <p:spTree>
@@ -12797,7 +13281,7 @@
 </p:sld>
 </file>
 
-<file path=ppt/slides/slide23.xml><?xml version="1.0" encoding="utf-8"?>
+<file path=ppt/slides/slide24.xml><?xml version="1.0" encoding="utf-8"?>
 <p:sld xmlns:a="http://schemas.openxmlformats.org/drawingml/2006/main" xmlns:p="http://schemas.openxmlformats.org/presentationml/2006/main" xmlns:r="http://schemas.openxmlformats.org/officeDocument/2006/relationships">
   <p:cSld>
     <p:spTree>
@@ -13322,7 +13806,7 @@
 </p:sld>
 </file>
 
-<file path=ppt/slides/slide24.xml><?xml version="1.0" encoding="utf-8"?>
+<file path=ppt/slides/slide25.xml><?xml version="1.0" encoding="utf-8"?>
 <p:sld xmlns:a="http://schemas.openxmlformats.org/drawingml/2006/main" xmlns:p="http://schemas.openxmlformats.org/presentationml/2006/main" xmlns:r="http://schemas.openxmlformats.org/officeDocument/2006/relationships">
   <p:cSld>
     <p:spTree>
@@ -13574,7 +14058,7 @@
 </p:sld>
 </file>
 
-<file path=ppt/slides/slide25.xml><?xml version="1.0" encoding="utf-8"?>
+<file path=ppt/slides/slide26.xml><?xml version="1.0" encoding="utf-8"?>
 <p:sld xmlns:a="http://schemas.openxmlformats.org/drawingml/2006/main" xmlns:p="http://schemas.openxmlformats.org/presentationml/2006/main" xmlns:r="http://schemas.openxmlformats.org/officeDocument/2006/relationships">
   <p:cSld>
     <p:spTree>
@@ -13833,7 +14317,7 @@
 </p:sld>
 </file>
 
-<file path=ppt/slides/slide26.xml><?xml version="1.0" encoding="utf-8"?>
+<file path=ppt/slides/slide27.xml><?xml version="1.0" encoding="utf-8"?>
 <p:sld xmlns:a="http://schemas.openxmlformats.org/drawingml/2006/main" xmlns:p="http://schemas.openxmlformats.org/presentationml/2006/main" xmlns:r="http://schemas.openxmlformats.org/officeDocument/2006/relationships">
   <p:cSld>
     <p:spTree>
@@ -14131,7 +14615,7 @@
 </p:sld>
 </file>
 
-<file path=ppt/slides/slide27.xml><?xml version="1.0" encoding="utf-8"?>
+<file path=ppt/slides/slide28.xml><?xml version="1.0" encoding="utf-8"?>
 <p:sld xmlns:a="http://schemas.openxmlformats.org/drawingml/2006/main" xmlns:p="http://schemas.openxmlformats.org/presentationml/2006/main" xmlns:r="http://schemas.openxmlformats.org/officeDocument/2006/relationships">
   <p:cSld>
     <p:spTree>
@@ -14675,7 +15159,7 @@
 </p:sld>
 </file>
 
-<file path=ppt/slides/slide28.xml><?xml version="1.0" encoding="utf-8"?>
+<file path=ppt/slides/slide29.xml><?xml version="1.0" encoding="utf-8"?>
 <p:sld xmlns:a="http://schemas.openxmlformats.org/drawingml/2006/main" xmlns:p="http://schemas.openxmlformats.org/presentationml/2006/main" xmlns:r="http://schemas.openxmlformats.org/officeDocument/2006/relationships">
   <p:cSld>
     <p:spTree>
@@ -15523,7 +16007,738 @@
 </p:sld>
 </file>
 
-<file path=ppt/slides/slide29.xml><?xml version="1.0" encoding="utf-8"?>
+<file path=ppt/slides/slide3.xml><?xml version="1.0" encoding="utf-8"?>
+<p:sld xmlns:a="http://schemas.openxmlformats.org/drawingml/2006/main" xmlns:p="http://schemas.openxmlformats.org/presentationml/2006/main" xmlns:r="http://schemas.openxmlformats.org/officeDocument/2006/relationships">
+  <p:cSld>
+    <p:spTree>
+      <p:nvGrpSpPr>
+        <p:cNvPr id="1" name=""/>
+        <p:cNvGrpSpPr/>
+        <p:nvPr/>
+      </p:nvGrpSpPr>
+      <p:grpSpPr/>
+      <p:sp>
+        <p:nvSpPr>
+          <p:cNvPr id="2" name="TextBox 1"/>
+          <p:cNvSpPr txBox="1"/>
+          <p:nvPr/>
+        </p:nvSpPr>
+        <p:spPr>
+          <a:xfrm>
+            <a:off x="411480" y="201168"/>
+            <a:ext cx="11368735" cy="914400"/>
+          </a:xfrm>
+          <a:prstGeom prst="rect">
+            <a:avLst/>
+          </a:prstGeom>
+          <a:noFill/>
+        </p:spPr>
+        <p:txBody>
+          <a:bodyPr wrap="square">
+            <a:spAutoFit/>
+          </a:bodyPr>
+          <a:lstStyle/>
+          <a:p>
+            <a:pPr>
+              <a:spcAft>
+                <a:spcPts val="400"/>
+              </a:spcAft>
+            </a:pPr>
+            <a:r>
+              <a:rPr sz="2400" b="1">
+                <a:solidFill>
+                  <a:srgbClr val="1F4E79"/>
+                </a:solidFill>
+                <a:latin typeface="Arial"/>
+              </a:rPr>
+              <a:t>One bench, four ways of sensing</a:t>
+            </a:r>
+          </a:p>
+          <a:p>
+            <a:pPr>
+              <a:spcAft>
+                <a:spcPts val="0"/>
+              </a:spcAft>
+            </a:pPr>
+            <a:r>
+              <a:rPr sz="1250" b="0">
+                <a:solidFill>
+                  <a:srgbClr val="6E6E6E"/>
+                </a:solidFill>
+                <a:latin typeface="Arial"/>
+              </a:rPr>
+              <a:t>Everything shares the front end: a filtered HeNe, a collimator, a plate splitter at 22.5°, a 700 mm leg to the mirror, a focuser to an internal focus, a field lens to a camera at the pupil image</a:t>
+            </a:r>
+          </a:p>
+        </p:txBody>
+      </p:sp>
+      <p:sp>
+        <p:nvSpPr>
+          <p:cNvPr id="3" name="Rectangle 2"/>
+          <p:cNvSpPr/>
+          <p:nvPr/>
+        </p:nvSpPr>
+        <p:spPr>
+          <a:xfrm>
+            <a:off x="411480" y="1133856"/>
+            <a:ext cx="11368735" cy="20320"/>
+          </a:xfrm>
+          <a:prstGeom prst="rect">
+            <a:avLst/>
+          </a:prstGeom>
+          <a:solidFill>
+            <a:srgbClr val="B8C6D4"/>
+          </a:solidFill>
+          <a:ln>
+            <a:noFill/>
+          </a:ln>
+          <a:effectLst/>
+        </p:spPr>
+        <p:style>
+          <a:lnRef idx="1">
+            <a:schemeClr val="accent1"/>
+          </a:lnRef>
+          <a:fillRef idx="3">
+            <a:schemeClr val="accent1"/>
+          </a:fillRef>
+          <a:effectRef idx="2">
+            <a:schemeClr val="accent1"/>
+          </a:effectRef>
+          <a:fontRef idx="minor">
+            <a:schemeClr val="lt1"/>
+          </a:fontRef>
+        </p:style>
+        <p:txBody>
+          <a:bodyPr rtlCol="0" anchor="ctr"/>
+          <a:lstStyle/>
+          <a:p>
+            <a:pPr algn="ctr"/>
+          </a:p>
+        </p:txBody>
+      </p:sp>
+      <p:pic>
+        <p:nvPicPr>
+          <p:cNvPr id="4" name="Picture 3" descr="crop_bench_bs22_train.png"/>
+          <p:cNvPicPr>
+            <a:picLocks noChangeAspect="1"/>
+          </p:cNvPicPr>
+          <p:nvPr/>
+        </p:nvPicPr>
+        <p:blipFill>
+          <a:blip r:embed="rId2"/>
+          <a:stretch>
+            <a:fillRect/>
+          </a:stretch>
+        </p:blipFill>
+        <p:spPr>
+          <a:xfrm>
+            <a:off x="4061668" y="1298448"/>
+            <a:ext cx="4068357" cy="2348992"/>
+          </a:xfrm>
+          <a:prstGeom prst="rect">
+            <a:avLst/>
+          </a:prstGeom>
+        </p:spPr>
+      </p:pic>
+      <p:sp>
+        <p:nvSpPr>
+          <p:cNvPr id="5" name="TextBox 4"/>
+          <p:cNvSpPr txBox="1"/>
+          <p:nvPr/>
+        </p:nvSpPr>
+        <p:spPr>
+          <a:xfrm>
+            <a:off x="411480" y="3665727"/>
+            <a:ext cx="11368735" cy="394208"/>
+          </a:xfrm>
+          <a:prstGeom prst="rect">
+            <a:avLst/>
+          </a:prstGeom>
+          <a:noFill/>
+        </p:spPr>
+        <p:txBody>
+          <a:bodyPr wrap="square">
+            <a:spAutoFit/>
+          </a:bodyPr>
+          <a:lstStyle/>
+          <a:p>
+            <a:pPr algn="ctr">
+              <a:spcAft>
+                <a:spcPts val="0"/>
+              </a:spcAft>
+            </a:pPr>
+            <a:r>
+              <a:rPr sz="1000" b="0">
+                <a:solidFill>
+                  <a:srgbClr val="6E6E6E"/>
+                </a:solidFill>
+                <a:latin typeface="Arial"/>
+              </a:rPr>
+              <a:t>The shared front end as traced by the engine, seen from above, at the 22.5° splitter: source at left, collimator L1, the splitter, the 96 mm mirror on its 700 mm leg (blue), the reference arm and its flat (orange, the interferometer only), the focuser L2 toward the internal focus.  The mask seat at that focus is where the four sensing methods differ.</a:t>
+            </a:r>
+          </a:p>
+        </p:txBody>
+      </p:sp>
+      <p:graphicFrame>
+        <p:nvGraphicFramePr>
+          <p:cNvPr id="6" name="Table 5"/>
+          <p:cNvGraphicFramePr>
+            <a:graphicFrameLocks noGrp="1"/>
+          </p:cNvGraphicFramePr>
+          <p:nvPr/>
+        </p:nvGraphicFramePr>
+        <p:xfrm>
+          <a:off x="411480" y="4096511"/>
+          <a:ext cx="5806439" cy="1965960"/>
+        </p:xfrm>
+        <a:graphic>
+          <a:graphicData uri="http://schemas.openxmlformats.org/drawingml/2006/table">
+            <a:tbl>
+              <a:tblPr firstRow="1" bandRow="1">
+                <a:tableStyleId>{5C22544A-7EE6-4342-B048-85BDC9FD1C3A}</a:tableStyleId>
+              </a:tblPr>
+              <a:tblGrid>
+                <a:gridCol w="662479"/>
+                <a:gridCol w="5143960"/>
+              </a:tblGrid>
+              <a:tr h="280035">
+                <a:tc>
+                  <a:txBody>
+                    <a:bodyPr wrap="square"/>
+                    <a:lstStyle/>
+                    <a:p>
+                      <a:r>
+                        <a:rPr sz="1100" b="1">
+                          <a:solidFill>
+                            <a:srgbClr val="FFFFFF"/>
+                          </a:solidFill>
+                          <a:latin typeface="Arial"/>
+                        </a:rPr>
+                        <a:t>part</a:t>
+                      </a:r>
+                    </a:p>
+                  </a:txBody>
+                  <a:tcPr marL="54864" marR="54864" marT="18288" marB="18288">
+                    <a:solidFill>
+                      <a:srgbClr val="1F4E79"/>
+                    </a:solidFill>
+                  </a:tcPr>
+                </a:tc>
+                <a:tc>
+                  <a:txBody>
+                    <a:bodyPr wrap="square"/>
+                    <a:lstStyle/>
+                    <a:p>
+                      <a:r>
+                        <a:rPr sz="1100" b="1">
+                          <a:solidFill>
+                            <a:srgbClr val="FFFFFF"/>
+                          </a:solidFill>
+                          <a:latin typeface="Arial"/>
+                        </a:rPr>
+                        <a:t>value</a:t>
+                      </a:r>
+                    </a:p>
+                  </a:txBody>
+                  <a:tcPr marL="54864" marR="54864" marT="18288" marB="18288">
+                    <a:solidFill>
+                      <a:srgbClr val="1F4E79"/>
+                    </a:solidFill>
+                  </a:tcPr>
+                </a:tc>
+              </a:tr>
+              <a:tr h="280035">
+                <a:tc>
+                  <a:txBody>
+                    <a:bodyPr wrap="square"/>
+                    <a:lstStyle/>
+                    <a:p>
+                      <a:r>
+                        <a:rPr sz="1100" b="0">
+                          <a:solidFill>
+                            <a:srgbClr val="282828"/>
+                          </a:solidFill>
+                          <a:latin typeface="Arial"/>
+                        </a:rPr>
+                        <a:t>source</a:t>
+                      </a:r>
+                    </a:p>
+                  </a:txBody>
+                  <a:tcPr marL="54864" marR="54864" marT="18288" marB="18288">
+                    <a:solidFill>
+                      <a:srgbClr val="FFFFFF"/>
+                    </a:solidFill>
+                  </a:tcPr>
+                </a:tc>
+                <a:tc>
+                  <a:txBody>
+                    <a:bodyPr wrap="square"/>
+                    <a:lstStyle/>
+                    <a:p>
+                      <a:r>
+                        <a:rPr sz="1100" b="0">
+                          <a:solidFill>
+                            <a:srgbClr val="282828"/>
+                          </a:solidFill>
+                          <a:latin typeface="Arial"/>
+                        </a:rPr>
+                        <a:t>HeNe 632.8 nm, filtered, 51 mm beam radius</a:t>
+                      </a:r>
+                    </a:p>
+                  </a:txBody>
+                  <a:tcPr marL="54864" marR="54864" marT="18288" marB="18288">
+                    <a:solidFill>
+                      <a:srgbClr val="FFFFFF"/>
+                    </a:solidFill>
+                  </a:tcPr>
+                </a:tc>
+              </a:tr>
+              <a:tr h="468630">
+                <a:tc>
+                  <a:txBody>
+                    <a:bodyPr wrap="square"/>
+                    <a:lstStyle/>
+                    <a:p>
+                      <a:r>
+                        <a:rPr sz="1100" b="0">
+                          <a:solidFill>
+                            <a:srgbClr val="282828"/>
+                          </a:solidFill>
+                          <a:latin typeface="Arial"/>
+                        </a:rPr>
+                        <a:t>collimator L1</a:t>
+                      </a:r>
+                    </a:p>
+                  </a:txBody>
+                  <a:tcPr marL="54864" marR="54864" marT="18288" marB="18288">
+                    <a:solidFill>
+                      <a:srgbClr val="ECF1F6"/>
+                    </a:solidFill>
+                  </a:tcPr>
+                </a:tc>
+                <a:tc>
+                  <a:txBody>
+                    <a:bodyPr wrap="square"/>
+                    <a:lstStyle/>
+                    <a:p>
+                      <a:r>
+                        <a:rPr sz="1100" b="0">
+                          <a:solidFill>
+                            <a:srgbClr val="282828"/>
+                          </a:solidFill>
+                          <a:latin typeface="Arial"/>
+                        </a:rPr>
+                        <a:t>f 857 mm, 103 mm, coated; modeled 5 mm center, 2 mm edge, to be a real 103 mm singlet</a:t>
+                      </a:r>
+                    </a:p>
+                  </a:txBody>
+                  <a:tcPr marL="54864" marR="54864" marT="18288" marB="18288">
+                    <a:solidFill>
+                      <a:srgbClr val="ECF1F6"/>
+                    </a:solidFill>
+                  </a:tcPr>
+                </a:tc>
+              </a:tr>
+              <a:tr h="468630">
+                <a:tc>
+                  <a:txBody>
+                    <a:bodyPr wrap="square"/>
+                    <a:lstStyle/>
+                    <a:p>
+                      <a:r>
+                        <a:rPr sz="1100" b="0">
+                          <a:solidFill>
+                            <a:srgbClr val="282828"/>
+                          </a:solidFill>
+                          <a:latin typeface="Arial"/>
+                        </a:rPr>
+                        <a:t>plate splitter</a:t>
+                      </a:r>
+                    </a:p>
+                  </a:txBody>
+                  <a:tcPr marL="54864" marR="54864" marT="18288" marB="18288">
+                    <a:solidFill>
+                      <a:srgbClr val="FFFFFF"/>
+                    </a:solidFill>
+                  </a:tcPr>
+                </a:tc>
+                <a:tc>
+                  <a:txBody>
+                    <a:bodyPr wrap="square"/>
+                    <a:lstStyle/>
+                    <a:p>
+                      <a:r>
+                        <a:rPr sz="1100" b="0">
+                          <a:solidFill>
+                            <a:srgbClr val="282828"/>
+                          </a:solidFill>
+                          <a:latin typeface="Arial"/>
+                        </a:rPr>
+                        <a:t>22.5° incidence (the record's 7° does not clear the node: next slide), 50/50; compensator matched; modeled 2.6 mm thick, to be 10 mm</a:t>
+                      </a:r>
+                    </a:p>
+                  </a:txBody>
+                  <a:tcPr marL="54864" marR="54864" marT="18288" marB="18288">
+                    <a:solidFill>
+                      <a:srgbClr val="FFFFFF"/>
+                    </a:solidFill>
+                  </a:tcPr>
+                </a:tc>
+              </a:tr>
+              <a:tr h="468630">
+                <a:tc>
+                  <a:txBody>
+                    <a:bodyPr wrap="square"/>
+                    <a:lstStyle/>
+                    <a:p>
+                      <a:r>
+                        <a:rPr sz="1100" b="0">
+                          <a:solidFill>
+                            <a:srgbClr val="282828"/>
+                          </a:solidFill>
+                          <a:latin typeface="Arial"/>
+                        </a:rPr>
+                        <a:t>deformable mirror</a:t>
+                      </a:r>
+                    </a:p>
+                  </a:txBody>
+                  <a:tcPr marL="54864" marR="54864" marT="18288" marB="18288">
+                    <a:solidFill>
+                      <a:srgbClr val="ECF1F6"/>
+                    </a:solidFill>
+                  </a:tcPr>
+                </a:tc>
+                <a:tc>
+                  <a:txBody>
+                    <a:bodyPr wrap="square"/>
+                    <a:lstStyle/>
+                    <a:p>
+                      <a:r>
+                        <a:rPr sz="1100" b="0">
+                          <a:solidFill>
+                            <a:srgbClr val="282828"/>
+                          </a:solidFill>
+                          <a:latin typeface="Arial"/>
+                        </a:rPr>
+                        <a:t>96×96, 1 mm pitch, 96 mm, 700 mm leg</a:t>
+                      </a:r>
+                    </a:p>
+                  </a:txBody>
+                  <a:tcPr marL="54864" marR="54864" marT="18288" marB="18288">
+                    <a:solidFill>
+                      <a:srgbClr val="ECF1F6"/>
+                    </a:solidFill>
+                  </a:tcPr>
+                </a:tc>
+              </a:tr>
+            </a:tbl>
+          </a:graphicData>
+        </a:graphic>
+      </p:graphicFrame>
+      <p:graphicFrame>
+        <p:nvGraphicFramePr>
+          <p:cNvPr id="7" name="Table 6"/>
+          <p:cNvGraphicFramePr>
+            <a:graphicFrameLocks noGrp="1"/>
+          </p:cNvGraphicFramePr>
+          <p:nvPr/>
+        </p:nvGraphicFramePr>
+        <p:xfrm>
+          <a:off x="6400800" y="4096511"/>
+          <a:ext cx="5394960" cy="1657350"/>
+        </p:xfrm>
+        <a:graphic>
+          <a:graphicData uri="http://schemas.openxmlformats.org/drawingml/2006/table">
+            <a:tbl>
+              <a:tblPr firstRow="1" bandRow="1">
+                <a:tableStyleId>{5C22544A-7EE6-4342-B048-85BDC9FD1C3A}</a:tableStyleId>
+              </a:tblPr>
+              <a:tblGrid>
+                <a:gridCol w="806704"/>
+                <a:gridCol w="4588256"/>
+              </a:tblGrid>
+              <a:tr h="262890">
+                <a:tc>
+                  <a:txBody>
+                    <a:bodyPr wrap="square"/>
+                    <a:lstStyle/>
+                    <a:p>
+                      <a:r>
+                        <a:rPr sz="1000" b="1">
+                          <a:solidFill>
+                            <a:srgbClr val="FFFFFF"/>
+                          </a:solidFill>
+                          <a:latin typeface="Arial"/>
+                        </a:rPr>
+                        <a:t>part</a:t>
+                      </a:r>
+                    </a:p>
+                  </a:txBody>
+                  <a:tcPr marL="54864" marR="54864" marT="18288" marB="18288">
+                    <a:solidFill>
+                      <a:srgbClr val="1F4E79"/>
+                    </a:solidFill>
+                  </a:tcPr>
+                </a:tc>
+                <a:tc>
+                  <a:txBody>
+                    <a:bodyPr wrap="square"/>
+                    <a:lstStyle/>
+                    <a:p>
+                      <a:r>
+                        <a:rPr sz="1000" b="1">
+                          <a:solidFill>
+                            <a:srgbClr val="FFFFFF"/>
+                          </a:solidFill>
+                          <a:latin typeface="Arial"/>
+                        </a:rPr>
+                        <a:t>value</a:t>
+                      </a:r>
+                    </a:p>
+                  </a:txBody>
+                  <a:tcPr marL="54864" marR="54864" marT="18288" marB="18288">
+                    <a:solidFill>
+                      <a:srgbClr val="1F4E79"/>
+                    </a:solidFill>
+                  </a:tcPr>
+                </a:tc>
+              </a:tr>
+              <a:tr h="434340">
+                <a:tc>
+                  <a:txBody>
+                    <a:bodyPr wrap="square"/>
+                    <a:lstStyle/>
+                    <a:p>
+                      <a:r>
+                        <a:rPr sz="1000" b="0">
+                          <a:solidFill>
+                            <a:srgbClr val="282828"/>
+                          </a:solidFill>
+                          <a:latin typeface="Arial"/>
+                        </a:rPr>
+                        <a:t>focuser L2</a:t>
+                      </a:r>
+                    </a:p>
+                  </a:txBody>
+                  <a:tcPr marL="54864" marR="54864" marT="18288" marB="18288">
+                    <a:solidFill>
+                      <a:srgbClr val="FFFFFF"/>
+                    </a:solidFill>
+                  </a:tcPr>
+                </a:tc>
+                <a:tc>
+                  <a:txBody>
+                    <a:bodyPr wrap="square"/>
+                    <a:lstStyle/>
+                    <a:p>
+                      <a:r>
+                        <a:rPr sz="1000" b="0">
+                          <a:solidFill>
+                            <a:srgbClr val="282828"/>
+                          </a:solidFill>
+                          <a:latin typeface="Arial"/>
+                        </a:rPr>
+                        <a:t>f 429 mm, 103 mm; internal focus at F/4.2; modeled 8 mm center, to be real</a:t>
+                      </a:r>
+                    </a:p>
+                  </a:txBody>
+                  <a:tcPr marL="54864" marR="54864" marT="18288" marB="18288">
+                    <a:solidFill>
+                      <a:srgbClr val="FFFFFF"/>
+                    </a:solidFill>
+                  </a:tcPr>
+                </a:tc>
+              </a:tr>
+              <a:tr h="262890">
+                <a:tc>
+                  <a:txBody>
+                    <a:bodyPr wrap="square"/>
+                    <a:lstStyle/>
+                    <a:p>
+                      <a:r>
+                        <a:rPr sz="1000" b="0">
+                          <a:solidFill>
+                            <a:srgbClr val="282828"/>
+                          </a:solidFill>
+                          <a:latin typeface="Arial"/>
+                        </a:rPr>
+                        <a:t>field lens</a:t>
+                      </a:r>
+                    </a:p>
+                  </a:txBody>
+                  <a:tcPr marL="54864" marR="54864" marT="18288" marB="18288">
+                    <a:solidFill>
+                      <a:srgbClr val="ECF1F6"/>
+                    </a:solidFill>
+                  </a:tcPr>
+                </a:tc>
+                <a:tc>
+                  <a:txBody>
+                    <a:bodyPr wrap="square"/>
+                    <a:lstStyle/>
+                    <a:p>
+                      <a:r>
+                        <a:rPr sz="1000" b="0">
+                          <a:solidFill>
+                            <a:srgbClr val="282828"/>
+                          </a:solidFill>
+                          <a:latin typeface="Arial"/>
+                        </a:rPr>
+                        <a:t>f 43 mm, 21 mm; pupil image 9.4 mm, 32 mm behind it</a:t>
+                      </a:r>
+                    </a:p>
+                  </a:txBody>
+                  <a:tcPr marL="54864" marR="54864" marT="18288" marB="18288">
+                    <a:solidFill>
+                      <a:srgbClr val="ECF1F6"/>
+                    </a:solidFill>
+                  </a:tcPr>
+                </a:tc>
+              </a:tr>
+              <a:tr h="434340">
+                <a:tc>
+                  <a:txBody>
+                    <a:bodyPr wrap="square"/>
+                    <a:lstStyle/>
+                    <a:p>
+                      <a:r>
+                        <a:rPr sz="1000" b="0">
+                          <a:solidFill>
+                            <a:srgbClr val="282828"/>
+                          </a:solidFill>
+                          <a:latin typeface="Arial"/>
+                        </a:rPr>
+                        <a:t>camera</a:t>
+                      </a:r>
+                    </a:p>
+                  </a:txBody>
+                  <a:tcPr marL="54864" marR="54864" marT="18288" marB="18288">
+                    <a:solidFill>
+                      <a:srgbClr val="FFFFFF"/>
+                    </a:solidFill>
+                  </a:tcPr>
+                </a:tc>
+                <a:tc>
+                  <a:txBody>
+                    <a:bodyPr wrap="square"/>
+                    <a:lstStyle/>
+                    <a:p>
+                      <a:r>
+                        <a:rPr sz="1000" b="0">
+                          <a:solidFill>
+                            <a:srgbClr val="282828"/>
+                          </a:solidFill>
+                          <a:latin typeface="Arial"/>
+                        </a:rPr>
+                        <a:t>pupil image 9.4 mm: a 6.5 µm sCMOS puts 1450 pixels across it, binned 4 to the modeled 385 (5 per actuator)</a:t>
+                      </a:r>
+                    </a:p>
+                  </a:txBody>
+                  <a:tcPr marL="54864" marR="54864" marT="18288" marB="18288">
+                    <a:solidFill>
+                      <a:srgbClr val="FFFFFF"/>
+                    </a:solidFill>
+                  </a:tcPr>
+                </a:tc>
+              </a:tr>
+              <a:tr h="262890">
+                <a:tc>
+                  <a:txBody>
+                    <a:bodyPr wrap="square"/>
+                    <a:lstStyle/>
+                    <a:p>
+                      <a:r>
+                        <a:rPr sz="1000" b="0">
+                          <a:solidFill>
+                            <a:srgbClr val="282828"/>
+                          </a:solidFill>
+                          <a:latin typeface="Arial"/>
+                        </a:rPr>
+                        <a:t>mask seat</a:t>
+                      </a:r>
+                    </a:p>
+                  </a:txBody>
+                  <a:tcPr marL="54864" marR="54864" marT="18288" marB="18288">
+                    <a:solidFill>
+                      <a:srgbClr val="ECF1F6"/>
+                    </a:solidFill>
+                  </a:tcPr>
+                </a:tc>
+                <a:tc>
+                  <a:txBody>
+                    <a:bodyPr wrap="square"/>
+                    <a:lstStyle/>
+                    <a:p>
+                      <a:r>
+                        <a:rPr sz="1000" b="0">
+                          <a:solidFill>
+                            <a:srgbClr val="282828"/>
+                          </a:solidFill>
+                          <a:latin typeface="Arial"/>
+                        </a:rPr>
+                        <a:t>one substrate at the internal focus, translated to select the sensor</a:t>
+                      </a:r>
+                    </a:p>
+                  </a:txBody>
+                  <a:tcPr marL="54864" marR="54864" marT="18288" marB="18288">
+                    <a:solidFill>
+                      <a:srgbClr val="ECF1F6"/>
+                    </a:solidFill>
+                  </a:tcPr>
+                </a:tc>
+              </a:tr>
+            </a:tbl>
+          </a:graphicData>
+        </a:graphic>
+      </p:graphicFrame>
+      <p:sp>
+        <p:nvSpPr>
+          <p:cNvPr id="8" name="TextBox 7"/>
+          <p:cNvSpPr txBox="1"/>
+          <p:nvPr/>
+        </p:nvSpPr>
+        <p:spPr>
+          <a:xfrm>
+            <a:off x="6400800" y="5900166"/>
+            <a:ext cx="5394960" cy="274320"/>
+          </a:xfrm>
+          <a:prstGeom prst="rect">
+            <a:avLst/>
+          </a:prstGeom>
+          <a:noFill/>
+        </p:spPr>
+        <p:txBody>
+          <a:bodyPr wrap="square">
+            <a:spAutoFit/>
+          </a:bodyPr>
+          <a:lstStyle/>
+          <a:p>
+            <a:pPr>
+              <a:spcAft>
+                <a:spcPts val="600"/>
+              </a:spcAft>
+            </a:pPr>
+            <a:r>
+              <a:rPr sz="1050" b="0">
+                <a:solidFill>
+                  <a:srgbClr val="6E6E6E"/>
+                </a:solidFill>
+                <a:latin typeface="Arial"/>
+              </a:rPr>
+              <a:t>The reference arm (a 103 mm flat on a piezo stage, 564 mm leg) is the interferometer's; shuttered, the same bench is every other sensor.  Lenses, not off-axis mirrors: the choice is priced on the lenses-versus-mirrors slide.  The drawings are to scale: the model's parts are the 56 mm rig's scaled up, thinner than 103 mm optics can be built; the next model round gives every part its real thickness.</a:t>
+            </a:r>
+          </a:p>
+        </p:txBody>
+      </p:sp>
+    </p:spTree>
+  </p:cSld>
+  <p:clrMapOvr>
+    <a:masterClrMapping/>
+  </p:clrMapOvr>
+</p:sld>
+</file>
+
+<file path=ppt/slides/slide30.xml><?xml version="1.0" encoding="utf-8"?>
 <p:sld xmlns:a="http://schemas.openxmlformats.org/drawingml/2006/main" xmlns:p="http://schemas.openxmlformats.org/presentationml/2006/main" xmlns:r="http://schemas.openxmlformats.org/officeDocument/2006/relationships">
   <p:cSld>
     <p:spTree>
@@ -15813,7 +17028,7 @@
 </p:sld>
 </file>
 
-<file path=ppt/slides/slide3.xml><?xml version="1.0" encoding="utf-8"?>
+<file path=ppt/slides/slide31.xml><?xml version="1.0" encoding="utf-8"?>
 <p:sld xmlns:a="http://schemas.openxmlformats.org/drawingml/2006/main" xmlns:p="http://schemas.openxmlformats.org/presentationml/2006/main" xmlns:r="http://schemas.openxmlformats.org/officeDocument/2006/relationships">
   <p:cSld>
     <p:spTree>
@@ -15857,7 +17072,7 @@
                 </a:solidFill>
                 <a:latin typeface="Arial"/>
               </a:rPr>
-              <a:t>One bench, four ways of sensing</a:t>
+              <a:t>Backup: the point-diffraction trades</a:t>
             </a:r>
           </a:p>
           <a:p>
@@ -15873,7 +17088,7 @@
                 </a:solidFill>
                 <a:latin typeface="Arial"/>
               </a:rPr>
-              <a:t>Everything shares the front end: a filtered HeNe, a collimator, a plate splitter at 30°, a 700 mm leg to the mirror, a focuser to an internal focus, a field lens to a camera at the pupil image</a:t>
+              <a:t>The pinhole diameter of record is 2.0 λF/D; the P/SRI's traced reference arm moves with the state by 0.05% of the figure and costs twice the light</a:t>
             </a:r>
           </a:p>
         </p:txBody>
@@ -15922,30 +17137,635 @@
           </a:p>
         </p:txBody>
       </p:sp>
-      <p:pic>
-        <p:nvPicPr>
-          <p:cNvPr id="4" name="Picture 3" descr="crop_bench_bs30_train.png"/>
-          <p:cNvPicPr>
-            <a:picLocks noChangeAspect="1"/>
-          </p:cNvPicPr>
+      <p:graphicFrame>
+        <p:nvGraphicFramePr>
+          <p:cNvPr id="4" name="Table 3"/>
+          <p:cNvGraphicFramePr>
+            <a:graphicFrameLocks noGrp="1"/>
+          </p:cNvGraphicFramePr>
           <p:nvPr/>
-        </p:nvPicPr>
-        <p:blipFill>
-          <a:blip r:embed="rId2"/>
-          <a:stretch>
-            <a:fillRect/>
-          </a:stretch>
-        </p:blipFill>
-        <p:spPr>
-          <a:xfrm>
-            <a:off x="4302204" y="1298448"/>
-            <a:ext cx="3587286" cy="2183892"/>
-          </a:xfrm>
-          <a:prstGeom prst="rect">
-            <a:avLst/>
-          </a:prstGeom>
-        </p:spPr>
-      </p:pic>
+        </p:nvGraphicFramePr>
+        <p:xfrm>
+          <a:off x="411480" y="1298448"/>
+          <a:ext cx="5806438" cy="3274695"/>
+        </p:xfrm>
+        <a:graphic>
+          <a:graphicData uri="http://schemas.openxmlformats.org/drawingml/2006/table">
+            <a:tbl>
+              <a:tblPr firstRow="1" bandRow="1">
+                <a:tableStyleId>{5C22544A-7EE6-4342-B048-85BDC9FD1C3A}</a:tableStyleId>
+              </a:tblPr>
+              <a:tblGrid>
+                <a:gridCol w="2152949"/>
+                <a:gridCol w="1043854"/>
+                <a:gridCol w="2609635"/>
+              </a:tblGrid>
+              <a:tr h="468630">
+                <a:tc>
+                  <a:txBody>
+                    <a:bodyPr wrap="square"/>
+                    <a:lstStyle/>
+                    <a:p/>
+                  </a:txBody>
+                  <a:tcPr marL="54864" marR="54864" marT="18288" marB="18288">
+                    <a:solidFill>
+                      <a:srgbClr val="1F4E79"/>
+                    </a:solidFill>
+                  </a:tcPr>
+                </a:tc>
+                <a:tc>
+                  <a:txBody>
+                    <a:bodyPr wrap="square"/>
+                    <a:lstStyle/>
+                    <a:p>
+                      <a:r>
+                        <a:rPr sz="1100" b="1">
+                          <a:solidFill>
+                            <a:srgbClr val="FFFFFF"/>
+                          </a:solidFill>
+                          <a:latin typeface="Arial"/>
+                        </a:rPr>
+                        <a:t>2.0 λF/D pinhole</a:t>
+                      </a:r>
+                    </a:p>
+                  </a:txBody>
+                  <a:tcPr marL="54864" marR="54864" marT="18288" marB="18288">
+                    <a:solidFill>
+                      <a:srgbClr val="1F4E79"/>
+                    </a:solidFill>
+                  </a:tcPr>
+                </a:tc>
+                <a:tc>
+                  <a:txBody>
+                    <a:bodyPr wrap="square"/>
+                    <a:lstStyle/>
+                    <a:p>
+                      <a:r>
+                        <a:rPr sz="1100" b="1">
+                          <a:solidFill>
+                            <a:srgbClr val="FFFFFF"/>
+                          </a:solidFill>
+                          <a:latin typeface="Arial"/>
+                        </a:rPr>
+                        <a:t>1.0 λF/D pinhole</a:t>
+                      </a:r>
+                    </a:p>
+                  </a:txBody>
+                  <a:tcPr marL="54864" marR="54864" marT="18288" marB="18288">
+                    <a:solidFill>
+                      <a:srgbClr val="1F4E79"/>
+                    </a:solidFill>
+                  </a:tcPr>
+                </a:tc>
+              </a:tr>
+              <a:tr h="280035">
+                <a:tc>
+                  <a:txBody>
+                    <a:bodyPr wrap="square"/>
+                    <a:lstStyle/>
+                    <a:p>
+                      <a:r>
+                        <a:rPr sz="1100" b="0">
+                          <a:solidFill>
+                            <a:srgbClr val="282828"/>
+                          </a:solidFill>
+                          <a:latin typeface="Arial"/>
+                        </a:rPr>
+                        <a:t>diameter</a:t>
+                      </a:r>
+                    </a:p>
+                  </a:txBody>
+                  <a:tcPr marL="54864" marR="54864" marT="18288" marB="18288">
+                    <a:solidFill>
+                      <a:srgbClr val="FFFFFF"/>
+                    </a:solidFill>
+                  </a:tcPr>
+                </a:tc>
+                <a:tc>
+                  <a:txBody>
+                    <a:bodyPr wrap="square"/>
+                    <a:lstStyle/>
+                    <a:p>
+                      <a:r>
+                        <a:rPr sz="1100" b="0">
+                          <a:solidFill>
+                            <a:srgbClr val="282828"/>
+                          </a:solidFill>
+                          <a:latin typeface="Arial"/>
+                        </a:rPr>
+                        <a:t>5.27 µm</a:t>
+                      </a:r>
+                    </a:p>
+                  </a:txBody>
+                  <a:tcPr marL="54864" marR="54864" marT="18288" marB="18288">
+                    <a:solidFill>
+                      <a:srgbClr val="FFFFFF"/>
+                    </a:solidFill>
+                  </a:tcPr>
+                </a:tc>
+                <a:tc>
+                  <a:txBody>
+                    <a:bodyPr wrap="square"/>
+                    <a:lstStyle/>
+                    <a:p>
+                      <a:r>
+                        <a:rPr sz="1100" b="0">
+                          <a:solidFill>
+                            <a:srgbClr val="282828"/>
+                          </a:solidFill>
+                          <a:latin typeface="Arial"/>
+                        </a:rPr>
+                        <a:t>2.64 µm</a:t>
+                      </a:r>
+                    </a:p>
+                  </a:txBody>
+                  <a:tcPr marL="54864" marR="54864" marT="18288" marB="18288">
+                    <a:solidFill>
+                      <a:srgbClr val="FFFFFF"/>
+                    </a:solidFill>
+                  </a:tcPr>
+                </a:tc>
+              </a:tr>
+              <a:tr h="468630">
+                <a:tc>
+                  <a:txBody>
+                    <a:bodyPr wrap="square"/>
+                    <a:lstStyle/>
+                    <a:p>
+                      <a:r>
+                        <a:rPr sz="1100" b="0">
+                          <a:solidFill>
+                            <a:srgbClr val="282828"/>
+                          </a:solidFill>
+                          <a:latin typeface="Arial"/>
+                        </a:rPr>
+                        <a:t>surround transmission (amplitude)</a:t>
+                      </a:r>
+                    </a:p>
+                  </a:txBody>
+                  <a:tcPr marL="54864" marR="54864" marT="18288" marB="18288">
+                    <a:solidFill>
+                      <a:srgbClr val="ECF1F6"/>
+                    </a:solidFill>
+                  </a:tcPr>
+                </a:tc>
+                <a:tc>
+                  <a:txBody>
+                    <a:bodyPr wrap="square"/>
+                    <a:lstStyle/>
+                    <a:p>
+                      <a:r>
+                        <a:rPr sz="1100" b="0">
+                          <a:solidFill>
+                            <a:srgbClr val="282828"/>
+                          </a:solidFill>
+                          <a:latin typeface="Arial"/>
+                        </a:rPr>
+                        <a:t>0.72</a:t>
+                      </a:r>
+                    </a:p>
+                  </a:txBody>
+                  <a:tcPr marL="54864" marR="54864" marT="18288" marB="18288">
+                    <a:solidFill>
+                      <a:srgbClr val="ECF1F6"/>
+                    </a:solidFill>
+                  </a:tcPr>
+                </a:tc>
+                <a:tc>
+                  <a:txBody>
+                    <a:bodyPr wrap="square"/>
+                    <a:lstStyle/>
+                    <a:p>
+                      <a:r>
+                        <a:rPr sz="1100" b="0">
+                          <a:solidFill>
+                            <a:srgbClr val="282828"/>
+                          </a:solidFill>
+                          <a:latin typeface="Arial"/>
+                        </a:rPr>
+                        <a:t>0.28</a:t>
+                      </a:r>
+                    </a:p>
+                  </a:txBody>
+                  <a:tcPr marL="54864" marR="54864" marT="18288" marB="18288">
+                    <a:solidFill>
+                      <a:srgbClr val="ECF1F6"/>
+                    </a:solidFill>
+                  </a:tcPr>
+                </a:tc>
+              </a:tr>
+              <a:tr h="280035">
+                <a:tc>
+                  <a:txBody>
+                    <a:bodyPr wrap="square"/>
+                    <a:lstStyle/>
+                    <a:p>
+                      <a:r>
+                        <a:rPr sz="1100" b="0">
+                          <a:solidFill>
+                            <a:srgbClr val="282828"/>
+                          </a:solidFill>
+                          <a:latin typeface="Arial"/>
+                        </a:rPr>
+                        <a:t>throughput</a:t>
+                      </a:r>
+                    </a:p>
+                  </a:txBody>
+                  <a:tcPr marL="54864" marR="54864" marT="18288" marB="18288">
+                    <a:solidFill>
+                      <a:srgbClr val="FFFFFF"/>
+                    </a:solidFill>
+                  </a:tcPr>
+                </a:tc>
+                <a:tc>
+                  <a:txBody>
+                    <a:bodyPr wrap="square"/>
+                    <a:lstStyle/>
+                    <a:p>
+                      <a:r>
+                        <a:rPr sz="1100" b="0">
+                          <a:solidFill>
+                            <a:srgbClr val="282828"/>
+                          </a:solidFill>
+                          <a:latin typeface="Arial"/>
+                        </a:rPr>
+                        <a:t>0.82</a:t>
+                      </a:r>
+                    </a:p>
+                  </a:txBody>
+                  <a:tcPr marL="54864" marR="54864" marT="18288" marB="18288">
+                    <a:solidFill>
+                      <a:srgbClr val="FFFFFF"/>
+                    </a:solidFill>
+                  </a:tcPr>
+                </a:tc>
+                <a:tc>
+                  <a:txBody>
+                    <a:bodyPr wrap="square"/>
+                    <a:lstStyle/>
+                    <a:p>
+                      <a:r>
+                        <a:rPr sz="1100" b="0">
+                          <a:solidFill>
+                            <a:srgbClr val="282828"/>
+                          </a:solidFill>
+                          <a:latin typeface="Arial"/>
+                        </a:rPr>
+                        <a:t>0.29</a:t>
+                      </a:r>
+                    </a:p>
+                  </a:txBody>
+                  <a:tcPr marL="54864" marR="54864" marT="18288" marB="18288">
+                    <a:solidFill>
+                      <a:srgbClr val="FFFFFF"/>
+                    </a:solidFill>
+                  </a:tcPr>
+                </a:tc>
+              </a:tr>
+              <a:tr h="468630">
+                <a:tc>
+                  <a:txBody>
+                    <a:bodyPr wrap="square"/>
+                    <a:lstStyle/>
+                    <a:p>
+                      <a:r>
+                        <a:rPr sz="1100" b="0">
+                          <a:solidFill>
+                            <a:srgbClr val="282828"/>
+                          </a:solidFill>
+                          <a:latin typeface="Arial"/>
+                        </a:rPr>
+                        <a:t>pixels across at the mask</a:t>
+                      </a:r>
+                    </a:p>
+                  </a:txBody>
+                  <a:tcPr marL="54864" marR="54864" marT="18288" marB="18288">
+                    <a:solidFill>
+                      <a:srgbClr val="ECF1F6"/>
+                    </a:solidFill>
+                  </a:tcPr>
+                </a:tc>
+                <a:tc>
+                  <a:txBody>
+                    <a:bodyPr wrap="square"/>
+                    <a:lstStyle/>
+                    <a:p>
+                      <a:r>
+                        <a:rPr sz="1100" b="0">
+                          <a:solidFill>
+                            <a:srgbClr val="282828"/>
+                          </a:solidFill>
+                          <a:latin typeface="Arial"/>
+                        </a:rPr>
+                        <a:t>7.9</a:t>
+                      </a:r>
+                    </a:p>
+                  </a:txBody>
+                  <a:tcPr marL="54864" marR="54864" marT="18288" marB="18288">
+                    <a:solidFill>
+                      <a:srgbClr val="ECF1F6"/>
+                    </a:solidFill>
+                  </a:tcPr>
+                </a:tc>
+                <a:tc>
+                  <a:txBody>
+                    <a:bodyPr wrap="square"/>
+                    <a:lstStyle/>
+                    <a:p>
+                      <a:r>
+                        <a:rPr sz="1100" b="0">
+                          <a:solidFill>
+                            <a:srgbClr val="282828"/>
+                          </a:solidFill>
+                          <a:latin typeface="Arial"/>
+                        </a:rPr>
+                        <a:t>4.0 (below the 6 the sampling rule asks)</a:t>
+                      </a:r>
+                    </a:p>
+                  </a:txBody>
+                  <a:tcPr marL="54864" marR="54864" marT="18288" marB="18288">
+                    <a:solidFill>
+                      <a:srgbClr val="ECF1F6"/>
+                    </a:solidFill>
+                  </a:tcPr>
+                </a:tc>
+              </a:tr>
+              <a:tr h="280035">
+                <a:tc>
+                  <a:txBody>
+                    <a:bodyPr wrap="square"/>
+                    <a:lstStyle/>
+                    <a:p>
+                      <a:r>
+                        <a:rPr sz="1100" b="0">
+                          <a:solidFill>
+                            <a:srgbClr val="282828"/>
+                          </a:solidFill>
+                          <a:latin typeface="Arial"/>
+                        </a:rPr>
+                        <a:t>10 nm on one actuator</a:t>
+                      </a:r>
+                    </a:p>
+                  </a:txBody>
+                  <a:tcPr marL="54864" marR="54864" marT="18288" marB="18288">
+                    <a:solidFill>
+                      <a:srgbClr val="FFFFFF"/>
+                    </a:solidFill>
+                  </a:tcPr>
+                </a:tc>
+                <a:tc>
+                  <a:txBody>
+                    <a:bodyPr wrap="square"/>
+                    <a:lstStyle/>
+                    <a:p>
+                      <a:r>
+                        <a:rPr sz="1100" b="0">
+                          <a:solidFill>
+                            <a:srgbClr val="282828"/>
+                          </a:solidFill>
+                          <a:latin typeface="Arial"/>
+                        </a:rPr>
+                        <a:t>0.9935 / 4 pm</a:t>
+                      </a:r>
+                    </a:p>
+                  </a:txBody>
+                  <a:tcPr marL="54864" marR="54864" marT="18288" marB="18288">
+                    <a:solidFill>
+                      <a:srgbClr val="FFFFFF"/>
+                    </a:solidFill>
+                  </a:tcPr>
+                </a:tc>
+                <a:tc>
+                  <a:txBody>
+                    <a:bodyPr wrap="square"/>
+                    <a:lstStyle/>
+                    <a:p>
+                      <a:r>
+                        <a:rPr sz="1100" b="0">
+                          <a:solidFill>
+                            <a:srgbClr val="282828"/>
+                          </a:solidFill>
+                          <a:latin typeface="Arial"/>
+                        </a:rPr>
+                        <a:t>0.9937 / 4 pm</a:t>
+                      </a:r>
+                    </a:p>
+                  </a:txBody>
+                  <a:tcPr marL="54864" marR="54864" marT="18288" marB="18288">
+                    <a:solidFill>
+                      <a:srgbClr val="FFFFFF"/>
+                    </a:solidFill>
+                  </a:tcPr>
+                </a:tc>
+              </a:tr>
+              <a:tr h="280035">
+                <a:tc>
+                  <a:txBody>
+                    <a:bodyPr wrap="square"/>
+                    <a:lstStyle/>
+                    <a:p>
+                      <a:r>
+                        <a:rPr sz="1100" b="0">
+                          <a:solidFill>
+                            <a:srgbClr val="282828"/>
+                          </a:solidFill>
+                          <a:latin typeface="Arial"/>
+                        </a:rPr>
+                        <a:t>capture range, no shutter</a:t>
+                      </a:r>
+                    </a:p>
+                  </a:txBody>
+                  <a:tcPr marL="54864" marR="54864" marT="18288" marB="18288">
+                    <a:solidFill>
+                      <a:srgbClr val="ECF1F6"/>
+                    </a:solidFill>
+                  </a:tcPr>
+                </a:tc>
+                <a:tc>
+                  <a:txBody>
+                    <a:bodyPr wrap="square"/>
+                    <a:lstStyle/>
+                    <a:p>
+                      <a:r>
+                        <a:rPr sz="1100" b="0">
+                          <a:solidFill>
+                            <a:srgbClr val="282828"/>
+                          </a:solidFill>
+                          <a:latin typeface="Arial"/>
+                        </a:rPr>
+                        <a:t>62 nm</a:t>
+                      </a:r>
+                    </a:p>
+                  </a:txBody>
+                  <a:tcPr marL="54864" marR="54864" marT="18288" marB="18288">
+                    <a:solidFill>
+                      <a:srgbClr val="ECF1F6"/>
+                    </a:solidFill>
+                  </a:tcPr>
+                </a:tc>
+                <a:tc>
+                  <a:txBody>
+                    <a:bodyPr wrap="square"/>
+                    <a:lstStyle/>
+                    <a:p>
+                      <a:r>
+                        <a:rPr sz="1100" b="0">
+                          <a:solidFill>
+                            <a:srgbClr val="282828"/>
+                          </a:solidFill>
+                          <a:latin typeface="Arial"/>
+                        </a:rPr>
+                        <a:t>120 nm and beyond</a:t>
+                      </a:r>
+                    </a:p>
+                  </a:txBody>
+                  <a:tcPr marL="54864" marR="54864" marT="18288" marB="18288">
+                    <a:solidFill>
+                      <a:srgbClr val="ECF1F6"/>
+                    </a:solidFill>
+                  </a:tcPr>
+                </a:tc>
+              </a:tr>
+              <a:tr h="468630">
+                <a:tc>
+                  <a:txBody>
+                    <a:bodyPr wrap="square"/>
+                    <a:lstStyle/>
+                    <a:p>
+                      <a:r>
+                        <a:rPr sz="1100" b="0">
+                          <a:solidFill>
+                            <a:srgbClr val="282828"/>
+                          </a:solidFill>
+                          <a:latin typeface="Arial"/>
+                        </a:rPr>
+                        <a:t>photons for 1 pm on the surface</a:t>
+                      </a:r>
+                    </a:p>
+                  </a:txBody>
+                  <a:tcPr marL="54864" marR="54864" marT="18288" marB="18288">
+                    <a:solidFill>
+                      <a:srgbClr val="FFFFFF"/>
+                    </a:solidFill>
+                  </a:tcPr>
+                </a:tc>
+                <a:tc>
+                  <a:txBody>
+                    <a:bodyPr wrap="square"/>
+                    <a:lstStyle/>
+                    <a:p>
+                      <a:r>
+                        <a:rPr sz="1100" b="0">
+                          <a:solidFill>
+                            <a:srgbClr val="282828"/>
+                          </a:solidFill>
+                          <a:latin typeface="Arial"/>
+                        </a:rPr>
+                        <a:t>9.8e13</a:t>
+                      </a:r>
+                    </a:p>
+                  </a:txBody>
+                  <a:tcPr marL="54864" marR="54864" marT="18288" marB="18288">
+                    <a:solidFill>
+                      <a:srgbClr val="FFFFFF"/>
+                    </a:solidFill>
+                  </a:tcPr>
+                </a:tc>
+                <a:tc>
+                  <a:txBody>
+                    <a:bodyPr wrap="square"/>
+                    <a:lstStyle/>
+                    <a:p>
+                      <a:r>
+                        <a:rPr sz="1100" b="0">
+                          <a:solidFill>
+                            <a:srgbClr val="282828"/>
+                          </a:solidFill>
+                          <a:latin typeface="Arial"/>
+                        </a:rPr>
+                        <a:t>2.1e14</a:t>
+                      </a:r>
+                    </a:p>
+                  </a:txBody>
+                  <a:tcPr marL="54864" marR="54864" marT="18288" marB="18288">
+                    <a:solidFill>
+                      <a:srgbClr val="FFFFFF"/>
+                    </a:solidFill>
+                  </a:tcPr>
+                </a:tc>
+              </a:tr>
+              <a:tr h="280035">
+                <a:tc>
+                  <a:txBody>
+                    <a:bodyPr wrap="square"/>
+                    <a:lstStyle/>
+                    <a:p>
+                      <a:r>
+                        <a:rPr sz="1100" b="0">
+                          <a:solidFill>
+                            <a:srgbClr val="282828"/>
+                          </a:solidFill>
+                          <a:latin typeface="Arial"/>
+                        </a:rPr>
+                        <a:t>3 pm under the walk</a:t>
+                      </a:r>
+                    </a:p>
+                  </a:txBody>
+                  <a:tcPr marL="54864" marR="54864" marT="18288" marB="18288">
+                    <a:solidFill>
+                      <a:srgbClr val="ECF1F6"/>
+                    </a:solidFill>
+                  </a:tcPr>
+                </a:tc>
+                <a:tc>
+                  <a:txBody>
+                    <a:bodyPr wrap="square"/>
+                    <a:lstStyle/>
+                    <a:p>
+                      <a:r>
+                        <a:rPr sz="1100" b="0">
+                          <a:solidFill>
+                            <a:srgbClr val="282828"/>
+                          </a:solidFill>
+                          <a:latin typeface="Arial"/>
+                        </a:rPr>
+                        <a:t>below 1e13</a:t>
+                      </a:r>
+                    </a:p>
+                  </a:txBody>
+                  <a:tcPr marL="54864" marR="54864" marT="18288" marB="18288">
+                    <a:solidFill>
+                      <a:srgbClr val="ECF1F6"/>
+                    </a:solidFill>
+                  </a:tcPr>
+                </a:tc>
+                <a:tc>
+                  <a:txBody>
+                    <a:bodyPr wrap="square"/>
+                    <a:lstStyle/>
+                    <a:p>
+                      <a:r>
+                        <a:rPr sz="1100" b="0">
+                          <a:solidFill>
+                            <a:srgbClr val="282828"/>
+                          </a:solidFill>
+                          <a:latin typeface="Arial"/>
+                        </a:rPr>
+                        <a:t>3.6e13</a:t>
+                      </a:r>
+                    </a:p>
+                  </a:txBody>
+                  <a:tcPr marL="54864" marR="54864" marT="18288" marB="18288">
+                    <a:solidFill>
+                      <a:srgbClr val="ECF1F6"/>
+                    </a:solidFill>
+                  </a:tcPr>
+                </a:tc>
+              </a:tr>
+            </a:tbl>
+          </a:graphicData>
+        </a:graphic>
+      </p:graphicFrame>
       <p:sp>
         <p:nvSpPr>
           <p:cNvPr id="5" name="TextBox 4"/>
@@ -15954,558 +17774,7 @@
         </p:nvSpPr>
         <p:spPr>
           <a:xfrm>
-            <a:off x="411480" y="3500628"/>
-            <a:ext cx="11368735" cy="559307"/>
-          </a:xfrm>
-          <a:prstGeom prst="rect">
-            <a:avLst/>
-          </a:prstGeom>
-          <a:noFill/>
-        </p:spPr>
-        <p:txBody>
-          <a:bodyPr wrap="square">
-            <a:spAutoFit/>
-          </a:bodyPr>
-          <a:lstStyle/>
-          <a:p>
-            <a:pPr algn="ctr">
-              <a:spcAft>
-                <a:spcPts val="0"/>
-              </a:spcAft>
-            </a:pPr>
-            <a:r>
-              <a:rPr sz="1000" b="0">
-                <a:solidFill>
-                  <a:srgbClr val="6E6E6E"/>
-                </a:solidFill>
-                <a:latin typeface="Arial"/>
-              </a:rPr>
-              <a:t>The shared front end as traced by the engine, seen from above, at the proposed 30° splitter: source at left, collimator L1, the splitter, the 96 mm mirror on its 700 mm leg (blue), the reference arm and its flat (orange, the interferometer only), the focuser L2 toward the internal focus.  The mask seat at that focus is where the four sensing methods differ.</a:t>
-            </a:r>
-          </a:p>
-        </p:txBody>
-      </p:sp>
-      <p:graphicFrame>
-        <p:nvGraphicFramePr>
-          <p:cNvPr id="6" name="Table 5"/>
-          <p:cNvGraphicFramePr>
-            <a:graphicFrameLocks noGrp="1"/>
-          </p:cNvGraphicFramePr>
-          <p:nvPr/>
-        </p:nvGraphicFramePr>
-        <p:xfrm>
-          <a:off x="411480" y="4096512"/>
-          <a:ext cx="5806439" cy="1965960"/>
-        </p:xfrm>
-        <a:graphic>
-          <a:graphicData uri="http://schemas.openxmlformats.org/drawingml/2006/table">
-            <a:tbl>
-              <a:tblPr firstRow="1" bandRow="1">
-                <a:tableStyleId>{5C22544A-7EE6-4342-B048-85BDC9FD1C3A}</a:tableStyleId>
-              </a:tblPr>
-              <a:tblGrid>
-                <a:gridCol w="796044"/>
-                <a:gridCol w="5010395"/>
-              </a:tblGrid>
-              <a:tr h="280035">
-                <a:tc>
-                  <a:txBody>
-                    <a:bodyPr wrap="square"/>
-                    <a:lstStyle/>
-                    <a:p>
-                      <a:r>
-                        <a:rPr sz="1100" b="1">
-                          <a:solidFill>
-                            <a:srgbClr val="FFFFFF"/>
-                          </a:solidFill>
-                          <a:latin typeface="Arial"/>
-                        </a:rPr>
-                        <a:t>part</a:t>
-                      </a:r>
-                    </a:p>
-                  </a:txBody>
-                  <a:tcPr marL="54864" marR="54864" marT="18288" marB="18288">
-                    <a:solidFill>
-                      <a:srgbClr val="1F4E79"/>
-                    </a:solidFill>
-                  </a:tcPr>
-                </a:tc>
-                <a:tc>
-                  <a:txBody>
-                    <a:bodyPr wrap="square"/>
-                    <a:lstStyle/>
-                    <a:p>
-                      <a:r>
-                        <a:rPr sz="1100" b="1">
-                          <a:solidFill>
-                            <a:srgbClr val="FFFFFF"/>
-                          </a:solidFill>
-                          <a:latin typeface="Arial"/>
-                        </a:rPr>
-                        <a:t>value</a:t>
-                      </a:r>
-                    </a:p>
-                  </a:txBody>
-                  <a:tcPr marL="54864" marR="54864" marT="18288" marB="18288">
-                    <a:solidFill>
-                      <a:srgbClr val="1F4E79"/>
-                    </a:solidFill>
-                  </a:tcPr>
-                </a:tc>
-              </a:tr>
-              <a:tr h="280035">
-                <a:tc>
-                  <a:txBody>
-                    <a:bodyPr wrap="square"/>
-                    <a:lstStyle/>
-                    <a:p>
-                      <a:r>
-                        <a:rPr sz="1100" b="0">
-                          <a:solidFill>
-                            <a:srgbClr val="282828"/>
-                          </a:solidFill>
-                          <a:latin typeface="Arial"/>
-                        </a:rPr>
-                        <a:t>source</a:t>
-                      </a:r>
-                    </a:p>
-                  </a:txBody>
-                  <a:tcPr marL="54864" marR="54864" marT="18288" marB="18288">
-                    <a:solidFill>
-                      <a:srgbClr val="FFFFFF"/>
-                    </a:solidFill>
-                  </a:tcPr>
-                </a:tc>
-                <a:tc>
-                  <a:txBody>
-                    <a:bodyPr wrap="square"/>
-                    <a:lstStyle/>
-                    <a:p>
-                      <a:r>
-                        <a:rPr sz="1100" b="0">
-                          <a:solidFill>
-                            <a:srgbClr val="282828"/>
-                          </a:solidFill>
-                          <a:latin typeface="Arial"/>
-                        </a:rPr>
-                        <a:t>HeNe 632.8 nm, filtered, 51 mm beam radius</a:t>
-                      </a:r>
-                    </a:p>
-                  </a:txBody>
-                  <a:tcPr marL="54864" marR="54864" marT="18288" marB="18288">
-                    <a:solidFill>
-                      <a:srgbClr val="FFFFFF"/>
-                    </a:solidFill>
-                  </a:tcPr>
-                </a:tc>
-              </a:tr>
-              <a:tr h="468630">
-                <a:tc>
-                  <a:txBody>
-                    <a:bodyPr wrap="square"/>
-                    <a:lstStyle/>
-                    <a:p>
-                      <a:r>
-                        <a:rPr sz="1100" b="0">
-                          <a:solidFill>
-                            <a:srgbClr val="282828"/>
-                          </a:solidFill>
-                          <a:latin typeface="Arial"/>
-                        </a:rPr>
-                        <a:t>collimator L1</a:t>
-                      </a:r>
-                    </a:p>
-                  </a:txBody>
-                  <a:tcPr marL="54864" marR="54864" marT="18288" marB="18288">
-                    <a:solidFill>
-                      <a:srgbClr val="ECF1F6"/>
-                    </a:solidFill>
-                  </a:tcPr>
-                </a:tc>
-                <a:tc>
-                  <a:txBody>
-                    <a:bodyPr wrap="square"/>
-                    <a:lstStyle/>
-                    <a:p>
-                      <a:r>
-                        <a:rPr sz="1100" b="0">
-                          <a:solidFill>
-                            <a:srgbClr val="282828"/>
-                          </a:solidFill>
-                          <a:latin typeface="Arial"/>
-                        </a:rPr>
-                        <a:t>f 857 mm, 103 mm, coated</a:t>
-                      </a:r>
-                    </a:p>
-                  </a:txBody>
-                  <a:tcPr marL="54864" marR="54864" marT="18288" marB="18288">
-                    <a:solidFill>
-                      <a:srgbClr val="ECF1F6"/>
-                    </a:solidFill>
-                  </a:tcPr>
-                </a:tc>
-              </a:tr>
-              <a:tr h="468630">
-                <a:tc>
-                  <a:txBody>
-                    <a:bodyPr wrap="square"/>
-                    <a:lstStyle/>
-                    <a:p>
-                      <a:r>
-                        <a:rPr sz="1100" b="0">
-                          <a:solidFill>
-                            <a:srgbClr val="282828"/>
-                          </a:solidFill>
-                          <a:latin typeface="Arial"/>
-                        </a:rPr>
-                        <a:t>plate splitter</a:t>
-                      </a:r>
-                    </a:p>
-                  </a:txBody>
-                  <a:tcPr marL="54864" marR="54864" marT="18288" marB="18288">
-                    <a:solidFill>
-                      <a:srgbClr val="FFFFFF"/>
-                    </a:solidFill>
-                  </a:tcPr>
-                </a:tc>
-                <a:tc>
-                  <a:txBody>
-                    <a:bodyPr wrap="square"/>
-                    <a:lstStyle/>
-                    <a:p>
-                      <a:r>
-                        <a:rPr sz="1100" b="0">
-                          <a:solidFill>
-                            <a:srgbClr val="282828"/>
-                          </a:solidFill>
-                          <a:latin typeface="Arial"/>
-                        </a:rPr>
-                        <a:t>30° incidence (proposed; the record's 7° does not clear the node), 2.6 mm thick, 50/50; compensator matched</a:t>
-                      </a:r>
-                    </a:p>
-                  </a:txBody>
-                  <a:tcPr marL="54864" marR="54864" marT="18288" marB="18288">
-                    <a:solidFill>
-                      <a:srgbClr val="FFFFFF"/>
-                    </a:solidFill>
-                  </a:tcPr>
-                </a:tc>
-              </a:tr>
-              <a:tr h="468630">
-                <a:tc>
-                  <a:txBody>
-                    <a:bodyPr wrap="square"/>
-                    <a:lstStyle/>
-                    <a:p>
-                      <a:r>
-                        <a:rPr sz="1100" b="0">
-                          <a:solidFill>
-                            <a:srgbClr val="282828"/>
-                          </a:solidFill>
-                          <a:latin typeface="Arial"/>
-                        </a:rPr>
-                        <a:t>deformable mirror</a:t>
-                      </a:r>
-                    </a:p>
-                  </a:txBody>
-                  <a:tcPr marL="54864" marR="54864" marT="18288" marB="18288">
-                    <a:solidFill>
-                      <a:srgbClr val="ECF1F6"/>
-                    </a:solidFill>
-                  </a:tcPr>
-                </a:tc>
-                <a:tc>
-                  <a:txBody>
-                    <a:bodyPr wrap="square"/>
-                    <a:lstStyle/>
-                    <a:p>
-                      <a:r>
-                        <a:rPr sz="1100" b="0">
-                          <a:solidFill>
-                            <a:srgbClr val="282828"/>
-                          </a:solidFill>
-                          <a:latin typeface="Arial"/>
-                        </a:rPr>
-                        <a:t>96×96, 1 mm pitch, 96 mm, 700 mm leg</a:t>
-                      </a:r>
-                    </a:p>
-                  </a:txBody>
-                  <a:tcPr marL="54864" marR="54864" marT="18288" marB="18288">
-                    <a:solidFill>
-                      <a:srgbClr val="ECF1F6"/>
-                    </a:solidFill>
-                  </a:tcPr>
-                </a:tc>
-              </a:tr>
-            </a:tbl>
-          </a:graphicData>
-        </a:graphic>
-      </p:graphicFrame>
-      <p:graphicFrame>
-        <p:nvGraphicFramePr>
-          <p:cNvPr id="7" name="Table 6"/>
-          <p:cNvGraphicFramePr>
-            <a:graphicFrameLocks noGrp="1"/>
-          </p:cNvGraphicFramePr>
-          <p:nvPr/>
-        </p:nvGraphicFramePr>
-        <p:xfrm>
-          <a:off x="6400800" y="4096512"/>
-          <a:ext cx="5394960" cy="1485900"/>
-        </p:xfrm>
-        <a:graphic>
-          <a:graphicData uri="http://schemas.openxmlformats.org/drawingml/2006/table">
-            <a:tbl>
-              <a:tblPr firstRow="1" bandRow="1">
-                <a:tableStyleId>{5C22544A-7EE6-4342-B048-85BDC9FD1C3A}</a:tableStyleId>
-              </a:tblPr>
-              <a:tblGrid>
-                <a:gridCol w="806704"/>
-                <a:gridCol w="4588256"/>
-              </a:tblGrid>
-              <a:tr h="262890">
-                <a:tc>
-                  <a:txBody>
-                    <a:bodyPr wrap="square"/>
-                    <a:lstStyle/>
-                    <a:p>
-                      <a:r>
-                        <a:rPr sz="1000" b="1">
-                          <a:solidFill>
-                            <a:srgbClr val="FFFFFF"/>
-                          </a:solidFill>
-                          <a:latin typeface="Arial"/>
-                        </a:rPr>
-                        <a:t>part</a:t>
-                      </a:r>
-                    </a:p>
-                  </a:txBody>
-                  <a:tcPr marL="54864" marR="54864" marT="18288" marB="18288">
-                    <a:solidFill>
-                      <a:srgbClr val="1F4E79"/>
-                    </a:solidFill>
-                  </a:tcPr>
-                </a:tc>
-                <a:tc>
-                  <a:txBody>
-                    <a:bodyPr wrap="square"/>
-                    <a:lstStyle/>
-                    <a:p>
-                      <a:r>
-                        <a:rPr sz="1000" b="1">
-                          <a:solidFill>
-                            <a:srgbClr val="FFFFFF"/>
-                          </a:solidFill>
-                          <a:latin typeface="Arial"/>
-                        </a:rPr>
-                        <a:t>value</a:t>
-                      </a:r>
-                    </a:p>
-                  </a:txBody>
-                  <a:tcPr marL="54864" marR="54864" marT="18288" marB="18288">
-                    <a:solidFill>
-                      <a:srgbClr val="1F4E79"/>
-                    </a:solidFill>
-                  </a:tcPr>
-                </a:tc>
-              </a:tr>
-              <a:tr h="262890">
-                <a:tc>
-                  <a:txBody>
-                    <a:bodyPr wrap="square"/>
-                    <a:lstStyle/>
-                    <a:p>
-                      <a:r>
-                        <a:rPr sz="1000" b="0">
-                          <a:solidFill>
-                            <a:srgbClr val="282828"/>
-                          </a:solidFill>
-                          <a:latin typeface="Arial"/>
-                        </a:rPr>
-                        <a:t>focuser L2</a:t>
-                      </a:r>
-                    </a:p>
-                  </a:txBody>
-                  <a:tcPr marL="54864" marR="54864" marT="18288" marB="18288">
-                    <a:solidFill>
-                      <a:srgbClr val="FFFFFF"/>
-                    </a:solidFill>
-                  </a:tcPr>
-                </a:tc>
-                <a:tc>
-                  <a:txBody>
-                    <a:bodyPr wrap="square"/>
-                    <a:lstStyle/>
-                    <a:p>
-                      <a:r>
-                        <a:rPr sz="1000" b="0">
-                          <a:solidFill>
-                            <a:srgbClr val="282828"/>
-                          </a:solidFill>
-                          <a:latin typeface="Arial"/>
-                        </a:rPr>
-                        <a:t>f 429 mm, 103 mm; internal focus at F/4.2</a:t>
-                      </a:r>
-                    </a:p>
-                  </a:txBody>
-                  <a:tcPr marL="54864" marR="54864" marT="18288" marB="18288">
-                    <a:solidFill>
-                      <a:srgbClr val="FFFFFF"/>
-                    </a:solidFill>
-                  </a:tcPr>
-                </a:tc>
-              </a:tr>
-              <a:tr h="262890">
-                <a:tc>
-                  <a:txBody>
-                    <a:bodyPr wrap="square"/>
-                    <a:lstStyle/>
-                    <a:p>
-                      <a:r>
-                        <a:rPr sz="1000" b="0">
-                          <a:solidFill>
-                            <a:srgbClr val="282828"/>
-                          </a:solidFill>
-                          <a:latin typeface="Arial"/>
-                        </a:rPr>
-                        <a:t>field lens</a:t>
-                      </a:r>
-                    </a:p>
-                  </a:txBody>
-                  <a:tcPr marL="54864" marR="54864" marT="18288" marB="18288">
-                    <a:solidFill>
-                      <a:srgbClr val="ECF1F6"/>
-                    </a:solidFill>
-                  </a:tcPr>
-                </a:tc>
-                <a:tc>
-                  <a:txBody>
-                    <a:bodyPr wrap="square"/>
-                    <a:lstStyle/>
-                    <a:p>
-                      <a:r>
-                        <a:rPr sz="1000" b="0">
-                          <a:solidFill>
-                            <a:srgbClr val="282828"/>
-                          </a:solidFill>
-                          <a:latin typeface="Arial"/>
-                        </a:rPr>
-                        <a:t>f 43 mm, 21 mm; pupil image 9.4 mm, 32 mm behind it</a:t>
-                      </a:r>
-                    </a:p>
-                  </a:txBody>
-                  <a:tcPr marL="54864" marR="54864" marT="18288" marB="18288">
-                    <a:solidFill>
-                      <a:srgbClr val="ECF1F6"/>
-                    </a:solidFill>
-                  </a:tcPr>
-                </a:tc>
-              </a:tr>
-              <a:tr h="434340">
-                <a:tc>
-                  <a:txBody>
-                    <a:bodyPr wrap="square"/>
-                    <a:lstStyle/>
-                    <a:p>
-                      <a:r>
-                        <a:rPr sz="1000" b="0">
-                          <a:solidFill>
-                            <a:srgbClr val="282828"/>
-                          </a:solidFill>
-                          <a:latin typeface="Arial"/>
-                        </a:rPr>
-                        <a:t>camera</a:t>
-                      </a:r>
-                    </a:p>
-                  </a:txBody>
-                  <a:tcPr marL="54864" marR="54864" marT="18288" marB="18288">
-                    <a:solidFill>
-                      <a:srgbClr val="FFFFFF"/>
-                    </a:solidFill>
-                  </a:tcPr>
-                </a:tc>
-                <a:tc>
-                  <a:txBody>
-                    <a:bodyPr wrap="square"/>
-                    <a:lstStyle/>
-                    <a:p>
-                      <a:r>
-                        <a:rPr sz="1000" b="0">
-                          <a:solidFill>
-                            <a:srgbClr val="282828"/>
-                          </a:solidFill>
-                          <a:latin typeface="Arial"/>
-                        </a:rPr>
-                        <a:t>pupil image 9.4 mm: a 6.5 µm sCMOS puts 1450 pixels across it, binned 4 to the modeled 385 (5 per actuator)</a:t>
-                      </a:r>
-                    </a:p>
-                  </a:txBody>
-                  <a:tcPr marL="54864" marR="54864" marT="18288" marB="18288">
-                    <a:solidFill>
-                      <a:srgbClr val="FFFFFF"/>
-                    </a:solidFill>
-                  </a:tcPr>
-                </a:tc>
-              </a:tr>
-              <a:tr h="262890">
-                <a:tc>
-                  <a:txBody>
-                    <a:bodyPr wrap="square"/>
-                    <a:lstStyle/>
-                    <a:p>
-                      <a:r>
-                        <a:rPr sz="1000" b="0">
-                          <a:solidFill>
-                            <a:srgbClr val="282828"/>
-                          </a:solidFill>
-                          <a:latin typeface="Arial"/>
-                        </a:rPr>
-                        <a:t>mask seat</a:t>
-                      </a:r>
-                    </a:p>
-                  </a:txBody>
-                  <a:tcPr marL="54864" marR="54864" marT="18288" marB="18288">
-                    <a:solidFill>
-                      <a:srgbClr val="ECF1F6"/>
-                    </a:solidFill>
-                  </a:tcPr>
-                </a:tc>
-                <a:tc>
-                  <a:txBody>
-                    <a:bodyPr wrap="square"/>
-                    <a:lstStyle/>
-                    <a:p>
-                      <a:r>
-                        <a:rPr sz="1000" b="0">
-                          <a:solidFill>
-                            <a:srgbClr val="282828"/>
-                          </a:solidFill>
-                          <a:latin typeface="Arial"/>
-                        </a:rPr>
-                        <a:t>one substrate at the internal focus, translated to select the sensor</a:t>
-                      </a:r>
-                    </a:p>
-                  </a:txBody>
-                  <a:tcPr marL="54864" marR="54864" marT="18288" marB="18288">
-                    <a:solidFill>
-                      <a:srgbClr val="ECF1F6"/>
-                    </a:solidFill>
-                  </a:tcPr>
-                </a:tc>
-              </a:tr>
-            </a:tbl>
-          </a:graphicData>
-        </a:graphic>
-      </p:graphicFrame>
-      <p:sp>
-        <p:nvSpPr>
-          <p:cNvPr id="8" name="TextBox 7"/>
-          <p:cNvSpPr txBox="1"/>
-          <p:nvPr/>
-        </p:nvSpPr>
-        <p:spPr>
-          <a:xfrm>
-            <a:off x="6400800" y="5728716"/>
+            <a:off x="6400800" y="1298448"/>
             <a:ext cx="5394960" cy="274320"/>
           </a:xfrm>
           <a:prstGeom prst="rect">
@@ -16525,13 +17794,84 @@
               </a:spcAft>
             </a:pPr>
             <a:r>
+              <a:rPr sz="1200" b="0">
+                <a:solidFill>
+                  <a:srgbClr val="282828"/>
+                </a:solidFill>
+                <a:latin typeface="Arial"/>
+              </a:rPr>
+              <a:t>•  The range the small pinhole buys, the shutter frame gives free at the large one's throughput: 1.02 / 1.06 / 1.13 at 120 / 240 / 480 nm.</a:t>
+            </a:r>
+          </a:p>
+          <a:p>
+            <a:pPr>
+              <a:spcAft>
+                <a:spcPts val="600"/>
+              </a:spcAft>
+            </a:pPr>
+            <a:r>
+              <a:rPr sz="1200" b="0">
+                <a:solidFill>
+                  <a:srgbClr val="282828"/>
+                </a:solidFill>
+                <a:latin typeface="Arial"/>
+              </a:rPr>
+              <a:t>•  The P/SRI (pickoff plate 60/40, a 300 mm F/2.9 reference lens, a 3.7 µm pinhole feeding a single-mode waveguide with a thermo-optic phase shifter, a mirrored second lens, folds, a 21.9 mm compensator, a 50/50 recombiner): balanced to zero path difference in the trace.  Its reference moving with the state costs 5.9 pm absolute on a 13 nm figure and 12% on the dense floor; frozen, 0.000.</a:t>
+            </a:r>
+          </a:p>
+          <a:p>
+            <a:pPr>
+              <a:spcAft>
+                <a:spcPts val="600"/>
+              </a:spcAft>
+            </a:pPr>
+            <a:r>
+              <a:rPr sz="1200" b="0">
+                <a:solidFill>
+                  <a:srgbClr val="282828"/>
+                </a:solidFill>
+                <a:latin typeface="Arial"/>
+              </a:rPr>
+              <a:t>•  Five frames beat four: a 2% step error reads 4.9 pm (pinhole) and 2.2 pm (P/SRI) with the Schwider-Hariharan scan against 421 and 251 pm with four-step least squares.</a:t>
+            </a:r>
+          </a:p>
+        </p:txBody>
+      </p:sp>
+      <p:sp>
+        <p:nvSpPr>
+          <p:cNvPr id="6" name="TextBox 5"/>
+          <p:cNvSpPr txBox="1"/>
+          <p:nvPr/>
+        </p:nvSpPr>
+        <p:spPr>
+          <a:xfrm>
+            <a:off x="6400800" y="3934968"/>
+            <a:ext cx="5394960" cy="274320"/>
+          </a:xfrm>
+          <a:prstGeom prst="rect">
+            <a:avLst/>
+          </a:prstGeom>
+          <a:noFill/>
+        </p:spPr>
+        <p:txBody>
+          <a:bodyPr wrap="square">
+            <a:spAutoFit/>
+          </a:bodyPr>
+          <a:lstStyle/>
+          <a:p>
+            <a:pPr>
+              <a:spcAft>
+                <a:spcPts val="600"/>
+              </a:spcAft>
+            </a:pPr>
+            <a:r>
               <a:rPr sz="1050" b="0">
                 <a:solidFill>
                   <a:srgbClr val="6E6E6E"/>
                 </a:solidFill>
                 <a:latin typeface="Arial"/>
               </a:rPr>
-              <a:t>The reference arm (a 103 mm flat on a piezo stage, 564 mm leg) is the interferometer's; shuttered, the same bench is every other sensor.  Lenses, not off-axis mirrors: the choice is priced on the lenses-versus-mirrors slide.  Why 30°: the backup slide on clearance.</a:t>
+              <a:t>Run tags pin20_1024, pin10_2048, pin20_loop, pin10_loop, pfdeck, pfdeck_frz, pdi193se_sh5, pdi193se_ls; layouts psri_layout.png and psri_render.png in pdi_dm96.</a:t>
             </a:r>
           </a:p>
         </p:txBody>
@@ -16544,7 +17884,7 @@
 </p:sld>
 </file>
 
-<file path=ppt/slides/slide30.xml><?xml version="1.0" encoding="utf-8"?>
+<file path=ppt/slides/slide32.xml><?xml version="1.0" encoding="utf-8"?>
 <p:sld xmlns:a="http://schemas.openxmlformats.org/drawingml/2006/main" xmlns:p="http://schemas.openxmlformats.org/presentationml/2006/main" xmlns:r="http://schemas.openxmlformats.org/officeDocument/2006/relationships">
   <p:cSld>
     <p:spTree>
@@ -16588,7 +17928,7 @@
                 </a:solidFill>
                 <a:latin typeface="Arial"/>
               </a:rPr>
-              <a:t>Backup: the point-diffraction trades</a:t>
+              <a:t>Backup: drift within a measurement</a:t>
             </a:r>
           </a:p>
           <a:p>
@@ -16604,7 +17944,7 @@
                 </a:solidFill>
                 <a:latin typeface="Arial"/>
               </a:rPr>
-              <a:t>The pinhole diameter of record is 2.0 λF/D; the P/SRI's traced reference arm moves with the state by 0.05% of the figure and costs twice the light</a:t>
+              <a:t>A mirror that drifts during a stepped scan helps the stepped readings; a camera that drifts during the scan hurts them; the simultaneous readings see neither</a:t>
             </a:r>
           </a:p>
         </p:txBody>
@@ -16663,7 +18003,7 @@
         </p:nvGraphicFramePr>
         <p:xfrm>
           <a:off x="411480" y="1298448"/>
-          <a:ext cx="5806438" cy="3274695"/>
+          <a:ext cx="5806437" cy="1680210"/>
         </p:xfrm>
         <a:graphic>
           <a:graphicData uri="http://schemas.openxmlformats.org/drawingml/2006/table">
@@ -16672,16 +18012,29 @@
                 <a:tableStyleId>{5C22544A-7EE6-4342-B048-85BDC9FD1C3A}</a:tableStyleId>
               </a:tblPr>
               <a:tblGrid>
-                <a:gridCol w="2152949"/>
-                <a:gridCol w="1043854"/>
-                <a:gridCol w="2609635"/>
+                <a:gridCol w="3208822"/>
+                <a:gridCol w="534803"/>
+                <a:gridCol w="534803"/>
+                <a:gridCol w="458403"/>
+                <a:gridCol w="534803"/>
+                <a:gridCol w="534803"/>
               </a:tblGrid>
-              <a:tr h="468630">
-                <a:tc>
-                  <a:txBody>
-                    <a:bodyPr wrap="square"/>
-                    <a:lstStyle/>
-                    <a:p/>
+              <a:tr h="280035">
+                <a:tc>
+                  <a:txBody>
+                    <a:bodyPr wrap="square"/>
+                    <a:lstStyle/>
+                    <a:p>
+                      <a:r>
+                        <a:rPr sz="1100" b="1">
+                          <a:solidFill>
+                            <a:srgbClr val="FFFFFF"/>
+                          </a:solidFill>
+                          <a:latin typeface="Arial"/>
+                        </a:rPr>
+                        <a:t>hold error at 1e15 photons per cycle</a:t>
+                      </a:r>
+                    </a:p>
                   </a:txBody>
                   <a:tcPr marL="54864" marR="54864" marT="18288" marB="18288">
                     <a:solidFill>
@@ -16701,7 +18054,7 @@
                           </a:solidFill>
                           <a:latin typeface="Arial"/>
                         </a:rPr>
-                        <a:t>2.0 λF/D pinhole</a:t>
+                        <a:t>linear</a:t>
                       </a:r>
                     </a:p>
                   </a:txBody>
@@ -16723,7 +18076,73 @@
                           </a:solidFill>
                           <a:latin typeface="Arial"/>
                         </a:rPr>
-                        <a:t>1.0 λF/D pinhole</a:t>
+                        <a:t>stepped</a:t>
+                      </a:r>
+                    </a:p>
+                  </a:txBody>
+                  <a:tcPr marL="54864" marR="54864" marT="18288" marB="18288">
+                    <a:solidFill>
+                      <a:srgbClr val="1F4E79"/>
+                    </a:solidFill>
+                  </a:tcPr>
+                </a:tc>
+                <a:tc>
+                  <a:txBody>
+                    <a:bodyPr wrap="square"/>
+                    <a:lstStyle/>
+                    <a:p>
+                      <a:r>
+                        <a:rPr sz="1100" b="1">
+                          <a:solidFill>
+                            <a:srgbClr val="FFFFFF"/>
+                          </a:solidFill>
+                          <a:latin typeface="Arial"/>
+                        </a:rPr>
+                        <a:t>vector</a:t>
+                      </a:r>
+                    </a:p>
+                  </a:txBody>
+                  <a:tcPr marL="54864" marR="54864" marT="18288" marB="18288">
+                    <a:solidFill>
+                      <a:srgbClr val="1F4E79"/>
+                    </a:solidFill>
+                  </a:tcPr>
+                </a:tc>
+                <a:tc>
+                  <a:txBody>
+                    <a:bodyPr wrap="square"/>
+                    <a:lstStyle/>
+                    <a:p>
+                      <a:r>
+                        <a:rPr sz="1100" b="1">
+                          <a:solidFill>
+                            <a:srgbClr val="FFFFFF"/>
+                          </a:solidFill>
+                          <a:latin typeface="Arial"/>
+                        </a:rPr>
+                        <a:t>pinhole</a:t>
+                      </a:r>
+                    </a:p>
+                  </a:txBody>
+                  <a:tcPr marL="54864" marR="54864" marT="18288" marB="18288">
+                    <a:solidFill>
+                      <a:srgbClr val="1F4E79"/>
+                    </a:solidFill>
+                  </a:tcPr>
+                </a:tc>
+                <a:tc>
+                  <a:txBody>
+                    <a:bodyPr wrap="square"/>
+                    <a:lstStyle/>
+                    <a:p>
+                      <a:r>
+                        <a:rPr sz="1100" b="1">
+                          <a:solidFill>
+                            <a:srgbClr val="FFFFFF"/>
+                          </a:solidFill>
+                          <a:latin typeface="Arial"/>
+                        </a:rPr>
+                        <a:t>P/SRI</a:t>
                       </a:r>
                     </a:p>
                   </a:txBody>
@@ -16747,7 +18166,7 @@
                           </a:solidFill>
                           <a:latin typeface="Arial"/>
                         </a:rPr>
-                        <a:t>diameter</a:t>
+                        <a:t>2 pm walk, mirror still during a scan</a:t>
                       </a:r>
                     </a:p>
                   </a:txBody>
@@ -16769,7 +18188,7 @@
                           </a:solidFill>
                           <a:latin typeface="Arial"/>
                         </a:rPr>
-                        <a:t>5.27 µm</a:t>
+                        <a:t>2.38</a:t>
                       </a:r>
                     </a:p>
                   </a:txBody>
@@ -16791,7 +18210,7 @@
                           </a:solidFill>
                           <a:latin typeface="Arial"/>
                         </a:rPr>
-                        <a:t>2.64 µm</a:t>
+                        <a:t>2.32</a:t>
                       </a:r>
                     </a:p>
                   </a:txBody>
@@ -16801,71 +18220,69 @@
                     </a:solidFill>
                   </a:tcPr>
                 </a:tc>
-              </a:tr>
-              <a:tr h="468630">
-                <a:tc>
-                  <a:txBody>
-                    <a:bodyPr wrap="square"/>
-                    <a:lstStyle/>
-                    <a:p>
-                      <a:r>
-                        <a:rPr sz="1100" b="0">
-                          <a:solidFill>
-                            <a:srgbClr val="282828"/>
-                          </a:solidFill>
-                          <a:latin typeface="Arial"/>
-                        </a:rPr>
-                        <a:t>surround transmission (amplitude)</a:t>
-                      </a:r>
-                    </a:p>
-                  </a:txBody>
-                  <a:tcPr marL="54864" marR="54864" marT="18288" marB="18288">
-                    <a:solidFill>
-                      <a:srgbClr val="ECF1F6"/>
-                    </a:solidFill>
-                  </a:tcPr>
-                </a:tc>
-                <a:tc>
-                  <a:txBody>
-                    <a:bodyPr wrap="square"/>
-                    <a:lstStyle/>
-                    <a:p>
-                      <a:r>
-                        <a:rPr sz="1100" b="0">
-                          <a:solidFill>
-                            <a:srgbClr val="282828"/>
-                          </a:solidFill>
-                          <a:latin typeface="Arial"/>
-                        </a:rPr>
-                        <a:t>0.72</a:t>
-                      </a:r>
-                    </a:p>
-                  </a:txBody>
-                  <a:tcPr marL="54864" marR="54864" marT="18288" marB="18288">
-                    <a:solidFill>
-                      <a:srgbClr val="ECF1F6"/>
-                    </a:solidFill>
-                  </a:tcPr>
-                </a:tc>
-                <a:tc>
-                  <a:txBody>
-                    <a:bodyPr wrap="square"/>
-                    <a:lstStyle/>
-                    <a:p>
-                      <a:r>
-                        <a:rPr sz="1100" b="0">
-                          <a:solidFill>
-                            <a:srgbClr val="282828"/>
-                          </a:solidFill>
-                          <a:latin typeface="Arial"/>
-                        </a:rPr>
-                        <a:t>0.28</a:t>
-                      </a:r>
-                    </a:p>
-                  </a:txBody>
-                  <a:tcPr marL="54864" marR="54864" marT="18288" marB="18288">
-                    <a:solidFill>
-                      <a:srgbClr val="ECF1F6"/>
+                <a:tc>
+                  <a:txBody>
+                    <a:bodyPr wrap="square"/>
+                    <a:lstStyle/>
+                    <a:p>
+                      <a:r>
+                        <a:rPr sz="1100" b="0">
+                          <a:solidFill>
+                            <a:srgbClr val="282828"/>
+                          </a:solidFill>
+                          <a:latin typeface="Arial"/>
+                        </a:rPr>
+                        <a:t>2.32</a:t>
+                      </a:r>
+                    </a:p>
+                  </a:txBody>
+                  <a:tcPr marL="54864" marR="54864" marT="18288" marB="18288">
+                    <a:solidFill>
+                      <a:srgbClr val="FFFFFF"/>
+                    </a:solidFill>
+                  </a:tcPr>
+                </a:tc>
+                <a:tc>
+                  <a:txBody>
+                    <a:bodyPr wrap="square"/>
+                    <a:lstStyle/>
+                    <a:p>
+                      <a:r>
+                        <a:rPr sz="1100" b="0">
+                          <a:solidFill>
+                            <a:srgbClr val="282828"/>
+                          </a:solidFill>
+                          <a:latin typeface="Arial"/>
+                        </a:rPr>
+                        <a:t>2.32</a:t>
+                      </a:r>
+                    </a:p>
+                  </a:txBody>
+                  <a:tcPr marL="54864" marR="54864" marT="18288" marB="18288">
+                    <a:solidFill>
+                      <a:srgbClr val="FFFFFF"/>
+                    </a:solidFill>
+                  </a:tcPr>
+                </a:tc>
+                <a:tc>
+                  <a:txBody>
+                    <a:bodyPr wrap="square"/>
+                    <a:lstStyle/>
+                    <a:p>
+                      <a:r>
+                        <a:rPr sz="1100" b="0">
+                          <a:solidFill>
+                            <a:srgbClr val="282828"/>
+                          </a:solidFill>
+                          <a:latin typeface="Arial"/>
+                        </a:rPr>
+                        <a:t>2.33 pm</a:t>
+                      </a:r>
+                    </a:p>
+                  </a:txBody>
+                  <a:tcPr marL="54864" marR="54864" marT="18288" marB="18288">
+                    <a:solidFill>
+                      <a:srgbClr val="FFFFFF"/>
                     </a:solidFill>
                   </a:tcPr>
                 </a:tc>
@@ -16883,75 +18300,7 @@
                           </a:solidFill>
                           <a:latin typeface="Arial"/>
                         </a:rPr>
-                        <a:t>throughput</a:t>
-                      </a:r>
-                    </a:p>
-                  </a:txBody>
-                  <a:tcPr marL="54864" marR="54864" marT="18288" marB="18288">
-                    <a:solidFill>
-                      <a:srgbClr val="FFFFFF"/>
-                    </a:solidFill>
-                  </a:tcPr>
-                </a:tc>
-                <a:tc>
-                  <a:txBody>
-                    <a:bodyPr wrap="square"/>
-                    <a:lstStyle/>
-                    <a:p>
-                      <a:r>
-                        <a:rPr sz="1100" b="0">
-                          <a:solidFill>
-                            <a:srgbClr val="282828"/>
-                          </a:solidFill>
-                          <a:latin typeface="Arial"/>
-                        </a:rPr>
-                        <a:t>0.82</a:t>
-                      </a:r>
-                    </a:p>
-                  </a:txBody>
-                  <a:tcPr marL="54864" marR="54864" marT="18288" marB="18288">
-                    <a:solidFill>
-                      <a:srgbClr val="FFFFFF"/>
-                    </a:solidFill>
-                  </a:tcPr>
-                </a:tc>
-                <a:tc>
-                  <a:txBody>
-                    <a:bodyPr wrap="square"/>
-                    <a:lstStyle/>
-                    <a:p>
-                      <a:r>
-                        <a:rPr sz="1100" b="0">
-                          <a:solidFill>
-                            <a:srgbClr val="282828"/>
-                          </a:solidFill>
-                          <a:latin typeface="Arial"/>
-                        </a:rPr>
-                        <a:t>0.29</a:t>
-                      </a:r>
-                    </a:p>
-                  </a:txBody>
-                  <a:tcPr marL="54864" marR="54864" marT="18288" marB="18288">
-                    <a:solidFill>
-                      <a:srgbClr val="FFFFFF"/>
-                    </a:solidFill>
-                  </a:tcPr>
-                </a:tc>
-              </a:tr>
-              <a:tr h="468630">
-                <a:tc>
-                  <a:txBody>
-                    <a:bodyPr wrap="square"/>
-                    <a:lstStyle/>
-                    <a:p>
-                      <a:r>
-                        <a:rPr sz="1100" b="0">
-                          <a:solidFill>
-                            <a:srgbClr val="282828"/>
-                          </a:solidFill>
-                          <a:latin typeface="Arial"/>
-                        </a:rPr>
-                        <a:t>pixels across at the mask</a:t>
+                        <a:t>2 pm walk, mirror drifting across the scan</a:t>
                       </a:r>
                     </a:p>
                   </a:txBody>
@@ -16973,7 +18322,7 @@
                           </a:solidFill>
                           <a:latin typeface="Arial"/>
                         </a:rPr>
-                        <a:t>7.9</a:t>
+                        <a:t>2.38</a:t>
                       </a:r>
                     </a:p>
                   </a:txBody>
@@ -16995,7 +18344,73 @@
                           </a:solidFill>
                           <a:latin typeface="Arial"/>
                         </a:rPr>
-                        <a:t>4.0 (below the 6 the sampling rule asks)</a:t>
+                        <a:t>1.57</a:t>
+                      </a:r>
+                    </a:p>
+                  </a:txBody>
+                  <a:tcPr marL="54864" marR="54864" marT="18288" marB="18288">
+                    <a:solidFill>
+                      <a:srgbClr val="ECF1F6"/>
+                    </a:solidFill>
+                  </a:tcPr>
+                </a:tc>
+                <a:tc>
+                  <a:txBody>
+                    <a:bodyPr wrap="square"/>
+                    <a:lstStyle/>
+                    <a:p>
+                      <a:r>
+                        <a:rPr sz="1100" b="0">
+                          <a:solidFill>
+                            <a:srgbClr val="282828"/>
+                          </a:solidFill>
+                          <a:latin typeface="Arial"/>
+                        </a:rPr>
+                        <a:t>2.32</a:t>
+                      </a:r>
+                    </a:p>
+                  </a:txBody>
+                  <a:tcPr marL="54864" marR="54864" marT="18288" marB="18288">
+                    <a:solidFill>
+                      <a:srgbClr val="ECF1F6"/>
+                    </a:solidFill>
+                  </a:tcPr>
+                </a:tc>
+                <a:tc>
+                  <a:txBody>
+                    <a:bodyPr wrap="square"/>
+                    <a:lstStyle/>
+                    <a:p>
+                      <a:r>
+                        <a:rPr sz="1100" b="0">
+                          <a:solidFill>
+                            <a:srgbClr val="282828"/>
+                          </a:solidFill>
+                          <a:latin typeface="Arial"/>
+                        </a:rPr>
+                        <a:t>1.58</a:t>
+                      </a:r>
+                    </a:p>
+                  </a:txBody>
+                  <a:tcPr marL="54864" marR="54864" marT="18288" marB="18288">
+                    <a:solidFill>
+                      <a:srgbClr val="ECF1F6"/>
+                    </a:solidFill>
+                  </a:tcPr>
+                </a:tc>
+                <a:tc>
+                  <a:txBody>
+                    <a:bodyPr wrap="square"/>
+                    <a:lstStyle/>
+                    <a:p>
+                      <a:r>
+                        <a:rPr sz="1100" b="0">
+                          <a:solidFill>
+                            <a:srgbClr val="282828"/>
+                          </a:solidFill>
+                          <a:latin typeface="Arial"/>
+                        </a:rPr>
+                        <a:t>1.71 pm</a:t>
                       </a:r>
                     </a:p>
                   </a:txBody>
@@ -17019,7 +18434,7 @@
                           </a:solidFill>
                           <a:latin typeface="Arial"/>
                         </a:rPr>
-                        <a:t>10 nm on one actuator</a:t>
+                        <a:t>5 pm ramp, mirror still</a:t>
                       </a:r>
                     </a:p>
                   </a:txBody>
@@ -17041,7 +18456,7 @@
                           </a:solidFill>
                           <a:latin typeface="Arial"/>
                         </a:rPr>
-                        <a:t>0.9935 / 4 pm</a:t>
+                        <a:t>27.6</a:t>
                       </a:r>
                     </a:p>
                   </a:txBody>
@@ -17063,7 +18478,73 @@
                           </a:solidFill>
                           <a:latin typeface="Arial"/>
                         </a:rPr>
-                        <a:t>0.9937 / 4 pm</a:t>
+                        <a:t>10.05</a:t>
+                      </a:r>
+                    </a:p>
+                  </a:txBody>
+                  <a:tcPr marL="54864" marR="54864" marT="18288" marB="18288">
+                    <a:solidFill>
+                      <a:srgbClr val="FFFFFF"/>
+                    </a:solidFill>
+                  </a:tcPr>
+                </a:tc>
+                <a:tc>
+                  <a:txBody>
+                    <a:bodyPr wrap="square"/>
+                    <a:lstStyle/>
+                    <a:p>
+                      <a:r>
+                        <a:rPr sz="1100" b="0">
+                          <a:solidFill>
+                            <a:srgbClr val="282828"/>
+                          </a:solidFill>
+                          <a:latin typeface="Arial"/>
+                        </a:rPr>
+                        <a:t>9.87</a:t>
+                      </a:r>
+                    </a:p>
+                  </a:txBody>
+                  <a:tcPr marL="54864" marR="54864" marT="18288" marB="18288">
+                    <a:solidFill>
+                      <a:srgbClr val="FFFFFF"/>
+                    </a:solidFill>
+                  </a:tcPr>
+                </a:tc>
+                <a:tc>
+                  <a:txBody>
+                    <a:bodyPr wrap="square"/>
+                    <a:lstStyle/>
+                    <a:p>
+                      <a:r>
+                        <a:rPr sz="1100" b="0">
+                          <a:solidFill>
+                            <a:srgbClr val="282828"/>
+                          </a:solidFill>
+                          <a:latin typeface="Arial"/>
+                        </a:rPr>
+                        <a:t>9.86</a:t>
+                      </a:r>
+                    </a:p>
+                  </a:txBody>
+                  <a:tcPr marL="54864" marR="54864" marT="18288" marB="18288">
+                    <a:solidFill>
+                      <a:srgbClr val="FFFFFF"/>
+                    </a:solidFill>
+                  </a:tcPr>
+                </a:tc>
+                <a:tc>
+                  <a:txBody>
+                    <a:bodyPr wrap="square"/>
+                    <a:lstStyle/>
+                    <a:p>
+                      <a:r>
+                        <a:rPr sz="1100" b="0">
+                          <a:solidFill>
+                            <a:srgbClr val="282828"/>
+                          </a:solidFill>
+                          <a:latin typeface="Arial"/>
+                        </a:rPr>
+                        <a:t>9.88 pm</a:t>
                       </a:r>
                     </a:p>
                   </a:txBody>
@@ -17087,7 +18568,7 @@
                           </a:solidFill>
                           <a:latin typeface="Arial"/>
                         </a:rPr>
-                        <a:t>capture range, no shutter</a:t>
+                        <a:t>5 pm ramp, drifting across the scan</a:t>
                       </a:r>
                     </a:p>
                   </a:txBody>
@@ -17109,7 +18590,7 @@
                           </a:solidFill>
                           <a:latin typeface="Arial"/>
                         </a:rPr>
-                        <a:t>62 nm</a:t>
+                        <a:t>27.6</a:t>
                       </a:r>
                     </a:p>
                   </a:txBody>
@@ -17131,7 +18612,7 @@
                           </a:solidFill>
                           <a:latin typeface="Arial"/>
                         </a:rPr>
-                        <a:t>120 nm and beyond</a:t>
+                        <a:t>7.16</a:t>
                       </a:r>
                     </a:p>
                   </a:txBody>
@@ -17141,71 +18622,69 @@
                     </a:solidFill>
                   </a:tcPr>
                 </a:tc>
-              </a:tr>
-              <a:tr h="468630">
-                <a:tc>
-                  <a:txBody>
-                    <a:bodyPr wrap="square"/>
-                    <a:lstStyle/>
-                    <a:p>
-                      <a:r>
-                        <a:rPr sz="1100" b="0">
-                          <a:solidFill>
-                            <a:srgbClr val="282828"/>
-                          </a:solidFill>
-                          <a:latin typeface="Arial"/>
-                        </a:rPr>
-                        <a:t>photons for 1 pm on the surface</a:t>
-                      </a:r>
-                    </a:p>
-                  </a:txBody>
-                  <a:tcPr marL="54864" marR="54864" marT="18288" marB="18288">
-                    <a:solidFill>
-                      <a:srgbClr val="FFFFFF"/>
-                    </a:solidFill>
-                  </a:tcPr>
-                </a:tc>
-                <a:tc>
-                  <a:txBody>
-                    <a:bodyPr wrap="square"/>
-                    <a:lstStyle/>
-                    <a:p>
-                      <a:r>
-                        <a:rPr sz="1100" b="0">
-                          <a:solidFill>
-                            <a:srgbClr val="282828"/>
-                          </a:solidFill>
-                          <a:latin typeface="Arial"/>
-                        </a:rPr>
-                        <a:t>9.8e13</a:t>
-                      </a:r>
-                    </a:p>
-                  </a:txBody>
-                  <a:tcPr marL="54864" marR="54864" marT="18288" marB="18288">
-                    <a:solidFill>
-                      <a:srgbClr val="FFFFFF"/>
-                    </a:solidFill>
-                  </a:tcPr>
-                </a:tc>
-                <a:tc>
-                  <a:txBody>
-                    <a:bodyPr wrap="square"/>
-                    <a:lstStyle/>
-                    <a:p>
-                      <a:r>
-                        <a:rPr sz="1100" b="0">
-                          <a:solidFill>
-                            <a:srgbClr val="282828"/>
-                          </a:solidFill>
-                          <a:latin typeface="Arial"/>
-                        </a:rPr>
-                        <a:t>2.1e14</a:t>
-                      </a:r>
-                    </a:p>
-                  </a:txBody>
-                  <a:tcPr marL="54864" marR="54864" marT="18288" marB="18288">
-                    <a:solidFill>
-                      <a:srgbClr val="FFFFFF"/>
+                <a:tc>
+                  <a:txBody>
+                    <a:bodyPr wrap="square"/>
+                    <a:lstStyle/>
+                    <a:p>
+                      <a:r>
+                        <a:rPr sz="1100" b="0">
+                          <a:solidFill>
+                            <a:srgbClr val="282828"/>
+                          </a:solidFill>
+                          <a:latin typeface="Arial"/>
+                        </a:rPr>
+                        <a:t>9.87</a:t>
+                      </a:r>
+                    </a:p>
+                  </a:txBody>
+                  <a:tcPr marL="54864" marR="54864" marT="18288" marB="18288">
+                    <a:solidFill>
+                      <a:srgbClr val="ECF1F6"/>
+                    </a:solidFill>
+                  </a:tcPr>
+                </a:tc>
+                <a:tc>
+                  <a:txBody>
+                    <a:bodyPr wrap="square"/>
+                    <a:lstStyle/>
+                    <a:p>
+                      <a:r>
+                        <a:rPr sz="1100" b="0">
+                          <a:solidFill>
+                            <a:srgbClr val="282828"/>
+                          </a:solidFill>
+                          <a:latin typeface="Arial"/>
+                        </a:rPr>
+                        <a:t>6.70</a:t>
+                      </a:r>
+                    </a:p>
+                  </a:txBody>
+                  <a:tcPr marL="54864" marR="54864" marT="18288" marB="18288">
+                    <a:solidFill>
+                      <a:srgbClr val="ECF1F6"/>
+                    </a:solidFill>
+                  </a:tcPr>
+                </a:tc>
+                <a:tc>
+                  <a:txBody>
+                    <a:bodyPr wrap="square"/>
+                    <a:lstStyle/>
+                    <a:p>
+                      <a:r>
+                        <a:rPr sz="1100" b="0">
+                          <a:solidFill>
+                            <a:srgbClr val="282828"/>
+                          </a:solidFill>
+                          <a:latin typeface="Arial"/>
+                        </a:rPr>
+                        <a:t>7.30 pm</a:t>
+                      </a:r>
+                    </a:p>
+                  </a:txBody>
+                  <a:tcPr marL="54864" marR="54864" marT="18288" marB="18288">
+                    <a:solidFill>
+                      <a:srgbClr val="ECF1F6"/>
                     </a:solidFill>
                   </a:tcPr>
                 </a:tc>
@@ -17223,57 +18702,123 @@
                           </a:solidFill>
                           <a:latin typeface="Arial"/>
                         </a:rPr>
-                        <a:t>3 pm under the walk</a:t>
-                      </a:r>
-                    </a:p>
-                  </a:txBody>
-                  <a:tcPr marL="54864" marR="54864" marT="18288" marB="18288">
-                    <a:solidFill>
-                      <a:srgbClr val="ECF1F6"/>
-                    </a:solidFill>
-                  </a:tcPr>
-                </a:tc>
-                <a:tc>
-                  <a:txBody>
-                    <a:bodyPr wrap="square"/>
-                    <a:lstStyle/>
-                    <a:p>
-                      <a:r>
-                        <a:rPr sz="1100" b="0">
-                          <a:solidFill>
-                            <a:srgbClr val="282828"/>
-                          </a:solidFill>
-                          <a:latin typeface="Arial"/>
-                        </a:rPr>
-                        <a:t>below 1e13</a:t>
-                      </a:r>
-                    </a:p>
-                  </a:txBody>
-                  <a:tcPr marL="54864" marR="54864" marT="18288" marB="18288">
-                    <a:solidFill>
-                      <a:srgbClr val="ECF1F6"/>
-                    </a:solidFill>
-                  </a:tcPr>
-                </a:tc>
-                <a:tc>
-                  <a:txBody>
-                    <a:bodyPr wrap="square"/>
-                    <a:lstStyle/>
-                    <a:p>
-                      <a:r>
-                        <a:rPr sz="1100" b="0">
-                          <a:solidFill>
-                            <a:srgbClr val="282828"/>
-                          </a:solidFill>
-                          <a:latin typeface="Arial"/>
-                        </a:rPr>
-                        <a:t>3.6e13</a:t>
-                      </a:r>
-                    </a:p>
-                  </a:txBody>
-                  <a:tcPr marL="54864" marR="54864" marT="18288" marB="18288">
-                    <a:solidFill>
-                      <a:srgbClr val="ECF1F6"/>
+                        <a:t>camera scale drifting 1e-3 across the scan</a:t>
+                      </a:r>
+                    </a:p>
+                  </a:txBody>
+                  <a:tcPr marL="54864" marR="54864" marT="18288" marB="18288">
+                    <a:solidFill>
+                      <a:srgbClr val="FFFFFF"/>
+                    </a:solidFill>
+                  </a:tcPr>
+                </a:tc>
+                <a:tc>
+                  <a:txBody>
+                    <a:bodyPr wrap="square"/>
+                    <a:lstStyle/>
+                    <a:p>
+                      <a:r>
+                        <a:rPr sz="1100" b="0">
+                          <a:solidFill>
+                            <a:srgbClr val="282828"/>
+                          </a:solidFill>
+                          <a:latin typeface="Arial"/>
+                        </a:rPr>
+                        <a:t>10.8 nm</a:t>
+                      </a:r>
+                    </a:p>
+                  </a:txBody>
+                  <a:tcPr marL="54864" marR="54864" marT="18288" marB="18288">
+                    <a:solidFill>
+                      <a:srgbClr val="FFFFFF"/>
+                    </a:solidFill>
+                  </a:tcPr>
+                </a:tc>
+                <a:tc>
+                  <a:txBody>
+                    <a:bodyPr wrap="square"/>
+                    <a:lstStyle/>
+                    <a:p>
+                      <a:r>
+                        <a:rPr sz="1100" b="0">
+                          <a:solidFill>
+                            <a:srgbClr val="282828"/>
+                          </a:solidFill>
+                          <a:latin typeface="Arial"/>
+                        </a:rPr>
+                        <a:t>5.4</a:t>
+                      </a:r>
+                    </a:p>
+                  </a:txBody>
+                  <a:tcPr marL="54864" marR="54864" marT="18288" marB="18288">
+                    <a:solidFill>
+                      <a:srgbClr val="FFFFFF"/>
+                    </a:solidFill>
+                  </a:tcPr>
+                </a:tc>
+                <a:tc>
+                  <a:txBody>
+                    <a:bodyPr wrap="square"/>
+                    <a:lstStyle/>
+                    <a:p>
+                      <a:r>
+                        <a:rPr sz="1100" b="0">
+                          <a:solidFill>
+                            <a:srgbClr val="282828"/>
+                          </a:solidFill>
+                          <a:latin typeface="Arial"/>
+                        </a:rPr>
+                        <a:t>89 pm</a:t>
+                      </a:r>
+                    </a:p>
+                  </a:txBody>
+                  <a:tcPr marL="54864" marR="54864" marT="18288" marB="18288">
+                    <a:solidFill>
+                      <a:srgbClr val="FFFFFF"/>
+                    </a:solidFill>
+                  </a:tcPr>
+                </a:tc>
+                <a:tc>
+                  <a:txBody>
+                    <a:bodyPr wrap="square"/>
+                    <a:lstStyle/>
+                    <a:p>
+                      <a:r>
+                        <a:rPr sz="1100" b="0">
+                          <a:solidFill>
+                            <a:srgbClr val="282828"/>
+                          </a:solidFill>
+                          <a:latin typeface="Arial"/>
+                        </a:rPr>
+                        <a:t>5.3</a:t>
+                      </a:r>
+                    </a:p>
+                  </a:txBody>
+                  <a:tcPr marL="54864" marR="54864" marT="18288" marB="18288">
+                    <a:solidFill>
+                      <a:srgbClr val="FFFFFF"/>
+                    </a:solidFill>
+                  </a:tcPr>
+                </a:tc>
+                <a:tc>
+                  <a:txBody>
+                    <a:bodyPr wrap="square"/>
+                    <a:lstStyle/>
+                    <a:p>
+                      <a:r>
+                        <a:rPr sz="1100" b="0">
+                          <a:solidFill>
+                            <a:srgbClr val="282828"/>
+                          </a:solidFill>
+                          <a:latin typeface="Arial"/>
+                        </a:rPr>
+                        <a:t>10.7 pm</a:t>
+                      </a:r>
+                    </a:p>
+                  </a:txBody>
+                  <a:tcPr marL="54864" marR="54864" marT="18288" marB="18288">
+                    <a:solidFill>
+                      <a:srgbClr val="FFFFFF"/>
                     </a:solidFill>
                   </a:tcPr>
                 </a:tc>
@@ -17316,7 +18861,7 @@
                 </a:solidFill>
                 <a:latin typeface="Arial"/>
               </a:rPr>
-              <a:t>•  The range the small pinhole buys, the shutter frame gives free at the large one's throughput: 1.02 / 1.06 / 1.13 at 120 / 240 / 480 nm.</a:t>
+              <a:t>•  Why the mirror's drift helps: a scan reads the surface at its midpoint, a free half-step of prediction; 26-32% less hold error for the stepped readings.  The camera's drift is an additive bias, the opposite sign.</a:t>
             </a:r>
           </a:p>
           <a:p>
@@ -17332,7 +18877,7 @@
                 </a:solidFill>
                 <a:latin typeface="Arial"/>
               </a:rPr>
-              <a:t>•  The P/SRI (pickoff plate 60/40, a 300 mm F/2.9 reference lens, a 3.7 µm pinhole feeding a single-mode waveguide with a thermo-optic phase shifter, a mirrored second lens, folds, a 21.9 mm compensator, a 50/50 recombiner): balanced to zero path difference in the trace.  Its reference moving with the state costs 5.9 pm absolute on a 13 nm figure and 12% on the dense floor; frozen, 0.000.</a:t>
+              <a:t>•  The P/SRI's reference arm walking (a random path walk of 1e-3 to 1e-1 rad per cycle) costs 4% in light over that hundredfold range: a path change is piston, the one mode the actuator estimator nulls.  Not benign for absolute field work; a tilting reference is outside the model.</a:t>
             </a:r>
           </a:p>
           <a:p>
@@ -17348,7 +18893,7 @@
                 </a:solidFill>
                 <a:latin typeface="Arial"/>
               </a:rPr>
-              <a:t>•  Five frames beat four: a 2% step error reads 4.9 pm (pinhole) and 2.2 pm (P/SRI) with the Schwider-Hariharan scan against 421 and 251 pm with four-step least squares.</a:t>
+              <a:t>•  The paper's camera number (0.13 electrons per pixel per cycle) is invisible to every reading: an electron is 1e-4 of a lit pixel's shot noise at 1e13 photons.</a:t>
             </a:r>
           </a:p>
         </p:txBody>
@@ -17387,7 +18932,7 @@
                 </a:solidFill>
                 <a:latin typeface="Arial"/>
               </a:rPr>
-              <a:t>Run tags pin20_1024, pin10_2048, pin20_loop, pin10_loop, pfdeck, pfdeck_frz, pdi193se_sh5, pdi193se_ls; layouts psri_layout.png and psri_render.png in pdi_dm96.</a:t>
+              <a:t>Run tags intra193_0, intra193, pcam193, pcam193r, pcam193ri, rw193_1e3/1e2/1e1, loop_lens_intra, loop_lens_cam.</a:t>
             </a:r>
           </a:p>
         </p:txBody>
@@ -17400,7 +18945,7 @@
 </p:sld>
 </file>
 
-<file path=ppt/slides/slide31.xml><?xml version="1.0" encoding="utf-8"?>
+<file path=ppt/slides/slide33.xml><?xml version="1.0" encoding="utf-8"?>
 <p:sld xmlns:a="http://schemas.openxmlformats.org/drawingml/2006/main" xmlns:p="http://schemas.openxmlformats.org/presentationml/2006/main" xmlns:r="http://schemas.openxmlformats.org/officeDocument/2006/relationships">
   <p:cSld>
     <p:spTree>
@@ -17444,7 +18989,7 @@
                 </a:solidFill>
                 <a:latin typeface="Arial"/>
               </a:rPr>
-              <a:t>Backup: drift within a measurement</a:t>
+              <a:t>Backup: the vector sensor's polarization terms</a:t>
             </a:r>
           </a:p>
           <a:p>
@@ -17460,7 +19005,7 @@
                 </a:solidFill>
                 <a:latin typeface="Arial"/>
               </a:rPr>
-              <a:t>A mirror that drifts during a stepped scan helps the stepped readings; a camera that drifts during the scan hurts them; the simultaneous readings see neither</a:t>
+              <a:t>The metasurface's retardance error, the arm's polarization aberration, and the analyzer, each from the engine's polarized traces of this bench</a:t>
             </a:r>
           </a:p>
         </p:txBody>
@@ -17519,7 +19064,7 @@
         </p:nvGraphicFramePr>
         <p:xfrm>
           <a:off x="411480" y="1298448"/>
-          <a:ext cx="5806437" cy="1680210"/>
+          <a:ext cx="5806439" cy="3377565"/>
         </p:xfrm>
         <a:graphic>
           <a:graphicData uri="http://schemas.openxmlformats.org/drawingml/2006/table">
@@ -17528,14 +19073,11 @@
                 <a:tableStyleId>{5C22544A-7EE6-4342-B048-85BDC9FD1C3A}</a:tableStyleId>
               </a:tblPr>
               <a:tblGrid>
-                <a:gridCol w="3208822"/>
-                <a:gridCol w="534803"/>
-                <a:gridCol w="534803"/>
-                <a:gridCol w="458403"/>
-                <a:gridCol w="534803"/>
-                <a:gridCol w="534803"/>
+                <a:gridCol w="1924420"/>
+                <a:gridCol w="1824881"/>
+                <a:gridCol w="2057138"/>
               </a:tblGrid>
-              <a:tr h="280035">
+              <a:tr h="468630">
                 <a:tc>
                   <a:txBody>
                     <a:bodyPr wrap="square"/>
@@ -17548,7 +19090,7 @@
                           </a:solidFill>
                           <a:latin typeface="Arial"/>
                         </a:rPr>
-                        <a:t>hold error at 1e15 photons per cycle</a:t>
+                        <a:t>term</a:t>
                       </a:r>
                     </a:p>
                   </a:txBody>
@@ -17570,7 +19112,7 @@
                           </a:solidFill>
                           <a:latin typeface="Arial"/>
                         </a:rPr>
-                        <a:t>linear</a:t>
+                        <a:t>uncalibrated, on 100 nm pokes (12 nm rms)</a:t>
                       </a:r>
                     </a:p>
                   </a:txBody>
@@ -17592,7 +19134,7 @@
                           </a:solidFill>
                           <a:latin typeface="Arial"/>
                         </a:rPr>
-                        <a:t>stepped</a:t>
+                        <a:t>through the matrix measured on the surface</a:t>
                       </a:r>
                     </a:p>
                   </a:txBody>
@@ -17602,87 +19144,21 @@
                     </a:solidFill>
                   </a:tcPr>
                 </a:tc>
-                <a:tc>
-                  <a:txBody>
-                    <a:bodyPr wrap="square"/>
-                    <a:lstStyle/>
-                    <a:p>
-                      <a:r>
-                        <a:rPr sz="1100" b="1">
-                          <a:solidFill>
-                            <a:srgbClr val="FFFFFF"/>
-                          </a:solidFill>
-                          <a:latin typeface="Arial"/>
-                        </a:rPr>
-                        <a:t>vector</a:t>
-                      </a:r>
-                    </a:p>
-                  </a:txBody>
-                  <a:tcPr marL="54864" marR="54864" marT="18288" marB="18288">
-                    <a:solidFill>
-                      <a:srgbClr val="1F4E79"/>
-                    </a:solidFill>
-                  </a:tcPr>
-                </a:tc>
-                <a:tc>
-                  <a:txBody>
-                    <a:bodyPr wrap="square"/>
-                    <a:lstStyle/>
-                    <a:p>
-                      <a:r>
-                        <a:rPr sz="1100" b="1">
-                          <a:solidFill>
-                            <a:srgbClr val="FFFFFF"/>
-                          </a:solidFill>
-                          <a:latin typeface="Arial"/>
-                        </a:rPr>
-                        <a:t>pinhole</a:t>
-                      </a:r>
-                    </a:p>
-                  </a:txBody>
-                  <a:tcPr marL="54864" marR="54864" marT="18288" marB="18288">
-                    <a:solidFill>
-                      <a:srgbClr val="1F4E79"/>
-                    </a:solidFill>
-                  </a:tcPr>
-                </a:tc>
-                <a:tc>
-                  <a:txBody>
-                    <a:bodyPr wrap="square"/>
-                    <a:lstStyle/>
-                    <a:p>
-                      <a:r>
-                        <a:rPr sz="1100" b="1">
-                          <a:solidFill>
-                            <a:srgbClr val="FFFFFF"/>
-                          </a:solidFill>
-                          <a:latin typeface="Arial"/>
-                        </a:rPr>
-                        <a:t>P/SRI</a:t>
-                      </a:r>
-                    </a:p>
-                  </a:txBody>
-                  <a:tcPr marL="54864" marR="54864" marT="18288" marB="18288">
-                    <a:solidFill>
-                      <a:srgbClr val="1F4E79"/>
-                    </a:solidFill>
-                  </a:tcPr>
-                </a:tc>
               </a:tr>
-              <a:tr h="280035">
-                <a:tc>
-                  <a:txBody>
-                    <a:bodyPr wrap="square"/>
-                    <a:lstStyle/>
-                    <a:p>
-                      <a:r>
-                        <a:rPr sz="1100" b="0">
-                          <a:solidFill>
-                            <a:srgbClr val="282828"/>
-                          </a:solidFill>
-                          <a:latin typeface="Arial"/>
-                        </a:rPr>
-                        <a:t>2 pm walk, mirror still during a scan</a:t>
+              <a:tr h="657225">
+                <a:tc>
+                  <a:txBody>
+                    <a:bodyPr wrap="square"/>
+                    <a:lstStyle/>
+                    <a:p>
+                      <a:r>
+                        <a:rPr sz="1100" b="0">
+                          <a:solidFill>
+                            <a:srgbClr val="282828"/>
+                          </a:solidFill>
+                          <a:latin typeface="Arial"/>
+                        </a:rPr>
+                        <a:t>metasurface retardance error 0.02 / 0.05 / 0.10 / 0.20 rad</a:t>
                       </a:r>
                     </a:p>
                   </a:txBody>
@@ -17704,7 +19180,7 @@
                           </a:solidFill>
                           <a:latin typeface="Arial"/>
                         </a:rPr>
-                        <a:t>2.38</a:t>
+                        <a:t>153 / 380 / 750 / 1461 pm</a:t>
                       </a:r>
                     </a:p>
                   </a:txBody>
@@ -17726,7 +19202,7 @@
                           </a:solidFill>
                           <a:latin typeface="Arial"/>
                         </a:rPr>
-                        <a:t>2.32</a:t>
+                        <a:t>0.9934 / 4 pm at 0.10 and 0.20: the ideal rows</a:t>
                       </a:r>
                     </a:p>
                   </a:txBody>
@@ -17736,19 +19212,89 @@
                     </a:solidFill>
                   </a:tcPr>
                 </a:tc>
-                <a:tc>
-                  <a:txBody>
-                    <a:bodyPr wrap="square"/>
-                    <a:lstStyle/>
-                    <a:p>
-                      <a:r>
-                        <a:rPr sz="1100" b="0">
-                          <a:solidFill>
-                            <a:srgbClr val="282828"/>
-                          </a:solidFill>
-                          <a:latin typeface="Arial"/>
-                        </a:rPr>
-                        <a:t>2.32</a:t>
+              </a:tr>
+              <a:tr h="657225">
+                <a:tc>
+                  <a:txBody>
+                    <a:bodyPr wrap="square"/>
+                    <a:lstStyle/>
+                    <a:p>
+                      <a:r>
+                        <a:rPr sz="1100" b="0">
+                          <a:solidFill>
+                            <a:srgbClr val="282828"/>
+                          </a:solidFill>
+                          <a:latin typeface="Arial"/>
+                        </a:rPr>
+                        <a:t>the arm, laser at 45° / 0° / 90° to the fold plane</a:t>
+                      </a:r>
+                    </a:p>
+                  </a:txBody>
+                  <a:tcPr marL="54864" marR="54864" marT="18288" marB="18288">
+                    <a:solidFill>
+                      <a:srgbClr val="ECF1F6"/>
+                    </a:solidFill>
+                  </a:tcPr>
+                </a:tc>
+                <a:tc>
+                  <a:txBody>
+                    <a:bodyPr wrap="square"/>
+                    <a:lstStyle/>
+                    <a:p>
+                      <a:r>
+                        <a:rPr sz="1100" b="0">
+                          <a:solidFill>
+                            <a:srgbClr val="282828"/>
+                          </a:solidFill>
+                          <a:latin typeface="Arial"/>
+                        </a:rPr>
+                        <a:t>9.0 / 17.2 / 11.2 pm (ideal 0.05)</a:t>
+                      </a:r>
+                    </a:p>
+                  </a:txBody>
+                  <a:tcPr marL="54864" marR="54864" marT="18288" marB="18288">
+                    <a:solidFill>
+                      <a:srgbClr val="ECF1F6"/>
+                    </a:solidFill>
+                  </a:tcPr>
+                </a:tc>
+                <a:tc>
+                  <a:txBody>
+                    <a:bodyPr wrap="square"/>
+                    <a:lstStyle/>
+                    <a:p>
+                      <a:r>
+                        <a:rPr sz="1100" b="0">
+                          <a:solidFill>
+                            <a:srgbClr val="282828"/>
+                          </a:solidFill>
+                          <a:latin typeface="Arial"/>
+                        </a:rPr>
+                        <a:t>nothing through 0.1 rad of channel phase; 10% gain loss at 0.3</a:t>
+                      </a:r>
+                    </a:p>
+                  </a:txBody>
+                  <a:tcPr marL="54864" marR="54864" marT="18288" marB="18288">
+                    <a:solidFill>
+                      <a:srgbClr val="ECF1F6"/>
+                    </a:solidFill>
+                  </a:tcPr>
+                </a:tc>
+              </a:tr>
+              <a:tr h="657225">
+                <a:tc>
+                  <a:txBody>
+                    <a:bodyPr wrap="square"/>
+                    <a:lstStyle/>
+                    <a:p>
+                      <a:r>
+                        <a:rPr sz="1100" b="0">
+                          <a:solidFill>
+                            <a:srgbClr val="282828"/>
+                          </a:solidFill>
+                          <a:latin typeface="Arial"/>
+                        </a:rPr>
+                        <a:t>the arm, design scan: 6 nm per rad of channel phase</a:t>
                       </a:r>
                     </a:p>
                   </a:txBody>
@@ -17770,7 +19316,7 @@
                           </a:solidFill>
                           <a:latin typeface="Arial"/>
                         </a:rPr>
-                        <a:t>2.32</a:t>
+                        <a:t>59 / 178 / 597 / 1877 pm at 0.01 / 0.03 / 0.1 / 0.3 rad</a:t>
                       </a:r>
                     </a:p>
                   </a:txBody>
@@ -17792,7 +19338,7 @@
                           </a:solidFill>
                           <a:latin typeface="Arial"/>
                         </a:rPr>
-                        <a:t>2.33 pm</a:t>
+                        <a:t>—</a:t>
                       </a:r>
                     </a:p>
                   </a:txBody>
@@ -17803,20 +19349,20 @@
                   </a:tcPr>
                 </a:tc>
               </a:tr>
-              <a:tr h="280035">
-                <a:tc>
-                  <a:txBody>
-                    <a:bodyPr wrap="square"/>
-                    <a:lstStyle/>
-                    <a:p>
-                      <a:r>
-                        <a:rPr sz="1100" b="0">
-                          <a:solidFill>
-                            <a:srgbClr val="282828"/>
-                          </a:solidFill>
-                          <a:latin typeface="Arial"/>
-                        </a:rPr>
-                        <a:t>2 pm walk, mirror drifting across the scan</a:t>
+              <a:tr h="468630">
+                <a:tc>
+                  <a:txBody>
+                    <a:bodyPr wrap="square"/>
+                    <a:lstStyle/>
+                    <a:p>
+                      <a:r>
+                        <a:rPr sz="1100" b="0">
+                          <a:solidFill>
+                            <a:srgbClr val="282828"/>
+                          </a:solidFill>
+                          <a:latin typeface="Arial"/>
+                        </a:rPr>
+                        <a:t>analyzer: cube extinction alone</a:t>
                       </a:r>
                     </a:p>
                   </a:txBody>
@@ -17838,7 +19384,7 @@
                           </a:solidFill>
                           <a:latin typeface="Arial"/>
                         </a:rPr>
-                        <a:t>2.38</a:t>
+                        <a:t>3.5 pm</a:t>
                       </a:r>
                     </a:p>
                   </a:txBody>
@@ -17860,7 +19406,7 @@
                           </a:solidFill>
                           <a:latin typeface="Arial"/>
                         </a:rPr>
-                        <a:t>1.57</a:t>
+                        <a:t>0.9934 / 4 pm</a:t>
                       </a:r>
                     </a:p>
                   </a:txBody>
@@ -17870,87 +19416,21 @@
                     </a:solidFill>
                   </a:tcPr>
                 </a:tc>
-                <a:tc>
-                  <a:txBody>
-                    <a:bodyPr wrap="square"/>
-                    <a:lstStyle/>
-                    <a:p>
-                      <a:r>
-                        <a:rPr sz="1100" b="0">
-                          <a:solidFill>
-                            <a:srgbClr val="282828"/>
-                          </a:solidFill>
-                          <a:latin typeface="Arial"/>
-                        </a:rPr>
-                        <a:t>2.32</a:t>
-                      </a:r>
-                    </a:p>
-                  </a:txBody>
-                  <a:tcPr marL="54864" marR="54864" marT="18288" marB="18288">
-                    <a:solidFill>
-                      <a:srgbClr val="ECF1F6"/>
-                    </a:solidFill>
-                  </a:tcPr>
-                </a:tc>
-                <a:tc>
-                  <a:txBody>
-                    <a:bodyPr wrap="square"/>
-                    <a:lstStyle/>
-                    <a:p>
-                      <a:r>
-                        <a:rPr sz="1100" b="0">
-                          <a:solidFill>
-                            <a:srgbClr val="282828"/>
-                          </a:solidFill>
-                          <a:latin typeface="Arial"/>
-                        </a:rPr>
-                        <a:t>1.58</a:t>
-                      </a:r>
-                    </a:p>
-                  </a:txBody>
-                  <a:tcPr marL="54864" marR="54864" marT="18288" marB="18288">
-                    <a:solidFill>
-                      <a:srgbClr val="ECF1F6"/>
-                    </a:solidFill>
-                  </a:tcPr>
-                </a:tc>
-                <a:tc>
-                  <a:txBody>
-                    <a:bodyPr wrap="square"/>
-                    <a:lstStyle/>
-                    <a:p>
-                      <a:r>
-                        <a:rPr sz="1100" b="0">
-                          <a:solidFill>
-                            <a:srgbClr val="282828"/>
-                          </a:solidFill>
-                          <a:latin typeface="Arial"/>
-                        </a:rPr>
-                        <a:t>1.71 pm</a:t>
-                      </a:r>
-                    </a:p>
-                  </a:txBody>
-                  <a:tcPr marL="54864" marR="54864" marT="18288" marB="18288">
-                    <a:solidFill>
-                      <a:srgbClr val="ECF1F6"/>
-                    </a:solidFill>
-                  </a:tcPr>
-                </a:tc>
               </a:tr>
-              <a:tr h="280035">
-                <a:tc>
-                  <a:txBody>
-                    <a:bodyPr wrap="square"/>
-                    <a:lstStyle/>
-                    <a:p>
-                      <a:r>
-                        <a:rPr sz="1100" b="0">
-                          <a:solidFill>
-                            <a:srgbClr val="282828"/>
-                          </a:solidFill>
-                          <a:latin typeface="Arial"/>
-                        </a:rPr>
-                        <a:t>5 pm ramp, mirror still</a:t>
+              <a:tr h="468630">
+                <a:tc>
+                  <a:txBody>
+                    <a:bodyPr wrap="square"/>
+                    <a:lstStyle/>
+                    <a:p>
+                      <a:r>
+                        <a:rPr sz="1100" b="0">
+                          <a:solidFill>
+                            <a:srgbClr val="282828"/>
+                          </a:solidFill>
+                          <a:latin typeface="Arial"/>
+                        </a:rPr>
+                        <a:t>analyzer: plate λ/300; 1° azimuth; λ/100</a:t>
                       </a:r>
                     </a:p>
                   </a:txBody>
@@ -17972,7 +19452,7 @@
                           </a:solidFill>
                           <a:latin typeface="Arial"/>
                         </a:rPr>
-                        <a:t>27.6</a:t>
+                        <a:t>165; 263; 496 pm</a:t>
                       </a:r>
                     </a:p>
                   </a:txBody>
@@ -17994,341 +19474,7 @@
                           </a:solidFill>
                           <a:latin typeface="Arial"/>
                         </a:rPr>
-                        <a:t>10.05</a:t>
-                      </a:r>
-                    </a:p>
-                  </a:txBody>
-                  <a:tcPr marL="54864" marR="54864" marT="18288" marB="18288">
-                    <a:solidFill>
-                      <a:srgbClr val="FFFFFF"/>
-                    </a:solidFill>
-                  </a:tcPr>
-                </a:tc>
-                <a:tc>
-                  <a:txBody>
-                    <a:bodyPr wrap="square"/>
-                    <a:lstStyle/>
-                    <a:p>
-                      <a:r>
-                        <a:rPr sz="1100" b="0">
-                          <a:solidFill>
-                            <a:srgbClr val="282828"/>
-                          </a:solidFill>
-                          <a:latin typeface="Arial"/>
-                        </a:rPr>
-                        <a:t>9.87</a:t>
-                      </a:r>
-                    </a:p>
-                  </a:txBody>
-                  <a:tcPr marL="54864" marR="54864" marT="18288" marB="18288">
-                    <a:solidFill>
-                      <a:srgbClr val="FFFFFF"/>
-                    </a:solidFill>
-                  </a:tcPr>
-                </a:tc>
-                <a:tc>
-                  <a:txBody>
-                    <a:bodyPr wrap="square"/>
-                    <a:lstStyle/>
-                    <a:p>
-                      <a:r>
-                        <a:rPr sz="1100" b="0">
-                          <a:solidFill>
-                            <a:srgbClr val="282828"/>
-                          </a:solidFill>
-                          <a:latin typeface="Arial"/>
-                        </a:rPr>
-                        <a:t>9.86</a:t>
-                      </a:r>
-                    </a:p>
-                  </a:txBody>
-                  <a:tcPr marL="54864" marR="54864" marT="18288" marB="18288">
-                    <a:solidFill>
-                      <a:srgbClr val="FFFFFF"/>
-                    </a:solidFill>
-                  </a:tcPr>
-                </a:tc>
-                <a:tc>
-                  <a:txBody>
-                    <a:bodyPr wrap="square"/>
-                    <a:lstStyle/>
-                    <a:p>
-                      <a:r>
-                        <a:rPr sz="1100" b="0">
-                          <a:solidFill>
-                            <a:srgbClr val="282828"/>
-                          </a:solidFill>
-                          <a:latin typeface="Arial"/>
-                        </a:rPr>
-                        <a:t>9.88 pm</a:t>
-                      </a:r>
-                    </a:p>
-                  </a:txBody>
-                  <a:tcPr marL="54864" marR="54864" marT="18288" marB="18288">
-                    <a:solidFill>
-                      <a:srgbClr val="FFFFFF"/>
-                    </a:solidFill>
-                  </a:tcPr>
-                </a:tc>
-              </a:tr>
-              <a:tr h="280035">
-                <a:tc>
-                  <a:txBody>
-                    <a:bodyPr wrap="square"/>
-                    <a:lstStyle/>
-                    <a:p>
-                      <a:r>
-                        <a:rPr sz="1100" b="0">
-                          <a:solidFill>
-                            <a:srgbClr val="282828"/>
-                          </a:solidFill>
-                          <a:latin typeface="Arial"/>
-                        </a:rPr>
-                        <a:t>5 pm ramp, drifting across the scan</a:t>
-                      </a:r>
-                    </a:p>
-                  </a:txBody>
-                  <a:tcPr marL="54864" marR="54864" marT="18288" marB="18288">
-                    <a:solidFill>
-                      <a:srgbClr val="ECF1F6"/>
-                    </a:solidFill>
-                  </a:tcPr>
-                </a:tc>
-                <a:tc>
-                  <a:txBody>
-                    <a:bodyPr wrap="square"/>
-                    <a:lstStyle/>
-                    <a:p>
-                      <a:r>
-                        <a:rPr sz="1100" b="0">
-                          <a:solidFill>
-                            <a:srgbClr val="282828"/>
-                          </a:solidFill>
-                          <a:latin typeface="Arial"/>
-                        </a:rPr>
-                        <a:t>27.6</a:t>
-                      </a:r>
-                    </a:p>
-                  </a:txBody>
-                  <a:tcPr marL="54864" marR="54864" marT="18288" marB="18288">
-                    <a:solidFill>
-                      <a:srgbClr val="ECF1F6"/>
-                    </a:solidFill>
-                  </a:tcPr>
-                </a:tc>
-                <a:tc>
-                  <a:txBody>
-                    <a:bodyPr wrap="square"/>
-                    <a:lstStyle/>
-                    <a:p>
-                      <a:r>
-                        <a:rPr sz="1100" b="0">
-                          <a:solidFill>
-                            <a:srgbClr val="282828"/>
-                          </a:solidFill>
-                          <a:latin typeface="Arial"/>
-                        </a:rPr>
-                        <a:t>7.16</a:t>
-                      </a:r>
-                    </a:p>
-                  </a:txBody>
-                  <a:tcPr marL="54864" marR="54864" marT="18288" marB="18288">
-                    <a:solidFill>
-                      <a:srgbClr val="ECF1F6"/>
-                    </a:solidFill>
-                  </a:tcPr>
-                </a:tc>
-                <a:tc>
-                  <a:txBody>
-                    <a:bodyPr wrap="square"/>
-                    <a:lstStyle/>
-                    <a:p>
-                      <a:r>
-                        <a:rPr sz="1100" b="0">
-                          <a:solidFill>
-                            <a:srgbClr val="282828"/>
-                          </a:solidFill>
-                          <a:latin typeface="Arial"/>
-                        </a:rPr>
-                        <a:t>9.87</a:t>
-                      </a:r>
-                    </a:p>
-                  </a:txBody>
-                  <a:tcPr marL="54864" marR="54864" marT="18288" marB="18288">
-                    <a:solidFill>
-                      <a:srgbClr val="ECF1F6"/>
-                    </a:solidFill>
-                  </a:tcPr>
-                </a:tc>
-                <a:tc>
-                  <a:txBody>
-                    <a:bodyPr wrap="square"/>
-                    <a:lstStyle/>
-                    <a:p>
-                      <a:r>
-                        <a:rPr sz="1100" b="0">
-                          <a:solidFill>
-                            <a:srgbClr val="282828"/>
-                          </a:solidFill>
-                          <a:latin typeface="Arial"/>
-                        </a:rPr>
-                        <a:t>6.70</a:t>
-                      </a:r>
-                    </a:p>
-                  </a:txBody>
-                  <a:tcPr marL="54864" marR="54864" marT="18288" marB="18288">
-                    <a:solidFill>
-                      <a:srgbClr val="ECF1F6"/>
-                    </a:solidFill>
-                  </a:tcPr>
-                </a:tc>
-                <a:tc>
-                  <a:txBody>
-                    <a:bodyPr wrap="square"/>
-                    <a:lstStyle/>
-                    <a:p>
-                      <a:r>
-                        <a:rPr sz="1100" b="0">
-                          <a:solidFill>
-                            <a:srgbClr val="282828"/>
-                          </a:solidFill>
-                          <a:latin typeface="Arial"/>
-                        </a:rPr>
-                        <a:t>7.30 pm</a:t>
-                      </a:r>
-                    </a:p>
-                  </a:txBody>
-                  <a:tcPr marL="54864" marR="54864" marT="18288" marB="18288">
-                    <a:solidFill>
-                      <a:srgbClr val="ECF1F6"/>
-                    </a:solidFill>
-                  </a:tcPr>
-                </a:tc>
-              </a:tr>
-              <a:tr h="280035">
-                <a:tc>
-                  <a:txBody>
-                    <a:bodyPr wrap="square"/>
-                    <a:lstStyle/>
-                    <a:p>
-                      <a:r>
-                        <a:rPr sz="1100" b="0">
-                          <a:solidFill>
-                            <a:srgbClr val="282828"/>
-                          </a:solidFill>
-                          <a:latin typeface="Arial"/>
-                        </a:rPr>
-                        <a:t>camera scale drifting 1e-3 across the scan</a:t>
-                      </a:r>
-                    </a:p>
-                  </a:txBody>
-                  <a:tcPr marL="54864" marR="54864" marT="18288" marB="18288">
-                    <a:solidFill>
-                      <a:srgbClr val="FFFFFF"/>
-                    </a:solidFill>
-                  </a:tcPr>
-                </a:tc>
-                <a:tc>
-                  <a:txBody>
-                    <a:bodyPr wrap="square"/>
-                    <a:lstStyle/>
-                    <a:p>
-                      <a:r>
-                        <a:rPr sz="1100" b="0">
-                          <a:solidFill>
-                            <a:srgbClr val="282828"/>
-                          </a:solidFill>
-                          <a:latin typeface="Arial"/>
-                        </a:rPr>
-                        <a:t>10.8 nm</a:t>
-                      </a:r>
-                    </a:p>
-                  </a:txBody>
-                  <a:tcPr marL="54864" marR="54864" marT="18288" marB="18288">
-                    <a:solidFill>
-                      <a:srgbClr val="FFFFFF"/>
-                    </a:solidFill>
-                  </a:tcPr>
-                </a:tc>
-                <a:tc>
-                  <a:txBody>
-                    <a:bodyPr wrap="square"/>
-                    <a:lstStyle/>
-                    <a:p>
-                      <a:r>
-                        <a:rPr sz="1100" b="0">
-                          <a:solidFill>
-                            <a:srgbClr val="282828"/>
-                          </a:solidFill>
-                          <a:latin typeface="Arial"/>
-                        </a:rPr>
-                        <a:t>5.4</a:t>
-                      </a:r>
-                    </a:p>
-                  </a:txBody>
-                  <a:tcPr marL="54864" marR="54864" marT="18288" marB="18288">
-                    <a:solidFill>
-                      <a:srgbClr val="FFFFFF"/>
-                    </a:solidFill>
-                  </a:tcPr>
-                </a:tc>
-                <a:tc>
-                  <a:txBody>
-                    <a:bodyPr wrap="square"/>
-                    <a:lstStyle/>
-                    <a:p>
-                      <a:r>
-                        <a:rPr sz="1100" b="0">
-                          <a:solidFill>
-                            <a:srgbClr val="282828"/>
-                          </a:solidFill>
-                          <a:latin typeface="Arial"/>
-                        </a:rPr>
-                        <a:t>89 pm</a:t>
-                      </a:r>
-                    </a:p>
-                  </a:txBody>
-                  <a:tcPr marL="54864" marR="54864" marT="18288" marB="18288">
-                    <a:solidFill>
-                      <a:srgbClr val="FFFFFF"/>
-                    </a:solidFill>
-                  </a:tcPr>
-                </a:tc>
-                <a:tc>
-                  <a:txBody>
-                    <a:bodyPr wrap="square"/>
-                    <a:lstStyle/>
-                    <a:p>
-                      <a:r>
-                        <a:rPr sz="1100" b="0">
-                          <a:solidFill>
-                            <a:srgbClr val="282828"/>
-                          </a:solidFill>
-                          <a:latin typeface="Arial"/>
-                        </a:rPr>
-                        <a:t>5.3</a:t>
-                      </a:r>
-                    </a:p>
-                  </a:txBody>
-                  <a:tcPr marL="54864" marR="54864" marT="18288" marB="18288">
-                    <a:solidFill>
-                      <a:srgbClr val="FFFFFF"/>
-                    </a:solidFill>
-                  </a:tcPr>
-                </a:tc>
-                <a:tc>
-                  <a:txBody>
-                    <a:bodyPr wrap="square"/>
-                    <a:lstStyle/>
-                    <a:p>
-                      <a:r>
-                        <a:rPr sz="1100" b="0">
-                          <a:solidFill>
-                            <a:srgbClr val="282828"/>
-                          </a:solidFill>
-                          <a:latin typeface="Arial"/>
-                        </a:rPr>
-                        <a:t>10.7 pm</a:t>
+                        <a:t>0.9932 / 4; 0.9932 / 4; 0.9928 / 4 pm</a:t>
                       </a:r>
                     </a:p>
                   </a:txBody>
@@ -18377,668 +19523,6 @@
                 </a:solidFill>
                 <a:latin typeface="Arial"/>
               </a:rPr>
-              <a:t>•  Why the mirror's drift helps: a scan reads the surface at its midpoint, a free half-step of prediction; 26-32% less hold error for the stepped readings.  The camera's drift is an additive bias, the opposite sign.</a:t>
-            </a:r>
-          </a:p>
-          <a:p>
-            <a:pPr>
-              <a:spcAft>
-                <a:spcPts val="600"/>
-              </a:spcAft>
-            </a:pPr>
-            <a:r>
-              <a:rPr sz="1200" b="0">
-                <a:solidFill>
-                  <a:srgbClr val="282828"/>
-                </a:solidFill>
-                <a:latin typeface="Arial"/>
-              </a:rPr>
-              <a:t>•  The P/SRI's reference arm walking (a random path walk of 1e-3 to 1e-1 rad per cycle) costs 4% in light over that hundredfold range: a path change is piston, the one mode the actuator estimator nulls.  Not benign for absolute field work; a tilting reference is outside the model.</a:t>
-            </a:r>
-          </a:p>
-          <a:p>
-            <a:pPr>
-              <a:spcAft>
-                <a:spcPts val="600"/>
-              </a:spcAft>
-            </a:pPr>
-            <a:r>
-              <a:rPr sz="1200" b="0">
-                <a:solidFill>
-                  <a:srgbClr val="282828"/>
-                </a:solidFill>
-                <a:latin typeface="Arial"/>
-              </a:rPr>
-              <a:t>•  The paper's camera number (0.13 electrons per pixel per cycle) is invisible to every reading: an electron is 1e-4 of a lit pixel's shot noise at 1e13 photons.</a:t>
-            </a:r>
-          </a:p>
-        </p:txBody>
-      </p:sp>
-      <p:sp>
-        <p:nvSpPr>
-          <p:cNvPr id="6" name="TextBox 5"/>
-          <p:cNvSpPr txBox="1"/>
-          <p:nvPr/>
-        </p:nvSpPr>
-        <p:spPr>
-          <a:xfrm>
-            <a:off x="6400800" y="3934968"/>
-            <a:ext cx="5394960" cy="274320"/>
-          </a:xfrm>
-          <a:prstGeom prst="rect">
-            <a:avLst/>
-          </a:prstGeom>
-          <a:noFill/>
-        </p:spPr>
-        <p:txBody>
-          <a:bodyPr wrap="square">
-            <a:spAutoFit/>
-          </a:bodyPr>
-          <a:lstStyle/>
-          <a:p>
-            <a:pPr>
-              <a:spcAft>
-                <a:spcPts val="600"/>
-              </a:spcAft>
-            </a:pPr>
-            <a:r>
-              <a:rPr sz="1050" b="0">
-                <a:solidFill>
-                  <a:srgbClr val="6E6E6E"/>
-                </a:solidFill>
-                <a:latin typeface="Arial"/>
-              </a:rPr>
-              <a:t>Run tags intra193_0, intra193, pcam193, pcam193r, pcam193ri, rw193_1e3/1e2/1e1, loop_lens_intra, loop_lens_cam.</a:t>
-            </a:r>
-          </a:p>
-        </p:txBody>
-      </p:sp>
-    </p:spTree>
-  </p:cSld>
-  <p:clrMapOvr>
-    <a:masterClrMapping/>
-  </p:clrMapOvr>
-</p:sld>
-</file>
-
-<file path=ppt/slides/slide32.xml><?xml version="1.0" encoding="utf-8"?>
-<p:sld xmlns:a="http://schemas.openxmlformats.org/drawingml/2006/main" xmlns:p="http://schemas.openxmlformats.org/presentationml/2006/main" xmlns:r="http://schemas.openxmlformats.org/officeDocument/2006/relationships">
-  <p:cSld>
-    <p:spTree>
-      <p:nvGrpSpPr>
-        <p:cNvPr id="1" name=""/>
-        <p:cNvGrpSpPr/>
-        <p:nvPr/>
-      </p:nvGrpSpPr>
-      <p:grpSpPr/>
-      <p:sp>
-        <p:nvSpPr>
-          <p:cNvPr id="2" name="TextBox 1"/>
-          <p:cNvSpPr txBox="1"/>
-          <p:nvPr/>
-        </p:nvSpPr>
-        <p:spPr>
-          <a:xfrm>
-            <a:off x="411480" y="201168"/>
-            <a:ext cx="11368735" cy="914400"/>
-          </a:xfrm>
-          <a:prstGeom prst="rect">
-            <a:avLst/>
-          </a:prstGeom>
-          <a:noFill/>
-        </p:spPr>
-        <p:txBody>
-          <a:bodyPr wrap="square">
-            <a:spAutoFit/>
-          </a:bodyPr>
-          <a:lstStyle/>
-          <a:p>
-            <a:pPr>
-              <a:spcAft>
-                <a:spcPts val="400"/>
-              </a:spcAft>
-            </a:pPr>
-            <a:r>
-              <a:rPr sz="2400" b="1">
-                <a:solidFill>
-                  <a:srgbClr val="1F4E79"/>
-                </a:solidFill>
-                <a:latin typeface="Arial"/>
-              </a:rPr>
-              <a:t>Backup: the vector sensor's polarization terms</a:t>
-            </a:r>
-          </a:p>
-          <a:p>
-            <a:pPr>
-              <a:spcAft>
-                <a:spcPts val="0"/>
-              </a:spcAft>
-            </a:pPr>
-            <a:r>
-              <a:rPr sz="1250" b="0">
-                <a:solidFill>
-                  <a:srgbClr val="6E6E6E"/>
-                </a:solidFill>
-                <a:latin typeface="Arial"/>
-              </a:rPr>
-              <a:t>The metasurface's retardance error, the arm's polarization aberration, and the analyzer, each from the engine's polarized traces of this bench</a:t>
-            </a:r>
-          </a:p>
-        </p:txBody>
-      </p:sp>
-      <p:sp>
-        <p:nvSpPr>
-          <p:cNvPr id="3" name="Rectangle 2"/>
-          <p:cNvSpPr/>
-          <p:nvPr/>
-        </p:nvSpPr>
-        <p:spPr>
-          <a:xfrm>
-            <a:off x="411480" y="1133856"/>
-            <a:ext cx="11368735" cy="20320"/>
-          </a:xfrm>
-          <a:prstGeom prst="rect">
-            <a:avLst/>
-          </a:prstGeom>
-          <a:solidFill>
-            <a:srgbClr val="B8C6D4"/>
-          </a:solidFill>
-          <a:ln>
-            <a:noFill/>
-          </a:ln>
-          <a:effectLst/>
-        </p:spPr>
-        <p:style>
-          <a:lnRef idx="1">
-            <a:schemeClr val="accent1"/>
-          </a:lnRef>
-          <a:fillRef idx="3">
-            <a:schemeClr val="accent1"/>
-          </a:fillRef>
-          <a:effectRef idx="2">
-            <a:schemeClr val="accent1"/>
-          </a:effectRef>
-          <a:fontRef idx="minor">
-            <a:schemeClr val="lt1"/>
-          </a:fontRef>
-        </p:style>
-        <p:txBody>
-          <a:bodyPr rtlCol="0" anchor="ctr"/>
-          <a:lstStyle/>
-          <a:p>
-            <a:pPr algn="ctr"/>
-          </a:p>
-        </p:txBody>
-      </p:sp>
-      <p:graphicFrame>
-        <p:nvGraphicFramePr>
-          <p:cNvPr id="4" name="Table 3"/>
-          <p:cNvGraphicFramePr>
-            <a:graphicFrameLocks noGrp="1"/>
-          </p:cNvGraphicFramePr>
-          <p:nvPr/>
-        </p:nvGraphicFramePr>
-        <p:xfrm>
-          <a:off x="411480" y="1298448"/>
-          <a:ext cx="5806439" cy="3377565"/>
-        </p:xfrm>
-        <a:graphic>
-          <a:graphicData uri="http://schemas.openxmlformats.org/drawingml/2006/table">
-            <a:tbl>
-              <a:tblPr firstRow="1" bandRow="1">
-                <a:tableStyleId>{5C22544A-7EE6-4342-B048-85BDC9FD1C3A}</a:tableStyleId>
-              </a:tblPr>
-              <a:tblGrid>
-                <a:gridCol w="1924420"/>
-                <a:gridCol w="1824881"/>
-                <a:gridCol w="2057138"/>
-              </a:tblGrid>
-              <a:tr h="468630">
-                <a:tc>
-                  <a:txBody>
-                    <a:bodyPr wrap="square"/>
-                    <a:lstStyle/>
-                    <a:p>
-                      <a:r>
-                        <a:rPr sz="1100" b="1">
-                          <a:solidFill>
-                            <a:srgbClr val="FFFFFF"/>
-                          </a:solidFill>
-                          <a:latin typeface="Arial"/>
-                        </a:rPr>
-                        <a:t>term</a:t>
-                      </a:r>
-                    </a:p>
-                  </a:txBody>
-                  <a:tcPr marL="54864" marR="54864" marT="18288" marB="18288">
-                    <a:solidFill>
-                      <a:srgbClr val="1F4E79"/>
-                    </a:solidFill>
-                  </a:tcPr>
-                </a:tc>
-                <a:tc>
-                  <a:txBody>
-                    <a:bodyPr wrap="square"/>
-                    <a:lstStyle/>
-                    <a:p>
-                      <a:r>
-                        <a:rPr sz="1100" b="1">
-                          <a:solidFill>
-                            <a:srgbClr val="FFFFFF"/>
-                          </a:solidFill>
-                          <a:latin typeface="Arial"/>
-                        </a:rPr>
-                        <a:t>uncalibrated, on 100 nm pokes (12 nm rms)</a:t>
-                      </a:r>
-                    </a:p>
-                  </a:txBody>
-                  <a:tcPr marL="54864" marR="54864" marT="18288" marB="18288">
-                    <a:solidFill>
-                      <a:srgbClr val="1F4E79"/>
-                    </a:solidFill>
-                  </a:tcPr>
-                </a:tc>
-                <a:tc>
-                  <a:txBody>
-                    <a:bodyPr wrap="square"/>
-                    <a:lstStyle/>
-                    <a:p>
-                      <a:r>
-                        <a:rPr sz="1100" b="1">
-                          <a:solidFill>
-                            <a:srgbClr val="FFFFFF"/>
-                          </a:solidFill>
-                          <a:latin typeface="Arial"/>
-                        </a:rPr>
-                        <a:t>through the matrix measured on the surface</a:t>
-                      </a:r>
-                    </a:p>
-                  </a:txBody>
-                  <a:tcPr marL="54864" marR="54864" marT="18288" marB="18288">
-                    <a:solidFill>
-                      <a:srgbClr val="1F4E79"/>
-                    </a:solidFill>
-                  </a:tcPr>
-                </a:tc>
-              </a:tr>
-              <a:tr h="657225">
-                <a:tc>
-                  <a:txBody>
-                    <a:bodyPr wrap="square"/>
-                    <a:lstStyle/>
-                    <a:p>
-                      <a:r>
-                        <a:rPr sz="1100" b="0">
-                          <a:solidFill>
-                            <a:srgbClr val="282828"/>
-                          </a:solidFill>
-                          <a:latin typeface="Arial"/>
-                        </a:rPr>
-                        <a:t>metasurface retardance error 0.02 / 0.05 / 0.10 / 0.20 rad</a:t>
-                      </a:r>
-                    </a:p>
-                  </a:txBody>
-                  <a:tcPr marL="54864" marR="54864" marT="18288" marB="18288">
-                    <a:solidFill>
-                      <a:srgbClr val="FFFFFF"/>
-                    </a:solidFill>
-                  </a:tcPr>
-                </a:tc>
-                <a:tc>
-                  <a:txBody>
-                    <a:bodyPr wrap="square"/>
-                    <a:lstStyle/>
-                    <a:p>
-                      <a:r>
-                        <a:rPr sz="1100" b="0">
-                          <a:solidFill>
-                            <a:srgbClr val="282828"/>
-                          </a:solidFill>
-                          <a:latin typeface="Arial"/>
-                        </a:rPr>
-                        <a:t>153 / 380 / 750 / 1461 pm</a:t>
-                      </a:r>
-                    </a:p>
-                  </a:txBody>
-                  <a:tcPr marL="54864" marR="54864" marT="18288" marB="18288">
-                    <a:solidFill>
-                      <a:srgbClr val="FFFFFF"/>
-                    </a:solidFill>
-                  </a:tcPr>
-                </a:tc>
-                <a:tc>
-                  <a:txBody>
-                    <a:bodyPr wrap="square"/>
-                    <a:lstStyle/>
-                    <a:p>
-                      <a:r>
-                        <a:rPr sz="1100" b="0">
-                          <a:solidFill>
-                            <a:srgbClr val="282828"/>
-                          </a:solidFill>
-                          <a:latin typeface="Arial"/>
-                        </a:rPr>
-                        <a:t>0.9934 / 4 pm at 0.10 and 0.20: the ideal rows</a:t>
-                      </a:r>
-                    </a:p>
-                  </a:txBody>
-                  <a:tcPr marL="54864" marR="54864" marT="18288" marB="18288">
-                    <a:solidFill>
-                      <a:srgbClr val="FFFFFF"/>
-                    </a:solidFill>
-                  </a:tcPr>
-                </a:tc>
-              </a:tr>
-              <a:tr h="657225">
-                <a:tc>
-                  <a:txBody>
-                    <a:bodyPr wrap="square"/>
-                    <a:lstStyle/>
-                    <a:p>
-                      <a:r>
-                        <a:rPr sz="1100" b="0">
-                          <a:solidFill>
-                            <a:srgbClr val="282828"/>
-                          </a:solidFill>
-                          <a:latin typeface="Arial"/>
-                        </a:rPr>
-                        <a:t>the arm, laser at 45° / 0° / 90° to the fold plane</a:t>
-                      </a:r>
-                    </a:p>
-                  </a:txBody>
-                  <a:tcPr marL="54864" marR="54864" marT="18288" marB="18288">
-                    <a:solidFill>
-                      <a:srgbClr val="ECF1F6"/>
-                    </a:solidFill>
-                  </a:tcPr>
-                </a:tc>
-                <a:tc>
-                  <a:txBody>
-                    <a:bodyPr wrap="square"/>
-                    <a:lstStyle/>
-                    <a:p>
-                      <a:r>
-                        <a:rPr sz="1100" b="0">
-                          <a:solidFill>
-                            <a:srgbClr val="282828"/>
-                          </a:solidFill>
-                          <a:latin typeface="Arial"/>
-                        </a:rPr>
-                        <a:t>9.0 / 17.2 / 11.2 pm (ideal 0.05)</a:t>
-                      </a:r>
-                    </a:p>
-                  </a:txBody>
-                  <a:tcPr marL="54864" marR="54864" marT="18288" marB="18288">
-                    <a:solidFill>
-                      <a:srgbClr val="ECF1F6"/>
-                    </a:solidFill>
-                  </a:tcPr>
-                </a:tc>
-                <a:tc>
-                  <a:txBody>
-                    <a:bodyPr wrap="square"/>
-                    <a:lstStyle/>
-                    <a:p>
-                      <a:r>
-                        <a:rPr sz="1100" b="0">
-                          <a:solidFill>
-                            <a:srgbClr val="282828"/>
-                          </a:solidFill>
-                          <a:latin typeface="Arial"/>
-                        </a:rPr>
-                        <a:t>nothing through 0.1 rad of channel phase; 10% gain loss at 0.3</a:t>
-                      </a:r>
-                    </a:p>
-                  </a:txBody>
-                  <a:tcPr marL="54864" marR="54864" marT="18288" marB="18288">
-                    <a:solidFill>
-                      <a:srgbClr val="ECF1F6"/>
-                    </a:solidFill>
-                  </a:tcPr>
-                </a:tc>
-              </a:tr>
-              <a:tr h="657225">
-                <a:tc>
-                  <a:txBody>
-                    <a:bodyPr wrap="square"/>
-                    <a:lstStyle/>
-                    <a:p>
-                      <a:r>
-                        <a:rPr sz="1100" b="0">
-                          <a:solidFill>
-                            <a:srgbClr val="282828"/>
-                          </a:solidFill>
-                          <a:latin typeface="Arial"/>
-                        </a:rPr>
-                        <a:t>the arm, design scan: 6 nm per rad of channel phase</a:t>
-                      </a:r>
-                    </a:p>
-                  </a:txBody>
-                  <a:tcPr marL="54864" marR="54864" marT="18288" marB="18288">
-                    <a:solidFill>
-                      <a:srgbClr val="FFFFFF"/>
-                    </a:solidFill>
-                  </a:tcPr>
-                </a:tc>
-                <a:tc>
-                  <a:txBody>
-                    <a:bodyPr wrap="square"/>
-                    <a:lstStyle/>
-                    <a:p>
-                      <a:r>
-                        <a:rPr sz="1100" b="0">
-                          <a:solidFill>
-                            <a:srgbClr val="282828"/>
-                          </a:solidFill>
-                          <a:latin typeface="Arial"/>
-                        </a:rPr>
-                        <a:t>59 / 178 / 597 / 1877 pm at 0.01 / 0.03 / 0.1 / 0.3 rad</a:t>
-                      </a:r>
-                    </a:p>
-                  </a:txBody>
-                  <a:tcPr marL="54864" marR="54864" marT="18288" marB="18288">
-                    <a:solidFill>
-                      <a:srgbClr val="FFFFFF"/>
-                    </a:solidFill>
-                  </a:tcPr>
-                </a:tc>
-                <a:tc>
-                  <a:txBody>
-                    <a:bodyPr wrap="square"/>
-                    <a:lstStyle/>
-                    <a:p>
-                      <a:r>
-                        <a:rPr sz="1100" b="0">
-                          <a:solidFill>
-                            <a:srgbClr val="282828"/>
-                          </a:solidFill>
-                          <a:latin typeface="Arial"/>
-                        </a:rPr>
-                        <a:t>—</a:t>
-                      </a:r>
-                    </a:p>
-                  </a:txBody>
-                  <a:tcPr marL="54864" marR="54864" marT="18288" marB="18288">
-                    <a:solidFill>
-                      <a:srgbClr val="FFFFFF"/>
-                    </a:solidFill>
-                  </a:tcPr>
-                </a:tc>
-              </a:tr>
-              <a:tr h="468630">
-                <a:tc>
-                  <a:txBody>
-                    <a:bodyPr wrap="square"/>
-                    <a:lstStyle/>
-                    <a:p>
-                      <a:r>
-                        <a:rPr sz="1100" b="0">
-                          <a:solidFill>
-                            <a:srgbClr val="282828"/>
-                          </a:solidFill>
-                          <a:latin typeface="Arial"/>
-                        </a:rPr>
-                        <a:t>analyzer: cube extinction alone</a:t>
-                      </a:r>
-                    </a:p>
-                  </a:txBody>
-                  <a:tcPr marL="54864" marR="54864" marT="18288" marB="18288">
-                    <a:solidFill>
-                      <a:srgbClr val="ECF1F6"/>
-                    </a:solidFill>
-                  </a:tcPr>
-                </a:tc>
-                <a:tc>
-                  <a:txBody>
-                    <a:bodyPr wrap="square"/>
-                    <a:lstStyle/>
-                    <a:p>
-                      <a:r>
-                        <a:rPr sz="1100" b="0">
-                          <a:solidFill>
-                            <a:srgbClr val="282828"/>
-                          </a:solidFill>
-                          <a:latin typeface="Arial"/>
-                        </a:rPr>
-                        <a:t>3.5 pm</a:t>
-                      </a:r>
-                    </a:p>
-                  </a:txBody>
-                  <a:tcPr marL="54864" marR="54864" marT="18288" marB="18288">
-                    <a:solidFill>
-                      <a:srgbClr val="ECF1F6"/>
-                    </a:solidFill>
-                  </a:tcPr>
-                </a:tc>
-                <a:tc>
-                  <a:txBody>
-                    <a:bodyPr wrap="square"/>
-                    <a:lstStyle/>
-                    <a:p>
-                      <a:r>
-                        <a:rPr sz="1100" b="0">
-                          <a:solidFill>
-                            <a:srgbClr val="282828"/>
-                          </a:solidFill>
-                          <a:latin typeface="Arial"/>
-                        </a:rPr>
-                        <a:t>0.9934 / 4 pm</a:t>
-                      </a:r>
-                    </a:p>
-                  </a:txBody>
-                  <a:tcPr marL="54864" marR="54864" marT="18288" marB="18288">
-                    <a:solidFill>
-                      <a:srgbClr val="ECF1F6"/>
-                    </a:solidFill>
-                  </a:tcPr>
-                </a:tc>
-              </a:tr>
-              <a:tr h="468630">
-                <a:tc>
-                  <a:txBody>
-                    <a:bodyPr wrap="square"/>
-                    <a:lstStyle/>
-                    <a:p>
-                      <a:r>
-                        <a:rPr sz="1100" b="0">
-                          <a:solidFill>
-                            <a:srgbClr val="282828"/>
-                          </a:solidFill>
-                          <a:latin typeface="Arial"/>
-                        </a:rPr>
-                        <a:t>analyzer: plate λ/300; 1° azimuth; λ/100</a:t>
-                      </a:r>
-                    </a:p>
-                  </a:txBody>
-                  <a:tcPr marL="54864" marR="54864" marT="18288" marB="18288">
-                    <a:solidFill>
-                      <a:srgbClr val="FFFFFF"/>
-                    </a:solidFill>
-                  </a:tcPr>
-                </a:tc>
-                <a:tc>
-                  <a:txBody>
-                    <a:bodyPr wrap="square"/>
-                    <a:lstStyle/>
-                    <a:p>
-                      <a:r>
-                        <a:rPr sz="1100" b="0">
-                          <a:solidFill>
-                            <a:srgbClr val="282828"/>
-                          </a:solidFill>
-                          <a:latin typeface="Arial"/>
-                        </a:rPr>
-                        <a:t>165; 263; 496 pm</a:t>
-                      </a:r>
-                    </a:p>
-                  </a:txBody>
-                  <a:tcPr marL="54864" marR="54864" marT="18288" marB="18288">
-                    <a:solidFill>
-                      <a:srgbClr val="FFFFFF"/>
-                    </a:solidFill>
-                  </a:tcPr>
-                </a:tc>
-                <a:tc>
-                  <a:txBody>
-                    <a:bodyPr wrap="square"/>
-                    <a:lstStyle/>
-                    <a:p>
-                      <a:r>
-                        <a:rPr sz="1100" b="0">
-                          <a:solidFill>
-                            <a:srgbClr val="282828"/>
-                          </a:solidFill>
-                          <a:latin typeface="Arial"/>
-                        </a:rPr>
-                        <a:t>0.9932 / 4; 0.9932 / 4; 0.9928 / 4 pm</a:t>
-                      </a:r>
-                    </a:p>
-                  </a:txBody>
-                  <a:tcPr marL="54864" marR="54864" marT="18288" marB="18288">
-                    <a:solidFill>
-                      <a:srgbClr val="FFFFFF"/>
-                    </a:solidFill>
-                  </a:tcPr>
-                </a:tc>
-              </a:tr>
-            </a:tbl>
-          </a:graphicData>
-        </a:graphic>
-      </p:graphicFrame>
-      <p:sp>
-        <p:nvSpPr>
-          <p:cNvPr id="5" name="TextBox 4"/>
-          <p:cNvSpPr txBox="1"/>
-          <p:nvPr/>
-        </p:nvSpPr>
-        <p:spPr>
-          <a:xfrm>
-            <a:off x="6400800" y="1298448"/>
-            <a:ext cx="5394960" cy="274320"/>
-          </a:xfrm>
-          <a:prstGeom prst="rect">
-            <a:avLst/>
-          </a:prstGeom>
-          <a:noFill/>
-        </p:spPr>
-        <p:txBody>
-          <a:bodyPr wrap="square">
-            <a:spAutoFit/>
-          </a:bodyPr>
-          <a:lstStyle/>
-          <a:p>
-            <a:pPr>
-              <a:spcAft>
-                <a:spcPts val="600"/>
-              </a:spcAft>
-            </a:pPr>
-            <a:r>
-              <a:rPr sz="1200" b="0">
-                <a:solidFill>
-                  <a:srgbClr val="282828"/>
-                </a:solidFill>
-                <a:latin typeface="Arial"/>
-              </a:rPr>
               <a:t>•  The arm: six 7° glass faces give 5e-3 diattenuation and 0.9 mrad retardance; because the Jones matrix is real, the two circular channels differ in phase only, 1.6 mrad rms at the worst laser angle and 2e-5 along the fold plane's axis.  Rule: specify pupil-varying diattenuation, put the laser on the eigenaxis.</a:t>
             </a:r>
           </a:p>
@@ -19123,7 +19607,7 @@
 </p:sld>
 </file>
 
-<file path=ppt/slides/slide33.xml><?xml version="1.0" encoding="utf-8"?>
+<file path=ppt/slides/slide34.xml><?xml version="1.0" encoding="utf-8"?>
 <p:sld xmlns:a="http://schemas.openxmlformats.org/drawingml/2006/main" xmlns:p="http://schemas.openxmlformats.org/presentationml/2006/main" xmlns:r="http://schemas.openxmlformats.org/officeDocument/2006/relationships">
   <p:cSld>
     <p:spTree>
@@ -19413,7 +19897,7 @@
 </p:sld>
 </file>
 
-<file path=ppt/slides/slide34.xml><?xml version="1.0" encoding="utf-8"?>
+<file path=ppt/slides/slide35.xml><?xml version="1.0" encoding="utf-8"?>
 <p:sld xmlns:a="http://schemas.openxmlformats.org/drawingml/2006/main" xmlns:p="http://schemas.openxmlformats.org/presentationml/2006/main" xmlns:r="http://schemas.openxmlformats.org/officeDocument/2006/relationships">
   <p:cSld>
     <p:spTree>
@@ -19457,7 +19941,7 @@
                 </a:solidFill>
                 <a:latin typeface="Arial"/>
               </a:rPr>
-              <a:t>Backup: why the splitter moves from 7° to 30°</a:t>
+              <a:t>Backup: the clearance scan behind the 22.5° choice</a:t>
             </a:r>
           </a:p>
           <a:p>
@@ -19946,7 +20430,7 @@
       </p:sp>
       <p:pic>
         <p:nvPicPr>
-          <p:cNvPr id="6" name="Picture 5" descr="crop_bench_bs22_node.png"/>
+          <p:cNvPr id="6" name="Picture 5" descr="crop_bench_bs30_node.png"/>
           <p:cNvPicPr>
             <a:picLocks noChangeAspect="1"/>
           </p:cNvPicPr>
@@ -19960,8 +20444,8 @@
         </p:blipFill>
         <p:spPr>
           <a:xfrm>
-            <a:off x="7496678" y="1298448"/>
-            <a:ext cx="3203203" cy="1965451"/>
+            <a:off x="7364768" y="1298448"/>
+            <a:ext cx="3467022" cy="1965451"/>
           </a:xfrm>
           <a:prstGeom prst="rect">
             <a:avLst/>
@@ -20002,7 +20486,7 @@
                 </a:solidFill>
                 <a:latin typeface="Arial"/>
               </a:rPr>
-              <a:t>The node at 22.5°, the alternative: every part clears, the compensator by 16 mm.</a:t>
+              <a:t>The node at 30°: the compensator clears by 57 mm, the rest by 178 mm or more.</a:t>
             </a:r>
           </a:p>
         </p:txBody>
@@ -20023,8 +20507,8 @@
         </p:blipFill>
         <p:spPr>
           <a:xfrm>
-            <a:off x="7414234" y="3547872"/>
-            <a:ext cx="3368090" cy="1965451"/>
+            <a:off x="7355974" y="3547872"/>
+            <a:ext cx="3484610" cy="1965451"/>
           </a:xfrm>
           <a:prstGeom prst="rect">
             <a:avLst/>
@@ -20117,7 +20601,7 @@
 </p:sld>
 </file>
 
-<file path=ppt/slides/slide35.xml><?xml version="1.0" encoding="utf-8"?>
+<file path=ppt/slides/slide36.xml><?xml version="1.0" encoding="utf-8"?>
 <p:sld xmlns:a="http://schemas.openxmlformats.org/drawingml/2006/main" xmlns:p="http://schemas.openxmlformats.org/presentationml/2006/main" xmlns:r="http://schemas.openxmlformats.org/officeDocument/2006/relationships">
   <p:cSld>
     <p:spTree>
@@ -20420,7 +20904,7 @@
                 </a:solidFill>
                 <a:latin typeface="Arial"/>
               </a:rPr>
-              <a:t>Interferometer: Twyman-Green, four phase steps</a:t>
+              <a:t>The splitter angle: three options</a:t>
             </a:r>
           </a:p>
           <a:p>
@@ -20436,7 +20920,7 @@
                 </a:solidFill>
                 <a:latin typeface="Arial"/>
               </a:rPr>
-              <a:t>Its best form is the hybrid: a polarization snapshot for every change measurement, a piezo four-step for the absolute calibration; the reference arm makes it the one gauge that captures a whole wave of figure</a:t>
+              <a:t>The record's 7° cannot be built; 22.5° clears every part and is the choice; 30° adds margin at the price of a wider bench and more plate polarization</a:t>
             </a:r>
           </a:p>
         </p:txBody>
@@ -20485,16 +20969,40 @@
           </a:p>
         </p:txBody>
       </p:sp>
+      <p:pic>
+        <p:nvPicPr>
+          <p:cNvPr id="4" name="Picture 3" descr="bench_three_nodes.png"/>
+          <p:cNvPicPr>
+            <a:picLocks noChangeAspect="1"/>
+          </p:cNvPicPr>
+          <p:nvPr/>
+        </p:nvPicPr>
+        <p:blipFill>
+          <a:blip r:embed="rId2"/>
+          <a:stretch>
+            <a:fillRect/>
+          </a:stretch>
+        </p:blipFill>
+        <p:spPr>
+          <a:xfrm>
+            <a:off x="2242989" y="1298448"/>
+            <a:ext cx="7705716" cy="1434592"/>
+          </a:xfrm>
+          <a:prstGeom prst="rect">
+            <a:avLst/>
+          </a:prstGeom>
+        </p:spPr>
+      </p:pic>
       <p:sp>
         <p:nvSpPr>
-          <p:cNvPr id="4" name="TextBox 3"/>
+          <p:cNvPr id="5" name="TextBox 4"/>
           <p:cNvSpPr txBox="1"/>
           <p:nvPr/>
         </p:nvSpPr>
         <p:spPr>
           <a:xfrm>
-            <a:off x="411480" y="1298448"/>
-            <a:ext cx="5806440" cy="274320"/>
+            <a:off x="411480" y="2751328"/>
+            <a:ext cx="11368735" cy="394208"/>
           </a:xfrm>
           <a:prstGeom prst="rect">
             <a:avLst/>
@@ -20507,66 +21015,34 @@
           </a:bodyPr>
           <a:lstStyle/>
           <a:p>
-            <a:pPr>
+            <a:pPr algn="ctr">
               <a:spcAft>
-                <a:spcPts val="600"/>
+                <a:spcPts val="0"/>
               </a:spcAft>
             </a:pPr>
             <a:r>
-              <a:rPr sz="1200" b="0">
+              <a:rPr sz="1000" b="0">
                 <a:solidFill>
-                  <a:srgbClr val="282828"/>
+                  <a:srgbClr val="6E6E6E"/>
                 </a:solidFill>
                 <a:latin typeface="Arial"/>
               </a:rPr>
-              <a:t>•  How it reads: the test beam from the mirror interferes with the flat's beam; four frames at four phase steps give the phase at every pixel.  The snapshot form takes the four frames at once through polarization optics (no drift within a scan); the piezo form steps the flat in time (no polarization systematics).  Each removes the other's error.</a:t>
-            </a:r>
-          </a:p>
-          <a:p>
-            <a:pPr>
-              <a:spcAft>
-                <a:spcPts val="600"/>
-              </a:spcAft>
-            </a:pPr>
-            <a:r>
-              <a:rPr sz="1200" b="0">
-                <a:solidFill>
-                  <a:srgbClr val="282828"/>
-                </a:solidFill>
-                <a:latin typeface="Arial"/>
-              </a:rPr>
-              <a:t>•  On the 30 nm surface, matrix measured on it: 10 nm on one actuator 0.991 / 2 pm / SNR 6076; 1 nm on 52 sites 0.990 / 1 pm; dense 10 nm 0.990, 168 pm.</a:t>
-            </a:r>
-          </a:p>
-          <a:p>
-            <a:pPr>
-              <a:spcAft>
-                <a:spcPts val="600"/>
-              </a:spcAft>
-            </a:pPr>
-            <a:r>
-              <a:rPr sz="1200" b="0">
-                <a:solidFill>
-                  <a:srgbClr val="282828"/>
-                </a:solidFill>
-                <a:latin typeface="Arial"/>
-              </a:rPr>
-              <a:t>•  Servo: 3 pm from 5.5e12 photons per cycle with noise only, 2.0e13 under a 2 pm per-cycle actuator walk; a fixed error of about 9% on a noiseless step, from the four-step's roll-off.</a:t>
+              <a:t>The node at 7° (left, the record: eight parts in another beam), 22.5° (middle, the choice: every part clears, the compensator by 16 mm) and 30° (right: the compensator by 57 mm); the output plate and analyzer moved to 160 mm behind the splitter in the last two.  The three panels are the tool's own node drawings, placed side by side.</a:t>
             </a:r>
           </a:p>
         </p:txBody>
       </p:sp>
       <p:graphicFrame>
         <p:nvGraphicFramePr>
-          <p:cNvPr id="5" name="Table 4"/>
+          <p:cNvPr id="6" name="Table 5"/>
           <p:cNvGraphicFramePr>
             <a:graphicFrameLocks noGrp="1"/>
           </p:cNvGraphicFramePr>
           <p:nvPr/>
         </p:nvGraphicFramePr>
         <p:xfrm>
-          <a:off x="6400800" y="1298448"/>
-          <a:ext cx="5394959" cy="1828800"/>
+          <a:off x="411480" y="3182112"/>
+          <a:ext cx="11368734" cy="3183255"/>
         </p:xfrm>
         <a:graphic>
           <a:graphicData uri="http://schemas.openxmlformats.org/drawingml/2006/table">
@@ -20575,23 +21051,25 @@
                 <a:tableStyleId>{5C22544A-7EE6-4342-B048-85BDC9FD1C3A}</a:tableStyleId>
               </a:tblPr>
               <a:tblGrid>
-                <a:gridCol w="2861415"/>
-                <a:gridCol w="2533544"/>
+                <a:gridCol w="3410620"/>
+                <a:gridCol w="2273747"/>
+                <a:gridCol w="3284301"/>
+                <a:gridCol w="2400066"/>
               </a:tblGrid>
-              <a:tr h="262890">
-                <a:tc>
-                  <a:txBody>
-                    <a:bodyPr wrap="square"/>
-                    <a:lstStyle/>
-                    <a:p>
-                      <a:r>
-                        <a:rPr sz="1000" b="1">
+              <a:tr h="280035">
+                <a:tc>
+                  <a:txBody>
+                    <a:bodyPr wrap="square"/>
+                    <a:lstStyle/>
+                    <a:p>
+                      <a:r>
+                        <a:rPr sz="1100" b="1">
                           <a:solidFill>
                             <a:srgbClr val="FFFFFF"/>
                           </a:solidFill>
                           <a:latin typeface="Arial"/>
                         </a:rPr>
-                        <a:t>added to the front end</a:t>
+                        <a:t>impact</a:t>
                       </a:r>
                     </a:p>
                   </a:txBody>
@@ -20607,13 +21085,13 @@
                     <a:lstStyle/>
                     <a:p>
                       <a:r>
-                        <a:rPr sz="1000" b="1">
+                        <a:rPr sz="1100" b="1">
                           <a:solidFill>
                             <a:srgbClr val="FFFFFF"/>
                           </a:solidFill>
                           <a:latin typeface="Arial"/>
                         </a:rPr>
-                        <a:t>value</a:t>
+                        <a:t>7° (record)</a:t>
                       </a:r>
                     </a:p>
                   </a:txBody>
@@ -20623,21 +21101,65 @@
                     </a:solidFill>
                   </a:tcPr>
                 </a:tc>
+                <a:tc>
+                  <a:txBody>
+                    <a:bodyPr wrap="square"/>
+                    <a:lstStyle/>
+                    <a:p>
+                      <a:r>
+                        <a:rPr sz="1100" b="1">
+                          <a:solidFill>
+                            <a:srgbClr val="FFFFFF"/>
+                          </a:solidFill>
+                          <a:latin typeface="Arial"/>
+                        </a:rPr>
+                        <a:t>22.5° (choice)</a:t>
+                      </a:r>
+                    </a:p>
+                  </a:txBody>
+                  <a:tcPr marL="54864" marR="54864" marT="18288" marB="18288">
+                    <a:solidFill>
+                      <a:srgbClr val="1F4E79"/>
+                    </a:solidFill>
+                  </a:tcPr>
+                </a:tc>
+                <a:tc>
+                  <a:txBody>
+                    <a:bodyPr wrap="square"/>
+                    <a:lstStyle/>
+                    <a:p>
+                      <a:r>
+                        <a:rPr sz="1100" b="1">
+                          <a:solidFill>
+                            <a:srgbClr val="FFFFFF"/>
+                          </a:solidFill>
+                          <a:latin typeface="Arial"/>
+                        </a:rPr>
+                        <a:t>30°</a:t>
+                      </a:r>
+                    </a:p>
+                  </a:txBody>
+                  <a:tcPr marL="54864" marR="54864" marT="18288" marB="18288">
+                    <a:solidFill>
+                      <a:srgbClr val="1F4E79"/>
+                    </a:solidFill>
+                  </a:tcPr>
+                </a:tc>
               </a:tr>
-              <a:tr h="262890">
-                <a:tc>
-                  <a:txBody>
-                    <a:bodyPr wrap="square"/>
-                    <a:lstStyle/>
-                    <a:p>
-                      <a:r>
-                        <a:rPr sz="1000" b="0">
-                          <a:solidFill>
-                            <a:srgbClr val="282828"/>
-                          </a:solidFill>
-                          <a:latin typeface="Arial"/>
-                        </a:rPr>
-                        <a:t>reference flat on a piezo stage</a:t>
+              <a:tr h="468630">
+                <a:tc>
+                  <a:txBody>
+                    <a:bodyPr wrap="square"/>
+                    <a:lstStyle/>
+                    <a:p>
+                      <a:r>
+                        <a:rPr sz="1100" b="0">
+                          <a:solidFill>
+                            <a:srgbClr val="282828"/>
+                          </a:solidFill>
+                          <a:latin typeface="Arial"/>
+                        </a:rPr>
+                        <a:t>node clearance, worst part</a:t>
                       </a:r>
                     </a:p>
                   </a:txBody>
@@ -20653,13 +21175,13 @@
                     <a:lstStyle/>
                     <a:p>
                       <a:r>
-                        <a:rPr sz="1000" b="0">
-                          <a:solidFill>
-                            <a:srgbClr val="282828"/>
-                          </a:solidFill>
-                          <a:latin typeface="Arial"/>
-                        </a:rPr>
-                        <a:t>103 mm, protected aluminum, 564 mm leg</a:t>
+                        <a:rPr sz="1100" b="0">
+                          <a:solidFill>
+                            <a:srgbClr val="282828"/>
+                          </a:solidFill>
+                          <a:latin typeface="Arial"/>
+                        </a:rPr>
+                        <a:t>−109 mm: not buildable</a:t>
                       </a:r>
                     </a:p>
                   </a:txBody>
@@ -20669,21 +21191,65 @@
                     </a:solidFill>
                   </a:tcPr>
                 </a:tc>
+                <a:tc>
+                  <a:txBody>
+                    <a:bodyPr wrap="square"/>
+                    <a:lstStyle/>
+                    <a:p>
+                      <a:r>
+                        <a:rPr sz="1100" b="0">
+                          <a:solidFill>
+                            <a:srgbClr val="282828"/>
+                          </a:solidFill>
+                          <a:latin typeface="Arial"/>
+                        </a:rPr>
+                        <a:t>compensator +16 mm; output optics +55 / +65; L2 +100</a:t>
+                      </a:r>
+                    </a:p>
+                  </a:txBody>
+                  <a:tcPr marL="54864" marR="54864" marT="18288" marB="18288">
+                    <a:solidFill>
+                      <a:srgbClr val="FFFFFF"/>
+                    </a:solidFill>
+                  </a:tcPr>
+                </a:tc>
+                <a:tc>
+                  <a:txBody>
+                    <a:bodyPr wrap="square"/>
+                    <a:lstStyle/>
+                    <a:p>
+                      <a:r>
+                        <a:rPr sz="1100" b="0">
+                          <a:solidFill>
+                            <a:srgbClr val="282828"/>
+                          </a:solidFill>
+                          <a:latin typeface="Arial"/>
+                        </a:rPr>
+                        <a:t>compensator +57; the rest +178 or more</a:t>
+                      </a:r>
+                    </a:p>
+                  </a:txBody>
+                  <a:tcPr marL="54864" marR="54864" marT="18288" marB="18288">
+                    <a:solidFill>
+                      <a:srgbClr val="FFFFFF"/>
+                    </a:solidFill>
+                  </a:tcPr>
+                </a:tc>
               </a:tr>
-              <a:tr h="262890">
-                <a:tc>
-                  <a:txBody>
-                    <a:bodyPr wrap="square"/>
-                    <a:lstStyle/>
-                    <a:p>
-                      <a:r>
-                        <a:rPr sz="1000" b="0">
-                          <a:solidFill>
-                            <a:srgbClr val="282828"/>
-                          </a:solidFill>
-                          <a:latin typeface="Arial"/>
-                        </a:rPr>
-                        <a:t>compensator plate</a:t>
+              <a:tr h="468630">
+                <a:tc>
+                  <a:txBody>
+                    <a:bodyPr wrap="square"/>
+                    <a:lstStyle/>
+                    <a:p>
+                      <a:r>
+                        <a:rPr sz="1100" b="0">
+                          <a:solidFill>
+                            <a:srgbClr val="282828"/>
+                          </a:solidFill>
+                          <a:latin typeface="Arial"/>
+                        </a:rPr>
+                        <a:t>bench shape</a:t>
                       </a:r>
                     </a:p>
                   </a:txBody>
@@ -20699,13 +21265,13 @@
                     <a:lstStyle/>
                     <a:p>
                       <a:r>
-                        <a:rPr sz="1000" b="0">
-                          <a:solidFill>
-                            <a:srgbClr val="282828"/>
-                          </a:solidFill>
-                          <a:latin typeface="Arial"/>
-                        </a:rPr>
-                        <a:t>matched to the splitter</a:t>
+                        <a:rPr sz="1100" b="0">
+                          <a:solidFill>
+                            <a:srgbClr val="282828"/>
+                          </a:solidFill>
+                          <a:latin typeface="Arial"/>
+                        </a:rPr>
+                        <a:t>all four legs within 14° of one line</a:t>
                       </a:r>
                     </a:p>
                   </a:txBody>
@@ -20715,21 +21281,65 @@
                     </a:solidFill>
                   </a:tcPr>
                 </a:tc>
+                <a:tc>
+                  <a:txBody>
+                    <a:bodyPr wrap="square"/>
+                    <a:lstStyle/>
+                    <a:p>
+                      <a:r>
+                        <a:rPr sz="1100" b="0">
+                          <a:solidFill>
+                            <a:srgbClr val="282828"/>
+                          </a:solidFill>
+                          <a:latin typeface="Arial"/>
+                        </a:rPr>
+                        <a:t>mirror leg at 45° to the source leg</a:t>
+                      </a:r>
+                    </a:p>
+                  </a:txBody>
+                  <a:tcPr marL="54864" marR="54864" marT="18288" marB="18288">
+                    <a:solidFill>
+                      <a:srgbClr val="ECF1F6"/>
+                    </a:solidFill>
+                  </a:tcPr>
+                </a:tc>
+                <a:tc>
+                  <a:txBody>
+                    <a:bodyPr wrap="square"/>
+                    <a:lstStyle/>
+                    <a:p>
+                      <a:r>
+                        <a:rPr sz="1100" b="0">
+                          <a:solidFill>
+                            <a:srgbClr val="282828"/>
+                          </a:solidFill>
+                          <a:latin typeface="Arial"/>
+                        </a:rPr>
+                        <a:t>mirror leg at 60°</a:t>
+                      </a:r>
+                    </a:p>
+                  </a:txBody>
+                  <a:tcPr marL="54864" marR="54864" marT="18288" marB="18288">
+                    <a:solidFill>
+                      <a:srgbClr val="ECF1F6"/>
+                    </a:solidFill>
+                  </a:tcPr>
+                </a:tc>
               </a:tr>
-              <a:tr h="605790">
-                <a:tc>
-                  <a:txBody>
-                    <a:bodyPr wrap="square"/>
-                    <a:lstStyle/>
-                    <a:p>
-                      <a:r>
-                        <a:rPr sz="1000" b="0">
-                          <a:solidFill>
-                            <a:srgbClr val="282828"/>
-                          </a:solidFill>
-                          <a:latin typeface="Arial"/>
-                        </a:rPr>
-                        <a:t>snapshot form: input polarizer, two arm quarter-wave plates, output quarter-wave plate, analyzer</a:t>
+              <a:tr h="468630">
+                <a:tc>
+                  <a:txBody>
+                    <a:bodyPr wrap="square"/>
+                    <a:lstStyle/>
+                    <a:p>
+                      <a:r>
+                        <a:rPr sz="1100" b="0">
+                          <a:solidFill>
+                            <a:srgbClr val="282828"/>
+                          </a:solidFill>
+                          <a:latin typeface="Arial"/>
+                        </a:rPr>
+                        <a:t>plate's polarization (mean diattenuation, uniform)</a:t>
                       </a:r>
                     </a:p>
                   </a:txBody>
@@ -20745,13 +21355,13 @@
                     <a:lstStyle/>
                     <a:p>
                       <a:r>
-                        <a:rPr sz="1000" b="0">
-                          <a:solidFill>
-                            <a:srgbClr val="282828"/>
-                          </a:solidFill>
-                          <a:latin typeface="Arial"/>
-                        </a:rPr>
-                        <a:t>zero-order plates on 2-3 mm substrates (to be modeled); azimuths 45 / 0 / 45 / 0 / 0°</a:t>
+                        <a:rPr sz="1100" b="0">
+                          <a:solidFill>
+                            <a:srgbClr val="282828"/>
+                          </a:solidFill>
+                          <a:latin typeface="Arial"/>
+                        </a:rPr>
+                        <a:t>0.5%</a:t>
                       </a:r>
                     </a:p>
                   </a:txBody>
@@ -20761,21 +21371,65 @@
                     </a:solidFill>
                   </a:tcPr>
                 </a:tc>
+                <a:tc>
+                  <a:txBody>
+                    <a:bodyPr wrap="square"/>
+                    <a:lstStyle/>
+                    <a:p>
+                      <a:r>
+                        <a:rPr sz="1100" b="0">
+                          <a:solidFill>
+                            <a:srgbClr val="282828"/>
+                          </a:solidFill>
+                          <a:latin typeface="Arial"/>
+                        </a:rPr>
+                        <a:t>5.5%</a:t>
+                      </a:r>
+                    </a:p>
+                  </a:txBody>
+                  <a:tcPr marL="54864" marR="54864" marT="18288" marB="18288">
+                    <a:solidFill>
+                      <a:srgbClr val="FFFFFF"/>
+                    </a:solidFill>
+                  </a:tcPr>
+                </a:tc>
+                <a:tc>
+                  <a:txBody>
+                    <a:bodyPr wrap="square"/>
+                    <a:lstStyle/>
+                    <a:p>
+                      <a:r>
+                        <a:rPr sz="1100" b="0">
+                          <a:solidFill>
+                            <a:srgbClr val="282828"/>
+                          </a:solidFill>
+                          <a:latin typeface="Arial"/>
+                        </a:rPr>
+                        <a:t>10%</a:t>
+                      </a:r>
+                    </a:p>
+                  </a:txBody>
+                  <a:tcPr marL="54864" marR="54864" marT="18288" marB="18288">
+                    <a:solidFill>
+                      <a:srgbClr val="FFFFFF"/>
+                    </a:solidFill>
+                  </a:tcPr>
+                </a:tc>
               </a:tr>
-              <a:tr h="434340">
-                <a:tc>
-                  <a:txBody>
-                    <a:bodyPr wrap="square"/>
-                    <a:lstStyle/>
-                    <a:p>
-                      <a:r>
-                        <a:rPr sz="1000" b="0">
-                          <a:solidFill>
-                            <a:srgbClr val="282828"/>
-                          </a:solidFill>
-                          <a:latin typeface="Arial"/>
-                        </a:rPr>
-                        <a:t>frames per measurement</a:t>
+              <a:tr h="468630">
+                <a:tc>
+                  <a:txBody>
+                    <a:bodyPr wrap="square"/>
+                    <a:lstStyle/>
+                    <a:p>
+                      <a:r>
+                        <a:rPr sz="1100" b="0">
+                          <a:solidFill>
+                            <a:srgbClr val="282828"/>
+                          </a:solidFill>
+                          <a:latin typeface="Arial"/>
+                        </a:rPr>
+                        <a:t>pupil-varying part (the lenses; what the sensors feel)</a:t>
                       </a:r>
                     </a:p>
                   </a:txBody>
@@ -20791,19 +21445,333 @@
                     <a:lstStyle/>
                     <a:p>
                       <a:r>
-                        <a:rPr sz="1000" b="0">
-                          <a:solidFill>
-                            <a:srgbClr val="282828"/>
-                          </a:solidFill>
-                          <a:latin typeface="Arial"/>
-                        </a:rPr>
-                        <a:t>4 (snapshot: at once; piezo: in sequence)</a:t>
+                        <a:rPr sz="1100" b="0">
+                          <a:solidFill>
+                            <a:srgbClr val="282828"/>
+                          </a:solidFill>
+                          <a:latin typeface="Arial"/>
+                        </a:rPr>
+                        <a:t>1.1e-3 rms</a:t>
                       </a:r>
                     </a:p>
                   </a:txBody>
                   <a:tcPr marL="54864" marR="54864" marT="18288" marB="18288">
                     <a:solidFill>
                       <a:srgbClr val="ECF1F6"/>
+                    </a:solidFill>
+                  </a:tcPr>
+                </a:tc>
+                <a:tc>
+                  <a:txBody>
+                    <a:bodyPr wrap="square"/>
+                    <a:lstStyle/>
+                    <a:p>
+                      <a:r>
+                        <a:rPr sz="1100" b="0">
+                          <a:solidFill>
+                            <a:srgbClr val="282828"/>
+                          </a:solidFill>
+                          <a:latin typeface="Arial"/>
+                        </a:rPr>
+                        <a:t>1.1e-3 rms</a:t>
+                      </a:r>
+                    </a:p>
+                  </a:txBody>
+                  <a:tcPr marL="54864" marR="54864" marT="18288" marB="18288">
+                    <a:solidFill>
+                      <a:srgbClr val="ECF1F6"/>
+                    </a:solidFill>
+                  </a:tcPr>
+                </a:tc>
+                <a:tc>
+                  <a:txBody>
+                    <a:bodyPr wrap="square"/>
+                    <a:lstStyle/>
+                    <a:p>
+                      <a:r>
+                        <a:rPr sz="1100" b="0">
+                          <a:solidFill>
+                            <a:srgbClr val="282828"/>
+                          </a:solidFill>
+                          <a:latin typeface="Arial"/>
+                        </a:rPr>
+                        <a:t>1.1e-3 rms</a:t>
+                      </a:r>
+                    </a:p>
+                  </a:txBody>
+                  <a:tcPr marL="54864" marR="54864" marT="18288" marB="18288">
+                    <a:solidFill>
+                      <a:srgbClr val="ECF1F6"/>
+                    </a:solidFill>
+                  </a:tcPr>
+                </a:tc>
+              </a:tr>
+              <a:tr h="468630">
+                <a:tc>
+                  <a:txBody>
+                    <a:bodyPr wrap="square"/>
+                    <a:lstStyle/>
+                    <a:p>
+                      <a:r>
+                        <a:rPr sz="1100" b="0">
+                          <a:solidFill>
+                            <a:srgbClr val="282828"/>
+                          </a:solidFill>
+                          <a:latin typeface="Arial"/>
+                        </a:rPr>
+                        <a:t>vector sensor, channel phase difference / 100 nm pokes</a:t>
+                      </a:r>
+                    </a:p>
+                  </a:txBody>
+                  <a:tcPr marL="54864" marR="54864" marT="18288" marB="18288">
+                    <a:solidFill>
+                      <a:srgbClr val="FFFFFF"/>
+                    </a:solidFill>
+                  </a:tcPr>
+                </a:tc>
+                <a:tc>
+                  <a:txBody>
+                    <a:bodyPr wrap="square"/>
+                    <a:lstStyle/>
+                    <a:p>
+                      <a:r>
+                        <a:rPr sz="1100" b="0">
+                          <a:solidFill>
+                            <a:srgbClr val="282828"/>
+                          </a:solidFill>
+                          <a:latin typeface="Arial"/>
+                        </a:rPr>
+                        <a:t>1.63 mrad / 9.0 pm</a:t>
+                      </a:r>
+                    </a:p>
+                  </a:txBody>
+                  <a:tcPr marL="54864" marR="54864" marT="18288" marB="18288">
+                    <a:solidFill>
+                      <a:srgbClr val="FFFFFF"/>
+                    </a:solidFill>
+                  </a:tcPr>
+                </a:tc>
+                <a:tc>
+                  <a:txBody>
+                    <a:bodyPr wrap="square"/>
+                    <a:lstStyle/>
+                    <a:p>
+                      <a:r>
+                        <a:rPr sz="1100" b="0">
+                          <a:solidFill>
+                            <a:srgbClr val="282828"/>
+                          </a:solidFill>
+                          <a:latin typeface="Arial"/>
+                        </a:rPr>
+                        <a:t>1.66 mrad / 8.8 pm</a:t>
+                      </a:r>
+                    </a:p>
+                  </a:txBody>
+                  <a:tcPr marL="54864" marR="54864" marT="18288" marB="18288">
+                    <a:solidFill>
+                      <a:srgbClr val="FFFFFF"/>
+                    </a:solidFill>
+                  </a:tcPr>
+                </a:tc>
+                <a:tc>
+                  <a:txBody>
+                    <a:bodyPr wrap="square"/>
+                    <a:lstStyle/>
+                    <a:p>
+                      <a:r>
+                        <a:rPr sz="1100" b="0">
+                          <a:solidFill>
+                            <a:srgbClr val="282828"/>
+                          </a:solidFill>
+                          <a:latin typeface="Arial"/>
+                        </a:rPr>
+                        <a:t>1.69 mrad / 9.1 pm</a:t>
+                      </a:r>
+                    </a:p>
+                  </a:txBody>
+                  <a:tcPr marL="54864" marR="54864" marT="18288" marB="18288">
+                    <a:solidFill>
+                      <a:srgbClr val="FFFFFF"/>
+                    </a:solidFill>
+                  </a:tcPr>
+                </a:tc>
+              </a:tr>
+              <a:tr h="280035">
+                <a:tc>
+                  <a:txBody>
+                    <a:bodyPr wrap="square"/>
+                    <a:lstStyle/>
+                    <a:p>
+                      <a:r>
+                        <a:rPr sz="1100" b="0">
+                          <a:solidFill>
+                            <a:srgbClr val="282828"/>
+                          </a:solidFill>
+                          <a:latin typeface="Arial"/>
+                        </a:rPr>
+                        <a:t>transmitted beam shift in the 2.6 mm plate</a:t>
+                      </a:r>
+                    </a:p>
+                  </a:txBody>
+                  <a:tcPr marL="54864" marR="54864" marT="18288" marB="18288">
+                    <a:solidFill>
+                      <a:srgbClr val="ECF1F6"/>
+                    </a:solidFill>
+                  </a:tcPr>
+                </a:tc>
+                <a:tc>
+                  <a:txBody>
+                    <a:bodyPr wrap="square"/>
+                    <a:lstStyle/>
+                    <a:p>
+                      <a:r>
+                        <a:rPr sz="1100" b="0">
+                          <a:solidFill>
+                            <a:srgbClr val="282828"/>
+                          </a:solidFill>
+                          <a:latin typeface="Arial"/>
+                        </a:rPr>
+                        <a:t>0.1 mm</a:t>
+                      </a:r>
+                    </a:p>
+                  </a:txBody>
+                  <a:tcPr marL="54864" marR="54864" marT="18288" marB="18288">
+                    <a:solidFill>
+                      <a:srgbClr val="ECF1F6"/>
+                    </a:solidFill>
+                  </a:tcPr>
+                </a:tc>
+                <a:tc>
+                  <a:txBody>
+                    <a:bodyPr wrap="square"/>
+                    <a:lstStyle/>
+                    <a:p>
+                      <a:r>
+                        <a:rPr sz="1100" b="0">
+                          <a:solidFill>
+                            <a:srgbClr val="282828"/>
+                          </a:solidFill>
+                          <a:latin typeface="Arial"/>
+                        </a:rPr>
+                        <a:t>0.36 mm (1.4 at 10 mm)</a:t>
+                      </a:r>
+                    </a:p>
+                  </a:txBody>
+                  <a:tcPr marL="54864" marR="54864" marT="18288" marB="18288">
+                    <a:solidFill>
+                      <a:srgbClr val="ECF1F6"/>
+                    </a:solidFill>
+                  </a:tcPr>
+                </a:tc>
+                <a:tc>
+                  <a:txBody>
+                    <a:bodyPr wrap="square"/>
+                    <a:lstStyle/>
+                    <a:p>
+                      <a:r>
+                        <a:rPr sz="1100" b="0">
+                          <a:solidFill>
+                            <a:srgbClr val="282828"/>
+                          </a:solidFill>
+                          <a:latin typeface="Arial"/>
+                        </a:rPr>
+                        <a:t>0.50 mm</a:t>
+                      </a:r>
+                    </a:p>
+                  </a:txBody>
+                  <a:tcPr marL="54864" marR="54864" marT="18288" marB="18288">
+                    <a:solidFill>
+                      <a:srgbClr val="ECF1F6"/>
+                    </a:solidFill>
+                  </a:tcPr>
+                </a:tc>
+              </a:tr>
+              <a:tr h="280035">
+                <a:tc>
+                  <a:txBody>
+                    <a:bodyPr wrap="square"/>
+                    <a:lstStyle/>
+                    <a:p>
+                      <a:r>
+                        <a:rPr sz="1100" b="0">
+                          <a:solidFill>
+                            <a:srgbClr val="282828"/>
+                          </a:solidFill>
+                          <a:latin typeface="Arial"/>
+                        </a:rPr>
+                        <a:t>interferometer snapshot form</a:t>
+                      </a:r>
+                    </a:p>
+                  </a:txBody>
+                  <a:tcPr marL="54864" marR="54864" marT="18288" marB="18288">
+                    <a:solidFill>
+                      <a:srgbClr val="FFFFFF"/>
+                    </a:solidFill>
+                  </a:tcPr>
+                </a:tc>
+                <a:tc>
+                  <a:txBody>
+                    <a:bodyPr wrap="square"/>
+                    <a:lstStyle/>
+                    <a:p>
+                      <a:r>
+                        <a:rPr sz="1100" b="0">
+                          <a:solidFill>
+                            <a:srgbClr val="282828"/>
+                          </a:solidFill>
+                          <a:latin typeface="Arial"/>
+                        </a:rPr>
+                        <a:t>the small-angle case</a:t>
+                      </a:r>
+                    </a:p>
+                  </a:txBody>
+                  <a:tcPr marL="54864" marR="54864" marT="18288" marB="18288">
+                    <a:solidFill>
+                      <a:srgbClr val="FFFFFF"/>
+                    </a:solidFill>
+                  </a:tcPr>
+                </a:tc>
+                <a:tc>
+                  <a:txBody>
+                    <a:bodyPr wrap="square"/>
+                    <a:lstStyle/>
+                    <a:p>
+                      <a:r>
+                        <a:rPr sz="1100" b="0">
+                          <a:solidFill>
+                            <a:srgbClr val="282828"/>
+                          </a:solidFill>
+                          <a:latin typeface="Arial"/>
+                        </a:rPr>
+                        <a:t>its plate systematics re-run at this angle</a:t>
+                      </a:r>
+                    </a:p>
+                  </a:txBody>
+                  <a:tcPr marL="54864" marR="54864" marT="18288" marB="18288">
+                    <a:solidFill>
+                      <a:srgbClr val="FFFFFF"/>
+                    </a:solidFill>
+                  </a:tcPr>
+                </a:tc>
+                <a:tc>
+                  <a:txBody>
+                    <a:bodyPr wrap="square"/>
+                    <a:lstStyle/>
+                    <a:p>
+                      <a:r>
+                        <a:rPr sz="1100" b="0">
+                          <a:solidFill>
+                            <a:srgbClr val="282828"/>
+                          </a:solidFill>
+                          <a:latin typeface="Arial"/>
+                        </a:rPr>
+                        <a:t>larger</a:t>
+                      </a:r>
+                    </a:p>
+                  </a:txBody>
+                  <a:tcPr marL="54864" marR="54864" marT="18288" marB="18288">
+                    <a:solidFill>
+                      <a:srgbClr val="FFFFFF"/>
                     </a:solidFill>
                   </a:tcPr>
                 </a:tc>
@@ -20814,14 +21782,14 @@
       </p:graphicFrame>
       <p:sp>
         <p:nvSpPr>
-          <p:cNvPr id="6" name="TextBox 5"/>
+          <p:cNvPr id="7" name="TextBox 6"/>
           <p:cNvSpPr txBox="1"/>
           <p:nvPr/>
         </p:nvSpPr>
         <p:spPr>
           <a:xfrm>
-            <a:off x="6400800" y="3273552"/>
-            <a:ext cx="5394960" cy="274320"/>
+            <a:off x="411480" y="6511671"/>
+            <a:ext cx="11368735" cy="274320"/>
           </a:xfrm>
           <a:prstGeom prst="rect">
             <a:avLst/>
@@ -20846,7 +21814,7 @@
                 </a:solidFill>
                 <a:latin typeface="Arial"/>
               </a:rPr>
-              <a:t>Run tags lens_deck, loop_lens, lens_deck_se2; the three phase-shift forms are priced in backup.</a:t>
+              <a:t>The sensors reproduce their rows at every angle; the interferometer's snapshot form is the one thing the angle changes, through the plate's polarization, and the cube form is built for 45°.  Run tags bs22_dev, bs30_dev; the panels at 7° and 30° are on the backup clearance slide.</a:t>
             </a:r>
           </a:p>
         </p:txBody>
@@ -20903,7 +21871,7 @@
                 </a:solidFill>
                 <a:latin typeface="Arial"/>
               </a:rPr>
-              <a:t>Interferometer: the node, at the proposed 30°</a:t>
+              <a:t>Interferometer: Twyman-Green, four phase steps</a:t>
             </a:r>
           </a:p>
           <a:p>
@@ -20919,7 +21887,7 @@
                 </a:solidFill>
                 <a:latin typeface="Arial"/>
               </a:rPr>
-              <a:t>Every part clears every beam it is not in by at least 57 mm: the collimator and input polarizer on the source leg, the compensator on the mirror leg, the output plate and analyzer moved to 160 mm behind the splitter ahead of the focuser</a:t>
+              <a:t>Its best form is the hybrid: a polarization snapshot for every change measurement, a piezo four-step for the absolute calibration; the reference arm makes it the one gauge that captures a whole wave of figure</a:t>
             </a:r>
           </a:p>
         </p:txBody>
@@ -20968,9 +21936,492 @@
           </a:p>
         </p:txBody>
       </p:sp>
+      <p:sp>
+        <p:nvSpPr>
+          <p:cNvPr id="4" name="TextBox 3"/>
+          <p:cNvSpPr txBox="1"/>
+          <p:nvPr/>
+        </p:nvSpPr>
+        <p:spPr>
+          <a:xfrm>
+            <a:off x="411480" y="1298448"/>
+            <a:ext cx="5806440" cy="274320"/>
+          </a:xfrm>
+          <a:prstGeom prst="rect">
+            <a:avLst/>
+          </a:prstGeom>
+          <a:noFill/>
+        </p:spPr>
+        <p:txBody>
+          <a:bodyPr wrap="square">
+            <a:spAutoFit/>
+          </a:bodyPr>
+          <a:lstStyle/>
+          <a:p>
+            <a:pPr>
+              <a:spcAft>
+                <a:spcPts val="600"/>
+              </a:spcAft>
+            </a:pPr>
+            <a:r>
+              <a:rPr sz="1200" b="0">
+                <a:solidFill>
+                  <a:srgbClr val="282828"/>
+                </a:solidFill>
+                <a:latin typeface="Arial"/>
+              </a:rPr>
+              <a:t>•  How it reads: the test beam from the mirror interferes with the flat's beam; four frames at four phase steps give the phase at every pixel.  The snapshot form takes the four frames at once through polarization optics (no drift within a scan); the piezo form steps the flat in time (no polarization systematics).  Each removes the other's error.</a:t>
+            </a:r>
+          </a:p>
+          <a:p>
+            <a:pPr>
+              <a:spcAft>
+                <a:spcPts val="600"/>
+              </a:spcAft>
+            </a:pPr>
+            <a:r>
+              <a:rPr sz="1200" b="0">
+                <a:solidFill>
+                  <a:srgbClr val="282828"/>
+                </a:solidFill>
+                <a:latin typeface="Arial"/>
+              </a:rPr>
+              <a:t>•  On the 30 nm surface, matrix measured on it: 10 nm on one actuator 0.991 / 2 pm / SNR 6076; 1 nm on 52 sites 0.990 / 1 pm; dense 10 nm 0.990, 168 pm.</a:t>
+            </a:r>
+          </a:p>
+          <a:p>
+            <a:pPr>
+              <a:spcAft>
+                <a:spcPts val="600"/>
+              </a:spcAft>
+            </a:pPr>
+            <a:r>
+              <a:rPr sz="1200" b="0">
+                <a:solidFill>
+                  <a:srgbClr val="282828"/>
+                </a:solidFill>
+                <a:latin typeface="Arial"/>
+              </a:rPr>
+              <a:t>•  Servo: 3 pm from 5.5e12 photons per cycle with noise only, 2.0e13 under a 2 pm per-cycle actuator walk; a fixed error of about 9% on a noiseless step, from the four-step's roll-off.</a:t>
+            </a:r>
+          </a:p>
+        </p:txBody>
+      </p:sp>
+      <p:graphicFrame>
+        <p:nvGraphicFramePr>
+          <p:cNvPr id="5" name="Table 4"/>
+          <p:cNvGraphicFramePr>
+            <a:graphicFrameLocks noGrp="1"/>
+          </p:cNvGraphicFramePr>
+          <p:nvPr/>
+        </p:nvGraphicFramePr>
+        <p:xfrm>
+          <a:off x="6400800" y="1298448"/>
+          <a:ext cx="5394959" cy="1828800"/>
+        </p:xfrm>
+        <a:graphic>
+          <a:graphicData uri="http://schemas.openxmlformats.org/drawingml/2006/table">
+            <a:tbl>
+              <a:tblPr firstRow="1" bandRow="1">
+                <a:tableStyleId>{5C22544A-7EE6-4342-B048-85BDC9FD1C3A}</a:tableStyleId>
+              </a:tblPr>
+              <a:tblGrid>
+                <a:gridCol w="2861415"/>
+                <a:gridCol w="2533544"/>
+              </a:tblGrid>
+              <a:tr h="262890">
+                <a:tc>
+                  <a:txBody>
+                    <a:bodyPr wrap="square"/>
+                    <a:lstStyle/>
+                    <a:p>
+                      <a:r>
+                        <a:rPr sz="1000" b="1">
+                          <a:solidFill>
+                            <a:srgbClr val="FFFFFF"/>
+                          </a:solidFill>
+                          <a:latin typeface="Arial"/>
+                        </a:rPr>
+                        <a:t>added to the front end</a:t>
+                      </a:r>
+                    </a:p>
+                  </a:txBody>
+                  <a:tcPr marL="54864" marR="54864" marT="18288" marB="18288">
+                    <a:solidFill>
+                      <a:srgbClr val="1F4E79"/>
+                    </a:solidFill>
+                  </a:tcPr>
+                </a:tc>
+                <a:tc>
+                  <a:txBody>
+                    <a:bodyPr wrap="square"/>
+                    <a:lstStyle/>
+                    <a:p>
+                      <a:r>
+                        <a:rPr sz="1000" b="1">
+                          <a:solidFill>
+                            <a:srgbClr val="FFFFFF"/>
+                          </a:solidFill>
+                          <a:latin typeface="Arial"/>
+                        </a:rPr>
+                        <a:t>value</a:t>
+                      </a:r>
+                    </a:p>
+                  </a:txBody>
+                  <a:tcPr marL="54864" marR="54864" marT="18288" marB="18288">
+                    <a:solidFill>
+                      <a:srgbClr val="1F4E79"/>
+                    </a:solidFill>
+                  </a:tcPr>
+                </a:tc>
+              </a:tr>
+              <a:tr h="262890">
+                <a:tc>
+                  <a:txBody>
+                    <a:bodyPr wrap="square"/>
+                    <a:lstStyle/>
+                    <a:p>
+                      <a:r>
+                        <a:rPr sz="1000" b="0">
+                          <a:solidFill>
+                            <a:srgbClr val="282828"/>
+                          </a:solidFill>
+                          <a:latin typeface="Arial"/>
+                        </a:rPr>
+                        <a:t>reference flat on a piezo stage</a:t>
+                      </a:r>
+                    </a:p>
+                  </a:txBody>
+                  <a:tcPr marL="54864" marR="54864" marT="18288" marB="18288">
+                    <a:solidFill>
+                      <a:srgbClr val="FFFFFF"/>
+                    </a:solidFill>
+                  </a:tcPr>
+                </a:tc>
+                <a:tc>
+                  <a:txBody>
+                    <a:bodyPr wrap="square"/>
+                    <a:lstStyle/>
+                    <a:p>
+                      <a:r>
+                        <a:rPr sz="1000" b="0">
+                          <a:solidFill>
+                            <a:srgbClr val="282828"/>
+                          </a:solidFill>
+                          <a:latin typeface="Arial"/>
+                        </a:rPr>
+                        <a:t>103 mm, protected aluminum, 564 mm leg</a:t>
+                      </a:r>
+                    </a:p>
+                  </a:txBody>
+                  <a:tcPr marL="54864" marR="54864" marT="18288" marB="18288">
+                    <a:solidFill>
+                      <a:srgbClr val="FFFFFF"/>
+                    </a:solidFill>
+                  </a:tcPr>
+                </a:tc>
+              </a:tr>
+              <a:tr h="262890">
+                <a:tc>
+                  <a:txBody>
+                    <a:bodyPr wrap="square"/>
+                    <a:lstStyle/>
+                    <a:p>
+                      <a:r>
+                        <a:rPr sz="1000" b="0">
+                          <a:solidFill>
+                            <a:srgbClr val="282828"/>
+                          </a:solidFill>
+                          <a:latin typeface="Arial"/>
+                        </a:rPr>
+                        <a:t>compensator plate</a:t>
+                      </a:r>
+                    </a:p>
+                  </a:txBody>
+                  <a:tcPr marL="54864" marR="54864" marT="18288" marB="18288">
+                    <a:solidFill>
+                      <a:srgbClr val="ECF1F6"/>
+                    </a:solidFill>
+                  </a:tcPr>
+                </a:tc>
+                <a:tc>
+                  <a:txBody>
+                    <a:bodyPr wrap="square"/>
+                    <a:lstStyle/>
+                    <a:p>
+                      <a:r>
+                        <a:rPr sz="1000" b="0">
+                          <a:solidFill>
+                            <a:srgbClr val="282828"/>
+                          </a:solidFill>
+                          <a:latin typeface="Arial"/>
+                        </a:rPr>
+                        <a:t>matched to the splitter</a:t>
+                      </a:r>
+                    </a:p>
+                  </a:txBody>
+                  <a:tcPr marL="54864" marR="54864" marT="18288" marB="18288">
+                    <a:solidFill>
+                      <a:srgbClr val="ECF1F6"/>
+                    </a:solidFill>
+                  </a:tcPr>
+                </a:tc>
+              </a:tr>
+              <a:tr h="605790">
+                <a:tc>
+                  <a:txBody>
+                    <a:bodyPr wrap="square"/>
+                    <a:lstStyle/>
+                    <a:p>
+                      <a:r>
+                        <a:rPr sz="1000" b="0">
+                          <a:solidFill>
+                            <a:srgbClr val="282828"/>
+                          </a:solidFill>
+                          <a:latin typeface="Arial"/>
+                        </a:rPr>
+                        <a:t>snapshot form: input polarizer, two arm quarter-wave plates, output quarter-wave plate, analyzer</a:t>
+                      </a:r>
+                    </a:p>
+                  </a:txBody>
+                  <a:tcPr marL="54864" marR="54864" marT="18288" marB="18288">
+                    <a:solidFill>
+                      <a:srgbClr val="FFFFFF"/>
+                    </a:solidFill>
+                  </a:tcPr>
+                </a:tc>
+                <a:tc>
+                  <a:txBody>
+                    <a:bodyPr wrap="square"/>
+                    <a:lstStyle/>
+                    <a:p>
+                      <a:r>
+                        <a:rPr sz="1000" b="0">
+                          <a:solidFill>
+                            <a:srgbClr val="282828"/>
+                          </a:solidFill>
+                          <a:latin typeface="Arial"/>
+                        </a:rPr>
+                        <a:t>zero-order plates on 2-3 mm substrates (to be modeled); azimuths 45 / 0 / 45 / 0 / 0°</a:t>
+                      </a:r>
+                    </a:p>
+                  </a:txBody>
+                  <a:tcPr marL="54864" marR="54864" marT="18288" marB="18288">
+                    <a:solidFill>
+                      <a:srgbClr val="FFFFFF"/>
+                    </a:solidFill>
+                  </a:tcPr>
+                </a:tc>
+              </a:tr>
+              <a:tr h="434340">
+                <a:tc>
+                  <a:txBody>
+                    <a:bodyPr wrap="square"/>
+                    <a:lstStyle/>
+                    <a:p>
+                      <a:r>
+                        <a:rPr sz="1000" b="0">
+                          <a:solidFill>
+                            <a:srgbClr val="282828"/>
+                          </a:solidFill>
+                          <a:latin typeface="Arial"/>
+                        </a:rPr>
+                        <a:t>frames per measurement</a:t>
+                      </a:r>
+                    </a:p>
+                  </a:txBody>
+                  <a:tcPr marL="54864" marR="54864" marT="18288" marB="18288">
+                    <a:solidFill>
+                      <a:srgbClr val="ECF1F6"/>
+                    </a:solidFill>
+                  </a:tcPr>
+                </a:tc>
+                <a:tc>
+                  <a:txBody>
+                    <a:bodyPr wrap="square"/>
+                    <a:lstStyle/>
+                    <a:p>
+                      <a:r>
+                        <a:rPr sz="1000" b="0">
+                          <a:solidFill>
+                            <a:srgbClr val="282828"/>
+                          </a:solidFill>
+                          <a:latin typeface="Arial"/>
+                        </a:rPr>
+                        <a:t>4 (snapshot: at once; piezo: in sequence)</a:t>
+                      </a:r>
+                    </a:p>
+                  </a:txBody>
+                  <a:tcPr marL="54864" marR="54864" marT="18288" marB="18288">
+                    <a:solidFill>
+                      <a:srgbClr val="ECF1F6"/>
+                    </a:solidFill>
+                  </a:tcPr>
+                </a:tc>
+              </a:tr>
+            </a:tbl>
+          </a:graphicData>
+        </a:graphic>
+      </p:graphicFrame>
+      <p:sp>
+        <p:nvSpPr>
+          <p:cNvPr id="6" name="TextBox 5"/>
+          <p:cNvSpPr txBox="1"/>
+          <p:nvPr/>
+        </p:nvSpPr>
+        <p:spPr>
+          <a:xfrm>
+            <a:off x="6400800" y="3273552"/>
+            <a:ext cx="5394960" cy="274320"/>
+          </a:xfrm>
+          <a:prstGeom prst="rect">
+            <a:avLst/>
+          </a:prstGeom>
+          <a:noFill/>
+        </p:spPr>
+        <p:txBody>
+          <a:bodyPr wrap="square">
+            <a:spAutoFit/>
+          </a:bodyPr>
+          <a:lstStyle/>
+          <a:p>
+            <a:pPr>
+              <a:spcAft>
+                <a:spcPts val="600"/>
+              </a:spcAft>
+            </a:pPr>
+            <a:r>
+              <a:rPr sz="1050" b="0">
+                <a:solidFill>
+                  <a:srgbClr val="6E6E6E"/>
+                </a:solidFill>
+                <a:latin typeface="Arial"/>
+              </a:rPr>
+              <a:t>Run tags lens_deck, loop_lens, lens_deck_se2; the three phase-shift forms are priced in backup.</a:t>
+            </a:r>
+          </a:p>
+        </p:txBody>
+      </p:sp>
+    </p:spTree>
+  </p:cSld>
+  <p:clrMapOvr>
+    <a:masterClrMapping/>
+  </p:clrMapOvr>
+</p:sld>
+</file>
+
+<file path=ppt/slides/slide6.xml><?xml version="1.0" encoding="utf-8"?>
+<p:sld xmlns:a="http://schemas.openxmlformats.org/drawingml/2006/main" xmlns:p="http://schemas.openxmlformats.org/presentationml/2006/main" xmlns:r="http://schemas.openxmlformats.org/officeDocument/2006/relationships">
+  <p:cSld>
+    <p:spTree>
+      <p:nvGrpSpPr>
+        <p:cNvPr id="1" name=""/>
+        <p:cNvGrpSpPr/>
+        <p:nvPr/>
+      </p:nvGrpSpPr>
+      <p:grpSpPr/>
+      <p:sp>
+        <p:nvSpPr>
+          <p:cNvPr id="2" name="TextBox 1"/>
+          <p:cNvSpPr txBox="1"/>
+          <p:nvPr/>
+        </p:nvSpPr>
+        <p:spPr>
+          <a:xfrm>
+            <a:off x="411480" y="201168"/>
+            <a:ext cx="11368735" cy="914400"/>
+          </a:xfrm>
+          <a:prstGeom prst="rect">
+            <a:avLst/>
+          </a:prstGeom>
+          <a:noFill/>
+        </p:spPr>
+        <p:txBody>
+          <a:bodyPr wrap="square">
+            <a:spAutoFit/>
+          </a:bodyPr>
+          <a:lstStyle/>
+          <a:p>
+            <a:pPr>
+              <a:spcAft>
+                <a:spcPts val="400"/>
+              </a:spcAft>
+            </a:pPr>
+            <a:r>
+              <a:rPr sz="2400" b="1">
+                <a:solidFill>
+                  <a:srgbClr val="1F4E79"/>
+                </a:solidFill>
+                <a:latin typeface="Arial"/>
+              </a:rPr>
+              <a:t>Interferometer: the node at 22.5°</a:t>
+            </a:r>
+          </a:p>
+          <a:p>
+            <a:pPr>
+              <a:spcAft>
+                <a:spcPts val="0"/>
+              </a:spcAft>
+            </a:pPr>
+            <a:r>
+              <a:rPr sz="1250" b="0">
+                <a:solidFill>
+                  <a:srgbClr val="6E6E6E"/>
+                </a:solidFill>
+                <a:latin typeface="Arial"/>
+              </a:rPr>
+              <a:t>Every part clears every beam it is not in; the output plate and analyzer sit 160 mm behind the splitter, ahead of the focuser; the four snapshot channels come from a polarization camera, not a rotating analyzer</a:t>
+            </a:r>
+          </a:p>
+        </p:txBody>
+      </p:sp>
+      <p:sp>
+        <p:nvSpPr>
+          <p:cNvPr id="3" name="Rectangle 2"/>
+          <p:cNvSpPr/>
+          <p:nvPr/>
+        </p:nvSpPr>
+        <p:spPr>
+          <a:xfrm>
+            <a:off x="411480" y="1133856"/>
+            <a:ext cx="11368735" cy="20320"/>
+          </a:xfrm>
+          <a:prstGeom prst="rect">
+            <a:avLst/>
+          </a:prstGeom>
+          <a:solidFill>
+            <a:srgbClr val="B8C6D4"/>
+          </a:solidFill>
+          <a:ln>
+            <a:noFill/>
+          </a:ln>
+          <a:effectLst/>
+        </p:spPr>
+        <p:style>
+          <a:lnRef idx="1">
+            <a:schemeClr val="accent1"/>
+          </a:lnRef>
+          <a:fillRef idx="3">
+            <a:schemeClr val="accent1"/>
+          </a:fillRef>
+          <a:effectRef idx="2">
+            <a:schemeClr val="accent1"/>
+          </a:effectRef>
+          <a:fontRef idx="minor">
+            <a:schemeClr val="lt1"/>
+          </a:fontRef>
+        </p:style>
+        <p:txBody>
+          <a:bodyPr rtlCol="0" anchor="ctr"/>
+          <a:lstStyle/>
+          <a:p>
+            <a:pPr algn="ctr"/>
+          </a:p>
+        </p:txBody>
+      </p:sp>
       <p:pic>
         <p:nvPicPr>
-          <p:cNvPr id="4" name="Picture 3" descr="crop_bench_bs30_node.png"/>
+          <p:cNvPr id="4" name="Picture 3" descr="crop_bench_bs22_node.png"/>
           <p:cNvPicPr>
             <a:picLocks noChangeAspect="1"/>
           </p:cNvPicPr>
@@ -20984,8 +22435,8 @@
         </p:blipFill>
         <p:spPr>
           <a:xfrm>
-            <a:off x="3198559" y="1298448"/>
-            <a:ext cx="5794577" cy="3555492"/>
+            <a:off x="3159675" y="1298448"/>
+            <a:ext cx="5872343" cy="3281172"/>
           </a:xfrm>
           <a:prstGeom prst="rect">
             <a:avLst/>
@@ -21000,7 +22451,7 @@
         </p:nvSpPr>
         <p:spPr>
           <a:xfrm>
-            <a:off x="411480" y="4872228"/>
+            <a:off x="411480" y="4597908"/>
             <a:ext cx="11368735" cy="559307"/>
           </a:xfrm>
           <a:prstGeom prst="rect">
@@ -21026,7 +22477,7 @@
                 </a:solidFill>
                 <a:latin typeface="Arial"/>
               </a:rPr>
-              <a:t>The splitter node from above, as traced at 30°, ±320 mm about the splitter: L1 and the input polarizer, the splitter, the compensator on the mirror leg, the output quarter-wave plate and analyzer just ahead of the focuser L2; test arm blue, reference arm orange.  The two "QWP" labels at the node mark builder placements; the physical plates sit at the mirror and the flat.</a:t>
+              <a:t>The splitter node from above, as traced at 22.5°, ±320 mm about the splitter: L1 and the input polarizer, the splitter, the compensator on the mirror leg, the output quarter-wave plate and analyzer just ahead of the focuser L2; test arm blue, reference arm orange.  The two "QWP" labels at the node mark builder placements; the physical plates sit at the mirror and the flat.</a:t>
             </a:r>
           </a:p>
         </p:txBody>
@@ -21039,7 +22490,7 @@
         </p:nvSpPr>
         <p:spPr>
           <a:xfrm>
-            <a:off x="411480" y="5468112"/>
+            <a:off x="411480" y="5193792"/>
             <a:ext cx="11368735" cy="274320"/>
           </a:xfrm>
           <a:prstGeom prst="rect">
@@ -21065,7 +22516,7 @@
                 </a:solidFill>
                 <a:latin typeface="Arial"/>
               </a:rPr>
-              <a:t>The plates here (polarizer, quarter-wave plates, analyzer) are drawn as ideal surfaces; the next model round gives each a 2-3 mm substrate, which in these collimated legs adds path only.  Drawn by dmg_bench_clearance.</a:t>
+              <a:t>The analyzer's four orientations are taken at once by a polarization camera (a micro-polarizer array at 0 / 45 / 90 / 135° on the pixels); the model rotates an ideal analyzer between its four frames, the same measurement.  A rotating stage would make the snapshot a sequential scan.  The plates here are drawn as ideal surfaces; the next model round gives each a 2-3 mm substrate, which in these collimated legs adds path only.  Drawn by dmg_bench_clearance.</a:t>
             </a:r>
           </a:p>
         </p:txBody>
@@ -21078,7 +22529,7 @@
 </p:sld>
 </file>
 
-<file path=ppt/slides/slide6.xml><?xml version="1.0" encoding="utf-8"?>
+<file path=ppt/slides/slide7.xml><?xml version="1.0" encoding="utf-8"?>
 <p:sld xmlns:a="http://schemas.openxmlformats.org/drawingml/2006/main" xmlns:p="http://schemas.openxmlformats.org/presentationml/2006/main" xmlns:r="http://schemas.openxmlformats.org/officeDocument/2006/relationships">
   <p:cSld>
     <p:spTree>
@@ -21368,7 +22819,7 @@
 </p:sld>
 </file>
 
-<file path=ppt/slides/slide7.xml><?xml version="1.0" encoding="utf-8"?>
+<file path=ppt/slides/slide8.xml><?xml version="1.0" encoding="utf-8"?>
 <p:sld xmlns:a="http://schemas.openxmlformats.org/drawingml/2006/main" xmlns:p="http://schemas.openxmlformats.org/presentationml/2006/main" xmlns:r="http://schemas.openxmlformats.org/officeDocument/2006/relationships">
   <p:cSld>
     <p:spTree>
@@ -21897,7 +23348,7 @@
 </p:sld>
 </file>
 
-<file path=ppt/slides/slide8.xml><?xml version="1.0" encoding="utf-8"?>
+<file path=ppt/slides/slide9.xml><?xml version="1.0" encoding="utf-8"?>
 <p:sld xmlns:a="http://schemas.openxmlformats.org/drawingml/2006/main" xmlns:p="http://schemas.openxmlformats.org/presentationml/2006/main" xmlns:r="http://schemas.openxmlformats.org/officeDocument/2006/relationships">
   <p:cSld>
     <p:spTree>
@@ -22104,489 +23555,6 @@
                 <a:latin typeface="Arial"/>
               </a:rPr>
               <a:t>Drawn by zwfs_vlayout.m from the two emitted decks (the engine does not split rays); the whole train is on the front-end slide.  The metasurface and the plate are drawn as ideal surfaces and the cameras as planes; the next model round draws the substrates and the 13 mm sensors.</a:t>
-            </a:r>
-          </a:p>
-        </p:txBody>
-      </p:sp>
-    </p:spTree>
-  </p:cSld>
-  <p:clrMapOvr>
-    <a:masterClrMapping/>
-  </p:clrMapOvr>
-</p:sld>
-</file>
-
-<file path=ppt/slides/slide9.xml><?xml version="1.0" encoding="utf-8"?>
-<p:sld xmlns:a="http://schemas.openxmlformats.org/drawingml/2006/main" xmlns:p="http://schemas.openxmlformats.org/presentationml/2006/main" xmlns:r="http://schemas.openxmlformats.org/officeDocument/2006/relationships">
-  <p:cSld>
-    <p:spTree>
-      <p:nvGrpSpPr>
-        <p:cNvPr id="1" name=""/>
-        <p:cNvGrpSpPr/>
-        <p:nvPr/>
-      </p:nvGrpSpPr>
-      <p:grpSpPr/>
-      <p:sp>
-        <p:nvSpPr>
-          <p:cNvPr id="2" name="TextBox 1"/>
-          <p:cNvSpPr txBox="1"/>
-          <p:nvPr/>
-        </p:nvSpPr>
-        <p:spPr>
-          <a:xfrm>
-            <a:off x="411480" y="201168"/>
-            <a:ext cx="11368735" cy="914400"/>
-          </a:xfrm>
-          <a:prstGeom prst="rect">
-            <a:avLst/>
-          </a:prstGeom>
-          <a:noFill/>
-        </p:spPr>
-        <p:txBody>
-          <a:bodyPr wrap="square">
-            <a:spAutoFit/>
-          </a:bodyPr>
-          <a:lstStyle/>
-          <a:p>
-            <a:pPr>
-              <a:spcAft>
-                <a:spcPts val="400"/>
-              </a:spcAft>
-            </a:pPr>
-            <a:r>
-              <a:rPr sz="2400" b="1">
-                <a:solidFill>
-                  <a:srgbClr val="1F4E79"/>
-                </a:solidFill>
-                <a:latin typeface="Arial"/>
-              </a:rPr>
-              <a:t>Point-diffraction sensor: a stepped pinhole with a shutter frame</a:t>
-            </a:r>
-          </a:p>
-          <a:p>
-            <a:pPr>
-              <a:spcAft>
-                <a:spcPts val="0"/>
-              </a:spcAft>
-            </a:pPr>
-            <a:r>
-              <a:rPr sz="1250" b="0">
-                <a:solidFill>
-                  <a:srgbClr val="6E6E6E"/>
-                </a:solidFill>
-                <a:latin typeface="Arial"/>
-              </a:rPr>
-              <a:t>The best common-path form: a 5.3 µm pinhole with an attenuated surround at the focus, five phase steps of the substrate, plus one pinhole-only frame per state that keeps the calibration honest far from null</a:t>
-            </a:r>
-          </a:p>
-        </p:txBody>
-      </p:sp>
-      <p:sp>
-        <p:nvSpPr>
-          <p:cNvPr id="3" name="Rectangle 2"/>
-          <p:cNvSpPr/>
-          <p:nvPr/>
-        </p:nvSpPr>
-        <p:spPr>
-          <a:xfrm>
-            <a:off x="411480" y="1133856"/>
-            <a:ext cx="11368735" cy="20320"/>
-          </a:xfrm>
-          <a:prstGeom prst="rect">
-            <a:avLst/>
-          </a:prstGeom>
-          <a:solidFill>
-            <a:srgbClr val="B8C6D4"/>
-          </a:solidFill>
-          <a:ln>
-            <a:noFill/>
-          </a:ln>
-          <a:effectLst/>
-        </p:spPr>
-        <p:style>
-          <a:lnRef idx="1">
-            <a:schemeClr val="accent1"/>
-          </a:lnRef>
-          <a:fillRef idx="3">
-            <a:schemeClr val="accent1"/>
-          </a:fillRef>
-          <a:effectRef idx="2">
-            <a:schemeClr val="accent1"/>
-          </a:effectRef>
-          <a:fontRef idx="minor">
-            <a:schemeClr val="lt1"/>
-          </a:fontRef>
-        </p:style>
-        <p:txBody>
-          <a:bodyPr rtlCol="0" anchor="ctr"/>
-          <a:lstStyle/>
-          <a:p>
-            <a:pPr algn="ctr"/>
-          </a:p>
-        </p:txBody>
-      </p:sp>
-      <p:sp>
-        <p:nvSpPr>
-          <p:cNvPr id="4" name="TextBox 3"/>
-          <p:cNvSpPr txBox="1"/>
-          <p:nvPr/>
-        </p:nvSpPr>
-        <p:spPr>
-          <a:xfrm>
-            <a:off x="411480" y="1298448"/>
-            <a:ext cx="5806440" cy="274320"/>
-          </a:xfrm>
-          <a:prstGeom prst="rect">
-            <a:avLst/>
-          </a:prstGeom>
-          <a:noFill/>
-        </p:spPr>
-        <p:txBody>
-          <a:bodyPr wrap="square">
-            <a:spAutoFit/>
-          </a:bodyPr>
-          <a:lstStyle/>
-          <a:p>
-            <a:pPr>
-              <a:spcAft>
-                <a:spcPts val="600"/>
-              </a:spcAft>
-            </a:pPr>
-            <a:r>
-              <a:rPr sz="1200" b="0">
-                <a:solidFill>
-                  <a:srgbClr val="282828"/>
-                </a:solidFill>
-                <a:latin typeface="Arial"/>
-              </a:rPr>
-              <a:t>•  How it reads: the pinhole passes the core of the focal spot as the reference; the surround, attenuated to 0.72 in amplitude, passes the rest.  The substrate steps the surround's phase through five frames (the Schwider-Hariharan scan, insensitive to step error); a sixth frame with the surround shuttered measures the reference by itself.</a:t>
-            </a:r>
-          </a:p>
-          <a:p>
-            <a:pPr>
-              <a:spcAft>
-                <a:spcPts val="600"/>
-              </a:spcAft>
-            </a:pPr>
-            <a:r>
-              <a:rPr sz="1200" b="0">
-                <a:solidFill>
-                  <a:srgbClr val="282828"/>
-                </a:solidFill>
-                <a:latin typeface="Arial"/>
-              </a:rPr>
-              <a:t>•  On the 30 nm surface, matrix measured on it: 10 nm on one actuator 0.9935 / 4 pm / SNR 2790; 1 nm on 47 sites 0.9992 / 3 pm; dense 10 nm 0.9985, 338 pm.</a:t>
-            </a:r>
-          </a:p>
-          <a:p>
-            <a:pPr>
-              <a:spcAft>
-                <a:spcPts val="600"/>
-              </a:spcAft>
-            </a:pPr>
-            <a:r>
-              <a:rPr sz="1200" b="0">
-                <a:solidFill>
-                  <a:srgbClr val="282828"/>
-                </a:solidFill>
-                <a:latin typeface="Arial"/>
-              </a:rPr>
-              <a:t>•  Servo: 3 pm from 2.3e12 photons per cycle noise only, 7.0e12 under the walk; no fixed error.  The shutter frame is what lets it read to 480 nm of surface (next slides).</a:t>
-            </a:r>
-          </a:p>
-        </p:txBody>
-      </p:sp>
-      <p:graphicFrame>
-        <p:nvGraphicFramePr>
-          <p:cNvPr id="5" name="Table 4"/>
-          <p:cNvGraphicFramePr>
-            <a:graphicFrameLocks noGrp="1"/>
-          </p:cNvGraphicFramePr>
-          <p:nvPr/>
-        </p:nvGraphicFramePr>
-        <p:xfrm>
-          <a:off x="6400800" y="1298448"/>
-          <a:ext cx="5394959" cy="2000250"/>
-        </p:xfrm>
-        <a:graphic>
-          <a:graphicData uri="http://schemas.openxmlformats.org/drawingml/2006/table">
-            <a:tbl>
-              <a:tblPr firstRow="1" bandRow="1">
-                <a:tableStyleId>{5C22544A-7EE6-4342-B048-85BDC9FD1C3A}</a:tableStyleId>
-              </a:tblPr>
-              <a:tblGrid>
-                <a:gridCol w="1141241"/>
-                <a:gridCol w="4253718"/>
-              </a:tblGrid>
-              <a:tr h="434340">
-                <a:tc>
-                  <a:txBody>
-                    <a:bodyPr wrap="square"/>
-                    <a:lstStyle/>
-                    <a:p>
-                      <a:r>
-                        <a:rPr sz="1000" b="1">
-                          <a:solidFill>
-                            <a:srgbClr val="FFFFFF"/>
-                          </a:solidFill>
-                          <a:latin typeface="Arial"/>
-                        </a:rPr>
-                        <a:t>added to the front end</a:t>
-                      </a:r>
-                    </a:p>
-                  </a:txBody>
-                  <a:tcPr marL="54864" marR="54864" marT="18288" marB="18288">
-                    <a:solidFill>
-                      <a:srgbClr val="1F4E79"/>
-                    </a:solidFill>
-                  </a:tcPr>
-                </a:tc>
-                <a:tc>
-                  <a:txBody>
-                    <a:bodyPr wrap="square"/>
-                    <a:lstStyle/>
-                    <a:p>
-                      <a:r>
-                        <a:rPr sz="1000" b="1">
-                          <a:solidFill>
-                            <a:srgbClr val="FFFFFF"/>
-                          </a:solidFill>
-                          <a:latin typeface="Arial"/>
-                        </a:rPr>
-                        <a:t>value</a:t>
-                      </a:r>
-                    </a:p>
-                  </a:txBody>
-                  <a:tcPr marL="54864" marR="54864" marT="18288" marB="18288">
-                    <a:solidFill>
-                      <a:srgbClr val="1F4E79"/>
-                    </a:solidFill>
-                  </a:tcPr>
-                </a:tc>
-              </a:tr>
-              <a:tr h="434340">
-                <a:tc>
-                  <a:txBody>
-                    <a:bodyPr wrap="square"/>
-                    <a:lstStyle/>
-                    <a:p>
-                      <a:r>
-                        <a:rPr sz="1000" b="0">
-                          <a:solidFill>
-                            <a:srgbClr val="282828"/>
-                          </a:solidFill>
-                          <a:latin typeface="Arial"/>
-                        </a:rPr>
-                        <a:t>pinhole substrate</a:t>
-                      </a:r>
-                    </a:p>
-                  </a:txBody>
-                  <a:tcPr marL="54864" marR="54864" marT="18288" marB="18288">
-                    <a:solidFill>
-                      <a:srgbClr val="FFFFFF"/>
-                    </a:solidFill>
-                  </a:tcPr>
-                </a:tc>
-                <a:tc>
-                  <a:txBody>
-                    <a:bodyPr wrap="square"/>
-                    <a:lstStyle/>
-                    <a:p>
-                      <a:r>
-                        <a:rPr sz="1000" b="0">
-                          <a:solidFill>
-                            <a:srgbClr val="282828"/>
-                          </a:solidFill>
-                          <a:latin typeface="Arial"/>
-                        </a:rPr>
-                        <a:t>fused silica, 2-3 mm, in the mask seat; pinhole 5.27 µm (2.0 λF/D at F/4.2), clear</a:t>
-                      </a:r>
-                    </a:p>
-                  </a:txBody>
-                  <a:tcPr marL="54864" marR="54864" marT="18288" marB="18288">
-                    <a:solidFill>
-                      <a:srgbClr val="FFFFFF"/>
-                    </a:solidFill>
-                  </a:tcPr>
-                </a:tc>
-              </a:tr>
-              <a:tr h="434340">
-                <a:tc>
-                  <a:txBody>
-                    <a:bodyPr wrap="square"/>
-                    <a:lstStyle/>
-                    <a:p>
-                      <a:r>
-                        <a:rPr sz="1000" b="0">
-                          <a:solidFill>
-                            <a:srgbClr val="282828"/>
-                          </a:solidFill>
-                          <a:latin typeface="Arial"/>
-                        </a:rPr>
-                        <a:t>surround</a:t>
-                      </a:r>
-                    </a:p>
-                  </a:txBody>
-                  <a:tcPr marL="54864" marR="54864" marT="18288" marB="18288">
-                    <a:solidFill>
-                      <a:srgbClr val="ECF1F6"/>
-                    </a:solidFill>
-                  </a:tcPr>
-                </a:tc>
-                <a:tc>
-                  <a:txBody>
-                    <a:bodyPr wrap="square"/>
-                    <a:lstStyle/>
-                    <a:p>
-                      <a:r>
-                        <a:rPr sz="1000" b="0">
-                          <a:solidFill>
-                            <a:srgbClr val="282828"/>
-                          </a:solidFill>
-                          <a:latin typeface="Arial"/>
-                        </a:rPr>
-                        <a:t>attenuated to 0.72 in amplitude (0.52 in power), phase-stepped on a stage</a:t>
-                      </a:r>
-                    </a:p>
-                  </a:txBody>
-                  <a:tcPr marL="54864" marR="54864" marT="18288" marB="18288">
-                    <a:solidFill>
-                      <a:srgbClr val="ECF1F6"/>
-                    </a:solidFill>
-                  </a:tcPr>
-                </a:tc>
-              </a:tr>
-              <a:tr h="262890">
-                <a:tc>
-                  <a:txBody>
-                    <a:bodyPr wrap="square"/>
-                    <a:lstStyle/>
-                    <a:p>
-                      <a:r>
-                        <a:rPr sz="1000" b="0">
-                          <a:solidFill>
-                            <a:srgbClr val="282828"/>
-                          </a:solidFill>
-                          <a:latin typeface="Arial"/>
-                        </a:rPr>
-                        <a:t>shutter</a:t>
-                      </a:r>
-                    </a:p>
-                  </a:txBody>
-                  <a:tcPr marL="54864" marR="54864" marT="18288" marB="18288">
-                    <a:solidFill>
-                      <a:srgbClr val="FFFFFF"/>
-                    </a:solidFill>
-                  </a:tcPr>
-                </a:tc>
-                <a:tc>
-                  <a:txBody>
-                    <a:bodyPr wrap="square"/>
-                    <a:lstStyle/>
-                    <a:p>
-                      <a:r>
-                        <a:rPr sz="1000" b="0">
-                          <a:solidFill>
-                            <a:srgbClr val="282828"/>
-                          </a:solidFill>
-                          <a:latin typeface="Arial"/>
-                        </a:rPr>
-                        <a:t>over the surround: one pinhole-only frame per state</a:t>
-                      </a:r>
-                    </a:p>
-                  </a:txBody>
-                  <a:tcPr marL="54864" marR="54864" marT="18288" marB="18288">
-                    <a:solidFill>
-                      <a:srgbClr val="FFFFFF"/>
-                    </a:solidFill>
-                  </a:tcPr>
-                </a:tc>
-              </a:tr>
-              <a:tr h="434340">
-                <a:tc>
-                  <a:txBody>
-                    <a:bodyPr wrap="square"/>
-                    <a:lstStyle/>
-                    <a:p>
-                      <a:r>
-                        <a:rPr sz="1000" b="0">
-                          <a:solidFill>
-                            <a:srgbClr val="282828"/>
-                          </a:solidFill>
-                          <a:latin typeface="Arial"/>
-                        </a:rPr>
-                        <a:t>frames per measurement</a:t>
-                      </a:r>
-                    </a:p>
-                  </a:txBody>
-                  <a:tcPr marL="54864" marR="54864" marT="18288" marB="18288">
-                    <a:solidFill>
-                      <a:srgbClr val="ECF1F6"/>
-                    </a:solidFill>
-                  </a:tcPr>
-                </a:tc>
-                <a:tc>
-                  <a:txBody>
-                    <a:bodyPr wrap="square"/>
-                    <a:lstStyle/>
-                    <a:p>
-                      <a:r>
-                        <a:rPr sz="1000" b="0">
-                          <a:solidFill>
-                            <a:srgbClr val="282828"/>
-                          </a:solidFill>
-                          <a:latin typeface="Arial"/>
-                        </a:rPr>
-                        <a:t>6: the five-step scan plus the shutter frame</a:t>
-                      </a:r>
-                    </a:p>
-                  </a:txBody>
-                  <a:tcPr marL="54864" marR="54864" marT="18288" marB="18288">
-                    <a:solidFill>
-                      <a:srgbClr val="ECF1F6"/>
-                    </a:solidFill>
-                  </a:tcPr>
-                </a:tc>
-              </a:tr>
-            </a:tbl>
-          </a:graphicData>
-        </a:graphic>
-      </p:graphicFrame>
-      <p:sp>
-        <p:nvSpPr>
-          <p:cNvPr id="6" name="TextBox 5"/>
-          <p:cNvSpPr txBox="1"/>
-          <p:nvPr/>
-        </p:nvSpPr>
-        <p:spPr>
-          <a:xfrm>
-            <a:off x="6400800" y="3445002"/>
-            <a:ext cx="5394960" cy="274320"/>
-          </a:xfrm>
-          <a:prstGeom prst="rect">
-            <a:avLst/>
-          </a:prstGeom>
-          <a:noFill/>
-        </p:spPr>
-        <p:txBody>
-          <a:bodyPr wrap="square">
-            <a:spAutoFit/>
-          </a:bodyPr>
-          <a:lstStyle/>
-          <a:p>
-            <a:pPr>
-              <a:spcAft>
-                <a:spcPts val="600"/>
-              </a:spcAft>
-            </a:pPr>
-            <a:r>
-              <a:rPr sz="1050" b="0">
-                <a:solidFill>
-                  <a:srgbClr val="6E6E6E"/>
-                </a:solidFill>
-                <a:latin typeface="Arial"/>
-              </a:rPr>
-              <a:t>The two-arm form of this sensor (the P/SRI: a pickoff, a reference lens, a 3.7 µm pinhole feeding a single-mode waveguide with a photonic phase shifter, a recombiner) is a capture instrument here; its trade is in backup.  Run tags pdi193fbase, ploop193, pdi193state.</a:t>
             </a:r>
           </a:p>
         </p:txBody>

--- a/demo_session/deck_gauges.pptx
+++ b/demo_session/deck_gauges.pptx
@@ -41,6 +41,8 @@
     <p:sldId id="289" r:id="rId40"/>
     <p:sldId id="290" r:id="rId41"/>
     <p:sldId id="291" r:id="rId42"/>
+    <p:sldId id="292" r:id="rId43"/>
+    <p:sldId id="293" r:id="rId44"/>
   </p:sldIdLst>
   <p:sldSz cx="12191695" cy="6858000" type="screen4x3"/>
   <p:notesSz cx="6858000" cy="9144000"/>
@@ -14361,7 +14363,7 @@
                 </a:solidFill>
                 <a:latin typeface="Arial"/>
               </a:rPr>
-              <a:t>Run it yourself</a:t>
+              <a:t>How every configuration was analyzed</a:t>
             </a:r>
           </a:p>
           <a:p>
@@ -14377,7 +14379,7 @@
                 </a:solidFill>
                 <a:latin typeface="Arial"/>
               </a:rPr>
-              <a:t>One parameter sheet and one runner per approach, shared code underneath; every number here is reproduced by the commands below</a:t>
+              <a:t>One repeatable path, ten steps, the same for all four approaches: a new sensor is a new reading class in the shared runner plus its gate, then steps 4 to 10 unchanged</a:t>
             </a:r>
           </a:p>
         </p:txBody>
@@ -14426,86 +14428,885 @@
           </a:p>
         </p:txBody>
       </p:sp>
+      <p:graphicFrame>
+        <p:nvGraphicFramePr>
+          <p:cNvPr id="4" name="Table 3"/>
+          <p:cNvGraphicFramePr>
+            <a:graphicFrameLocks noGrp="1"/>
+          </p:cNvGraphicFramePr>
+          <p:nvPr/>
+        </p:nvGraphicFramePr>
+        <p:xfrm>
+          <a:off x="411480" y="1298448"/>
+          <a:ext cx="5806439" cy="3377565"/>
+        </p:xfrm>
+        <a:graphic>
+          <a:graphicData uri="http://schemas.openxmlformats.org/drawingml/2006/table">
+            <a:tbl>
+              <a:tblPr firstRow="1" bandRow="1">
+                <a:tableStyleId>{5C22544A-7EE6-4342-B048-85BDC9FD1C3A}</a:tableStyleId>
+              </a:tblPr>
+              <a:tblGrid>
+                <a:gridCol w="436880"/>
+                <a:gridCol w="2856711"/>
+                <a:gridCol w="2512848"/>
+              </a:tblGrid>
+              <a:tr h="280035">
+                <a:tc>
+                  <a:txBody>
+                    <a:bodyPr wrap="square"/>
+                    <a:lstStyle/>
+                    <a:p>
+                      <a:r>
+                        <a:rPr sz="1100" b="1">
+                          <a:solidFill>
+                            <a:srgbClr val="FFFFFF"/>
+                          </a:solidFill>
+                          <a:latin typeface="Arial"/>
+                        </a:rPr>
+                        <a:t>step</a:t>
+                      </a:r>
+                    </a:p>
+                  </a:txBody>
+                  <a:tcPr marL="54864" marR="54864" marT="18288" marB="18288">
+                    <a:solidFill>
+                      <a:srgbClr val="1F4E79"/>
+                    </a:solidFill>
+                  </a:tcPr>
+                </a:tc>
+                <a:tc>
+                  <a:txBody>
+                    <a:bodyPr wrap="square"/>
+                    <a:lstStyle/>
+                    <a:p>
+                      <a:r>
+                        <a:rPr sz="1100" b="1">
+                          <a:solidFill>
+                            <a:srgbClr val="FFFFFF"/>
+                          </a:solidFill>
+                          <a:latin typeface="Arial"/>
+                        </a:rPr>
+                        <a:t>what</a:t>
+                      </a:r>
+                    </a:p>
+                  </a:txBody>
+                  <a:tcPr marL="54864" marR="54864" marT="18288" marB="18288">
+                    <a:solidFill>
+                      <a:srgbClr val="1F4E79"/>
+                    </a:solidFill>
+                  </a:tcPr>
+                </a:tc>
+                <a:tc>
+                  <a:txBody>
+                    <a:bodyPr wrap="square"/>
+                    <a:lstStyle/>
+                    <a:p>
+                      <a:r>
+                        <a:rPr sz="1100" b="1">
+                          <a:solidFill>
+                            <a:srgbClr val="FFFFFF"/>
+                          </a:solidFill>
+                          <a:latin typeface="Arial"/>
+                        </a:rPr>
+                        <a:t>gate or output</a:t>
+                      </a:r>
+                    </a:p>
+                  </a:txBody>
+                  <a:tcPr marL="54864" marR="54864" marT="18288" marB="18288">
+                    <a:solidFill>
+                      <a:srgbClr val="1F4E79"/>
+                    </a:solidFill>
+                  </a:tcPr>
+                </a:tc>
+              </a:tr>
+              <a:tr h="468630">
+                <a:tc>
+                  <a:txBody>
+                    <a:bodyPr wrap="square"/>
+                    <a:lstStyle/>
+                    <a:p>
+                      <a:r>
+                        <a:rPr sz="1100" b="0">
+                          <a:solidFill>
+                            <a:srgbClr val="282828"/>
+                          </a:solidFill>
+                          <a:latin typeface="Arial"/>
+                        </a:rPr>
+                        <a:t>1</a:t>
+                      </a:r>
+                    </a:p>
+                  </a:txBody>
+                  <a:tcPr marL="54864" marR="54864" marT="18288" marB="18288">
+                    <a:solidFill>
+                      <a:srgbClr val="FFFFFF"/>
+                    </a:solidFill>
+                  </a:tcPr>
+                </a:tc>
+                <a:tc>
+                  <a:txBody>
+                    <a:bodyPr wrap="square"/>
+                    <a:lstStyle/>
+                    <a:p>
+                      <a:r>
+                        <a:rPr sz="1100" b="0">
+                          <a:solidFill>
+                            <a:srgbClr val="282828"/>
+                          </a:solidFill>
+                          <a:latin typeface="Arial"/>
+                        </a:rPr>
+                        <a:t>one parameter sheet and one runner per approach; batch wrappers</a:t>
+                      </a:r>
+                    </a:p>
+                  </a:txBody>
+                  <a:tcPr marL="54864" marR="54864" marT="18288" marB="18288">
+                    <a:solidFill>
+                      <a:srgbClr val="FFFFFF"/>
+                    </a:solidFill>
+                  </a:tcPr>
+                </a:tc>
+                <a:tc>
+                  <a:txBody>
+                    <a:bodyPr wrap="square"/>
+                    <a:lstStyle/>
+                    <a:p>
+                      <a:r>
+                        <a:rPr sz="1100" b="0">
+                          <a:solidFill>
+                            <a:srgbClr val="282828"/>
+                          </a:solidFill>
+                          <a:latin typeface="Arial"/>
+                        </a:rPr>
+                        <a:t>every number has a run tag</a:t>
+                      </a:r>
+                    </a:p>
+                  </a:txBody>
+                  <a:tcPr marL="54864" marR="54864" marT="18288" marB="18288">
+                    <a:solidFill>
+                      <a:srgbClr val="FFFFFF"/>
+                    </a:solidFill>
+                  </a:tcPr>
+                </a:tc>
+              </a:tr>
+              <a:tr h="657225">
+                <a:tc>
+                  <a:txBody>
+                    <a:bodyPr wrap="square"/>
+                    <a:lstStyle/>
+                    <a:p>
+                      <a:r>
+                        <a:rPr sz="1100" b="0">
+                          <a:solidFill>
+                            <a:srgbClr val="282828"/>
+                          </a:solidFill>
+                          <a:latin typeface="Arial"/>
+                        </a:rPr>
+                        <a:t>2</a:t>
+                      </a:r>
+                    </a:p>
+                  </a:txBody>
+                  <a:tcPr marL="54864" marR="54864" marT="18288" marB="18288">
+                    <a:solidFill>
+                      <a:srgbClr val="ECF1F6"/>
+                    </a:solidFill>
+                  </a:tcPr>
+                </a:tc>
+                <a:tc>
+                  <a:txBody>
+                    <a:bodyPr wrap="square"/>
+                    <a:lstStyle/>
+                    <a:p>
+                      <a:r>
+                        <a:rPr sz="1100" b="0">
+                          <a:solidFill>
+                            <a:srgbClr val="282828"/>
+                          </a:solidFill>
+                          <a:latin typeface="Arial"/>
+                        </a:rPr>
+                        <a:t>build the bench from the sheet, trace it; clearance of end bodies and node parts; tail tune; sampling budget</a:t>
+                      </a:r>
+                    </a:p>
+                  </a:txBody>
+                  <a:tcPr marL="54864" marR="54864" marT="18288" marB="18288">
+                    <a:solidFill>
+                      <a:srgbClr val="ECF1F6"/>
+                    </a:solidFill>
+                  </a:tcPr>
+                </a:tc>
+                <a:tc>
+                  <a:txBody>
+                    <a:bodyPr wrap="square"/>
+                    <a:lstStyle/>
+                    <a:p>
+                      <a:r>
+                        <a:rPr sz="1100" b="0">
+                          <a:solidFill>
+                            <a:srgbClr val="282828"/>
+                          </a:solidFill>
+                          <a:latin typeface="Arial"/>
+                        </a:rPr>
+                        <a:t>every part clears by 25 mm; 6 pixels across the mask feature</a:t>
+                      </a:r>
+                    </a:p>
+                  </a:txBody>
+                  <a:tcPr marL="54864" marR="54864" marT="18288" marB="18288">
+                    <a:solidFill>
+                      <a:srgbClr val="ECF1F6"/>
+                    </a:solidFill>
+                  </a:tcPr>
+                </a:tc>
+              </a:tr>
+              <a:tr h="657225">
+                <a:tc>
+                  <a:txBody>
+                    <a:bodyPr wrap="square"/>
+                    <a:lstStyle/>
+                    <a:p>
+                      <a:r>
+                        <a:rPr sz="1100" b="0">
+                          <a:solidFill>
+                            <a:srgbClr val="282828"/>
+                          </a:solidFill>
+                          <a:latin typeface="Arial"/>
+                        </a:rPr>
+                        <a:t>3</a:t>
+                      </a:r>
+                    </a:p>
+                  </a:txBody>
+                  <a:tcPr marL="54864" marR="54864" marT="18288" marB="18288">
+                    <a:solidFill>
+                      <a:srgbClr val="FFFFFF"/>
+                    </a:solidFill>
+                  </a:tcPr>
+                </a:tc>
+                <a:tc>
+                  <a:txBody>
+                    <a:bodyPr wrap="square"/>
+                    <a:lstStyle/>
+                    <a:p>
+                      <a:r>
+                        <a:rPr sz="1100" b="0">
+                          <a:solidFill>
+                            <a:srgbClr val="282828"/>
+                          </a:solidFill>
+                          <a:latin typeface="Arial"/>
+                        </a:rPr>
+                        <a:t>model gates before any number</a:t>
+                      </a:r>
+                    </a:p>
+                  </a:txBody>
+                  <a:tcPr marL="54864" marR="54864" marT="18288" marB="18288">
+                    <a:solidFill>
+                      <a:srgbClr val="FFFFFF"/>
+                    </a:solidFill>
+                  </a:tcPr>
+                </a:tc>
+                <a:tc>
+                  <a:txBody>
+                    <a:bodyPr wrap="square"/>
+                    <a:lstStyle/>
+                    <a:p>
+                      <a:r>
+                        <a:rPr sz="1100" b="0">
+                          <a:solidFill>
+                            <a:srgbClr val="282828"/>
+                          </a:solidFill>
+                          <a:latin typeface="Arial"/>
+                        </a:rPr>
+                        <a:t>mask round trip, reference-wave surrogate, working-state amplitude, the reading on 100 nm pokes</a:t>
+                      </a:r>
+                    </a:p>
+                  </a:txBody>
+                  <a:tcPr marL="54864" marR="54864" marT="18288" marB="18288">
+                    <a:solidFill>
+                      <a:srgbClr val="FFFFFF"/>
+                    </a:solidFill>
+                  </a:tcPr>
+                </a:tc>
+              </a:tr>
+              <a:tr h="657225">
+                <a:tc>
+                  <a:txBody>
+                    <a:bodyPr wrap="square"/>
+                    <a:lstStyle/>
+                    <a:p>
+                      <a:r>
+                        <a:rPr sz="1100" b="0">
+                          <a:solidFill>
+                            <a:srgbClr val="282828"/>
+                          </a:solidFill>
+                          <a:latin typeface="Arial"/>
+                        </a:rPr>
+                        <a:t>4</a:t>
+                      </a:r>
+                    </a:p>
+                  </a:txBody>
+                  <a:tcPr marL="54864" marR="54864" marT="18288" marB="18288">
+                    <a:solidFill>
+                      <a:srgbClr val="ECF1F6"/>
+                    </a:solidFill>
+                  </a:tcPr>
+                </a:tc>
+                <a:tc>
+                  <a:txBody>
+                    <a:bodyPr wrap="square"/>
+                    <a:lstStyle/>
+                    <a:p>
+                      <a:r>
+                        <a:rPr sz="1100" b="0">
+                          <a:solidFill>
+                            <a:srgbClr val="282828"/>
+                          </a:solidFill>
+                          <a:latin typeface="Arial"/>
+                        </a:rPr>
+                        <a:t>calibration: the response matrix measured through the sensor, on the 30 nm working surface</a:t>
+                      </a:r>
+                    </a:p>
+                  </a:txBody>
+                  <a:tcPr marL="54864" marR="54864" marT="18288" marB="18288">
+                    <a:solidFill>
+                      <a:srgbClr val="ECF1F6"/>
+                    </a:solidFill>
+                  </a:tcPr>
+                </a:tc>
+                <a:tc>
+                  <a:txBody>
+                    <a:bodyPr wrap="square"/>
+                    <a:lstStyle/>
+                    <a:p>
+                      <a:r>
+                        <a:rPr sz="1100" b="0">
+                          <a:solidFill>
+                            <a:srgbClr val="282828"/>
+                          </a:solidFill>
+                          <a:latin typeface="Arial"/>
+                        </a:rPr>
+                        <a:t>piston null carried; stencil-site fit</a:t>
+                      </a:r>
+                    </a:p>
+                  </a:txBody>
+                  <a:tcPr marL="54864" marR="54864" marT="18288" marB="18288">
+                    <a:solidFill>
+                      <a:srgbClr val="ECF1F6"/>
+                    </a:solidFill>
+                  </a:tcPr>
+                </a:tc>
+              </a:tr>
+              <a:tr h="657225">
+                <a:tc>
+                  <a:txBody>
+                    <a:bodyPr wrap="square"/>
+                    <a:lstStyle/>
+                    <a:p>
+                      <a:r>
+                        <a:rPr sz="1100" b="0">
+                          <a:solidFill>
+                            <a:srgbClr val="282828"/>
+                          </a:solidFill>
+                          <a:latin typeface="Arial"/>
+                        </a:rPr>
+                        <a:t>5</a:t>
+                      </a:r>
+                    </a:p>
+                  </a:txBody>
+                  <a:tcPr marL="54864" marR="54864" marT="18288" marB="18288">
+                    <a:solidFill>
+                      <a:srgbClr val="FFFFFF"/>
+                    </a:solidFill>
+                  </a:tcPr>
+                </a:tc>
+                <a:tc>
+                  <a:txBody>
+                    <a:bodyPr wrap="square"/>
+                    <a:lstStyle/>
+                    <a:p>
+                      <a:r>
+                        <a:rPr sz="1100" b="0">
+                          <a:solidFill>
+                            <a:srgbClr val="282828"/>
+                          </a:solidFill>
+                          <a:latin typeface="Arial"/>
+                        </a:rPr>
+                        <a:t>rows on the working surface: 10 nm on one actuator; 1 nm on 47 sites; dense 10 nm</a:t>
+                      </a:r>
+                    </a:p>
+                  </a:txBody>
+                  <a:tcPr marL="54864" marR="54864" marT="18288" marB="18288">
+                    <a:solidFill>
+                      <a:srgbClr val="FFFFFF"/>
+                    </a:solidFill>
+                  </a:tcPr>
+                </a:tc>
+                <a:tc>
+                  <a:txBody>
+                    <a:bodyPr wrap="square"/>
+                    <a:lstStyle/>
+                    <a:p>
+                      <a:r>
+                        <a:rPr sz="1100" b="0">
+                          <a:solidFill>
+                            <a:srgbClr val="282828"/>
+                          </a:solidFill>
+                          <a:latin typeface="Arial"/>
+                        </a:rPr>
+                        <a:t>gain, floor, SNR</a:t>
+                      </a:r>
+                    </a:p>
+                  </a:txBody>
+                  <a:tcPr marL="54864" marR="54864" marT="18288" marB="18288">
+                    <a:solidFill>
+                      <a:srgbClr val="FFFFFF"/>
+                    </a:solidFill>
+                  </a:tcPr>
+                </a:tc>
+              </a:tr>
+            </a:tbl>
+          </a:graphicData>
+        </a:graphic>
+      </p:graphicFrame>
+      <p:graphicFrame>
+        <p:nvGraphicFramePr>
+          <p:cNvPr id="5" name="Table 4"/>
+          <p:cNvGraphicFramePr>
+            <a:graphicFrameLocks noGrp="1"/>
+          </p:cNvGraphicFramePr>
+          <p:nvPr/>
+        </p:nvGraphicFramePr>
+        <p:xfrm>
+          <a:off x="6400800" y="1298448"/>
+          <a:ext cx="5394959" cy="2777490"/>
+        </p:xfrm>
+        <a:graphic>
+          <a:graphicData uri="http://schemas.openxmlformats.org/drawingml/2006/table">
+            <a:tbl>
+              <a:tblPr firstRow="1" bandRow="1">
+                <a:tableStyleId>{5C22544A-7EE6-4342-B048-85BDC9FD1C3A}</a:tableStyleId>
+              </a:tblPr>
+              <a:tblGrid>
+                <a:gridCol w="410464"/>
+                <a:gridCol w="3846730"/>
+                <a:gridCol w="1137765"/>
+              </a:tblGrid>
+              <a:tr h="262890">
+                <a:tc>
+                  <a:txBody>
+                    <a:bodyPr wrap="square"/>
+                    <a:lstStyle/>
+                    <a:p>
+                      <a:r>
+                        <a:rPr sz="1000" b="1">
+                          <a:solidFill>
+                            <a:srgbClr val="FFFFFF"/>
+                          </a:solidFill>
+                          <a:latin typeface="Arial"/>
+                        </a:rPr>
+                        <a:t>step</a:t>
+                      </a:r>
+                    </a:p>
+                  </a:txBody>
+                  <a:tcPr marL="54864" marR="54864" marT="18288" marB="18288">
+                    <a:solidFill>
+                      <a:srgbClr val="1F4E79"/>
+                    </a:solidFill>
+                  </a:tcPr>
+                </a:tc>
+                <a:tc>
+                  <a:txBody>
+                    <a:bodyPr wrap="square"/>
+                    <a:lstStyle/>
+                    <a:p>
+                      <a:r>
+                        <a:rPr sz="1000" b="1">
+                          <a:solidFill>
+                            <a:srgbClr val="FFFFFF"/>
+                          </a:solidFill>
+                          <a:latin typeface="Arial"/>
+                        </a:rPr>
+                        <a:t>what</a:t>
+                      </a:r>
+                    </a:p>
+                  </a:txBody>
+                  <a:tcPr marL="54864" marR="54864" marT="18288" marB="18288">
+                    <a:solidFill>
+                      <a:srgbClr val="1F4E79"/>
+                    </a:solidFill>
+                  </a:tcPr>
+                </a:tc>
+                <a:tc>
+                  <a:txBody>
+                    <a:bodyPr wrap="square"/>
+                    <a:lstStyle/>
+                    <a:p>
+                      <a:r>
+                        <a:rPr sz="1000" b="1">
+                          <a:solidFill>
+                            <a:srgbClr val="FFFFFF"/>
+                          </a:solidFill>
+                          <a:latin typeface="Arial"/>
+                        </a:rPr>
+                        <a:t>gate or output</a:t>
+                      </a:r>
+                    </a:p>
+                  </a:txBody>
+                  <a:tcPr marL="54864" marR="54864" marT="18288" marB="18288">
+                    <a:solidFill>
+                      <a:srgbClr val="1F4E79"/>
+                    </a:solidFill>
+                  </a:tcPr>
+                </a:tc>
+              </a:tr>
+              <a:tr h="434340">
+                <a:tc>
+                  <a:txBody>
+                    <a:bodyPr wrap="square"/>
+                    <a:lstStyle/>
+                    <a:p>
+                      <a:r>
+                        <a:rPr sz="1000" b="0">
+                          <a:solidFill>
+                            <a:srgbClr val="282828"/>
+                          </a:solidFill>
+                          <a:latin typeface="Arial"/>
+                        </a:rPr>
+                        <a:t>6</a:t>
+                      </a:r>
+                    </a:p>
+                  </a:txBody>
+                  <a:tcPr marL="54864" marR="54864" marT="18288" marB="18288">
+                    <a:solidFill>
+                      <a:srgbClr val="FFFFFF"/>
+                    </a:solidFill>
+                  </a:tcPr>
+                </a:tc>
+                <a:tc>
+                  <a:txBody>
+                    <a:bodyPr wrap="square"/>
+                    <a:lstStyle/>
+                    <a:p>
+                      <a:r>
+                        <a:rPr sz="1000" b="0">
+                          <a:solidFill>
+                            <a:srgbClr val="282828"/>
+                          </a:solidFill>
+                          <a:latin typeface="Arial"/>
+                        </a:rPr>
+                        <a:t>capture range: the aging ladder to 10%; the matrix re-measured at 60 to 160 nm with its photon cost</a:t>
+                      </a:r>
+                    </a:p>
+                  </a:txBody>
+                  <a:tcPr marL="54864" marR="54864" marT="18288" marB="18288">
+                    <a:solidFill>
+                      <a:srgbClr val="FFFFFF"/>
+                    </a:solidFill>
+                  </a:tcPr>
+                </a:tc>
+                <a:tc>
+                  <a:txBody>
+                    <a:bodyPr wrap="square"/>
+                    <a:lstStyle/>
+                    <a:p>
+                      <a:r>
+                        <a:rPr sz="1000" b="0">
+                          <a:solidFill>
+                            <a:srgbClr val="282828"/>
+                          </a:solidFill>
+                          <a:latin typeface="Arial"/>
+                        </a:rPr>
+                        <a:t>range in nm; photons per rung</a:t>
+                      </a:r>
+                    </a:p>
+                  </a:txBody>
+                  <a:tcPr marL="54864" marR="54864" marT="18288" marB="18288">
+                    <a:solidFill>
+                      <a:srgbClr val="FFFFFF"/>
+                    </a:solidFill>
+                  </a:tcPr>
+                </a:tc>
+              </a:tr>
+              <a:tr h="434340">
+                <a:tc>
+                  <a:txBody>
+                    <a:bodyPr wrap="square"/>
+                    <a:lstStyle/>
+                    <a:p>
+                      <a:r>
+                        <a:rPr sz="1000" b="0">
+                          <a:solidFill>
+                            <a:srgbClr val="282828"/>
+                          </a:solidFill>
+                          <a:latin typeface="Arial"/>
+                        </a:rPr>
+                        <a:t>7</a:t>
+                      </a:r>
+                    </a:p>
+                  </a:txBody>
+                  <a:tcPr marL="54864" marR="54864" marT="18288" marB="18288">
+                    <a:solidFill>
+                      <a:srgbClr val="ECF1F6"/>
+                    </a:solidFill>
+                  </a:tcPr>
+                </a:tc>
+                <a:tc>
+                  <a:txBody>
+                    <a:bodyPr wrap="square"/>
+                    <a:lstStyle/>
+                    <a:p>
+                      <a:r>
+                        <a:rPr sz="1000" b="0">
+                          <a:solidFill>
+                            <a:srgbClr val="282828"/>
+                          </a:solidFill>
+                          <a:latin typeface="Arial"/>
+                        </a:rPr>
+                        <a:t>photons: noise fit over 1e8 to 1e14 per measurement, flat and on-surface matrix</a:t>
+                      </a:r>
+                    </a:p>
+                  </a:txBody>
+                  <a:tcPr marL="54864" marR="54864" marT="18288" marB="18288">
+                    <a:solidFill>
+                      <a:srgbClr val="ECF1F6"/>
+                    </a:solidFill>
+                  </a:tcPr>
+                </a:tc>
+                <a:tc>
+                  <a:txBody>
+                    <a:bodyPr wrap="square"/>
+                    <a:lstStyle/>
+                    <a:p>
+                      <a:r>
+                        <a:rPr sz="1000" b="0">
+                          <a:solidFill>
+                            <a:srgbClr val="282828"/>
+                          </a:solidFill>
+                          <a:latin typeface="Arial"/>
+                        </a:rPr>
+                        <a:t>photons for 1 pm</a:t>
+                      </a:r>
+                    </a:p>
+                  </a:txBody>
+                  <a:tcPr marL="54864" marR="54864" marT="18288" marB="18288">
+                    <a:solidFill>
+                      <a:srgbClr val="ECF1F6"/>
+                    </a:solidFill>
+                  </a:tcPr>
+                </a:tc>
+              </a:tr>
+              <a:tr h="605790">
+                <a:tc>
+                  <a:txBody>
+                    <a:bodyPr wrap="square"/>
+                    <a:lstStyle/>
+                    <a:p>
+                      <a:r>
+                        <a:rPr sz="1000" b="0">
+                          <a:solidFill>
+                            <a:srgbClr val="282828"/>
+                          </a:solidFill>
+                          <a:latin typeface="Arial"/>
+                        </a:rPr>
+                        <a:t>8</a:t>
+                      </a:r>
+                    </a:p>
+                  </a:txBody>
+                  <a:tcPr marL="54864" marR="54864" marT="18288" marB="18288">
+                    <a:solidFill>
+                      <a:srgbClr val="FFFFFF"/>
+                    </a:solidFill>
+                  </a:tcPr>
+                </a:tc>
+                <a:tc>
+                  <a:txBody>
+                    <a:bodyPr wrap="square"/>
+                    <a:lstStyle/>
+                    <a:p>
+                      <a:r>
+                        <a:rPr sz="1000" b="0">
+                          <a:solidFill>
+                            <a:srgbClr val="282828"/>
+                          </a:solidFill>
+                          <a:latin typeface="Arial"/>
+                        </a:rPr>
+                        <a:t>closed loop in the shared loop code: noise, walk, ramp; noiseless step; within-scan drift</a:t>
+                      </a:r>
+                    </a:p>
+                  </a:txBody>
+                  <a:tcPr marL="54864" marR="54864" marT="18288" marB="18288">
+                    <a:solidFill>
+                      <a:srgbClr val="FFFFFF"/>
+                    </a:solidFill>
+                  </a:tcPr>
+                </a:tc>
+                <a:tc>
+                  <a:txBody>
+                    <a:bodyPr wrap="square"/>
+                    <a:lstStyle/>
+                    <a:p>
+                      <a:r>
+                        <a:rPr sz="1000" b="0">
+                          <a:solidFill>
+                            <a:srgbClr val="282828"/>
+                          </a:solidFill>
+                          <a:latin typeface="Arial"/>
+                        </a:rPr>
+                        <a:t>photons per cycle for 3 pm; fixed error</a:t>
+                      </a:r>
+                    </a:p>
+                  </a:txBody>
+                  <a:tcPr marL="54864" marR="54864" marT="18288" marB="18288">
+                    <a:solidFill>
+                      <a:srgbClr val="FFFFFF"/>
+                    </a:solidFill>
+                  </a:tcPr>
+                </a:tc>
+              </a:tr>
+              <a:tr h="434340">
+                <a:tc>
+                  <a:txBody>
+                    <a:bodyPr wrap="square"/>
+                    <a:lstStyle/>
+                    <a:p>
+                      <a:r>
+                        <a:rPr sz="1000" b="0">
+                          <a:solidFill>
+                            <a:srgbClr val="282828"/>
+                          </a:solidFill>
+                          <a:latin typeface="Arial"/>
+                        </a:rPr>
+                        <a:t>9</a:t>
+                      </a:r>
+                    </a:p>
+                  </a:txBody>
+                  <a:tcPr marL="54864" marR="54864" marT="18288" marB="18288">
+                    <a:solidFill>
+                      <a:srgbClr val="ECF1F6"/>
+                    </a:solidFill>
+                  </a:tcPr>
+                </a:tc>
+                <a:tc>
+                  <a:txBody>
+                    <a:bodyPr wrap="square"/>
+                    <a:lstStyle/>
+                    <a:p>
+                      <a:r>
+                        <a:rPr sz="1000" b="0">
+                          <a:solidFill>
+                            <a:srgbClr val="282828"/>
+                          </a:solidFill>
+                          <a:latin typeface="Arial"/>
+                        </a:rPr>
+                        <a:t>descent: the start ladder with unwrapping and recalibration on and off</a:t>
+                      </a:r>
+                    </a:p>
+                  </a:txBody>
+                  <a:tcPr marL="54864" marR="54864" marT="18288" marB="18288">
+                    <a:solidFill>
+                      <a:srgbClr val="ECF1F6"/>
+                    </a:solidFill>
+                  </a:tcPr>
+                </a:tc>
+                <a:tc>
+                  <a:txBody>
+                    <a:bodyPr wrap="square"/>
+                    <a:lstStyle/>
+                    <a:p>
+                      <a:r>
+                        <a:rPr sz="1000" b="0">
+                          <a:solidFill>
+                            <a:srgbClr val="282828"/>
+                          </a:solidFill>
+                          <a:latin typeface="Arial"/>
+                        </a:rPr>
+                        <a:t>largest start brought to 3 pm</a:t>
+                      </a:r>
+                    </a:p>
+                  </a:txBody>
+                  <a:tcPr marL="54864" marR="54864" marT="18288" marB="18288">
+                    <a:solidFill>
+                      <a:srgbClr val="ECF1F6"/>
+                    </a:solidFill>
+                  </a:tcPr>
+                </a:tc>
+              </a:tr>
+              <a:tr h="605790">
+                <a:tc>
+                  <a:txBody>
+                    <a:bodyPr wrap="square"/>
+                    <a:lstStyle/>
+                    <a:p>
+                      <a:r>
+                        <a:rPr sz="1000" b="0">
+                          <a:solidFill>
+                            <a:srgbClr val="282828"/>
+                          </a:solidFill>
+                          <a:latin typeface="Arial"/>
+                        </a:rPr>
+                        <a:t>10</a:t>
+                      </a:r>
+                    </a:p>
+                  </a:txBody>
+                  <a:tcPr marL="54864" marR="54864" marT="18288" marB="18288">
+                    <a:solidFill>
+                      <a:srgbClr val="FFFFFF"/>
+                    </a:solidFill>
+                  </a:tcPr>
+                </a:tc>
+                <a:tc>
+                  <a:txBody>
+                    <a:bodyPr wrap="square"/>
+                    <a:lstStyle/>
+                    <a:p>
+                      <a:r>
+                        <a:rPr sz="1000" b="0">
+                          <a:solidFill>
+                            <a:srgbClr val="282828"/>
+                          </a:solidFill>
+                          <a:latin typeface="Arial"/>
+                        </a:rPr>
+                        <a:t>systematics one at a time, uncalibrated and through the matrix; layout drawn from the emitted deck; parts from the sheet; report numbers first</a:t>
+                      </a:r>
+                    </a:p>
+                  </a:txBody>
+                  <a:tcPr marL="54864" marR="54864" marT="18288" marB="18288">
+                    <a:solidFill>
+                      <a:srgbClr val="FFFFFF"/>
+                    </a:solidFill>
+                  </a:tcPr>
+                </a:tc>
+                <a:tc>
+                  <a:txBody>
+                    <a:bodyPr wrap="square"/>
+                    <a:lstStyle/>
+                    <a:p>
+                      <a:r>
+                        <a:rPr sz="1000" b="0">
+                          <a:solidFill>
+                            <a:srgbClr val="282828"/>
+                          </a:solidFill>
+                          <a:latin typeface="Arial"/>
+                        </a:rPr>
+                        <a:t>one line per term on the systematics slide</a:t>
+                      </a:r>
+                    </a:p>
+                  </a:txBody>
+                  <a:tcPr marL="54864" marR="54864" marT="18288" marB="18288">
+                    <a:solidFill>
+                      <a:srgbClr val="FFFFFF"/>
+                    </a:solidFill>
+                  </a:tcPr>
+                </a:tc>
+              </a:tr>
+            </a:tbl>
+          </a:graphicData>
+        </a:graphic>
+      </p:graphicFrame>
       <p:sp>
         <p:nvSpPr>
-          <p:cNvPr id="4" name="TextBox 3"/>
+          <p:cNvPr id="6" name="TextBox 5"/>
           <p:cNvSpPr txBox="1"/>
           <p:nvPr/>
         </p:nvSpPr>
         <p:spPr>
           <a:xfrm>
-            <a:off x="411480" y="1298448"/>
-            <a:ext cx="5806440" cy="274320"/>
-          </a:xfrm>
-          <a:prstGeom prst="rect">
-            <a:avLst/>
-          </a:prstGeom>
-          <a:noFill/>
-        </p:spPr>
-        <p:txBody>
-          <a:bodyPr wrap="square">
-            <a:spAutoFit/>
-          </a:bodyPr>
-          <a:lstStyle/>
-          <a:p>
-            <a:pPr>
-              <a:spcAft>
-                <a:spcPts val="600"/>
-              </a:spcAft>
-            </a:pPr>
-            <a:r>
-              <a:rPr sz="1200" b="0">
-                <a:solidFill>
-                  <a:srgbClr val="282828"/>
-                </a:solidFill>
-                <a:latin typeface="Arial"/>
-              </a:rPr>
-              <a:t>•  Interferometer (tg_psi_dm96_oap): tg96_run for the lens rig; tg96_run('bench.optics','oap','tag','oap') for the mirror rig; ./tg96_batch.sh lens_deck "'stages',{'bench','deck'},'battery.noise',true"; ./tg96_batch.sh loop_lens "'stages',{'bench','loop','figs'}".</a:t>
-            </a:r>
-          </a:p>
-          <a:p>
-            <a:pPr>
-              <a:spcAft>
-                <a:spcPts val="600"/>
-              </a:spcAft>
-            </a:pPr>
-            <a:r>
-              <a:rPr sz="1200" b="0">
-                <a:solidFill>
-                  <a:srgbClr val="282828"/>
-                </a:solidFill>
-                <a:latin typeface="Arial"/>
-              </a:rPr>
-              <a:t>•  Zernike sensors (zwfs_dm96): out = zwfs_run; (bench + battery + figures); zwfs_run('tag','ng385','NGRID',385); zwfs_run('MODEL',2048,'NGRID',385,'param_file','macos_param_2048.txt'); ./zwfs_batch.sh loop193 "'stages',{'bench','loop','figs'}".</a:t>
-            </a:r>
-          </a:p>
-          <a:p>
-            <a:pPr>
-              <a:spcAft>
-                <a:spcPts val="600"/>
-              </a:spcAft>
-            </a:pPr>
-            <a:r>
-              <a:rPr sz="1200" b="0">
-                <a:solidFill>
-                  <a:srgbClr val="282828"/>
-                </a:solidFill>
-                <a:latin typeface="Arial"/>
-              </a:rPr>
-              <a:t>•  Point-diffraction (pdi_dm96): P = pdi_params; out = pdi_run(P);; pdi_run('pdi.DIA_LAMD',1.0,'stages',{'bench','battery','figs'}); ./pdi_batch.sh TAG "pdi_params, 'stages',{'bench','loop','figs'}".</a:t>
-            </a:r>
-          </a:p>
-        </p:txBody>
-      </p:sp>
-      <p:sp>
-        <p:nvSpPr>
-          <p:cNvPr id="5" name="TextBox 4"/>
-          <p:cNvSpPr txBox="1"/>
-          <p:nvPr/>
-        </p:nvSpPr>
-        <p:spPr>
-          <a:xfrm>
-            <a:off x="6400800" y="1298448"/>
+            <a:off x="6400800" y="4222242"/>
             <a:ext cx="5394960" cy="274320"/>
           </a:xfrm>
           <a:prstGeom prst="rect">
@@ -14525,84 +15326,13 @@
               </a:spcAft>
             </a:pPr>
             <a:r>
-              <a:rPr sz="1200" b="0">
-                <a:solidFill>
-                  <a:srgbClr val="282828"/>
-                </a:solidFill>
-                <a:latin typeface="Arial"/>
-              </a:rPr>
-              <a:t>•  The other gauges on the mirror rig: zwfs_run('bench.optics','oap','bench.coat_oap','bareAl','readings',{'L','S','V','P','PF'},'stages',{'bench','battery','noise','loop'},'mask.v_arm','engine').</a:t>
-            </a:r>
-          </a:p>
-          <a:p>
-            <a:pPr>
-              <a:spcAft>
-                <a:spcPts val="600"/>
-              </a:spcAft>
-            </a:pPr>
-            <a:r>
-              <a:rPr sz="1200" b="0">
-                <a:solidFill>
-                  <a:srgbClr val="282828"/>
-                </a:solidFill>
-                <a:latin typeface="Arial"/>
-              </a:rPr>
-              <a:t>•  Where: MACOS_resources/mmacos/templates/40_benches/{tg_psi_dm96_oap, zwfs_dm96, pdi_dm96}, the shared scoring library dm_gauge_lib, branch dev-candidate.  A model-1024 run needs about 11 GB; the batch wrappers run one at a time.</a:t>
-            </a:r>
-          </a:p>
-          <a:p>
-            <a:pPr>
-              <a:spcAft>
-                <a:spcPts val="600"/>
-              </a:spcAft>
-            </a:pPr>
-            <a:r>
-              <a:rPr sz="1200" b="0">
-                <a:solidFill>
-                  <a:srgbClr val="282828"/>
-                </a:solidFill>
-                <a:latin typeface="Arial"/>
-              </a:rPr>
-              <a:t>•  Gates: every stage asserts its own gates (the mask round trip, the reference-wave surrogate, the fold, the pinhole, the analyzer); tDmgLoop 15/15; the mmacos fast suite 481/0.</a:t>
-            </a:r>
-          </a:p>
-        </p:txBody>
-      </p:sp>
-      <p:sp>
-        <p:nvSpPr>
-          <p:cNvPr id="6" name="TextBox 5"/>
-          <p:cNvSpPr txBox="1"/>
-          <p:nvPr/>
-        </p:nvSpPr>
-        <p:spPr>
-          <a:xfrm>
-            <a:off x="6400800" y="3736848"/>
-            <a:ext cx="5394960" cy="274320"/>
-          </a:xfrm>
-          <a:prstGeom prst="rect">
-            <a:avLst/>
-          </a:prstGeom>
-          <a:noFill/>
-        </p:spPr>
-        <p:txBody>
-          <a:bodyPr wrap="square">
-            <a:spAutoFit/>
-          </a:bodyPr>
-          <a:lstStyle/>
-          <a:p>
-            <a:pPr>
-              <a:spcAft>
-                <a:spcPts val="600"/>
-              </a:spcAft>
-            </a:pPr>
-            <a:r>
               <a:rPr sz="1050" b="0">
                 <a:solidFill>
                   <a:srgbClr val="6E6E6E"/>
                 </a:solidFill>
                 <a:latin typeface="Arial"/>
               </a:rPr>
-              <a:t>Each directory's README carries the full command list and the run-tag index.</a:t>
+              <a:t>The scoring library (the loop, the unwrapper, the arm and analyzer maps, the clearance check) is shared by the three lanes; nothing is copied between them.  The path is recorded as reference memory so the next configuration follows it in a day.</a:t>
             </a:r>
           </a:p>
         </p:txBody>
@@ -14659,7 +15389,7 @@
                 </a:solidFill>
                 <a:latin typeface="Arial"/>
               </a:rPr>
-              <a:t>Backup: the interferometer's three phase-shift forms</a:t>
+              <a:t>Run it yourself</a:t>
             </a:r>
           </a:p>
           <a:p>
@@ -14675,7 +15405,7 @@
                 </a:solidFill>
                 <a:latin typeface="Arial"/>
               </a:rPr>
-              <a:t>The four frames are the same in the model; the forms differ in what they get wrong</a:t>
+              <a:t>One parameter sheet and one runner per approach, shared code underneath; every number here is reproduced by the commands below</a:t>
             </a:r>
           </a:p>
         </p:txBody>
@@ -14724,6 +15454,304 @@
           </a:p>
         </p:txBody>
       </p:sp>
+      <p:sp>
+        <p:nvSpPr>
+          <p:cNvPr id="4" name="TextBox 3"/>
+          <p:cNvSpPr txBox="1"/>
+          <p:nvPr/>
+        </p:nvSpPr>
+        <p:spPr>
+          <a:xfrm>
+            <a:off x="411480" y="1298448"/>
+            <a:ext cx="5806440" cy="274320"/>
+          </a:xfrm>
+          <a:prstGeom prst="rect">
+            <a:avLst/>
+          </a:prstGeom>
+          <a:noFill/>
+        </p:spPr>
+        <p:txBody>
+          <a:bodyPr wrap="square">
+            <a:spAutoFit/>
+          </a:bodyPr>
+          <a:lstStyle/>
+          <a:p>
+            <a:pPr>
+              <a:spcAft>
+                <a:spcPts val="600"/>
+              </a:spcAft>
+            </a:pPr>
+            <a:r>
+              <a:rPr sz="1200" b="0">
+                <a:solidFill>
+                  <a:srgbClr val="282828"/>
+                </a:solidFill>
+                <a:latin typeface="Arial"/>
+              </a:rPr>
+              <a:t>•  Interferometer (tg_psi_dm96_oap): tg96_run for the lens rig; tg96_run('bench.optics','oap','tag','oap') for the mirror rig; ./tg96_batch.sh lens_deck "'stages',{'bench','deck'},'battery.noise',true"; ./tg96_batch.sh loop_lens "'stages',{'bench','loop','figs'}".</a:t>
+            </a:r>
+          </a:p>
+          <a:p>
+            <a:pPr>
+              <a:spcAft>
+                <a:spcPts val="600"/>
+              </a:spcAft>
+            </a:pPr>
+            <a:r>
+              <a:rPr sz="1200" b="0">
+                <a:solidFill>
+                  <a:srgbClr val="282828"/>
+                </a:solidFill>
+                <a:latin typeface="Arial"/>
+              </a:rPr>
+              <a:t>•  Zernike sensors (zwfs_dm96): out = zwfs_run; (bench + battery + figures); zwfs_run('tag','ng385','NGRID',385); zwfs_run('MODEL',2048,'NGRID',385,'param_file','macos_param_2048.txt'); ./zwfs_batch.sh loop193 "'stages',{'bench','loop','figs'}".</a:t>
+            </a:r>
+          </a:p>
+          <a:p>
+            <a:pPr>
+              <a:spcAft>
+                <a:spcPts val="600"/>
+              </a:spcAft>
+            </a:pPr>
+            <a:r>
+              <a:rPr sz="1200" b="0">
+                <a:solidFill>
+                  <a:srgbClr val="282828"/>
+                </a:solidFill>
+                <a:latin typeface="Arial"/>
+              </a:rPr>
+              <a:t>•  Point-diffraction (pdi_dm96): P = pdi_params; out = pdi_run(P);; pdi_run('pdi.DIA_LAMD',1.0,'stages',{'bench','battery','figs'}); ./pdi_batch.sh TAG "pdi_params, 'stages',{'bench','loop','figs'}".</a:t>
+            </a:r>
+          </a:p>
+        </p:txBody>
+      </p:sp>
+      <p:sp>
+        <p:nvSpPr>
+          <p:cNvPr id="5" name="TextBox 4"/>
+          <p:cNvSpPr txBox="1"/>
+          <p:nvPr/>
+        </p:nvSpPr>
+        <p:spPr>
+          <a:xfrm>
+            <a:off x="6400800" y="1298448"/>
+            <a:ext cx="5394960" cy="274320"/>
+          </a:xfrm>
+          <a:prstGeom prst="rect">
+            <a:avLst/>
+          </a:prstGeom>
+          <a:noFill/>
+        </p:spPr>
+        <p:txBody>
+          <a:bodyPr wrap="square">
+            <a:spAutoFit/>
+          </a:bodyPr>
+          <a:lstStyle/>
+          <a:p>
+            <a:pPr>
+              <a:spcAft>
+                <a:spcPts val="600"/>
+              </a:spcAft>
+            </a:pPr>
+            <a:r>
+              <a:rPr sz="1200" b="0">
+                <a:solidFill>
+                  <a:srgbClr val="282828"/>
+                </a:solidFill>
+                <a:latin typeface="Arial"/>
+              </a:rPr>
+              <a:t>•  The other gauges on the mirror rig: zwfs_run('bench.optics','oap','bench.coat_oap','bareAl','readings',{'L','S','V','P','PF'},'stages',{'bench','battery','noise','loop'},'mask.v_arm','engine').</a:t>
+            </a:r>
+          </a:p>
+          <a:p>
+            <a:pPr>
+              <a:spcAft>
+                <a:spcPts val="600"/>
+              </a:spcAft>
+            </a:pPr>
+            <a:r>
+              <a:rPr sz="1200" b="0">
+                <a:solidFill>
+                  <a:srgbClr val="282828"/>
+                </a:solidFill>
+                <a:latin typeface="Arial"/>
+              </a:rPr>
+              <a:t>•  Where: MACOS_resources/mmacos/templates/40_benches/{tg_psi_dm96_oap, zwfs_dm96, pdi_dm96}, the shared scoring library dm_gauge_lib, branch dev-candidate.  A model-1024 run needs about 11 GB; the batch wrappers run one at a time.</a:t>
+            </a:r>
+          </a:p>
+          <a:p>
+            <a:pPr>
+              <a:spcAft>
+                <a:spcPts val="600"/>
+              </a:spcAft>
+            </a:pPr>
+            <a:r>
+              <a:rPr sz="1200" b="0">
+                <a:solidFill>
+                  <a:srgbClr val="282828"/>
+                </a:solidFill>
+                <a:latin typeface="Arial"/>
+              </a:rPr>
+              <a:t>•  Gates: every stage asserts its own gates (the mask round trip, the reference-wave surrogate, the fold, the pinhole, the analyzer); tDmgLoop 15/15; the mmacos fast suite 481/0.</a:t>
+            </a:r>
+          </a:p>
+        </p:txBody>
+      </p:sp>
+      <p:sp>
+        <p:nvSpPr>
+          <p:cNvPr id="6" name="TextBox 5"/>
+          <p:cNvSpPr txBox="1"/>
+          <p:nvPr/>
+        </p:nvSpPr>
+        <p:spPr>
+          <a:xfrm>
+            <a:off x="6400800" y="3736848"/>
+            <a:ext cx="5394960" cy="274320"/>
+          </a:xfrm>
+          <a:prstGeom prst="rect">
+            <a:avLst/>
+          </a:prstGeom>
+          <a:noFill/>
+        </p:spPr>
+        <p:txBody>
+          <a:bodyPr wrap="square">
+            <a:spAutoFit/>
+          </a:bodyPr>
+          <a:lstStyle/>
+          <a:p>
+            <a:pPr>
+              <a:spcAft>
+                <a:spcPts val="600"/>
+              </a:spcAft>
+            </a:pPr>
+            <a:r>
+              <a:rPr sz="1050" b="0">
+                <a:solidFill>
+                  <a:srgbClr val="6E6E6E"/>
+                </a:solidFill>
+                <a:latin typeface="Arial"/>
+              </a:rPr>
+              <a:t>Each directory's README carries the full command list and the run-tag index.</a:t>
+            </a:r>
+          </a:p>
+        </p:txBody>
+      </p:sp>
+    </p:spTree>
+  </p:cSld>
+  <p:clrMapOvr>
+    <a:masterClrMapping/>
+  </p:clrMapOvr>
+</p:sld>
+</file>
+
+<file path=ppt/slides/slide29.xml><?xml version="1.0" encoding="utf-8"?>
+<p:sld xmlns:a="http://schemas.openxmlformats.org/drawingml/2006/main" xmlns:p="http://schemas.openxmlformats.org/presentationml/2006/main" xmlns:r="http://schemas.openxmlformats.org/officeDocument/2006/relationships">
+  <p:cSld>
+    <p:spTree>
+      <p:nvGrpSpPr>
+        <p:cNvPr id="1" name=""/>
+        <p:cNvGrpSpPr/>
+        <p:nvPr/>
+      </p:nvGrpSpPr>
+      <p:grpSpPr/>
+      <p:sp>
+        <p:nvSpPr>
+          <p:cNvPr id="2" name="TextBox 1"/>
+          <p:cNvSpPr txBox="1"/>
+          <p:nvPr/>
+        </p:nvSpPr>
+        <p:spPr>
+          <a:xfrm>
+            <a:off x="411480" y="201168"/>
+            <a:ext cx="11368735" cy="914400"/>
+          </a:xfrm>
+          <a:prstGeom prst="rect">
+            <a:avLst/>
+          </a:prstGeom>
+          <a:noFill/>
+        </p:spPr>
+        <p:txBody>
+          <a:bodyPr wrap="square">
+            <a:spAutoFit/>
+          </a:bodyPr>
+          <a:lstStyle/>
+          <a:p>
+            <a:pPr>
+              <a:spcAft>
+                <a:spcPts val="400"/>
+              </a:spcAft>
+            </a:pPr>
+            <a:r>
+              <a:rPr sz="2400" b="1">
+                <a:solidFill>
+                  <a:srgbClr val="1F4E79"/>
+                </a:solidFill>
+                <a:latin typeface="Arial"/>
+              </a:rPr>
+              <a:t>Backup: the interferometer's three phase-shift forms</a:t>
+            </a:r>
+          </a:p>
+          <a:p>
+            <a:pPr>
+              <a:spcAft>
+                <a:spcPts val="0"/>
+              </a:spcAft>
+            </a:pPr>
+            <a:r>
+              <a:rPr sz="1250" b="0">
+                <a:solidFill>
+                  <a:srgbClr val="6E6E6E"/>
+                </a:solidFill>
+                <a:latin typeface="Arial"/>
+              </a:rPr>
+              <a:t>The four frames are the same in the model; the forms differ in what they get wrong</a:t>
+            </a:r>
+          </a:p>
+        </p:txBody>
+      </p:sp>
+      <p:sp>
+        <p:nvSpPr>
+          <p:cNvPr id="3" name="Rectangle 2"/>
+          <p:cNvSpPr/>
+          <p:nvPr/>
+        </p:nvSpPr>
+        <p:spPr>
+          <a:xfrm>
+            <a:off x="411480" y="1133856"/>
+            <a:ext cx="11368735" cy="20320"/>
+          </a:xfrm>
+          <a:prstGeom prst="rect">
+            <a:avLst/>
+          </a:prstGeom>
+          <a:solidFill>
+            <a:srgbClr val="B8C6D4"/>
+          </a:solidFill>
+          <a:ln>
+            <a:noFill/>
+          </a:ln>
+          <a:effectLst/>
+        </p:spPr>
+        <p:style>
+          <a:lnRef idx="1">
+            <a:schemeClr val="accent1"/>
+          </a:lnRef>
+          <a:fillRef idx="3">
+            <a:schemeClr val="accent1"/>
+          </a:fillRef>
+          <a:effectRef idx="2">
+            <a:schemeClr val="accent1"/>
+          </a:effectRef>
+          <a:fontRef idx="minor">
+            <a:schemeClr val="lt1"/>
+          </a:fontRef>
+        </p:style>
+        <p:txBody>
+          <a:bodyPr rtlCol="0" anchor="ctr"/>
+          <a:lstStyle/>
+          <a:p>
+            <a:pPr algn="ctr"/>
+          </a:p>
+        </p:txBody>
+      </p:sp>
       <p:graphicFrame>
         <p:nvGraphicFramePr>
           <p:cNvPr id="4" name="Table 3"/>
@@ -15159,7 +16187,738 @@
 </p:sld>
 </file>
 
-<file path=ppt/slides/slide29.xml><?xml version="1.0" encoding="utf-8"?>
+<file path=ppt/slides/slide3.xml><?xml version="1.0" encoding="utf-8"?>
+<p:sld xmlns:a="http://schemas.openxmlformats.org/drawingml/2006/main" xmlns:p="http://schemas.openxmlformats.org/presentationml/2006/main" xmlns:r="http://schemas.openxmlformats.org/officeDocument/2006/relationships">
+  <p:cSld>
+    <p:spTree>
+      <p:nvGrpSpPr>
+        <p:cNvPr id="1" name=""/>
+        <p:cNvGrpSpPr/>
+        <p:nvPr/>
+      </p:nvGrpSpPr>
+      <p:grpSpPr/>
+      <p:sp>
+        <p:nvSpPr>
+          <p:cNvPr id="2" name="TextBox 1"/>
+          <p:cNvSpPr txBox="1"/>
+          <p:nvPr/>
+        </p:nvSpPr>
+        <p:spPr>
+          <a:xfrm>
+            <a:off x="411480" y="201168"/>
+            <a:ext cx="11368735" cy="914400"/>
+          </a:xfrm>
+          <a:prstGeom prst="rect">
+            <a:avLst/>
+          </a:prstGeom>
+          <a:noFill/>
+        </p:spPr>
+        <p:txBody>
+          <a:bodyPr wrap="square">
+            <a:spAutoFit/>
+          </a:bodyPr>
+          <a:lstStyle/>
+          <a:p>
+            <a:pPr>
+              <a:spcAft>
+                <a:spcPts val="400"/>
+              </a:spcAft>
+            </a:pPr>
+            <a:r>
+              <a:rPr sz="2400" b="1">
+                <a:solidFill>
+                  <a:srgbClr val="1F4E79"/>
+                </a:solidFill>
+                <a:latin typeface="Arial"/>
+              </a:rPr>
+              <a:t>One bench, four ways of sensing</a:t>
+            </a:r>
+          </a:p>
+          <a:p>
+            <a:pPr>
+              <a:spcAft>
+                <a:spcPts val="0"/>
+              </a:spcAft>
+            </a:pPr>
+            <a:r>
+              <a:rPr sz="1250" b="0">
+                <a:solidFill>
+                  <a:srgbClr val="6E6E6E"/>
+                </a:solidFill>
+                <a:latin typeface="Arial"/>
+              </a:rPr>
+              <a:t>Everything shares the front end: a filtered HeNe, a collimator, a plate splitter at 22.5°, a 700 mm leg to the mirror, a focuser to an internal focus, a field lens to a camera at the pupil image</a:t>
+            </a:r>
+          </a:p>
+        </p:txBody>
+      </p:sp>
+      <p:sp>
+        <p:nvSpPr>
+          <p:cNvPr id="3" name="Rectangle 2"/>
+          <p:cNvSpPr/>
+          <p:nvPr/>
+        </p:nvSpPr>
+        <p:spPr>
+          <a:xfrm>
+            <a:off x="411480" y="1133856"/>
+            <a:ext cx="11368735" cy="20320"/>
+          </a:xfrm>
+          <a:prstGeom prst="rect">
+            <a:avLst/>
+          </a:prstGeom>
+          <a:solidFill>
+            <a:srgbClr val="B8C6D4"/>
+          </a:solidFill>
+          <a:ln>
+            <a:noFill/>
+          </a:ln>
+          <a:effectLst/>
+        </p:spPr>
+        <p:style>
+          <a:lnRef idx="1">
+            <a:schemeClr val="accent1"/>
+          </a:lnRef>
+          <a:fillRef idx="3">
+            <a:schemeClr val="accent1"/>
+          </a:fillRef>
+          <a:effectRef idx="2">
+            <a:schemeClr val="accent1"/>
+          </a:effectRef>
+          <a:fontRef idx="minor">
+            <a:schemeClr val="lt1"/>
+          </a:fontRef>
+        </p:style>
+        <p:txBody>
+          <a:bodyPr rtlCol="0" anchor="ctr"/>
+          <a:lstStyle/>
+          <a:p>
+            <a:pPr algn="ctr"/>
+          </a:p>
+        </p:txBody>
+      </p:sp>
+      <p:pic>
+        <p:nvPicPr>
+          <p:cNvPr id="4" name="Picture 3" descr="crop_bench_bs22_train.png"/>
+          <p:cNvPicPr>
+            <a:picLocks noChangeAspect="1"/>
+          </p:cNvPicPr>
+          <p:nvPr/>
+        </p:nvPicPr>
+        <p:blipFill>
+          <a:blip r:embed="rId2"/>
+          <a:stretch>
+            <a:fillRect/>
+          </a:stretch>
+        </p:blipFill>
+        <p:spPr>
+          <a:xfrm>
+            <a:off x="4061668" y="1298448"/>
+            <a:ext cx="4068357" cy="2348992"/>
+          </a:xfrm>
+          <a:prstGeom prst="rect">
+            <a:avLst/>
+          </a:prstGeom>
+        </p:spPr>
+      </p:pic>
+      <p:sp>
+        <p:nvSpPr>
+          <p:cNvPr id="5" name="TextBox 4"/>
+          <p:cNvSpPr txBox="1"/>
+          <p:nvPr/>
+        </p:nvSpPr>
+        <p:spPr>
+          <a:xfrm>
+            <a:off x="411480" y="3665727"/>
+            <a:ext cx="11368735" cy="394208"/>
+          </a:xfrm>
+          <a:prstGeom prst="rect">
+            <a:avLst/>
+          </a:prstGeom>
+          <a:noFill/>
+        </p:spPr>
+        <p:txBody>
+          <a:bodyPr wrap="square">
+            <a:spAutoFit/>
+          </a:bodyPr>
+          <a:lstStyle/>
+          <a:p>
+            <a:pPr algn="ctr">
+              <a:spcAft>
+                <a:spcPts val="0"/>
+              </a:spcAft>
+            </a:pPr>
+            <a:r>
+              <a:rPr sz="1000" b="0">
+                <a:solidFill>
+                  <a:srgbClr val="6E6E6E"/>
+                </a:solidFill>
+                <a:latin typeface="Arial"/>
+              </a:rPr>
+              <a:t>The shared front end as traced by the engine, seen from above, at the 22.5° splitter: source at left, collimator L1, the splitter, the 96 mm mirror on its 700 mm leg (blue), the reference arm and its flat (orange, the interferometer only), the focuser L2 toward the internal focus.  The mask seat at that focus is where the four sensing methods differ.</a:t>
+            </a:r>
+          </a:p>
+        </p:txBody>
+      </p:sp>
+      <p:graphicFrame>
+        <p:nvGraphicFramePr>
+          <p:cNvPr id="6" name="Table 5"/>
+          <p:cNvGraphicFramePr>
+            <a:graphicFrameLocks noGrp="1"/>
+          </p:cNvGraphicFramePr>
+          <p:nvPr/>
+        </p:nvGraphicFramePr>
+        <p:xfrm>
+          <a:off x="411480" y="4096511"/>
+          <a:ext cx="5806439" cy="1965960"/>
+        </p:xfrm>
+        <a:graphic>
+          <a:graphicData uri="http://schemas.openxmlformats.org/drawingml/2006/table">
+            <a:tbl>
+              <a:tblPr firstRow="1" bandRow="1">
+                <a:tableStyleId>{5C22544A-7EE6-4342-B048-85BDC9FD1C3A}</a:tableStyleId>
+              </a:tblPr>
+              <a:tblGrid>
+                <a:gridCol w="662479"/>
+                <a:gridCol w="5143960"/>
+              </a:tblGrid>
+              <a:tr h="280035">
+                <a:tc>
+                  <a:txBody>
+                    <a:bodyPr wrap="square"/>
+                    <a:lstStyle/>
+                    <a:p>
+                      <a:r>
+                        <a:rPr sz="1100" b="1">
+                          <a:solidFill>
+                            <a:srgbClr val="FFFFFF"/>
+                          </a:solidFill>
+                          <a:latin typeface="Arial"/>
+                        </a:rPr>
+                        <a:t>part</a:t>
+                      </a:r>
+                    </a:p>
+                  </a:txBody>
+                  <a:tcPr marL="54864" marR="54864" marT="18288" marB="18288">
+                    <a:solidFill>
+                      <a:srgbClr val="1F4E79"/>
+                    </a:solidFill>
+                  </a:tcPr>
+                </a:tc>
+                <a:tc>
+                  <a:txBody>
+                    <a:bodyPr wrap="square"/>
+                    <a:lstStyle/>
+                    <a:p>
+                      <a:r>
+                        <a:rPr sz="1100" b="1">
+                          <a:solidFill>
+                            <a:srgbClr val="FFFFFF"/>
+                          </a:solidFill>
+                          <a:latin typeface="Arial"/>
+                        </a:rPr>
+                        <a:t>value</a:t>
+                      </a:r>
+                    </a:p>
+                  </a:txBody>
+                  <a:tcPr marL="54864" marR="54864" marT="18288" marB="18288">
+                    <a:solidFill>
+                      <a:srgbClr val="1F4E79"/>
+                    </a:solidFill>
+                  </a:tcPr>
+                </a:tc>
+              </a:tr>
+              <a:tr h="280035">
+                <a:tc>
+                  <a:txBody>
+                    <a:bodyPr wrap="square"/>
+                    <a:lstStyle/>
+                    <a:p>
+                      <a:r>
+                        <a:rPr sz="1100" b="0">
+                          <a:solidFill>
+                            <a:srgbClr val="282828"/>
+                          </a:solidFill>
+                          <a:latin typeface="Arial"/>
+                        </a:rPr>
+                        <a:t>source</a:t>
+                      </a:r>
+                    </a:p>
+                  </a:txBody>
+                  <a:tcPr marL="54864" marR="54864" marT="18288" marB="18288">
+                    <a:solidFill>
+                      <a:srgbClr val="FFFFFF"/>
+                    </a:solidFill>
+                  </a:tcPr>
+                </a:tc>
+                <a:tc>
+                  <a:txBody>
+                    <a:bodyPr wrap="square"/>
+                    <a:lstStyle/>
+                    <a:p>
+                      <a:r>
+                        <a:rPr sz="1100" b="0">
+                          <a:solidFill>
+                            <a:srgbClr val="282828"/>
+                          </a:solidFill>
+                          <a:latin typeface="Arial"/>
+                        </a:rPr>
+                        <a:t>HeNe 632.8 nm, filtered, 51 mm beam radius</a:t>
+                      </a:r>
+                    </a:p>
+                  </a:txBody>
+                  <a:tcPr marL="54864" marR="54864" marT="18288" marB="18288">
+                    <a:solidFill>
+                      <a:srgbClr val="FFFFFF"/>
+                    </a:solidFill>
+                  </a:tcPr>
+                </a:tc>
+              </a:tr>
+              <a:tr h="468630">
+                <a:tc>
+                  <a:txBody>
+                    <a:bodyPr wrap="square"/>
+                    <a:lstStyle/>
+                    <a:p>
+                      <a:r>
+                        <a:rPr sz="1100" b="0">
+                          <a:solidFill>
+                            <a:srgbClr val="282828"/>
+                          </a:solidFill>
+                          <a:latin typeface="Arial"/>
+                        </a:rPr>
+                        <a:t>collimator L1</a:t>
+                      </a:r>
+                    </a:p>
+                  </a:txBody>
+                  <a:tcPr marL="54864" marR="54864" marT="18288" marB="18288">
+                    <a:solidFill>
+                      <a:srgbClr val="ECF1F6"/>
+                    </a:solidFill>
+                  </a:tcPr>
+                </a:tc>
+                <a:tc>
+                  <a:txBody>
+                    <a:bodyPr wrap="square"/>
+                    <a:lstStyle/>
+                    <a:p>
+                      <a:r>
+                        <a:rPr sz="1100" b="0">
+                          <a:solidFill>
+                            <a:srgbClr val="282828"/>
+                          </a:solidFill>
+                          <a:latin typeface="Arial"/>
+                        </a:rPr>
+                        <a:t>f 857 mm, 103 mm, coated; modeled 5 mm center, 2 mm edge, to be a real 103 mm singlet</a:t>
+                      </a:r>
+                    </a:p>
+                  </a:txBody>
+                  <a:tcPr marL="54864" marR="54864" marT="18288" marB="18288">
+                    <a:solidFill>
+                      <a:srgbClr val="ECF1F6"/>
+                    </a:solidFill>
+                  </a:tcPr>
+                </a:tc>
+              </a:tr>
+              <a:tr h="468630">
+                <a:tc>
+                  <a:txBody>
+                    <a:bodyPr wrap="square"/>
+                    <a:lstStyle/>
+                    <a:p>
+                      <a:r>
+                        <a:rPr sz="1100" b="0">
+                          <a:solidFill>
+                            <a:srgbClr val="282828"/>
+                          </a:solidFill>
+                          <a:latin typeface="Arial"/>
+                        </a:rPr>
+                        <a:t>plate splitter</a:t>
+                      </a:r>
+                    </a:p>
+                  </a:txBody>
+                  <a:tcPr marL="54864" marR="54864" marT="18288" marB="18288">
+                    <a:solidFill>
+                      <a:srgbClr val="FFFFFF"/>
+                    </a:solidFill>
+                  </a:tcPr>
+                </a:tc>
+                <a:tc>
+                  <a:txBody>
+                    <a:bodyPr wrap="square"/>
+                    <a:lstStyle/>
+                    <a:p>
+                      <a:r>
+                        <a:rPr sz="1100" b="0">
+                          <a:solidFill>
+                            <a:srgbClr val="282828"/>
+                          </a:solidFill>
+                          <a:latin typeface="Arial"/>
+                        </a:rPr>
+                        <a:t>22.5° incidence (the record's 7° does not clear the node: next slide), 50/50; compensator matched; modeled 2.6 mm thick, to be 10 mm</a:t>
+                      </a:r>
+                    </a:p>
+                  </a:txBody>
+                  <a:tcPr marL="54864" marR="54864" marT="18288" marB="18288">
+                    <a:solidFill>
+                      <a:srgbClr val="FFFFFF"/>
+                    </a:solidFill>
+                  </a:tcPr>
+                </a:tc>
+              </a:tr>
+              <a:tr h="468630">
+                <a:tc>
+                  <a:txBody>
+                    <a:bodyPr wrap="square"/>
+                    <a:lstStyle/>
+                    <a:p>
+                      <a:r>
+                        <a:rPr sz="1100" b="0">
+                          <a:solidFill>
+                            <a:srgbClr val="282828"/>
+                          </a:solidFill>
+                          <a:latin typeface="Arial"/>
+                        </a:rPr>
+                        <a:t>deformable mirror</a:t>
+                      </a:r>
+                    </a:p>
+                  </a:txBody>
+                  <a:tcPr marL="54864" marR="54864" marT="18288" marB="18288">
+                    <a:solidFill>
+                      <a:srgbClr val="ECF1F6"/>
+                    </a:solidFill>
+                  </a:tcPr>
+                </a:tc>
+                <a:tc>
+                  <a:txBody>
+                    <a:bodyPr wrap="square"/>
+                    <a:lstStyle/>
+                    <a:p>
+                      <a:r>
+                        <a:rPr sz="1100" b="0">
+                          <a:solidFill>
+                            <a:srgbClr val="282828"/>
+                          </a:solidFill>
+                          <a:latin typeface="Arial"/>
+                        </a:rPr>
+                        <a:t>96×96, 1 mm pitch, 96 mm, 700 mm leg</a:t>
+                      </a:r>
+                    </a:p>
+                  </a:txBody>
+                  <a:tcPr marL="54864" marR="54864" marT="18288" marB="18288">
+                    <a:solidFill>
+                      <a:srgbClr val="ECF1F6"/>
+                    </a:solidFill>
+                  </a:tcPr>
+                </a:tc>
+              </a:tr>
+            </a:tbl>
+          </a:graphicData>
+        </a:graphic>
+      </p:graphicFrame>
+      <p:graphicFrame>
+        <p:nvGraphicFramePr>
+          <p:cNvPr id="7" name="Table 6"/>
+          <p:cNvGraphicFramePr>
+            <a:graphicFrameLocks noGrp="1"/>
+          </p:cNvGraphicFramePr>
+          <p:nvPr/>
+        </p:nvGraphicFramePr>
+        <p:xfrm>
+          <a:off x="6400800" y="4096511"/>
+          <a:ext cx="5394960" cy="1657350"/>
+        </p:xfrm>
+        <a:graphic>
+          <a:graphicData uri="http://schemas.openxmlformats.org/drawingml/2006/table">
+            <a:tbl>
+              <a:tblPr firstRow="1" bandRow="1">
+                <a:tableStyleId>{5C22544A-7EE6-4342-B048-85BDC9FD1C3A}</a:tableStyleId>
+              </a:tblPr>
+              <a:tblGrid>
+                <a:gridCol w="806704"/>
+                <a:gridCol w="4588256"/>
+              </a:tblGrid>
+              <a:tr h="262890">
+                <a:tc>
+                  <a:txBody>
+                    <a:bodyPr wrap="square"/>
+                    <a:lstStyle/>
+                    <a:p>
+                      <a:r>
+                        <a:rPr sz="1000" b="1">
+                          <a:solidFill>
+                            <a:srgbClr val="FFFFFF"/>
+                          </a:solidFill>
+                          <a:latin typeface="Arial"/>
+                        </a:rPr>
+                        <a:t>part</a:t>
+                      </a:r>
+                    </a:p>
+                  </a:txBody>
+                  <a:tcPr marL="54864" marR="54864" marT="18288" marB="18288">
+                    <a:solidFill>
+                      <a:srgbClr val="1F4E79"/>
+                    </a:solidFill>
+                  </a:tcPr>
+                </a:tc>
+                <a:tc>
+                  <a:txBody>
+                    <a:bodyPr wrap="square"/>
+                    <a:lstStyle/>
+                    <a:p>
+                      <a:r>
+                        <a:rPr sz="1000" b="1">
+                          <a:solidFill>
+                            <a:srgbClr val="FFFFFF"/>
+                          </a:solidFill>
+                          <a:latin typeface="Arial"/>
+                        </a:rPr>
+                        <a:t>value</a:t>
+                      </a:r>
+                    </a:p>
+                  </a:txBody>
+                  <a:tcPr marL="54864" marR="54864" marT="18288" marB="18288">
+                    <a:solidFill>
+                      <a:srgbClr val="1F4E79"/>
+                    </a:solidFill>
+                  </a:tcPr>
+                </a:tc>
+              </a:tr>
+              <a:tr h="434340">
+                <a:tc>
+                  <a:txBody>
+                    <a:bodyPr wrap="square"/>
+                    <a:lstStyle/>
+                    <a:p>
+                      <a:r>
+                        <a:rPr sz="1000" b="0">
+                          <a:solidFill>
+                            <a:srgbClr val="282828"/>
+                          </a:solidFill>
+                          <a:latin typeface="Arial"/>
+                        </a:rPr>
+                        <a:t>focuser L2</a:t>
+                      </a:r>
+                    </a:p>
+                  </a:txBody>
+                  <a:tcPr marL="54864" marR="54864" marT="18288" marB="18288">
+                    <a:solidFill>
+                      <a:srgbClr val="FFFFFF"/>
+                    </a:solidFill>
+                  </a:tcPr>
+                </a:tc>
+                <a:tc>
+                  <a:txBody>
+                    <a:bodyPr wrap="square"/>
+                    <a:lstStyle/>
+                    <a:p>
+                      <a:r>
+                        <a:rPr sz="1000" b="0">
+                          <a:solidFill>
+                            <a:srgbClr val="282828"/>
+                          </a:solidFill>
+                          <a:latin typeface="Arial"/>
+                        </a:rPr>
+                        <a:t>f 429 mm, 103 mm; internal focus at F/4.2; modeled 8 mm center, to be real</a:t>
+                      </a:r>
+                    </a:p>
+                  </a:txBody>
+                  <a:tcPr marL="54864" marR="54864" marT="18288" marB="18288">
+                    <a:solidFill>
+                      <a:srgbClr val="FFFFFF"/>
+                    </a:solidFill>
+                  </a:tcPr>
+                </a:tc>
+              </a:tr>
+              <a:tr h="262890">
+                <a:tc>
+                  <a:txBody>
+                    <a:bodyPr wrap="square"/>
+                    <a:lstStyle/>
+                    <a:p>
+                      <a:r>
+                        <a:rPr sz="1000" b="0">
+                          <a:solidFill>
+                            <a:srgbClr val="282828"/>
+                          </a:solidFill>
+                          <a:latin typeface="Arial"/>
+                        </a:rPr>
+                        <a:t>field lens</a:t>
+                      </a:r>
+                    </a:p>
+                  </a:txBody>
+                  <a:tcPr marL="54864" marR="54864" marT="18288" marB="18288">
+                    <a:solidFill>
+                      <a:srgbClr val="ECF1F6"/>
+                    </a:solidFill>
+                  </a:tcPr>
+                </a:tc>
+                <a:tc>
+                  <a:txBody>
+                    <a:bodyPr wrap="square"/>
+                    <a:lstStyle/>
+                    <a:p>
+                      <a:r>
+                        <a:rPr sz="1000" b="0">
+                          <a:solidFill>
+                            <a:srgbClr val="282828"/>
+                          </a:solidFill>
+                          <a:latin typeface="Arial"/>
+                        </a:rPr>
+                        <a:t>f 43 mm, 21 mm; pupil image 9.4 mm, 32 mm behind it</a:t>
+                      </a:r>
+                    </a:p>
+                  </a:txBody>
+                  <a:tcPr marL="54864" marR="54864" marT="18288" marB="18288">
+                    <a:solidFill>
+                      <a:srgbClr val="ECF1F6"/>
+                    </a:solidFill>
+                  </a:tcPr>
+                </a:tc>
+              </a:tr>
+              <a:tr h="434340">
+                <a:tc>
+                  <a:txBody>
+                    <a:bodyPr wrap="square"/>
+                    <a:lstStyle/>
+                    <a:p>
+                      <a:r>
+                        <a:rPr sz="1000" b="0">
+                          <a:solidFill>
+                            <a:srgbClr val="282828"/>
+                          </a:solidFill>
+                          <a:latin typeface="Arial"/>
+                        </a:rPr>
+                        <a:t>camera</a:t>
+                      </a:r>
+                    </a:p>
+                  </a:txBody>
+                  <a:tcPr marL="54864" marR="54864" marT="18288" marB="18288">
+                    <a:solidFill>
+                      <a:srgbClr val="FFFFFF"/>
+                    </a:solidFill>
+                  </a:tcPr>
+                </a:tc>
+                <a:tc>
+                  <a:txBody>
+                    <a:bodyPr wrap="square"/>
+                    <a:lstStyle/>
+                    <a:p>
+                      <a:r>
+                        <a:rPr sz="1000" b="0">
+                          <a:solidFill>
+                            <a:srgbClr val="282828"/>
+                          </a:solidFill>
+                          <a:latin typeface="Arial"/>
+                        </a:rPr>
+                        <a:t>pupil image 9.4 mm: a 6.5 µm sCMOS puts 1450 pixels across it, binned 4 to the modeled 385 (5 per actuator)</a:t>
+                      </a:r>
+                    </a:p>
+                  </a:txBody>
+                  <a:tcPr marL="54864" marR="54864" marT="18288" marB="18288">
+                    <a:solidFill>
+                      <a:srgbClr val="FFFFFF"/>
+                    </a:solidFill>
+                  </a:tcPr>
+                </a:tc>
+              </a:tr>
+              <a:tr h="262890">
+                <a:tc>
+                  <a:txBody>
+                    <a:bodyPr wrap="square"/>
+                    <a:lstStyle/>
+                    <a:p>
+                      <a:r>
+                        <a:rPr sz="1000" b="0">
+                          <a:solidFill>
+                            <a:srgbClr val="282828"/>
+                          </a:solidFill>
+                          <a:latin typeface="Arial"/>
+                        </a:rPr>
+                        <a:t>mask seat</a:t>
+                      </a:r>
+                    </a:p>
+                  </a:txBody>
+                  <a:tcPr marL="54864" marR="54864" marT="18288" marB="18288">
+                    <a:solidFill>
+                      <a:srgbClr val="ECF1F6"/>
+                    </a:solidFill>
+                  </a:tcPr>
+                </a:tc>
+                <a:tc>
+                  <a:txBody>
+                    <a:bodyPr wrap="square"/>
+                    <a:lstStyle/>
+                    <a:p>
+                      <a:r>
+                        <a:rPr sz="1000" b="0">
+                          <a:solidFill>
+                            <a:srgbClr val="282828"/>
+                          </a:solidFill>
+                          <a:latin typeface="Arial"/>
+                        </a:rPr>
+                        <a:t>one substrate at the internal focus, translated to select the sensor</a:t>
+                      </a:r>
+                    </a:p>
+                  </a:txBody>
+                  <a:tcPr marL="54864" marR="54864" marT="18288" marB="18288">
+                    <a:solidFill>
+                      <a:srgbClr val="ECF1F6"/>
+                    </a:solidFill>
+                  </a:tcPr>
+                </a:tc>
+              </a:tr>
+            </a:tbl>
+          </a:graphicData>
+        </a:graphic>
+      </p:graphicFrame>
+      <p:sp>
+        <p:nvSpPr>
+          <p:cNvPr id="8" name="TextBox 7"/>
+          <p:cNvSpPr txBox="1"/>
+          <p:nvPr/>
+        </p:nvSpPr>
+        <p:spPr>
+          <a:xfrm>
+            <a:off x="6400800" y="5900166"/>
+            <a:ext cx="5394960" cy="274320"/>
+          </a:xfrm>
+          <a:prstGeom prst="rect">
+            <a:avLst/>
+          </a:prstGeom>
+          <a:noFill/>
+        </p:spPr>
+        <p:txBody>
+          <a:bodyPr wrap="square">
+            <a:spAutoFit/>
+          </a:bodyPr>
+          <a:lstStyle/>
+          <a:p>
+            <a:pPr>
+              <a:spcAft>
+                <a:spcPts val="600"/>
+              </a:spcAft>
+            </a:pPr>
+            <a:r>
+              <a:rPr sz="1050" b="0">
+                <a:solidFill>
+                  <a:srgbClr val="6E6E6E"/>
+                </a:solidFill>
+                <a:latin typeface="Arial"/>
+              </a:rPr>
+              <a:t>The reference arm (a 103 mm flat on a piezo stage, 564 mm leg) is the interferometer's; shuttered, the same bench is every other sensor.  Lenses, not off-axis mirrors: the choice is priced on the lenses-versus-mirrors slide.  The drawings are to scale: the model's parts are the 56 mm rig's scaled up, thinner than 103 mm optics can be built; the next model round gives every part its real thickness.</a:t>
+            </a:r>
+          </a:p>
+        </p:txBody>
+      </p:sp>
+    </p:spTree>
+  </p:cSld>
+  <p:clrMapOvr>
+    <a:masterClrMapping/>
+  </p:clrMapOvr>
+</p:sld>
+</file>
+
+<file path=ppt/slides/slide30.xml><?xml version="1.0" encoding="utf-8"?>
 <p:sld xmlns:a="http://schemas.openxmlformats.org/drawingml/2006/main" xmlns:p="http://schemas.openxmlformats.org/presentationml/2006/main" xmlns:r="http://schemas.openxmlformats.org/officeDocument/2006/relationships">
   <p:cSld>
     <p:spTree>
@@ -16007,738 +17766,7 @@
 </p:sld>
 </file>
 
-<file path=ppt/slides/slide3.xml><?xml version="1.0" encoding="utf-8"?>
-<p:sld xmlns:a="http://schemas.openxmlformats.org/drawingml/2006/main" xmlns:p="http://schemas.openxmlformats.org/presentationml/2006/main" xmlns:r="http://schemas.openxmlformats.org/officeDocument/2006/relationships">
-  <p:cSld>
-    <p:spTree>
-      <p:nvGrpSpPr>
-        <p:cNvPr id="1" name=""/>
-        <p:cNvGrpSpPr/>
-        <p:nvPr/>
-      </p:nvGrpSpPr>
-      <p:grpSpPr/>
-      <p:sp>
-        <p:nvSpPr>
-          <p:cNvPr id="2" name="TextBox 1"/>
-          <p:cNvSpPr txBox="1"/>
-          <p:nvPr/>
-        </p:nvSpPr>
-        <p:spPr>
-          <a:xfrm>
-            <a:off x="411480" y="201168"/>
-            <a:ext cx="11368735" cy="914400"/>
-          </a:xfrm>
-          <a:prstGeom prst="rect">
-            <a:avLst/>
-          </a:prstGeom>
-          <a:noFill/>
-        </p:spPr>
-        <p:txBody>
-          <a:bodyPr wrap="square">
-            <a:spAutoFit/>
-          </a:bodyPr>
-          <a:lstStyle/>
-          <a:p>
-            <a:pPr>
-              <a:spcAft>
-                <a:spcPts val="400"/>
-              </a:spcAft>
-            </a:pPr>
-            <a:r>
-              <a:rPr sz="2400" b="1">
-                <a:solidFill>
-                  <a:srgbClr val="1F4E79"/>
-                </a:solidFill>
-                <a:latin typeface="Arial"/>
-              </a:rPr>
-              <a:t>One bench, four ways of sensing</a:t>
-            </a:r>
-          </a:p>
-          <a:p>
-            <a:pPr>
-              <a:spcAft>
-                <a:spcPts val="0"/>
-              </a:spcAft>
-            </a:pPr>
-            <a:r>
-              <a:rPr sz="1250" b="0">
-                <a:solidFill>
-                  <a:srgbClr val="6E6E6E"/>
-                </a:solidFill>
-                <a:latin typeface="Arial"/>
-              </a:rPr>
-              <a:t>Everything shares the front end: a filtered HeNe, a collimator, a plate splitter at 22.5°, a 700 mm leg to the mirror, a focuser to an internal focus, a field lens to a camera at the pupil image</a:t>
-            </a:r>
-          </a:p>
-        </p:txBody>
-      </p:sp>
-      <p:sp>
-        <p:nvSpPr>
-          <p:cNvPr id="3" name="Rectangle 2"/>
-          <p:cNvSpPr/>
-          <p:nvPr/>
-        </p:nvSpPr>
-        <p:spPr>
-          <a:xfrm>
-            <a:off x="411480" y="1133856"/>
-            <a:ext cx="11368735" cy="20320"/>
-          </a:xfrm>
-          <a:prstGeom prst="rect">
-            <a:avLst/>
-          </a:prstGeom>
-          <a:solidFill>
-            <a:srgbClr val="B8C6D4"/>
-          </a:solidFill>
-          <a:ln>
-            <a:noFill/>
-          </a:ln>
-          <a:effectLst/>
-        </p:spPr>
-        <p:style>
-          <a:lnRef idx="1">
-            <a:schemeClr val="accent1"/>
-          </a:lnRef>
-          <a:fillRef idx="3">
-            <a:schemeClr val="accent1"/>
-          </a:fillRef>
-          <a:effectRef idx="2">
-            <a:schemeClr val="accent1"/>
-          </a:effectRef>
-          <a:fontRef idx="minor">
-            <a:schemeClr val="lt1"/>
-          </a:fontRef>
-        </p:style>
-        <p:txBody>
-          <a:bodyPr rtlCol="0" anchor="ctr"/>
-          <a:lstStyle/>
-          <a:p>
-            <a:pPr algn="ctr"/>
-          </a:p>
-        </p:txBody>
-      </p:sp>
-      <p:pic>
-        <p:nvPicPr>
-          <p:cNvPr id="4" name="Picture 3" descr="crop_bench_bs22_train.png"/>
-          <p:cNvPicPr>
-            <a:picLocks noChangeAspect="1"/>
-          </p:cNvPicPr>
-          <p:nvPr/>
-        </p:nvPicPr>
-        <p:blipFill>
-          <a:blip r:embed="rId2"/>
-          <a:stretch>
-            <a:fillRect/>
-          </a:stretch>
-        </p:blipFill>
-        <p:spPr>
-          <a:xfrm>
-            <a:off x="4061668" y="1298448"/>
-            <a:ext cx="4068357" cy="2348992"/>
-          </a:xfrm>
-          <a:prstGeom prst="rect">
-            <a:avLst/>
-          </a:prstGeom>
-        </p:spPr>
-      </p:pic>
-      <p:sp>
-        <p:nvSpPr>
-          <p:cNvPr id="5" name="TextBox 4"/>
-          <p:cNvSpPr txBox="1"/>
-          <p:nvPr/>
-        </p:nvSpPr>
-        <p:spPr>
-          <a:xfrm>
-            <a:off x="411480" y="3665727"/>
-            <a:ext cx="11368735" cy="394208"/>
-          </a:xfrm>
-          <a:prstGeom prst="rect">
-            <a:avLst/>
-          </a:prstGeom>
-          <a:noFill/>
-        </p:spPr>
-        <p:txBody>
-          <a:bodyPr wrap="square">
-            <a:spAutoFit/>
-          </a:bodyPr>
-          <a:lstStyle/>
-          <a:p>
-            <a:pPr algn="ctr">
-              <a:spcAft>
-                <a:spcPts val="0"/>
-              </a:spcAft>
-            </a:pPr>
-            <a:r>
-              <a:rPr sz="1000" b="0">
-                <a:solidFill>
-                  <a:srgbClr val="6E6E6E"/>
-                </a:solidFill>
-                <a:latin typeface="Arial"/>
-              </a:rPr>
-              <a:t>The shared front end as traced by the engine, seen from above, at the 22.5° splitter: source at left, collimator L1, the splitter, the 96 mm mirror on its 700 mm leg (blue), the reference arm and its flat (orange, the interferometer only), the focuser L2 toward the internal focus.  The mask seat at that focus is where the four sensing methods differ.</a:t>
-            </a:r>
-          </a:p>
-        </p:txBody>
-      </p:sp>
-      <p:graphicFrame>
-        <p:nvGraphicFramePr>
-          <p:cNvPr id="6" name="Table 5"/>
-          <p:cNvGraphicFramePr>
-            <a:graphicFrameLocks noGrp="1"/>
-          </p:cNvGraphicFramePr>
-          <p:nvPr/>
-        </p:nvGraphicFramePr>
-        <p:xfrm>
-          <a:off x="411480" y="4096511"/>
-          <a:ext cx="5806439" cy="1965960"/>
-        </p:xfrm>
-        <a:graphic>
-          <a:graphicData uri="http://schemas.openxmlformats.org/drawingml/2006/table">
-            <a:tbl>
-              <a:tblPr firstRow="1" bandRow="1">
-                <a:tableStyleId>{5C22544A-7EE6-4342-B048-85BDC9FD1C3A}</a:tableStyleId>
-              </a:tblPr>
-              <a:tblGrid>
-                <a:gridCol w="662479"/>
-                <a:gridCol w="5143960"/>
-              </a:tblGrid>
-              <a:tr h="280035">
-                <a:tc>
-                  <a:txBody>
-                    <a:bodyPr wrap="square"/>
-                    <a:lstStyle/>
-                    <a:p>
-                      <a:r>
-                        <a:rPr sz="1100" b="1">
-                          <a:solidFill>
-                            <a:srgbClr val="FFFFFF"/>
-                          </a:solidFill>
-                          <a:latin typeface="Arial"/>
-                        </a:rPr>
-                        <a:t>part</a:t>
-                      </a:r>
-                    </a:p>
-                  </a:txBody>
-                  <a:tcPr marL="54864" marR="54864" marT="18288" marB="18288">
-                    <a:solidFill>
-                      <a:srgbClr val="1F4E79"/>
-                    </a:solidFill>
-                  </a:tcPr>
-                </a:tc>
-                <a:tc>
-                  <a:txBody>
-                    <a:bodyPr wrap="square"/>
-                    <a:lstStyle/>
-                    <a:p>
-                      <a:r>
-                        <a:rPr sz="1100" b="1">
-                          <a:solidFill>
-                            <a:srgbClr val="FFFFFF"/>
-                          </a:solidFill>
-                          <a:latin typeface="Arial"/>
-                        </a:rPr>
-                        <a:t>value</a:t>
-                      </a:r>
-                    </a:p>
-                  </a:txBody>
-                  <a:tcPr marL="54864" marR="54864" marT="18288" marB="18288">
-                    <a:solidFill>
-                      <a:srgbClr val="1F4E79"/>
-                    </a:solidFill>
-                  </a:tcPr>
-                </a:tc>
-              </a:tr>
-              <a:tr h="280035">
-                <a:tc>
-                  <a:txBody>
-                    <a:bodyPr wrap="square"/>
-                    <a:lstStyle/>
-                    <a:p>
-                      <a:r>
-                        <a:rPr sz="1100" b="0">
-                          <a:solidFill>
-                            <a:srgbClr val="282828"/>
-                          </a:solidFill>
-                          <a:latin typeface="Arial"/>
-                        </a:rPr>
-                        <a:t>source</a:t>
-                      </a:r>
-                    </a:p>
-                  </a:txBody>
-                  <a:tcPr marL="54864" marR="54864" marT="18288" marB="18288">
-                    <a:solidFill>
-                      <a:srgbClr val="FFFFFF"/>
-                    </a:solidFill>
-                  </a:tcPr>
-                </a:tc>
-                <a:tc>
-                  <a:txBody>
-                    <a:bodyPr wrap="square"/>
-                    <a:lstStyle/>
-                    <a:p>
-                      <a:r>
-                        <a:rPr sz="1100" b="0">
-                          <a:solidFill>
-                            <a:srgbClr val="282828"/>
-                          </a:solidFill>
-                          <a:latin typeface="Arial"/>
-                        </a:rPr>
-                        <a:t>HeNe 632.8 nm, filtered, 51 mm beam radius</a:t>
-                      </a:r>
-                    </a:p>
-                  </a:txBody>
-                  <a:tcPr marL="54864" marR="54864" marT="18288" marB="18288">
-                    <a:solidFill>
-                      <a:srgbClr val="FFFFFF"/>
-                    </a:solidFill>
-                  </a:tcPr>
-                </a:tc>
-              </a:tr>
-              <a:tr h="468630">
-                <a:tc>
-                  <a:txBody>
-                    <a:bodyPr wrap="square"/>
-                    <a:lstStyle/>
-                    <a:p>
-                      <a:r>
-                        <a:rPr sz="1100" b="0">
-                          <a:solidFill>
-                            <a:srgbClr val="282828"/>
-                          </a:solidFill>
-                          <a:latin typeface="Arial"/>
-                        </a:rPr>
-                        <a:t>collimator L1</a:t>
-                      </a:r>
-                    </a:p>
-                  </a:txBody>
-                  <a:tcPr marL="54864" marR="54864" marT="18288" marB="18288">
-                    <a:solidFill>
-                      <a:srgbClr val="ECF1F6"/>
-                    </a:solidFill>
-                  </a:tcPr>
-                </a:tc>
-                <a:tc>
-                  <a:txBody>
-                    <a:bodyPr wrap="square"/>
-                    <a:lstStyle/>
-                    <a:p>
-                      <a:r>
-                        <a:rPr sz="1100" b="0">
-                          <a:solidFill>
-                            <a:srgbClr val="282828"/>
-                          </a:solidFill>
-                          <a:latin typeface="Arial"/>
-                        </a:rPr>
-                        <a:t>f 857 mm, 103 mm, coated; modeled 5 mm center, 2 mm edge, to be a real 103 mm singlet</a:t>
-                      </a:r>
-                    </a:p>
-                  </a:txBody>
-                  <a:tcPr marL="54864" marR="54864" marT="18288" marB="18288">
-                    <a:solidFill>
-                      <a:srgbClr val="ECF1F6"/>
-                    </a:solidFill>
-                  </a:tcPr>
-                </a:tc>
-              </a:tr>
-              <a:tr h="468630">
-                <a:tc>
-                  <a:txBody>
-                    <a:bodyPr wrap="square"/>
-                    <a:lstStyle/>
-                    <a:p>
-                      <a:r>
-                        <a:rPr sz="1100" b="0">
-                          <a:solidFill>
-                            <a:srgbClr val="282828"/>
-                          </a:solidFill>
-                          <a:latin typeface="Arial"/>
-                        </a:rPr>
-                        <a:t>plate splitter</a:t>
-                      </a:r>
-                    </a:p>
-                  </a:txBody>
-                  <a:tcPr marL="54864" marR="54864" marT="18288" marB="18288">
-                    <a:solidFill>
-                      <a:srgbClr val="FFFFFF"/>
-                    </a:solidFill>
-                  </a:tcPr>
-                </a:tc>
-                <a:tc>
-                  <a:txBody>
-                    <a:bodyPr wrap="square"/>
-                    <a:lstStyle/>
-                    <a:p>
-                      <a:r>
-                        <a:rPr sz="1100" b="0">
-                          <a:solidFill>
-                            <a:srgbClr val="282828"/>
-                          </a:solidFill>
-                          <a:latin typeface="Arial"/>
-                        </a:rPr>
-                        <a:t>22.5° incidence (the record's 7° does not clear the node: next slide), 50/50; compensator matched; modeled 2.6 mm thick, to be 10 mm</a:t>
-                      </a:r>
-                    </a:p>
-                  </a:txBody>
-                  <a:tcPr marL="54864" marR="54864" marT="18288" marB="18288">
-                    <a:solidFill>
-                      <a:srgbClr val="FFFFFF"/>
-                    </a:solidFill>
-                  </a:tcPr>
-                </a:tc>
-              </a:tr>
-              <a:tr h="468630">
-                <a:tc>
-                  <a:txBody>
-                    <a:bodyPr wrap="square"/>
-                    <a:lstStyle/>
-                    <a:p>
-                      <a:r>
-                        <a:rPr sz="1100" b="0">
-                          <a:solidFill>
-                            <a:srgbClr val="282828"/>
-                          </a:solidFill>
-                          <a:latin typeface="Arial"/>
-                        </a:rPr>
-                        <a:t>deformable mirror</a:t>
-                      </a:r>
-                    </a:p>
-                  </a:txBody>
-                  <a:tcPr marL="54864" marR="54864" marT="18288" marB="18288">
-                    <a:solidFill>
-                      <a:srgbClr val="ECF1F6"/>
-                    </a:solidFill>
-                  </a:tcPr>
-                </a:tc>
-                <a:tc>
-                  <a:txBody>
-                    <a:bodyPr wrap="square"/>
-                    <a:lstStyle/>
-                    <a:p>
-                      <a:r>
-                        <a:rPr sz="1100" b="0">
-                          <a:solidFill>
-                            <a:srgbClr val="282828"/>
-                          </a:solidFill>
-                          <a:latin typeface="Arial"/>
-                        </a:rPr>
-                        <a:t>96×96, 1 mm pitch, 96 mm, 700 mm leg</a:t>
-                      </a:r>
-                    </a:p>
-                  </a:txBody>
-                  <a:tcPr marL="54864" marR="54864" marT="18288" marB="18288">
-                    <a:solidFill>
-                      <a:srgbClr val="ECF1F6"/>
-                    </a:solidFill>
-                  </a:tcPr>
-                </a:tc>
-              </a:tr>
-            </a:tbl>
-          </a:graphicData>
-        </a:graphic>
-      </p:graphicFrame>
-      <p:graphicFrame>
-        <p:nvGraphicFramePr>
-          <p:cNvPr id="7" name="Table 6"/>
-          <p:cNvGraphicFramePr>
-            <a:graphicFrameLocks noGrp="1"/>
-          </p:cNvGraphicFramePr>
-          <p:nvPr/>
-        </p:nvGraphicFramePr>
-        <p:xfrm>
-          <a:off x="6400800" y="4096511"/>
-          <a:ext cx="5394960" cy="1657350"/>
-        </p:xfrm>
-        <a:graphic>
-          <a:graphicData uri="http://schemas.openxmlformats.org/drawingml/2006/table">
-            <a:tbl>
-              <a:tblPr firstRow="1" bandRow="1">
-                <a:tableStyleId>{5C22544A-7EE6-4342-B048-85BDC9FD1C3A}</a:tableStyleId>
-              </a:tblPr>
-              <a:tblGrid>
-                <a:gridCol w="806704"/>
-                <a:gridCol w="4588256"/>
-              </a:tblGrid>
-              <a:tr h="262890">
-                <a:tc>
-                  <a:txBody>
-                    <a:bodyPr wrap="square"/>
-                    <a:lstStyle/>
-                    <a:p>
-                      <a:r>
-                        <a:rPr sz="1000" b="1">
-                          <a:solidFill>
-                            <a:srgbClr val="FFFFFF"/>
-                          </a:solidFill>
-                          <a:latin typeface="Arial"/>
-                        </a:rPr>
-                        <a:t>part</a:t>
-                      </a:r>
-                    </a:p>
-                  </a:txBody>
-                  <a:tcPr marL="54864" marR="54864" marT="18288" marB="18288">
-                    <a:solidFill>
-                      <a:srgbClr val="1F4E79"/>
-                    </a:solidFill>
-                  </a:tcPr>
-                </a:tc>
-                <a:tc>
-                  <a:txBody>
-                    <a:bodyPr wrap="square"/>
-                    <a:lstStyle/>
-                    <a:p>
-                      <a:r>
-                        <a:rPr sz="1000" b="1">
-                          <a:solidFill>
-                            <a:srgbClr val="FFFFFF"/>
-                          </a:solidFill>
-                          <a:latin typeface="Arial"/>
-                        </a:rPr>
-                        <a:t>value</a:t>
-                      </a:r>
-                    </a:p>
-                  </a:txBody>
-                  <a:tcPr marL="54864" marR="54864" marT="18288" marB="18288">
-                    <a:solidFill>
-                      <a:srgbClr val="1F4E79"/>
-                    </a:solidFill>
-                  </a:tcPr>
-                </a:tc>
-              </a:tr>
-              <a:tr h="434340">
-                <a:tc>
-                  <a:txBody>
-                    <a:bodyPr wrap="square"/>
-                    <a:lstStyle/>
-                    <a:p>
-                      <a:r>
-                        <a:rPr sz="1000" b="0">
-                          <a:solidFill>
-                            <a:srgbClr val="282828"/>
-                          </a:solidFill>
-                          <a:latin typeface="Arial"/>
-                        </a:rPr>
-                        <a:t>focuser L2</a:t>
-                      </a:r>
-                    </a:p>
-                  </a:txBody>
-                  <a:tcPr marL="54864" marR="54864" marT="18288" marB="18288">
-                    <a:solidFill>
-                      <a:srgbClr val="FFFFFF"/>
-                    </a:solidFill>
-                  </a:tcPr>
-                </a:tc>
-                <a:tc>
-                  <a:txBody>
-                    <a:bodyPr wrap="square"/>
-                    <a:lstStyle/>
-                    <a:p>
-                      <a:r>
-                        <a:rPr sz="1000" b="0">
-                          <a:solidFill>
-                            <a:srgbClr val="282828"/>
-                          </a:solidFill>
-                          <a:latin typeface="Arial"/>
-                        </a:rPr>
-                        <a:t>f 429 mm, 103 mm; internal focus at F/4.2; modeled 8 mm center, to be real</a:t>
-                      </a:r>
-                    </a:p>
-                  </a:txBody>
-                  <a:tcPr marL="54864" marR="54864" marT="18288" marB="18288">
-                    <a:solidFill>
-                      <a:srgbClr val="FFFFFF"/>
-                    </a:solidFill>
-                  </a:tcPr>
-                </a:tc>
-              </a:tr>
-              <a:tr h="262890">
-                <a:tc>
-                  <a:txBody>
-                    <a:bodyPr wrap="square"/>
-                    <a:lstStyle/>
-                    <a:p>
-                      <a:r>
-                        <a:rPr sz="1000" b="0">
-                          <a:solidFill>
-                            <a:srgbClr val="282828"/>
-                          </a:solidFill>
-                          <a:latin typeface="Arial"/>
-                        </a:rPr>
-                        <a:t>field lens</a:t>
-                      </a:r>
-                    </a:p>
-                  </a:txBody>
-                  <a:tcPr marL="54864" marR="54864" marT="18288" marB="18288">
-                    <a:solidFill>
-                      <a:srgbClr val="ECF1F6"/>
-                    </a:solidFill>
-                  </a:tcPr>
-                </a:tc>
-                <a:tc>
-                  <a:txBody>
-                    <a:bodyPr wrap="square"/>
-                    <a:lstStyle/>
-                    <a:p>
-                      <a:r>
-                        <a:rPr sz="1000" b="0">
-                          <a:solidFill>
-                            <a:srgbClr val="282828"/>
-                          </a:solidFill>
-                          <a:latin typeface="Arial"/>
-                        </a:rPr>
-                        <a:t>f 43 mm, 21 mm; pupil image 9.4 mm, 32 mm behind it</a:t>
-                      </a:r>
-                    </a:p>
-                  </a:txBody>
-                  <a:tcPr marL="54864" marR="54864" marT="18288" marB="18288">
-                    <a:solidFill>
-                      <a:srgbClr val="ECF1F6"/>
-                    </a:solidFill>
-                  </a:tcPr>
-                </a:tc>
-              </a:tr>
-              <a:tr h="434340">
-                <a:tc>
-                  <a:txBody>
-                    <a:bodyPr wrap="square"/>
-                    <a:lstStyle/>
-                    <a:p>
-                      <a:r>
-                        <a:rPr sz="1000" b="0">
-                          <a:solidFill>
-                            <a:srgbClr val="282828"/>
-                          </a:solidFill>
-                          <a:latin typeface="Arial"/>
-                        </a:rPr>
-                        <a:t>camera</a:t>
-                      </a:r>
-                    </a:p>
-                  </a:txBody>
-                  <a:tcPr marL="54864" marR="54864" marT="18288" marB="18288">
-                    <a:solidFill>
-                      <a:srgbClr val="FFFFFF"/>
-                    </a:solidFill>
-                  </a:tcPr>
-                </a:tc>
-                <a:tc>
-                  <a:txBody>
-                    <a:bodyPr wrap="square"/>
-                    <a:lstStyle/>
-                    <a:p>
-                      <a:r>
-                        <a:rPr sz="1000" b="0">
-                          <a:solidFill>
-                            <a:srgbClr val="282828"/>
-                          </a:solidFill>
-                          <a:latin typeface="Arial"/>
-                        </a:rPr>
-                        <a:t>pupil image 9.4 mm: a 6.5 µm sCMOS puts 1450 pixels across it, binned 4 to the modeled 385 (5 per actuator)</a:t>
-                      </a:r>
-                    </a:p>
-                  </a:txBody>
-                  <a:tcPr marL="54864" marR="54864" marT="18288" marB="18288">
-                    <a:solidFill>
-                      <a:srgbClr val="FFFFFF"/>
-                    </a:solidFill>
-                  </a:tcPr>
-                </a:tc>
-              </a:tr>
-              <a:tr h="262890">
-                <a:tc>
-                  <a:txBody>
-                    <a:bodyPr wrap="square"/>
-                    <a:lstStyle/>
-                    <a:p>
-                      <a:r>
-                        <a:rPr sz="1000" b="0">
-                          <a:solidFill>
-                            <a:srgbClr val="282828"/>
-                          </a:solidFill>
-                          <a:latin typeface="Arial"/>
-                        </a:rPr>
-                        <a:t>mask seat</a:t>
-                      </a:r>
-                    </a:p>
-                  </a:txBody>
-                  <a:tcPr marL="54864" marR="54864" marT="18288" marB="18288">
-                    <a:solidFill>
-                      <a:srgbClr val="ECF1F6"/>
-                    </a:solidFill>
-                  </a:tcPr>
-                </a:tc>
-                <a:tc>
-                  <a:txBody>
-                    <a:bodyPr wrap="square"/>
-                    <a:lstStyle/>
-                    <a:p>
-                      <a:r>
-                        <a:rPr sz="1000" b="0">
-                          <a:solidFill>
-                            <a:srgbClr val="282828"/>
-                          </a:solidFill>
-                          <a:latin typeface="Arial"/>
-                        </a:rPr>
-                        <a:t>one substrate at the internal focus, translated to select the sensor</a:t>
-                      </a:r>
-                    </a:p>
-                  </a:txBody>
-                  <a:tcPr marL="54864" marR="54864" marT="18288" marB="18288">
-                    <a:solidFill>
-                      <a:srgbClr val="ECF1F6"/>
-                    </a:solidFill>
-                  </a:tcPr>
-                </a:tc>
-              </a:tr>
-            </a:tbl>
-          </a:graphicData>
-        </a:graphic>
-      </p:graphicFrame>
-      <p:sp>
-        <p:nvSpPr>
-          <p:cNvPr id="8" name="TextBox 7"/>
-          <p:cNvSpPr txBox="1"/>
-          <p:nvPr/>
-        </p:nvSpPr>
-        <p:spPr>
-          <a:xfrm>
-            <a:off x="6400800" y="5900166"/>
-            <a:ext cx="5394960" cy="274320"/>
-          </a:xfrm>
-          <a:prstGeom prst="rect">
-            <a:avLst/>
-          </a:prstGeom>
-          <a:noFill/>
-        </p:spPr>
-        <p:txBody>
-          <a:bodyPr wrap="square">
-            <a:spAutoFit/>
-          </a:bodyPr>
-          <a:lstStyle/>
-          <a:p>
-            <a:pPr>
-              <a:spcAft>
-                <a:spcPts val="600"/>
-              </a:spcAft>
-            </a:pPr>
-            <a:r>
-              <a:rPr sz="1050" b="0">
-                <a:solidFill>
-                  <a:srgbClr val="6E6E6E"/>
-                </a:solidFill>
-                <a:latin typeface="Arial"/>
-              </a:rPr>
-              <a:t>The reference arm (a 103 mm flat on a piezo stage, 564 mm leg) is the interferometer's; shuttered, the same bench is every other sensor.  Lenses, not off-axis mirrors: the choice is priced on the lenses-versus-mirrors slide.  The drawings are to scale: the model's parts are the 56 mm rig's scaled up, thinner than 103 mm optics can be built; the next model round gives every part its real thickness.</a:t>
-            </a:r>
-          </a:p>
-        </p:txBody>
-      </p:sp>
-    </p:spTree>
-  </p:cSld>
-  <p:clrMapOvr>
-    <a:masterClrMapping/>
-  </p:clrMapOvr>
-</p:sld>
-</file>
-
-<file path=ppt/slides/slide30.xml><?xml version="1.0" encoding="utf-8"?>
+<file path=ppt/slides/slide31.xml><?xml version="1.0" encoding="utf-8"?>
 <p:sld xmlns:a="http://schemas.openxmlformats.org/drawingml/2006/main" xmlns:p="http://schemas.openxmlformats.org/presentationml/2006/main" xmlns:r="http://schemas.openxmlformats.org/officeDocument/2006/relationships">
   <p:cSld>
     <p:spTree>
@@ -17028,7 +18056,7 @@
 </p:sld>
 </file>
 
-<file path=ppt/slides/slide31.xml><?xml version="1.0" encoding="utf-8"?>
+<file path=ppt/slides/slide32.xml><?xml version="1.0" encoding="utf-8"?>
 <p:sld xmlns:a="http://schemas.openxmlformats.org/drawingml/2006/main" xmlns:p="http://schemas.openxmlformats.org/presentationml/2006/main" xmlns:r="http://schemas.openxmlformats.org/officeDocument/2006/relationships">
   <p:cSld>
     <p:spTree>
@@ -17884,7 +18912,7 @@
 </p:sld>
 </file>
 
-<file path=ppt/slides/slide32.xml><?xml version="1.0" encoding="utf-8"?>
+<file path=ppt/slides/slide33.xml><?xml version="1.0" encoding="utf-8"?>
 <p:sld xmlns:a="http://schemas.openxmlformats.org/drawingml/2006/main" xmlns:p="http://schemas.openxmlformats.org/presentationml/2006/main" xmlns:r="http://schemas.openxmlformats.org/officeDocument/2006/relationships">
   <p:cSld>
     <p:spTree>
@@ -18945,7 +19973,7 @@
 </p:sld>
 </file>
 
-<file path=ppt/slides/slide33.xml><?xml version="1.0" encoding="utf-8"?>
+<file path=ppt/slides/slide34.xml><?xml version="1.0" encoding="utf-8"?>
 <p:sld xmlns:a="http://schemas.openxmlformats.org/drawingml/2006/main" xmlns:p="http://schemas.openxmlformats.org/presentationml/2006/main" xmlns:r="http://schemas.openxmlformats.org/officeDocument/2006/relationships">
   <p:cSld>
     <p:spTree>
@@ -19607,7 +20635,7 @@
 </p:sld>
 </file>
 
-<file path=ppt/slides/slide34.xml><?xml version="1.0" encoding="utf-8"?>
+<file path=ppt/slides/slide35.xml><?xml version="1.0" encoding="utf-8"?>
 <p:sld xmlns:a="http://schemas.openxmlformats.org/drawingml/2006/main" xmlns:p="http://schemas.openxmlformats.org/presentationml/2006/main" xmlns:r="http://schemas.openxmlformats.org/officeDocument/2006/relationships">
   <p:cSld>
     <p:spTree>
@@ -19897,7 +20925,7 @@
 </p:sld>
 </file>
 
-<file path=ppt/slides/slide35.xml><?xml version="1.0" encoding="utf-8"?>
+<file path=ppt/slides/slide36.xml><?xml version="1.0" encoding="utf-8"?>
 <p:sld xmlns:a="http://schemas.openxmlformats.org/drawingml/2006/main" xmlns:p="http://schemas.openxmlformats.org/presentationml/2006/main" xmlns:r="http://schemas.openxmlformats.org/officeDocument/2006/relationships">
   <p:cSld>
     <p:spTree>
@@ -20601,7 +21629,1001 @@
 </p:sld>
 </file>
 
-<file path=ppt/slides/slide36.xml><?xml version="1.0" encoding="utf-8"?>
+<file path=ppt/slides/slide37.xml><?xml version="1.0" encoding="utf-8"?>
+<p:sld xmlns:a="http://schemas.openxmlformats.org/drawingml/2006/main" xmlns:p="http://schemas.openxmlformats.org/presentationml/2006/main" xmlns:r="http://schemas.openxmlformats.org/officeDocument/2006/relationships">
+  <p:cSld>
+    <p:spTree>
+      <p:nvGrpSpPr>
+        <p:cNvPr id="1" name=""/>
+        <p:cNvGrpSpPr/>
+        <p:nvPr/>
+      </p:nvGrpSpPr>
+      <p:grpSpPr/>
+      <p:sp>
+        <p:nvSpPr>
+          <p:cNvPr id="2" name="TextBox 1"/>
+          <p:cNvSpPr txBox="1"/>
+          <p:nvPr/>
+        </p:nvSpPr>
+        <p:spPr>
+          <a:xfrm>
+            <a:off x="411480" y="201168"/>
+            <a:ext cx="11368735" cy="914400"/>
+          </a:xfrm>
+          <a:prstGeom prst="rect">
+            <a:avLst/>
+          </a:prstGeom>
+          <a:noFill/>
+        </p:spPr>
+        <p:txBody>
+          <a:bodyPr wrap="square">
+            <a:spAutoFit/>
+          </a:bodyPr>
+          <a:lstStyle/>
+          <a:p>
+            <a:pPr>
+              <a:spcAft>
+                <a:spcPts val="400"/>
+              </a:spcAft>
+            </a:pPr>
+            <a:r>
+              <a:rPr sz="2400" b="1">
+                <a:solidFill>
+                  <a:srgbClr val="1F4E79"/>
+                </a:solidFill>
+                <a:latin typeface="Arial"/>
+              </a:rPr>
+              <a:t>Backup: the path per configuration</a:t>
+            </a:r>
+          </a:p>
+          <a:p>
+            <a:pPr>
+              <a:spcAft>
+                <a:spcPts val="0"/>
+              </a:spcAft>
+            </a:pPr>
+            <a:r>
+              <a:rPr sz="1250" b="0">
+                <a:solidFill>
+                  <a:srgbClr val="6E6E6E"/>
+                </a:solidFill>
+                <a:latin typeface="Arial"/>
+              </a:rPr>
+              <a:t>The runner stages and knobs each approach went through, in the order they ran</a:t>
+            </a:r>
+          </a:p>
+        </p:txBody>
+      </p:sp>
+      <p:sp>
+        <p:nvSpPr>
+          <p:cNvPr id="3" name="Rectangle 2"/>
+          <p:cNvSpPr/>
+          <p:nvPr/>
+        </p:nvSpPr>
+        <p:spPr>
+          <a:xfrm>
+            <a:off x="411480" y="1133856"/>
+            <a:ext cx="11368735" cy="20320"/>
+          </a:xfrm>
+          <a:prstGeom prst="rect">
+            <a:avLst/>
+          </a:prstGeom>
+          <a:solidFill>
+            <a:srgbClr val="B8C6D4"/>
+          </a:solidFill>
+          <a:ln>
+            <a:noFill/>
+          </a:ln>
+          <a:effectLst/>
+        </p:spPr>
+        <p:style>
+          <a:lnRef idx="1">
+            <a:schemeClr val="accent1"/>
+          </a:lnRef>
+          <a:fillRef idx="3">
+            <a:schemeClr val="accent1"/>
+          </a:fillRef>
+          <a:effectRef idx="2">
+            <a:schemeClr val="accent1"/>
+          </a:effectRef>
+          <a:fontRef idx="minor">
+            <a:schemeClr val="lt1"/>
+          </a:fontRef>
+        </p:style>
+        <p:txBody>
+          <a:bodyPr rtlCol="0" anchor="ctr"/>
+          <a:lstStyle/>
+          <a:p>
+            <a:pPr algn="ctr"/>
+          </a:p>
+        </p:txBody>
+      </p:sp>
+      <p:graphicFrame>
+        <p:nvGraphicFramePr>
+          <p:cNvPr id="4" name="Table 3"/>
+          <p:cNvGraphicFramePr>
+            <a:graphicFrameLocks noGrp="1"/>
+          </p:cNvGraphicFramePr>
+          <p:nvPr/>
+        </p:nvGraphicFramePr>
+        <p:xfrm>
+          <a:off x="411480" y="1298448"/>
+          <a:ext cx="11368733" cy="4217670"/>
+        </p:xfrm>
+        <a:graphic>
+          <a:graphicData uri="http://schemas.openxmlformats.org/drawingml/2006/table">
+            <a:tbl>
+              <a:tblPr firstRow="1" bandRow="1">
+                <a:tableStyleId>{5C22544A-7EE6-4342-B048-85BDC9FD1C3A}</a:tableStyleId>
+              </a:tblPr>
+              <a:tblGrid>
+                <a:gridCol w="1453895"/>
+                <a:gridCol w="2946123"/>
+                <a:gridCol w="3371045"/>
+                <a:gridCol w="3597670"/>
+              </a:tblGrid>
+              <a:tr h="280035">
+                <a:tc>
+                  <a:txBody>
+                    <a:bodyPr wrap="square"/>
+                    <a:lstStyle/>
+                    <a:p>
+                      <a:r>
+                        <a:rPr sz="1100" b="1">
+                          <a:solidFill>
+                            <a:srgbClr val="FFFFFF"/>
+                          </a:solidFill>
+                          <a:latin typeface="Arial"/>
+                        </a:rPr>
+                        <a:t>step</a:t>
+                      </a:r>
+                    </a:p>
+                  </a:txBody>
+                  <a:tcPr marL="54864" marR="54864" marT="18288" marB="18288">
+                    <a:solidFill>
+                      <a:srgbClr val="1F4E79"/>
+                    </a:solidFill>
+                  </a:tcPr>
+                </a:tc>
+                <a:tc>
+                  <a:txBody>
+                    <a:bodyPr wrap="square"/>
+                    <a:lstStyle/>
+                    <a:p>
+                      <a:r>
+                        <a:rPr sz="1100" b="1">
+                          <a:solidFill>
+                            <a:srgbClr val="FFFFFF"/>
+                          </a:solidFill>
+                          <a:latin typeface="Arial"/>
+                        </a:rPr>
+                        <a:t>interferometer (tg96_run)</a:t>
+                      </a:r>
+                    </a:p>
+                  </a:txBody>
+                  <a:tcPr marL="54864" marR="54864" marT="18288" marB="18288">
+                    <a:solidFill>
+                      <a:srgbClr val="1F4E79"/>
+                    </a:solidFill>
+                  </a:tcPr>
+                </a:tc>
+                <a:tc>
+                  <a:txBody>
+                    <a:bodyPr wrap="square"/>
+                    <a:lstStyle/>
+                    <a:p>
+                      <a:r>
+                        <a:rPr sz="1100" b="1">
+                          <a:solidFill>
+                            <a:srgbClr val="FFFFFF"/>
+                          </a:solidFill>
+                          <a:latin typeface="Arial"/>
+                        </a:rPr>
+                        <a:t>Zernike, scalar and vector (zwfs_run)</a:t>
+                      </a:r>
+                    </a:p>
+                  </a:txBody>
+                  <a:tcPr marL="54864" marR="54864" marT="18288" marB="18288">
+                    <a:solidFill>
+                      <a:srgbClr val="1F4E79"/>
+                    </a:solidFill>
+                  </a:tcPr>
+                </a:tc>
+                <a:tc>
+                  <a:txBody>
+                    <a:bodyPr wrap="square"/>
+                    <a:lstStyle/>
+                    <a:p>
+                      <a:r>
+                        <a:rPr sz="1100" b="1">
+                          <a:solidFill>
+                            <a:srgbClr val="FFFFFF"/>
+                          </a:solidFill>
+                          <a:latin typeface="Arial"/>
+                        </a:rPr>
+                        <a:t>point-diffraction (pdi_run over zwfs_run)</a:t>
+                      </a:r>
+                    </a:p>
+                  </a:txBody>
+                  <a:tcPr marL="54864" marR="54864" marT="18288" marB="18288">
+                    <a:solidFill>
+                      <a:srgbClr val="1F4E79"/>
+                    </a:solidFill>
+                  </a:tcPr>
+                </a:tc>
+              </a:tr>
+              <a:tr h="657225">
+                <a:tc>
+                  <a:txBody>
+                    <a:bodyPr wrap="square"/>
+                    <a:lstStyle/>
+                    <a:p>
+                      <a:r>
+                        <a:rPr sz="1100" b="0">
+                          <a:solidFill>
+                            <a:srgbClr val="282828"/>
+                          </a:solidFill>
+                          <a:latin typeface="Arial"/>
+                        </a:rPr>
+                        <a:t>build + gates</a:t>
+                      </a:r>
+                    </a:p>
+                  </a:txBody>
+                  <a:tcPr marL="54864" marR="54864" marT="18288" marB="18288">
+                    <a:solidFill>
+                      <a:srgbClr val="FFFFFF"/>
+                    </a:solidFill>
+                  </a:tcPr>
+                </a:tc>
+                <a:tc>
+                  <a:txBody>
+                    <a:bodyPr wrap="square"/>
+                    <a:lstStyle/>
+                    <a:p>
+                      <a:r>
+                        <a:rPr sz="1100" b="0">
+                          <a:solidFill>
+                            <a:srgbClr val="282828"/>
+                          </a:solidFill>
+                          <a:latin typeface="Arial"/>
+                        </a:rPr>
+                        <a:t>stage A clearance, A2 sampling, B build both arms; the tail from tg96_tail; the wrapped phase difference</a:t>
+                      </a:r>
+                    </a:p>
+                  </a:txBody>
+                  <a:tcPr marL="54864" marR="54864" marT="18288" marB="18288">
+                    <a:solidFill>
+                      <a:srgbClr val="FFFFFF"/>
+                    </a:solidFill>
+                  </a:tcPr>
+                </a:tc>
+                <a:tc>
+                  <a:txBody>
+                    <a:bodyPr wrap="square"/>
+                    <a:lstStyle/>
+                    <a:p>
+                      <a:r>
+                        <a:rPr sz="1100" b="0">
+                          <a:solidFill>
+                            <a:srgbClr val="282828"/>
+                          </a:solidFill>
+                          <a:latin typeface="Arial"/>
+                        </a:rPr>
+                        <a:t>bench: the symmetric mask sandwich (the S7 correction), the mask gauge factory, gates G1 to G4, G8, G9, the mask figure</a:t>
+                      </a:r>
+                    </a:p>
+                  </a:txBody>
+                  <a:tcPr marL="54864" marR="54864" marT="18288" marB="18288">
+                    <a:solidFill>
+                      <a:srgbClr val="FFFFFF"/>
+                    </a:solidFill>
+                  </a:tcPr>
+                </a:tc>
+                <a:tc>
+                  <a:txBody>
+                    <a:bodyPr wrap="square"/>
+                    <a:lstStyle/>
+                    <a:p>
+                      <a:r>
+                        <a:rPr sz="1100" b="0">
+                          <a:solidFill>
+                            <a:srgbClr val="282828"/>
+                          </a:solidFill>
+                          <a:latin typeface="Arial"/>
+                        </a:rPr>
+                        <a:t>the pinhole gauge in the same seat; G5 (pinhole at full transmission equals the stepped Zernike); the P/SRI's two decks, G6, G7</a:t>
+                      </a:r>
+                    </a:p>
+                  </a:txBody>
+                  <a:tcPr marL="54864" marR="54864" marT="18288" marB="18288">
+                    <a:solidFill>
+                      <a:srgbClr val="FFFFFF"/>
+                    </a:solidFill>
+                  </a:tcPr>
+                </a:tc>
+              </a:tr>
+              <a:tr h="657225">
+                <a:tc>
+                  <a:txBody>
+                    <a:bodyPr wrap="square"/>
+                    <a:lstStyle/>
+                    <a:p>
+                      <a:r>
+                        <a:rPr sz="1100" b="0">
+                          <a:solidFill>
+                            <a:srgbClr val="282828"/>
+                          </a:solidFill>
+                          <a:latin typeface="Arial"/>
+                        </a:rPr>
+                        <a:t>calibration + rows</a:t>
+                      </a:r>
+                    </a:p>
+                  </a:txBody>
+                  <a:tcPr marL="54864" marR="54864" marT="18288" marB="18288">
+                    <a:solidFill>
+                      <a:srgbClr val="ECF1F6"/>
+                    </a:solidFill>
+                  </a:tcPr>
+                </a:tc>
+                <a:tc>
+                  <a:txBody>
+                    <a:bodyPr wrap="square"/>
+                    <a:lstStyle/>
+                    <a:p>
+                      <a:r>
+                        <a:rPr sz="1100" b="0">
+                          <a:solidFill>
+                            <a:srgbClr val="282828"/>
+                          </a:solidFill>
+                          <a:latin typeface="Arial"/>
+                        </a:rPr>
+                        <a:t>stage deck: matrix on the 30 nm surface; single, 52-site grid, dense</a:t>
+                      </a:r>
+                    </a:p>
+                  </a:txBody>
+                  <a:tcPr marL="54864" marR="54864" marT="18288" marB="18288">
+                    <a:solidFill>
+                      <a:srgbClr val="ECF1F6"/>
+                    </a:solidFill>
+                  </a:tcPr>
+                </a:tc>
+                <a:tc>
+                  <a:txBody>
+                    <a:bodyPr wrap="square"/>
+                    <a:lstStyle/>
+                    <a:p>
+                      <a:r>
+                        <a:rPr sz="1100" b="0">
+                          <a:solidFill>
+                            <a:srgbClr val="282828"/>
+                          </a:solidFill>
+                          <a:latin typeface="Arial"/>
+                        </a:rPr>
+                        <a:t>battery: matrix on the surface (record mode, stencil fix); the same three rows; readings L, I, I+, S, V</a:t>
+                      </a:r>
+                    </a:p>
+                  </a:txBody>
+                  <a:tcPr marL="54864" marR="54864" marT="18288" marB="18288">
+                    <a:solidFill>
+                      <a:srgbClr val="ECF1F6"/>
+                    </a:solidFill>
+                  </a:tcPr>
+                </a:tc>
+                <a:tc>
+                  <a:txBody>
+                    <a:bodyPr wrap="square"/>
+                    <a:lstStyle/>
+                    <a:p>
+                      <a:r>
+                        <a:rPr sz="1100" b="0">
+                          <a:solidFill>
+                            <a:srgbClr val="282828"/>
+                          </a:solidFill>
+                          <a:latin typeface="Arial"/>
+                        </a:rPr>
+                        <a:t>battery through the shared runner; readings P (five-frame scan, shutter frame), PF (traced reference)</a:t>
+                      </a:r>
+                    </a:p>
+                  </a:txBody>
+                  <a:tcPr marL="54864" marR="54864" marT="18288" marB="18288">
+                    <a:solidFill>
+                      <a:srgbClr val="ECF1F6"/>
+                    </a:solidFill>
+                  </a:tcPr>
+                </a:tc>
+              </a:tr>
+              <a:tr h="468630">
+                <a:tc>
+                  <a:txBody>
+                    <a:bodyPr wrap="square"/>
+                    <a:lstStyle/>
+                    <a:p>
+                      <a:r>
+                        <a:rPr sz="1100" b="0">
+                          <a:solidFill>
+                            <a:srgbClr val="282828"/>
+                          </a:solidFill>
+                          <a:latin typeface="Arial"/>
+                        </a:rPr>
+                        <a:t>capture range</a:t>
+                      </a:r>
+                    </a:p>
+                  </a:txBody>
+                  <a:tcPr marL="54864" marR="54864" marT="18288" marB="18288">
+                    <a:solidFill>
+                      <a:srgbClr val="FFFFFF"/>
+                    </a:solidFill>
+                  </a:tcPr>
+                </a:tc>
+                <a:tc>
+                  <a:txBody>
+                    <a:bodyPr wrap="square"/>
+                    <a:lstStyle/>
+                    <a:p>
+                      <a:r>
+                        <a:rPr sz="1100" b="0">
+                          <a:solidFill>
+                            <a:srgbClr val="282828"/>
+                          </a:solidFill>
+                          <a:latin typeface="Arial"/>
+                        </a:rPr>
+                        <a:t>aging 30 to 480 nm; re-measured to 160; photons</a:t>
+                      </a:r>
+                    </a:p>
+                  </a:txBody>
+                  <a:tcPr marL="54864" marR="54864" marT="18288" marB="18288">
+                    <a:solidFill>
+                      <a:srgbClr val="FFFFFF"/>
+                    </a:solidFill>
+                  </a:tcPr>
+                </a:tc>
+                <a:tc>
+                  <a:txBody>
+                    <a:bodyPr wrap="square"/>
+                    <a:lstStyle/>
+                    <a:p>
+                      <a:r>
+                        <a:rPr sz="1100" b="0">
+                          <a:solidFill>
+                            <a:srgbClr val="282828"/>
+                          </a:solidFill>
+                          <a:latin typeface="Arial"/>
+                        </a:rPr>
+                        <a:t>the ladder with the capture-range print; base_rms rungs; noise stage per rung</a:t>
+                      </a:r>
+                    </a:p>
+                  </a:txBody>
+                  <a:tcPr marL="54864" marR="54864" marT="18288" marB="18288">
+                    <a:solidFill>
+                      <a:srgbClr val="FFFFFF"/>
+                    </a:solidFill>
+                  </a:tcPr>
+                </a:tc>
+                <a:tc>
+                  <a:txBody>
+                    <a:bodyPr wrap="square"/>
+                    <a:lstStyle/>
+                    <a:p>
+                      <a:r>
+                        <a:rPr sz="1100" b="0">
+                          <a:solidFill>
+                            <a:srgbClr val="282828"/>
+                          </a:solidFill>
+                          <a:latin typeface="Arial"/>
+                        </a:rPr>
+                        <a:t>the same knobs; the shutter frame's 480 nm</a:t>
+                      </a:r>
+                    </a:p>
+                  </a:txBody>
+                  <a:tcPr marL="54864" marR="54864" marT="18288" marB="18288">
+                    <a:solidFill>
+                      <a:srgbClr val="FFFFFF"/>
+                    </a:solidFill>
+                  </a:tcPr>
+                </a:tc>
+              </a:tr>
+              <a:tr h="280035">
+                <a:tc>
+                  <a:txBody>
+                    <a:bodyPr wrap="square"/>
+                    <a:lstStyle/>
+                    <a:p>
+                      <a:r>
+                        <a:rPr sz="1100" b="0">
+                          <a:solidFill>
+                            <a:srgbClr val="282828"/>
+                          </a:solidFill>
+                          <a:latin typeface="Arial"/>
+                        </a:rPr>
+                        <a:t>photons</a:t>
+                      </a:r>
+                    </a:p>
+                  </a:txBody>
+                  <a:tcPr marL="54864" marR="54864" marT="18288" marB="18288">
+                    <a:solidFill>
+                      <a:srgbClr val="ECF1F6"/>
+                    </a:solidFill>
+                  </a:tcPr>
+                </a:tc>
+                <a:tc>
+                  <a:txBody>
+                    <a:bodyPr wrap="square"/>
+                    <a:lstStyle/>
+                    <a:p>
+                      <a:r>
+                        <a:rPr sz="1100" b="0">
+                          <a:solidFill>
+                            <a:srgbClr val="282828"/>
+                          </a:solidFill>
+                          <a:latin typeface="Arial"/>
+                        </a:rPr>
+                        <a:t>S5 form and the loop's noise fit</a:t>
+                      </a:r>
+                    </a:p>
+                  </a:txBody>
+                  <a:tcPr marL="54864" marR="54864" marT="18288" marB="18288">
+                    <a:solidFill>
+                      <a:srgbClr val="ECF1F6"/>
+                    </a:solidFill>
+                  </a:tcPr>
+                </a:tc>
+                <a:tc>
+                  <a:txBody>
+                    <a:bodyPr wrap="square"/>
+                    <a:lstStyle/>
+                    <a:p>
+                      <a:r>
+                        <a:rPr sz="1100" b="0">
+                          <a:solidFill>
+                            <a:srgbClr val="282828"/>
+                          </a:solidFill>
+                          <a:latin typeface="Arial"/>
+                        </a:rPr>
+                        <a:t>noise stage: N(1 pm) flat and on-surface</a:t>
+                      </a:r>
+                    </a:p>
+                  </a:txBody>
+                  <a:tcPr marL="54864" marR="54864" marT="18288" marB="18288">
+                    <a:solidFill>
+                      <a:srgbClr val="ECF1F6"/>
+                    </a:solidFill>
+                  </a:tcPr>
+                </a:tc>
+                <a:tc>
+                  <a:txBody>
+                    <a:bodyPr wrap="square"/>
+                    <a:lstStyle/>
+                    <a:p>
+                      <a:r>
+                        <a:rPr sz="1100" b="0">
+                          <a:solidFill>
+                            <a:srgbClr val="282828"/>
+                          </a:solidFill>
+                          <a:latin typeface="Arial"/>
+                        </a:rPr>
+                        <a:t>noise stage; 2.0 vs 1.0 λF/D</a:t>
+                      </a:r>
+                    </a:p>
+                  </a:txBody>
+                  <a:tcPr marL="54864" marR="54864" marT="18288" marB="18288">
+                    <a:solidFill>
+                      <a:srgbClr val="ECF1F6"/>
+                    </a:solidFill>
+                  </a:tcPr>
+                </a:tc>
+              </a:tr>
+              <a:tr h="468630">
+                <a:tc>
+                  <a:txBody>
+                    <a:bodyPr wrap="square"/>
+                    <a:lstStyle/>
+                    <a:p>
+                      <a:r>
+                        <a:rPr sz="1100" b="0">
+                          <a:solidFill>
+                            <a:srgbClr val="282828"/>
+                          </a:solidFill>
+                          <a:latin typeface="Arial"/>
+                        </a:rPr>
+                        <a:t>loop</a:t>
+                      </a:r>
+                    </a:p>
+                  </a:txBody>
+                  <a:tcPr marL="54864" marR="54864" marT="18288" marB="18288">
+                    <a:solidFill>
+                      <a:srgbClr val="FFFFFF"/>
+                    </a:solidFill>
+                  </a:tcPr>
+                </a:tc>
+                <a:tc>
+                  <a:txBody>
+                    <a:bodyPr wrap="square"/>
+                    <a:lstStyle/>
+                    <a:p>
+                      <a:r>
+                        <a:rPr sz="1100" b="0">
+                          <a:solidFill>
+                            <a:srgbClr val="282828"/>
+                          </a:solidFill>
+                          <a:latin typeface="Arial"/>
+                        </a:rPr>
+                        <a:t>shared loop; PZT step error; camera and DM within-scan walks</a:t>
+                      </a:r>
+                    </a:p>
+                  </a:txBody>
+                  <a:tcPr marL="54864" marR="54864" marT="18288" marB="18288">
+                    <a:solidFill>
+                      <a:srgbClr val="FFFFFF"/>
+                    </a:solidFill>
+                  </a:tcPr>
+                </a:tc>
+                <a:tc>
+                  <a:txBody>
+                    <a:bodyPr wrap="square"/>
+                    <a:lstStyle/>
+                    <a:p>
+                      <a:r>
+                        <a:rPr sz="1100" b="0">
+                          <a:solidFill>
+                            <a:srgbClr val="282828"/>
+                          </a:solidFill>
+                          <a:latin typeface="Arial"/>
+                        </a:rPr>
+                        <a:t>shared loop: noise, walk, ramp, step; camera drift forms</a:t>
+                      </a:r>
+                    </a:p>
+                  </a:txBody>
+                  <a:tcPr marL="54864" marR="54864" marT="18288" marB="18288">
+                    <a:solidFill>
+                      <a:srgbClr val="FFFFFF"/>
+                    </a:solidFill>
+                  </a:tcPr>
+                </a:tc>
+                <a:tc>
+                  <a:txBody>
+                    <a:bodyPr wrap="square"/>
+                    <a:lstStyle/>
+                    <a:p>
+                      <a:r>
+                        <a:rPr sz="1100" b="0">
+                          <a:solidFill>
+                            <a:srgbClr val="282828"/>
+                          </a:solidFill>
+                          <a:latin typeface="Arial"/>
+                        </a:rPr>
+                        <a:t>shared loop; within-scan drift; reference-arm walk</a:t>
+                      </a:r>
+                    </a:p>
+                  </a:txBody>
+                  <a:tcPr marL="54864" marR="54864" marT="18288" marB="18288">
+                    <a:solidFill>
+                      <a:srgbClr val="FFFFFF"/>
+                    </a:solidFill>
+                  </a:tcPr>
+                </a:tc>
+              </a:tr>
+              <a:tr h="468630">
+                <a:tc>
+                  <a:txBody>
+                    <a:bodyPr wrap="square"/>
+                    <a:lstStyle/>
+                    <a:p>
+                      <a:r>
+                        <a:rPr sz="1100" b="0">
+                          <a:solidFill>
+                            <a:srgbClr val="282828"/>
+                          </a:solidFill>
+                          <a:latin typeface="Arial"/>
+                        </a:rPr>
+                        <a:t>descent</a:t>
+                      </a:r>
+                    </a:p>
+                  </a:txBody>
+                  <a:tcPr marL="54864" marR="54864" marT="18288" marB="18288">
+                    <a:solidFill>
+                      <a:srgbClr val="ECF1F6"/>
+                    </a:solidFill>
+                  </a:tcPr>
+                </a:tc>
+                <a:tc>
+                  <a:txBody>
+                    <a:bodyPr wrap="square"/>
+                    <a:lstStyle/>
+                    <a:p>
+                      <a:r>
+                        <a:rPr sz="1100" b="0">
+                          <a:solidFill>
+                            <a:srgbClr val="282828"/>
+                          </a:solidFill>
+                          <a:latin typeface="Arial"/>
+                        </a:rPr>
+                        <a:t>unwrap alone: 60 to 300 nm starts</a:t>
+                      </a:r>
+                    </a:p>
+                  </a:txBody>
+                  <a:tcPr marL="54864" marR="54864" marT="18288" marB="18288">
+                    <a:solidFill>
+                      <a:srgbClr val="ECF1F6"/>
+                    </a:solidFill>
+                  </a:tcPr>
+                </a:tc>
+                <a:tc>
+                  <a:txBody>
+                    <a:bodyPr wrap="square"/>
+                    <a:lstStyle/>
+                    <a:p>
+                      <a:r>
+                        <a:rPr sz="1100" b="0">
+                          <a:solidFill>
+                            <a:srgbClr val="282828"/>
+                          </a:solidFill>
+                          <a:latin typeface="Arial"/>
+                        </a:rPr>
+                        <a:t>the start ladder: self-referenced readings blind past 60 nm</a:t>
+                      </a:r>
+                    </a:p>
+                  </a:txBody>
+                  <a:tcPr marL="54864" marR="54864" marT="18288" marB="18288">
+                    <a:solidFill>
+                      <a:srgbClr val="ECF1F6"/>
+                    </a:solidFill>
+                  </a:tcPr>
+                </a:tc>
+                <a:tc>
+                  <a:txBody>
+                    <a:bodyPr wrap="square"/>
+                    <a:lstStyle/>
+                    <a:p>
+                      <a:r>
+                        <a:rPr sz="1100" b="0">
+                          <a:solidFill>
+                            <a:srgbClr val="282828"/>
+                          </a:solidFill>
+                          <a:latin typeface="Arial"/>
+                        </a:rPr>
+                        <a:t>unwrap + recalibration: 100 nm with the shutter frame</a:t>
+                      </a:r>
+                    </a:p>
+                  </a:txBody>
+                  <a:tcPr marL="54864" marR="54864" marT="18288" marB="18288">
+                    <a:solidFill>
+                      <a:srgbClr val="ECF1F6"/>
+                    </a:solidFill>
+                  </a:tcPr>
+                </a:tc>
+              </a:tr>
+              <a:tr h="468630">
+                <a:tc>
+                  <a:txBody>
+                    <a:bodyPr wrap="square"/>
+                    <a:lstStyle/>
+                    <a:p>
+                      <a:r>
+                        <a:rPr sz="1100" b="0">
+                          <a:solidFill>
+                            <a:srgbClr val="282828"/>
+                          </a:solidFill>
+                          <a:latin typeface="Arial"/>
+                        </a:rPr>
+                        <a:t>systematics</a:t>
+                      </a:r>
+                    </a:p>
+                  </a:txBody>
+                  <a:tcPr marL="54864" marR="54864" marT="18288" marB="18288">
+                    <a:solidFill>
+                      <a:srgbClr val="FFFFFF"/>
+                    </a:solidFill>
+                  </a:tcPr>
+                </a:tc>
+                <a:tc>
+                  <a:txBody>
+                    <a:bodyPr wrap="square"/>
+                    <a:lstStyle/>
+                    <a:p>
+                      <a:r>
+                        <a:rPr sz="1100" b="0">
+                          <a:solidFill>
+                            <a:srgbClr val="282828"/>
+                          </a:solidFill>
+                          <a:latin typeface="Arial"/>
+                        </a:rPr>
+                        <a:t>the three phase-shift forms; coatings; alignment (D4); OAP seat trim</a:t>
+                      </a:r>
+                    </a:p>
+                  </a:txBody>
+                  <a:tcPr marL="54864" marR="54864" marT="18288" marB="18288">
+                    <a:solidFill>
+                      <a:srgbClr val="FFFFFF"/>
+                    </a:solidFill>
+                  </a:tcPr>
+                </a:tc>
+                <a:tc>
+                  <a:txBody>
+                    <a:bodyPr wrap="square"/>
+                    <a:lstStyle/>
+                    <a:p>
+                      <a:r>
+                        <a:rPr sz="1100" b="0">
+                          <a:solidFill>
+                            <a:srgbClr val="282828"/>
+                          </a:solidFill>
+                          <a:latin typeface="Arial"/>
+                        </a:rPr>
+                        <a:t>V2 metasurface, V3 arm maps, V4 analyzer, V5 clear frame; color; sampling</a:t>
+                      </a:r>
+                    </a:p>
+                  </a:txBody>
+                  <a:tcPr marL="54864" marR="54864" marT="18288" marB="18288">
+                    <a:solidFill>
+                      <a:srgbClr val="FFFFFF"/>
+                    </a:solidFill>
+                  </a:tcPr>
+                </a:tc>
+                <a:tc>
+                  <a:txBody>
+                    <a:bodyPr wrap="square"/>
+                    <a:lstStyle/>
+                    <a:p>
+                      <a:r>
+                        <a:rPr sz="1100" b="0">
+                          <a:solidFill>
+                            <a:srgbClr val="282828"/>
+                          </a:solidFill>
+                          <a:latin typeface="Arial"/>
+                        </a:rPr>
+                        <a:t>step schemes; camera drift; reference motion and walk; pinhole diameter</a:t>
+                      </a:r>
+                    </a:p>
+                  </a:txBody>
+                  <a:tcPr marL="54864" marR="54864" marT="18288" marB="18288">
+                    <a:solidFill>
+                      <a:srgbClr val="FFFFFF"/>
+                    </a:solidFill>
+                  </a:tcPr>
+                </a:tc>
+              </a:tr>
+              <a:tr h="468630">
+                <a:tc>
+                  <a:txBody>
+                    <a:bodyPr wrap="square"/>
+                    <a:lstStyle/>
+                    <a:p>
+                      <a:r>
+                        <a:rPr sz="1100" b="0">
+                          <a:solidFill>
+                            <a:srgbClr val="282828"/>
+                          </a:solidFill>
+                          <a:latin typeface="Arial"/>
+                        </a:rPr>
+                        <a:t>layout + parts</a:t>
+                      </a:r>
+                    </a:p>
+                  </a:txBody>
+                  <a:tcPr marL="54864" marR="54864" marT="18288" marB="18288">
+                    <a:solidFill>
+                      <a:srgbClr val="ECF1F6"/>
+                    </a:solidFill>
+                  </a:tcPr>
+                </a:tc>
+                <a:tc>
+                  <a:txBody>
+                    <a:bodyPr wrap="square"/>
+                    <a:lstStyle/>
+                    <a:p>
+                      <a:r>
+                        <a:rPr sz="1100" b="0">
+                          <a:solidFill>
+                            <a:srgbClr val="282828"/>
+                          </a:solidFill>
+                          <a:latin typeface="Arial"/>
+                        </a:rPr>
+                        <a:t>the view_rx recipe: train, node, tail</a:t>
+                      </a:r>
+                    </a:p>
+                  </a:txBody>
+                  <a:tcPr marL="54864" marR="54864" marT="18288" marB="18288">
+                    <a:solidFill>
+                      <a:srgbClr val="ECF1F6"/>
+                    </a:solidFill>
+                  </a:tcPr>
+                </a:tc>
+                <a:tc>
+                  <a:txBody>
+                    <a:bodyPr wrap="square"/>
+                    <a:lstStyle/>
+                    <a:p>
+                      <a:r>
+                        <a:rPr sz="1100" b="0">
+                          <a:solidFill>
+                            <a:srgbClr val="282828"/>
+                          </a:solidFill>
+                          <a:latin typeface="Arial"/>
+                        </a:rPr>
+                        <a:t>zwfs_vlayout: both channel decks; the bench clearance tool</a:t>
+                      </a:r>
+                    </a:p>
+                  </a:txBody>
+                  <a:tcPr marL="54864" marR="54864" marT="18288" marB="18288">
+                    <a:solidFill>
+                      <a:srgbClr val="ECF1F6"/>
+                    </a:solidFill>
+                  </a:tcPr>
+                </a:tc>
+                <a:tc>
+                  <a:txBody>
+                    <a:bodyPr wrap="square"/>
+                    <a:lstStyle/>
+                    <a:p>
+                      <a:r>
+                        <a:rPr sz="1100" b="0">
+                          <a:solidFill>
+                            <a:srgbClr val="282828"/>
+                          </a:solidFill>
+                          <a:latin typeface="Arial"/>
+                        </a:rPr>
+                        <a:t>pdi_vfig_util: pinhole and P/SRI layouts</a:t>
+                      </a:r>
+                    </a:p>
+                  </a:txBody>
+                  <a:tcPr marL="54864" marR="54864" marT="18288" marB="18288">
+                    <a:solidFill>
+                      <a:srgbClr val="ECF1F6"/>
+                    </a:solidFill>
+                  </a:tcPr>
+                </a:tc>
+              </a:tr>
+            </a:tbl>
+          </a:graphicData>
+        </a:graphic>
+      </p:graphicFrame>
+      <p:sp>
+        <p:nvSpPr>
+          <p:cNvPr id="5" name="TextBox 4"/>
+          <p:cNvSpPr txBox="1"/>
+          <p:nvPr/>
+        </p:nvSpPr>
+        <p:spPr>
+          <a:xfrm>
+            <a:off x="411480" y="5662422"/>
+            <a:ext cx="11368735" cy="274320"/>
+          </a:xfrm>
+          <a:prstGeom prst="rect">
+            <a:avLst/>
+          </a:prstGeom>
+          <a:noFill/>
+        </p:spPr>
+        <p:txBody>
+          <a:bodyPr wrap="square">
+            <a:spAutoFit/>
+          </a:bodyPr>
+          <a:lstStyle/>
+          <a:p>
+            <a:pPr>
+              <a:spcAft>
+                <a:spcPts val="600"/>
+              </a:spcAft>
+            </a:pPr>
+            <a:r>
+              <a:rPr sz="1050" b="0">
+                <a:solidFill>
+                  <a:srgbClr val="6E6E6E"/>
+                </a:solidFill>
+                <a:latin typeface="Arial"/>
+              </a:rPr>
+              <a:t>Directories tg_psi_dm96_oap, zwfs_dm96, pdi_dm96 and the shared dm_gauge_lib under MACOS_resources/mmacos/templates/40_benches; each README's "run it yourself" reproduces its column.</a:t>
+            </a:r>
+          </a:p>
+        </p:txBody>
+      </p:sp>
+    </p:spTree>
+  </p:cSld>
+  <p:clrMapOvr>
+    <a:masterClrMapping/>
+  </p:clrMapOvr>
+</p:sld>
+</file>
+
+<file path=ppt/slides/slide38.xml><?xml version="1.0" encoding="utf-8"?>
 <p:sld xmlns:a="http://schemas.openxmlformats.org/drawingml/2006/main" xmlns:p="http://schemas.openxmlformats.org/presentationml/2006/main" xmlns:r="http://schemas.openxmlformats.org/officeDocument/2006/relationships">
   <p:cSld>
     <p:spTree>

--- a/demo_session/deck_gauges.pptx
+++ b/demo_session/deck_gauges.pptx
@@ -6816,7 +6816,7 @@
                 </a:solidFill>
                 <a:latin typeface="Arial"/>
               </a:rPr>
-              <a:t>Run tags: lens_deck, oap_deck, matbase, matbase385, v193base, pdi193fbase, pfdeck.  The interferometer rows are at 385 pixels per pupil, the rest at 193; the 385 checks read the same.</a:t>
+              <a:t>Run tags: lens_deck, oap_deck, matbase, matbase385, v193base, pdi193fbase, pfdeck.  The interferometer rows are at 385 pixels per pupil, the rest at 193; the 385 checks read the same.  The sensor rows re-run on the 22.5° bench of record (gate22_193) hold to the digit: stepped 0.989 / 5 pm, vector 0.994 / 3, pinhole 0.994 / 3 on one actuator; 0.998 / 4, 0.998 / 3, 0.998 / 3 on 47 sites.</a:t>
             </a:r>
           </a:p>
         </p:txBody>
@@ -25629,7 +25629,7 @@
                 </a:solidFill>
                 <a:latin typeface="Arial"/>
               </a:rPr>
-              <a:t>•  Zernike sensors (zwfs_dm96/runs): matbase, matbase385, m2048, m2048_lat, cap385, cap385_b60-b160, noise193_b30-b160, rec193full, loop193, loop385, v193base, v193noise, vloop193, fold_diag, v2g, v2loop, v3arm, v3s, v3loop, an193_ref/cube/q300/q100/az1/bound/clear.  README.md (CCL) and deck_zwfs.md.</a:t>
+              <a:t>•  Zernike sensors (zwfs_dm96/runs): matbase, matbase385, m2048, m2048_lat, cap385, cap385_b60-b160, noise193_b30-b160, rec193full, loop193, loop385, v193base, v193noise, vloop193, fold_diag, v2g, v2loop, v3arm, v3s, v3loop, an193_ref/cube/q300/q100/az1/bound/clear, stations193, gate22_193 (the 22.5° bench).  README.md (CCL) and deck_zwfs.md.</a:t>
             </a:r>
           </a:p>
           <a:p>

--- a/demo_session/deck_gauges.pptx
+++ b/demo_session/deck_gauges.pptx
@@ -49,6 +49,7 @@
     <p:sldId id="297" r:id="rId48"/>
     <p:sldId id="298" r:id="rId49"/>
     <p:sldId id="299" r:id="rId50"/>
+    <p:sldId id="300" r:id="rId51"/>
   </p:sldIdLst>
   <p:sldSz cx="12191695" cy="6858000" type="screen4x3"/>
   <p:notesSz cx="6858000" cy="9144000"/>
@@ -3229,7 +3230,7 @@
                 </a:solidFill>
                 <a:latin typeface="Arial"/>
               </a:rPr>
-              <a:t>DRAFT — pending review.  Every number here comes from a committed run of one shared, parameterized model (MACOS, mmacos); the run tags are on the provenance slide.  Bench geometry under revision (2026-09-15): the record's 7° splitter is not buildable; the splitter goes to 22.5° (ruled 2026-09-15; the layouts show it), and the substrates, part thicknesses and camera are being added to the model.</a:t>
+              <a:t>DRAFT — pending review.  Every number here comes from a committed run of one shared, parameterized model (MACOS, mmacos); the run tags are on the provenance slide.  Bench geometry under revision (2026-09-15): the record's 7° splitter is not buildable; the splitter goes to 22.5° (ruled 2026-09-15; the layouts show it), and the substrates, part thicknesses and camera are being added to the model.  The reflective front end has been redesigned on it (2026-09-15) and its rows are being re-measured; the lenses-versus-mirrors comparison is provisional.</a:t>
             </a:r>
           </a:p>
         </p:txBody>
@@ -11675,7 +11676,7 @@
                 </a:solidFill>
                 <a:latin typeface="Arial"/>
               </a:rPr>
-              <a:t>Lenses or off-axis mirrors in the front end</a:t>
+              <a:t>Lenses or off-axis mirrors: the record</a:t>
             </a:r>
           </a:p>
           <a:p>
@@ -11691,7 +11692,7 @@
                 </a:solidFill>
                 <a:latin typeface="Arial"/>
               </a:rPr>
-              <a:t>The reflective rig is the budget choice; it costs the interferometer its servo and its capture, and it breaks the focus-critical sensors: the mirror fold's coma at the mask seat is 0.8 λF/D</a:t>
+              <a:t>On the record's 7° mirror rig the interferometer lost its servo and its capture and the focus-critical sensors broke; the cause was read as fold coma.  It was not (next slide): the collimator was fed 25 mm inside its focus</a:t>
             </a:r>
           </a:p>
         </p:txBody>
@@ -12539,7 +12540,7 @@
                 </a:solidFill>
                 <a:latin typeface="Arial"/>
               </a:rPr>
-              <a:t>•  The mirror rig's fold is in the same plane as the splitter's, and its residual astigmatism and coma leak between the mirror's modes.  Open-loop rows tolerate it; a servo does not.</a:t>
+              <a:t>•  What the record saw: residual astigmatism and coma leaking between the mirror's modes; open-loop rows tolerated it, a servo did not.  At the mask seat the blur was 1.1 λF/D once the seat was refocused by a 6.1 mm trim, and the more focus-critical the mask feature, the worse: the 2 λF/D dimple survived, the polarized dimple degraded, the pinhole broke.</a:t>
             </a:r>
           </a:p>
           <a:p>
@@ -12555,7 +12556,7 @@
                 </a:solidFill>
                 <a:latin typeface="Arial"/>
               </a:rPr>
-              <a:t>•  At the mask seat the fold coma blurs the focus to 1.1 λF/D once the seat is refocused (a 6.1 mm trim, the collimator's residual defocus refocused by the focuser).  The more focus-critical the mask feature, the worse: the 2 λF/D dimple survives, the polarized dimple degrades, the pinhole breaks.</a:t>
+              <a:t>•  What it was: the collimator fed 25 mm inside its focus, a 926 µrad residual the fold turns into coma, linear in the angle; the 6.1 mm trim is that error refocused.  Fed at its focus the blur is zero at every fold angle.</a:t>
             </a:r>
           </a:p>
           <a:p>
@@ -12584,7 +12585,7 @@
         </p:nvSpPr>
         <p:spPr>
           <a:xfrm>
-            <a:off x="6400800" y="3736848"/>
+            <a:off x="6400800" y="4133087"/>
             <a:ext cx="5394960" cy="274320"/>
           </a:xfrm>
           <a:prstGeom prst="rect">
@@ -12610,7 +12611,7 @@
                 </a:solidFill>
                 <a:latin typeface="Arial"/>
               </a:rPr>
-              <a:t>Run tags oap_deck, loop_oap, descent_oap, zoap; the seat-trim solve is in tg_psi_dm96_oap/REPORT_gauge_ifo.md section 4.  Astigmatism scales with the fold angle squared: halving it lengthens the leg 1.33×.</a:t>
+              <a:t>Run tags oap_deck, loop_oap, descent_oap, zoap (all on the 7° rig with the 25 mm conjugate error; the seat-trim solve is in tg_psi_dm96_oap/REPORT_gauge_ifo.md section 4).  These rows stand as the record of what a misfed collimator costs; the redesigned rig's rows are being re-measured.</a:t>
             </a:r>
           </a:p>
         </p:txBody>
@@ -12667,7 +12668,7 @@
                 </a:solidFill>
                 <a:latin typeface="Arial"/>
               </a:rPr>
-              <a:t>What can spoil each reading, priced</a:t>
+              <a:t>The reflective front end, redesigned</a:t>
             </a:r>
           </a:p>
           <a:p>
@@ -12683,7 +12684,7 @@
                 </a:solidFill>
                 <a:latin typeface="Arial"/>
               </a:rPr>
-              <a:t>Every systematic we could model is either calibrated by the response matrix measured through the sensor, or shown small; one line per approach</a:t>
+              <a:t>Fed at its focus and re-solved at the 22.5° splitter, the mirror rig is buildable (every part clears by 33 mm), its mask seat is diffraction-limited at zero trim, and its untuned tail nulls 4.6× better than the lens rig's tuned one; the rows are running</a:t>
             </a:r>
           </a:p>
         </p:txBody>
@@ -12732,17 +12733,80 @@
           </a:p>
         </p:txBody>
       </p:sp>
+      <p:pic>
+        <p:nvPicPr>
+          <p:cNvPr id="4" name="Picture 3" descr="crop_oapdraw3_train.png"/>
+          <p:cNvPicPr>
+            <a:picLocks noChangeAspect="1"/>
+          </p:cNvPicPr>
+          <p:nvPr/>
+        </p:nvPicPr>
+        <p:blipFill>
+          <a:blip r:embed="rId2"/>
+          <a:stretch>
+            <a:fillRect/>
+          </a:stretch>
+        </p:blipFill>
+        <p:spPr>
+          <a:xfrm>
+            <a:off x="1997776" y="1298448"/>
+            <a:ext cx="2633846" cy="2384552"/>
+          </a:xfrm>
+          <a:prstGeom prst="rect">
+            <a:avLst/>
+          </a:prstGeom>
+        </p:spPr>
+      </p:pic>
+      <p:sp>
+        <p:nvSpPr>
+          <p:cNvPr id="5" name="TextBox 4"/>
+          <p:cNvSpPr txBox="1"/>
+          <p:nvPr/>
+        </p:nvSpPr>
+        <p:spPr>
+          <a:xfrm>
+            <a:off x="411480" y="3701287"/>
+            <a:ext cx="5806440" cy="724408"/>
+          </a:xfrm>
+          <a:prstGeom prst="rect">
+            <a:avLst/>
+          </a:prstGeom>
+          <a:noFill/>
+        </p:spPr>
+        <p:txBody>
+          <a:bodyPr wrap="square">
+            <a:spAutoFit/>
+          </a:bodyPr>
+          <a:lstStyle/>
+          <a:p>
+            <a:pPr algn="ctr">
+              <a:spcAft>
+                <a:spcPts val="0"/>
+              </a:spcAft>
+            </a:pPr>
+            <a:r>
+              <a:rPr sz="1000" b="0">
+                <a:solidFill>
+                  <a:srgbClr val="6E6E6E"/>
+                </a:solidFill>
+                <a:latin typeface="Arial"/>
+              </a:rPr>
+              <a:t>The redesigned reflective interferometer as traced by the engine, from above: the source and input polarizer in the diverging leg, OAP1 (collimator, 20° fold), the splitter at 22.5°, the 96 × 96 mirror on the test leg (blue), the reference flat on its piezo (orange), the output plate and analyzer, OAP2 (focuser, 25° fold) toward the mask seat.</a:t>
+            </a:r>
+          </a:p>
+        </p:txBody>
+      </p:sp>
       <p:graphicFrame>
         <p:nvGraphicFramePr>
-          <p:cNvPr id="4" name="Table 3"/>
+          <p:cNvPr id="6" name="Table 5"/>
           <p:cNvGraphicFramePr>
             <a:graphicFrameLocks noGrp="1"/>
           </p:cNvGraphicFramePr>
           <p:nvPr/>
         </p:nvGraphicFramePr>
         <p:xfrm>
-          <a:off x="411480" y="1298448"/>
-          <a:ext cx="11368734" cy="4966335"/>
+          <a:off x="6400800" y="1298448"/>
+          <a:ext cx="5394959" cy="2263140"/>
         </p:xfrm>
         <a:graphic>
           <a:graphicData uri="http://schemas.openxmlformats.org/drawingml/2006/table">
@@ -12751,25 +12815,36 @@
                 <a:tableStyleId>{5C22544A-7EE6-4342-B048-85BDC9FD1C3A}</a:tableStyleId>
               </a:tblPr>
               <a:tblGrid>
-                <a:gridCol w="1889760"/>
-                <a:gridCol w="2537301"/>
-                <a:gridCol w="4404372"/>
-                <a:gridCol w="2537301"/>
+                <a:gridCol w="1940292"/>
+                <a:gridCol w="1656347"/>
+                <a:gridCol w="1798320"/>
               </a:tblGrid>
-              <a:tr h="468630">
-                <a:tc>
-                  <a:txBody>
-                    <a:bodyPr wrap="square"/>
-                    <a:lstStyle/>
-                    <a:p>
-                      <a:r>
-                        <a:rPr sz="1100" b="1">
+              <a:tr h="262890">
+                <a:tc>
+                  <a:txBody>
+                    <a:bodyPr wrap="square"/>
+                    <a:lstStyle/>
+                    <a:p/>
+                  </a:txBody>
+                  <a:tcPr marL="54864" marR="54864" marT="18288" marB="18288">
+                    <a:solidFill>
+                      <a:srgbClr val="1F4E79"/>
+                    </a:solidFill>
+                  </a:tcPr>
+                </a:tc>
+                <a:tc>
+                  <a:txBody>
+                    <a:bodyPr wrap="square"/>
+                    <a:lstStyle/>
+                    <a:p>
+                      <a:r>
+                        <a:rPr sz="1000" b="1">
                           <a:solidFill>
                             <a:srgbClr val="FFFFFF"/>
                           </a:solidFill>
                           <a:latin typeface="Arial"/>
                         </a:rPr>
-                        <a:t>approach</a:t>
+                        <a:t>record's mirror rig (7°)</a:t>
                       </a:r>
                     </a:p>
                   </a:txBody>
@@ -12785,13 +12860,13 @@
                     <a:lstStyle/>
                     <a:p>
                       <a:r>
-                        <a:rPr sz="1100" b="1">
+                        <a:rPr sz="1000" b="1">
                           <a:solidFill>
                             <a:srgbClr val="FFFFFF"/>
                           </a:solidFill>
                           <a:latin typeface="Arial"/>
                         </a:rPr>
-                        <a:t>term</a:t>
+                        <a:t>redesigned (22.5°)</a:t>
                       </a:r>
                     </a:p>
                   </a:txBody>
@@ -12801,131 +12876,65 @@
                     </a:solidFill>
                   </a:tcPr>
                 </a:tc>
-                <a:tc>
-                  <a:txBody>
-                    <a:bodyPr wrap="square"/>
-                    <a:lstStyle/>
-                    <a:p>
-                      <a:r>
-                        <a:rPr sz="1100" b="1">
-                          <a:solidFill>
-                            <a:srgbClr val="FFFFFF"/>
-                          </a:solidFill>
-                          <a:latin typeface="Arial"/>
-                        </a:rPr>
-                        <a:t>uncalibrated size</a:t>
-                      </a:r>
-                    </a:p>
-                  </a:txBody>
-                  <a:tcPr marL="54864" marR="54864" marT="18288" marB="18288">
-                    <a:solidFill>
-                      <a:srgbClr val="1F4E79"/>
-                    </a:solidFill>
-                  </a:tcPr>
-                </a:tc>
-                <a:tc>
-                  <a:txBody>
-                    <a:bodyPr wrap="square"/>
-                    <a:lstStyle/>
-                    <a:p>
-                      <a:r>
-                        <a:rPr sz="1100" b="1">
-                          <a:solidFill>
-                            <a:srgbClr val="FFFFFF"/>
-                          </a:solidFill>
-                          <a:latin typeface="Arial"/>
-                        </a:rPr>
-                        <a:t>after the matrix measured on the surface</a:t>
-                      </a:r>
-                    </a:p>
-                  </a:txBody>
-                  <a:tcPr marL="54864" marR="54864" marT="18288" marB="18288">
-                    <a:solidFill>
-                      <a:srgbClr val="1F4E79"/>
-                    </a:solidFill>
-                  </a:tcPr>
-                </a:tc>
               </a:tr>
-              <a:tr h="468630">
-                <a:tc>
-                  <a:txBody>
-                    <a:bodyPr wrap="square"/>
-                    <a:lstStyle/>
-                    <a:p>
-                      <a:r>
-                        <a:rPr sz="1100" b="0">
-                          <a:solidFill>
-                            <a:srgbClr val="282828"/>
-                          </a:solidFill>
-                          <a:latin typeface="Arial"/>
-                        </a:rPr>
-                        <a:t>interferometer</a:t>
-                      </a:r>
-                    </a:p>
-                  </a:txBody>
-                  <a:tcPr marL="54864" marR="54864" marT="18288" marB="18288">
-                    <a:solidFill>
-                      <a:srgbClr val="FFFFFF"/>
-                    </a:solidFill>
-                  </a:tcPr>
-                </a:tc>
-                <a:tc>
-                  <a:txBody>
-                    <a:bodyPr wrap="square"/>
-                    <a:lstStyle/>
-                    <a:p>
-                      <a:r>
-                        <a:rPr sz="1100" b="0">
-                          <a:solidFill>
-                            <a:srgbClr val="282828"/>
-                          </a:solidFill>
-                          <a:latin typeface="Arial"/>
-                        </a:rPr>
-                        <a:t>piezo step error 2% / 5%</a:t>
-                      </a:r>
-                    </a:p>
-                  </a:txBody>
-                  <a:tcPr marL="54864" marR="54864" marT="18288" marB="18288">
-                    <a:solidFill>
-                      <a:srgbClr val="FFFFFF"/>
-                    </a:solidFill>
-                  </a:tcPr>
-                </a:tc>
-                <a:tc>
-                  <a:txBody>
-                    <a:bodyPr wrap="square"/>
-                    <a:lstStyle/>
-                    <a:p>
-                      <a:r>
-                        <a:rPr sz="1100" b="0">
-                          <a:solidFill>
-                            <a:srgbClr val="282828"/>
-                          </a:solidFill>
-                          <a:latin typeface="Arial"/>
-                        </a:rPr>
-                        <a:t>gain 0.974 / 0.954; floor 2 → 5 / 9 pm</a:t>
-                      </a:r>
-                    </a:p>
-                  </a:txBody>
-                  <a:tcPr marL="54864" marR="54864" marT="18288" marB="18288">
-                    <a:solidFill>
-                      <a:srgbClr val="FFFFFF"/>
-                    </a:solidFill>
-                  </a:tcPr>
-                </a:tc>
-                <a:tc>
-                  <a:txBody>
-                    <a:bodyPr wrap="square"/>
-                    <a:lstStyle/>
-                    <a:p>
-                      <a:r>
-                        <a:rPr sz="1100" b="0">
-                          <a:solidFill>
-                            <a:srgbClr val="282828"/>
-                          </a:solidFill>
-                          <a:latin typeface="Arial"/>
-                        </a:rPr>
-                        <a:t>common mode in the servo: 5.4e12 vs 5.5e12</a:t>
+              <a:tr h="434340">
+                <a:tc>
+                  <a:txBody>
+                    <a:bodyPr wrap="square"/>
+                    <a:lstStyle/>
+                    <a:p>
+                      <a:r>
+                        <a:rPr sz="1000" b="0">
+                          <a:solidFill>
+                            <a:srgbClr val="282828"/>
+                          </a:solidFill>
+                          <a:latin typeface="Arial"/>
+                        </a:rPr>
+                        <a:t>collimation after the collimator</a:t>
+                      </a:r>
+                    </a:p>
+                  </a:txBody>
+                  <a:tcPr marL="54864" marR="54864" marT="18288" marB="18288">
+                    <a:solidFill>
+                      <a:srgbClr val="FFFFFF"/>
+                    </a:solidFill>
+                  </a:tcPr>
+                </a:tc>
+                <a:tc>
+                  <a:txBody>
+                    <a:bodyPr wrap="square"/>
+                    <a:lstStyle/>
+                    <a:p>
+                      <a:r>
+                        <a:rPr sz="1000" b="0">
+                          <a:solidFill>
+                            <a:srgbClr val="282828"/>
+                          </a:solidFill>
+                          <a:latin typeface="Arial"/>
+                        </a:rPr>
+                        <a:t>926 µrad rms (a 28.8 m focus)</a:t>
+                      </a:r>
+                    </a:p>
+                  </a:txBody>
+                  <a:tcPr marL="54864" marR="54864" marT="18288" marB="18288">
+                    <a:solidFill>
+                      <a:srgbClr val="FFFFFF"/>
+                    </a:solidFill>
+                  </a:tcPr>
+                </a:tc>
+                <a:tc>
+                  <a:txBody>
+                    <a:bodyPr wrap="square"/>
+                    <a:lstStyle/>
+                    <a:p>
+                      <a:r>
+                        <a:rPr sz="1000" b="0">
+                          <a:solidFill>
+                            <a:srgbClr val="282828"/>
+                          </a:solidFill>
+                          <a:latin typeface="Arial"/>
+                        </a:rPr>
+                        <a:t>0.00</a:t>
                       </a:r>
                     </a:p>
                   </a:txBody>
@@ -12936,20 +12945,20 @@
                   </a:tcPr>
                 </a:tc>
               </a:tr>
-              <a:tr h="468630">
-                <a:tc>
-                  <a:txBody>
-                    <a:bodyPr wrap="square"/>
-                    <a:lstStyle/>
-                    <a:p>
-                      <a:r>
-                        <a:rPr sz="1100" b="0">
-                          <a:solidFill>
-                            <a:srgbClr val="282828"/>
-                          </a:solidFill>
-                          <a:latin typeface="Arial"/>
-                        </a:rPr>
-                        <a:t>interferometer</a:t>
+              <a:tr h="434340">
+                <a:tc>
+                  <a:txBody>
+                    <a:bodyPr wrap="square"/>
+                    <a:lstStyle/>
+                    <a:p>
+                      <a:r>
+                        <a:rPr sz="1000" b="0">
+                          <a:solidFill>
+                            <a:srgbClr val="282828"/>
+                          </a:solidFill>
+                          <a:latin typeface="Arial"/>
+                        </a:rPr>
+                        <a:t>blur at the mask seat, best focus</a:t>
                       </a:r>
                     </a:p>
                   </a:txBody>
@@ -12965,13 +12974,13 @@
                     <a:lstStyle/>
                     <a:p>
                       <a:r>
-                        <a:rPr sz="1100" b="0">
-                          <a:solidFill>
-                            <a:srgbClr val="282828"/>
-                          </a:solidFill>
-                          <a:latin typeface="Arial"/>
-                        </a:rPr>
-                        <a:t>camera 1/f walk, 1e-3 of signal within a scan</a:t>
+                        <a:rPr sz="1000" b="0">
+                          <a:solidFill>
+                            <a:srgbClr val="282828"/>
+                          </a:solidFill>
+                          <a:latin typeface="Arial"/>
+                        </a:rPr>
+                        <a:t>1.1 λF/D at a 6.1 mm trim</a:t>
                       </a:r>
                     </a:p>
                   </a:txBody>
@@ -12987,13 +12996,13 @@
                     <a:lstStyle/>
                     <a:p>
                       <a:r>
-                        <a:rPr sz="1100" b="0">
-                          <a:solidFill>
-                            <a:srgbClr val="282828"/>
-                          </a:solidFill>
-                          <a:latin typeface="Arial"/>
-                        </a:rPr>
-                        <a:t>+13% light for 3 pm</a:t>
+                        <a:rPr sz="1000" b="0">
+                          <a:solidFill>
+                            <a:srgbClr val="282828"/>
+                          </a:solidFill>
+                          <a:latin typeface="Arial"/>
+                        </a:rPr>
+                        <a:t>0.000 λF/D at zero trim</a:t>
                       </a:r>
                     </a:p>
                   </a:txBody>
@@ -13003,19 +13012,89 @@
                     </a:solidFill>
                   </a:tcPr>
                 </a:tc>
-                <a:tc>
-                  <a:txBody>
-                    <a:bodyPr wrap="square"/>
-                    <a:lstStyle/>
-                    <a:p>
-                      <a:r>
-                        <a:rPr sz="1100" b="0">
-                          <a:solidFill>
-                            <a:srgbClr val="282828"/>
-                          </a:solidFill>
-                          <a:latin typeface="Arial"/>
-                        </a:rPr>
-                        <a:t>—</a:t>
+              </a:tr>
+              <a:tr h="434340">
+                <a:tc>
+                  <a:txBody>
+                    <a:bodyPr wrap="square"/>
+                    <a:lstStyle/>
+                    <a:p>
+                      <a:r>
+                        <a:rPr sz="1000" b="0">
+                          <a:solidFill>
+                            <a:srgbClr val="282828"/>
+                          </a:solidFill>
+                          <a:latin typeface="Arial"/>
+                        </a:rPr>
+                        <a:t>flat-mirror null, tail as tuned / untuned</a:t>
+                      </a:r>
+                    </a:p>
+                  </a:txBody>
+                  <a:tcPr marL="54864" marR="54864" marT="18288" marB="18288">
+                    <a:solidFill>
+                      <a:srgbClr val="FFFFFF"/>
+                    </a:solidFill>
+                  </a:tcPr>
+                </a:tc>
+                <a:tc>
+                  <a:txBody>
+                    <a:bodyPr wrap="square"/>
+                    <a:lstStyle/>
+                    <a:p>
+                      <a:r>
+                        <a:rPr sz="1000" b="0">
+                          <a:solidFill>
+                            <a:srgbClr val="282828"/>
+                          </a:solidFill>
+                          <a:latin typeface="Arial"/>
+                        </a:rPr>
+                        <a:t>12.9 nm tuned</a:t>
+                      </a:r>
+                    </a:p>
+                  </a:txBody>
+                  <a:tcPr marL="54864" marR="54864" marT="18288" marB="18288">
+                    <a:solidFill>
+                      <a:srgbClr val="FFFFFF"/>
+                    </a:solidFill>
+                  </a:tcPr>
+                </a:tc>
+                <a:tc>
+                  <a:txBody>
+                    <a:bodyPr wrap="square"/>
+                    <a:lstStyle/>
+                    <a:p>
+                      <a:r>
+                        <a:rPr sz="1000" b="0">
+                          <a:solidFill>
+                            <a:srgbClr val="282828"/>
+                          </a:solidFill>
+                          <a:latin typeface="Arial"/>
+                        </a:rPr>
+                        <a:t>0.029 nm untuned (lens rig 0.13 tuned)</a:t>
+                      </a:r>
+                    </a:p>
+                  </a:txBody>
+                  <a:tcPr marL="54864" marR="54864" marT="18288" marB="18288">
+                    <a:solidFill>
+                      <a:srgbClr val="FFFFFF"/>
+                    </a:solidFill>
+                  </a:tcPr>
+                </a:tc>
+              </a:tr>
+              <a:tr h="434340">
+                <a:tc>
+                  <a:txBody>
+                    <a:bodyPr wrap="square"/>
+                    <a:lstStyle/>
+                    <a:p>
+                      <a:r>
+                        <a:rPr sz="1000" b="0">
+                          <a:solidFill>
+                            <a:srgbClr val="282828"/>
+                          </a:solidFill>
+                          <a:latin typeface="Arial"/>
+                        </a:rPr>
+                        <a:t>clearance, worst part</a:t>
                       </a:r>
                     </a:p>
                   </a:txBody>
@@ -13025,723 +13104,115 @@
                     </a:solidFill>
                   </a:tcPr>
                 </a:tc>
+                <a:tc>
+                  <a:txBody>
+                    <a:bodyPr wrap="square"/>
+                    <a:lstStyle/>
+                    <a:p>
+                      <a:r>
+                        <a:rPr sz="1000" b="0">
+                          <a:solidFill>
+                            <a:srgbClr val="282828"/>
+                          </a:solidFill>
+                          <a:latin typeface="Arial"/>
+                        </a:rPr>
+                        <a:t>fails (a plate 10 mm past the pole)</a:t>
+                      </a:r>
+                    </a:p>
+                  </a:txBody>
+                  <a:tcPr marL="54864" marR="54864" marT="18288" marB="18288">
+                    <a:solidFill>
+                      <a:srgbClr val="ECF1F6"/>
+                    </a:solidFill>
+                  </a:tcPr>
+                </a:tc>
+                <a:tc>
+                  <a:txBody>
+                    <a:bodyPr wrap="square"/>
+                    <a:lstStyle/>
+                    <a:p>
+                      <a:r>
+                        <a:rPr sz="1000" b="0">
+                          <a:solidFill>
+                            <a:srgbClr val="282828"/>
+                          </a:solidFill>
+                          <a:latin typeface="Arial"/>
+                        </a:rPr>
+                        <a:t>+33.4 mm over 8 parts</a:t>
+                      </a:r>
+                    </a:p>
+                  </a:txBody>
+                  <a:tcPr marL="54864" marR="54864" marT="18288" marB="18288">
+                    <a:solidFill>
+                      <a:srgbClr val="ECF1F6"/>
+                    </a:solidFill>
+                  </a:tcPr>
+                </a:tc>
               </a:tr>
-              <a:tr h="468630">
-                <a:tc>
-                  <a:txBody>
-                    <a:bodyPr wrap="square"/>
-                    <a:lstStyle/>
-                    <a:p>
-                      <a:r>
-                        <a:rPr sz="1100" b="0">
-                          <a:solidFill>
-                            <a:srgbClr val="282828"/>
-                          </a:solidFill>
-                          <a:latin typeface="Arial"/>
-                        </a:rPr>
-                        <a:t>interferometer, snapshot</a:t>
-                      </a:r>
-                    </a:p>
-                  </a:txBody>
-                  <a:tcPr marL="54864" marR="54864" marT="18288" marB="18288">
-                    <a:solidFill>
-                      <a:srgbClr val="FFFFFF"/>
-                    </a:solidFill>
-                  </a:tcPr>
-                </a:tc>
-                <a:tc>
-                  <a:txBody>
-                    <a:bodyPr wrap="square"/>
-                    <a:lstStyle/>
-                    <a:p>
-                      <a:r>
-                        <a:rPr sz="1100" b="0">
-                          <a:solidFill>
-                            <a:srgbClr val="282828"/>
-                          </a:solidFill>
-                          <a:latin typeface="Arial"/>
-                        </a:rPr>
-                        <a:t>splitter diattenuation (plate); cube R_p</a:t>
-                      </a:r>
-                    </a:p>
-                  </a:txBody>
-                  <a:tcPr marL="54864" marR="54864" marT="18288" marB="18288">
-                    <a:solidFill>
-                      <a:srgbClr val="FFFFFF"/>
-                    </a:solidFill>
-                  </a:tcPr>
-                </a:tc>
-                <a:tc>
-                  <a:txBody>
-                    <a:bodyPr wrap="square"/>
-                    <a:lstStyle/>
-                    <a:p>
-                      <a:r>
-                        <a:rPr sz="1100" b="0">
-                          <a:solidFill>
-                            <a:srgbClr val="282828"/>
-                          </a:solidFill>
-                          <a:latin typeface="Arial"/>
-                        </a:rPr>
-                        <a:t>gain +11.7% (plate); 2.1% (cube, naive stack)</a:t>
-                      </a:r>
-                    </a:p>
-                  </a:txBody>
-                  <a:tcPr marL="54864" marR="54864" marT="18288" marB="18288">
-                    <a:solidFill>
-                      <a:srgbClr val="FFFFFF"/>
-                    </a:solidFill>
-                  </a:tcPr>
-                </a:tc>
-                <a:tc>
-                  <a:txBody>
-                    <a:bodyPr wrap="square"/>
-                    <a:lstStyle/>
-                    <a:p>
-                      <a:r>
-                        <a:rPr sz="1100" b="0">
-                          <a:solidFill>
-                            <a:srgbClr val="282828"/>
-                          </a:solidFill>
-                          <a:latin typeface="Arial"/>
-                        </a:rPr>
-                        <a:t>analyzer sweep nulls to 1.00000; symmetric stack 0</a:t>
-                      </a:r>
-                    </a:p>
-                  </a:txBody>
-                  <a:tcPr marL="54864" marR="54864" marT="18288" marB="18288">
-                    <a:solidFill>
-                      <a:srgbClr val="FFFFFF"/>
-                    </a:solidFill>
-                  </a:tcPr>
-                </a:tc>
-              </a:tr>
-              <a:tr h="468630">
-                <a:tc>
-                  <a:txBody>
-                    <a:bodyPr wrap="square"/>
-                    <a:lstStyle/>
-                    <a:p>
-                      <a:r>
-                        <a:rPr sz="1100" b="0">
-                          <a:solidFill>
-                            <a:srgbClr val="282828"/>
-                          </a:solidFill>
-                          <a:latin typeface="Arial"/>
-                        </a:rPr>
-                        <a:t>Zernike</a:t>
-                      </a:r>
-                    </a:p>
-                  </a:txBody>
-                  <a:tcPr marL="54864" marR="54864" marT="18288" marB="18288">
-                    <a:solidFill>
-                      <a:srgbClr val="ECF1F6"/>
-                    </a:solidFill>
-                  </a:tcPr>
-                </a:tc>
-                <a:tc>
-                  <a:txBody>
-                    <a:bodyPr wrap="square"/>
-                    <a:lstStyle/>
-                    <a:p>
-                      <a:r>
-                        <a:rPr sz="1100" b="0">
-                          <a:solidFill>
-                            <a:srgbClr val="282828"/>
-                          </a:solidFill>
-                          <a:latin typeface="Arial"/>
-                        </a:rPr>
-                        <a:t>model out of focus (the early model); sampling; color</a:t>
-                      </a:r>
-                    </a:p>
-                  </a:txBody>
-                  <a:tcPr marL="54864" marR="54864" marT="18288" marB="18288">
-                    <a:solidFill>
-                      <a:srgbClr val="ECF1F6"/>
-                    </a:solidFill>
-                  </a:tcPr>
-                </a:tc>
-                <a:tc>
-                  <a:txBody>
-                    <a:bodyPr wrap="square"/>
-                    <a:lstStyle/>
-                    <a:p>
-                      <a:r>
-                        <a:rPr sz="1100" b="0">
-                          <a:solidFill>
-                            <a:srgbClr val="282828"/>
-                          </a:solidFill>
-                          <a:latin typeface="Arial"/>
-                        </a:rPr>
-                        <a:t>floor 744 → 67 pm on correction; dimple needs 6 pixels; one etch reads five colors within 3%</a:t>
-                      </a:r>
-                    </a:p>
-                  </a:txBody>
-                  <a:tcPr marL="54864" marR="54864" marT="18288" marB="18288">
-                    <a:solidFill>
-                      <a:srgbClr val="ECF1F6"/>
-                    </a:solidFill>
-                  </a:tcPr>
-                </a:tc>
-                <a:tc>
-                  <a:txBody>
-                    <a:bodyPr wrap="square"/>
-                    <a:lstStyle/>
-                    <a:p>
-                      <a:r>
-                        <a:rPr sz="1100" b="0">
-                          <a:solidFill>
-                            <a:srgbClr val="282828"/>
-                          </a:solidFill>
-                          <a:latin typeface="Arial"/>
-                        </a:rPr>
-                        <a:t>—</a:t>
-                      </a:r>
-                    </a:p>
-                  </a:txBody>
-                  <a:tcPr marL="54864" marR="54864" marT="18288" marB="18288">
-                    <a:solidFill>
-                      <a:srgbClr val="ECF1F6"/>
-                    </a:solidFill>
-                  </a:tcPr>
-                </a:tc>
-              </a:tr>
-              <a:tr h="468630">
-                <a:tc>
-                  <a:txBody>
-                    <a:bodyPr wrap="square"/>
-                    <a:lstStyle/>
-                    <a:p>
-                      <a:r>
-                        <a:rPr sz="1100" b="0">
-                          <a:solidFill>
-                            <a:srgbClr val="282828"/>
-                          </a:solidFill>
-                          <a:latin typeface="Arial"/>
-                        </a:rPr>
-                        <a:t>vector Zernike</a:t>
-                      </a:r>
-                    </a:p>
-                  </a:txBody>
-                  <a:tcPr marL="54864" marR="54864" marT="18288" marB="18288">
-                    <a:solidFill>
-                      <a:srgbClr val="FFFFFF"/>
-                    </a:solidFill>
-                  </a:tcPr>
-                </a:tc>
-                <a:tc>
-                  <a:txBody>
-                    <a:bodyPr wrap="square"/>
-                    <a:lstStyle/>
-                    <a:p>
-                      <a:r>
-                        <a:rPr sz="1100" b="0">
-                          <a:solidFill>
-                            <a:srgbClr val="282828"/>
-                          </a:solidFill>
-                          <a:latin typeface="Arial"/>
-                        </a:rPr>
-                        <a:t>metasurface retardance error 0.1 rad</a:t>
-                      </a:r>
-                    </a:p>
-                  </a:txBody>
-                  <a:tcPr marL="54864" marR="54864" marT="18288" marB="18288">
-                    <a:solidFill>
-                      <a:srgbClr val="FFFFFF"/>
-                    </a:solidFill>
-                  </a:tcPr>
-                </a:tc>
-                <a:tc>
-                  <a:txBody>
-                    <a:bodyPr wrap="square"/>
-                    <a:lstStyle/>
-                    <a:p>
-                      <a:r>
-                        <a:rPr sz="1100" b="0">
-                          <a:solidFill>
-                            <a:srgbClr val="282828"/>
-                          </a:solidFill>
-                          <a:latin typeface="Arial"/>
-                        </a:rPr>
-                        <a:t>750 pm on a 12 nm figure</a:t>
-                      </a:r>
-                    </a:p>
-                  </a:txBody>
-                  <a:tcPr marL="54864" marR="54864" marT="18288" marB="18288">
-                    <a:solidFill>
-                      <a:srgbClr val="FFFFFF"/>
-                    </a:solidFill>
-                  </a:tcPr>
-                </a:tc>
-                <a:tc>
-                  <a:txBody>
-                    <a:bodyPr wrap="square"/>
-                    <a:lstStyle/>
-                    <a:p>
-                      <a:r>
-                        <a:rPr sz="1100" b="0">
-                          <a:solidFill>
-                            <a:srgbClr val="282828"/>
-                          </a:solidFill>
-                          <a:latin typeface="Arial"/>
-                        </a:rPr>
-                        <a:t>rows 0.9934 / 4 pm, the ideal numbers</a:t>
-                      </a:r>
-                    </a:p>
-                  </a:txBody>
-                  <a:tcPr marL="54864" marR="54864" marT="18288" marB="18288">
-                    <a:solidFill>
-                      <a:srgbClr val="FFFFFF"/>
-                    </a:solidFill>
-                  </a:tcPr>
-                </a:tc>
-              </a:tr>
-              <a:tr h="468630">
-                <a:tc>
-                  <a:txBody>
-                    <a:bodyPr wrap="square"/>
-                    <a:lstStyle/>
-                    <a:p>
-                      <a:r>
-                        <a:rPr sz="1100" b="0">
-                          <a:solidFill>
-                            <a:srgbClr val="282828"/>
-                          </a:solidFill>
-                          <a:latin typeface="Arial"/>
-                        </a:rPr>
-                        <a:t>vector Zernike</a:t>
-                      </a:r>
-                    </a:p>
-                  </a:txBody>
-                  <a:tcPr marL="54864" marR="54864" marT="18288" marB="18288">
-                    <a:solidFill>
-                      <a:srgbClr val="ECF1F6"/>
-                    </a:solidFill>
-                  </a:tcPr>
-                </a:tc>
-                <a:tc>
-                  <a:txBody>
-                    <a:bodyPr wrap="square"/>
-                    <a:lstStyle/>
-                    <a:p>
-                      <a:r>
-                        <a:rPr sz="1100" b="0">
-                          <a:solidFill>
-                            <a:srgbClr val="282828"/>
-                          </a:solidFill>
-                          <a:latin typeface="Arial"/>
-                        </a:rPr>
-                        <a:t>the arm's polarization (six tilted glass faces)</a:t>
-                      </a:r>
-                    </a:p>
-                  </a:txBody>
-                  <a:tcPr marL="54864" marR="54864" marT="18288" marB="18288">
-                    <a:solidFill>
-                      <a:srgbClr val="ECF1F6"/>
-                    </a:solidFill>
-                  </a:tcPr>
-                </a:tc>
-                <a:tc>
-                  <a:txBody>
-                    <a:bodyPr wrap="square"/>
-                    <a:lstStyle/>
-                    <a:p>
-                      <a:r>
-                        <a:rPr sz="1100" b="0">
-                          <a:solidFill>
-                            <a:srgbClr val="282828"/>
-                          </a:solidFill>
-                          <a:latin typeface="Arial"/>
-                        </a:rPr>
-                        <a:t>9 pm on 12 nm; 6 nm per rad of channel phase</a:t>
-                      </a:r>
-                    </a:p>
-                  </a:txBody>
-                  <a:tcPr marL="54864" marR="54864" marT="18288" marB="18288">
-                    <a:solidFill>
-                      <a:srgbClr val="ECF1F6"/>
-                    </a:solidFill>
-                  </a:tcPr>
-                </a:tc>
-                <a:tc>
-                  <a:txBody>
-                    <a:bodyPr wrap="square"/>
-                    <a:lstStyle/>
-                    <a:p>
-                      <a:r>
-                        <a:rPr sz="1100" b="0">
-                          <a:solidFill>
-                            <a:srgbClr val="282828"/>
-                          </a:solidFill>
-                          <a:latin typeface="Arial"/>
-                        </a:rPr>
-                        <a:t>nothing to 0.1 rad; 10% gain loss at 0.3</a:t>
-                      </a:r>
-                    </a:p>
-                  </a:txBody>
-                  <a:tcPr marL="54864" marR="54864" marT="18288" marB="18288">
-                    <a:solidFill>
-                      <a:srgbClr val="ECF1F6"/>
-                    </a:solidFill>
-                  </a:tcPr>
-                </a:tc>
-              </a:tr>
-              <a:tr h="468630">
-                <a:tc>
-                  <a:txBody>
-                    <a:bodyPr wrap="square"/>
-                    <a:lstStyle/>
-                    <a:p>
-                      <a:r>
-                        <a:rPr sz="1100" b="0">
-                          <a:solidFill>
-                            <a:srgbClr val="282828"/>
-                          </a:solidFill>
-                          <a:latin typeface="Arial"/>
-                        </a:rPr>
-                        <a:t>vector Zernike</a:t>
-                      </a:r>
-                    </a:p>
-                  </a:txBody>
-                  <a:tcPr marL="54864" marR="54864" marT="18288" marB="18288">
-                    <a:solidFill>
-                      <a:srgbClr val="FFFFFF"/>
-                    </a:solidFill>
-                  </a:tcPr>
-                </a:tc>
-                <a:tc>
-                  <a:txBody>
-                    <a:bodyPr wrap="square"/>
-                    <a:lstStyle/>
-                    <a:p>
-                      <a:r>
-                        <a:rPr sz="1100" b="0">
-                          <a:solidFill>
-                            <a:srgbClr val="282828"/>
-                          </a:solidFill>
-                          <a:latin typeface="Arial"/>
-                        </a:rPr>
-                        <a:t>the analyzer: cube extinction; plate error λ/300</a:t>
-                      </a:r>
-                    </a:p>
-                  </a:txBody>
-                  <a:tcPr marL="54864" marR="54864" marT="18288" marB="18288">
-                    <a:solidFill>
-                      <a:srgbClr val="FFFFFF"/>
-                    </a:solidFill>
-                  </a:tcPr>
-                </a:tc>
-                <a:tc>
-                  <a:txBody>
-                    <a:bodyPr wrap="square"/>
-                    <a:lstStyle/>
-                    <a:p>
-                      <a:r>
-                        <a:rPr sz="1100" b="0">
-                          <a:solidFill>
-                            <a:srgbClr val="282828"/>
-                          </a:solidFill>
-                          <a:latin typeface="Arial"/>
-                        </a:rPr>
-                        <a:t>3.5 pm; 165 pm (1.4% of the figure)</a:t>
-                      </a:r>
-                    </a:p>
-                  </a:txBody>
-                  <a:tcPr marL="54864" marR="54864" marT="18288" marB="18288">
-                    <a:solidFill>
-                      <a:srgbClr val="FFFFFF"/>
-                    </a:solidFill>
-                  </a:tcPr>
-                </a:tc>
-                <a:tc>
-                  <a:txBody>
-                    <a:bodyPr wrap="square"/>
-                    <a:lstStyle/>
-                    <a:p>
-                      <a:r>
-                        <a:rPr sz="1100" b="0">
-                          <a:solidFill>
-                            <a:srgbClr val="282828"/>
-                          </a:solidFill>
-                          <a:latin typeface="Arial"/>
-                        </a:rPr>
-                        <a:t>gain within 0.7%, floors within 4 pm</a:t>
-                      </a:r>
-                    </a:p>
-                  </a:txBody>
-                  <a:tcPr marL="54864" marR="54864" marT="18288" marB="18288">
-                    <a:solidFill>
-                      <a:srgbClr val="FFFFFF"/>
-                    </a:solidFill>
-                  </a:tcPr>
-                </a:tc>
-              </a:tr>
-              <a:tr h="468630">
-                <a:tc>
-                  <a:txBody>
-                    <a:bodyPr wrap="square"/>
-                    <a:lstStyle/>
-                    <a:p>
-                      <a:r>
-                        <a:rPr sz="1100" b="0">
-                          <a:solidFill>
-                            <a:srgbClr val="282828"/>
-                          </a:solidFill>
-                          <a:latin typeface="Arial"/>
-                        </a:rPr>
-                        <a:t>pinhole</a:t>
-                      </a:r>
-                    </a:p>
-                  </a:txBody>
-                  <a:tcPr marL="54864" marR="54864" marT="18288" marB="18288">
-                    <a:solidFill>
-                      <a:srgbClr val="ECF1F6"/>
-                    </a:solidFill>
-                  </a:tcPr>
-                </a:tc>
-                <a:tc>
-                  <a:txBody>
-                    <a:bodyPr wrap="square"/>
-                    <a:lstStyle/>
-                    <a:p>
-                      <a:r>
-                        <a:rPr sz="1100" b="0">
-                          <a:solidFill>
-                            <a:srgbClr val="282828"/>
-                          </a:solidFill>
-                          <a:latin typeface="Arial"/>
-                        </a:rPr>
-                        <a:t>2% step error</a:t>
-                      </a:r>
-                    </a:p>
-                  </a:txBody>
-                  <a:tcPr marL="54864" marR="54864" marT="18288" marB="18288">
-                    <a:solidFill>
-                      <a:srgbClr val="ECF1F6"/>
-                    </a:solidFill>
-                  </a:tcPr>
-                </a:tc>
-                <a:tc>
-                  <a:txBody>
-                    <a:bodyPr wrap="square"/>
-                    <a:lstStyle/>
-                    <a:p>
-                      <a:r>
-                        <a:rPr sz="1100" b="0">
-                          <a:solidFill>
-                            <a:srgbClr val="282828"/>
-                          </a:solidFill>
-                          <a:latin typeface="Arial"/>
-                        </a:rPr>
-                        <a:t>4.9 pm with the five-frame scan (421 pm with four-step least squares)</a:t>
-                      </a:r>
-                    </a:p>
-                  </a:txBody>
-                  <a:tcPr marL="54864" marR="54864" marT="18288" marB="18288">
-                    <a:solidFill>
-                      <a:srgbClr val="ECF1F6"/>
-                    </a:solidFill>
-                  </a:tcPr>
-                </a:tc>
-                <a:tc>
-                  <a:txBody>
-                    <a:bodyPr wrap="square"/>
-                    <a:lstStyle/>
-                    <a:p>
-                      <a:r>
-                        <a:rPr sz="1100" b="0">
-                          <a:solidFill>
-                            <a:srgbClr val="282828"/>
-                          </a:solidFill>
-                          <a:latin typeface="Arial"/>
-                        </a:rPr>
-                        <a:t>differential rows error-free to the digit</a:t>
-                      </a:r>
-                    </a:p>
-                  </a:txBody>
-                  <a:tcPr marL="54864" marR="54864" marT="18288" marB="18288">
-                    <a:solidFill>
-                      <a:srgbClr val="ECF1F6"/>
-                    </a:solidFill>
-                  </a:tcPr>
-                </a:tc>
-              </a:tr>
-              <a:tr h="280035">
-                <a:tc>
-                  <a:txBody>
-                    <a:bodyPr wrap="square"/>
-                    <a:lstStyle/>
-                    <a:p>
-                      <a:r>
-                        <a:rPr sz="1100" b="0">
-                          <a:solidFill>
-                            <a:srgbClr val="282828"/>
-                          </a:solidFill>
-                          <a:latin typeface="Arial"/>
-                        </a:rPr>
-                        <a:t>pinhole, P/SRI</a:t>
-                      </a:r>
-                    </a:p>
-                  </a:txBody>
-                  <a:tcPr marL="54864" marR="54864" marT="18288" marB="18288">
-                    <a:solidFill>
-                      <a:srgbClr val="FFFFFF"/>
-                    </a:solidFill>
-                  </a:tcPr>
-                </a:tc>
-                <a:tc>
-                  <a:txBody>
-                    <a:bodyPr wrap="square"/>
-                    <a:lstStyle/>
-                    <a:p>
-                      <a:r>
-                        <a:rPr sz="1100" b="0">
-                          <a:solidFill>
-                            <a:srgbClr val="282828"/>
-                          </a:solidFill>
-                          <a:latin typeface="Arial"/>
-                        </a:rPr>
-                        <a:t>camera bias drifting within a scan</a:t>
-                      </a:r>
-                    </a:p>
-                  </a:txBody>
-                  <a:tcPr marL="54864" marR="54864" marT="18288" marB="18288">
-                    <a:solidFill>
-                      <a:srgbClr val="FFFFFF"/>
-                    </a:solidFill>
-                  </a:tcPr>
-                </a:tc>
-                <a:tc>
-                  <a:txBody>
-                    <a:bodyPr wrap="square"/>
-                    <a:lstStyle/>
-                    <a:p>
-                      <a:r>
-                        <a:rPr sz="1100" b="0">
-                          <a:solidFill>
-                            <a:srgbClr val="282828"/>
-                          </a:solidFill>
-                          <a:latin typeface="Arial"/>
-                        </a:rPr>
-                        <a:t>5.3 / 10.7 pm at 1e15 (the linear Zernike: 10.8 nm)</a:t>
-                      </a:r>
-                    </a:p>
-                  </a:txBody>
-                  <a:tcPr marL="54864" marR="54864" marT="18288" marB="18288">
-                    <a:solidFill>
-                      <a:srgbClr val="FFFFFF"/>
-                    </a:solidFill>
-                  </a:tcPr>
-                </a:tc>
-                <a:tc>
-                  <a:txBody>
-                    <a:bodyPr wrap="square"/>
-                    <a:lstStyle/>
-                    <a:p>
-                      <a:r>
-                        <a:rPr sz="1100" b="0">
-                          <a:solidFill>
-                            <a:srgbClr val="282828"/>
-                          </a:solidFill>
-                          <a:latin typeface="Arial"/>
-                        </a:rPr>
-                        <a:t>—</a:t>
-                      </a:r>
-                    </a:p>
-                  </a:txBody>
-                  <a:tcPr marL="54864" marR="54864" marT="18288" marB="18288">
-                    <a:solidFill>
-                      <a:srgbClr val="FFFFFF"/>
-                    </a:solidFill>
-                  </a:tcPr>
-                </a:tc>
-              </a:tr>
-              <a:tr h="468630">
-                <a:tc>
-                  <a:txBody>
-                    <a:bodyPr wrap="square"/>
-                    <a:lstStyle/>
-                    <a:p>
-                      <a:r>
-                        <a:rPr sz="1100" b="0">
-                          <a:solidFill>
-                            <a:srgbClr val="282828"/>
-                          </a:solidFill>
-                          <a:latin typeface="Arial"/>
-                        </a:rPr>
-                        <a:t>P/SRI</a:t>
-                      </a:r>
-                    </a:p>
-                  </a:txBody>
-                  <a:tcPr marL="54864" marR="54864" marT="18288" marB="18288">
-                    <a:solidFill>
-                      <a:srgbClr val="ECF1F6"/>
-                    </a:solidFill>
-                  </a:tcPr>
-                </a:tc>
-                <a:tc>
-                  <a:txBody>
-                    <a:bodyPr wrap="square"/>
-                    <a:lstStyle/>
-                    <a:p>
-                      <a:r>
-                        <a:rPr sz="1100" b="0">
-                          <a:solidFill>
-                            <a:srgbClr val="282828"/>
-                          </a:solidFill>
-                          <a:latin typeface="Arial"/>
-                        </a:rPr>
-                        <a:t>its own reference arm walking</a:t>
-                      </a:r>
-                    </a:p>
-                  </a:txBody>
-                  <a:tcPr marL="54864" marR="54864" marT="18288" marB="18288">
-                    <a:solidFill>
-                      <a:srgbClr val="ECF1F6"/>
-                    </a:solidFill>
-                  </a:tcPr>
-                </a:tc>
-                <a:tc>
-                  <a:txBody>
-                    <a:bodyPr wrap="square"/>
-                    <a:lstStyle/>
-                    <a:p>
-                      <a:r>
-                        <a:rPr sz="1100" b="0">
-                          <a:solidFill>
-                            <a:srgbClr val="282828"/>
-                          </a:solidFill>
-                          <a:latin typeface="Arial"/>
-                        </a:rPr>
-                        <a:t>4% more light over a hundredfold range of walk</a:t>
-                      </a:r>
-                    </a:p>
-                  </a:txBody>
-                  <a:tcPr marL="54864" marR="54864" marT="18288" marB="18288">
-                    <a:solidFill>
-                      <a:srgbClr val="ECF1F6"/>
-                    </a:solidFill>
-                  </a:tcPr>
-                </a:tc>
-                <a:tc>
-                  <a:txBody>
-                    <a:bodyPr wrap="square"/>
-                    <a:lstStyle/>
-                    <a:p>
-                      <a:r>
-                        <a:rPr sz="1100" b="0">
-                          <a:solidFill>
-                            <a:srgbClr val="282828"/>
-                          </a:solidFill>
-                          <a:latin typeface="Arial"/>
-                        </a:rPr>
-                        <a:t>a path change is piston, the mode the estimator nulls</a:t>
-                      </a:r>
-                    </a:p>
-                  </a:txBody>
-                  <a:tcPr marL="54864" marR="54864" marT="18288" marB="18288">
-                    <a:solidFill>
-                      <a:srgbClr val="ECF1F6"/>
+              <a:tr h="262890">
+                <a:tc>
+                  <a:txBody>
+                    <a:bodyPr wrap="square"/>
+                    <a:lstStyle/>
+                    <a:p>
+                      <a:r>
+                        <a:rPr sz="1000" b="0">
+                          <a:solidFill>
+                            <a:srgbClr val="282828"/>
+                          </a:solidFill>
+                          <a:latin typeface="Arial"/>
+                        </a:rPr>
+                        <a:t>rays lost</a:t>
+                      </a:r>
+                    </a:p>
+                  </a:txBody>
+                  <a:tcPr marL="54864" marR="54864" marT="18288" marB="18288">
+                    <a:solidFill>
+                      <a:srgbClr val="FFFFFF"/>
+                    </a:solidFill>
+                  </a:tcPr>
+                </a:tc>
+                <a:tc>
+                  <a:txBody>
+                    <a:bodyPr wrap="square"/>
+                    <a:lstStyle/>
+                    <a:p>
+                      <a:r>
+                        <a:rPr sz="1000" b="0">
+                          <a:solidFill>
+                            <a:srgbClr val="282828"/>
+                          </a:solidFill>
+                          <a:latin typeface="Arial"/>
+                        </a:rPr>
+                        <a:t>2-33% by fold angle</a:t>
+                      </a:r>
+                    </a:p>
+                  </a:txBody>
+                  <a:tcPr marL="54864" marR="54864" marT="18288" marB="18288">
+                    <a:solidFill>
+                      <a:srgbClr val="FFFFFF"/>
+                    </a:solidFill>
+                  </a:tcPr>
+                </a:tc>
+                <a:tc>
+                  <a:txBody>
+                    <a:bodyPr wrap="square"/>
+                    <a:lstStyle/>
+                    <a:p>
+                      <a:r>
+                        <a:rPr sz="1000" b="0">
+                          <a:solidFill>
+                            <a:srgbClr val="282828"/>
+                          </a:solidFill>
+                          <a:latin typeface="Arial"/>
+                        </a:rPr>
+                        <a:t>0</a:t>
+                      </a:r>
+                    </a:p>
+                  </a:txBody>
+                  <a:tcPr marL="54864" marR="54864" marT="18288" marB="18288">
+                    <a:solidFill>
+                      <a:srgbClr val="FFFFFF"/>
                     </a:solidFill>
                   </a:tcPr>
                 </a:tc>
@@ -13752,14 +13223,85 @@
       </p:graphicFrame>
       <p:sp>
         <p:nvSpPr>
-          <p:cNvPr id="5" name="TextBox 4"/>
+          <p:cNvPr id="7" name="TextBox 6"/>
           <p:cNvSpPr txBox="1"/>
           <p:nvPr/>
         </p:nvSpPr>
         <p:spPr>
           <a:xfrm>
-            <a:off x="411480" y="6411087"/>
-            <a:ext cx="11368735" cy="274320"/>
+            <a:off x="6400800" y="3707891"/>
+            <a:ext cx="5394960" cy="274320"/>
+          </a:xfrm>
+          <a:prstGeom prst="rect">
+            <a:avLst/>
+          </a:prstGeom>
+          <a:noFill/>
+        </p:spPr>
+        <p:txBody>
+          <a:bodyPr wrap="square">
+            <a:spAutoFit/>
+          </a:bodyPr>
+          <a:lstStyle/>
+          <a:p>
+            <a:pPr>
+              <a:spcAft>
+                <a:spcPts val="600"/>
+              </a:spcAft>
+            </a:pPr>
+            <a:r>
+              <a:rPr sz="1200" b="0">
+                <a:solidFill>
+                  <a:srgbClr val="282828"/>
+                </a:solidFill>
+                <a:latin typeface="Arial"/>
+              </a:rPr>
+              <a:t>•  Two defects, both removed: the builder placed the point source 25 mm inside the collimator's focus (a lens hides that in its tuned figures; a parabola cannot), and the input polarizer sat 10 mm past the collimator's pole, inside the incoming cone and the mirror's own sag.  The polarizer moves into the source leg.</a:t>
+            </a:r>
+          </a:p>
+          <a:p>
+            <a:pPr>
+              <a:spcAft>
+                <a:spcPts val="600"/>
+              </a:spcAft>
+            </a:pPr>
+            <a:r>
+              <a:rPr sz="1200" b="0">
+                <a:solidFill>
+                  <a:srgbClr val="282828"/>
+                </a:solidFill>
+                <a:latin typeface="Arial"/>
+              </a:rPr>
+              <a:t>•  The "fold coma" was the conjugate error turned into coma by the fold, linear in the angle, not quadratic; at the design point there is nothing left for a smaller fold to recover.</a:t>
+            </a:r>
+          </a:p>
+          <a:p>
+            <a:pPr>
+              <a:spcAft>
+                <a:spcPts val="600"/>
+              </a:spcAft>
+            </a:pPr>
+            <a:r>
+              <a:rPr sz="1200" b="0">
+                <a:solidFill>
+                  <a:srgbClr val="282828"/>
+                </a:solidFill>
+                <a:latin typeface="Arial"/>
+              </a:rPr>
+              <a:t>•  Open: the interferometer's rows, servo and descent, and the three sensors on this rig, are running (TO).  Their numbers replace the record's on the previous slide when they land.</a:t>
+            </a:r>
+          </a:p>
+        </p:txBody>
+      </p:sp>
+      <p:sp>
+        <p:nvSpPr>
+          <p:cNvPr id="8" name="TextBox 7"/>
+          <p:cNvSpPr txBox="1"/>
+          <p:nvPr/>
+        </p:nvSpPr>
+        <p:spPr>
+          <a:xfrm>
+            <a:off x="6400800" y="6344412"/>
+            <a:ext cx="5394960" cy="274320"/>
           </a:xfrm>
           <a:prstGeom prst="rect">
             <a:avLst/>
@@ -13784,7 +13326,7 @@
                 </a:solidFill>
                 <a:latin typeface="Arial"/>
               </a:rPr>
-              <a:t>Nothing is left open on the vector sensor's line.  Run tags lens_deck_se2/se5, loop_lens_cam, tg_psi_dm, tg_psi_dm_v2, v2g, v3arm, an193, pdi193se_sh5, pcam193ri, rw193.</a:t>
+              <a:t>Off-axis parabolas: OAP1 parent f 757 mm, off-axis 551 mm, 20°; OAP2 parent f 352 mm, off-axis 328 mm, 25°; each on a tip/tilt mount.  Run tags fold1-4, loss, loss_src, conj, zseat, oap22d, oapdraw3, oap22d_tail; tg_psi_dm96_oap/REPORT_reflective.md (TO, 2026-09-15).</a:t>
             </a:r>
           </a:p>
         </p:txBody>
@@ -13841,7 +13383,7 @@
                 </a:solidFill>
                 <a:latin typeface="Arial"/>
               </a:rPr>
-              <a:t>Recommendation</a:t>
+              <a:t>What can spoil each reading, priced</a:t>
             </a:r>
           </a:p>
           <a:p>
@@ -13857,7 +13399,7 @@
                 </a:solidFill>
                 <a:latin typeface="Arial"/>
               </a:rPr>
-              <a:t>Hold with the vector Zernike sensor; capture with the interferometer, or with the stepped pinhole's shutter frame if a second arm is not wanted; build on lenses; build one bench that switches</a:t>
+              <a:t>Every systematic we could model is either calibrated by the response matrix measured through the sensor, or shown small; one line per approach</a:t>
             </a:r>
           </a:p>
         </p:txBody>
@@ -13906,6 +13448,1180 @@
           </a:p>
         </p:txBody>
       </p:sp>
+      <p:graphicFrame>
+        <p:nvGraphicFramePr>
+          <p:cNvPr id="4" name="Table 3"/>
+          <p:cNvGraphicFramePr>
+            <a:graphicFrameLocks noGrp="1"/>
+          </p:cNvGraphicFramePr>
+          <p:nvPr/>
+        </p:nvGraphicFramePr>
+        <p:xfrm>
+          <a:off x="411480" y="1298448"/>
+          <a:ext cx="11368734" cy="4966335"/>
+        </p:xfrm>
+        <a:graphic>
+          <a:graphicData uri="http://schemas.openxmlformats.org/drawingml/2006/table">
+            <a:tbl>
+              <a:tblPr firstRow="1" bandRow="1">
+                <a:tableStyleId>{5C22544A-7EE6-4342-B048-85BDC9FD1C3A}</a:tableStyleId>
+              </a:tblPr>
+              <a:tblGrid>
+                <a:gridCol w="1889760"/>
+                <a:gridCol w="2537301"/>
+                <a:gridCol w="4404372"/>
+                <a:gridCol w="2537301"/>
+              </a:tblGrid>
+              <a:tr h="468630">
+                <a:tc>
+                  <a:txBody>
+                    <a:bodyPr wrap="square"/>
+                    <a:lstStyle/>
+                    <a:p>
+                      <a:r>
+                        <a:rPr sz="1100" b="1">
+                          <a:solidFill>
+                            <a:srgbClr val="FFFFFF"/>
+                          </a:solidFill>
+                          <a:latin typeface="Arial"/>
+                        </a:rPr>
+                        <a:t>approach</a:t>
+                      </a:r>
+                    </a:p>
+                  </a:txBody>
+                  <a:tcPr marL="54864" marR="54864" marT="18288" marB="18288">
+                    <a:solidFill>
+                      <a:srgbClr val="1F4E79"/>
+                    </a:solidFill>
+                  </a:tcPr>
+                </a:tc>
+                <a:tc>
+                  <a:txBody>
+                    <a:bodyPr wrap="square"/>
+                    <a:lstStyle/>
+                    <a:p>
+                      <a:r>
+                        <a:rPr sz="1100" b="1">
+                          <a:solidFill>
+                            <a:srgbClr val="FFFFFF"/>
+                          </a:solidFill>
+                          <a:latin typeface="Arial"/>
+                        </a:rPr>
+                        <a:t>term</a:t>
+                      </a:r>
+                    </a:p>
+                  </a:txBody>
+                  <a:tcPr marL="54864" marR="54864" marT="18288" marB="18288">
+                    <a:solidFill>
+                      <a:srgbClr val="1F4E79"/>
+                    </a:solidFill>
+                  </a:tcPr>
+                </a:tc>
+                <a:tc>
+                  <a:txBody>
+                    <a:bodyPr wrap="square"/>
+                    <a:lstStyle/>
+                    <a:p>
+                      <a:r>
+                        <a:rPr sz="1100" b="1">
+                          <a:solidFill>
+                            <a:srgbClr val="FFFFFF"/>
+                          </a:solidFill>
+                          <a:latin typeface="Arial"/>
+                        </a:rPr>
+                        <a:t>uncalibrated size</a:t>
+                      </a:r>
+                    </a:p>
+                  </a:txBody>
+                  <a:tcPr marL="54864" marR="54864" marT="18288" marB="18288">
+                    <a:solidFill>
+                      <a:srgbClr val="1F4E79"/>
+                    </a:solidFill>
+                  </a:tcPr>
+                </a:tc>
+                <a:tc>
+                  <a:txBody>
+                    <a:bodyPr wrap="square"/>
+                    <a:lstStyle/>
+                    <a:p>
+                      <a:r>
+                        <a:rPr sz="1100" b="1">
+                          <a:solidFill>
+                            <a:srgbClr val="FFFFFF"/>
+                          </a:solidFill>
+                          <a:latin typeface="Arial"/>
+                        </a:rPr>
+                        <a:t>after the matrix measured on the surface</a:t>
+                      </a:r>
+                    </a:p>
+                  </a:txBody>
+                  <a:tcPr marL="54864" marR="54864" marT="18288" marB="18288">
+                    <a:solidFill>
+                      <a:srgbClr val="1F4E79"/>
+                    </a:solidFill>
+                  </a:tcPr>
+                </a:tc>
+              </a:tr>
+              <a:tr h="468630">
+                <a:tc>
+                  <a:txBody>
+                    <a:bodyPr wrap="square"/>
+                    <a:lstStyle/>
+                    <a:p>
+                      <a:r>
+                        <a:rPr sz="1100" b="0">
+                          <a:solidFill>
+                            <a:srgbClr val="282828"/>
+                          </a:solidFill>
+                          <a:latin typeface="Arial"/>
+                        </a:rPr>
+                        <a:t>interferometer</a:t>
+                      </a:r>
+                    </a:p>
+                  </a:txBody>
+                  <a:tcPr marL="54864" marR="54864" marT="18288" marB="18288">
+                    <a:solidFill>
+                      <a:srgbClr val="FFFFFF"/>
+                    </a:solidFill>
+                  </a:tcPr>
+                </a:tc>
+                <a:tc>
+                  <a:txBody>
+                    <a:bodyPr wrap="square"/>
+                    <a:lstStyle/>
+                    <a:p>
+                      <a:r>
+                        <a:rPr sz="1100" b="0">
+                          <a:solidFill>
+                            <a:srgbClr val="282828"/>
+                          </a:solidFill>
+                          <a:latin typeface="Arial"/>
+                        </a:rPr>
+                        <a:t>piezo step error 2% / 5%</a:t>
+                      </a:r>
+                    </a:p>
+                  </a:txBody>
+                  <a:tcPr marL="54864" marR="54864" marT="18288" marB="18288">
+                    <a:solidFill>
+                      <a:srgbClr val="FFFFFF"/>
+                    </a:solidFill>
+                  </a:tcPr>
+                </a:tc>
+                <a:tc>
+                  <a:txBody>
+                    <a:bodyPr wrap="square"/>
+                    <a:lstStyle/>
+                    <a:p>
+                      <a:r>
+                        <a:rPr sz="1100" b="0">
+                          <a:solidFill>
+                            <a:srgbClr val="282828"/>
+                          </a:solidFill>
+                          <a:latin typeface="Arial"/>
+                        </a:rPr>
+                        <a:t>gain 0.974 / 0.954; floor 2 → 5 / 9 pm</a:t>
+                      </a:r>
+                    </a:p>
+                  </a:txBody>
+                  <a:tcPr marL="54864" marR="54864" marT="18288" marB="18288">
+                    <a:solidFill>
+                      <a:srgbClr val="FFFFFF"/>
+                    </a:solidFill>
+                  </a:tcPr>
+                </a:tc>
+                <a:tc>
+                  <a:txBody>
+                    <a:bodyPr wrap="square"/>
+                    <a:lstStyle/>
+                    <a:p>
+                      <a:r>
+                        <a:rPr sz="1100" b="0">
+                          <a:solidFill>
+                            <a:srgbClr val="282828"/>
+                          </a:solidFill>
+                          <a:latin typeface="Arial"/>
+                        </a:rPr>
+                        <a:t>common mode in the servo: 5.4e12 vs 5.5e12</a:t>
+                      </a:r>
+                    </a:p>
+                  </a:txBody>
+                  <a:tcPr marL="54864" marR="54864" marT="18288" marB="18288">
+                    <a:solidFill>
+                      <a:srgbClr val="FFFFFF"/>
+                    </a:solidFill>
+                  </a:tcPr>
+                </a:tc>
+              </a:tr>
+              <a:tr h="468630">
+                <a:tc>
+                  <a:txBody>
+                    <a:bodyPr wrap="square"/>
+                    <a:lstStyle/>
+                    <a:p>
+                      <a:r>
+                        <a:rPr sz="1100" b="0">
+                          <a:solidFill>
+                            <a:srgbClr val="282828"/>
+                          </a:solidFill>
+                          <a:latin typeface="Arial"/>
+                        </a:rPr>
+                        <a:t>interferometer</a:t>
+                      </a:r>
+                    </a:p>
+                  </a:txBody>
+                  <a:tcPr marL="54864" marR="54864" marT="18288" marB="18288">
+                    <a:solidFill>
+                      <a:srgbClr val="ECF1F6"/>
+                    </a:solidFill>
+                  </a:tcPr>
+                </a:tc>
+                <a:tc>
+                  <a:txBody>
+                    <a:bodyPr wrap="square"/>
+                    <a:lstStyle/>
+                    <a:p>
+                      <a:r>
+                        <a:rPr sz="1100" b="0">
+                          <a:solidFill>
+                            <a:srgbClr val="282828"/>
+                          </a:solidFill>
+                          <a:latin typeface="Arial"/>
+                        </a:rPr>
+                        <a:t>camera 1/f walk, 1e-3 of signal within a scan</a:t>
+                      </a:r>
+                    </a:p>
+                  </a:txBody>
+                  <a:tcPr marL="54864" marR="54864" marT="18288" marB="18288">
+                    <a:solidFill>
+                      <a:srgbClr val="ECF1F6"/>
+                    </a:solidFill>
+                  </a:tcPr>
+                </a:tc>
+                <a:tc>
+                  <a:txBody>
+                    <a:bodyPr wrap="square"/>
+                    <a:lstStyle/>
+                    <a:p>
+                      <a:r>
+                        <a:rPr sz="1100" b="0">
+                          <a:solidFill>
+                            <a:srgbClr val="282828"/>
+                          </a:solidFill>
+                          <a:latin typeface="Arial"/>
+                        </a:rPr>
+                        <a:t>+13% light for 3 pm</a:t>
+                      </a:r>
+                    </a:p>
+                  </a:txBody>
+                  <a:tcPr marL="54864" marR="54864" marT="18288" marB="18288">
+                    <a:solidFill>
+                      <a:srgbClr val="ECF1F6"/>
+                    </a:solidFill>
+                  </a:tcPr>
+                </a:tc>
+                <a:tc>
+                  <a:txBody>
+                    <a:bodyPr wrap="square"/>
+                    <a:lstStyle/>
+                    <a:p>
+                      <a:r>
+                        <a:rPr sz="1100" b="0">
+                          <a:solidFill>
+                            <a:srgbClr val="282828"/>
+                          </a:solidFill>
+                          <a:latin typeface="Arial"/>
+                        </a:rPr>
+                        <a:t>—</a:t>
+                      </a:r>
+                    </a:p>
+                  </a:txBody>
+                  <a:tcPr marL="54864" marR="54864" marT="18288" marB="18288">
+                    <a:solidFill>
+                      <a:srgbClr val="ECF1F6"/>
+                    </a:solidFill>
+                  </a:tcPr>
+                </a:tc>
+              </a:tr>
+              <a:tr h="468630">
+                <a:tc>
+                  <a:txBody>
+                    <a:bodyPr wrap="square"/>
+                    <a:lstStyle/>
+                    <a:p>
+                      <a:r>
+                        <a:rPr sz="1100" b="0">
+                          <a:solidFill>
+                            <a:srgbClr val="282828"/>
+                          </a:solidFill>
+                          <a:latin typeface="Arial"/>
+                        </a:rPr>
+                        <a:t>interferometer, snapshot</a:t>
+                      </a:r>
+                    </a:p>
+                  </a:txBody>
+                  <a:tcPr marL="54864" marR="54864" marT="18288" marB="18288">
+                    <a:solidFill>
+                      <a:srgbClr val="FFFFFF"/>
+                    </a:solidFill>
+                  </a:tcPr>
+                </a:tc>
+                <a:tc>
+                  <a:txBody>
+                    <a:bodyPr wrap="square"/>
+                    <a:lstStyle/>
+                    <a:p>
+                      <a:r>
+                        <a:rPr sz="1100" b="0">
+                          <a:solidFill>
+                            <a:srgbClr val="282828"/>
+                          </a:solidFill>
+                          <a:latin typeface="Arial"/>
+                        </a:rPr>
+                        <a:t>splitter diattenuation (plate); cube R_p</a:t>
+                      </a:r>
+                    </a:p>
+                  </a:txBody>
+                  <a:tcPr marL="54864" marR="54864" marT="18288" marB="18288">
+                    <a:solidFill>
+                      <a:srgbClr val="FFFFFF"/>
+                    </a:solidFill>
+                  </a:tcPr>
+                </a:tc>
+                <a:tc>
+                  <a:txBody>
+                    <a:bodyPr wrap="square"/>
+                    <a:lstStyle/>
+                    <a:p>
+                      <a:r>
+                        <a:rPr sz="1100" b="0">
+                          <a:solidFill>
+                            <a:srgbClr val="282828"/>
+                          </a:solidFill>
+                          <a:latin typeface="Arial"/>
+                        </a:rPr>
+                        <a:t>gain +11.7% (plate); 2.1% (cube, naive stack)</a:t>
+                      </a:r>
+                    </a:p>
+                  </a:txBody>
+                  <a:tcPr marL="54864" marR="54864" marT="18288" marB="18288">
+                    <a:solidFill>
+                      <a:srgbClr val="FFFFFF"/>
+                    </a:solidFill>
+                  </a:tcPr>
+                </a:tc>
+                <a:tc>
+                  <a:txBody>
+                    <a:bodyPr wrap="square"/>
+                    <a:lstStyle/>
+                    <a:p>
+                      <a:r>
+                        <a:rPr sz="1100" b="0">
+                          <a:solidFill>
+                            <a:srgbClr val="282828"/>
+                          </a:solidFill>
+                          <a:latin typeface="Arial"/>
+                        </a:rPr>
+                        <a:t>analyzer sweep nulls to 1.00000; symmetric stack 0</a:t>
+                      </a:r>
+                    </a:p>
+                  </a:txBody>
+                  <a:tcPr marL="54864" marR="54864" marT="18288" marB="18288">
+                    <a:solidFill>
+                      <a:srgbClr val="FFFFFF"/>
+                    </a:solidFill>
+                  </a:tcPr>
+                </a:tc>
+              </a:tr>
+              <a:tr h="468630">
+                <a:tc>
+                  <a:txBody>
+                    <a:bodyPr wrap="square"/>
+                    <a:lstStyle/>
+                    <a:p>
+                      <a:r>
+                        <a:rPr sz="1100" b="0">
+                          <a:solidFill>
+                            <a:srgbClr val="282828"/>
+                          </a:solidFill>
+                          <a:latin typeface="Arial"/>
+                        </a:rPr>
+                        <a:t>Zernike</a:t>
+                      </a:r>
+                    </a:p>
+                  </a:txBody>
+                  <a:tcPr marL="54864" marR="54864" marT="18288" marB="18288">
+                    <a:solidFill>
+                      <a:srgbClr val="ECF1F6"/>
+                    </a:solidFill>
+                  </a:tcPr>
+                </a:tc>
+                <a:tc>
+                  <a:txBody>
+                    <a:bodyPr wrap="square"/>
+                    <a:lstStyle/>
+                    <a:p>
+                      <a:r>
+                        <a:rPr sz="1100" b="0">
+                          <a:solidFill>
+                            <a:srgbClr val="282828"/>
+                          </a:solidFill>
+                          <a:latin typeface="Arial"/>
+                        </a:rPr>
+                        <a:t>model out of focus (the early model); sampling; color</a:t>
+                      </a:r>
+                    </a:p>
+                  </a:txBody>
+                  <a:tcPr marL="54864" marR="54864" marT="18288" marB="18288">
+                    <a:solidFill>
+                      <a:srgbClr val="ECF1F6"/>
+                    </a:solidFill>
+                  </a:tcPr>
+                </a:tc>
+                <a:tc>
+                  <a:txBody>
+                    <a:bodyPr wrap="square"/>
+                    <a:lstStyle/>
+                    <a:p>
+                      <a:r>
+                        <a:rPr sz="1100" b="0">
+                          <a:solidFill>
+                            <a:srgbClr val="282828"/>
+                          </a:solidFill>
+                          <a:latin typeface="Arial"/>
+                        </a:rPr>
+                        <a:t>floor 744 → 67 pm on correction; dimple needs 6 pixels; one etch reads five colors within 3%</a:t>
+                      </a:r>
+                    </a:p>
+                  </a:txBody>
+                  <a:tcPr marL="54864" marR="54864" marT="18288" marB="18288">
+                    <a:solidFill>
+                      <a:srgbClr val="ECF1F6"/>
+                    </a:solidFill>
+                  </a:tcPr>
+                </a:tc>
+                <a:tc>
+                  <a:txBody>
+                    <a:bodyPr wrap="square"/>
+                    <a:lstStyle/>
+                    <a:p>
+                      <a:r>
+                        <a:rPr sz="1100" b="0">
+                          <a:solidFill>
+                            <a:srgbClr val="282828"/>
+                          </a:solidFill>
+                          <a:latin typeface="Arial"/>
+                        </a:rPr>
+                        <a:t>—</a:t>
+                      </a:r>
+                    </a:p>
+                  </a:txBody>
+                  <a:tcPr marL="54864" marR="54864" marT="18288" marB="18288">
+                    <a:solidFill>
+                      <a:srgbClr val="ECF1F6"/>
+                    </a:solidFill>
+                  </a:tcPr>
+                </a:tc>
+              </a:tr>
+              <a:tr h="468630">
+                <a:tc>
+                  <a:txBody>
+                    <a:bodyPr wrap="square"/>
+                    <a:lstStyle/>
+                    <a:p>
+                      <a:r>
+                        <a:rPr sz="1100" b="0">
+                          <a:solidFill>
+                            <a:srgbClr val="282828"/>
+                          </a:solidFill>
+                          <a:latin typeface="Arial"/>
+                        </a:rPr>
+                        <a:t>vector Zernike</a:t>
+                      </a:r>
+                    </a:p>
+                  </a:txBody>
+                  <a:tcPr marL="54864" marR="54864" marT="18288" marB="18288">
+                    <a:solidFill>
+                      <a:srgbClr val="FFFFFF"/>
+                    </a:solidFill>
+                  </a:tcPr>
+                </a:tc>
+                <a:tc>
+                  <a:txBody>
+                    <a:bodyPr wrap="square"/>
+                    <a:lstStyle/>
+                    <a:p>
+                      <a:r>
+                        <a:rPr sz="1100" b="0">
+                          <a:solidFill>
+                            <a:srgbClr val="282828"/>
+                          </a:solidFill>
+                          <a:latin typeface="Arial"/>
+                        </a:rPr>
+                        <a:t>metasurface retardance error 0.1 rad</a:t>
+                      </a:r>
+                    </a:p>
+                  </a:txBody>
+                  <a:tcPr marL="54864" marR="54864" marT="18288" marB="18288">
+                    <a:solidFill>
+                      <a:srgbClr val="FFFFFF"/>
+                    </a:solidFill>
+                  </a:tcPr>
+                </a:tc>
+                <a:tc>
+                  <a:txBody>
+                    <a:bodyPr wrap="square"/>
+                    <a:lstStyle/>
+                    <a:p>
+                      <a:r>
+                        <a:rPr sz="1100" b="0">
+                          <a:solidFill>
+                            <a:srgbClr val="282828"/>
+                          </a:solidFill>
+                          <a:latin typeface="Arial"/>
+                        </a:rPr>
+                        <a:t>750 pm on a 12 nm figure</a:t>
+                      </a:r>
+                    </a:p>
+                  </a:txBody>
+                  <a:tcPr marL="54864" marR="54864" marT="18288" marB="18288">
+                    <a:solidFill>
+                      <a:srgbClr val="FFFFFF"/>
+                    </a:solidFill>
+                  </a:tcPr>
+                </a:tc>
+                <a:tc>
+                  <a:txBody>
+                    <a:bodyPr wrap="square"/>
+                    <a:lstStyle/>
+                    <a:p>
+                      <a:r>
+                        <a:rPr sz="1100" b="0">
+                          <a:solidFill>
+                            <a:srgbClr val="282828"/>
+                          </a:solidFill>
+                          <a:latin typeface="Arial"/>
+                        </a:rPr>
+                        <a:t>rows 0.9934 / 4 pm, the ideal numbers</a:t>
+                      </a:r>
+                    </a:p>
+                  </a:txBody>
+                  <a:tcPr marL="54864" marR="54864" marT="18288" marB="18288">
+                    <a:solidFill>
+                      <a:srgbClr val="FFFFFF"/>
+                    </a:solidFill>
+                  </a:tcPr>
+                </a:tc>
+              </a:tr>
+              <a:tr h="468630">
+                <a:tc>
+                  <a:txBody>
+                    <a:bodyPr wrap="square"/>
+                    <a:lstStyle/>
+                    <a:p>
+                      <a:r>
+                        <a:rPr sz="1100" b="0">
+                          <a:solidFill>
+                            <a:srgbClr val="282828"/>
+                          </a:solidFill>
+                          <a:latin typeface="Arial"/>
+                        </a:rPr>
+                        <a:t>vector Zernike</a:t>
+                      </a:r>
+                    </a:p>
+                  </a:txBody>
+                  <a:tcPr marL="54864" marR="54864" marT="18288" marB="18288">
+                    <a:solidFill>
+                      <a:srgbClr val="ECF1F6"/>
+                    </a:solidFill>
+                  </a:tcPr>
+                </a:tc>
+                <a:tc>
+                  <a:txBody>
+                    <a:bodyPr wrap="square"/>
+                    <a:lstStyle/>
+                    <a:p>
+                      <a:r>
+                        <a:rPr sz="1100" b="0">
+                          <a:solidFill>
+                            <a:srgbClr val="282828"/>
+                          </a:solidFill>
+                          <a:latin typeface="Arial"/>
+                        </a:rPr>
+                        <a:t>the arm's polarization (six tilted glass faces)</a:t>
+                      </a:r>
+                    </a:p>
+                  </a:txBody>
+                  <a:tcPr marL="54864" marR="54864" marT="18288" marB="18288">
+                    <a:solidFill>
+                      <a:srgbClr val="ECF1F6"/>
+                    </a:solidFill>
+                  </a:tcPr>
+                </a:tc>
+                <a:tc>
+                  <a:txBody>
+                    <a:bodyPr wrap="square"/>
+                    <a:lstStyle/>
+                    <a:p>
+                      <a:r>
+                        <a:rPr sz="1100" b="0">
+                          <a:solidFill>
+                            <a:srgbClr val="282828"/>
+                          </a:solidFill>
+                          <a:latin typeface="Arial"/>
+                        </a:rPr>
+                        <a:t>9 pm on 12 nm; 6 nm per rad of channel phase</a:t>
+                      </a:r>
+                    </a:p>
+                  </a:txBody>
+                  <a:tcPr marL="54864" marR="54864" marT="18288" marB="18288">
+                    <a:solidFill>
+                      <a:srgbClr val="ECF1F6"/>
+                    </a:solidFill>
+                  </a:tcPr>
+                </a:tc>
+                <a:tc>
+                  <a:txBody>
+                    <a:bodyPr wrap="square"/>
+                    <a:lstStyle/>
+                    <a:p>
+                      <a:r>
+                        <a:rPr sz="1100" b="0">
+                          <a:solidFill>
+                            <a:srgbClr val="282828"/>
+                          </a:solidFill>
+                          <a:latin typeface="Arial"/>
+                        </a:rPr>
+                        <a:t>nothing to 0.1 rad; 10% gain loss at 0.3</a:t>
+                      </a:r>
+                    </a:p>
+                  </a:txBody>
+                  <a:tcPr marL="54864" marR="54864" marT="18288" marB="18288">
+                    <a:solidFill>
+                      <a:srgbClr val="ECF1F6"/>
+                    </a:solidFill>
+                  </a:tcPr>
+                </a:tc>
+              </a:tr>
+              <a:tr h="468630">
+                <a:tc>
+                  <a:txBody>
+                    <a:bodyPr wrap="square"/>
+                    <a:lstStyle/>
+                    <a:p>
+                      <a:r>
+                        <a:rPr sz="1100" b="0">
+                          <a:solidFill>
+                            <a:srgbClr val="282828"/>
+                          </a:solidFill>
+                          <a:latin typeface="Arial"/>
+                        </a:rPr>
+                        <a:t>vector Zernike</a:t>
+                      </a:r>
+                    </a:p>
+                  </a:txBody>
+                  <a:tcPr marL="54864" marR="54864" marT="18288" marB="18288">
+                    <a:solidFill>
+                      <a:srgbClr val="FFFFFF"/>
+                    </a:solidFill>
+                  </a:tcPr>
+                </a:tc>
+                <a:tc>
+                  <a:txBody>
+                    <a:bodyPr wrap="square"/>
+                    <a:lstStyle/>
+                    <a:p>
+                      <a:r>
+                        <a:rPr sz="1100" b="0">
+                          <a:solidFill>
+                            <a:srgbClr val="282828"/>
+                          </a:solidFill>
+                          <a:latin typeface="Arial"/>
+                        </a:rPr>
+                        <a:t>the analyzer: cube extinction; plate error λ/300</a:t>
+                      </a:r>
+                    </a:p>
+                  </a:txBody>
+                  <a:tcPr marL="54864" marR="54864" marT="18288" marB="18288">
+                    <a:solidFill>
+                      <a:srgbClr val="FFFFFF"/>
+                    </a:solidFill>
+                  </a:tcPr>
+                </a:tc>
+                <a:tc>
+                  <a:txBody>
+                    <a:bodyPr wrap="square"/>
+                    <a:lstStyle/>
+                    <a:p>
+                      <a:r>
+                        <a:rPr sz="1100" b="0">
+                          <a:solidFill>
+                            <a:srgbClr val="282828"/>
+                          </a:solidFill>
+                          <a:latin typeface="Arial"/>
+                        </a:rPr>
+                        <a:t>3.5 pm; 165 pm (1.4% of the figure)</a:t>
+                      </a:r>
+                    </a:p>
+                  </a:txBody>
+                  <a:tcPr marL="54864" marR="54864" marT="18288" marB="18288">
+                    <a:solidFill>
+                      <a:srgbClr val="FFFFFF"/>
+                    </a:solidFill>
+                  </a:tcPr>
+                </a:tc>
+                <a:tc>
+                  <a:txBody>
+                    <a:bodyPr wrap="square"/>
+                    <a:lstStyle/>
+                    <a:p>
+                      <a:r>
+                        <a:rPr sz="1100" b="0">
+                          <a:solidFill>
+                            <a:srgbClr val="282828"/>
+                          </a:solidFill>
+                          <a:latin typeface="Arial"/>
+                        </a:rPr>
+                        <a:t>gain within 0.7%, floors within 4 pm</a:t>
+                      </a:r>
+                    </a:p>
+                  </a:txBody>
+                  <a:tcPr marL="54864" marR="54864" marT="18288" marB="18288">
+                    <a:solidFill>
+                      <a:srgbClr val="FFFFFF"/>
+                    </a:solidFill>
+                  </a:tcPr>
+                </a:tc>
+              </a:tr>
+              <a:tr h="468630">
+                <a:tc>
+                  <a:txBody>
+                    <a:bodyPr wrap="square"/>
+                    <a:lstStyle/>
+                    <a:p>
+                      <a:r>
+                        <a:rPr sz="1100" b="0">
+                          <a:solidFill>
+                            <a:srgbClr val="282828"/>
+                          </a:solidFill>
+                          <a:latin typeface="Arial"/>
+                        </a:rPr>
+                        <a:t>pinhole</a:t>
+                      </a:r>
+                    </a:p>
+                  </a:txBody>
+                  <a:tcPr marL="54864" marR="54864" marT="18288" marB="18288">
+                    <a:solidFill>
+                      <a:srgbClr val="ECF1F6"/>
+                    </a:solidFill>
+                  </a:tcPr>
+                </a:tc>
+                <a:tc>
+                  <a:txBody>
+                    <a:bodyPr wrap="square"/>
+                    <a:lstStyle/>
+                    <a:p>
+                      <a:r>
+                        <a:rPr sz="1100" b="0">
+                          <a:solidFill>
+                            <a:srgbClr val="282828"/>
+                          </a:solidFill>
+                          <a:latin typeface="Arial"/>
+                        </a:rPr>
+                        <a:t>2% step error</a:t>
+                      </a:r>
+                    </a:p>
+                  </a:txBody>
+                  <a:tcPr marL="54864" marR="54864" marT="18288" marB="18288">
+                    <a:solidFill>
+                      <a:srgbClr val="ECF1F6"/>
+                    </a:solidFill>
+                  </a:tcPr>
+                </a:tc>
+                <a:tc>
+                  <a:txBody>
+                    <a:bodyPr wrap="square"/>
+                    <a:lstStyle/>
+                    <a:p>
+                      <a:r>
+                        <a:rPr sz="1100" b="0">
+                          <a:solidFill>
+                            <a:srgbClr val="282828"/>
+                          </a:solidFill>
+                          <a:latin typeface="Arial"/>
+                        </a:rPr>
+                        <a:t>4.9 pm with the five-frame scan (421 pm with four-step least squares)</a:t>
+                      </a:r>
+                    </a:p>
+                  </a:txBody>
+                  <a:tcPr marL="54864" marR="54864" marT="18288" marB="18288">
+                    <a:solidFill>
+                      <a:srgbClr val="ECF1F6"/>
+                    </a:solidFill>
+                  </a:tcPr>
+                </a:tc>
+                <a:tc>
+                  <a:txBody>
+                    <a:bodyPr wrap="square"/>
+                    <a:lstStyle/>
+                    <a:p>
+                      <a:r>
+                        <a:rPr sz="1100" b="0">
+                          <a:solidFill>
+                            <a:srgbClr val="282828"/>
+                          </a:solidFill>
+                          <a:latin typeface="Arial"/>
+                        </a:rPr>
+                        <a:t>differential rows error-free to the digit</a:t>
+                      </a:r>
+                    </a:p>
+                  </a:txBody>
+                  <a:tcPr marL="54864" marR="54864" marT="18288" marB="18288">
+                    <a:solidFill>
+                      <a:srgbClr val="ECF1F6"/>
+                    </a:solidFill>
+                  </a:tcPr>
+                </a:tc>
+              </a:tr>
+              <a:tr h="280035">
+                <a:tc>
+                  <a:txBody>
+                    <a:bodyPr wrap="square"/>
+                    <a:lstStyle/>
+                    <a:p>
+                      <a:r>
+                        <a:rPr sz="1100" b="0">
+                          <a:solidFill>
+                            <a:srgbClr val="282828"/>
+                          </a:solidFill>
+                          <a:latin typeface="Arial"/>
+                        </a:rPr>
+                        <a:t>pinhole, P/SRI</a:t>
+                      </a:r>
+                    </a:p>
+                  </a:txBody>
+                  <a:tcPr marL="54864" marR="54864" marT="18288" marB="18288">
+                    <a:solidFill>
+                      <a:srgbClr val="FFFFFF"/>
+                    </a:solidFill>
+                  </a:tcPr>
+                </a:tc>
+                <a:tc>
+                  <a:txBody>
+                    <a:bodyPr wrap="square"/>
+                    <a:lstStyle/>
+                    <a:p>
+                      <a:r>
+                        <a:rPr sz="1100" b="0">
+                          <a:solidFill>
+                            <a:srgbClr val="282828"/>
+                          </a:solidFill>
+                          <a:latin typeface="Arial"/>
+                        </a:rPr>
+                        <a:t>camera bias drifting within a scan</a:t>
+                      </a:r>
+                    </a:p>
+                  </a:txBody>
+                  <a:tcPr marL="54864" marR="54864" marT="18288" marB="18288">
+                    <a:solidFill>
+                      <a:srgbClr val="FFFFFF"/>
+                    </a:solidFill>
+                  </a:tcPr>
+                </a:tc>
+                <a:tc>
+                  <a:txBody>
+                    <a:bodyPr wrap="square"/>
+                    <a:lstStyle/>
+                    <a:p>
+                      <a:r>
+                        <a:rPr sz="1100" b="0">
+                          <a:solidFill>
+                            <a:srgbClr val="282828"/>
+                          </a:solidFill>
+                          <a:latin typeface="Arial"/>
+                        </a:rPr>
+                        <a:t>5.3 / 10.7 pm at 1e15 (the linear Zernike: 10.8 nm)</a:t>
+                      </a:r>
+                    </a:p>
+                  </a:txBody>
+                  <a:tcPr marL="54864" marR="54864" marT="18288" marB="18288">
+                    <a:solidFill>
+                      <a:srgbClr val="FFFFFF"/>
+                    </a:solidFill>
+                  </a:tcPr>
+                </a:tc>
+                <a:tc>
+                  <a:txBody>
+                    <a:bodyPr wrap="square"/>
+                    <a:lstStyle/>
+                    <a:p>
+                      <a:r>
+                        <a:rPr sz="1100" b="0">
+                          <a:solidFill>
+                            <a:srgbClr val="282828"/>
+                          </a:solidFill>
+                          <a:latin typeface="Arial"/>
+                        </a:rPr>
+                        <a:t>—</a:t>
+                      </a:r>
+                    </a:p>
+                  </a:txBody>
+                  <a:tcPr marL="54864" marR="54864" marT="18288" marB="18288">
+                    <a:solidFill>
+                      <a:srgbClr val="FFFFFF"/>
+                    </a:solidFill>
+                  </a:tcPr>
+                </a:tc>
+              </a:tr>
+              <a:tr h="468630">
+                <a:tc>
+                  <a:txBody>
+                    <a:bodyPr wrap="square"/>
+                    <a:lstStyle/>
+                    <a:p>
+                      <a:r>
+                        <a:rPr sz="1100" b="0">
+                          <a:solidFill>
+                            <a:srgbClr val="282828"/>
+                          </a:solidFill>
+                          <a:latin typeface="Arial"/>
+                        </a:rPr>
+                        <a:t>P/SRI</a:t>
+                      </a:r>
+                    </a:p>
+                  </a:txBody>
+                  <a:tcPr marL="54864" marR="54864" marT="18288" marB="18288">
+                    <a:solidFill>
+                      <a:srgbClr val="ECF1F6"/>
+                    </a:solidFill>
+                  </a:tcPr>
+                </a:tc>
+                <a:tc>
+                  <a:txBody>
+                    <a:bodyPr wrap="square"/>
+                    <a:lstStyle/>
+                    <a:p>
+                      <a:r>
+                        <a:rPr sz="1100" b="0">
+                          <a:solidFill>
+                            <a:srgbClr val="282828"/>
+                          </a:solidFill>
+                          <a:latin typeface="Arial"/>
+                        </a:rPr>
+                        <a:t>its own reference arm walking</a:t>
+                      </a:r>
+                    </a:p>
+                  </a:txBody>
+                  <a:tcPr marL="54864" marR="54864" marT="18288" marB="18288">
+                    <a:solidFill>
+                      <a:srgbClr val="ECF1F6"/>
+                    </a:solidFill>
+                  </a:tcPr>
+                </a:tc>
+                <a:tc>
+                  <a:txBody>
+                    <a:bodyPr wrap="square"/>
+                    <a:lstStyle/>
+                    <a:p>
+                      <a:r>
+                        <a:rPr sz="1100" b="0">
+                          <a:solidFill>
+                            <a:srgbClr val="282828"/>
+                          </a:solidFill>
+                          <a:latin typeface="Arial"/>
+                        </a:rPr>
+                        <a:t>4% more light over a hundredfold range of walk</a:t>
+                      </a:r>
+                    </a:p>
+                  </a:txBody>
+                  <a:tcPr marL="54864" marR="54864" marT="18288" marB="18288">
+                    <a:solidFill>
+                      <a:srgbClr val="ECF1F6"/>
+                    </a:solidFill>
+                  </a:tcPr>
+                </a:tc>
+                <a:tc>
+                  <a:txBody>
+                    <a:bodyPr wrap="square"/>
+                    <a:lstStyle/>
+                    <a:p>
+                      <a:r>
+                        <a:rPr sz="1100" b="0">
+                          <a:solidFill>
+                            <a:srgbClr val="282828"/>
+                          </a:solidFill>
+                          <a:latin typeface="Arial"/>
+                        </a:rPr>
+                        <a:t>a path change is piston, the mode the estimator nulls</a:t>
+                      </a:r>
+                    </a:p>
+                  </a:txBody>
+                  <a:tcPr marL="54864" marR="54864" marT="18288" marB="18288">
+                    <a:solidFill>
+                      <a:srgbClr val="ECF1F6"/>
+                    </a:solidFill>
+                  </a:tcPr>
+                </a:tc>
+              </a:tr>
+            </a:tbl>
+          </a:graphicData>
+        </a:graphic>
+      </p:graphicFrame>
+      <p:sp>
+        <p:nvSpPr>
+          <p:cNvPr id="5" name="TextBox 4"/>
+          <p:cNvSpPr txBox="1"/>
+          <p:nvPr/>
+        </p:nvSpPr>
+        <p:spPr>
+          <a:xfrm>
+            <a:off x="411480" y="6411087"/>
+            <a:ext cx="11368735" cy="274320"/>
+          </a:xfrm>
+          <a:prstGeom prst="rect">
+            <a:avLst/>
+          </a:prstGeom>
+          <a:noFill/>
+        </p:spPr>
+        <p:txBody>
+          <a:bodyPr wrap="square">
+            <a:spAutoFit/>
+          </a:bodyPr>
+          <a:lstStyle/>
+          <a:p>
+            <a:pPr>
+              <a:spcAft>
+                <a:spcPts val="600"/>
+              </a:spcAft>
+            </a:pPr>
+            <a:r>
+              <a:rPr sz="1050" b="0">
+                <a:solidFill>
+                  <a:srgbClr val="6E6E6E"/>
+                </a:solidFill>
+                <a:latin typeface="Arial"/>
+              </a:rPr>
+              <a:t>Nothing is left open on the vector sensor's line.  Run tags lens_deck_se2/se5, loop_lens_cam, tg_psi_dm, tg_psi_dm_v2, v2g, v3arm, an193, pdi193se_sh5, pcam193ri, rw193.</a:t>
+            </a:r>
+          </a:p>
+        </p:txBody>
+      </p:sp>
+    </p:spTree>
+  </p:cSld>
+  <p:clrMapOvr>
+    <a:masterClrMapping/>
+  </p:clrMapOvr>
+</p:sld>
+</file>
+
+<file path=ppt/slides/slide27.xml><?xml version="1.0" encoding="utf-8"?>
+<p:sld xmlns:a="http://schemas.openxmlformats.org/drawingml/2006/main" xmlns:p="http://schemas.openxmlformats.org/presentationml/2006/main" xmlns:r="http://schemas.openxmlformats.org/officeDocument/2006/relationships">
+  <p:cSld>
+    <p:spTree>
+      <p:nvGrpSpPr>
+        <p:cNvPr id="1" name=""/>
+        <p:cNvGrpSpPr/>
+        <p:nvPr/>
+      </p:nvGrpSpPr>
+      <p:grpSpPr/>
+      <p:sp>
+        <p:nvSpPr>
+          <p:cNvPr id="2" name="TextBox 1"/>
+          <p:cNvSpPr txBox="1"/>
+          <p:nvPr/>
+        </p:nvSpPr>
+        <p:spPr>
+          <a:xfrm>
+            <a:off x="411480" y="201168"/>
+            <a:ext cx="11368735" cy="914400"/>
+          </a:xfrm>
+          <a:prstGeom prst="rect">
+            <a:avLst/>
+          </a:prstGeom>
+          <a:noFill/>
+        </p:spPr>
+        <p:txBody>
+          <a:bodyPr wrap="square">
+            <a:spAutoFit/>
+          </a:bodyPr>
+          <a:lstStyle/>
+          <a:p>
+            <a:pPr>
+              <a:spcAft>
+                <a:spcPts val="400"/>
+              </a:spcAft>
+            </a:pPr>
+            <a:r>
+              <a:rPr sz="2400" b="1">
+                <a:solidFill>
+                  <a:srgbClr val="1F4E79"/>
+                </a:solidFill>
+                <a:latin typeface="Arial"/>
+              </a:rPr>
+              <a:t>Recommendation</a:t>
+            </a:r>
+          </a:p>
+          <a:p>
+            <a:pPr>
+              <a:spcAft>
+                <a:spcPts val="0"/>
+              </a:spcAft>
+            </a:pPr>
+            <a:r>
+              <a:rPr sz="1250" b="0">
+                <a:solidFill>
+                  <a:srgbClr val="6E6E6E"/>
+                </a:solidFill>
+                <a:latin typeface="Arial"/>
+              </a:rPr>
+              <a:t>Hold with the vector Zernike sensor; capture with the interferometer, or with the stepped pinhole's shutter frame if a second arm is not wanted; build on lenses; build one bench that switches</a:t>
+            </a:r>
+          </a:p>
+        </p:txBody>
+      </p:sp>
+      <p:sp>
+        <p:nvSpPr>
+          <p:cNvPr id="3" name="Rectangle 2"/>
+          <p:cNvSpPr/>
+          <p:nvPr/>
+        </p:nvSpPr>
+        <p:spPr>
+          <a:xfrm>
+            <a:off x="411480" y="1133856"/>
+            <a:ext cx="11368735" cy="20320"/>
+          </a:xfrm>
+          <a:prstGeom prst="rect">
+            <a:avLst/>
+          </a:prstGeom>
+          <a:solidFill>
+            <a:srgbClr val="B8C6D4"/>
+          </a:solidFill>
+          <a:ln>
+            <a:noFill/>
+          </a:ln>
+          <a:effectLst/>
+        </p:spPr>
+        <p:style>
+          <a:lnRef idx="1">
+            <a:schemeClr val="accent1"/>
+          </a:lnRef>
+          <a:fillRef idx="3">
+            <a:schemeClr val="accent1"/>
+          </a:fillRef>
+          <a:effectRef idx="2">
+            <a:schemeClr val="accent1"/>
+          </a:effectRef>
+          <a:fontRef idx="minor">
+            <a:schemeClr val="lt1"/>
+          </a:fontRef>
+        </p:style>
+        <p:txBody>
+          <a:bodyPr rtlCol="0" anchor="ctr"/>
+          <a:lstStyle/>
+          <a:p>
+            <a:pPr algn="ctr"/>
+          </a:p>
+        </p:txBody>
+      </p:sp>
       <p:sp>
         <p:nvSpPr>
           <p:cNvPr id="4" name="TextBox 3"/>
@@ -13972,7 +14688,7 @@
                 </a:solidFill>
                 <a:latin typeface="Arial"/>
               </a:rPr>
-              <a:t>•  Front end: lenses.  The mirror rig's fold coma walls the servo and breaks the pinhole.</a:t>
+              <a:t>•  Front end: lenses on the record; the redesigned mirror rig (fed at its focus, 22.5°) removes what walled the servo and broke the pinhole, and its rows are running.  If they match the lens rig's, the mirrors are the budget choice with no penalty.</a:t>
             </a:r>
           </a:p>
         </p:txBody>
@@ -14079,7 +14795,7 @@
 </p:sld>
 </file>
 
-<file path=ppt/slides/slide27.xml><?xml version="1.0" encoding="utf-8"?>
+<file path=ppt/slides/slide28.xml><?xml version="1.0" encoding="utf-8"?>
 <p:sld xmlns:a="http://schemas.openxmlformats.org/drawingml/2006/main" xmlns:p="http://schemas.openxmlformats.org/presentationml/2006/main" xmlns:r="http://schemas.openxmlformats.org/officeDocument/2006/relationships">
   <p:cSld>
     <p:spTree>
@@ -14298,7 +15014,7 @@
 </p:sld>
 </file>
 
-<file path=ppt/slides/slide28.xml><?xml version="1.0" encoding="utf-8"?>
+<file path=ppt/slides/slide29.xml><?xml version="1.0" encoding="utf-8"?>
 <p:sld xmlns:a="http://schemas.openxmlformats.org/drawingml/2006/main" xmlns:p="http://schemas.openxmlformats.org/presentationml/2006/main" xmlns:r="http://schemas.openxmlformats.org/officeDocument/2006/relationships">
   <p:cSld>
     <p:spTree>
@@ -14944,7 +15660,738 @@
 </p:sld>
 </file>
 
-<file path=ppt/slides/slide29.xml><?xml version="1.0" encoding="utf-8"?>
+<file path=ppt/slides/slide3.xml><?xml version="1.0" encoding="utf-8"?>
+<p:sld xmlns:a="http://schemas.openxmlformats.org/drawingml/2006/main" xmlns:p="http://schemas.openxmlformats.org/presentationml/2006/main" xmlns:r="http://schemas.openxmlformats.org/officeDocument/2006/relationships">
+  <p:cSld>
+    <p:spTree>
+      <p:nvGrpSpPr>
+        <p:cNvPr id="1" name=""/>
+        <p:cNvGrpSpPr/>
+        <p:nvPr/>
+      </p:nvGrpSpPr>
+      <p:grpSpPr/>
+      <p:sp>
+        <p:nvSpPr>
+          <p:cNvPr id="2" name="TextBox 1"/>
+          <p:cNvSpPr txBox="1"/>
+          <p:nvPr/>
+        </p:nvSpPr>
+        <p:spPr>
+          <a:xfrm>
+            <a:off x="411480" y="201168"/>
+            <a:ext cx="11368735" cy="914400"/>
+          </a:xfrm>
+          <a:prstGeom prst="rect">
+            <a:avLst/>
+          </a:prstGeom>
+          <a:noFill/>
+        </p:spPr>
+        <p:txBody>
+          <a:bodyPr wrap="square">
+            <a:spAutoFit/>
+          </a:bodyPr>
+          <a:lstStyle/>
+          <a:p>
+            <a:pPr>
+              <a:spcAft>
+                <a:spcPts val="400"/>
+              </a:spcAft>
+            </a:pPr>
+            <a:r>
+              <a:rPr sz="2400" b="1">
+                <a:solidFill>
+                  <a:srgbClr val="1F4E79"/>
+                </a:solidFill>
+                <a:latin typeface="Arial"/>
+              </a:rPr>
+              <a:t>One bench, four ways of sensing</a:t>
+            </a:r>
+          </a:p>
+          <a:p>
+            <a:pPr>
+              <a:spcAft>
+                <a:spcPts val="0"/>
+              </a:spcAft>
+            </a:pPr>
+            <a:r>
+              <a:rPr sz="1250" b="0">
+                <a:solidFill>
+                  <a:srgbClr val="6E6E6E"/>
+                </a:solidFill>
+                <a:latin typeface="Arial"/>
+              </a:rPr>
+              <a:t>Everything shares the front end: a filtered HeNe, a collimator, a plate splitter at 22.5°, a 700 mm leg to the mirror, a focuser to an internal focus, a field lens to a camera at the pupil image</a:t>
+            </a:r>
+          </a:p>
+        </p:txBody>
+      </p:sp>
+      <p:sp>
+        <p:nvSpPr>
+          <p:cNvPr id="3" name="Rectangle 2"/>
+          <p:cNvSpPr/>
+          <p:nvPr/>
+        </p:nvSpPr>
+        <p:spPr>
+          <a:xfrm>
+            <a:off x="411480" y="1133856"/>
+            <a:ext cx="11368735" cy="20320"/>
+          </a:xfrm>
+          <a:prstGeom prst="rect">
+            <a:avLst/>
+          </a:prstGeom>
+          <a:solidFill>
+            <a:srgbClr val="B8C6D4"/>
+          </a:solidFill>
+          <a:ln>
+            <a:noFill/>
+          </a:ln>
+          <a:effectLst/>
+        </p:spPr>
+        <p:style>
+          <a:lnRef idx="1">
+            <a:schemeClr val="accent1"/>
+          </a:lnRef>
+          <a:fillRef idx="3">
+            <a:schemeClr val="accent1"/>
+          </a:fillRef>
+          <a:effectRef idx="2">
+            <a:schemeClr val="accent1"/>
+          </a:effectRef>
+          <a:fontRef idx="minor">
+            <a:schemeClr val="lt1"/>
+          </a:fontRef>
+        </p:style>
+        <p:txBody>
+          <a:bodyPr rtlCol="0" anchor="ctr"/>
+          <a:lstStyle/>
+          <a:p>
+            <a:pPr algn="ctr"/>
+          </a:p>
+        </p:txBody>
+      </p:sp>
+      <p:pic>
+        <p:nvPicPr>
+          <p:cNvPr id="4" name="Picture 3" descr="crop_bench_bs22_train.png"/>
+          <p:cNvPicPr>
+            <a:picLocks noChangeAspect="1"/>
+          </p:cNvPicPr>
+          <p:nvPr/>
+        </p:nvPicPr>
+        <p:blipFill>
+          <a:blip r:embed="rId2"/>
+          <a:stretch>
+            <a:fillRect/>
+          </a:stretch>
+        </p:blipFill>
+        <p:spPr>
+          <a:xfrm>
+            <a:off x="4061668" y="1298448"/>
+            <a:ext cx="4068357" cy="2348992"/>
+          </a:xfrm>
+          <a:prstGeom prst="rect">
+            <a:avLst/>
+          </a:prstGeom>
+        </p:spPr>
+      </p:pic>
+      <p:sp>
+        <p:nvSpPr>
+          <p:cNvPr id="5" name="TextBox 4"/>
+          <p:cNvSpPr txBox="1"/>
+          <p:nvPr/>
+        </p:nvSpPr>
+        <p:spPr>
+          <a:xfrm>
+            <a:off x="411480" y="3665727"/>
+            <a:ext cx="11368735" cy="394208"/>
+          </a:xfrm>
+          <a:prstGeom prst="rect">
+            <a:avLst/>
+          </a:prstGeom>
+          <a:noFill/>
+        </p:spPr>
+        <p:txBody>
+          <a:bodyPr wrap="square">
+            <a:spAutoFit/>
+          </a:bodyPr>
+          <a:lstStyle/>
+          <a:p>
+            <a:pPr algn="ctr">
+              <a:spcAft>
+                <a:spcPts val="0"/>
+              </a:spcAft>
+            </a:pPr>
+            <a:r>
+              <a:rPr sz="1000" b="0">
+                <a:solidFill>
+                  <a:srgbClr val="6E6E6E"/>
+                </a:solidFill>
+                <a:latin typeface="Arial"/>
+              </a:rPr>
+              <a:t>The shared front end as traced by the engine, seen from above, at the 22.5° splitter: source at left, collimator L1, the splitter, the 96 mm mirror on its 700 mm leg (blue), the reference arm and its flat (orange, the interferometer only), the focuser L2 toward the internal focus.  The mask seat at that focus is where the four sensing methods differ.</a:t>
+            </a:r>
+          </a:p>
+        </p:txBody>
+      </p:sp>
+      <p:graphicFrame>
+        <p:nvGraphicFramePr>
+          <p:cNvPr id="6" name="Table 5"/>
+          <p:cNvGraphicFramePr>
+            <a:graphicFrameLocks noGrp="1"/>
+          </p:cNvGraphicFramePr>
+          <p:nvPr/>
+        </p:nvGraphicFramePr>
+        <p:xfrm>
+          <a:off x="411480" y="4096511"/>
+          <a:ext cx="5806439" cy="1965960"/>
+        </p:xfrm>
+        <a:graphic>
+          <a:graphicData uri="http://schemas.openxmlformats.org/drawingml/2006/table">
+            <a:tbl>
+              <a:tblPr firstRow="1" bandRow="1">
+                <a:tableStyleId>{5C22544A-7EE6-4342-B048-85BDC9FD1C3A}</a:tableStyleId>
+              </a:tblPr>
+              <a:tblGrid>
+                <a:gridCol w="662479"/>
+                <a:gridCol w="5143960"/>
+              </a:tblGrid>
+              <a:tr h="280035">
+                <a:tc>
+                  <a:txBody>
+                    <a:bodyPr wrap="square"/>
+                    <a:lstStyle/>
+                    <a:p>
+                      <a:r>
+                        <a:rPr sz="1100" b="1">
+                          <a:solidFill>
+                            <a:srgbClr val="FFFFFF"/>
+                          </a:solidFill>
+                          <a:latin typeface="Arial"/>
+                        </a:rPr>
+                        <a:t>part</a:t>
+                      </a:r>
+                    </a:p>
+                  </a:txBody>
+                  <a:tcPr marL="54864" marR="54864" marT="18288" marB="18288">
+                    <a:solidFill>
+                      <a:srgbClr val="1F4E79"/>
+                    </a:solidFill>
+                  </a:tcPr>
+                </a:tc>
+                <a:tc>
+                  <a:txBody>
+                    <a:bodyPr wrap="square"/>
+                    <a:lstStyle/>
+                    <a:p>
+                      <a:r>
+                        <a:rPr sz="1100" b="1">
+                          <a:solidFill>
+                            <a:srgbClr val="FFFFFF"/>
+                          </a:solidFill>
+                          <a:latin typeface="Arial"/>
+                        </a:rPr>
+                        <a:t>value</a:t>
+                      </a:r>
+                    </a:p>
+                  </a:txBody>
+                  <a:tcPr marL="54864" marR="54864" marT="18288" marB="18288">
+                    <a:solidFill>
+                      <a:srgbClr val="1F4E79"/>
+                    </a:solidFill>
+                  </a:tcPr>
+                </a:tc>
+              </a:tr>
+              <a:tr h="280035">
+                <a:tc>
+                  <a:txBody>
+                    <a:bodyPr wrap="square"/>
+                    <a:lstStyle/>
+                    <a:p>
+                      <a:r>
+                        <a:rPr sz="1100" b="0">
+                          <a:solidFill>
+                            <a:srgbClr val="282828"/>
+                          </a:solidFill>
+                          <a:latin typeface="Arial"/>
+                        </a:rPr>
+                        <a:t>source</a:t>
+                      </a:r>
+                    </a:p>
+                  </a:txBody>
+                  <a:tcPr marL="54864" marR="54864" marT="18288" marB="18288">
+                    <a:solidFill>
+                      <a:srgbClr val="FFFFFF"/>
+                    </a:solidFill>
+                  </a:tcPr>
+                </a:tc>
+                <a:tc>
+                  <a:txBody>
+                    <a:bodyPr wrap="square"/>
+                    <a:lstStyle/>
+                    <a:p>
+                      <a:r>
+                        <a:rPr sz="1100" b="0">
+                          <a:solidFill>
+                            <a:srgbClr val="282828"/>
+                          </a:solidFill>
+                          <a:latin typeface="Arial"/>
+                        </a:rPr>
+                        <a:t>HeNe 632.8 nm, filtered, 51 mm beam radius</a:t>
+                      </a:r>
+                    </a:p>
+                  </a:txBody>
+                  <a:tcPr marL="54864" marR="54864" marT="18288" marB="18288">
+                    <a:solidFill>
+                      <a:srgbClr val="FFFFFF"/>
+                    </a:solidFill>
+                  </a:tcPr>
+                </a:tc>
+              </a:tr>
+              <a:tr h="468630">
+                <a:tc>
+                  <a:txBody>
+                    <a:bodyPr wrap="square"/>
+                    <a:lstStyle/>
+                    <a:p>
+                      <a:r>
+                        <a:rPr sz="1100" b="0">
+                          <a:solidFill>
+                            <a:srgbClr val="282828"/>
+                          </a:solidFill>
+                          <a:latin typeface="Arial"/>
+                        </a:rPr>
+                        <a:t>collimator L1</a:t>
+                      </a:r>
+                    </a:p>
+                  </a:txBody>
+                  <a:tcPr marL="54864" marR="54864" marT="18288" marB="18288">
+                    <a:solidFill>
+                      <a:srgbClr val="ECF1F6"/>
+                    </a:solidFill>
+                  </a:tcPr>
+                </a:tc>
+                <a:tc>
+                  <a:txBody>
+                    <a:bodyPr wrap="square"/>
+                    <a:lstStyle/>
+                    <a:p>
+                      <a:r>
+                        <a:rPr sz="1100" b="0">
+                          <a:solidFill>
+                            <a:srgbClr val="282828"/>
+                          </a:solidFill>
+                          <a:latin typeface="Arial"/>
+                        </a:rPr>
+                        <a:t>f 857 mm, 103 mm, coated; modeled 5 mm center, 2 mm edge, to be a real 103 mm singlet</a:t>
+                      </a:r>
+                    </a:p>
+                  </a:txBody>
+                  <a:tcPr marL="54864" marR="54864" marT="18288" marB="18288">
+                    <a:solidFill>
+                      <a:srgbClr val="ECF1F6"/>
+                    </a:solidFill>
+                  </a:tcPr>
+                </a:tc>
+              </a:tr>
+              <a:tr h="468630">
+                <a:tc>
+                  <a:txBody>
+                    <a:bodyPr wrap="square"/>
+                    <a:lstStyle/>
+                    <a:p>
+                      <a:r>
+                        <a:rPr sz="1100" b="0">
+                          <a:solidFill>
+                            <a:srgbClr val="282828"/>
+                          </a:solidFill>
+                          <a:latin typeface="Arial"/>
+                        </a:rPr>
+                        <a:t>plate splitter</a:t>
+                      </a:r>
+                    </a:p>
+                  </a:txBody>
+                  <a:tcPr marL="54864" marR="54864" marT="18288" marB="18288">
+                    <a:solidFill>
+                      <a:srgbClr val="FFFFFF"/>
+                    </a:solidFill>
+                  </a:tcPr>
+                </a:tc>
+                <a:tc>
+                  <a:txBody>
+                    <a:bodyPr wrap="square"/>
+                    <a:lstStyle/>
+                    <a:p>
+                      <a:r>
+                        <a:rPr sz="1100" b="0">
+                          <a:solidFill>
+                            <a:srgbClr val="282828"/>
+                          </a:solidFill>
+                          <a:latin typeface="Arial"/>
+                        </a:rPr>
+                        <a:t>22.5° incidence (the record's 7° does not clear the node: next slide), 50/50; compensator matched; modeled 2.6 mm thick, to be 10 mm</a:t>
+                      </a:r>
+                    </a:p>
+                  </a:txBody>
+                  <a:tcPr marL="54864" marR="54864" marT="18288" marB="18288">
+                    <a:solidFill>
+                      <a:srgbClr val="FFFFFF"/>
+                    </a:solidFill>
+                  </a:tcPr>
+                </a:tc>
+              </a:tr>
+              <a:tr h="468630">
+                <a:tc>
+                  <a:txBody>
+                    <a:bodyPr wrap="square"/>
+                    <a:lstStyle/>
+                    <a:p>
+                      <a:r>
+                        <a:rPr sz="1100" b="0">
+                          <a:solidFill>
+                            <a:srgbClr val="282828"/>
+                          </a:solidFill>
+                          <a:latin typeface="Arial"/>
+                        </a:rPr>
+                        <a:t>deformable mirror</a:t>
+                      </a:r>
+                    </a:p>
+                  </a:txBody>
+                  <a:tcPr marL="54864" marR="54864" marT="18288" marB="18288">
+                    <a:solidFill>
+                      <a:srgbClr val="ECF1F6"/>
+                    </a:solidFill>
+                  </a:tcPr>
+                </a:tc>
+                <a:tc>
+                  <a:txBody>
+                    <a:bodyPr wrap="square"/>
+                    <a:lstStyle/>
+                    <a:p>
+                      <a:r>
+                        <a:rPr sz="1100" b="0">
+                          <a:solidFill>
+                            <a:srgbClr val="282828"/>
+                          </a:solidFill>
+                          <a:latin typeface="Arial"/>
+                        </a:rPr>
+                        <a:t>96×96, 1 mm pitch, 96 mm, 700 mm leg</a:t>
+                      </a:r>
+                    </a:p>
+                  </a:txBody>
+                  <a:tcPr marL="54864" marR="54864" marT="18288" marB="18288">
+                    <a:solidFill>
+                      <a:srgbClr val="ECF1F6"/>
+                    </a:solidFill>
+                  </a:tcPr>
+                </a:tc>
+              </a:tr>
+            </a:tbl>
+          </a:graphicData>
+        </a:graphic>
+      </p:graphicFrame>
+      <p:graphicFrame>
+        <p:nvGraphicFramePr>
+          <p:cNvPr id="7" name="Table 6"/>
+          <p:cNvGraphicFramePr>
+            <a:graphicFrameLocks noGrp="1"/>
+          </p:cNvGraphicFramePr>
+          <p:nvPr/>
+        </p:nvGraphicFramePr>
+        <p:xfrm>
+          <a:off x="6400800" y="4096511"/>
+          <a:ext cx="5394960" cy="1657350"/>
+        </p:xfrm>
+        <a:graphic>
+          <a:graphicData uri="http://schemas.openxmlformats.org/drawingml/2006/table">
+            <a:tbl>
+              <a:tblPr firstRow="1" bandRow="1">
+                <a:tableStyleId>{5C22544A-7EE6-4342-B048-85BDC9FD1C3A}</a:tableStyleId>
+              </a:tblPr>
+              <a:tblGrid>
+                <a:gridCol w="806704"/>
+                <a:gridCol w="4588256"/>
+              </a:tblGrid>
+              <a:tr h="262890">
+                <a:tc>
+                  <a:txBody>
+                    <a:bodyPr wrap="square"/>
+                    <a:lstStyle/>
+                    <a:p>
+                      <a:r>
+                        <a:rPr sz="1000" b="1">
+                          <a:solidFill>
+                            <a:srgbClr val="FFFFFF"/>
+                          </a:solidFill>
+                          <a:latin typeface="Arial"/>
+                        </a:rPr>
+                        <a:t>part</a:t>
+                      </a:r>
+                    </a:p>
+                  </a:txBody>
+                  <a:tcPr marL="54864" marR="54864" marT="18288" marB="18288">
+                    <a:solidFill>
+                      <a:srgbClr val="1F4E79"/>
+                    </a:solidFill>
+                  </a:tcPr>
+                </a:tc>
+                <a:tc>
+                  <a:txBody>
+                    <a:bodyPr wrap="square"/>
+                    <a:lstStyle/>
+                    <a:p>
+                      <a:r>
+                        <a:rPr sz="1000" b="1">
+                          <a:solidFill>
+                            <a:srgbClr val="FFFFFF"/>
+                          </a:solidFill>
+                          <a:latin typeface="Arial"/>
+                        </a:rPr>
+                        <a:t>value</a:t>
+                      </a:r>
+                    </a:p>
+                  </a:txBody>
+                  <a:tcPr marL="54864" marR="54864" marT="18288" marB="18288">
+                    <a:solidFill>
+                      <a:srgbClr val="1F4E79"/>
+                    </a:solidFill>
+                  </a:tcPr>
+                </a:tc>
+              </a:tr>
+              <a:tr h="434340">
+                <a:tc>
+                  <a:txBody>
+                    <a:bodyPr wrap="square"/>
+                    <a:lstStyle/>
+                    <a:p>
+                      <a:r>
+                        <a:rPr sz="1000" b="0">
+                          <a:solidFill>
+                            <a:srgbClr val="282828"/>
+                          </a:solidFill>
+                          <a:latin typeface="Arial"/>
+                        </a:rPr>
+                        <a:t>focuser L2</a:t>
+                      </a:r>
+                    </a:p>
+                  </a:txBody>
+                  <a:tcPr marL="54864" marR="54864" marT="18288" marB="18288">
+                    <a:solidFill>
+                      <a:srgbClr val="FFFFFF"/>
+                    </a:solidFill>
+                  </a:tcPr>
+                </a:tc>
+                <a:tc>
+                  <a:txBody>
+                    <a:bodyPr wrap="square"/>
+                    <a:lstStyle/>
+                    <a:p>
+                      <a:r>
+                        <a:rPr sz="1000" b="0">
+                          <a:solidFill>
+                            <a:srgbClr val="282828"/>
+                          </a:solidFill>
+                          <a:latin typeface="Arial"/>
+                        </a:rPr>
+                        <a:t>f 429 mm, 103 mm; internal focus at F/4.2; modeled 8 mm center, to be real</a:t>
+                      </a:r>
+                    </a:p>
+                  </a:txBody>
+                  <a:tcPr marL="54864" marR="54864" marT="18288" marB="18288">
+                    <a:solidFill>
+                      <a:srgbClr val="FFFFFF"/>
+                    </a:solidFill>
+                  </a:tcPr>
+                </a:tc>
+              </a:tr>
+              <a:tr h="262890">
+                <a:tc>
+                  <a:txBody>
+                    <a:bodyPr wrap="square"/>
+                    <a:lstStyle/>
+                    <a:p>
+                      <a:r>
+                        <a:rPr sz="1000" b="0">
+                          <a:solidFill>
+                            <a:srgbClr val="282828"/>
+                          </a:solidFill>
+                          <a:latin typeface="Arial"/>
+                        </a:rPr>
+                        <a:t>field lens</a:t>
+                      </a:r>
+                    </a:p>
+                  </a:txBody>
+                  <a:tcPr marL="54864" marR="54864" marT="18288" marB="18288">
+                    <a:solidFill>
+                      <a:srgbClr val="ECF1F6"/>
+                    </a:solidFill>
+                  </a:tcPr>
+                </a:tc>
+                <a:tc>
+                  <a:txBody>
+                    <a:bodyPr wrap="square"/>
+                    <a:lstStyle/>
+                    <a:p>
+                      <a:r>
+                        <a:rPr sz="1000" b="0">
+                          <a:solidFill>
+                            <a:srgbClr val="282828"/>
+                          </a:solidFill>
+                          <a:latin typeface="Arial"/>
+                        </a:rPr>
+                        <a:t>f 43 mm, 21 mm; pupil image 9.4 mm, 32 mm behind it</a:t>
+                      </a:r>
+                    </a:p>
+                  </a:txBody>
+                  <a:tcPr marL="54864" marR="54864" marT="18288" marB="18288">
+                    <a:solidFill>
+                      <a:srgbClr val="ECF1F6"/>
+                    </a:solidFill>
+                  </a:tcPr>
+                </a:tc>
+              </a:tr>
+              <a:tr h="434340">
+                <a:tc>
+                  <a:txBody>
+                    <a:bodyPr wrap="square"/>
+                    <a:lstStyle/>
+                    <a:p>
+                      <a:r>
+                        <a:rPr sz="1000" b="0">
+                          <a:solidFill>
+                            <a:srgbClr val="282828"/>
+                          </a:solidFill>
+                          <a:latin typeface="Arial"/>
+                        </a:rPr>
+                        <a:t>camera</a:t>
+                      </a:r>
+                    </a:p>
+                  </a:txBody>
+                  <a:tcPr marL="54864" marR="54864" marT="18288" marB="18288">
+                    <a:solidFill>
+                      <a:srgbClr val="FFFFFF"/>
+                    </a:solidFill>
+                  </a:tcPr>
+                </a:tc>
+                <a:tc>
+                  <a:txBody>
+                    <a:bodyPr wrap="square"/>
+                    <a:lstStyle/>
+                    <a:p>
+                      <a:r>
+                        <a:rPr sz="1000" b="0">
+                          <a:solidFill>
+                            <a:srgbClr val="282828"/>
+                          </a:solidFill>
+                          <a:latin typeface="Arial"/>
+                        </a:rPr>
+                        <a:t>pupil image 9.4 mm: a 6.5 µm sCMOS puts 1450 pixels across it, binned 4 to the modeled 385 (5 per actuator)</a:t>
+                      </a:r>
+                    </a:p>
+                  </a:txBody>
+                  <a:tcPr marL="54864" marR="54864" marT="18288" marB="18288">
+                    <a:solidFill>
+                      <a:srgbClr val="FFFFFF"/>
+                    </a:solidFill>
+                  </a:tcPr>
+                </a:tc>
+              </a:tr>
+              <a:tr h="262890">
+                <a:tc>
+                  <a:txBody>
+                    <a:bodyPr wrap="square"/>
+                    <a:lstStyle/>
+                    <a:p>
+                      <a:r>
+                        <a:rPr sz="1000" b="0">
+                          <a:solidFill>
+                            <a:srgbClr val="282828"/>
+                          </a:solidFill>
+                          <a:latin typeface="Arial"/>
+                        </a:rPr>
+                        <a:t>mask seat</a:t>
+                      </a:r>
+                    </a:p>
+                  </a:txBody>
+                  <a:tcPr marL="54864" marR="54864" marT="18288" marB="18288">
+                    <a:solidFill>
+                      <a:srgbClr val="ECF1F6"/>
+                    </a:solidFill>
+                  </a:tcPr>
+                </a:tc>
+                <a:tc>
+                  <a:txBody>
+                    <a:bodyPr wrap="square"/>
+                    <a:lstStyle/>
+                    <a:p>
+                      <a:r>
+                        <a:rPr sz="1000" b="0">
+                          <a:solidFill>
+                            <a:srgbClr val="282828"/>
+                          </a:solidFill>
+                          <a:latin typeface="Arial"/>
+                        </a:rPr>
+                        <a:t>one substrate at the internal focus, translated to select the sensor</a:t>
+                      </a:r>
+                    </a:p>
+                  </a:txBody>
+                  <a:tcPr marL="54864" marR="54864" marT="18288" marB="18288">
+                    <a:solidFill>
+                      <a:srgbClr val="ECF1F6"/>
+                    </a:solidFill>
+                  </a:tcPr>
+                </a:tc>
+              </a:tr>
+            </a:tbl>
+          </a:graphicData>
+        </a:graphic>
+      </p:graphicFrame>
+      <p:sp>
+        <p:nvSpPr>
+          <p:cNvPr id="8" name="TextBox 7"/>
+          <p:cNvSpPr txBox="1"/>
+          <p:nvPr/>
+        </p:nvSpPr>
+        <p:spPr>
+          <a:xfrm>
+            <a:off x="6400800" y="5900166"/>
+            <a:ext cx="5394960" cy="274320"/>
+          </a:xfrm>
+          <a:prstGeom prst="rect">
+            <a:avLst/>
+          </a:prstGeom>
+          <a:noFill/>
+        </p:spPr>
+        <p:txBody>
+          <a:bodyPr wrap="square">
+            <a:spAutoFit/>
+          </a:bodyPr>
+          <a:lstStyle/>
+          <a:p>
+            <a:pPr>
+              <a:spcAft>
+                <a:spcPts val="600"/>
+              </a:spcAft>
+            </a:pPr>
+            <a:r>
+              <a:rPr sz="1050" b="0">
+                <a:solidFill>
+                  <a:srgbClr val="6E6E6E"/>
+                </a:solidFill>
+                <a:latin typeface="Arial"/>
+              </a:rPr>
+              <a:t>The reference arm (a 103 mm flat on a piezo stage, 564 mm leg) is the interferometer's; shuttered, the same bench is every other sensor.  Lenses, not off-axis mirrors: the choice is priced on the lenses-versus-mirrors slide.  The drawings are to scale: the model's parts are the 56 mm rig's scaled up, thinner than 103 mm optics can be built; the next model round gives every part its real thickness.</a:t>
+            </a:r>
+          </a:p>
+        </p:txBody>
+      </p:sp>
+    </p:spTree>
+  </p:cSld>
+  <p:clrMapOvr>
+    <a:masterClrMapping/>
+  </p:clrMapOvr>
+</p:sld>
+</file>
+
+<file path=ppt/slides/slide30.xml><?xml version="1.0" encoding="utf-8"?>
 <p:sld xmlns:a="http://schemas.openxmlformats.org/drawingml/2006/main" xmlns:p="http://schemas.openxmlformats.org/presentationml/2006/main" xmlns:r="http://schemas.openxmlformats.org/officeDocument/2006/relationships">
   <p:cSld>
     <p:spTree>
@@ -15163,7 +16610,7 @@
 </p:sld>
 </file>
 
-<file path=ppt/slides/slide3.xml><?xml version="1.0" encoding="utf-8"?>
+<file path=ppt/slides/slide31.xml><?xml version="1.0" encoding="utf-8"?>
 <p:sld xmlns:a="http://schemas.openxmlformats.org/drawingml/2006/main" xmlns:p="http://schemas.openxmlformats.org/presentationml/2006/main" xmlns:r="http://schemas.openxmlformats.org/officeDocument/2006/relationships">
   <p:cSld>
     <p:spTree>
@@ -15207,7 +16654,7 @@
                 </a:solidFill>
                 <a:latin typeface="Arial"/>
               </a:rPr>
-              <a:t>One bench, four ways of sensing</a:t>
+              <a:t>Future work: capture beyond one wave with a second color</a:t>
             </a:r>
           </a:p>
           <a:p>
@@ -15223,7 +16670,7 @@
                 </a:solidFill>
                 <a:latin typeface="Arial"/>
               </a:rPr>
-              <a:t>Everything shares the front end: a filtered HeNe, a collimator, a plate splitter at 22.5°, a 700 mm leg to the mirror, a focuser to an internal focus, a field lens to a camera at the pupil image</a:t>
+              <a:t>Unwrapping works while neighboring pixels differ by less than half a wave; a figure of more than a wave with actuator-scale structure needs a coarse ruler</a:t>
             </a:r>
           </a:p>
         </p:txBody>
@@ -15272,40 +16719,16 @@
           </a:p>
         </p:txBody>
       </p:sp>
-      <p:pic>
-        <p:nvPicPr>
-          <p:cNvPr id="4" name="Picture 3" descr="crop_bench_bs22_train.png"/>
-          <p:cNvPicPr>
-            <a:picLocks noChangeAspect="1"/>
-          </p:cNvPicPr>
-          <p:nvPr/>
-        </p:nvPicPr>
-        <p:blipFill>
-          <a:blip r:embed="rId2"/>
-          <a:stretch>
-            <a:fillRect/>
-          </a:stretch>
-        </p:blipFill>
-        <p:spPr>
-          <a:xfrm>
-            <a:off x="4061668" y="1298448"/>
-            <a:ext cx="4068357" cy="2348992"/>
-          </a:xfrm>
-          <a:prstGeom prst="rect">
-            <a:avLst/>
-          </a:prstGeom>
-        </p:spPr>
-      </p:pic>
       <p:sp>
         <p:nvSpPr>
-          <p:cNvPr id="5" name="TextBox 4"/>
+          <p:cNvPr id="4" name="TextBox 3"/>
           <p:cNvSpPr txBox="1"/>
           <p:nvPr/>
         </p:nvSpPr>
         <p:spPr>
           <a:xfrm>
-            <a:off x="411480" y="3665727"/>
-            <a:ext cx="11368735" cy="394208"/>
+            <a:off x="411480" y="1298448"/>
+            <a:ext cx="5806440" cy="274320"/>
           </a:xfrm>
           <a:prstGeom prst="rect">
             <a:avLst/>
@@ -15318,34 +16741,66 @@
           </a:bodyPr>
           <a:lstStyle/>
           <a:p>
-            <a:pPr algn="ctr">
+            <a:pPr>
               <a:spcAft>
-                <a:spcPts val="0"/>
+                <a:spcPts val="600"/>
               </a:spcAft>
             </a:pPr>
             <a:r>
-              <a:rPr sz="1000" b="0">
+              <a:rPr sz="1200" b="0">
                 <a:solidFill>
-                  <a:srgbClr val="6E6E6E"/>
+                  <a:srgbClr val="282828"/>
                 </a:solidFill>
                 <a:latin typeface="Arial"/>
               </a:rPr>
-              <a:t>The shared front end as traced by the engine, seen from above, at the 22.5° splitter: source at left, collimator L1, the splitter, the 96 mm mirror on its 700 mm leg (blue), the reference arm and its flat (orange, the interferometer only), the focuser L2 toward the internal focus.  The mask seat at that focus is where the four sensing methods differ.</a:t>
+              <a:t>•  Where unwrapping stops: at 4 pixels per actuator a 100-200 nm rms actuator pattern is 0.7-1.4 rad per pixel and unwraps; quilting, print-through or a stuck actuator at more than a wave does not.</a:t>
+            </a:r>
+          </a:p>
+          <a:p>
+            <a:pPr>
+              <a:spcAft>
+                <a:spcPts val="600"/>
+              </a:spcAft>
+            </a:pPr>
+            <a:r>
+              <a:rPr sz="1200" b="0">
+                <a:solidFill>
+                  <a:srgbClr val="282828"/>
+                </a:solidFill>
+                <a:latin typeface="Arial"/>
+              </a:rPr>
+              <a:t>•  A second color makes a synthetic wavelength: 632.8 + 700 nm gives 6.6 µm, an unambiguous surface range of 1.6 µm (double pass); 632.8 + 780 nm gives 3.35 µm and 0.84 µm.  The coarse pair captures, the single color holds; the coarse solve is 5-10× noisier.</a:t>
+            </a:r>
+          </a:p>
+          <a:p>
+            <a:pPr>
+              <a:spcAft>
+                <a:spcPts val="600"/>
+              </a:spcAft>
+            </a:pPr>
+            <a:r>
+              <a:rPr sz="1200" b="0">
+                <a:solidFill>
+                  <a:srgbClr val="282828"/>
+                </a:solidFill>
+                <a:latin typeface="Arial"/>
+              </a:rPr>
+              <a:t>•  The machinery exists: the runner already traces one physical mask at five colors (the dimple is 1.57 rad at 632.8 nm, 1.42 at 700); the measurement to add is the start ladder with a two-color coarse solve feeding the single-color loop, per reading.</a:t>
             </a:r>
           </a:p>
         </p:txBody>
       </p:sp>
       <p:graphicFrame>
         <p:nvGraphicFramePr>
-          <p:cNvPr id="6" name="Table 5"/>
+          <p:cNvPr id="5" name="Table 4"/>
           <p:cNvGraphicFramePr>
             <a:graphicFrameLocks noGrp="1"/>
           </p:cNvGraphicFramePr>
           <p:nvPr/>
         </p:nvGraphicFramePr>
         <p:xfrm>
-          <a:off x="411480" y="4096511"/>
-          <a:ext cx="5806439" cy="1965960"/>
+          <a:off x="6400800" y="1298448"/>
+          <a:ext cx="5394959" cy="788670"/>
         </p:xfrm>
         <a:graphic>
           <a:graphicData uri="http://schemas.openxmlformats.org/drawingml/2006/table">
@@ -15354,264 +16809,10 @@
                 <a:tableStyleId>{5C22544A-7EE6-4342-B048-85BDC9FD1C3A}</a:tableStyleId>
               </a:tblPr>
               <a:tblGrid>
-                <a:gridCol w="662479"/>
-                <a:gridCol w="5143960"/>
-              </a:tblGrid>
-              <a:tr h="280035">
-                <a:tc>
-                  <a:txBody>
-                    <a:bodyPr wrap="square"/>
-                    <a:lstStyle/>
-                    <a:p>
-                      <a:r>
-                        <a:rPr sz="1100" b="1">
-                          <a:solidFill>
-                            <a:srgbClr val="FFFFFF"/>
-                          </a:solidFill>
-                          <a:latin typeface="Arial"/>
-                        </a:rPr>
-                        <a:t>part</a:t>
-                      </a:r>
-                    </a:p>
-                  </a:txBody>
-                  <a:tcPr marL="54864" marR="54864" marT="18288" marB="18288">
-                    <a:solidFill>
-                      <a:srgbClr val="1F4E79"/>
-                    </a:solidFill>
-                  </a:tcPr>
-                </a:tc>
-                <a:tc>
-                  <a:txBody>
-                    <a:bodyPr wrap="square"/>
-                    <a:lstStyle/>
-                    <a:p>
-                      <a:r>
-                        <a:rPr sz="1100" b="1">
-                          <a:solidFill>
-                            <a:srgbClr val="FFFFFF"/>
-                          </a:solidFill>
-                          <a:latin typeface="Arial"/>
-                        </a:rPr>
-                        <a:t>value</a:t>
-                      </a:r>
-                    </a:p>
-                  </a:txBody>
-                  <a:tcPr marL="54864" marR="54864" marT="18288" marB="18288">
-                    <a:solidFill>
-                      <a:srgbClr val="1F4E79"/>
-                    </a:solidFill>
-                  </a:tcPr>
-                </a:tc>
-              </a:tr>
-              <a:tr h="280035">
-                <a:tc>
-                  <a:txBody>
-                    <a:bodyPr wrap="square"/>
-                    <a:lstStyle/>
-                    <a:p>
-                      <a:r>
-                        <a:rPr sz="1100" b="0">
-                          <a:solidFill>
-                            <a:srgbClr val="282828"/>
-                          </a:solidFill>
-                          <a:latin typeface="Arial"/>
-                        </a:rPr>
-                        <a:t>source</a:t>
-                      </a:r>
-                    </a:p>
-                  </a:txBody>
-                  <a:tcPr marL="54864" marR="54864" marT="18288" marB="18288">
-                    <a:solidFill>
-                      <a:srgbClr val="FFFFFF"/>
-                    </a:solidFill>
-                  </a:tcPr>
-                </a:tc>
-                <a:tc>
-                  <a:txBody>
-                    <a:bodyPr wrap="square"/>
-                    <a:lstStyle/>
-                    <a:p>
-                      <a:r>
-                        <a:rPr sz="1100" b="0">
-                          <a:solidFill>
-                            <a:srgbClr val="282828"/>
-                          </a:solidFill>
-                          <a:latin typeface="Arial"/>
-                        </a:rPr>
-                        <a:t>HeNe 632.8 nm, filtered, 51 mm beam radius</a:t>
-                      </a:r>
-                    </a:p>
-                  </a:txBody>
-                  <a:tcPr marL="54864" marR="54864" marT="18288" marB="18288">
-                    <a:solidFill>
-                      <a:srgbClr val="FFFFFF"/>
-                    </a:solidFill>
-                  </a:tcPr>
-                </a:tc>
-              </a:tr>
-              <a:tr h="468630">
-                <a:tc>
-                  <a:txBody>
-                    <a:bodyPr wrap="square"/>
-                    <a:lstStyle/>
-                    <a:p>
-                      <a:r>
-                        <a:rPr sz="1100" b="0">
-                          <a:solidFill>
-                            <a:srgbClr val="282828"/>
-                          </a:solidFill>
-                          <a:latin typeface="Arial"/>
-                        </a:rPr>
-                        <a:t>collimator L1</a:t>
-                      </a:r>
-                    </a:p>
-                  </a:txBody>
-                  <a:tcPr marL="54864" marR="54864" marT="18288" marB="18288">
-                    <a:solidFill>
-                      <a:srgbClr val="ECF1F6"/>
-                    </a:solidFill>
-                  </a:tcPr>
-                </a:tc>
-                <a:tc>
-                  <a:txBody>
-                    <a:bodyPr wrap="square"/>
-                    <a:lstStyle/>
-                    <a:p>
-                      <a:r>
-                        <a:rPr sz="1100" b="0">
-                          <a:solidFill>
-                            <a:srgbClr val="282828"/>
-                          </a:solidFill>
-                          <a:latin typeface="Arial"/>
-                        </a:rPr>
-                        <a:t>f 857 mm, 103 mm, coated; modeled 5 mm center, 2 mm edge, to be a real 103 mm singlet</a:t>
-                      </a:r>
-                    </a:p>
-                  </a:txBody>
-                  <a:tcPr marL="54864" marR="54864" marT="18288" marB="18288">
-                    <a:solidFill>
-                      <a:srgbClr val="ECF1F6"/>
-                    </a:solidFill>
-                  </a:tcPr>
-                </a:tc>
-              </a:tr>
-              <a:tr h="468630">
-                <a:tc>
-                  <a:txBody>
-                    <a:bodyPr wrap="square"/>
-                    <a:lstStyle/>
-                    <a:p>
-                      <a:r>
-                        <a:rPr sz="1100" b="0">
-                          <a:solidFill>
-                            <a:srgbClr val="282828"/>
-                          </a:solidFill>
-                          <a:latin typeface="Arial"/>
-                        </a:rPr>
-                        <a:t>plate splitter</a:t>
-                      </a:r>
-                    </a:p>
-                  </a:txBody>
-                  <a:tcPr marL="54864" marR="54864" marT="18288" marB="18288">
-                    <a:solidFill>
-                      <a:srgbClr val="FFFFFF"/>
-                    </a:solidFill>
-                  </a:tcPr>
-                </a:tc>
-                <a:tc>
-                  <a:txBody>
-                    <a:bodyPr wrap="square"/>
-                    <a:lstStyle/>
-                    <a:p>
-                      <a:r>
-                        <a:rPr sz="1100" b="0">
-                          <a:solidFill>
-                            <a:srgbClr val="282828"/>
-                          </a:solidFill>
-                          <a:latin typeface="Arial"/>
-                        </a:rPr>
-                        <a:t>22.5° incidence (the record's 7° does not clear the node: next slide), 50/50; compensator matched; modeled 2.6 mm thick, to be 10 mm</a:t>
-                      </a:r>
-                    </a:p>
-                  </a:txBody>
-                  <a:tcPr marL="54864" marR="54864" marT="18288" marB="18288">
-                    <a:solidFill>
-                      <a:srgbClr val="FFFFFF"/>
-                    </a:solidFill>
-                  </a:tcPr>
-                </a:tc>
-              </a:tr>
-              <a:tr h="468630">
-                <a:tc>
-                  <a:txBody>
-                    <a:bodyPr wrap="square"/>
-                    <a:lstStyle/>
-                    <a:p>
-                      <a:r>
-                        <a:rPr sz="1100" b="0">
-                          <a:solidFill>
-                            <a:srgbClr val="282828"/>
-                          </a:solidFill>
-                          <a:latin typeface="Arial"/>
-                        </a:rPr>
-                        <a:t>deformable mirror</a:t>
-                      </a:r>
-                    </a:p>
-                  </a:txBody>
-                  <a:tcPr marL="54864" marR="54864" marT="18288" marB="18288">
-                    <a:solidFill>
-                      <a:srgbClr val="ECF1F6"/>
-                    </a:solidFill>
-                  </a:tcPr>
-                </a:tc>
-                <a:tc>
-                  <a:txBody>
-                    <a:bodyPr wrap="square"/>
-                    <a:lstStyle/>
-                    <a:p>
-                      <a:r>
-                        <a:rPr sz="1100" b="0">
-                          <a:solidFill>
-                            <a:srgbClr val="282828"/>
-                          </a:solidFill>
-                          <a:latin typeface="Arial"/>
-                        </a:rPr>
-                        <a:t>96×96, 1 mm pitch, 96 mm, 700 mm leg</a:t>
-                      </a:r>
-                    </a:p>
-                  </a:txBody>
-                  <a:tcPr marL="54864" marR="54864" marT="18288" marB="18288">
-                    <a:solidFill>
-                      <a:srgbClr val="ECF1F6"/>
-                    </a:solidFill>
-                  </a:tcPr>
-                </a:tc>
-              </a:tr>
-            </a:tbl>
-          </a:graphicData>
-        </a:graphic>
-      </p:graphicFrame>
-      <p:graphicFrame>
-        <p:nvGraphicFramePr>
-          <p:cNvPr id="7" name="Table 6"/>
-          <p:cNvGraphicFramePr>
-            <a:graphicFrameLocks noGrp="1"/>
-          </p:cNvGraphicFramePr>
-          <p:nvPr/>
-        </p:nvGraphicFramePr>
-        <p:xfrm>
-          <a:off x="6400800" y="4096511"/>
-          <a:ext cx="5394960" cy="1657350"/>
-        </p:xfrm>
-        <a:graphic>
-          <a:graphicData uri="http://schemas.openxmlformats.org/drawingml/2006/table">
-            <a:tbl>
-              <a:tblPr firstRow="1" bandRow="1">
-                <a:tableStyleId>{5C22544A-7EE6-4342-B048-85BDC9FD1C3A}</a:tableStyleId>
-              </a:tblPr>
-              <a:tblGrid>
+                <a:gridCol w="1070864"/>
+                <a:gridCol w="1803790"/>
+                <a:gridCol w="1713601"/>
                 <a:gridCol w="806704"/>
-                <a:gridCol w="4588256"/>
               </a:tblGrid>
               <a:tr h="262890">
                 <a:tc>
@@ -15626,7 +16827,7 @@
                           </a:solidFill>
                           <a:latin typeface="Arial"/>
                         </a:rPr>
-                        <a:t>part</a:t>
+                        <a:t>color pair</a:t>
                       </a:r>
                     </a:p>
                   </a:txBody>
@@ -15648,7 +16849,7 @@
                           </a:solidFill>
                           <a:latin typeface="Arial"/>
                         </a:rPr>
-                        <a:t>value</a:t>
+                        <a:t>synthetic wavelength</a:t>
                       </a:r>
                     </a:p>
                   </a:txBody>
@@ -15658,49 +16859,47 @@
                     </a:solidFill>
                   </a:tcPr>
                 </a:tc>
-              </a:tr>
-              <a:tr h="434340">
-                <a:tc>
-                  <a:txBody>
-                    <a:bodyPr wrap="square"/>
-                    <a:lstStyle/>
-                    <a:p>
-                      <a:r>
-                        <a:rPr sz="1000" b="0">
-                          <a:solidFill>
-                            <a:srgbClr val="282828"/>
-                          </a:solidFill>
-                          <a:latin typeface="Arial"/>
-                        </a:rPr>
-                        <a:t>focuser L2</a:t>
-                      </a:r>
-                    </a:p>
-                  </a:txBody>
-                  <a:tcPr marL="54864" marR="54864" marT="18288" marB="18288">
-                    <a:solidFill>
-                      <a:srgbClr val="FFFFFF"/>
-                    </a:solidFill>
-                  </a:tcPr>
-                </a:tc>
-                <a:tc>
-                  <a:txBody>
-                    <a:bodyPr wrap="square"/>
-                    <a:lstStyle/>
-                    <a:p>
-                      <a:r>
-                        <a:rPr sz="1000" b="0">
-                          <a:solidFill>
-                            <a:srgbClr val="282828"/>
-                          </a:solidFill>
-                          <a:latin typeface="Arial"/>
-                        </a:rPr>
-                        <a:t>f 429 mm, 103 mm; internal focus at F/4.2; modeled 8 mm center, to be real</a:t>
-                      </a:r>
-                    </a:p>
-                  </a:txBody>
-                  <a:tcPr marL="54864" marR="54864" marT="18288" marB="18288">
-                    <a:solidFill>
-                      <a:srgbClr val="FFFFFF"/>
+                <a:tc>
+                  <a:txBody>
+                    <a:bodyPr wrap="square"/>
+                    <a:lstStyle/>
+                    <a:p>
+                      <a:r>
+                        <a:rPr sz="1000" b="1">
+                          <a:solidFill>
+                            <a:srgbClr val="FFFFFF"/>
+                          </a:solidFill>
+                          <a:latin typeface="Arial"/>
+                        </a:rPr>
+                        <a:t>unambiguous surface</a:t>
+                      </a:r>
+                    </a:p>
+                  </a:txBody>
+                  <a:tcPr marL="54864" marR="54864" marT="18288" marB="18288">
+                    <a:solidFill>
+                      <a:srgbClr val="1F4E79"/>
+                    </a:solidFill>
+                  </a:tcPr>
+                </a:tc>
+                <a:tc>
+                  <a:txBody>
+                    <a:bodyPr wrap="square"/>
+                    <a:lstStyle/>
+                    <a:p>
+                      <a:r>
+                        <a:rPr sz="1000" b="1">
+                          <a:solidFill>
+                            <a:srgbClr val="FFFFFF"/>
+                          </a:solidFill>
+                          <a:latin typeface="Arial"/>
+                        </a:rPr>
+                        <a:t>noise cost</a:t>
+                      </a:r>
+                    </a:p>
+                  </a:txBody>
+                  <a:tcPr marL="54864" marR="54864" marT="18288" marB="18288">
+                    <a:solidFill>
+                      <a:srgbClr val="1F4E79"/>
                     </a:solidFill>
                   </a:tcPr>
                 </a:tc>
@@ -15718,13 +16917,13 @@
                           </a:solidFill>
                           <a:latin typeface="Arial"/>
                         </a:rPr>
-                        <a:t>field lens</a:t>
-                      </a:r>
-                    </a:p>
-                  </a:txBody>
-                  <a:tcPr marL="54864" marR="54864" marT="18288" marB="18288">
-                    <a:solidFill>
-                      <a:srgbClr val="ECF1F6"/>
+                        <a:t>632.8 + 700 nm</a:t>
+                      </a:r>
+                    </a:p>
+                  </a:txBody>
+                  <a:tcPr marL="54864" marR="54864" marT="18288" marB="18288">
+                    <a:solidFill>
+                      <a:srgbClr val="FFFFFF"/>
                     </a:solidFill>
                   </a:tcPr>
                 </a:tc>
@@ -15740,18 +16939,16 @@
                           </a:solidFill>
                           <a:latin typeface="Arial"/>
                         </a:rPr>
-                        <a:t>f 43 mm, 21 mm; pupil image 9.4 mm, 32 mm behind it</a:t>
-                      </a:r>
-                    </a:p>
-                  </a:txBody>
-                  <a:tcPr marL="54864" marR="54864" marT="18288" marB="18288">
-                    <a:solidFill>
-                      <a:srgbClr val="ECF1F6"/>
-                    </a:solidFill>
-                  </a:tcPr>
-                </a:tc>
-              </a:tr>
-              <a:tr h="434340">
+                        <a:t>6.6 µm</a:t>
+                      </a:r>
+                    </a:p>
+                  </a:txBody>
+                  <a:tcPr marL="54864" marR="54864" marT="18288" marB="18288">
+                    <a:solidFill>
+                      <a:srgbClr val="FFFFFF"/>
+                    </a:solidFill>
+                  </a:tcPr>
+                </a:tc>
                 <a:tc>
                   <a:txBody>
                     <a:bodyPr wrap="square"/>
@@ -15764,7 +16961,7 @@
                           </a:solidFill>
                           <a:latin typeface="Arial"/>
                         </a:rPr>
-                        <a:t>camera</a:t>
+                        <a:t>1.6 µm</a:t>
                       </a:r>
                     </a:p>
                   </a:txBody>
@@ -15786,7 +16983,7 @@
                           </a:solidFill>
                           <a:latin typeface="Arial"/>
                         </a:rPr>
-                        <a:t>pupil image 9.4 mm: a 6.5 µm sCMOS puts 1450 pixels across it, binned 4 to the modeled 385 (5 per actuator)</a:t>
+                        <a:t>10×</a:t>
                       </a:r>
                     </a:p>
                   </a:txBody>
@@ -15810,7 +17007,7 @@
                           </a:solidFill>
                           <a:latin typeface="Arial"/>
                         </a:rPr>
-                        <a:t>mask seat</a:t>
+                        <a:t>632.8 + 780 nm</a:t>
                       </a:r>
                     </a:p>
                   </a:txBody>
@@ -15832,7 +17029,51 @@
                           </a:solidFill>
                           <a:latin typeface="Arial"/>
                         </a:rPr>
-                        <a:t>one substrate at the internal focus, translated to select the sensor</a:t>
+                        <a:t>3.35 µm</a:t>
+                      </a:r>
+                    </a:p>
+                  </a:txBody>
+                  <a:tcPr marL="54864" marR="54864" marT="18288" marB="18288">
+                    <a:solidFill>
+                      <a:srgbClr val="ECF1F6"/>
+                    </a:solidFill>
+                  </a:tcPr>
+                </a:tc>
+                <a:tc>
+                  <a:txBody>
+                    <a:bodyPr wrap="square"/>
+                    <a:lstStyle/>
+                    <a:p>
+                      <a:r>
+                        <a:rPr sz="1000" b="0">
+                          <a:solidFill>
+                            <a:srgbClr val="282828"/>
+                          </a:solidFill>
+                          <a:latin typeface="Arial"/>
+                        </a:rPr>
+                        <a:t>0.84 µm</a:t>
+                      </a:r>
+                    </a:p>
+                  </a:txBody>
+                  <a:tcPr marL="54864" marR="54864" marT="18288" marB="18288">
+                    <a:solidFill>
+                      <a:srgbClr val="ECF1F6"/>
+                    </a:solidFill>
+                  </a:tcPr>
+                </a:tc>
+                <a:tc>
+                  <a:txBody>
+                    <a:bodyPr wrap="square"/>
+                    <a:lstStyle/>
+                    <a:p>
+                      <a:r>
+                        <a:rPr sz="1000" b="0">
+                          <a:solidFill>
+                            <a:srgbClr val="282828"/>
+                          </a:solidFill>
+                          <a:latin typeface="Arial"/>
+                        </a:rPr>
+                        <a:t>5×</a:t>
                       </a:r>
                     </a:p>
                   </a:txBody>
@@ -15849,13 +17090,13 @@
       </p:graphicFrame>
       <p:sp>
         <p:nvSpPr>
-          <p:cNvPr id="8" name="TextBox 7"/>
+          <p:cNvPr id="6" name="TextBox 5"/>
           <p:cNvSpPr txBox="1"/>
           <p:nvPr/>
         </p:nvSpPr>
         <p:spPr>
           <a:xfrm>
-            <a:off x="6400800" y="5900166"/>
+            <a:off x="6400800" y="2233422"/>
             <a:ext cx="5394960" cy="274320"/>
           </a:xfrm>
           <a:prstGeom prst="rect">
@@ -15881,7 +17122,7 @@
                 </a:solidFill>
                 <a:latin typeface="Arial"/>
               </a:rPr>
-              <a:t>The reference arm (a 103 mm flat on a piezo stage, 564 mm leg) is the interferometer's; shuttered, the same bench is every other sensor.  Lenses, not off-axis mirrors: the choice is priced on the lenses-versus-mirrors slide.  The drawings are to scale: the model's parts are the 56 mm rig's scaled up, thinner than 103 mm optics can be built; the next model round gives every part its real thickness.</a:t>
+              <a:t>The two-color interferometer is the classic form; the same trick applies to the dimple and the pinhole through their color stage.</a:t>
             </a:r>
           </a:p>
         </p:txBody>
@@ -15894,7 +17135,7 @@
 </p:sld>
 </file>
 
-<file path=ppt/slides/slide30.xml><?xml version="1.0" encoding="utf-8"?>
+<file path=ppt/slides/slide32.xml><?xml version="1.0" encoding="utf-8"?>
 <p:sld xmlns:a="http://schemas.openxmlformats.org/drawingml/2006/main" xmlns:p="http://schemas.openxmlformats.org/presentationml/2006/main" xmlns:r="http://schemas.openxmlformats.org/officeDocument/2006/relationships">
   <p:cSld>
     <p:spTree>
@@ -15938,7 +17179,7 @@
                 </a:solidFill>
                 <a:latin typeface="Arial"/>
               </a:rPr>
-              <a:t>Future work: capture beyond one wave with a second color</a:t>
+              <a:t>Future work: other approaches worth a look</a:t>
             </a:r>
           </a:p>
           <a:p>
@@ -15954,7 +17195,7 @@
                 </a:solidFill>
                 <a:latin typeface="Arial"/>
               </a:rPr>
-              <a:t>Unwrapping works while neighboring pixels differ by less than half a wave; a figure of more than a wave with actuator-scale structure needs a coarse ruler</a:t>
+              <a:t>Seven candidates, none modeled here, each with one sentence on what it would buy</a:t>
             </a:r>
           </a:p>
         </p:txBody>
@@ -16012,7 +17253,7 @@
         <p:spPr>
           <a:xfrm>
             <a:off x="411480" y="1298448"/>
-            <a:ext cx="5806440" cy="274320"/>
+            <a:ext cx="11368735" cy="274320"/>
           </a:xfrm>
           <a:prstGeom prst="rect">
             <a:avLst/>
@@ -16031,13 +17272,13 @@
               </a:spcAft>
             </a:pPr>
             <a:r>
-              <a:rPr sz="1200" b="0">
+              <a:rPr sz="1500" b="0">
                 <a:solidFill>
                   <a:srgbClr val="282828"/>
                 </a:solidFill>
                 <a:latin typeface="Arial"/>
               </a:rPr>
-              <a:t>•  Where unwrapping stops: at 4 pixels per actuator a 100-200 nm rms actuator pattern is 0.7-1.4 rad per pixel and unwraps; quilting, print-through or a stuck actuator at more than a wave does not.</a:t>
+              <a:t>•  Shack-Hartmann or modulated pyramid as the capture stage: many waves of range, no wrap, far from picometers; hands off to the gauge inside its range.</a:t>
             </a:r>
           </a:p>
           <a:p>
@@ -16047,13 +17288,13 @@
               </a:spcAft>
             </a:pPr>
             <a:r>
-              <a:rPr sz="1200" b="0">
+              <a:rPr sz="1500" b="0">
                 <a:solidFill>
                   <a:srgbClr val="282828"/>
                 </a:solidFill>
                 <a:latin typeface="Arial"/>
               </a:rPr>
-              <a:t>•  A second color makes a synthetic wavelength: 632.8 + 700 nm gives 6.6 µm, an unambiguous surface range of 1.6 µm (double pass); 632.8 + 780 nm gives 3.35 µm and 0.84 µm.  The coarse pair captures, the single color holds; the coarse solve is 5-10× noisier.</a:t>
+              <a:t>•  Phase diversity (two defocused pupil images): wide range, common path, iterative; a capture candidate with the existing camera and one translation stage.</a:t>
             </a:r>
           </a:p>
           <a:p>
@@ -16063,336 +17304,15 @@
               </a:spcAft>
             </a:pPr>
             <a:r>
-              <a:rPr sz="1200" b="0">
+              <a:rPr sz="1500" b="0">
                 <a:solidFill>
                   <a:srgbClr val="282828"/>
                 </a:solidFill>
                 <a:latin typeface="Arial"/>
               </a:rPr>
-              <a:t>•  The machinery exists: the runner already traces one physical mask at five colors (the dimple is 1.57 rad at 632.8 nm, 1.42 at 700); the measurement to add is the start ladder with a two-color coarse solve feeding the single-color loop, per reading.</a:t>
+              <a:t>•  White-light scanning in the interferometer: an absolute surface with no wrap, slow; a one-time capture tool.</a:t>
             </a:r>
           </a:p>
-        </p:txBody>
-      </p:sp>
-      <p:graphicFrame>
-        <p:nvGraphicFramePr>
-          <p:cNvPr id="5" name="Table 4"/>
-          <p:cNvGraphicFramePr>
-            <a:graphicFrameLocks noGrp="1"/>
-          </p:cNvGraphicFramePr>
-          <p:nvPr/>
-        </p:nvGraphicFramePr>
-        <p:xfrm>
-          <a:off x="6400800" y="1298448"/>
-          <a:ext cx="5394959" cy="788670"/>
-        </p:xfrm>
-        <a:graphic>
-          <a:graphicData uri="http://schemas.openxmlformats.org/drawingml/2006/table">
-            <a:tbl>
-              <a:tblPr firstRow="1" bandRow="1">
-                <a:tableStyleId>{5C22544A-7EE6-4342-B048-85BDC9FD1C3A}</a:tableStyleId>
-              </a:tblPr>
-              <a:tblGrid>
-                <a:gridCol w="1070864"/>
-                <a:gridCol w="1803790"/>
-                <a:gridCol w="1713601"/>
-                <a:gridCol w="806704"/>
-              </a:tblGrid>
-              <a:tr h="262890">
-                <a:tc>
-                  <a:txBody>
-                    <a:bodyPr wrap="square"/>
-                    <a:lstStyle/>
-                    <a:p>
-                      <a:r>
-                        <a:rPr sz="1000" b="1">
-                          <a:solidFill>
-                            <a:srgbClr val="FFFFFF"/>
-                          </a:solidFill>
-                          <a:latin typeface="Arial"/>
-                        </a:rPr>
-                        <a:t>color pair</a:t>
-                      </a:r>
-                    </a:p>
-                  </a:txBody>
-                  <a:tcPr marL="54864" marR="54864" marT="18288" marB="18288">
-                    <a:solidFill>
-                      <a:srgbClr val="1F4E79"/>
-                    </a:solidFill>
-                  </a:tcPr>
-                </a:tc>
-                <a:tc>
-                  <a:txBody>
-                    <a:bodyPr wrap="square"/>
-                    <a:lstStyle/>
-                    <a:p>
-                      <a:r>
-                        <a:rPr sz="1000" b="1">
-                          <a:solidFill>
-                            <a:srgbClr val="FFFFFF"/>
-                          </a:solidFill>
-                          <a:latin typeface="Arial"/>
-                        </a:rPr>
-                        <a:t>synthetic wavelength</a:t>
-                      </a:r>
-                    </a:p>
-                  </a:txBody>
-                  <a:tcPr marL="54864" marR="54864" marT="18288" marB="18288">
-                    <a:solidFill>
-                      <a:srgbClr val="1F4E79"/>
-                    </a:solidFill>
-                  </a:tcPr>
-                </a:tc>
-                <a:tc>
-                  <a:txBody>
-                    <a:bodyPr wrap="square"/>
-                    <a:lstStyle/>
-                    <a:p>
-                      <a:r>
-                        <a:rPr sz="1000" b="1">
-                          <a:solidFill>
-                            <a:srgbClr val="FFFFFF"/>
-                          </a:solidFill>
-                          <a:latin typeface="Arial"/>
-                        </a:rPr>
-                        <a:t>unambiguous surface</a:t>
-                      </a:r>
-                    </a:p>
-                  </a:txBody>
-                  <a:tcPr marL="54864" marR="54864" marT="18288" marB="18288">
-                    <a:solidFill>
-                      <a:srgbClr val="1F4E79"/>
-                    </a:solidFill>
-                  </a:tcPr>
-                </a:tc>
-                <a:tc>
-                  <a:txBody>
-                    <a:bodyPr wrap="square"/>
-                    <a:lstStyle/>
-                    <a:p>
-                      <a:r>
-                        <a:rPr sz="1000" b="1">
-                          <a:solidFill>
-                            <a:srgbClr val="FFFFFF"/>
-                          </a:solidFill>
-                          <a:latin typeface="Arial"/>
-                        </a:rPr>
-                        <a:t>noise cost</a:t>
-                      </a:r>
-                    </a:p>
-                  </a:txBody>
-                  <a:tcPr marL="54864" marR="54864" marT="18288" marB="18288">
-                    <a:solidFill>
-                      <a:srgbClr val="1F4E79"/>
-                    </a:solidFill>
-                  </a:tcPr>
-                </a:tc>
-              </a:tr>
-              <a:tr h="262890">
-                <a:tc>
-                  <a:txBody>
-                    <a:bodyPr wrap="square"/>
-                    <a:lstStyle/>
-                    <a:p>
-                      <a:r>
-                        <a:rPr sz="1000" b="0">
-                          <a:solidFill>
-                            <a:srgbClr val="282828"/>
-                          </a:solidFill>
-                          <a:latin typeface="Arial"/>
-                        </a:rPr>
-                        <a:t>632.8 + 700 nm</a:t>
-                      </a:r>
-                    </a:p>
-                  </a:txBody>
-                  <a:tcPr marL="54864" marR="54864" marT="18288" marB="18288">
-                    <a:solidFill>
-                      <a:srgbClr val="FFFFFF"/>
-                    </a:solidFill>
-                  </a:tcPr>
-                </a:tc>
-                <a:tc>
-                  <a:txBody>
-                    <a:bodyPr wrap="square"/>
-                    <a:lstStyle/>
-                    <a:p>
-                      <a:r>
-                        <a:rPr sz="1000" b="0">
-                          <a:solidFill>
-                            <a:srgbClr val="282828"/>
-                          </a:solidFill>
-                          <a:latin typeface="Arial"/>
-                        </a:rPr>
-                        <a:t>6.6 µm</a:t>
-                      </a:r>
-                    </a:p>
-                  </a:txBody>
-                  <a:tcPr marL="54864" marR="54864" marT="18288" marB="18288">
-                    <a:solidFill>
-                      <a:srgbClr val="FFFFFF"/>
-                    </a:solidFill>
-                  </a:tcPr>
-                </a:tc>
-                <a:tc>
-                  <a:txBody>
-                    <a:bodyPr wrap="square"/>
-                    <a:lstStyle/>
-                    <a:p>
-                      <a:r>
-                        <a:rPr sz="1000" b="0">
-                          <a:solidFill>
-                            <a:srgbClr val="282828"/>
-                          </a:solidFill>
-                          <a:latin typeface="Arial"/>
-                        </a:rPr>
-                        <a:t>1.6 µm</a:t>
-                      </a:r>
-                    </a:p>
-                  </a:txBody>
-                  <a:tcPr marL="54864" marR="54864" marT="18288" marB="18288">
-                    <a:solidFill>
-                      <a:srgbClr val="FFFFFF"/>
-                    </a:solidFill>
-                  </a:tcPr>
-                </a:tc>
-                <a:tc>
-                  <a:txBody>
-                    <a:bodyPr wrap="square"/>
-                    <a:lstStyle/>
-                    <a:p>
-                      <a:r>
-                        <a:rPr sz="1000" b="0">
-                          <a:solidFill>
-                            <a:srgbClr val="282828"/>
-                          </a:solidFill>
-                          <a:latin typeface="Arial"/>
-                        </a:rPr>
-                        <a:t>10×</a:t>
-                      </a:r>
-                    </a:p>
-                  </a:txBody>
-                  <a:tcPr marL="54864" marR="54864" marT="18288" marB="18288">
-                    <a:solidFill>
-                      <a:srgbClr val="FFFFFF"/>
-                    </a:solidFill>
-                  </a:tcPr>
-                </a:tc>
-              </a:tr>
-              <a:tr h="262890">
-                <a:tc>
-                  <a:txBody>
-                    <a:bodyPr wrap="square"/>
-                    <a:lstStyle/>
-                    <a:p>
-                      <a:r>
-                        <a:rPr sz="1000" b="0">
-                          <a:solidFill>
-                            <a:srgbClr val="282828"/>
-                          </a:solidFill>
-                          <a:latin typeface="Arial"/>
-                        </a:rPr>
-                        <a:t>632.8 + 780 nm</a:t>
-                      </a:r>
-                    </a:p>
-                  </a:txBody>
-                  <a:tcPr marL="54864" marR="54864" marT="18288" marB="18288">
-                    <a:solidFill>
-                      <a:srgbClr val="ECF1F6"/>
-                    </a:solidFill>
-                  </a:tcPr>
-                </a:tc>
-                <a:tc>
-                  <a:txBody>
-                    <a:bodyPr wrap="square"/>
-                    <a:lstStyle/>
-                    <a:p>
-                      <a:r>
-                        <a:rPr sz="1000" b="0">
-                          <a:solidFill>
-                            <a:srgbClr val="282828"/>
-                          </a:solidFill>
-                          <a:latin typeface="Arial"/>
-                        </a:rPr>
-                        <a:t>3.35 µm</a:t>
-                      </a:r>
-                    </a:p>
-                  </a:txBody>
-                  <a:tcPr marL="54864" marR="54864" marT="18288" marB="18288">
-                    <a:solidFill>
-                      <a:srgbClr val="ECF1F6"/>
-                    </a:solidFill>
-                  </a:tcPr>
-                </a:tc>
-                <a:tc>
-                  <a:txBody>
-                    <a:bodyPr wrap="square"/>
-                    <a:lstStyle/>
-                    <a:p>
-                      <a:r>
-                        <a:rPr sz="1000" b="0">
-                          <a:solidFill>
-                            <a:srgbClr val="282828"/>
-                          </a:solidFill>
-                          <a:latin typeface="Arial"/>
-                        </a:rPr>
-                        <a:t>0.84 µm</a:t>
-                      </a:r>
-                    </a:p>
-                  </a:txBody>
-                  <a:tcPr marL="54864" marR="54864" marT="18288" marB="18288">
-                    <a:solidFill>
-                      <a:srgbClr val="ECF1F6"/>
-                    </a:solidFill>
-                  </a:tcPr>
-                </a:tc>
-                <a:tc>
-                  <a:txBody>
-                    <a:bodyPr wrap="square"/>
-                    <a:lstStyle/>
-                    <a:p>
-                      <a:r>
-                        <a:rPr sz="1000" b="0">
-                          <a:solidFill>
-                            <a:srgbClr val="282828"/>
-                          </a:solidFill>
-                          <a:latin typeface="Arial"/>
-                        </a:rPr>
-                        <a:t>5×</a:t>
-                      </a:r>
-                    </a:p>
-                  </a:txBody>
-                  <a:tcPr marL="54864" marR="54864" marT="18288" marB="18288">
-                    <a:solidFill>
-                      <a:srgbClr val="ECF1F6"/>
-                    </a:solidFill>
-                  </a:tcPr>
-                </a:tc>
-              </a:tr>
-            </a:tbl>
-          </a:graphicData>
-        </a:graphic>
-      </p:graphicFrame>
-      <p:sp>
-        <p:nvSpPr>
-          <p:cNvPr id="6" name="TextBox 5"/>
-          <p:cNvSpPr txBox="1"/>
-          <p:nvPr/>
-        </p:nvSpPr>
-        <p:spPr>
-          <a:xfrm>
-            <a:off x="6400800" y="2233422"/>
-            <a:ext cx="5394960" cy="274320"/>
-          </a:xfrm>
-          <a:prstGeom prst="rect">
-            <a:avLst/>
-          </a:prstGeom>
-          <a:noFill/>
-        </p:spPr>
-        <p:txBody>
-          <a:bodyPr wrap="square">
-            <a:spAutoFit/>
-          </a:bodyPr>
-          <a:lstStyle/>
           <a:p>
             <a:pPr>
               <a:spcAft>
@@ -16400,13 +17320,61 @@
               </a:spcAft>
             </a:pPr>
             <a:r>
-              <a:rPr sz="1050" b="0">
+              <a:rPr sz="1500" b="0">
                 <a:solidFill>
-                  <a:srgbClr val="6E6E6E"/>
+                  <a:srgbClr val="282828"/>
                 </a:solidFill>
                 <a:latin typeface="Arial"/>
               </a:rPr>
-              <a:t>The two-color interferometer is the classic form; the same trick applies to the dimple and the pinhole through their color stage.</a:t>
+              <a:t>•  A model-based large-figure solve: the mirror's influence functions as the basis of a nonlinear fit to the sensor's frames; the estimator already carries the basis.</a:t>
+            </a:r>
+          </a:p>
+          <a:p>
+            <a:pPr>
+              <a:spcAft>
+                <a:spcPts val="600"/>
+              </a:spcAft>
+            </a:pPr>
+            <a:r>
+              <a:rPr sz="1500" b="0">
+                <a:solidFill>
+                  <a:srgbClr val="282828"/>
+                </a:solidFill>
+                <a:latin typeface="Arial"/>
+              </a:rPr>
+              <a:t>•  Vector Zernike with a polarization camera: one camera instead of the cube and two, at a quarter of the pixels per image.</a:t>
+            </a:r>
+          </a:p>
+          <a:p>
+            <a:pPr>
+              <a:spcAft>
+                <a:spcPts val="600"/>
+              </a:spcAft>
+            </a:pPr>
+            <a:r>
+              <a:rPr sz="1500" b="0">
+                <a:solidFill>
+                  <a:srgbClr val="282828"/>
+                </a:solidFill>
+                <a:latin typeface="Arial"/>
+              </a:rPr>
+              <a:t>•  Heterodyne or lock-in detection: immunity to slow drift and 1/f electronics, for a frequency-shifted reference; the two-arm instruments can carry it, the common-path sensors cannot.</a:t>
+            </a:r>
+          </a:p>
+          <a:p>
+            <a:pPr>
+              <a:spcAft>
+                <a:spcPts val="600"/>
+              </a:spcAft>
+            </a:pPr>
+            <a:r>
+              <a:rPr sz="1500" b="0">
+                <a:solidFill>
+                  <a:srgbClr val="282828"/>
+                </a:solidFill>
+                <a:latin typeface="Arial"/>
+              </a:rPr>
+              <a:t>•  Direct actuator metrology (capacitive, optical): a coarse reference the optical gauge is calibrated against.</a:t>
             </a:r>
           </a:p>
         </p:txBody>
@@ -16419,7 +17387,7 @@
 </p:sld>
 </file>
 
-<file path=ppt/slides/slide31.xml><?xml version="1.0" encoding="utf-8"?>
+<file path=ppt/slides/slide33.xml><?xml version="1.0" encoding="utf-8"?>
 <p:sld xmlns:a="http://schemas.openxmlformats.org/drawingml/2006/main" xmlns:p="http://schemas.openxmlformats.org/presentationml/2006/main" xmlns:r="http://schemas.openxmlformats.org/officeDocument/2006/relationships">
   <p:cSld>
     <p:spTree>
@@ -16463,7 +17431,7 @@
                 </a:solidFill>
                 <a:latin typeface="Arial"/>
               </a:rPr>
-              <a:t>Future work: other approaches worth a look</a:t>
+              <a:t>Future work: from this model to as-built performance</a:t>
             </a:r>
           </a:p>
           <a:p>
@@ -16479,7 +17447,7 @@
                 </a:solidFill>
                 <a:latin typeface="Arial"/>
               </a:rPr>
-              <a:t>Seven candidates, none modeled here, each with one sentence on what it would buy</a:t>
+              <a:t>The model today has ideal optics, a perfect camera, photon noise, and mirror and camera drift; five additions, in the order they are likely to matter</a:t>
             </a:r>
           </a:p>
         </p:txBody>
@@ -16562,7 +17530,7 @@
                 </a:solidFill>
                 <a:latin typeface="Arial"/>
               </a:rPr>
-              <a:t>•  Shack-Hartmann or modulated pyramid as the capture stage: many waves of range, no wrap, far from picometers; hands off to the gauge inside its range.</a:t>
+              <a:t>•  The camera sets the measurement time, not the laser: 1e14 photons over 1e5 pupil pixels is 1e9 electrons per pixel; with a 1e5-electron well that is 1e4 co-added frames, 100 s at 100 frames per second, against 0.13 s of laser.  Price well depth, frame rate, read noise (as the square root of the frame count), bit depth, gain nonlinearity, pixel-response nonuniformity, persistence between the stepped frames.</a:t>
             </a:r>
           </a:p>
           <a:p>
@@ -16578,7 +17546,7 @@
                 </a:solidFill>
                 <a:latin typeface="Arial"/>
               </a:rPr>
-              <a:t>•  Phase diversity (two defocused pupil images): wide range, common path, iterative; a capture candidate with the existing camera and one translation stage.</a:t>
+              <a:t>•  Optical surface errors: every lens, mirror, plate and the mask substrate with a typical figure (λ/10 to λ/20, a 1/f² spectrum) on the element; the sensors' reference core sees the low orders (0.16 wave of defocus moved every number in the early model); the dimple's etch depth and the mask's flatness.</a:t>
             </a:r>
           </a:p>
           <a:p>
@@ -16594,7 +17562,7 @@
                 </a:solidFill>
                 <a:latin typeface="Arial"/>
               </a:rPr>
-              <a:t>•  White-light scanning in the interferometer: an absolute surface with no wrap, slow; a one-time capture tool.</a:t>
+              <a:t>•  Alignment and stability: the sensitivities exist (10 µm, 10 µrad); add the mask's centering drift on the focal spot, the bench's thermal expansion, source pointing and wavelength drift, laser polarization angle, and the two-arm instruments' non-common-path air and mounts.</a:t>
             </a:r>
           </a:p>
           <a:p>
@@ -16610,7 +17578,7 @@
                 </a:solidFill>
                 <a:latin typeface="Arial"/>
               </a:rPr>
-              <a:t>•  A model-based large-figure solve: the mirror's influence functions as the basis of a nonlinear fit to the sensor's frames; the estimator already carries the basis.</a:t>
+              <a:t>•  More drift in the loop: actuator hysteresis and creep, command quantization (14-16 bits: 0.1-0.5 nm steps as a floor), influence-function error, vibration within a stepped scan.</a:t>
             </a:r>
           </a:p>
           <a:p>
@@ -16626,9 +17594,32 @@
                 </a:solidFill>
                 <a:latin typeface="Arial"/>
               </a:rPr>
-              <a:t>•  Vector Zernike with a polarization camera: one camera instead of the cube and two, at a quarter of the pixels per image.</a:t>
+              <a:t>•  The error budget in the JPL form: per reading, fixed terms after calibration, drift terms weighted by the servo bandwidth, noise terms in quadrature, to a held error at a stated light and time.  This deck's comparison table is its first column.</a:t>
             </a:r>
           </a:p>
+        </p:txBody>
+      </p:sp>
+      <p:sp>
+        <p:nvSpPr>
+          <p:cNvPr id="5" name="TextBox 4"/>
+          <p:cNvSpPr txBox="1"/>
+          <p:nvPr/>
+        </p:nvSpPr>
+        <p:spPr>
+          <a:xfrm>
+            <a:off x="411480" y="5750814"/>
+            <a:ext cx="11368735" cy="274320"/>
+          </a:xfrm>
+          <a:prstGeom prst="rect">
+            <a:avLst/>
+          </a:prstGeom>
+          <a:noFill/>
+        </p:spPr>
+        <p:txBody>
+          <a:bodyPr wrap="square">
+            <a:spAutoFit/>
+          </a:bodyPr>
+          <a:lstStyle/>
           <a:p>
             <a:pPr>
               <a:spcAft>
@@ -16636,29 +17627,13 @@
               </a:spcAft>
             </a:pPr>
             <a:r>
-              <a:rPr sz="1500" b="0">
+              <a:rPr sz="1050" b="0">
                 <a:solidFill>
-                  <a:srgbClr val="282828"/>
+                  <a:srgbClr val="6E6E6E"/>
                 </a:solidFill>
                 <a:latin typeface="Arial"/>
               </a:rPr>
-              <a:t>•  Heterodyne or lock-in detection: immunity to slow drift and 1/f electronics, for a frequency-shifted reference; the two-arm instruments can carry it, the common-path sensors cannot.</a:t>
-            </a:r>
-          </a:p>
-          <a:p>
-            <a:pPr>
-              <a:spcAft>
-                <a:spcPts val="600"/>
-              </a:spcAft>
-            </a:pPr>
-            <a:r>
-              <a:rPr sz="1500" b="0">
-                <a:solidFill>
-                  <a:srgbClr val="282828"/>
-                </a:solidFill>
-                <a:latin typeface="Arial"/>
-              </a:rPr>
-              <a:t>•  Direct actuator metrology (capacitive, optical): a coarse reference the optical gauge is calibrated against.</a:t>
+              <a:t>The telescope-level version of this (an allocation table rolled through the sensitivity model, then the closed-loop predictor) is being planned separately; it is a later add to this deck.</a:t>
             </a:r>
           </a:p>
         </p:txBody>
@@ -16671,7 +17646,7 @@
 </p:sld>
 </file>
 
-<file path=ppt/slides/slide32.xml><?xml version="1.0" encoding="utf-8"?>
+<file path=ppt/slides/slide34.xml><?xml version="1.0" encoding="utf-8"?>
 <p:sld xmlns:a="http://schemas.openxmlformats.org/drawingml/2006/main" xmlns:p="http://schemas.openxmlformats.org/presentationml/2006/main" xmlns:r="http://schemas.openxmlformats.org/officeDocument/2006/relationships">
   <p:cSld>
     <p:spTree>
@@ -16715,7 +17690,7 @@
                 </a:solidFill>
                 <a:latin typeface="Arial"/>
               </a:rPr>
-              <a:t>Future work: from this model to as-built performance</a:t>
+              <a:t>How every configuration was analyzed</a:t>
             </a:r>
           </a:p>
           <a:p>
@@ -16731,7 +17706,7 @@
                 </a:solidFill>
                 <a:latin typeface="Arial"/>
               </a:rPr>
-              <a:t>The model today has ideal optics, a perfect camera, photon noise, and mirror and camera drift; five additions, in the order they are likely to matter</a:t>
+              <a:t>One repeatable path, ten steps, the same for all four approaches: a new sensor is a new reading class in the shared runner plus its gate, then steps 4 to 10 unchanged</a:t>
             </a:r>
           </a:p>
         </p:txBody>
@@ -16780,119 +17755,886 @@
           </a:p>
         </p:txBody>
       </p:sp>
+      <p:graphicFrame>
+        <p:nvGraphicFramePr>
+          <p:cNvPr id="4" name="Table 3"/>
+          <p:cNvGraphicFramePr>
+            <a:graphicFrameLocks noGrp="1"/>
+          </p:cNvGraphicFramePr>
+          <p:nvPr/>
+        </p:nvGraphicFramePr>
+        <p:xfrm>
+          <a:off x="411480" y="1298448"/>
+          <a:ext cx="5806439" cy="3377565"/>
+        </p:xfrm>
+        <a:graphic>
+          <a:graphicData uri="http://schemas.openxmlformats.org/drawingml/2006/table">
+            <a:tbl>
+              <a:tblPr firstRow="1" bandRow="1">
+                <a:tableStyleId>{5C22544A-7EE6-4342-B048-85BDC9FD1C3A}</a:tableStyleId>
+              </a:tblPr>
+              <a:tblGrid>
+                <a:gridCol w="436880"/>
+                <a:gridCol w="2856711"/>
+                <a:gridCol w="2512848"/>
+              </a:tblGrid>
+              <a:tr h="280035">
+                <a:tc>
+                  <a:txBody>
+                    <a:bodyPr wrap="square"/>
+                    <a:lstStyle/>
+                    <a:p>
+                      <a:r>
+                        <a:rPr sz="1100" b="1">
+                          <a:solidFill>
+                            <a:srgbClr val="FFFFFF"/>
+                          </a:solidFill>
+                          <a:latin typeface="Arial"/>
+                        </a:rPr>
+                        <a:t>step</a:t>
+                      </a:r>
+                    </a:p>
+                  </a:txBody>
+                  <a:tcPr marL="54864" marR="54864" marT="18288" marB="18288">
+                    <a:solidFill>
+                      <a:srgbClr val="1F4E79"/>
+                    </a:solidFill>
+                  </a:tcPr>
+                </a:tc>
+                <a:tc>
+                  <a:txBody>
+                    <a:bodyPr wrap="square"/>
+                    <a:lstStyle/>
+                    <a:p>
+                      <a:r>
+                        <a:rPr sz="1100" b="1">
+                          <a:solidFill>
+                            <a:srgbClr val="FFFFFF"/>
+                          </a:solidFill>
+                          <a:latin typeface="Arial"/>
+                        </a:rPr>
+                        <a:t>what</a:t>
+                      </a:r>
+                    </a:p>
+                  </a:txBody>
+                  <a:tcPr marL="54864" marR="54864" marT="18288" marB="18288">
+                    <a:solidFill>
+                      <a:srgbClr val="1F4E79"/>
+                    </a:solidFill>
+                  </a:tcPr>
+                </a:tc>
+                <a:tc>
+                  <a:txBody>
+                    <a:bodyPr wrap="square"/>
+                    <a:lstStyle/>
+                    <a:p>
+                      <a:r>
+                        <a:rPr sz="1100" b="1">
+                          <a:solidFill>
+                            <a:srgbClr val="FFFFFF"/>
+                          </a:solidFill>
+                          <a:latin typeface="Arial"/>
+                        </a:rPr>
+                        <a:t>gate or output</a:t>
+                      </a:r>
+                    </a:p>
+                  </a:txBody>
+                  <a:tcPr marL="54864" marR="54864" marT="18288" marB="18288">
+                    <a:solidFill>
+                      <a:srgbClr val="1F4E79"/>
+                    </a:solidFill>
+                  </a:tcPr>
+                </a:tc>
+              </a:tr>
+              <a:tr h="468630">
+                <a:tc>
+                  <a:txBody>
+                    <a:bodyPr wrap="square"/>
+                    <a:lstStyle/>
+                    <a:p>
+                      <a:r>
+                        <a:rPr sz="1100" b="0">
+                          <a:solidFill>
+                            <a:srgbClr val="282828"/>
+                          </a:solidFill>
+                          <a:latin typeface="Arial"/>
+                        </a:rPr>
+                        <a:t>1</a:t>
+                      </a:r>
+                    </a:p>
+                  </a:txBody>
+                  <a:tcPr marL="54864" marR="54864" marT="18288" marB="18288">
+                    <a:solidFill>
+                      <a:srgbClr val="FFFFFF"/>
+                    </a:solidFill>
+                  </a:tcPr>
+                </a:tc>
+                <a:tc>
+                  <a:txBody>
+                    <a:bodyPr wrap="square"/>
+                    <a:lstStyle/>
+                    <a:p>
+                      <a:r>
+                        <a:rPr sz="1100" b="0">
+                          <a:solidFill>
+                            <a:srgbClr val="282828"/>
+                          </a:solidFill>
+                          <a:latin typeface="Arial"/>
+                        </a:rPr>
+                        <a:t>one parameter sheet and one runner per approach; batch wrappers</a:t>
+                      </a:r>
+                    </a:p>
+                  </a:txBody>
+                  <a:tcPr marL="54864" marR="54864" marT="18288" marB="18288">
+                    <a:solidFill>
+                      <a:srgbClr val="FFFFFF"/>
+                    </a:solidFill>
+                  </a:tcPr>
+                </a:tc>
+                <a:tc>
+                  <a:txBody>
+                    <a:bodyPr wrap="square"/>
+                    <a:lstStyle/>
+                    <a:p>
+                      <a:r>
+                        <a:rPr sz="1100" b="0">
+                          <a:solidFill>
+                            <a:srgbClr val="282828"/>
+                          </a:solidFill>
+                          <a:latin typeface="Arial"/>
+                        </a:rPr>
+                        <a:t>every number has a run tag</a:t>
+                      </a:r>
+                    </a:p>
+                  </a:txBody>
+                  <a:tcPr marL="54864" marR="54864" marT="18288" marB="18288">
+                    <a:solidFill>
+                      <a:srgbClr val="FFFFFF"/>
+                    </a:solidFill>
+                  </a:tcPr>
+                </a:tc>
+              </a:tr>
+              <a:tr h="657225">
+                <a:tc>
+                  <a:txBody>
+                    <a:bodyPr wrap="square"/>
+                    <a:lstStyle/>
+                    <a:p>
+                      <a:r>
+                        <a:rPr sz="1100" b="0">
+                          <a:solidFill>
+                            <a:srgbClr val="282828"/>
+                          </a:solidFill>
+                          <a:latin typeface="Arial"/>
+                        </a:rPr>
+                        <a:t>2</a:t>
+                      </a:r>
+                    </a:p>
+                  </a:txBody>
+                  <a:tcPr marL="54864" marR="54864" marT="18288" marB="18288">
+                    <a:solidFill>
+                      <a:srgbClr val="ECF1F6"/>
+                    </a:solidFill>
+                  </a:tcPr>
+                </a:tc>
+                <a:tc>
+                  <a:txBody>
+                    <a:bodyPr wrap="square"/>
+                    <a:lstStyle/>
+                    <a:p>
+                      <a:r>
+                        <a:rPr sz="1100" b="0">
+                          <a:solidFill>
+                            <a:srgbClr val="282828"/>
+                          </a:solidFill>
+                          <a:latin typeface="Arial"/>
+                        </a:rPr>
+                        <a:t>build the bench from the sheet, trace it; clearance of end bodies and node parts; tail tune; sampling budget</a:t>
+                      </a:r>
+                    </a:p>
+                  </a:txBody>
+                  <a:tcPr marL="54864" marR="54864" marT="18288" marB="18288">
+                    <a:solidFill>
+                      <a:srgbClr val="ECF1F6"/>
+                    </a:solidFill>
+                  </a:tcPr>
+                </a:tc>
+                <a:tc>
+                  <a:txBody>
+                    <a:bodyPr wrap="square"/>
+                    <a:lstStyle/>
+                    <a:p>
+                      <a:r>
+                        <a:rPr sz="1100" b="0">
+                          <a:solidFill>
+                            <a:srgbClr val="282828"/>
+                          </a:solidFill>
+                          <a:latin typeface="Arial"/>
+                        </a:rPr>
+                        <a:t>every part clears by 25 mm; 6 pixels across the mask feature</a:t>
+                      </a:r>
+                    </a:p>
+                  </a:txBody>
+                  <a:tcPr marL="54864" marR="54864" marT="18288" marB="18288">
+                    <a:solidFill>
+                      <a:srgbClr val="ECF1F6"/>
+                    </a:solidFill>
+                  </a:tcPr>
+                </a:tc>
+              </a:tr>
+              <a:tr h="657225">
+                <a:tc>
+                  <a:txBody>
+                    <a:bodyPr wrap="square"/>
+                    <a:lstStyle/>
+                    <a:p>
+                      <a:r>
+                        <a:rPr sz="1100" b="0">
+                          <a:solidFill>
+                            <a:srgbClr val="282828"/>
+                          </a:solidFill>
+                          <a:latin typeface="Arial"/>
+                        </a:rPr>
+                        <a:t>3</a:t>
+                      </a:r>
+                    </a:p>
+                  </a:txBody>
+                  <a:tcPr marL="54864" marR="54864" marT="18288" marB="18288">
+                    <a:solidFill>
+                      <a:srgbClr val="FFFFFF"/>
+                    </a:solidFill>
+                  </a:tcPr>
+                </a:tc>
+                <a:tc>
+                  <a:txBody>
+                    <a:bodyPr wrap="square"/>
+                    <a:lstStyle/>
+                    <a:p>
+                      <a:r>
+                        <a:rPr sz="1100" b="0">
+                          <a:solidFill>
+                            <a:srgbClr val="282828"/>
+                          </a:solidFill>
+                          <a:latin typeface="Arial"/>
+                        </a:rPr>
+                        <a:t>model gates before any number</a:t>
+                      </a:r>
+                    </a:p>
+                  </a:txBody>
+                  <a:tcPr marL="54864" marR="54864" marT="18288" marB="18288">
+                    <a:solidFill>
+                      <a:srgbClr val="FFFFFF"/>
+                    </a:solidFill>
+                  </a:tcPr>
+                </a:tc>
+                <a:tc>
+                  <a:txBody>
+                    <a:bodyPr wrap="square"/>
+                    <a:lstStyle/>
+                    <a:p>
+                      <a:r>
+                        <a:rPr sz="1100" b="0">
+                          <a:solidFill>
+                            <a:srgbClr val="282828"/>
+                          </a:solidFill>
+                          <a:latin typeface="Arial"/>
+                        </a:rPr>
+                        <a:t>mask round trip, reference-wave surrogate, working-state amplitude, the reading on 100 nm pokes</a:t>
+                      </a:r>
+                    </a:p>
+                  </a:txBody>
+                  <a:tcPr marL="54864" marR="54864" marT="18288" marB="18288">
+                    <a:solidFill>
+                      <a:srgbClr val="FFFFFF"/>
+                    </a:solidFill>
+                  </a:tcPr>
+                </a:tc>
+              </a:tr>
+              <a:tr h="657225">
+                <a:tc>
+                  <a:txBody>
+                    <a:bodyPr wrap="square"/>
+                    <a:lstStyle/>
+                    <a:p>
+                      <a:r>
+                        <a:rPr sz="1100" b="0">
+                          <a:solidFill>
+                            <a:srgbClr val="282828"/>
+                          </a:solidFill>
+                          <a:latin typeface="Arial"/>
+                        </a:rPr>
+                        <a:t>4</a:t>
+                      </a:r>
+                    </a:p>
+                  </a:txBody>
+                  <a:tcPr marL="54864" marR="54864" marT="18288" marB="18288">
+                    <a:solidFill>
+                      <a:srgbClr val="ECF1F6"/>
+                    </a:solidFill>
+                  </a:tcPr>
+                </a:tc>
+                <a:tc>
+                  <a:txBody>
+                    <a:bodyPr wrap="square"/>
+                    <a:lstStyle/>
+                    <a:p>
+                      <a:r>
+                        <a:rPr sz="1100" b="0">
+                          <a:solidFill>
+                            <a:srgbClr val="282828"/>
+                          </a:solidFill>
+                          <a:latin typeface="Arial"/>
+                        </a:rPr>
+                        <a:t>calibration: the response matrix measured through the sensor, on the 30 nm working surface</a:t>
+                      </a:r>
+                    </a:p>
+                  </a:txBody>
+                  <a:tcPr marL="54864" marR="54864" marT="18288" marB="18288">
+                    <a:solidFill>
+                      <a:srgbClr val="ECF1F6"/>
+                    </a:solidFill>
+                  </a:tcPr>
+                </a:tc>
+                <a:tc>
+                  <a:txBody>
+                    <a:bodyPr wrap="square"/>
+                    <a:lstStyle/>
+                    <a:p>
+                      <a:r>
+                        <a:rPr sz="1100" b="0">
+                          <a:solidFill>
+                            <a:srgbClr val="282828"/>
+                          </a:solidFill>
+                          <a:latin typeface="Arial"/>
+                        </a:rPr>
+                        <a:t>piston null carried; stencil-site fit</a:t>
+                      </a:r>
+                    </a:p>
+                  </a:txBody>
+                  <a:tcPr marL="54864" marR="54864" marT="18288" marB="18288">
+                    <a:solidFill>
+                      <a:srgbClr val="ECF1F6"/>
+                    </a:solidFill>
+                  </a:tcPr>
+                </a:tc>
+              </a:tr>
+              <a:tr h="657225">
+                <a:tc>
+                  <a:txBody>
+                    <a:bodyPr wrap="square"/>
+                    <a:lstStyle/>
+                    <a:p>
+                      <a:r>
+                        <a:rPr sz="1100" b="0">
+                          <a:solidFill>
+                            <a:srgbClr val="282828"/>
+                          </a:solidFill>
+                          <a:latin typeface="Arial"/>
+                        </a:rPr>
+                        <a:t>5</a:t>
+                      </a:r>
+                    </a:p>
+                  </a:txBody>
+                  <a:tcPr marL="54864" marR="54864" marT="18288" marB="18288">
+                    <a:solidFill>
+                      <a:srgbClr val="FFFFFF"/>
+                    </a:solidFill>
+                  </a:tcPr>
+                </a:tc>
+                <a:tc>
+                  <a:txBody>
+                    <a:bodyPr wrap="square"/>
+                    <a:lstStyle/>
+                    <a:p>
+                      <a:r>
+                        <a:rPr sz="1100" b="0">
+                          <a:solidFill>
+                            <a:srgbClr val="282828"/>
+                          </a:solidFill>
+                          <a:latin typeface="Arial"/>
+                        </a:rPr>
+                        <a:t>rows on the working surface: 10 nm on one actuator; 1 nm on 47 sites; dense 10 nm</a:t>
+                      </a:r>
+                    </a:p>
+                  </a:txBody>
+                  <a:tcPr marL="54864" marR="54864" marT="18288" marB="18288">
+                    <a:solidFill>
+                      <a:srgbClr val="FFFFFF"/>
+                    </a:solidFill>
+                  </a:tcPr>
+                </a:tc>
+                <a:tc>
+                  <a:txBody>
+                    <a:bodyPr wrap="square"/>
+                    <a:lstStyle/>
+                    <a:p>
+                      <a:r>
+                        <a:rPr sz="1100" b="0">
+                          <a:solidFill>
+                            <a:srgbClr val="282828"/>
+                          </a:solidFill>
+                          <a:latin typeface="Arial"/>
+                        </a:rPr>
+                        <a:t>gain, floor, SNR</a:t>
+                      </a:r>
+                    </a:p>
+                  </a:txBody>
+                  <a:tcPr marL="54864" marR="54864" marT="18288" marB="18288">
+                    <a:solidFill>
+                      <a:srgbClr val="FFFFFF"/>
+                    </a:solidFill>
+                  </a:tcPr>
+                </a:tc>
+              </a:tr>
+            </a:tbl>
+          </a:graphicData>
+        </a:graphic>
+      </p:graphicFrame>
+      <p:graphicFrame>
+        <p:nvGraphicFramePr>
+          <p:cNvPr id="5" name="Table 4"/>
+          <p:cNvGraphicFramePr>
+            <a:graphicFrameLocks noGrp="1"/>
+          </p:cNvGraphicFramePr>
+          <p:nvPr/>
+        </p:nvGraphicFramePr>
+        <p:xfrm>
+          <a:off x="6400800" y="1298448"/>
+          <a:ext cx="5394959" cy="2777490"/>
+        </p:xfrm>
+        <a:graphic>
+          <a:graphicData uri="http://schemas.openxmlformats.org/drawingml/2006/table">
+            <a:tbl>
+              <a:tblPr firstRow="1" bandRow="1">
+                <a:tableStyleId>{5C22544A-7EE6-4342-B048-85BDC9FD1C3A}</a:tableStyleId>
+              </a:tblPr>
+              <a:tblGrid>
+                <a:gridCol w="410464"/>
+                <a:gridCol w="3846730"/>
+                <a:gridCol w="1137765"/>
+              </a:tblGrid>
+              <a:tr h="262890">
+                <a:tc>
+                  <a:txBody>
+                    <a:bodyPr wrap="square"/>
+                    <a:lstStyle/>
+                    <a:p>
+                      <a:r>
+                        <a:rPr sz="1000" b="1">
+                          <a:solidFill>
+                            <a:srgbClr val="FFFFFF"/>
+                          </a:solidFill>
+                          <a:latin typeface="Arial"/>
+                        </a:rPr>
+                        <a:t>step</a:t>
+                      </a:r>
+                    </a:p>
+                  </a:txBody>
+                  <a:tcPr marL="54864" marR="54864" marT="18288" marB="18288">
+                    <a:solidFill>
+                      <a:srgbClr val="1F4E79"/>
+                    </a:solidFill>
+                  </a:tcPr>
+                </a:tc>
+                <a:tc>
+                  <a:txBody>
+                    <a:bodyPr wrap="square"/>
+                    <a:lstStyle/>
+                    <a:p>
+                      <a:r>
+                        <a:rPr sz="1000" b="1">
+                          <a:solidFill>
+                            <a:srgbClr val="FFFFFF"/>
+                          </a:solidFill>
+                          <a:latin typeface="Arial"/>
+                        </a:rPr>
+                        <a:t>what</a:t>
+                      </a:r>
+                    </a:p>
+                  </a:txBody>
+                  <a:tcPr marL="54864" marR="54864" marT="18288" marB="18288">
+                    <a:solidFill>
+                      <a:srgbClr val="1F4E79"/>
+                    </a:solidFill>
+                  </a:tcPr>
+                </a:tc>
+                <a:tc>
+                  <a:txBody>
+                    <a:bodyPr wrap="square"/>
+                    <a:lstStyle/>
+                    <a:p>
+                      <a:r>
+                        <a:rPr sz="1000" b="1">
+                          <a:solidFill>
+                            <a:srgbClr val="FFFFFF"/>
+                          </a:solidFill>
+                          <a:latin typeface="Arial"/>
+                        </a:rPr>
+                        <a:t>gate or output</a:t>
+                      </a:r>
+                    </a:p>
+                  </a:txBody>
+                  <a:tcPr marL="54864" marR="54864" marT="18288" marB="18288">
+                    <a:solidFill>
+                      <a:srgbClr val="1F4E79"/>
+                    </a:solidFill>
+                  </a:tcPr>
+                </a:tc>
+              </a:tr>
+              <a:tr h="434340">
+                <a:tc>
+                  <a:txBody>
+                    <a:bodyPr wrap="square"/>
+                    <a:lstStyle/>
+                    <a:p>
+                      <a:r>
+                        <a:rPr sz="1000" b="0">
+                          <a:solidFill>
+                            <a:srgbClr val="282828"/>
+                          </a:solidFill>
+                          <a:latin typeface="Arial"/>
+                        </a:rPr>
+                        <a:t>6</a:t>
+                      </a:r>
+                    </a:p>
+                  </a:txBody>
+                  <a:tcPr marL="54864" marR="54864" marT="18288" marB="18288">
+                    <a:solidFill>
+                      <a:srgbClr val="FFFFFF"/>
+                    </a:solidFill>
+                  </a:tcPr>
+                </a:tc>
+                <a:tc>
+                  <a:txBody>
+                    <a:bodyPr wrap="square"/>
+                    <a:lstStyle/>
+                    <a:p>
+                      <a:r>
+                        <a:rPr sz="1000" b="0">
+                          <a:solidFill>
+                            <a:srgbClr val="282828"/>
+                          </a:solidFill>
+                          <a:latin typeface="Arial"/>
+                        </a:rPr>
+                        <a:t>capture range: the aging ladder to 10%; the matrix re-measured at 60 to 160 nm with its photon cost</a:t>
+                      </a:r>
+                    </a:p>
+                  </a:txBody>
+                  <a:tcPr marL="54864" marR="54864" marT="18288" marB="18288">
+                    <a:solidFill>
+                      <a:srgbClr val="FFFFFF"/>
+                    </a:solidFill>
+                  </a:tcPr>
+                </a:tc>
+                <a:tc>
+                  <a:txBody>
+                    <a:bodyPr wrap="square"/>
+                    <a:lstStyle/>
+                    <a:p>
+                      <a:r>
+                        <a:rPr sz="1000" b="0">
+                          <a:solidFill>
+                            <a:srgbClr val="282828"/>
+                          </a:solidFill>
+                          <a:latin typeface="Arial"/>
+                        </a:rPr>
+                        <a:t>range in nm; photons per rung</a:t>
+                      </a:r>
+                    </a:p>
+                  </a:txBody>
+                  <a:tcPr marL="54864" marR="54864" marT="18288" marB="18288">
+                    <a:solidFill>
+                      <a:srgbClr val="FFFFFF"/>
+                    </a:solidFill>
+                  </a:tcPr>
+                </a:tc>
+              </a:tr>
+              <a:tr h="434340">
+                <a:tc>
+                  <a:txBody>
+                    <a:bodyPr wrap="square"/>
+                    <a:lstStyle/>
+                    <a:p>
+                      <a:r>
+                        <a:rPr sz="1000" b="0">
+                          <a:solidFill>
+                            <a:srgbClr val="282828"/>
+                          </a:solidFill>
+                          <a:latin typeface="Arial"/>
+                        </a:rPr>
+                        <a:t>7</a:t>
+                      </a:r>
+                    </a:p>
+                  </a:txBody>
+                  <a:tcPr marL="54864" marR="54864" marT="18288" marB="18288">
+                    <a:solidFill>
+                      <a:srgbClr val="ECF1F6"/>
+                    </a:solidFill>
+                  </a:tcPr>
+                </a:tc>
+                <a:tc>
+                  <a:txBody>
+                    <a:bodyPr wrap="square"/>
+                    <a:lstStyle/>
+                    <a:p>
+                      <a:r>
+                        <a:rPr sz="1000" b="0">
+                          <a:solidFill>
+                            <a:srgbClr val="282828"/>
+                          </a:solidFill>
+                          <a:latin typeface="Arial"/>
+                        </a:rPr>
+                        <a:t>photons: noise fit over 1e8 to 1e14 per measurement, flat and on-surface matrix</a:t>
+                      </a:r>
+                    </a:p>
+                  </a:txBody>
+                  <a:tcPr marL="54864" marR="54864" marT="18288" marB="18288">
+                    <a:solidFill>
+                      <a:srgbClr val="ECF1F6"/>
+                    </a:solidFill>
+                  </a:tcPr>
+                </a:tc>
+                <a:tc>
+                  <a:txBody>
+                    <a:bodyPr wrap="square"/>
+                    <a:lstStyle/>
+                    <a:p>
+                      <a:r>
+                        <a:rPr sz="1000" b="0">
+                          <a:solidFill>
+                            <a:srgbClr val="282828"/>
+                          </a:solidFill>
+                          <a:latin typeface="Arial"/>
+                        </a:rPr>
+                        <a:t>photons for 1 pm</a:t>
+                      </a:r>
+                    </a:p>
+                  </a:txBody>
+                  <a:tcPr marL="54864" marR="54864" marT="18288" marB="18288">
+                    <a:solidFill>
+                      <a:srgbClr val="ECF1F6"/>
+                    </a:solidFill>
+                  </a:tcPr>
+                </a:tc>
+              </a:tr>
+              <a:tr h="605790">
+                <a:tc>
+                  <a:txBody>
+                    <a:bodyPr wrap="square"/>
+                    <a:lstStyle/>
+                    <a:p>
+                      <a:r>
+                        <a:rPr sz="1000" b="0">
+                          <a:solidFill>
+                            <a:srgbClr val="282828"/>
+                          </a:solidFill>
+                          <a:latin typeface="Arial"/>
+                        </a:rPr>
+                        <a:t>8</a:t>
+                      </a:r>
+                    </a:p>
+                  </a:txBody>
+                  <a:tcPr marL="54864" marR="54864" marT="18288" marB="18288">
+                    <a:solidFill>
+                      <a:srgbClr val="FFFFFF"/>
+                    </a:solidFill>
+                  </a:tcPr>
+                </a:tc>
+                <a:tc>
+                  <a:txBody>
+                    <a:bodyPr wrap="square"/>
+                    <a:lstStyle/>
+                    <a:p>
+                      <a:r>
+                        <a:rPr sz="1000" b="0">
+                          <a:solidFill>
+                            <a:srgbClr val="282828"/>
+                          </a:solidFill>
+                          <a:latin typeface="Arial"/>
+                        </a:rPr>
+                        <a:t>closed loop in the shared loop code: noise, walk, ramp; noiseless step; within-scan drift</a:t>
+                      </a:r>
+                    </a:p>
+                  </a:txBody>
+                  <a:tcPr marL="54864" marR="54864" marT="18288" marB="18288">
+                    <a:solidFill>
+                      <a:srgbClr val="FFFFFF"/>
+                    </a:solidFill>
+                  </a:tcPr>
+                </a:tc>
+                <a:tc>
+                  <a:txBody>
+                    <a:bodyPr wrap="square"/>
+                    <a:lstStyle/>
+                    <a:p>
+                      <a:r>
+                        <a:rPr sz="1000" b="0">
+                          <a:solidFill>
+                            <a:srgbClr val="282828"/>
+                          </a:solidFill>
+                          <a:latin typeface="Arial"/>
+                        </a:rPr>
+                        <a:t>photons per cycle for 3 pm; fixed error</a:t>
+                      </a:r>
+                    </a:p>
+                  </a:txBody>
+                  <a:tcPr marL="54864" marR="54864" marT="18288" marB="18288">
+                    <a:solidFill>
+                      <a:srgbClr val="FFFFFF"/>
+                    </a:solidFill>
+                  </a:tcPr>
+                </a:tc>
+              </a:tr>
+              <a:tr h="434340">
+                <a:tc>
+                  <a:txBody>
+                    <a:bodyPr wrap="square"/>
+                    <a:lstStyle/>
+                    <a:p>
+                      <a:r>
+                        <a:rPr sz="1000" b="0">
+                          <a:solidFill>
+                            <a:srgbClr val="282828"/>
+                          </a:solidFill>
+                          <a:latin typeface="Arial"/>
+                        </a:rPr>
+                        <a:t>9</a:t>
+                      </a:r>
+                    </a:p>
+                  </a:txBody>
+                  <a:tcPr marL="54864" marR="54864" marT="18288" marB="18288">
+                    <a:solidFill>
+                      <a:srgbClr val="ECF1F6"/>
+                    </a:solidFill>
+                  </a:tcPr>
+                </a:tc>
+                <a:tc>
+                  <a:txBody>
+                    <a:bodyPr wrap="square"/>
+                    <a:lstStyle/>
+                    <a:p>
+                      <a:r>
+                        <a:rPr sz="1000" b="0">
+                          <a:solidFill>
+                            <a:srgbClr val="282828"/>
+                          </a:solidFill>
+                          <a:latin typeface="Arial"/>
+                        </a:rPr>
+                        <a:t>descent: the start ladder with unwrapping and recalibration on and off</a:t>
+                      </a:r>
+                    </a:p>
+                  </a:txBody>
+                  <a:tcPr marL="54864" marR="54864" marT="18288" marB="18288">
+                    <a:solidFill>
+                      <a:srgbClr val="ECF1F6"/>
+                    </a:solidFill>
+                  </a:tcPr>
+                </a:tc>
+                <a:tc>
+                  <a:txBody>
+                    <a:bodyPr wrap="square"/>
+                    <a:lstStyle/>
+                    <a:p>
+                      <a:r>
+                        <a:rPr sz="1000" b="0">
+                          <a:solidFill>
+                            <a:srgbClr val="282828"/>
+                          </a:solidFill>
+                          <a:latin typeface="Arial"/>
+                        </a:rPr>
+                        <a:t>largest start brought to 3 pm</a:t>
+                      </a:r>
+                    </a:p>
+                  </a:txBody>
+                  <a:tcPr marL="54864" marR="54864" marT="18288" marB="18288">
+                    <a:solidFill>
+                      <a:srgbClr val="ECF1F6"/>
+                    </a:solidFill>
+                  </a:tcPr>
+                </a:tc>
+              </a:tr>
+              <a:tr h="605790">
+                <a:tc>
+                  <a:txBody>
+                    <a:bodyPr wrap="square"/>
+                    <a:lstStyle/>
+                    <a:p>
+                      <a:r>
+                        <a:rPr sz="1000" b="0">
+                          <a:solidFill>
+                            <a:srgbClr val="282828"/>
+                          </a:solidFill>
+                          <a:latin typeface="Arial"/>
+                        </a:rPr>
+                        <a:t>10</a:t>
+                      </a:r>
+                    </a:p>
+                  </a:txBody>
+                  <a:tcPr marL="54864" marR="54864" marT="18288" marB="18288">
+                    <a:solidFill>
+                      <a:srgbClr val="FFFFFF"/>
+                    </a:solidFill>
+                  </a:tcPr>
+                </a:tc>
+                <a:tc>
+                  <a:txBody>
+                    <a:bodyPr wrap="square"/>
+                    <a:lstStyle/>
+                    <a:p>
+                      <a:r>
+                        <a:rPr sz="1000" b="0">
+                          <a:solidFill>
+                            <a:srgbClr val="282828"/>
+                          </a:solidFill>
+                          <a:latin typeface="Arial"/>
+                        </a:rPr>
+                        <a:t>systematics one at a time, uncalibrated and through the matrix; layout drawn from the emitted deck; parts from the sheet; report numbers first</a:t>
+                      </a:r>
+                    </a:p>
+                  </a:txBody>
+                  <a:tcPr marL="54864" marR="54864" marT="18288" marB="18288">
+                    <a:solidFill>
+                      <a:srgbClr val="FFFFFF"/>
+                    </a:solidFill>
+                  </a:tcPr>
+                </a:tc>
+                <a:tc>
+                  <a:txBody>
+                    <a:bodyPr wrap="square"/>
+                    <a:lstStyle/>
+                    <a:p>
+                      <a:r>
+                        <a:rPr sz="1000" b="0">
+                          <a:solidFill>
+                            <a:srgbClr val="282828"/>
+                          </a:solidFill>
+                          <a:latin typeface="Arial"/>
+                        </a:rPr>
+                        <a:t>one line per term on the systematics slide</a:t>
+                      </a:r>
+                    </a:p>
+                  </a:txBody>
+                  <a:tcPr marL="54864" marR="54864" marT="18288" marB="18288">
+                    <a:solidFill>
+                      <a:srgbClr val="FFFFFF"/>
+                    </a:solidFill>
+                  </a:tcPr>
+                </a:tc>
+              </a:tr>
+            </a:tbl>
+          </a:graphicData>
+        </a:graphic>
+      </p:graphicFrame>
       <p:sp>
         <p:nvSpPr>
-          <p:cNvPr id="4" name="TextBox 3"/>
+          <p:cNvPr id="6" name="TextBox 5"/>
           <p:cNvSpPr txBox="1"/>
           <p:nvPr/>
         </p:nvSpPr>
         <p:spPr>
           <a:xfrm>
-            <a:off x="411480" y="1298448"/>
-            <a:ext cx="11368735" cy="274320"/>
-          </a:xfrm>
-          <a:prstGeom prst="rect">
-            <a:avLst/>
-          </a:prstGeom>
-          <a:noFill/>
-        </p:spPr>
-        <p:txBody>
-          <a:bodyPr wrap="square">
-            <a:spAutoFit/>
-          </a:bodyPr>
-          <a:lstStyle/>
-          <a:p>
-            <a:pPr>
-              <a:spcAft>
-                <a:spcPts val="600"/>
-              </a:spcAft>
-            </a:pPr>
-            <a:r>
-              <a:rPr sz="1500" b="0">
-                <a:solidFill>
-                  <a:srgbClr val="282828"/>
-                </a:solidFill>
-                <a:latin typeface="Arial"/>
-              </a:rPr>
-              <a:t>•  The camera sets the measurement time, not the laser: 1e14 photons over 1e5 pupil pixels is 1e9 electrons per pixel; with a 1e5-electron well that is 1e4 co-added frames, 100 s at 100 frames per second, against 0.13 s of laser.  Price well depth, frame rate, read noise (as the square root of the frame count), bit depth, gain nonlinearity, pixel-response nonuniformity, persistence between the stepped frames.</a:t>
-            </a:r>
-          </a:p>
-          <a:p>
-            <a:pPr>
-              <a:spcAft>
-                <a:spcPts val="600"/>
-              </a:spcAft>
-            </a:pPr>
-            <a:r>
-              <a:rPr sz="1500" b="0">
-                <a:solidFill>
-                  <a:srgbClr val="282828"/>
-                </a:solidFill>
-                <a:latin typeface="Arial"/>
-              </a:rPr>
-              <a:t>•  Optical surface errors: every lens, mirror, plate and the mask substrate with a typical figure (λ/10 to λ/20, a 1/f² spectrum) on the element; the sensors' reference core sees the low orders (0.16 wave of defocus moved every number in the early model); the dimple's etch depth and the mask's flatness.</a:t>
-            </a:r>
-          </a:p>
-          <a:p>
-            <a:pPr>
-              <a:spcAft>
-                <a:spcPts val="600"/>
-              </a:spcAft>
-            </a:pPr>
-            <a:r>
-              <a:rPr sz="1500" b="0">
-                <a:solidFill>
-                  <a:srgbClr val="282828"/>
-                </a:solidFill>
-                <a:latin typeface="Arial"/>
-              </a:rPr>
-              <a:t>•  Alignment and stability: the sensitivities exist (10 µm, 10 µrad); add the mask's centering drift on the focal spot, the bench's thermal expansion, source pointing and wavelength drift, laser polarization angle, and the two-arm instruments' non-common-path air and mounts.</a:t>
-            </a:r>
-          </a:p>
-          <a:p>
-            <a:pPr>
-              <a:spcAft>
-                <a:spcPts val="600"/>
-              </a:spcAft>
-            </a:pPr>
-            <a:r>
-              <a:rPr sz="1500" b="0">
-                <a:solidFill>
-                  <a:srgbClr val="282828"/>
-                </a:solidFill>
-                <a:latin typeface="Arial"/>
-              </a:rPr>
-              <a:t>•  More drift in the loop: actuator hysteresis and creep, command quantization (14-16 bits: 0.1-0.5 nm steps as a floor), influence-function error, vibration within a stepped scan.</a:t>
-            </a:r>
-          </a:p>
-          <a:p>
-            <a:pPr>
-              <a:spcAft>
-                <a:spcPts val="600"/>
-              </a:spcAft>
-            </a:pPr>
-            <a:r>
-              <a:rPr sz="1500" b="0">
-                <a:solidFill>
-                  <a:srgbClr val="282828"/>
-                </a:solidFill>
-                <a:latin typeface="Arial"/>
-              </a:rPr>
-              <a:t>•  The error budget in the JPL form: per reading, fixed terms after calibration, drift terms weighted by the servo bandwidth, noise terms in quadrature, to a held error at a stated light and time.  This deck's comparison table is its first column.</a:t>
-            </a:r>
-          </a:p>
-        </p:txBody>
-      </p:sp>
-      <p:sp>
-        <p:nvSpPr>
-          <p:cNvPr id="5" name="TextBox 4"/>
-          <p:cNvSpPr txBox="1"/>
-          <p:nvPr/>
-        </p:nvSpPr>
-        <p:spPr>
-          <a:xfrm>
-            <a:off x="411480" y="5750814"/>
-            <a:ext cx="11368735" cy="274320"/>
+            <a:off x="6400800" y="4222242"/>
+            <a:ext cx="5394960" cy="274320"/>
           </a:xfrm>
           <a:prstGeom prst="rect">
             <a:avLst/>
@@ -16917,7 +18659,7 @@
                 </a:solidFill>
                 <a:latin typeface="Arial"/>
               </a:rPr>
-              <a:t>The telescope-level version of this (an allocation table rolled through the sensitivity model, then the closed-loop predictor) is being planned separately; it is a later add to this deck.</a:t>
+              <a:t>The scoring library (the loop, the unwrapper, the arm and analyzer maps, the clearance check) is shared by the three lanes; nothing is copied between them.  The path is recorded as reference memory so the next configuration follows it in a day.</a:t>
             </a:r>
           </a:p>
         </p:txBody>
@@ -16930,7 +18672,7 @@
 </p:sld>
 </file>
 
-<file path=ppt/slides/slide33.xml><?xml version="1.0" encoding="utf-8"?>
+<file path=ppt/slides/slide35.xml><?xml version="1.0" encoding="utf-8"?>
 <p:sld xmlns:a="http://schemas.openxmlformats.org/drawingml/2006/main" xmlns:p="http://schemas.openxmlformats.org/presentationml/2006/main" xmlns:r="http://schemas.openxmlformats.org/officeDocument/2006/relationships">
   <p:cSld>
     <p:spTree>
@@ -16974,7 +18716,7 @@
                 </a:solidFill>
                 <a:latin typeface="Arial"/>
               </a:rPr>
-              <a:t>How every configuration was analyzed</a:t>
+              <a:t>Run it yourself</a:t>
             </a:r>
           </a:p>
           <a:p>
@@ -16990,7 +18732,7 @@
                 </a:solidFill>
                 <a:latin typeface="Arial"/>
               </a:rPr>
-              <a:t>One repeatable path, ten steps, the same for all four approaches: a new sensor is a new reading class in the shared runner plus its gate, then steps 4 to 10 unchanged</a:t>
+              <a:t>One parameter sheet and one runner per approach, shared code underneath; every number here is reproduced by the commands below</a:t>
             </a:r>
           </a:p>
         </p:txBody>
@@ -17039,885 +18781,86 @@
           </a:p>
         </p:txBody>
       </p:sp>
-      <p:graphicFrame>
-        <p:nvGraphicFramePr>
-          <p:cNvPr id="4" name="Table 3"/>
-          <p:cNvGraphicFramePr>
-            <a:graphicFrameLocks noGrp="1"/>
-          </p:cNvGraphicFramePr>
-          <p:nvPr/>
-        </p:nvGraphicFramePr>
-        <p:xfrm>
-          <a:off x="411480" y="1298448"/>
-          <a:ext cx="5806439" cy="3377565"/>
-        </p:xfrm>
-        <a:graphic>
-          <a:graphicData uri="http://schemas.openxmlformats.org/drawingml/2006/table">
-            <a:tbl>
-              <a:tblPr firstRow="1" bandRow="1">
-                <a:tableStyleId>{5C22544A-7EE6-4342-B048-85BDC9FD1C3A}</a:tableStyleId>
-              </a:tblPr>
-              <a:tblGrid>
-                <a:gridCol w="436880"/>
-                <a:gridCol w="2856711"/>
-                <a:gridCol w="2512848"/>
-              </a:tblGrid>
-              <a:tr h="280035">
-                <a:tc>
-                  <a:txBody>
-                    <a:bodyPr wrap="square"/>
-                    <a:lstStyle/>
-                    <a:p>
-                      <a:r>
-                        <a:rPr sz="1100" b="1">
-                          <a:solidFill>
-                            <a:srgbClr val="FFFFFF"/>
-                          </a:solidFill>
-                          <a:latin typeface="Arial"/>
-                        </a:rPr>
-                        <a:t>step</a:t>
-                      </a:r>
-                    </a:p>
-                  </a:txBody>
-                  <a:tcPr marL="54864" marR="54864" marT="18288" marB="18288">
-                    <a:solidFill>
-                      <a:srgbClr val="1F4E79"/>
-                    </a:solidFill>
-                  </a:tcPr>
-                </a:tc>
-                <a:tc>
-                  <a:txBody>
-                    <a:bodyPr wrap="square"/>
-                    <a:lstStyle/>
-                    <a:p>
-                      <a:r>
-                        <a:rPr sz="1100" b="1">
-                          <a:solidFill>
-                            <a:srgbClr val="FFFFFF"/>
-                          </a:solidFill>
-                          <a:latin typeface="Arial"/>
-                        </a:rPr>
-                        <a:t>what</a:t>
-                      </a:r>
-                    </a:p>
-                  </a:txBody>
-                  <a:tcPr marL="54864" marR="54864" marT="18288" marB="18288">
-                    <a:solidFill>
-                      <a:srgbClr val="1F4E79"/>
-                    </a:solidFill>
-                  </a:tcPr>
-                </a:tc>
-                <a:tc>
-                  <a:txBody>
-                    <a:bodyPr wrap="square"/>
-                    <a:lstStyle/>
-                    <a:p>
-                      <a:r>
-                        <a:rPr sz="1100" b="1">
-                          <a:solidFill>
-                            <a:srgbClr val="FFFFFF"/>
-                          </a:solidFill>
-                          <a:latin typeface="Arial"/>
-                        </a:rPr>
-                        <a:t>gate or output</a:t>
-                      </a:r>
-                    </a:p>
-                  </a:txBody>
-                  <a:tcPr marL="54864" marR="54864" marT="18288" marB="18288">
-                    <a:solidFill>
-                      <a:srgbClr val="1F4E79"/>
-                    </a:solidFill>
-                  </a:tcPr>
-                </a:tc>
-              </a:tr>
-              <a:tr h="468630">
-                <a:tc>
-                  <a:txBody>
-                    <a:bodyPr wrap="square"/>
-                    <a:lstStyle/>
-                    <a:p>
-                      <a:r>
-                        <a:rPr sz="1100" b="0">
-                          <a:solidFill>
-                            <a:srgbClr val="282828"/>
-                          </a:solidFill>
-                          <a:latin typeface="Arial"/>
-                        </a:rPr>
-                        <a:t>1</a:t>
-                      </a:r>
-                    </a:p>
-                  </a:txBody>
-                  <a:tcPr marL="54864" marR="54864" marT="18288" marB="18288">
-                    <a:solidFill>
-                      <a:srgbClr val="FFFFFF"/>
-                    </a:solidFill>
-                  </a:tcPr>
-                </a:tc>
-                <a:tc>
-                  <a:txBody>
-                    <a:bodyPr wrap="square"/>
-                    <a:lstStyle/>
-                    <a:p>
-                      <a:r>
-                        <a:rPr sz="1100" b="0">
-                          <a:solidFill>
-                            <a:srgbClr val="282828"/>
-                          </a:solidFill>
-                          <a:latin typeface="Arial"/>
-                        </a:rPr>
-                        <a:t>one parameter sheet and one runner per approach; batch wrappers</a:t>
-                      </a:r>
-                    </a:p>
-                  </a:txBody>
-                  <a:tcPr marL="54864" marR="54864" marT="18288" marB="18288">
-                    <a:solidFill>
-                      <a:srgbClr val="FFFFFF"/>
-                    </a:solidFill>
-                  </a:tcPr>
-                </a:tc>
-                <a:tc>
-                  <a:txBody>
-                    <a:bodyPr wrap="square"/>
-                    <a:lstStyle/>
-                    <a:p>
-                      <a:r>
-                        <a:rPr sz="1100" b="0">
-                          <a:solidFill>
-                            <a:srgbClr val="282828"/>
-                          </a:solidFill>
-                          <a:latin typeface="Arial"/>
-                        </a:rPr>
-                        <a:t>every number has a run tag</a:t>
-                      </a:r>
-                    </a:p>
-                  </a:txBody>
-                  <a:tcPr marL="54864" marR="54864" marT="18288" marB="18288">
-                    <a:solidFill>
-                      <a:srgbClr val="FFFFFF"/>
-                    </a:solidFill>
-                  </a:tcPr>
-                </a:tc>
-              </a:tr>
-              <a:tr h="657225">
-                <a:tc>
-                  <a:txBody>
-                    <a:bodyPr wrap="square"/>
-                    <a:lstStyle/>
-                    <a:p>
-                      <a:r>
-                        <a:rPr sz="1100" b="0">
-                          <a:solidFill>
-                            <a:srgbClr val="282828"/>
-                          </a:solidFill>
-                          <a:latin typeface="Arial"/>
-                        </a:rPr>
-                        <a:t>2</a:t>
-                      </a:r>
-                    </a:p>
-                  </a:txBody>
-                  <a:tcPr marL="54864" marR="54864" marT="18288" marB="18288">
-                    <a:solidFill>
-                      <a:srgbClr val="ECF1F6"/>
-                    </a:solidFill>
-                  </a:tcPr>
-                </a:tc>
-                <a:tc>
-                  <a:txBody>
-                    <a:bodyPr wrap="square"/>
-                    <a:lstStyle/>
-                    <a:p>
-                      <a:r>
-                        <a:rPr sz="1100" b="0">
-                          <a:solidFill>
-                            <a:srgbClr val="282828"/>
-                          </a:solidFill>
-                          <a:latin typeface="Arial"/>
-                        </a:rPr>
-                        <a:t>build the bench from the sheet, trace it; clearance of end bodies and node parts; tail tune; sampling budget</a:t>
-                      </a:r>
-                    </a:p>
-                  </a:txBody>
-                  <a:tcPr marL="54864" marR="54864" marT="18288" marB="18288">
-                    <a:solidFill>
-                      <a:srgbClr val="ECF1F6"/>
-                    </a:solidFill>
-                  </a:tcPr>
-                </a:tc>
-                <a:tc>
-                  <a:txBody>
-                    <a:bodyPr wrap="square"/>
-                    <a:lstStyle/>
-                    <a:p>
-                      <a:r>
-                        <a:rPr sz="1100" b="0">
-                          <a:solidFill>
-                            <a:srgbClr val="282828"/>
-                          </a:solidFill>
-                          <a:latin typeface="Arial"/>
-                        </a:rPr>
-                        <a:t>every part clears by 25 mm; 6 pixels across the mask feature</a:t>
-                      </a:r>
-                    </a:p>
-                  </a:txBody>
-                  <a:tcPr marL="54864" marR="54864" marT="18288" marB="18288">
-                    <a:solidFill>
-                      <a:srgbClr val="ECF1F6"/>
-                    </a:solidFill>
-                  </a:tcPr>
-                </a:tc>
-              </a:tr>
-              <a:tr h="657225">
-                <a:tc>
-                  <a:txBody>
-                    <a:bodyPr wrap="square"/>
-                    <a:lstStyle/>
-                    <a:p>
-                      <a:r>
-                        <a:rPr sz="1100" b="0">
-                          <a:solidFill>
-                            <a:srgbClr val="282828"/>
-                          </a:solidFill>
-                          <a:latin typeface="Arial"/>
-                        </a:rPr>
-                        <a:t>3</a:t>
-                      </a:r>
-                    </a:p>
-                  </a:txBody>
-                  <a:tcPr marL="54864" marR="54864" marT="18288" marB="18288">
-                    <a:solidFill>
-                      <a:srgbClr val="FFFFFF"/>
-                    </a:solidFill>
-                  </a:tcPr>
-                </a:tc>
-                <a:tc>
-                  <a:txBody>
-                    <a:bodyPr wrap="square"/>
-                    <a:lstStyle/>
-                    <a:p>
-                      <a:r>
-                        <a:rPr sz="1100" b="0">
-                          <a:solidFill>
-                            <a:srgbClr val="282828"/>
-                          </a:solidFill>
-                          <a:latin typeface="Arial"/>
-                        </a:rPr>
-                        <a:t>model gates before any number</a:t>
-                      </a:r>
-                    </a:p>
-                  </a:txBody>
-                  <a:tcPr marL="54864" marR="54864" marT="18288" marB="18288">
-                    <a:solidFill>
-                      <a:srgbClr val="FFFFFF"/>
-                    </a:solidFill>
-                  </a:tcPr>
-                </a:tc>
-                <a:tc>
-                  <a:txBody>
-                    <a:bodyPr wrap="square"/>
-                    <a:lstStyle/>
-                    <a:p>
-                      <a:r>
-                        <a:rPr sz="1100" b="0">
-                          <a:solidFill>
-                            <a:srgbClr val="282828"/>
-                          </a:solidFill>
-                          <a:latin typeface="Arial"/>
-                        </a:rPr>
-                        <a:t>mask round trip, reference-wave surrogate, working-state amplitude, the reading on 100 nm pokes</a:t>
-                      </a:r>
-                    </a:p>
-                  </a:txBody>
-                  <a:tcPr marL="54864" marR="54864" marT="18288" marB="18288">
-                    <a:solidFill>
-                      <a:srgbClr val="FFFFFF"/>
-                    </a:solidFill>
-                  </a:tcPr>
-                </a:tc>
-              </a:tr>
-              <a:tr h="657225">
-                <a:tc>
-                  <a:txBody>
-                    <a:bodyPr wrap="square"/>
-                    <a:lstStyle/>
-                    <a:p>
-                      <a:r>
-                        <a:rPr sz="1100" b="0">
-                          <a:solidFill>
-                            <a:srgbClr val="282828"/>
-                          </a:solidFill>
-                          <a:latin typeface="Arial"/>
-                        </a:rPr>
-                        <a:t>4</a:t>
-                      </a:r>
-                    </a:p>
-                  </a:txBody>
-                  <a:tcPr marL="54864" marR="54864" marT="18288" marB="18288">
-                    <a:solidFill>
-                      <a:srgbClr val="ECF1F6"/>
-                    </a:solidFill>
-                  </a:tcPr>
-                </a:tc>
-                <a:tc>
-                  <a:txBody>
-                    <a:bodyPr wrap="square"/>
-                    <a:lstStyle/>
-                    <a:p>
-                      <a:r>
-                        <a:rPr sz="1100" b="0">
-                          <a:solidFill>
-                            <a:srgbClr val="282828"/>
-                          </a:solidFill>
-                          <a:latin typeface="Arial"/>
-                        </a:rPr>
-                        <a:t>calibration: the response matrix measured through the sensor, on the 30 nm working surface</a:t>
-                      </a:r>
-                    </a:p>
-                  </a:txBody>
-                  <a:tcPr marL="54864" marR="54864" marT="18288" marB="18288">
-                    <a:solidFill>
-                      <a:srgbClr val="ECF1F6"/>
-                    </a:solidFill>
-                  </a:tcPr>
-                </a:tc>
-                <a:tc>
-                  <a:txBody>
-                    <a:bodyPr wrap="square"/>
-                    <a:lstStyle/>
-                    <a:p>
-                      <a:r>
-                        <a:rPr sz="1100" b="0">
-                          <a:solidFill>
-                            <a:srgbClr val="282828"/>
-                          </a:solidFill>
-                          <a:latin typeface="Arial"/>
-                        </a:rPr>
-                        <a:t>piston null carried; stencil-site fit</a:t>
-                      </a:r>
-                    </a:p>
-                  </a:txBody>
-                  <a:tcPr marL="54864" marR="54864" marT="18288" marB="18288">
-                    <a:solidFill>
-                      <a:srgbClr val="ECF1F6"/>
-                    </a:solidFill>
-                  </a:tcPr>
-                </a:tc>
-              </a:tr>
-              <a:tr h="657225">
-                <a:tc>
-                  <a:txBody>
-                    <a:bodyPr wrap="square"/>
-                    <a:lstStyle/>
-                    <a:p>
-                      <a:r>
-                        <a:rPr sz="1100" b="0">
-                          <a:solidFill>
-                            <a:srgbClr val="282828"/>
-                          </a:solidFill>
-                          <a:latin typeface="Arial"/>
-                        </a:rPr>
-                        <a:t>5</a:t>
-                      </a:r>
-                    </a:p>
-                  </a:txBody>
-                  <a:tcPr marL="54864" marR="54864" marT="18288" marB="18288">
-                    <a:solidFill>
-                      <a:srgbClr val="FFFFFF"/>
-                    </a:solidFill>
-                  </a:tcPr>
-                </a:tc>
-                <a:tc>
-                  <a:txBody>
-                    <a:bodyPr wrap="square"/>
-                    <a:lstStyle/>
-                    <a:p>
-                      <a:r>
-                        <a:rPr sz="1100" b="0">
-                          <a:solidFill>
-                            <a:srgbClr val="282828"/>
-                          </a:solidFill>
-                          <a:latin typeface="Arial"/>
-                        </a:rPr>
-                        <a:t>rows on the working surface: 10 nm on one actuator; 1 nm on 47 sites; dense 10 nm</a:t>
-                      </a:r>
-                    </a:p>
-                  </a:txBody>
-                  <a:tcPr marL="54864" marR="54864" marT="18288" marB="18288">
-                    <a:solidFill>
-                      <a:srgbClr val="FFFFFF"/>
-                    </a:solidFill>
-                  </a:tcPr>
-                </a:tc>
-                <a:tc>
-                  <a:txBody>
-                    <a:bodyPr wrap="square"/>
-                    <a:lstStyle/>
-                    <a:p>
-                      <a:r>
-                        <a:rPr sz="1100" b="0">
-                          <a:solidFill>
-                            <a:srgbClr val="282828"/>
-                          </a:solidFill>
-                          <a:latin typeface="Arial"/>
-                        </a:rPr>
-                        <a:t>gain, floor, SNR</a:t>
-                      </a:r>
-                    </a:p>
-                  </a:txBody>
-                  <a:tcPr marL="54864" marR="54864" marT="18288" marB="18288">
-                    <a:solidFill>
-                      <a:srgbClr val="FFFFFF"/>
-                    </a:solidFill>
-                  </a:tcPr>
-                </a:tc>
-              </a:tr>
-            </a:tbl>
-          </a:graphicData>
-        </a:graphic>
-      </p:graphicFrame>
-      <p:graphicFrame>
-        <p:nvGraphicFramePr>
-          <p:cNvPr id="5" name="Table 4"/>
-          <p:cNvGraphicFramePr>
-            <a:graphicFrameLocks noGrp="1"/>
-          </p:cNvGraphicFramePr>
-          <p:nvPr/>
-        </p:nvGraphicFramePr>
-        <p:xfrm>
-          <a:off x="6400800" y="1298448"/>
-          <a:ext cx="5394959" cy="2777490"/>
-        </p:xfrm>
-        <a:graphic>
-          <a:graphicData uri="http://schemas.openxmlformats.org/drawingml/2006/table">
-            <a:tbl>
-              <a:tblPr firstRow="1" bandRow="1">
-                <a:tableStyleId>{5C22544A-7EE6-4342-B048-85BDC9FD1C3A}</a:tableStyleId>
-              </a:tblPr>
-              <a:tblGrid>
-                <a:gridCol w="410464"/>
-                <a:gridCol w="3846730"/>
-                <a:gridCol w="1137765"/>
-              </a:tblGrid>
-              <a:tr h="262890">
-                <a:tc>
-                  <a:txBody>
-                    <a:bodyPr wrap="square"/>
-                    <a:lstStyle/>
-                    <a:p>
-                      <a:r>
-                        <a:rPr sz="1000" b="1">
-                          <a:solidFill>
-                            <a:srgbClr val="FFFFFF"/>
-                          </a:solidFill>
-                          <a:latin typeface="Arial"/>
-                        </a:rPr>
-                        <a:t>step</a:t>
-                      </a:r>
-                    </a:p>
-                  </a:txBody>
-                  <a:tcPr marL="54864" marR="54864" marT="18288" marB="18288">
-                    <a:solidFill>
-                      <a:srgbClr val="1F4E79"/>
-                    </a:solidFill>
-                  </a:tcPr>
-                </a:tc>
-                <a:tc>
-                  <a:txBody>
-                    <a:bodyPr wrap="square"/>
-                    <a:lstStyle/>
-                    <a:p>
-                      <a:r>
-                        <a:rPr sz="1000" b="1">
-                          <a:solidFill>
-                            <a:srgbClr val="FFFFFF"/>
-                          </a:solidFill>
-                          <a:latin typeface="Arial"/>
-                        </a:rPr>
-                        <a:t>what</a:t>
-                      </a:r>
-                    </a:p>
-                  </a:txBody>
-                  <a:tcPr marL="54864" marR="54864" marT="18288" marB="18288">
-                    <a:solidFill>
-                      <a:srgbClr val="1F4E79"/>
-                    </a:solidFill>
-                  </a:tcPr>
-                </a:tc>
-                <a:tc>
-                  <a:txBody>
-                    <a:bodyPr wrap="square"/>
-                    <a:lstStyle/>
-                    <a:p>
-                      <a:r>
-                        <a:rPr sz="1000" b="1">
-                          <a:solidFill>
-                            <a:srgbClr val="FFFFFF"/>
-                          </a:solidFill>
-                          <a:latin typeface="Arial"/>
-                        </a:rPr>
-                        <a:t>gate or output</a:t>
-                      </a:r>
-                    </a:p>
-                  </a:txBody>
-                  <a:tcPr marL="54864" marR="54864" marT="18288" marB="18288">
-                    <a:solidFill>
-                      <a:srgbClr val="1F4E79"/>
-                    </a:solidFill>
-                  </a:tcPr>
-                </a:tc>
-              </a:tr>
-              <a:tr h="434340">
-                <a:tc>
-                  <a:txBody>
-                    <a:bodyPr wrap="square"/>
-                    <a:lstStyle/>
-                    <a:p>
-                      <a:r>
-                        <a:rPr sz="1000" b="0">
-                          <a:solidFill>
-                            <a:srgbClr val="282828"/>
-                          </a:solidFill>
-                          <a:latin typeface="Arial"/>
-                        </a:rPr>
-                        <a:t>6</a:t>
-                      </a:r>
-                    </a:p>
-                  </a:txBody>
-                  <a:tcPr marL="54864" marR="54864" marT="18288" marB="18288">
-                    <a:solidFill>
-                      <a:srgbClr val="FFFFFF"/>
-                    </a:solidFill>
-                  </a:tcPr>
-                </a:tc>
-                <a:tc>
-                  <a:txBody>
-                    <a:bodyPr wrap="square"/>
-                    <a:lstStyle/>
-                    <a:p>
-                      <a:r>
-                        <a:rPr sz="1000" b="0">
-                          <a:solidFill>
-                            <a:srgbClr val="282828"/>
-                          </a:solidFill>
-                          <a:latin typeface="Arial"/>
-                        </a:rPr>
-                        <a:t>capture range: the aging ladder to 10%; the matrix re-measured at 60 to 160 nm with its photon cost</a:t>
-                      </a:r>
-                    </a:p>
-                  </a:txBody>
-                  <a:tcPr marL="54864" marR="54864" marT="18288" marB="18288">
-                    <a:solidFill>
-                      <a:srgbClr val="FFFFFF"/>
-                    </a:solidFill>
-                  </a:tcPr>
-                </a:tc>
-                <a:tc>
-                  <a:txBody>
-                    <a:bodyPr wrap="square"/>
-                    <a:lstStyle/>
-                    <a:p>
-                      <a:r>
-                        <a:rPr sz="1000" b="0">
-                          <a:solidFill>
-                            <a:srgbClr val="282828"/>
-                          </a:solidFill>
-                          <a:latin typeface="Arial"/>
-                        </a:rPr>
-                        <a:t>range in nm; photons per rung</a:t>
-                      </a:r>
-                    </a:p>
-                  </a:txBody>
-                  <a:tcPr marL="54864" marR="54864" marT="18288" marB="18288">
-                    <a:solidFill>
-                      <a:srgbClr val="FFFFFF"/>
-                    </a:solidFill>
-                  </a:tcPr>
-                </a:tc>
-              </a:tr>
-              <a:tr h="434340">
-                <a:tc>
-                  <a:txBody>
-                    <a:bodyPr wrap="square"/>
-                    <a:lstStyle/>
-                    <a:p>
-                      <a:r>
-                        <a:rPr sz="1000" b="0">
-                          <a:solidFill>
-                            <a:srgbClr val="282828"/>
-                          </a:solidFill>
-                          <a:latin typeface="Arial"/>
-                        </a:rPr>
-                        <a:t>7</a:t>
-                      </a:r>
-                    </a:p>
-                  </a:txBody>
-                  <a:tcPr marL="54864" marR="54864" marT="18288" marB="18288">
-                    <a:solidFill>
-                      <a:srgbClr val="ECF1F6"/>
-                    </a:solidFill>
-                  </a:tcPr>
-                </a:tc>
-                <a:tc>
-                  <a:txBody>
-                    <a:bodyPr wrap="square"/>
-                    <a:lstStyle/>
-                    <a:p>
-                      <a:r>
-                        <a:rPr sz="1000" b="0">
-                          <a:solidFill>
-                            <a:srgbClr val="282828"/>
-                          </a:solidFill>
-                          <a:latin typeface="Arial"/>
-                        </a:rPr>
-                        <a:t>photons: noise fit over 1e8 to 1e14 per measurement, flat and on-surface matrix</a:t>
-                      </a:r>
-                    </a:p>
-                  </a:txBody>
-                  <a:tcPr marL="54864" marR="54864" marT="18288" marB="18288">
-                    <a:solidFill>
-                      <a:srgbClr val="ECF1F6"/>
-                    </a:solidFill>
-                  </a:tcPr>
-                </a:tc>
-                <a:tc>
-                  <a:txBody>
-                    <a:bodyPr wrap="square"/>
-                    <a:lstStyle/>
-                    <a:p>
-                      <a:r>
-                        <a:rPr sz="1000" b="0">
-                          <a:solidFill>
-                            <a:srgbClr val="282828"/>
-                          </a:solidFill>
-                          <a:latin typeface="Arial"/>
-                        </a:rPr>
-                        <a:t>photons for 1 pm</a:t>
-                      </a:r>
-                    </a:p>
-                  </a:txBody>
-                  <a:tcPr marL="54864" marR="54864" marT="18288" marB="18288">
-                    <a:solidFill>
-                      <a:srgbClr val="ECF1F6"/>
-                    </a:solidFill>
-                  </a:tcPr>
-                </a:tc>
-              </a:tr>
-              <a:tr h="605790">
-                <a:tc>
-                  <a:txBody>
-                    <a:bodyPr wrap="square"/>
-                    <a:lstStyle/>
-                    <a:p>
-                      <a:r>
-                        <a:rPr sz="1000" b="0">
-                          <a:solidFill>
-                            <a:srgbClr val="282828"/>
-                          </a:solidFill>
-                          <a:latin typeface="Arial"/>
-                        </a:rPr>
-                        <a:t>8</a:t>
-                      </a:r>
-                    </a:p>
-                  </a:txBody>
-                  <a:tcPr marL="54864" marR="54864" marT="18288" marB="18288">
-                    <a:solidFill>
-                      <a:srgbClr val="FFFFFF"/>
-                    </a:solidFill>
-                  </a:tcPr>
-                </a:tc>
-                <a:tc>
-                  <a:txBody>
-                    <a:bodyPr wrap="square"/>
-                    <a:lstStyle/>
-                    <a:p>
-                      <a:r>
-                        <a:rPr sz="1000" b="0">
-                          <a:solidFill>
-                            <a:srgbClr val="282828"/>
-                          </a:solidFill>
-                          <a:latin typeface="Arial"/>
-                        </a:rPr>
-                        <a:t>closed loop in the shared loop code: noise, walk, ramp; noiseless step; within-scan drift</a:t>
-                      </a:r>
-                    </a:p>
-                  </a:txBody>
-                  <a:tcPr marL="54864" marR="54864" marT="18288" marB="18288">
-                    <a:solidFill>
-                      <a:srgbClr val="FFFFFF"/>
-                    </a:solidFill>
-                  </a:tcPr>
-                </a:tc>
-                <a:tc>
-                  <a:txBody>
-                    <a:bodyPr wrap="square"/>
-                    <a:lstStyle/>
-                    <a:p>
-                      <a:r>
-                        <a:rPr sz="1000" b="0">
-                          <a:solidFill>
-                            <a:srgbClr val="282828"/>
-                          </a:solidFill>
-                          <a:latin typeface="Arial"/>
-                        </a:rPr>
-                        <a:t>photons per cycle for 3 pm; fixed error</a:t>
-                      </a:r>
-                    </a:p>
-                  </a:txBody>
-                  <a:tcPr marL="54864" marR="54864" marT="18288" marB="18288">
-                    <a:solidFill>
-                      <a:srgbClr val="FFFFFF"/>
-                    </a:solidFill>
-                  </a:tcPr>
-                </a:tc>
-              </a:tr>
-              <a:tr h="434340">
-                <a:tc>
-                  <a:txBody>
-                    <a:bodyPr wrap="square"/>
-                    <a:lstStyle/>
-                    <a:p>
-                      <a:r>
-                        <a:rPr sz="1000" b="0">
-                          <a:solidFill>
-                            <a:srgbClr val="282828"/>
-                          </a:solidFill>
-                          <a:latin typeface="Arial"/>
-                        </a:rPr>
-                        <a:t>9</a:t>
-                      </a:r>
-                    </a:p>
-                  </a:txBody>
-                  <a:tcPr marL="54864" marR="54864" marT="18288" marB="18288">
-                    <a:solidFill>
-                      <a:srgbClr val="ECF1F6"/>
-                    </a:solidFill>
-                  </a:tcPr>
-                </a:tc>
-                <a:tc>
-                  <a:txBody>
-                    <a:bodyPr wrap="square"/>
-                    <a:lstStyle/>
-                    <a:p>
-                      <a:r>
-                        <a:rPr sz="1000" b="0">
-                          <a:solidFill>
-                            <a:srgbClr val="282828"/>
-                          </a:solidFill>
-                          <a:latin typeface="Arial"/>
-                        </a:rPr>
-                        <a:t>descent: the start ladder with unwrapping and recalibration on and off</a:t>
-                      </a:r>
-                    </a:p>
-                  </a:txBody>
-                  <a:tcPr marL="54864" marR="54864" marT="18288" marB="18288">
-                    <a:solidFill>
-                      <a:srgbClr val="ECF1F6"/>
-                    </a:solidFill>
-                  </a:tcPr>
-                </a:tc>
-                <a:tc>
-                  <a:txBody>
-                    <a:bodyPr wrap="square"/>
-                    <a:lstStyle/>
-                    <a:p>
-                      <a:r>
-                        <a:rPr sz="1000" b="0">
-                          <a:solidFill>
-                            <a:srgbClr val="282828"/>
-                          </a:solidFill>
-                          <a:latin typeface="Arial"/>
-                        </a:rPr>
-                        <a:t>largest start brought to 3 pm</a:t>
-                      </a:r>
-                    </a:p>
-                  </a:txBody>
-                  <a:tcPr marL="54864" marR="54864" marT="18288" marB="18288">
-                    <a:solidFill>
-                      <a:srgbClr val="ECF1F6"/>
-                    </a:solidFill>
-                  </a:tcPr>
-                </a:tc>
-              </a:tr>
-              <a:tr h="605790">
-                <a:tc>
-                  <a:txBody>
-                    <a:bodyPr wrap="square"/>
-                    <a:lstStyle/>
-                    <a:p>
-                      <a:r>
-                        <a:rPr sz="1000" b="0">
-                          <a:solidFill>
-                            <a:srgbClr val="282828"/>
-                          </a:solidFill>
-                          <a:latin typeface="Arial"/>
-                        </a:rPr>
-                        <a:t>10</a:t>
-                      </a:r>
-                    </a:p>
-                  </a:txBody>
-                  <a:tcPr marL="54864" marR="54864" marT="18288" marB="18288">
-                    <a:solidFill>
-                      <a:srgbClr val="FFFFFF"/>
-                    </a:solidFill>
-                  </a:tcPr>
-                </a:tc>
-                <a:tc>
-                  <a:txBody>
-                    <a:bodyPr wrap="square"/>
-                    <a:lstStyle/>
-                    <a:p>
-                      <a:r>
-                        <a:rPr sz="1000" b="0">
-                          <a:solidFill>
-                            <a:srgbClr val="282828"/>
-                          </a:solidFill>
-                          <a:latin typeface="Arial"/>
-                        </a:rPr>
-                        <a:t>systematics one at a time, uncalibrated and through the matrix; layout drawn from the emitted deck; parts from the sheet; report numbers first</a:t>
-                      </a:r>
-                    </a:p>
-                  </a:txBody>
-                  <a:tcPr marL="54864" marR="54864" marT="18288" marB="18288">
-                    <a:solidFill>
-                      <a:srgbClr val="FFFFFF"/>
-                    </a:solidFill>
-                  </a:tcPr>
-                </a:tc>
-                <a:tc>
-                  <a:txBody>
-                    <a:bodyPr wrap="square"/>
-                    <a:lstStyle/>
-                    <a:p>
-                      <a:r>
-                        <a:rPr sz="1000" b="0">
-                          <a:solidFill>
-                            <a:srgbClr val="282828"/>
-                          </a:solidFill>
-                          <a:latin typeface="Arial"/>
-                        </a:rPr>
-                        <a:t>one line per term on the systematics slide</a:t>
-                      </a:r>
-                    </a:p>
-                  </a:txBody>
-                  <a:tcPr marL="54864" marR="54864" marT="18288" marB="18288">
-                    <a:solidFill>
-                      <a:srgbClr val="FFFFFF"/>
-                    </a:solidFill>
-                  </a:tcPr>
-                </a:tc>
-              </a:tr>
-            </a:tbl>
-          </a:graphicData>
-        </a:graphic>
-      </p:graphicFrame>
       <p:sp>
         <p:nvSpPr>
-          <p:cNvPr id="6" name="TextBox 5"/>
+          <p:cNvPr id="4" name="TextBox 3"/>
           <p:cNvSpPr txBox="1"/>
           <p:nvPr/>
         </p:nvSpPr>
         <p:spPr>
           <a:xfrm>
-            <a:off x="6400800" y="4222242"/>
+            <a:off x="411480" y="1298448"/>
+            <a:ext cx="5806440" cy="274320"/>
+          </a:xfrm>
+          <a:prstGeom prst="rect">
+            <a:avLst/>
+          </a:prstGeom>
+          <a:noFill/>
+        </p:spPr>
+        <p:txBody>
+          <a:bodyPr wrap="square">
+            <a:spAutoFit/>
+          </a:bodyPr>
+          <a:lstStyle/>
+          <a:p>
+            <a:pPr>
+              <a:spcAft>
+                <a:spcPts val="600"/>
+              </a:spcAft>
+            </a:pPr>
+            <a:r>
+              <a:rPr sz="1200" b="0">
+                <a:solidFill>
+                  <a:srgbClr val="282828"/>
+                </a:solidFill>
+                <a:latin typeface="Arial"/>
+              </a:rPr>
+              <a:t>•  Interferometer (tg_psi_dm96_oap): tg96_run for the lens rig; tg96_run('bench.optics','oap','tag','oap') for the mirror rig; ./tg96_batch.sh lens_deck "'stages',{'bench','deck'},'battery.noise',true"; ./tg96_batch.sh loop_lens "'stages',{'bench','loop','figs'}".</a:t>
+            </a:r>
+          </a:p>
+          <a:p>
+            <a:pPr>
+              <a:spcAft>
+                <a:spcPts val="600"/>
+              </a:spcAft>
+            </a:pPr>
+            <a:r>
+              <a:rPr sz="1200" b="0">
+                <a:solidFill>
+                  <a:srgbClr val="282828"/>
+                </a:solidFill>
+                <a:latin typeface="Arial"/>
+              </a:rPr>
+              <a:t>•  Zernike sensors (zwfs_dm96): out = zwfs_run; (bench + battery + figures); zwfs_run('tag','ng385','NGRID',385); zwfs_run('MODEL',2048,'NGRID',385,'param_file','macos_param_2048.txt'); ./zwfs_batch.sh loop193 "'stages',{'bench','loop','figs'}".</a:t>
+            </a:r>
+          </a:p>
+          <a:p>
+            <a:pPr>
+              <a:spcAft>
+                <a:spcPts val="600"/>
+              </a:spcAft>
+            </a:pPr>
+            <a:r>
+              <a:rPr sz="1200" b="0">
+                <a:solidFill>
+                  <a:srgbClr val="282828"/>
+                </a:solidFill>
+                <a:latin typeface="Arial"/>
+              </a:rPr>
+              <a:t>•  Point-diffraction (pdi_dm96): P = pdi_params; out = pdi_run(P);; pdi_run('pdi.DIA_LAMD',1.0,'stages',{'bench','battery','figs'}); ./pdi_batch.sh TAG "pdi_params, 'stages',{'bench','loop','figs'}".</a:t>
+            </a:r>
+          </a:p>
+        </p:txBody>
+      </p:sp>
+      <p:sp>
+        <p:nvSpPr>
+          <p:cNvPr id="5" name="TextBox 4"/>
+          <p:cNvSpPr txBox="1"/>
+          <p:nvPr/>
+        </p:nvSpPr>
+        <p:spPr>
+          <a:xfrm>
+            <a:off x="6400800" y="1298448"/>
             <a:ext cx="5394960" cy="274320"/>
           </a:xfrm>
           <a:prstGeom prst="rect">
@@ -17937,13 +18880,84 @@
               </a:spcAft>
             </a:pPr>
             <a:r>
+              <a:rPr sz="1200" b="0">
+                <a:solidFill>
+                  <a:srgbClr val="282828"/>
+                </a:solidFill>
+                <a:latin typeface="Arial"/>
+              </a:rPr>
+              <a:t>•  The other gauges on the mirror rig: zwfs_run('bench.optics','oap','bench.coat_oap','bareAl','readings',{'L','S','V','P','PF'},'stages',{'bench','battery','noise','loop'},'mask.v_arm','engine').</a:t>
+            </a:r>
+          </a:p>
+          <a:p>
+            <a:pPr>
+              <a:spcAft>
+                <a:spcPts val="600"/>
+              </a:spcAft>
+            </a:pPr>
+            <a:r>
+              <a:rPr sz="1200" b="0">
+                <a:solidFill>
+                  <a:srgbClr val="282828"/>
+                </a:solidFill>
+                <a:latin typeface="Arial"/>
+              </a:rPr>
+              <a:t>•  Where: MACOS_resources/mmacos/templates/40_benches/{tg_psi_dm96_oap, zwfs_dm96, pdi_dm96}, the shared scoring library dm_gauge_lib, branch dev-candidate.  A model-1024 run needs about 11 GB; the batch wrappers run one at a time.</a:t>
+            </a:r>
+          </a:p>
+          <a:p>
+            <a:pPr>
+              <a:spcAft>
+                <a:spcPts val="600"/>
+              </a:spcAft>
+            </a:pPr>
+            <a:r>
+              <a:rPr sz="1200" b="0">
+                <a:solidFill>
+                  <a:srgbClr val="282828"/>
+                </a:solidFill>
+                <a:latin typeface="Arial"/>
+              </a:rPr>
+              <a:t>•  Gates: every stage asserts its own gates (the mask round trip, the reference-wave surrogate, the fold, the pinhole, the analyzer); tDmgLoop 15/15; the mmacos fast suite 481/0.</a:t>
+            </a:r>
+          </a:p>
+        </p:txBody>
+      </p:sp>
+      <p:sp>
+        <p:nvSpPr>
+          <p:cNvPr id="6" name="TextBox 5"/>
+          <p:cNvSpPr txBox="1"/>
+          <p:nvPr/>
+        </p:nvSpPr>
+        <p:spPr>
+          <a:xfrm>
+            <a:off x="6400800" y="3736848"/>
+            <a:ext cx="5394960" cy="274320"/>
+          </a:xfrm>
+          <a:prstGeom prst="rect">
+            <a:avLst/>
+          </a:prstGeom>
+          <a:noFill/>
+        </p:spPr>
+        <p:txBody>
+          <a:bodyPr wrap="square">
+            <a:spAutoFit/>
+          </a:bodyPr>
+          <a:lstStyle/>
+          <a:p>
+            <a:pPr>
+              <a:spcAft>
+                <a:spcPts val="600"/>
+              </a:spcAft>
+            </a:pPr>
+            <a:r>
               <a:rPr sz="1050" b="0">
                 <a:solidFill>
                   <a:srgbClr val="6E6E6E"/>
                 </a:solidFill>
                 <a:latin typeface="Arial"/>
               </a:rPr>
-              <a:t>The scoring library (the loop, the unwrapper, the arm and analyzer maps, the clearance check) is shared by the three lanes; nothing is copied between them.  The path is recorded as reference memory so the next configuration follows it in a day.</a:t>
+              <a:t>Each directory's README carries the full command list and the run-tag index.</a:t>
             </a:r>
           </a:p>
         </p:txBody>
@@ -17956,7 +18970,7 @@
 </p:sld>
 </file>
 
-<file path=ppt/slides/slide34.xml><?xml version="1.0" encoding="utf-8"?>
+<file path=ppt/slides/slide36.xml><?xml version="1.0" encoding="utf-8"?>
 <p:sld xmlns:a="http://schemas.openxmlformats.org/drawingml/2006/main" xmlns:p="http://schemas.openxmlformats.org/presentationml/2006/main" xmlns:r="http://schemas.openxmlformats.org/officeDocument/2006/relationships">
   <p:cSld>
     <p:spTree>
@@ -18000,7 +19014,7 @@
                 </a:solidFill>
                 <a:latin typeface="Arial"/>
               </a:rPr>
-              <a:t>Run it yourself</a:t>
+              <a:t>Backup: the interferometer's three phase-shift forms</a:t>
             </a:r>
           </a:p>
           <a:p>
@@ -18016,7 +19030,7 @@
                 </a:solidFill>
                 <a:latin typeface="Arial"/>
               </a:rPr>
-              <a:t>One parameter sheet and one runner per approach, shared code underneath; every number here is reproduced by the commands below</a:t>
+              <a:t>The four frames are the same in the model; the forms differ in what they get wrong</a:t>
             </a:r>
           </a:p>
         </p:txBody>
@@ -18065,304 +19079,6 @@
           </a:p>
         </p:txBody>
       </p:sp>
-      <p:sp>
-        <p:nvSpPr>
-          <p:cNvPr id="4" name="TextBox 3"/>
-          <p:cNvSpPr txBox="1"/>
-          <p:nvPr/>
-        </p:nvSpPr>
-        <p:spPr>
-          <a:xfrm>
-            <a:off x="411480" y="1298448"/>
-            <a:ext cx="5806440" cy="274320"/>
-          </a:xfrm>
-          <a:prstGeom prst="rect">
-            <a:avLst/>
-          </a:prstGeom>
-          <a:noFill/>
-        </p:spPr>
-        <p:txBody>
-          <a:bodyPr wrap="square">
-            <a:spAutoFit/>
-          </a:bodyPr>
-          <a:lstStyle/>
-          <a:p>
-            <a:pPr>
-              <a:spcAft>
-                <a:spcPts val="600"/>
-              </a:spcAft>
-            </a:pPr>
-            <a:r>
-              <a:rPr sz="1200" b="0">
-                <a:solidFill>
-                  <a:srgbClr val="282828"/>
-                </a:solidFill>
-                <a:latin typeface="Arial"/>
-              </a:rPr>
-              <a:t>•  Interferometer (tg_psi_dm96_oap): tg96_run for the lens rig; tg96_run('bench.optics','oap','tag','oap') for the mirror rig; ./tg96_batch.sh lens_deck "'stages',{'bench','deck'},'battery.noise',true"; ./tg96_batch.sh loop_lens "'stages',{'bench','loop','figs'}".</a:t>
-            </a:r>
-          </a:p>
-          <a:p>
-            <a:pPr>
-              <a:spcAft>
-                <a:spcPts val="600"/>
-              </a:spcAft>
-            </a:pPr>
-            <a:r>
-              <a:rPr sz="1200" b="0">
-                <a:solidFill>
-                  <a:srgbClr val="282828"/>
-                </a:solidFill>
-                <a:latin typeface="Arial"/>
-              </a:rPr>
-              <a:t>•  Zernike sensors (zwfs_dm96): out = zwfs_run; (bench + battery + figures); zwfs_run('tag','ng385','NGRID',385); zwfs_run('MODEL',2048,'NGRID',385,'param_file','macos_param_2048.txt'); ./zwfs_batch.sh loop193 "'stages',{'bench','loop','figs'}".</a:t>
-            </a:r>
-          </a:p>
-          <a:p>
-            <a:pPr>
-              <a:spcAft>
-                <a:spcPts val="600"/>
-              </a:spcAft>
-            </a:pPr>
-            <a:r>
-              <a:rPr sz="1200" b="0">
-                <a:solidFill>
-                  <a:srgbClr val="282828"/>
-                </a:solidFill>
-                <a:latin typeface="Arial"/>
-              </a:rPr>
-              <a:t>•  Point-diffraction (pdi_dm96): P = pdi_params; out = pdi_run(P);; pdi_run('pdi.DIA_LAMD',1.0,'stages',{'bench','battery','figs'}); ./pdi_batch.sh TAG "pdi_params, 'stages',{'bench','loop','figs'}".</a:t>
-            </a:r>
-          </a:p>
-        </p:txBody>
-      </p:sp>
-      <p:sp>
-        <p:nvSpPr>
-          <p:cNvPr id="5" name="TextBox 4"/>
-          <p:cNvSpPr txBox="1"/>
-          <p:nvPr/>
-        </p:nvSpPr>
-        <p:spPr>
-          <a:xfrm>
-            <a:off x="6400800" y="1298448"/>
-            <a:ext cx="5394960" cy="274320"/>
-          </a:xfrm>
-          <a:prstGeom prst="rect">
-            <a:avLst/>
-          </a:prstGeom>
-          <a:noFill/>
-        </p:spPr>
-        <p:txBody>
-          <a:bodyPr wrap="square">
-            <a:spAutoFit/>
-          </a:bodyPr>
-          <a:lstStyle/>
-          <a:p>
-            <a:pPr>
-              <a:spcAft>
-                <a:spcPts val="600"/>
-              </a:spcAft>
-            </a:pPr>
-            <a:r>
-              <a:rPr sz="1200" b="0">
-                <a:solidFill>
-                  <a:srgbClr val="282828"/>
-                </a:solidFill>
-                <a:latin typeface="Arial"/>
-              </a:rPr>
-              <a:t>•  The other gauges on the mirror rig: zwfs_run('bench.optics','oap','bench.coat_oap','bareAl','readings',{'L','S','V','P','PF'},'stages',{'bench','battery','noise','loop'},'mask.v_arm','engine').</a:t>
-            </a:r>
-          </a:p>
-          <a:p>
-            <a:pPr>
-              <a:spcAft>
-                <a:spcPts val="600"/>
-              </a:spcAft>
-            </a:pPr>
-            <a:r>
-              <a:rPr sz="1200" b="0">
-                <a:solidFill>
-                  <a:srgbClr val="282828"/>
-                </a:solidFill>
-                <a:latin typeface="Arial"/>
-              </a:rPr>
-              <a:t>•  Where: MACOS_resources/mmacos/templates/40_benches/{tg_psi_dm96_oap, zwfs_dm96, pdi_dm96}, the shared scoring library dm_gauge_lib, branch dev-candidate.  A model-1024 run needs about 11 GB; the batch wrappers run one at a time.</a:t>
-            </a:r>
-          </a:p>
-          <a:p>
-            <a:pPr>
-              <a:spcAft>
-                <a:spcPts val="600"/>
-              </a:spcAft>
-            </a:pPr>
-            <a:r>
-              <a:rPr sz="1200" b="0">
-                <a:solidFill>
-                  <a:srgbClr val="282828"/>
-                </a:solidFill>
-                <a:latin typeface="Arial"/>
-              </a:rPr>
-              <a:t>•  Gates: every stage asserts its own gates (the mask round trip, the reference-wave surrogate, the fold, the pinhole, the analyzer); tDmgLoop 15/15; the mmacos fast suite 481/0.</a:t>
-            </a:r>
-          </a:p>
-        </p:txBody>
-      </p:sp>
-      <p:sp>
-        <p:nvSpPr>
-          <p:cNvPr id="6" name="TextBox 5"/>
-          <p:cNvSpPr txBox="1"/>
-          <p:nvPr/>
-        </p:nvSpPr>
-        <p:spPr>
-          <a:xfrm>
-            <a:off x="6400800" y="3736848"/>
-            <a:ext cx="5394960" cy="274320"/>
-          </a:xfrm>
-          <a:prstGeom prst="rect">
-            <a:avLst/>
-          </a:prstGeom>
-          <a:noFill/>
-        </p:spPr>
-        <p:txBody>
-          <a:bodyPr wrap="square">
-            <a:spAutoFit/>
-          </a:bodyPr>
-          <a:lstStyle/>
-          <a:p>
-            <a:pPr>
-              <a:spcAft>
-                <a:spcPts val="600"/>
-              </a:spcAft>
-            </a:pPr>
-            <a:r>
-              <a:rPr sz="1050" b="0">
-                <a:solidFill>
-                  <a:srgbClr val="6E6E6E"/>
-                </a:solidFill>
-                <a:latin typeface="Arial"/>
-              </a:rPr>
-              <a:t>Each directory's README carries the full command list and the run-tag index.</a:t>
-            </a:r>
-          </a:p>
-        </p:txBody>
-      </p:sp>
-    </p:spTree>
-  </p:cSld>
-  <p:clrMapOvr>
-    <a:masterClrMapping/>
-  </p:clrMapOvr>
-</p:sld>
-</file>
-
-<file path=ppt/slides/slide35.xml><?xml version="1.0" encoding="utf-8"?>
-<p:sld xmlns:a="http://schemas.openxmlformats.org/drawingml/2006/main" xmlns:p="http://schemas.openxmlformats.org/presentationml/2006/main" xmlns:r="http://schemas.openxmlformats.org/officeDocument/2006/relationships">
-  <p:cSld>
-    <p:spTree>
-      <p:nvGrpSpPr>
-        <p:cNvPr id="1" name=""/>
-        <p:cNvGrpSpPr/>
-        <p:nvPr/>
-      </p:nvGrpSpPr>
-      <p:grpSpPr/>
-      <p:sp>
-        <p:nvSpPr>
-          <p:cNvPr id="2" name="TextBox 1"/>
-          <p:cNvSpPr txBox="1"/>
-          <p:nvPr/>
-        </p:nvSpPr>
-        <p:spPr>
-          <a:xfrm>
-            <a:off x="411480" y="201168"/>
-            <a:ext cx="11368735" cy="914400"/>
-          </a:xfrm>
-          <a:prstGeom prst="rect">
-            <a:avLst/>
-          </a:prstGeom>
-          <a:noFill/>
-        </p:spPr>
-        <p:txBody>
-          <a:bodyPr wrap="square">
-            <a:spAutoFit/>
-          </a:bodyPr>
-          <a:lstStyle/>
-          <a:p>
-            <a:pPr>
-              <a:spcAft>
-                <a:spcPts val="400"/>
-              </a:spcAft>
-            </a:pPr>
-            <a:r>
-              <a:rPr sz="2400" b="1">
-                <a:solidFill>
-                  <a:srgbClr val="1F4E79"/>
-                </a:solidFill>
-                <a:latin typeface="Arial"/>
-              </a:rPr>
-              <a:t>Backup: the interferometer's three phase-shift forms</a:t>
-            </a:r>
-          </a:p>
-          <a:p>
-            <a:pPr>
-              <a:spcAft>
-                <a:spcPts val="0"/>
-              </a:spcAft>
-            </a:pPr>
-            <a:r>
-              <a:rPr sz="1250" b="0">
-                <a:solidFill>
-                  <a:srgbClr val="6E6E6E"/>
-                </a:solidFill>
-                <a:latin typeface="Arial"/>
-              </a:rPr>
-              <a:t>The four frames are the same in the model; the forms differ in what they get wrong</a:t>
-            </a:r>
-          </a:p>
-        </p:txBody>
-      </p:sp>
-      <p:sp>
-        <p:nvSpPr>
-          <p:cNvPr id="3" name="Rectangle 2"/>
-          <p:cNvSpPr/>
-          <p:nvPr/>
-        </p:nvSpPr>
-        <p:spPr>
-          <a:xfrm>
-            <a:off x="411480" y="1133856"/>
-            <a:ext cx="11368735" cy="20320"/>
-          </a:xfrm>
-          <a:prstGeom prst="rect">
-            <a:avLst/>
-          </a:prstGeom>
-          <a:solidFill>
-            <a:srgbClr val="B8C6D4"/>
-          </a:solidFill>
-          <a:ln>
-            <a:noFill/>
-          </a:ln>
-          <a:effectLst/>
-        </p:spPr>
-        <p:style>
-          <a:lnRef idx="1">
-            <a:schemeClr val="accent1"/>
-          </a:lnRef>
-          <a:fillRef idx="3">
-            <a:schemeClr val="accent1"/>
-          </a:fillRef>
-          <a:effectRef idx="2">
-            <a:schemeClr val="accent1"/>
-          </a:effectRef>
-          <a:fontRef idx="minor">
-            <a:schemeClr val="lt1"/>
-          </a:fontRef>
-        </p:style>
-        <p:txBody>
-          <a:bodyPr rtlCol="0" anchor="ctr"/>
-          <a:lstStyle/>
-          <a:p>
-            <a:pPr algn="ctr"/>
-          </a:p>
-        </p:txBody>
-      </p:sp>
       <p:graphicFrame>
         <p:nvGraphicFramePr>
           <p:cNvPr id="4" name="Table 3"/>
@@ -18798,7 +19514,7 @@
 </p:sld>
 </file>
 
-<file path=ppt/slides/slide36.xml><?xml version="1.0" encoding="utf-8"?>
+<file path=ppt/slides/slide37.xml><?xml version="1.0" encoding="utf-8"?>
 <p:sld xmlns:a="http://schemas.openxmlformats.org/drawingml/2006/main" xmlns:p="http://schemas.openxmlformats.org/presentationml/2006/main" xmlns:r="http://schemas.openxmlformats.org/officeDocument/2006/relationships">
   <p:cSld>
     <p:spTree>
@@ -19646,7 +20362,7 @@
 </p:sld>
 </file>
 
-<file path=ppt/slides/slide37.xml><?xml version="1.0" encoding="utf-8"?>
+<file path=ppt/slides/slide38.xml><?xml version="1.0" encoding="utf-8"?>
 <p:sld xmlns:a="http://schemas.openxmlformats.org/drawingml/2006/main" xmlns:p="http://schemas.openxmlformats.org/presentationml/2006/main" xmlns:r="http://schemas.openxmlformats.org/officeDocument/2006/relationships">
   <p:cSld>
     <p:spTree>
@@ -19936,7 +20652,7 @@
 </p:sld>
 </file>
 
-<file path=ppt/slides/slide38.xml><?xml version="1.0" encoding="utf-8"?>
+<file path=ppt/slides/slide39.xml><?xml version="1.0" encoding="utf-8"?>
 <p:sld xmlns:a="http://schemas.openxmlformats.org/drawingml/2006/main" xmlns:p="http://schemas.openxmlformats.org/presentationml/2006/main" xmlns:r="http://schemas.openxmlformats.org/officeDocument/2006/relationships">
   <p:cSld>
     <p:spTree>
@@ -20780,1067 +21496,6 @@
                 <a:latin typeface="Arial"/>
               </a:rPr>
               <a:t>Run tags pin20_1024, pin10_2048, pin20_loop, pin10_loop, pfdeck, pfdeck_frz, pdi193se_sh5, pdi193se_ls; layouts psri_layout.png and psri_render.png in pdi_dm96.</a:t>
-            </a:r>
-          </a:p>
-        </p:txBody>
-      </p:sp>
-    </p:spTree>
-  </p:cSld>
-  <p:clrMapOvr>
-    <a:masterClrMapping/>
-  </p:clrMapOvr>
-</p:sld>
-</file>
-
-<file path=ppt/slides/slide39.xml><?xml version="1.0" encoding="utf-8"?>
-<p:sld xmlns:a="http://schemas.openxmlformats.org/drawingml/2006/main" xmlns:p="http://schemas.openxmlformats.org/presentationml/2006/main" xmlns:r="http://schemas.openxmlformats.org/officeDocument/2006/relationships">
-  <p:cSld>
-    <p:spTree>
-      <p:nvGrpSpPr>
-        <p:cNvPr id="1" name=""/>
-        <p:cNvGrpSpPr/>
-        <p:nvPr/>
-      </p:nvGrpSpPr>
-      <p:grpSpPr/>
-      <p:sp>
-        <p:nvSpPr>
-          <p:cNvPr id="2" name="TextBox 1"/>
-          <p:cNvSpPr txBox="1"/>
-          <p:nvPr/>
-        </p:nvSpPr>
-        <p:spPr>
-          <a:xfrm>
-            <a:off x="411480" y="201168"/>
-            <a:ext cx="11368735" cy="914400"/>
-          </a:xfrm>
-          <a:prstGeom prst="rect">
-            <a:avLst/>
-          </a:prstGeom>
-          <a:noFill/>
-        </p:spPr>
-        <p:txBody>
-          <a:bodyPr wrap="square">
-            <a:spAutoFit/>
-          </a:bodyPr>
-          <a:lstStyle/>
-          <a:p>
-            <a:pPr>
-              <a:spcAft>
-                <a:spcPts val="400"/>
-              </a:spcAft>
-            </a:pPr>
-            <a:r>
-              <a:rPr sz="2400" b="1">
-                <a:solidFill>
-                  <a:srgbClr val="1F4E79"/>
-                </a:solidFill>
-                <a:latin typeface="Arial"/>
-              </a:rPr>
-              <a:t>Backup: drift within a measurement</a:t>
-            </a:r>
-          </a:p>
-          <a:p>
-            <a:pPr>
-              <a:spcAft>
-                <a:spcPts val="0"/>
-              </a:spcAft>
-            </a:pPr>
-            <a:r>
-              <a:rPr sz="1250" b="0">
-                <a:solidFill>
-                  <a:srgbClr val="6E6E6E"/>
-                </a:solidFill>
-                <a:latin typeface="Arial"/>
-              </a:rPr>
-              <a:t>A mirror that drifts during a stepped scan helps the stepped readings; a camera that drifts during the scan hurts them; the simultaneous readings see neither</a:t>
-            </a:r>
-          </a:p>
-        </p:txBody>
-      </p:sp>
-      <p:sp>
-        <p:nvSpPr>
-          <p:cNvPr id="3" name="Rectangle 2"/>
-          <p:cNvSpPr/>
-          <p:nvPr/>
-        </p:nvSpPr>
-        <p:spPr>
-          <a:xfrm>
-            <a:off x="411480" y="1133856"/>
-            <a:ext cx="11368735" cy="20320"/>
-          </a:xfrm>
-          <a:prstGeom prst="rect">
-            <a:avLst/>
-          </a:prstGeom>
-          <a:solidFill>
-            <a:srgbClr val="B8C6D4"/>
-          </a:solidFill>
-          <a:ln>
-            <a:noFill/>
-          </a:ln>
-          <a:effectLst/>
-        </p:spPr>
-        <p:style>
-          <a:lnRef idx="1">
-            <a:schemeClr val="accent1"/>
-          </a:lnRef>
-          <a:fillRef idx="3">
-            <a:schemeClr val="accent1"/>
-          </a:fillRef>
-          <a:effectRef idx="2">
-            <a:schemeClr val="accent1"/>
-          </a:effectRef>
-          <a:fontRef idx="minor">
-            <a:schemeClr val="lt1"/>
-          </a:fontRef>
-        </p:style>
-        <p:txBody>
-          <a:bodyPr rtlCol="0" anchor="ctr"/>
-          <a:lstStyle/>
-          <a:p>
-            <a:pPr algn="ctr"/>
-          </a:p>
-        </p:txBody>
-      </p:sp>
-      <p:graphicFrame>
-        <p:nvGraphicFramePr>
-          <p:cNvPr id="4" name="Table 3"/>
-          <p:cNvGraphicFramePr>
-            <a:graphicFrameLocks noGrp="1"/>
-          </p:cNvGraphicFramePr>
-          <p:nvPr/>
-        </p:nvGraphicFramePr>
-        <p:xfrm>
-          <a:off x="411480" y="1298448"/>
-          <a:ext cx="5806437" cy="1680210"/>
-        </p:xfrm>
-        <a:graphic>
-          <a:graphicData uri="http://schemas.openxmlformats.org/drawingml/2006/table">
-            <a:tbl>
-              <a:tblPr firstRow="1" bandRow="1">
-                <a:tableStyleId>{5C22544A-7EE6-4342-B048-85BDC9FD1C3A}</a:tableStyleId>
-              </a:tblPr>
-              <a:tblGrid>
-                <a:gridCol w="3208822"/>
-                <a:gridCol w="534803"/>
-                <a:gridCol w="534803"/>
-                <a:gridCol w="458403"/>
-                <a:gridCol w="534803"/>
-                <a:gridCol w="534803"/>
-              </a:tblGrid>
-              <a:tr h="280035">
-                <a:tc>
-                  <a:txBody>
-                    <a:bodyPr wrap="square"/>
-                    <a:lstStyle/>
-                    <a:p>
-                      <a:r>
-                        <a:rPr sz="1100" b="1">
-                          <a:solidFill>
-                            <a:srgbClr val="FFFFFF"/>
-                          </a:solidFill>
-                          <a:latin typeface="Arial"/>
-                        </a:rPr>
-                        <a:t>hold error at 1e15 photons per cycle</a:t>
-                      </a:r>
-                    </a:p>
-                  </a:txBody>
-                  <a:tcPr marL="54864" marR="54864" marT="18288" marB="18288">
-                    <a:solidFill>
-                      <a:srgbClr val="1F4E79"/>
-                    </a:solidFill>
-                  </a:tcPr>
-                </a:tc>
-                <a:tc>
-                  <a:txBody>
-                    <a:bodyPr wrap="square"/>
-                    <a:lstStyle/>
-                    <a:p>
-                      <a:r>
-                        <a:rPr sz="1100" b="1">
-                          <a:solidFill>
-                            <a:srgbClr val="FFFFFF"/>
-                          </a:solidFill>
-                          <a:latin typeface="Arial"/>
-                        </a:rPr>
-                        <a:t>linear</a:t>
-                      </a:r>
-                    </a:p>
-                  </a:txBody>
-                  <a:tcPr marL="54864" marR="54864" marT="18288" marB="18288">
-                    <a:solidFill>
-                      <a:srgbClr val="1F4E79"/>
-                    </a:solidFill>
-                  </a:tcPr>
-                </a:tc>
-                <a:tc>
-                  <a:txBody>
-                    <a:bodyPr wrap="square"/>
-                    <a:lstStyle/>
-                    <a:p>
-                      <a:r>
-                        <a:rPr sz="1100" b="1">
-                          <a:solidFill>
-                            <a:srgbClr val="FFFFFF"/>
-                          </a:solidFill>
-                          <a:latin typeface="Arial"/>
-                        </a:rPr>
-                        <a:t>stepped</a:t>
-                      </a:r>
-                    </a:p>
-                  </a:txBody>
-                  <a:tcPr marL="54864" marR="54864" marT="18288" marB="18288">
-                    <a:solidFill>
-                      <a:srgbClr val="1F4E79"/>
-                    </a:solidFill>
-                  </a:tcPr>
-                </a:tc>
-                <a:tc>
-                  <a:txBody>
-                    <a:bodyPr wrap="square"/>
-                    <a:lstStyle/>
-                    <a:p>
-                      <a:r>
-                        <a:rPr sz="1100" b="1">
-                          <a:solidFill>
-                            <a:srgbClr val="FFFFFF"/>
-                          </a:solidFill>
-                          <a:latin typeface="Arial"/>
-                        </a:rPr>
-                        <a:t>vector</a:t>
-                      </a:r>
-                    </a:p>
-                  </a:txBody>
-                  <a:tcPr marL="54864" marR="54864" marT="18288" marB="18288">
-                    <a:solidFill>
-                      <a:srgbClr val="1F4E79"/>
-                    </a:solidFill>
-                  </a:tcPr>
-                </a:tc>
-                <a:tc>
-                  <a:txBody>
-                    <a:bodyPr wrap="square"/>
-                    <a:lstStyle/>
-                    <a:p>
-                      <a:r>
-                        <a:rPr sz="1100" b="1">
-                          <a:solidFill>
-                            <a:srgbClr val="FFFFFF"/>
-                          </a:solidFill>
-                          <a:latin typeface="Arial"/>
-                        </a:rPr>
-                        <a:t>pinhole</a:t>
-                      </a:r>
-                    </a:p>
-                  </a:txBody>
-                  <a:tcPr marL="54864" marR="54864" marT="18288" marB="18288">
-                    <a:solidFill>
-                      <a:srgbClr val="1F4E79"/>
-                    </a:solidFill>
-                  </a:tcPr>
-                </a:tc>
-                <a:tc>
-                  <a:txBody>
-                    <a:bodyPr wrap="square"/>
-                    <a:lstStyle/>
-                    <a:p>
-                      <a:r>
-                        <a:rPr sz="1100" b="1">
-                          <a:solidFill>
-                            <a:srgbClr val="FFFFFF"/>
-                          </a:solidFill>
-                          <a:latin typeface="Arial"/>
-                        </a:rPr>
-                        <a:t>P/SRI</a:t>
-                      </a:r>
-                    </a:p>
-                  </a:txBody>
-                  <a:tcPr marL="54864" marR="54864" marT="18288" marB="18288">
-                    <a:solidFill>
-                      <a:srgbClr val="1F4E79"/>
-                    </a:solidFill>
-                  </a:tcPr>
-                </a:tc>
-              </a:tr>
-              <a:tr h="280035">
-                <a:tc>
-                  <a:txBody>
-                    <a:bodyPr wrap="square"/>
-                    <a:lstStyle/>
-                    <a:p>
-                      <a:r>
-                        <a:rPr sz="1100" b="0">
-                          <a:solidFill>
-                            <a:srgbClr val="282828"/>
-                          </a:solidFill>
-                          <a:latin typeface="Arial"/>
-                        </a:rPr>
-                        <a:t>2 pm walk, mirror still during a scan</a:t>
-                      </a:r>
-                    </a:p>
-                  </a:txBody>
-                  <a:tcPr marL="54864" marR="54864" marT="18288" marB="18288">
-                    <a:solidFill>
-                      <a:srgbClr val="FFFFFF"/>
-                    </a:solidFill>
-                  </a:tcPr>
-                </a:tc>
-                <a:tc>
-                  <a:txBody>
-                    <a:bodyPr wrap="square"/>
-                    <a:lstStyle/>
-                    <a:p>
-                      <a:r>
-                        <a:rPr sz="1100" b="0">
-                          <a:solidFill>
-                            <a:srgbClr val="282828"/>
-                          </a:solidFill>
-                          <a:latin typeface="Arial"/>
-                        </a:rPr>
-                        <a:t>2.38</a:t>
-                      </a:r>
-                    </a:p>
-                  </a:txBody>
-                  <a:tcPr marL="54864" marR="54864" marT="18288" marB="18288">
-                    <a:solidFill>
-                      <a:srgbClr val="FFFFFF"/>
-                    </a:solidFill>
-                  </a:tcPr>
-                </a:tc>
-                <a:tc>
-                  <a:txBody>
-                    <a:bodyPr wrap="square"/>
-                    <a:lstStyle/>
-                    <a:p>
-                      <a:r>
-                        <a:rPr sz="1100" b="0">
-                          <a:solidFill>
-                            <a:srgbClr val="282828"/>
-                          </a:solidFill>
-                          <a:latin typeface="Arial"/>
-                        </a:rPr>
-                        <a:t>2.32</a:t>
-                      </a:r>
-                    </a:p>
-                  </a:txBody>
-                  <a:tcPr marL="54864" marR="54864" marT="18288" marB="18288">
-                    <a:solidFill>
-                      <a:srgbClr val="FFFFFF"/>
-                    </a:solidFill>
-                  </a:tcPr>
-                </a:tc>
-                <a:tc>
-                  <a:txBody>
-                    <a:bodyPr wrap="square"/>
-                    <a:lstStyle/>
-                    <a:p>
-                      <a:r>
-                        <a:rPr sz="1100" b="0">
-                          <a:solidFill>
-                            <a:srgbClr val="282828"/>
-                          </a:solidFill>
-                          <a:latin typeface="Arial"/>
-                        </a:rPr>
-                        <a:t>2.32</a:t>
-                      </a:r>
-                    </a:p>
-                  </a:txBody>
-                  <a:tcPr marL="54864" marR="54864" marT="18288" marB="18288">
-                    <a:solidFill>
-                      <a:srgbClr val="FFFFFF"/>
-                    </a:solidFill>
-                  </a:tcPr>
-                </a:tc>
-                <a:tc>
-                  <a:txBody>
-                    <a:bodyPr wrap="square"/>
-                    <a:lstStyle/>
-                    <a:p>
-                      <a:r>
-                        <a:rPr sz="1100" b="0">
-                          <a:solidFill>
-                            <a:srgbClr val="282828"/>
-                          </a:solidFill>
-                          <a:latin typeface="Arial"/>
-                        </a:rPr>
-                        <a:t>2.32</a:t>
-                      </a:r>
-                    </a:p>
-                  </a:txBody>
-                  <a:tcPr marL="54864" marR="54864" marT="18288" marB="18288">
-                    <a:solidFill>
-                      <a:srgbClr val="FFFFFF"/>
-                    </a:solidFill>
-                  </a:tcPr>
-                </a:tc>
-                <a:tc>
-                  <a:txBody>
-                    <a:bodyPr wrap="square"/>
-                    <a:lstStyle/>
-                    <a:p>
-                      <a:r>
-                        <a:rPr sz="1100" b="0">
-                          <a:solidFill>
-                            <a:srgbClr val="282828"/>
-                          </a:solidFill>
-                          <a:latin typeface="Arial"/>
-                        </a:rPr>
-                        <a:t>2.33 pm</a:t>
-                      </a:r>
-                    </a:p>
-                  </a:txBody>
-                  <a:tcPr marL="54864" marR="54864" marT="18288" marB="18288">
-                    <a:solidFill>
-                      <a:srgbClr val="FFFFFF"/>
-                    </a:solidFill>
-                  </a:tcPr>
-                </a:tc>
-              </a:tr>
-              <a:tr h="280035">
-                <a:tc>
-                  <a:txBody>
-                    <a:bodyPr wrap="square"/>
-                    <a:lstStyle/>
-                    <a:p>
-                      <a:r>
-                        <a:rPr sz="1100" b="0">
-                          <a:solidFill>
-                            <a:srgbClr val="282828"/>
-                          </a:solidFill>
-                          <a:latin typeface="Arial"/>
-                        </a:rPr>
-                        <a:t>2 pm walk, mirror drifting across the scan</a:t>
-                      </a:r>
-                    </a:p>
-                  </a:txBody>
-                  <a:tcPr marL="54864" marR="54864" marT="18288" marB="18288">
-                    <a:solidFill>
-                      <a:srgbClr val="ECF1F6"/>
-                    </a:solidFill>
-                  </a:tcPr>
-                </a:tc>
-                <a:tc>
-                  <a:txBody>
-                    <a:bodyPr wrap="square"/>
-                    <a:lstStyle/>
-                    <a:p>
-                      <a:r>
-                        <a:rPr sz="1100" b="0">
-                          <a:solidFill>
-                            <a:srgbClr val="282828"/>
-                          </a:solidFill>
-                          <a:latin typeface="Arial"/>
-                        </a:rPr>
-                        <a:t>2.38</a:t>
-                      </a:r>
-                    </a:p>
-                  </a:txBody>
-                  <a:tcPr marL="54864" marR="54864" marT="18288" marB="18288">
-                    <a:solidFill>
-                      <a:srgbClr val="ECF1F6"/>
-                    </a:solidFill>
-                  </a:tcPr>
-                </a:tc>
-                <a:tc>
-                  <a:txBody>
-                    <a:bodyPr wrap="square"/>
-                    <a:lstStyle/>
-                    <a:p>
-                      <a:r>
-                        <a:rPr sz="1100" b="0">
-                          <a:solidFill>
-                            <a:srgbClr val="282828"/>
-                          </a:solidFill>
-                          <a:latin typeface="Arial"/>
-                        </a:rPr>
-                        <a:t>1.57</a:t>
-                      </a:r>
-                    </a:p>
-                  </a:txBody>
-                  <a:tcPr marL="54864" marR="54864" marT="18288" marB="18288">
-                    <a:solidFill>
-                      <a:srgbClr val="ECF1F6"/>
-                    </a:solidFill>
-                  </a:tcPr>
-                </a:tc>
-                <a:tc>
-                  <a:txBody>
-                    <a:bodyPr wrap="square"/>
-                    <a:lstStyle/>
-                    <a:p>
-                      <a:r>
-                        <a:rPr sz="1100" b="0">
-                          <a:solidFill>
-                            <a:srgbClr val="282828"/>
-                          </a:solidFill>
-                          <a:latin typeface="Arial"/>
-                        </a:rPr>
-                        <a:t>2.32</a:t>
-                      </a:r>
-                    </a:p>
-                  </a:txBody>
-                  <a:tcPr marL="54864" marR="54864" marT="18288" marB="18288">
-                    <a:solidFill>
-                      <a:srgbClr val="ECF1F6"/>
-                    </a:solidFill>
-                  </a:tcPr>
-                </a:tc>
-                <a:tc>
-                  <a:txBody>
-                    <a:bodyPr wrap="square"/>
-                    <a:lstStyle/>
-                    <a:p>
-                      <a:r>
-                        <a:rPr sz="1100" b="0">
-                          <a:solidFill>
-                            <a:srgbClr val="282828"/>
-                          </a:solidFill>
-                          <a:latin typeface="Arial"/>
-                        </a:rPr>
-                        <a:t>1.58</a:t>
-                      </a:r>
-                    </a:p>
-                  </a:txBody>
-                  <a:tcPr marL="54864" marR="54864" marT="18288" marB="18288">
-                    <a:solidFill>
-                      <a:srgbClr val="ECF1F6"/>
-                    </a:solidFill>
-                  </a:tcPr>
-                </a:tc>
-                <a:tc>
-                  <a:txBody>
-                    <a:bodyPr wrap="square"/>
-                    <a:lstStyle/>
-                    <a:p>
-                      <a:r>
-                        <a:rPr sz="1100" b="0">
-                          <a:solidFill>
-                            <a:srgbClr val="282828"/>
-                          </a:solidFill>
-                          <a:latin typeface="Arial"/>
-                        </a:rPr>
-                        <a:t>1.71 pm</a:t>
-                      </a:r>
-                    </a:p>
-                  </a:txBody>
-                  <a:tcPr marL="54864" marR="54864" marT="18288" marB="18288">
-                    <a:solidFill>
-                      <a:srgbClr val="ECF1F6"/>
-                    </a:solidFill>
-                  </a:tcPr>
-                </a:tc>
-              </a:tr>
-              <a:tr h="280035">
-                <a:tc>
-                  <a:txBody>
-                    <a:bodyPr wrap="square"/>
-                    <a:lstStyle/>
-                    <a:p>
-                      <a:r>
-                        <a:rPr sz="1100" b="0">
-                          <a:solidFill>
-                            <a:srgbClr val="282828"/>
-                          </a:solidFill>
-                          <a:latin typeface="Arial"/>
-                        </a:rPr>
-                        <a:t>5 pm ramp, mirror still</a:t>
-                      </a:r>
-                    </a:p>
-                  </a:txBody>
-                  <a:tcPr marL="54864" marR="54864" marT="18288" marB="18288">
-                    <a:solidFill>
-                      <a:srgbClr val="FFFFFF"/>
-                    </a:solidFill>
-                  </a:tcPr>
-                </a:tc>
-                <a:tc>
-                  <a:txBody>
-                    <a:bodyPr wrap="square"/>
-                    <a:lstStyle/>
-                    <a:p>
-                      <a:r>
-                        <a:rPr sz="1100" b="0">
-                          <a:solidFill>
-                            <a:srgbClr val="282828"/>
-                          </a:solidFill>
-                          <a:latin typeface="Arial"/>
-                        </a:rPr>
-                        <a:t>27.6</a:t>
-                      </a:r>
-                    </a:p>
-                  </a:txBody>
-                  <a:tcPr marL="54864" marR="54864" marT="18288" marB="18288">
-                    <a:solidFill>
-                      <a:srgbClr val="FFFFFF"/>
-                    </a:solidFill>
-                  </a:tcPr>
-                </a:tc>
-                <a:tc>
-                  <a:txBody>
-                    <a:bodyPr wrap="square"/>
-                    <a:lstStyle/>
-                    <a:p>
-                      <a:r>
-                        <a:rPr sz="1100" b="0">
-                          <a:solidFill>
-                            <a:srgbClr val="282828"/>
-                          </a:solidFill>
-                          <a:latin typeface="Arial"/>
-                        </a:rPr>
-                        <a:t>10.05</a:t>
-                      </a:r>
-                    </a:p>
-                  </a:txBody>
-                  <a:tcPr marL="54864" marR="54864" marT="18288" marB="18288">
-                    <a:solidFill>
-                      <a:srgbClr val="FFFFFF"/>
-                    </a:solidFill>
-                  </a:tcPr>
-                </a:tc>
-                <a:tc>
-                  <a:txBody>
-                    <a:bodyPr wrap="square"/>
-                    <a:lstStyle/>
-                    <a:p>
-                      <a:r>
-                        <a:rPr sz="1100" b="0">
-                          <a:solidFill>
-                            <a:srgbClr val="282828"/>
-                          </a:solidFill>
-                          <a:latin typeface="Arial"/>
-                        </a:rPr>
-                        <a:t>9.87</a:t>
-                      </a:r>
-                    </a:p>
-                  </a:txBody>
-                  <a:tcPr marL="54864" marR="54864" marT="18288" marB="18288">
-                    <a:solidFill>
-                      <a:srgbClr val="FFFFFF"/>
-                    </a:solidFill>
-                  </a:tcPr>
-                </a:tc>
-                <a:tc>
-                  <a:txBody>
-                    <a:bodyPr wrap="square"/>
-                    <a:lstStyle/>
-                    <a:p>
-                      <a:r>
-                        <a:rPr sz="1100" b="0">
-                          <a:solidFill>
-                            <a:srgbClr val="282828"/>
-                          </a:solidFill>
-                          <a:latin typeface="Arial"/>
-                        </a:rPr>
-                        <a:t>9.86</a:t>
-                      </a:r>
-                    </a:p>
-                  </a:txBody>
-                  <a:tcPr marL="54864" marR="54864" marT="18288" marB="18288">
-                    <a:solidFill>
-                      <a:srgbClr val="FFFFFF"/>
-                    </a:solidFill>
-                  </a:tcPr>
-                </a:tc>
-                <a:tc>
-                  <a:txBody>
-                    <a:bodyPr wrap="square"/>
-                    <a:lstStyle/>
-                    <a:p>
-                      <a:r>
-                        <a:rPr sz="1100" b="0">
-                          <a:solidFill>
-                            <a:srgbClr val="282828"/>
-                          </a:solidFill>
-                          <a:latin typeface="Arial"/>
-                        </a:rPr>
-                        <a:t>9.88 pm</a:t>
-                      </a:r>
-                    </a:p>
-                  </a:txBody>
-                  <a:tcPr marL="54864" marR="54864" marT="18288" marB="18288">
-                    <a:solidFill>
-                      <a:srgbClr val="FFFFFF"/>
-                    </a:solidFill>
-                  </a:tcPr>
-                </a:tc>
-              </a:tr>
-              <a:tr h="280035">
-                <a:tc>
-                  <a:txBody>
-                    <a:bodyPr wrap="square"/>
-                    <a:lstStyle/>
-                    <a:p>
-                      <a:r>
-                        <a:rPr sz="1100" b="0">
-                          <a:solidFill>
-                            <a:srgbClr val="282828"/>
-                          </a:solidFill>
-                          <a:latin typeface="Arial"/>
-                        </a:rPr>
-                        <a:t>5 pm ramp, drifting across the scan</a:t>
-                      </a:r>
-                    </a:p>
-                  </a:txBody>
-                  <a:tcPr marL="54864" marR="54864" marT="18288" marB="18288">
-                    <a:solidFill>
-                      <a:srgbClr val="ECF1F6"/>
-                    </a:solidFill>
-                  </a:tcPr>
-                </a:tc>
-                <a:tc>
-                  <a:txBody>
-                    <a:bodyPr wrap="square"/>
-                    <a:lstStyle/>
-                    <a:p>
-                      <a:r>
-                        <a:rPr sz="1100" b="0">
-                          <a:solidFill>
-                            <a:srgbClr val="282828"/>
-                          </a:solidFill>
-                          <a:latin typeface="Arial"/>
-                        </a:rPr>
-                        <a:t>27.6</a:t>
-                      </a:r>
-                    </a:p>
-                  </a:txBody>
-                  <a:tcPr marL="54864" marR="54864" marT="18288" marB="18288">
-                    <a:solidFill>
-                      <a:srgbClr val="ECF1F6"/>
-                    </a:solidFill>
-                  </a:tcPr>
-                </a:tc>
-                <a:tc>
-                  <a:txBody>
-                    <a:bodyPr wrap="square"/>
-                    <a:lstStyle/>
-                    <a:p>
-                      <a:r>
-                        <a:rPr sz="1100" b="0">
-                          <a:solidFill>
-                            <a:srgbClr val="282828"/>
-                          </a:solidFill>
-                          <a:latin typeface="Arial"/>
-                        </a:rPr>
-                        <a:t>7.16</a:t>
-                      </a:r>
-                    </a:p>
-                  </a:txBody>
-                  <a:tcPr marL="54864" marR="54864" marT="18288" marB="18288">
-                    <a:solidFill>
-                      <a:srgbClr val="ECF1F6"/>
-                    </a:solidFill>
-                  </a:tcPr>
-                </a:tc>
-                <a:tc>
-                  <a:txBody>
-                    <a:bodyPr wrap="square"/>
-                    <a:lstStyle/>
-                    <a:p>
-                      <a:r>
-                        <a:rPr sz="1100" b="0">
-                          <a:solidFill>
-                            <a:srgbClr val="282828"/>
-                          </a:solidFill>
-                          <a:latin typeface="Arial"/>
-                        </a:rPr>
-                        <a:t>9.87</a:t>
-                      </a:r>
-                    </a:p>
-                  </a:txBody>
-                  <a:tcPr marL="54864" marR="54864" marT="18288" marB="18288">
-                    <a:solidFill>
-                      <a:srgbClr val="ECF1F6"/>
-                    </a:solidFill>
-                  </a:tcPr>
-                </a:tc>
-                <a:tc>
-                  <a:txBody>
-                    <a:bodyPr wrap="square"/>
-                    <a:lstStyle/>
-                    <a:p>
-                      <a:r>
-                        <a:rPr sz="1100" b="0">
-                          <a:solidFill>
-                            <a:srgbClr val="282828"/>
-                          </a:solidFill>
-                          <a:latin typeface="Arial"/>
-                        </a:rPr>
-                        <a:t>6.70</a:t>
-                      </a:r>
-                    </a:p>
-                  </a:txBody>
-                  <a:tcPr marL="54864" marR="54864" marT="18288" marB="18288">
-                    <a:solidFill>
-                      <a:srgbClr val="ECF1F6"/>
-                    </a:solidFill>
-                  </a:tcPr>
-                </a:tc>
-                <a:tc>
-                  <a:txBody>
-                    <a:bodyPr wrap="square"/>
-                    <a:lstStyle/>
-                    <a:p>
-                      <a:r>
-                        <a:rPr sz="1100" b="0">
-                          <a:solidFill>
-                            <a:srgbClr val="282828"/>
-                          </a:solidFill>
-                          <a:latin typeface="Arial"/>
-                        </a:rPr>
-                        <a:t>7.30 pm</a:t>
-                      </a:r>
-                    </a:p>
-                  </a:txBody>
-                  <a:tcPr marL="54864" marR="54864" marT="18288" marB="18288">
-                    <a:solidFill>
-                      <a:srgbClr val="ECF1F6"/>
-                    </a:solidFill>
-                  </a:tcPr>
-                </a:tc>
-              </a:tr>
-              <a:tr h="280035">
-                <a:tc>
-                  <a:txBody>
-                    <a:bodyPr wrap="square"/>
-                    <a:lstStyle/>
-                    <a:p>
-                      <a:r>
-                        <a:rPr sz="1100" b="0">
-                          <a:solidFill>
-                            <a:srgbClr val="282828"/>
-                          </a:solidFill>
-                          <a:latin typeface="Arial"/>
-                        </a:rPr>
-                        <a:t>camera scale drifting 1e-3 across the scan</a:t>
-                      </a:r>
-                    </a:p>
-                  </a:txBody>
-                  <a:tcPr marL="54864" marR="54864" marT="18288" marB="18288">
-                    <a:solidFill>
-                      <a:srgbClr val="FFFFFF"/>
-                    </a:solidFill>
-                  </a:tcPr>
-                </a:tc>
-                <a:tc>
-                  <a:txBody>
-                    <a:bodyPr wrap="square"/>
-                    <a:lstStyle/>
-                    <a:p>
-                      <a:r>
-                        <a:rPr sz="1100" b="0">
-                          <a:solidFill>
-                            <a:srgbClr val="282828"/>
-                          </a:solidFill>
-                          <a:latin typeface="Arial"/>
-                        </a:rPr>
-                        <a:t>10.8 nm</a:t>
-                      </a:r>
-                    </a:p>
-                  </a:txBody>
-                  <a:tcPr marL="54864" marR="54864" marT="18288" marB="18288">
-                    <a:solidFill>
-                      <a:srgbClr val="FFFFFF"/>
-                    </a:solidFill>
-                  </a:tcPr>
-                </a:tc>
-                <a:tc>
-                  <a:txBody>
-                    <a:bodyPr wrap="square"/>
-                    <a:lstStyle/>
-                    <a:p>
-                      <a:r>
-                        <a:rPr sz="1100" b="0">
-                          <a:solidFill>
-                            <a:srgbClr val="282828"/>
-                          </a:solidFill>
-                          <a:latin typeface="Arial"/>
-                        </a:rPr>
-                        <a:t>5.4</a:t>
-                      </a:r>
-                    </a:p>
-                  </a:txBody>
-                  <a:tcPr marL="54864" marR="54864" marT="18288" marB="18288">
-                    <a:solidFill>
-                      <a:srgbClr val="FFFFFF"/>
-                    </a:solidFill>
-                  </a:tcPr>
-                </a:tc>
-                <a:tc>
-                  <a:txBody>
-                    <a:bodyPr wrap="square"/>
-                    <a:lstStyle/>
-                    <a:p>
-                      <a:r>
-                        <a:rPr sz="1100" b="0">
-                          <a:solidFill>
-                            <a:srgbClr val="282828"/>
-                          </a:solidFill>
-                          <a:latin typeface="Arial"/>
-                        </a:rPr>
-                        <a:t>89 pm</a:t>
-                      </a:r>
-                    </a:p>
-                  </a:txBody>
-                  <a:tcPr marL="54864" marR="54864" marT="18288" marB="18288">
-                    <a:solidFill>
-                      <a:srgbClr val="FFFFFF"/>
-                    </a:solidFill>
-                  </a:tcPr>
-                </a:tc>
-                <a:tc>
-                  <a:txBody>
-                    <a:bodyPr wrap="square"/>
-                    <a:lstStyle/>
-                    <a:p>
-                      <a:r>
-                        <a:rPr sz="1100" b="0">
-                          <a:solidFill>
-                            <a:srgbClr val="282828"/>
-                          </a:solidFill>
-                          <a:latin typeface="Arial"/>
-                        </a:rPr>
-                        <a:t>5.3</a:t>
-                      </a:r>
-                    </a:p>
-                  </a:txBody>
-                  <a:tcPr marL="54864" marR="54864" marT="18288" marB="18288">
-                    <a:solidFill>
-                      <a:srgbClr val="FFFFFF"/>
-                    </a:solidFill>
-                  </a:tcPr>
-                </a:tc>
-                <a:tc>
-                  <a:txBody>
-                    <a:bodyPr wrap="square"/>
-                    <a:lstStyle/>
-                    <a:p>
-                      <a:r>
-                        <a:rPr sz="1100" b="0">
-                          <a:solidFill>
-                            <a:srgbClr val="282828"/>
-                          </a:solidFill>
-                          <a:latin typeface="Arial"/>
-                        </a:rPr>
-                        <a:t>10.7 pm</a:t>
-                      </a:r>
-                    </a:p>
-                  </a:txBody>
-                  <a:tcPr marL="54864" marR="54864" marT="18288" marB="18288">
-                    <a:solidFill>
-                      <a:srgbClr val="FFFFFF"/>
-                    </a:solidFill>
-                  </a:tcPr>
-                </a:tc>
-              </a:tr>
-            </a:tbl>
-          </a:graphicData>
-        </a:graphic>
-      </p:graphicFrame>
-      <p:sp>
-        <p:nvSpPr>
-          <p:cNvPr id="5" name="TextBox 4"/>
-          <p:cNvSpPr txBox="1"/>
-          <p:nvPr/>
-        </p:nvSpPr>
-        <p:spPr>
-          <a:xfrm>
-            <a:off x="6400800" y="1298448"/>
-            <a:ext cx="5394960" cy="274320"/>
-          </a:xfrm>
-          <a:prstGeom prst="rect">
-            <a:avLst/>
-          </a:prstGeom>
-          <a:noFill/>
-        </p:spPr>
-        <p:txBody>
-          <a:bodyPr wrap="square">
-            <a:spAutoFit/>
-          </a:bodyPr>
-          <a:lstStyle/>
-          <a:p>
-            <a:pPr>
-              <a:spcAft>
-                <a:spcPts val="600"/>
-              </a:spcAft>
-            </a:pPr>
-            <a:r>
-              <a:rPr sz="1200" b="0">
-                <a:solidFill>
-                  <a:srgbClr val="282828"/>
-                </a:solidFill>
-                <a:latin typeface="Arial"/>
-              </a:rPr>
-              <a:t>•  Why the mirror's drift helps: a scan reads the surface at its midpoint, a free half-step of prediction; 26-32% less hold error for the stepped readings.  The camera's drift is an additive bias, the opposite sign.</a:t>
-            </a:r>
-          </a:p>
-          <a:p>
-            <a:pPr>
-              <a:spcAft>
-                <a:spcPts val="600"/>
-              </a:spcAft>
-            </a:pPr>
-            <a:r>
-              <a:rPr sz="1200" b="0">
-                <a:solidFill>
-                  <a:srgbClr val="282828"/>
-                </a:solidFill>
-                <a:latin typeface="Arial"/>
-              </a:rPr>
-              <a:t>•  The P/SRI's reference arm walking (a random path walk of 1e-3 to 1e-1 rad per cycle) costs 4% in light over that hundredfold range: a path change is piston, the one mode the actuator estimator nulls.  Not benign for absolute field work; a tilting reference is outside the model.</a:t>
-            </a:r>
-          </a:p>
-          <a:p>
-            <a:pPr>
-              <a:spcAft>
-                <a:spcPts val="600"/>
-              </a:spcAft>
-            </a:pPr>
-            <a:r>
-              <a:rPr sz="1200" b="0">
-                <a:solidFill>
-                  <a:srgbClr val="282828"/>
-                </a:solidFill>
-                <a:latin typeface="Arial"/>
-              </a:rPr>
-              <a:t>•  The paper's camera number (0.13 electrons per pixel per cycle) is invisible to every reading: an electron is 1e-4 of a lit pixel's shot noise at 1e13 photons.</a:t>
-            </a:r>
-          </a:p>
-        </p:txBody>
-      </p:sp>
-      <p:sp>
-        <p:nvSpPr>
-          <p:cNvPr id="6" name="TextBox 5"/>
-          <p:cNvSpPr txBox="1"/>
-          <p:nvPr/>
-        </p:nvSpPr>
-        <p:spPr>
-          <a:xfrm>
-            <a:off x="6400800" y="3934968"/>
-            <a:ext cx="5394960" cy="274320"/>
-          </a:xfrm>
-          <a:prstGeom prst="rect">
-            <a:avLst/>
-          </a:prstGeom>
-          <a:noFill/>
-        </p:spPr>
-        <p:txBody>
-          <a:bodyPr wrap="square">
-            <a:spAutoFit/>
-          </a:bodyPr>
-          <a:lstStyle/>
-          <a:p>
-            <a:pPr>
-              <a:spcAft>
-                <a:spcPts val="600"/>
-              </a:spcAft>
-            </a:pPr>
-            <a:r>
-              <a:rPr sz="1050" b="0">
-                <a:solidFill>
-                  <a:srgbClr val="6E6E6E"/>
-                </a:solidFill>
-                <a:latin typeface="Arial"/>
-              </a:rPr>
-              <a:t>Run tags intra193_0, intra193, pcam193, pcam193r, pcam193ri, rw193_1e3/1e2/1e1, loop_lens_intra, loop_lens_cam.</a:t>
             </a:r>
           </a:p>
         </p:txBody>
@@ -22864,7 +22519,7 @@
                 </a:solidFill>
                 <a:latin typeface="Arial"/>
               </a:rPr>
-              <a:t>Backup: the vector sensor's polarization terms</a:t>
+              <a:t>Backup: drift within a measurement</a:t>
             </a:r>
           </a:p>
           <a:p>
@@ -22880,7 +22535,7 @@
                 </a:solidFill>
                 <a:latin typeface="Arial"/>
               </a:rPr>
-              <a:t>The metasurface's retardance error, the arm's polarization aberration, and the analyzer, each from the engine's polarized traces of this bench</a:t>
+              <a:t>A mirror that drifts during a stepped scan helps the stepped readings; a camera that drifts during the scan hurts them; the simultaneous readings see neither</a:t>
             </a:r>
           </a:p>
         </p:txBody>
@@ -22939,7 +22594,7 @@
         </p:nvGraphicFramePr>
         <p:xfrm>
           <a:off x="411480" y="1298448"/>
-          <a:ext cx="5806439" cy="3377565"/>
+          <a:ext cx="5806437" cy="1680210"/>
         </p:xfrm>
         <a:graphic>
           <a:graphicData uri="http://schemas.openxmlformats.org/drawingml/2006/table">
@@ -22948,11 +22603,14 @@
                 <a:tableStyleId>{5C22544A-7EE6-4342-B048-85BDC9FD1C3A}</a:tableStyleId>
               </a:tblPr>
               <a:tblGrid>
-                <a:gridCol w="1924420"/>
-                <a:gridCol w="1824881"/>
-                <a:gridCol w="2057138"/>
+                <a:gridCol w="3208822"/>
+                <a:gridCol w="534803"/>
+                <a:gridCol w="534803"/>
+                <a:gridCol w="458403"/>
+                <a:gridCol w="534803"/>
+                <a:gridCol w="534803"/>
               </a:tblGrid>
-              <a:tr h="468630">
+              <a:tr h="280035">
                 <a:tc>
                   <a:txBody>
                     <a:bodyPr wrap="square"/>
@@ -22965,7 +22623,7 @@
                           </a:solidFill>
                           <a:latin typeface="Arial"/>
                         </a:rPr>
-                        <a:t>term</a:t>
+                        <a:t>hold error at 1e15 photons per cycle</a:t>
                       </a:r>
                     </a:p>
                   </a:txBody>
@@ -22987,7 +22645,7 @@
                           </a:solidFill>
                           <a:latin typeface="Arial"/>
                         </a:rPr>
-                        <a:t>uncalibrated, on 100 nm pokes (12 nm rms)</a:t>
+                        <a:t>linear</a:t>
                       </a:r>
                     </a:p>
                   </a:txBody>
@@ -23009,7 +22667,7 @@
                           </a:solidFill>
                           <a:latin typeface="Arial"/>
                         </a:rPr>
-                        <a:t>through the matrix measured on the surface</a:t>
+                        <a:t>stepped</a:t>
                       </a:r>
                     </a:p>
                   </a:txBody>
@@ -23019,65 +22677,197 @@
                     </a:solidFill>
                   </a:tcPr>
                 </a:tc>
+                <a:tc>
+                  <a:txBody>
+                    <a:bodyPr wrap="square"/>
+                    <a:lstStyle/>
+                    <a:p>
+                      <a:r>
+                        <a:rPr sz="1100" b="1">
+                          <a:solidFill>
+                            <a:srgbClr val="FFFFFF"/>
+                          </a:solidFill>
+                          <a:latin typeface="Arial"/>
+                        </a:rPr>
+                        <a:t>vector</a:t>
+                      </a:r>
+                    </a:p>
+                  </a:txBody>
+                  <a:tcPr marL="54864" marR="54864" marT="18288" marB="18288">
+                    <a:solidFill>
+                      <a:srgbClr val="1F4E79"/>
+                    </a:solidFill>
+                  </a:tcPr>
+                </a:tc>
+                <a:tc>
+                  <a:txBody>
+                    <a:bodyPr wrap="square"/>
+                    <a:lstStyle/>
+                    <a:p>
+                      <a:r>
+                        <a:rPr sz="1100" b="1">
+                          <a:solidFill>
+                            <a:srgbClr val="FFFFFF"/>
+                          </a:solidFill>
+                          <a:latin typeface="Arial"/>
+                        </a:rPr>
+                        <a:t>pinhole</a:t>
+                      </a:r>
+                    </a:p>
+                  </a:txBody>
+                  <a:tcPr marL="54864" marR="54864" marT="18288" marB="18288">
+                    <a:solidFill>
+                      <a:srgbClr val="1F4E79"/>
+                    </a:solidFill>
+                  </a:tcPr>
+                </a:tc>
+                <a:tc>
+                  <a:txBody>
+                    <a:bodyPr wrap="square"/>
+                    <a:lstStyle/>
+                    <a:p>
+                      <a:r>
+                        <a:rPr sz="1100" b="1">
+                          <a:solidFill>
+                            <a:srgbClr val="FFFFFF"/>
+                          </a:solidFill>
+                          <a:latin typeface="Arial"/>
+                        </a:rPr>
+                        <a:t>P/SRI</a:t>
+                      </a:r>
+                    </a:p>
+                  </a:txBody>
+                  <a:tcPr marL="54864" marR="54864" marT="18288" marB="18288">
+                    <a:solidFill>
+                      <a:srgbClr val="1F4E79"/>
+                    </a:solidFill>
+                  </a:tcPr>
+                </a:tc>
               </a:tr>
-              <a:tr h="657225">
-                <a:tc>
-                  <a:txBody>
-                    <a:bodyPr wrap="square"/>
-                    <a:lstStyle/>
-                    <a:p>
-                      <a:r>
-                        <a:rPr sz="1100" b="0">
-                          <a:solidFill>
-                            <a:srgbClr val="282828"/>
-                          </a:solidFill>
-                          <a:latin typeface="Arial"/>
-                        </a:rPr>
-                        <a:t>metasurface retardance error 0.02 / 0.05 / 0.10 / 0.20 rad</a:t>
-                      </a:r>
-                    </a:p>
-                  </a:txBody>
-                  <a:tcPr marL="54864" marR="54864" marT="18288" marB="18288">
-                    <a:solidFill>
-                      <a:srgbClr val="FFFFFF"/>
-                    </a:solidFill>
-                  </a:tcPr>
-                </a:tc>
-                <a:tc>
-                  <a:txBody>
-                    <a:bodyPr wrap="square"/>
-                    <a:lstStyle/>
-                    <a:p>
-                      <a:r>
-                        <a:rPr sz="1100" b="0">
-                          <a:solidFill>
-                            <a:srgbClr val="282828"/>
-                          </a:solidFill>
-                          <a:latin typeface="Arial"/>
-                        </a:rPr>
-                        <a:t>153 / 380 / 750 / 1461 pm</a:t>
-                      </a:r>
-                    </a:p>
-                  </a:txBody>
-                  <a:tcPr marL="54864" marR="54864" marT="18288" marB="18288">
-                    <a:solidFill>
-                      <a:srgbClr val="FFFFFF"/>
-                    </a:solidFill>
-                  </a:tcPr>
-                </a:tc>
-                <a:tc>
-                  <a:txBody>
-                    <a:bodyPr wrap="square"/>
-                    <a:lstStyle/>
-                    <a:p>
-                      <a:r>
-                        <a:rPr sz="1100" b="0">
-                          <a:solidFill>
-                            <a:srgbClr val="282828"/>
-                          </a:solidFill>
-                          <a:latin typeface="Arial"/>
-                        </a:rPr>
-                        <a:t>0.9934 / 4 pm at 0.10 and 0.20: the ideal rows</a:t>
+              <a:tr h="280035">
+                <a:tc>
+                  <a:txBody>
+                    <a:bodyPr wrap="square"/>
+                    <a:lstStyle/>
+                    <a:p>
+                      <a:r>
+                        <a:rPr sz="1100" b="0">
+                          <a:solidFill>
+                            <a:srgbClr val="282828"/>
+                          </a:solidFill>
+                          <a:latin typeface="Arial"/>
+                        </a:rPr>
+                        <a:t>2 pm walk, mirror still during a scan</a:t>
+                      </a:r>
+                    </a:p>
+                  </a:txBody>
+                  <a:tcPr marL="54864" marR="54864" marT="18288" marB="18288">
+                    <a:solidFill>
+                      <a:srgbClr val="FFFFFF"/>
+                    </a:solidFill>
+                  </a:tcPr>
+                </a:tc>
+                <a:tc>
+                  <a:txBody>
+                    <a:bodyPr wrap="square"/>
+                    <a:lstStyle/>
+                    <a:p>
+                      <a:r>
+                        <a:rPr sz="1100" b="0">
+                          <a:solidFill>
+                            <a:srgbClr val="282828"/>
+                          </a:solidFill>
+                          <a:latin typeface="Arial"/>
+                        </a:rPr>
+                        <a:t>2.38</a:t>
+                      </a:r>
+                    </a:p>
+                  </a:txBody>
+                  <a:tcPr marL="54864" marR="54864" marT="18288" marB="18288">
+                    <a:solidFill>
+                      <a:srgbClr val="FFFFFF"/>
+                    </a:solidFill>
+                  </a:tcPr>
+                </a:tc>
+                <a:tc>
+                  <a:txBody>
+                    <a:bodyPr wrap="square"/>
+                    <a:lstStyle/>
+                    <a:p>
+                      <a:r>
+                        <a:rPr sz="1100" b="0">
+                          <a:solidFill>
+                            <a:srgbClr val="282828"/>
+                          </a:solidFill>
+                          <a:latin typeface="Arial"/>
+                        </a:rPr>
+                        <a:t>2.32</a:t>
+                      </a:r>
+                    </a:p>
+                  </a:txBody>
+                  <a:tcPr marL="54864" marR="54864" marT="18288" marB="18288">
+                    <a:solidFill>
+                      <a:srgbClr val="FFFFFF"/>
+                    </a:solidFill>
+                  </a:tcPr>
+                </a:tc>
+                <a:tc>
+                  <a:txBody>
+                    <a:bodyPr wrap="square"/>
+                    <a:lstStyle/>
+                    <a:p>
+                      <a:r>
+                        <a:rPr sz="1100" b="0">
+                          <a:solidFill>
+                            <a:srgbClr val="282828"/>
+                          </a:solidFill>
+                          <a:latin typeface="Arial"/>
+                        </a:rPr>
+                        <a:t>2.32</a:t>
+                      </a:r>
+                    </a:p>
+                  </a:txBody>
+                  <a:tcPr marL="54864" marR="54864" marT="18288" marB="18288">
+                    <a:solidFill>
+                      <a:srgbClr val="FFFFFF"/>
+                    </a:solidFill>
+                  </a:tcPr>
+                </a:tc>
+                <a:tc>
+                  <a:txBody>
+                    <a:bodyPr wrap="square"/>
+                    <a:lstStyle/>
+                    <a:p>
+                      <a:r>
+                        <a:rPr sz="1100" b="0">
+                          <a:solidFill>
+                            <a:srgbClr val="282828"/>
+                          </a:solidFill>
+                          <a:latin typeface="Arial"/>
+                        </a:rPr>
+                        <a:t>2.32</a:t>
+                      </a:r>
+                    </a:p>
+                  </a:txBody>
+                  <a:tcPr marL="54864" marR="54864" marT="18288" marB="18288">
+                    <a:solidFill>
+                      <a:srgbClr val="FFFFFF"/>
+                    </a:solidFill>
+                  </a:tcPr>
+                </a:tc>
+                <a:tc>
+                  <a:txBody>
+                    <a:bodyPr wrap="square"/>
+                    <a:lstStyle/>
+                    <a:p>
+                      <a:r>
+                        <a:rPr sz="1100" b="0">
+                          <a:solidFill>
+                            <a:srgbClr val="282828"/>
+                          </a:solidFill>
+                          <a:latin typeface="Arial"/>
+                        </a:rPr>
+                        <a:t>2.33 pm</a:t>
                       </a:r>
                     </a:p>
                   </a:txBody>
@@ -23088,20 +22878,20 @@
                   </a:tcPr>
                 </a:tc>
               </a:tr>
-              <a:tr h="657225">
-                <a:tc>
-                  <a:txBody>
-                    <a:bodyPr wrap="square"/>
-                    <a:lstStyle/>
-                    <a:p>
-                      <a:r>
-                        <a:rPr sz="1100" b="0">
-                          <a:solidFill>
-                            <a:srgbClr val="282828"/>
-                          </a:solidFill>
-                          <a:latin typeface="Arial"/>
-                        </a:rPr>
-                        <a:t>the arm, laser at 45° / 0° / 90° to the fold plane</a:t>
+              <a:tr h="280035">
+                <a:tc>
+                  <a:txBody>
+                    <a:bodyPr wrap="square"/>
+                    <a:lstStyle/>
+                    <a:p>
+                      <a:r>
+                        <a:rPr sz="1100" b="0">
+                          <a:solidFill>
+                            <a:srgbClr val="282828"/>
+                          </a:solidFill>
+                          <a:latin typeface="Arial"/>
+                        </a:rPr>
+                        <a:t>2 pm walk, mirror drifting across the scan</a:t>
                       </a:r>
                     </a:p>
                   </a:txBody>
@@ -23123,7 +22913,7 @@
                           </a:solidFill>
                           <a:latin typeface="Arial"/>
                         </a:rPr>
-                        <a:t>9.0 / 17.2 / 11.2 pm (ideal 0.05)</a:t>
+                        <a:t>2.38</a:t>
                       </a:r>
                     </a:p>
                   </a:txBody>
@@ -23145,7 +22935,7 @@
                           </a:solidFill>
                           <a:latin typeface="Arial"/>
                         </a:rPr>
-                        <a:t>nothing through 0.1 rad of channel phase; 10% gain loss at 0.3</a:t>
+                        <a:t>1.57</a:t>
                       </a:r>
                     </a:p>
                   </a:txBody>
@@ -23155,65 +22945,197 @@
                     </a:solidFill>
                   </a:tcPr>
                 </a:tc>
+                <a:tc>
+                  <a:txBody>
+                    <a:bodyPr wrap="square"/>
+                    <a:lstStyle/>
+                    <a:p>
+                      <a:r>
+                        <a:rPr sz="1100" b="0">
+                          <a:solidFill>
+                            <a:srgbClr val="282828"/>
+                          </a:solidFill>
+                          <a:latin typeface="Arial"/>
+                        </a:rPr>
+                        <a:t>2.32</a:t>
+                      </a:r>
+                    </a:p>
+                  </a:txBody>
+                  <a:tcPr marL="54864" marR="54864" marT="18288" marB="18288">
+                    <a:solidFill>
+                      <a:srgbClr val="ECF1F6"/>
+                    </a:solidFill>
+                  </a:tcPr>
+                </a:tc>
+                <a:tc>
+                  <a:txBody>
+                    <a:bodyPr wrap="square"/>
+                    <a:lstStyle/>
+                    <a:p>
+                      <a:r>
+                        <a:rPr sz="1100" b="0">
+                          <a:solidFill>
+                            <a:srgbClr val="282828"/>
+                          </a:solidFill>
+                          <a:latin typeface="Arial"/>
+                        </a:rPr>
+                        <a:t>1.58</a:t>
+                      </a:r>
+                    </a:p>
+                  </a:txBody>
+                  <a:tcPr marL="54864" marR="54864" marT="18288" marB="18288">
+                    <a:solidFill>
+                      <a:srgbClr val="ECF1F6"/>
+                    </a:solidFill>
+                  </a:tcPr>
+                </a:tc>
+                <a:tc>
+                  <a:txBody>
+                    <a:bodyPr wrap="square"/>
+                    <a:lstStyle/>
+                    <a:p>
+                      <a:r>
+                        <a:rPr sz="1100" b="0">
+                          <a:solidFill>
+                            <a:srgbClr val="282828"/>
+                          </a:solidFill>
+                          <a:latin typeface="Arial"/>
+                        </a:rPr>
+                        <a:t>1.71 pm</a:t>
+                      </a:r>
+                    </a:p>
+                  </a:txBody>
+                  <a:tcPr marL="54864" marR="54864" marT="18288" marB="18288">
+                    <a:solidFill>
+                      <a:srgbClr val="ECF1F6"/>
+                    </a:solidFill>
+                  </a:tcPr>
+                </a:tc>
               </a:tr>
-              <a:tr h="657225">
-                <a:tc>
-                  <a:txBody>
-                    <a:bodyPr wrap="square"/>
-                    <a:lstStyle/>
-                    <a:p>
-                      <a:r>
-                        <a:rPr sz="1100" b="0">
-                          <a:solidFill>
-                            <a:srgbClr val="282828"/>
-                          </a:solidFill>
-                          <a:latin typeface="Arial"/>
-                        </a:rPr>
-                        <a:t>the arm, design scan: 6 nm per rad of channel phase</a:t>
-                      </a:r>
-                    </a:p>
-                  </a:txBody>
-                  <a:tcPr marL="54864" marR="54864" marT="18288" marB="18288">
-                    <a:solidFill>
-                      <a:srgbClr val="FFFFFF"/>
-                    </a:solidFill>
-                  </a:tcPr>
-                </a:tc>
-                <a:tc>
-                  <a:txBody>
-                    <a:bodyPr wrap="square"/>
-                    <a:lstStyle/>
-                    <a:p>
-                      <a:r>
-                        <a:rPr sz="1100" b="0">
-                          <a:solidFill>
-                            <a:srgbClr val="282828"/>
-                          </a:solidFill>
-                          <a:latin typeface="Arial"/>
-                        </a:rPr>
-                        <a:t>59 / 178 / 597 / 1877 pm at 0.01 / 0.03 / 0.1 / 0.3 rad</a:t>
-                      </a:r>
-                    </a:p>
-                  </a:txBody>
-                  <a:tcPr marL="54864" marR="54864" marT="18288" marB="18288">
-                    <a:solidFill>
-                      <a:srgbClr val="FFFFFF"/>
-                    </a:solidFill>
-                  </a:tcPr>
-                </a:tc>
-                <a:tc>
-                  <a:txBody>
-                    <a:bodyPr wrap="square"/>
-                    <a:lstStyle/>
-                    <a:p>
-                      <a:r>
-                        <a:rPr sz="1100" b="0">
-                          <a:solidFill>
-                            <a:srgbClr val="282828"/>
-                          </a:solidFill>
-                          <a:latin typeface="Arial"/>
-                        </a:rPr>
-                        <a:t>—</a:t>
+              <a:tr h="280035">
+                <a:tc>
+                  <a:txBody>
+                    <a:bodyPr wrap="square"/>
+                    <a:lstStyle/>
+                    <a:p>
+                      <a:r>
+                        <a:rPr sz="1100" b="0">
+                          <a:solidFill>
+                            <a:srgbClr val="282828"/>
+                          </a:solidFill>
+                          <a:latin typeface="Arial"/>
+                        </a:rPr>
+                        <a:t>5 pm ramp, mirror still</a:t>
+                      </a:r>
+                    </a:p>
+                  </a:txBody>
+                  <a:tcPr marL="54864" marR="54864" marT="18288" marB="18288">
+                    <a:solidFill>
+                      <a:srgbClr val="FFFFFF"/>
+                    </a:solidFill>
+                  </a:tcPr>
+                </a:tc>
+                <a:tc>
+                  <a:txBody>
+                    <a:bodyPr wrap="square"/>
+                    <a:lstStyle/>
+                    <a:p>
+                      <a:r>
+                        <a:rPr sz="1100" b="0">
+                          <a:solidFill>
+                            <a:srgbClr val="282828"/>
+                          </a:solidFill>
+                          <a:latin typeface="Arial"/>
+                        </a:rPr>
+                        <a:t>27.6</a:t>
+                      </a:r>
+                    </a:p>
+                  </a:txBody>
+                  <a:tcPr marL="54864" marR="54864" marT="18288" marB="18288">
+                    <a:solidFill>
+                      <a:srgbClr val="FFFFFF"/>
+                    </a:solidFill>
+                  </a:tcPr>
+                </a:tc>
+                <a:tc>
+                  <a:txBody>
+                    <a:bodyPr wrap="square"/>
+                    <a:lstStyle/>
+                    <a:p>
+                      <a:r>
+                        <a:rPr sz="1100" b="0">
+                          <a:solidFill>
+                            <a:srgbClr val="282828"/>
+                          </a:solidFill>
+                          <a:latin typeface="Arial"/>
+                        </a:rPr>
+                        <a:t>10.05</a:t>
+                      </a:r>
+                    </a:p>
+                  </a:txBody>
+                  <a:tcPr marL="54864" marR="54864" marT="18288" marB="18288">
+                    <a:solidFill>
+                      <a:srgbClr val="FFFFFF"/>
+                    </a:solidFill>
+                  </a:tcPr>
+                </a:tc>
+                <a:tc>
+                  <a:txBody>
+                    <a:bodyPr wrap="square"/>
+                    <a:lstStyle/>
+                    <a:p>
+                      <a:r>
+                        <a:rPr sz="1100" b="0">
+                          <a:solidFill>
+                            <a:srgbClr val="282828"/>
+                          </a:solidFill>
+                          <a:latin typeface="Arial"/>
+                        </a:rPr>
+                        <a:t>9.87</a:t>
+                      </a:r>
+                    </a:p>
+                  </a:txBody>
+                  <a:tcPr marL="54864" marR="54864" marT="18288" marB="18288">
+                    <a:solidFill>
+                      <a:srgbClr val="FFFFFF"/>
+                    </a:solidFill>
+                  </a:tcPr>
+                </a:tc>
+                <a:tc>
+                  <a:txBody>
+                    <a:bodyPr wrap="square"/>
+                    <a:lstStyle/>
+                    <a:p>
+                      <a:r>
+                        <a:rPr sz="1100" b="0">
+                          <a:solidFill>
+                            <a:srgbClr val="282828"/>
+                          </a:solidFill>
+                          <a:latin typeface="Arial"/>
+                        </a:rPr>
+                        <a:t>9.86</a:t>
+                      </a:r>
+                    </a:p>
+                  </a:txBody>
+                  <a:tcPr marL="54864" marR="54864" marT="18288" marB="18288">
+                    <a:solidFill>
+                      <a:srgbClr val="FFFFFF"/>
+                    </a:solidFill>
+                  </a:tcPr>
+                </a:tc>
+                <a:tc>
+                  <a:txBody>
+                    <a:bodyPr wrap="square"/>
+                    <a:lstStyle/>
+                    <a:p>
+                      <a:r>
+                        <a:rPr sz="1100" b="0">
+                          <a:solidFill>
+                            <a:srgbClr val="282828"/>
+                          </a:solidFill>
+                          <a:latin typeface="Arial"/>
+                        </a:rPr>
+                        <a:t>9.88 pm</a:t>
                       </a:r>
                     </a:p>
                   </a:txBody>
@@ -23224,20 +23146,20 @@
                   </a:tcPr>
                 </a:tc>
               </a:tr>
-              <a:tr h="468630">
-                <a:tc>
-                  <a:txBody>
-                    <a:bodyPr wrap="square"/>
-                    <a:lstStyle/>
-                    <a:p>
-                      <a:r>
-                        <a:rPr sz="1100" b="0">
-                          <a:solidFill>
-                            <a:srgbClr val="282828"/>
-                          </a:solidFill>
-                          <a:latin typeface="Arial"/>
-                        </a:rPr>
-                        <a:t>analyzer: cube extinction alone</a:t>
+              <a:tr h="280035">
+                <a:tc>
+                  <a:txBody>
+                    <a:bodyPr wrap="square"/>
+                    <a:lstStyle/>
+                    <a:p>
+                      <a:r>
+                        <a:rPr sz="1100" b="0">
+                          <a:solidFill>
+                            <a:srgbClr val="282828"/>
+                          </a:solidFill>
+                          <a:latin typeface="Arial"/>
+                        </a:rPr>
+                        <a:t>5 pm ramp, drifting across the scan</a:t>
                       </a:r>
                     </a:p>
                   </a:txBody>
@@ -23259,7 +23181,7 @@
                           </a:solidFill>
                           <a:latin typeface="Arial"/>
                         </a:rPr>
-                        <a:t>3.5 pm</a:t>
+                        <a:t>27.6</a:t>
                       </a:r>
                     </a:p>
                   </a:txBody>
@@ -23281,7 +23203,7 @@
                           </a:solidFill>
                           <a:latin typeface="Arial"/>
                         </a:rPr>
-                        <a:t>0.9934 / 4 pm</a:t>
+                        <a:t>7.16</a:t>
                       </a:r>
                     </a:p>
                   </a:txBody>
@@ -23291,65 +23213,197 @@
                     </a:solidFill>
                   </a:tcPr>
                 </a:tc>
+                <a:tc>
+                  <a:txBody>
+                    <a:bodyPr wrap="square"/>
+                    <a:lstStyle/>
+                    <a:p>
+                      <a:r>
+                        <a:rPr sz="1100" b="0">
+                          <a:solidFill>
+                            <a:srgbClr val="282828"/>
+                          </a:solidFill>
+                          <a:latin typeface="Arial"/>
+                        </a:rPr>
+                        <a:t>9.87</a:t>
+                      </a:r>
+                    </a:p>
+                  </a:txBody>
+                  <a:tcPr marL="54864" marR="54864" marT="18288" marB="18288">
+                    <a:solidFill>
+                      <a:srgbClr val="ECF1F6"/>
+                    </a:solidFill>
+                  </a:tcPr>
+                </a:tc>
+                <a:tc>
+                  <a:txBody>
+                    <a:bodyPr wrap="square"/>
+                    <a:lstStyle/>
+                    <a:p>
+                      <a:r>
+                        <a:rPr sz="1100" b="0">
+                          <a:solidFill>
+                            <a:srgbClr val="282828"/>
+                          </a:solidFill>
+                          <a:latin typeface="Arial"/>
+                        </a:rPr>
+                        <a:t>6.70</a:t>
+                      </a:r>
+                    </a:p>
+                  </a:txBody>
+                  <a:tcPr marL="54864" marR="54864" marT="18288" marB="18288">
+                    <a:solidFill>
+                      <a:srgbClr val="ECF1F6"/>
+                    </a:solidFill>
+                  </a:tcPr>
+                </a:tc>
+                <a:tc>
+                  <a:txBody>
+                    <a:bodyPr wrap="square"/>
+                    <a:lstStyle/>
+                    <a:p>
+                      <a:r>
+                        <a:rPr sz="1100" b="0">
+                          <a:solidFill>
+                            <a:srgbClr val="282828"/>
+                          </a:solidFill>
+                          <a:latin typeface="Arial"/>
+                        </a:rPr>
+                        <a:t>7.30 pm</a:t>
+                      </a:r>
+                    </a:p>
+                  </a:txBody>
+                  <a:tcPr marL="54864" marR="54864" marT="18288" marB="18288">
+                    <a:solidFill>
+                      <a:srgbClr val="ECF1F6"/>
+                    </a:solidFill>
+                  </a:tcPr>
+                </a:tc>
               </a:tr>
-              <a:tr h="468630">
-                <a:tc>
-                  <a:txBody>
-                    <a:bodyPr wrap="square"/>
-                    <a:lstStyle/>
-                    <a:p>
-                      <a:r>
-                        <a:rPr sz="1100" b="0">
-                          <a:solidFill>
-                            <a:srgbClr val="282828"/>
-                          </a:solidFill>
-                          <a:latin typeface="Arial"/>
-                        </a:rPr>
-                        <a:t>analyzer: plate λ/300; 1° azimuth; λ/100</a:t>
-                      </a:r>
-                    </a:p>
-                  </a:txBody>
-                  <a:tcPr marL="54864" marR="54864" marT="18288" marB="18288">
-                    <a:solidFill>
-                      <a:srgbClr val="FFFFFF"/>
-                    </a:solidFill>
-                  </a:tcPr>
-                </a:tc>
-                <a:tc>
-                  <a:txBody>
-                    <a:bodyPr wrap="square"/>
-                    <a:lstStyle/>
-                    <a:p>
-                      <a:r>
-                        <a:rPr sz="1100" b="0">
-                          <a:solidFill>
-                            <a:srgbClr val="282828"/>
-                          </a:solidFill>
-                          <a:latin typeface="Arial"/>
-                        </a:rPr>
-                        <a:t>165; 263; 496 pm</a:t>
-                      </a:r>
-                    </a:p>
-                  </a:txBody>
-                  <a:tcPr marL="54864" marR="54864" marT="18288" marB="18288">
-                    <a:solidFill>
-                      <a:srgbClr val="FFFFFF"/>
-                    </a:solidFill>
-                  </a:tcPr>
-                </a:tc>
-                <a:tc>
-                  <a:txBody>
-                    <a:bodyPr wrap="square"/>
-                    <a:lstStyle/>
-                    <a:p>
-                      <a:r>
-                        <a:rPr sz="1100" b="0">
-                          <a:solidFill>
-                            <a:srgbClr val="282828"/>
-                          </a:solidFill>
-                          <a:latin typeface="Arial"/>
-                        </a:rPr>
-                        <a:t>0.9932 / 4; 0.9932 / 4; 0.9928 / 4 pm</a:t>
+              <a:tr h="280035">
+                <a:tc>
+                  <a:txBody>
+                    <a:bodyPr wrap="square"/>
+                    <a:lstStyle/>
+                    <a:p>
+                      <a:r>
+                        <a:rPr sz="1100" b="0">
+                          <a:solidFill>
+                            <a:srgbClr val="282828"/>
+                          </a:solidFill>
+                          <a:latin typeface="Arial"/>
+                        </a:rPr>
+                        <a:t>camera scale drifting 1e-3 across the scan</a:t>
+                      </a:r>
+                    </a:p>
+                  </a:txBody>
+                  <a:tcPr marL="54864" marR="54864" marT="18288" marB="18288">
+                    <a:solidFill>
+                      <a:srgbClr val="FFFFFF"/>
+                    </a:solidFill>
+                  </a:tcPr>
+                </a:tc>
+                <a:tc>
+                  <a:txBody>
+                    <a:bodyPr wrap="square"/>
+                    <a:lstStyle/>
+                    <a:p>
+                      <a:r>
+                        <a:rPr sz="1100" b="0">
+                          <a:solidFill>
+                            <a:srgbClr val="282828"/>
+                          </a:solidFill>
+                          <a:latin typeface="Arial"/>
+                        </a:rPr>
+                        <a:t>10.8 nm</a:t>
+                      </a:r>
+                    </a:p>
+                  </a:txBody>
+                  <a:tcPr marL="54864" marR="54864" marT="18288" marB="18288">
+                    <a:solidFill>
+                      <a:srgbClr val="FFFFFF"/>
+                    </a:solidFill>
+                  </a:tcPr>
+                </a:tc>
+                <a:tc>
+                  <a:txBody>
+                    <a:bodyPr wrap="square"/>
+                    <a:lstStyle/>
+                    <a:p>
+                      <a:r>
+                        <a:rPr sz="1100" b="0">
+                          <a:solidFill>
+                            <a:srgbClr val="282828"/>
+                          </a:solidFill>
+                          <a:latin typeface="Arial"/>
+                        </a:rPr>
+                        <a:t>5.4</a:t>
+                      </a:r>
+                    </a:p>
+                  </a:txBody>
+                  <a:tcPr marL="54864" marR="54864" marT="18288" marB="18288">
+                    <a:solidFill>
+                      <a:srgbClr val="FFFFFF"/>
+                    </a:solidFill>
+                  </a:tcPr>
+                </a:tc>
+                <a:tc>
+                  <a:txBody>
+                    <a:bodyPr wrap="square"/>
+                    <a:lstStyle/>
+                    <a:p>
+                      <a:r>
+                        <a:rPr sz="1100" b="0">
+                          <a:solidFill>
+                            <a:srgbClr val="282828"/>
+                          </a:solidFill>
+                          <a:latin typeface="Arial"/>
+                        </a:rPr>
+                        <a:t>89 pm</a:t>
+                      </a:r>
+                    </a:p>
+                  </a:txBody>
+                  <a:tcPr marL="54864" marR="54864" marT="18288" marB="18288">
+                    <a:solidFill>
+                      <a:srgbClr val="FFFFFF"/>
+                    </a:solidFill>
+                  </a:tcPr>
+                </a:tc>
+                <a:tc>
+                  <a:txBody>
+                    <a:bodyPr wrap="square"/>
+                    <a:lstStyle/>
+                    <a:p>
+                      <a:r>
+                        <a:rPr sz="1100" b="0">
+                          <a:solidFill>
+                            <a:srgbClr val="282828"/>
+                          </a:solidFill>
+                          <a:latin typeface="Arial"/>
+                        </a:rPr>
+                        <a:t>5.3</a:t>
+                      </a:r>
+                    </a:p>
+                  </a:txBody>
+                  <a:tcPr marL="54864" marR="54864" marT="18288" marB="18288">
+                    <a:solidFill>
+                      <a:srgbClr val="FFFFFF"/>
+                    </a:solidFill>
+                  </a:tcPr>
+                </a:tc>
+                <a:tc>
+                  <a:txBody>
+                    <a:bodyPr wrap="square"/>
+                    <a:lstStyle/>
+                    <a:p>
+                      <a:r>
+                        <a:rPr sz="1100" b="0">
+                          <a:solidFill>
+                            <a:srgbClr val="282828"/>
+                          </a:solidFill>
+                          <a:latin typeface="Arial"/>
+                        </a:rPr>
+                        <a:t>10.7 pm</a:t>
                       </a:r>
                     </a:p>
                   </a:txBody>
@@ -23398,6 +23452,668 @@
                 </a:solidFill>
                 <a:latin typeface="Arial"/>
               </a:rPr>
+              <a:t>•  Why the mirror's drift helps: a scan reads the surface at its midpoint, a free half-step of prediction; 26-32% less hold error for the stepped readings.  The camera's drift is an additive bias, the opposite sign.</a:t>
+            </a:r>
+          </a:p>
+          <a:p>
+            <a:pPr>
+              <a:spcAft>
+                <a:spcPts val="600"/>
+              </a:spcAft>
+            </a:pPr>
+            <a:r>
+              <a:rPr sz="1200" b="0">
+                <a:solidFill>
+                  <a:srgbClr val="282828"/>
+                </a:solidFill>
+                <a:latin typeface="Arial"/>
+              </a:rPr>
+              <a:t>•  The P/SRI's reference arm walking (a random path walk of 1e-3 to 1e-1 rad per cycle) costs 4% in light over that hundredfold range: a path change is piston, the one mode the actuator estimator nulls.  Not benign for absolute field work; a tilting reference is outside the model.</a:t>
+            </a:r>
+          </a:p>
+          <a:p>
+            <a:pPr>
+              <a:spcAft>
+                <a:spcPts val="600"/>
+              </a:spcAft>
+            </a:pPr>
+            <a:r>
+              <a:rPr sz="1200" b="0">
+                <a:solidFill>
+                  <a:srgbClr val="282828"/>
+                </a:solidFill>
+                <a:latin typeface="Arial"/>
+              </a:rPr>
+              <a:t>•  The paper's camera number (0.13 electrons per pixel per cycle) is invisible to every reading: an electron is 1e-4 of a lit pixel's shot noise at 1e13 photons.</a:t>
+            </a:r>
+          </a:p>
+        </p:txBody>
+      </p:sp>
+      <p:sp>
+        <p:nvSpPr>
+          <p:cNvPr id="6" name="TextBox 5"/>
+          <p:cNvSpPr txBox="1"/>
+          <p:nvPr/>
+        </p:nvSpPr>
+        <p:spPr>
+          <a:xfrm>
+            <a:off x="6400800" y="3934968"/>
+            <a:ext cx="5394960" cy="274320"/>
+          </a:xfrm>
+          <a:prstGeom prst="rect">
+            <a:avLst/>
+          </a:prstGeom>
+          <a:noFill/>
+        </p:spPr>
+        <p:txBody>
+          <a:bodyPr wrap="square">
+            <a:spAutoFit/>
+          </a:bodyPr>
+          <a:lstStyle/>
+          <a:p>
+            <a:pPr>
+              <a:spcAft>
+                <a:spcPts val="600"/>
+              </a:spcAft>
+            </a:pPr>
+            <a:r>
+              <a:rPr sz="1050" b="0">
+                <a:solidFill>
+                  <a:srgbClr val="6E6E6E"/>
+                </a:solidFill>
+                <a:latin typeface="Arial"/>
+              </a:rPr>
+              <a:t>Run tags intra193_0, intra193, pcam193, pcam193r, pcam193ri, rw193_1e3/1e2/1e1, loop_lens_intra, loop_lens_cam.</a:t>
+            </a:r>
+          </a:p>
+        </p:txBody>
+      </p:sp>
+    </p:spTree>
+  </p:cSld>
+  <p:clrMapOvr>
+    <a:masterClrMapping/>
+  </p:clrMapOvr>
+</p:sld>
+</file>
+
+<file path=ppt/slides/slide41.xml><?xml version="1.0" encoding="utf-8"?>
+<p:sld xmlns:a="http://schemas.openxmlformats.org/drawingml/2006/main" xmlns:p="http://schemas.openxmlformats.org/presentationml/2006/main" xmlns:r="http://schemas.openxmlformats.org/officeDocument/2006/relationships">
+  <p:cSld>
+    <p:spTree>
+      <p:nvGrpSpPr>
+        <p:cNvPr id="1" name=""/>
+        <p:cNvGrpSpPr/>
+        <p:nvPr/>
+      </p:nvGrpSpPr>
+      <p:grpSpPr/>
+      <p:sp>
+        <p:nvSpPr>
+          <p:cNvPr id="2" name="TextBox 1"/>
+          <p:cNvSpPr txBox="1"/>
+          <p:nvPr/>
+        </p:nvSpPr>
+        <p:spPr>
+          <a:xfrm>
+            <a:off x="411480" y="201168"/>
+            <a:ext cx="11368735" cy="914400"/>
+          </a:xfrm>
+          <a:prstGeom prst="rect">
+            <a:avLst/>
+          </a:prstGeom>
+          <a:noFill/>
+        </p:spPr>
+        <p:txBody>
+          <a:bodyPr wrap="square">
+            <a:spAutoFit/>
+          </a:bodyPr>
+          <a:lstStyle/>
+          <a:p>
+            <a:pPr>
+              <a:spcAft>
+                <a:spcPts val="400"/>
+              </a:spcAft>
+            </a:pPr>
+            <a:r>
+              <a:rPr sz="2400" b="1">
+                <a:solidFill>
+                  <a:srgbClr val="1F4E79"/>
+                </a:solidFill>
+                <a:latin typeface="Arial"/>
+              </a:rPr>
+              <a:t>Backup: the vector sensor's polarization terms</a:t>
+            </a:r>
+          </a:p>
+          <a:p>
+            <a:pPr>
+              <a:spcAft>
+                <a:spcPts val="0"/>
+              </a:spcAft>
+            </a:pPr>
+            <a:r>
+              <a:rPr sz="1250" b="0">
+                <a:solidFill>
+                  <a:srgbClr val="6E6E6E"/>
+                </a:solidFill>
+                <a:latin typeface="Arial"/>
+              </a:rPr>
+              <a:t>The metasurface's retardance error, the arm's polarization aberration, and the analyzer, each from the engine's polarized traces of this bench</a:t>
+            </a:r>
+          </a:p>
+        </p:txBody>
+      </p:sp>
+      <p:sp>
+        <p:nvSpPr>
+          <p:cNvPr id="3" name="Rectangle 2"/>
+          <p:cNvSpPr/>
+          <p:nvPr/>
+        </p:nvSpPr>
+        <p:spPr>
+          <a:xfrm>
+            <a:off x="411480" y="1133856"/>
+            <a:ext cx="11368735" cy="20320"/>
+          </a:xfrm>
+          <a:prstGeom prst="rect">
+            <a:avLst/>
+          </a:prstGeom>
+          <a:solidFill>
+            <a:srgbClr val="B8C6D4"/>
+          </a:solidFill>
+          <a:ln>
+            <a:noFill/>
+          </a:ln>
+          <a:effectLst/>
+        </p:spPr>
+        <p:style>
+          <a:lnRef idx="1">
+            <a:schemeClr val="accent1"/>
+          </a:lnRef>
+          <a:fillRef idx="3">
+            <a:schemeClr val="accent1"/>
+          </a:fillRef>
+          <a:effectRef idx="2">
+            <a:schemeClr val="accent1"/>
+          </a:effectRef>
+          <a:fontRef idx="minor">
+            <a:schemeClr val="lt1"/>
+          </a:fontRef>
+        </p:style>
+        <p:txBody>
+          <a:bodyPr rtlCol="0" anchor="ctr"/>
+          <a:lstStyle/>
+          <a:p>
+            <a:pPr algn="ctr"/>
+          </a:p>
+        </p:txBody>
+      </p:sp>
+      <p:graphicFrame>
+        <p:nvGraphicFramePr>
+          <p:cNvPr id="4" name="Table 3"/>
+          <p:cNvGraphicFramePr>
+            <a:graphicFrameLocks noGrp="1"/>
+          </p:cNvGraphicFramePr>
+          <p:nvPr/>
+        </p:nvGraphicFramePr>
+        <p:xfrm>
+          <a:off x="411480" y="1298448"/>
+          <a:ext cx="5806439" cy="3377565"/>
+        </p:xfrm>
+        <a:graphic>
+          <a:graphicData uri="http://schemas.openxmlformats.org/drawingml/2006/table">
+            <a:tbl>
+              <a:tblPr firstRow="1" bandRow="1">
+                <a:tableStyleId>{5C22544A-7EE6-4342-B048-85BDC9FD1C3A}</a:tableStyleId>
+              </a:tblPr>
+              <a:tblGrid>
+                <a:gridCol w="1924420"/>
+                <a:gridCol w="1824881"/>
+                <a:gridCol w="2057138"/>
+              </a:tblGrid>
+              <a:tr h="468630">
+                <a:tc>
+                  <a:txBody>
+                    <a:bodyPr wrap="square"/>
+                    <a:lstStyle/>
+                    <a:p>
+                      <a:r>
+                        <a:rPr sz="1100" b="1">
+                          <a:solidFill>
+                            <a:srgbClr val="FFFFFF"/>
+                          </a:solidFill>
+                          <a:latin typeface="Arial"/>
+                        </a:rPr>
+                        <a:t>term</a:t>
+                      </a:r>
+                    </a:p>
+                  </a:txBody>
+                  <a:tcPr marL="54864" marR="54864" marT="18288" marB="18288">
+                    <a:solidFill>
+                      <a:srgbClr val="1F4E79"/>
+                    </a:solidFill>
+                  </a:tcPr>
+                </a:tc>
+                <a:tc>
+                  <a:txBody>
+                    <a:bodyPr wrap="square"/>
+                    <a:lstStyle/>
+                    <a:p>
+                      <a:r>
+                        <a:rPr sz="1100" b="1">
+                          <a:solidFill>
+                            <a:srgbClr val="FFFFFF"/>
+                          </a:solidFill>
+                          <a:latin typeface="Arial"/>
+                        </a:rPr>
+                        <a:t>uncalibrated, on 100 nm pokes (12 nm rms)</a:t>
+                      </a:r>
+                    </a:p>
+                  </a:txBody>
+                  <a:tcPr marL="54864" marR="54864" marT="18288" marB="18288">
+                    <a:solidFill>
+                      <a:srgbClr val="1F4E79"/>
+                    </a:solidFill>
+                  </a:tcPr>
+                </a:tc>
+                <a:tc>
+                  <a:txBody>
+                    <a:bodyPr wrap="square"/>
+                    <a:lstStyle/>
+                    <a:p>
+                      <a:r>
+                        <a:rPr sz="1100" b="1">
+                          <a:solidFill>
+                            <a:srgbClr val="FFFFFF"/>
+                          </a:solidFill>
+                          <a:latin typeface="Arial"/>
+                        </a:rPr>
+                        <a:t>through the matrix measured on the surface</a:t>
+                      </a:r>
+                    </a:p>
+                  </a:txBody>
+                  <a:tcPr marL="54864" marR="54864" marT="18288" marB="18288">
+                    <a:solidFill>
+                      <a:srgbClr val="1F4E79"/>
+                    </a:solidFill>
+                  </a:tcPr>
+                </a:tc>
+              </a:tr>
+              <a:tr h="657225">
+                <a:tc>
+                  <a:txBody>
+                    <a:bodyPr wrap="square"/>
+                    <a:lstStyle/>
+                    <a:p>
+                      <a:r>
+                        <a:rPr sz="1100" b="0">
+                          <a:solidFill>
+                            <a:srgbClr val="282828"/>
+                          </a:solidFill>
+                          <a:latin typeface="Arial"/>
+                        </a:rPr>
+                        <a:t>metasurface retardance error 0.02 / 0.05 / 0.10 / 0.20 rad</a:t>
+                      </a:r>
+                    </a:p>
+                  </a:txBody>
+                  <a:tcPr marL="54864" marR="54864" marT="18288" marB="18288">
+                    <a:solidFill>
+                      <a:srgbClr val="FFFFFF"/>
+                    </a:solidFill>
+                  </a:tcPr>
+                </a:tc>
+                <a:tc>
+                  <a:txBody>
+                    <a:bodyPr wrap="square"/>
+                    <a:lstStyle/>
+                    <a:p>
+                      <a:r>
+                        <a:rPr sz="1100" b="0">
+                          <a:solidFill>
+                            <a:srgbClr val="282828"/>
+                          </a:solidFill>
+                          <a:latin typeface="Arial"/>
+                        </a:rPr>
+                        <a:t>153 / 380 / 750 / 1461 pm</a:t>
+                      </a:r>
+                    </a:p>
+                  </a:txBody>
+                  <a:tcPr marL="54864" marR="54864" marT="18288" marB="18288">
+                    <a:solidFill>
+                      <a:srgbClr val="FFFFFF"/>
+                    </a:solidFill>
+                  </a:tcPr>
+                </a:tc>
+                <a:tc>
+                  <a:txBody>
+                    <a:bodyPr wrap="square"/>
+                    <a:lstStyle/>
+                    <a:p>
+                      <a:r>
+                        <a:rPr sz="1100" b="0">
+                          <a:solidFill>
+                            <a:srgbClr val="282828"/>
+                          </a:solidFill>
+                          <a:latin typeface="Arial"/>
+                        </a:rPr>
+                        <a:t>0.9934 / 4 pm at 0.10 and 0.20: the ideal rows</a:t>
+                      </a:r>
+                    </a:p>
+                  </a:txBody>
+                  <a:tcPr marL="54864" marR="54864" marT="18288" marB="18288">
+                    <a:solidFill>
+                      <a:srgbClr val="FFFFFF"/>
+                    </a:solidFill>
+                  </a:tcPr>
+                </a:tc>
+              </a:tr>
+              <a:tr h="657225">
+                <a:tc>
+                  <a:txBody>
+                    <a:bodyPr wrap="square"/>
+                    <a:lstStyle/>
+                    <a:p>
+                      <a:r>
+                        <a:rPr sz="1100" b="0">
+                          <a:solidFill>
+                            <a:srgbClr val="282828"/>
+                          </a:solidFill>
+                          <a:latin typeface="Arial"/>
+                        </a:rPr>
+                        <a:t>the arm, laser at 45° / 0° / 90° to the fold plane</a:t>
+                      </a:r>
+                    </a:p>
+                  </a:txBody>
+                  <a:tcPr marL="54864" marR="54864" marT="18288" marB="18288">
+                    <a:solidFill>
+                      <a:srgbClr val="ECF1F6"/>
+                    </a:solidFill>
+                  </a:tcPr>
+                </a:tc>
+                <a:tc>
+                  <a:txBody>
+                    <a:bodyPr wrap="square"/>
+                    <a:lstStyle/>
+                    <a:p>
+                      <a:r>
+                        <a:rPr sz="1100" b="0">
+                          <a:solidFill>
+                            <a:srgbClr val="282828"/>
+                          </a:solidFill>
+                          <a:latin typeface="Arial"/>
+                        </a:rPr>
+                        <a:t>9.0 / 17.2 / 11.2 pm (ideal 0.05)</a:t>
+                      </a:r>
+                    </a:p>
+                  </a:txBody>
+                  <a:tcPr marL="54864" marR="54864" marT="18288" marB="18288">
+                    <a:solidFill>
+                      <a:srgbClr val="ECF1F6"/>
+                    </a:solidFill>
+                  </a:tcPr>
+                </a:tc>
+                <a:tc>
+                  <a:txBody>
+                    <a:bodyPr wrap="square"/>
+                    <a:lstStyle/>
+                    <a:p>
+                      <a:r>
+                        <a:rPr sz="1100" b="0">
+                          <a:solidFill>
+                            <a:srgbClr val="282828"/>
+                          </a:solidFill>
+                          <a:latin typeface="Arial"/>
+                        </a:rPr>
+                        <a:t>nothing through 0.1 rad of channel phase; 10% gain loss at 0.3</a:t>
+                      </a:r>
+                    </a:p>
+                  </a:txBody>
+                  <a:tcPr marL="54864" marR="54864" marT="18288" marB="18288">
+                    <a:solidFill>
+                      <a:srgbClr val="ECF1F6"/>
+                    </a:solidFill>
+                  </a:tcPr>
+                </a:tc>
+              </a:tr>
+              <a:tr h="657225">
+                <a:tc>
+                  <a:txBody>
+                    <a:bodyPr wrap="square"/>
+                    <a:lstStyle/>
+                    <a:p>
+                      <a:r>
+                        <a:rPr sz="1100" b="0">
+                          <a:solidFill>
+                            <a:srgbClr val="282828"/>
+                          </a:solidFill>
+                          <a:latin typeface="Arial"/>
+                        </a:rPr>
+                        <a:t>the arm, design scan: 6 nm per rad of channel phase</a:t>
+                      </a:r>
+                    </a:p>
+                  </a:txBody>
+                  <a:tcPr marL="54864" marR="54864" marT="18288" marB="18288">
+                    <a:solidFill>
+                      <a:srgbClr val="FFFFFF"/>
+                    </a:solidFill>
+                  </a:tcPr>
+                </a:tc>
+                <a:tc>
+                  <a:txBody>
+                    <a:bodyPr wrap="square"/>
+                    <a:lstStyle/>
+                    <a:p>
+                      <a:r>
+                        <a:rPr sz="1100" b="0">
+                          <a:solidFill>
+                            <a:srgbClr val="282828"/>
+                          </a:solidFill>
+                          <a:latin typeface="Arial"/>
+                        </a:rPr>
+                        <a:t>59 / 178 / 597 / 1877 pm at 0.01 / 0.03 / 0.1 / 0.3 rad</a:t>
+                      </a:r>
+                    </a:p>
+                  </a:txBody>
+                  <a:tcPr marL="54864" marR="54864" marT="18288" marB="18288">
+                    <a:solidFill>
+                      <a:srgbClr val="FFFFFF"/>
+                    </a:solidFill>
+                  </a:tcPr>
+                </a:tc>
+                <a:tc>
+                  <a:txBody>
+                    <a:bodyPr wrap="square"/>
+                    <a:lstStyle/>
+                    <a:p>
+                      <a:r>
+                        <a:rPr sz="1100" b="0">
+                          <a:solidFill>
+                            <a:srgbClr val="282828"/>
+                          </a:solidFill>
+                          <a:latin typeface="Arial"/>
+                        </a:rPr>
+                        <a:t>—</a:t>
+                      </a:r>
+                    </a:p>
+                  </a:txBody>
+                  <a:tcPr marL="54864" marR="54864" marT="18288" marB="18288">
+                    <a:solidFill>
+                      <a:srgbClr val="FFFFFF"/>
+                    </a:solidFill>
+                  </a:tcPr>
+                </a:tc>
+              </a:tr>
+              <a:tr h="468630">
+                <a:tc>
+                  <a:txBody>
+                    <a:bodyPr wrap="square"/>
+                    <a:lstStyle/>
+                    <a:p>
+                      <a:r>
+                        <a:rPr sz="1100" b="0">
+                          <a:solidFill>
+                            <a:srgbClr val="282828"/>
+                          </a:solidFill>
+                          <a:latin typeface="Arial"/>
+                        </a:rPr>
+                        <a:t>analyzer: cube extinction alone</a:t>
+                      </a:r>
+                    </a:p>
+                  </a:txBody>
+                  <a:tcPr marL="54864" marR="54864" marT="18288" marB="18288">
+                    <a:solidFill>
+                      <a:srgbClr val="ECF1F6"/>
+                    </a:solidFill>
+                  </a:tcPr>
+                </a:tc>
+                <a:tc>
+                  <a:txBody>
+                    <a:bodyPr wrap="square"/>
+                    <a:lstStyle/>
+                    <a:p>
+                      <a:r>
+                        <a:rPr sz="1100" b="0">
+                          <a:solidFill>
+                            <a:srgbClr val="282828"/>
+                          </a:solidFill>
+                          <a:latin typeface="Arial"/>
+                        </a:rPr>
+                        <a:t>3.5 pm</a:t>
+                      </a:r>
+                    </a:p>
+                  </a:txBody>
+                  <a:tcPr marL="54864" marR="54864" marT="18288" marB="18288">
+                    <a:solidFill>
+                      <a:srgbClr val="ECF1F6"/>
+                    </a:solidFill>
+                  </a:tcPr>
+                </a:tc>
+                <a:tc>
+                  <a:txBody>
+                    <a:bodyPr wrap="square"/>
+                    <a:lstStyle/>
+                    <a:p>
+                      <a:r>
+                        <a:rPr sz="1100" b="0">
+                          <a:solidFill>
+                            <a:srgbClr val="282828"/>
+                          </a:solidFill>
+                          <a:latin typeface="Arial"/>
+                        </a:rPr>
+                        <a:t>0.9934 / 4 pm</a:t>
+                      </a:r>
+                    </a:p>
+                  </a:txBody>
+                  <a:tcPr marL="54864" marR="54864" marT="18288" marB="18288">
+                    <a:solidFill>
+                      <a:srgbClr val="ECF1F6"/>
+                    </a:solidFill>
+                  </a:tcPr>
+                </a:tc>
+              </a:tr>
+              <a:tr h="468630">
+                <a:tc>
+                  <a:txBody>
+                    <a:bodyPr wrap="square"/>
+                    <a:lstStyle/>
+                    <a:p>
+                      <a:r>
+                        <a:rPr sz="1100" b="0">
+                          <a:solidFill>
+                            <a:srgbClr val="282828"/>
+                          </a:solidFill>
+                          <a:latin typeface="Arial"/>
+                        </a:rPr>
+                        <a:t>analyzer: plate λ/300; 1° azimuth; λ/100</a:t>
+                      </a:r>
+                    </a:p>
+                  </a:txBody>
+                  <a:tcPr marL="54864" marR="54864" marT="18288" marB="18288">
+                    <a:solidFill>
+                      <a:srgbClr val="FFFFFF"/>
+                    </a:solidFill>
+                  </a:tcPr>
+                </a:tc>
+                <a:tc>
+                  <a:txBody>
+                    <a:bodyPr wrap="square"/>
+                    <a:lstStyle/>
+                    <a:p>
+                      <a:r>
+                        <a:rPr sz="1100" b="0">
+                          <a:solidFill>
+                            <a:srgbClr val="282828"/>
+                          </a:solidFill>
+                          <a:latin typeface="Arial"/>
+                        </a:rPr>
+                        <a:t>165; 263; 496 pm</a:t>
+                      </a:r>
+                    </a:p>
+                  </a:txBody>
+                  <a:tcPr marL="54864" marR="54864" marT="18288" marB="18288">
+                    <a:solidFill>
+                      <a:srgbClr val="FFFFFF"/>
+                    </a:solidFill>
+                  </a:tcPr>
+                </a:tc>
+                <a:tc>
+                  <a:txBody>
+                    <a:bodyPr wrap="square"/>
+                    <a:lstStyle/>
+                    <a:p>
+                      <a:r>
+                        <a:rPr sz="1100" b="0">
+                          <a:solidFill>
+                            <a:srgbClr val="282828"/>
+                          </a:solidFill>
+                          <a:latin typeface="Arial"/>
+                        </a:rPr>
+                        <a:t>0.9932 / 4; 0.9932 / 4; 0.9928 / 4 pm</a:t>
+                      </a:r>
+                    </a:p>
+                  </a:txBody>
+                  <a:tcPr marL="54864" marR="54864" marT="18288" marB="18288">
+                    <a:solidFill>
+                      <a:srgbClr val="FFFFFF"/>
+                    </a:solidFill>
+                  </a:tcPr>
+                </a:tc>
+              </a:tr>
+            </a:tbl>
+          </a:graphicData>
+        </a:graphic>
+      </p:graphicFrame>
+      <p:sp>
+        <p:nvSpPr>
+          <p:cNvPr id="5" name="TextBox 4"/>
+          <p:cNvSpPr txBox="1"/>
+          <p:nvPr/>
+        </p:nvSpPr>
+        <p:spPr>
+          <a:xfrm>
+            <a:off x="6400800" y="1298448"/>
+            <a:ext cx="5394960" cy="274320"/>
+          </a:xfrm>
+          <a:prstGeom prst="rect">
+            <a:avLst/>
+          </a:prstGeom>
+          <a:noFill/>
+        </p:spPr>
+        <p:txBody>
+          <a:bodyPr wrap="square">
+            <a:spAutoFit/>
+          </a:bodyPr>
+          <a:lstStyle/>
+          <a:p>
+            <a:pPr>
+              <a:spcAft>
+                <a:spcPts val="600"/>
+              </a:spcAft>
+            </a:pPr>
+            <a:r>
+              <a:rPr sz="1200" b="0">
+                <a:solidFill>
+                  <a:srgbClr val="282828"/>
+                </a:solidFill>
+                <a:latin typeface="Arial"/>
+              </a:rPr>
               <a:t>•  The arm: six 7° glass faces give 5e-3 diattenuation and 0.9 mrad retardance; because the Jones matrix is real, the two circular channels differ in phase only, 1.6 mrad rms at the worst laser angle and 2e-5 along the fold plane's axis.  Rule: specify pupil-varying diattenuation, put the laser on the eigenaxis.</a:t>
             </a:r>
           </a:p>
@@ -23482,7 +24198,7 @@
 </p:sld>
 </file>
 
-<file path=ppt/slides/slide41.xml><?xml version="1.0" encoding="utf-8"?>
+<file path=ppt/slides/slide42.xml><?xml version="1.0" encoding="utf-8"?>
 <p:sld xmlns:a="http://schemas.openxmlformats.org/drawingml/2006/main" xmlns:p="http://schemas.openxmlformats.org/presentationml/2006/main" xmlns:r="http://schemas.openxmlformats.org/officeDocument/2006/relationships">
   <p:cSld>
     <p:spTree>
@@ -23772,7 +24488,7 @@
 </p:sld>
 </file>
 
-<file path=ppt/slides/slide42.xml><?xml version="1.0" encoding="utf-8"?>
+<file path=ppt/slides/slide43.xml><?xml version="1.0" encoding="utf-8"?>
 <p:sld xmlns:a="http://schemas.openxmlformats.org/drawingml/2006/main" xmlns:p="http://schemas.openxmlformats.org/presentationml/2006/main" xmlns:r="http://schemas.openxmlformats.org/officeDocument/2006/relationships">
   <p:cSld>
     <p:spTree>
@@ -24476,7 +25192,7 @@
 </p:sld>
 </file>
 
-<file path=ppt/slides/slide43.xml><?xml version="1.0" encoding="utf-8"?>
+<file path=ppt/slides/slide44.xml><?xml version="1.0" encoding="utf-8"?>
 <p:sld xmlns:a="http://schemas.openxmlformats.org/drawingml/2006/main" xmlns:p="http://schemas.openxmlformats.org/presentationml/2006/main" xmlns:r="http://schemas.openxmlformats.org/officeDocument/2006/relationships">
   <p:cSld>
     <p:spTree>
@@ -25470,7 +26186,7 @@
 </p:sld>
 </file>
 
-<file path=ppt/slides/slide44.xml><?xml version="1.0" encoding="utf-8"?>
+<file path=ppt/slides/slide45.xml><?xml version="1.0" encoding="utf-8"?>
 <p:sld xmlns:a="http://schemas.openxmlformats.org/drawingml/2006/main" xmlns:p="http://schemas.openxmlformats.org/presentationml/2006/main" xmlns:r="http://schemas.openxmlformats.org/officeDocument/2006/relationships">
   <p:cSld>
     <p:spTree>
@@ -25613,7 +26329,7 @@
                 </a:solidFill>
                 <a:latin typeface="Arial"/>
               </a:rPr>
-              <a:t>•  Interferometer (tg_psi_dm96_oap/runs): lens_deck, lens_deck_se2, lens_deck_se5, loop_lens, loop_lens_cam, loop_lens_intra, loop_lens_se2, descent_lens, oap_deck, loop_oap, descent_oap, oap_bareAl, oap_coat, oap_jones, zoap.  Report REPORT_gauge_ifo.md (CCMac), with REPORT_oap.md and README.md.</a:t>
+              <a:t>•  Interferometer (tg_psi_dm96_oap/runs): lens_deck, lens_deck_se2, lens_deck_se5, loop_lens, loop_lens_cam, loop_lens_intra, loop_lens_se2, descent_lens, oap_deck, loop_oap, descent_oap, oap_bareAl, oap_coat, oap_jones, zoap (the 7° rigs); lens22, lens22g, lens22h, node22t, fold1-4, loss, loss_src, loss_a2, conj, zseat, zseat2, oap22d, oapdraw3, oap22d_tail (the 22.5° bench and the redesigned reflective rig); pdi_dm96/runs/psriclear2 (the P/SRI bench through the clearance tool).  Reports REPORT_gauge_ifo.md (CCMac) with REPORT_oap.md, REPORT_bench_realism.md and REPORT_reflective.md (TO), and README.md.</a:t>
             </a:r>
           </a:p>
           <a:p>
@@ -25690,7 +26406,7 @@
         </p:nvSpPr>
         <p:spPr>
           <a:xfrm>
-            <a:off x="411480" y="5750814"/>
+            <a:off x="411480" y="6493764"/>
             <a:ext cx="11368735" cy="274320"/>
           </a:xfrm>
           <a:prstGeom prst="rect">
@@ -29600,8 +30316,8 @@
         </p:blipFill>
         <p:spPr>
           <a:xfrm>
-            <a:off x="3159675" y="1298448"/>
-            <a:ext cx="5872343" cy="3281172"/>
+            <a:off x="3176191" y="1298448"/>
+            <a:ext cx="5839311" cy="3281172"/>
           </a:xfrm>
           <a:prstGeom prst="rect">
             <a:avLst/>

--- a/demo_session/deck_gauges.pptx
+++ b/demo_session/deck_gauges.pptx
@@ -4469,8 +4469,8 @@
         </p:blipFill>
         <p:spPr>
           <a:xfrm>
-            <a:off x="2555258" y="1298448"/>
-            <a:ext cx="7081177" cy="3994912"/>
+            <a:off x="3041504" y="1298448"/>
+            <a:ext cx="6108686" cy="3446272"/>
           </a:xfrm>
           <a:prstGeom prst="rect">
             <a:avLst/>
@@ -4485,7 +4485,7 @@
         </p:nvSpPr>
         <p:spPr>
           <a:xfrm>
-            <a:off x="411480" y="5311647"/>
+            <a:off x="411480" y="4763008"/>
             <a:ext cx="11368735" cy="394208"/>
           </a:xfrm>
           <a:prstGeom prst="rect">
@@ -4524,7 +4524,46 @@
         </p:nvSpPr>
         <p:spPr>
           <a:xfrm>
-            <a:off x="411480" y="5742431"/>
+            <a:off x="411480" y="5193792"/>
+            <a:ext cx="11368735" cy="274320"/>
+          </a:xfrm>
+          <a:prstGeom prst="rect">
+            <a:avLst/>
+          </a:prstGeom>
+          <a:noFill/>
+        </p:spPr>
+        <p:txBody>
+          <a:bodyPr wrap="square">
+            <a:spAutoFit/>
+          </a:bodyPr>
+          <a:lstStyle/>
+          <a:p>
+            <a:pPr>
+              <a:spcAft>
+                <a:spcPts val="600"/>
+              </a:spcAft>
+            </a:pPr>
+            <a:r>
+              <a:rPr sz="1500" b="0">
+                <a:solidFill>
+                  <a:srgbClr val="282828"/>
+                </a:solidFill>
+                <a:latin typeface="Arial"/>
+              </a:rPr>
+              <a:t>•  The same polarization camera as the interferometer's snapshot form would replace the cube and one camera: behind the quarter-wave plate the two circular channels are the 0° and 90° pixels of the micro-polarizer array, so the two images land on one sensor, registered by construction.  The price is half the pixels per channel and the array's extinction in place of the cube's, a term the model already carries (the analyzer, on the systematics slide).</a:t>
+            </a:r>
+          </a:p>
+        </p:txBody>
+      </p:sp>
+      <p:sp>
+        <p:nvSpPr>
+          <p:cNvPr id="7" name="TextBox 6"/>
+          <p:cNvSpPr txBox="1"/>
+          <p:nvPr/>
+        </p:nvSpPr>
+        <p:spPr>
+          <a:xfrm>
+            <a:off x="411480" y="6361175"/>
             <a:ext cx="11368735" cy="274320"/>
           </a:xfrm>
           <a:prstGeom prst="rect">

--- a/demo_session/deck_gauges.pptx
+++ b/demo_session/deck_gauges.pptx
@@ -15759,7 +15759,7 @@
                 </a:solidFill>
                 <a:latin typeface="Arial"/>
               </a:rPr>
-              <a:t>Everything shares the front end: a filtered HeNe, a collimator, a plate splitter at 22.5°, a 700 mm leg to the mirror, a focuser to an internal focus, a field lens to a camera at the pupil image</a:t>
+              <a:t>Everything shares the front end: a filtered HeNe, a collimator, a plate splitter at 22.5°, a 700 mm leg to the mirror, a focuser to an internal focus, a field lens to a camera at the pupil image; the collimator and focuser are lenses or off-axis parabolas</a:t>
             </a:r>
           </a:p>
         </p:txBody>
@@ -15824,8 +15824,8 @@
         </p:blipFill>
         <p:spPr>
           <a:xfrm>
-            <a:off x="4061668" y="1298448"/>
-            <a:ext cx="4068357" cy="2348992"/>
+            <a:off x="1645652" y="1298448"/>
+            <a:ext cx="3338094" cy="1927352"/>
           </a:xfrm>
           <a:prstGeom prst="rect">
             <a:avLst/>
@@ -15840,8 +15840,8 @@
         </p:nvSpPr>
         <p:spPr>
           <a:xfrm>
-            <a:off x="411480" y="3665727"/>
-            <a:ext cx="11368735" cy="394208"/>
+            <a:off x="411480" y="3244088"/>
+            <a:ext cx="5806440" cy="724408"/>
           </a:xfrm>
           <a:prstGeom prst="rect">
             <a:avLst/>
@@ -15866,22 +15866,85 @@
                 </a:solidFill>
                 <a:latin typeface="Arial"/>
               </a:rPr>
-              <a:t>The shared front end as traced by the engine, seen from above, at the 22.5° splitter: source at left, collimator L1, the splitter, the 96 mm mirror on its 700 mm leg (blue), the reference arm and its flat (orange, the interferometer only), the focuser L2 toward the internal focus.  The mask seat at that focus is where the four sensing methods differ.</a:t>
+              <a:t>The lens rig as traced by the engine, from above: source at left, collimator L1, the 22.5° splitter, the 96 mm mirror on its 700 mm leg (blue), the reference arm and its flat (orange, the interferometer only), the focuser L2 toward the internal focus.  The mask seat at that focus is where the four sensing methods differ.</a:t>
+            </a:r>
+          </a:p>
+        </p:txBody>
+      </p:sp>
+      <p:pic>
+        <p:nvPicPr>
+          <p:cNvPr id="6" name="Picture 5" descr="crop_oapdraw3_train.png"/>
+          <p:cNvPicPr>
+            <a:picLocks noChangeAspect="1"/>
+          </p:cNvPicPr>
+          <p:nvPr/>
+        </p:nvPicPr>
+        <p:blipFill>
+          <a:blip r:embed="rId3"/>
+          <a:stretch>
+            <a:fillRect/>
+          </a:stretch>
+        </p:blipFill>
+        <p:spPr>
+          <a:xfrm>
+            <a:off x="8033856" y="1298448"/>
+            <a:ext cx="2128847" cy="1927352"/>
+          </a:xfrm>
+          <a:prstGeom prst="rect">
+            <a:avLst/>
+          </a:prstGeom>
+        </p:spPr>
+      </p:pic>
+      <p:sp>
+        <p:nvSpPr>
+          <p:cNvPr id="7" name="TextBox 6"/>
+          <p:cNvSpPr txBox="1"/>
+          <p:nvPr/>
+        </p:nvSpPr>
+        <p:spPr>
+          <a:xfrm>
+            <a:off x="6400800" y="3244088"/>
+            <a:ext cx="5394960" cy="724408"/>
+          </a:xfrm>
+          <a:prstGeom prst="rect">
+            <a:avLst/>
+          </a:prstGeom>
+          <a:noFill/>
+        </p:spPr>
+        <p:txBody>
+          <a:bodyPr wrap="square">
+            <a:spAutoFit/>
+          </a:bodyPr>
+          <a:lstStyle/>
+          <a:p>
+            <a:pPr algn="ctr">
+              <a:spcAft>
+                <a:spcPts val="0"/>
+              </a:spcAft>
+            </a:pPr>
+            <a:r>
+              <a:rPr sz="1000" b="0">
+                <a:solidFill>
+                  <a:srgbClr val="6E6E6E"/>
+                </a:solidFill>
+                <a:latin typeface="Arial"/>
+              </a:rPr>
+              <a:t>The reflective rig, redesigned on the same splitter: the source and input polarizer in the diverging leg, OAP1 collimating at a 20° fold, the same node, OAP2 focusing at 25° toward the mask seat.  Both drawings are the tools' own renders to scale; parts and thicknesses are on the next slides.</a:t>
             </a:r>
           </a:p>
         </p:txBody>
       </p:sp>
       <p:graphicFrame>
         <p:nvGraphicFramePr>
-          <p:cNvPr id="6" name="Table 5"/>
+          <p:cNvPr id="8" name="Table 7"/>
           <p:cNvGraphicFramePr>
             <a:graphicFrameLocks noGrp="1"/>
           </p:cNvGraphicFramePr>
           <p:nvPr/>
         </p:nvGraphicFramePr>
         <p:xfrm>
-          <a:off x="411480" y="4096511"/>
-          <a:ext cx="5806439" cy="1965960"/>
+          <a:off x="411480" y="4005072"/>
+          <a:ext cx="11368735" cy="2251710"/>
         </p:xfrm>
         <a:graphic>
           <a:graphicData uri="http://schemas.openxmlformats.org/drawingml/2006/table">
@@ -15890,14 +15953,27 @@
                 <a:tableStyleId>{5C22544A-7EE6-4342-B048-85BDC9FD1C3A}</a:tableStyleId>
               </a:tblPr>
               <a:tblGrid>
-                <a:gridCol w="662479"/>
-                <a:gridCol w="5143960"/>
+                <a:gridCol w="1235964"/>
+                <a:gridCol w="3759959"/>
+                <a:gridCol w="6372812"/>
               </a:tblGrid>
               <a:tr h="280035">
                 <a:tc>
                   <a:txBody>
                     <a:bodyPr wrap="square"/>
                     <a:lstStyle/>
+                    <a:p/>
+                  </a:txBody>
+                  <a:tcPr marL="54864" marR="54864" marT="18288" marB="18288">
+                    <a:solidFill>
+                      <a:srgbClr val="1F4E79"/>
+                    </a:solidFill>
+                  </a:tcPr>
+                </a:tc>
+                <a:tc>
+                  <a:txBody>
+                    <a:bodyPr wrap="square"/>
+                    <a:lstStyle/>
                     <a:p>
                       <a:r>
                         <a:rPr sz="1100" b="1">
@@ -15906,7 +15982,7 @@
                           </a:solidFill>
                           <a:latin typeface="Arial"/>
                         </a:rPr>
-                        <a:t>part</a:t>
+                        <a:t>lenses (L1, L2: 103 mm singlets)</a:t>
                       </a:r>
                     </a:p>
                   </a:txBody>
@@ -15928,7 +16004,7 @@
                           </a:solidFill>
                           <a:latin typeface="Arial"/>
                         </a:rPr>
-                        <a:t>value</a:t>
+                        <a:t>off-axis parabolas (OAP1 20°, OAP2 25°)</a:t>
                       </a:r>
                     </a:p>
                   </a:txBody>
@@ -15939,48 +16015,138 @@
                   </a:tcPr>
                 </a:tc>
               </a:tr>
-              <a:tr h="280035">
-                <a:tc>
-                  <a:txBody>
-                    <a:bodyPr wrap="square"/>
-                    <a:lstStyle/>
-                    <a:p>
-                      <a:r>
-                        <a:rPr sz="1100" b="0">
-                          <a:solidFill>
-                            <a:srgbClr val="282828"/>
-                          </a:solidFill>
-                          <a:latin typeface="Arial"/>
-                        </a:rPr>
-                        <a:t>source</a:t>
-                      </a:r>
-                    </a:p>
-                  </a:txBody>
-                  <a:tcPr marL="54864" marR="54864" marT="18288" marB="18288">
-                    <a:solidFill>
-                      <a:srgbClr val="FFFFFF"/>
-                    </a:solidFill>
-                  </a:tcPr>
-                </a:tc>
-                <a:tc>
-                  <a:txBody>
-                    <a:bodyPr wrap="square"/>
-                    <a:lstStyle/>
-                    <a:p>
-                      <a:r>
-                        <a:rPr sz="1100" b="0">
-                          <a:solidFill>
-                            <a:srgbClr val="282828"/>
-                          </a:solidFill>
-                          <a:latin typeface="Arial"/>
-                        </a:rPr>
-                        <a:t>HeNe 632.8 nm, filtered, 51 mm beam radius</a:t>
-                      </a:r>
-                    </a:p>
-                  </a:txBody>
-                  <a:tcPr marL="54864" marR="54864" marT="18288" marB="18288">
-                    <a:solidFill>
-                      <a:srgbClr val="FFFFFF"/>
+              <a:tr h="657225">
+                <a:tc>
+                  <a:txBody>
+                    <a:bodyPr wrap="square"/>
+                    <a:lstStyle/>
+                    <a:p>
+                      <a:r>
+                        <a:rPr sz="1100" b="0">
+                          <a:solidFill>
+                            <a:srgbClr val="282828"/>
+                          </a:solidFill>
+                          <a:latin typeface="Arial"/>
+                        </a:rPr>
+                        <a:t>for</a:t>
+                      </a:r>
+                    </a:p>
+                  </a:txBody>
+                  <a:tcPr marL="54864" marR="54864" marT="18288" marB="18288">
+                    <a:solidFill>
+                      <a:srgbClr val="FFFFFF"/>
+                    </a:solidFill>
+                  </a:tcPr>
+                </a:tc>
+                <a:tc>
+                  <a:txBody>
+                    <a:bodyPr wrap="square"/>
+                    <a:lstStyle/>
+                    <a:p>
+                      <a:r>
+                        <a:rPr sz="1100" b="0">
+                          <a:solidFill>
+                            <a:srgbClr val="282828"/>
+                          </a:solidFill>
+                          <a:latin typeface="Arial"/>
+                        </a:rPr>
+                        <a:t>on axis, no fold polarization; cheap parts; the record's readings were all measured on it</a:t>
+                      </a:r>
+                    </a:p>
+                  </a:txBody>
+                  <a:tcPr marL="54864" marR="54864" marT="18288" marB="18288">
+                    <a:solidFill>
+                      <a:srgbClr val="FFFFFF"/>
+                    </a:solidFill>
+                  </a:tcPr>
+                </a:tc>
+                <a:tc>
+                  <a:txBody>
+                    <a:bodyPr wrap="square"/>
+                    <a:lstStyle/>
+                    <a:p>
+                      <a:r>
+                        <a:rPr sz="1100" b="0">
+                          <a:solidFill>
+                            <a:srgbClr val="282828"/>
+                          </a:solidFill>
+                          <a:latin typeface="Arial"/>
+                        </a:rPr>
+                        <a:t>no glass in the beam: achromatic (a second color for capture is free), no ghosts; fed at its focus the mask seat is diffraction-limited at zero trim, and the untuned tail nulls 0.029 nm against the lens rig's tuned 0.134; every part clears by 33 mm</a:t>
+                      </a:r>
+                    </a:p>
+                  </a:txBody>
+                  <a:tcPr marL="54864" marR="54864" marT="18288" marB="18288">
+                    <a:solidFill>
+                      <a:srgbClr val="FFFFFF"/>
+                    </a:solidFill>
+                  </a:tcPr>
+                </a:tc>
+              </a:tr>
+              <a:tr h="845820">
+                <a:tc>
+                  <a:txBody>
+                    <a:bodyPr wrap="square"/>
+                    <a:lstStyle/>
+                    <a:p>
+                      <a:r>
+                        <a:rPr sz="1100" b="0">
+                          <a:solidFill>
+                            <a:srgbClr val="282828"/>
+                          </a:solidFill>
+                          <a:latin typeface="Arial"/>
+                        </a:rPr>
+                        <a:t>against</a:t>
+                      </a:r>
+                    </a:p>
+                  </a:txBody>
+                  <a:tcPr marL="54864" marR="54864" marT="18288" marB="18288">
+                    <a:solidFill>
+                      <a:srgbClr val="ECF1F6"/>
+                    </a:solidFill>
+                  </a:tcPr>
+                </a:tc>
+                <a:tc>
+                  <a:txBody>
+                    <a:bodyPr wrap="square"/>
+                    <a:lstStyle/>
+                    <a:p>
+                      <a:r>
+                        <a:rPr sz="1100" b="0">
+                          <a:solidFill>
+                            <a:srgbClr val="282828"/>
+                          </a:solidFill>
+                          <a:latin typeface="Arial"/>
+                        </a:rPr>
+                        <a:t>one wavelength (a second color refocuses); substrates in the converging legs (0.03 wave W040 per 2 mm); the tail needs a tuned solve; faces need AR coating in the interferometer</a:t>
+                      </a:r>
+                    </a:p>
+                  </a:txBody>
+                  <a:tcPr marL="54864" marR="54864" marT="18288" marB="18288">
+                    <a:solidFill>
+                      <a:srgbClr val="ECF1F6"/>
+                    </a:solidFill>
+                  </a:tcPr>
+                </a:tc>
+                <a:tc>
+                  <a:txBody>
+                    <a:bodyPr wrap="square"/>
+                    <a:lstStyle/>
+                    <a:p>
+                      <a:r>
+                        <a:rPr sz="1100" b="0">
+                          <a:solidFill>
+                            <a:srgbClr val="282828"/>
+                          </a:solidFill>
+                          <a:latin typeface="Arial"/>
+                        </a:rPr>
+                        <a:t>fold polarization: bare aluminum at these angles gives the vector reading 0.1 rad of channel phase, at the edge of its calibration (a quarter-wave overcoat is expected to fix it); 10 µrad of mirror tilt moves the null 95-103 nm; capture range on a deep surface pending (the seed tail wraps at 120 nm)</a:t>
+                      </a:r>
+                    </a:p>
+                  </a:txBody>
+                  <a:tcPr marL="54864" marR="54864" marT="18288" marB="18288">
+                    <a:solidFill>
+                      <a:srgbClr val="ECF1F6"/>
                     </a:solidFill>
                   </a:tcPr>
                 </a:tc>
@@ -15998,383 +16164,57 @@
                           </a:solidFill>
                           <a:latin typeface="Arial"/>
                         </a:rPr>
-                        <a:t>collimator L1</a:t>
-                      </a:r>
-                    </a:p>
-                  </a:txBody>
-                  <a:tcPr marL="54864" marR="54864" marT="18288" marB="18288">
-                    <a:solidFill>
-                      <a:srgbClr val="ECF1F6"/>
-                    </a:solidFill>
-                  </a:tcPr>
-                </a:tc>
-                <a:tc>
-                  <a:txBody>
-                    <a:bodyPr wrap="square"/>
-                    <a:lstStyle/>
-                    <a:p>
-                      <a:r>
-                        <a:rPr sz="1100" b="0">
-                          <a:solidFill>
-                            <a:srgbClr val="282828"/>
-                          </a:solidFill>
-                          <a:latin typeface="Arial"/>
-                        </a:rPr>
-                        <a:t>f 857 mm, 103 mm, coated; modeled 5 mm center, 2 mm edge, to be a real 103 mm singlet</a:t>
-                      </a:r>
-                    </a:p>
-                  </a:txBody>
-                  <a:tcPr marL="54864" marR="54864" marT="18288" marB="18288">
-                    <a:solidFill>
-                      <a:srgbClr val="ECF1F6"/>
-                    </a:solidFill>
-                  </a:tcPr>
-                </a:tc>
-              </a:tr>
-              <a:tr h="468630">
-                <a:tc>
-                  <a:txBody>
-                    <a:bodyPr wrap="square"/>
-                    <a:lstStyle/>
-                    <a:p>
-                      <a:r>
-                        <a:rPr sz="1100" b="0">
-                          <a:solidFill>
-                            <a:srgbClr val="282828"/>
-                          </a:solidFill>
-                          <a:latin typeface="Arial"/>
-                        </a:rPr>
-                        <a:t>plate splitter</a:t>
-                      </a:r>
-                    </a:p>
-                  </a:txBody>
-                  <a:tcPr marL="54864" marR="54864" marT="18288" marB="18288">
-                    <a:solidFill>
-                      <a:srgbClr val="FFFFFF"/>
-                    </a:solidFill>
-                  </a:tcPr>
-                </a:tc>
-                <a:tc>
-                  <a:txBody>
-                    <a:bodyPr wrap="square"/>
-                    <a:lstStyle/>
-                    <a:p>
-                      <a:r>
-                        <a:rPr sz="1100" b="0">
-                          <a:solidFill>
-                            <a:srgbClr val="282828"/>
-                          </a:solidFill>
-                          <a:latin typeface="Arial"/>
-                        </a:rPr>
-                        <a:t>22.5° incidence (the record's 7° does not clear the node: next slide), 50/50; compensator matched; modeled 2.6 mm thick, to be 10 mm</a:t>
-                      </a:r>
-                    </a:p>
-                  </a:txBody>
-                  <a:tcPr marL="54864" marR="54864" marT="18288" marB="18288">
-                    <a:solidFill>
-                      <a:srgbClr val="FFFFFF"/>
-                    </a:solidFill>
-                  </a:tcPr>
-                </a:tc>
-              </a:tr>
-              <a:tr h="468630">
-                <a:tc>
-                  <a:txBody>
-                    <a:bodyPr wrap="square"/>
-                    <a:lstStyle/>
-                    <a:p>
-                      <a:r>
-                        <a:rPr sz="1100" b="0">
-                          <a:solidFill>
-                            <a:srgbClr val="282828"/>
-                          </a:solidFill>
-                          <a:latin typeface="Arial"/>
-                        </a:rPr>
-                        <a:t>deformable mirror</a:t>
-                      </a:r>
-                    </a:p>
-                  </a:txBody>
-                  <a:tcPr marL="54864" marR="54864" marT="18288" marB="18288">
-                    <a:solidFill>
-                      <a:srgbClr val="ECF1F6"/>
-                    </a:solidFill>
-                  </a:tcPr>
-                </a:tc>
-                <a:tc>
-                  <a:txBody>
-                    <a:bodyPr wrap="square"/>
-                    <a:lstStyle/>
-                    <a:p>
-                      <a:r>
-                        <a:rPr sz="1100" b="0">
-                          <a:solidFill>
-                            <a:srgbClr val="282828"/>
-                          </a:solidFill>
-                          <a:latin typeface="Arial"/>
-                        </a:rPr>
-                        <a:t>96×96, 1 mm pitch, 96 mm, 700 mm leg</a:t>
-                      </a:r>
-                    </a:p>
-                  </a:txBody>
-                  <a:tcPr marL="54864" marR="54864" marT="18288" marB="18288">
-                    <a:solidFill>
-                      <a:srgbClr val="ECF1F6"/>
-                    </a:solidFill>
-                  </a:tcPr>
-                </a:tc>
-              </a:tr>
-            </a:tbl>
-          </a:graphicData>
-        </a:graphic>
-      </p:graphicFrame>
-      <p:graphicFrame>
-        <p:nvGraphicFramePr>
-          <p:cNvPr id="7" name="Table 6"/>
-          <p:cNvGraphicFramePr>
-            <a:graphicFrameLocks noGrp="1"/>
-          </p:cNvGraphicFramePr>
-          <p:nvPr/>
-        </p:nvGraphicFramePr>
-        <p:xfrm>
-          <a:off x="6400800" y="4096511"/>
-          <a:ext cx="5394960" cy="1657350"/>
-        </p:xfrm>
-        <a:graphic>
-          <a:graphicData uri="http://schemas.openxmlformats.org/drawingml/2006/table">
-            <a:tbl>
-              <a:tblPr firstRow="1" bandRow="1">
-                <a:tableStyleId>{5C22544A-7EE6-4342-B048-85BDC9FD1C3A}</a:tableStyleId>
-              </a:tblPr>
-              <a:tblGrid>
-                <a:gridCol w="806704"/>
-                <a:gridCol w="4588256"/>
-              </a:tblGrid>
-              <a:tr h="262890">
-                <a:tc>
-                  <a:txBody>
-                    <a:bodyPr wrap="square"/>
-                    <a:lstStyle/>
-                    <a:p>
-                      <a:r>
-                        <a:rPr sz="1000" b="1">
-                          <a:solidFill>
-                            <a:srgbClr val="FFFFFF"/>
-                          </a:solidFill>
-                          <a:latin typeface="Arial"/>
-                        </a:rPr>
-                        <a:t>part</a:t>
-                      </a:r>
-                    </a:p>
-                  </a:txBody>
-                  <a:tcPr marL="54864" marR="54864" marT="18288" marB="18288">
-                    <a:solidFill>
-                      <a:srgbClr val="1F4E79"/>
-                    </a:solidFill>
-                  </a:tcPr>
-                </a:tc>
-                <a:tc>
-                  <a:txBody>
-                    <a:bodyPr wrap="square"/>
-                    <a:lstStyle/>
-                    <a:p>
-                      <a:r>
-                        <a:rPr sz="1000" b="1">
-                          <a:solidFill>
-                            <a:srgbClr val="FFFFFF"/>
-                          </a:solidFill>
-                          <a:latin typeface="Arial"/>
-                        </a:rPr>
-                        <a:t>value</a:t>
-                      </a:r>
-                    </a:p>
-                  </a:txBody>
-                  <a:tcPr marL="54864" marR="54864" marT="18288" marB="18288">
-                    <a:solidFill>
-                      <a:srgbClr val="1F4E79"/>
-                    </a:solidFill>
-                  </a:tcPr>
-                </a:tc>
-              </a:tr>
-              <a:tr h="434340">
-                <a:tc>
-                  <a:txBody>
-                    <a:bodyPr wrap="square"/>
-                    <a:lstStyle/>
-                    <a:p>
-                      <a:r>
-                        <a:rPr sz="1000" b="0">
-                          <a:solidFill>
-                            <a:srgbClr val="282828"/>
-                          </a:solidFill>
-                          <a:latin typeface="Arial"/>
-                        </a:rPr>
-                        <a:t>focuser L2</a:t>
-                      </a:r>
-                    </a:p>
-                  </a:txBody>
-                  <a:tcPr marL="54864" marR="54864" marT="18288" marB="18288">
-                    <a:solidFill>
-                      <a:srgbClr val="FFFFFF"/>
-                    </a:solidFill>
-                  </a:tcPr>
-                </a:tc>
-                <a:tc>
-                  <a:txBody>
-                    <a:bodyPr wrap="square"/>
-                    <a:lstStyle/>
-                    <a:p>
-                      <a:r>
-                        <a:rPr sz="1000" b="0">
-                          <a:solidFill>
-                            <a:srgbClr val="282828"/>
-                          </a:solidFill>
-                          <a:latin typeface="Arial"/>
-                        </a:rPr>
-                        <a:t>f 429 mm, 103 mm; internal focus at F/4.2; modeled 8 mm center, to be real</a:t>
-                      </a:r>
-                    </a:p>
-                  </a:txBody>
-                  <a:tcPr marL="54864" marR="54864" marT="18288" marB="18288">
-                    <a:solidFill>
-                      <a:srgbClr val="FFFFFF"/>
-                    </a:solidFill>
-                  </a:tcPr>
-                </a:tc>
-              </a:tr>
-              <a:tr h="262890">
-                <a:tc>
-                  <a:txBody>
-                    <a:bodyPr wrap="square"/>
-                    <a:lstStyle/>
-                    <a:p>
-                      <a:r>
-                        <a:rPr sz="1000" b="0">
-                          <a:solidFill>
-                            <a:srgbClr val="282828"/>
-                          </a:solidFill>
-                          <a:latin typeface="Arial"/>
-                        </a:rPr>
-                        <a:t>field lens</a:t>
-                      </a:r>
-                    </a:p>
-                  </a:txBody>
-                  <a:tcPr marL="54864" marR="54864" marT="18288" marB="18288">
-                    <a:solidFill>
-                      <a:srgbClr val="ECF1F6"/>
-                    </a:solidFill>
-                  </a:tcPr>
-                </a:tc>
-                <a:tc>
-                  <a:txBody>
-                    <a:bodyPr wrap="square"/>
-                    <a:lstStyle/>
-                    <a:p>
-                      <a:r>
-                        <a:rPr sz="1000" b="0">
-                          <a:solidFill>
-                            <a:srgbClr val="282828"/>
-                          </a:solidFill>
-                          <a:latin typeface="Arial"/>
-                        </a:rPr>
-                        <a:t>f 43 mm, 21 mm; pupil image 9.4 mm, 32 mm behind it</a:t>
-                      </a:r>
-                    </a:p>
-                  </a:txBody>
-                  <a:tcPr marL="54864" marR="54864" marT="18288" marB="18288">
-                    <a:solidFill>
-                      <a:srgbClr val="ECF1F6"/>
-                    </a:solidFill>
-                  </a:tcPr>
-                </a:tc>
-              </a:tr>
-              <a:tr h="434340">
-                <a:tc>
-                  <a:txBody>
-                    <a:bodyPr wrap="square"/>
-                    <a:lstStyle/>
-                    <a:p>
-                      <a:r>
-                        <a:rPr sz="1000" b="0">
-                          <a:solidFill>
-                            <a:srgbClr val="282828"/>
-                          </a:solidFill>
-                          <a:latin typeface="Arial"/>
-                        </a:rPr>
-                        <a:t>camera</a:t>
-                      </a:r>
-                    </a:p>
-                  </a:txBody>
-                  <a:tcPr marL="54864" marR="54864" marT="18288" marB="18288">
-                    <a:solidFill>
-                      <a:srgbClr val="FFFFFF"/>
-                    </a:solidFill>
-                  </a:tcPr>
-                </a:tc>
-                <a:tc>
-                  <a:txBody>
-                    <a:bodyPr wrap="square"/>
-                    <a:lstStyle/>
-                    <a:p>
-                      <a:r>
-                        <a:rPr sz="1000" b="0">
-                          <a:solidFill>
-                            <a:srgbClr val="282828"/>
-                          </a:solidFill>
-                          <a:latin typeface="Arial"/>
-                        </a:rPr>
-                        <a:t>pupil image 9.4 mm: a 6.5 µm sCMOS puts 1450 pixels across it, binned 4 to the modeled 385 (5 per actuator)</a:t>
-                      </a:r>
-                    </a:p>
-                  </a:txBody>
-                  <a:tcPr marL="54864" marR="54864" marT="18288" marB="18288">
-                    <a:solidFill>
-                      <a:srgbClr val="FFFFFF"/>
-                    </a:solidFill>
-                  </a:tcPr>
-                </a:tc>
-              </a:tr>
-              <a:tr h="262890">
-                <a:tc>
-                  <a:txBody>
-                    <a:bodyPr wrap="square"/>
-                    <a:lstStyle/>
-                    <a:p>
-                      <a:r>
-                        <a:rPr sz="1000" b="0">
-                          <a:solidFill>
-                            <a:srgbClr val="282828"/>
-                          </a:solidFill>
-                          <a:latin typeface="Arial"/>
-                        </a:rPr>
-                        <a:t>mask seat</a:t>
-                      </a:r>
-                    </a:p>
-                  </a:txBody>
-                  <a:tcPr marL="54864" marR="54864" marT="18288" marB="18288">
-                    <a:solidFill>
-                      <a:srgbClr val="ECF1F6"/>
-                    </a:solidFill>
-                  </a:tcPr>
-                </a:tc>
-                <a:tc>
-                  <a:txBody>
-                    <a:bodyPr wrap="square"/>
-                    <a:lstStyle/>
-                    <a:p>
-                      <a:r>
-                        <a:rPr sz="1000" b="0">
-                          <a:solidFill>
-                            <a:srgbClr val="282828"/>
-                          </a:solidFill>
-                          <a:latin typeface="Arial"/>
-                        </a:rPr>
-                        <a:t>one substrate at the internal focus, translated to select the sensor</a:t>
-                      </a:r>
-                    </a:p>
-                  </a:txBody>
-                  <a:tcPr marL="54864" marR="54864" marT="18288" marB="18288">
-                    <a:solidFill>
-                      <a:srgbClr val="ECF1F6"/>
+                        <a:t>where it stands</a:t>
+                      </a:r>
+                    </a:p>
+                  </a:txBody>
+                  <a:tcPr marL="54864" marR="54864" marT="18288" marB="18288">
+                    <a:solidFill>
+                      <a:srgbClr val="FFFFFF"/>
+                    </a:solidFill>
+                  </a:tcPr>
+                </a:tc>
+                <a:tc>
+                  <a:txBody>
+                    <a:bodyPr wrap="square"/>
+                    <a:lstStyle/>
+                    <a:p>
+                      <a:r>
+                        <a:rPr sz="1100" b="0">
+                          <a:solidFill>
+                            <a:srgbClr val="282828"/>
+                          </a:solidFill>
+                          <a:latin typeface="Arial"/>
+                        </a:rPr>
+                        <a:t>the record</a:t>
+                      </a:r>
+                    </a:p>
+                  </a:txBody>
+                  <a:tcPr marL="54864" marR="54864" marT="18288" marB="18288">
+                    <a:solidFill>
+                      <a:srgbClr val="FFFFFF"/>
+                    </a:solidFill>
+                  </a:tcPr>
+                </a:tc>
+                <a:tc>
+                  <a:txBody>
+                    <a:bodyPr wrap="square"/>
+                    <a:lstStyle/>
+                    <a:p>
+                      <a:r>
+                        <a:rPr sz="1100" b="0">
+                          <a:solidFill>
+                            <a:srgbClr val="282828"/>
+                          </a:solidFill>
+                          <a:latin typeface="Arial"/>
+                        </a:rPr>
+                        <a:t>rows read at 0.99 / 2.4 pm and 0.99 / 161 pm, cross-talk 0.006-0.02 (the lens rig's own); pinhole recovers; vector pair and interferometer servo being re-measured</a:t>
+                      </a:r>
+                    </a:p>
+                  </a:txBody>
+                  <a:tcPr marL="54864" marR="54864" marT="18288" marB="18288">
+                    <a:solidFill>
+                      <a:srgbClr val="FFFFFF"/>
                     </a:solidFill>
                   </a:tcPr>
                 </a:tc>
@@ -16385,14 +16225,14 @@
       </p:graphicFrame>
       <p:sp>
         <p:nvSpPr>
-          <p:cNvPr id="8" name="TextBox 7"/>
+          <p:cNvPr id="9" name="TextBox 8"/>
           <p:cNvSpPr txBox="1"/>
           <p:nvPr/>
         </p:nvSpPr>
         <p:spPr>
           <a:xfrm>
-            <a:off x="6400800" y="5900166"/>
-            <a:ext cx="5394960" cy="274320"/>
+            <a:off x="411480" y="6403086"/>
+            <a:ext cx="11368735" cy="274320"/>
           </a:xfrm>
           <a:prstGeom prst="rect">
             <a:avLst/>
@@ -16417,7 +16257,7 @@
                 </a:solidFill>
                 <a:latin typeface="Arial"/>
               </a:rPr>
-              <a:t>The reference arm (a 103 mm flat on a piezo stage, 564 mm leg) is the interferometer's; shuttered, the same bench is every other sensor.  Lenses, not off-axis mirrors: the choice is priced on the lenses-versus-mirrors slide.  The drawings are to scale: the model's parts are the 56 mm rig's scaled up, thinner than 103 mm optics can be built; the next model round gives every part its real thickness.</a:t>
+              <a:t>The reference arm (a 103 mm flat on a piezo, 564 mm leg) is the interferometer's; shuttered, the same bench is every other sensor.  Run tags bench_bs22, oapdraw3, oapifo2, oapsens22; the priced comparison is on the lenses-versus-mirrors slides.</a:t>
             </a:r>
           </a:p>
         </p:txBody>

--- a/demo_session/deck_gauges.pptx
+++ b/demo_session/deck_gauges.pptx
@@ -3802,7 +3802,7 @@
                 </a:solidFill>
                 <a:latin typeface="Arial"/>
               </a:rPr>
-              <a:t>The residual column is the raw pixel map against the engine's field, before any calibration; the rows and the servo use the calibrated estimate.</a:t>
+              <a:t>The residual column is the raw pixel map against the engine's field, before any calibration; the performance rows and the servo use the calibrated estimate.</a:t>
             </a:r>
           </a:p>
         </p:txBody>
@@ -4404,7 +4404,7 @@
                 </a:solidFill>
                 <a:latin typeface="Arial"/>
               </a:rPr>
-              <a:t>The tail from the focus to the two cameras, both channel decks traced by the engine</a:t>
+              <a:t>The leg from the focus to the two cameras, both channel decks traced by the engine</a:t>
             </a:r>
           </a:p>
         </p:txBody>
@@ -4847,7 +4847,7 @@
                 </a:solidFill>
                 <a:latin typeface="Arial"/>
               </a:rPr>
-              <a:t>The 25 pm is the raw absolute map's error on a 30 nm surface with the flat's calibration; the rows on the same surface read 0.9935 / 4 pm through the matrix.</a:t>
+              <a:t>The 25 pm is the raw absolute map's error on a 30 nm surface with the flat's calibration; on the same surface the calibrated reading is 0.9935 / 4 pm.</a:t>
             </a:r>
           </a:p>
         </p:txBody>
@@ -5038,6 +5038,22 @@
               <a:t>•  Servo: 3 pm from 2.3e12 photons per cycle noise only, 7.0e12 under the walk; no fixed error.  The shutter frame is what lets it read to 480 nm of surface (next slides).</a:t>
             </a:r>
           </a:p>
+          <a:p>
+            <a:pPr>
+              <a:spcAft>
+                <a:spcPts val="600"/>
+              </a:spcAft>
+            </a:pPr>
+            <a:r>
+              <a:rPr sz="1200" b="0">
+                <a:solidFill>
+                  <a:srgbClr val="282828"/>
+                </a:solidFill>
+                <a:latin typeface="Arial"/>
+              </a:rPr>
+              <a:t>•  Not yet modeled: how the phase is stepped.  These results step the surround's phase by an ideal increment ("magic"), with a step-error knob only.  The photonic phase shifter of the two-arm form, and the stage or etched steps of this one, have no device physics yet: coupling, loss, drift.</a:t>
+            </a:r>
+          </a:p>
         </p:txBody>
       </p:sp>
       <p:graphicFrame>
@@ -5403,7 +5419,7 @@
                 </a:solidFill>
                 <a:latin typeface="Arial"/>
               </a:rPr>
-              <a:t>The tail from the focuser to the camera, with the pinhole substrate at the internal focus</a:t>
+              <a:t>The leg from the focuser to the camera, with the pinhole substrate at the internal focus</a:t>
             </a:r>
           </a:p>
         </p:txBody>
@@ -12723,7 +12739,7 @@
                 </a:solidFill>
                 <a:latin typeface="Arial"/>
               </a:rPr>
-              <a:t>Fed at its focus and re-solved at the 22.5° splitter, the mirror rig is buildable (every part clears by 33 mm), its mask seat is diffraction-limited at zero trim, and its untuned tail nulls 4.6× better than the lens rig's tuned one; the rows are running</a:t>
+              <a:t>Fed at its focus and re-solved at the 22.5° splitter, the mirror rig is buildable (every part clears by 33 mm), its focus lands on the mask seat without adjustment, and its residual with a flat mirror is 4.6× smaller than the lens rig's; its performance is being measured</a:t>
             </a:r>
           </a:p>
         </p:txBody>
@@ -12845,7 +12861,7 @@
         </p:nvGraphicFramePr>
         <p:xfrm>
           <a:off x="6400800" y="1298448"/>
-          <a:ext cx="5394959" cy="2263140"/>
+          <a:ext cx="5394958" cy="2263140"/>
         </p:xfrm>
         <a:graphic>
           <a:graphicData uri="http://schemas.openxmlformats.org/drawingml/2006/table">
@@ -12854,9 +12870,9 @@
                 <a:tableStyleId>{5C22544A-7EE6-4342-B048-85BDC9FD1C3A}</a:tableStyleId>
               </a:tblPr>
               <a:tblGrid>
-                <a:gridCol w="1940292"/>
-                <a:gridCol w="1656347"/>
-                <a:gridCol w="1798320"/>
+                <a:gridCol w="1496081"/>
+                <a:gridCol w="1586752"/>
+                <a:gridCol w="2312125"/>
               </a:tblGrid>
               <a:tr h="262890">
                 <a:tc>
@@ -13065,7 +13081,7 @@
                           </a:solidFill>
                           <a:latin typeface="Arial"/>
                         </a:rPr>
-                        <a:t>flat-mirror null, tail as tuned / untuned</a:t>
+                        <a:t>residual with a flat mirror</a:t>
                       </a:r>
                     </a:p>
                   </a:txBody>
@@ -13087,7 +13103,7 @@
                           </a:solidFill>
                           <a:latin typeface="Arial"/>
                         </a:rPr>
-                        <a:t>12.9 nm tuned</a:t>
+                        <a:t>12.9 nm after focus adjustment</a:t>
                       </a:r>
                     </a:p>
                   </a:txBody>
@@ -13109,7 +13125,7 @@
                           </a:solidFill>
                           <a:latin typeface="Arial"/>
                         </a:rPr>
-                        <a:t>0.029 nm untuned (lens rig 0.13 tuned)</a:t>
+                        <a:t>0.029 nm with none (lens rig 0.13 after adjustment)</a:t>
                       </a:r>
                     </a:p>
                   </a:txBody>
@@ -15686,7 +15702,7 @@
                 </a:solidFill>
                 <a:latin typeface="Arial"/>
               </a:rPr>
-              <a:t>Run tag an193_clear; the runner's mask.v_clear reading and gate G9.  On orbit with starlight, the field's amplitude is what the second mirror's control needs.</a:t>
+              <a:t>Run tag an193_clear; the runner's mask.v_clear reading and its amplitude-dip check.  On orbit with starlight, the field's amplitude is what the second mirror's control needs.</a:t>
             </a:r>
           </a:p>
         </p:txBody>
@@ -15824,8 +15840,8 @@
         </p:blipFill>
         <p:spPr>
           <a:xfrm>
-            <a:off x="1645652" y="1298448"/>
-            <a:ext cx="3338094" cy="1927352"/>
+            <a:off x="1883208" y="1298448"/>
+            <a:ext cx="2862983" cy="1653032"/>
           </a:xfrm>
           <a:prstGeom prst="rect">
             <a:avLst/>
@@ -15840,7 +15856,7 @@
         </p:nvSpPr>
         <p:spPr>
           <a:xfrm>
-            <a:off x="411480" y="3244088"/>
+            <a:off x="411480" y="2969768"/>
             <a:ext cx="5806440" cy="724408"/>
           </a:xfrm>
           <a:prstGeom prst="rect">
@@ -15887,8 +15903,8 @@
         </p:blipFill>
         <p:spPr>
           <a:xfrm>
-            <a:off x="8033856" y="1298448"/>
-            <a:ext cx="2128847" cy="1927352"/>
+            <a:off x="8185355" y="1298448"/>
+            <a:ext cx="1825848" cy="1653032"/>
           </a:xfrm>
           <a:prstGeom prst="rect">
             <a:avLst/>
@@ -15903,7 +15919,7 @@
         </p:nvSpPr>
         <p:spPr>
           <a:xfrm>
-            <a:off x="6400800" y="3244088"/>
+            <a:off x="6400800" y="2969768"/>
             <a:ext cx="5394960" cy="724408"/>
           </a:xfrm>
           <a:prstGeom prst="rect">
@@ -15943,8 +15959,8 @@
           <p:nvPr/>
         </p:nvGraphicFramePr>
         <p:xfrm>
-          <a:off x="411480" y="4005072"/>
-          <a:ext cx="11368735" cy="2251710"/>
+          <a:off x="411480" y="3730752"/>
+          <a:ext cx="11368735" cy="2440305"/>
         </p:xfrm>
         <a:graphic>
           <a:graphicData uri="http://schemas.openxmlformats.org/drawingml/2006/table">
@@ -15954,8 +15970,8 @@
               </a:tblPr>
               <a:tblGrid>
                 <a:gridCol w="1235964"/>
-                <a:gridCol w="3759959"/>
-                <a:gridCol w="6372812"/>
+                <a:gridCol w="3790407"/>
+                <a:gridCol w="6342364"/>
               </a:tblGrid>
               <a:tr h="280035">
                 <a:tc>
@@ -16050,29 +16066,29 @@
                           </a:solidFill>
                           <a:latin typeface="Arial"/>
                         </a:rPr>
-                        <a:t>on axis, no fold polarization; cheap parts; the record's readings were all measured on it</a:t>
-                      </a:r>
-                    </a:p>
-                  </a:txBody>
-                  <a:tcPr marL="54864" marR="54864" marT="18288" marB="18288">
-                    <a:solidFill>
-                      <a:srgbClr val="FFFFFF"/>
-                    </a:solidFill>
-                  </a:tcPr>
-                </a:tc>
-                <a:tc>
-                  <a:txBody>
-                    <a:bodyPr wrap="square"/>
-                    <a:lstStyle/>
-                    <a:p>
-                      <a:r>
-                        <a:rPr sz="1100" b="0">
-                          <a:solidFill>
-                            <a:srgbClr val="282828"/>
-                          </a:solidFill>
-                          <a:latin typeface="Arial"/>
-                        </a:rPr>
-                        <a:t>no glass in the beam: achromatic (a second color for capture is free), no ghosts; fed at its focus the mask seat is diffraction-limited at zero trim, and the untuned tail nulls 0.029 nm against the lens rig's tuned 0.134; every part clears by 33 mm</a:t>
+                        <a:t>on axis, no polarization from folds; inexpensive parts; every record reading was measured on it</a:t>
+                      </a:r>
+                    </a:p>
+                  </a:txBody>
+                  <a:tcPr marL="54864" marR="54864" marT="18288" marB="18288">
+                    <a:solidFill>
+                      <a:srgbClr val="FFFFFF"/>
+                    </a:solidFill>
+                  </a:tcPr>
+                </a:tc>
+                <a:tc>
+                  <a:txBody>
+                    <a:bodyPr wrap="square"/>
+                    <a:lstStyle/>
+                    <a:p>
+                      <a:r>
+                        <a:rPr sz="1100" b="0">
+                          <a:solidFill>
+                            <a:srgbClr val="282828"/>
+                          </a:solidFill>
+                          <a:latin typeface="Arial"/>
+                        </a:rPr>
+                        <a:t>no glass in the beam: works at any color (a second color for capture is free), no ghosts; the focus lands on the mask without adjustment, and the residual with a flat mirror is 0.029 nm against the lens rig's 0.13; every part clears by 33 mm</a:t>
                       </a:r>
                     </a:p>
                   </a:txBody>
@@ -16118,7 +16134,7 @@
                           </a:solidFill>
                           <a:latin typeface="Arial"/>
                         </a:rPr>
-                        <a:t>one wavelength (a second color refocuses); substrates in the converging legs (0.03 wave W040 per 2 mm); the tail needs a tuned solve; faces need AR coating in the interferometer</a:t>
+                        <a:t>one color at a time; each plate in the converging beam adds aberration (0.03 wave per 2 mm); the detector leg reaches its best focus only after a numerical adjustment; faces need anti-reflection coating</a:t>
                       </a:r>
                     </a:p>
                   </a:txBody>
@@ -16140,7 +16156,7 @@
                           </a:solidFill>
                           <a:latin typeface="Arial"/>
                         </a:rPr>
-                        <a:t>fold polarization: bare aluminum at these angles gives the vector reading 0.1 rad of channel phase, at the edge of its calibration (a quarter-wave overcoat is expected to fix it); 10 µrad of mirror tilt moves the null 95-103 nm; capture range on a deep surface pending (the seed tail wraps at 120 nm)</a:t>
+                        <a:t>the folds polarize: bare aluminum at these angles gives the vector reading a 0.1 rad channel error, at the edge of what its calibration removes (a quarter-wave overcoat should fix it); 10 µrad of mirror tilt moves the null 95-103 nm; on a 120 nm surface the reading folds over, which the lens rig's does not (being re-run with unwrapping)</a:t>
                       </a:r>
                     </a:p>
                   </a:txBody>
@@ -16151,7 +16167,7 @@
                   </a:tcPr>
                 </a:tc>
               </a:tr>
-              <a:tr h="468630">
+              <a:tr h="657225">
                 <a:tc>
                   <a:txBody>
                     <a:bodyPr wrap="square"/>
@@ -16208,7 +16224,7 @@
                           </a:solidFill>
                           <a:latin typeface="Arial"/>
                         </a:rPr>
-                        <a:t>rows read at 0.99 / 2.4 pm and 0.99 / 161 pm, cross-talk 0.006-0.02 (the lens rig's own); pinhole recovers; vector pair and interferometer servo being re-measured</a:t>
+                        <a:t>reads 0.99 / 2.4 pm and 0.99 / 161 pm with the lens rig's own cross-talk (0.006-0.02); the pinhole recovers; the vector pair and the interferometer servo are being re-measured</a:t>
                       </a:r>
                     </a:p>
                   </a:txBody>
@@ -16231,7 +16247,7 @@
         </p:nvSpPr>
         <p:spPr>
           <a:xfrm>
-            <a:off x="411480" y="6403086"/>
+            <a:off x="411480" y="6317361"/>
             <a:ext cx="11368735" cy="274320"/>
           </a:xfrm>
           <a:prstGeom prst="rect">
@@ -17644,7 +17660,7 @@
         </p:nvGraphicFramePr>
         <p:xfrm>
           <a:off x="411480" y="1298448"/>
-          <a:ext cx="5806439" cy="3377565"/>
+          <a:ext cx="5806439" cy="3188970"/>
         </p:xfrm>
         <a:graphic>
           <a:graphicData uri="http://schemas.openxmlformats.org/drawingml/2006/table">
@@ -17654,8 +17670,8 @@
               </a:tblPr>
               <a:tblGrid>
                 <a:gridCol w="436880"/>
-                <a:gridCol w="2856711"/>
-                <a:gridCol w="2512848"/>
+                <a:gridCol w="2963389"/>
+                <a:gridCol w="2406170"/>
               </a:tblGrid>
               <a:tr h="280035">
                 <a:tc>
@@ -17828,7 +17844,7 @@
                           </a:solidFill>
                           <a:latin typeface="Arial"/>
                         </a:rPr>
-                        <a:t>build the bench from the sheet, trace it; clearance of end bodies and node parts; tail tune; sampling budget</a:t>
+                        <a:t>build the bench from the sheet, trace it; clearance of end bodies and node parts; detector-leg focus; sampling budget</a:t>
                       </a:r>
                     </a:p>
                   </a:txBody>
@@ -17997,7 +18013,7 @@
                   </a:tcPr>
                 </a:tc>
               </a:tr>
-              <a:tr h="657225">
+              <a:tr h="468630">
                 <a:tc>
                   <a:txBody>
                     <a:bodyPr wrap="square"/>
@@ -24877,7 +24893,7 @@
                 </a:solidFill>
                 <a:latin typeface="Arial"/>
               </a:rPr>
-              <a:t>•  What moves: the output plate and analyzer from 17 and 27 mm behind the splitter to 160 and 170 mm, just ahead of the focuser at 207 mm; nothing else, so the tuned tail is untouched.</a:t>
+              <a:t>•  What moves: the output plate and analyzer from 17 and 27 mm behind the splitter to 160 and 170 mm, just ahead of the focuser at 207 mm; nothing else, so the focused detector leg is untouched.</a:t>
             </a:r>
           </a:p>
           <a:p>
@@ -25200,9 +25216,9 @@
               </a:tblPr>
               <a:tblGrid>
                 <a:gridCol w="1453895"/>
-                <a:gridCol w="2946123"/>
-                <a:gridCol w="3371045"/>
-                <a:gridCol w="3597670"/>
+                <a:gridCol w="3250766"/>
+                <a:gridCol w="3223677"/>
+                <a:gridCol w="3440395"/>
               </a:tblGrid>
               <a:tr h="280035">
                 <a:tc>
@@ -25329,7 +25345,7 @@
                           </a:solidFill>
                           <a:latin typeface="Arial"/>
                         </a:rPr>
-                        <a:t>stage A clearance, A2 sampling, B build both arms; the tail from tg96_tail; the wrapped phase difference</a:t>
+                        <a:t>stage A clearance, A2 sampling, B build both arms; the detector leg's focus from tg96_tail; the wrapped phase difference</a:t>
                       </a:r>
                     </a:p>
                   </a:txBody>
@@ -25959,7 +25975,7 @@
                           </a:solidFill>
                           <a:latin typeface="Arial"/>
                         </a:rPr>
-                        <a:t>the view_rx recipe: train, node, tail</a:t>
+                        <a:t>the view_rx recipe: train, node, detector leg</a:t>
                       </a:r>
                     </a:p>
                   </a:txBody>
@@ -26384,7 +26400,7 @@
                 </a:solidFill>
                 <a:latin typeface="Arial"/>
               </a:rPr>
-              <a:t>The front end and the detector tail, from the parameter sheet; thicknesses are the scaled model's and are being made real</a:t>
+              <a:t>The front end and the detector leg, from the parameter sheet; thicknesses are the scaled model's and are being made real</a:t>
             </a:r>
           </a:p>
         </p:txBody>
@@ -27728,7 +27744,7 @@
                 </a:solidFill>
                 <a:latin typeface="Arial"/>
               </a:rPr>
-              <a:t>The tail (focuser, mask seat, field lens, camera) is tuned once and shared; only the mask seat's contents and what follows the field lens change between configurations.</a:t>
+              <a:t>The detector leg (focuser, mask seat, field lens, camera) is focused once and shared; only the mask seat's contents and what follows the field lens change between configurations.</a:t>
             </a:r>
           </a:p>
         </p:txBody>

--- a/demo_session/deck_gauges.pptx
+++ b/demo_session/deck_gauges.pptx
@@ -7743,7 +7743,7 @@
                 </a:solidFill>
                 <a:latin typeface="Arial"/>
               </a:rPr>
-              <a:t>•  Job 3, hold: the servo at picometers: the light per cycle that holds 3 pm rms, and whether the reading leaves a fixed error.</a:t>
+              <a:t>•  Job 3, hold: the servo at picometers on the 30 nm rms working surface, its set point: the light per cycle that holds changes about it to 3 pm rms under a 2 pm per-cycle random walk, and whether the reading leaves a fixed error.</a:t>
             </a:r>
           </a:p>
         </p:txBody>

--- a/demo_session/deck_gauges.pptx
+++ b/demo_session/deck_gauges.pptx
@@ -6376,7 +6376,7 @@
                 </a:solidFill>
                 <a:latin typeface="Arial"/>
               </a:rPr>
-              <a:t>Three jobs, one bench, four ways of sensing; the record on a 30 nm working surface; lenses or mirrors; what remains</a:t>
+              <a:t>Three jobs, one bench, four ways of sensing</a:t>
             </a:r>
           </a:p>
         </p:txBody>
@@ -6459,7 +6459,7 @@
                 </a:solidFill>
                 <a:latin typeface="Arial"/>
               </a:rPr>
-              <a:t>•  The jobs and the bench (3-8): measure, capture, hold; one bench, four ways of sensing; the splitter angle; parts common to every configuration, the interferometer's, the sensors'.</a:t>
+              <a:t>•  3-8 The jobs; the bench and its parts</a:t>
             </a:r>
           </a:p>
           <a:p>
@@ -6475,7 +6475,7 @@
                 </a:solidFill>
                 <a:latin typeface="Arial"/>
               </a:rPr>
-              <a:t>•  The four approaches (9-19): the Twyman-Green interferometer, its node and its stations; the Zernike dimple and its stations; the vector Zernike, its layout and stations; the stepped pinhole, its layout and stations.</a:t>
+              <a:t>•  9-19 The four approaches: interferometer, Zernike, vector Zernike, pinhole</a:t>
             </a:r>
           </a:p>
           <a:p>
@@ -6491,7 +6491,7 @@
                 </a:solidFill>
                 <a:latin typeface="Arial"/>
               </a:rPr>
-              <a:t>•  Performance on the working surface (20-25): side by side; capture range and its photon price; photons for 1 pm; the servo; capturing the initial figure.</a:t>
+              <a:t>•  20-25 Performance on the working surface: rows, capture, photons, servo</a:t>
             </a:r>
           </a:p>
           <a:p>
@@ -6507,7 +6507,7 @@
                 </a:solidFill>
                 <a:latin typeface="Arial"/>
               </a:rPr>
-              <a:t>•  Lenses or off-axis mirrors (26-28): the record; the reflective front end redesigned; measured.</a:t>
+              <a:t>•  26-28 Lenses or off-axis mirrors</a:t>
             </a:r>
           </a:p>
         </p:txBody>
@@ -6546,7 +6546,7 @@
                 </a:solidFill>
                 <a:latin typeface="Arial"/>
               </a:rPr>
-              <a:t>•  Systematics and the recommendation (29-30).</a:t>
+              <a:t>•  29-30 Systematics; recommendation</a:t>
             </a:r>
           </a:p>
           <a:p>
@@ -6562,7 +6562,7 @@
                 </a:solidFill>
                 <a:latin typeface="Arial"/>
               </a:rPr>
-              <a:t>•  Operating the gauge (31-33): the modes from launch to hold; the complex amplitude for two-mirror control; one bench, every mode.</a:t>
+              <a:t>•  31-33 Operating the gauge</a:t>
             </a:r>
           </a:p>
           <a:p>
@@ -6578,7 +6578,7 @@
                 </a:solidFill>
                 <a:latin typeface="Arial"/>
               </a:rPr>
-              <a:t>•  Future work (34-36): a second color for capture; other approaches; from this model to as-built performance.</a:t>
+              <a:t>•  34-36 Future work</a:t>
             </a:r>
           </a:p>
           <a:p>
@@ -6594,7 +6594,7 @@
                 </a:solidFill>
                 <a:latin typeface="Arial"/>
               </a:rPr>
-              <a:t>•  Method (37-38): how every configuration was analyzed; run it yourself.</a:t>
+              <a:t>•  37-38 Method; run it yourself</a:t>
             </a:r>
           </a:p>
           <a:p>
@@ -6610,46 +6610,7 @@
                 </a:solidFill>
                 <a:latin typeface="Arial"/>
               </a:rPr>
-              <a:t>•  Backup (39-48): the three phase-shift forms; the record's mirror rig; the Zernike readings that lost; the pinhole trades; drift within a measurement; the vector sensor's polarization terms; sampling and color; the clearance scan; the path per configuration; provenance.</a:t>
-            </a:r>
-          </a:p>
-        </p:txBody>
-      </p:sp>
-      <p:sp>
-        <p:nvSpPr>
-          <p:cNvPr id="6" name="TextBox 5"/>
-          <p:cNvSpPr txBox="1"/>
-          <p:nvPr/>
-        </p:nvSpPr>
-        <p:spPr>
-          <a:xfrm>
-            <a:off x="6400800" y="4215384"/>
-            <a:ext cx="5394960" cy="274320"/>
-          </a:xfrm>
-          <a:prstGeom prst="rect">
-            <a:avLst/>
-          </a:prstGeom>
-          <a:noFill/>
-        </p:spPr>
-        <p:txBody>
-          <a:bodyPr wrap="square">
-            <a:spAutoFit/>
-          </a:bodyPr>
-          <a:lstStyle/>
-          <a:p>
-            <a:pPr>
-              <a:spcAft>
-                <a:spcPts val="600"/>
-              </a:spcAft>
-            </a:pPr>
-            <a:r>
-              <a:rPr sz="1050" b="0">
-                <a:solidFill>
-                  <a:srgbClr val="6E6E6E"/>
-                </a:solidFill>
-                <a:latin typeface="Arial"/>
-              </a:rPr>
-              <a:t>Every number carries a run tag on its slide; the tags resolve to committed run directories of the shared model (provenance, slide 48).</a:t>
+              <a:t>•  39-48 Backup</a:t>
             </a:r>
           </a:p>
         </p:txBody>

--- a/demo_session/deck_gauges.pptx
+++ b/demo_session/deck_gauges.pptx
@@ -3600,7 +3600,7 @@
       </p:sp>
       <p:pic>
         <p:nvPicPr>
-          <p:cNvPr id="4" name="Picture 3" descr="oapifol2_stations.png"/>
+          <p:cNvPr id="4" name="Picture 3" descr="stnoap_stations.png"/>
           <p:cNvPicPr>
             <a:picLocks noChangeAspect="1"/>
           </p:cNvPicPr>
@@ -3614,8 +3614,8 @@
         </p:blipFill>
         <p:spPr>
           <a:xfrm>
-            <a:off x="2231570" y="1298448"/>
-            <a:ext cx="7728554" cy="2531872"/>
+            <a:off x="2026767" y="1298448"/>
+            <a:ext cx="8138160" cy="2531872"/>
           </a:xfrm>
           <a:prstGeom prst="rect">
             <a:avLst/>
@@ -3734,7 +3734,7 @@
                 </a:solidFill>
                 <a:latin typeface="Arial"/>
               </a:rPr>
-              <a:t>Run tag oapifol2 (seed detector leg, record resolution); the lens rig's figure is being regenerated at the same width.</a:t>
+              <a:t>Run tag stnoap (the redesigned mirror rig, seed detector leg; bit-identical to the servo run's figure).  The lens rig's figure exists but its residual panel reads 62 nm against the engine, a misregistration under investigation, so it is not shown.</a:t>
             </a:r>
           </a:p>
         </p:txBody>
@@ -8467,9 +8467,9 @@
                 <a:tableStyleId>{5C22544A-7EE6-4342-B048-85BDC9FD1C3A}</a:tableStyleId>
               </a:tblPr>
               <a:tblGrid>
-                <a:gridCol w="1721163"/>
-                <a:gridCol w="7020533"/>
-                <a:gridCol w="2627038"/>
+                <a:gridCol w="1435255"/>
+                <a:gridCol w="7742826"/>
+                <a:gridCol w="2190653"/>
               </a:tblGrid>
               <a:tr h="468630">
                 <a:tc>
@@ -9028,7 +9028,7 @@
                           </a:solidFill>
                           <a:latin typeface="Arial"/>
                         </a:rPr>
-                        <a:t>interferometer, mirror rig, redesigned</a:t>
+                        <a:t>interferometer, either rig</a:t>
                       </a:r>
                     </a:p>
                   </a:txBody>
@@ -9050,7 +9050,7 @@
                           </a:solidFill>
                           <a:latin typeface="Arial"/>
                         </a:rPr>
-                        <a:t>0.99 / 2 pm to 60 nm; the raw reading folds at 120 nm (lens rig at 240): two wrapped maps subtracted, an arithmetic of the ladder, not a limit of the bench</a:t>
+                        <a:t>0.99 / 2 pm to 60 nm; between 60 and 120 nm the raw four-step reading wraps (the base past λ/2 of surface reads 91 nm rms whatever it is) on lens and mirror rigs alike; unwrapping restores it (next slides)</a:t>
                       </a:r>
                     </a:p>
                   </a:txBody>
@@ -14673,7 +14673,7 @@
                 </a:solidFill>
                 <a:latin typeface="Arial"/>
               </a:rPr>
-              <a:t>•  Open: the raw interferometer reading folds at 120 nm of surface on this rig and at 240 on the lens rig, which is the ladder subtracting two wrapped maps rather than a bench limit; both rigs capture with unwrapping.  The detector leg here is the geometric seed (the tuner's objective prefers a leg that does not read: a known defect, being fixed).</a:t>
+              <a:t>•  Closed: the raw interferometer reading wraps between 60 and 120 nm of surface on both rigs, lens and mirror alike (a base the four-step cannot follow reads λ/2 ÷ √12 = 91 nm rms, measured 89-92 on both); the capture range is set by the reading, not the optics, and unwrapping restores it.  The detector leg here is the geometric seed (the tuner's objective prefers a leg that does not read: a known defect, being fixed).</a:t>
             </a:r>
           </a:p>
         </p:txBody>
@@ -14686,7 +14686,7 @@
         </p:nvSpPr>
         <p:spPr>
           <a:xfrm>
-            <a:off x="411480" y="5487924"/>
+            <a:off x="411480" y="5735574"/>
             <a:ext cx="11368735" cy="274320"/>
           </a:xfrm>
           <a:prstGeom prst="rect">
@@ -21051,7 +21051,7 @@
         </p:nvGraphicFramePr>
         <p:xfrm>
           <a:off x="411480" y="3730752"/>
-          <a:ext cx="11368734" cy="2440305"/>
+          <a:ext cx="11368735" cy="2628900"/>
         </p:xfrm>
         <a:graphic>
           <a:graphicData uri="http://schemas.openxmlformats.org/drawingml/2006/table">
@@ -21061,8 +21061,8 @@
               </a:tblPr>
               <a:tblGrid>
                 <a:gridCol w="1235964"/>
-                <a:gridCol w="3898704"/>
-                <a:gridCol w="6234066"/>
+                <a:gridCol w="3635559"/>
+                <a:gridCol w="6497212"/>
               </a:tblGrid>
               <a:tr h="280035">
                 <a:tc>
@@ -21190,7 +21190,7 @@
                   </a:tcPr>
                 </a:tc>
               </a:tr>
-              <a:tr h="845820">
+              <a:tr h="1034415">
                 <a:tc>
                   <a:txBody>
                     <a:bodyPr wrap="square"/>
@@ -21247,7 +21247,7 @@
                           </a:solidFill>
                           <a:latin typeface="Arial"/>
                         </a:rPr>
-                        <a:t>the metal folds polarize: the vector reading needs its two channels calibrated (634 pm raw, 0.054 pm calibrated; a quarter-wave overcoat halves the raw error); 10 µrad of mirror tilt moves the null 95-103 nm; the raw reading folds over at 120 nm of surface where the lens rig's does at 240, and both capture with unwrapping</a:t>
+                        <a:t>the metal folds polarize: the vector reading needs its two channels calibrated (634 pm raw, 0.054 pm calibrated; a quarter-wave overcoat halves the raw error); 10 µrad of mirror tilt moves the null 95-103 nm; the raw four-step reading wraps between 60 and 120 nm of surface on both rigs (a base past λ/2 reads 91 nm whatever it is); both capture with unwrapping</a:t>
                       </a:r>
                     </a:p>
                   </a:txBody>
@@ -21338,7 +21338,7 @@
         </p:nvSpPr>
         <p:spPr>
           <a:xfrm>
-            <a:off x="411480" y="6317361"/>
+            <a:off x="411480" y="6505956"/>
             <a:ext cx="11368735" cy="274320"/>
           </a:xfrm>
           <a:prstGeom prst="rect">
@@ -27225,7 +27225,7 @@
                 </a:solidFill>
                 <a:latin typeface="Arial"/>
               </a:rPr>
-              <a:t>•  Interferometer (tg_psi_dm96_oap/runs): lens_deck, lens_deck_se2, lens_deck_se5, loop_lens, loop_lens_cam, loop_lens_intra, loop_lens_se2, descent_lens, oap_deck, loop_oap, descent_oap, oap_bareAl, oap_coat, oap_jones, zoap (the 7° rigs); lens22, lens22g, lens22h, node22t, fold1-4, loss, loss_src, loss_a2, conj, zseat, zseat2, oap22d, oapdraw3, oap22d_tail, tailA, tailB, oapifo2, oapifol2, oapdesc2, oapuw2, lensuw2, thk22, sub22, aoi_lens22, aoi_oap22, gate3_win, gate3_lens (the 22.5° bench and the redesigned reflective rig); pdi_dm96/runs/psriclear2 (the P/SRI bench through the clearance tool).  Reports REPORT_gauge_ifo.md (CCMac) with REPORT_oap.md, REPORT_bench_realism.md and REPORT_reflective.md (TO), and README.md.</a:t>
+              <a:t>•  Interferometer (tg_psi_dm96_oap/runs): lens_deck, lens_deck_se2, lens_deck_se5, loop_lens, loop_lens_cam, loop_lens_intra, loop_lens_se2, descent_lens, oap_deck, loop_oap, descent_oap, oap_bareAl, oap_coat, oap_jones, zoap (the 7° rigs); lens22, lens22g, lens22h, node22t, fold1-4, loss, loss_src, loss_a2, conj, zseat, zseat2, oap22d, oapdraw3, oap22d_tail, tailA, tailB, oapifo2, oapifol2, oapdesc2, oapuw2, lensuw2, thk22, sub22, aoi_lens22, aoi_oap22, gate3_win, gate3_lens, wrapoap, wraplens, stnoap, stnlens (the 22.5° bench and the redesigned reflective rig); pdi_dm96/runs/psriclear2 (the P/SRI bench through the clearance tool).  Reports REPORT_gauge_ifo.md (CCMac) with REPORT_oap.md, REPORT_bench_realism.md and REPORT_reflective.md (TO), and README.md.</a:t>
             </a:r>
           </a:p>
           <a:p>
@@ -28427,7 +28427,7 @@
         </p:nvGraphicFramePr>
         <p:xfrm>
           <a:off x="411480" y="1298448"/>
-          <a:ext cx="11368734" cy="6852285"/>
+          <a:ext cx="11368734" cy="8549640"/>
         </p:xfrm>
         <a:graphic>
           <a:graphicData uri="http://schemas.openxmlformats.org/drawingml/2006/table">
@@ -28437,10 +28437,10 @@
               </a:tblPr>
               <a:tblGrid>
                 <a:gridCol w="1962404"/>
-                <a:gridCol w="5406970"/>
+                <a:gridCol w="5700809"/>
                 <a:gridCol w="2180336"/>
                 <a:gridCol w="509524"/>
-                <a:gridCol w="1309500"/>
+                <a:gridCol w="1015661"/>
               </a:tblGrid>
               <a:tr h="280035">
                 <a:tc>
@@ -28554,7 +28554,7 @@
                   </a:tcPr>
                 </a:tc>
               </a:tr>
-              <a:tr h="657225">
+              <a:tr h="845820">
                 <a:tc>
                   <a:txBody>
                     <a:bodyPr wrap="square"/>
@@ -28778,6 +28778,118 @@
                   </a:tcPr>
                 </a:tc>
               </a:tr>
+              <a:tr h="1034415">
+                <a:tc>
+                  <a:txBody>
+                    <a:bodyPr wrap="square"/>
+                    <a:lstStyle/>
+                    <a:p>
+                      <a:r>
+                        <a:rPr sz="1100" b="0">
+                          <a:solidFill>
+                            <a:srgbClr val="282828"/>
+                          </a:solidFill>
+                          <a:latin typeface="Arial"/>
+                        </a:rPr>
+                        <a:t>plate splitter</a:t>
+                      </a:r>
+                    </a:p>
+                  </a:txBody>
+                  <a:tcPr marL="54864" marR="54864" marT="18288" marB="18288">
+                    <a:solidFill>
+                      <a:srgbClr val="FFFFFF"/>
+                    </a:solidFill>
+                  </a:tcPr>
+                </a:tc>
+                <a:tc>
+                  <a:txBody>
+                    <a:bodyPr wrap="square"/>
+                    <a:lstStyle/>
+                    <a:p>
+                      <a:r>
+                        <a:rPr sz="1100" b="0">
+                          <a:solidFill>
+                            <a:srgbClr val="282828"/>
+                          </a:solidFill>
+                          <a:latin typeface="Arial"/>
+                        </a:rPr>
+                        <a:t>103 mm, 22.5° incidence, 50/50; 10 mm thick (modeled): shifts the transmitted beam 1.39 mm, which the compensator cannot undo; the interferometer's flat null rises from 0.13 to 20 nm and its reading is attenuated 13%, a cost in floor and SNR, not gain (differential rows 1.00-1.01, single actuator 0.989; capture unchanged); the sensors do not move</a:t>
+                      </a:r>
+                    </a:p>
+                  </a:txBody>
+                  <a:tcPr marL="54864" marR="54864" marT="18288" marB="18288">
+                    <a:solidFill>
+                      <a:srgbClr val="FFFFFF"/>
+                    </a:solidFill>
+                  </a:tcPr>
+                </a:tc>
+                <a:tc>
+                  <a:txBody>
+                    <a:bodyPr wrap="square"/>
+                    <a:lstStyle/>
+                    <a:p>
+                      <a:r>
+                        <a:rPr sz="1100" b="0">
+                          <a:solidFill>
+                            <a:srgbClr val="282828"/>
+                          </a:solidFill>
+                          <a:latin typeface="Arial"/>
+                        </a:rPr>
+                        <a:t>50/50 front coating, AR back</a:t>
+                      </a:r>
+                    </a:p>
+                  </a:txBody>
+                  <a:tcPr marL="54864" marR="54864" marT="18288" marB="18288">
+                    <a:solidFill>
+                      <a:srgbClr val="FFFFFF"/>
+                    </a:solidFill>
+                  </a:tcPr>
+                </a:tc>
+                <a:tc>
+                  <a:txBody>
+                    <a:bodyPr wrap="square"/>
+                    <a:lstStyle/>
+                    <a:p>
+                      <a:r>
+                        <a:rPr sz="1100" b="0">
+                          <a:solidFill>
+                            <a:srgbClr val="282828"/>
+                          </a:solidFill>
+                          <a:latin typeface="Arial"/>
+                        </a:rPr>
+                        <a:t>1</a:t>
+                      </a:r>
+                    </a:p>
+                  </a:txBody>
+                  <a:tcPr marL="54864" marR="54864" marT="18288" marB="18288">
+                    <a:solidFill>
+                      <a:srgbClr val="FFFFFF"/>
+                    </a:solidFill>
+                  </a:tcPr>
+                </a:tc>
+                <a:tc>
+                  <a:txBody>
+                    <a:bodyPr wrap="square"/>
+                    <a:lstStyle/>
+                    <a:p>
+                      <a:r>
+                        <a:rPr sz="1100" b="0">
+                          <a:solidFill>
+                            <a:srgbClr val="282828"/>
+                          </a:solidFill>
+                          <a:latin typeface="Arial"/>
+                        </a:rPr>
+                        <a:t>splits to the mirror and the reference arm</a:t>
+                      </a:r>
+                    </a:p>
+                  </a:txBody>
+                  <a:tcPr marL="54864" marR="54864" marT="18288" marB="18288">
+                    <a:solidFill>
+                      <a:srgbClr val="FFFFFF"/>
+                    </a:solidFill>
+                  </a:tcPr>
+                </a:tc>
+              </a:tr>
               <a:tr h="845820">
                 <a:tc>
                   <a:txBody>
@@ -28791,57 +28903,57 @@
                           </a:solidFill>
                           <a:latin typeface="Arial"/>
                         </a:rPr>
-                        <a:t>plate splitter</a:t>
-                      </a:r>
-                    </a:p>
-                  </a:txBody>
-                  <a:tcPr marL="54864" marR="54864" marT="18288" marB="18288">
-                    <a:solidFill>
-                      <a:srgbClr val="FFFFFF"/>
-                    </a:solidFill>
-                  </a:tcPr>
-                </a:tc>
-                <a:tc>
-                  <a:txBody>
-                    <a:bodyPr wrap="square"/>
-                    <a:lstStyle/>
-                    <a:p>
-                      <a:r>
-                        <a:rPr sz="1100" b="0">
-                          <a:solidFill>
-                            <a:srgbClr val="282828"/>
-                          </a:solidFill>
-                          <a:latin typeface="Arial"/>
-                        </a:rPr>
-                        <a:t>103 mm, 22.5° incidence, 50/50; 10 mm thick (modeled): shifts the transmitted beam 1.39 mm, which the compensator cannot undo, so the interferometer's flat null rises from 0.13 to 20 nm (its differential rows are being re-measured; the sensors do not move)</a:t>
-                      </a:r>
-                    </a:p>
-                  </a:txBody>
-                  <a:tcPr marL="54864" marR="54864" marT="18288" marB="18288">
-                    <a:solidFill>
-                      <a:srgbClr val="FFFFFF"/>
-                    </a:solidFill>
-                  </a:tcPr>
-                </a:tc>
-                <a:tc>
-                  <a:txBody>
-                    <a:bodyPr wrap="square"/>
-                    <a:lstStyle/>
-                    <a:p>
-                      <a:r>
-                        <a:rPr sz="1100" b="0">
-                          <a:solidFill>
-                            <a:srgbClr val="282828"/>
-                          </a:solidFill>
-                          <a:latin typeface="Arial"/>
-                        </a:rPr>
-                        <a:t>50/50 front coating, AR back</a:t>
-                      </a:r>
-                    </a:p>
-                  </a:txBody>
-                  <a:tcPr marL="54864" marR="54864" marT="18288" marB="18288">
-                    <a:solidFill>
-                      <a:srgbClr val="FFFFFF"/>
+                        <a:t>compensator plate</a:t>
+                      </a:r>
+                    </a:p>
+                  </a:txBody>
+                  <a:tcPr marL="54864" marR="54864" marT="18288" marB="18288">
+                    <a:solidFill>
+                      <a:srgbClr val="ECF1F6"/>
+                    </a:solidFill>
+                  </a:tcPr>
+                </a:tc>
+                <a:tc>
+                  <a:txBody>
+                    <a:bodyPr wrap="square"/>
+                    <a:lstStyle/>
+                    <a:p>
+                      <a:r>
+                        <a:rPr sz="1100" b="0">
+                          <a:solidFill>
+                            <a:srgbClr val="282828"/>
+                          </a:solidFill>
+                          <a:latin typeface="Arial"/>
+                        </a:rPr>
+                        <a:t>103 mm, matched to the splitter, in the mirror leg</a:t>
+                      </a:r>
+                    </a:p>
+                  </a:txBody>
+                  <a:tcPr marL="54864" marR="54864" marT="18288" marB="18288">
+                    <a:solidFill>
+                      <a:srgbClr val="ECF1F6"/>
+                    </a:solidFill>
+                  </a:tcPr>
+                </a:tc>
+                <a:tc>
+                  <a:txBody>
+                    <a:bodyPr wrap="square"/>
+                    <a:lstStyle/>
+                    <a:p>
+                      <a:r>
+                        <a:rPr sz="1100" b="0">
+                          <a:solidFill>
+                            <a:srgbClr val="282828"/>
+                          </a:solidFill>
+                          <a:latin typeface="Arial"/>
+                        </a:rPr>
+                        <a:t>AR</a:t>
+                      </a:r>
+                    </a:p>
+                  </a:txBody>
+                  <a:tcPr marL="54864" marR="54864" marT="18288" marB="18288">
+                    <a:solidFill>
+                      <a:srgbClr val="ECF1F6"/>
                     </a:solidFill>
                   </a:tcPr>
                 </a:tc>
@@ -28863,29 +28975,477 @@
                   </a:txBody>
                   <a:tcPr marL="54864" marR="54864" marT="18288" marB="18288">
                     <a:solidFill>
-                      <a:srgbClr val="FFFFFF"/>
-                    </a:solidFill>
-                  </a:tcPr>
-                </a:tc>
-                <a:tc>
-                  <a:txBody>
-                    <a:bodyPr wrap="square"/>
-                    <a:lstStyle/>
-                    <a:p>
-                      <a:r>
-                        <a:rPr sz="1100" b="0">
-                          <a:solidFill>
-                            <a:srgbClr val="282828"/>
-                          </a:solidFill>
-                          <a:latin typeface="Arial"/>
-                        </a:rPr>
-                        <a:t>splits to the mirror and the reference arm</a:t>
-                      </a:r>
-                    </a:p>
-                  </a:txBody>
-                  <a:tcPr marL="54864" marR="54864" marT="18288" marB="18288">
-                    <a:solidFill>
-                      <a:srgbClr val="FFFFFF"/>
+                      <a:srgbClr val="ECF1F6"/>
+                    </a:solidFill>
+                  </a:tcPr>
+                </a:tc>
+                <a:tc>
+                  <a:txBody>
+                    <a:bodyPr wrap="square"/>
+                    <a:lstStyle/>
+                    <a:p>
+                      <a:r>
+                        <a:rPr sz="1100" b="0">
+                          <a:solidFill>
+                            <a:srgbClr val="282828"/>
+                          </a:solidFill>
+                          <a:latin typeface="Arial"/>
+                        </a:rPr>
+                        <a:t>balances the glass path through the splitter</a:t>
+                      </a:r>
+                    </a:p>
+                  </a:txBody>
+                  <a:tcPr marL="54864" marR="54864" marT="18288" marB="18288">
+                    <a:solidFill>
+                      <a:srgbClr val="ECF1F6"/>
+                    </a:solidFill>
+                  </a:tcPr>
+                </a:tc>
+              </a:tr>
+              <a:tr h="845820">
+                <a:tc>
+                  <a:txBody>
+                    <a:bodyPr wrap="square"/>
+                    <a:lstStyle/>
+                    <a:p>
+                      <a:r>
+                        <a:rPr sz="1100" b="0">
+                          <a:solidFill>
+                            <a:srgbClr val="282828"/>
+                          </a:solidFill>
+                          <a:latin typeface="Arial"/>
+                        </a:rPr>
+                        <a:t>deformable mirror</a:t>
+                      </a:r>
+                    </a:p>
+                  </a:txBody>
+                  <a:tcPr marL="54864" marR="54864" marT="18288" marB="18288">
+                    <a:solidFill>
+                      <a:srgbClr val="FFFFFF"/>
+                    </a:solidFill>
+                  </a:tcPr>
+                </a:tc>
+                <a:tc>
+                  <a:txBody>
+                    <a:bodyPr wrap="square"/>
+                    <a:lstStyle/>
+                    <a:p>
+                      <a:r>
+                        <a:rPr sz="1100" b="0">
+                          <a:solidFill>
+                            <a:srgbClr val="282828"/>
+                          </a:solidFill>
+                          <a:latin typeface="Arial"/>
+                        </a:rPr>
+                        <a:t>96×96, 1 mm pitch, 96 mm, 700 mm leg</a:t>
+                      </a:r>
+                    </a:p>
+                  </a:txBody>
+                  <a:tcPr marL="54864" marR="54864" marT="18288" marB="18288">
+                    <a:solidFill>
+                      <a:srgbClr val="FFFFFF"/>
+                    </a:solidFill>
+                  </a:tcPr>
+                </a:tc>
+                <a:tc>
+                  <a:txBody>
+                    <a:bodyPr wrap="square"/>
+                    <a:lstStyle/>
+                    <a:p>
+                      <a:r>
+                        <a:rPr sz="1100" b="0">
+                          <a:solidFill>
+                            <a:srgbClr val="282828"/>
+                          </a:solidFill>
+                          <a:latin typeface="Arial"/>
+                        </a:rPr>
+                        <a:t>protected aluminum</a:t>
+                      </a:r>
+                    </a:p>
+                  </a:txBody>
+                  <a:tcPr marL="54864" marR="54864" marT="18288" marB="18288">
+                    <a:solidFill>
+                      <a:srgbClr val="FFFFFF"/>
+                    </a:solidFill>
+                  </a:tcPr>
+                </a:tc>
+                <a:tc>
+                  <a:txBody>
+                    <a:bodyPr wrap="square"/>
+                    <a:lstStyle/>
+                    <a:p>
+                      <a:r>
+                        <a:rPr sz="1100" b="0">
+                          <a:solidFill>
+                            <a:srgbClr val="282828"/>
+                          </a:solidFill>
+                          <a:latin typeface="Arial"/>
+                        </a:rPr>
+                        <a:t>1</a:t>
+                      </a:r>
+                    </a:p>
+                  </a:txBody>
+                  <a:tcPr marL="54864" marR="54864" marT="18288" marB="18288">
+                    <a:solidFill>
+                      <a:srgbClr val="FFFFFF"/>
+                    </a:solidFill>
+                  </a:tcPr>
+                </a:tc>
+                <a:tc>
+                  <a:txBody>
+                    <a:bodyPr wrap="square"/>
+                    <a:lstStyle/>
+                    <a:p>
+                      <a:r>
+                        <a:rPr sz="1100" b="0">
+                          <a:solidFill>
+                            <a:srgbClr val="282828"/>
+                          </a:solidFill>
+                          <a:latin typeface="Arial"/>
+                        </a:rPr>
+                        <a:t>the test object; its surface is the measurand</a:t>
+                      </a:r>
+                    </a:p>
+                  </a:txBody>
+                  <a:tcPr marL="54864" marR="54864" marT="18288" marB="18288">
+                    <a:solidFill>
+                      <a:srgbClr val="FFFFFF"/>
+                    </a:solidFill>
+                  </a:tcPr>
+                </a:tc>
+              </a:tr>
+              <a:tr h="845820">
+                <a:tc>
+                  <a:txBody>
+                    <a:bodyPr wrap="square"/>
+                    <a:lstStyle/>
+                    <a:p>
+                      <a:r>
+                        <a:rPr sz="1100" b="0">
+                          <a:solidFill>
+                            <a:srgbClr val="282828"/>
+                          </a:solidFill>
+                          <a:latin typeface="Arial"/>
+                        </a:rPr>
+                        <a:t>focuser L2</a:t>
+                      </a:r>
+                    </a:p>
+                  </a:txBody>
+                  <a:tcPr marL="54864" marR="54864" marT="18288" marB="18288">
+                    <a:solidFill>
+                      <a:srgbClr val="ECF1F6"/>
+                    </a:solidFill>
+                  </a:tcPr>
+                </a:tc>
+                <a:tc>
+                  <a:txBody>
+                    <a:bodyPr wrap="square"/>
+                    <a:lstStyle/>
+                    <a:p>
+                      <a:r>
+                        <a:rPr sz="1100" b="0">
+                          <a:solidFill>
+                            <a:srgbClr val="282828"/>
+                          </a:solidFill>
+                          <a:latin typeface="Arial"/>
+                        </a:rPr>
+                        <a:t>f 429 mm, 103 mm, plano-convex conic; modeled 8 mm center</a:t>
+                      </a:r>
+                    </a:p>
+                  </a:txBody>
+                  <a:tcPr marL="54864" marR="54864" marT="18288" marB="18288">
+                    <a:solidFill>
+                      <a:srgbClr val="ECF1F6"/>
+                    </a:solidFill>
+                  </a:tcPr>
+                </a:tc>
+                <a:tc>
+                  <a:txBody>
+                    <a:bodyPr wrap="square"/>
+                    <a:lstStyle/>
+                    <a:p>
+                      <a:r>
+                        <a:rPr sz="1100" b="0">
+                          <a:solidFill>
+                            <a:srgbClr val="282828"/>
+                          </a:solidFill>
+                          <a:latin typeface="Arial"/>
+                        </a:rPr>
+                        <a:t>AR</a:t>
+                      </a:r>
+                    </a:p>
+                  </a:txBody>
+                  <a:tcPr marL="54864" marR="54864" marT="18288" marB="18288">
+                    <a:solidFill>
+                      <a:srgbClr val="ECF1F6"/>
+                    </a:solidFill>
+                  </a:tcPr>
+                </a:tc>
+                <a:tc>
+                  <a:txBody>
+                    <a:bodyPr wrap="square"/>
+                    <a:lstStyle/>
+                    <a:p>
+                      <a:r>
+                        <a:rPr sz="1100" b="0">
+                          <a:solidFill>
+                            <a:srgbClr val="282828"/>
+                          </a:solidFill>
+                          <a:latin typeface="Arial"/>
+                        </a:rPr>
+                        <a:t>1</a:t>
+                      </a:r>
+                    </a:p>
+                  </a:txBody>
+                  <a:tcPr marL="54864" marR="54864" marT="18288" marB="18288">
+                    <a:solidFill>
+                      <a:srgbClr val="ECF1F6"/>
+                    </a:solidFill>
+                  </a:tcPr>
+                </a:tc>
+                <a:tc>
+                  <a:txBody>
+                    <a:bodyPr wrap="square"/>
+                    <a:lstStyle/>
+                    <a:p>
+                      <a:r>
+                        <a:rPr sz="1100" b="0">
+                          <a:solidFill>
+                            <a:srgbClr val="282828"/>
+                          </a:solidFill>
+                          <a:latin typeface="Arial"/>
+                        </a:rPr>
+                        <a:t>the internal focus at F/4.2 where the masks sit</a:t>
+                      </a:r>
+                    </a:p>
+                  </a:txBody>
+                  <a:tcPr marL="54864" marR="54864" marT="18288" marB="18288">
+                    <a:solidFill>
+                      <a:srgbClr val="ECF1F6"/>
+                    </a:solidFill>
+                  </a:tcPr>
+                </a:tc>
+              </a:tr>
+              <a:tr h="1034415">
+                <a:tc>
+                  <a:txBody>
+                    <a:bodyPr wrap="square"/>
+                    <a:lstStyle/>
+                    <a:p>
+                      <a:r>
+                        <a:rPr sz="1100" b="0">
+                          <a:solidFill>
+                            <a:srgbClr val="282828"/>
+                          </a:solidFill>
+                          <a:latin typeface="Arial"/>
+                        </a:rPr>
+                        <a:t>mask seat</a:t>
+                      </a:r>
+                    </a:p>
+                  </a:txBody>
+                  <a:tcPr marL="54864" marR="54864" marT="18288" marB="18288">
+                    <a:solidFill>
+                      <a:srgbClr val="FFFFFF"/>
+                    </a:solidFill>
+                  </a:tcPr>
+                </a:tc>
+                <a:tc>
+                  <a:txBody>
+                    <a:bodyPr wrap="square"/>
+                    <a:lstStyle/>
+                    <a:p>
+                      <a:r>
+                        <a:rPr sz="1100" b="0">
+                          <a:solidFill>
+                            <a:srgbClr val="282828"/>
+                          </a:solidFill>
+                          <a:latin typeface="Arial"/>
+                        </a:rPr>
+                        <a:t>translation stage at the internal focus</a:t>
+                      </a:r>
+                    </a:p>
+                  </a:txBody>
+                  <a:tcPr marL="54864" marR="54864" marT="18288" marB="18288">
+                    <a:solidFill>
+                      <a:srgbClr val="FFFFFF"/>
+                    </a:solidFill>
+                  </a:tcPr>
+                </a:tc>
+                <a:tc>
+                  <a:txBody>
+                    <a:bodyPr wrap="square"/>
+                    <a:lstStyle/>
+                    <a:p>
+                      <a:r>
+                        <a:rPr sz="1100" b="0">
+                          <a:solidFill>
+                            <a:srgbClr val="282828"/>
+                          </a:solidFill>
+                          <a:latin typeface="Arial"/>
+                        </a:rPr>
+                        <a:t>—</a:t>
+                      </a:r>
+                    </a:p>
+                  </a:txBody>
+                  <a:tcPr marL="54864" marR="54864" marT="18288" marB="18288">
+                    <a:solidFill>
+                      <a:srgbClr val="FFFFFF"/>
+                    </a:solidFill>
+                  </a:tcPr>
+                </a:tc>
+                <a:tc>
+                  <a:txBody>
+                    <a:bodyPr wrap="square"/>
+                    <a:lstStyle/>
+                    <a:p>
+                      <a:r>
+                        <a:rPr sz="1100" b="0">
+                          <a:solidFill>
+                            <a:srgbClr val="282828"/>
+                          </a:solidFill>
+                          <a:latin typeface="Arial"/>
+                        </a:rPr>
+                        <a:t>1</a:t>
+                      </a:r>
+                    </a:p>
+                  </a:txBody>
+                  <a:tcPr marL="54864" marR="54864" marT="18288" marB="18288">
+                    <a:solidFill>
+                      <a:srgbClr val="FFFFFF"/>
+                    </a:solidFill>
+                  </a:tcPr>
+                </a:tc>
+                <a:tc>
+                  <a:txBody>
+                    <a:bodyPr wrap="square"/>
+                    <a:lstStyle/>
+                    <a:p>
+                      <a:r>
+                        <a:rPr sz="1100" b="0">
+                          <a:solidFill>
+                            <a:srgbClr val="282828"/>
+                          </a:solidFill>
+                          <a:latin typeface="Arial"/>
+                        </a:rPr>
+                        <a:t>selects the sensor: clear window, dimple, metasurface, pinhole</a:t>
+                      </a:r>
+                    </a:p>
+                  </a:txBody>
+                  <a:tcPr marL="54864" marR="54864" marT="18288" marB="18288">
+                    <a:solidFill>
+                      <a:srgbClr val="FFFFFF"/>
+                    </a:solidFill>
+                  </a:tcPr>
+                </a:tc>
+              </a:tr>
+              <a:tr h="1034415">
+                <a:tc>
+                  <a:txBody>
+                    <a:bodyPr wrap="square"/>
+                    <a:lstStyle/>
+                    <a:p>
+                      <a:r>
+                        <a:rPr sz="1100" b="0">
+                          <a:solidFill>
+                            <a:srgbClr val="282828"/>
+                          </a:solidFill>
+                          <a:latin typeface="Arial"/>
+                        </a:rPr>
+                        <a:t>field lens</a:t>
+                      </a:r>
+                    </a:p>
+                  </a:txBody>
+                  <a:tcPr marL="54864" marR="54864" marT="18288" marB="18288">
+                    <a:solidFill>
+                      <a:srgbClr val="ECF1F6"/>
+                    </a:solidFill>
+                  </a:tcPr>
+                </a:tc>
+                <a:tc>
+                  <a:txBody>
+                    <a:bodyPr wrap="square"/>
+                    <a:lstStyle/>
+                    <a:p>
+                      <a:r>
+                        <a:rPr sz="1100" b="0">
+                          <a:solidFill>
+                            <a:srgbClr val="282828"/>
+                          </a:solidFill>
+                          <a:latin typeface="Arial"/>
+                        </a:rPr>
+                        <a:t>f 43 mm, 21 mm</a:t>
+                      </a:r>
+                    </a:p>
+                  </a:txBody>
+                  <a:tcPr marL="54864" marR="54864" marT="18288" marB="18288">
+                    <a:solidFill>
+                      <a:srgbClr val="ECF1F6"/>
+                    </a:solidFill>
+                  </a:tcPr>
+                </a:tc>
+                <a:tc>
+                  <a:txBody>
+                    <a:bodyPr wrap="square"/>
+                    <a:lstStyle/>
+                    <a:p>
+                      <a:r>
+                        <a:rPr sz="1100" b="0">
+                          <a:solidFill>
+                            <a:srgbClr val="282828"/>
+                          </a:solidFill>
+                          <a:latin typeface="Arial"/>
+                        </a:rPr>
+                        <a:t>AR</a:t>
+                      </a:r>
+                    </a:p>
+                  </a:txBody>
+                  <a:tcPr marL="54864" marR="54864" marT="18288" marB="18288">
+                    <a:solidFill>
+                      <a:srgbClr val="ECF1F6"/>
+                    </a:solidFill>
+                  </a:tcPr>
+                </a:tc>
+                <a:tc>
+                  <a:txBody>
+                    <a:bodyPr wrap="square"/>
+                    <a:lstStyle/>
+                    <a:p>
+                      <a:r>
+                        <a:rPr sz="1100" b="0">
+                          <a:solidFill>
+                            <a:srgbClr val="282828"/>
+                          </a:solidFill>
+                          <a:latin typeface="Arial"/>
+                        </a:rPr>
+                        <a:t>1</a:t>
+                      </a:r>
+                    </a:p>
+                  </a:txBody>
+                  <a:tcPr marL="54864" marR="54864" marT="18288" marB="18288">
+                    <a:solidFill>
+                      <a:srgbClr val="ECF1F6"/>
+                    </a:solidFill>
+                  </a:tcPr>
+                </a:tc>
+                <a:tc>
+                  <a:txBody>
+                    <a:bodyPr wrap="square"/>
+                    <a:lstStyle/>
+                    <a:p>
+                      <a:r>
+                        <a:rPr sz="1100" b="0">
+                          <a:solidFill>
+                            <a:srgbClr val="282828"/>
+                          </a:solidFill>
+                          <a:latin typeface="Arial"/>
+                        </a:rPr>
+                        <a:t>reimages the pupil (7.5-7.8 mm as traced) 32 mm behind it</a:t>
+                      </a:r>
+                    </a:p>
+                  </a:txBody>
+                  <a:tcPr marL="54864" marR="54864" marT="18288" marB="18288">
+                    <a:solidFill>
+                      <a:srgbClr val="ECF1F6"/>
                     </a:solidFill>
                   </a:tcPr>
                 </a:tc>
@@ -28903,57 +29463,57 @@
                           </a:solidFill>
                           <a:latin typeface="Arial"/>
                         </a:rPr>
-                        <a:t>compensator plate</a:t>
-                      </a:r>
-                    </a:p>
-                  </a:txBody>
-                  <a:tcPr marL="54864" marR="54864" marT="18288" marB="18288">
-                    <a:solidFill>
-                      <a:srgbClr val="ECF1F6"/>
-                    </a:solidFill>
-                  </a:tcPr>
-                </a:tc>
-                <a:tc>
-                  <a:txBody>
-                    <a:bodyPr wrap="square"/>
-                    <a:lstStyle/>
-                    <a:p>
-                      <a:r>
-                        <a:rPr sz="1100" b="0">
-                          <a:solidFill>
-                            <a:srgbClr val="282828"/>
-                          </a:solidFill>
-                          <a:latin typeface="Arial"/>
-                        </a:rPr>
-                        <a:t>103 mm, matched to the splitter, in the mirror leg</a:t>
-                      </a:r>
-                    </a:p>
-                  </a:txBody>
-                  <a:tcPr marL="54864" marR="54864" marT="18288" marB="18288">
-                    <a:solidFill>
-                      <a:srgbClr val="ECF1F6"/>
-                    </a:solidFill>
-                  </a:tcPr>
-                </a:tc>
-                <a:tc>
-                  <a:txBody>
-                    <a:bodyPr wrap="square"/>
-                    <a:lstStyle/>
-                    <a:p>
-                      <a:r>
-                        <a:rPr sz="1100" b="0">
-                          <a:solidFill>
-                            <a:srgbClr val="282828"/>
-                          </a:solidFill>
-                          <a:latin typeface="Arial"/>
-                        </a:rPr>
-                        <a:t>AR</a:t>
-                      </a:r>
-                    </a:p>
-                  </a:txBody>
-                  <a:tcPr marL="54864" marR="54864" marT="18288" marB="18288">
-                    <a:solidFill>
-                      <a:srgbClr val="ECF1F6"/>
+                        <a:t>camera A</a:t>
+                      </a:r>
+                    </a:p>
+                  </a:txBody>
+                  <a:tcPr marL="54864" marR="54864" marT="18288" marB="18288">
+                    <a:solidFill>
+                      <a:srgbClr val="FFFFFF"/>
+                    </a:solidFill>
+                  </a:tcPr>
+                </a:tc>
+                <a:tc>
+                  <a:txBody>
+                    <a:bodyPr wrap="square"/>
+                    <a:lstStyle/>
+                    <a:p>
+                      <a:r>
+                        <a:rPr sz="1100" b="0">
+                          <a:solidFill>
+                            <a:srgbClr val="282828"/>
+                          </a:solidFill>
+                          <a:latin typeface="Arial"/>
+                        </a:rPr>
+                        <a:t>sCMOS 2048×2048, 6.5 µm (13.3 mm): 1155 raw pixels across the 7.5 mm pupil image, binned 3 to 385 or 6 to the modeled 193</a:t>
+                      </a:r>
+                    </a:p>
+                  </a:txBody>
+                  <a:tcPr marL="54864" marR="54864" marT="18288" marB="18288">
+                    <a:solidFill>
+                      <a:srgbClr val="FFFFFF"/>
+                    </a:solidFill>
+                  </a:tcPr>
+                </a:tc>
+                <a:tc>
+                  <a:txBody>
+                    <a:bodyPr wrap="square"/>
+                    <a:lstStyle/>
+                    <a:p>
+                      <a:r>
+                        <a:rPr sz="1100" b="0">
+                          <a:solidFill>
+                            <a:srgbClr val="282828"/>
+                          </a:solidFill>
+                          <a:latin typeface="Arial"/>
+                        </a:rPr>
+                        <a:t>—</a:t>
+                      </a:r>
+                    </a:p>
+                  </a:txBody>
+                  <a:tcPr marL="54864" marR="54864" marT="18288" marB="18288">
+                    <a:solidFill>
+                      <a:srgbClr val="FFFFFF"/>
                     </a:solidFill>
                   </a:tcPr>
                 </a:tc>
@@ -28975,594 +29535,34 @@
                   </a:txBody>
                   <a:tcPr marL="54864" marR="54864" marT="18288" marB="18288">
                     <a:solidFill>
-                      <a:srgbClr val="ECF1F6"/>
-                    </a:solidFill>
-                  </a:tcPr>
-                </a:tc>
-                <a:tc>
-                  <a:txBody>
-                    <a:bodyPr wrap="square"/>
-                    <a:lstStyle/>
-                    <a:p>
-                      <a:r>
-                        <a:rPr sz="1100" b="0">
-                          <a:solidFill>
-                            <a:srgbClr val="282828"/>
-                          </a:solidFill>
-                          <a:latin typeface="Arial"/>
-                        </a:rPr>
-                        <a:t>balances the glass path through the splitter</a:t>
-                      </a:r>
-                    </a:p>
-                  </a:txBody>
-                  <a:tcPr marL="54864" marR="54864" marT="18288" marB="18288">
-                    <a:solidFill>
-                      <a:srgbClr val="ECF1F6"/>
+                      <a:srgbClr val="FFFFFF"/>
+                    </a:solidFill>
+                  </a:tcPr>
+                </a:tc>
+                <a:tc>
+                  <a:txBody>
+                    <a:bodyPr wrap="square"/>
+                    <a:lstStyle/>
+                    <a:p>
+                      <a:r>
+                        <a:rPr sz="1100" b="0">
+                          <a:solidFill>
+                            <a:srgbClr val="282828"/>
+                          </a:solidFill>
+                          <a:latin typeface="Arial"/>
+                        </a:rPr>
+                        <a:t>every configuration's pupil image</a:t>
+                      </a:r>
+                    </a:p>
+                  </a:txBody>
+                  <a:tcPr marL="54864" marR="54864" marT="18288" marB="18288">
+                    <a:solidFill>
+                      <a:srgbClr val="FFFFFF"/>
                     </a:solidFill>
                   </a:tcPr>
                 </a:tc>
               </a:tr>
               <a:tr h="657225">
-                <a:tc>
-                  <a:txBody>
-                    <a:bodyPr wrap="square"/>
-                    <a:lstStyle/>
-                    <a:p>
-                      <a:r>
-                        <a:rPr sz="1100" b="0">
-                          <a:solidFill>
-                            <a:srgbClr val="282828"/>
-                          </a:solidFill>
-                          <a:latin typeface="Arial"/>
-                        </a:rPr>
-                        <a:t>deformable mirror</a:t>
-                      </a:r>
-                    </a:p>
-                  </a:txBody>
-                  <a:tcPr marL="54864" marR="54864" marT="18288" marB="18288">
-                    <a:solidFill>
-                      <a:srgbClr val="FFFFFF"/>
-                    </a:solidFill>
-                  </a:tcPr>
-                </a:tc>
-                <a:tc>
-                  <a:txBody>
-                    <a:bodyPr wrap="square"/>
-                    <a:lstStyle/>
-                    <a:p>
-                      <a:r>
-                        <a:rPr sz="1100" b="0">
-                          <a:solidFill>
-                            <a:srgbClr val="282828"/>
-                          </a:solidFill>
-                          <a:latin typeface="Arial"/>
-                        </a:rPr>
-                        <a:t>96×96, 1 mm pitch, 96 mm, 700 mm leg</a:t>
-                      </a:r>
-                    </a:p>
-                  </a:txBody>
-                  <a:tcPr marL="54864" marR="54864" marT="18288" marB="18288">
-                    <a:solidFill>
-                      <a:srgbClr val="FFFFFF"/>
-                    </a:solidFill>
-                  </a:tcPr>
-                </a:tc>
-                <a:tc>
-                  <a:txBody>
-                    <a:bodyPr wrap="square"/>
-                    <a:lstStyle/>
-                    <a:p>
-                      <a:r>
-                        <a:rPr sz="1100" b="0">
-                          <a:solidFill>
-                            <a:srgbClr val="282828"/>
-                          </a:solidFill>
-                          <a:latin typeface="Arial"/>
-                        </a:rPr>
-                        <a:t>protected aluminum</a:t>
-                      </a:r>
-                    </a:p>
-                  </a:txBody>
-                  <a:tcPr marL="54864" marR="54864" marT="18288" marB="18288">
-                    <a:solidFill>
-                      <a:srgbClr val="FFFFFF"/>
-                    </a:solidFill>
-                  </a:tcPr>
-                </a:tc>
-                <a:tc>
-                  <a:txBody>
-                    <a:bodyPr wrap="square"/>
-                    <a:lstStyle/>
-                    <a:p>
-                      <a:r>
-                        <a:rPr sz="1100" b="0">
-                          <a:solidFill>
-                            <a:srgbClr val="282828"/>
-                          </a:solidFill>
-                          <a:latin typeface="Arial"/>
-                        </a:rPr>
-                        <a:t>1</a:t>
-                      </a:r>
-                    </a:p>
-                  </a:txBody>
-                  <a:tcPr marL="54864" marR="54864" marT="18288" marB="18288">
-                    <a:solidFill>
-                      <a:srgbClr val="FFFFFF"/>
-                    </a:solidFill>
-                  </a:tcPr>
-                </a:tc>
-                <a:tc>
-                  <a:txBody>
-                    <a:bodyPr wrap="square"/>
-                    <a:lstStyle/>
-                    <a:p>
-                      <a:r>
-                        <a:rPr sz="1100" b="0">
-                          <a:solidFill>
-                            <a:srgbClr val="282828"/>
-                          </a:solidFill>
-                          <a:latin typeface="Arial"/>
-                        </a:rPr>
-                        <a:t>the test object; its surface is the measurand</a:t>
-                      </a:r>
-                    </a:p>
-                  </a:txBody>
-                  <a:tcPr marL="54864" marR="54864" marT="18288" marB="18288">
-                    <a:solidFill>
-                      <a:srgbClr val="FFFFFF"/>
-                    </a:solidFill>
-                  </a:tcPr>
-                </a:tc>
-              </a:tr>
-              <a:tr h="657225">
-                <a:tc>
-                  <a:txBody>
-                    <a:bodyPr wrap="square"/>
-                    <a:lstStyle/>
-                    <a:p>
-                      <a:r>
-                        <a:rPr sz="1100" b="0">
-                          <a:solidFill>
-                            <a:srgbClr val="282828"/>
-                          </a:solidFill>
-                          <a:latin typeface="Arial"/>
-                        </a:rPr>
-                        <a:t>focuser L2</a:t>
-                      </a:r>
-                    </a:p>
-                  </a:txBody>
-                  <a:tcPr marL="54864" marR="54864" marT="18288" marB="18288">
-                    <a:solidFill>
-                      <a:srgbClr val="ECF1F6"/>
-                    </a:solidFill>
-                  </a:tcPr>
-                </a:tc>
-                <a:tc>
-                  <a:txBody>
-                    <a:bodyPr wrap="square"/>
-                    <a:lstStyle/>
-                    <a:p>
-                      <a:r>
-                        <a:rPr sz="1100" b="0">
-                          <a:solidFill>
-                            <a:srgbClr val="282828"/>
-                          </a:solidFill>
-                          <a:latin typeface="Arial"/>
-                        </a:rPr>
-                        <a:t>f 429 mm, 103 mm, plano-convex conic; modeled 8 mm center</a:t>
-                      </a:r>
-                    </a:p>
-                  </a:txBody>
-                  <a:tcPr marL="54864" marR="54864" marT="18288" marB="18288">
-                    <a:solidFill>
-                      <a:srgbClr val="ECF1F6"/>
-                    </a:solidFill>
-                  </a:tcPr>
-                </a:tc>
-                <a:tc>
-                  <a:txBody>
-                    <a:bodyPr wrap="square"/>
-                    <a:lstStyle/>
-                    <a:p>
-                      <a:r>
-                        <a:rPr sz="1100" b="0">
-                          <a:solidFill>
-                            <a:srgbClr val="282828"/>
-                          </a:solidFill>
-                          <a:latin typeface="Arial"/>
-                        </a:rPr>
-                        <a:t>AR</a:t>
-                      </a:r>
-                    </a:p>
-                  </a:txBody>
-                  <a:tcPr marL="54864" marR="54864" marT="18288" marB="18288">
-                    <a:solidFill>
-                      <a:srgbClr val="ECF1F6"/>
-                    </a:solidFill>
-                  </a:tcPr>
-                </a:tc>
-                <a:tc>
-                  <a:txBody>
-                    <a:bodyPr wrap="square"/>
-                    <a:lstStyle/>
-                    <a:p>
-                      <a:r>
-                        <a:rPr sz="1100" b="0">
-                          <a:solidFill>
-                            <a:srgbClr val="282828"/>
-                          </a:solidFill>
-                          <a:latin typeface="Arial"/>
-                        </a:rPr>
-                        <a:t>1</a:t>
-                      </a:r>
-                    </a:p>
-                  </a:txBody>
-                  <a:tcPr marL="54864" marR="54864" marT="18288" marB="18288">
-                    <a:solidFill>
-                      <a:srgbClr val="ECF1F6"/>
-                    </a:solidFill>
-                  </a:tcPr>
-                </a:tc>
-                <a:tc>
-                  <a:txBody>
-                    <a:bodyPr wrap="square"/>
-                    <a:lstStyle/>
-                    <a:p>
-                      <a:r>
-                        <a:rPr sz="1100" b="0">
-                          <a:solidFill>
-                            <a:srgbClr val="282828"/>
-                          </a:solidFill>
-                          <a:latin typeface="Arial"/>
-                        </a:rPr>
-                        <a:t>the internal focus at F/4.2 where the masks sit</a:t>
-                      </a:r>
-                    </a:p>
-                  </a:txBody>
-                  <a:tcPr marL="54864" marR="54864" marT="18288" marB="18288">
-                    <a:solidFill>
-                      <a:srgbClr val="ECF1F6"/>
-                    </a:solidFill>
-                  </a:tcPr>
-                </a:tc>
-              </a:tr>
-              <a:tr h="845820">
-                <a:tc>
-                  <a:txBody>
-                    <a:bodyPr wrap="square"/>
-                    <a:lstStyle/>
-                    <a:p>
-                      <a:r>
-                        <a:rPr sz="1100" b="0">
-                          <a:solidFill>
-                            <a:srgbClr val="282828"/>
-                          </a:solidFill>
-                          <a:latin typeface="Arial"/>
-                        </a:rPr>
-                        <a:t>mask seat</a:t>
-                      </a:r>
-                    </a:p>
-                  </a:txBody>
-                  <a:tcPr marL="54864" marR="54864" marT="18288" marB="18288">
-                    <a:solidFill>
-                      <a:srgbClr val="FFFFFF"/>
-                    </a:solidFill>
-                  </a:tcPr>
-                </a:tc>
-                <a:tc>
-                  <a:txBody>
-                    <a:bodyPr wrap="square"/>
-                    <a:lstStyle/>
-                    <a:p>
-                      <a:r>
-                        <a:rPr sz="1100" b="0">
-                          <a:solidFill>
-                            <a:srgbClr val="282828"/>
-                          </a:solidFill>
-                          <a:latin typeface="Arial"/>
-                        </a:rPr>
-                        <a:t>translation stage at the internal focus</a:t>
-                      </a:r>
-                    </a:p>
-                  </a:txBody>
-                  <a:tcPr marL="54864" marR="54864" marT="18288" marB="18288">
-                    <a:solidFill>
-                      <a:srgbClr val="FFFFFF"/>
-                    </a:solidFill>
-                  </a:tcPr>
-                </a:tc>
-                <a:tc>
-                  <a:txBody>
-                    <a:bodyPr wrap="square"/>
-                    <a:lstStyle/>
-                    <a:p>
-                      <a:r>
-                        <a:rPr sz="1100" b="0">
-                          <a:solidFill>
-                            <a:srgbClr val="282828"/>
-                          </a:solidFill>
-                          <a:latin typeface="Arial"/>
-                        </a:rPr>
-                        <a:t>—</a:t>
-                      </a:r>
-                    </a:p>
-                  </a:txBody>
-                  <a:tcPr marL="54864" marR="54864" marT="18288" marB="18288">
-                    <a:solidFill>
-                      <a:srgbClr val="FFFFFF"/>
-                    </a:solidFill>
-                  </a:tcPr>
-                </a:tc>
-                <a:tc>
-                  <a:txBody>
-                    <a:bodyPr wrap="square"/>
-                    <a:lstStyle/>
-                    <a:p>
-                      <a:r>
-                        <a:rPr sz="1100" b="0">
-                          <a:solidFill>
-                            <a:srgbClr val="282828"/>
-                          </a:solidFill>
-                          <a:latin typeface="Arial"/>
-                        </a:rPr>
-                        <a:t>1</a:t>
-                      </a:r>
-                    </a:p>
-                  </a:txBody>
-                  <a:tcPr marL="54864" marR="54864" marT="18288" marB="18288">
-                    <a:solidFill>
-                      <a:srgbClr val="FFFFFF"/>
-                    </a:solidFill>
-                  </a:tcPr>
-                </a:tc>
-                <a:tc>
-                  <a:txBody>
-                    <a:bodyPr wrap="square"/>
-                    <a:lstStyle/>
-                    <a:p>
-                      <a:r>
-                        <a:rPr sz="1100" b="0">
-                          <a:solidFill>
-                            <a:srgbClr val="282828"/>
-                          </a:solidFill>
-                          <a:latin typeface="Arial"/>
-                        </a:rPr>
-                        <a:t>selects the sensor: clear window, dimple, metasurface, pinhole</a:t>
-                      </a:r>
-                    </a:p>
-                  </a:txBody>
-                  <a:tcPr marL="54864" marR="54864" marT="18288" marB="18288">
-                    <a:solidFill>
-                      <a:srgbClr val="FFFFFF"/>
-                    </a:solidFill>
-                  </a:tcPr>
-                </a:tc>
-              </a:tr>
-              <a:tr h="845820">
-                <a:tc>
-                  <a:txBody>
-                    <a:bodyPr wrap="square"/>
-                    <a:lstStyle/>
-                    <a:p>
-                      <a:r>
-                        <a:rPr sz="1100" b="0">
-                          <a:solidFill>
-                            <a:srgbClr val="282828"/>
-                          </a:solidFill>
-                          <a:latin typeface="Arial"/>
-                        </a:rPr>
-                        <a:t>field lens</a:t>
-                      </a:r>
-                    </a:p>
-                  </a:txBody>
-                  <a:tcPr marL="54864" marR="54864" marT="18288" marB="18288">
-                    <a:solidFill>
-                      <a:srgbClr val="ECF1F6"/>
-                    </a:solidFill>
-                  </a:tcPr>
-                </a:tc>
-                <a:tc>
-                  <a:txBody>
-                    <a:bodyPr wrap="square"/>
-                    <a:lstStyle/>
-                    <a:p>
-                      <a:r>
-                        <a:rPr sz="1100" b="0">
-                          <a:solidFill>
-                            <a:srgbClr val="282828"/>
-                          </a:solidFill>
-                          <a:latin typeface="Arial"/>
-                        </a:rPr>
-                        <a:t>f 43 mm, 21 mm</a:t>
-                      </a:r>
-                    </a:p>
-                  </a:txBody>
-                  <a:tcPr marL="54864" marR="54864" marT="18288" marB="18288">
-                    <a:solidFill>
-                      <a:srgbClr val="ECF1F6"/>
-                    </a:solidFill>
-                  </a:tcPr>
-                </a:tc>
-                <a:tc>
-                  <a:txBody>
-                    <a:bodyPr wrap="square"/>
-                    <a:lstStyle/>
-                    <a:p>
-                      <a:r>
-                        <a:rPr sz="1100" b="0">
-                          <a:solidFill>
-                            <a:srgbClr val="282828"/>
-                          </a:solidFill>
-                          <a:latin typeface="Arial"/>
-                        </a:rPr>
-                        <a:t>AR</a:t>
-                      </a:r>
-                    </a:p>
-                  </a:txBody>
-                  <a:tcPr marL="54864" marR="54864" marT="18288" marB="18288">
-                    <a:solidFill>
-                      <a:srgbClr val="ECF1F6"/>
-                    </a:solidFill>
-                  </a:tcPr>
-                </a:tc>
-                <a:tc>
-                  <a:txBody>
-                    <a:bodyPr wrap="square"/>
-                    <a:lstStyle/>
-                    <a:p>
-                      <a:r>
-                        <a:rPr sz="1100" b="0">
-                          <a:solidFill>
-                            <a:srgbClr val="282828"/>
-                          </a:solidFill>
-                          <a:latin typeface="Arial"/>
-                        </a:rPr>
-                        <a:t>1</a:t>
-                      </a:r>
-                    </a:p>
-                  </a:txBody>
-                  <a:tcPr marL="54864" marR="54864" marT="18288" marB="18288">
-                    <a:solidFill>
-                      <a:srgbClr val="ECF1F6"/>
-                    </a:solidFill>
-                  </a:tcPr>
-                </a:tc>
-                <a:tc>
-                  <a:txBody>
-                    <a:bodyPr wrap="square"/>
-                    <a:lstStyle/>
-                    <a:p>
-                      <a:r>
-                        <a:rPr sz="1100" b="0">
-                          <a:solidFill>
-                            <a:srgbClr val="282828"/>
-                          </a:solidFill>
-                          <a:latin typeface="Arial"/>
-                        </a:rPr>
-                        <a:t>reimages the pupil (7.5-7.8 mm as traced) 32 mm behind it</a:t>
-                      </a:r>
-                    </a:p>
-                  </a:txBody>
-                  <a:tcPr marL="54864" marR="54864" marT="18288" marB="18288">
-                    <a:solidFill>
-                      <a:srgbClr val="ECF1F6"/>
-                    </a:solidFill>
-                  </a:tcPr>
-                </a:tc>
-              </a:tr>
-              <a:tr h="468630">
-                <a:tc>
-                  <a:txBody>
-                    <a:bodyPr wrap="square"/>
-                    <a:lstStyle/>
-                    <a:p>
-                      <a:r>
-                        <a:rPr sz="1100" b="0">
-                          <a:solidFill>
-                            <a:srgbClr val="282828"/>
-                          </a:solidFill>
-                          <a:latin typeface="Arial"/>
-                        </a:rPr>
-                        <a:t>camera A</a:t>
-                      </a:r>
-                    </a:p>
-                  </a:txBody>
-                  <a:tcPr marL="54864" marR="54864" marT="18288" marB="18288">
-                    <a:solidFill>
-                      <a:srgbClr val="FFFFFF"/>
-                    </a:solidFill>
-                  </a:tcPr>
-                </a:tc>
-                <a:tc>
-                  <a:txBody>
-                    <a:bodyPr wrap="square"/>
-                    <a:lstStyle/>
-                    <a:p>
-                      <a:r>
-                        <a:rPr sz="1100" b="0">
-                          <a:solidFill>
-                            <a:srgbClr val="282828"/>
-                          </a:solidFill>
-                          <a:latin typeface="Arial"/>
-                        </a:rPr>
-                        <a:t>sCMOS 2048×2048, 6.5 µm (13.3 mm): 1155 raw pixels across the 7.5 mm pupil image, binned 3 to 385 or 6 to the modeled 193</a:t>
-                      </a:r>
-                    </a:p>
-                  </a:txBody>
-                  <a:tcPr marL="54864" marR="54864" marT="18288" marB="18288">
-                    <a:solidFill>
-                      <a:srgbClr val="FFFFFF"/>
-                    </a:solidFill>
-                  </a:tcPr>
-                </a:tc>
-                <a:tc>
-                  <a:txBody>
-                    <a:bodyPr wrap="square"/>
-                    <a:lstStyle/>
-                    <a:p>
-                      <a:r>
-                        <a:rPr sz="1100" b="0">
-                          <a:solidFill>
-                            <a:srgbClr val="282828"/>
-                          </a:solidFill>
-                          <a:latin typeface="Arial"/>
-                        </a:rPr>
-                        <a:t>—</a:t>
-                      </a:r>
-                    </a:p>
-                  </a:txBody>
-                  <a:tcPr marL="54864" marR="54864" marT="18288" marB="18288">
-                    <a:solidFill>
-                      <a:srgbClr val="FFFFFF"/>
-                    </a:solidFill>
-                  </a:tcPr>
-                </a:tc>
-                <a:tc>
-                  <a:txBody>
-                    <a:bodyPr wrap="square"/>
-                    <a:lstStyle/>
-                    <a:p>
-                      <a:r>
-                        <a:rPr sz="1100" b="0">
-                          <a:solidFill>
-                            <a:srgbClr val="282828"/>
-                          </a:solidFill>
-                          <a:latin typeface="Arial"/>
-                        </a:rPr>
-                        <a:t>1</a:t>
-                      </a:r>
-                    </a:p>
-                  </a:txBody>
-                  <a:tcPr marL="54864" marR="54864" marT="18288" marB="18288">
-                    <a:solidFill>
-                      <a:srgbClr val="FFFFFF"/>
-                    </a:solidFill>
-                  </a:tcPr>
-                </a:tc>
-                <a:tc>
-                  <a:txBody>
-                    <a:bodyPr wrap="square"/>
-                    <a:lstStyle/>
-                    <a:p>
-                      <a:r>
-                        <a:rPr sz="1100" b="0">
-                          <a:solidFill>
-                            <a:srgbClr val="282828"/>
-                          </a:solidFill>
-                          <a:latin typeface="Arial"/>
-                        </a:rPr>
-                        <a:t>every configuration's pupil image</a:t>
-                      </a:r>
-                    </a:p>
-                  </a:txBody>
-                  <a:tcPr marL="54864" marR="54864" marT="18288" marB="18288">
-                    <a:solidFill>
-                      <a:srgbClr val="FFFFFF"/>
-                    </a:solidFill>
-                  </a:tcPr>
-                </a:tc>
-              </a:tr>
-              <a:tr h="468630">
                 <a:tc>
                   <a:txBody>
                     <a:bodyPr wrap="square"/>
@@ -29686,7 +29686,7 @@
         </p:nvSpPr>
         <p:spPr>
           <a:xfrm>
-            <a:off x="411480" y="8297037"/>
+            <a:off x="411480" y="9994392"/>
             <a:ext cx="11368735" cy="274320"/>
           </a:xfrm>
           <a:prstGeom prst="rect">

--- a/demo_session/deck_gauges.pptx
+++ b/demo_session/deck_gauges.pptx
@@ -10023,7 +10023,7 @@
                 </a:solidFill>
                 <a:latin typeface="Arial"/>
               </a:rPr>
-              <a:t>In closed loop at gain 0.5 the vector Zernike holds 3 pm from 1.5e12 photons per cycle, the pinhole and stepped Zernike from 2.3-2.6e12, the interferometer from 5.4-5.5e12 on either front end — and the sensors carry no fixed error</a:t>
+              <a:t>In closed loop at gain 0.5 the vector Zernike holds 3 pm from 1.5-1.7e12 photons per cycle, the pinhole and stepped Zernike from 2.3-2.7e12, the interferometer from 5.4-5.5e12, on either front end — and the sensors carry no fixed error</a:t>
             </a:r>
           </a:p>
         </p:txBody>
@@ -10082,7 +10082,7 @@
         </p:nvGraphicFramePr>
         <p:xfrm>
           <a:off x="411480" y="1298448"/>
-          <a:ext cx="5806437" cy="3463290"/>
+          <a:ext cx="5806437" cy="4869180"/>
         </p:xfrm>
         <a:graphic>
           <a:graphicData uri="http://schemas.openxmlformats.org/drawingml/2006/table">
@@ -10894,73 +10894,73 @@
                           </a:solidFill>
                           <a:latin typeface="Arial"/>
                         </a:rPr>
-                        <a:t>interferometer, mirror rig, redesigned</a:t>
-                      </a:r>
-                    </a:p>
-                  </a:txBody>
-                  <a:tcPr marL="54864" marR="54864" marT="18288" marB="18288">
-                    <a:solidFill>
-                      <a:srgbClr val="FFFFFF"/>
-                    </a:solidFill>
-                  </a:tcPr>
-                </a:tc>
-                <a:tc>
-                  <a:txBody>
-                    <a:bodyPr wrap="square"/>
-                    <a:lstStyle/>
-                    <a:p>
-                      <a:r>
-                        <a:rPr sz="1100" b="0">
-                          <a:solidFill>
-                            <a:srgbClr val="282828"/>
-                          </a:solidFill>
-                          <a:latin typeface="Arial"/>
-                        </a:rPr>
-                        <a:t>5.4e12</a:t>
-                      </a:r>
-                    </a:p>
-                  </a:txBody>
-                  <a:tcPr marL="54864" marR="54864" marT="18288" marB="18288">
-                    <a:solidFill>
-                      <a:srgbClr val="FFFFFF"/>
-                    </a:solidFill>
-                  </a:tcPr>
-                </a:tc>
-                <a:tc>
-                  <a:txBody>
-                    <a:bodyPr wrap="square"/>
-                    <a:lstStyle/>
-                    <a:p>
-                      <a:r>
-                        <a:rPr sz="1100" b="0">
-                          <a:solidFill>
-                            <a:srgbClr val="282828"/>
-                          </a:solidFill>
-                          <a:latin typeface="Arial"/>
-                        </a:rPr>
-                        <a:t>1.7e13</a:t>
-                      </a:r>
-                    </a:p>
-                  </a:txBody>
-                  <a:tcPr marL="54864" marR="54864" marT="18288" marB="18288">
-                    <a:solidFill>
-                      <a:srgbClr val="FFFFFF"/>
-                    </a:solidFill>
-                  </a:tcPr>
-                </a:tc>
-                <a:tc>
-                  <a:txBody>
-                    <a:bodyPr wrap="square"/>
-                    <a:lstStyle/>
-                    <a:p>
-                      <a:r>
-                        <a:rPr sz="1100" b="0">
-                          <a:solidFill>
-                            <a:srgbClr val="282828"/>
-                          </a:solidFill>
-                          <a:latin typeface="Arial"/>
-                        </a:rPr>
-                        <a:t>10.0 pm</a:t>
+                        <a:t>vector Zernike, mirror rig</a:t>
+                      </a:r>
+                    </a:p>
+                  </a:txBody>
+                  <a:tcPr marL="54864" marR="54864" marT="18288" marB="18288">
+                    <a:solidFill>
+                      <a:srgbClr val="FFFFFF"/>
+                    </a:solidFill>
+                  </a:tcPr>
+                </a:tc>
+                <a:tc>
+                  <a:txBody>
+                    <a:bodyPr wrap="square"/>
+                    <a:lstStyle/>
+                    <a:p>
+                      <a:r>
+                        <a:rPr sz="1100" b="0">
+                          <a:solidFill>
+                            <a:srgbClr val="282828"/>
+                          </a:solidFill>
+                          <a:latin typeface="Arial"/>
+                        </a:rPr>
+                        <a:t>1.7e12</a:t>
+                      </a:r>
+                    </a:p>
+                  </a:txBody>
+                  <a:tcPr marL="54864" marR="54864" marT="18288" marB="18288">
+                    <a:solidFill>
+                      <a:srgbClr val="FFFFFF"/>
+                    </a:solidFill>
+                  </a:tcPr>
+                </a:tc>
+                <a:tc>
+                  <a:txBody>
+                    <a:bodyPr wrap="square"/>
+                    <a:lstStyle/>
+                    <a:p>
+                      <a:r>
+                        <a:rPr sz="1100" b="0">
+                          <a:solidFill>
+                            <a:srgbClr val="282828"/>
+                          </a:solidFill>
+                          <a:latin typeface="Arial"/>
+                        </a:rPr>
+                        <a:t>5.7e12</a:t>
+                      </a:r>
+                    </a:p>
+                  </a:txBody>
+                  <a:tcPr marL="54864" marR="54864" marT="18288" marB="18288">
+                    <a:solidFill>
+                      <a:srgbClr val="FFFFFF"/>
+                    </a:solidFill>
+                  </a:tcPr>
+                </a:tc>
+                <a:tc>
+                  <a:txBody>
+                    <a:bodyPr wrap="square"/>
+                    <a:lstStyle/>
+                    <a:p>
+                      <a:r>
+                        <a:rPr sz="1100" b="0">
+                          <a:solidFill>
+                            <a:srgbClr val="282828"/>
+                          </a:solidFill>
+                          <a:latin typeface="Arial"/>
+                        </a:rPr>
+                        <a:t>9.8 pm</a:t>
                       </a:r>
                     </a:p>
                   </a:txBody>
@@ -11006,13 +11006,349 @@
                           </a:solidFill>
                           <a:latin typeface="Arial"/>
                         </a:rPr>
+                        <a:t>stepped pinhole, mirror rig</a:t>
+                      </a:r>
+                    </a:p>
+                  </a:txBody>
+                  <a:tcPr marL="54864" marR="54864" marT="18288" marB="18288">
+                    <a:solidFill>
+                      <a:srgbClr val="ECF1F6"/>
+                    </a:solidFill>
+                  </a:tcPr>
+                </a:tc>
+                <a:tc>
+                  <a:txBody>
+                    <a:bodyPr wrap="square"/>
+                    <a:lstStyle/>
+                    <a:p>
+                      <a:r>
+                        <a:rPr sz="1100" b="0">
+                          <a:solidFill>
+                            <a:srgbClr val="282828"/>
+                          </a:solidFill>
+                          <a:latin typeface="Arial"/>
+                        </a:rPr>
+                        <a:t>2.5e12</a:t>
+                      </a:r>
+                    </a:p>
+                  </a:txBody>
+                  <a:tcPr marL="54864" marR="54864" marT="18288" marB="18288">
+                    <a:solidFill>
+                      <a:srgbClr val="ECF1F6"/>
+                    </a:solidFill>
+                  </a:tcPr>
+                </a:tc>
+                <a:tc>
+                  <a:txBody>
+                    <a:bodyPr wrap="square"/>
+                    <a:lstStyle/>
+                    <a:p>
+                      <a:r>
+                        <a:rPr sz="1100" b="0">
+                          <a:solidFill>
+                            <a:srgbClr val="282828"/>
+                          </a:solidFill>
+                          <a:latin typeface="Arial"/>
+                        </a:rPr>
+                        <a:t>7.4e12</a:t>
+                      </a:r>
+                    </a:p>
+                  </a:txBody>
+                  <a:tcPr marL="54864" marR="54864" marT="18288" marB="18288">
+                    <a:solidFill>
+                      <a:srgbClr val="ECF1F6"/>
+                    </a:solidFill>
+                  </a:tcPr>
+                </a:tc>
+                <a:tc>
+                  <a:txBody>
+                    <a:bodyPr wrap="square"/>
+                    <a:lstStyle/>
+                    <a:p>
+                      <a:r>
+                        <a:rPr sz="1100" b="0">
+                          <a:solidFill>
+                            <a:srgbClr val="282828"/>
+                          </a:solidFill>
+                          <a:latin typeface="Arial"/>
+                        </a:rPr>
+                        <a:t>9.9 pm</a:t>
+                      </a:r>
+                    </a:p>
+                  </a:txBody>
+                  <a:tcPr marL="54864" marR="54864" marT="18288" marB="18288">
+                    <a:solidFill>
+                      <a:srgbClr val="ECF1F6"/>
+                    </a:solidFill>
+                  </a:tcPr>
+                </a:tc>
+                <a:tc>
+                  <a:txBody>
+                    <a:bodyPr wrap="square"/>
+                    <a:lstStyle/>
+                    <a:p>
+                      <a:r>
+                        <a:rPr sz="1100" b="0">
+                          <a:solidFill>
+                            <a:srgbClr val="282828"/>
+                          </a:solidFill>
+                          <a:latin typeface="Arial"/>
+                        </a:rPr>
+                        <a:t>—</a:t>
+                      </a:r>
+                    </a:p>
+                  </a:txBody>
+                  <a:tcPr marL="54864" marR="54864" marT="18288" marB="18288">
+                    <a:solidFill>
+                      <a:srgbClr val="ECF1F6"/>
+                    </a:solidFill>
+                  </a:tcPr>
+                </a:tc>
+              </a:tr>
+              <a:tr h="468630">
+                <a:tc>
+                  <a:txBody>
+                    <a:bodyPr wrap="square"/>
+                    <a:lstStyle/>
+                    <a:p>
+                      <a:r>
+                        <a:rPr sz="1100" b="0">
+                          <a:solidFill>
+                            <a:srgbClr val="282828"/>
+                          </a:solidFill>
+                          <a:latin typeface="Arial"/>
+                        </a:rPr>
+                        <a:t>Zernike stepped, mirror rig</a:t>
+                      </a:r>
+                    </a:p>
+                  </a:txBody>
+                  <a:tcPr marL="54864" marR="54864" marT="18288" marB="18288">
+                    <a:solidFill>
+                      <a:srgbClr val="FFFFFF"/>
+                    </a:solidFill>
+                  </a:tcPr>
+                </a:tc>
+                <a:tc>
+                  <a:txBody>
+                    <a:bodyPr wrap="square"/>
+                    <a:lstStyle/>
+                    <a:p>
+                      <a:r>
+                        <a:rPr sz="1100" b="0">
+                          <a:solidFill>
+                            <a:srgbClr val="282828"/>
+                          </a:solidFill>
+                          <a:latin typeface="Arial"/>
+                        </a:rPr>
+                        <a:t>2.7e12</a:t>
+                      </a:r>
+                    </a:p>
+                  </a:txBody>
+                  <a:tcPr marL="54864" marR="54864" marT="18288" marB="18288">
+                    <a:solidFill>
+                      <a:srgbClr val="FFFFFF"/>
+                    </a:solidFill>
+                  </a:tcPr>
+                </a:tc>
+                <a:tc>
+                  <a:txBody>
+                    <a:bodyPr wrap="square"/>
+                    <a:lstStyle/>
+                    <a:p>
+                      <a:r>
+                        <a:rPr sz="1100" b="0">
+                          <a:solidFill>
+                            <a:srgbClr val="282828"/>
+                          </a:solidFill>
+                          <a:latin typeface="Arial"/>
+                        </a:rPr>
+                        <a:t>7.9e12</a:t>
+                      </a:r>
+                    </a:p>
+                  </a:txBody>
+                  <a:tcPr marL="54864" marR="54864" marT="18288" marB="18288">
+                    <a:solidFill>
+                      <a:srgbClr val="FFFFFF"/>
+                    </a:solidFill>
+                  </a:tcPr>
+                </a:tc>
+                <a:tc>
+                  <a:txBody>
+                    <a:bodyPr wrap="square"/>
+                    <a:lstStyle/>
+                    <a:p>
+                      <a:r>
+                        <a:rPr sz="1100" b="0">
+                          <a:solidFill>
+                            <a:srgbClr val="282828"/>
+                          </a:solidFill>
+                          <a:latin typeface="Arial"/>
+                        </a:rPr>
+                        <a:t>10.0 pm</a:t>
+                      </a:r>
+                    </a:p>
+                  </a:txBody>
+                  <a:tcPr marL="54864" marR="54864" marT="18288" marB="18288">
+                    <a:solidFill>
+                      <a:srgbClr val="FFFFFF"/>
+                    </a:solidFill>
+                  </a:tcPr>
+                </a:tc>
+                <a:tc>
+                  <a:txBody>
+                    <a:bodyPr wrap="square"/>
+                    <a:lstStyle/>
+                    <a:p>
+                      <a:r>
+                        <a:rPr sz="1100" b="0">
+                          <a:solidFill>
+                            <a:srgbClr val="282828"/>
+                          </a:solidFill>
+                          <a:latin typeface="Arial"/>
+                        </a:rPr>
+                        <a:t>—</a:t>
+                      </a:r>
+                    </a:p>
+                  </a:txBody>
+                  <a:tcPr marL="54864" marR="54864" marT="18288" marB="18288">
+                    <a:solidFill>
+                      <a:srgbClr val="FFFFFF"/>
+                    </a:solidFill>
+                  </a:tcPr>
+                </a:tc>
+              </a:tr>
+              <a:tr h="468630">
+                <a:tc>
+                  <a:txBody>
+                    <a:bodyPr wrap="square"/>
+                    <a:lstStyle/>
+                    <a:p>
+                      <a:r>
+                        <a:rPr sz="1100" b="0">
+                          <a:solidFill>
+                            <a:srgbClr val="282828"/>
+                          </a:solidFill>
+                          <a:latin typeface="Arial"/>
+                        </a:rPr>
+                        <a:t>interferometer, mirror rig, redesigned</a:t>
+                      </a:r>
+                    </a:p>
+                  </a:txBody>
+                  <a:tcPr marL="54864" marR="54864" marT="18288" marB="18288">
+                    <a:solidFill>
+                      <a:srgbClr val="ECF1F6"/>
+                    </a:solidFill>
+                  </a:tcPr>
+                </a:tc>
+                <a:tc>
+                  <a:txBody>
+                    <a:bodyPr wrap="square"/>
+                    <a:lstStyle/>
+                    <a:p>
+                      <a:r>
+                        <a:rPr sz="1100" b="0">
+                          <a:solidFill>
+                            <a:srgbClr val="282828"/>
+                          </a:solidFill>
+                          <a:latin typeface="Arial"/>
+                        </a:rPr>
+                        <a:t>5.4e12</a:t>
+                      </a:r>
+                    </a:p>
+                  </a:txBody>
+                  <a:tcPr marL="54864" marR="54864" marT="18288" marB="18288">
+                    <a:solidFill>
+                      <a:srgbClr val="ECF1F6"/>
+                    </a:solidFill>
+                  </a:tcPr>
+                </a:tc>
+                <a:tc>
+                  <a:txBody>
+                    <a:bodyPr wrap="square"/>
+                    <a:lstStyle/>
+                    <a:p>
+                      <a:r>
+                        <a:rPr sz="1100" b="0">
+                          <a:solidFill>
+                            <a:srgbClr val="282828"/>
+                          </a:solidFill>
+                          <a:latin typeface="Arial"/>
+                        </a:rPr>
+                        <a:t>1.7e13</a:t>
+                      </a:r>
+                    </a:p>
+                  </a:txBody>
+                  <a:tcPr marL="54864" marR="54864" marT="18288" marB="18288">
+                    <a:solidFill>
+                      <a:srgbClr val="ECF1F6"/>
+                    </a:solidFill>
+                  </a:tcPr>
+                </a:tc>
+                <a:tc>
+                  <a:txBody>
+                    <a:bodyPr wrap="square"/>
+                    <a:lstStyle/>
+                    <a:p>
+                      <a:r>
+                        <a:rPr sz="1100" b="0">
+                          <a:solidFill>
+                            <a:srgbClr val="282828"/>
+                          </a:solidFill>
+                          <a:latin typeface="Arial"/>
+                        </a:rPr>
+                        <a:t>10.0 pm</a:t>
+                      </a:r>
+                    </a:p>
+                  </a:txBody>
+                  <a:tcPr marL="54864" marR="54864" marT="18288" marB="18288">
+                    <a:solidFill>
+                      <a:srgbClr val="ECF1F6"/>
+                    </a:solidFill>
+                  </a:tcPr>
+                </a:tc>
+                <a:tc>
+                  <a:txBody>
+                    <a:bodyPr wrap="square"/>
+                    <a:lstStyle/>
+                    <a:p>
+                      <a:r>
+                        <a:rPr sz="1100" b="0">
+                          <a:solidFill>
+                            <a:srgbClr val="282828"/>
+                          </a:solidFill>
+                          <a:latin typeface="Arial"/>
+                        </a:rPr>
+                        <a:t>—</a:t>
+                      </a:r>
+                    </a:p>
+                  </a:txBody>
+                  <a:tcPr marL="54864" marR="54864" marT="18288" marB="18288">
+                    <a:solidFill>
+                      <a:srgbClr val="ECF1F6"/>
+                    </a:solidFill>
+                  </a:tcPr>
+                </a:tc>
+              </a:tr>
+              <a:tr h="468630">
+                <a:tc>
+                  <a:txBody>
+                    <a:bodyPr wrap="square"/>
+                    <a:lstStyle/>
+                    <a:p>
+                      <a:r>
+                        <a:rPr sz="1100" b="0">
+                          <a:solidFill>
+                            <a:srgbClr val="282828"/>
+                          </a:solidFill>
+                          <a:latin typeface="Arial"/>
+                        </a:rPr>
                         <a:t>interferometer, mirror rig, record (7°)</a:t>
                       </a:r>
                     </a:p>
                   </a:txBody>
                   <a:tcPr marL="54864" marR="54864" marT="18288" marB="18288">
                     <a:solidFill>
-                      <a:srgbClr val="ECF1F6"/>
+                      <a:srgbClr val="FFFFFF"/>
                     </a:solidFill>
                   </a:tcPr>
                 </a:tc>
@@ -11034,7 +11370,7 @@
                   </a:txBody>
                   <a:tcPr marL="54864" marR="54864" marT="18288" marB="18288">
                     <a:solidFill>
-                      <a:srgbClr val="ECF1F6"/>
+                      <a:srgbClr val="FFFFFF"/>
                     </a:solidFill>
                   </a:tcPr>
                 </a:tc>
@@ -11056,7 +11392,7 @@
                   </a:txBody>
                   <a:tcPr marL="54864" marR="54864" marT="18288" marB="18288">
                     <a:solidFill>
-                      <a:srgbClr val="ECF1F6"/>
+                      <a:srgbClr val="FFFFFF"/>
                     </a:solidFill>
                   </a:tcPr>
                 </a:tc>
@@ -11078,7 +11414,7 @@
                   </a:txBody>
                   <a:tcPr marL="54864" marR="54864" marT="18288" marB="18288">
                     <a:solidFill>
-                      <a:srgbClr val="ECF1F6"/>
+                      <a:srgbClr val="FFFFFF"/>
                     </a:solidFill>
                   </a:tcPr>
                 </a:tc>
@@ -11100,7 +11436,7 @@
                   </a:txBody>
                   <a:tcPr marL="54864" marR="54864" marT="18288" marB="18288">
                     <a:solidFill>
-                      <a:srgbClr val="ECF1F6"/>
+                      <a:srgbClr val="FFFFFF"/>
                     </a:solidFill>
                   </a:tcPr>
                 </a:tc>
@@ -11206,7 +11542,7 @@
                 </a:solidFill>
                 <a:latin typeface="Arial"/>
               </a:rPr>
-              <a:t>7.5e12 photons per cycle is 2.4 µJ, 9 ms of a 1 mW laser.  The ramp floor of 10 pm is the loop's lag (rate ÷ gain), the same for every reading with no fixed error, and it is low-order: 9.2 of its 10 pm sits below 4 cycles per aperture, so a faster or higher-gain low-order loop removes it while light buys nothing.  Both drift floors are the textbook formulas, reproduced by the engine to 1%.  The exact one-frame Zernike reading diverges in the loop.  Run tags vloop193, ploop193, loop193, pfdeck_loop, loop_lens, loop_oap, oapifol2.</a:t>
+              <a:t>7.5e12 photons per cycle is 2.4 µJ, 9 ms of a 1 mW laser.  The ramp floor of 10 pm is the loop's lag (rate ÷ gain), the same for every reading with no fixed error, and it is low-order: 9.2 of its 10 pm sits below 4 cycles per aperture, so a faster or higher-gain low-order loop removes it while light buys nothing.  Both drift floors are the textbook formulas, reproduced by the engine to 1%.  The exact one-frame Zernike reading diverges in the loop.  Run tags vloop193, ploop193, loop193, pfdeck_loop, loop_lens, loop_oap, oapifol2, oaploop22 (the sensors on the mirror rig).</a:t>
             </a:r>
           </a:p>
         </p:txBody>
@@ -13895,7 +14231,7 @@
         </p:nvGraphicFramePr>
         <p:xfrm>
           <a:off x="411480" y="1298448"/>
-          <a:ext cx="11368735" cy="2240280"/>
+          <a:ext cx="11368735" cy="2520315"/>
         </p:xfrm>
         <a:graphic>
           <a:graphicData uri="http://schemas.openxmlformats.org/drawingml/2006/table">
@@ -13904,9 +14240,9 @@
                 <a:tableStyleId>{5C22544A-7EE6-4342-B048-85BDC9FD1C3A}</a:tableStyleId>
               </a:tblPr>
               <a:tblGrid>
-                <a:gridCol w="3830648"/>
+                <a:gridCol w="4350344"/>
                 <a:gridCol w="1889760"/>
-                <a:gridCol w="3395347"/>
+                <a:gridCol w="2875651"/>
                 <a:gridCol w="2252980"/>
               </a:tblGrid>
               <a:tr h="280035">
@@ -14272,7 +14608,7 @@
                           </a:solidFill>
                           <a:latin typeface="Arial"/>
                         </a:rPr>
-                        <a:t>servo: 3 pm noise only / under the 2 pm walk</a:t>
+                        <a:t>interferometer servo: 3 pm noise only / under the 2 pm walk</a:t>
                       </a:r>
                     </a:p>
                   </a:txBody>
@@ -14362,73 +14698,73 @@
                           </a:solidFill>
                           <a:latin typeface="Arial"/>
                         </a:rPr>
-                        <a:t>capture with unwrapping</a:t>
-                      </a:r>
-                    </a:p>
-                  </a:txBody>
-                  <a:tcPr marL="54864" marR="54864" marT="18288" marB="18288">
-                    <a:solidFill>
-                      <a:srgbClr val="FFFFFF"/>
-                    </a:solidFill>
-                  </a:tcPr>
-                </a:tc>
-                <a:tc>
-                  <a:txBody>
-                    <a:bodyPr wrap="square"/>
-                    <a:lstStyle/>
-                    <a:p>
-                      <a:r>
-                        <a:rPr sz="1100" b="0">
-                          <a:solidFill>
-                            <a:srgbClr val="282828"/>
-                          </a:solidFill>
-                          <a:latin typeface="Arial"/>
-                        </a:rPr>
-                        <a:t>stalls from 60 nm</a:t>
-                      </a:r>
-                    </a:p>
-                  </a:txBody>
-                  <a:tcPr marL="54864" marR="54864" marT="18288" marB="18288">
-                    <a:solidFill>
-                      <a:srgbClr val="FFFFFF"/>
-                    </a:solidFill>
-                  </a:tcPr>
-                </a:tc>
-                <a:tc>
-                  <a:txBody>
-                    <a:bodyPr wrap="square"/>
-                    <a:lstStyle/>
-                    <a:p>
-                      <a:r>
-                        <a:rPr sz="1100" b="0">
-                          <a:solidFill>
-                            <a:srgbClr val="282828"/>
-                          </a:solidFill>
-                          <a:latin typeface="Arial"/>
-                        </a:rPr>
-                        <a:t>3 pm from 200 nm in 19 cycles</a:t>
-                      </a:r>
-                    </a:p>
-                  </a:txBody>
-                  <a:tcPr marL="54864" marR="54864" marT="18288" marB="18288">
-                    <a:solidFill>
-                      <a:srgbClr val="FFFFFF"/>
-                    </a:solidFill>
-                  </a:tcPr>
-                </a:tc>
-                <a:tc>
-                  <a:txBody>
-                    <a:bodyPr wrap="square"/>
-                    <a:lstStyle/>
-                    <a:p>
-                      <a:r>
-                        <a:rPr sz="1100" b="0">
-                          <a:solidFill>
-                            <a:srgbClr val="282828"/>
-                          </a:solidFill>
-                          <a:latin typeface="Arial"/>
-                        </a:rPr>
-                        <a:t>3 pm from 300 nm in 43 cycles</a:t>
+                        <a:t>sensors' servo under the walk: vector / pinhole / stepped</a:t>
+                      </a:r>
+                    </a:p>
+                  </a:txBody>
+                  <a:tcPr marL="54864" marR="54864" marT="18288" marB="18288">
+                    <a:solidFill>
+                      <a:srgbClr val="FFFFFF"/>
+                    </a:solidFill>
+                  </a:tcPr>
+                </a:tc>
+                <a:tc>
+                  <a:txBody>
+                    <a:bodyPr wrap="square"/>
+                    <a:lstStyle/>
+                    <a:p>
+                      <a:r>
+                        <a:rPr sz="1100" b="0">
+                          <a:solidFill>
+                            <a:srgbClr val="282828"/>
+                          </a:solidFill>
+                          <a:latin typeface="Arial"/>
+                        </a:rPr>
+                        <a:t>—</a:t>
+                      </a:r>
+                    </a:p>
+                  </a:txBody>
+                  <a:tcPr marL="54864" marR="54864" marT="18288" marB="18288">
+                    <a:solidFill>
+                      <a:srgbClr val="FFFFFF"/>
+                    </a:solidFill>
+                  </a:tcPr>
+                </a:tc>
+                <a:tc>
+                  <a:txBody>
+                    <a:bodyPr wrap="square"/>
+                    <a:lstStyle/>
+                    <a:p>
+                      <a:r>
+                        <a:rPr sz="1100" b="0">
+                          <a:solidFill>
+                            <a:srgbClr val="282828"/>
+                          </a:solidFill>
+                          <a:latin typeface="Arial"/>
+                        </a:rPr>
+                        <a:t>5.7e12 / 7.4e12 / 7.9e12</a:t>
+                      </a:r>
+                    </a:p>
+                  </a:txBody>
+                  <a:tcPr marL="54864" marR="54864" marT="18288" marB="18288">
+                    <a:solidFill>
+                      <a:srgbClr val="FFFFFF"/>
+                    </a:solidFill>
+                  </a:tcPr>
+                </a:tc>
+                <a:tc>
+                  <a:txBody>
+                    <a:bodyPr wrap="square"/>
+                    <a:lstStyle/>
+                    <a:p>
+                      <a:r>
+                        <a:rPr sz="1100" b="0">
+                          <a:solidFill>
+                            <a:srgbClr val="282828"/>
+                          </a:solidFill>
+                          <a:latin typeface="Arial"/>
+                        </a:rPr>
+                        <a:t>5.3e12 / 7.0e12 / 7.5e12</a:t>
                       </a:r>
                     </a:p>
                   </a:txBody>
@@ -14452,7 +14788,7 @@
                           </a:solidFill>
                           <a:latin typeface="Arial"/>
                         </a:rPr>
-                        <a:t>vector Zernike, 100 nm pokes (fold gate)</a:t>
+                        <a:t>capture with unwrapping</a:t>
                       </a:r>
                     </a:p>
                   </a:txBody>
@@ -14474,7 +14810,7 @@
                           </a:solidFill>
                           <a:latin typeface="Arial"/>
                         </a:rPr>
-                        <a:t>19.6 pm, fails</a:t>
+                        <a:t>stalls from 60 nm</a:t>
                       </a:r>
                     </a:p>
                   </a:txBody>
@@ -14496,7 +14832,7 @@
                           </a:solidFill>
                           <a:latin typeface="Arial"/>
                         </a:rPr>
-                        <a:t>634 pm raw; 0.054 pm calibrated: passes</a:t>
+                        <a:t>3 pm from 200 nm in 19 cycles</a:t>
                       </a:r>
                     </a:p>
                   </a:txBody>
@@ -14518,7 +14854,7 @@
                           </a:solidFill>
                           <a:latin typeface="Arial"/>
                         </a:rPr>
-                        <a:t>0.05 pm</a:t>
+                        <a:t>3 pm from 300 nm in 43 cycles</a:t>
                       </a:r>
                     </a:p>
                   </a:txBody>
@@ -14542,13 +14878,103 @@
                           </a:solidFill>
                           <a:latin typeface="Arial"/>
                         </a:rPr>
+                        <a:t>vector Zernike, 100 nm pokes (fold gate)</a:t>
+                      </a:r>
+                    </a:p>
+                  </a:txBody>
+                  <a:tcPr marL="54864" marR="54864" marT="18288" marB="18288">
+                    <a:solidFill>
+                      <a:srgbClr val="FFFFFF"/>
+                    </a:solidFill>
+                  </a:tcPr>
+                </a:tc>
+                <a:tc>
+                  <a:txBody>
+                    <a:bodyPr wrap="square"/>
+                    <a:lstStyle/>
+                    <a:p>
+                      <a:r>
+                        <a:rPr sz="1100" b="0">
+                          <a:solidFill>
+                            <a:srgbClr val="282828"/>
+                          </a:solidFill>
+                          <a:latin typeface="Arial"/>
+                        </a:rPr>
+                        <a:t>19.6 pm, fails</a:t>
+                      </a:r>
+                    </a:p>
+                  </a:txBody>
+                  <a:tcPr marL="54864" marR="54864" marT="18288" marB="18288">
+                    <a:solidFill>
+                      <a:srgbClr val="FFFFFF"/>
+                    </a:solidFill>
+                  </a:tcPr>
+                </a:tc>
+                <a:tc>
+                  <a:txBody>
+                    <a:bodyPr wrap="square"/>
+                    <a:lstStyle/>
+                    <a:p>
+                      <a:r>
+                        <a:rPr sz="1100" b="0">
+                          <a:solidFill>
+                            <a:srgbClr val="282828"/>
+                          </a:solidFill>
+                          <a:latin typeface="Arial"/>
+                        </a:rPr>
+                        <a:t>634 pm raw; 0.054 pm calibrated: passes</a:t>
+                      </a:r>
+                    </a:p>
+                  </a:txBody>
+                  <a:tcPr marL="54864" marR="54864" marT="18288" marB="18288">
+                    <a:solidFill>
+                      <a:srgbClr val="FFFFFF"/>
+                    </a:solidFill>
+                  </a:tcPr>
+                </a:tc>
+                <a:tc>
+                  <a:txBody>
+                    <a:bodyPr wrap="square"/>
+                    <a:lstStyle/>
+                    <a:p>
+                      <a:r>
+                        <a:rPr sz="1100" b="0">
+                          <a:solidFill>
+                            <a:srgbClr val="282828"/>
+                          </a:solidFill>
+                          <a:latin typeface="Arial"/>
+                        </a:rPr>
+                        <a:t>0.05 pm</a:t>
+                      </a:r>
+                    </a:p>
+                  </a:txBody>
+                  <a:tcPr marL="54864" marR="54864" marT="18288" marB="18288">
+                    <a:solidFill>
+                      <a:srgbClr val="FFFFFF"/>
+                    </a:solidFill>
+                  </a:tcPr>
+                </a:tc>
+              </a:tr>
+              <a:tr h="280035">
+                <a:tc>
+                  <a:txBody>
+                    <a:bodyPr wrap="square"/>
+                    <a:lstStyle/>
+                    <a:p>
+                      <a:r>
+                        <a:rPr sz="1100" b="0">
+                          <a:solidFill>
+                            <a:srgbClr val="282828"/>
+                          </a:solidFill>
+                          <a:latin typeface="Arial"/>
+                        </a:rPr>
                         <a:t>stepped pinhole, 100 nm pokes</a:t>
                       </a:r>
                     </a:p>
                   </a:txBody>
                   <a:tcPr marL="54864" marR="54864" marT="18288" marB="18288">
                     <a:solidFill>
-                      <a:srgbClr val="FFFFFF"/>
+                      <a:srgbClr val="ECF1F6"/>
                     </a:solidFill>
                   </a:tcPr>
                 </a:tc>
@@ -14570,7 +14996,7 @@
                   </a:txBody>
                   <a:tcPr marL="54864" marR="54864" marT="18288" marB="18288">
                     <a:solidFill>
-                      <a:srgbClr val="FFFFFF"/>
+                      <a:srgbClr val="ECF1F6"/>
                     </a:solidFill>
                   </a:tcPr>
                 </a:tc>
@@ -14592,7 +15018,7 @@
                   </a:txBody>
                   <a:tcPr marL="54864" marR="54864" marT="18288" marB="18288">
                     <a:solidFill>
-                      <a:srgbClr val="FFFFFF"/>
+                      <a:srgbClr val="ECF1F6"/>
                     </a:solidFill>
                   </a:tcPr>
                 </a:tc>
@@ -14614,7 +15040,7 @@
                   </a:txBody>
                   <a:tcPr marL="54864" marR="54864" marT="18288" marB="18288">
                     <a:solidFill>
-                      <a:srgbClr val="FFFFFF"/>
+                      <a:srgbClr val="ECF1F6"/>
                     </a:solidFill>
                   </a:tcPr>
                 </a:tc>
@@ -14631,7 +15057,7 @@
         </p:nvSpPr>
         <p:spPr>
           <a:xfrm>
-            <a:off x="411480" y="3685032"/>
+            <a:off x="411480" y="3965066"/>
             <a:ext cx="11368735" cy="274320"/>
           </a:xfrm>
           <a:prstGeom prst="rect">
@@ -14673,7 +15099,7 @@
                 </a:solidFill>
                 <a:latin typeface="Arial"/>
               </a:rPr>
-              <a:t>•  Closed: the raw interferometer reading wraps between 60 and 120 nm of surface on both rigs, lens and mirror alike (a base the four-step cannot follow reads λ/2 ÷ √12 = 91 nm rms, measured 89-92 on both); the capture range is set by the reading, not the optics, and unwrapping restores it.  The detector leg here is the geometric seed (the tuner's objective prefers a leg that does not read: a known defect, being fixed).</a:t>
+              <a:t>•  Closed: the raw interferometer reading wraps between 60 and 120 nm of surface on both rigs, lens and mirror alike (a base the four-step cannot follow reads λ/2 ÷ √12 = 91 nm rms, measured 89-92 on both); the capture range is set by the reading, not the optics, and unwrapping restores it.  The detector leg here is the geometric seed; the tuner's winner is now gated against the seed through the same estimator, so a leg that does not read cannot be handed to a bench.</a:t>
             </a:r>
           </a:p>
         </p:txBody>
@@ -14686,7 +15112,7 @@
         </p:nvSpPr>
         <p:spPr>
           <a:xfrm>
-            <a:off x="411480" y="5735574"/>
+            <a:off x="411480" y="6015608"/>
             <a:ext cx="11368735" cy="274320"/>
           </a:xfrm>
           <a:prstGeom prst="rect">
@@ -14712,7 +15138,7 @@
                 </a:solidFill>
                 <a:latin typeface="Arial"/>
               </a:rPr>
-              <a:t>Run tags oapifo2, oapifol2, oapdesc2, oapsens22, vqw22, vmap22, oapuw2, lensuw2; tg_psi_dm96_oap/REPORT_reflective.md (TO, 2026-09-16).</a:t>
+              <a:t>Run tags oapifo2, oapifol2, oapdesc2, oapsens22, vqw22, vmap22, oapuw2, lensuw2, oaploop22; tg_psi_dm96_oap/REPORT_reflective.md (TO, 2026-09-16).</a:t>
             </a:r>
           </a:p>
         </p:txBody>
@@ -16711,7 +17137,7 @@
                 </a:solidFill>
                 <a:latin typeface="Arial"/>
               </a:rPr>
-              <a:t>•  Front end: either builds.  The redesigned mirror rig matches the lens rig on the rows, the servo (1.7e13 vs 2.0e13 photons per cycle) and capture (200 nm), and its sensors pass once calibrated; it buys any color and no glass in the beam, and costs alignment tolerance (10 µrad = 100 nm of null) and a polarization calibration of the vector reading.  The record's stance was lenses; the measured trade is now on the table for a ruling.</a:t>
+              <a:t>•  Front end: either builds.  The redesigned mirror rig matches the lens rig on the rows, the servo (interferometer 1.7e13 vs 2.0e13 photons per cycle; the sensors within 10%) and capture (200 nm), and its sensors pass once calibrated; it buys any color and no glass in the beam, and costs alignment tolerance (10 µrad = 100 nm of null) and a polarization calibration of the vector reading.  The record's stance was lenses; the measured trade is now on the table for a ruling.</a:t>
             </a:r>
           </a:p>
         </p:txBody>
@@ -27241,7 +27667,7 @@
                 </a:solidFill>
                 <a:latin typeface="Arial"/>
               </a:rPr>
-              <a:t>•  Zernike sensors (zwfs_dm96/runs): matbase, matbase385, m2048, m2048_lat, cap385, cap385_b60-b160, noise193_b30-b160, rec193full, loop193, loop385, v193base, v193noise, vloop193, fold_diag, v2g, v2loop, v3arm, v3s, v3loop, an193_ref/cube/q300/q100/az1/bound/clear, stations193, gate22_193, sub22, thk22 (the 22.5° bench with substrates and thicknesses), oapsens22, oapsens22n, vqw22, vmap22 (the sensors on the redesigned mirror rig).  README.md (CCL) and deck_zwfs.md.</a:t>
+              <a:t>•  Zernike sensors (zwfs_dm96/runs): matbase, matbase385, m2048, m2048_lat, cap385, cap385_b60-b160, noise193_b30-b160, rec193full, loop193, loop385, v193base, v193noise, vloop193, fold_diag, v2g, v2loop, v3arm, v3s, v3loop, an193_ref/cube/q300/q100/az1/bound/clear, stations193, gate22_193, sub22, thk22 (the 22.5° bench with substrates and thicknesses), oapsens22, oapsens22n, vqw22, vmap22, oaploop22 (the sensors on the redesigned mirror rig).  README.md (CCL) and deck_zwfs.md.</a:t>
             </a:r>
           </a:p>
           <a:p>
@@ -27302,7 +27728,7 @@
         </p:nvSpPr>
         <p:spPr>
           <a:xfrm>
-            <a:off x="411480" y="6989064"/>
+            <a:off x="411480" y="7236714"/>
             <a:ext cx="11368735" cy="274320"/>
           </a:xfrm>
           <a:prstGeom prst="rect">

--- a/demo_session/deck_gauges.pptx
+++ b/demo_session/deck_gauges.pptx
@@ -9233,7 +9233,7 @@
                 </a:solidFill>
                 <a:latin typeface="Arial"/>
               </a:rPr>
-              <a:t>On the flat calibration the sensors need 3-6e13 photons per measurement and the interferometer 1.4-2.5e14; on the working surface the sensors' cost roughly doubles and the two-arm instruments' does not</a:t>
+              <a:t>On the flat calibration the sensors need 3-6e13 photons per measurement and the interferometer 1.4-2.5e14; on the working surface the sensors' cost roughly doubles, on either front end, and the two-arm instruments' does not</a:t>
             </a:r>
           </a:p>
         </p:txBody>
@@ -9292,7 +9292,7 @@
         </p:nvGraphicFramePr>
         <p:xfrm>
           <a:off x="411480" y="1298448"/>
-          <a:ext cx="5806438" cy="2617470"/>
+          <a:ext cx="5806439" cy="3086100"/>
         </p:xfrm>
         <a:graphic>
           <a:graphicData uri="http://schemas.openxmlformats.org/drawingml/2006/table">
@@ -9301,9 +9301,9 @@
                 <a:tableStyleId>{5C22544A-7EE6-4342-B048-85BDC9FD1C3A}</a:tableStyleId>
               </a:tblPr>
               <a:tblGrid>
-                <a:gridCol w="2148382"/>
-                <a:gridCol w="1683867"/>
-                <a:gridCol w="1974189"/>
+                <a:gridCol w="3116692"/>
+                <a:gridCol w="1238137"/>
+                <a:gridCol w="1451610"/>
               </a:tblGrid>
               <a:tr h="468630">
                 <a:tc>
@@ -9713,6 +9713,74 @@
                   </a:tcPr>
                 </a:tc>
               </a:tr>
+              <a:tr h="468630">
+                <a:tc>
+                  <a:txBody>
+                    <a:bodyPr wrap="square"/>
+                    <a:lstStyle/>
+                    <a:p>
+                      <a:r>
+                        <a:rPr sz="1100" b="0">
+                          <a:solidFill>
+                            <a:srgbClr val="282828"/>
+                          </a:solidFill>
+                          <a:latin typeface="Arial"/>
+                        </a:rPr>
+                        <a:t>interferometer, lens rig</a:t>
+                      </a:r>
+                    </a:p>
+                  </a:txBody>
+                  <a:tcPr marL="54864" marR="54864" marT="18288" marB="18288">
+                    <a:solidFill>
+                      <a:srgbClr val="ECF1F6"/>
+                    </a:solidFill>
+                  </a:tcPr>
+                </a:tc>
+                <a:tc>
+                  <a:txBody>
+                    <a:bodyPr wrap="square"/>
+                    <a:lstStyle/>
+                    <a:p>
+                      <a:r>
+                        <a:rPr sz="1100" b="0">
+                          <a:solidFill>
+                            <a:srgbClr val="282828"/>
+                          </a:solidFill>
+                          <a:latin typeface="Arial"/>
+                        </a:rPr>
+                        <a:t>1.4e14 (servo form)</a:t>
+                      </a:r>
+                    </a:p>
+                  </a:txBody>
+                  <a:tcPr marL="54864" marR="54864" marT="18288" marB="18288">
+                    <a:solidFill>
+                      <a:srgbClr val="ECF1F6"/>
+                    </a:solidFill>
+                  </a:tcPr>
+                </a:tc>
+                <a:tc>
+                  <a:txBody>
+                    <a:bodyPr wrap="square"/>
+                    <a:lstStyle/>
+                    <a:p>
+                      <a:r>
+                        <a:rPr sz="1100" b="0">
+                          <a:solidFill>
+                            <a:srgbClr val="282828"/>
+                          </a:solidFill>
+                          <a:latin typeface="Arial"/>
+                        </a:rPr>
+                        <a:t>2.5e14</a:t>
+                      </a:r>
+                    </a:p>
+                  </a:txBody>
+                  <a:tcPr marL="54864" marR="54864" marT="18288" marB="18288">
+                    <a:solidFill>
+                      <a:srgbClr val="ECF1F6"/>
+                    </a:solidFill>
+                  </a:tcPr>
+                </a:tc>
+              </a:tr>
               <a:tr h="280035">
                 <a:tc>
                   <a:txBody>
@@ -9726,57 +9794,57 @@
                           </a:solidFill>
                           <a:latin typeface="Arial"/>
                         </a:rPr>
-                        <a:t>interferometer, lens rig</a:t>
-                      </a:r>
-                    </a:p>
-                  </a:txBody>
-                  <a:tcPr marL="54864" marR="54864" marT="18288" marB="18288">
-                    <a:solidFill>
-                      <a:srgbClr val="ECF1F6"/>
-                    </a:solidFill>
-                  </a:tcPr>
-                </a:tc>
-                <a:tc>
-                  <a:txBody>
-                    <a:bodyPr wrap="square"/>
-                    <a:lstStyle/>
-                    <a:p>
-                      <a:r>
-                        <a:rPr sz="1100" b="0">
-                          <a:solidFill>
-                            <a:srgbClr val="282828"/>
-                          </a:solidFill>
-                          <a:latin typeface="Arial"/>
-                        </a:rPr>
-                        <a:t>1.4e14 (servo form)</a:t>
-                      </a:r>
-                    </a:p>
-                  </a:txBody>
-                  <a:tcPr marL="54864" marR="54864" marT="18288" marB="18288">
-                    <a:solidFill>
-                      <a:srgbClr val="ECF1F6"/>
-                    </a:solidFill>
-                  </a:tcPr>
-                </a:tc>
-                <a:tc>
-                  <a:txBody>
-                    <a:bodyPr wrap="square"/>
-                    <a:lstStyle/>
-                    <a:p>
-                      <a:r>
-                        <a:rPr sz="1100" b="0">
-                          <a:solidFill>
-                            <a:srgbClr val="282828"/>
-                          </a:solidFill>
-                          <a:latin typeface="Arial"/>
-                        </a:rPr>
-                        <a:t>2.5e14</a:t>
-                      </a:r>
-                    </a:p>
-                  </a:txBody>
-                  <a:tcPr marL="54864" marR="54864" marT="18288" marB="18288">
-                    <a:solidFill>
-                      <a:srgbClr val="ECF1F6"/>
+                        <a:t>interferometer, mirror rig, record 7°</a:t>
+                      </a:r>
+                    </a:p>
+                  </a:txBody>
+                  <a:tcPr marL="54864" marR="54864" marT="18288" marB="18288">
+                    <a:solidFill>
+                      <a:srgbClr val="FFFFFF"/>
+                    </a:solidFill>
+                  </a:tcPr>
+                </a:tc>
+                <a:tc>
+                  <a:txBody>
+                    <a:bodyPr wrap="square"/>
+                    <a:lstStyle/>
+                    <a:p>
+                      <a:r>
+                        <a:rPr sz="1100" b="0">
+                          <a:solidFill>
+                            <a:srgbClr val="282828"/>
+                          </a:solidFill>
+                          <a:latin typeface="Arial"/>
+                        </a:rPr>
+                        <a:t>4.9e14</a:t>
+                      </a:r>
+                    </a:p>
+                  </a:txBody>
+                  <a:tcPr marL="54864" marR="54864" marT="18288" marB="18288">
+                    <a:solidFill>
+                      <a:srgbClr val="FFFFFF"/>
+                    </a:solidFill>
+                  </a:tcPr>
+                </a:tc>
+                <a:tc>
+                  <a:txBody>
+                    <a:bodyPr wrap="square"/>
+                    <a:lstStyle/>
+                    <a:p>
+                      <a:r>
+                        <a:rPr sz="1100" b="0">
+                          <a:solidFill>
+                            <a:srgbClr val="282828"/>
+                          </a:solidFill>
+                          <a:latin typeface="Arial"/>
+                        </a:rPr>
+                        <a:t>6.2e14</a:t>
+                      </a:r>
+                    </a:p>
+                  </a:txBody>
+                  <a:tcPr marL="54864" marR="54864" marT="18288" marB="18288">
+                    <a:solidFill>
+                      <a:srgbClr val="FFFFFF"/>
                     </a:solidFill>
                   </a:tcPr>
                 </a:tc>
@@ -9794,57 +9862,57 @@
                           </a:solidFill>
                           <a:latin typeface="Arial"/>
                         </a:rPr>
-                        <a:t>interferometer, mirror rig, record 7°</a:t>
-                      </a:r>
-                    </a:p>
-                  </a:txBody>
-                  <a:tcPr marL="54864" marR="54864" marT="18288" marB="18288">
-                    <a:solidFill>
-                      <a:srgbClr val="FFFFFF"/>
-                    </a:solidFill>
-                  </a:tcPr>
-                </a:tc>
-                <a:tc>
-                  <a:txBody>
-                    <a:bodyPr wrap="square"/>
-                    <a:lstStyle/>
-                    <a:p>
-                      <a:r>
-                        <a:rPr sz="1100" b="0">
-                          <a:solidFill>
-                            <a:srgbClr val="282828"/>
-                          </a:solidFill>
-                          <a:latin typeface="Arial"/>
-                        </a:rPr>
-                        <a:t>4.9e14</a:t>
-                      </a:r>
-                    </a:p>
-                  </a:txBody>
-                  <a:tcPr marL="54864" marR="54864" marT="18288" marB="18288">
-                    <a:solidFill>
-                      <a:srgbClr val="FFFFFF"/>
-                    </a:solidFill>
-                  </a:tcPr>
-                </a:tc>
-                <a:tc>
-                  <a:txBody>
-                    <a:bodyPr wrap="square"/>
-                    <a:lstStyle/>
-                    <a:p>
-                      <a:r>
-                        <a:rPr sz="1100" b="0">
-                          <a:solidFill>
-                            <a:srgbClr val="282828"/>
-                          </a:solidFill>
-                          <a:latin typeface="Arial"/>
-                        </a:rPr>
-                        <a:t>6.2e14</a:t>
-                      </a:r>
-                    </a:p>
-                  </a:txBody>
-                  <a:tcPr marL="54864" marR="54864" marT="18288" marB="18288">
-                    <a:solidFill>
-                      <a:srgbClr val="FFFFFF"/>
+                        <a:t>stepped pinhole / vector Zernike / Zernike stepped, redesigned mirror rig</a:t>
+                      </a:r>
+                    </a:p>
+                  </a:txBody>
+                  <a:tcPr marL="54864" marR="54864" marT="18288" marB="18288">
+                    <a:solidFill>
+                      <a:srgbClr val="ECF1F6"/>
+                    </a:solidFill>
+                  </a:tcPr>
+                </a:tc>
+                <a:tc>
+                  <a:txBody>
+                    <a:bodyPr wrap="square"/>
+                    <a:lstStyle/>
+                    <a:p>
+                      <a:r>
+                        <a:rPr sz="1100" b="0">
+                          <a:solidFill>
+                            <a:srgbClr val="282828"/>
+                          </a:solidFill>
+                          <a:latin typeface="Arial"/>
+                        </a:rPr>
+                        <a:t>—</a:t>
+                      </a:r>
+                    </a:p>
+                  </a:txBody>
+                  <a:tcPr marL="54864" marR="54864" marT="18288" marB="18288">
+                    <a:solidFill>
+                      <a:srgbClr val="ECF1F6"/>
+                    </a:solidFill>
+                  </a:tcPr>
+                </a:tc>
+                <a:tc>
+                  <a:txBody>
+                    <a:bodyPr wrap="square"/>
+                    <a:lstStyle/>
+                    <a:p>
+                      <a:r>
+                        <a:rPr sz="1100" b="0">
+                          <a:solidFill>
+                            <a:srgbClr val="282828"/>
+                          </a:solidFill>
+                          <a:latin typeface="Arial"/>
+                        </a:rPr>
+                        <a:t>8.5e13 / 7.3e13 / 5.8e13</a:t>
+                      </a:r>
+                    </a:p>
+                  </a:txBody>
+                  <a:tcPr marL="54864" marR="54864" marT="18288" marB="18288">
+                    <a:solidFill>
+                      <a:srgbClr val="ECF1F6"/>
                     </a:solidFill>
                   </a:tcPr>
                 </a:tc>
@@ -9950,7 +10018,7 @@
                 </a:solidFill>
                 <a:latin typeface="Arial"/>
               </a:rPr>
-              <a:t>One measurement at 1e14 photons is 31 µJ: 0.13 s of a 1 mW laser at 25% throughput.  The camera's well depth, not the laser, sets the time (future-work slide).  Run tags pdi193f, v193noise, rec193full, noise193_b30, noise193p_b30, pfdeck, loop_lens, lens_deck, oap_deck.</a:t>
+              <a:t>One measurement at 1e14 photons is 31 µJ: 0.13 s of a 1 mW laser at 25% throughput.  The camera's well depth, not the laser, sets the time (future-work slide).  Run tags pdi193f, v193noise, rec193full, noise193_b30, noise193p_b30, pfdeck, loop_lens, lens_deck, oap_deck, oapnoise22 (the sensors on the mirror rig).</a:t>
             </a:r>
           </a:p>
         </p:txBody>
@@ -27667,7 +27735,7 @@
                 </a:solidFill>
                 <a:latin typeface="Arial"/>
               </a:rPr>
-              <a:t>•  Zernike sensors (zwfs_dm96/runs): matbase, matbase385, m2048, m2048_lat, cap385, cap385_b60-b160, noise193_b30-b160, rec193full, loop193, loop385, v193base, v193noise, vloop193, fold_diag, v2g, v2loop, v3arm, v3s, v3loop, an193_ref/cube/q300/q100/az1/bound/clear, stations193, gate22_193, sub22, thk22 (the 22.5° bench with substrates and thicknesses), oapsens22, oapsens22n, vqw22, vmap22, oaploop22 (the sensors on the redesigned mirror rig).  README.md (CCL) and deck_zwfs.md.</a:t>
+              <a:t>•  Zernike sensors (zwfs_dm96/runs): matbase, matbase385, m2048, m2048_lat, cap385, cap385_b60-b160, noise193_b30-b160, rec193full, loop193, loop385, v193base, v193noise, vloop193, fold_diag, v2g, v2loop, v3arm, v3s, v3loop, an193_ref/cube/q300/q100/az1/bound/clear, stations193, gate22_193, sub22, thk22 (the 22.5° bench with substrates and thicknesses), oapsens22, oapsens22n, vqw22, vmap22, oaploop22, oapnoise22 (the sensors on the redesigned mirror rig).  README.md (CCL) and deck_zwfs.md.</a:t>
             </a:r>
           </a:p>
           <a:p>

--- a/demo_session/deck_gauges.pptx
+++ b/demo_session/deck_gauges.pptx
@@ -6459,7 +6459,7 @@
                 </a:solidFill>
                 <a:latin typeface="Arial"/>
               </a:rPr>
-              <a:t>•  3-8 The jobs; the bench and its parts</a:t>
+              <a:t>•  3 Introduction: the three jobs and how they are scored</a:t>
             </a:r>
           </a:p>
           <a:p>
@@ -6475,7 +6475,7 @@
                 </a:solidFill>
                 <a:latin typeface="Arial"/>
               </a:rPr>
-              <a:t>•  9-19 The four approaches: interferometer, Zernike, vector Zernike, pinhole</a:t>
+              <a:t>•  4 The bench layout</a:t>
             </a:r>
           </a:p>
           <a:p>
@@ -6491,7 +6491,7 @@
                 </a:solidFill>
                 <a:latin typeface="Arial"/>
               </a:rPr>
-              <a:t>•  20-25 Performance on the working surface: rows, capture, photons, servo</a:t>
+              <a:t>•  6 Parts</a:t>
             </a:r>
           </a:p>
           <a:p>
@@ -6507,7 +6507,71 @@
                 </a:solidFill>
                 <a:latin typeface="Arial"/>
               </a:rPr>
-              <a:t>•  26-28 Lenses or off-axis mirrors</a:t>
+              <a:t>•  9 Twyman-Green interferometer</a:t>
+            </a:r>
+          </a:p>
+          <a:p>
+            <a:pPr>
+              <a:spcAft>
+                <a:spcPts val="600"/>
+              </a:spcAft>
+            </a:pPr>
+            <a:r>
+              <a:rPr sz="1200" b="0">
+                <a:solidFill>
+                  <a:srgbClr val="282828"/>
+                </a:solidFill>
+                <a:latin typeface="Arial"/>
+              </a:rPr>
+              <a:t>•  12 Zernike sensor</a:t>
+            </a:r>
+          </a:p>
+          <a:p>
+            <a:pPr>
+              <a:spcAft>
+                <a:spcPts val="600"/>
+              </a:spcAft>
+            </a:pPr>
+            <a:r>
+              <a:rPr sz="1200" b="0">
+                <a:solidFill>
+                  <a:srgbClr val="282828"/>
+                </a:solidFill>
+                <a:latin typeface="Arial"/>
+              </a:rPr>
+              <a:t>•  14 Vector Zernike sensor</a:t>
+            </a:r>
+          </a:p>
+          <a:p>
+            <a:pPr>
+              <a:spcAft>
+                <a:spcPts val="600"/>
+              </a:spcAft>
+            </a:pPr>
+            <a:r>
+              <a:rPr sz="1200" b="0">
+                <a:solidFill>
+                  <a:srgbClr val="282828"/>
+                </a:solidFill>
+                <a:latin typeface="Arial"/>
+              </a:rPr>
+              <a:t>•  17 Point-diffraction sensor</a:t>
+            </a:r>
+          </a:p>
+          <a:p>
+            <a:pPr>
+              <a:spcAft>
+                <a:spcPts val="600"/>
+              </a:spcAft>
+            </a:pPr>
+            <a:r>
+              <a:rPr sz="1200" b="0">
+                <a:solidFill>
+                  <a:srgbClr val="282828"/>
+                </a:solidFill>
+                <a:latin typeface="Arial"/>
+              </a:rPr>
+              <a:t>•  20 Performance: rows, capture, photons, servo</a:t>
             </a:r>
           </a:p>
         </p:txBody>
@@ -6546,7 +6610,7 @@
                 </a:solidFill>
                 <a:latin typeface="Arial"/>
               </a:rPr>
-              <a:t>•  29-30 Systematics; recommendation</a:t>
+              <a:t>•  26 Lenses versus off-axis parabolas</a:t>
             </a:r>
           </a:p>
           <a:p>
@@ -6562,7 +6626,7 @@
                 </a:solidFill>
                 <a:latin typeface="Arial"/>
               </a:rPr>
-              <a:t>•  31-33 Operating the gauge</a:t>
+              <a:t>•  27 The reflective front end and its performance</a:t>
             </a:r>
           </a:p>
           <a:p>
@@ -6578,7 +6642,7 @@
                 </a:solidFill>
                 <a:latin typeface="Arial"/>
               </a:rPr>
-              <a:t>•  34-36 Future work</a:t>
+              <a:t>•  29 Comparison and recommendation</a:t>
             </a:r>
           </a:p>
           <a:p>
@@ -6594,7 +6658,7 @@
                 </a:solidFill>
                 <a:latin typeface="Arial"/>
               </a:rPr>
-              <a:t>•  37-38 Method; run it yourself</a:t>
+              <a:t>•  32 Complex amplitude</a:t>
             </a:r>
           </a:p>
           <a:p>
@@ -6610,7 +6674,39 @@
                 </a:solidFill>
                 <a:latin typeface="Arial"/>
               </a:rPr>
-              <a:t>•  39-48 Backup</a:t>
+              <a:t>•  33 Summary and future work</a:t>
+            </a:r>
+          </a:p>
+          <a:p>
+            <a:pPr>
+              <a:spcAft>
+                <a:spcPts val="600"/>
+              </a:spcAft>
+            </a:pPr>
+            <a:r>
+              <a:rPr sz="1200" b="0">
+                <a:solidFill>
+                  <a:srgbClr val="282828"/>
+                </a:solidFill>
+                <a:latin typeface="Arial"/>
+              </a:rPr>
+              <a:t>•  38 Run it yourself</a:t>
+            </a:r>
+          </a:p>
+          <a:p>
+            <a:pPr>
+              <a:spcAft>
+                <a:spcPts val="600"/>
+              </a:spcAft>
+            </a:pPr>
+            <a:r>
+              <a:rPr sz="1200" b="0">
+                <a:solidFill>
+                  <a:srgbClr val="282828"/>
+                </a:solidFill>
+                <a:latin typeface="Arial"/>
+              </a:rPr>
+              <a:t>•  39 Backup</a:t>
             </a:r>
           </a:p>
         </p:txBody>

--- a/demo_session/deck_gauges.pptx
+++ b/demo_session/deck_gauges.pptx
@@ -53,6 +53,7 @@
     <p:sldId id="301" r:id="rId52"/>
     <p:sldId id="302" r:id="rId53"/>
     <p:sldId id="303" r:id="rId54"/>
+    <p:sldId id="304" r:id="rId55"/>
   </p:sldIdLst>
   <p:sldSz cx="12191695" cy="6858000" type="screen4x3"/>
   <p:notesSz cx="6858000" cy="9144000"/>
@@ -3791,6 +3792,647 @@
                 </a:solidFill>
                 <a:latin typeface="Arial"/>
               </a:rPr>
+              <a:t>Interferometer: pupil image quality</a:t>
+            </a:r>
+          </a:p>
+          <a:p>
+            <a:pPr>
+              <a:spcAft>
+                <a:spcPts val="0"/>
+              </a:spcAft>
+            </a:pPr>
+            <a:r>
+              <a:rPr sz="1250" b="0">
+                <a:solidFill>
+                  <a:srgbClr val="6E6E6E"/>
+                </a:solidFill>
+                <a:latin typeface="Arial"/>
+              </a:rPr>
+              <a:t>The camera sees the DM sharply on both front ends; against a single global mapping the image is distorted by a third of a pitch at the edge on lenses and most of a pitch on mirrors, which the measured response matrix absorbs and a geometric mapping would not</a:t>
+            </a:r>
+          </a:p>
+        </p:txBody>
+      </p:sp>
+      <p:sp>
+        <p:nvSpPr>
+          <p:cNvPr id="3" name="Rectangle 2"/>
+          <p:cNvSpPr/>
+          <p:nvPr/>
+        </p:nvSpPr>
+        <p:spPr>
+          <a:xfrm>
+            <a:off x="411480" y="1133856"/>
+            <a:ext cx="11368735" cy="20320"/>
+          </a:xfrm>
+          <a:prstGeom prst="rect">
+            <a:avLst/>
+          </a:prstGeom>
+          <a:solidFill>
+            <a:srgbClr val="B8C6D4"/>
+          </a:solidFill>
+          <a:ln>
+            <a:noFill/>
+          </a:ln>
+          <a:effectLst/>
+        </p:spPr>
+        <p:style>
+          <a:lnRef idx="1">
+            <a:schemeClr val="accent1"/>
+          </a:lnRef>
+          <a:fillRef idx="3">
+            <a:schemeClr val="accent1"/>
+          </a:fillRef>
+          <a:effectRef idx="2">
+            <a:schemeClr val="accent1"/>
+          </a:effectRef>
+          <a:fontRef idx="minor">
+            <a:schemeClr val="lt1"/>
+          </a:fontRef>
+        </p:style>
+        <p:txBody>
+          <a:bodyPr rtlCol="0" anchor="ctr"/>
+          <a:lstStyle/>
+          <a:p>
+            <a:pPr algn="ctr"/>
+          </a:p>
+        </p:txBody>
+      </p:sp>
+      <p:pic>
+        <p:nvPicPr>
+          <p:cNvPr id="4" name="Picture 3" descr="pupilq_lens_pupil.png"/>
+          <p:cNvPicPr>
+            <a:picLocks noChangeAspect="1"/>
+          </p:cNvPicPr>
+          <p:nvPr/>
+        </p:nvPicPr>
+        <p:blipFill>
+          <a:blip r:embed="rId2"/>
+          <a:stretch>
+            <a:fillRect/>
+          </a:stretch>
+        </p:blipFill>
+        <p:spPr>
+          <a:xfrm>
+            <a:off x="1366701" y="1298448"/>
+            <a:ext cx="3895997" cy="1818132"/>
+          </a:xfrm>
+          <a:prstGeom prst="rect">
+            <a:avLst/>
+          </a:prstGeom>
+        </p:spPr>
+      </p:pic>
+      <p:sp>
+        <p:nvSpPr>
+          <p:cNvPr id="5" name="TextBox 4"/>
+          <p:cNvSpPr txBox="1"/>
+          <p:nvPr/>
+        </p:nvSpPr>
+        <p:spPr>
+          <a:xfrm>
+            <a:off x="411480" y="3134868"/>
+            <a:ext cx="5806440" cy="559307"/>
+          </a:xfrm>
+          <a:prstGeom prst="rect">
+            <a:avLst/>
+          </a:prstGeom>
+          <a:noFill/>
+        </p:spPr>
+        <p:txBody>
+          <a:bodyPr wrap="square">
+            <a:spAutoFit/>
+          </a:bodyPr>
+          <a:lstStyle/>
+          <a:p>
+            <a:pPr algn="ctr">
+              <a:spcAft>
+                <a:spcPts val="0"/>
+              </a:spcAft>
+            </a:pPr>
+            <a:r>
+              <a:rPr sz="1000" b="0">
+                <a:solidFill>
+                  <a:srgbClr val="6E6E6E"/>
+                </a:solidFill>
+                <a:latin typeface="Arial"/>
+              </a:rPr>
+              <a:t>The DM's image at the camera on the lens rig, the DM as the stop: left, distortion against the global affine (arrows ×3, DM mm); right, the blur of each zone's image over the band of tilts the DM can make.  The runner's own figure.</a:t>
+            </a:r>
+          </a:p>
+        </p:txBody>
+      </p:sp>
+      <p:graphicFrame>
+        <p:nvGraphicFramePr>
+          <p:cNvPr id="6" name="Table 5"/>
+          <p:cNvGraphicFramePr>
+            <a:graphicFrameLocks noGrp="1"/>
+          </p:cNvGraphicFramePr>
+          <p:nvPr/>
+        </p:nvGraphicFramePr>
+        <p:xfrm>
+          <a:off x="6400800" y="1298448"/>
+          <a:ext cx="5394958" cy="1314450"/>
+        </p:xfrm>
+        <a:graphic>
+          <a:graphicData uri="http://schemas.openxmlformats.org/drawingml/2006/table">
+            <a:tbl>
+              <a:tblPr firstRow="1" bandRow="1">
+                <a:tableStyleId>{5C22544A-7EE6-4342-B048-85BDC9FD1C3A}</a:tableStyleId>
+              </a:tblPr>
+              <a:tblGrid>
+                <a:gridCol w="3159202"/>
+                <a:gridCol w="1098853"/>
+                <a:gridCol w="1136903"/>
+              </a:tblGrid>
+              <a:tr h="262890">
+                <a:tc>
+                  <a:txBody>
+                    <a:bodyPr wrap="square"/>
+                    <a:lstStyle/>
+                    <a:p>
+                      <a:r>
+                        <a:rPr sz="1000" b="1">
+                          <a:solidFill>
+                            <a:srgbClr val="FFFFFF"/>
+                          </a:solidFill>
+                          <a:latin typeface="Arial"/>
+                        </a:rPr>
+                        <a:t>DM mm unless stated</a:t>
+                      </a:r>
+                    </a:p>
+                  </a:txBody>
+                  <a:tcPr marL="54864" marR="54864" marT="18288" marB="18288">
+                    <a:solidFill>
+                      <a:srgbClr val="1F4E79"/>
+                    </a:solidFill>
+                  </a:tcPr>
+                </a:tc>
+                <a:tc>
+                  <a:txBody>
+                    <a:bodyPr wrap="square"/>
+                    <a:lstStyle/>
+                    <a:p>
+                      <a:r>
+                        <a:rPr sz="1000" b="1">
+                          <a:solidFill>
+                            <a:srgbClr val="FFFFFF"/>
+                          </a:solidFill>
+                          <a:latin typeface="Arial"/>
+                        </a:rPr>
+                        <a:t>lens rig</a:t>
+                      </a:r>
+                    </a:p>
+                  </a:txBody>
+                  <a:tcPr marL="54864" marR="54864" marT="18288" marB="18288">
+                    <a:solidFill>
+                      <a:srgbClr val="1F4E79"/>
+                    </a:solidFill>
+                  </a:tcPr>
+                </a:tc>
+                <a:tc>
+                  <a:txBody>
+                    <a:bodyPr wrap="square"/>
+                    <a:lstStyle/>
+                    <a:p>
+                      <a:r>
+                        <a:rPr sz="1000" b="1">
+                          <a:solidFill>
+                            <a:srgbClr val="FFFFFF"/>
+                          </a:solidFill>
+                          <a:latin typeface="Arial"/>
+                        </a:rPr>
+                        <a:t>mirror rig</a:t>
+                      </a:r>
+                    </a:p>
+                  </a:txBody>
+                  <a:tcPr marL="54864" marR="54864" marT="18288" marB="18288">
+                    <a:solidFill>
+                      <a:srgbClr val="1F4E79"/>
+                    </a:solidFill>
+                  </a:tcPr>
+                </a:tc>
+              </a:tr>
+              <a:tr h="262890">
+                <a:tc>
+                  <a:txBody>
+                    <a:bodyPr wrap="square"/>
+                    <a:lstStyle/>
+                    <a:p>
+                      <a:r>
+                        <a:rPr sz="1000" b="0">
+                          <a:solidFill>
+                            <a:srgbClr val="282828"/>
+                          </a:solidFill>
+                          <a:latin typeface="Arial"/>
+                        </a:rPr>
+                        <a:t>distortion vs one affine: rms / edge</a:t>
+                      </a:r>
+                    </a:p>
+                  </a:txBody>
+                  <a:tcPr marL="54864" marR="54864" marT="18288" marB="18288">
+                    <a:solidFill>
+                      <a:srgbClr val="FFFFFF"/>
+                    </a:solidFill>
+                  </a:tcPr>
+                </a:tc>
+                <a:tc>
+                  <a:txBody>
+                    <a:bodyPr wrap="square"/>
+                    <a:lstStyle/>
+                    <a:p>
+                      <a:r>
+                        <a:rPr sz="1000" b="0">
+                          <a:solidFill>
+                            <a:srgbClr val="282828"/>
+                          </a:solidFill>
+                          <a:latin typeface="Arial"/>
+                        </a:rPr>
+                        <a:t>0.13 / 0.30</a:t>
+                      </a:r>
+                    </a:p>
+                  </a:txBody>
+                  <a:tcPr marL="54864" marR="54864" marT="18288" marB="18288">
+                    <a:solidFill>
+                      <a:srgbClr val="FFFFFF"/>
+                    </a:solidFill>
+                  </a:tcPr>
+                </a:tc>
+                <a:tc>
+                  <a:txBody>
+                    <a:bodyPr wrap="square"/>
+                    <a:lstStyle/>
+                    <a:p>
+                      <a:r>
+                        <a:rPr sz="1000" b="0">
+                          <a:solidFill>
+                            <a:srgbClr val="282828"/>
+                          </a:solidFill>
+                          <a:latin typeface="Arial"/>
+                        </a:rPr>
+                        <a:t>0.45 / 0.85</a:t>
+                      </a:r>
+                    </a:p>
+                  </a:txBody>
+                  <a:tcPr marL="54864" marR="54864" marT="18288" marB="18288">
+                    <a:solidFill>
+                      <a:srgbClr val="FFFFFF"/>
+                    </a:solidFill>
+                  </a:tcPr>
+                </a:tc>
+              </a:tr>
+              <a:tr h="262890">
+                <a:tc>
+                  <a:txBody>
+                    <a:bodyPr wrap="square"/>
+                    <a:lstStyle/>
+                    <a:p>
+                      <a:r>
+                        <a:rPr sz="1000" b="0">
+                          <a:solidFill>
+                            <a:srgbClr val="282828"/>
+                          </a:solidFill>
+                          <a:latin typeface="Arial"/>
+                        </a:rPr>
+                        <a:t>blur over the actuator band: rms / max</a:t>
+                      </a:r>
+                    </a:p>
+                  </a:txBody>
+                  <a:tcPr marL="54864" marR="54864" marT="18288" marB="18288">
+                    <a:solidFill>
+                      <a:srgbClr val="ECF1F6"/>
+                    </a:solidFill>
+                  </a:tcPr>
+                </a:tc>
+                <a:tc>
+                  <a:txBody>
+                    <a:bodyPr wrap="square"/>
+                    <a:lstStyle/>
+                    <a:p>
+                      <a:r>
+                        <a:rPr sz="1000" b="0">
+                          <a:solidFill>
+                            <a:srgbClr val="282828"/>
+                          </a:solidFill>
+                          <a:latin typeface="Arial"/>
+                        </a:rPr>
+                        <a:t>0.023 / 0.060</a:t>
+                      </a:r>
+                    </a:p>
+                  </a:txBody>
+                  <a:tcPr marL="54864" marR="54864" marT="18288" marB="18288">
+                    <a:solidFill>
+                      <a:srgbClr val="ECF1F6"/>
+                    </a:solidFill>
+                  </a:tcPr>
+                </a:tc>
+                <a:tc>
+                  <a:txBody>
+                    <a:bodyPr wrap="square"/>
+                    <a:lstStyle/>
+                    <a:p>
+                      <a:r>
+                        <a:rPr sz="1000" b="0">
+                          <a:solidFill>
+                            <a:srgbClr val="282828"/>
+                          </a:solidFill>
+                          <a:latin typeface="Arial"/>
+                        </a:rPr>
+                        <a:t>0.032 / 0.093</a:t>
+                      </a:r>
+                    </a:p>
+                  </a:txBody>
+                  <a:tcPr marL="54864" marR="54864" marT="18288" marB="18288">
+                    <a:solidFill>
+                      <a:srgbClr val="ECF1F6"/>
+                    </a:solidFill>
+                  </a:tcPr>
+                </a:tc>
+              </a:tr>
+              <a:tr h="262890">
+                <a:tc>
+                  <a:txBody>
+                    <a:bodyPr wrap="square"/>
+                    <a:lstStyle/>
+                    <a:p>
+                      <a:r>
+                        <a:rPr sz="1000" b="0">
+                          <a:solidFill>
+                            <a:srgbClr val="282828"/>
+                          </a:solidFill>
+                          <a:latin typeface="Arial"/>
+                        </a:rPr>
+                        <a:t>image surface: defocus / tilt (mm of sag)</a:t>
+                      </a:r>
+                    </a:p>
+                  </a:txBody>
+                  <a:tcPr marL="54864" marR="54864" marT="18288" marB="18288">
+                    <a:solidFill>
+                      <a:srgbClr val="FFFFFF"/>
+                    </a:solidFill>
+                  </a:tcPr>
+                </a:tc>
+                <a:tc>
+                  <a:txBody>
+                    <a:bodyPr wrap="square"/>
+                    <a:lstStyle/>
+                    <a:p>
+                      <a:r>
+                        <a:rPr sz="1000" b="0">
+                          <a:solidFill>
+                            <a:srgbClr val="282828"/>
+                          </a:solidFill>
+                          <a:latin typeface="Arial"/>
+                        </a:rPr>
+                        <a:t>3.8 / 0.0</a:t>
+                      </a:r>
+                    </a:p>
+                  </a:txBody>
+                  <a:tcPr marL="54864" marR="54864" marT="18288" marB="18288">
+                    <a:solidFill>
+                      <a:srgbClr val="FFFFFF"/>
+                    </a:solidFill>
+                  </a:tcPr>
+                </a:tc>
+                <a:tc>
+                  <a:txBody>
+                    <a:bodyPr wrap="square"/>
+                    <a:lstStyle/>
+                    <a:p>
+                      <a:r>
+                        <a:rPr sz="1000" b="0">
+                          <a:solidFill>
+                            <a:srgbClr val="282828"/>
+                          </a:solidFill>
+                          <a:latin typeface="Arial"/>
+                        </a:rPr>
+                        <a:t>-0.5 / 0.45</a:t>
+                      </a:r>
+                    </a:p>
+                  </a:txBody>
+                  <a:tcPr marL="54864" marR="54864" marT="18288" marB="18288">
+                    <a:solidFill>
+                      <a:srgbClr val="FFFFFF"/>
+                    </a:solidFill>
+                  </a:tcPr>
+                </a:tc>
+              </a:tr>
+              <a:tr h="262890">
+                <a:tc>
+                  <a:txBody>
+                    <a:bodyPr wrap="square"/>
+                    <a:lstStyle/>
+                    <a:p>
+                      <a:r>
+                        <a:rPr sz="1000" b="0">
+                          <a:solidFill>
+                            <a:srgbClr val="282828"/>
+                          </a:solidFill>
+                          <a:latin typeface="Arial"/>
+                        </a:rPr>
+                        <a:t>focal spot on axis / at the actuator-band tilt</a:t>
+                      </a:r>
+                    </a:p>
+                  </a:txBody>
+                  <a:tcPr marL="54864" marR="54864" marT="18288" marB="18288">
+                    <a:solidFill>
+                      <a:srgbClr val="ECF1F6"/>
+                    </a:solidFill>
+                  </a:tcPr>
+                </a:tc>
+                <a:tc>
+                  <a:txBody>
+                    <a:bodyPr wrap="square"/>
+                    <a:lstStyle/>
+                    <a:p>
+                      <a:r>
+                        <a:rPr sz="1000" b="0">
+                          <a:solidFill>
+                            <a:srgbClr val="282828"/>
+                          </a:solidFill>
+                          <a:latin typeface="Arial"/>
+                        </a:rPr>
+                        <a:t>0.16 / 0.16 λF/D</a:t>
+                      </a:r>
+                    </a:p>
+                  </a:txBody>
+                  <a:tcPr marL="54864" marR="54864" marT="18288" marB="18288">
+                    <a:solidFill>
+                      <a:srgbClr val="ECF1F6"/>
+                    </a:solidFill>
+                  </a:tcPr>
+                </a:tc>
+                <a:tc>
+                  <a:txBody>
+                    <a:bodyPr wrap="square"/>
+                    <a:lstStyle/>
+                    <a:p>
+                      <a:r>
+                        <a:rPr sz="1000" b="0">
+                          <a:solidFill>
+                            <a:srgbClr val="282828"/>
+                          </a:solidFill>
+                          <a:latin typeface="Arial"/>
+                        </a:rPr>
+                        <a:t>0.00 / 2.3 λF/D</a:t>
+                      </a:r>
+                    </a:p>
+                  </a:txBody>
+                  <a:tcPr marL="54864" marR="54864" marT="18288" marB="18288">
+                    <a:solidFill>
+                      <a:srgbClr val="ECF1F6"/>
+                    </a:solidFill>
+                  </a:tcPr>
+                </a:tc>
+              </a:tr>
+            </a:tbl>
+          </a:graphicData>
+        </a:graphic>
+      </p:graphicFrame>
+      <p:sp>
+        <p:nvSpPr>
+          <p:cNvPr id="7" name="TextBox 6"/>
+          <p:cNvSpPr txBox="1"/>
+          <p:nvPr/>
+        </p:nvSpPr>
+        <p:spPr>
+          <a:xfrm>
+            <a:off x="6400800" y="2759202"/>
+            <a:ext cx="5394960" cy="274320"/>
+          </a:xfrm>
+          <a:prstGeom prst="rect">
+            <a:avLst/>
+          </a:prstGeom>
+          <a:noFill/>
+        </p:spPr>
+        <p:txBody>
+          <a:bodyPr wrap="square">
+            <a:spAutoFit/>
+          </a:bodyPr>
+          <a:lstStyle/>
+          <a:p>
+            <a:pPr>
+              <a:spcAft>
+                <a:spcPts val="600"/>
+              </a:spcAft>
+            </a:pPr>
+            <a:r>
+              <a:rPr sz="1200" b="0">
+                <a:solidFill>
+                  <a:srgbClr val="282828"/>
+                </a:solidFill>
+                <a:latin typeface="Arial"/>
+              </a:rPr>
+              <a:t>•  Method: the DM declared the stop; the field a tilt about it (a spatial frequency on its surface); two traces a small field step apart cross at each zone's image at the camera; scored in DM millimeters against the 1 mm pitch and the 0.4 mm pixel.</a:t>
+            </a:r>
+          </a:p>
+          <a:p>
+            <a:pPr>
+              <a:spcAft>
+                <a:spcPts val="600"/>
+              </a:spcAft>
+            </a:pPr>
+            <a:r>
+              <a:rPr sz="1200" b="0">
+                <a:solidFill>
+                  <a:srgbClr val="282828"/>
+                </a:solidFill>
+                <a:latin typeface="Arial"/>
+              </a:rPr>
+              <a:t>•  The mirror rig's focus is perfect on axis and coma-limited off it (2.3 λF/D at the actuator-band tilt); not a pupil-image or mask-sensor cost, a number to know for any off-axis reading at the seat.</a:t>
+            </a:r>
+          </a:p>
+        </p:txBody>
+      </p:sp>
+      <p:sp>
+        <p:nvSpPr>
+          <p:cNvPr id="8" name="TextBox 7"/>
+          <p:cNvSpPr txBox="1"/>
+          <p:nvPr/>
+        </p:nvSpPr>
+        <p:spPr>
+          <a:xfrm>
+            <a:off x="6400800" y="4463034"/>
+            <a:ext cx="5394960" cy="274320"/>
+          </a:xfrm>
+          <a:prstGeom prst="rect">
+            <a:avLst/>
+          </a:prstGeom>
+          <a:noFill/>
+        </p:spPr>
+        <p:txBody>
+          <a:bodyPr wrap="square">
+            <a:spAutoFit/>
+          </a:bodyPr>
+          <a:lstStyle/>
+          <a:p>
+            <a:pPr>
+              <a:spcAft>
+                <a:spcPts val="600"/>
+              </a:spcAft>
+            </a:pPr>
+            <a:r>
+              <a:rPr sz="1050" b="0">
+                <a:solidFill>
+                  <a:srgbClr val="6E6E6E"/>
+                </a:solidFill>
+                <a:latin typeface="Arial"/>
+              </a:rPr>
+              <a:t>Run tags pupilq_lens, pupilq_oap (tg96_pupilq, model 512); tg_psi_dm96_oap/REPORT_bench_realism.md section 6.  Requested by Fang Shi.</a:t>
+            </a:r>
+          </a:p>
+        </p:txBody>
+      </p:sp>
+    </p:spTree>
+  </p:cSld>
+  <p:clrMapOvr>
+    <a:masterClrMapping/>
+  </p:clrMapOvr>
+</p:sld>
+</file>
+
+<file path=ppt/slides/slide13.xml><?xml version="1.0" encoding="utf-8"?>
+<p:sld xmlns:a="http://schemas.openxmlformats.org/drawingml/2006/main" xmlns:p="http://schemas.openxmlformats.org/presentationml/2006/main" xmlns:r="http://schemas.openxmlformats.org/officeDocument/2006/relationships">
+  <p:cSld>
+    <p:spTree>
+      <p:nvGrpSpPr>
+        <p:cNvPr id="1" name=""/>
+        <p:cNvGrpSpPr/>
+        <p:nvPr/>
+      </p:nvGrpSpPr>
+      <p:grpSpPr/>
+      <p:sp>
+        <p:nvSpPr>
+          <p:cNvPr id="2" name="TextBox 1"/>
+          <p:cNvSpPr txBox="1"/>
+          <p:nvPr/>
+        </p:nvSpPr>
+        <p:spPr>
+          <a:xfrm>
+            <a:off x="411480" y="201168"/>
+            <a:ext cx="11368735" cy="914400"/>
+          </a:xfrm>
+          <a:prstGeom prst="rect">
+            <a:avLst/>
+          </a:prstGeom>
+          <a:noFill/>
+        </p:spPr>
+        <p:txBody>
+          <a:bodyPr wrap="square">
+            <a:spAutoFit/>
+          </a:bodyPr>
+          <a:lstStyle/>
+          <a:p>
+            <a:pPr>
+              <a:spcAft>
+                <a:spcPts val="400"/>
+              </a:spcAft>
+            </a:pPr>
+            <a:r>
+              <a:rPr sz="2400" b="1">
+                <a:solidFill>
+                  <a:srgbClr val="1F4E79"/>
+                </a:solidFill>
+                <a:latin typeface="Arial"/>
+              </a:rPr>
               <a:t>Zernike sensor: a quarter-wave dimple at the focus</a:t>
             </a:r>
           </a:p>
@@ -4037,7 +4679,7 @@
 </p:sld>
 </file>
 
-<file path=ppt/slides/slide13.xml><?xml version="1.0" encoding="utf-8"?>
+<file path=ppt/slides/slide14.xml><?xml version="1.0" encoding="utf-8"?>
 <p:sld xmlns:a="http://schemas.openxmlformats.org/drawingml/2006/main" xmlns:p="http://schemas.openxmlformats.org/presentationml/2006/main" xmlns:r="http://schemas.openxmlformats.org/officeDocument/2006/relationships">
   <p:cSld>
     <p:spTree>
@@ -4295,7 +4937,7 @@
 </p:sld>
 </file>
 
-<file path=ppt/slides/slide14.xml><?xml version="1.0" encoding="utf-8"?>
+<file path=ppt/slides/slide15.xml><?xml version="1.0" encoding="utf-8"?>
 <p:sld xmlns:a="http://schemas.openxmlformats.org/drawingml/2006/main" xmlns:p="http://schemas.openxmlformats.org/presentationml/2006/main" xmlns:r="http://schemas.openxmlformats.org/officeDocument/2006/relationships">
   <p:cSld>
     <p:spTree>
@@ -4824,7 +5466,7 @@
 </p:sld>
 </file>
 
-<file path=ppt/slides/slide15.xml><?xml version="1.0" encoding="utf-8"?>
+<file path=ppt/slides/slide16.xml><?xml version="1.0" encoding="utf-8"?>
 <p:sld xmlns:a="http://schemas.openxmlformats.org/drawingml/2006/main" xmlns:p="http://schemas.openxmlformats.org/presentationml/2006/main" xmlns:r="http://schemas.openxmlformats.org/officeDocument/2006/relationships">
   <p:cSld>
     <p:spTree>
@@ -5082,7 +5724,7 @@
 </p:sld>
 </file>
 
-<file path=ppt/slides/slide16.xml><?xml version="1.0" encoding="utf-8"?>
+<file path=ppt/slides/slide17.xml><?xml version="1.0" encoding="utf-8"?>
 <p:sld xmlns:a="http://schemas.openxmlformats.org/drawingml/2006/main" xmlns:p="http://schemas.openxmlformats.org/presentationml/2006/main" xmlns:r="http://schemas.openxmlformats.org/officeDocument/2006/relationships">
   <p:cSld>
     <p:spTree>
@@ -5340,7 +5982,7 @@
 </p:sld>
 </file>
 
-<file path=ppt/slides/slide17.xml><?xml version="1.0" encoding="utf-8"?>
+<file path=ppt/slides/slide18.xml><?xml version="1.0" encoding="utf-8"?>
 <p:sld xmlns:a="http://schemas.openxmlformats.org/drawingml/2006/main" xmlns:p="http://schemas.openxmlformats.org/presentationml/2006/main" xmlns:r="http://schemas.openxmlformats.org/officeDocument/2006/relationships">
   <p:cSld>
     <p:spTree>
@@ -5839,7 +6481,7 @@
 </p:sld>
 </file>
 
-<file path=ppt/slides/slide18.xml><?xml version="1.0" encoding="utf-8"?>
+<file path=ppt/slides/slide19.xml><?xml version="1.0" encoding="utf-8"?>
 <p:sld xmlns:a="http://schemas.openxmlformats.org/drawingml/2006/main" xmlns:p="http://schemas.openxmlformats.org/presentationml/2006/main" xmlns:r="http://schemas.openxmlformats.org/officeDocument/2006/relationships">
   <p:cSld>
     <p:spTree>
@@ -6058,7 +6700,410 @@
 </p:sld>
 </file>
 
-<file path=ppt/slides/slide19.xml><?xml version="1.0" encoding="utf-8"?>
+<file path=ppt/slides/slide2.xml><?xml version="1.0" encoding="utf-8"?>
+<p:sld xmlns:a="http://schemas.openxmlformats.org/drawingml/2006/main" xmlns:p="http://schemas.openxmlformats.org/presentationml/2006/main" xmlns:r="http://schemas.openxmlformats.org/officeDocument/2006/relationships">
+  <p:cSld>
+    <p:spTree>
+      <p:nvGrpSpPr>
+        <p:cNvPr id="1" name=""/>
+        <p:cNvGrpSpPr/>
+        <p:nvPr/>
+      </p:nvGrpSpPr>
+      <p:grpSpPr/>
+      <p:sp>
+        <p:nvSpPr>
+          <p:cNvPr id="2" name="TextBox 1"/>
+          <p:cNvSpPr txBox="1"/>
+          <p:nvPr/>
+        </p:nvSpPr>
+        <p:spPr>
+          <a:xfrm>
+            <a:off x="411480" y="201168"/>
+            <a:ext cx="11368735" cy="914400"/>
+          </a:xfrm>
+          <a:prstGeom prst="rect">
+            <a:avLst/>
+          </a:prstGeom>
+          <a:noFill/>
+        </p:spPr>
+        <p:txBody>
+          <a:bodyPr wrap="square">
+            <a:spAutoFit/>
+          </a:bodyPr>
+          <a:lstStyle/>
+          <a:p>
+            <a:pPr>
+              <a:spcAft>
+                <a:spcPts val="400"/>
+              </a:spcAft>
+            </a:pPr>
+            <a:r>
+              <a:rPr sz="2400" b="1">
+                <a:solidFill>
+                  <a:srgbClr val="1F4E79"/>
+                </a:solidFill>
+                <a:latin typeface="Arial"/>
+              </a:rPr>
+              <a:t>Contents</a:t>
+            </a:r>
+          </a:p>
+          <a:p>
+            <a:pPr>
+              <a:spcAft>
+                <a:spcPts val="0"/>
+              </a:spcAft>
+            </a:pPr>
+            <a:r>
+              <a:rPr sz="1250" b="0">
+                <a:solidFill>
+                  <a:srgbClr val="6E6E6E"/>
+                </a:solidFill>
+                <a:latin typeface="Arial"/>
+              </a:rPr>
+              <a:t>Three jobs, one bench, four ways of sensing</a:t>
+            </a:r>
+          </a:p>
+        </p:txBody>
+      </p:sp>
+      <p:sp>
+        <p:nvSpPr>
+          <p:cNvPr id="3" name="Rectangle 2"/>
+          <p:cNvSpPr/>
+          <p:nvPr/>
+        </p:nvSpPr>
+        <p:spPr>
+          <a:xfrm>
+            <a:off x="411480" y="1133856"/>
+            <a:ext cx="11368735" cy="20320"/>
+          </a:xfrm>
+          <a:prstGeom prst="rect">
+            <a:avLst/>
+          </a:prstGeom>
+          <a:solidFill>
+            <a:srgbClr val="B8C6D4"/>
+          </a:solidFill>
+          <a:ln>
+            <a:noFill/>
+          </a:ln>
+          <a:effectLst/>
+        </p:spPr>
+        <p:style>
+          <a:lnRef idx="1">
+            <a:schemeClr val="accent1"/>
+          </a:lnRef>
+          <a:fillRef idx="3">
+            <a:schemeClr val="accent1"/>
+          </a:fillRef>
+          <a:effectRef idx="2">
+            <a:schemeClr val="accent1"/>
+          </a:effectRef>
+          <a:fontRef idx="minor">
+            <a:schemeClr val="lt1"/>
+          </a:fontRef>
+        </p:style>
+        <p:txBody>
+          <a:bodyPr rtlCol="0" anchor="ctr"/>
+          <a:lstStyle/>
+          <a:p>
+            <a:pPr algn="ctr"/>
+          </a:p>
+        </p:txBody>
+      </p:sp>
+      <p:sp>
+        <p:nvSpPr>
+          <p:cNvPr id="4" name="TextBox 3"/>
+          <p:cNvSpPr txBox="1"/>
+          <p:nvPr/>
+        </p:nvSpPr>
+        <p:spPr>
+          <a:xfrm>
+            <a:off x="411480" y="1298448"/>
+            <a:ext cx="5806440" cy="274320"/>
+          </a:xfrm>
+          <a:prstGeom prst="rect">
+            <a:avLst/>
+          </a:prstGeom>
+          <a:noFill/>
+        </p:spPr>
+        <p:txBody>
+          <a:bodyPr wrap="square">
+            <a:spAutoFit/>
+          </a:bodyPr>
+          <a:lstStyle/>
+          <a:p>
+            <a:pPr>
+              <a:spcAft>
+                <a:spcPts val="600"/>
+              </a:spcAft>
+            </a:pPr>
+            <a:r>
+              <a:rPr sz="1200" b="0">
+                <a:solidFill>
+                  <a:srgbClr val="282828"/>
+                </a:solidFill>
+                <a:latin typeface="Arial"/>
+              </a:rPr>
+              <a:t>•  3 Introduction: the three jobs and how they are scored</a:t>
+            </a:r>
+          </a:p>
+          <a:p>
+            <a:pPr>
+              <a:spcAft>
+                <a:spcPts val="600"/>
+              </a:spcAft>
+            </a:pPr>
+            <a:r>
+              <a:rPr sz="1200" b="0">
+                <a:solidFill>
+                  <a:srgbClr val="282828"/>
+                </a:solidFill>
+                <a:latin typeface="Arial"/>
+              </a:rPr>
+              <a:t>•  4 The bench layout</a:t>
+            </a:r>
+          </a:p>
+          <a:p>
+            <a:pPr>
+              <a:spcAft>
+                <a:spcPts val="600"/>
+              </a:spcAft>
+            </a:pPr>
+            <a:r>
+              <a:rPr sz="1200" b="0">
+                <a:solidFill>
+                  <a:srgbClr val="282828"/>
+                </a:solidFill>
+                <a:latin typeface="Arial"/>
+              </a:rPr>
+              <a:t>•  6 Parts</a:t>
+            </a:r>
+          </a:p>
+          <a:p>
+            <a:pPr>
+              <a:spcAft>
+                <a:spcPts val="600"/>
+              </a:spcAft>
+            </a:pPr>
+            <a:r>
+              <a:rPr sz="1200" b="0">
+                <a:solidFill>
+                  <a:srgbClr val="282828"/>
+                </a:solidFill>
+                <a:latin typeface="Arial"/>
+              </a:rPr>
+              <a:t>•  9 Twyman-Green interferometer</a:t>
+            </a:r>
+          </a:p>
+          <a:p>
+            <a:pPr>
+              <a:spcAft>
+                <a:spcPts val="600"/>
+              </a:spcAft>
+            </a:pPr>
+            <a:r>
+              <a:rPr sz="1200" b="0">
+                <a:solidFill>
+                  <a:srgbClr val="282828"/>
+                </a:solidFill>
+                <a:latin typeface="Arial"/>
+              </a:rPr>
+              <a:t>•  13 Zernike sensor</a:t>
+            </a:r>
+          </a:p>
+          <a:p>
+            <a:pPr>
+              <a:spcAft>
+                <a:spcPts val="600"/>
+              </a:spcAft>
+            </a:pPr>
+            <a:r>
+              <a:rPr sz="1200" b="0">
+                <a:solidFill>
+                  <a:srgbClr val="282828"/>
+                </a:solidFill>
+                <a:latin typeface="Arial"/>
+              </a:rPr>
+              <a:t>•  15 Vector Zernike sensor</a:t>
+            </a:r>
+          </a:p>
+          <a:p>
+            <a:pPr>
+              <a:spcAft>
+                <a:spcPts val="600"/>
+              </a:spcAft>
+            </a:pPr>
+            <a:r>
+              <a:rPr sz="1200" b="0">
+                <a:solidFill>
+                  <a:srgbClr val="282828"/>
+                </a:solidFill>
+                <a:latin typeface="Arial"/>
+              </a:rPr>
+              <a:t>•  18 Point-diffraction sensor</a:t>
+            </a:r>
+          </a:p>
+          <a:p>
+            <a:pPr>
+              <a:spcAft>
+                <a:spcPts val="600"/>
+              </a:spcAft>
+            </a:pPr>
+            <a:r>
+              <a:rPr sz="1200" b="0">
+                <a:solidFill>
+                  <a:srgbClr val="282828"/>
+                </a:solidFill>
+                <a:latin typeface="Arial"/>
+              </a:rPr>
+              <a:t>•  21 Performance: rows, capture, photons, servo</a:t>
+            </a:r>
+          </a:p>
+        </p:txBody>
+      </p:sp>
+      <p:sp>
+        <p:nvSpPr>
+          <p:cNvPr id="5" name="TextBox 4"/>
+          <p:cNvSpPr txBox="1"/>
+          <p:nvPr/>
+        </p:nvSpPr>
+        <p:spPr>
+          <a:xfrm>
+            <a:off x="6400800" y="1298448"/>
+            <a:ext cx="5394960" cy="274320"/>
+          </a:xfrm>
+          <a:prstGeom prst="rect">
+            <a:avLst/>
+          </a:prstGeom>
+          <a:noFill/>
+        </p:spPr>
+        <p:txBody>
+          <a:bodyPr wrap="square">
+            <a:spAutoFit/>
+          </a:bodyPr>
+          <a:lstStyle/>
+          <a:p>
+            <a:pPr>
+              <a:spcAft>
+                <a:spcPts val="600"/>
+              </a:spcAft>
+            </a:pPr>
+            <a:r>
+              <a:rPr sz="1200" b="0">
+                <a:solidFill>
+                  <a:srgbClr val="282828"/>
+                </a:solidFill>
+                <a:latin typeface="Arial"/>
+              </a:rPr>
+              <a:t>•  27 Lenses versus off-axis parabolas</a:t>
+            </a:r>
+          </a:p>
+          <a:p>
+            <a:pPr>
+              <a:spcAft>
+                <a:spcPts val="600"/>
+              </a:spcAft>
+            </a:pPr>
+            <a:r>
+              <a:rPr sz="1200" b="0">
+                <a:solidFill>
+                  <a:srgbClr val="282828"/>
+                </a:solidFill>
+                <a:latin typeface="Arial"/>
+              </a:rPr>
+              <a:t>•  28 The reflective front end and its performance</a:t>
+            </a:r>
+          </a:p>
+          <a:p>
+            <a:pPr>
+              <a:spcAft>
+                <a:spcPts val="600"/>
+              </a:spcAft>
+            </a:pPr>
+            <a:r>
+              <a:rPr sz="1200" b="0">
+                <a:solidFill>
+                  <a:srgbClr val="282828"/>
+                </a:solidFill>
+                <a:latin typeface="Arial"/>
+              </a:rPr>
+              <a:t>•  30 Comparison and recommendation</a:t>
+            </a:r>
+          </a:p>
+          <a:p>
+            <a:pPr>
+              <a:spcAft>
+                <a:spcPts val="600"/>
+              </a:spcAft>
+            </a:pPr>
+            <a:r>
+              <a:rPr sz="1200" b="0">
+                <a:solidFill>
+                  <a:srgbClr val="282828"/>
+                </a:solidFill>
+                <a:latin typeface="Arial"/>
+              </a:rPr>
+              <a:t>•  33 Complex amplitude</a:t>
+            </a:r>
+          </a:p>
+          <a:p>
+            <a:pPr>
+              <a:spcAft>
+                <a:spcPts val="600"/>
+              </a:spcAft>
+            </a:pPr>
+            <a:r>
+              <a:rPr sz="1200" b="0">
+                <a:solidFill>
+                  <a:srgbClr val="282828"/>
+                </a:solidFill>
+                <a:latin typeface="Arial"/>
+              </a:rPr>
+              <a:t>•  34 Summary and future work</a:t>
+            </a:r>
+          </a:p>
+          <a:p>
+            <a:pPr>
+              <a:spcAft>
+                <a:spcPts val="600"/>
+              </a:spcAft>
+            </a:pPr>
+            <a:r>
+              <a:rPr sz="1200" b="0">
+                <a:solidFill>
+                  <a:srgbClr val="282828"/>
+                </a:solidFill>
+                <a:latin typeface="Arial"/>
+              </a:rPr>
+              <a:t>•  39 Run it yourself</a:t>
+            </a:r>
+          </a:p>
+          <a:p>
+            <a:pPr>
+              <a:spcAft>
+                <a:spcPts val="600"/>
+              </a:spcAft>
+            </a:pPr>
+            <a:r>
+              <a:rPr sz="1200" b="0">
+                <a:solidFill>
+                  <a:srgbClr val="282828"/>
+                </a:solidFill>
+                <a:latin typeface="Arial"/>
+              </a:rPr>
+              <a:t>•  40 Backup</a:t>
+            </a:r>
+          </a:p>
+        </p:txBody>
+      </p:sp>
+    </p:spTree>
+  </p:cSld>
+  <p:clrMapOvr>
+    <a:masterClrMapping/>
+  </p:clrMapOvr>
+</p:sld>
+</file>
+
+<file path=ppt/slides/slide20.xml><?xml version="1.0" encoding="utf-8"?>
 <p:sld xmlns:a="http://schemas.openxmlformats.org/drawingml/2006/main" xmlns:p="http://schemas.openxmlformats.org/presentationml/2006/main" xmlns:r="http://schemas.openxmlformats.org/officeDocument/2006/relationships">
   <p:cSld>
     <p:spTree>
@@ -6316,7 +7361,7 @@
 </p:sld>
 </file>
 
-<file path=ppt/slides/slide2.xml><?xml version="1.0" encoding="utf-8"?>
+<file path=ppt/slides/slide21.xml><?xml version="1.0" encoding="utf-8"?>
 <p:sld xmlns:a="http://schemas.openxmlformats.org/drawingml/2006/main" xmlns:p="http://schemas.openxmlformats.org/presentationml/2006/main" xmlns:r="http://schemas.openxmlformats.org/officeDocument/2006/relationships">
   <p:cSld>
     <p:spTree>
@@ -6360,7 +7405,7 @@
                 </a:solidFill>
                 <a:latin typeface="Arial"/>
               </a:rPr>
-              <a:t>Contents</a:t>
+              <a:t>Performance side by side</a:t>
             </a:r>
           </a:p>
           <a:p>
@@ -6376,7 +7421,7 @@
                 </a:solidFill>
                 <a:latin typeface="Arial"/>
               </a:rPr>
-              <a:t>Three jobs, one bench, four ways of sensing</a:t>
+              <a:t>Every reading on the same 30 nm working surface, the response matrix measured on it: the four best readings are within 1% of each other and within 2 pm on the floor</a:t>
             </a:r>
           </a:p>
         </p:txBody>
@@ -6425,16 +7470,854 @@
           </a:p>
         </p:txBody>
       </p:sp>
+      <p:graphicFrame>
+        <p:nvGraphicFramePr>
+          <p:cNvPr id="4" name="Table 3"/>
+          <p:cNvGraphicFramePr>
+            <a:graphicFrameLocks noGrp="1"/>
+          </p:cNvGraphicFramePr>
+          <p:nvPr/>
+        </p:nvGraphicFramePr>
+        <p:xfrm>
+          <a:off x="411480" y="1298448"/>
+          <a:ext cx="11368733" cy="2520315"/>
+        </p:xfrm>
+        <a:graphic>
+          <a:graphicData uri="http://schemas.openxmlformats.org/drawingml/2006/table">
+            <a:tbl>
+              <a:tblPr firstRow="1" bandRow="1">
+                <a:tableStyleId>{5C22544A-7EE6-4342-B048-85BDC9FD1C3A}</a:tableStyleId>
+              </a:tblPr>
+              <a:tblGrid>
+                <a:gridCol w="2694811"/>
+                <a:gridCol w="3452726"/>
+                <a:gridCol w="2526385"/>
+                <a:gridCol w="2694811"/>
+              </a:tblGrid>
+              <a:tr h="280035">
+                <a:tc>
+                  <a:txBody>
+                    <a:bodyPr wrap="square"/>
+                    <a:lstStyle/>
+                    <a:p>
+                      <a:r>
+                        <a:rPr sz="1100" b="1">
+                          <a:solidFill>
+                            <a:srgbClr val="FFFFFF"/>
+                          </a:solidFill>
+                          <a:latin typeface="Arial"/>
+                        </a:rPr>
+                        <a:t>reading (frames per measurement)</a:t>
+                      </a:r>
+                    </a:p>
+                  </a:txBody>
+                  <a:tcPr marL="54864" marR="54864" marT="18288" marB="18288">
+                    <a:solidFill>
+                      <a:srgbClr val="1F4E79"/>
+                    </a:solidFill>
+                  </a:tcPr>
+                </a:tc>
+                <a:tc>
+                  <a:txBody>
+                    <a:bodyPr wrap="square"/>
+                    <a:lstStyle/>
+                    <a:p>
+                      <a:r>
+                        <a:rPr sz="1100" b="1">
+                          <a:solidFill>
+                            <a:srgbClr val="FFFFFF"/>
+                          </a:solidFill>
+                          <a:latin typeface="Arial"/>
+                        </a:rPr>
+                        <a:t>10 nm on one actuator: gain / floor / SNR</a:t>
+                      </a:r>
+                    </a:p>
+                  </a:txBody>
+                  <a:tcPr marL="54864" marR="54864" marT="18288" marB="18288">
+                    <a:solidFill>
+                      <a:srgbClr val="1F4E79"/>
+                    </a:solidFill>
+                  </a:tcPr>
+                </a:tc>
+                <a:tc>
+                  <a:txBody>
+                    <a:bodyPr wrap="square"/>
+                    <a:lstStyle/>
+                    <a:p>
+                      <a:r>
+                        <a:rPr sz="1100" b="1">
+                          <a:solidFill>
+                            <a:srgbClr val="FFFFFF"/>
+                          </a:solidFill>
+                          <a:latin typeface="Arial"/>
+                        </a:rPr>
+                        <a:t>1 nm on 47 sites: gain / floor</a:t>
+                      </a:r>
+                    </a:p>
+                  </a:txBody>
+                  <a:tcPr marL="54864" marR="54864" marT="18288" marB="18288">
+                    <a:solidFill>
+                      <a:srgbClr val="1F4E79"/>
+                    </a:solidFill>
+                  </a:tcPr>
+                </a:tc>
+                <a:tc>
+                  <a:txBody>
+                    <a:bodyPr wrap="square"/>
+                    <a:lstStyle/>
+                    <a:p>
+                      <a:r>
+                        <a:rPr sz="1100" b="1">
+                          <a:solidFill>
+                            <a:srgbClr val="FFFFFF"/>
+                          </a:solidFill>
+                          <a:latin typeface="Arial"/>
+                        </a:rPr>
+                        <a:t>dense random 10 nm: gain / error</a:t>
+                      </a:r>
+                    </a:p>
+                  </a:txBody>
+                  <a:tcPr marL="54864" marR="54864" marT="18288" marB="18288">
+                    <a:solidFill>
+                      <a:srgbClr val="1F4E79"/>
+                    </a:solidFill>
+                  </a:tcPr>
+                </a:tc>
+              </a:tr>
+              <a:tr h="280035">
+                <a:tc>
+                  <a:txBody>
+                    <a:bodyPr wrap="square"/>
+                    <a:lstStyle/>
+                    <a:p>
+                      <a:r>
+                        <a:rPr sz="1100" b="0">
+                          <a:solidFill>
+                            <a:srgbClr val="282828"/>
+                          </a:solidFill>
+                          <a:latin typeface="Arial"/>
+                        </a:rPr>
+                        <a:t>interferometer, lens rig (4)</a:t>
+                      </a:r>
+                    </a:p>
+                  </a:txBody>
+                  <a:tcPr marL="54864" marR="54864" marT="18288" marB="18288">
+                    <a:solidFill>
+                      <a:srgbClr val="FFFFFF"/>
+                    </a:solidFill>
+                  </a:tcPr>
+                </a:tc>
+                <a:tc>
+                  <a:txBody>
+                    <a:bodyPr wrap="square"/>
+                    <a:lstStyle/>
+                    <a:p>
+                      <a:r>
+                        <a:rPr sz="1100" b="0">
+                          <a:solidFill>
+                            <a:srgbClr val="282828"/>
+                          </a:solidFill>
+                          <a:latin typeface="Arial"/>
+                        </a:rPr>
+                        <a:t>0.991 / 2 pm / 6076</a:t>
+                      </a:r>
+                    </a:p>
+                  </a:txBody>
+                  <a:tcPr marL="54864" marR="54864" marT="18288" marB="18288">
+                    <a:solidFill>
+                      <a:srgbClr val="FFFFFF"/>
+                    </a:solidFill>
+                  </a:tcPr>
+                </a:tc>
+                <a:tc>
+                  <a:txBody>
+                    <a:bodyPr wrap="square"/>
+                    <a:lstStyle/>
+                    <a:p>
+                      <a:r>
+                        <a:rPr sz="1100" b="0">
+                          <a:solidFill>
+                            <a:srgbClr val="282828"/>
+                          </a:solidFill>
+                          <a:latin typeface="Arial"/>
+                        </a:rPr>
+                        <a:t>0.990 / 1 pm (52 sites)</a:t>
+                      </a:r>
+                    </a:p>
+                  </a:txBody>
+                  <a:tcPr marL="54864" marR="54864" marT="18288" marB="18288">
+                    <a:solidFill>
+                      <a:srgbClr val="FFFFFF"/>
+                    </a:solidFill>
+                  </a:tcPr>
+                </a:tc>
+                <a:tc>
+                  <a:txBody>
+                    <a:bodyPr wrap="square"/>
+                    <a:lstStyle/>
+                    <a:p>
+                      <a:r>
+                        <a:rPr sz="1100" b="0">
+                          <a:solidFill>
+                            <a:srgbClr val="282828"/>
+                          </a:solidFill>
+                          <a:latin typeface="Arial"/>
+                        </a:rPr>
+                        <a:t>0.990 / 168 pm</a:t>
+                      </a:r>
+                    </a:p>
+                  </a:txBody>
+                  <a:tcPr marL="54864" marR="54864" marT="18288" marB="18288">
+                    <a:solidFill>
+                      <a:srgbClr val="FFFFFF"/>
+                    </a:solidFill>
+                  </a:tcPr>
+                </a:tc>
+              </a:tr>
+              <a:tr h="280035">
+                <a:tc>
+                  <a:txBody>
+                    <a:bodyPr wrap="square"/>
+                    <a:lstStyle/>
+                    <a:p>
+                      <a:r>
+                        <a:rPr sz="1100" b="0">
+                          <a:solidFill>
+                            <a:srgbClr val="282828"/>
+                          </a:solidFill>
+                          <a:latin typeface="Arial"/>
+                        </a:rPr>
+                        <a:t>interferometer, mirror rig (4)</a:t>
+                      </a:r>
+                    </a:p>
+                  </a:txBody>
+                  <a:tcPr marL="54864" marR="54864" marT="18288" marB="18288">
+                    <a:solidFill>
+                      <a:srgbClr val="ECF1F6"/>
+                    </a:solidFill>
+                  </a:tcPr>
+                </a:tc>
+                <a:tc>
+                  <a:txBody>
+                    <a:bodyPr wrap="square"/>
+                    <a:lstStyle/>
+                    <a:p>
+                      <a:r>
+                        <a:rPr sz="1100" b="0">
+                          <a:solidFill>
+                            <a:srgbClr val="282828"/>
+                          </a:solidFill>
+                          <a:latin typeface="Arial"/>
+                        </a:rPr>
+                        <a:t>0.996 / 2 pm / 5301</a:t>
+                      </a:r>
+                    </a:p>
+                  </a:txBody>
+                  <a:tcPr marL="54864" marR="54864" marT="18288" marB="18288">
+                    <a:solidFill>
+                      <a:srgbClr val="ECF1F6"/>
+                    </a:solidFill>
+                  </a:tcPr>
+                </a:tc>
+                <a:tc>
+                  <a:txBody>
+                    <a:bodyPr wrap="square"/>
+                    <a:lstStyle/>
+                    <a:p>
+                      <a:r>
+                        <a:rPr sz="1100" b="0">
+                          <a:solidFill>
+                            <a:srgbClr val="282828"/>
+                          </a:solidFill>
+                          <a:latin typeface="Arial"/>
+                        </a:rPr>
+                        <a:t>0.958 / 1 pm (52 sites)</a:t>
+                      </a:r>
+                    </a:p>
+                  </a:txBody>
+                  <a:tcPr marL="54864" marR="54864" marT="18288" marB="18288">
+                    <a:solidFill>
+                      <a:srgbClr val="ECF1F6"/>
+                    </a:solidFill>
+                  </a:tcPr>
+                </a:tc>
+                <a:tc>
+                  <a:txBody>
+                    <a:bodyPr wrap="square"/>
+                    <a:lstStyle/>
+                    <a:p>
+                      <a:r>
+                        <a:rPr sz="1100" b="0">
+                          <a:solidFill>
+                            <a:srgbClr val="282828"/>
+                          </a:solidFill>
+                          <a:latin typeface="Arial"/>
+                        </a:rPr>
+                        <a:t>0.950 / 2.1 nm</a:t>
+                      </a:r>
+                    </a:p>
+                  </a:txBody>
+                  <a:tcPr marL="54864" marR="54864" marT="18288" marB="18288">
+                    <a:solidFill>
+                      <a:srgbClr val="ECF1F6"/>
+                    </a:solidFill>
+                  </a:tcPr>
+                </a:tc>
+              </a:tr>
+              <a:tr h="280035">
+                <a:tc>
+                  <a:txBody>
+                    <a:bodyPr wrap="square"/>
+                    <a:lstStyle/>
+                    <a:p>
+                      <a:r>
+                        <a:rPr sz="1100" b="0">
+                          <a:solidFill>
+                            <a:srgbClr val="282828"/>
+                          </a:solidFill>
+                          <a:latin typeface="Arial"/>
+                        </a:rPr>
+                        <a:t>Zernike, linear one frame (1)</a:t>
+                      </a:r>
+                    </a:p>
+                  </a:txBody>
+                  <a:tcPr marL="54864" marR="54864" marT="18288" marB="18288">
+                    <a:solidFill>
+                      <a:srgbClr val="FFFFFF"/>
+                    </a:solidFill>
+                  </a:tcPr>
+                </a:tc>
+                <a:tc>
+                  <a:txBody>
+                    <a:bodyPr wrap="square"/>
+                    <a:lstStyle/>
+                    <a:p>
+                      <a:r>
+                        <a:rPr sz="1100" b="0">
+                          <a:solidFill>
+                            <a:srgbClr val="282828"/>
+                          </a:solidFill>
+                          <a:latin typeface="Arial"/>
+                        </a:rPr>
+                        <a:t>1.04 / 21 pm / 492</a:t>
+                      </a:r>
+                    </a:p>
+                  </a:txBody>
+                  <a:tcPr marL="54864" marR="54864" marT="18288" marB="18288">
+                    <a:solidFill>
+                      <a:srgbClr val="FFFFFF"/>
+                    </a:solidFill>
+                  </a:tcPr>
+                </a:tc>
+                <a:tc>
+                  <a:txBody>
+                    <a:bodyPr wrap="square"/>
+                    <a:lstStyle/>
+                    <a:p>
+                      <a:r>
+                        <a:rPr sz="1100" b="0">
+                          <a:solidFill>
+                            <a:srgbClr val="282828"/>
+                          </a:solidFill>
+                          <a:latin typeface="Arial"/>
+                        </a:rPr>
+                        <a:t>1.05 / 22 pm</a:t>
+                      </a:r>
+                    </a:p>
+                  </a:txBody>
+                  <a:tcPr marL="54864" marR="54864" marT="18288" marB="18288">
+                    <a:solidFill>
+                      <a:srgbClr val="FFFFFF"/>
+                    </a:solidFill>
+                  </a:tcPr>
+                </a:tc>
+                <a:tc>
+                  <a:txBody>
+                    <a:bodyPr wrap="square"/>
+                    <a:lstStyle/>
+                    <a:p>
+                      <a:r>
+                        <a:rPr sz="1100" b="0">
+                          <a:solidFill>
+                            <a:srgbClr val="282828"/>
+                          </a:solidFill>
+                          <a:latin typeface="Arial"/>
+                        </a:rPr>
+                        <a:t>1.04 / 4.7 nm</a:t>
+                      </a:r>
+                    </a:p>
+                  </a:txBody>
+                  <a:tcPr marL="54864" marR="54864" marT="18288" marB="18288">
+                    <a:solidFill>
+                      <a:srgbClr val="FFFFFF"/>
+                    </a:solidFill>
+                  </a:tcPr>
+                </a:tc>
+              </a:tr>
+              <a:tr h="280035">
+                <a:tc>
+                  <a:txBody>
+                    <a:bodyPr wrap="square"/>
+                    <a:lstStyle/>
+                    <a:p>
+                      <a:r>
+                        <a:rPr sz="1100" b="0">
+                          <a:solidFill>
+                            <a:srgbClr val="282828"/>
+                          </a:solidFill>
+                          <a:latin typeface="Arial"/>
+                        </a:rPr>
+                        <a:t>Zernike, exact one frame (1)</a:t>
+                      </a:r>
+                    </a:p>
+                  </a:txBody>
+                  <a:tcPr marL="54864" marR="54864" marT="18288" marB="18288">
+                    <a:solidFill>
+                      <a:srgbClr val="ECF1F6"/>
+                    </a:solidFill>
+                  </a:tcPr>
+                </a:tc>
+                <a:tc>
+                  <a:txBody>
+                    <a:bodyPr wrap="square"/>
+                    <a:lstStyle/>
+                    <a:p>
+                      <a:r>
+                        <a:rPr sz="1100" b="0">
+                          <a:solidFill>
+                            <a:srgbClr val="282828"/>
+                          </a:solidFill>
+                          <a:latin typeface="Arial"/>
+                        </a:rPr>
+                        <a:t>0.78 / 74 pm</a:t>
+                      </a:r>
+                    </a:p>
+                  </a:txBody>
+                  <a:tcPr marL="54864" marR="54864" marT="18288" marB="18288">
+                    <a:solidFill>
+                      <a:srgbClr val="ECF1F6"/>
+                    </a:solidFill>
+                  </a:tcPr>
+                </a:tc>
+                <a:tc>
+                  <a:txBody>
+                    <a:bodyPr wrap="square"/>
+                    <a:lstStyle/>
+                    <a:p>
+                      <a:r>
+                        <a:rPr sz="1100" b="0">
+                          <a:solidFill>
+                            <a:srgbClr val="282828"/>
+                          </a:solidFill>
+                          <a:latin typeface="Arial"/>
+                        </a:rPr>
+                        <a:t>0.90 / 35 pm</a:t>
+                      </a:r>
+                    </a:p>
+                  </a:txBody>
+                  <a:tcPr marL="54864" marR="54864" marT="18288" marB="18288">
+                    <a:solidFill>
+                      <a:srgbClr val="ECF1F6"/>
+                    </a:solidFill>
+                  </a:tcPr>
+                </a:tc>
+                <a:tc>
+                  <a:txBody>
+                    <a:bodyPr wrap="square"/>
+                    <a:lstStyle/>
+                    <a:p>
+                      <a:r>
+                        <a:rPr sz="1100" b="0">
+                          <a:solidFill>
+                            <a:srgbClr val="282828"/>
+                          </a:solidFill>
+                          <a:latin typeface="Arial"/>
+                        </a:rPr>
+                        <a:t>0.86 / 5.2 nm</a:t>
+                      </a:r>
+                    </a:p>
+                  </a:txBody>
+                  <a:tcPr marL="54864" marR="54864" marT="18288" marB="18288">
+                    <a:solidFill>
+                      <a:srgbClr val="ECF1F6"/>
+                    </a:solidFill>
+                  </a:tcPr>
+                </a:tc>
+              </a:tr>
+              <a:tr h="280035">
+                <a:tc>
+                  <a:txBody>
+                    <a:bodyPr wrap="square"/>
+                    <a:lstStyle/>
+                    <a:p>
+                      <a:r>
+                        <a:rPr sz="1100" b="0">
+                          <a:solidFill>
+                            <a:srgbClr val="282828"/>
+                          </a:solidFill>
+                          <a:latin typeface="Arial"/>
+                        </a:rPr>
+                        <a:t>Zernike, stepped (4)</a:t>
+                      </a:r>
+                    </a:p>
+                  </a:txBody>
+                  <a:tcPr marL="54864" marR="54864" marT="18288" marB="18288">
+                    <a:solidFill>
+                      <a:srgbClr val="FFFFFF"/>
+                    </a:solidFill>
+                  </a:tcPr>
+                </a:tc>
+                <a:tc>
+                  <a:txBody>
+                    <a:bodyPr wrap="square"/>
+                    <a:lstStyle/>
+                    <a:p>
+                      <a:r>
+                        <a:rPr sz="1100" b="0">
+                          <a:solidFill>
+                            <a:srgbClr val="282828"/>
+                          </a:solidFill>
+                          <a:latin typeface="Arial"/>
+                        </a:rPr>
+                        <a:t>0.989 / 5 pm / 2160</a:t>
+                      </a:r>
+                    </a:p>
+                  </a:txBody>
+                  <a:tcPr marL="54864" marR="54864" marT="18288" marB="18288">
+                    <a:solidFill>
+                      <a:srgbClr val="FFFFFF"/>
+                    </a:solidFill>
+                  </a:tcPr>
+                </a:tc>
+                <a:tc>
+                  <a:txBody>
+                    <a:bodyPr wrap="square"/>
+                    <a:lstStyle/>
+                    <a:p>
+                      <a:r>
+                        <a:rPr sz="1100" b="0">
+                          <a:solidFill>
+                            <a:srgbClr val="282828"/>
+                          </a:solidFill>
+                          <a:latin typeface="Arial"/>
+                        </a:rPr>
+                        <a:t>0.999 / 4 pm</a:t>
+                      </a:r>
+                    </a:p>
+                  </a:txBody>
+                  <a:tcPr marL="54864" marR="54864" marT="18288" marB="18288">
+                    <a:solidFill>
+                      <a:srgbClr val="FFFFFF"/>
+                    </a:solidFill>
+                  </a:tcPr>
+                </a:tc>
+                <a:tc>
+                  <a:txBody>
+                    <a:bodyPr wrap="square"/>
+                    <a:lstStyle/>
+                    <a:p>
+                      <a:r>
+                        <a:rPr sz="1100" b="0">
+                          <a:solidFill>
+                            <a:srgbClr val="282828"/>
+                          </a:solidFill>
+                          <a:latin typeface="Arial"/>
+                        </a:rPr>
+                        <a:t>0.984 / 0.68 nm</a:t>
+                      </a:r>
+                    </a:p>
+                  </a:txBody>
+                  <a:tcPr marL="54864" marR="54864" marT="18288" marB="18288">
+                    <a:solidFill>
+                      <a:srgbClr val="FFFFFF"/>
+                    </a:solidFill>
+                  </a:tcPr>
+                </a:tc>
+              </a:tr>
+              <a:tr h="280035">
+                <a:tc>
+                  <a:txBody>
+                    <a:bodyPr wrap="square"/>
+                    <a:lstStyle/>
+                    <a:p>
+                      <a:r>
+                        <a:rPr sz="1100" b="0">
+                          <a:solidFill>
+                            <a:srgbClr val="282828"/>
+                          </a:solidFill>
+                          <a:latin typeface="Arial"/>
+                        </a:rPr>
+                        <a:t>vector Zernike (2)</a:t>
+                      </a:r>
+                    </a:p>
+                  </a:txBody>
+                  <a:tcPr marL="54864" marR="54864" marT="18288" marB="18288">
+                    <a:solidFill>
+                      <a:srgbClr val="ECF1F6"/>
+                    </a:solidFill>
+                  </a:tcPr>
+                </a:tc>
+                <a:tc>
+                  <a:txBody>
+                    <a:bodyPr wrap="square"/>
+                    <a:lstStyle/>
+                    <a:p>
+                      <a:r>
+                        <a:rPr sz="1100" b="0">
+                          <a:solidFill>
+                            <a:srgbClr val="282828"/>
+                          </a:solidFill>
+                          <a:latin typeface="Arial"/>
+                        </a:rPr>
+                        <a:t>0.9935 / 4 pm / 2830</a:t>
+                      </a:r>
+                    </a:p>
+                  </a:txBody>
+                  <a:tcPr marL="54864" marR="54864" marT="18288" marB="18288">
+                    <a:solidFill>
+                      <a:srgbClr val="ECF1F6"/>
+                    </a:solidFill>
+                  </a:tcPr>
+                </a:tc>
+                <a:tc>
+                  <a:txBody>
+                    <a:bodyPr wrap="square"/>
+                    <a:lstStyle/>
+                    <a:p>
+                      <a:r>
+                        <a:rPr sz="1100" b="0">
+                          <a:solidFill>
+                            <a:srgbClr val="282828"/>
+                          </a:solidFill>
+                          <a:latin typeface="Arial"/>
+                        </a:rPr>
+                        <a:t>0.9992 / 3 pm</a:t>
+                      </a:r>
+                    </a:p>
+                  </a:txBody>
+                  <a:tcPr marL="54864" marR="54864" marT="18288" marB="18288">
+                    <a:solidFill>
+                      <a:srgbClr val="ECF1F6"/>
+                    </a:solidFill>
+                  </a:tcPr>
+                </a:tc>
+                <a:tc>
+                  <a:txBody>
+                    <a:bodyPr wrap="square"/>
+                    <a:lstStyle/>
+                    <a:p>
+                      <a:r>
+                        <a:rPr sz="1100" b="0">
+                          <a:solidFill>
+                            <a:srgbClr val="282828"/>
+                          </a:solidFill>
+                          <a:latin typeface="Arial"/>
+                        </a:rPr>
+                        <a:t>0.9999 / 0.33 nm</a:t>
+                      </a:r>
+                    </a:p>
+                  </a:txBody>
+                  <a:tcPr marL="54864" marR="54864" marT="18288" marB="18288">
+                    <a:solidFill>
+                      <a:srgbClr val="ECF1F6"/>
+                    </a:solidFill>
+                  </a:tcPr>
+                </a:tc>
+              </a:tr>
+              <a:tr h="280035">
+                <a:tc>
+                  <a:txBody>
+                    <a:bodyPr wrap="square"/>
+                    <a:lstStyle/>
+                    <a:p>
+                      <a:r>
+                        <a:rPr sz="1100" b="0">
+                          <a:solidFill>
+                            <a:srgbClr val="282828"/>
+                          </a:solidFill>
+                          <a:latin typeface="Arial"/>
+                        </a:rPr>
+                        <a:t>stepped pinhole (6)</a:t>
+                      </a:r>
+                    </a:p>
+                  </a:txBody>
+                  <a:tcPr marL="54864" marR="54864" marT="18288" marB="18288">
+                    <a:solidFill>
+                      <a:srgbClr val="FFFFFF"/>
+                    </a:solidFill>
+                  </a:tcPr>
+                </a:tc>
+                <a:tc>
+                  <a:txBody>
+                    <a:bodyPr wrap="square"/>
+                    <a:lstStyle/>
+                    <a:p>
+                      <a:r>
+                        <a:rPr sz="1100" b="0">
+                          <a:solidFill>
+                            <a:srgbClr val="282828"/>
+                          </a:solidFill>
+                          <a:latin typeface="Arial"/>
+                        </a:rPr>
+                        <a:t>0.9935 / 4 pm / 2790</a:t>
+                      </a:r>
+                    </a:p>
+                  </a:txBody>
+                  <a:tcPr marL="54864" marR="54864" marT="18288" marB="18288">
+                    <a:solidFill>
+                      <a:srgbClr val="FFFFFF"/>
+                    </a:solidFill>
+                  </a:tcPr>
+                </a:tc>
+                <a:tc>
+                  <a:txBody>
+                    <a:bodyPr wrap="square"/>
+                    <a:lstStyle/>
+                    <a:p>
+                      <a:r>
+                        <a:rPr sz="1100" b="0">
+                          <a:solidFill>
+                            <a:srgbClr val="282828"/>
+                          </a:solidFill>
+                          <a:latin typeface="Arial"/>
+                        </a:rPr>
+                        <a:t>0.9992 / 3 pm</a:t>
+                      </a:r>
+                    </a:p>
+                  </a:txBody>
+                  <a:tcPr marL="54864" marR="54864" marT="18288" marB="18288">
+                    <a:solidFill>
+                      <a:srgbClr val="FFFFFF"/>
+                    </a:solidFill>
+                  </a:tcPr>
+                </a:tc>
+                <a:tc>
+                  <a:txBody>
+                    <a:bodyPr wrap="square"/>
+                    <a:lstStyle/>
+                    <a:p>
+                      <a:r>
+                        <a:rPr sz="1100" b="0">
+                          <a:solidFill>
+                            <a:srgbClr val="282828"/>
+                          </a:solidFill>
+                          <a:latin typeface="Arial"/>
+                        </a:rPr>
+                        <a:t>0.9985 / 338 pm</a:t>
+                      </a:r>
+                    </a:p>
+                  </a:txBody>
+                  <a:tcPr marL="54864" marR="54864" marT="18288" marB="18288">
+                    <a:solidFill>
+                      <a:srgbClr val="FFFFFF"/>
+                    </a:solidFill>
+                  </a:tcPr>
+                </a:tc>
+              </a:tr>
+              <a:tr h="280035">
+                <a:tc>
+                  <a:txBody>
+                    <a:bodyPr wrap="square"/>
+                    <a:lstStyle/>
+                    <a:p>
+                      <a:r>
+                        <a:rPr sz="1100" b="0">
+                          <a:solidFill>
+                            <a:srgbClr val="282828"/>
+                          </a:solidFill>
+                          <a:latin typeface="Arial"/>
+                        </a:rPr>
+                        <a:t>P/SRI, reference arm traced (4)</a:t>
+                      </a:r>
+                    </a:p>
+                  </a:txBody>
+                  <a:tcPr marL="54864" marR="54864" marT="18288" marB="18288">
+                    <a:solidFill>
+                      <a:srgbClr val="ECF1F6"/>
+                    </a:solidFill>
+                  </a:tcPr>
+                </a:tc>
+                <a:tc>
+                  <a:txBody>
+                    <a:bodyPr wrap="square"/>
+                    <a:lstStyle/>
+                    <a:p>
+                      <a:r>
+                        <a:rPr sz="1100" b="0">
+                          <a:solidFill>
+                            <a:srgbClr val="282828"/>
+                          </a:solidFill>
+                          <a:latin typeface="Arial"/>
+                        </a:rPr>
+                        <a:t>0.9935 / 2 pm / 4895</a:t>
+                      </a:r>
+                    </a:p>
+                  </a:txBody>
+                  <a:tcPr marL="54864" marR="54864" marT="18288" marB="18288">
+                    <a:solidFill>
+                      <a:srgbClr val="ECF1F6"/>
+                    </a:solidFill>
+                  </a:tcPr>
+                </a:tc>
+                <a:tc>
+                  <a:txBody>
+                    <a:bodyPr wrap="square"/>
+                    <a:lstStyle/>
+                    <a:p>
+                      <a:r>
+                        <a:rPr sz="1100" b="0">
+                          <a:solidFill>
+                            <a:srgbClr val="282828"/>
+                          </a:solidFill>
+                          <a:latin typeface="Arial"/>
+                        </a:rPr>
+                        <a:t>0.9924 / 1 pm</a:t>
+                      </a:r>
+                    </a:p>
+                  </a:txBody>
+                  <a:tcPr marL="54864" marR="54864" marT="18288" marB="18288">
+                    <a:solidFill>
+                      <a:srgbClr val="ECF1F6"/>
+                    </a:solidFill>
+                  </a:tcPr>
+                </a:tc>
+                <a:tc>
+                  <a:txBody>
+                    <a:bodyPr wrap="square"/>
+                    <a:lstStyle/>
+                    <a:p>
+                      <a:r>
+                        <a:rPr sz="1100" b="0">
+                          <a:solidFill>
+                            <a:srgbClr val="282828"/>
+                          </a:solidFill>
+                          <a:latin typeface="Arial"/>
+                        </a:rPr>
+                        <a:t>0.9926 / 144 pm</a:t>
+                      </a:r>
+                    </a:p>
+                  </a:txBody>
+                  <a:tcPr marL="54864" marR="54864" marT="18288" marB="18288">
+                    <a:solidFill>
+                      <a:srgbClr val="ECF1F6"/>
+                    </a:solidFill>
+                  </a:tcPr>
+                </a:tc>
+              </a:tr>
+            </a:tbl>
+          </a:graphicData>
+        </a:graphic>
+      </p:graphicFrame>
       <p:sp>
         <p:nvSpPr>
-          <p:cNvPr id="4" name="TextBox 3"/>
+          <p:cNvPr id="5" name="TextBox 4"/>
           <p:cNvSpPr txBox="1"/>
           <p:nvPr/>
         </p:nvSpPr>
         <p:spPr>
           <a:xfrm>
-            <a:off x="411480" y="1298448"/>
-            <a:ext cx="5806440" cy="274320"/>
+            <a:off x="411480" y="3965066"/>
+            <a:ext cx="11368735" cy="274320"/>
           </a:xfrm>
           <a:prstGeom prst="rect">
             <a:avLst/>
@@ -6453,13 +8336,13 @@
               </a:spcAft>
             </a:pPr>
             <a:r>
-              <a:rPr sz="1200" b="0">
+              <a:rPr sz="1500" b="0">
                 <a:solidFill>
                   <a:srgbClr val="282828"/>
                 </a:solidFill>
                 <a:latin typeface="Arial"/>
               </a:rPr>
-              <a:t>•  3 Introduction: the three jobs and how they are scored</a:t>
+              <a:t>•  The one-frame Zernike readings lose: the linear one is biased 4-5% and floors at 21 pm; the exact one-frame reading misreads the sign past the quarter-wave fold (7.8% of pixels on this surface) and diverges in a servo.</a:t>
             </a:r>
           </a:p>
           <a:p>
@@ -6469,123 +8352,27 @@
               </a:spcAft>
             </a:pPr>
             <a:r>
-              <a:rPr sz="1200" b="0">
+              <a:rPr sz="1500" b="0">
                 <a:solidFill>
                   <a:srgbClr val="282828"/>
                 </a:solidFill>
                 <a:latin typeface="Arial"/>
               </a:rPr>
-              <a:t>•  4 The bench layout</a:t>
-            </a:r>
-          </a:p>
-          <a:p>
-            <a:pPr>
-              <a:spcAft>
-                <a:spcPts val="600"/>
-              </a:spcAft>
-            </a:pPr>
-            <a:r>
-              <a:rPr sz="1200" b="0">
-                <a:solidFill>
-                  <a:srgbClr val="282828"/>
-                </a:solidFill>
-                <a:latin typeface="Arial"/>
-              </a:rPr>
-              <a:t>•  6 Parts</a:t>
-            </a:r>
-          </a:p>
-          <a:p>
-            <a:pPr>
-              <a:spcAft>
-                <a:spcPts val="600"/>
-              </a:spcAft>
-            </a:pPr>
-            <a:r>
-              <a:rPr sz="1200" b="0">
-                <a:solidFill>
-                  <a:srgbClr val="282828"/>
-                </a:solidFill>
-                <a:latin typeface="Arial"/>
-              </a:rPr>
-              <a:t>•  9 Twyman-Green interferometer</a:t>
-            </a:r>
-          </a:p>
-          <a:p>
-            <a:pPr>
-              <a:spcAft>
-                <a:spcPts val="600"/>
-              </a:spcAft>
-            </a:pPr>
-            <a:r>
-              <a:rPr sz="1200" b="0">
-                <a:solidFill>
-                  <a:srgbClr val="282828"/>
-                </a:solidFill>
-                <a:latin typeface="Arial"/>
-              </a:rPr>
-              <a:t>•  12 Zernike sensor</a:t>
-            </a:r>
-          </a:p>
-          <a:p>
-            <a:pPr>
-              <a:spcAft>
-                <a:spcPts val="600"/>
-              </a:spcAft>
-            </a:pPr>
-            <a:r>
-              <a:rPr sz="1200" b="0">
-                <a:solidFill>
-                  <a:srgbClr val="282828"/>
-                </a:solidFill>
-                <a:latin typeface="Arial"/>
-              </a:rPr>
-              <a:t>•  14 Vector Zernike sensor</a:t>
-            </a:r>
-          </a:p>
-          <a:p>
-            <a:pPr>
-              <a:spcAft>
-                <a:spcPts val="600"/>
-              </a:spcAft>
-            </a:pPr>
-            <a:r>
-              <a:rPr sz="1200" b="0">
-                <a:solidFill>
-                  <a:srgbClr val="282828"/>
-                </a:solidFill>
-                <a:latin typeface="Arial"/>
-              </a:rPr>
-              <a:t>•  17 Point-diffraction sensor</a:t>
-            </a:r>
-          </a:p>
-          <a:p>
-            <a:pPr>
-              <a:spcAft>
-                <a:spcPts val="600"/>
-              </a:spcAft>
-            </a:pPr>
-            <a:r>
-              <a:rPr sz="1200" b="0">
-                <a:solidFill>
-                  <a:srgbClr val="282828"/>
-                </a:solidFill>
-                <a:latin typeface="Arial"/>
-              </a:rPr>
-              <a:t>•  20 Performance: rows, capture, photons, servo</a:t>
+              <a:t>•  The interferometer's 52-site rows count the sites its pupil lights; the others use 47.  The interferometer's dense-pattern error, 168 pm against 0.33-0.68 nm, is its reference arm: it does not make its reference from the beam.</a:t>
             </a:r>
           </a:p>
         </p:txBody>
       </p:sp>
       <p:sp>
         <p:nvSpPr>
-          <p:cNvPr id="5" name="TextBox 4"/>
+          <p:cNvPr id="6" name="TextBox 5"/>
           <p:cNvSpPr txBox="1"/>
           <p:nvPr/>
         </p:nvSpPr>
         <p:spPr>
           <a:xfrm>
-            <a:off x="6400800" y="1298448"/>
-            <a:ext cx="5394960" cy="274320"/>
+            <a:off x="411480" y="5272659"/>
+            <a:ext cx="11368735" cy="274320"/>
           </a:xfrm>
           <a:prstGeom prst="rect">
             <a:avLst/>
@@ -6604,109 +8391,13 @@
               </a:spcAft>
             </a:pPr>
             <a:r>
-              <a:rPr sz="1200" b="0">
+              <a:rPr sz="1050" b="0">
                 <a:solidFill>
-                  <a:srgbClr val="282828"/>
+                  <a:srgbClr val="6E6E6E"/>
                 </a:solidFill>
                 <a:latin typeface="Arial"/>
               </a:rPr>
-              <a:t>•  26 Lenses versus off-axis parabolas</a:t>
-            </a:r>
-          </a:p>
-          <a:p>
-            <a:pPr>
-              <a:spcAft>
-                <a:spcPts val="600"/>
-              </a:spcAft>
-            </a:pPr>
-            <a:r>
-              <a:rPr sz="1200" b="0">
-                <a:solidFill>
-                  <a:srgbClr val="282828"/>
-                </a:solidFill>
-                <a:latin typeface="Arial"/>
-              </a:rPr>
-              <a:t>•  27 The reflective front end and its performance</a:t>
-            </a:r>
-          </a:p>
-          <a:p>
-            <a:pPr>
-              <a:spcAft>
-                <a:spcPts val="600"/>
-              </a:spcAft>
-            </a:pPr>
-            <a:r>
-              <a:rPr sz="1200" b="0">
-                <a:solidFill>
-                  <a:srgbClr val="282828"/>
-                </a:solidFill>
-                <a:latin typeface="Arial"/>
-              </a:rPr>
-              <a:t>•  29 Comparison and recommendation</a:t>
-            </a:r>
-          </a:p>
-          <a:p>
-            <a:pPr>
-              <a:spcAft>
-                <a:spcPts val="600"/>
-              </a:spcAft>
-            </a:pPr>
-            <a:r>
-              <a:rPr sz="1200" b="0">
-                <a:solidFill>
-                  <a:srgbClr val="282828"/>
-                </a:solidFill>
-                <a:latin typeface="Arial"/>
-              </a:rPr>
-              <a:t>•  32 Complex amplitude</a:t>
-            </a:r>
-          </a:p>
-          <a:p>
-            <a:pPr>
-              <a:spcAft>
-                <a:spcPts val="600"/>
-              </a:spcAft>
-            </a:pPr>
-            <a:r>
-              <a:rPr sz="1200" b="0">
-                <a:solidFill>
-                  <a:srgbClr val="282828"/>
-                </a:solidFill>
-                <a:latin typeface="Arial"/>
-              </a:rPr>
-              <a:t>•  33 Summary and future work</a:t>
-            </a:r>
-          </a:p>
-          <a:p>
-            <a:pPr>
-              <a:spcAft>
-                <a:spcPts val="600"/>
-              </a:spcAft>
-            </a:pPr>
-            <a:r>
-              <a:rPr sz="1200" b="0">
-                <a:solidFill>
-                  <a:srgbClr val="282828"/>
-                </a:solidFill>
-                <a:latin typeface="Arial"/>
-              </a:rPr>
-              <a:t>•  38 Run it yourself</a:t>
-            </a:r>
-          </a:p>
-          <a:p>
-            <a:pPr>
-              <a:spcAft>
-                <a:spcPts val="600"/>
-              </a:spcAft>
-            </a:pPr>
-            <a:r>
-              <a:rPr sz="1200" b="0">
-                <a:solidFill>
-                  <a:srgbClr val="282828"/>
-                </a:solidFill>
-                <a:latin typeface="Arial"/>
-              </a:rPr>
-              <a:t>•  39 Backup</a:t>
+              <a:t>Run tags: lens_deck, oap_deck, matbase, matbase385, v193base, pdi193fbase, pfdeck.  The interferometer rows are at 385 pixels per pupil, the rest at 193; the 385 checks read the same.  The sensor rows re-run on the 22.5° bench of record (gate22_193) hold to the digit: stepped 0.989 / 5 pm, vector 0.994 / 3, pinhole 0.994 / 3 on one actuator; 0.998 / 4, 0.998 / 3, 0.998 / 3 on 47 sites.</a:t>
             </a:r>
           </a:p>
         </p:txBody>
@@ -6719,7 +8410,7 @@
 </p:sld>
 </file>
 
-<file path=ppt/slides/slide20.xml><?xml version="1.0" encoding="utf-8"?>
+<file path=ppt/slides/slide22.xml><?xml version="1.0" encoding="utf-8"?>
 <p:sld xmlns:a="http://schemas.openxmlformats.org/drawingml/2006/main" xmlns:p="http://schemas.openxmlformats.org/presentationml/2006/main" xmlns:r="http://schemas.openxmlformats.org/officeDocument/2006/relationships">
   <p:cSld>
     <p:spTree>
@@ -6763,7 +8454,7 @@
                 </a:solidFill>
                 <a:latin typeface="Arial"/>
               </a:rPr>
-              <a:t>Performance side by side</a:t>
+              <a:t>Capture range: how far from null each reading works</a:t>
             </a:r>
           </a:p>
           <a:p>
@@ -6779,7 +8470,7 @@
                 </a:solidFill>
                 <a:latin typeface="Arial"/>
               </a:rPr>
-              <a:t>Every reading on the same 30 nm working surface, the response matrix measured on it: the four best readings are within 1% of each other and within 2 pm on the floor</a:t>
+              <a:t>With the calibration left as measured at 30 nm, the self-referenced sensors hold 10% accuracy only to 36-70 nm of surface; the externally referenced ones, and the pinhole with its shutter frame, hold to 480 nm and beyond</a:t>
             </a:r>
           </a:p>
         </p:txBody>
@@ -6838,7 +8529,7 @@
         </p:nvGraphicFramePr>
         <p:xfrm>
           <a:off x="411480" y="1298448"/>
-          <a:ext cx="11368733" cy="2520315"/>
+          <a:ext cx="5806439" cy="2708910"/>
         </p:xfrm>
         <a:graphic>
           <a:graphicData uri="http://schemas.openxmlformats.org/drawingml/2006/table">
@@ -6847,10 +8538,8 @@
                 <a:tableStyleId>{5C22544A-7EE6-4342-B048-85BDC9FD1C3A}</a:tableStyleId>
               </a:tblPr>
               <a:tblGrid>
-                <a:gridCol w="2694811"/>
-                <a:gridCol w="3452726"/>
-                <a:gridCol w="2526385"/>
-                <a:gridCol w="2694811"/>
+                <a:gridCol w="1912709"/>
+                <a:gridCol w="3893730"/>
               </a:tblGrid>
               <a:tr h="280035">
                 <a:tc>
@@ -6865,7 +8554,7 @@
                           </a:solidFill>
                           <a:latin typeface="Arial"/>
                         </a:rPr>
-                        <a:t>reading (frames per measurement)</a:t>
+                        <a:t>reading</a:t>
                       </a:r>
                     </a:p>
                   </a:txBody>
@@ -6887,51 +8576,7 @@
                           </a:solidFill>
                           <a:latin typeface="Arial"/>
                         </a:rPr>
-                        <a:t>10 nm on one actuator: gain / floor / SNR</a:t>
-                      </a:r>
-                    </a:p>
-                  </a:txBody>
-                  <a:tcPr marL="54864" marR="54864" marT="18288" marB="18288">
-                    <a:solidFill>
-                      <a:srgbClr val="1F4E79"/>
-                    </a:solidFill>
-                  </a:tcPr>
-                </a:tc>
-                <a:tc>
-                  <a:txBody>
-                    <a:bodyPr wrap="square"/>
-                    <a:lstStyle/>
-                    <a:p>
-                      <a:r>
-                        <a:rPr sz="1100" b="1">
-                          <a:solidFill>
-                            <a:srgbClr val="FFFFFF"/>
-                          </a:solidFill>
-                          <a:latin typeface="Arial"/>
-                        </a:rPr>
-                        <a:t>1 nm on 47 sites: gain / floor</a:t>
-                      </a:r>
-                    </a:p>
-                  </a:txBody>
-                  <a:tcPr marL="54864" marR="54864" marT="18288" marB="18288">
-                    <a:solidFill>
-                      <a:srgbClr val="1F4E79"/>
-                    </a:solidFill>
-                  </a:tcPr>
-                </a:tc>
-                <a:tc>
-                  <a:txBody>
-                    <a:bodyPr wrap="square"/>
-                    <a:lstStyle/>
-                    <a:p>
-                      <a:r>
-                        <a:rPr sz="1100" b="1">
-                          <a:solidFill>
-                            <a:srgbClr val="FFFFFF"/>
-                          </a:solidFill>
-                          <a:latin typeface="Arial"/>
-                        </a:rPr>
-                        <a:t>dense random 10 nm: gain / error</a:t>
+                        <a:t>range to 10%, calibration aging from 30 nm</a:t>
                       </a:r>
                     </a:p>
                   </a:txBody>
@@ -6955,73 +8600,29 @@
                           </a:solidFill>
                           <a:latin typeface="Arial"/>
                         </a:rPr>
-                        <a:t>interferometer, lens rig (4)</a:t>
-                      </a:r>
-                    </a:p>
-                  </a:txBody>
-                  <a:tcPr marL="54864" marR="54864" marT="18288" marB="18288">
-                    <a:solidFill>
-                      <a:srgbClr val="FFFFFF"/>
-                    </a:solidFill>
-                  </a:tcPr>
-                </a:tc>
-                <a:tc>
-                  <a:txBody>
-                    <a:bodyPr wrap="square"/>
-                    <a:lstStyle/>
-                    <a:p>
-                      <a:r>
-                        <a:rPr sz="1100" b="0">
-                          <a:solidFill>
-                            <a:srgbClr val="282828"/>
-                          </a:solidFill>
-                          <a:latin typeface="Arial"/>
-                        </a:rPr>
-                        <a:t>0.991 / 2 pm / 6076</a:t>
-                      </a:r>
-                    </a:p>
-                  </a:txBody>
-                  <a:tcPr marL="54864" marR="54864" marT="18288" marB="18288">
-                    <a:solidFill>
-                      <a:srgbClr val="FFFFFF"/>
-                    </a:solidFill>
-                  </a:tcPr>
-                </a:tc>
-                <a:tc>
-                  <a:txBody>
-                    <a:bodyPr wrap="square"/>
-                    <a:lstStyle/>
-                    <a:p>
-                      <a:r>
-                        <a:rPr sz="1100" b="0">
-                          <a:solidFill>
-                            <a:srgbClr val="282828"/>
-                          </a:solidFill>
-                          <a:latin typeface="Arial"/>
-                        </a:rPr>
-                        <a:t>0.990 / 1 pm (52 sites)</a:t>
-                      </a:r>
-                    </a:p>
-                  </a:txBody>
-                  <a:tcPr marL="54864" marR="54864" marT="18288" marB="18288">
-                    <a:solidFill>
-                      <a:srgbClr val="FFFFFF"/>
-                    </a:solidFill>
-                  </a:tcPr>
-                </a:tc>
-                <a:tc>
-                  <a:txBody>
-                    <a:bodyPr wrap="square"/>
-                    <a:lstStyle/>
-                    <a:p>
-                      <a:r>
-                        <a:rPr sz="1100" b="0">
-                          <a:solidFill>
-                            <a:srgbClr val="282828"/>
-                          </a:solidFill>
-                          <a:latin typeface="Arial"/>
-                        </a:rPr>
-                        <a:t>0.990 / 168 pm</a:t>
+                        <a:t>Zernike exact one frame</a:t>
+                      </a:r>
+                    </a:p>
+                  </a:txBody>
+                  <a:tcPr marL="54864" marR="54864" marT="18288" marB="18288">
+                    <a:solidFill>
+                      <a:srgbClr val="FFFFFF"/>
+                    </a:solidFill>
+                  </a:tcPr>
+                </a:tc>
+                <a:tc>
+                  <a:txBody>
+                    <a:bodyPr wrap="square"/>
+                    <a:lstStyle/>
+                    <a:p>
+                      <a:r>
+                        <a:rPr sz="1100" b="0">
+                          <a:solidFill>
+                            <a:srgbClr val="282828"/>
+                          </a:solidFill>
+                          <a:latin typeface="Arial"/>
+                        </a:rPr>
+                        <a:t>36 nm</a:t>
                       </a:r>
                     </a:p>
                   </a:txBody>
@@ -7045,7 +8646,7 @@
                           </a:solidFill>
                           <a:latin typeface="Arial"/>
                         </a:rPr>
-                        <a:t>interferometer, mirror rig (4)</a:t>
+                        <a:t>Zernike stepped</a:t>
                       </a:r>
                     </a:p>
                   </a:txBody>
@@ -7067,51 +8668,7 @@
                           </a:solidFill>
                           <a:latin typeface="Arial"/>
                         </a:rPr>
-                        <a:t>0.996 / 2 pm / 5301</a:t>
-                      </a:r>
-                    </a:p>
-                  </a:txBody>
-                  <a:tcPr marL="54864" marR="54864" marT="18288" marB="18288">
-                    <a:solidFill>
-                      <a:srgbClr val="ECF1F6"/>
-                    </a:solidFill>
-                  </a:tcPr>
-                </a:tc>
-                <a:tc>
-                  <a:txBody>
-                    <a:bodyPr wrap="square"/>
-                    <a:lstStyle/>
-                    <a:p>
-                      <a:r>
-                        <a:rPr sz="1100" b="0">
-                          <a:solidFill>
-                            <a:srgbClr val="282828"/>
-                          </a:solidFill>
-                          <a:latin typeface="Arial"/>
-                        </a:rPr>
-                        <a:t>0.958 / 1 pm (52 sites)</a:t>
-                      </a:r>
-                    </a:p>
-                  </a:txBody>
-                  <a:tcPr marL="54864" marR="54864" marT="18288" marB="18288">
-                    <a:solidFill>
-                      <a:srgbClr val="ECF1F6"/>
-                    </a:solidFill>
-                  </a:tcPr>
-                </a:tc>
-                <a:tc>
-                  <a:txBody>
-                    <a:bodyPr wrap="square"/>
-                    <a:lstStyle/>
-                    <a:p>
-                      <a:r>
-                        <a:rPr sz="1100" b="0">
-                          <a:solidFill>
-                            <a:srgbClr val="282828"/>
-                          </a:solidFill>
-                          <a:latin typeface="Arial"/>
-                        </a:rPr>
-                        <a:t>0.950 / 2.1 nm</a:t>
+                        <a:t>42 nm</a:t>
                       </a:r>
                     </a:p>
                   </a:txBody>
@@ -7135,73 +8692,29 @@
                           </a:solidFill>
                           <a:latin typeface="Arial"/>
                         </a:rPr>
-                        <a:t>Zernike, linear one frame (1)</a:t>
-                      </a:r>
-                    </a:p>
-                  </a:txBody>
-                  <a:tcPr marL="54864" marR="54864" marT="18288" marB="18288">
-                    <a:solidFill>
-                      <a:srgbClr val="FFFFFF"/>
-                    </a:solidFill>
-                  </a:tcPr>
-                </a:tc>
-                <a:tc>
-                  <a:txBody>
-                    <a:bodyPr wrap="square"/>
-                    <a:lstStyle/>
-                    <a:p>
-                      <a:r>
-                        <a:rPr sz="1100" b="0">
-                          <a:solidFill>
-                            <a:srgbClr val="282828"/>
-                          </a:solidFill>
-                          <a:latin typeface="Arial"/>
-                        </a:rPr>
-                        <a:t>1.04 / 21 pm / 492</a:t>
-                      </a:r>
-                    </a:p>
-                  </a:txBody>
-                  <a:tcPr marL="54864" marR="54864" marT="18288" marB="18288">
-                    <a:solidFill>
-                      <a:srgbClr val="FFFFFF"/>
-                    </a:solidFill>
-                  </a:tcPr>
-                </a:tc>
-                <a:tc>
-                  <a:txBody>
-                    <a:bodyPr wrap="square"/>
-                    <a:lstStyle/>
-                    <a:p>
-                      <a:r>
-                        <a:rPr sz="1100" b="0">
-                          <a:solidFill>
-                            <a:srgbClr val="282828"/>
-                          </a:solidFill>
-                          <a:latin typeface="Arial"/>
-                        </a:rPr>
-                        <a:t>1.05 / 22 pm</a:t>
-                      </a:r>
-                    </a:p>
-                  </a:txBody>
-                  <a:tcPr marL="54864" marR="54864" marT="18288" marB="18288">
-                    <a:solidFill>
-                      <a:srgbClr val="FFFFFF"/>
-                    </a:solidFill>
-                  </a:tcPr>
-                </a:tc>
-                <a:tc>
-                  <a:txBody>
-                    <a:bodyPr wrap="square"/>
-                    <a:lstStyle/>
-                    <a:p>
-                      <a:r>
-                        <a:rPr sz="1100" b="0">
-                          <a:solidFill>
-                            <a:srgbClr val="282828"/>
-                          </a:solidFill>
-                          <a:latin typeface="Arial"/>
-                        </a:rPr>
-                        <a:t>1.04 / 4.7 nm</a:t>
+                        <a:t>Zernike linear</a:t>
+                      </a:r>
+                    </a:p>
+                  </a:txBody>
+                  <a:tcPr marL="54864" marR="54864" marT="18288" marB="18288">
+                    <a:solidFill>
+                      <a:srgbClr val="FFFFFF"/>
+                    </a:solidFill>
+                  </a:tcPr>
+                </a:tc>
+                <a:tc>
+                  <a:txBody>
+                    <a:bodyPr wrap="square"/>
+                    <a:lstStyle/>
+                    <a:p>
+                      <a:r>
+                        <a:rPr sz="1100" b="0">
+                          <a:solidFill>
+                            <a:srgbClr val="282828"/>
+                          </a:solidFill>
+                          <a:latin typeface="Arial"/>
+                        </a:rPr>
+                        <a:t>44 nm</a:t>
                       </a:r>
                     </a:p>
                   </a:txBody>
@@ -7225,7 +8738,7 @@
                           </a:solidFill>
                           <a:latin typeface="Arial"/>
                         </a:rPr>
-                        <a:t>Zernike, exact one frame (1)</a:t>
+                        <a:t>pinhole, no shutter frame</a:t>
                       </a:r>
                     </a:p>
                   </a:txBody>
@@ -7247,51 +8760,7 @@
                           </a:solidFill>
                           <a:latin typeface="Arial"/>
                         </a:rPr>
-                        <a:t>0.78 / 74 pm</a:t>
-                      </a:r>
-                    </a:p>
-                  </a:txBody>
-                  <a:tcPr marL="54864" marR="54864" marT="18288" marB="18288">
-                    <a:solidFill>
-                      <a:srgbClr val="ECF1F6"/>
-                    </a:solidFill>
-                  </a:tcPr>
-                </a:tc>
-                <a:tc>
-                  <a:txBody>
-                    <a:bodyPr wrap="square"/>
-                    <a:lstStyle/>
-                    <a:p>
-                      <a:r>
-                        <a:rPr sz="1100" b="0">
-                          <a:solidFill>
-                            <a:srgbClr val="282828"/>
-                          </a:solidFill>
-                          <a:latin typeface="Arial"/>
-                        </a:rPr>
-                        <a:t>0.90 / 35 pm</a:t>
-                      </a:r>
-                    </a:p>
-                  </a:txBody>
-                  <a:tcPr marL="54864" marR="54864" marT="18288" marB="18288">
-                    <a:solidFill>
-                      <a:srgbClr val="ECF1F6"/>
-                    </a:solidFill>
-                  </a:tcPr>
-                </a:tc>
-                <a:tc>
-                  <a:txBody>
-                    <a:bodyPr wrap="square"/>
-                    <a:lstStyle/>
-                    <a:p>
-                      <a:r>
-                        <a:rPr sz="1100" b="0">
-                          <a:solidFill>
-                            <a:srgbClr val="282828"/>
-                          </a:solidFill>
-                          <a:latin typeface="Arial"/>
-                        </a:rPr>
-                        <a:t>0.86 / 5.2 nm</a:t>
+                        <a:t>62 nm</a:t>
                       </a:r>
                     </a:p>
                   </a:txBody>
@@ -7315,79 +8784,81 @@
                           </a:solidFill>
                           <a:latin typeface="Arial"/>
                         </a:rPr>
-                        <a:t>Zernike, stepped (4)</a:t>
-                      </a:r>
-                    </a:p>
-                  </a:txBody>
-                  <a:tcPr marL="54864" marR="54864" marT="18288" marB="18288">
-                    <a:solidFill>
-                      <a:srgbClr val="FFFFFF"/>
-                    </a:solidFill>
-                  </a:tcPr>
-                </a:tc>
-                <a:tc>
-                  <a:txBody>
-                    <a:bodyPr wrap="square"/>
-                    <a:lstStyle/>
-                    <a:p>
-                      <a:r>
-                        <a:rPr sz="1100" b="0">
-                          <a:solidFill>
-                            <a:srgbClr val="282828"/>
-                          </a:solidFill>
-                          <a:latin typeface="Arial"/>
-                        </a:rPr>
-                        <a:t>0.989 / 5 pm / 2160</a:t>
-                      </a:r>
-                    </a:p>
-                  </a:txBody>
-                  <a:tcPr marL="54864" marR="54864" marT="18288" marB="18288">
-                    <a:solidFill>
-                      <a:srgbClr val="FFFFFF"/>
-                    </a:solidFill>
-                  </a:tcPr>
-                </a:tc>
-                <a:tc>
-                  <a:txBody>
-                    <a:bodyPr wrap="square"/>
-                    <a:lstStyle/>
-                    <a:p>
-                      <a:r>
-                        <a:rPr sz="1100" b="0">
-                          <a:solidFill>
-                            <a:srgbClr val="282828"/>
-                          </a:solidFill>
-                          <a:latin typeface="Arial"/>
-                        </a:rPr>
-                        <a:t>0.999 / 4 pm</a:t>
-                      </a:r>
-                    </a:p>
-                  </a:txBody>
-                  <a:tcPr marL="54864" marR="54864" marT="18288" marB="18288">
-                    <a:solidFill>
-                      <a:srgbClr val="FFFFFF"/>
-                    </a:solidFill>
-                  </a:tcPr>
-                </a:tc>
-                <a:tc>
-                  <a:txBody>
-                    <a:bodyPr wrap="square"/>
-                    <a:lstStyle/>
-                    <a:p>
-                      <a:r>
-                        <a:rPr sz="1100" b="0">
-                          <a:solidFill>
-                            <a:srgbClr val="282828"/>
-                          </a:solidFill>
-                          <a:latin typeface="Arial"/>
-                        </a:rPr>
-                        <a:t>0.984 / 0.68 nm</a:t>
-                      </a:r>
-                    </a:p>
-                  </a:txBody>
-                  <a:tcPr marL="54864" marR="54864" marT="18288" marB="18288">
-                    <a:solidFill>
-                      <a:srgbClr val="FFFFFF"/>
+                        <a:t>vector Zernike</a:t>
+                      </a:r>
+                    </a:p>
+                  </a:txBody>
+                  <a:tcPr marL="54864" marR="54864" marT="18288" marB="18288">
+                    <a:solidFill>
+                      <a:srgbClr val="FFFFFF"/>
+                    </a:solidFill>
+                  </a:tcPr>
+                </a:tc>
+                <a:tc>
+                  <a:txBody>
+                    <a:bodyPr wrap="square"/>
+                    <a:lstStyle/>
+                    <a:p>
+                      <a:r>
+                        <a:rPr sz="1100" b="0">
+                          <a:solidFill>
+                            <a:srgbClr val="282828"/>
+                          </a:solidFill>
+                          <a:latin typeface="Arial"/>
+                        </a:rPr>
+                        <a:t>70 nm</a:t>
+                      </a:r>
+                    </a:p>
+                  </a:txBody>
+                  <a:tcPr marL="54864" marR="54864" marT="18288" marB="18288">
+                    <a:solidFill>
+                      <a:srgbClr val="FFFFFF"/>
+                    </a:solidFill>
+                  </a:tcPr>
+                </a:tc>
+              </a:tr>
+              <a:tr h="468630">
+                <a:tc>
+                  <a:txBody>
+                    <a:bodyPr wrap="square"/>
+                    <a:lstStyle/>
+                    <a:p>
+                      <a:r>
+                        <a:rPr sz="1100" b="0">
+                          <a:solidFill>
+                            <a:srgbClr val="282828"/>
+                          </a:solidFill>
+                          <a:latin typeface="Arial"/>
+                        </a:rPr>
+                        <a:t>pinhole with a shutter frame</a:t>
+                      </a:r>
+                    </a:p>
+                  </a:txBody>
+                  <a:tcPr marL="54864" marR="54864" marT="18288" marB="18288">
+                    <a:solidFill>
+                      <a:srgbClr val="ECF1F6"/>
+                    </a:solidFill>
+                  </a:tcPr>
+                </a:tc>
+                <a:tc>
+                  <a:txBody>
+                    <a:bodyPr wrap="square"/>
+                    <a:lstStyle/>
+                    <a:p>
+                      <a:r>
+                        <a:rPr sz="1100" b="0">
+                          <a:solidFill>
+                            <a:srgbClr val="282828"/>
+                          </a:solidFill>
+                          <a:latin typeface="Arial"/>
+                        </a:rPr>
+                        <a:t>480 nm and beyond (1.02 / 1.06 / 1.13 at 120 / 240 / 480)</a:t>
+                      </a:r>
+                    </a:p>
+                  </a:txBody>
+                  <a:tcPr marL="54864" marR="54864" marT="18288" marB="18288">
+                    <a:solidFill>
+                      <a:srgbClr val="ECF1F6"/>
                     </a:solidFill>
                   </a:tcPr>
                 </a:tc>
@@ -7405,79 +8876,35 @@
                           </a:solidFill>
                           <a:latin typeface="Arial"/>
                         </a:rPr>
-                        <a:t>vector Zernike (2)</a:t>
-                      </a:r>
-                    </a:p>
-                  </a:txBody>
-                  <a:tcPr marL="54864" marR="54864" marT="18288" marB="18288">
-                    <a:solidFill>
-                      <a:srgbClr val="ECF1F6"/>
-                    </a:solidFill>
-                  </a:tcPr>
-                </a:tc>
-                <a:tc>
-                  <a:txBody>
-                    <a:bodyPr wrap="square"/>
-                    <a:lstStyle/>
-                    <a:p>
-                      <a:r>
-                        <a:rPr sz="1100" b="0">
-                          <a:solidFill>
-                            <a:srgbClr val="282828"/>
-                          </a:solidFill>
-                          <a:latin typeface="Arial"/>
-                        </a:rPr>
-                        <a:t>0.9935 / 4 pm / 2830</a:t>
-                      </a:r>
-                    </a:p>
-                  </a:txBody>
-                  <a:tcPr marL="54864" marR="54864" marT="18288" marB="18288">
-                    <a:solidFill>
-                      <a:srgbClr val="ECF1F6"/>
-                    </a:solidFill>
-                  </a:tcPr>
-                </a:tc>
-                <a:tc>
-                  <a:txBody>
-                    <a:bodyPr wrap="square"/>
-                    <a:lstStyle/>
-                    <a:p>
-                      <a:r>
-                        <a:rPr sz="1100" b="0">
-                          <a:solidFill>
-                            <a:srgbClr val="282828"/>
-                          </a:solidFill>
-                          <a:latin typeface="Arial"/>
-                        </a:rPr>
-                        <a:t>0.9992 / 3 pm</a:t>
-                      </a:r>
-                    </a:p>
-                  </a:txBody>
-                  <a:tcPr marL="54864" marR="54864" marT="18288" marB="18288">
-                    <a:solidFill>
-                      <a:srgbClr val="ECF1F6"/>
-                    </a:solidFill>
-                  </a:tcPr>
-                </a:tc>
-                <a:tc>
-                  <a:txBody>
-                    <a:bodyPr wrap="square"/>
-                    <a:lstStyle/>
-                    <a:p>
-                      <a:r>
-                        <a:rPr sz="1100" b="0">
-                          <a:solidFill>
-                            <a:srgbClr val="282828"/>
-                          </a:solidFill>
-                          <a:latin typeface="Arial"/>
-                        </a:rPr>
-                        <a:t>0.9999 / 0.33 nm</a:t>
-                      </a:r>
-                    </a:p>
-                  </a:txBody>
-                  <a:tcPr marL="54864" marR="54864" marT="18288" marB="18288">
-                    <a:solidFill>
-                      <a:srgbClr val="ECF1F6"/>
+                        <a:t>P/SRI</a:t>
+                      </a:r>
+                    </a:p>
+                  </a:txBody>
+                  <a:tcPr marL="54864" marR="54864" marT="18288" marB="18288">
+                    <a:solidFill>
+                      <a:srgbClr val="FFFFFF"/>
+                    </a:solidFill>
+                  </a:tcPr>
+                </a:tc>
+                <a:tc>
+                  <a:txBody>
+                    <a:bodyPr wrap="square"/>
+                    <a:lstStyle/>
+                    <a:p>
+                      <a:r>
+                        <a:rPr sz="1100" b="0">
+                          <a:solidFill>
+                            <a:srgbClr val="282828"/>
+                          </a:solidFill>
+                          <a:latin typeface="Arial"/>
+                        </a:rPr>
+                        <a:t>480 nm and beyond (within 1% at 100)</a:t>
+                      </a:r>
+                    </a:p>
+                  </a:txBody>
+                  <a:tcPr marL="54864" marR="54864" marT="18288" marB="18288">
+                    <a:solidFill>
+                      <a:srgbClr val="FFFFFF"/>
                     </a:solidFill>
                   </a:tcPr>
                 </a:tc>
@@ -7495,97 +8922,7 @@
                           </a:solidFill>
                           <a:latin typeface="Arial"/>
                         </a:rPr>
-                        <a:t>stepped pinhole (6)</a:t>
-                      </a:r>
-                    </a:p>
-                  </a:txBody>
-                  <a:tcPr marL="54864" marR="54864" marT="18288" marB="18288">
-                    <a:solidFill>
-                      <a:srgbClr val="FFFFFF"/>
-                    </a:solidFill>
-                  </a:tcPr>
-                </a:tc>
-                <a:tc>
-                  <a:txBody>
-                    <a:bodyPr wrap="square"/>
-                    <a:lstStyle/>
-                    <a:p>
-                      <a:r>
-                        <a:rPr sz="1100" b="0">
-                          <a:solidFill>
-                            <a:srgbClr val="282828"/>
-                          </a:solidFill>
-                          <a:latin typeface="Arial"/>
-                        </a:rPr>
-                        <a:t>0.9935 / 4 pm / 2790</a:t>
-                      </a:r>
-                    </a:p>
-                  </a:txBody>
-                  <a:tcPr marL="54864" marR="54864" marT="18288" marB="18288">
-                    <a:solidFill>
-                      <a:srgbClr val="FFFFFF"/>
-                    </a:solidFill>
-                  </a:tcPr>
-                </a:tc>
-                <a:tc>
-                  <a:txBody>
-                    <a:bodyPr wrap="square"/>
-                    <a:lstStyle/>
-                    <a:p>
-                      <a:r>
-                        <a:rPr sz="1100" b="0">
-                          <a:solidFill>
-                            <a:srgbClr val="282828"/>
-                          </a:solidFill>
-                          <a:latin typeface="Arial"/>
-                        </a:rPr>
-                        <a:t>0.9992 / 3 pm</a:t>
-                      </a:r>
-                    </a:p>
-                  </a:txBody>
-                  <a:tcPr marL="54864" marR="54864" marT="18288" marB="18288">
-                    <a:solidFill>
-                      <a:srgbClr val="FFFFFF"/>
-                    </a:solidFill>
-                  </a:tcPr>
-                </a:tc>
-                <a:tc>
-                  <a:txBody>
-                    <a:bodyPr wrap="square"/>
-                    <a:lstStyle/>
-                    <a:p>
-                      <a:r>
-                        <a:rPr sz="1100" b="0">
-                          <a:solidFill>
-                            <a:srgbClr val="282828"/>
-                          </a:solidFill>
-                          <a:latin typeface="Arial"/>
-                        </a:rPr>
-                        <a:t>0.9985 / 338 pm</a:t>
-                      </a:r>
-                    </a:p>
-                  </a:txBody>
-                  <a:tcPr marL="54864" marR="54864" marT="18288" marB="18288">
-                    <a:solidFill>
-                      <a:srgbClr val="FFFFFF"/>
-                    </a:solidFill>
-                  </a:tcPr>
-                </a:tc>
-              </a:tr>
-              <a:tr h="280035">
-                <a:tc>
-                  <a:txBody>
-                    <a:bodyPr wrap="square"/>
-                    <a:lstStyle/>
-                    <a:p>
-                      <a:r>
-                        <a:rPr sz="1100" b="0">
-                          <a:solidFill>
-                            <a:srgbClr val="282828"/>
-                          </a:solidFill>
-                          <a:latin typeface="Arial"/>
-                        </a:rPr>
-                        <a:t>P/SRI, reference arm traced (4)</a:t>
+                        <a:t>interferometer, lens rig</a:t>
                       </a:r>
                     </a:p>
                   </a:txBody>
@@ -7607,51 +8944,7 @@
                           </a:solidFill>
                           <a:latin typeface="Arial"/>
                         </a:rPr>
-                        <a:t>0.9935 / 2 pm / 4895</a:t>
-                      </a:r>
-                    </a:p>
-                  </a:txBody>
-                  <a:tcPr marL="54864" marR="54864" marT="18288" marB="18288">
-                    <a:solidFill>
-                      <a:srgbClr val="ECF1F6"/>
-                    </a:solidFill>
-                  </a:tcPr>
-                </a:tc>
-                <a:tc>
-                  <a:txBody>
-                    <a:bodyPr wrap="square"/>
-                    <a:lstStyle/>
-                    <a:p>
-                      <a:r>
-                        <a:rPr sz="1100" b="0">
-                          <a:solidFill>
-                            <a:srgbClr val="282828"/>
-                          </a:solidFill>
-                          <a:latin typeface="Arial"/>
-                        </a:rPr>
-                        <a:t>0.9924 / 1 pm</a:t>
-                      </a:r>
-                    </a:p>
-                  </a:txBody>
-                  <a:tcPr marL="54864" marR="54864" marT="18288" marB="18288">
-                    <a:solidFill>
-                      <a:srgbClr val="ECF1F6"/>
-                    </a:solidFill>
-                  </a:tcPr>
-                </a:tc>
-                <a:tc>
-                  <a:txBody>
-                    <a:bodyPr wrap="square"/>
-                    <a:lstStyle/>
-                    <a:p>
-                      <a:r>
-                        <a:rPr sz="1100" b="0">
-                          <a:solidFill>
-                            <a:srgbClr val="282828"/>
-                          </a:solidFill>
-                          <a:latin typeface="Arial"/>
-                        </a:rPr>
-                        <a:t>0.9926 / 144 pm</a:t>
+                        <a:t>322 nm single site; 480 and beyond on the grid</a:t>
                       </a:r>
                     </a:p>
                   </a:txBody>
@@ -7674,8 +8967,8 @@
         </p:nvSpPr>
         <p:spPr>
           <a:xfrm>
-            <a:off x="411480" y="3965066"/>
-            <a:ext cx="11368735" cy="274320"/>
+            <a:off x="6400800" y="1298448"/>
+            <a:ext cx="5394960" cy="274320"/>
           </a:xfrm>
           <a:prstGeom prst="rect">
             <a:avLst/>
@@ -7694,13 +8987,13 @@
               </a:spcAft>
             </a:pPr>
             <a:r>
-              <a:rPr sz="1500" b="0">
+              <a:rPr sz="1200" b="0">
                 <a:solidFill>
                   <a:srgbClr val="282828"/>
                 </a:solidFill>
                 <a:latin typeface="Arial"/>
               </a:rPr>
-              <a:t>•  The one-frame Zernike readings lose: the linear one is biased 4-5% and floors at 21 pm; the exact one-frame reading misreads the sign past the quarter-wave fold (7.8% of pixels on this surface) and diverges in a servo.</a:t>
+              <a:t>•  Why the sensors age: their reference is made from the beam's own core, and the core changes with the surface.  Past 100 nm rms (2 rad of phase) the core collapses and the reading goes blind.</a:t>
             </a:r>
           </a:p>
           <a:p>
@@ -7710,13 +9003,29 @@
               </a:spcAft>
             </a:pPr>
             <a:r>
-              <a:rPr sz="1500" b="0">
+              <a:rPr sz="1200" b="0">
                 <a:solidFill>
                   <a:srgbClr val="282828"/>
                 </a:solidFill>
                 <a:latin typeface="Arial"/>
               </a:rPr>
-              <a:t>•  The interferometer's 52-site rows count the sites its pupil lights; the others use 47.  The interferometer's dense-pattern error, 168 pm against 0.33-0.68 nm, is its reference arm: it does not make its reference from the beam.</a:t>
+              <a:t>•  The shutter frame fixes the pinhole's version of this: measuring the reference by itself each state removes the surface dependence, for one more frame.</a:t>
+            </a:r>
+          </a:p>
+          <a:p>
+            <a:pPr>
+              <a:spcAft>
+                <a:spcPts val="600"/>
+              </a:spcAft>
+            </a:pPr>
+            <a:r>
+              <a:rPr sz="1200" b="0">
+                <a:solidFill>
+                  <a:srgbClr val="282828"/>
+                </a:solidFill>
+                <a:latin typeface="Arial"/>
+              </a:rPr>
+              <a:t>•  Re-measuring the matrix on the surface restores every reading's gain to within 5% at 60-160 nm — at a photon price (next slide).</a:t>
             </a:r>
           </a:p>
         </p:txBody>
@@ -7729,8 +9038,8 @@
         </p:nvSpPr>
         <p:spPr>
           <a:xfrm>
-            <a:off x="411480" y="5272659"/>
-            <a:ext cx="11368735" cy="274320"/>
+            <a:off x="6400800" y="3340608"/>
+            <a:ext cx="5394960" cy="274320"/>
           </a:xfrm>
           <a:prstGeom prst="rect">
             <a:avLst/>
@@ -7755,7 +9064,7 @@
                 </a:solidFill>
                 <a:latin typeface="Arial"/>
               </a:rPr>
-              <a:t>Run tags: lens_deck, oap_deck, matbase, matbase385, v193base, pdi193fbase, pfdeck.  The interferometer rows are at 385 pixels per pupil, the rest at 193; the 385 checks read the same.  The sensor rows re-run on the 22.5° bench of record (gate22_193) hold to the digit: stepped 0.989 / 5 pm, vector 0.994 / 3, pinhole 0.994 / 3 on one actuator; 0.998 / 4, 0.998 / 3, 0.998 / 3 on 47 sites.</a:t>
+              <a:t>Run tags cap385, cap385p, pdi193state, lens_deck, oap_deck; 385 pixels per pupil, 47 sites (52 for the interferometer).</a:t>
             </a:r>
           </a:p>
         </p:txBody>
@@ -7768,7 +9077,7 @@
 </p:sld>
 </file>
 
-<file path=ppt/slides/slide21.xml><?xml version="1.0" encoding="utf-8"?>
+<file path=ppt/slides/slide23.xml><?xml version="1.0" encoding="utf-8"?>
 <p:sld xmlns:a="http://schemas.openxmlformats.org/drawingml/2006/main" xmlns:p="http://schemas.openxmlformats.org/presentationml/2006/main" xmlns:r="http://schemas.openxmlformats.org/officeDocument/2006/relationships">
   <p:cSld>
     <p:spTree>
@@ -7812,7 +9121,7 @@
                 </a:solidFill>
                 <a:latin typeface="Arial"/>
               </a:rPr>
-              <a:t>Capture range: how far from null each reading works</a:t>
+              <a:t>Capture range, second half: the photon price of working off null</a:t>
             </a:r>
           </a:p>
           <a:p>
@@ -7828,7 +9137,7 @@
                 </a:solidFill>
                 <a:latin typeface="Arial"/>
               </a:rPr>
-              <a:t>With the calibration left as measured at 30 nm, the self-referenced sensors hold 10% accuracy only to 36-70 nm of surface; the externally referenced ones, and the pinhole with its shutter frame, hold to 480 nm and beyond</a:t>
+              <a:t>The matrix re-measured on the surface holds the gain; the light for 1 pm then rises 5-40× for the self-referenced sensors and not at all for the P/SRI</a:t>
             </a:r>
           </a:p>
         </p:txBody>
@@ -7887,673 +9196,6 @@
         </p:nvGraphicFramePr>
         <p:xfrm>
           <a:off x="411480" y="1298448"/>
-          <a:ext cx="5806439" cy="2708910"/>
-        </p:xfrm>
-        <a:graphic>
-          <a:graphicData uri="http://schemas.openxmlformats.org/drawingml/2006/table">
-            <a:tbl>
-              <a:tblPr firstRow="1" bandRow="1">
-                <a:tableStyleId>{5C22544A-7EE6-4342-B048-85BDC9FD1C3A}</a:tableStyleId>
-              </a:tblPr>
-              <a:tblGrid>
-                <a:gridCol w="1912709"/>
-                <a:gridCol w="3893730"/>
-              </a:tblGrid>
-              <a:tr h="280035">
-                <a:tc>
-                  <a:txBody>
-                    <a:bodyPr wrap="square"/>
-                    <a:lstStyle/>
-                    <a:p>
-                      <a:r>
-                        <a:rPr sz="1100" b="1">
-                          <a:solidFill>
-                            <a:srgbClr val="FFFFFF"/>
-                          </a:solidFill>
-                          <a:latin typeface="Arial"/>
-                        </a:rPr>
-                        <a:t>reading</a:t>
-                      </a:r>
-                    </a:p>
-                  </a:txBody>
-                  <a:tcPr marL="54864" marR="54864" marT="18288" marB="18288">
-                    <a:solidFill>
-                      <a:srgbClr val="1F4E79"/>
-                    </a:solidFill>
-                  </a:tcPr>
-                </a:tc>
-                <a:tc>
-                  <a:txBody>
-                    <a:bodyPr wrap="square"/>
-                    <a:lstStyle/>
-                    <a:p>
-                      <a:r>
-                        <a:rPr sz="1100" b="1">
-                          <a:solidFill>
-                            <a:srgbClr val="FFFFFF"/>
-                          </a:solidFill>
-                          <a:latin typeface="Arial"/>
-                        </a:rPr>
-                        <a:t>range to 10%, calibration aging from 30 nm</a:t>
-                      </a:r>
-                    </a:p>
-                  </a:txBody>
-                  <a:tcPr marL="54864" marR="54864" marT="18288" marB="18288">
-                    <a:solidFill>
-                      <a:srgbClr val="1F4E79"/>
-                    </a:solidFill>
-                  </a:tcPr>
-                </a:tc>
-              </a:tr>
-              <a:tr h="280035">
-                <a:tc>
-                  <a:txBody>
-                    <a:bodyPr wrap="square"/>
-                    <a:lstStyle/>
-                    <a:p>
-                      <a:r>
-                        <a:rPr sz="1100" b="0">
-                          <a:solidFill>
-                            <a:srgbClr val="282828"/>
-                          </a:solidFill>
-                          <a:latin typeface="Arial"/>
-                        </a:rPr>
-                        <a:t>Zernike exact one frame</a:t>
-                      </a:r>
-                    </a:p>
-                  </a:txBody>
-                  <a:tcPr marL="54864" marR="54864" marT="18288" marB="18288">
-                    <a:solidFill>
-                      <a:srgbClr val="FFFFFF"/>
-                    </a:solidFill>
-                  </a:tcPr>
-                </a:tc>
-                <a:tc>
-                  <a:txBody>
-                    <a:bodyPr wrap="square"/>
-                    <a:lstStyle/>
-                    <a:p>
-                      <a:r>
-                        <a:rPr sz="1100" b="0">
-                          <a:solidFill>
-                            <a:srgbClr val="282828"/>
-                          </a:solidFill>
-                          <a:latin typeface="Arial"/>
-                        </a:rPr>
-                        <a:t>36 nm</a:t>
-                      </a:r>
-                    </a:p>
-                  </a:txBody>
-                  <a:tcPr marL="54864" marR="54864" marT="18288" marB="18288">
-                    <a:solidFill>
-                      <a:srgbClr val="FFFFFF"/>
-                    </a:solidFill>
-                  </a:tcPr>
-                </a:tc>
-              </a:tr>
-              <a:tr h="280035">
-                <a:tc>
-                  <a:txBody>
-                    <a:bodyPr wrap="square"/>
-                    <a:lstStyle/>
-                    <a:p>
-                      <a:r>
-                        <a:rPr sz="1100" b="0">
-                          <a:solidFill>
-                            <a:srgbClr val="282828"/>
-                          </a:solidFill>
-                          <a:latin typeface="Arial"/>
-                        </a:rPr>
-                        <a:t>Zernike stepped</a:t>
-                      </a:r>
-                    </a:p>
-                  </a:txBody>
-                  <a:tcPr marL="54864" marR="54864" marT="18288" marB="18288">
-                    <a:solidFill>
-                      <a:srgbClr val="ECF1F6"/>
-                    </a:solidFill>
-                  </a:tcPr>
-                </a:tc>
-                <a:tc>
-                  <a:txBody>
-                    <a:bodyPr wrap="square"/>
-                    <a:lstStyle/>
-                    <a:p>
-                      <a:r>
-                        <a:rPr sz="1100" b="0">
-                          <a:solidFill>
-                            <a:srgbClr val="282828"/>
-                          </a:solidFill>
-                          <a:latin typeface="Arial"/>
-                        </a:rPr>
-                        <a:t>42 nm</a:t>
-                      </a:r>
-                    </a:p>
-                  </a:txBody>
-                  <a:tcPr marL="54864" marR="54864" marT="18288" marB="18288">
-                    <a:solidFill>
-                      <a:srgbClr val="ECF1F6"/>
-                    </a:solidFill>
-                  </a:tcPr>
-                </a:tc>
-              </a:tr>
-              <a:tr h="280035">
-                <a:tc>
-                  <a:txBody>
-                    <a:bodyPr wrap="square"/>
-                    <a:lstStyle/>
-                    <a:p>
-                      <a:r>
-                        <a:rPr sz="1100" b="0">
-                          <a:solidFill>
-                            <a:srgbClr val="282828"/>
-                          </a:solidFill>
-                          <a:latin typeface="Arial"/>
-                        </a:rPr>
-                        <a:t>Zernike linear</a:t>
-                      </a:r>
-                    </a:p>
-                  </a:txBody>
-                  <a:tcPr marL="54864" marR="54864" marT="18288" marB="18288">
-                    <a:solidFill>
-                      <a:srgbClr val="FFFFFF"/>
-                    </a:solidFill>
-                  </a:tcPr>
-                </a:tc>
-                <a:tc>
-                  <a:txBody>
-                    <a:bodyPr wrap="square"/>
-                    <a:lstStyle/>
-                    <a:p>
-                      <a:r>
-                        <a:rPr sz="1100" b="0">
-                          <a:solidFill>
-                            <a:srgbClr val="282828"/>
-                          </a:solidFill>
-                          <a:latin typeface="Arial"/>
-                        </a:rPr>
-                        <a:t>44 nm</a:t>
-                      </a:r>
-                    </a:p>
-                  </a:txBody>
-                  <a:tcPr marL="54864" marR="54864" marT="18288" marB="18288">
-                    <a:solidFill>
-                      <a:srgbClr val="FFFFFF"/>
-                    </a:solidFill>
-                  </a:tcPr>
-                </a:tc>
-              </a:tr>
-              <a:tr h="280035">
-                <a:tc>
-                  <a:txBody>
-                    <a:bodyPr wrap="square"/>
-                    <a:lstStyle/>
-                    <a:p>
-                      <a:r>
-                        <a:rPr sz="1100" b="0">
-                          <a:solidFill>
-                            <a:srgbClr val="282828"/>
-                          </a:solidFill>
-                          <a:latin typeface="Arial"/>
-                        </a:rPr>
-                        <a:t>pinhole, no shutter frame</a:t>
-                      </a:r>
-                    </a:p>
-                  </a:txBody>
-                  <a:tcPr marL="54864" marR="54864" marT="18288" marB="18288">
-                    <a:solidFill>
-                      <a:srgbClr val="ECF1F6"/>
-                    </a:solidFill>
-                  </a:tcPr>
-                </a:tc>
-                <a:tc>
-                  <a:txBody>
-                    <a:bodyPr wrap="square"/>
-                    <a:lstStyle/>
-                    <a:p>
-                      <a:r>
-                        <a:rPr sz="1100" b="0">
-                          <a:solidFill>
-                            <a:srgbClr val="282828"/>
-                          </a:solidFill>
-                          <a:latin typeface="Arial"/>
-                        </a:rPr>
-                        <a:t>62 nm</a:t>
-                      </a:r>
-                    </a:p>
-                  </a:txBody>
-                  <a:tcPr marL="54864" marR="54864" marT="18288" marB="18288">
-                    <a:solidFill>
-                      <a:srgbClr val="ECF1F6"/>
-                    </a:solidFill>
-                  </a:tcPr>
-                </a:tc>
-              </a:tr>
-              <a:tr h="280035">
-                <a:tc>
-                  <a:txBody>
-                    <a:bodyPr wrap="square"/>
-                    <a:lstStyle/>
-                    <a:p>
-                      <a:r>
-                        <a:rPr sz="1100" b="0">
-                          <a:solidFill>
-                            <a:srgbClr val="282828"/>
-                          </a:solidFill>
-                          <a:latin typeface="Arial"/>
-                        </a:rPr>
-                        <a:t>vector Zernike</a:t>
-                      </a:r>
-                    </a:p>
-                  </a:txBody>
-                  <a:tcPr marL="54864" marR="54864" marT="18288" marB="18288">
-                    <a:solidFill>
-                      <a:srgbClr val="FFFFFF"/>
-                    </a:solidFill>
-                  </a:tcPr>
-                </a:tc>
-                <a:tc>
-                  <a:txBody>
-                    <a:bodyPr wrap="square"/>
-                    <a:lstStyle/>
-                    <a:p>
-                      <a:r>
-                        <a:rPr sz="1100" b="0">
-                          <a:solidFill>
-                            <a:srgbClr val="282828"/>
-                          </a:solidFill>
-                          <a:latin typeface="Arial"/>
-                        </a:rPr>
-                        <a:t>70 nm</a:t>
-                      </a:r>
-                    </a:p>
-                  </a:txBody>
-                  <a:tcPr marL="54864" marR="54864" marT="18288" marB="18288">
-                    <a:solidFill>
-                      <a:srgbClr val="FFFFFF"/>
-                    </a:solidFill>
-                  </a:tcPr>
-                </a:tc>
-              </a:tr>
-              <a:tr h="468630">
-                <a:tc>
-                  <a:txBody>
-                    <a:bodyPr wrap="square"/>
-                    <a:lstStyle/>
-                    <a:p>
-                      <a:r>
-                        <a:rPr sz="1100" b="0">
-                          <a:solidFill>
-                            <a:srgbClr val="282828"/>
-                          </a:solidFill>
-                          <a:latin typeface="Arial"/>
-                        </a:rPr>
-                        <a:t>pinhole with a shutter frame</a:t>
-                      </a:r>
-                    </a:p>
-                  </a:txBody>
-                  <a:tcPr marL="54864" marR="54864" marT="18288" marB="18288">
-                    <a:solidFill>
-                      <a:srgbClr val="ECF1F6"/>
-                    </a:solidFill>
-                  </a:tcPr>
-                </a:tc>
-                <a:tc>
-                  <a:txBody>
-                    <a:bodyPr wrap="square"/>
-                    <a:lstStyle/>
-                    <a:p>
-                      <a:r>
-                        <a:rPr sz="1100" b="0">
-                          <a:solidFill>
-                            <a:srgbClr val="282828"/>
-                          </a:solidFill>
-                          <a:latin typeface="Arial"/>
-                        </a:rPr>
-                        <a:t>480 nm and beyond (1.02 / 1.06 / 1.13 at 120 / 240 / 480)</a:t>
-                      </a:r>
-                    </a:p>
-                  </a:txBody>
-                  <a:tcPr marL="54864" marR="54864" marT="18288" marB="18288">
-                    <a:solidFill>
-                      <a:srgbClr val="ECF1F6"/>
-                    </a:solidFill>
-                  </a:tcPr>
-                </a:tc>
-              </a:tr>
-              <a:tr h="280035">
-                <a:tc>
-                  <a:txBody>
-                    <a:bodyPr wrap="square"/>
-                    <a:lstStyle/>
-                    <a:p>
-                      <a:r>
-                        <a:rPr sz="1100" b="0">
-                          <a:solidFill>
-                            <a:srgbClr val="282828"/>
-                          </a:solidFill>
-                          <a:latin typeface="Arial"/>
-                        </a:rPr>
-                        <a:t>P/SRI</a:t>
-                      </a:r>
-                    </a:p>
-                  </a:txBody>
-                  <a:tcPr marL="54864" marR="54864" marT="18288" marB="18288">
-                    <a:solidFill>
-                      <a:srgbClr val="FFFFFF"/>
-                    </a:solidFill>
-                  </a:tcPr>
-                </a:tc>
-                <a:tc>
-                  <a:txBody>
-                    <a:bodyPr wrap="square"/>
-                    <a:lstStyle/>
-                    <a:p>
-                      <a:r>
-                        <a:rPr sz="1100" b="0">
-                          <a:solidFill>
-                            <a:srgbClr val="282828"/>
-                          </a:solidFill>
-                          <a:latin typeface="Arial"/>
-                        </a:rPr>
-                        <a:t>480 nm and beyond (within 1% at 100)</a:t>
-                      </a:r>
-                    </a:p>
-                  </a:txBody>
-                  <a:tcPr marL="54864" marR="54864" marT="18288" marB="18288">
-                    <a:solidFill>
-                      <a:srgbClr val="FFFFFF"/>
-                    </a:solidFill>
-                  </a:tcPr>
-                </a:tc>
-              </a:tr>
-              <a:tr h="280035">
-                <a:tc>
-                  <a:txBody>
-                    <a:bodyPr wrap="square"/>
-                    <a:lstStyle/>
-                    <a:p>
-                      <a:r>
-                        <a:rPr sz="1100" b="0">
-                          <a:solidFill>
-                            <a:srgbClr val="282828"/>
-                          </a:solidFill>
-                          <a:latin typeface="Arial"/>
-                        </a:rPr>
-                        <a:t>interferometer, lens rig</a:t>
-                      </a:r>
-                    </a:p>
-                  </a:txBody>
-                  <a:tcPr marL="54864" marR="54864" marT="18288" marB="18288">
-                    <a:solidFill>
-                      <a:srgbClr val="ECF1F6"/>
-                    </a:solidFill>
-                  </a:tcPr>
-                </a:tc>
-                <a:tc>
-                  <a:txBody>
-                    <a:bodyPr wrap="square"/>
-                    <a:lstStyle/>
-                    <a:p>
-                      <a:r>
-                        <a:rPr sz="1100" b="0">
-                          <a:solidFill>
-                            <a:srgbClr val="282828"/>
-                          </a:solidFill>
-                          <a:latin typeface="Arial"/>
-                        </a:rPr>
-                        <a:t>322 nm single site; 480 and beyond on the grid</a:t>
-                      </a:r>
-                    </a:p>
-                  </a:txBody>
-                  <a:tcPr marL="54864" marR="54864" marT="18288" marB="18288">
-                    <a:solidFill>
-                      <a:srgbClr val="ECF1F6"/>
-                    </a:solidFill>
-                  </a:tcPr>
-                </a:tc>
-              </a:tr>
-            </a:tbl>
-          </a:graphicData>
-        </a:graphic>
-      </p:graphicFrame>
-      <p:sp>
-        <p:nvSpPr>
-          <p:cNvPr id="5" name="TextBox 4"/>
-          <p:cNvSpPr txBox="1"/>
-          <p:nvPr/>
-        </p:nvSpPr>
-        <p:spPr>
-          <a:xfrm>
-            <a:off x="6400800" y="1298448"/>
-            <a:ext cx="5394960" cy="274320"/>
-          </a:xfrm>
-          <a:prstGeom prst="rect">
-            <a:avLst/>
-          </a:prstGeom>
-          <a:noFill/>
-        </p:spPr>
-        <p:txBody>
-          <a:bodyPr wrap="square">
-            <a:spAutoFit/>
-          </a:bodyPr>
-          <a:lstStyle/>
-          <a:p>
-            <a:pPr>
-              <a:spcAft>
-                <a:spcPts val="600"/>
-              </a:spcAft>
-            </a:pPr>
-            <a:r>
-              <a:rPr sz="1200" b="0">
-                <a:solidFill>
-                  <a:srgbClr val="282828"/>
-                </a:solidFill>
-                <a:latin typeface="Arial"/>
-              </a:rPr>
-              <a:t>•  Why the sensors age: their reference is made from the beam's own core, and the core changes with the surface.  Past 100 nm rms (2 rad of phase) the core collapses and the reading goes blind.</a:t>
-            </a:r>
-          </a:p>
-          <a:p>
-            <a:pPr>
-              <a:spcAft>
-                <a:spcPts val="600"/>
-              </a:spcAft>
-            </a:pPr>
-            <a:r>
-              <a:rPr sz="1200" b="0">
-                <a:solidFill>
-                  <a:srgbClr val="282828"/>
-                </a:solidFill>
-                <a:latin typeface="Arial"/>
-              </a:rPr>
-              <a:t>•  The shutter frame fixes the pinhole's version of this: measuring the reference by itself each state removes the surface dependence, for one more frame.</a:t>
-            </a:r>
-          </a:p>
-          <a:p>
-            <a:pPr>
-              <a:spcAft>
-                <a:spcPts val="600"/>
-              </a:spcAft>
-            </a:pPr>
-            <a:r>
-              <a:rPr sz="1200" b="0">
-                <a:solidFill>
-                  <a:srgbClr val="282828"/>
-                </a:solidFill>
-                <a:latin typeface="Arial"/>
-              </a:rPr>
-              <a:t>•  Re-measuring the matrix on the surface restores every reading's gain to within 5% at 60-160 nm — at a photon price (next slide).</a:t>
-            </a:r>
-          </a:p>
-        </p:txBody>
-      </p:sp>
-      <p:sp>
-        <p:nvSpPr>
-          <p:cNvPr id="6" name="TextBox 5"/>
-          <p:cNvSpPr txBox="1"/>
-          <p:nvPr/>
-        </p:nvSpPr>
-        <p:spPr>
-          <a:xfrm>
-            <a:off x="6400800" y="3340608"/>
-            <a:ext cx="5394960" cy="274320"/>
-          </a:xfrm>
-          <a:prstGeom prst="rect">
-            <a:avLst/>
-          </a:prstGeom>
-          <a:noFill/>
-        </p:spPr>
-        <p:txBody>
-          <a:bodyPr wrap="square">
-            <a:spAutoFit/>
-          </a:bodyPr>
-          <a:lstStyle/>
-          <a:p>
-            <a:pPr>
-              <a:spcAft>
-                <a:spcPts val="600"/>
-              </a:spcAft>
-            </a:pPr>
-            <a:r>
-              <a:rPr sz="1050" b="0">
-                <a:solidFill>
-                  <a:srgbClr val="6E6E6E"/>
-                </a:solidFill>
-                <a:latin typeface="Arial"/>
-              </a:rPr>
-              <a:t>Run tags cap385, cap385p, pdi193state, lens_deck, oap_deck; 385 pixels per pupil, 47 sites (52 for the interferometer).</a:t>
-            </a:r>
-          </a:p>
-        </p:txBody>
-      </p:sp>
-    </p:spTree>
-  </p:cSld>
-  <p:clrMapOvr>
-    <a:masterClrMapping/>
-  </p:clrMapOvr>
-</p:sld>
-</file>
-
-<file path=ppt/slides/slide22.xml><?xml version="1.0" encoding="utf-8"?>
-<p:sld xmlns:a="http://schemas.openxmlformats.org/drawingml/2006/main" xmlns:p="http://schemas.openxmlformats.org/presentationml/2006/main" xmlns:r="http://schemas.openxmlformats.org/officeDocument/2006/relationships">
-  <p:cSld>
-    <p:spTree>
-      <p:nvGrpSpPr>
-        <p:cNvPr id="1" name=""/>
-        <p:cNvGrpSpPr/>
-        <p:nvPr/>
-      </p:nvGrpSpPr>
-      <p:grpSpPr/>
-      <p:sp>
-        <p:nvSpPr>
-          <p:cNvPr id="2" name="TextBox 1"/>
-          <p:cNvSpPr txBox="1"/>
-          <p:nvPr/>
-        </p:nvSpPr>
-        <p:spPr>
-          <a:xfrm>
-            <a:off x="411480" y="201168"/>
-            <a:ext cx="11368735" cy="914400"/>
-          </a:xfrm>
-          <a:prstGeom prst="rect">
-            <a:avLst/>
-          </a:prstGeom>
-          <a:noFill/>
-        </p:spPr>
-        <p:txBody>
-          <a:bodyPr wrap="square">
-            <a:spAutoFit/>
-          </a:bodyPr>
-          <a:lstStyle/>
-          <a:p>
-            <a:pPr>
-              <a:spcAft>
-                <a:spcPts val="400"/>
-              </a:spcAft>
-            </a:pPr>
-            <a:r>
-              <a:rPr sz="2400" b="1">
-                <a:solidFill>
-                  <a:srgbClr val="1F4E79"/>
-                </a:solidFill>
-                <a:latin typeface="Arial"/>
-              </a:rPr>
-              <a:t>Capture range, second half: the photon price of working off null</a:t>
-            </a:r>
-          </a:p>
-          <a:p>
-            <a:pPr>
-              <a:spcAft>
-                <a:spcPts val="0"/>
-              </a:spcAft>
-            </a:pPr>
-            <a:r>
-              <a:rPr sz="1250" b="0">
-                <a:solidFill>
-                  <a:srgbClr val="6E6E6E"/>
-                </a:solidFill>
-                <a:latin typeface="Arial"/>
-              </a:rPr>
-              <a:t>The matrix re-measured on the surface holds the gain; the light for 1 pm then rises 5-40× for the self-referenced sensors and not at all for the P/SRI</a:t>
-            </a:r>
-          </a:p>
-        </p:txBody>
-      </p:sp>
-      <p:sp>
-        <p:nvSpPr>
-          <p:cNvPr id="3" name="Rectangle 2"/>
-          <p:cNvSpPr/>
-          <p:nvPr/>
-        </p:nvSpPr>
-        <p:spPr>
-          <a:xfrm>
-            <a:off x="411480" y="1133856"/>
-            <a:ext cx="11368735" cy="20320"/>
-          </a:xfrm>
-          <a:prstGeom prst="rect">
-            <a:avLst/>
-          </a:prstGeom>
-          <a:solidFill>
-            <a:srgbClr val="B8C6D4"/>
-          </a:solidFill>
-          <a:ln>
-            <a:noFill/>
-          </a:ln>
-          <a:effectLst/>
-        </p:spPr>
-        <p:style>
-          <a:lnRef idx="1">
-            <a:schemeClr val="accent1"/>
-          </a:lnRef>
-          <a:fillRef idx="3">
-            <a:schemeClr val="accent1"/>
-          </a:fillRef>
-          <a:effectRef idx="2">
-            <a:schemeClr val="accent1"/>
-          </a:effectRef>
-          <a:fontRef idx="minor">
-            <a:schemeClr val="lt1"/>
-          </a:fontRef>
-        </p:style>
-        <p:txBody>
-          <a:bodyPr rtlCol="0" anchor="ctr"/>
-          <a:lstStyle/>
-          <a:p>
-            <a:pPr algn="ctr"/>
-          </a:p>
-        </p:txBody>
-      </p:sp>
-      <p:graphicFrame>
-        <p:nvGraphicFramePr>
-          <p:cNvPr id="4" name="Table 3"/>
-          <p:cNvGraphicFramePr>
-            <a:graphicFrameLocks noGrp="1"/>
-          </p:cNvGraphicFramePr>
-          <p:nvPr/>
-        </p:nvGraphicFramePr>
-        <p:xfrm>
-          <a:off x="411480" y="1298448"/>
           <a:ext cx="11368734" cy="3463290"/>
         </p:xfrm>
         <a:graphic>
@@ -9269,7 +9911,7 @@
 </p:sld>
 </file>
 
-<file path=ppt/slides/slide23.xml><?xml version="1.0" encoding="utf-8"?>
+<file path=ppt/slides/slide24.xml><?xml version="1.0" encoding="utf-8"?>
 <p:sld xmlns:a="http://schemas.openxmlformats.org/drawingml/2006/main" xmlns:p="http://schemas.openxmlformats.org/presentationml/2006/main" xmlns:r="http://schemas.openxmlformats.org/officeDocument/2006/relationships">
   <p:cSld>
     <p:spTree>
@@ -10127,7 +10769,7 @@
 </p:sld>
 </file>
 
-<file path=ppt/slides/slide24.xml><?xml version="1.0" encoding="utf-8"?>
+<file path=ppt/slides/slide25.xml><?xml version="1.0" encoding="utf-8"?>
 <p:sld xmlns:a="http://schemas.openxmlformats.org/drawingml/2006/main" xmlns:p="http://schemas.openxmlformats.org/presentationml/2006/main" xmlns:r="http://schemas.openxmlformats.org/officeDocument/2006/relationships">
   <p:cSld>
     <p:spTree>
@@ -11719,7 +12361,7 @@
 </p:sld>
 </file>
 
-<file path=ppt/slides/slide25.xml><?xml version="1.0" encoding="utf-8"?>
+<file path=ppt/slides/slide26.xml><?xml version="1.0" encoding="utf-8"?>
 <p:sld xmlns:a="http://schemas.openxmlformats.org/drawingml/2006/main" xmlns:p="http://schemas.openxmlformats.org/presentationml/2006/main" xmlns:r="http://schemas.openxmlformats.org/officeDocument/2006/relationships">
   <p:cSld>
     <p:spTree>
@@ -12585,7 +13227,7 @@
 </p:sld>
 </file>
 
-<file path=ppt/slides/slide26.xml><?xml version="1.0" encoding="utf-8"?>
+<file path=ppt/slides/slide27.xml><?xml version="1.0" encoding="utf-8"?>
 <p:sld xmlns:a="http://schemas.openxmlformats.org/drawingml/2006/main" xmlns:p="http://schemas.openxmlformats.org/presentationml/2006/main" xmlns:r="http://schemas.openxmlformats.org/officeDocument/2006/relationships">
   <p:cSld>
     <p:spTree>
@@ -13577,7 +14219,7 @@
 </p:sld>
 </file>
 
-<file path=ppt/slides/slide27.xml><?xml version="1.0" encoding="utf-8"?>
+<file path=ppt/slides/slide28.xml><?xml version="1.0" encoding="utf-8"?>
 <p:sld xmlns:a="http://schemas.openxmlformats.org/drawingml/2006/main" xmlns:p="http://schemas.openxmlformats.org/presentationml/2006/main" xmlns:r="http://schemas.openxmlformats.org/officeDocument/2006/relationships">
   <p:cSld>
     <p:spTree>
@@ -14276,7 +14918,7 @@
 </p:sld>
 </file>
 
-<file path=ppt/slides/slide28.xml><?xml version="1.0" encoding="utf-8"?>
+<file path=ppt/slides/slide29.xml><?xml version="1.0" encoding="utf-8"?>
 <p:sld xmlns:a="http://schemas.openxmlformats.org/drawingml/2006/main" xmlns:p="http://schemas.openxmlformats.org/presentationml/2006/main" xmlns:r="http://schemas.openxmlformats.org/officeDocument/2006/relationships">
   <p:cSld>
     <p:spTree>
@@ -15315,7 +15957,7 @@
 </p:sld>
 </file>
 
-<file path=ppt/slides/slide29.xml><?xml version="1.0" encoding="utf-8"?>
+<file path=ppt/slides/slide3.xml><?xml version="1.0" encoding="utf-8"?>
 <p:sld xmlns:a="http://schemas.openxmlformats.org/drawingml/2006/main" xmlns:p="http://schemas.openxmlformats.org/presentationml/2006/main" xmlns:r="http://schemas.openxmlformats.org/officeDocument/2006/relationships">
   <p:cSld>
     <p:spTree>
@@ -15359,7 +16001,7 @@
                 </a:solidFill>
                 <a:latin typeface="Arial"/>
               </a:rPr>
-              <a:t>What can spoil each reading, priced</a:t>
+              <a:t>The three jobs, and how each is scored</a:t>
             </a:r>
           </a:p>
           <a:p>
@@ -15375,7 +16017,7 @@
                 </a:solidFill>
                 <a:latin typeface="Arial"/>
               </a:rPr>
-              <a:t>Every systematic we could model is either calibrated by the response matrix measured through the sensor, or shown small; one line per approach</a:t>
+              <a:t>Measure the mirror's surface to picometers; capture its post-launch shape, 100-200 nm of wavefront, into the servo's reach; hold it there in a servo</a:t>
             </a:r>
           </a:p>
         </p:txBody>
@@ -15424,17 +16066,104 @@
           </a:p>
         </p:txBody>
       </p:sp>
+      <p:sp>
+        <p:nvSpPr>
+          <p:cNvPr id="4" name="TextBox 3"/>
+          <p:cNvSpPr txBox="1"/>
+          <p:nvPr/>
+        </p:nvSpPr>
+        <p:spPr>
+          <a:xfrm>
+            <a:off x="411480" y="1298448"/>
+            <a:ext cx="5806440" cy="274320"/>
+          </a:xfrm>
+          <a:prstGeom prst="rect">
+            <a:avLst/>
+          </a:prstGeom>
+          <a:noFill/>
+        </p:spPr>
+        <p:txBody>
+          <a:bodyPr wrap="square">
+            <a:spAutoFit/>
+          </a:bodyPr>
+          <a:lstStyle/>
+          <a:p>
+            <a:pPr>
+              <a:spcAft>
+                <a:spcPts val="600"/>
+              </a:spcAft>
+            </a:pPr>
+            <a:r>
+              <a:rPr sz="1200" b="0">
+                <a:solidFill>
+                  <a:srgbClr val="282828"/>
+                </a:solidFill>
+                <a:latin typeface="Arial"/>
+              </a:rPr>
+              <a:t>•  The DM: 96×96 actuators on a 1 mm pitch, 96 mm across.  On orbit its surface must stay constant to well under 10 pm, measured often and held by a closed loop.  Every test runs on a random 30 nm rms working surface, not a flat: the gauge never operates at null.</a:t>
+            </a:r>
+          </a:p>
+          <a:p>
+            <a:pPr>
+              <a:spcAft>
+                <a:spcPts val="600"/>
+              </a:spcAft>
+            </a:pPr>
+            <a:r>
+              <a:rPr sz="1200" b="0">
+                <a:solidFill>
+                  <a:srgbClr val="282828"/>
+                </a:solidFill>
+                <a:latin typeface="Arial"/>
+              </a:rPr>
+              <a:t>•  Job 1, measure: read a change of 10 nm on one actuator, of 1 nm on 47 actuators, and a dense random 10 nm pattern, on the 30 nm surface with the response matrix measured on it; and keep that accuracy as the surface moves away from the calibration (capture range).</a:t>
+            </a:r>
+          </a:p>
+          <a:p>
+            <a:pPr>
+              <a:spcAft>
+                <a:spcPts val="600"/>
+              </a:spcAft>
+            </a:pPr>
+            <a:r>
+              <a:rPr sz="1200" b="0">
+                <a:solidFill>
+                  <a:srgbClr val="282828"/>
+                </a:solidFill>
+                <a:latin typeface="Arial"/>
+              </a:rPr>
+              <a:t>•  Job 2, capture: bring the largest possible starting surface, 100-200 nm of wavefront, down to the servo's floor; every phase reading wraps at ±158 nm of surface (±π at 632.8 nm, double pass), so this is a wrapping problem before it is a noise problem.</a:t>
+            </a:r>
+          </a:p>
+          <a:p>
+            <a:pPr>
+              <a:spcAft>
+                <a:spcPts val="600"/>
+              </a:spcAft>
+            </a:pPr>
+            <a:r>
+              <a:rPr sz="1200" b="0">
+                <a:solidFill>
+                  <a:srgbClr val="282828"/>
+                </a:solidFill>
+                <a:latin typeface="Arial"/>
+              </a:rPr>
+              <a:t>•  Job 3, hold: the servo at picometers on the 30 nm rms working surface, its set point: the light per cycle that holds changes about it to 3 pm rms under a 2 pm per-cycle random walk, and whether the reading leaves a fixed error.</a:t>
+            </a:r>
+          </a:p>
+        </p:txBody>
+      </p:sp>
       <p:graphicFrame>
         <p:nvGraphicFramePr>
-          <p:cNvPr id="4" name="Table 3"/>
+          <p:cNvPr id="5" name="Table 4"/>
           <p:cNvGraphicFramePr>
             <a:graphicFrameLocks noGrp="1"/>
           </p:cNvGraphicFramePr>
           <p:nvPr/>
         </p:nvGraphicFramePr>
         <p:xfrm>
-          <a:off x="411480" y="1298448"/>
-          <a:ext cx="11368733" cy="4777740"/>
+          <a:off x="6400800" y="1298448"/>
+          <a:ext cx="5394959" cy="2788920"/>
         </p:xfrm>
         <a:graphic>
           <a:graphicData uri="http://schemas.openxmlformats.org/drawingml/2006/table">
@@ -15443,25 +16172,23 @@
                 <a:tableStyleId>{5C22544A-7EE6-4342-B048-85BDC9FD1C3A}</a:tableStyleId>
               </a:tblPr>
               <a:tblGrid>
-                <a:gridCol w="1889760"/>
-                <a:gridCol w="2093273"/>
-                <a:gridCol w="4107555"/>
-                <a:gridCol w="3278145"/>
+                <a:gridCol w="844109"/>
+                <a:gridCol w="4550850"/>
               </a:tblGrid>
-              <a:tr h="280035">
-                <a:tc>
-                  <a:txBody>
-                    <a:bodyPr wrap="square"/>
-                    <a:lstStyle/>
-                    <a:p>
-                      <a:r>
-                        <a:rPr sz="1100" b="1">
+              <a:tr h="262890">
+                <a:tc>
+                  <a:txBody>
+                    <a:bodyPr wrap="square"/>
+                    <a:lstStyle/>
+                    <a:p>
+                      <a:r>
+                        <a:rPr sz="1000" b="1">
                           <a:solidFill>
                             <a:srgbClr val="FFFFFF"/>
                           </a:solidFill>
                           <a:latin typeface="Arial"/>
                         </a:rPr>
-                        <a:t>approach</a:t>
+                        <a:t>score</a:t>
                       </a:r>
                     </a:p>
                   </a:txBody>
@@ -15477,13 +16204,13 @@
                     <a:lstStyle/>
                     <a:p>
                       <a:r>
-                        <a:rPr sz="1100" b="1">
+                        <a:rPr sz="1000" b="1">
                           <a:solidFill>
                             <a:srgbClr val="FFFFFF"/>
                           </a:solidFill>
                           <a:latin typeface="Arial"/>
                         </a:rPr>
-                        <a:t>term</a:t>
+                        <a:t>meaning</a:t>
                       </a:r>
                     </a:p>
                   </a:txBody>
@@ -15493,131 +16220,43 @@
                     </a:solidFill>
                   </a:tcPr>
                 </a:tc>
-                <a:tc>
-                  <a:txBody>
-                    <a:bodyPr wrap="square"/>
-                    <a:lstStyle/>
-                    <a:p>
-                      <a:r>
-                        <a:rPr sz="1100" b="1">
-                          <a:solidFill>
-                            <a:srgbClr val="FFFFFF"/>
-                          </a:solidFill>
-                          <a:latin typeface="Arial"/>
-                        </a:rPr>
-                        <a:t>uncalibrated size</a:t>
-                      </a:r>
-                    </a:p>
-                  </a:txBody>
-                  <a:tcPr marL="54864" marR="54864" marT="18288" marB="18288">
-                    <a:solidFill>
-                      <a:srgbClr val="1F4E79"/>
-                    </a:solidFill>
-                  </a:tcPr>
-                </a:tc>
-                <a:tc>
-                  <a:txBody>
-                    <a:bodyPr wrap="square"/>
-                    <a:lstStyle/>
-                    <a:p>
-                      <a:r>
-                        <a:rPr sz="1100" b="1">
-                          <a:solidFill>
-                            <a:srgbClr val="FFFFFF"/>
-                          </a:solidFill>
-                          <a:latin typeface="Arial"/>
-                        </a:rPr>
-                        <a:t>after the matrix measured on the surface</a:t>
-                      </a:r>
-                    </a:p>
-                  </a:txBody>
-                  <a:tcPr marL="54864" marR="54864" marT="18288" marB="18288">
-                    <a:solidFill>
-                      <a:srgbClr val="1F4E79"/>
-                    </a:solidFill>
-                  </a:tcPr>
-                </a:tc>
               </a:tr>
-              <a:tr h="280035">
-                <a:tc>
-                  <a:txBody>
-                    <a:bodyPr wrap="square"/>
-                    <a:lstStyle/>
-                    <a:p>
-                      <a:r>
-                        <a:rPr sz="1100" b="0">
-                          <a:solidFill>
-                            <a:srgbClr val="282828"/>
-                          </a:solidFill>
-                          <a:latin typeface="Arial"/>
-                        </a:rPr>
-                        <a:t>interferometer</a:t>
-                      </a:r>
-                    </a:p>
-                  </a:txBody>
-                  <a:tcPr marL="54864" marR="54864" marT="18288" marB="18288">
-                    <a:solidFill>
-                      <a:srgbClr val="FFFFFF"/>
-                    </a:solidFill>
-                  </a:tcPr>
-                </a:tc>
-                <a:tc>
-                  <a:txBody>
-                    <a:bodyPr wrap="square"/>
-                    <a:lstStyle/>
-                    <a:p>
-                      <a:r>
-                        <a:rPr sz="1100" b="0">
-                          <a:solidFill>
-                            <a:srgbClr val="282828"/>
-                          </a:solidFill>
-                          <a:latin typeface="Arial"/>
-                        </a:rPr>
-                        <a:t>piezo step error 2% / 5%</a:t>
-                      </a:r>
-                    </a:p>
-                  </a:txBody>
-                  <a:tcPr marL="54864" marR="54864" marT="18288" marB="18288">
-                    <a:solidFill>
-                      <a:srgbClr val="FFFFFF"/>
-                    </a:solidFill>
-                  </a:tcPr>
-                </a:tc>
-                <a:tc>
-                  <a:txBody>
-                    <a:bodyPr wrap="square"/>
-                    <a:lstStyle/>
-                    <a:p>
-                      <a:r>
-                        <a:rPr sz="1100" b="0">
-                          <a:solidFill>
-                            <a:srgbClr val="282828"/>
-                          </a:solidFill>
-                          <a:latin typeface="Arial"/>
-                        </a:rPr>
-                        <a:t>gain 0.974 / 0.954; floor 2 → 5 / 9 pm</a:t>
-                      </a:r>
-                    </a:p>
-                  </a:txBody>
-                  <a:tcPr marL="54864" marR="54864" marT="18288" marB="18288">
-                    <a:solidFill>
-                      <a:srgbClr val="FFFFFF"/>
-                    </a:solidFill>
-                  </a:tcPr>
-                </a:tc>
-                <a:tc>
-                  <a:txBody>
-                    <a:bodyPr wrap="square"/>
-                    <a:lstStyle/>
-                    <a:p>
-                      <a:r>
-                        <a:rPr sz="1100" b="0">
-                          <a:solidFill>
-                            <a:srgbClr val="282828"/>
-                          </a:solidFill>
-                          <a:latin typeface="Arial"/>
-                        </a:rPr>
-                        <a:t>common mode in the servo: 5.4e12 vs 5.5e12</a:t>
+              <a:tr h="434340">
+                <a:tc>
+                  <a:txBody>
+                    <a:bodyPr wrap="square"/>
+                    <a:lstStyle/>
+                    <a:p>
+                      <a:r>
+                        <a:rPr sz="1000" b="0">
+                          <a:solidFill>
+                            <a:srgbClr val="282828"/>
+                          </a:solidFill>
+                          <a:latin typeface="Arial"/>
+                        </a:rPr>
+                        <a:t>gain</a:t>
+                      </a:r>
+                    </a:p>
+                  </a:txBody>
+                  <a:tcPr marL="54864" marR="54864" marT="18288" marB="18288">
+                    <a:solidFill>
+                      <a:srgbClr val="FFFFFF"/>
+                    </a:solidFill>
+                  </a:tcPr>
+                </a:tc>
+                <a:tc>
+                  <a:txBody>
+                    <a:bodyPr wrap="square"/>
+                    <a:lstStyle/>
+                    <a:p>
+                      <a:r>
+                        <a:rPr sz="1000" b="0">
+                          <a:solidFill>
+                            <a:srgbClr val="282828"/>
+                          </a:solidFill>
+                          <a:latin typeface="Arial"/>
+                        </a:rPr>
+                        <a:t>recovered change ÷ true change; 1.0 is perfect; quoted after calibration</a:t>
                       </a:r>
                     </a:p>
                   </a:txBody>
@@ -15628,20 +16267,20 @@
                   </a:tcPr>
                 </a:tc>
               </a:tr>
-              <a:tr h="468630">
-                <a:tc>
-                  <a:txBody>
-                    <a:bodyPr wrap="square"/>
-                    <a:lstStyle/>
-                    <a:p>
-                      <a:r>
-                        <a:rPr sz="1100" b="0">
-                          <a:solidFill>
-                            <a:srgbClr val="282828"/>
-                          </a:solidFill>
-                          <a:latin typeface="Arial"/>
-                        </a:rPr>
-                        <a:t>interferometer</a:t>
+              <a:tr h="262890">
+                <a:tc>
+                  <a:txBody>
+                    <a:bodyPr wrap="square"/>
+                    <a:lstStyle/>
+                    <a:p>
+                      <a:r>
+                        <a:rPr sz="1000" b="0">
+                          <a:solidFill>
+                            <a:srgbClr val="282828"/>
+                          </a:solidFill>
+                          <a:latin typeface="Arial"/>
+                        </a:rPr>
+                        <a:t>floor</a:t>
                       </a:r>
                     </a:p>
                   </a:txBody>
@@ -15657,13 +16296,13 @@
                     <a:lstStyle/>
                     <a:p>
                       <a:r>
-                        <a:rPr sz="1100" b="0">
-                          <a:solidFill>
-                            <a:srgbClr val="282828"/>
-                          </a:solidFill>
-                          <a:latin typeface="Arial"/>
-                        </a:rPr>
-                        <a:t>camera 1/f walk, 1e-3 of signal within a scan</a:t>
+                        <a:rPr sz="1000" b="0">
+                          <a:solidFill>
+                            <a:srgbClr val="282828"/>
+                          </a:solidFill>
+                          <a:latin typeface="Arial"/>
+                        </a:rPr>
+                        <a:t>rms of the actuators that were not changed, in picometers</a:t>
                       </a:r>
                     </a:p>
                   </a:txBody>
@@ -15673,19 +16312,67 @@
                     </a:solidFill>
                   </a:tcPr>
                 </a:tc>
-                <a:tc>
-                  <a:txBody>
-                    <a:bodyPr wrap="square"/>
-                    <a:lstStyle/>
-                    <a:p>
-                      <a:r>
-                        <a:rPr sz="1100" b="0">
-                          <a:solidFill>
-                            <a:srgbClr val="282828"/>
-                          </a:solidFill>
-                          <a:latin typeface="Arial"/>
-                        </a:rPr>
-                        <a:t>+13% light for 3 pm</a:t>
+              </a:tr>
+              <a:tr h="262890">
+                <a:tc>
+                  <a:txBody>
+                    <a:bodyPr wrap="square"/>
+                    <a:lstStyle/>
+                    <a:p>
+                      <a:r>
+                        <a:rPr sz="1000" b="0">
+                          <a:solidFill>
+                            <a:srgbClr val="282828"/>
+                          </a:solidFill>
+                          <a:latin typeface="Arial"/>
+                        </a:rPr>
+                        <a:t>SNR</a:t>
+                      </a:r>
+                    </a:p>
+                  </a:txBody>
+                  <a:tcPr marL="54864" marR="54864" marT="18288" marB="18288">
+                    <a:solidFill>
+                      <a:srgbClr val="FFFFFF"/>
+                    </a:solidFill>
+                  </a:tcPr>
+                </a:tc>
+                <a:tc>
+                  <a:txBody>
+                    <a:bodyPr wrap="square"/>
+                    <a:lstStyle/>
+                    <a:p>
+                      <a:r>
+                        <a:rPr sz="1000" b="0">
+                          <a:solidFill>
+                            <a:srgbClr val="282828"/>
+                          </a:solidFill>
+                          <a:latin typeface="Arial"/>
+                        </a:rPr>
+                        <a:t>recovered change ÷ floor; above 5 counts as detected</a:t>
+                      </a:r>
+                    </a:p>
+                  </a:txBody>
+                  <a:tcPr marL="54864" marR="54864" marT="18288" marB="18288">
+                    <a:solidFill>
+                      <a:srgbClr val="FFFFFF"/>
+                    </a:solidFill>
+                  </a:tcPr>
+                </a:tc>
+              </a:tr>
+              <a:tr h="434340">
+                <a:tc>
+                  <a:txBody>
+                    <a:bodyPr wrap="square"/>
+                    <a:lstStyle/>
+                    <a:p>
+                      <a:r>
+                        <a:rPr sz="1000" b="0">
+                          <a:solidFill>
+                            <a:srgbClr val="282828"/>
+                          </a:solidFill>
+                          <a:latin typeface="Arial"/>
+                        </a:rPr>
+                        <a:t>photons per measurement</a:t>
                       </a:r>
                     </a:p>
                   </a:txBody>
@@ -15701,13 +16388,13 @@
                     <a:lstStyle/>
                     <a:p>
                       <a:r>
-                        <a:rPr sz="1100" b="0">
-                          <a:solidFill>
-                            <a:srgbClr val="282828"/>
-                          </a:solidFill>
-                          <a:latin typeface="Arial"/>
-                        </a:rPr>
-                        <a:t>—</a:t>
+                        <a:rPr sz="1000" b="0">
+                          <a:solidFill>
+                            <a:srgbClr val="282828"/>
+                          </a:solidFill>
+                          <a:latin typeface="Arial"/>
+                        </a:rPr>
+                        <a:t>all frames of one measurement summed; 1e14 photons at 633 nm = 31 µJ = 0.13 s of a 1 mW laser at 25% throughput</a:t>
                       </a:r>
                     </a:p>
                   </a:txBody>
@@ -15718,86 +16405,42 @@
                   </a:tcPr>
                 </a:tc>
               </a:tr>
-              <a:tr h="468630">
-                <a:tc>
-                  <a:txBody>
-                    <a:bodyPr wrap="square"/>
-                    <a:lstStyle/>
-                    <a:p>
-                      <a:r>
-                        <a:rPr sz="1100" b="0">
-                          <a:solidFill>
-                            <a:srgbClr val="282828"/>
-                          </a:solidFill>
-                          <a:latin typeface="Arial"/>
-                        </a:rPr>
-                        <a:t>interferometer, snapshot</a:t>
-                      </a:r>
-                    </a:p>
-                  </a:txBody>
-                  <a:tcPr marL="54864" marR="54864" marT="18288" marB="18288">
-                    <a:solidFill>
-                      <a:srgbClr val="FFFFFF"/>
-                    </a:solidFill>
-                  </a:tcPr>
-                </a:tc>
-                <a:tc>
-                  <a:txBody>
-                    <a:bodyPr wrap="square"/>
-                    <a:lstStyle/>
-                    <a:p>
-                      <a:r>
-                        <a:rPr sz="1100" b="0">
-                          <a:solidFill>
-                            <a:srgbClr val="282828"/>
-                          </a:solidFill>
-                          <a:latin typeface="Arial"/>
-                        </a:rPr>
-                        <a:t>splitter diattenuation (plate); cube R_p</a:t>
-                      </a:r>
-                    </a:p>
-                  </a:txBody>
-                  <a:tcPr marL="54864" marR="54864" marT="18288" marB="18288">
-                    <a:solidFill>
-                      <a:srgbClr val="FFFFFF"/>
-                    </a:solidFill>
-                  </a:tcPr>
-                </a:tc>
-                <a:tc>
-                  <a:txBody>
-                    <a:bodyPr wrap="square"/>
-                    <a:lstStyle/>
-                    <a:p>
-                      <a:r>
-                        <a:rPr sz="1100" b="0">
-                          <a:solidFill>
-                            <a:srgbClr val="282828"/>
-                          </a:solidFill>
-                          <a:latin typeface="Arial"/>
-                        </a:rPr>
-                        <a:t>at the built 22.5°: arm rotation 1.56°, gain +0.9% (11.7% at the record's 45°); 2.1% (cube, naive stack)</a:t>
-                      </a:r>
-                    </a:p>
-                  </a:txBody>
-                  <a:tcPr marL="54864" marR="54864" marT="18288" marB="18288">
-                    <a:solidFill>
-                      <a:srgbClr val="FFFFFF"/>
-                    </a:solidFill>
-                  </a:tcPr>
-                </a:tc>
-                <a:tc>
-                  <a:txBody>
-                    <a:bodyPr wrap="square"/>
-                    <a:lstStyle/>
-                    <a:p>
-                      <a:r>
-                        <a:rPr sz="1100" b="0">
-                          <a:solidFill>
-                            <a:srgbClr val="282828"/>
-                          </a:solidFill>
-                          <a:latin typeface="Arial"/>
-                        </a:rPr>
-                        <a:t>residual after a measured matrix 1.4e-3 (lens), 5.5e-4 (mirrors); symmetric stack 0</a:t>
+              <a:tr h="434340">
+                <a:tc>
+                  <a:txBody>
+                    <a:bodyPr wrap="square"/>
+                    <a:lstStyle/>
+                    <a:p>
+                      <a:r>
+                        <a:rPr sz="1000" b="0">
+                          <a:solidFill>
+                            <a:srgbClr val="282828"/>
+                          </a:solidFill>
+                          <a:latin typeface="Arial"/>
+                        </a:rPr>
+                        <a:t>capture range to 10%</a:t>
+                      </a:r>
+                    </a:p>
+                  </a:txBody>
+                  <a:tcPr marL="54864" marR="54864" marT="18288" marB="18288">
+                    <a:solidFill>
+                      <a:srgbClr val="FFFFFF"/>
+                    </a:solidFill>
+                  </a:tcPr>
+                </a:tc>
+                <a:tc>
+                  <a:txBody>
+                    <a:bodyPr wrap="square"/>
+                    <a:lstStyle/>
+                    <a:p>
+                      <a:r>
+                        <a:rPr sz="1000" b="0">
+                          <a:solidFill>
+                            <a:srgbClr val="282828"/>
+                          </a:solidFill>
+                          <a:latin typeface="Arial"/>
+                        </a:rPr>
+                        <a:t>the largest working surface at which a 10 nm change on the 47 sites reads within 10%, the matrix left as calibrated at 30 nm</a:t>
                       </a:r>
                     </a:p>
                   </a:txBody>
@@ -15808,20 +16451,20 @@
                   </a:tcPr>
                 </a:tc>
               </a:tr>
-              <a:tr h="468630">
-                <a:tc>
-                  <a:txBody>
-                    <a:bodyPr wrap="square"/>
-                    <a:lstStyle/>
-                    <a:p>
-                      <a:r>
-                        <a:rPr sz="1100" b="0">
-                          <a:solidFill>
-                            <a:srgbClr val="282828"/>
-                          </a:solidFill>
-                          <a:latin typeface="Arial"/>
-                        </a:rPr>
-                        <a:t>Zernike</a:t>
+              <a:tr h="262890">
+                <a:tc>
+                  <a:txBody>
+                    <a:bodyPr wrap="square"/>
+                    <a:lstStyle/>
+                    <a:p>
+                      <a:r>
+                        <a:rPr sz="1000" b="0">
+                          <a:solidFill>
+                            <a:srgbClr val="282828"/>
+                          </a:solidFill>
+                          <a:latin typeface="Arial"/>
+                        </a:rPr>
+                        <a:t>capture</a:t>
                       </a:r>
                     </a:p>
                   </a:txBody>
@@ -15837,13 +16480,13 @@
                     <a:lstStyle/>
                     <a:p>
                       <a:r>
-                        <a:rPr sz="1100" b="0">
-                          <a:solidFill>
-                            <a:srgbClr val="282828"/>
-                          </a:solidFill>
-                          <a:latin typeface="Arial"/>
-                        </a:rPr>
-                        <a:t>model out of focus (the early model); sampling; color</a:t>
+                        <a:rPr sz="1000" b="0">
+                          <a:solidFill>
+                            <a:srgbClr val="282828"/>
+                          </a:solidFill>
+                          <a:latin typeface="Arial"/>
+                        </a:rPr>
+                        <a:t>the largest starting surface the servo brings to 3 pm</a:t>
                       </a:r>
                     </a:p>
                   </a:txBody>
@@ -15853,587 +16496,49 @@
                     </a:solidFill>
                   </a:tcPr>
                 </a:tc>
-                <a:tc>
-                  <a:txBody>
-                    <a:bodyPr wrap="square"/>
-                    <a:lstStyle/>
-                    <a:p>
-                      <a:r>
-                        <a:rPr sz="1100" b="0">
-                          <a:solidFill>
-                            <a:srgbClr val="282828"/>
-                          </a:solidFill>
-                          <a:latin typeface="Arial"/>
-                        </a:rPr>
-                        <a:t>floor 744 → 67 pm on correction; dimple needs 6 pixels; one etch reads five colors within 3%</a:t>
-                      </a:r>
-                    </a:p>
-                  </a:txBody>
-                  <a:tcPr marL="54864" marR="54864" marT="18288" marB="18288">
-                    <a:solidFill>
-                      <a:srgbClr val="ECF1F6"/>
-                    </a:solidFill>
-                  </a:tcPr>
-                </a:tc>
-                <a:tc>
-                  <a:txBody>
-                    <a:bodyPr wrap="square"/>
-                    <a:lstStyle/>
-                    <a:p>
-                      <a:r>
-                        <a:rPr sz="1100" b="0">
-                          <a:solidFill>
-                            <a:srgbClr val="282828"/>
-                          </a:solidFill>
-                          <a:latin typeface="Arial"/>
-                        </a:rPr>
-                        <a:t>—</a:t>
-                      </a:r>
-                    </a:p>
-                  </a:txBody>
-                  <a:tcPr marL="54864" marR="54864" marT="18288" marB="18288">
-                    <a:solidFill>
-                      <a:srgbClr val="ECF1F6"/>
-                    </a:solidFill>
-                  </a:tcPr>
-                </a:tc>
               </a:tr>
-              <a:tr h="468630">
-                <a:tc>
-                  <a:txBody>
-                    <a:bodyPr wrap="square"/>
-                    <a:lstStyle/>
-                    <a:p>
-                      <a:r>
-                        <a:rPr sz="1100" b="0">
-                          <a:solidFill>
-                            <a:srgbClr val="282828"/>
-                          </a:solidFill>
-                          <a:latin typeface="Arial"/>
-                        </a:rPr>
-                        <a:t>vector Zernike</a:t>
-                      </a:r>
-                    </a:p>
-                  </a:txBody>
-                  <a:tcPr marL="54864" marR="54864" marT="18288" marB="18288">
-                    <a:solidFill>
-                      <a:srgbClr val="FFFFFF"/>
-                    </a:solidFill>
-                  </a:tcPr>
-                </a:tc>
-                <a:tc>
-                  <a:txBody>
-                    <a:bodyPr wrap="square"/>
-                    <a:lstStyle/>
-                    <a:p>
-                      <a:r>
-                        <a:rPr sz="1100" b="0">
-                          <a:solidFill>
-                            <a:srgbClr val="282828"/>
-                          </a:solidFill>
-                          <a:latin typeface="Arial"/>
-                        </a:rPr>
-                        <a:t>metasurface retardance error 0.1 rad</a:t>
-                      </a:r>
-                    </a:p>
-                  </a:txBody>
-                  <a:tcPr marL="54864" marR="54864" marT="18288" marB="18288">
-                    <a:solidFill>
-                      <a:srgbClr val="FFFFFF"/>
-                    </a:solidFill>
-                  </a:tcPr>
-                </a:tc>
-                <a:tc>
-                  <a:txBody>
-                    <a:bodyPr wrap="square"/>
-                    <a:lstStyle/>
-                    <a:p>
-                      <a:r>
-                        <a:rPr sz="1100" b="0">
-                          <a:solidFill>
-                            <a:srgbClr val="282828"/>
-                          </a:solidFill>
-                          <a:latin typeface="Arial"/>
-                        </a:rPr>
-                        <a:t>750 pm on a 12 nm figure</a:t>
-                      </a:r>
-                    </a:p>
-                  </a:txBody>
-                  <a:tcPr marL="54864" marR="54864" marT="18288" marB="18288">
-                    <a:solidFill>
-                      <a:srgbClr val="FFFFFF"/>
-                    </a:solidFill>
-                  </a:tcPr>
-                </a:tc>
-                <a:tc>
-                  <a:txBody>
-                    <a:bodyPr wrap="square"/>
-                    <a:lstStyle/>
-                    <a:p>
-                      <a:r>
-                        <a:rPr sz="1100" b="0">
-                          <a:solidFill>
-                            <a:srgbClr val="282828"/>
-                          </a:solidFill>
-                          <a:latin typeface="Arial"/>
-                        </a:rPr>
-                        <a:t>rows 0.9934 / 4 pm, the ideal numbers</a:t>
-                      </a:r>
-                    </a:p>
-                  </a:txBody>
-                  <a:tcPr marL="54864" marR="54864" marT="18288" marB="18288">
-                    <a:solidFill>
-                      <a:srgbClr val="FFFFFF"/>
-                    </a:solidFill>
-                  </a:tcPr>
-                </a:tc>
-              </a:tr>
-              <a:tr h="468630">
-                <a:tc>
-                  <a:txBody>
-                    <a:bodyPr wrap="square"/>
-                    <a:lstStyle/>
-                    <a:p>
-                      <a:r>
-                        <a:rPr sz="1100" b="0">
-                          <a:solidFill>
-                            <a:srgbClr val="282828"/>
-                          </a:solidFill>
-                          <a:latin typeface="Arial"/>
-                        </a:rPr>
-                        <a:t>vector Zernike</a:t>
-                      </a:r>
-                    </a:p>
-                  </a:txBody>
-                  <a:tcPr marL="54864" marR="54864" marT="18288" marB="18288">
-                    <a:solidFill>
-                      <a:srgbClr val="ECF1F6"/>
-                    </a:solidFill>
-                  </a:tcPr>
-                </a:tc>
-                <a:tc>
-                  <a:txBody>
-                    <a:bodyPr wrap="square"/>
-                    <a:lstStyle/>
-                    <a:p>
-                      <a:r>
-                        <a:rPr sz="1100" b="0">
-                          <a:solidFill>
-                            <a:srgbClr val="282828"/>
-                          </a:solidFill>
-                          <a:latin typeface="Arial"/>
-                        </a:rPr>
-                        <a:t>the arm's polarization (six tilted glass faces)</a:t>
-                      </a:r>
-                    </a:p>
-                  </a:txBody>
-                  <a:tcPr marL="54864" marR="54864" marT="18288" marB="18288">
-                    <a:solidFill>
-                      <a:srgbClr val="ECF1F6"/>
-                    </a:solidFill>
-                  </a:tcPr>
-                </a:tc>
-                <a:tc>
-                  <a:txBody>
-                    <a:bodyPr wrap="square"/>
-                    <a:lstStyle/>
-                    <a:p>
-                      <a:r>
-                        <a:rPr sz="1100" b="0">
-                          <a:solidFill>
-                            <a:srgbClr val="282828"/>
-                          </a:solidFill>
-                          <a:latin typeface="Arial"/>
-                        </a:rPr>
-                        <a:t>9 pm on 12 nm; 6 nm per rad of channel phase</a:t>
-                      </a:r>
-                    </a:p>
-                  </a:txBody>
-                  <a:tcPr marL="54864" marR="54864" marT="18288" marB="18288">
-                    <a:solidFill>
-                      <a:srgbClr val="ECF1F6"/>
-                    </a:solidFill>
-                  </a:tcPr>
-                </a:tc>
-                <a:tc>
-                  <a:txBody>
-                    <a:bodyPr wrap="square"/>
-                    <a:lstStyle/>
-                    <a:p>
-                      <a:r>
-                        <a:rPr sz="1100" b="0">
-                          <a:solidFill>
-                            <a:srgbClr val="282828"/>
-                          </a:solidFill>
-                          <a:latin typeface="Arial"/>
-                        </a:rPr>
-                        <a:t>nothing to 0.1 rad; 10% gain loss at 0.3</a:t>
-                      </a:r>
-                    </a:p>
-                  </a:txBody>
-                  <a:tcPr marL="54864" marR="54864" marT="18288" marB="18288">
-                    <a:solidFill>
-                      <a:srgbClr val="ECF1F6"/>
-                    </a:solidFill>
-                  </a:tcPr>
-                </a:tc>
-              </a:tr>
-              <a:tr h="468630">
-                <a:tc>
-                  <a:txBody>
-                    <a:bodyPr wrap="square"/>
-                    <a:lstStyle/>
-                    <a:p>
-                      <a:r>
-                        <a:rPr sz="1100" b="0">
-                          <a:solidFill>
-                            <a:srgbClr val="282828"/>
-                          </a:solidFill>
-                          <a:latin typeface="Arial"/>
-                        </a:rPr>
-                        <a:t>vector Zernike</a:t>
-                      </a:r>
-                    </a:p>
-                  </a:txBody>
-                  <a:tcPr marL="54864" marR="54864" marT="18288" marB="18288">
-                    <a:solidFill>
-                      <a:srgbClr val="FFFFFF"/>
-                    </a:solidFill>
-                  </a:tcPr>
-                </a:tc>
-                <a:tc>
-                  <a:txBody>
-                    <a:bodyPr wrap="square"/>
-                    <a:lstStyle/>
-                    <a:p>
-                      <a:r>
-                        <a:rPr sz="1100" b="0">
-                          <a:solidFill>
-                            <a:srgbClr val="282828"/>
-                          </a:solidFill>
-                          <a:latin typeface="Arial"/>
-                        </a:rPr>
-                        <a:t>the analyzer: cube extinction; plate error λ/300</a:t>
-                      </a:r>
-                    </a:p>
-                  </a:txBody>
-                  <a:tcPr marL="54864" marR="54864" marT="18288" marB="18288">
-                    <a:solidFill>
-                      <a:srgbClr val="FFFFFF"/>
-                    </a:solidFill>
-                  </a:tcPr>
-                </a:tc>
-                <a:tc>
-                  <a:txBody>
-                    <a:bodyPr wrap="square"/>
-                    <a:lstStyle/>
-                    <a:p>
-                      <a:r>
-                        <a:rPr sz="1100" b="0">
-                          <a:solidFill>
-                            <a:srgbClr val="282828"/>
-                          </a:solidFill>
-                          <a:latin typeface="Arial"/>
-                        </a:rPr>
-                        <a:t>3.5 pm; 165 pm (1.4% of the figure)</a:t>
-                      </a:r>
-                    </a:p>
-                  </a:txBody>
-                  <a:tcPr marL="54864" marR="54864" marT="18288" marB="18288">
-                    <a:solidFill>
-                      <a:srgbClr val="FFFFFF"/>
-                    </a:solidFill>
-                  </a:tcPr>
-                </a:tc>
-                <a:tc>
-                  <a:txBody>
-                    <a:bodyPr wrap="square"/>
-                    <a:lstStyle/>
-                    <a:p>
-                      <a:r>
-                        <a:rPr sz="1100" b="0">
-                          <a:solidFill>
-                            <a:srgbClr val="282828"/>
-                          </a:solidFill>
-                          <a:latin typeface="Arial"/>
-                        </a:rPr>
-                        <a:t>gain within 0.7%, floors within 4 pm</a:t>
-                      </a:r>
-                    </a:p>
-                  </a:txBody>
-                  <a:tcPr marL="54864" marR="54864" marT="18288" marB="18288">
-                    <a:solidFill>
-                      <a:srgbClr val="FFFFFF"/>
-                    </a:solidFill>
-                  </a:tcPr>
-                </a:tc>
-              </a:tr>
-              <a:tr h="468630">
-                <a:tc>
-                  <a:txBody>
-                    <a:bodyPr wrap="square"/>
-                    <a:lstStyle/>
-                    <a:p>
-                      <a:r>
-                        <a:rPr sz="1100" b="0">
-                          <a:solidFill>
-                            <a:srgbClr val="282828"/>
-                          </a:solidFill>
-                          <a:latin typeface="Arial"/>
-                        </a:rPr>
-                        <a:t>pinhole</a:t>
-                      </a:r>
-                    </a:p>
-                  </a:txBody>
-                  <a:tcPr marL="54864" marR="54864" marT="18288" marB="18288">
-                    <a:solidFill>
-                      <a:srgbClr val="ECF1F6"/>
-                    </a:solidFill>
-                  </a:tcPr>
-                </a:tc>
-                <a:tc>
-                  <a:txBody>
-                    <a:bodyPr wrap="square"/>
-                    <a:lstStyle/>
-                    <a:p>
-                      <a:r>
-                        <a:rPr sz="1100" b="0">
-                          <a:solidFill>
-                            <a:srgbClr val="282828"/>
-                          </a:solidFill>
-                          <a:latin typeface="Arial"/>
-                        </a:rPr>
-                        <a:t>2% step error</a:t>
-                      </a:r>
-                    </a:p>
-                  </a:txBody>
-                  <a:tcPr marL="54864" marR="54864" marT="18288" marB="18288">
-                    <a:solidFill>
-                      <a:srgbClr val="ECF1F6"/>
-                    </a:solidFill>
-                  </a:tcPr>
-                </a:tc>
-                <a:tc>
-                  <a:txBody>
-                    <a:bodyPr wrap="square"/>
-                    <a:lstStyle/>
-                    <a:p>
-                      <a:r>
-                        <a:rPr sz="1100" b="0">
-                          <a:solidFill>
-                            <a:srgbClr val="282828"/>
-                          </a:solidFill>
-                          <a:latin typeface="Arial"/>
-                        </a:rPr>
-                        <a:t>4.9 pm with the five-frame scan (421 pm with four-step least squares)</a:t>
-                      </a:r>
-                    </a:p>
-                  </a:txBody>
-                  <a:tcPr marL="54864" marR="54864" marT="18288" marB="18288">
-                    <a:solidFill>
-                      <a:srgbClr val="ECF1F6"/>
-                    </a:solidFill>
-                  </a:tcPr>
-                </a:tc>
-                <a:tc>
-                  <a:txBody>
-                    <a:bodyPr wrap="square"/>
-                    <a:lstStyle/>
-                    <a:p>
-                      <a:r>
-                        <a:rPr sz="1100" b="0">
-                          <a:solidFill>
-                            <a:srgbClr val="282828"/>
-                          </a:solidFill>
-                          <a:latin typeface="Arial"/>
-                        </a:rPr>
-                        <a:t>differential rows error-free to the digit</a:t>
-                      </a:r>
-                    </a:p>
-                  </a:txBody>
-                  <a:tcPr marL="54864" marR="54864" marT="18288" marB="18288">
-                    <a:solidFill>
-                      <a:srgbClr val="ECF1F6"/>
-                    </a:solidFill>
-                  </a:tcPr>
-                </a:tc>
-              </a:tr>
-              <a:tr h="468630">
-                <a:tc>
-                  <a:txBody>
-                    <a:bodyPr wrap="square"/>
-                    <a:lstStyle/>
-                    <a:p>
-                      <a:r>
-                        <a:rPr sz="1100" b="0">
-                          <a:solidFill>
-                            <a:srgbClr val="282828"/>
-                          </a:solidFill>
-                          <a:latin typeface="Arial"/>
-                        </a:rPr>
-                        <a:t>pinhole, P/SRI</a:t>
-                      </a:r>
-                    </a:p>
-                  </a:txBody>
-                  <a:tcPr marL="54864" marR="54864" marT="18288" marB="18288">
-                    <a:solidFill>
-                      <a:srgbClr val="FFFFFF"/>
-                    </a:solidFill>
-                  </a:tcPr>
-                </a:tc>
-                <a:tc>
-                  <a:txBody>
-                    <a:bodyPr wrap="square"/>
-                    <a:lstStyle/>
-                    <a:p>
-                      <a:r>
-                        <a:rPr sz="1100" b="0">
-                          <a:solidFill>
-                            <a:srgbClr val="282828"/>
-                          </a:solidFill>
-                          <a:latin typeface="Arial"/>
-                        </a:rPr>
-                        <a:t>camera bias drifting within a scan</a:t>
-                      </a:r>
-                    </a:p>
-                  </a:txBody>
-                  <a:tcPr marL="54864" marR="54864" marT="18288" marB="18288">
-                    <a:solidFill>
-                      <a:srgbClr val="FFFFFF"/>
-                    </a:solidFill>
-                  </a:tcPr>
-                </a:tc>
-                <a:tc>
-                  <a:txBody>
-                    <a:bodyPr wrap="square"/>
-                    <a:lstStyle/>
-                    <a:p>
-                      <a:r>
-                        <a:rPr sz="1100" b="0">
-                          <a:solidFill>
-                            <a:srgbClr val="282828"/>
-                          </a:solidFill>
-                          <a:latin typeface="Arial"/>
-                        </a:rPr>
-                        <a:t>5.3 / 10.7 pm at 1e15 (the linear Zernike: 10.8 nm)</a:t>
-                      </a:r>
-                    </a:p>
-                  </a:txBody>
-                  <a:tcPr marL="54864" marR="54864" marT="18288" marB="18288">
-                    <a:solidFill>
-                      <a:srgbClr val="FFFFFF"/>
-                    </a:solidFill>
-                  </a:tcPr>
-                </a:tc>
-                <a:tc>
-                  <a:txBody>
-                    <a:bodyPr wrap="square"/>
-                    <a:lstStyle/>
-                    <a:p>
-                      <a:r>
-                        <a:rPr sz="1100" b="0">
-                          <a:solidFill>
-                            <a:srgbClr val="282828"/>
-                          </a:solidFill>
-                          <a:latin typeface="Arial"/>
-                        </a:rPr>
-                        <a:t>—</a:t>
-                      </a:r>
-                    </a:p>
-                  </a:txBody>
-                  <a:tcPr marL="54864" marR="54864" marT="18288" marB="18288">
-                    <a:solidFill>
-                      <a:srgbClr val="FFFFFF"/>
-                    </a:solidFill>
-                  </a:tcPr>
-                </a:tc>
-              </a:tr>
-              <a:tr h="468630">
-                <a:tc>
-                  <a:txBody>
-                    <a:bodyPr wrap="square"/>
-                    <a:lstStyle/>
-                    <a:p>
-                      <a:r>
-                        <a:rPr sz="1100" b="0">
-                          <a:solidFill>
-                            <a:srgbClr val="282828"/>
-                          </a:solidFill>
-                          <a:latin typeface="Arial"/>
-                        </a:rPr>
-                        <a:t>P/SRI</a:t>
-                      </a:r>
-                    </a:p>
-                  </a:txBody>
-                  <a:tcPr marL="54864" marR="54864" marT="18288" marB="18288">
-                    <a:solidFill>
-                      <a:srgbClr val="ECF1F6"/>
-                    </a:solidFill>
-                  </a:tcPr>
-                </a:tc>
-                <a:tc>
-                  <a:txBody>
-                    <a:bodyPr wrap="square"/>
-                    <a:lstStyle/>
-                    <a:p>
-                      <a:r>
-                        <a:rPr sz="1100" b="0">
-                          <a:solidFill>
-                            <a:srgbClr val="282828"/>
-                          </a:solidFill>
-                          <a:latin typeface="Arial"/>
-                        </a:rPr>
-                        <a:t>its own reference arm walking</a:t>
-                      </a:r>
-                    </a:p>
-                  </a:txBody>
-                  <a:tcPr marL="54864" marR="54864" marT="18288" marB="18288">
-                    <a:solidFill>
-                      <a:srgbClr val="ECF1F6"/>
-                    </a:solidFill>
-                  </a:tcPr>
-                </a:tc>
-                <a:tc>
-                  <a:txBody>
-                    <a:bodyPr wrap="square"/>
-                    <a:lstStyle/>
-                    <a:p>
-                      <a:r>
-                        <a:rPr sz="1100" b="0">
-                          <a:solidFill>
-                            <a:srgbClr val="282828"/>
-                          </a:solidFill>
-                          <a:latin typeface="Arial"/>
-                        </a:rPr>
-                        <a:t>4% more light over a hundredfold range of walk</a:t>
-                      </a:r>
-                    </a:p>
-                  </a:txBody>
-                  <a:tcPr marL="54864" marR="54864" marT="18288" marB="18288">
-                    <a:solidFill>
-                      <a:srgbClr val="ECF1F6"/>
-                    </a:solidFill>
-                  </a:tcPr>
-                </a:tc>
-                <a:tc>
-                  <a:txBody>
-                    <a:bodyPr wrap="square"/>
-                    <a:lstStyle/>
-                    <a:p>
-                      <a:r>
-                        <a:rPr sz="1100" b="0">
-                          <a:solidFill>
-                            <a:srgbClr val="282828"/>
-                          </a:solidFill>
-                          <a:latin typeface="Arial"/>
-                        </a:rPr>
-                        <a:t>a path change is piston, the mode the estimator nulls</a:t>
-                      </a:r>
-                    </a:p>
-                  </a:txBody>
-                  <a:tcPr marL="54864" marR="54864" marT="18288" marB="18288">
-                    <a:solidFill>
-                      <a:srgbClr val="ECF1F6"/>
+              <a:tr h="434340">
+                <a:tc>
+                  <a:txBody>
+                    <a:bodyPr wrap="square"/>
+                    <a:lstStyle/>
+                    <a:p>
+                      <a:r>
+                        <a:rPr sz="1000" b="0">
+                          <a:solidFill>
+                            <a:srgbClr val="282828"/>
+                          </a:solidFill>
+                          <a:latin typeface="Arial"/>
+                        </a:rPr>
+                        <a:t>hold, one number</a:t>
+                      </a:r>
+                    </a:p>
+                  </a:txBody>
+                  <a:tcPr marL="54864" marR="54864" marT="18288" marB="18288">
+                    <a:solidFill>
+                      <a:srgbClr val="FFFFFF"/>
+                    </a:solidFill>
+                  </a:tcPr>
+                </a:tc>
+                <a:tc>
+                  <a:txBody>
+                    <a:bodyPr wrap="square"/>
+                    <a:lstStyle/>
+                    <a:p>
+                      <a:r>
+                        <a:rPr sz="1000" b="0">
+                          <a:solidFill>
+                            <a:srgbClr val="282828"/>
+                          </a:solidFill>
+                          <a:latin typeface="Arial"/>
+                        </a:rPr>
+                        <a:t>photons per cycle that hold 3 pm rms in a 60-cycle loop at gain 0.5</a:t>
+                      </a:r>
+                    </a:p>
+                  </a:txBody>
+                  <a:tcPr marL="54864" marR="54864" marT="18288" marB="18288">
+                    <a:solidFill>
+                      <a:srgbClr val="FFFFFF"/>
                     </a:solidFill>
                   </a:tcPr>
                 </a:tc>
@@ -16444,14 +16549,14 @@
       </p:graphicFrame>
       <p:sp>
         <p:nvSpPr>
-          <p:cNvPr id="5" name="TextBox 4"/>
+          <p:cNvPr id="6" name="TextBox 5"/>
           <p:cNvSpPr txBox="1"/>
           <p:nvPr/>
         </p:nvSpPr>
         <p:spPr>
           <a:xfrm>
-            <a:off x="411480" y="6222492"/>
-            <a:ext cx="11368735" cy="274320"/>
+            <a:off x="6400800" y="4233672"/>
+            <a:ext cx="5394960" cy="274320"/>
           </a:xfrm>
           <a:prstGeom prst="rect">
             <a:avLst/>
@@ -16476,7 +16581,7 @@
                 </a:solidFill>
                 <a:latin typeface="Arial"/>
               </a:rPr>
-              <a:t>Nothing is left open on the vector sensor's line.  Run tags lens_deck_se2/se5, loop_lens_cam, tg_psi_dm, tg_psi_dm_v2, v2g, v3arm, an193, pdi193se_sh5, pcam193ri, rw193.</a:t>
+              <a:t>Measuring a change costs two measurements.  The 96×96 at 385 detector pixels per pupil is the flight-like sampling; most rows here are at 193 pixels, which the sampling study showed reads the same numbers.</a:t>
             </a:r>
           </a:p>
         </p:txBody>
@@ -16489,7 +16594,7 @@
 </p:sld>
 </file>
 
-<file path=ppt/slides/slide3.xml><?xml version="1.0" encoding="utf-8"?>
+<file path=ppt/slides/slide30.xml><?xml version="1.0" encoding="utf-8"?>
 <p:sld xmlns:a="http://schemas.openxmlformats.org/drawingml/2006/main" xmlns:p="http://schemas.openxmlformats.org/presentationml/2006/main" xmlns:r="http://schemas.openxmlformats.org/officeDocument/2006/relationships">
   <p:cSld>
     <p:spTree>
@@ -16533,7 +16638,7 @@
                 </a:solidFill>
                 <a:latin typeface="Arial"/>
               </a:rPr>
-              <a:t>The three jobs, and how each is scored</a:t>
+              <a:t>What can spoil each reading, priced</a:t>
             </a:r>
           </a:p>
           <a:p>
@@ -16549,7 +16654,7 @@
                 </a:solidFill>
                 <a:latin typeface="Arial"/>
               </a:rPr>
-              <a:t>Measure the mirror's surface to picometers; capture its post-launch shape, 100-200 nm of wavefront, into the servo's reach; hold it there in a servo</a:t>
+              <a:t>Every systematic we could model is either calibrated by the response matrix measured through the sensor, or shown small; one line per approach</a:t>
             </a:r>
           </a:p>
         </p:txBody>
@@ -16598,104 +16703,17 @@
           </a:p>
         </p:txBody>
       </p:sp>
-      <p:sp>
-        <p:nvSpPr>
-          <p:cNvPr id="4" name="TextBox 3"/>
-          <p:cNvSpPr txBox="1"/>
-          <p:nvPr/>
-        </p:nvSpPr>
-        <p:spPr>
-          <a:xfrm>
-            <a:off x="411480" y="1298448"/>
-            <a:ext cx="5806440" cy="274320"/>
-          </a:xfrm>
-          <a:prstGeom prst="rect">
-            <a:avLst/>
-          </a:prstGeom>
-          <a:noFill/>
-        </p:spPr>
-        <p:txBody>
-          <a:bodyPr wrap="square">
-            <a:spAutoFit/>
-          </a:bodyPr>
-          <a:lstStyle/>
-          <a:p>
-            <a:pPr>
-              <a:spcAft>
-                <a:spcPts val="600"/>
-              </a:spcAft>
-            </a:pPr>
-            <a:r>
-              <a:rPr sz="1200" b="0">
-                <a:solidFill>
-                  <a:srgbClr val="282828"/>
-                </a:solidFill>
-                <a:latin typeface="Arial"/>
-              </a:rPr>
-              <a:t>•  The DM: 96×96 actuators on a 1 mm pitch, 96 mm across.  On orbit its surface must stay constant to well under 10 pm, measured often and held by a closed loop.  Every test runs on a random 30 nm rms working surface, not a flat: the gauge never operates at null.</a:t>
-            </a:r>
-          </a:p>
-          <a:p>
-            <a:pPr>
-              <a:spcAft>
-                <a:spcPts val="600"/>
-              </a:spcAft>
-            </a:pPr>
-            <a:r>
-              <a:rPr sz="1200" b="0">
-                <a:solidFill>
-                  <a:srgbClr val="282828"/>
-                </a:solidFill>
-                <a:latin typeface="Arial"/>
-              </a:rPr>
-              <a:t>•  Job 1, measure: read a change of 10 nm on one actuator, of 1 nm on 47 actuators, and a dense random 10 nm pattern, on the 30 nm surface with the response matrix measured on it; and keep that accuracy as the surface moves away from the calibration (capture range).</a:t>
-            </a:r>
-          </a:p>
-          <a:p>
-            <a:pPr>
-              <a:spcAft>
-                <a:spcPts val="600"/>
-              </a:spcAft>
-            </a:pPr>
-            <a:r>
-              <a:rPr sz="1200" b="0">
-                <a:solidFill>
-                  <a:srgbClr val="282828"/>
-                </a:solidFill>
-                <a:latin typeface="Arial"/>
-              </a:rPr>
-              <a:t>•  Job 2, capture: bring the largest possible starting surface, 100-200 nm of wavefront, down to the servo's floor; every phase reading wraps at ±158 nm of surface (±π at 632.8 nm, double pass), so this is a wrapping problem before it is a noise problem.</a:t>
-            </a:r>
-          </a:p>
-          <a:p>
-            <a:pPr>
-              <a:spcAft>
-                <a:spcPts val="600"/>
-              </a:spcAft>
-            </a:pPr>
-            <a:r>
-              <a:rPr sz="1200" b="0">
-                <a:solidFill>
-                  <a:srgbClr val="282828"/>
-                </a:solidFill>
-                <a:latin typeface="Arial"/>
-              </a:rPr>
-              <a:t>•  Job 3, hold: the servo at picometers on the 30 nm rms working surface, its set point: the light per cycle that holds changes about it to 3 pm rms under a 2 pm per-cycle random walk, and whether the reading leaves a fixed error.</a:t>
-            </a:r>
-          </a:p>
-        </p:txBody>
-      </p:sp>
       <p:graphicFrame>
         <p:nvGraphicFramePr>
-          <p:cNvPr id="5" name="Table 4"/>
+          <p:cNvPr id="4" name="Table 3"/>
           <p:cNvGraphicFramePr>
             <a:graphicFrameLocks noGrp="1"/>
           </p:cNvGraphicFramePr>
           <p:nvPr/>
         </p:nvGraphicFramePr>
         <p:xfrm>
-          <a:off x="6400800" y="1298448"/>
-          <a:ext cx="5394959" cy="2788920"/>
+          <a:off x="411480" y="1298448"/>
+          <a:ext cx="11368733" cy="4777740"/>
         </p:xfrm>
         <a:graphic>
           <a:graphicData uri="http://schemas.openxmlformats.org/drawingml/2006/table">
@@ -16704,23 +16722,25 @@
                 <a:tableStyleId>{5C22544A-7EE6-4342-B048-85BDC9FD1C3A}</a:tableStyleId>
               </a:tblPr>
               <a:tblGrid>
-                <a:gridCol w="844109"/>
-                <a:gridCol w="4550850"/>
+                <a:gridCol w="1889760"/>
+                <a:gridCol w="2093273"/>
+                <a:gridCol w="4107555"/>
+                <a:gridCol w="3278145"/>
               </a:tblGrid>
-              <a:tr h="262890">
-                <a:tc>
-                  <a:txBody>
-                    <a:bodyPr wrap="square"/>
-                    <a:lstStyle/>
-                    <a:p>
-                      <a:r>
-                        <a:rPr sz="1000" b="1">
+              <a:tr h="280035">
+                <a:tc>
+                  <a:txBody>
+                    <a:bodyPr wrap="square"/>
+                    <a:lstStyle/>
+                    <a:p>
+                      <a:r>
+                        <a:rPr sz="1100" b="1">
                           <a:solidFill>
                             <a:srgbClr val="FFFFFF"/>
                           </a:solidFill>
                           <a:latin typeface="Arial"/>
                         </a:rPr>
-                        <a:t>score</a:t>
+                        <a:t>approach</a:t>
                       </a:r>
                     </a:p>
                   </a:txBody>
@@ -16736,13 +16756,13 @@
                     <a:lstStyle/>
                     <a:p>
                       <a:r>
-                        <a:rPr sz="1000" b="1">
+                        <a:rPr sz="1100" b="1">
                           <a:solidFill>
                             <a:srgbClr val="FFFFFF"/>
                           </a:solidFill>
                           <a:latin typeface="Arial"/>
                         </a:rPr>
-                        <a:t>meaning</a:t>
+                        <a:t>term</a:t>
                       </a:r>
                     </a:p>
                   </a:txBody>
@@ -16752,43 +16772,131 @@
                     </a:solidFill>
                   </a:tcPr>
                 </a:tc>
+                <a:tc>
+                  <a:txBody>
+                    <a:bodyPr wrap="square"/>
+                    <a:lstStyle/>
+                    <a:p>
+                      <a:r>
+                        <a:rPr sz="1100" b="1">
+                          <a:solidFill>
+                            <a:srgbClr val="FFFFFF"/>
+                          </a:solidFill>
+                          <a:latin typeface="Arial"/>
+                        </a:rPr>
+                        <a:t>uncalibrated size</a:t>
+                      </a:r>
+                    </a:p>
+                  </a:txBody>
+                  <a:tcPr marL="54864" marR="54864" marT="18288" marB="18288">
+                    <a:solidFill>
+                      <a:srgbClr val="1F4E79"/>
+                    </a:solidFill>
+                  </a:tcPr>
+                </a:tc>
+                <a:tc>
+                  <a:txBody>
+                    <a:bodyPr wrap="square"/>
+                    <a:lstStyle/>
+                    <a:p>
+                      <a:r>
+                        <a:rPr sz="1100" b="1">
+                          <a:solidFill>
+                            <a:srgbClr val="FFFFFF"/>
+                          </a:solidFill>
+                          <a:latin typeface="Arial"/>
+                        </a:rPr>
+                        <a:t>after the matrix measured on the surface</a:t>
+                      </a:r>
+                    </a:p>
+                  </a:txBody>
+                  <a:tcPr marL="54864" marR="54864" marT="18288" marB="18288">
+                    <a:solidFill>
+                      <a:srgbClr val="1F4E79"/>
+                    </a:solidFill>
+                  </a:tcPr>
+                </a:tc>
               </a:tr>
-              <a:tr h="434340">
-                <a:tc>
-                  <a:txBody>
-                    <a:bodyPr wrap="square"/>
-                    <a:lstStyle/>
-                    <a:p>
-                      <a:r>
-                        <a:rPr sz="1000" b="0">
-                          <a:solidFill>
-                            <a:srgbClr val="282828"/>
-                          </a:solidFill>
-                          <a:latin typeface="Arial"/>
-                        </a:rPr>
-                        <a:t>gain</a:t>
-                      </a:r>
-                    </a:p>
-                  </a:txBody>
-                  <a:tcPr marL="54864" marR="54864" marT="18288" marB="18288">
-                    <a:solidFill>
-                      <a:srgbClr val="FFFFFF"/>
-                    </a:solidFill>
-                  </a:tcPr>
-                </a:tc>
-                <a:tc>
-                  <a:txBody>
-                    <a:bodyPr wrap="square"/>
-                    <a:lstStyle/>
-                    <a:p>
-                      <a:r>
-                        <a:rPr sz="1000" b="0">
-                          <a:solidFill>
-                            <a:srgbClr val="282828"/>
-                          </a:solidFill>
-                          <a:latin typeface="Arial"/>
-                        </a:rPr>
-                        <a:t>recovered change ÷ true change; 1.0 is perfect; quoted after calibration</a:t>
+              <a:tr h="280035">
+                <a:tc>
+                  <a:txBody>
+                    <a:bodyPr wrap="square"/>
+                    <a:lstStyle/>
+                    <a:p>
+                      <a:r>
+                        <a:rPr sz="1100" b="0">
+                          <a:solidFill>
+                            <a:srgbClr val="282828"/>
+                          </a:solidFill>
+                          <a:latin typeface="Arial"/>
+                        </a:rPr>
+                        <a:t>interferometer</a:t>
+                      </a:r>
+                    </a:p>
+                  </a:txBody>
+                  <a:tcPr marL="54864" marR="54864" marT="18288" marB="18288">
+                    <a:solidFill>
+                      <a:srgbClr val="FFFFFF"/>
+                    </a:solidFill>
+                  </a:tcPr>
+                </a:tc>
+                <a:tc>
+                  <a:txBody>
+                    <a:bodyPr wrap="square"/>
+                    <a:lstStyle/>
+                    <a:p>
+                      <a:r>
+                        <a:rPr sz="1100" b="0">
+                          <a:solidFill>
+                            <a:srgbClr val="282828"/>
+                          </a:solidFill>
+                          <a:latin typeface="Arial"/>
+                        </a:rPr>
+                        <a:t>piezo step error 2% / 5%</a:t>
+                      </a:r>
+                    </a:p>
+                  </a:txBody>
+                  <a:tcPr marL="54864" marR="54864" marT="18288" marB="18288">
+                    <a:solidFill>
+                      <a:srgbClr val="FFFFFF"/>
+                    </a:solidFill>
+                  </a:tcPr>
+                </a:tc>
+                <a:tc>
+                  <a:txBody>
+                    <a:bodyPr wrap="square"/>
+                    <a:lstStyle/>
+                    <a:p>
+                      <a:r>
+                        <a:rPr sz="1100" b="0">
+                          <a:solidFill>
+                            <a:srgbClr val="282828"/>
+                          </a:solidFill>
+                          <a:latin typeface="Arial"/>
+                        </a:rPr>
+                        <a:t>gain 0.974 / 0.954; floor 2 → 5 / 9 pm</a:t>
+                      </a:r>
+                    </a:p>
+                  </a:txBody>
+                  <a:tcPr marL="54864" marR="54864" marT="18288" marB="18288">
+                    <a:solidFill>
+                      <a:srgbClr val="FFFFFF"/>
+                    </a:solidFill>
+                  </a:tcPr>
+                </a:tc>
+                <a:tc>
+                  <a:txBody>
+                    <a:bodyPr wrap="square"/>
+                    <a:lstStyle/>
+                    <a:p>
+                      <a:r>
+                        <a:rPr sz="1100" b="0">
+                          <a:solidFill>
+                            <a:srgbClr val="282828"/>
+                          </a:solidFill>
+                          <a:latin typeface="Arial"/>
+                        </a:rPr>
+                        <a:t>common mode in the servo: 5.4e12 vs 5.5e12</a:t>
                       </a:r>
                     </a:p>
                   </a:txBody>
@@ -16799,20 +16907,20 @@
                   </a:tcPr>
                 </a:tc>
               </a:tr>
-              <a:tr h="262890">
-                <a:tc>
-                  <a:txBody>
-                    <a:bodyPr wrap="square"/>
-                    <a:lstStyle/>
-                    <a:p>
-                      <a:r>
-                        <a:rPr sz="1000" b="0">
-                          <a:solidFill>
-                            <a:srgbClr val="282828"/>
-                          </a:solidFill>
-                          <a:latin typeface="Arial"/>
-                        </a:rPr>
-                        <a:t>floor</a:t>
+              <a:tr h="468630">
+                <a:tc>
+                  <a:txBody>
+                    <a:bodyPr wrap="square"/>
+                    <a:lstStyle/>
+                    <a:p>
+                      <a:r>
+                        <a:rPr sz="1100" b="0">
+                          <a:solidFill>
+                            <a:srgbClr val="282828"/>
+                          </a:solidFill>
+                          <a:latin typeface="Arial"/>
+                        </a:rPr>
+                        <a:t>interferometer</a:t>
                       </a:r>
                     </a:p>
                   </a:txBody>
@@ -16828,13 +16936,13 @@
                     <a:lstStyle/>
                     <a:p>
                       <a:r>
-                        <a:rPr sz="1000" b="0">
-                          <a:solidFill>
-                            <a:srgbClr val="282828"/>
-                          </a:solidFill>
-                          <a:latin typeface="Arial"/>
-                        </a:rPr>
-                        <a:t>rms of the actuators that were not changed, in picometers</a:t>
+                        <a:rPr sz="1100" b="0">
+                          <a:solidFill>
+                            <a:srgbClr val="282828"/>
+                          </a:solidFill>
+                          <a:latin typeface="Arial"/>
+                        </a:rPr>
+                        <a:t>camera 1/f walk, 1e-3 of signal within a scan</a:t>
                       </a:r>
                     </a:p>
                   </a:txBody>
@@ -16844,43 +16952,131 @@
                     </a:solidFill>
                   </a:tcPr>
                 </a:tc>
+                <a:tc>
+                  <a:txBody>
+                    <a:bodyPr wrap="square"/>
+                    <a:lstStyle/>
+                    <a:p>
+                      <a:r>
+                        <a:rPr sz="1100" b="0">
+                          <a:solidFill>
+                            <a:srgbClr val="282828"/>
+                          </a:solidFill>
+                          <a:latin typeface="Arial"/>
+                        </a:rPr>
+                        <a:t>+13% light for 3 pm</a:t>
+                      </a:r>
+                    </a:p>
+                  </a:txBody>
+                  <a:tcPr marL="54864" marR="54864" marT="18288" marB="18288">
+                    <a:solidFill>
+                      <a:srgbClr val="ECF1F6"/>
+                    </a:solidFill>
+                  </a:tcPr>
+                </a:tc>
+                <a:tc>
+                  <a:txBody>
+                    <a:bodyPr wrap="square"/>
+                    <a:lstStyle/>
+                    <a:p>
+                      <a:r>
+                        <a:rPr sz="1100" b="0">
+                          <a:solidFill>
+                            <a:srgbClr val="282828"/>
+                          </a:solidFill>
+                          <a:latin typeface="Arial"/>
+                        </a:rPr>
+                        <a:t>—</a:t>
+                      </a:r>
+                    </a:p>
+                  </a:txBody>
+                  <a:tcPr marL="54864" marR="54864" marT="18288" marB="18288">
+                    <a:solidFill>
+                      <a:srgbClr val="ECF1F6"/>
+                    </a:solidFill>
+                  </a:tcPr>
+                </a:tc>
               </a:tr>
-              <a:tr h="262890">
-                <a:tc>
-                  <a:txBody>
-                    <a:bodyPr wrap="square"/>
-                    <a:lstStyle/>
-                    <a:p>
-                      <a:r>
-                        <a:rPr sz="1000" b="0">
-                          <a:solidFill>
-                            <a:srgbClr val="282828"/>
-                          </a:solidFill>
-                          <a:latin typeface="Arial"/>
-                        </a:rPr>
-                        <a:t>SNR</a:t>
-                      </a:r>
-                    </a:p>
-                  </a:txBody>
-                  <a:tcPr marL="54864" marR="54864" marT="18288" marB="18288">
-                    <a:solidFill>
-                      <a:srgbClr val="FFFFFF"/>
-                    </a:solidFill>
-                  </a:tcPr>
-                </a:tc>
-                <a:tc>
-                  <a:txBody>
-                    <a:bodyPr wrap="square"/>
-                    <a:lstStyle/>
-                    <a:p>
-                      <a:r>
-                        <a:rPr sz="1000" b="0">
-                          <a:solidFill>
-                            <a:srgbClr val="282828"/>
-                          </a:solidFill>
-                          <a:latin typeface="Arial"/>
-                        </a:rPr>
-                        <a:t>recovered change ÷ floor; above 5 counts as detected</a:t>
+              <a:tr h="468630">
+                <a:tc>
+                  <a:txBody>
+                    <a:bodyPr wrap="square"/>
+                    <a:lstStyle/>
+                    <a:p>
+                      <a:r>
+                        <a:rPr sz="1100" b="0">
+                          <a:solidFill>
+                            <a:srgbClr val="282828"/>
+                          </a:solidFill>
+                          <a:latin typeface="Arial"/>
+                        </a:rPr>
+                        <a:t>interferometer, snapshot</a:t>
+                      </a:r>
+                    </a:p>
+                  </a:txBody>
+                  <a:tcPr marL="54864" marR="54864" marT="18288" marB="18288">
+                    <a:solidFill>
+                      <a:srgbClr val="FFFFFF"/>
+                    </a:solidFill>
+                  </a:tcPr>
+                </a:tc>
+                <a:tc>
+                  <a:txBody>
+                    <a:bodyPr wrap="square"/>
+                    <a:lstStyle/>
+                    <a:p>
+                      <a:r>
+                        <a:rPr sz="1100" b="0">
+                          <a:solidFill>
+                            <a:srgbClr val="282828"/>
+                          </a:solidFill>
+                          <a:latin typeface="Arial"/>
+                        </a:rPr>
+                        <a:t>splitter diattenuation (plate); cube R_p</a:t>
+                      </a:r>
+                    </a:p>
+                  </a:txBody>
+                  <a:tcPr marL="54864" marR="54864" marT="18288" marB="18288">
+                    <a:solidFill>
+                      <a:srgbClr val="FFFFFF"/>
+                    </a:solidFill>
+                  </a:tcPr>
+                </a:tc>
+                <a:tc>
+                  <a:txBody>
+                    <a:bodyPr wrap="square"/>
+                    <a:lstStyle/>
+                    <a:p>
+                      <a:r>
+                        <a:rPr sz="1100" b="0">
+                          <a:solidFill>
+                            <a:srgbClr val="282828"/>
+                          </a:solidFill>
+                          <a:latin typeface="Arial"/>
+                        </a:rPr>
+                        <a:t>at the built 22.5°: arm rotation 1.56°, gain +0.9% (11.7% at the record's 45°); 2.1% (cube, naive stack)</a:t>
+                      </a:r>
+                    </a:p>
+                  </a:txBody>
+                  <a:tcPr marL="54864" marR="54864" marT="18288" marB="18288">
+                    <a:solidFill>
+                      <a:srgbClr val="FFFFFF"/>
+                    </a:solidFill>
+                  </a:tcPr>
+                </a:tc>
+                <a:tc>
+                  <a:txBody>
+                    <a:bodyPr wrap="square"/>
+                    <a:lstStyle/>
+                    <a:p>
+                      <a:r>
+                        <a:rPr sz="1100" b="0">
+                          <a:solidFill>
+                            <a:srgbClr val="282828"/>
+                          </a:solidFill>
+                          <a:latin typeface="Arial"/>
+                        </a:rPr>
+                        <a:t>residual after a measured matrix 1.4e-3 (lens), 5.5e-4 (mirrors); symmetric stack 0</a:t>
                       </a:r>
                     </a:p>
                   </a:txBody>
@@ -16891,20 +17087,20 @@
                   </a:tcPr>
                 </a:tc>
               </a:tr>
-              <a:tr h="434340">
-                <a:tc>
-                  <a:txBody>
-                    <a:bodyPr wrap="square"/>
-                    <a:lstStyle/>
-                    <a:p>
-                      <a:r>
-                        <a:rPr sz="1000" b="0">
-                          <a:solidFill>
-                            <a:srgbClr val="282828"/>
-                          </a:solidFill>
-                          <a:latin typeface="Arial"/>
-                        </a:rPr>
-                        <a:t>photons per measurement</a:t>
+              <a:tr h="468630">
+                <a:tc>
+                  <a:txBody>
+                    <a:bodyPr wrap="square"/>
+                    <a:lstStyle/>
+                    <a:p>
+                      <a:r>
+                        <a:rPr sz="1100" b="0">
+                          <a:solidFill>
+                            <a:srgbClr val="282828"/>
+                          </a:solidFill>
+                          <a:latin typeface="Arial"/>
+                        </a:rPr>
+                        <a:t>Zernike</a:t>
                       </a:r>
                     </a:p>
                   </a:txBody>
@@ -16920,13 +17116,13 @@
                     <a:lstStyle/>
                     <a:p>
                       <a:r>
-                        <a:rPr sz="1000" b="0">
-                          <a:solidFill>
-                            <a:srgbClr val="282828"/>
-                          </a:solidFill>
-                          <a:latin typeface="Arial"/>
-                        </a:rPr>
-                        <a:t>all frames of one measurement summed; 1e14 photons at 633 nm = 31 µJ = 0.13 s of a 1 mW laser at 25% throughput</a:t>
+                        <a:rPr sz="1100" b="0">
+                          <a:solidFill>
+                            <a:srgbClr val="282828"/>
+                          </a:solidFill>
+                          <a:latin typeface="Arial"/>
+                        </a:rPr>
+                        <a:t>model out of focus (the early model); sampling; color</a:t>
                       </a:r>
                     </a:p>
                   </a:txBody>
@@ -16936,43 +17132,131 @@
                     </a:solidFill>
                   </a:tcPr>
                 </a:tc>
+                <a:tc>
+                  <a:txBody>
+                    <a:bodyPr wrap="square"/>
+                    <a:lstStyle/>
+                    <a:p>
+                      <a:r>
+                        <a:rPr sz="1100" b="0">
+                          <a:solidFill>
+                            <a:srgbClr val="282828"/>
+                          </a:solidFill>
+                          <a:latin typeface="Arial"/>
+                        </a:rPr>
+                        <a:t>floor 744 → 67 pm on correction; dimple needs 6 pixels; one etch reads five colors within 3%</a:t>
+                      </a:r>
+                    </a:p>
+                  </a:txBody>
+                  <a:tcPr marL="54864" marR="54864" marT="18288" marB="18288">
+                    <a:solidFill>
+                      <a:srgbClr val="ECF1F6"/>
+                    </a:solidFill>
+                  </a:tcPr>
+                </a:tc>
+                <a:tc>
+                  <a:txBody>
+                    <a:bodyPr wrap="square"/>
+                    <a:lstStyle/>
+                    <a:p>
+                      <a:r>
+                        <a:rPr sz="1100" b="0">
+                          <a:solidFill>
+                            <a:srgbClr val="282828"/>
+                          </a:solidFill>
+                          <a:latin typeface="Arial"/>
+                        </a:rPr>
+                        <a:t>—</a:t>
+                      </a:r>
+                    </a:p>
+                  </a:txBody>
+                  <a:tcPr marL="54864" marR="54864" marT="18288" marB="18288">
+                    <a:solidFill>
+                      <a:srgbClr val="ECF1F6"/>
+                    </a:solidFill>
+                  </a:tcPr>
+                </a:tc>
               </a:tr>
-              <a:tr h="434340">
-                <a:tc>
-                  <a:txBody>
-                    <a:bodyPr wrap="square"/>
-                    <a:lstStyle/>
-                    <a:p>
-                      <a:r>
-                        <a:rPr sz="1000" b="0">
-                          <a:solidFill>
-                            <a:srgbClr val="282828"/>
-                          </a:solidFill>
-                          <a:latin typeface="Arial"/>
-                        </a:rPr>
-                        <a:t>capture range to 10%</a:t>
-                      </a:r>
-                    </a:p>
-                  </a:txBody>
-                  <a:tcPr marL="54864" marR="54864" marT="18288" marB="18288">
-                    <a:solidFill>
-                      <a:srgbClr val="FFFFFF"/>
-                    </a:solidFill>
-                  </a:tcPr>
-                </a:tc>
-                <a:tc>
-                  <a:txBody>
-                    <a:bodyPr wrap="square"/>
-                    <a:lstStyle/>
-                    <a:p>
-                      <a:r>
-                        <a:rPr sz="1000" b="0">
-                          <a:solidFill>
-                            <a:srgbClr val="282828"/>
-                          </a:solidFill>
-                          <a:latin typeface="Arial"/>
-                        </a:rPr>
-                        <a:t>the largest working surface at which a 10 nm change on the 47 sites reads within 10%, the matrix left as calibrated at 30 nm</a:t>
+              <a:tr h="468630">
+                <a:tc>
+                  <a:txBody>
+                    <a:bodyPr wrap="square"/>
+                    <a:lstStyle/>
+                    <a:p>
+                      <a:r>
+                        <a:rPr sz="1100" b="0">
+                          <a:solidFill>
+                            <a:srgbClr val="282828"/>
+                          </a:solidFill>
+                          <a:latin typeface="Arial"/>
+                        </a:rPr>
+                        <a:t>vector Zernike</a:t>
+                      </a:r>
+                    </a:p>
+                  </a:txBody>
+                  <a:tcPr marL="54864" marR="54864" marT="18288" marB="18288">
+                    <a:solidFill>
+                      <a:srgbClr val="FFFFFF"/>
+                    </a:solidFill>
+                  </a:tcPr>
+                </a:tc>
+                <a:tc>
+                  <a:txBody>
+                    <a:bodyPr wrap="square"/>
+                    <a:lstStyle/>
+                    <a:p>
+                      <a:r>
+                        <a:rPr sz="1100" b="0">
+                          <a:solidFill>
+                            <a:srgbClr val="282828"/>
+                          </a:solidFill>
+                          <a:latin typeface="Arial"/>
+                        </a:rPr>
+                        <a:t>metasurface retardance error 0.1 rad</a:t>
+                      </a:r>
+                    </a:p>
+                  </a:txBody>
+                  <a:tcPr marL="54864" marR="54864" marT="18288" marB="18288">
+                    <a:solidFill>
+                      <a:srgbClr val="FFFFFF"/>
+                    </a:solidFill>
+                  </a:tcPr>
+                </a:tc>
+                <a:tc>
+                  <a:txBody>
+                    <a:bodyPr wrap="square"/>
+                    <a:lstStyle/>
+                    <a:p>
+                      <a:r>
+                        <a:rPr sz="1100" b="0">
+                          <a:solidFill>
+                            <a:srgbClr val="282828"/>
+                          </a:solidFill>
+                          <a:latin typeface="Arial"/>
+                        </a:rPr>
+                        <a:t>750 pm on a 12 nm figure</a:t>
+                      </a:r>
+                    </a:p>
+                  </a:txBody>
+                  <a:tcPr marL="54864" marR="54864" marT="18288" marB="18288">
+                    <a:solidFill>
+                      <a:srgbClr val="FFFFFF"/>
+                    </a:solidFill>
+                  </a:tcPr>
+                </a:tc>
+                <a:tc>
+                  <a:txBody>
+                    <a:bodyPr wrap="square"/>
+                    <a:lstStyle/>
+                    <a:p>
+                      <a:r>
+                        <a:rPr sz="1100" b="0">
+                          <a:solidFill>
+                            <a:srgbClr val="282828"/>
+                          </a:solidFill>
+                          <a:latin typeface="Arial"/>
+                        </a:rPr>
+                        <a:t>rows 0.9934 / 4 pm, the ideal numbers</a:t>
                       </a:r>
                     </a:p>
                   </a:txBody>
@@ -16983,20 +17267,20 @@
                   </a:tcPr>
                 </a:tc>
               </a:tr>
-              <a:tr h="262890">
-                <a:tc>
-                  <a:txBody>
-                    <a:bodyPr wrap="square"/>
-                    <a:lstStyle/>
-                    <a:p>
-                      <a:r>
-                        <a:rPr sz="1000" b="0">
-                          <a:solidFill>
-                            <a:srgbClr val="282828"/>
-                          </a:solidFill>
-                          <a:latin typeface="Arial"/>
-                        </a:rPr>
-                        <a:t>capture</a:t>
+              <a:tr h="468630">
+                <a:tc>
+                  <a:txBody>
+                    <a:bodyPr wrap="square"/>
+                    <a:lstStyle/>
+                    <a:p>
+                      <a:r>
+                        <a:rPr sz="1100" b="0">
+                          <a:solidFill>
+                            <a:srgbClr val="282828"/>
+                          </a:solidFill>
+                          <a:latin typeface="Arial"/>
+                        </a:rPr>
+                        <a:t>vector Zernike</a:t>
                       </a:r>
                     </a:p>
                   </a:txBody>
@@ -17012,13 +17296,13 @@
                     <a:lstStyle/>
                     <a:p>
                       <a:r>
-                        <a:rPr sz="1000" b="0">
-                          <a:solidFill>
-                            <a:srgbClr val="282828"/>
-                          </a:solidFill>
-                          <a:latin typeface="Arial"/>
-                        </a:rPr>
-                        <a:t>the largest starting surface the servo brings to 3 pm</a:t>
+                        <a:rPr sz="1100" b="0">
+                          <a:solidFill>
+                            <a:srgbClr val="282828"/>
+                          </a:solidFill>
+                          <a:latin typeface="Arial"/>
+                        </a:rPr>
+                        <a:t>the arm's polarization (six tilted glass faces)</a:t>
                       </a:r>
                     </a:p>
                   </a:txBody>
@@ -17028,49 +17312,407 @@
                     </a:solidFill>
                   </a:tcPr>
                 </a:tc>
+                <a:tc>
+                  <a:txBody>
+                    <a:bodyPr wrap="square"/>
+                    <a:lstStyle/>
+                    <a:p>
+                      <a:r>
+                        <a:rPr sz="1100" b="0">
+                          <a:solidFill>
+                            <a:srgbClr val="282828"/>
+                          </a:solidFill>
+                          <a:latin typeface="Arial"/>
+                        </a:rPr>
+                        <a:t>9 pm on 12 nm; 6 nm per rad of channel phase</a:t>
+                      </a:r>
+                    </a:p>
+                  </a:txBody>
+                  <a:tcPr marL="54864" marR="54864" marT="18288" marB="18288">
+                    <a:solidFill>
+                      <a:srgbClr val="ECF1F6"/>
+                    </a:solidFill>
+                  </a:tcPr>
+                </a:tc>
+                <a:tc>
+                  <a:txBody>
+                    <a:bodyPr wrap="square"/>
+                    <a:lstStyle/>
+                    <a:p>
+                      <a:r>
+                        <a:rPr sz="1100" b="0">
+                          <a:solidFill>
+                            <a:srgbClr val="282828"/>
+                          </a:solidFill>
+                          <a:latin typeface="Arial"/>
+                        </a:rPr>
+                        <a:t>nothing to 0.1 rad; 10% gain loss at 0.3</a:t>
+                      </a:r>
+                    </a:p>
+                  </a:txBody>
+                  <a:tcPr marL="54864" marR="54864" marT="18288" marB="18288">
+                    <a:solidFill>
+                      <a:srgbClr val="ECF1F6"/>
+                    </a:solidFill>
+                  </a:tcPr>
+                </a:tc>
               </a:tr>
-              <a:tr h="434340">
-                <a:tc>
-                  <a:txBody>
-                    <a:bodyPr wrap="square"/>
-                    <a:lstStyle/>
-                    <a:p>
-                      <a:r>
-                        <a:rPr sz="1000" b="0">
-                          <a:solidFill>
-                            <a:srgbClr val="282828"/>
-                          </a:solidFill>
-                          <a:latin typeface="Arial"/>
-                        </a:rPr>
-                        <a:t>hold, one number</a:t>
-                      </a:r>
-                    </a:p>
-                  </a:txBody>
-                  <a:tcPr marL="54864" marR="54864" marT="18288" marB="18288">
-                    <a:solidFill>
-                      <a:srgbClr val="FFFFFF"/>
-                    </a:solidFill>
-                  </a:tcPr>
-                </a:tc>
-                <a:tc>
-                  <a:txBody>
-                    <a:bodyPr wrap="square"/>
-                    <a:lstStyle/>
-                    <a:p>
-                      <a:r>
-                        <a:rPr sz="1000" b="0">
-                          <a:solidFill>
-                            <a:srgbClr val="282828"/>
-                          </a:solidFill>
-                          <a:latin typeface="Arial"/>
-                        </a:rPr>
-                        <a:t>photons per cycle that hold 3 pm rms in a 60-cycle loop at gain 0.5</a:t>
-                      </a:r>
-                    </a:p>
-                  </a:txBody>
-                  <a:tcPr marL="54864" marR="54864" marT="18288" marB="18288">
-                    <a:solidFill>
-                      <a:srgbClr val="FFFFFF"/>
+              <a:tr h="468630">
+                <a:tc>
+                  <a:txBody>
+                    <a:bodyPr wrap="square"/>
+                    <a:lstStyle/>
+                    <a:p>
+                      <a:r>
+                        <a:rPr sz="1100" b="0">
+                          <a:solidFill>
+                            <a:srgbClr val="282828"/>
+                          </a:solidFill>
+                          <a:latin typeface="Arial"/>
+                        </a:rPr>
+                        <a:t>vector Zernike</a:t>
+                      </a:r>
+                    </a:p>
+                  </a:txBody>
+                  <a:tcPr marL="54864" marR="54864" marT="18288" marB="18288">
+                    <a:solidFill>
+                      <a:srgbClr val="FFFFFF"/>
+                    </a:solidFill>
+                  </a:tcPr>
+                </a:tc>
+                <a:tc>
+                  <a:txBody>
+                    <a:bodyPr wrap="square"/>
+                    <a:lstStyle/>
+                    <a:p>
+                      <a:r>
+                        <a:rPr sz="1100" b="0">
+                          <a:solidFill>
+                            <a:srgbClr val="282828"/>
+                          </a:solidFill>
+                          <a:latin typeface="Arial"/>
+                        </a:rPr>
+                        <a:t>the analyzer: cube extinction; plate error λ/300</a:t>
+                      </a:r>
+                    </a:p>
+                  </a:txBody>
+                  <a:tcPr marL="54864" marR="54864" marT="18288" marB="18288">
+                    <a:solidFill>
+                      <a:srgbClr val="FFFFFF"/>
+                    </a:solidFill>
+                  </a:tcPr>
+                </a:tc>
+                <a:tc>
+                  <a:txBody>
+                    <a:bodyPr wrap="square"/>
+                    <a:lstStyle/>
+                    <a:p>
+                      <a:r>
+                        <a:rPr sz="1100" b="0">
+                          <a:solidFill>
+                            <a:srgbClr val="282828"/>
+                          </a:solidFill>
+                          <a:latin typeface="Arial"/>
+                        </a:rPr>
+                        <a:t>3.5 pm; 165 pm (1.4% of the figure)</a:t>
+                      </a:r>
+                    </a:p>
+                  </a:txBody>
+                  <a:tcPr marL="54864" marR="54864" marT="18288" marB="18288">
+                    <a:solidFill>
+                      <a:srgbClr val="FFFFFF"/>
+                    </a:solidFill>
+                  </a:tcPr>
+                </a:tc>
+                <a:tc>
+                  <a:txBody>
+                    <a:bodyPr wrap="square"/>
+                    <a:lstStyle/>
+                    <a:p>
+                      <a:r>
+                        <a:rPr sz="1100" b="0">
+                          <a:solidFill>
+                            <a:srgbClr val="282828"/>
+                          </a:solidFill>
+                          <a:latin typeface="Arial"/>
+                        </a:rPr>
+                        <a:t>gain within 0.7%, floors within 4 pm</a:t>
+                      </a:r>
+                    </a:p>
+                  </a:txBody>
+                  <a:tcPr marL="54864" marR="54864" marT="18288" marB="18288">
+                    <a:solidFill>
+                      <a:srgbClr val="FFFFFF"/>
+                    </a:solidFill>
+                  </a:tcPr>
+                </a:tc>
+              </a:tr>
+              <a:tr h="468630">
+                <a:tc>
+                  <a:txBody>
+                    <a:bodyPr wrap="square"/>
+                    <a:lstStyle/>
+                    <a:p>
+                      <a:r>
+                        <a:rPr sz="1100" b="0">
+                          <a:solidFill>
+                            <a:srgbClr val="282828"/>
+                          </a:solidFill>
+                          <a:latin typeface="Arial"/>
+                        </a:rPr>
+                        <a:t>pinhole</a:t>
+                      </a:r>
+                    </a:p>
+                  </a:txBody>
+                  <a:tcPr marL="54864" marR="54864" marT="18288" marB="18288">
+                    <a:solidFill>
+                      <a:srgbClr val="ECF1F6"/>
+                    </a:solidFill>
+                  </a:tcPr>
+                </a:tc>
+                <a:tc>
+                  <a:txBody>
+                    <a:bodyPr wrap="square"/>
+                    <a:lstStyle/>
+                    <a:p>
+                      <a:r>
+                        <a:rPr sz="1100" b="0">
+                          <a:solidFill>
+                            <a:srgbClr val="282828"/>
+                          </a:solidFill>
+                          <a:latin typeface="Arial"/>
+                        </a:rPr>
+                        <a:t>2% step error</a:t>
+                      </a:r>
+                    </a:p>
+                  </a:txBody>
+                  <a:tcPr marL="54864" marR="54864" marT="18288" marB="18288">
+                    <a:solidFill>
+                      <a:srgbClr val="ECF1F6"/>
+                    </a:solidFill>
+                  </a:tcPr>
+                </a:tc>
+                <a:tc>
+                  <a:txBody>
+                    <a:bodyPr wrap="square"/>
+                    <a:lstStyle/>
+                    <a:p>
+                      <a:r>
+                        <a:rPr sz="1100" b="0">
+                          <a:solidFill>
+                            <a:srgbClr val="282828"/>
+                          </a:solidFill>
+                          <a:latin typeface="Arial"/>
+                        </a:rPr>
+                        <a:t>4.9 pm with the five-frame scan (421 pm with four-step least squares)</a:t>
+                      </a:r>
+                    </a:p>
+                  </a:txBody>
+                  <a:tcPr marL="54864" marR="54864" marT="18288" marB="18288">
+                    <a:solidFill>
+                      <a:srgbClr val="ECF1F6"/>
+                    </a:solidFill>
+                  </a:tcPr>
+                </a:tc>
+                <a:tc>
+                  <a:txBody>
+                    <a:bodyPr wrap="square"/>
+                    <a:lstStyle/>
+                    <a:p>
+                      <a:r>
+                        <a:rPr sz="1100" b="0">
+                          <a:solidFill>
+                            <a:srgbClr val="282828"/>
+                          </a:solidFill>
+                          <a:latin typeface="Arial"/>
+                        </a:rPr>
+                        <a:t>differential rows error-free to the digit</a:t>
+                      </a:r>
+                    </a:p>
+                  </a:txBody>
+                  <a:tcPr marL="54864" marR="54864" marT="18288" marB="18288">
+                    <a:solidFill>
+                      <a:srgbClr val="ECF1F6"/>
+                    </a:solidFill>
+                  </a:tcPr>
+                </a:tc>
+              </a:tr>
+              <a:tr h="468630">
+                <a:tc>
+                  <a:txBody>
+                    <a:bodyPr wrap="square"/>
+                    <a:lstStyle/>
+                    <a:p>
+                      <a:r>
+                        <a:rPr sz="1100" b="0">
+                          <a:solidFill>
+                            <a:srgbClr val="282828"/>
+                          </a:solidFill>
+                          <a:latin typeface="Arial"/>
+                        </a:rPr>
+                        <a:t>pinhole, P/SRI</a:t>
+                      </a:r>
+                    </a:p>
+                  </a:txBody>
+                  <a:tcPr marL="54864" marR="54864" marT="18288" marB="18288">
+                    <a:solidFill>
+                      <a:srgbClr val="FFFFFF"/>
+                    </a:solidFill>
+                  </a:tcPr>
+                </a:tc>
+                <a:tc>
+                  <a:txBody>
+                    <a:bodyPr wrap="square"/>
+                    <a:lstStyle/>
+                    <a:p>
+                      <a:r>
+                        <a:rPr sz="1100" b="0">
+                          <a:solidFill>
+                            <a:srgbClr val="282828"/>
+                          </a:solidFill>
+                          <a:latin typeface="Arial"/>
+                        </a:rPr>
+                        <a:t>camera bias drifting within a scan</a:t>
+                      </a:r>
+                    </a:p>
+                  </a:txBody>
+                  <a:tcPr marL="54864" marR="54864" marT="18288" marB="18288">
+                    <a:solidFill>
+                      <a:srgbClr val="FFFFFF"/>
+                    </a:solidFill>
+                  </a:tcPr>
+                </a:tc>
+                <a:tc>
+                  <a:txBody>
+                    <a:bodyPr wrap="square"/>
+                    <a:lstStyle/>
+                    <a:p>
+                      <a:r>
+                        <a:rPr sz="1100" b="0">
+                          <a:solidFill>
+                            <a:srgbClr val="282828"/>
+                          </a:solidFill>
+                          <a:latin typeface="Arial"/>
+                        </a:rPr>
+                        <a:t>5.3 / 10.7 pm at 1e15 (the linear Zernike: 10.8 nm)</a:t>
+                      </a:r>
+                    </a:p>
+                  </a:txBody>
+                  <a:tcPr marL="54864" marR="54864" marT="18288" marB="18288">
+                    <a:solidFill>
+                      <a:srgbClr val="FFFFFF"/>
+                    </a:solidFill>
+                  </a:tcPr>
+                </a:tc>
+                <a:tc>
+                  <a:txBody>
+                    <a:bodyPr wrap="square"/>
+                    <a:lstStyle/>
+                    <a:p>
+                      <a:r>
+                        <a:rPr sz="1100" b="0">
+                          <a:solidFill>
+                            <a:srgbClr val="282828"/>
+                          </a:solidFill>
+                          <a:latin typeface="Arial"/>
+                        </a:rPr>
+                        <a:t>—</a:t>
+                      </a:r>
+                    </a:p>
+                  </a:txBody>
+                  <a:tcPr marL="54864" marR="54864" marT="18288" marB="18288">
+                    <a:solidFill>
+                      <a:srgbClr val="FFFFFF"/>
+                    </a:solidFill>
+                  </a:tcPr>
+                </a:tc>
+              </a:tr>
+              <a:tr h="468630">
+                <a:tc>
+                  <a:txBody>
+                    <a:bodyPr wrap="square"/>
+                    <a:lstStyle/>
+                    <a:p>
+                      <a:r>
+                        <a:rPr sz="1100" b="0">
+                          <a:solidFill>
+                            <a:srgbClr val="282828"/>
+                          </a:solidFill>
+                          <a:latin typeface="Arial"/>
+                        </a:rPr>
+                        <a:t>P/SRI</a:t>
+                      </a:r>
+                    </a:p>
+                  </a:txBody>
+                  <a:tcPr marL="54864" marR="54864" marT="18288" marB="18288">
+                    <a:solidFill>
+                      <a:srgbClr val="ECF1F6"/>
+                    </a:solidFill>
+                  </a:tcPr>
+                </a:tc>
+                <a:tc>
+                  <a:txBody>
+                    <a:bodyPr wrap="square"/>
+                    <a:lstStyle/>
+                    <a:p>
+                      <a:r>
+                        <a:rPr sz="1100" b="0">
+                          <a:solidFill>
+                            <a:srgbClr val="282828"/>
+                          </a:solidFill>
+                          <a:latin typeface="Arial"/>
+                        </a:rPr>
+                        <a:t>its own reference arm walking</a:t>
+                      </a:r>
+                    </a:p>
+                  </a:txBody>
+                  <a:tcPr marL="54864" marR="54864" marT="18288" marB="18288">
+                    <a:solidFill>
+                      <a:srgbClr val="ECF1F6"/>
+                    </a:solidFill>
+                  </a:tcPr>
+                </a:tc>
+                <a:tc>
+                  <a:txBody>
+                    <a:bodyPr wrap="square"/>
+                    <a:lstStyle/>
+                    <a:p>
+                      <a:r>
+                        <a:rPr sz="1100" b="0">
+                          <a:solidFill>
+                            <a:srgbClr val="282828"/>
+                          </a:solidFill>
+                          <a:latin typeface="Arial"/>
+                        </a:rPr>
+                        <a:t>4% more light over a hundredfold range of walk</a:t>
+                      </a:r>
+                    </a:p>
+                  </a:txBody>
+                  <a:tcPr marL="54864" marR="54864" marT="18288" marB="18288">
+                    <a:solidFill>
+                      <a:srgbClr val="ECF1F6"/>
+                    </a:solidFill>
+                  </a:tcPr>
+                </a:tc>
+                <a:tc>
+                  <a:txBody>
+                    <a:bodyPr wrap="square"/>
+                    <a:lstStyle/>
+                    <a:p>
+                      <a:r>
+                        <a:rPr sz="1100" b="0">
+                          <a:solidFill>
+                            <a:srgbClr val="282828"/>
+                          </a:solidFill>
+                          <a:latin typeface="Arial"/>
+                        </a:rPr>
+                        <a:t>a path change is piston, the mode the estimator nulls</a:t>
+                      </a:r>
+                    </a:p>
+                  </a:txBody>
+                  <a:tcPr marL="54864" marR="54864" marT="18288" marB="18288">
+                    <a:solidFill>
+                      <a:srgbClr val="ECF1F6"/>
                     </a:solidFill>
                   </a:tcPr>
                 </a:tc>
@@ -17081,14 +17723,14 @@
       </p:graphicFrame>
       <p:sp>
         <p:nvSpPr>
-          <p:cNvPr id="6" name="TextBox 5"/>
+          <p:cNvPr id="5" name="TextBox 4"/>
           <p:cNvSpPr txBox="1"/>
           <p:nvPr/>
         </p:nvSpPr>
         <p:spPr>
           <a:xfrm>
-            <a:off x="6400800" y="4233672"/>
-            <a:ext cx="5394960" cy="274320"/>
+            <a:off x="411480" y="6222492"/>
+            <a:ext cx="11368735" cy="274320"/>
           </a:xfrm>
           <a:prstGeom prst="rect">
             <a:avLst/>
@@ -17113,7 +17755,7 @@
                 </a:solidFill>
                 <a:latin typeface="Arial"/>
               </a:rPr>
-              <a:t>Measuring a change costs two measurements.  The 96×96 at 385 detector pixels per pupil is the flight-like sampling; most rows here are at 193 pixels, which the sampling study showed reads the same numbers.</a:t>
+              <a:t>Nothing is left open on the vector sensor's line.  Run tags lens_deck_se2/se5, loop_lens_cam, tg_psi_dm, tg_psi_dm_v2, v2g, v3arm, an193, pdi193se_sh5, pcam193ri, rw193.</a:t>
             </a:r>
           </a:p>
         </p:txBody>
@@ -17126,7 +17768,7 @@
 </p:sld>
 </file>
 
-<file path=ppt/slides/slide30.xml><?xml version="1.0" encoding="utf-8"?>
+<file path=ppt/slides/slide31.xml><?xml version="1.0" encoding="utf-8"?>
 <p:sld xmlns:a="http://schemas.openxmlformats.org/drawingml/2006/main" xmlns:p="http://schemas.openxmlformats.org/presentationml/2006/main" xmlns:r="http://schemas.openxmlformats.org/officeDocument/2006/relationships">
   <p:cSld>
     <p:spTree>
@@ -17408,7 +18050,7 @@
 </p:sld>
 </file>
 
-<file path=ppt/slides/slide31.xml><?xml version="1.0" encoding="utf-8"?>
+<file path=ppt/slides/slide32.xml><?xml version="1.0" encoding="utf-8"?>
 <p:sld xmlns:a="http://schemas.openxmlformats.org/drawingml/2006/main" xmlns:p="http://schemas.openxmlformats.org/presentationml/2006/main" xmlns:r="http://schemas.openxmlformats.org/officeDocument/2006/relationships">
   <p:cSld>
     <p:spTree>
@@ -17627,7 +18269,7 @@
 </p:sld>
 </file>
 
-<file path=ppt/slides/slide32.xml><?xml version="1.0" encoding="utf-8"?>
+<file path=ppt/slides/slide33.xml><?xml version="1.0" encoding="utf-8"?>
 <p:sld xmlns:a="http://schemas.openxmlformats.org/drawingml/2006/main" xmlns:p="http://schemas.openxmlformats.org/presentationml/2006/main" xmlns:r="http://schemas.openxmlformats.org/officeDocument/2006/relationships">
   <p:cSld>
     <p:spTree>
@@ -18273,7 +18915,7 @@
 </p:sld>
 </file>
 
-<file path=ppt/slides/slide33.xml><?xml version="1.0" encoding="utf-8"?>
+<file path=ppt/slides/slide34.xml><?xml version="1.0" encoding="utf-8"?>
 <p:sld xmlns:a="http://schemas.openxmlformats.org/drawingml/2006/main" xmlns:p="http://schemas.openxmlformats.org/presentationml/2006/main" xmlns:r="http://schemas.openxmlformats.org/officeDocument/2006/relationships">
   <p:cSld>
     <p:spTree>
@@ -18492,7 +19134,7 @@
 </p:sld>
 </file>
 
-<file path=ppt/slides/slide34.xml><?xml version="1.0" encoding="utf-8"?>
+<file path=ppt/slides/slide35.xml><?xml version="1.0" encoding="utf-8"?>
 <p:sld xmlns:a="http://schemas.openxmlformats.org/drawingml/2006/main" xmlns:p="http://schemas.openxmlformats.org/presentationml/2006/main" xmlns:r="http://schemas.openxmlformats.org/officeDocument/2006/relationships">
   <p:cSld>
     <p:spTree>
@@ -19017,7 +19659,7 @@
 </p:sld>
 </file>
 
-<file path=ppt/slides/slide35.xml><?xml version="1.0" encoding="utf-8"?>
+<file path=ppt/slides/slide36.xml><?xml version="1.0" encoding="utf-8"?>
 <p:sld xmlns:a="http://schemas.openxmlformats.org/drawingml/2006/main" xmlns:p="http://schemas.openxmlformats.org/presentationml/2006/main" xmlns:r="http://schemas.openxmlformats.org/officeDocument/2006/relationships">
   <p:cSld>
     <p:spTree>
@@ -19269,7 +19911,7 @@
 </p:sld>
 </file>
 
-<file path=ppt/slides/slide36.xml><?xml version="1.0" encoding="utf-8"?>
+<file path=ppt/slides/slide37.xml><?xml version="1.0" encoding="utf-8"?>
 <p:sld xmlns:a="http://schemas.openxmlformats.org/drawingml/2006/main" xmlns:p="http://schemas.openxmlformats.org/presentationml/2006/main" xmlns:r="http://schemas.openxmlformats.org/officeDocument/2006/relationships">
   <p:cSld>
     <p:spTree>
@@ -19528,7 +20170,7 @@
 </p:sld>
 </file>
 
-<file path=ppt/slides/slide37.xml><?xml version="1.0" encoding="utf-8"?>
+<file path=ppt/slides/slide38.xml><?xml version="1.0" encoding="utf-8"?>
 <p:sld xmlns:a="http://schemas.openxmlformats.org/drawingml/2006/main" xmlns:p="http://schemas.openxmlformats.org/presentationml/2006/main" xmlns:r="http://schemas.openxmlformats.org/officeDocument/2006/relationships">
   <p:cSld>
     <p:spTree>
@@ -20554,7 +21196,7 @@
 </p:sld>
 </file>
 
-<file path=ppt/slides/slide38.xml><?xml version="1.0" encoding="utf-8"?>
+<file path=ppt/slides/slide39.xml><?xml version="1.0" encoding="utf-8"?>
 <p:sld xmlns:a="http://schemas.openxmlformats.org/drawingml/2006/main" xmlns:p="http://schemas.openxmlformats.org/presentationml/2006/main" xmlns:r="http://schemas.openxmlformats.org/officeDocument/2006/relationships">
   <p:cSld>
     <p:spTree>
@@ -20840,550 +21482,6 @@
                 <a:latin typeface="Arial"/>
               </a:rPr>
               <a:t>Each directory's README carries the full command list and the run-tag index.</a:t>
-            </a:r>
-          </a:p>
-        </p:txBody>
-      </p:sp>
-    </p:spTree>
-  </p:cSld>
-  <p:clrMapOvr>
-    <a:masterClrMapping/>
-  </p:clrMapOvr>
-</p:sld>
-</file>
-
-<file path=ppt/slides/slide39.xml><?xml version="1.0" encoding="utf-8"?>
-<p:sld xmlns:a="http://schemas.openxmlformats.org/drawingml/2006/main" xmlns:p="http://schemas.openxmlformats.org/presentationml/2006/main" xmlns:r="http://schemas.openxmlformats.org/officeDocument/2006/relationships">
-  <p:cSld>
-    <p:spTree>
-      <p:nvGrpSpPr>
-        <p:cNvPr id="1" name=""/>
-        <p:cNvGrpSpPr/>
-        <p:nvPr/>
-      </p:nvGrpSpPr>
-      <p:grpSpPr/>
-      <p:sp>
-        <p:nvSpPr>
-          <p:cNvPr id="2" name="TextBox 1"/>
-          <p:cNvSpPr txBox="1"/>
-          <p:nvPr/>
-        </p:nvSpPr>
-        <p:spPr>
-          <a:xfrm>
-            <a:off x="411480" y="201168"/>
-            <a:ext cx="11368735" cy="914400"/>
-          </a:xfrm>
-          <a:prstGeom prst="rect">
-            <a:avLst/>
-          </a:prstGeom>
-          <a:noFill/>
-        </p:spPr>
-        <p:txBody>
-          <a:bodyPr wrap="square">
-            <a:spAutoFit/>
-          </a:bodyPr>
-          <a:lstStyle/>
-          <a:p>
-            <a:pPr>
-              <a:spcAft>
-                <a:spcPts val="400"/>
-              </a:spcAft>
-            </a:pPr>
-            <a:r>
-              <a:rPr sz="2400" b="1">
-                <a:solidFill>
-                  <a:srgbClr val="1F4E79"/>
-                </a:solidFill>
-                <a:latin typeface="Arial"/>
-              </a:rPr>
-              <a:t>Backup: the interferometer's three phase-shift forms</a:t>
-            </a:r>
-          </a:p>
-          <a:p>
-            <a:pPr>
-              <a:spcAft>
-                <a:spcPts val="0"/>
-              </a:spcAft>
-            </a:pPr>
-            <a:r>
-              <a:rPr sz="1250" b="0">
-                <a:solidFill>
-                  <a:srgbClr val="6E6E6E"/>
-                </a:solidFill>
-                <a:latin typeface="Arial"/>
-              </a:rPr>
-              <a:t>The four frames are the same in the model; the forms differ in what they get wrong</a:t>
-            </a:r>
-          </a:p>
-        </p:txBody>
-      </p:sp>
-      <p:sp>
-        <p:nvSpPr>
-          <p:cNvPr id="3" name="Rectangle 2"/>
-          <p:cNvSpPr/>
-          <p:nvPr/>
-        </p:nvSpPr>
-        <p:spPr>
-          <a:xfrm>
-            <a:off x="411480" y="1133856"/>
-            <a:ext cx="11368735" cy="20320"/>
-          </a:xfrm>
-          <a:prstGeom prst="rect">
-            <a:avLst/>
-          </a:prstGeom>
-          <a:solidFill>
-            <a:srgbClr val="B8C6D4"/>
-          </a:solidFill>
-          <a:ln>
-            <a:noFill/>
-          </a:ln>
-          <a:effectLst/>
-        </p:spPr>
-        <p:style>
-          <a:lnRef idx="1">
-            <a:schemeClr val="accent1"/>
-          </a:lnRef>
-          <a:fillRef idx="3">
-            <a:schemeClr val="accent1"/>
-          </a:fillRef>
-          <a:effectRef idx="2">
-            <a:schemeClr val="accent1"/>
-          </a:effectRef>
-          <a:fontRef idx="minor">
-            <a:schemeClr val="lt1"/>
-          </a:fontRef>
-        </p:style>
-        <p:txBody>
-          <a:bodyPr rtlCol="0" anchor="ctr"/>
-          <a:lstStyle/>
-          <a:p>
-            <a:pPr algn="ctr"/>
-          </a:p>
-        </p:txBody>
-      </p:sp>
-      <p:graphicFrame>
-        <p:nvGraphicFramePr>
-          <p:cNvPr id="4" name="Table 3"/>
-          <p:cNvGraphicFramePr>
-            <a:graphicFrameLocks noGrp="1"/>
-          </p:cNvGraphicFramePr>
-          <p:nvPr/>
-        </p:nvGraphicFramePr>
-        <p:xfrm>
-          <a:off x="411480" y="1298448"/>
-          <a:ext cx="11368734" cy="2817495"/>
-        </p:xfrm>
-        <a:graphic>
-          <a:graphicData uri="http://schemas.openxmlformats.org/drawingml/2006/table">
-            <a:tbl>
-              <a:tblPr firstRow="1" bandRow="1">
-                <a:tableStyleId>{5C22544A-7EE6-4342-B048-85BDC9FD1C3A}</a:tableStyleId>
-              </a:tblPr>
-              <a:tblGrid>
-                <a:gridCol w="1671828"/>
-                <a:gridCol w="1257454"/>
-                <a:gridCol w="1523454"/>
-                <a:gridCol w="6915998"/>
-              </a:tblGrid>
-              <a:tr h="468630">
-                <a:tc>
-                  <a:txBody>
-                    <a:bodyPr wrap="square"/>
-                    <a:lstStyle/>
-                    <a:p>
-                      <a:r>
-                        <a:rPr sz="1100" b="1">
-                          <a:solidFill>
-                            <a:srgbClr val="FFFFFF"/>
-                          </a:solidFill>
-                          <a:latin typeface="Arial"/>
-                        </a:rPr>
-                        <a:t>form</a:t>
-                      </a:r>
-                    </a:p>
-                  </a:txBody>
-                  <a:tcPr marL="54864" marR="54864" marT="18288" marB="18288">
-                    <a:solidFill>
-                      <a:srgbClr val="1F4E79"/>
-                    </a:solidFill>
-                  </a:tcPr>
-                </a:tc>
-                <a:tc>
-                  <a:txBody>
-                    <a:bodyPr wrap="square"/>
-                    <a:lstStyle/>
-                    <a:p>
-                      <a:r>
-                        <a:rPr sz="1100" b="1">
-                          <a:solidFill>
-                            <a:srgbClr val="FFFFFF"/>
-                          </a:solidFill>
-                          <a:latin typeface="Arial"/>
-                        </a:rPr>
-                        <a:t>how the four steps are made</a:t>
-                      </a:r>
-                    </a:p>
-                  </a:txBody>
-                  <a:tcPr marL="54864" marR="54864" marT="18288" marB="18288">
-                    <a:solidFill>
-                      <a:srgbClr val="1F4E79"/>
-                    </a:solidFill>
-                  </a:tcPr>
-                </a:tc>
-                <a:tc>
-                  <a:txBody>
-                    <a:bodyPr wrap="square"/>
-                    <a:lstStyle/>
-                    <a:p>
-                      <a:r>
-                        <a:rPr sz="1100" b="1">
-                          <a:solidFill>
-                            <a:srgbClr val="FFFFFF"/>
-                          </a:solidFill>
-                          <a:latin typeface="Arial"/>
-                        </a:rPr>
-                        <a:t>what it gets wrong</a:t>
-                      </a:r>
-                    </a:p>
-                  </a:txBody>
-                  <a:tcPr marL="54864" marR="54864" marT="18288" marB="18288">
-                    <a:solidFill>
-                      <a:srgbClr val="1F4E79"/>
-                    </a:solidFill>
-                  </a:tcPr>
-                </a:tc>
-                <a:tc>
-                  <a:txBody>
-                    <a:bodyPr wrap="square"/>
-                    <a:lstStyle/>
-                    <a:p>
-                      <a:r>
-                        <a:rPr sz="1100" b="1">
-                          <a:solidFill>
-                            <a:srgbClr val="FFFFFF"/>
-                          </a:solidFill>
-                          <a:latin typeface="Arial"/>
-                        </a:rPr>
-                        <a:t>priced</a:t>
-                      </a:r>
-                    </a:p>
-                  </a:txBody>
-                  <a:tcPr marL="54864" marR="54864" marT="18288" marB="18288">
-                    <a:solidFill>
-                      <a:srgbClr val="1F4E79"/>
-                    </a:solidFill>
-                  </a:tcPr>
-                </a:tc>
-              </a:tr>
-              <a:tr h="657225">
-                <a:tc>
-                  <a:txBody>
-                    <a:bodyPr wrap="square"/>
-                    <a:lstStyle/>
-                    <a:p>
-                      <a:r>
-                        <a:rPr sz="1100" b="0">
-                          <a:solidFill>
-                            <a:srgbClr val="282828"/>
-                          </a:solidFill>
-                          <a:latin typeface="Arial"/>
-                        </a:rPr>
-                        <a:t>piezo four-step</a:t>
-                      </a:r>
-                    </a:p>
-                  </a:txBody>
-                  <a:tcPr marL="54864" marR="54864" marT="18288" marB="18288">
-                    <a:solidFill>
-                      <a:srgbClr val="FFFFFF"/>
-                    </a:solidFill>
-                  </a:tcPr>
-                </a:tc>
-                <a:tc>
-                  <a:txBody>
-                    <a:bodyPr wrap="square"/>
-                    <a:lstStyle/>
-                    <a:p>
-                      <a:r>
-                        <a:rPr sz="1100" b="0">
-                          <a:solidFill>
-                            <a:srgbClr val="282828"/>
-                          </a:solidFill>
-                          <a:latin typeface="Arial"/>
-                        </a:rPr>
-                        <a:t>the reference flat stepped in time</a:t>
-                      </a:r>
-                    </a:p>
-                  </a:txBody>
-                  <a:tcPr marL="54864" marR="54864" marT="18288" marB="18288">
-                    <a:solidFill>
-                      <a:srgbClr val="FFFFFF"/>
-                    </a:solidFill>
-                  </a:tcPr>
-                </a:tc>
-                <a:tc>
-                  <a:txBody>
-                    <a:bodyPr wrap="square"/>
-                    <a:lstStyle/>
-                    <a:p>
-                      <a:r>
-                        <a:rPr sz="1100" b="0">
-                          <a:solidFill>
-                            <a:srgbClr val="282828"/>
-                          </a:solidFill>
-                          <a:latin typeface="Arial"/>
-                        </a:rPr>
-                        <a:t>step miscalibration; camera and mirror drift within a scan</a:t>
-                      </a:r>
-                    </a:p>
-                  </a:txBody>
-                  <a:tcPr marL="54864" marR="54864" marT="18288" marB="18288">
-                    <a:solidFill>
-                      <a:srgbClr val="FFFFFF"/>
-                    </a:solidFill>
-                  </a:tcPr>
-                </a:tc>
-                <a:tc>
-                  <a:txBody>
-                    <a:bodyPr wrap="square"/>
-                    <a:lstStyle/>
-                    <a:p>
-                      <a:r>
-                        <a:rPr sz="1100" b="0">
-                          <a:solidFill>
-                            <a:srgbClr val="282828"/>
-                          </a:solidFill>
-                          <a:latin typeface="Arial"/>
-                        </a:rPr>
-                        <a:t>step error 2% / 5%: gain 0.974 / 0.954, floors 5 / 9 pm; in the servo common mode (5.4e12 vs 5.5e12); camera walk 1e-3 within a scan: +13% light; mirror walk within a scan: 1.6e13 vs 1.7-2.0e13</a:t>
-                      </a:r>
-                    </a:p>
-                  </a:txBody>
-                  <a:tcPr marL="54864" marR="54864" marT="18288" marB="18288">
-                    <a:solidFill>
-                      <a:srgbClr val="FFFFFF"/>
-                    </a:solidFill>
-                  </a:tcPr>
-                </a:tc>
-              </a:tr>
-              <a:tr h="845820">
-                <a:tc>
-                  <a:txBody>
-                    <a:bodyPr wrap="square"/>
-                    <a:lstStyle/>
-                    <a:p>
-                      <a:r>
-                        <a:rPr sz="1100" b="0">
-                          <a:solidFill>
-                            <a:srgbClr val="282828"/>
-                          </a:solidFill>
-                          <a:latin typeface="Arial"/>
-                        </a:rPr>
-                        <a:t>polarization snapshot</a:t>
-                      </a:r>
-                    </a:p>
-                  </a:txBody>
-                  <a:tcPr marL="54864" marR="54864" marT="18288" marB="18288">
-                    <a:solidFill>
-                      <a:srgbClr val="ECF1F6"/>
-                    </a:solidFill>
-                  </a:tcPr>
-                </a:tc>
-                <a:tc>
-                  <a:txBody>
-                    <a:bodyPr wrap="square"/>
-                    <a:lstStyle/>
-                    <a:p>
-                      <a:r>
-                        <a:rPr sz="1100" b="0">
-                          <a:solidFill>
-                            <a:srgbClr val="282828"/>
-                          </a:solidFill>
-                          <a:latin typeface="Arial"/>
-                        </a:rPr>
-                        <a:t>four analyzer channels at once</a:t>
-                      </a:r>
-                    </a:p>
-                  </a:txBody>
-                  <a:tcPr marL="54864" marR="54864" marT="18288" marB="18288">
-                    <a:solidFill>
-                      <a:srgbClr val="ECF1F6"/>
-                    </a:solidFill>
-                  </a:tcPr>
-                </a:tc>
-                <a:tc>
-                  <a:txBody>
-                    <a:bodyPr wrap="square"/>
-                    <a:lstStyle/>
-                    <a:p>
-                      <a:r>
-                        <a:rPr sz="1100" b="0">
-                          <a:solidFill>
-                            <a:srgbClr val="282828"/>
-                          </a:solidFill>
-                          <a:latin typeface="Arial"/>
-                        </a:rPr>
-                        <a:t>polarization systematics, fixed by design; no within-scan drift</a:t>
-                      </a:r>
-                    </a:p>
-                  </a:txBody>
-                  <a:tcPr marL="54864" marR="54864" marT="18288" marB="18288">
-                    <a:solidFill>
-                      <a:srgbClr val="ECF1F6"/>
-                    </a:solidFill>
-                  </a:tcPr>
-                </a:tc>
-                <a:tc>
-                  <a:txBody>
-                    <a:bodyPr wrap="square"/>
-                    <a:lstStyle/>
-                    <a:p>
-                      <a:r>
-                        <a:rPr sz="1100" b="0">
-                          <a:solidFill>
-                            <a:srgbClr val="282828"/>
-                          </a:solidFill>
-                          <a:latin typeface="Arial"/>
-                        </a:rPr>
-                        <a:t>plate rig at the record's 45°: the splitter's diattenuation rotates the test arm 7.5°, gain +11.7% (at the built 22.5°: 1.56°, +0.9%), nulled to 1.00000 by an analyzer sweep and a 3.8° plate clock; cube rig: R_p 2.1% for a naive stack, 0 for the symmetric one, 2.27× the delivered power</a:t>
-                      </a:r>
-                    </a:p>
-                  </a:txBody>
-                  <a:tcPr marL="54864" marR="54864" marT="18288" marB="18288">
-                    <a:solidFill>
-                      <a:srgbClr val="ECF1F6"/>
-                    </a:solidFill>
-                  </a:tcPr>
-                </a:tc>
-              </a:tr>
-              <a:tr h="845820">
-                <a:tc>
-                  <a:txBody>
-                    <a:bodyPr wrap="square"/>
-                    <a:lstStyle/>
-                    <a:p>
-                      <a:r>
-                        <a:rPr sz="1100" b="0">
-                          <a:solidFill>
-                            <a:srgbClr val="282828"/>
-                          </a:solidFill>
-                          <a:latin typeface="Arial"/>
-                        </a:rPr>
-                        <a:t>hybrid</a:t>
-                      </a:r>
-                    </a:p>
-                  </a:txBody>
-                  <a:tcPr marL="54864" marR="54864" marT="18288" marB="18288">
-                    <a:solidFill>
-                      <a:srgbClr val="FFFFFF"/>
-                    </a:solidFill>
-                  </a:tcPr>
-                </a:tc>
-                <a:tc>
-                  <a:txBody>
-                    <a:bodyPr wrap="square"/>
-                    <a:lstStyle/>
-                    <a:p>
-                      <a:r>
-                        <a:rPr sz="1100" b="0">
-                          <a:solidFill>
-                            <a:srgbClr val="282828"/>
-                          </a:solidFill>
-                          <a:latin typeface="Arial"/>
-                        </a:rPr>
-                        <a:t>snapshot for the change, piezo for the absolute step</a:t>
-                      </a:r>
-                    </a:p>
-                  </a:txBody>
-                  <a:tcPr marL="54864" marR="54864" marT="18288" marB="18288">
-                    <a:solidFill>
-                      <a:srgbClr val="FFFFFF"/>
-                    </a:solidFill>
-                  </a:tcPr>
-                </a:tc>
-                <a:tc>
-                  <a:txBody>
-                    <a:bodyPr wrap="square"/>
-                    <a:lstStyle/>
-                    <a:p>
-                      <a:r>
-                        <a:rPr sz="1100" b="0">
-                          <a:solidFill>
-                            <a:srgbClr val="282828"/>
-                          </a:solidFill>
-                          <a:latin typeface="Arial"/>
-                        </a:rPr>
-                        <a:t>each half removes the other's error</a:t>
-                      </a:r>
-                    </a:p>
-                  </a:txBody>
-                  <a:tcPr marL="54864" marR="54864" marT="18288" marB="18288">
-                    <a:solidFill>
-                      <a:srgbClr val="FFFFFF"/>
-                    </a:solidFill>
-                  </a:tcPr>
-                </a:tc>
-                <a:tc>
-                  <a:txBody>
-                    <a:bodyPr wrap="square"/>
-                    <a:lstStyle/>
-                    <a:p>
-                      <a:r>
-                        <a:rPr sz="1100" b="0">
-                          <a:solidFill>
-                            <a:srgbClr val="282828"/>
-                          </a:solidFill>
-                          <a:latin typeface="Arial"/>
-                        </a:rPr>
-                        <a:t>the recommended form; its value is the absolute calibration more than drift immunity: the four-step already tolerates all three sequential terms in hold</a:t>
-                      </a:r>
-                    </a:p>
-                  </a:txBody>
-                  <a:tcPr marL="54864" marR="54864" marT="18288" marB="18288">
-                    <a:solidFill>
-                      <a:srgbClr val="FFFFFF"/>
-                    </a:solidFill>
-                  </a:tcPr>
-                </a:tc>
-              </a:tr>
-            </a:tbl>
-          </a:graphicData>
-        </a:graphic>
-      </p:graphicFrame>
-      <p:sp>
-        <p:nvSpPr>
-          <p:cNvPr id="5" name="TextBox 4"/>
-          <p:cNvSpPr txBox="1"/>
-          <p:nvPr/>
-        </p:nvSpPr>
-        <p:spPr>
-          <a:xfrm>
-            <a:off x="411480" y="4262247"/>
-            <a:ext cx="11368735" cy="274320"/>
-          </a:xfrm>
-          <a:prstGeom prst="rect">
-            <a:avLst/>
-          </a:prstGeom>
-          <a:noFill/>
-        </p:spPr>
-        <p:txBody>
-          <a:bodyPr wrap="square">
-            <a:spAutoFit/>
-          </a:bodyPr>
-          <a:lstStyle/>
-          <a:p>
-            <a:pPr>
-              <a:spcAft>
-                <a:spcPts val="600"/>
-              </a:spcAft>
-            </a:pPr>
-            <a:r>
-              <a:rPr sz="1050" b="0">
-                <a:solidFill>
-                  <a:srgbClr val="6E6E6E"/>
-                </a:solidFill>
-                <a:latin typeface="Arial"/>
-              </a:rPr>
-              <a:t>Run tags lens_deck_se2, lens_deck_se5, loop_lens_se2, loop_lens_cam, loop_lens_intra, tg_psi_dm, tg_psi_dm_v2.</a:t>
             </a:r>
           </a:p>
         </p:txBody>
@@ -21968,6 +22066,550 @@
 </file>
 
 <file path=ppt/slides/slide40.xml><?xml version="1.0" encoding="utf-8"?>
+<p:sld xmlns:a="http://schemas.openxmlformats.org/drawingml/2006/main" xmlns:p="http://schemas.openxmlformats.org/presentationml/2006/main" xmlns:r="http://schemas.openxmlformats.org/officeDocument/2006/relationships">
+  <p:cSld>
+    <p:spTree>
+      <p:nvGrpSpPr>
+        <p:cNvPr id="1" name=""/>
+        <p:cNvGrpSpPr/>
+        <p:nvPr/>
+      </p:nvGrpSpPr>
+      <p:grpSpPr/>
+      <p:sp>
+        <p:nvSpPr>
+          <p:cNvPr id="2" name="TextBox 1"/>
+          <p:cNvSpPr txBox="1"/>
+          <p:nvPr/>
+        </p:nvSpPr>
+        <p:spPr>
+          <a:xfrm>
+            <a:off x="411480" y="201168"/>
+            <a:ext cx="11368735" cy="914400"/>
+          </a:xfrm>
+          <a:prstGeom prst="rect">
+            <a:avLst/>
+          </a:prstGeom>
+          <a:noFill/>
+        </p:spPr>
+        <p:txBody>
+          <a:bodyPr wrap="square">
+            <a:spAutoFit/>
+          </a:bodyPr>
+          <a:lstStyle/>
+          <a:p>
+            <a:pPr>
+              <a:spcAft>
+                <a:spcPts val="400"/>
+              </a:spcAft>
+            </a:pPr>
+            <a:r>
+              <a:rPr sz="2400" b="1">
+                <a:solidFill>
+                  <a:srgbClr val="1F4E79"/>
+                </a:solidFill>
+                <a:latin typeface="Arial"/>
+              </a:rPr>
+              <a:t>Backup: the interferometer's three phase-shift forms</a:t>
+            </a:r>
+          </a:p>
+          <a:p>
+            <a:pPr>
+              <a:spcAft>
+                <a:spcPts val="0"/>
+              </a:spcAft>
+            </a:pPr>
+            <a:r>
+              <a:rPr sz="1250" b="0">
+                <a:solidFill>
+                  <a:srgbClr val="6E6E6E"/>
+                </a:solidFill>
+                <a:latin typeface="Arial"/>
+              </a:rPr>
+              <a:t>The four frames are the same in the model; the forms differ in what they get wrong</a:t>
+            </a:r>
+          </a:p>
+        </p:txBody>
+      </p:sp>
+      <p:sp>
+        <p:nvSpPr>
+          <p:cNvPr id="3" name="Rectangle 2"/>
+          <p:cNvSpPr/>
+          <p:nvPr/>
+        </p:nvSpPr>
+        <p:spPr>
+          <a:xfrm>
+            <a:off x="411480" y="1133856"/>
+            <a:ext cx="11368735" cy="20320"/>
+          </a:xfrm>
+          <a:prstGeom prst="rect">
+            <a:avLst/>
+          </a:prstGeom>
+          <a:solidFill>
+            <a:srgbClr val="B8C6D4"/>
+          </a:solidFill>
+          <a:ln>
+            <a:noFill/>
+          </a:ln>
+          <a:effectLst/>
+        </p:spPr>
+        <p:style>
+          <a:lnRef idx="1">
+            <a:schemeClr val="accent1"/>
+          </a:lnRef>
+          <a:fillRef idx="3">
+            <a:schemeClr val="accent1"/>
+          </a:fillRef>
+          <a:effectRef idx="2">
+            <a:schemeClr val="accent1"/>
+          </a:effectRef>
+          <a:fontRef idx="minor">
+            <a:schemeClr val="lt1"/>
+          </a:fontRef>
+        </p:style>
+        <p:txBody>
+          <a:bodyPr rtlCol="0" anchor="ctr"/>
+          <a:lstStyle/>
+          <a:p>
+            <a:pPr algn="ctr"/>
+          </a:p>
+        </p:txBody>
+      </p:sp>
+      <p:graphicFrame>
+        <p:nvGraphicFramePr>
+          <p:cNvPr id="4" name="Table 3"/>
+          <p:cNvGraphicFramePr>
+            <a:graphicFrameLocks noGrp="1"/>
+          </p:cNvGraphicFramePr>
+          <p:nvPr/>
+        </p:nvGraphicFramePr>
+        <p:xfrm>
+          <a:off x="411480" y="1298448"/>
+          <a:ext cx="11368734" cy="2817495"/>
+        </p:xfrm>
+        <a:graphic>
+          <a:graphicData uri="http://schemas.openxmlformats.org/drawingml/2006/table">
+            <a:tbl>
+              <a:tblPr firstRow="1" bandRow="1">
+                <a:tableStyleId>{5C22544A-7EE6-4342-B048-85BDC9FD1C3A}</a:tableStyleId>
+              </a:tblPr>
+              <a:tblGrid>
+                <a:gridCol w="1671828"/>
+                <a:gridCol w="1257454"/>
+                <a:gridCol w="1523454"/>
+                <a:gridCol w="6915998"/>
+              </a:tblGrid>
+              <a:tr h="468630">
+                <a:tc>
+                  <a:txBody>
+                    <a:bodyPr wrap="square"/>
+                    <a:lstStyle/>
+                    <a:p>
+                      <a:r>
+                        <a:rPr sz="1100" b="1">
+                          <a:solidFill>
+                            <a:srgbClr val="FFFFFF"/>
+                          </a:solidFill>
+                          <a:latin typeface="Arial"/>
+                        </a:rPr>
+                        <a:t>form</a:t>
+                      </a:r>
+                    </a:p>
+                  </a:txBody>
+                  <a:tcPr marL="54864" marR="54864" marT="18288" marB="18288">
+                    <a:solidFill>
+                      <a:srgbClr val="1F4E79"/>
+                    </a:solidFill>
+                  </a:tcPr>
+                </a:tc>
+                <a:tc>
+                  <a:txBody>
+                    <a:bodyPr wrap="square"/>
+                    <a:lstStyle/>
+                    <a:p>
+                      <a:r>
+                        <a:rPr sz="1100" b="1">
+                          <a:solidFill>
+                            <a:srgbClr val="FFFFFF"/>
+                          </a:solidFill>
+                          <a:latin typeface="Arial"/>
+                        </a:rPr>
+                        <a:t>how the four steps are made</a:t>
+                      </a:r>
+                    </a:p>
+                  </a:txBody>
+                  <a:tcPr marL="54864" marR="54864" marT="18288" marB="18288">
+                    <a:solidFill>
+                      <a:srgbClr val="1F4E79"/>
+                    </a:solidFill>
+                  </a:tcPr>
+                </a:tc>
+                <a:tc>
+                  <a:txBody>
+                    <a:bodyPr wrap="square"/>
+                    <a:lstStyle/>
+                    <a:p>
+                      <a:r>
+                        <a:rPr sz="1100" b="1">
+                          <a:solidFill>
+                            <a:srgbClr val="FFFFFF"/>
+                          </a:solidFill>
+                          <a:latin typeface="Arial"/>
+                        </a:rPr>
+                        <a:t>what it gets wrong</a:t>
+                      </a:r>
+                    </a:p>
+                  </a:txBody>
+                  <a:tcPr marL="54864" marR="54864" marT="18288" marB="18288">
+                    <a:solidFill>
+                      <a:srgbClr val="1F4E79"/>
+                    </a:solidFill>
+                  </a:tcPr>
+                </a:tc>
+                <a:tc>
+                  <a:txBody>
+                    <a:bodyPr wrap="square"/>
+                    <a:lstStyle/>
+                    <a:p>
+                      <a:r>
+                        <a:rPr sz="1100" b="1">
+                          <a:solidFill>
+                            <a:srgbClr val="FFFFFF"/>
+                          </a:solidFill>
+                          <a:latin typeface="Arial"/>
+                        </a:rPr>
+                        <a:t>priced</a:t>
+                      </a:r>
+                    </a:p>
+                  </a:txBody>
+                  <a:tcPr marL="54864" marR="54864" marT="18288" marB="18288">
+                    <a:solidFill>
+                      <a:srgbClr val="1F4E79"/>
+                    </a:solidFill>
+                  </a:tcPr>
+                </a:tc>
+              </a:tr>
+              <a:tr h="657225">
+                <a:tc>
+                  <a:txBody>
+                    <a:bodyPr wrap="square"/>
+                    <a:lstStyle/>
+                    <a:p>
+                      <a:r>
+                        <a:rPr sz="1100" b="0">
+                          <a:solidFill>
+                            <a:srgbClr val="282828"/>
+                          </a:solidFill>
+                          <a:latin typeface="Arial"/>
+                        </a:rPr>
+                        <a:t>piezo four-step</a:t>
+                      </a:r>
+                    </a:p>
+                  </a:txBody>
+                  <a:tcPr marL="54864" marR="54864" marT="18288" marB="18288">
+                    <a:solidFill>
+                      <a:srgbClr val="FFFFFF"/>
+                    </a:solidFill>
+                  </a:tcPr>
+                </a:tc>
+                <a:tc>
+                  <a:txBody>
+                    <a:bodyPr wrap="square"/>
+                    <a:lstStyle/>
+                    <a:p>
+                      <a:r>
+                        <a:rPr sz="1100" b="0">
+                          <a:solidFill>
+                            <a:srgbClr val="282828"/>
+                          </a:solidFill>
+                          <a:latin typeface="Arial"/>
+                        </a:rPr>
+                        <a:t>the reference flat stepped in time</a:t>
+                      </a:r>
+                    </a:p>
+                  </a:txBody>
+                  <a:tcPr marL="54864" marR="54864" marT="18288" marB="18288">
+                    <a:solidFill>
+                      <a:srgbClr val="FFFFFF"/>
+                    </a:solidFill>
+                  </a:tcPr>
+                </a:tc>
+                <a:tc>
+                  <a:txBody>
+                    <a:bodyPr wrap="square"/>
+                    <a:lstStyle/>
+                    <a:p>
+                      <a:r>
+                        <a:rPr sz="1100" b="0">
+                          <a:solidFill>
+                            <a:srgbClr val="282828"/>
+                          </a:solidFill>
+                          <a:latin typeface="Arial"/>
+                        </a:rPr>
+                        <a:t>step miscalibration; camera and mirror drift within a scan</a:t>
+                      </a:r>
+                    </a:p>
+                  </a:txBody>
+                  <a:tcPr marL="54864" marR="54864" marT="18288" marB="18288">
+                    <a:solidFill>
+                      <a:srgbClr val="FFFFFF"/>
+                    </a:solidFill>
+                  </a:tcPr>
+                </a:tc>
+                <a:tc>
+                  <a:txBody>
+                    <a:bodyPr wrap="square"/>
+                    <a:lstStyle/>
+                    <a:p>
+                      <a:r>
+                        <a:rPr sz="1100" b="0">
+                          <a:solidFill>
+                            <a:srgbClr val="282828"/>
+                          </a:solidFill>
+                          <a:latin typeface="Arial"/>
+                        </a:rPr>
+                        <a:t>step error 2% / 5%: gain 0.974 / 0.954, floors 5 / 9 pm; in the servo common mode (5.4e12 vs 5.5e12); camera walk 1e-3 within a scan: +13% light; mirror walk within a scan: 1.6e13 vs 1.7-2.0e13</a:t>
+                      </a:r>
+                    </a:p>
+                  </a:txBody>
+                  <a:tcPr marL="54864" marR="54864" marT="18288" marB="18288">
+                    <a:solidFill>
+                      <a:srgbClr val="FFFFFF"/>
+                    </a:solidFill>
+                  </a:tcPr>
+                </a:tc>
+              </a:tr>
+              <a:tr h="845820">
+                <a:tc>
+                  <a:txBody>
+                    <a:bodyPr wrap="square"/>
+                    <a:lstStyle/>
+                    <a:p>
+                      <a:r>
+                        <a:rPr sz="1100" b="0">
+                          <a:solidFill>
+                            <a:srgbClr val="282828"/>
+                          </a:solidFill>
+                          <a:latin typeface="Arial"/>
+                        </a:rPr>
+                        <a:t>polarization snapshot</a:t>
+                      </a:r>
+                    </a:p>
+                  </a:txBody>
+                  <a:tcPr marL="54864" marR="54864" marT="18288" marB="18288">
+                    <a:solidFill>
+                      <a:srgbClr val="ECF1F6"/>
+                    </a:solidFill>
+                  </a:tcPr>
+                </a:tc>
+                <a:tc>
+                  <a:txBody>
+                    <a:bodyPr wrap="square"/>
+                    <a:lstStyle/>
+                    <a:p>
+                      <a:r>
+                        <a:rPr sz="1100" b="0">
+                          <a:solidFill>
+                            <a:srgbClr val="282828"/>
+                          </a:solidFill>
+                          <a:latin typeface="Arial"/>
+                        </a:rPr>
+                        <a:t>four analyzer channels at once</a:t>
+                      </a:r>
+                    </a:p>
+                  </a:txBody>
+                  <a:tcPr marL="54864" marR="54864" marT="18288" marB="18288">
+                    <a:solidFill>
+                      <a:srgbClr val="ECF1F6"/>
+                    </a:solidFill>
+                  </a:tcPr>
+                </a:tc>
+                <a:tc>
+                  <a:txBody>
+                    <a:bodyPr wrap="square"/>
+                    <a:lstStyle/>
+                    <a:p>
+                      <a:r>
+                        <a:rPr sz="1100" b="0">
+                          <a:solidFill>
+                            <a:srgbClr val="282828"/>
+                          </a:solidFill>
+                          <a:latin typeface="Arial"/>
+                        </a:rPr>
+                        <a:t>polarization systematics, fixed by design; no within-scan drift</a:t>
+                      </a:r>
+                    </a:p>
+                  </a:txBody>
+                  <a:tcPr marL="54864" marR="54864" marT="18288" marB="18288">
+                    <a:solidFill>
+                      <a:srgbClr val="ECF1F6"/>
+                    </a:solidFill>
+                  </a:tcPr>
+                </a:tc>
+                <a:tc>
+                  <a:txBody>
+                    <a:bodyPr wrap="square"/>
+                    <a:lstStyle/>
+                    <a:p>
+                      <a:r>
+                        <a:rPr sz="1100" b="0">
+                          <a:solidFill>
+                            <a:srgbClr val="282828"/>
+                          </a:solidFill>
+                          <a:latin typeface="Arial"/>
+                        </a:rPr>
+                        <a:t>plate rig at the record's 45°: the splitter's diattenuation rotates the test arm 7.5°, gain +11.7% (at the built 22.5°: 1.56°, +0.9%), nulled to 1.00000 by an analyzer sweep and a 3.8° plate clock; cube rig: R_p 2.1% for a naive stack, 0 for the symmetric one, 2.27× the delivered power</a:t>
+                      </a:r>
+                    </a:p>
+                  </a:txBody>
+                  <a:tcPr marL="54864" marR="54864" marT="18288" marB="18288">
+                    <a:solidFill>
+                      <a:srgbClr val="ECF1F6"/>
+                    </a:solidFill>
+                  </a:tcPr>
+                </a:tc>
+              </a:tr>
+              <a:tr h="845820">
+                <a:tc>
+                  <a:txBody>
+                    <a:bodyPr wrap="square"/>
+                    <a:lstStyle/>
+                    <a:p>
+                      <a:r>
+                        <a:rPr sz="1100" b="0">
+                          <a:solidFill>
+                            <a:srgbClr val="282828"/>
+                          </a:solidFill>
+                          <a:latin typeface="Arial"/>
+                        </a:rPr>
+                        <a:t>hybrid</a:t>
+                      </a:r>
+                    </a:p>
+                  </a:txBody>
+                  <a:tcPr marL="54864" marR="54864" marT="18288" marB="18288">
+                    <a:solidFill>
+                      <a:srgbClr val="FFFFFF"/>
+                    </a:solidFill>
+                  </a:tcPr>
+                </a:tc>
+                <a:tc>
+                  <a:txBody>
+                    <a:bodyPr wrap="square"/>
+                    <a:lstStyle/>
+                    <a:p>
+                      <a:r>
+                        <a:rPr sz="1100" b="0">
+                          <a:solidFill>
+                            <a:srgbClr val="282828"/>
+                          </a:solidFill>
+                          <a:latin typeface="Arial"/>
+                        </a:rPr>
+                        <a:t>snapshot for the change, piezo for the absolute step</a:t>
+                      </a:r>
+                    </a:p>
+                  </a:txBody>
+                  <a:tcPr marL="54864" marR="54864" marT="18288" marB="18288">
+                    <a:solidFill>
+                      <a:srgbClr val="FFFFFF"/>
+                    </a:solidFill>
+                  </a:tcPr>
+                </a:tc>
+                <a:tc>
+                  <a:txBody>
+                    <a:bodyPr wrap="square"/>
+                    <a:lstStyle/>
+                    <a:p>
+                      <a:r>
+                        <a:rPr sz="1100" b="0">
+                          <a:solidFill>
+                            <a:srgbClr val="282828"/>
+                          </a:solidFill>
+                          <a:latin typeface="Arial"/>
+                        </a:rPr>
+                        <a:t>each half removes the other's error</a:t>
+                      </a:r>
+                    </a:p>
+                  </a:txBody>
+                  <a:tcPr marL="54864" marR="54864" marT="18288" marB="18288">
+                    <a:solidFill>
+                      <a:srgbClr val="FFFFFF"/>
+                    </a:solidFill>
+                  </a:tcPr>
+                </a:tc>
+                <a:tc>
+                  <a:txBody>
+                    <a:bodyPr wrap="square"/>
+                    <a:lstStyle/>
+                    <a:p>
+                      <a:r>
+                        <a:rPr sz="1100" b="0">
+                          <a:solidFill>
+                            <a:srgbClr val="282828"/>
+                          </a:solidFill>
+                          <a:latin typeface="Arial"/>
+                        </a:rPr>
+                        <a:t>the recommended form; its value is the absolute calibration more than drift immunity: the four-step already tolerates all three sequential terms in hold</a:t>
+                      </a:r>
+                    </a:p>
+                  </a:txBody>
+                  <a:tcPr marL="54864" marR="54864" marT="18288" marB="18288">
+                    <a:solidFill>
+                      <a:srgbClr val="FFFFFF"/>
+                    </a:solidFill>
+                  </a:tcPr>
+                </a:tc>
+              </a:tr>
+            </a:tbl>
+          </a:graphicData>
+        </a:graphic>
+      </p:graphicFrame>
+      <p:sp>
+        <p:nvSpPr>
+          <p:cNvPr id="5" name="TextBox 4"/>
+          <p:cNvSpPr txBox="1"/>
+          <p:nvPr/>
+        </p:nvSpPr>
+        <p:spPr>
+          <a:xfrm>
+            <a:off x="411480" y="4262247"/>
+            <a:ext cx="11368735" cy="274320"/>
+          </a:xfrm>
+          <a:prstGeom prst="rect">
+            <a:avLst/>
+          </a:prstGeom>
+          <a:noFill/>
+        </p:spPr>
+        <p:txBody>
+          <a:bodyPr wrap="square">
+            <a:spAutoFit/>
+          </a:bodyPr>
+          <a:lstStyle/>
+          <a:p>
+            <a:pPr>
+              <a:spcAft>
+                <a:spcPts val="600"/>
+              </a:spcAft>
+            </a:pPr>
+            <a:r>
+              <a:rPr sz="1050" b="0">
+                <a:solidFill>
+                  <a:srgbClr val="6E6E6E"/>
+                </a:solidFill>
+                <a:latin typeface="Arial"/>
+              </a:rPr>
+              <a:t>Run tags lens_deck_se2, lens_deck_se5, loop_lens_se2, loop_lens_cam, loop_lens_intra, tg_psi_dm, tg_psi_dm_v2.</a:t>
+            </a:r>
+          </a:p>
+        </p:txBody>
+      </p:sp>
+    </p:spTree>
+  </p:cSld>
+  <p:clrMapOvr>
+    <a:masterClrMapping/>
+  </p:clrMapOvr>
+</p:sld>
+</file>
+
+<file path=ppt/slides/slide41.xml><?xml version="1.0" encoding="utf-8"?>
 <p:sld xmlns:a="http://schemas.openxmlformats.org/drawingml/2006/main" xmlns:p="http://schemas.openxmlformats.org/presentationml/2006/main" xmlns:r="http://schemas.openxmlformats.org/officeDocument/2006/relationships">
   <p:cSld>
     <p:spTree>
@@ -22815,7 +23457,7 @@
 </p:sld>
 </file>
 
-<file path=ppt/slides/slide41.xml><?xml version="1.0" encoding="utf-8"?>
+<file path=ppt/slides/slide42.xml><?xml version="1.0" encoding="utf-8"?>
 <p:sld xmlns:a="http://schemas.openxmlformats.org/drawingml/2006/main" xmlns:p="http://schemas.openxmlformats.org/presentationml/2006/main" xmlns:r="http://schemas.openxmlformats.org/officeDocument/2006/relationships">
   <p:cSld>
     <p:spTree>
@@ -23105,7 +23747,7 @@
 </p:sld>
 </file>
 
-<file path=ppt/slides/slide42.xml><?xml version="1.0" encoding="utf-8"?>
+<file path=ppt/slides/slide43.xml><?xml version="1.0" encoding="utf-8"?>
 <p:sld xmlns:a="http://schemas.openxmlformats.org/drawingml/2006/main" xmlns:p="http://schemas.openxmlformats.org/presentationml/2006/main" xmlns:r="http://schemas.openxmlformats.org/officeDocument/2006/relationships">
   <p:cSld>
     <p:spTree>
@@ -23961,7 +24603,7 @@
 </p:sld>
 </file>
 
-<file path=ppt/slides/slide43.xml><?xml version="1.0" encoding="utf-8"?>
+<file path=ppt/slides/slide44.xml><?xml version="1.0" encoding="utf-8"?>
 <p:sld xmlns:a="http://schemas.openxmlformats.org/drawingml/2006/main" xmlns:p="http://schemas.openxmlformats.org/presentationml/2006/main" xmlns:r="http://schemas.openxmlformats.org/officeDocument/2006/relationships">
   <p:cSld>
     <p:spTree>
@@ -25022,7 +25664,7 @@
 </p:sld>
 </file>
 
-<file path=ppt/slides/slide44.xml><?xml version="1.0" encoding="utf-8"?>
+<file path=ppt/slides/slide45.xml><?xml version="1.0" encoding="utf-8"?>
 <p:sld xmlns:a="http://schemas.openxmlformats.org/drawingml/2006/main" xmlns:p="http://schemas.openxmlformats.org/presentationml/2006/main" xmlns:r="http://schemas.openxmlformats.org/officeDocument/2006/relationships">
   <p:cSld>
     <p:spTree>
@@ -25684,7 +26326,7 @@
 </p:sld>
 </file>
 
-<file path=ppt/slides/slide45.xml><?xml version="1.0" encoding="utf-8"?>
+<file path=ppt/slides/slide46.xml><?xml version="1.0" encoding="utf-8"?>
 <p:sld xmlns:a="http://schemas.openxmlformats.org/drawingml/2006/main" xmlns:p="http://schemas.openxmlformats.org/presentationml/2006/main" xmlns:r="http://schemas.openxmlformats.org/officeDocument/2006/relationships">
   <p:cSld>
     <p:spTree>
@@ -25974,7 +26616,7 @@
 </p:sld>
 </file>
 
-<file path=ppt/slides/slide46.xml><?xml version="1.0" encoding="utf-8"?>
+<file path=ppt/slides/slide47.xml><?xml version="1.0" encoding="utf-8"?>
 <p:sld xmlns:a="http://schemas.openxmlformats.org/drawingml/2006/main" xmlns:p="http://schemas.openxmlformats.org/presentationml/2006/main" xmlns:r="http://schemas.openxmlformats.org/officeDocument/2006/relationships">
   <p:cSld>
     <p:spTree>
@@ -26678,7 +27320,7 @@
 </p:sld>
 </file>
 
-<file path=ppt/slides/slide47.xml><?xml version="1.0" encoding="utf-8"?>
+<file path=ppt/slides/slide48.xml><?xml version="1.0" encoding="utf-8"?>
 <p:sld xmlns:a="http://schemas.openxmlformats.org/drawingml/2006/main" xmlns:p="http://schemas.openxmlformats.org/presentationml/2006/main" xmlns:r="http://schemas.openxmlformats.org/officeDocument/2006/relationships">
   <p:cSld>
     <p:spTree>
@@ -27672,7 +28314,7 @@
 </p:sld>
 </file>
 
-<file path=ppt/slides/slide48.xml><?xml version="1.0" encoding="utf-8"?>
+<file path=ppt/slides/slide49.xml><?xml version="1.0" encoding="utf-8"?>
 <p:sld xmlns:a="http://schemas.openxmlformats.org/drawingml/2006/main" xmlns:p="http://schemas.openxmlformats.org/presentationml/2006/main" xmlns:r="http://schemas.openxmlformats.org/officeDocument/2006/relationships">
   <p:cSld>
     <p:spTree>
@@ -27815,7 +28457,7 @@
                 </a:solidFill>
                 <a:latin typeface="Arial"/>
               </a:rPr>
-              <a:t>•  Interferometer (tg_psi_dm96_oap/runs): lens_deck, lens_deck_se2, lens_deck_se5, loop_lens, loop_lens_cam, loop_lens_intra, loop_lens_se2, descent_lens, oap_deck, loop_oap, descent_oap, oap_bareAl, oap_coat, oap_jones, zoap (the 7° rigs); lens22, lens22g, lens22h, node22t, fold1-4, loss, loss_src, loss_a2, conj, zseat, zseat2, oap22d, oapdraw3, oap22d_tail, tailA, tailB, oapifo2, oapifol2, oapdesc2, oapuw2, lensuw2, thk22, sub22, aoi_lens22, aoi_oap22, gate3_win, gate3_lens, wrapoap, wraplens, stnoap, stnlens (the 22.5° bench and the redesigned reflective rig); pdi_dm96/runs/psriclear2 (the P/SRI bench through the clearance tool).  Reports REPORT_gauge_ifo.md (CCMac) with REPORT_oap.md, REPORT_bench_realism.md and REPORT_reflective.md (TO), and README.md.</a:t>
+              <a:t>•  Interferometer (tg_psi_dm96_oap/runs): lens_deck, lens_deck_se2, lens_deck_se5, loop_lens, loop_lens_cam, loop_lens_intra, loop_lens_se2, descent_lens, oap_deck, loop_oap, descent_oap, oap_bareAl, oap_coat, oap_jones, zoap (the 7° rigs); lens22, lens22g, lens22h, node22t, fold1-4, loss, loss_src, loss_a2, conj, zseat, zseat2, oap22d, oapdraw3, oap22d_tail, tailA, tailB, oapifo2, oapifol2, oapdesc2, oapuw2, lensuw2, thk22, sub22, aoi_lens22, aoi_oap22, gate3_win, gate3_lens, wrapoap, wraplens, stnoap, stnlens, pupilq_lens, pupilq_oap (the 22.5° bench and the redesigned reflective rig); pdi_dm96/runs/psriclear2 (the P/SRI bench through the clearance tool).  Reports REPORT_gauge_ifo.md (CCMac) with REPORT_oap.md, REPORT_bench_realism.md and REPORT_reflective.md (TO), and README.md.</a:t>
             </a:r>
           </a:p>
           <a:p>

--- a/demo_session/deck_gauges.pptx
+++ b/demo_session/deck_gauges.pptx
@@ -56,6 +56,7 @@
     <p:sldId id="304" r:id="rId55"/>
     <p:sldId id="305" r:id="rId56"/>
     <p:sldId id="306" r:id="rId57"/>
+    <p:sldId id="307" r:id="rId58"/>
   </p:sldIdLst>
   <p:sldSz cx="12191695" cy="6858000" type="screen4x3"/>
   <p:notesSz cx="6858000" cy="9144000"/>
@@ -5445,6 +5446,1340 @@
                 </a:solidFill>
                 <a:latin typeface="Arial"/>
               </a:rPr>
+              <a:t>Improving the pupil image: the options, assessed</a:t>
+            </a:r>
+          </a:p>
+          <a:p>
+            <a:pPr>
+              <a:spcAft>
+                <a:spcPts val="0"/>
+              </a:spcAft>
+            </a:pPr>
+            <a:r>
+              <a:rPr sz="1250" b="0">
+                <a:solidFill>
+                  <a:srgbClr val="6E6E6E"/>
+                </a:solidFill>
+                <a:latin typeface="Arial"/>
+              </a:rPr>
+              <a:t>The tail geometry is the whole story: the seed field-lens station images the DM flat; the detector move is second-order once the tail is right; no flattener can fix the tuned bowl; true collimation is worth doing for itself</a:t>
+            </a:r>
+          </a:p>
+        </p:txBody>
+      </p:sp>
+      <p:sp>
+        <p:nvSpPr>
+          <p:cNvPr id="3" name="Rectangle 2"/>
+          <p:cNvSpPr/>
+          <p:nvPr/>
+        </p:nvSpPr>
+        <p:spPr>
+          <a:xfrm>
+            <a:off x="411480" y="1133856"/>
+            <a:ext cx="11368735" cy="20320"/>
+          </a:xfrm>
+          <a:prstGeom prst="rect">
+            <a:avLst/>
+          </a:prstGeom>
+          <a:solidFill>
+            <a:srgbClr val="B8C6D4"/>
+          </a:solidFill>
+          <a:ln>
+            <a:noFill/>
+          </a:ln>
+          <a:effectLst/>
+        </p:spPr>
+        <p:style>
+          <a:lnRef idx="1">
+            <a:schemeClr val="accent1"/>
+          </a:lnRef>
+          <a:fillRef idx="3">
+            <a:schemeClr val="accent1"/>
+          </a:fillRef>
+          <a:effectRef idx="2">
+            <a:schemeClr val="accent1"/>
+          </a:effectRef>
+          <a:fontRef idx="minor">
+            <a:schemeClr val="lt1"/>
+          </a:fontRef>
+        </p:style>
+        <p:txBody>
+          <a:bodyPr rtlCol="0" anchor="ctr"/>
+          <a:lstStyle/>
+          <a:p>
+            <a:pPr algn="ctr"/>
+          </a:p>
+        </p:txBody>
+      </p:sp>
+      <p:graphicFrame>
+        <p:nvGraphicFramePr>
+          <p:cNvPr id="4" name="Table 3"/>
+          <p:cNvGraphicFramePr>
+            <a:graphicFrameLocks noGrp="1"/>
+          </p:cNvGraphicFramePr>
+          <p:nvPr/>
+        </p:nvGraphicFramePr>
+        <p:xfrm>
+          <a:off x="411480" y="1298448"/>
+          <a:ext cx="11368734" cy="2903220"/>
+        </p:xfrm>
+        <a:graphic>
+          <a:graphicData uri="http://schemas.openxmlformats.org/drawingml/2006/table">
+            <a:tbl>
+              <a:tblPr firstRow="1" bandRow="1">
+                <a:tableStyleId>{5C22544A-7EE6-4342-B048-85BDC9FD1C3A}</a:tableStyleId>
+              </a:tblPr>
+              <a:tblGrid>
+                <a:gridCol w="2271675"/>
+                <a:gridCol w="2079160"/>
+                <a:gridCol w="945388"/>
+                <a:gridCol w="2325624"/>
+                <a:gridCol w="1347603"/>
+                <a:gridCol w="1526540"/>
+                <a:gridCol w="872744"/>
+              </a:tblGrid>
+              <a:tr h="468630">
+                <a:tc>
+                  <a:txBody>
+                    <a:bodyPr wrap="square"/>
+                    <a:lstStyle/>
+                    <a:p>
+                      <a:r>
+                        <a:rPr sz="1100" b="1">
+                          <a:solidFill>
+                            <a:srgbClr val="FFFFFF"/>
+                          </a:solidFill>
+                          <a:latin typeface="Arial"/>
+                        </a:rPr>
+                        <a:t>lens rig variant</a:t>
+                      </a:r>
+                    </a:p>
+                  </a:txBody>
+                  <a:tcPr marL="54864" marR="54864" marT="18288" marB="18288">
+                    <a:solidFill>
+                      <a:srgbClr val="1F4E79"/>
+                    </a:solidFill>
+                  </a:tcPr>
+                </a:tc>
+                <a:tc>
+                  <a:txBody>
+                    <a:bodyPr wrap="square"/>
+                    <a:lstStyle/>
+                    <a:p>
+                      <a:r>
+                        <a:rPr sz="1100" b="1">
+                          <a:solidFill>
+                            <a:srgbClr val="FFFFFF"/>
+                          </a:solidFill>
+                          <a:latin typeface="Arial"/>
+                        </a:rPr>
+                        <a:t>zone image vs the detector, mm (on axis / mean / edge)</a:t>
+                      </a:r>
+                    </a:p>
+                  </a:txBody>
+                  <a:tcPr marL="54864" marR="54864" marT="18288" marB="18288">
+                    <a:solidFill>
+                      <a:srgbClr val="1F4E79"/>
+                    </a:solidFill>
+                  </a:tcPr>
+                </a:tc>
+                <a:tc>
+                  <a:txBody>
+                    <a:bodyPr wrap="square"/>
+                    <a:lstStyle/>
+                    <a:p>
+                      <a:r>
+                        <a:rPr sz="1100" b="1">
+                          <a:solidFill>
+                            <a:srgbClr val="FFFFFF"/>
+                          </a:solidFill>
+                          <a:latin typeface="Arial"/>
+                        </a:rPr>
+                        <a:t>astigmatism</a:t>
+                      </a:r>
+                    </a:p>
+                  </a:txBody>
+                  <a:tcPr marL="54864" marR="54864" marT="18288" marB="18288">
+                    <a:solidFill>
+                      <a:srgbClr val="1F4E79"/>
+                    </a:solidFill>
+                  </a:tcPr>
+                </a:tc>
+                <a:tc>
+                  <a:txBody>
+                    <a:bodyPr wrap="square"/>
+                    <a:lstStyle/>
+                    <a:p>
+                      <a:r>
+                        <a:rPr sz="1100" b="1">
+                          <a:solidFill>
+                            <a:srgbClr val="FFFFFF"/>
+                          </a:solidFill>
+                          <a:latin typeface="Arial"/>
+                        </a:rPr>
+                        <a:t>Nyquist gain, as built / worst</a:t>
+                      </a:r>
+                    </a:p>
+                  </a:txBody>
+                  <a:tcPr marL="54864" marR="54864" marT="18288" marB="18288">
+                    <a:solidFill>
+                      <a:srgbClr val="1F4E79"/>
+                    </a:solidFill>
+                  </a:tcPr>
+                </a:tc>
+                <a:tc>
+                  <a:txBody>
+                    <a:bodyPr wrap="square"/>
+                    <a:lstStyle/>
+                    <a:p>
+                      <a:r>
+                        <a:rPr sz="1100" b="1">
+                          <a:solidFill>
+                            <a:srgbClr val="FFFFFF"/>
+                          </a:solidFill>
+                          <a:latin typeface="Arial"/>
+                        </a:rPr>
+                        <a:t>with the detector at the image mean</a:t>
+                      </a:r>
+                    </a:p>
+                  </a:txBody>
+                  <a:tcPr marL="54864" marR="54864" marT="18288" marB="18288">
+                    <a:solidFill>
+                      <a:srgbClr val="1F4E79"/>
+                    </a:solidFill>
+                  </a:tcPr>
+                </a:tc>
+                <a:tc>
+                  <a:txBody>
+                    <a:bodyPr wrap="square"/>
+                    <a:lstStyle/>
+                    <a:p>
+                      <a:r>
+                        <a:rPr sz="1100" b="1">
+                          <a:solidFill>
+                            <a:srgbClr val="FFFFFF"/>
+                          </a:solidFill>
+                          <a:latin typeface="Arial"/>
+                        </a:rPr>
+                        <a:t>30 nm surface error</a:t>
+                      </a:r>
+                    </a:p>
+                  </a:txBody>
+                  <a:tcPr marL="54864" marR="54864" marT="18288" marB="18288">
+                    <a:solidFill>
+                      <a:srgbClr val="1F4E79"/>
+                    </a:solidFill>
+                  </a:tcPr>
+                </a:tc>
+                <a:tc>
+                  <a:txBody>
+                    <a:bodyPr wrap="square"/>
+                    <a:lstStyle/>
+                    <a:p>
+                      <a:r>
+                        <a:rPr sz="1100" b="1">
+                          <a:solidFill>
+                            <a:srgbClr val="FFFFFF"/>
+                          </a:solidFill>
+                          <a:latin typeface="Arial"/>
+                        </a:rPr>
+                        <a:t>distortion</a:t>
+                      </a:r>
+                    </a:p>
+                  </a:txBody>
+                  <a:tcPr marL="54864" marR="54864" marT="18288" marB="18288">
+                    <a:solidFill>
+                      <a:srgbClr val="1F4E79"/>
+                    </a:solidFill>
+                  </a:tcPr>
+                </a:tc>
+              </a:tr>
+              <a:tr h="468630">
+                <a:tc>
+                  <a:txBody>
+                    <a:bodyPr wrap="square"/>
+                    <a:lstStyle/>
+                    <a:p>
+                      <a:r>
+                        <a:rPr sz="1100" b="0">
+                          <a:solidFill>
+                            <a:srgbClr val="282828"/>
+                          </a:solidFill>
+                          <a:latin typeface="Arial"/>
+                        </a:rPr>
+                        <a:t>tuned tail (field lens 39.8 mm past the focus, conic −2.59)</a:t>
+                      </a:r>
+                    </a:p>
+                  </a:txBody>
+                  <a:tcPr marL="54864" marR="54864" marT="18288" marB="18288">
+                    <a:solidFill>
+                      <a:srgbClr val="FFFFFF"/>
+                    </a:solidFill>
+                  </a:tcPr>
+                </a:tc>
+                <a:tc>
+                  <a:txBody>
+                    <a:bodyPr wrap="square"/>
+                    <a:lstStyle/>
+                    <a:p>
+                      <a:r>
+                        <a:rPr sz="1100" b="0">
+                          <a:solidFill>
+                            <a:srgbClr val="282828"/>
+                          </a:solidFill>
+                          <a:latin typeface="Arial"/>
+                        </a:rPr>
+                        <a:t>+2.6 / +4.3 / +6.0</a:t>
+                      </a:r>
+                    </a:p>
+                  </a:txBody>
+                  <a:tcPr marL="54864" marR="54864" marT="18288" marB="18288">
+                    <a:solidFill>
+                      <a:srgbClr val="FFFFFF"/>
+                    </a:solidFill>
+                  </a:tcPr>
+                </a:tc>
+                <a:tc>
+                  <a:txBody>
+                    <a:bodyPr wrap="square"/>
+                    <a:lstStyle/>
+                    <a:p>
+                      <a:r>
+                        <a:rPr sz="1100" b="0">
+                          <a:solidFill>
+                            <a:srgbClr val="282828"/>
+                          </a:solidFill>
+                          <a:latin typeface="Arial"/>
+                        </a:rPr>
+                        <a:t>1.05 mm</a:t>
+                      </a:r>
+                    </a:p>
+                  </a:txBody>
+                  <a:tcPr marL="54864" marR="54864" marT="18288" marB="18288">
+                    <a:solidFill>
+                      <a:srgbClr val="FFFFFF"/>
+                    </a:solidFill>
+                  </a:tcPr>
+                </a:tc>
+                <a:tc>
+                  <a:txBody>
+                    <a:bodyPr wrap="square"/>
+                    <a:lstStyle/>
+                    <a:p>
+                      <a:r>
+                        <a:rPr sz="1100" b="0">
+                          <a:solidFill>
+                            <a:srgbClr val="282828"/>
+                          </a:solidFill>
+                          <a:latin typeface="Arial"/>
+                        </a:rPr>
+                        <a:t>0.979 / 0.954</a:t>
+                      </a:r>
+                    </a:p>
+                  </a:txBody>
+                  <a:tcPr marL="54864" marR="54864" marT="18288" marB="18288">
+                    <a:solidFill>
+                      <a:srgbClr val="FFFFFF"/>
+                    </a:solidFill>
+                  </a:tcPr>
+                </a:tc>
+                <a:tc>
+                  <a:txBody>
+                    <a:bodyPr wrap="square"/>
+                    <a:lstStyle/>
+                    <a:p>
+                      <a:r>
+                        <a:rPr sz="1100" b="0">
+                          <a:solidFill>
+                            <a:srgbClr val="282828"/>
+                          </a:solidFill>
+                          <a:latin typeface="Arial"/>
+                        </a:rPr>
+                        <a:t>+4.3 mm: 0.993 worst</a:t>
+                      </a:r>
+                    </a:p>
+                  </a:txBody>
+                  <a:tcPr marL="54864" marR="54864" marT="18288" marB="18288">
+                    <a:solidFill>
+                      <a:srgbClr val="FFFFFF"/>
+                    </a:solidFill>
+                  </a:tcPr>
+                </a:tc>
+                <a:tc>
+                  <a:txBody>
+                    <a:bodyPr wrap="square"/>
+                    <a:lstStyle/>
+                    <a:p>
+                      <a:r>
+                        <a:rPr sz="1100" b="0">
+                          <a:solidFill>
+                            <a:srgbClr val="282828"/>
+                          </a:solidFill>
+                          <a:latin typeface="Arial"/>
+                        </a:rPr>
+                        <a:t>1.2 → 0.4 nm</a:t>
+                      </a:r>
+                    </a:p>
+                  </a:txBody>
+                  <a:tcPr marL="54864" marR="54864" marT="18288" marB="18288">
+                    <a:solidFill>
+                      <a:srgbClr val="FFFFFF"/>
+                    </a:solidFill>
+                  </a:tcPr>
+                </a:tc>
+                <a:tc>
+                  <a:txBody>
+                    <a:bodyPr wrap="square"/>
+                    <a:lstStyle/>
+                    <a:p>
+                      <a:r>
+                        <a:rPr sz="1100" b="0">
+                          <a:solidFill>
+                            <a:srgbClr val="282828"/>
+                          </a:solidFill>
+                          <a:latin typeface="Arial"/>
+                        </a:rPr>
+                        <a:t>0.27 mm</a:t>
+                      </a:r>
+                    </a:p>
+                  </a:txBody>
+                  <a:tcPr marL="54864" marR="54864" marT="18288" marB="18288">
+                    <a:solidFill>
+                      <a:srgbClr val="FFFFFF"/>
+                    </a:solidFill>
+                  </a:tcPr>
+                </a:tc>
+              </a:tr>
+              <a:tr h="468630">
+                <a:tc>
+                  <a:txBody>
+                    <a:bodyPr wrap="square"/>
+                    <a:lstStyle/>
+                    <a:p>
+                      <a:r>
+                        <a:rPr sz="1100" b="0">
+                          <a:solidFill>
+                            <a:srgbClr val="282828"/>
+                          </a:solidFill>
+                          <a:latin typeface="Arial"/>
+                        </a:rPr>
+                        <a:t>seed tail (field lens 10.8 mm past the focus, conic −2.11)</a:t>
+                      </a:r>
+                    </a:p>
+                  </a:txBody>
+                  <a:tcPr marL="54864" marR="54864" marT="18288" marB="18288">
+                    <a:solidFill>
+                      <a:srgbClr val="ECF1F6"/>
+                    </a:solidFill>
+                  </a:tcPr>
+                </a:tc>
+                <a:tc>
+                  <a:txBody>
+                    <a:bodyPr wrap="square"/>
+                    <a:lstStyle/>
+                    <a:p>
+                      <a:r>
+                        <a:rPr sz="1100" b="0">
+                          <a:solidFill>
+                            <a:srgbClr val="282828"/>
+                          </a:solidFill>
+                          <a:latin typeface="Arial"/>
+                        </a:rPr>
+                        <a:t>−0.5 / −0.7 / −1.0</a:t>
+                      </a:r>
+                    </a:p>
+                  </a:txBody>
+                  <a:tcPr marL="54864" marR="54864" marT="18288" marB="18288">
+                    <a:solidFill>
+                      <a:srgbClr val="ECF1F6"/>
+                    </a:solidFill>
+                  </a:tcPr>
+                </a:tc>
+                <a:tc>
+                  <a:txBody>
+                    <a:bodyPr wrap="square"/>
+                    <a:lstStyle/>
+                    <a:p>
+                      <a:r>
+                        <a:rPr sz="1100" b="0">
+                          <a:solidFill>
+                            <a:srgbClr val="282828"/>
+                          </a:solidFill>
+                          <a:latin typeface="Arial"/>
+                        </a:rPr>
+                        <a:t>0.08 mm</a:t>
+                      </a:r>
+                    </a:p>
+                  </a:txBody>
+                  <a:tcPr marL="54864" marR="54864" marT="18288" marB="18288">
+                    <a:solidFill>
+                      <a:srgbClr val="ECF1F6"/>
+                    </a:solidFill>
+                  </a:tcPr>
+                </a:tc>
+                <a:tc>
+                  <a:txBody>
+                    <a:bodyPr wrap="square"/>
+                    <a:lstStyle/>
+                    <a:p>
+                      <a:r>
+                        <a:rPr sz="1100" b="0">
+                          <a:solidFill>
+                            <a:srgbClr val="282828"/>
+                          </a:solidFill>
+                          <a:latin typeface="Arial"/>
+                        </a:rPr>
+                        <a:t>0.9992 / 0.9986</a:t>
+                      </a:r>
+                    </a:p>
+                  </a:txBody>
+                  <a:tcPr marL="54864" marR="54864" marT="18288" marB="18288">
+                    <a:solidFill>
+                      <a:srgbClr val="ECF1F6"/>
+                    </a:solidFill>
+                  </a:tcPr>
+                </a:tc>
+                <a:tc>
+                  <a:txBody>
+                    <a:bodyPr wrap="square"/>
+                    <a:lstStyle/>
+                    <a:p>
+                      <a:r>
+                        <a:rPr sz="1100" b="0">
+                          <a:solidFill>
+                            <a:srgbClr val="282828"/>
+                          </a:solidFill>
+                          <a:latin typeface="Arial"/>
+                        </a:rPr>
+                        <a:t>−0.7 mm: 0.9999</a:t>
+                      </a:r>
+                    </a:p>
+                  </a:txBody>
+                  <a:tcPr marL="54864" marR="54864" marT="18288" marB="18288">
+                    <a:solidFill>
+                      <a:srgbClr val="ECF1F6"/>
+                    </a:solidFill>
+                  </a:tcPr>
+                </a:tc>
+                <a:tc>
+                  <a:txBody>
+                    <a:bodyPr wrap="square"/>
+                    <a:lstStyle/>
+                    <a:p>
+                      <a:r>
+                        <a:rPr sz="1100" b="0">
+                          <a:solidFill>
+                            <a:srgbClr val="282828"/>
+                          </a:solidFill>
+                          <a:latin typeface="Arial"/>
+                        </a:rPr>
+                        <a:t>0.24 → 0.06 nm</a:t>
+                      </a:r>
+                    </a:p>
+                  </a:txBody>
+                  <a:tcPr marL="54864" marR="54864" marT="18288" marB="18288">
+                    <a:solidFill>
+                      <a:srgbClr val="ECF1F6"/>
+                    </a:solidFill>
+                  </a:tcPr>
+                </a:tc>
+                <a:tc>
+                  <a:txBody>
+                    <a:bodyPr wrap="square"/>
+                    <a:lstStyle/>
+                    <a:p>
+                      <a:r>
+                        <a:rPr sz="1100" b="0">
+                          <a:solidFill>
+                            <a:srgbClr val="282828"/>
+                          </a:solidFill>
+                          <a:latin typeface="Arial"/>
+                        </a:rPr>
+                        <a:t>0.003 mm</a:t>
+                      </a:r>
+                    </a:p>
+                  </a:txBody>
+                  <a:tcPr marL="54864" marR="54864" marT="18288" marB="18288">
+                    <a:solidFill>
+                      <a:srgbClr val="ECF1F6"/>
+                    </a:solidFill>
+                  </a:tcPr>
+                </a:tc>
+              </a:tr>
+              <a:tr h="468630">
+                <a:tc>
+                  <a:txBody>
+                    <a:bodyPr wrap="square"/>
+                    <a:lstStyle/>
+                    <a:p>
+                      <a:r>
+                        <a:rPr sz="1100" b="0">
+                          <a:solidFill>
+                            <a:srgbClr val="282828"/>
+                          </a:solidFill>
+                          <a:latin typeface="Arial"/>
+                        </a:rPr>
+                        <a:t>tuned tail, spherical field lens</a:t>
+                      </a:r>
+                    </a:p>
+                  </a:txBody>
+                  <a:tcPr marL="54864" marR="54864" marT="18288" marB="18288">
+                    <a:solidFill>
+                      <a:srgbClr val="FFFFFF"/>
+                    </a:solidFill>
+                  </a:tcPr>
+                </a:tc>
+                <a:tc>
+                  <a:txBody>
+                    <a:bodyPr wrap="square"/>
+                    <a:lstStyle/>
+                    <a:p>
+                      <a:r>
+                        <a:rPr sz="1100" b="0">
+                          <a:solidFill>
+                            <a:srgbClr val="282828"/>
+                          </a:solidFill>
+                          <a:latin typeface="Arial"/>
+                        </a:rPr>
+                        <a:t>+2.6 / +1.5 / +0.3</a:t>
+                      </a:r>
+                    </a:p>
+                  </a:txBody>
+                  <a:tcPr marL="54864" marR="54864" marT="18288" marB="18288">
+                    <a:solidFill>
+                      <a:srgbClr val="FFFFFF"/>
+                    </a:solidFill>
+                  </a:tcPr>
+                </a:tc>
+                <a:tc>
+                  <a:txBody>
+                    <a:bodyPr wrap="square"/>
+                    <a:lstStyle/>
+                    <a:p>
+                      <a:r>
+                        <a:rPr sz="1100" b="0">
+                          <a:solidFill>
+                            <a:srgbClr val="282828"/>
+                          </a:solidFill>
+                          <a:latin typeface="Arial"/>
+                        </a:rPr>
+                        <a:t>0.59 mm</a:t>
+                      </a:r>
+                    </a:p>
+                  </a:txBody>
+                  <a:tcPr marL="54864" marR="54864" marT="18288" marB="18288">
+                    <a:solidFill>
+                      <a:srgbClr val="FFFFFF"/>
+                    </a:solidFill>
+                  </a:tcPr>
+                </a:tc>
+                <a:tc>
+                  <a:txBody>
+                    <a:bodyPr wrap="square"/>
+                    <a:lstStyle/>
+                    <a:p>
+                      <a:r>
+                        <a:rPr sz="1100" b="0">
+                          <a:solidFill>
+                            <a:srgbClr val="282828"/>
+                          </a:solidFill>
+                          <a:latin typeface="Arial"/>
+                        </a:rPr>
+                        <a:t>0.996 / 0.992</a:t>
+                      </a:r>
+                    </a:p>
+                  </a:txBody>
+                  <a:tcPr marL="54864" marR="54864" marT="18288" marB="18288">
+                    <a:solidFill>
+                      <a:srgbClr val="FFFFFF"/>
+                    </a:solidFill>
+                  </a:tcPr>
+                </a:tc>
+                <a:tc>
+                  <a:txBody>
+                    <a:bodyPr wrap="square"/>
+                    <a:lstStyle/>
+                    <a:p>
+                      <a:r>
+                        <a:rPr sz="1100" b="0">
+                          <a:solidFill>
+                            <a:srgbClr val="282828"/>
+                          </a:solidFill>
+                          <a:latin typeface="Arial"/>
+                        </a:rPr>
+                        <a:t>+1.5 mm: 0.994</a:t>
+                      </a:r>
+                    </a:p>
+                  </a:txBody>
+                  <a:tcPr marL="54864" marR="54864" marT="18288" marB="18288">
+                    <a:solidFill>
+                      <a:srgbClr val="FFFFFF"/>
+                    </a:solidFill>
+                  </a:tcPr>
+                </a:tc>
+                <a:tc>
+                  <a:txBody>
+                    <a:bodyPr wrap="square"/>
+                    <a:lstStyle/>
+                    <a:p>
+                      <a:r>
+                        <a:rPr sz="1100" b="0">
+                          <a:solidFill>
+                            <a:srgbClr val="282828"/>
+                          </a:solidFill>
+                          <a:latin typeface="Arial"/>
+                        </a:rPr>
+                        <a:t>0.54 → 0.34 nm</a:t>
+                      </a:r>
+                    </a:p>
+                  </a:txBody>
+                  <a:tcPr marL="54864" marR="54864" marT="18288" marB="18288">
+                    <a:solidFill>
+                      <a:srgbClr val="FFFFFF"/>
+                    </a:solidFill>
+                  </a:tcPr>
+                </a:tc>
+                <a:tc>
+                  <a:txBody>
+                    <a:bodyPr wrap="square"/>
+                    <a:lstStyle/>
+                    <a:p>
+                      <a:r>
+                        <a:rPr sz="1100" b="0">
+                          <a:solidFill>
+                            <a:srgbClr val="282828"/>
+                          </a:solidFill>
+                          <a:latin typeface="Arial"/>
+                        </a:rPr>
+                        <a:t>0.30 mm</a:t>
+                      </a:r>
+                    </a:p>
+                  </a:txBody>
+                  <a:tcPr marL="54864" marR="54864" marT="18288" marB="18288">
+                    <a:solidFill>
+                      <a:srgbClr val="FFFFFF"/>
+                    </a:solidFill>
+                  </a:tcPr>
+                </a:tc>
+              </a:tr>
+              <a:tr h="280035">
+                <a:tc>
+                  <a:txBody>
+                    <a:bodyPr wrap="square"/>
+                    <a:lstStyle/>
+                    <a:p>
+                      <a:r>
+                        <a:rPr sz="1100" b="0">
+                          <a:solidFill>
+                            <a:srgbClr val="282828"/>
+                          </a:solidFill>
+                          <a:latin typeface="Arial"/>
+                        </a:rPr>
+                        <a:t>true collimation, tuned tail</a:t>
+                      </a:r>
+                    </a:p>
+                  </a:txBody>
+                  <a:tcPr marL="54864" marR="54864" marT="18288" marB="18288">
+                    <a:solidFill>
+                      <a:srgbClr val="ECF1F6"/>
+                    </a:solidFill>
+                  </a:tcPr>
+                </a:tc>
+                <a:tc>
+                  <a:txBody>
+                    <a:bodyPr wrap="square"/>
+                    <a:lstStyle/>
+                    <a:p>
+                      <a:r>
+                        <a:rPr sz="1100" b="0">
+                          <a:solidFill>
+                            <a:srgbClr val="282828"/>
+                          </a:solidFill>
+                          <a:latin typeface="Arial"/>
+                        </a:rPr>
+                        <a:t>+2.7 / +3.9 / +5.1</a:t>
+                      </a:r>
+                    </a:p>
+                  </a:txBody>
+                  <a:tcPr marL="54864" marR="54864" marT="18288" marB="18288">
+                    <a:solidFill>
+                      <a:srgbClr val="ECF1F6"/>
+                    </a:solidFill>
+                  </a:tcPr>
+                </a:tc>
+                <a:tc>
+                  <a:txBody>
+                    <a:bodyPr wrap="square"/>
+                    <a:lstStyle/>
+                    <a:p>
+                      <a:r>
+                        <a:rPr sz="1100" b="0">
+                          <a:solidFill>
+                            <a:srgbClr val="282828"/>
+                          </a:solidFill>
+                          <a:latin typeface="Arial"/>
+                        </a:rPr>
+                        <a:t>0.80 mm</a:t>
+                      </a:r>
+                    </a:p>
+                  </a:txBody>
+                  <a:tcPr marL="54864" marR="54864" marT="18288" marB="18288">
+                    <a:solidFill>
+                      <a:srgbClr val="ECF1F6"/>
+                    </a:solidFill>
+                  </a:tcPr>
+                </a:tc>
+                <a:tc>
+                  <a:txBody>
+                    <a:bodyPr wrap="square"/>
+                    <a:lstStyle/>
+                    <a:p>
+                      <a:r>
+                        <a:rPr sz="1100" b="0">
+                          <a:solidFill>
+                            <a:srgbClr val="282828"/>
+                          </a:solidFill>
+                          <a:latin typeface="Arial"/>
+                        </a:rPr>
+                        <a:t>0.982 / 0.965</a:t>
+                      </a:r>
+                    </a:p>
+                  </a:txBody>
+                  <a:tcPr marL="54864" marR="54864" marT="18288" marB="18288">
+                    <a:solidFill>
+                      <a:srgbClr val="ECF1F6"/>
+                    </a:solidFill>
+                  </a:tcPr>
+                </a:tc>
+                <a:tc>
+                  <a:txBody>
+                    <a:bodyPr wrap="square"/>
+                    <a:lstStyle/>
+                    <a:p>
+                      <a:r>
+                        <a:rPr sz="1100" b="0">
+                          <a:solidFill>
+                            <a:srgbClr val="282828"/>
+                          </a:solidFill>
+                          <a:latin typeface="Arial"/>
+                        </a:rPr>
+                        <a:t>+3.9 mm: 0.996</a:t>
+                      </a:r>
+                    </a:p>
+                  </a:txBody>
+                  <a:tcPr marL="54864" marR="54864" marT="18288" marB="18288">
+                    <a:solidFill>
+                      <a:srgbClr val="ECF1F6"/>
+                    </a:solidFill>
+                  </a:tcPr>
+                </a:tc>
+                <a:tc>
+                  <a:txBody>
+                    <a:bodyPr wrap="square"/>
+                    <a:lstStyle/>
+                    <a:p>
+                      <a:r>
+                        <a:rPr sz="1100" b="0">
+                          <a:solidFill>
+                            <a:srgbClr val="282828"/>
+                          </a:solidFill>
+                          <a:latin typeface="Arial"/>
+                        </a:rPr>
+                        <a:t>1.1 → 0.3 nm</a:t>
+                      </a:r>
+                    </a:p>
+                  </a:txBody>
+                  <a:tcPr marL="54864" marR="54864" marT="18288" marB="18288">
+                    <a:solidFill>
+                      <a:srgbClr val="ECF1F6"/>
+                    </a:solidFill>
+                  </a:tcPr>
+                </a:tc>
+                <a:tc>
+                  <a:txBody>
+                    <a:bodyPr wrap="square"/>
+                    <a:lstStyle/>
+                    <a:p>
+                      <a:r>
+                        <a:rPr sz="1100" b="0">
+                          <a:solidFill>
+                            <a:srgbClr val="282828"/>
+                          </a:solidFill>
+                          <a:latin typeface="Arial"/>
+                        </a:rPr>
+                        <a:t>0.13 mm</a:t>
+                      </a:r>
+                    </a:p>
+                  </a:txBody>
+                  <a:tcPr marL="54864" marR="54864" marT="18288" marB="18288">
+                    <a:solidFill>
+                      <a:srgbClr val="ECF1F6"/>
+                    </a:solidFill>
+                  </a:tcPr>
+                </a:tc>
+              </a:tr>
+              <a:tr h="280035">
+                <a:tc>
+                  <a:txBody>
+                    <a:bodyPr wrap="square"/>
+                    <a:lstStyle/>
+                    <a:p>
+                      <a:r>
+                        <a:rPr sz="1100" b="0">
+                          <a:solidFill>
+                            <a:srgbClr val="282828"/>
+                          </a:solidFill>
+                          <a:latin typeface="Arial"/>
+                        </a:rPr>
+                        <a:t>true collimation, seed tail</a:t>
+                      </a:r>
+                    </a:p>
+                  </a:txBody>
+                  <a:tcPr marL="54864" marR="54864" marT="18288" marB="18288">
+                    <a:solidFill>
+                      <a:srgbClr val="FFFFFF"/>
+                    </a:solidFill>
+                  </a:tcPr>
+                </a:tc>
+                <a:tc>
+                  <a:txBody>
+                    <a:bodyPr wrap="square"/>
+                    <a:lstStyle/>
+                    <a:p>
+                      <a:r>
+                        <a:rPr sz="1100" b="0">
+                          <a:solidFill>
+                            <a:srgbClr val="282828"/>
+                          </a:solidFill>
+                          <a:latin typeface="Arial"/>
+                        </a:rPr>
+                        <a:t>−0.5 / −0.8 / −1.1</a:t>
+                      </a:r>
+                    </a:p>
+                  </a:txBody>
+                  <a:tcPr marL="54864" marR="54864" marT="18288" marB="18288">
+                    <a:solidFill>
+                      <a:srgbClr val="FFFFFF"/>
+                    </a:solidFill>
+                  </a:tcPr>
+                </a:tc>
+                <a:tc>
+                  <a:txBody>
+                    <a:bodyPr wrap="square"/>
+                    <a:lstStyle/>
+                    <a:p>
+                      <a:r>
+                        <a:rPr sz="1100" b="0">
+                          <a:solidFill>
+                            <a:srgbClr val="282828"/>
+                          </a:solidFill>
+                          <a:latin typeface="Arial"/>
+                        </a:rPr>
+                        <a:t>0.11 mm</a:t>
+                      </a:r>
+                    </a:p>
+                  </a:txBody>
+                  <a:tcPr marL="54864" marR="54864" marT="18288" marB="18288">
+                    <a:solidFill>
+                      <a:srgbClr val="FFFFFF"/>
+                    </a:solidFill>
+                  </a:tcPr>
+                </a:tc>
+                <a:tc>
+                  <a:txBody>
+                    <a:bodyPr wrap="square"/>
+                    <a:lstStyle/>
+                    <a:p>
+                      <a:r>
+                        <a:rPr sz="1100" b="0">
+                          <a:solidFill>
+                            <a:srgbClr val="282828"/>
+                          </a:solidFill>
+                          <a:latin typeface="Arial"/>
+                        </a:rPr>
+                        <a:t>0.9991 / 0.9980</a:t>
+                      </a:r>
+                    </a:p>
+                  </a:txBody>
+                  <a:tcPr marL="54864" marR="54864" marT="18288" marB="18288">
+                    <a:solidFill>
+                      <a:srgbClr val="FFFFFF"/>
+                    </a:solidFill>
+                  </a:tcPr>
+                </a:tc>
+                <a:tc>
+                  <a:txBody>
+                    <a:bodyPr wrap="square"/>
+                    <a:lstStyle/>
+                    <a:p>
+                      <a:r>
+                        <a:rPr sz="1100" b="0">
+                          <a:solidFill>
+                            <a:srgbClr val="282828"/>
+                          </a:solidFill>
+                          <a:latin typeface="Arial"/>
+                        </a:rPr>
+                        <a:t>−0.8 mm: 0.9999</a:t>
+                      </a:r>
+                    </a:p>
+                  </a:txBody>
+                  <a:tcPr marL="54864" marR="54864" marT="18288" marB="18288">
+                    <a:solidFill>
+                      <a:srgbClr val="FFFFFF"/>
+                    </a:solidFill>
+                  </a:tcPr>
+                </a:tc>
+                <a:tc>
+                  <a:txBody>
+                    <a:bodyPr wrap="square"/>
+                    <a:lstStyle/>
+                    <a:p>
+                      <a:r>
+                        <a:rPr sz="1100" b="0">
+                          <a:solidFill>
+                            <a:srgbClr val="282828"/>
+                          </a:solidFill>
+                          <a:latin typeface="Arial"/>
+                        </a:rPr>
+                        <a:t>0.26 → 0.08 nm</a:t>
+                      </a:r>
+                    </a:p>
+                  </a:txBody>
+                  <a:tcPr marL="54864" marR="54864" marT="18288" marB="18288">
+                    <a:solidFill>
+                      <a:srgbClr val="FFFFFF"/>
+                    </a:solidFill>
+                  </a:tcPr>
+                </a:tc>
+                <a:tc>
+                  <a:txBody>
+                    <a:bodyPr wrap="square"/>
+                    <a:lstStyle/>
+                    <a:p>
+                      <a:r>
+                        <a:rPr sz="1100" b="0">
+                          <a:solidFill>
+                            <a:srgbClr val="282828"/>
+                          </a:solidFill>
+                          <a:latin typeface="Arial"/>
+                        </a:rPr>
+                        <a:t>0.035 mm</a:t>
+                      </a:r>
+                    </a:p>
+                  </a:txBody>
+                  <a:tcPr marL="54864" marR="54864" marT="18288" marB="18288">
+                    <a:solidFill>
+                      <a:srgbClr val="FFFFFF"/>
+                    </a:solidFill>
+                  </a:tcPr>
+                </a:tc>
+              </a:tr>
+              <a:tr h="468630">
+                <a:tc>
+                  <a:txBody>
+                    <a:bodyPr wrap="square"/>
+                    <a:lstStyle/>
+                    <a:p>
+                      <a:r>
+                        <a:rPr sz="1100" b="0">
+                          <a:solidFill>
+                            <a:srgbClr val="282828"/>
+                          </a:solidFill>
+                          <a:latin typeface="Arial"/>
+                        </a:rPr>
+                        <a:t>mirror rig, as built (seed tail)</a:t>
+                      </a:r>
+                    </a:p>
+                  </a:txBody>
+                  <a:tcPr marL="54864" marR="54864" marT="18288" marB="18288">
+                    <a:solidFill>
+                      <a:srgbClr val="ECF1F6"/>
+                    </a:solidFill>
+                  </a:tcPr>
+                </a:tc>
+                <a:tc>
+                  <a:txBody>
+                    <a:bodyPr wrap="square"/>
+                    <a:lstStyle/>
+                    <a:p>
+                      <a:r>
+                        <a:rPr sz="1100" b="0">
+                          <a:solidFill>
+                            <a:srgbClr val="282828"/>
+                          </a:solidFill>
+                          <a:latin typeface="Arial"/>
+                        </a:rPr>
+                        <a:t>−0.4 / −0.6 / −1.3</a:t>
+                      </a:r>
+                    </a:p>
+                  </a:txBody>
+                  <a:tcPr marL="54864" marR="54864" marT="18288" marB="18288">
+                    <a:solidFill>
+                      <a:srgbClr val="ECF1F6"/>
+                    </a:solidFill>
+                  </a:tcPr>
+                </a:tc>
+                <a:tc>
+                  <a:txBody>
+                    <a:bodyPr wrap="square"/>
+                    <a:lstStyle/>
+                    <a:p>
+                      <a:r>
+                        <a:rPr sz="1100" b="0">
+                          <a:solidFill>
+                            <a:srgbClr val="282828"/>
+                          </a:solidFill>
+                          <a:latin typeface="Arial"/>
+                        </a:rPr>
+                        <a:t>0.09 mm</a:t>
+                      </a:r>
+                    </a:p>
+                  </a:txBody>
+                  <a:tcPr marL="54864" marR="54864" marT="18288" marB="18288">
+                    <a:solidFill>
+                      <a:srgbClr val="ECF1F6"/>
+                    </a:solidFill>
+                  </a:tcPr>
+                </a:tc>
+                <a:tc>
+                  <a:txBody>
+                    <a:bodyPr wrap="square"/>
+                    <a:lstStyle/>
+                    <a:p>
+                      <a:r>
+                        <a:rPr sz="1100" b="0">
+                          <a:solidFill>
+                            <a:srgbClr val="282828"/>
+                          </a:solidFill>
+                          <a:latin typeface="Arial"/>
+                        </a:rPr>
+                        <a:t>0.9993 / 0.9974</a:t>
+                      </a:r>
+                    </a:p>
+                  </a:txBody>
+                  <a:tcPr marL="54864" marR="54864" marT="18288" marB="18288">
+                    <a:solidFill>
+                      <a:srgbClr val="ECF1F6"/>
+                    </a:solidFill>
+                  </a:tcPr>
+                </a:tc>
+                <a:tc>
+                  <a:txBody>
+                    <a:bodyPr wrap="square"/>
+                    <a:lstStyle/>
+                    <a:p>
+                      <a:r>
+                        <a:rPr sz="1100" b="0">
+                          <a:solidFill>
+                            <a:srgbClr val="282828"/>
+                          </a:solidFill>
+                          <a:latin typeface="Arial"/>
+                        </a:rPr>
+                        <a:t>−0.6 mm: 0.9994</a:t>
+                      </a:r>
+                    </a:p>
+                  </a:txBody>
+                  <a:tcPr marL="54864" marR="54864" marT="18288" marB="18288">
+                    <a:solidFill>
+                      <a:srgbClr val="ECF1F6"/>
+                    </a:solidFill>
+                  </a:tcPr>
+                </a:tc>
+                <a:tc>
+                  <a:txBody>
+                    <a:bodyPr wrap="square"/>
+                    <a:lstStyle/>
+                    <a:p>
+                      <a:r>
+                        <a:rPr sz="1100" b="0">
+                          <a:solidFill>
+                            <a:srgbClr val="282828"/>
+                          </a:solidFill>
+                          <a:latin typeface="Arial"/>
+                        </a:rPr>
+                        <a:t>0.23 → 0.09 nm</a:t>
+                      </a:r>
+                    </a:p>
+                  </a:txBody>
+                  <a:tcPr marL="54864" marR="54864" marT="18288" marB="18288">
+                    <a:solidFill>
+                      <a:srgbClr val="ECF1F6"/>
+                    </a:solidFill>
+                  </a:tcPr>
+                </a:tc>
+                <a:tc>
+                  <a:txBody>
+                    <a:bodyPr wrap="square"/>
+                    <a:lstStyle/>
+                    <a:p>
+                      <a:r>
+                        <a:rPr sz="1100" b="0">
+                          <a:solidFill>
+                            <a:srgbClr val="282828"/>
+                          </a:solidFill>
+                          <a:latin typeface="Arial"/>
+                        </a:rPr>
+                        <a:t>0.72 mm</a:t>
+                      </a:r>
+                    </a:p>
+                  </a:txBody>
+                  <a:tcPr marL="54864" marR="54864" marT="18288" marB="18288">
+                    <a:solidFill>
+                      <a:srgbClr val="ECF1F6"/>
+                    </a:solidFill>
+                  </a:tcPr>
+                </a:tc>
+              </a:tr>
+            </a:tbl>
+          </a:graphicData>
+        </a:graphic>
+      </p:graphicFrame>
+      <p:sp>
+        <p:nvSpPr>
+          <p:cNvPr id="5" name="TextBox 4"/>
+          <p:cNvSpPr txBox="1"/>
+          <p:nvPr/>
+        </p:nvSpPr>
+        <p:spPr>
+          <a:xfrm>
+            <a:off x="411480" y="4347972"/>
+            <a:ext cx="11368735" cy="274320"/>
+          </a:xfrm>
+          <a:prstGeom prst="rect">
+            <a:avLst/>
+          </a:prstGeom>
+          <a:noFill/>
+        </p:spPr>
+        <p:txBody>
+          <a:bodyPr wrap="square">
+            <a:spAutoFit/>
+          </a:bodyPr>
+          <a:lstStyle/>
+          <a:p>
+            <a:pPr>
+              <a:spcAft>
+                <a:spcPts val="600"/>
+              </a:spcAft>
+            </a:pPr>
+            <a:r>
+              <a:rPr sz="1500" b="0">
+                <a:solidFill>
+                  <a:srgbClr val="282828"/>
+                </a:solidFill>
+                <a:latin typeface="Arial"/>
+              </a:rPr>
+              <a:t>•  The null tuner bought its 0.13 nm flat-mirror null with the pupil image: it moved the field lens to its own focal length behind the focus, where the pupil rides 4.6 mm high on a 12 mm asphere.  At the seed station the pupil rides 1.2 mm high and the DM images flat.  The null it gives up (9 nm) is a fixed pattern the reference frame removes.</a:t>
+            </a:r>
+          </a:p>
+          <a:p>
+            <a:pPr>
+              <a:spcAft>
+                <a:spcPts val="600"/>
+              </a:spcAft>
+            </a:pPr>
+            <a:r>
+              <a:rPr sz="1500" b="0">
+                <a:solidFill>
+                  <a:srgbClr val="282828"/>
+                </a:solidFill>
+                <a:latin typeface="Arial"/>
+              </a:rPr>
+              <a:t>•  A flattener behind the tuned tail is not an optic: its bowl is a 5 mm-radius surface in image space.  True collimation (the record's source sits 14 mm inside the hyperbolic collimator's focus) halves the distortion and is needed for any re-tune and for the physical-optics chain.</a:t>
+            </a:r>
+          </a:p>
+        </p:txBody>
+      </p:sp>
+      <p:sp>
+        <p:nvSpPr>
+          <p:cNvPr id="6" name="TextBox 5"/>
+          <p:cNvSpPr txBox="1"/>
+          <p:nvPr/>
+        </p:nvSpPr>
+        <p:spPr>
+          <a:xfrm>
+            <a:off x="411480" y="6150864"/>
+            <a:ext cx="11368735" cy="274320"/>
+          </a:xfrm>
+          <a:prstGeom prst="rect">
+            <a:avLst/>
+          </a:prstGeom>
+          <a:noFill/>
+        </p:spPr>
+        <p:txBody>
+          <a:bodyPr wrap="square">
+            <a:spAutoFit/>
+          </a:bodyPr>
+          <a:lstStyle/>
+          <a:p>
+            <a:pPr>
+              <a:spcAft>
+                <a:spcPts val="600"/>
+              </a:spcAft>
+            </a:pPr>
+            <a:r>
+              <a:rPr sz="1050" b="0">
+                <a:solidFill>
+                  <a:srgbClr val="6E6E6E"/>
+                </a:solidFill>
+                <a:latin typeface="Arial"/>
+              </a:rPr>
+              <a:t>Recommendation: lens rig, field lens held at the seed station, conic and trim re-tuned with the image surface in the objective, detector at the image mean; mirror rig, the 0.6 mm move; collimator fixed first; rows re-run on the corrected tail and the 96 mm beam together.  Run tag pupil_options (tg96_pupil_options); REPORT_bench_realism 7.1.</a:t>
+            </a:r>
+          </a:p>
+        </p:txBody>
+      </p:sp>
+    </p:spTree>
+  </p:cSld>
+  <p:clrMapOvr>
+    <a:masterClrMapping/>
+  </p:clrMapOvr>
+</p:sld>
+</file>
+
+<file path=ppt/slides/slide16.xml><?xml version="1.0" encoding="utf-8"?>
+<p:sld xmlns:a="http://schemas.openxmlformats.org/drawingml/2006/main" xmlns:p="http://schemas.openxmlformats.org/presentationml/2006/main" xmlns:r="http://schemas.openxmlformats.org/officeDocument/2006/relationships">
+  <p:cSld>
+    <p:spTree>
+      <p:nvGrpSpPr>
+        <p:cNvPr id="1" name=""/>
+        <p:cNvGrpSpPr/>
+        <p:nvPr/>
+      </p:nvGrpSpPr>
+      <p:grpSpPr/>
+      <p:sp>
+        <p:nvSpPr>
+          <p:cNvPr id="2" name="TextBox 1"/>
+          <p:cNvSpPr txBox="1"/>
+          <p:nvPr/>
+        </p:nvSpPr>
+        <p:spPr>
+          <a:xfrm>
+            <a:off x="411480" y="201168"/>
+            <a:ext cx="11368735" cy="914400"/>
+          </a:xfrm>
+          <a:prstGeom prst="rect">
+            <a:avLst/>
+          </a:prstGeom>
+          <a:noFill/>
+        </p:spPr>
+        <p:txBody>
+          <a:bodyPr wrap="square">
+            <a:spAutoFit/>
+          </a:bodyPr>
+          <a:lstStyle/>
+          <a:p>
+            <a:pPr>
+              <a:spcAft>
+                <a:spcPts val="400"/>
+              </a:spcAft>
+            </a:pPr>
+            <a:r>
+              <a:rPr sz="2400" b="1">
+                <a:solidFill>
+                  <a:srgbClr val="1F4E79"/>
+                </a:solidFill>
+                <a:latin typeface="Arial"/>
+              </a:rPr>
               <a:t>Zernike sensor: a quarter-wave dimple at the focus</a:t>
             </a:r>
           </a:p>
@@ -5691,7 +7026,7 @@
 </p:sld>
 </file>
 
-<file path=ppt/slides/slide16.xml><?xml version="1.0" encoding="utf-8"?>
+<file path=ppt/slides/slide17.xml><?xml version="1.0" encoding="utf-8"?>
 <p:sld xmlns:a="http://schemas.openxmlformats.org/drawingml/2006/main" xmlns:p="http://schemas.openxmlformats.org/presentationml/2006/main" xmlns:r="http://schemas.openxmlformats.org/officeDocument/2006/relationships">
   <p:cSld>
     <p:spTree>
@@ -5949,7 +7284,7 @@
 </p:sld>
 </file>
 
-<file path=ppt/slides/slide17.xml><?xml version="1.0" encoding="utf-8"?>
+<file path=ppt/slides/slide18.xml><?xml version="1.0" encoding="utf-8"?>
 <p:sld xmlns:a="http://schemas.openxmlformats.org/drawingml/2006/main" xmlns:p="http://schemas.openxmlformats.org/presentationml/2006/main" xmlns:r="http://schemas.openxmlformats.org/officeDocument/2006/relationships">
   <p:cSld>
     <p:spTree>
@@ -6478,7 +7813,7 @@
 </p:sld>
 </file>
 
-<file path=ppt/slides/slide18.xml><?xml version="1.0" encoding="utf-8"?>
+<file path=ppt/slides/slide19.xml><?xml version="1.0" encoding="utf-8"?>
 <p:sld xmlns:a="http://schemas.openxmlformats.org/drawingml/2006/main" xmlns:p="http://schemas.openxmlformats.org/presentationml/2006/main" xmlns:r="http://schemas.openxmlformats.org/officeDocument/2006/relationships">
   <p:cSld>
     <p:spTree>
@@ -6736,7 +8071,410 @@
 </p:sld>
 </file>
 
-<file path=ppt/slides/slide19.xml><?xml version="1.0" encoding="utf-8"?>
+<file path=ppt/slides/slide2.xml><?xml version="1.0" encoding="utf-8"?>
+<p:sld xmlns:a="http://schemas.openxmlformats.org/drawingml/2006/main" xmlns:p="http://schemas.openxmlformats.org/presentationml/2006/main" xmlns:r="http://schemas.openxmlformats.org/officeDocument/2006/relationships">
+  <p:cSld>
+    <p:spTree>
+      <p:nvGrpSpPr>
+        <p:cNvPr id="1" name=""/>
+        <p:cNvGrpSpPr/>
+        <p:nvPr/>
+      </p:nvGrpSpPr>
+      <p:grpSpPr/>
+      <p:sp>
+        <p:nvSpPr>
+          <p:cNvPr id="2" name="TextBox 1"/>
+          <p:cNvSpPr txBox="1"/>
+          <p:nvPr/>
+        </p:nvSpPr>
+        <p:spPr>
+          <a:xfrm>
+            <a:off x="411480" y="201168"/>
+            <a:ext cx="11368735" cy="914400"/>
+          </a:xfrm>
+          <a:prstGeom prst="rect">
+            <a:avLst/>
+          </a:prstGeom>
+          <a:noFill/>
+        </p:spPr>
+        <p:txBody>
+          <a:bodyPr wrap="square">
+            <a:spAutoFit/>
+          </a:bodyPr>
+          <a:lstStyle/>
+          <a:p>
+            <a:pPr>
+              <a:spcAft>
+                <a:spcPts val="400"/>
+              </a:spcAft>
+            </a:pPr>
+            <a:r>
+              <a:rPr sz="2400" b="1">
+                <a:solidFill>
+                  <a:srgbClr val="1F4E79"/>
+                </a:solidFill>
+                <a:latin typeface="Arial"/>
+              </a:rPr>
+              <a:t>Contents</a:t>
+            </a:r>
+          </a:p>
+          <a:p>
+            <a:pPr>
+              <a:spcAft>
+                <a:spcPts val="0"/>
+              </a:spcAft>
+            </a:pPr>
+            <a:r>
+              <a:rPr sz="1250" b="0">
+                <a:solidFill>
+                  <a:srgbClr val="6E6E6E"/>
+                </a:solidFill>
+                <a:latin typeface="Arial"/>
+              </a:rPr>
+              <a:t>Three jobs, one bench, four ways of sensing</a:t>
+            </a:r>
+          </a:p>
+        </p:txBody>
+      </p:sp>
+      <p:sp>
+        <p:nvSpPr>
+          <p:cNvPr id="3" name="Rectangle 2"/>
+          <p:cNvSpPr/>
+          <p:nvPr/>
+        </p:nvSpPr>
+        <p:spPr>
+          <a:xfrm>
+            <a:off x="411480" y="1133856"/>
+            <a:ext cx="11368735" cy="20320"/>
+          </a:xfrm>
+          <a:prstGeom prst="rect">
+            <a:avLst/>
+          </a:prstGeom>
+          <a:solidFill>
+            <a:srgbClr val="B8C6D4"/>
+          </a:solidFill>
+          <a:ln>
+            <a:noFill/>
+          </a:ln>
+          <a:effectLst/>
+        </p:spPr>
+        <p:style>
+          <a:lnRef idx="1">
+            <a:schemeClr val="accent1"/>
+          </a:lnRef>
+          <a:fillRef idx="3">
+            <a:schemeClr val="accent1"/>
+          </a:fillRef>
+          <a:effectRef idx="2">
+            <a:schemeClr val="accent1"/>
+          </a:effectRef>
+          <a:fontRef idx="minor">
+            <a:schemeClr val="lt1"/>
+          </a:fontRef>
+        </p:style>
+        <p:txBody>
+          <a:bodyPr rtlCol="0" anchor="ctr"/>
+          <a:lstStyle/>
+          <a:p>
+            <a:pPr algn="ctr"/>
+          </a:p>
+        </p:txBody>
+      </p:sp>
+      <p:sp>
+        <p:nvSpPr>
+          <p:cNvPr id="4" name="TextBox 3"/>
+          <p:cNvSpPr txBox="1"/>
+          <p:nvPr/>
+        </p:nvSpPr>
+        <p:spPr>
+          <a:xfrm>
+            <a:off x="411480" y="1298448"/>
+            <a:ext cx="5806440" cy="274320"/>
+          </a:xfrm>
+          <a:prstGeom prst="rect">
+            <a:avLst/>
+          </a:prstGeom>
+          <a:noFill/>
+        </p:spPr>
+        <p:txBody>
+          <a:bodyPr wrap="square">
+            <a:spAutoFit/>
+          </a:bodyPr>
+          <a:lstStyle/>
+          <a:p>
+            <a:pPr>
+              <a:spcAft>
+                <a:spcPts val="600"/>
+              </a:spcAft>
+            </a:pPr>
+            <a:r>
+              <a:rPr sz="1200" b="0">
+                <a:solidFill>
+                  <a:srgbClr val="282828"/>
+                </a:solidFill>
+                <a:latin typeface="Arial"/>
+              </a:rPr>
+              <a:t>•  3 Introduction: the three jobs and how they are scored</a:t>
+            </a:r>
+          </a:p>
+          <a:p>
+            <a:pPr>
+              <a:spcAft>
+                <a:spcPts val="600"/>
+              </a:spcAft>
+            </a:pPr>
+            <a:r>
+              <a:rPr sz="1200" b="0">
+                <a:solidFill>
+                  <a:srgbClr val="282828"/>
+                </a:solidFill>
+                <a:latin typeface="Arial"/>
+              </a:rPr>
+              <a:t>•  4 The bench layout</a:t>
+            </a:r>
+          </a:p>
+          <a:p>
+            <a:pPr>
+              <a:spcAft>
+                <a:spcPts val="600"/>
+              </a:spcAft>
+            </a:pPr>
+            <a:r>
+              <a:rPr sz="1200" b="0">
+                <a:solidFill>
+                  <a:srgbClr val="282828"/>
+                </a:solidFill>
+                <a:latin typeface="Arial"/>
+              </a:rPr>
+              <a:t>•  6 Parts</a:t>
+            </a:r>
+          </a:p>
+          <a:p>
+            <a:pPr>
+              <a:spcAft>
+                <a:spcPts val="600"/>
+              </a:spcAft>
+            </a:pPr>
+            <a:r>
+              <a:rPr sz="1200" b="0">
+                <a:solidFill>
+                  <a:srgbClr val="282828"/>
+                </a:solidFill>
+                <a:latin typeface="Arial"/>
+              </a:rPr>
+              <a:t>•  9 Twyman-Green interferometer</a:t>
+            </a:r>
+          </a:p>
+          <a:p>
+            <a:pPr>
+              <a:spcAft>
+                <a:spcPts val="600"/>
+              </a:spcAft>
+            </a:pPr>
+            <a:r>
+              <a:rPr sz="1200" b="0">
+                <a:solidFill>
+                  <a:srgbClr val="282828"/>
+                </a:solidFill>
+                <a:latin typeface="Arial"/>
+              </a:rPr>
+              <a:t>•  16 Zernike sensor</a:t>
+            </a:r>
+          </a:p>
+          <a:p>
+            <a:pPr>
+              <a:spcAft>
+                <a:spcPts val="600"/>
+              </a:spcAft>
+            </a:pPr>
+            <a:r>
+              <a:rPr sz="1200" b="0">
+                <a:solidFill>
+                  <a:srgbClr val="282828"/>
+                </a:solidFill>
+                <a:latin typeface="Arial"/>
+              </a:rPr>
+              <a:t>•  18 Vector Zernike sensor</a:t>
+            </a:r>
+          </a:p>
+          <a:p>
+            <a:pPr>
+              <a:spcAft>
+                <a:spcPts val="600"/>
+              </a:spcAft>
+            </a:pPr>
+            <a:r>
+              <a:rPr sz="1200" b="0">
+                <a:solidFill>
+                  <a:srgbClr val="282828"/>
+                </a:solidFill>
+                <a:latin typeface="Arial"/>
+              </a:rPr>
+              <a:t>•  21 Point-diffraction sensor</a:t>
+            </a:r>
+          </a:p>
+          <a:p>
+            <a:pPr>
+              <a:spcAft>
+                <a:spcPts val="600"/>
+              </a:spcAft>
+            </a:pPr>
+            <a:r>
+              <a:rPr sz="1200" b="0">
+                <a:solidFill>
+                  <a:srgbClr val="282828"/>
+                </a:solidFill>
+                <a:latin typeface="Arial"/>
+              </a:rPr>
+              <a:t>•  24 Performance: rows, capture, photons, servo</a:t>
+            </a:r>
+          </a:p>
+        </p:txBody>
+      </p:sp>
+      <p:sp>
+        <p:nvSpPr>
+          <p:cNvPr id="5" name="TextBox 4"/>
+          <p:cNvSpPr txBox="1"/>
+          <p:nvPr/>
+        </p:nvSpPr>
+        <p:spPr>
+          <a:xfrm>
+            <a:off x="6400800" y="1298448"/>
+            <a:ext cx="5394960" cy="274320"/>
+          </a:xfrm>
+          <a:prstGeom prst="rect">
+            <a:avLst/>
+          </a:prstGeom>
+          <a:noFill/>
+        </p:spPr>
+        <p:txBody>
+          <a:bodyPr wrap="square">
+            <a:spAutoFit/>
+          </a:bodyPr>
+          <a:lstStyle/>
+          <a:p>
+            <a:pPr>
+              <a:spcAft>
+                <a:spcPts val="600"/>
+              </a:spcAft>
+            </a:pPr>
+            <a:r>
+              <a:rPr sz="1200" b="0">
+                <a:solidFill>
+                  <a:srgbClr val="282828"/>
+                </a:solidFill>
+                <a:latin typeface="Arial"/>
+              </a:rPr>
+              <a:t>•  30 Lenses versus off-axis parabolas</a:t>
+            </a:r>
+          </a:p>
+          <a:p>
+            <a:pPr>
+              <a:spcAft>
+                <a:spcPts val="600"/>
+              </a:spcAft>
+            </a:pPr>
+            <a:r>
+              <a:rPr sz="1200" b="0">
+                <a:solidFill>
+                  <a:srgbClr val="282828"/>
+                </a:solidFill>
+                <a:latin typeface="Arial"/>
+              </a:rPr>
+              <a:t>•  31 The reflective front end and its performance</a:t>
+            </a:r>
+          </a:p>
+          <a:p>
+            <a:pPr>
+              <a:spcAft>
+                <a:spcPts val="600"/>
+              </a:spcAft>
+            </a:pPr>
+            <a:r>
+              <a:rPr sz="1200" b="0">
+                <a:solidFill>
+                  <a:srgbClr val="282828"/>
+                </a:solidFill>
+                <a:latin typeface="Arial"/>
+              </a:rPr>
+              <a:t>•  33 Comparison and recommendation</a:t>
+            </a:r>
+          </a:p>
+          <a:p>
+            <a:pPr>
+              <a:spcAft>
+                <a:spcPts val="600"/>
+              </a:spcAft>
+            </a:pPr>
+            <a:r>
+              <a:rPr sz="1200" b="0">
+                <a:solidFill>
+                  <a:srgbClr val="282828"/>
+                </a:solidFill>
+                <a:latin typeface="Arial"/>
+              </a:rPr>
+              <a:t>•  36 Complex amplitude</a:t>
+            </a:r>
+          </a:p>
+          <a:p>
+            <a:pPr>
+              <a:spcAft>
+                <a:spcPts val="600"/>
+              </a:spcAft>
+            </a:pPr>
+            <a:r>
+              <a:rPr sz="1200" b="0">
+                <a:solidFill>
+                  <a:srgbClr val="282828"/>
+                </a:solidFill>
+                <a:latin typeface="Arial"/>
+              </a:rPr>
+              <a:t>•  37 Summary and future work</a:t>
+            </a:r>
+          </a:p>
+          <a:p>
+            <a:pPr>
+              <a:spcAft>
+                <a:spcPts val="600"/>
+              </a:spcAft>
+            </a:pPr>
+            <a:r>
+              <a:rPr sz="1200" b="0">
+                <a:solidFill>
+                  <a:srgbClr val="282828"/>
+                </a:solidFill>
+                <a:latin typeface="Arial"/>
+              </a:rPr>
+              <a:t>•  42 Run it yourself</a:t>
+            </a:r>
+          </a:p>
+          <a:p>
+            <a:pPr>
+              <a:spcAft>
+                <a:spcPts val="600"/>
+              </a:spcAft>
+            </a:pPr>
+            <a:r>
+              <a:rPr sz="1200" b="0">
+                <a:solidFill>
+                  <a:srgbClr val="282828"/>
+                </a:solidFill>
+                <a:latin typeface="Arial"/>
+              </a:rPr>
+              <a:t>•  43 Backup</a:t>
+            </a:r>
+          </a:p>
+        </p:txBody>
+      </p:sp>
+    </p:spTree>
+  </p:cSld>
+  <p:clrMapOvr>
+    <a:masterClrMapping/>
+  </p:clrMapOvr>
+</p:sld>
+</file>
+
+<file path=ppt/slides/slide20.xml><?xml version="1.0" encoding="utf-8"?>
 <p:sld xmlns:a="http://schemas.openxmlformats.org/drawingml/2006/main" xmlns:p="http://schemas.openxmlformats.org/presentationml/2006/main" xmlns:r="http://schemas.openxmlformats.org/officeDocument/2006/relationships">
   <p:cSld>
     <p:spTree>
@@ -6994,7 +8732,7 @@
 </p:sld>
 </file>
 
-<file path=ppt/slides/slide2.xml><?xml version="1.0" encoding="utf-8"?>
+<file path=ppt/slides/slide21.xml><?xml version="1.0" encoding="utf-8"?>
 <p:sld xmlns:a="http://schemas.openxmlformats.org/drawingml/2006/main" xmlns:p="http://schemas.openxmlformats.org/presentationml/2006/main" xmlns:r="http://schemas.openxmlformats.org/officeDocument/2006/relationships">
   <p:cSld>
     <p:spTree>
@@ -7038,7 +8776,7 @@
                 </a:solidFill>
                 <a:latin typeface="Arial"/>
               </a:rPr>
-              <a:t>Contents</a:t>
+              <a:t>Point-diffraction sensor: a stepped pinhole with a shutter frame</a:t>
             </a:r>
           </a:p>
           <a:p>
@@ -7054,7 +8792,7 @@
                 </a:solidFill>
                 <a:latin typeface="Arial"/>
               </a:rPr>
-              <a:t>Three jobs, one bench, four ways of sensing</a:t>
+              <a:t>The best common-path form: a 5.3 µm pinhole with an attenuated surround at the focus, five phase steps of the substrate, plus one pinhole-only frame per state that keeps the calibration honest far from null</a:t>
             </a:r>
           </a:p>
         </p:txBody>
@@ -7137,409 +8875,6 @@
                 </a:solidFill>
                 <a:latin typeface="Arial"/>
               </a:rPr>
-              <a:t>•  3 Introduction: the three jobs and how they are scored</a:t>
-            </a:r>
-          </a:p>
-          <a:p>
-            <a:pPr>
-              <a:spcAft>
-                <a:spcPts val="600"/>
-              </a:spcAft>
-            </a:pPr>
-            <a:r>
-              <a:rPr sz="1200" b="0">
-                <a:solidFill>
-                  <a:srgbClr val="282828"/>
-                </a:solidFill>
-                <a:latin typeface="Arial"/>
-              </a:rPr>
-              <a:t>•  4 The bench layout</a:t>
-            </a:r>
-          </a:p>
-          <a:p>
-            <a:pPr>
-              <a:spcAft>
-                <a:spcPts val="600"/>
-              </a:spcAft>
-            </a:pPr>
-            <a:r>
-              <a:rPr sz="1200" b="0">
-                <a:solidFill>
-                  <a:srgbClr val="282828"/>
-                </a:solidFill>
-                <a:latin typeface="Arial"/>
-              </a:rPr>
-              <a:t>•  6 Parts</a:t>
-            </a:r>
-          </a:p>
-          <a:p>
-            <a:pPr>
-              <a:spcAft>
-                <a:spcPts val="600"/>
-              </a:spcAft>
-            </a:pPr>
-            <a:r>
-              <a:rPr sz="1200" b="0">
-                <a:solidFill>
-                  <a:srgbClr val="282828"/>
-                </a:solidFill>
-                <a:latin typeface="Arial"/>
-              </a:rPr>
-              <a:t>•  9 Twyman-Green interferometer</a:t>
-            </a:r>
-          </a:p>
-          <a:p>
-            <a:pPr>
-              <a:spcAft>
-                <a:spcPts val="600"/>
-              </a:spcAft>
-            </a:pPr>
-            <a:r>
-              <a:rPr sz="1200" b="0">
-                <a:solidFill>
-                  <a:srgbClr val="282828"/>
-                </a:solidFill>
-                <a:latin typeface="Arial"/>
-              </a:rPr>
-              <a:t>•  15 Zernike sensor</a:t>
-            </a:r>
-          </a:p>
-          <a:p>
-            <a:pPr>
-              <a:spcAft>
-                <a:spcPts val="600"/>
-              </a:spcAft>
-            </a:pPr>
-            <a:r>
-              <a:rPr sz="1200" b="0">
-                <a:solidFill>
-                  <a:srgbClr val="282828"/>
-                </a:solidFill>
-                <a:latin typeface="Arial"/>
-              </a:rPr>
-              <a:t>•  17 Vector Zernike sensor</a:t>
-            </a:r>
-          </a:p>
-          <a:p>
-            <a:pPr>
-              <a:spcAft>
-                <a:spcPts val="600"/>
-              </a:spcAft>
-            </a:pPr>
-            <a:r>
-              <a:rPr sz="1200" b="0">
-                <a:solidFill>
-                  <a:srgbClr val="282828"/>
-                </a:solidFill>
-                <a:latin typeface="Arial"/>
-              </a:rPr>
-              <a:t>•  20 Point-diffraction sensor</a:t>
-            </a:r>
-          </a:p>
-          <a:p>
-            <a:pPr>
-              <a:spcAft>
-                <a:spcPts val="600"/>
-              </a:spcAft>
-            </a:pPr>
-            <a:r>
-              <a:rPr sz="1200" b="0">
-                <a:solidFill>
-                  <a:srgbClr val="282828"/>
-                </a:solidFill>
-                <a:latin typeface="Arial"/>
-              </a:rPr>
-              <a:t>•  23 Performance: rows, capture, photons, servo</a:t>
-            </a:r>
-          </a:p>
-        </p:txBody>
-      </p:sp>
-      <p:sp>
-        <p:nvSpPr>
-          <p:cNvPr id="5" name="TextBox 4"/>
-          <p:cNvSpPr txBox="1"/>
-          <p:nvPr/>
-        </p:nvSpPr>
-        <p:spPr>
-          <a:xfrm>
-            <a:off x="6400800" y="1298448"/>
-            <a:ext cx="5394960" cy="274320"/>
-          </a:xfrm>
-          <a:prstGeom prst="rect">
-            <a:avLst/>
-          </a:prstGeom>
-          <a:noFill/>
-        </p:spPr>
-        <p:txBody>
-          <a:bodyPr wrap="square">
-            <a:spAutoFit/>
-          </a:bodyPr>
-          <a:lstStyle/>
-          <a:p>
-            <a:pPr>
-              <a:spcAft>
-                <a:spcPts val="600"/>
-              </a:spcAft>
-            </a:pPr>
-            <a:r>
-              <a:rPr sz="1200" b="0">
-                <a:solidFill>
-                  <a:srgbClr val="282828"/>
-                </a:solidFill>
-                <a:latin typeface="Arial"/>
-              </a:rPr>
-              <a:t>•  29 Lenses versus off-axis parabolas</a:t>
-            </a:r>
-          </a:p>
-          <a:p>
-            <a:pPr>
-              <a:spcAft>
-                <a:spcPts val="600"/>
-              </a:spcAft>
-            </a:pPr>
-            <a:r>
-              <a:rPr sz="1200" b="0">
-                <a:solidFill>
-                  <a:srgbClr val="282828"/>
-                </a:solidFill>
-                <a:latin typeface="Arial"/>
-              </a:rPr>
-              <a:t>•  30 The reflective front end and its performance</a:t>
-            </a:r>
-          </a:p>
-          <a:p>
-            <a:pPr>
-              <a:spcAft>
-                <a:spcPts val="600"/>
-              </a:spcAft>
-            </a:pPr>
-            <a:r>
-              <a:rPr sz="1200" b="0">
-                <a:solidFill>
-                  <a:srgbClr val="282828"/>
-                </a:solidFill>
-                <a:latin typeface="Arial"/>
-              </a:rPr>
-              <a:t>•  32 Comparison and recommendation</a:t>
-            </a:r>
-          </a:p>
-          <a:p>
-            <a:pPr>
-              <a:spcAft>
-                <a:spcPts val="600"/>
-              </a:spcAft>
-            </a:pPr>
-            <a:r>
-              <a:rPr sz="1200" b="0">
-                <a:solidFill>
-                  <a:srgbClr val="282828"/>
-                </a:solidFill>
-                <a:latin typeface="Arial"/>
-              </a:rPr>
-              <a:t>•  35 Complex amplitude</a:t>
-            </a:r>
-          </a:p>
-          <a:p>
-            <a:pPr>
-              <a:spcAft>
-                <a:spcPts val="600"/>
-              </a:spcAft>
-            </a:pPr>
-            <a:r>
-              <a:rPr sz="1200" b="0">
-                <a:solidFill>
-                  <a:srgbClr val="282828"/>
-                </a:solidFill>
-                <a:latin typeface="Arial"/>
-              </a:rPr>
-              <a:t>•  36 Summary and future work</a:t>
-            </a:r>
-          </a:p>
-          <a:p>
-            <a:pPr>
-              <a:spcAft>
-                <a:spcPts val="600"/>
-              </a:spcAft>
-            </a:pPr>
-            <a:r>
-              <a:rPr sz="1200" b="0">
-                <a:solidFill>
-                  <a:srgbClr val="282828"/>
-                </a:solidFill>
-                <a:latin typeface="Arial"/>
-              </a:rPr>
-              <a:t>•  41 Run it yourself</a:t>
-            </a:r>
-          </a:p>
-          <a:p>
-            <a:pPr>
-              <a:spcAft>
-                <a:spcPts val="600"/>
-              </a:spcAft>
-            </a:pPr>
-            <a:r>
-              <a:rPr sz="1200" b="0">
-                <a:solidFill>
-                  <a:srgbClr val="282828"/>
-                </a:solidFill>
-                <a:latin typeface="Arial"/>
-              </a:rPr>
-              <a:t>•  42 Backup</a:t>
-            </a:r>
-          </a:p>
-        </p:txBody>
-      </p:sp>
-    </p:spTree>
-  </p:cSld>
-  <p:clrMapOvr>
-    <a:masterClrMapping/>
-  </p:clrMapOvr>
-</p:sld>
-</file>
-
-<file path=ppt/slides/slide20.xml><?xml version="1.0" encoding="utf-8"?>
-<p:sld xmlns:a="http://schemas.openxmlformats.org/drawingml/2006/main" xmlns:p="http://schemas.openxmlformats.org/presentationml/2006/main" xmlns:r="http://schemas.openxmlformats.org/officeDocument/2006/relationships">
-  <p:cSld>
-    <p:spTree>
-      <p:nvGrpSpPr>
-        <p:cNvPr id="1" name=""/>
-        <p:cNvGrpSpPr/>
-        <p:nvPr/>
-      </p:nvGrpSpPr>
-      <p:grpSpPr/>
-      <p:sp>
-        <p:nvSpPr>
-          <p:cNvPr id="2" name="TextBox 1"/>
-          <p:cNvSpPr txBox="1"/>
-          <p:nvPr/>
-        </p:nvSpPr>
-        <p:spPr>
-          <a:xfrm>
-            <a:off x="411480" y="201168"/>
-            <a:ext cx="11368735" cy="914400"/>
-          </a:xfrm>
-          <a:prstGeom prst="rect">
-            <a:avLst/>
-          </a:prstGeom>
-          <a:noFill/>
-        </p:spPr>
-        <p:txBody>
-          <a:bodyPr wrap="square">
-            <a:spAutoFit/>
-          </a:bodyPr>
-          <a:lstStyle/>
-          <a:p>
-            <a:pPr>
-              <a:spcAft>
-                <a:spcPts val="400"/>
-              </a:spcAft>
-            </a:pPr>
-            <a:r>
-              <a:rPr sz="2400" b="1">
-                <a:solidFill>
-                  <a:srgbClr val="1F4E79"/>
-                </a:solidFill>
-                <a:latin typeface="Arial"/>
-              </a:rPr>
-              <a:t>Point-diffraction sensor: a stepped pinhole with a shutter frame</a:t>
-            </a:r>
-          </a:p>
-          <a:p>
-            <a:pPr>
-              <a:spcAft>
-                <a:spcPts val="0"/>
-              </a:spcAft>
-            </a:pPr>
-            <a:r>
-              <a:rPr sz="1250" b="0">
-                <a:solidFill>
-                  <a:srgbClr val="6E6E6E"/>
-                </a:solidFill>
-                <a:latin typeface="Arial"/>
-              </a:rPr>
-              <a:t>The best common-path form: a 5.3 µm pinhole with an attenuated surround at the focus, five phase steps of the substrate, plus one pinhole-only frame per state that keeps the calibration honest far from null</a:t>
-            </a:r>
-          </a:p>
-        </p:txBody>
-      </p:sp>
-      <p:sp>
-        <p:nvSpPr>
-          <p:cNvPr id="3" name="Rectangle 2"/>
-          <p:cNvSpPr/>
-          <p:nvPr/>
-        </p:nvSpPr>
-        <p:spPr>
-          <a:xfrm>
-            <a:off x="411480" y="1133856"/>
-            <a:ext cx="11368735" cy="20320"/>
-          </a:xfrm>
-          <a:prstGeom prst="rect">
-            <a:avLst/>
-          </a:prstGeom>
-          <a:solidFill>
-            <a:srgbClr val="B8C6D4"/>
-          </a:solidFill>
-          <a:ln>
-            <a:noFill/>
-          </a:ln>
-          <a:effectLst/>
-        </p:spPr>
-        <p:style>
-          <a:lnRef idx="1">
-            <a:schemeClr val="accent1"/>
-          </a:lnRef>
-          <a:fillRef idx="3">
-            <a:schemeClr val="accent1"/>
-          </a:fillRef>
-          <a:effectRef idx="2">
-            <a:schemeClr val="accent1"/>
-          </a:effectRef>
-          <a:fontRef idx="minor">
-            <a:schemeClr val="lt1"/>
-          </a:fontRef>
-        </p:style>
-        <p:txBody>
-          <a:bodyPr rtlCol="0" anchor="ctr"/>
-          <a:lstStyle/>
-          <a:p>
-            <a:pPr algn="ctr"/>
-          </a:p>
-        </p:txBody>
-      </p:sp>
-      <p:sp>
-        <p:nvSpPr>
-          <p:cNvPr id="4" name="TextBox 3"/>
-          <p:cNvSpPr txBox="1"/>
-          <p:nvPr/>
-        </p:nvSpPr>
-        <p:spPr>
-          <a:xfrm>
-            <a:off x="411480" y="1298448"/>
-            <a:ext cx="5806440" cy="274320"/>
-          </a:xfrm>
-          <a:prstGeom prst="rect">
-            <a:avLst/>
-          </a:prstGeom>
-          <a:noFill/>
-        </p:spPr>
-        <p:txBody>
-          <a:bodyPr wrap="square">
-            <a:spAutoFit/>
-          </a:bodyPr>
-          <a:lstStyle/>
-          <a:p>
-            <a:pPr>
-              <a:spcAft>
-                <a:spcPts val="600"/>
-              </a:spcAft>
-            </a:pPr>
-            <a:r>
-              <a:rPr sz="1200" b="0">
-                <a:solidFill>
-                  <a:srgbClr val="282828"/>
-                </a:solidFill>
-                <a:latin typeface="Arial"/>
-              </a:rPr>
               <a:t>•  How it reads: the pinhole passes the core of the focal spot as the reference; the surround, attenuated to 0.72 in amplitude, passes the rest.  The substrate steps the surround's phase through five frames (the Schwider-Hariharan scan, insensitive to step error); a sixth frame with the surround shuttered measures the reference by itself.</a:t>
             </a:r>
           </a:p>
@@ -7896,7 +9231,7 @@
 </p:sld>
 </file>
 
-<file path=ppt/slides/slide21.xml><?xml version="1.0" encoding="utf-8"?>
+<file path=ppt/slides/slide22.xml><?xml version="1.0" encoding="utf-8"?>
 <p:sld xmlns:a="http://schemas.openxmlformats.org/drawingml/2006/main" xmlns:p="http://schemas.openxmlformats.org/presentationml/2006/main" xmlns:r="http://schemas.openxmlformats.org/officeDocument/2006/relationships">
   <p:cSld>
     <p:spTree>
@@ -8115,7 +9450,7 @@
 </p:sld>
 </file>
 
-<file path=ppt/slides/slide22.xml><?xml version="1.0" encoding="utf-8"?>
+<file path=ppt/slides/slide23.xml><?xml version="1.0" encoding="utf-8"?>
 <p:sld xmlns:a="http://schemas.openxmlformats.org/drawingml/2006/main" xmlns:p="http://schemas.openxmlformats.org/presentationml/2006/main" xmlns:r="http://schemas.openxmlformats.org/officeDocument/2006/relationships">
   <p:cSld>
     <p:spTree>
@@ -8373,7 +9708,7 @@
 </p:sld>
 </file>
 
-<file path=ppt/slides/slide23.xml><?xml version="1.0" encoding="utf-8"?>
+<file path=ppt/slides/slide24.xml><?xml version="1.0" encoding="utf-8"?>
 <p:sld xmlns:a="http://schemas.openxmlformats.org/drawingml/2006/main" xmlns:p="http://schemas.openxmlformats.org/presentationml/2006/main" xmlns:r="http://schemas.openxmlformats.org/officeDocument/2006/relationships">
   <p:cSld>
     <p:spTree>
@@ -9422,7 +10757,7 @@
 </p:sld>
 </file>
 
-<file path=ppt/slides/slide24.xml><?xml version="1.0" encoding="utf-8"?>
+<file path=ppt/slides/slide25.xml><?xml version="1.0" encoding="utf-8"?>
 <p:sld xmlns:a="http://schemas.openxmlformats.org/drawingml/2006/main" xmlns:p="http://schemas.openxmlformats.org/presentationml/2006/main" xmlns:r="http://schemas.openxmlformats.org/officeDocument/2006/relationships">
   <p:cSld>
     <p:spTree>
@@ -10089,7 +11424,7 @@
 </p:sld>
 </file>
 
-<file path=ppt/slides/slide25.xml><?xml version="1.0" encoding="utf-8"?>
+<file path=ppt/slides/slide26.xml><?xml version="1.0" encoding="utf-8"?>
 <p:sld xmlns:a="http://schemas.openxmlformats.org/drawingml/2006/main" xmlns:p="http://schemas.openxmlformats.org/presentationml/2006/main" xmlns:r="http://schemas.openxmlformats.org/officeDocument/2006/relationships">
   <p:cSld>
     <p:spTree>
@@ -10923,7 +12258,7 @@
 </p:sld>
 </file>
 
-<file path=ppt/slides/slide26.xml><?xml version="1.0" encoding="utf-8"?>
+<file path=ppt/slides/slide27.xml><?xml version="1.0" encoding="utf-8"?>
 <p:sld xmlns:a="http://schemas.openxmlformats.org/drawingml/2006/main" xmlns:p="http://schemas.openxmlformats.org/presentationml/2006/main" xmlns:r="http://schemas.openxmlformats.org/officeDocument/2006/relationships">
   <p:cSld>
     <p:spTree>
@@ -11781,7 +13116,7 @@
 </p:sld>
 </file>
 
-<file path=ppt/slides/slide27.xml><?xml version="1.0" encoding="utf-8"?>
+<file path=ppt/slides/slide28.xml><?xml version="1.0" encoding="utf-8"?>
 <p:sld xmlns:a="http://schemas.openxmlformats.org/drawingml/2006/main" xmlns:p="http://schemas.openxmlformats.org/presentationml/2006/main" xmlns:r="http://schemas.openxmlformats.org/officeDocument/2006/relationships">
   <p:cSld>
     <p:spTree>
@@ -13373,7 +14708,7 @@
 </p:sld>
 </file>
 
-<file path=ppt/slides/slide28.xml><?xml version="1.0" encoding="utf-8"?>
+<file path=ppt/slides/slide29.xml><?xml version="1.0" encoding="utf-8"?>
 <p:sld xmlns:a="http://schemas.openxmlformats.org/drawingml/2006/main" xmlns:p="http://schemas.openxmlformats.org/presentationml/2006/main" xmlns:r="http://schemas.openxmlformats.org/officeDocument/2006/relationships">
   <p:cSld>
     <p:spTree>
@@ -14239,7 +15574,7 @@
 </p:sld>
 </file>
 
-<file path=ppt/slides/slide29.xml><?xml version="1.0" encoding="utf-8"?>
+<file path=ppt/slides/slide3.xml><?xml version="1.0" encoding="utf-8"?>
 <p:sld xmlns:a="http://schemas.openxmlformats.org/drawingml/2006/main" xmlns:p="http://schemas.openxmlformats.org/presentationml/2006/main" xmlns:r="http://schemas.openxmlformats.org/officeDocument/2006/relationships">
   <p:cSld>
     <p:spTree>
@@ -14283,7 +15618,7 @@
                 </a:solidFill>
                 <a:latin typeface="Arial"/>
               </a:rPr>
-              <a:t>Lenses or off-axis mirrors: the record</a:t>
+              <a:t>The three jobs, and how each is scored</a:t>
             </a:r>
           </a:p>
           <a:p>
@@ -14299,7 +15634,7 @@
                 </a:solidFill>
                 <a:latin typeface="Arial"/>
               </a:rPr>
-              <a:t>On the record's 7° mirror rig the interferometer lost its servo and its capture and the focus-critical sensors broke; the cause was read as fold coma.  It was not (next slide): the collimator was fed 25 mm inside its focus</a:t>
+              <a:t>Measure the mirror's surface to picometers; capture its post-launch shape, 100-200 nm of wavefront, into the servo's reach; hold it there in a servo</a:t>
             </a:r>
           </a:p>
         </p:txBody>
@@ -14348,17 +15683,104 @@
           </a:p>
         </p:txBody>
       </p:sp>
+      <p:sp>
+        <p:nvSpPr>
+          <p:cNvPr id="4" name="TextBox 3"/>
+          <p:cNvSpPr txBox="1"/>
+          <p:nvPr/>
+        </p:nvSpPr>
+        <p:spPr>
+          <a:xfrm>
+            <a:off x="411480" y="1298448"/>
+            <a:ext cx="5806440" cy="274320"/>
+          </a:xfrm>
+          <a:prstGeom prst="rect">
+            <a:avLst/>
+          </a:prstGeom>
+          <a:noFill/>
+        </p:spPr>
+        <p:txBody>
+          <a:bodyPr wrap="square">
+            <a:spAutoFit/>
+          </a:bodyPr>
+          <a:lstStyle/>
+          <a:p>
+            <a:pPr>
+              <a:spcAft>
+                <a:spcPts val="600"/>
+              </a:spcAft>
+            </a:pPr>
+            <a:r>
+              <a:rPr sz="1200" b="0">
+                <a:solidFill>
+                  <a:srgbClr val="282828"/>
+                </a:solidFill>
+                <a:latin typeface="Arial"/>
+              </a:rPr>
+              <a:t>•  The DM: 96×96 actuators on a 1 mm pitch, 96 mm across.  On orbit its surface must stay constant to well under 10 pm, measured often and held by a closed loop.  Every test runs on a random 30 nm rms working surface, not a flat: the gauge never operates at null.</a:t>
+            </a:r>
+          </a:p>
+          <a:p>
+            <a:pPr>
+              <a:spcAft>
+                <a:spcPts val="600"/>
+              </a:spcAft>
+            </a:pPr>
+            <a:r>
+              <a:rPr sz="1200" b="0">
+                <a:solidFill>
+                  <a:srgbClr val="282828"/>
+                </a:solidFill>
+                <a:latin typeface="Arial"/>
+              </a:rPr>
+              <a:t>•  Job 1, measure: read a change of 10 nm on one actuator, of 1 nm on 47 actuators, and a dense random 10 nm pattern, on the 30 nm surface with the response matrix measured on it; and keep that accuracy as the surface moves away from the calibration (capture range).</a:t>
+            </a:r>
+          </a:p>
+          <a:p>
+            <a:pPr>
+              <a:spcAft>
+                <a:spcPts val="600"/>
+              </a:spcAft>
+            </a:pPr>
+            <a:r>
+              <a:rPr sz="1200" b="0">
+                <a:solidFill>
+                  <a:srgbClr val="282828"/>
+                </a:solidFill>
+                <a:latin typeface="Arial"/>
+              </a:rPr>
+              <a:t>•  Job 2, capture: bring the largest possible starting surface, 100-200 nm of wavefront, down to the servo's floor; every phase reading wraps at ±158 nm of surface (±π at 632.8 nm, double pass), so this is a wrapping problem before it is a noise problem.</a:t>
+            </a:r>
+          </a:p>
+          <a:p>
+            <a:pPr>
+              <a:spcAft>
+                <a:spcPts val="600"/>
+              </a:spcAft>
+            </a:pPr>
+            <a:r>
+              <a:rPr sz="1200" b="0">
+                <a:solidFill>
+                  <a:srgbClr val="282828"/>
+                </a:solidFill>
+                <a:latin typeface="Arial"/>
+              </a:rPr>
+              <a:t>•  Job 3, hold: the servo at picometers on the 30 nm rms working surface, its set point: the light per cycle that holds changes about it to 3 pm rms under a 2 pm per-cycle random walk, and whether the reading leaves a fixed error.</a:t>
+            </a:r>
+          </a:p>
+        </p:txBody>
+      </p:sp>
       <p:graphicFrame>
         <p:nvGraphicFramePr>
-          <p:cNvPr id="4" name="Table 3"/>
+          <p:cNvPr id="5" name="Table 4"/>
           <p:cNvGraphicFramePr>
             <a:graphicFrameLocks noGrp="1"/>
           </p:cNvGraphicFramePr>
           <p:nvPr/>
         </p:nvGraphicFramePr>
         <p:xfrm>
-          <a:off x="411480" y="1298448"/>
-          <a:ext cx="5806439" cy="3646170"/>
+          <a:off x="6400800" y="1298448"/>
+          <a:ext cx="5394959" cy="2788920"/>
         </p:xfrm>
         <a:graphic>
           <a:graphicData uri="http://schemas.openxmlformats.org/drawingml/2006/table">
@@ -14367,16 +15789,25 @@
                 <a:tableStyleId>{5C22544A-7EE6-4342-B048-85BDC9FD1C3A}</a:tableStyleId>
               </a:tblPr>
               <a:tblGrid>
-                <a:gridCol w="2416966"/>
-                <a:gridCol w="1163320"/>
-                <a:gridCol w="2226153"/>
+                <a:gridCol w="844109"/>
+                <a:gridCol w="4550850"/>
               </a:tblGrid>
-              <a:tr h="468630">
-                <a:tc>
-                  <a:txBody>
-                    <a:bodyPr wrap="square"/>
-                    <a:lstStyle/>
-                    <a:p/>
+              <a:tr h="262890">
+                <a:tc>
+                  <a:txBody>
+                    <a:bodyPr wrap="square"/>
+                    <a:lstStyle/>
+                    <a:p>
+                      <a:r>
+                        <a:rPr sz="1000" b="1">
+                          <a:solidFill>
+                            <a:srgbClr val="FFFFFF"/>
+                          </a:solidFill>
+                          <a:latin typeface="Arial"/>
+                        </a:rPr>
+                        <a:t>score</a:t>
+                      </a:r>
+                    </a:p>
                   </a:txBody>
                   <a:tcPr marL="54864" marR="54864" marT="18288" marB="18288">
                     <a:solidFill>
@@ -14390,13 +15821,13 @@
                     <a:lstStyle/>
                     <a:p>
                       <a:r>
-                        <a:rPr sz="1100" b="1">
+                        <a:rPr sz="1000" b="1">
                           <a:solidFill>
                             <a:srgbClr val="FFFFFF"/>
                           </a:solidFill>
                           <a:latin typeface="Arial"/>
                         </a:rPr>
-                        <a:t>lens rig</a:t>
+                        <a:t>meaning</a:t>
                       </a:r>
                     </a:p>
                   </a:txBody>
@@ -14406,87 +15837,43 @@
                     </a:solidFill>
                   </a:tcPr>
                 </a:tc>
-                <a:tc>
-                  <a:txBody>
-                    <a:bodyPr wrap="square"/>
-                    <a:lstStyle/>
-                    <a:p>
-                      <a:r>
-                        <a:rPr sz="1100" b="1">
-                          <a:solidFill>
-                            <a:srgbClr val="FFFFFF"/>
-                          </a:solidFill>
-                          <a:latin typeface="Arial"/>
-                        </a:rPr>
-                        <a:t>off-axis mirror rig (bare aluminum)</a:t>
-                      </a:r>
-                    </a:p>
-                  </a:txBody>
-                  <a:tcPr marL="54864" marR="54864" marT="18288" marB="18288">
-                    <a:solidFill>
-                      <a:srgbClr val="1F4E79"/>
-                    </a:solidFill>
-                  </a:tcPr>
-                </a:tc>
               </a:tr>
-              <a:tr h="280035">
-                <a:tc>
-                  <a:txBody>
-                    <a:bodyPr wrap="square"/>
-                    <a:lstStyle/>
-                    <a:p>
-                      <a:r>
-                        <a:rPr sz="1100" b="0">
-                          <a:solidFill>
-                            <a:srgbClr val="282828"/>
-                          </a:solidFill>
-                          <a:latin typeface="Arial"/>
-                        </a:rPr>
-                        <a:t>interferometer, 1 nm on 52 sites</a:t>
-                      </a:r>
-                    </a:p>
-                  </a:txBody>
-                  <a:tcPr marL="54864" marR="54864" marT="18288" marB="18288">
-                    <a:solidFill>
-                      <a:srgbClr val="FFFFFF"/>
-                    </a:solidFill>
-                  </a:tcPr>
-                </a:tc>
-                <a:tc>
-                  <a:txBody>
-                    <a:bodyPr wrap="square"/>
-                    <a:lstStyle/>
-                    <a:p>
-                      <a:r>
-                        <a:rPr sz="1100" b="0">
-                          <a:solidFill>
-                            <a:srgbClr val="282828"/>
-                          </a:solidFill>
-                          <a:latin typeface="Arial"/>
-                        </a:rPr>
-                        <a:t>0.990 / 1 pm</a:t>
-                      </a:r>
-                    </a:p>
-                  </a:txBody>
-                  <a:tcPr marL="54864" marR="54864" marT="18288" marB="18288">
-                    <a:solidFill>
-                      <a:srgbClr val="FFFFFF"/>
-                    </a:solidFill>
-                  </a:tcPr>
-                </a:tc>
-                <a:tc>
-                  <a:txBody>
-                    <a:bodyPr wrap="square"/>
-                    <a:lstStyle/>
-                    <a:p>
-                      <a:r>
-                        <a:rPr sz="1100" b="0">
-                          <a:solidFill>
-                            <a:srgbClr val="282828"/>
-                          </a:solidFill>
-                          <a:latin typeface="Arial"/>
-                        </a:rPr>
-                        <a:t>0.958 / 1 pm</a:t>
+              <a:tr h="434340">
+                <a:tc>
+                  <a:txBody>
+                    <a:bodyPr wrap="square"/>
+                    <a:lstStyle/>
+                    <a:p>
+                      <a:r>
+                        <a:rPr sz="1000" b="0">
+                          <a:solidFill>
+                            <a:srgbClr val="282828"/>
+                          </a:solidFill>
+                          <a:latin typeface="Arial"/>
+                        </a:rPr>
+                        <a:t>gain</a:t>
+                      </a:r>
+                    </a:p>
+                  </a:txBody>
+                  <a:tcPr marL="54864" marR="54864" marT="18288" marB="18288">
+                    <a:solidFill>
+                      <a:srgbClr val="FFFFFF"/>
+                    </a:solidFill>
+                  </a:tcPr>
+                </a:tc>
+                <a:tc>
+                  <a:txBody>
+                    <a:bodyPr wrap="square"/>
+                    <a:lstStyle/>
+                    <a:p>
+                      <a:r>
+                        <a:rPr sz="1000" b="0">
+                          <a:solidFill>
+                            <a:srgbClr val="282828"/>
+                          </a:solidFill>
+                          <a:latin typeface="Arial"/>
+                        </a:rPr>
+                        <a:t>recovered change ÷ true change; 1.0 is perfect; quoted after calibration</a:t>
                       </a:r>
                     </a:p>
                   </a:txBody>
@@ -14497,20 +15884,20 @@
                   </a:tcPr>
                 </a:tc>
               </a:tr>
-              <a:tr h="280035">
-                <a:tc>
-                  <a:txBody>
-                    <a:bodyPr wrap="square"/>
-                    <a:lstStyle/>
-                    <a:p>
-                      <a:r>
-                        <a:rPr sz="1100" b="0">
-                          <a:solidFill>
-                            <a:srgbClr val="282828"/>
-                          </a:solidFill>
-                          <a:latin typeface="Arial"/>
-                        </a:rPr>
-                        <a:t>interferometer, dense 10 nm</a:t>
+              <a:tr h="262890">
+                <a:tc>
+                  <a:txBody>
+                    <a:bodyPr wrap="square"/>
+                    <a:lstStyle/>
+                    <a:p>
+                      <a:r>
+                        <a:rPr sz="1000" b="0">
+                          <a:solidFill>
+                            <a:srgbClr val="282828"/>
+                          </a:solidFill>
+                          <a:latin typeface="Arial"/>
+                        </a:rPr>
+                        <a:t>floor</a:t>
                       </a:r>
                     </a:p>
                   </a:txBody>
@@ -14526,13 +15913,13 @@
                     <a:lstStyle/>
                     <a:p>
                       <a:r>
-                        <a:rPr sz="1100" b="0">
-                          <a:solidFill>
-                            <a:srgbClr val="282828"/>
-                          </a:solidFill>
-                          <a:latin typeface="Arial"/>
-                        </a:rPr>
-                        <a:t>0.990 / 168 pm</a:t>
+                        <a:rPr sz="1000" b="0">
+                          <a:solidFill>
+                            <a:srgbClr val="282828"/>
+                          </a:solidFill>
+                          <a:latin typeface="Arial"/>
+                        </a:rPr>
+                        <a:t>rms of the actuators that were not changed, in picometers</a:t>
                       </a:r>
                     </a:p>
                   </a:txBody>
@@ -14542,19 +15929,67 @@
                     </a:solidFill>
                   </a:tcPr>
                 </a:tc>
-                <a:tc>
-                  <a:txBody>
-                    <a:bodyPr wrap="square"/>
-                    <a:lstStyle/>
-                    <a:p>
-                      <a:r>
-                        <a:rPr sz="1100" b="0">
-                          <a:solidFill>
-                            <a:srgbClr val="282828"/>
-                          </a:solidFill>
-                          <a:latin typeface="Arial"/>
-                        </a:rPr>
-                        <a:t>0.950 / 2.1 nm</a:t>
+              </a:tr>
+              <a:tr h="262890">
+                <a:tc>
+                  <a:txBody>
+                    <a:bodyPr wrap="square"/>
+                    <a:lstStyle/>
+                    <a:p>
+                      <a:r>
+                        <a:rPr sz="1000" b="0">
+                          <a:solidFill>
+                            <a:srgbClr val="282828"/>
+                          </a:solidFill>
+                          <a:latin typeface="Arial"/>
+                        </a:rPr>
+                        <a:t>SNR</a:t>
+                      </a:r>
+                    </a:p>
+                  </a:txBody>
+                  <a:tcPr marL="54864" marR="54864" marT="18288" marB="18288">
+                    <a:solidFill>
+                      <a:srgbClr val="FFFFFF"/>
+                    </a:solidFill>
+                  </a:tcPr>
+                </a:tc>
+                <a:tc>
+                  <a:txBody>
+                    <a:bodyPr wrap="square"/>
+                    <a:lstStyle/>
+                    <a:p>
+                      <a:r>
+                        <a:rPr sz="1000" b="0">
+                          <a:solidFill>
+                            <a:srgbClr val="282828"/>
+                          </a:solidFill>
+                          <a:latin typeface="Arial"/>
+                        </a:rPr>
+                        <a:t>recovered change ÷ floor; above 5 counts as detected</a:t>
+                      </a:r>
+                    </a:p>
+                  </a:txBody>
+                  <a:tcPr marL="54864" marR="54864" marT="18288" marB="18288">
+                    <a:solidFill>
+                      <a:srgbClr val="FFFFFF"/>
+                    </a:solidFill>
+                  </a:tcPr>
+                </a:tc>
+              </a:tr>
+              <a:tr h="434340">
+                <a:tc>
+                  <a:txBody>
+                    <a:bodyPr wrap="square"/>
+                    <a:lstStyle/>
+                    <a:p>
+                      <a:r>
+                        <a:rPr sz="1000" b="0">
+                          <a:solidFill>
+                            <a:srgbClr val="282828"/>
+                          </a:solidFill>
+                          <a:latin typeface="Arial"/>
+                        </a:rPr>
+                        <a:t>photons per measurement</a:t>
                       </a:r>
                     </a:p>
                   </a:txBody>
@@ -14564,65 +15999,65 @@
                     </a:solidFill>
                   </a:tcPr>
                 </a:tc>
+                <a:tc>
+                  <a:txBody>
+                    <a:bodyPr wrap="square"/>
+                    <a:lstStyle/>
+                    <a:p>
+                      <a:r>
+                        <a:rPr sz="1000" b="0">
+                          <a:solidFill>
+                            <a:srgbClr val="282828"/>
+                          </a:solidFill>
+                          <a:latin typeface="Arial"/>
+                        </a:rPr>
+                        <a:t>all frames of one measurement summed; 1e14 photons at 633 nm = 31 µJ = 0.13 s of a 1 mW laser at 25% throughput</a:t>
+                      </a:r>
+                    </a:p>
+                  </a:txBody>
+                  <a:tcPr marL="54864" marR="54864" marT="18288" marB="18288">
+                    <a:solidFill>
+                      <a:srgbClr val="ECF1F6"/>
+                    </a:solidFill>
+                  </a:tcPr>
+                </a:tc>
               </a:tr>
-              <a:tr h="280035">
-                <a:tc>
-                  <a:txBody>
-                    <a:bodyPr wrap="square"/>
-                    <a:lstStyle/>
-                    <a:p>
-                      <a:r>
-                        <a:rPr sz="1100" b="0">
-                          <a:solidFill>
-                            <a:srgbClr val="282828"/>
-                          </a:solidFill>
-                          <a:latin typeface="Arial"/>
-                        </a:rPr>
-                        <a:t>mode-to-mode cross-talk</a:t>
-                      </a:r>
-                    </a:p>
-                  </a:txBody>
-                  <a:tcPr marL="54864" marR="54864" marT="18288" marB="18288">
-                    <a:solidFill>
-                      <a:srgbClr val="FFFFFF"/>
-                    </a:solidFill>
-                  </a:tcPr>
-                </a:tc>
-                <a:tc>
-                  <a:txBody>
-                    <a:bodyPr wrap="square"/>
-                    <a:lstStyle/>
-                    <a:p>
-                      <a:r>
-                        <a:rPr sz="1100" b="0">
-                          <a:solidFill>
-                            <a:srgbClr val="282828"/>
-                          </a:solidFill>
-                          <a:latin typeface="Arial"/>
-                        </a:rPr>
-                        <a:t>below 0.06</a:t>
-                      </a:r>
-                    </a:p>
-                  </a:txBody>
-                  <a:tcPr marL="54864" marR="54864" marT="18288" marB="18288">
-                    <a:solidFill>
-                      <a:srgbClr val="FFFFFF"/>
-                    </a:solidFill>
-                  </a:tcPr>
-                </a:tc>
-                <a:tc>
-                  <a:txBody>
-                    <a:bodyPr wrap="square"/>
-                    <a:lstStyle/>
-                    <a:p>
-                      <a:r>
-                        <a:rPr sz="1100" b="0">
-                          <a:solidFill>
-                            <a:srgbClr val="282828"/>
-                          </a:solidFill>
-                          <a:latin typeface="Arial"/>
-                        </a:rPr>
-                        <a:t>about 0.18</a:t>
+              <a:tr h="434340">
+                <a:tc>
+                  <a:txBody>
+                    <a:bodyPr wrap="square"/>
+                    <a:lstStyle/>
+                    <a:p>
+                      <a:r>
+                        <a:rPr sz="1000" b="0">
+                          <a:solidFill>
+                            <a:srgbClr val="282828"/>
+                          </a:solidFill>
+                          <a:latin typeface="Arial"/>
+                        </a:rPr>
+                        <a:t>capture range to 10%</a:t>
+                      </a:r>
+                    </a:p>
+                  </a:txBody>
+                  <a:tcPr marL="54864" marR="54864" marT="18288" marB="18288">
+                    <a:solidFill>
+                      <a:srgbClr val="FFFFFF"/>
+                    </a:solidFill>
+                  </a:tcPr>
+                </a:tc>
+                <a:tc>
+                  <a:txBody>
+                    <a:bodyPr wrap="square"/>
+                    <a:lstStyle/>
+                    <a:p>
+                      <a:r>
+                        <a:rPr sz="1000" b="0">
+                          <a:solidFill>
+                            <a:srgbClr val="282828"/>
+                          </a:solidFill>
+                          <a:latin typeface="Arial"/>
+                        </a:rPr>
+                        <a:t>the largest working surface at which a 10 nm change on the 47 sites reads within 10%, the matrix left as calibrated at 30 nm</a:t>
                       </a:r>
                     </a:p>
                   </a:txBody>
@@ -14633,20 +16068,20 @@
                   </a:tcPr>
                 </a:tc>
               </a:tr>
-              <a:tr h="280035">
-                <a:tc>
-                  <a:txBody>
-                    <a:bodyPr wrap="square"/>
-                    <a:lstStyle/>
-                    <a:p>
-                      <a:r>
-                        <a:rPr sz="1100" b="0">
-                          <a:solidFill>
-                            <a:srgbClr val="282828"/>
-                          </a:solidFill>
-                          <a:latin typeface="Arial"/>
-                        </a:rPr>
-                        <a:t>servo, 3 pm under the walk</a:t>
+              <a:tr h="262890">
+                <a:tc>
+                  <a:txBody>
+                    <a:bodyPr wrap="square"/>
+                    <a:lstStyle/>
+                    <a:p>
+                      <a:r>
+                        <a:rPr sz="1000" b="0">
+                          <a:solidFill>
+                            <a:srgbClr val="282828"/>
+                          </a:solidFill>
+                          <a:latin typeface="Arial"/>
+                        </a:rPr>
+                        <a:t>capture</a:t>
                       </a:r>
                     </a:p>
                   </a:txBody>
@@ -14662,13 +16097,13 @@
                     <a:lstStyle/>
                     <a:p>
                       <a:r>
-                        <a:rPr sz="1100" b="0">
-                          <a:solidFill>
-                            <a:srgbClr val="282828"/>
-                          </a:solidFill>
-                          <a:latin typeface="Arial"/>
-                        </a:rPr>
-                        <a:t>2.0e13</a:t>
+                        <a:rPr sz="1000" b="0">
+                          <a:solidFill>
+                            <a:srgbClr val="282828"/>
+                          </a:solidFill>
+                          <a:latin typeface="Arial"/>
+                        </a:rPr>
+                        <a:t>the largest starting surface the servo brings to 3 pm</a:t>
                       </a:r>
                     </a:p>
                   </a:txBody>
@@ -14678,433 +16113,49 @@
                     </a:solidFill>
                   </a:tcPr>
                 </a:tc>
-                <a:tc>
-                  <a:txBody>
-                    <a:bodyPr wrap="square"/>
-                    <a:lstStyle/>
-                    <a:p>
-                      <a:r>
-                        <a:rPr sz="1100" b="0">
-                          <a:solidFill>
-                            <a:srgbClr val="282828"/>
-                          </a:solidFill>
-                          <a:latin typeface="Arial"/>
-                        </a:rPr>
-                        <a:t>never</a:t>
-                      </a:r>
-                    </a:p>
-                  </a:txBody>
-                  <a:tcPr marL="54864" marR="54864" marT="18288" marB="18288">
-                    <a:solidFill>
-                      <a:srgbClr val="ECF1F6"/>
-                    </a:solidFill>
-                  </a:tcPr>
-                </a:tc>
               </a:tr>
-              <a:tr h="280035">
-                <a:tc>
-                  <a:txBody>
-                    <a:bodyPr wrap="square"/>
-                    <a:lstStyle/>
-                    <a:p>
-                      <a:r>
-                        <a:rPr sz="1100" b="0">
-                          <a:solidFill>
-                            <a:srgbClr val="282828"/>
-                          </a:solidFill>
-                          <a:latin typeface="Arial"/>
-                        </a:rPr>
-                        <a:t>noiseless step, fixed error</a:t>
-                      </a:r>
-                    </a:p>
-                  </a:txBody>
-                  <a:tcPr marL="54864" marR="54864" marT="18288" marB="18288">
-                    <a:solidFill>
-                      <a:srgbClr val="FFFFFF"/>
-                    </a:solidFill>
-                  </a:tcPr>
-                </a:tc>
-                <a:tc>
-                  <a:txBody>
-                    <a:bodyPr wrap="square"/>
-                    <a:lstStyle/>
-                    <a:p>
-                      <a:r>
-                        <a:rPr sz="1100" b="0">
-                          <a:solidFill>
-                            <a:srgbClr val="282828"/>
-                          </a:solidFill>
-                          <a:latin typeface="Arial"/>
-                        </a:rPr>
-                        <a:t>8.6%</a:t>
-                      </a:r>
-                    </a:p>
-                  </a:txBody>
-                  <a:tcPr marL="54864" marR="54864" marT="18288" marB="18288">
-                    <a:solidFill>
-                      <a:srgbClr val="FFFFFF"/>
-                    </a:solidFill>
-                  </a:tcPr>
-                </a:tc>
-                <a:tc>
-                  <a:txBody>
-                    <a:bodyPr wrap="square"/>
-                    <a:lstStyle/>
-                    <a:p>
-                      <a:r>
-                        <a:rPr sz="1100" b="0">
-                          <a:solidFill>
-                            <a:srgbClr val="282828"/>
-                          </a:solidFill>
-                          <a:latin typeface="Arial"/>
-                        </a:rPr>
-                        <a:t>27.6%</a:t>
-                      </a:r>
-                    </a:p>
-                  </a:txBody>
-                  <a:tcPr marL="54864" marR="54864" marT="18288" marB="18288">
-                    <a:solidFill>
-                      <a:srgbClr val="FFFFFF"/>
-                    </a:solidFill>
-                  </a:tcPr>
-                </a:tc>
-              </a:tr>
-              <a:tr h="280035">
-                <a:tc>
-                  <a:txBody>
-                    <a:bodyPr wrap="square"/>
-                    <a:lstStyle/>
-                    <a:p>
-                      <a:r>
-                        <a:rPr sz="1100" b="0">
-                          <a:solidFill>
-                            <a:srgbClr val="282828"/>
-                          </a:solidFill>
-                          <a:latin typeface="Arial"/>
-                        </a:rPr>
-                        <a:t>capture from 60-300 nm</a:t>
-                      </a:r>
-                    </a:p>
-                  </a:txBody>
-                  <a:tcPr marL="54864" marR="54864" marT="18288" marB="18288">
-                    <a:solidFill>
-                      <a:srgbClr val="ECF1F6"/>
-                    </a:solidFill>
-                  </a:tcPr>
-                </a:tc>
-                <a:tc>
-                  <a:txBody>
-                    <a:bodyPr wrap="square"/>
-                    <a:lstStyle/>
-                    <a:p>
-                      <a:r>
-                        <a:rPr sz="1100" b="0">
-                          <a:solidFill>
-                            <a:srgbClr val="282828"/>
-                          </a:solidFill>
-                          <a:latin typeface="Arial"/>
-                        </a:rPr>
-                        <a:t>converges</a:t>
-                      </a:r>
-                    </a:p>
-                  </a:txBody>
-                  <a:tcPr marL="54864" marR="54864" marT="18288" marB="18288">
-                    <a:solidFill>
-                      <a:srgbClr val="ECF1F6"/>
-                    </a:solidFill>
-                  </a:tcPr>
-                </a:tc>
-                <a:tc>
-                  <a:txBody>
-                    <a:bodyPr wrap="square"/>
-                    <a:lstStyle/>
-                    <a:p>
-                      <a:r>
-                        <a:rPr sz="1100" b="0">
-                          <a:solidFill>
-                            <a:srgbClr val="282828"/>
-                          </a:solidFill>
-                          <a:latin typeface="Arial"/>
-                        </a:rPr>
-                        <a:t>stalls</a:t>
-                      </a:r>
-                    </a:p>
-                  </a:txBody>
-                  <a:tcPr marL="54864" marR="54864" marT="18288" marB="18288">
-                    <a:solidFill>
-                      <a:srgbClr val="ECF1F6"/>
-                    </a:solidFill>
-                  </a:tcPr>
-                </a:tc>
-              </a:tr>
-              <a:tr h="468630">
-                <a:tc>
-                  <a:txBody>
-                    <a:bodyPr wrap="square"/>
-                    <a:lstStyle/>
-                    <a:p>
-                      <a:r>
-                        <a:rPr sz="1100" b="0">
-                          <a:solidFill>
-                            <a:srgbClr val="282828"/>
-                          </a:solidFill>
-                          <a:latin typeface="Arial"/>
-                        </a:rPr>
-                        <a:t>alignment: 10 µrad tilt of a mirror</a:t>
-                      </a:r>
-                    </a:p>
-                  </a:txBody>
-                  <a:tcPr marL="54864" marR="54864" marT="18288" marB="18288">
-                    <a:solidFill>
-                      <a:srgbClr val="FFFFFF"/>
-                    </a:solidFill>
-                  </a:tcPr>
-                </a:tc>
-                <a:tc>
-                  <a:txBody>
-                    <a:bodyPr wrap="square"/>
-                    <a:lstStyle/>
-                    <a:p>
-                      <a:r>
-                        <a:rPr sz="1100" b="0">
-                          <a:solidFill>
-                            <a:srgbClr val="282828"/>
-                          </a:solidFill>
-                          <a:latin typeface="Arial"/>
-                        </a:rPr>
-                        <a:t>—</a:t>
-                      </a:r>
-                    </a:p>
-                  </a:txBody>
-                  <a:tcPr marL="54864" marR="54864" marT="18288" marB="18288">
-                    <a:solidFill>
-                      <a:srgbClr val="FFFFFF"/>
-                    </a:solidFill>
-                  </a:tcPr>
-                </a:tc>
-                <a:tc>
-                  <a:txBody>
-                    <a:bodyPr wrap="square"/>
-                    <a:lstStyle/>
-                    <a:p>
-                      <a:r>
-                        <a:rPr sz="1100" b="0">
-                          <a:solidFill>
-                            <a:srgbClr val="282828"/>
-                          </a:solidFill>
-                          <a:latin typeface="Arial"/>
-                        </a:rPr>
-                        <a:t>95-103 nm of null shift</a:t>
-                      </a:r>
-                    </a:p>
-                  </a:txBody>
-                  <a:tcPr marL="54864" marR="54864" marT="18288" marB="18288">
-                    <a:solidFill>
-                      <a:srgbClr val="FFFFFF"/>
-                    </a:solidFill>
-                  </a:tcPr>
-                </a:tc>
-              </a:tr>
-              <a:tr h="468630">
-                <a:tc>
-                  <a:txBody>
-                    <a:bodyPr wrap="square"/>
-                    <a:lstStyle/>
-                    <a:p>
-                      <a:r>
-                        <a:rPr sz="1100" b="0">
-                          <a:solidFill>
-                            <a:srgbClr val="282828"/>
-                          </a:solidFill>
-                          <a:latin typeface="Arial"/>
-                        </a:rPr>
-                        <a:t>Zernike stepped, 10 nm on one actuator</a:t>
-                      </a:r>
-                    </a:p>
-                  </a:txBody>
-                  <a:tcPr marL="54864" marR="54864" marT="18288" marB="18288">
-                    <a:solidFill>
-                      <a:srgbClr val="ECF1F6"/>
-                    </a:solidFill>
-                  </a:tcPr>
-                </a:tc>
-                <a:tc>
-                  <a:txBody>
-                    <a:bodyPr wrap="square"/>
-                    <a:lstStyle/>
-                    <a:p>
-                      <a:r>
-                        <a:rPr sz="1100" b="0">
-                          <a:solidFill>
-                            <a:srgbClr val="282828"/>
-                          </a:solidFill>
-                          <a:latin typeface="Arial"/>
-                        </a:rPr>
-                        <a:t>0.989 / 5 pm</a:t>
-                      </a:r>
-                    </a:p>
-                  </a:txBody>
-                  <a:tcPr marL="54864" marR="54864" marT="18288" marB="18288">
-                    <a:solidFill>
-                      <a:srgbClr val="ECF1F6"/>
-                    </a:solidFill>
-                  </a:tcPr>
-                </a:tc>
-                <a:tc>
-                  <a:txBody>
-                    <a:bodyPr wrap="square"/>
-                    <a:lstStyle/>
-                    <a:p>
-                      <a:r>
-                        <a:rPr sz="1100" b="0">
-                          <a:solidFill>
-                            <a:srgbClr val="282828"/>
-                          </a:solidFill>
-                          <a:latin typeface="Arial"/>
-                        </a:rPr>
-                        <a:t>1.000 / 4 pm; 47 sites 0.967</a:t>
-                      </a:r>
-                    </a:p>
-                  </a:txBody>
-                  <a:tcPr marL="54864" marR="54864" marT="18288" marB="18288">
-                    <a:solidFill>
-                      <a:srgbClr val="ECF1F6"/>
-                    </a:solidFill>
-                  </a:tcPr>
-                </a:tc>
-              </a:tr>
-              <a:tr h="280035">
-                <a:tc>
-                  <a:txBody>
-                    <a:bodyPr wrap="square"/>
-                    <a:lstStyle/>
-                    <a:p>
-                      <a:r>
-                        <a:rPr sz="1100" b="0">
-                          <a:solidFill>
-                            <a:srgbClr val="282828"/>
-                          </a:solidFill>
-                          <a:latin typeface="Arial"/>
-                        </a:rPr>
-                        <a:t>vector Zernike, 100 nm pokes</a:t>
-                      </a:r>
-                    </a:p>
-                  </a:txBody>
-                  <a:tcPr marL="54864" marR="54864" marT="18288" marB="18288">
-                    <a:solidFill>
-                      <a:srgbClr val="FFFFFF"/>
-                    </a:solidFill>
-                  </a:tcPr>
-                </a:tc>
-                <a:tc>
-                  <a:txBody>
-                    <a:bodyPr wrap="square"/>
-                    <a:lstStyle/>
-                    <a:p>
-                      <a:r>
-                        <a:rPr sz="1100" b="0">
-                          <a:solidFill>
-                            <a:srgbClr val="282828"/>
-                          </a:solidFill>
-                          <a:latin typeface="Arial"/>
-                        </a:rPr>
-                        <a:t>0.05 pm</a:t>
-                      </a:r>
-                    </a:p>
-                  </a:txBody>
-                  <a:tcPr marL="54864" marR="54864" marT="18288" marB="18288">
-                    <a:solidFill>
-                      <a:srgbClr val="FFFFFF"/>
-                    </a:solidFill>
-                  </a:tcPr>
-                </a:tc>
-                <a:tc>
-                  <a:txBody>
-                    <a:bodyPr wrap="square"/>
-                    <a:lstStyle/>
-                    <a:p>
-                      <a:r>
-                        <a:rPr sz="1100" b="0">
-                          <a:solidFill>
-                            <a:srgbClr val="282828"/>
-                          </a:solidFill>
-                          <a:latin typeface="Arial"/>
-                        </a:rPr>
-                        <a:t>19.6 pm: fails its gate</a:t>
-                      </a:r>
-                    </a:p>
-                  </a:txBody>
-                  <a:tcPr marL="54864" marR="54864" marT="18288" marB="18288">
-                    <a:solidFill>
-                      <a:srgbClr val="FFFFFF"/>
-                    </a:solidFill>
-                  </a:tcPr>
-                </a:tc>
-              </a:tr>
-              <a:tr h="280035">
-                <a:tc>
-                  <a:txBody>
-                    <a:bodyPr wrap="square"/>
-                    <a:lstStyle/>
-                    <a:p>
-                      <a:r>
-                        <a:rPr sz="1100" b="0">
-                          <a:solidFill>
-                            <a:srgbClr val="282828"/>
-                          </a:solidFill>
-                          <a:latin typeface="Arial"/>
-                        </a:rPr>
-                        <a:t>stepped pinhole, 100 nm pokes</a:t>
-                      </a:r>
-                    </a:p>
-                  </a:txBody>
-                  <a:tcPr marL="54864" marR="54864" marT="18288" marB="18288">
-                    <a:solidFill>
-                      <a:srgbClr val="ECF1F6"/>
-                    </a:solidFill>
-                  </a:tcPr>
-                </a:tc>
-                <a:tc>
-                  <a:txBody>
-                    <a:bodyPr wrap="square"/>
-                    <a:lstStyle/>
-                    <a:p>
-                      <a:r>
-                        <a:rPr sz="1100" b="0">
-                          <a:solidFill>
-                            <a:srgbClr val="282828"/>
-                          </a:solidFill>
-                          <a:latin typeface="Arial"/>
-                        </a:rPr>
-                        <a:t>1.9 pm</a:t>
-                      </a:r>
-                    </a:p>
-                  </a:txBody>
-                  <a:tcPr marL="54864" marR="54864" marT="18288" marB="18288">
-                    <a:solidFill>
-                      <a:srgbClr val="ECF1F6"/>
-                    </a:solidFill>
-                  </a:tcPr>
-                </a:tc>
-                <a:tc>
-                  <a:txBody>
-                    <a:bodyPr wrap="square"/>
-                    <a:lstStyle/>
-                    <a:p>
-                      <a:r>
-                        <a:rPr sz="1100" b="0">
-                          <a:solidFill>
-                            <a:srgbClr val="282828"/>
-                          </a:solidFill>
-                          <a:latin typeface="Arial"/>
-                        </a:rPr>
-                        <a:t>94 pm: fails its gate</a:t>
-                      </a:r>
-                    </a:p>
-                  </a:txBody>
-                  <a:tcPr marL="54864" marR="54864" marT="18288" marB="18288">
-                    <a:solidFill>
-                      <a:srgbClr val="ECF1F6"/>
+              <a:tr h="434340">
+                <a:tc>
+                  <a:txBody>
+                    <a:bodyPr wrap="square"/>
+                    <a:lstStyle/>
+                    <a:p>
+                      <a:r>
+                        <a:rPr sz="1000" b="0">
+                          <a:solidFill>
+                            <a:srgbClr val="282828"/>
+                          </a:solidFill>
+                          <a:latin typeface="Arial"/>
+                        </a:rPr>
+                        <a:t>hold, one number</a:t>
+                      </a:r>
+                    </a:p>
+                  </a:txBody>
+                  <a:tcPr marL="54864" marR="54864" marT="18288" marB="18288">
+                    <a:solidFill>
+                      <a:srgbClr val="FFFFFF"/>
+                    </a:solidFill>
+                  </a:tcPr>
+                </a:tc>
+                <a:tc>
+                  <a:txBody>
+                    <a:bodyPr wrap="square"/>
+                    <a:lstStyle/>
+                    <a:p>
+                      <a:r>
+                        <a:rPr sz="1000" b="0">
+                          <a:solidFill>
+                            <a:srgbClr val="282828"/>
+                          </a:solidFill>
+                          <a:latin typeface="Arial"/>
+                        </a:rPr>
+                        <a:t>photons per cycle that hold 3 pm rms in a 60-cycle loop at gain 0.5</a:t>
+                      </a:r>
+                    </a:p>
+                  </a:txBody>
+                  <a:tcPr marL="54864" marR="54864" marT="18288" marB="18288">
+                    <a:solidFill>
+                      <a:srgbClr val="FFFFFF"/>
                     </a:solidFill>
                   </a:tcPr>
                 </a:tc>
@@ -15115,13 +16166,13 @@
       </p:graphicFrame>
       <p:sp>
         <p:nvSpPr>
-          <p:cNvPr id="5" name="TextBox 4"/>
+          <p:cNvPr id="6" name="TextBox 5"/>
           <p:cNvSpPr txBox="1"/>
           <p:nvPr/>
         </p:nvSpPr>
         <p:spPr>
           <a:xfrm>
-            <a:off x="6400800" y="1298448"/>
+            <a:off x="6400800" y="4233672"/>
             <a:ext cx="5394960" cy="274320"/>
           </a:xfrm>
           <a:prstGeom prst="rect">
@@ -15141,84 +16192,13 @@
               </a:spcAft>
             </a:pPr>
             <a:r>
-              <a:rPr sz="1200" b="0">
-                <a:solidFill>
-                  <a:srgbClr val="282828"/>
-                </a:solidFill>
-                <a:latin typeface="Arial"/>
-              </a:rPr>
-              <a:t>•  What the record saw: residual astigmatism and coma leaking between the mirror's modes; open-loop rows tolerated it, a servo did not.  At the mask seat the blur was 1.1 λF/D once the seat was refocused by a 6.1 mm trim, and the more focus-critical the mask feature, the worse: the 2 λF/D dimple survived, the polarized dimple degraded, the pinhole broke.</a:t>
-            </a:r>
-          </a:p>
-          <a:p>
-            <a:pPr>
-              <a:spcAft>
-                <a:spcPts val="600"/>
-              </a:spcAft>
-            </a:pPr>
-            <a:r>
-              <a:rPr sz="1200" b="0">
-                <a:solidFill>
-                  <a:srgbClr val="282828"/>
-                </a:solidFill>
-                <a:latin typeface="Arial"/>
-              </a:rPr>
-              <a:t>•  What it was: the collimator fed 25 mm inside its focus, a 926 µrad residual the fold turns into coma, linear in the angle; the 6.1 mm trim is that error refocused.  Fed at its focus the blur is zero at every fold angle.</a:t>
-            </a:r>
-          </a:p>
-          <a:p>
-            <a:pPr>
-              <a:spcAft>
-                <a:spcPts val="600"/>
-              </a:spcAft>
-            </a:pPr>
-            <a:r>
-              <a:rPr sz="1200" b="0">
-                <a:solidFill>
-                  <a:srgbClr val="282828"/>
-                </a:solidFill>
-                <a:latin typeface="Arial"/>
-              </a:rPr>
-              <a:t>•  Coatings do not rescue it: bare and protected aluminum give the same rows; the retardance variation they add is 0.5 mrad, a floor.</a:t>
-            </a:r>
-          </a:p>
-        </p:txBody>
-      </p:sp>
-      <p:sp>
-        <p:nvSpPr>
-          <p:cNvPr id="6" name="TextBox 5"/>
-          <p:cNvSpPr txBox="1"/>
-          <p:nvPr/>
-        </p:nvSpPr>
-        <p:spPr>
-          <a:xfrm>
-            <a:off x="6400800" y="4133087"/>
-            <a:ext cx="5394960" cy="274320"/>
-          </a:xfrm>
-          <a:prstGeom prst="rect">
-            <a:avLst/>
-          </a:prstGeom>
-          <a:noFill/>
-        </p:spPr>
-        <p:txBody>
-          <a:bodyPr wrap="square">
-            <a:spAutoFit/>
-          </a:bodyPr>
-          <a:lstStyle/>
-          <a:p>
-            <a:pPr>
-              <a:spcAft>
-                <a:spcPts val="600"/>
-              </a:spcAft>
-            </a:pPr>
-            <a:r>
               <a:rPr sz="1050" b="0">
                 <a:solidFill>
                   <a:srgbClr val="6E6E6E"/>
                 </a:solidFill>
                 <a:latin typeface="Arial"/>
               </a:rPr>
-              <a:t>Run tags oap_deck, loop_oap, descent_oap, zoap (all on the 7° rig with the 25 mm conjugate error; the seat-trim solve is in tg_psi_dm96_oap/REPORT_gauge_ifo.md section 4).  These rows stand as the record of what a misfed collimator costs; the redesigned rig's measurements are on the next slide.</a:t>
+              <a:t>Measuring a change costs two measurements.  The 96×96 at 385 detector pixels per pupil is the flight-like sampling; most rows here are at 193 pixels, which the sampling study showed reads the same numbers.</a:t>
             </a:r>
           </a:p>
         </p:txBody>
@@ -15231,7 +16211,7 @@
 </p:sld>
 </file>
 
-<file path=ppt/slides/slide3.xml><?xml version="1.0" encoding="utf-8"?>
+<file path=ppt/slides/slide30.xml><?xml version="1.0" encoding="utf-8"?>
 <p:sld xmlns:a="http://schemas.openxmlformats.org/drawingml/2006/main" xmlns:p="http://schemas.openxmlformats.org/presentationml/2006/main" xmlns:r="http://schemas.openxmlformats.org/officeDocument/2006/relationships">
   <p:cSld>
     <p:spTree>
@@ -15275,7 +16255,7 @@
                 </a:solidFill>
                 <a:latin typeface="Arial"/>
               </a:rPr>
-              <a:t>The three jobs, and how each is scored</a:t>
+              <a:t>Lenses or off-axis mirrors: the record</a:t>
             </a:r>
           </a:p>
           <a:p>
@@ -15291,7 +16271,7 @@
                 </a:solidFill>
                 <a:latin typeface="Arial"/>
               </a:rPr>
-              <a:t>Measure the mirror's surface to picometers; capture its post-launch shape, 100-200 nm of wavefront, into the servo's reach; hold it there in a servo</a:t>
+              <a:t>On the record's 7° mirror rig the interferometer lost its servo and its capture and the focus-critical sensors broke; the cause was read as fold coma.  It was not (next slide): the collimator was fed 25 mm inside its focus</a:t>
             </a:r>
           </a:p>
         </p:txBody>
@@ -15340,16 +16320,781 @@
           </a:p>
         </p:txBody>
       </p:sp>
+      <p:graphicFrame>
+        <p:nvGraphicFramePr>
+          <p:cNvPr id="4" name="Table 3"/>
+          <p:cNvGraphicFramePr>
+            <a:graphicFrameLocks noGrp="1"/>
+          </p:cNvGraphicFramePr>
+          <p:nvPr/>
+        </p:nvGraphicFramePr>
+        <p:xfrm>
+          <a:off x="411480" y="1298448"/>
+          <a:ext cx="5806439" cy="3646170"/>
+        </p:xfrm>
+        <a:graphic>
+          <a:graphicData uri="http://schemas.openxmlformats.org/drawingml/2006/table">
+            <a:tbl>
+              <a:tblPr firstRow="1" bandRow="1">
+                <a:tableStyleId>{5C22544A-7EE6-4342-B048-85BDC9FD1C3A}</a:tableStyleId>
+              </a:tblPr>
+              <a:tblGrid>
+                <a:gridCol w="2416966"/>
+                <a:gridCol w="1163320"/>
+                <a:gridCol w="2226153"/>
+              </a:tblGrid>
+              <a:tr h="468630">
+                <a:tc>
+                  <a:txBody>
+                    <a:bodyPr wrap="square"/>
+                    <a:lstStyle/>
+                    <a:p/>
+                  </a:txBody>
+                  <a:tcPr marL="54864" marR="54864" marT="18288" marB="18288">
+                    <a:solidFill>
+                      <a:srgbClr val="1F4E79"/>
+                    </a:solidFill>
+                  </a:tcPr>
+                </a:tc>
+                <a:tc>
+                  <a:txBody>
+                    <a:bodyPr wrap="square"/>
+                    <a:lstStyle/>
+                    <a:p>
+                      <a:r>
+                        <a:rPr sz="1100" b="1">
+                          <a:solidFill>
+                            <a:srgbClr val="FFFFFF"/>
+                          </a:solidFill>
+                          <a:latin typeface="Arial"/>
+                        </a:rPr>
+                        <a:t>lens rig</a:t>
+                      </a:r>
+                    </a:p>
+                  </a:txBody>
+                  <a:tcPr marL="54864" marR="54864" marT="18288" marB="18288">
+                    <a:solidFill>
+                      <a:srgbClr val="1F4E79"/>
+                    </a:solidFill>
+                  </a:tcPr>
+                </a:tc>
+                <a:tc>
+                  <a:txBody>
+                    <a:bodyPr wrap="square"/>
+                    <a:lstStyle/>
+                    <a:p>
+                      <a:r>
+                        <a:rPr sz="1100" b="1">
+                          <a:solidFill>
+                            <a:srgbClr val="FFFFFF"/>
+                          </a:solidFill>
+                          <a:latin typeface="Arial"/>
+                        </a:rPr>
+                        <a:t>off-axis mirror rig (bare aluminum)</a:t>
+                      </a:r>
+                    </a:p>
+                  </a:txBody>
+                  <a:tcPr marL="54864" marR="54864" marT="18288" marB="18288">
+                    <a:solidFill>
+                      <a:srgbClr val="1F4E79"/>
+                    </a:solidFill>
+                  </a:tcPr>
+                </a:tc>
+              </a:tr>
+              <a:tr h="280035">
+                <a:tc>
+                  <a:txBody>
+                    <a:bodyPr wrap="square"/>
+                    <a:lstStyle/>
+                    <a:p>
+                      <a:r>
+                        <a:rPr sz="1100" b="0">
+                          <a:solidFill>
+                            <a:srgbClr val="282828"/>
+                          </a:solidFill>
+                          <a:latin typeface="Arial"/>
+                        </a:rPr>
+                        <a:t>interferometer, 1 nm on 52 sites</a:t>
+                      </a:r>
+                    </a:p>
+                  </a:txBody>
+                  <a:tcPr marL="54864" marR="54864" marT="18288" marB="18288">
+                    <a:solidFill>
+                      <a:srgbClr val="FFFFFF"/>
+                    </a:solidFill>
+                  </a:tcPr>
+                </a:tc>
+                <a:tc>
+                  <a:txBody>
+                    <a:bodyPr wrap="square"/>
+                    <a:lstStyle/>
+                    <a:p>
+                      <a:r>
+                        <a:rPr sz="1100" b="0">
+                          <a:solidFill>
+                            <a:srgbClr val="282828"/>
+                          </a:solidFill>
+                          <a:latin typeface="Arial"/>
+                        </a:rPr>
+                        <a:t>0.990 / 1 pm</a:t>
+                      </a:r>
+                    </a:p>
+                  </a:txBody>
+                  <a:tcPr marL="54864" marR="54864" marT="18288" marB="18288">
+                    <a:solidFill>
+                      <a:srgbClr val="FFFFFF"/>
+                    </a:solidFill>
+                  </a:tcPr>
+                </a:tc>
+                <a:tc>
+                  <a:txBody>
+                    <a:bodyPr wrap="square"/>
+                    <a:lstStyle/>
+                    <a:p>
+                      <a:r>
+                        <a:rPr sz="1100" b="0">
+                          <a:solidFill>
+                            <a:srgbClr val="282828"/>
+                          </a:solidFill>
+                          <a:latin typeface="Arial"/>
+                        </a:rPr>
+                        <a:t>0.958 / 1 pm</a:t>
+                      </a:r>
+                    </a:p>
+                  </a:txBody>
+                  <a:tcPr marL="54864" marR="54864" marT="18288" marB="18288">
+                    <a:solidFill>
+                      <a:srgbClr val="FFFFFF"/>
+                    </a:solidFill>
+                  </a:tcPr>
+                </a:tc>
+              </a:tr>
+              <a:tr h="280035">
+                <a:tc>
+                  <a:txBody>
+                    <a:bodyPr wrap="square"/>
+                    <a:lstStyle/>
+                    <a:p>
+                      <a:r>
+                        <a:rPr sz="1100" b="0">
+                          <a:solidFill>
+                            <a:srgbClr val="282828"/>
+                          </a:solidFill>
+                          <a:latin typeface="Arial"/>
+                        </a:rPr>
+                        <a:t>interferometer, dense 10 nm</a:t>
+                      </a:r>
+                    </a:p>
+                  </a:txBody>
+                  <a:tcPr marL="54864" marR="54864" marT="18288" marB="18288">
+                    <a:solidFill>
+                      <a:srgbClr val="ECF1F6"/>
+                    </a:solidFill>
+                  </a:tcPr>
+                </a:tc>
+                <a:tc>
+                  <a:txBody>
+                    <a:bodyPr wrap="square"/>
+                    <a:lstStyle/>
+                    <a:p>
+                      <a:r>
+                        <a:rPr sz="1100" b="0">
+                          <a:solidFill>
+                            <a:srgbClr val="282828"/>
+                          </a:solidFill>
+                          <a:latin typeface="Arial"/>
+                        </a:rPr>
+                        <a:t>0.990 / 168 pm</a:t>
+                      </a:r>
+                    </a:p>
+                  </a:txBody>
+                  <a:tcPr marL="54864" marR="54864" marT="18288" marB="18288">
+                    <a:solidFill>
+                      <a:srgbClr val="ECF1F6"/>
+                    </a:solidFill>
+                  </a:tcPr>
+                </a:tc>
+                <a:tc>
+                  <a:txBody>
+                    <a:bodyPr wrap="square"/>
+                    <a:lstStyle/>
+                    <a:p>
+                      <a:r>
+                        <a:rPr sz="1100" b="0">
+                          <a:solidFill>
+                            <a:srgbClr val="282828"/>
+                          </a:solidFill>
+                          <a:latin typeface="Arial"/>
+                        </a:rPr>
+                        <a:t>0.950 / 2.1 nm</a:t>
+                      </a:r>
+                    </a:p>
+                  </a:txBody>
+                  <a:tcPr marL="54864" marR="54864" marT="18288" marB="18288">
+                    <a:solidFill>
+                      <a:srgbClr val="ECF1F6"/>
+                    </a:solidFill>
+                  </a:tcPr>
+                </a:tc>
+              </a:tr>
+              <a:tr h="280035">
+                <a:tc>
+                  <a:txBody>
+                    <a:bodyPr wrap="square"/>
+                    <a:lstStyle/>
+                    <a:p>
+                      <a:r>
+                        <a:rPr sz="1100" b="0">
+                          <a:solidFill>
+                            <a:srgbClr val="282828"/>
+                          </a:solidFill>
+                          <a:latin typeface="Arial"/>
+                        </a:rPr>
+                        <a:t>mode-to-mode cross-talk</a:t>
+                      </a:r>
+                    </a:p>
+                  </a:txBody>
+                  <a:tcPr marL="54864" marR="54864" marT="18288" marB="18288">
+                    <a:solidFill>
+                      <a:srgbClr val="FFFFFF"/>
+                    </a:solidFill>
+                  </a:tcPr>
+                </a:tc>
+                <a:tc>
+                  <a:txBody>
+                    <a:bodyPr wrap="square"/>
+                    <a:lstStyle/>
+                    <a:p>
+                      <a:r>
+                        <a:rPr sz="1100" b="0">
+                          <a:solidFill>
+                            <a:srgbClr val="282828"/>
+                          </a:solidFill>
+                          <a:latin typeface="Arial"/>
+                        </a:rPr>
+                        <a:t>below 0.06</a:t>
+                      </a:r>
+                    </a:p>
+                  </a:txBody>
+                  <a:tcPr marL="54864" marR="54864" marT="18288" marB="18288">
+                    <a:solidFill>
+                      <a:srgbClr val="FFFFFF"/>
+                    </a:solidFill>
+                  </a:tcPr>
+                </a:tc>
+                <a:tc>
+                  <a:txBody>
+                    <a:bodyPr wrap="square"/>
+                    <a:lstStyle/>
+                    <a:p>
+                      <a:r>
+                        <a:rPr sz="1100" b="0">
+                          <a:solidFill>
+                            <a:srgbClr val="282828"/>
+                          </a:solidFill>
+                          <a:latin typeface="Arial"/>
+                        </a:rPr>
+                        <a:t>about 0.18</a:t>
+                      </a:r>
+                    </a:p>
+                  </a:txBody>
+                  <a:tcPr marL="54864" marR="54864" marT="18288" marB="18288">
+                    <a:solidFill>
+                      <a:srgbClr val="FFFFFF"/>
+                    </a:solidFill>
+                  </a:tcPr>
+                </a:tc>
+              </a:tr>
+              <a:tr h="280035">
+                <a:tc>
+                  <a:txBody>
+                    <a:bodyPr wrap="square"/>
+                    <a:lstStyle/>
+                    <a:p>
+                      <a:r>
+                        <a:rPr sz="1100" b="0">
+                          <a:solidFill>
+                            <a:srgbClr val="282828"/>
+                          </a:solidFill>
+                          <a:latin typeface="Arial"/>
+                        </a:rPr>
+                        <a:t>servo, 3 pm under the walk</a:t>
+                      </a:r>
+                    </a:p>
+                  </a:txBody>
+                  <a:tcPr marL="54864" marR="54864" marT="18288" marB="18288">
+                    <a:solidFill>
+                      <a:srgbClr val="ECF1F6"/>
+                    </a:solidFill>
+                  </a:tcPr>
+                </a:tc>
+                <a:tc>
+                  <a:txBody>
+                    <a:bodyPr wrap="square"/>
+                    <a:lstStyle/>
+                    <a:p>
+                      <a:r>
+                        <a:rPr sz="1100" b="0">
+                          <a:solidFill>
+                            <a:srgbClr val="282828"/>
+                          </a:solidFill>
+                          <a:latin typeface="Arial"/>
+                        </a:rPr>
+                        <a:t>2.0e13</a:t>
+                      </a:r>
+                    </a:p>
+                  </a:txBody>
+                  <a:tcPr marL="54864" marR="54864" marT="18288" marB="18288">
+                    <a:solidFill>
+                      <a:srgbClr val="ECF1F6"/>
+                    </a:solidFill>
+                  </a:tcPr>
+                </a:tc>
+                <a:tc>
+                  <a:txBody>
+                    <a:bodyPr wrap="square"/>
+                    <a:lstStyle/>
+                    <a:p>
+                      <a:r>
+                        <a:rPr sz="1100" b="0">
+                          <a:solidFill>
+                            <a:srgbClr val="282828"/>
+                          </a:solidFill>
+                          <a:latin typeface="Arial"/>
+                        </a:rPr>
+                        <a:t>never</a:t>
+                      </a:r>
+                    </a:p>
+                  </a:txBody>
+                  <a:tcPr marL="54864" marR="54864" marT="18288" marB="18288">
+                    <a:solidFill>
+                      <a:srgbClr val="ECF1F6"/>
+                    </a:solidFill>
+                  </a:tcPr>
+                </a:tc>
+              </a:tr>
+              <a:tr h="280035">
+                <a:tc>
+                  <a:txBody>
+                    <a:bodyPr wrap="square"/>
+                    <a:lstStyle/>
+                    <a:p>
+                      <a:r>
+                        <a:rPr sz="1100" b="0">
+                          <a:solidFill>
+                            <a:srgbClr val="282828"/>
+                          </a:solidFill>
+                          <a:latin typeface="Arial"/>
+                        </a:rPr>
+                        <a:t>noiseless step, fixed error</a:t>
+                      </a:r>
+                    </a:p>
+                  </a:txBody>
+                  <a:tcPr marL="54864" marR="54864" marT="18288" marB="18288">
+                    <a:solidFill>
+                      <a:srgbClr val="FFFFFF"/>
+                    </a:solidFill>
+                  </a:tcPr>
+                </a:tc>
+                <a:tc>
+                  <a:txBody>
+                    <a:bodyPr wrap="square"/>
+                    <a:lstStyle/>
+                    <a:p>
+                      <a:r>
+                        <a:rPr sz="1100" b="0">
+                          <a:solidFill>
+                            <a:srgbClr val="282828"/>
+                          </a:solidFill>
+                          <a:latin typeface="Arial"/>
+                        </a:rPr>
+                        <a:t>8.6%</a:t>
+                      </a:r>
+                    </a:p>
+                  </a:txBody>
+                  <a:tcPr marL="54864" marR="54864" marT="18288" marB="18288">
+                    <a:solidFill>
+                      <a:srgbClr val="FFFFFF"/>
+                    </a:solidFill>
+                  </a:tcPr>
+                </a:tc>
+                <a:tc>
+                  <a:txBody>
+                    <a:bodyPr wrap="square"/>
+                    <a:lstStyle/>
+                    <a:p>
+                      <a:r>
+                        <a:rPr sz="1100" b="0">
+                          <a:solidFill>
+                            <a:srgbClr val="282828"/>
+                          </a:solidFill>
+                          <a:latin typeface="Arial"/>
+                        </a:rPr>
+                        <a:t>27.6%</a:t>
+                      </a:r>
+                    </a:p>
+                  </a:txBody>
+                  <a:tcPr marL="54864" marR="54864" marT="18288" marB="18288">
+                    <a:solidFill>
+                      <a:srgbClr val="FFFFFF"/>
+                    </a:solidFill>
+                  </a:tcPr>
+                </a:tc>
+              </a:tr>
+              <a:tr h="280035">
+                <a:tc>
+                  <a:txBody>
+                    <a:bodyPr wrap="square"/>
+                    <a:lstStyle/>
+                    <a:p>
+                      <a:r>
+                        <a:rPr sz="1100" b="0">
+                          <a:solidFill>
+                            <a:srgbClr val="282828"/>
+                          </a:solidFill>
+                          <a:latin typeface="Arial"/>
+                        </a:rPr>
+                        <a:t>capture from 60-300 nm</a:t>
+                      </a:r>
+                    </a:p>
+                  </a:txBody>
+                  <a:tcPr marL="54864" marR="54864" marT="18288" marB="18288">
+                    <a:solidFill>
+                      <a:srgbClr val="ECF1F6"/>
+                    </a:solidFill>
+                  </a:tcPr>
+                </a:tc>
+                <a:tc>
+                  <a:txBody>
+                    <a:bodyPr wrap="square"/>
+                    <a:lstStyle/>
+                    <a:p>
+                      <a:r>
+                        <a:rPr sz="1100" b="0">
+                          <a:solidFill>
+                            <a:srgbClr val="282828"/>
+                          </a:solidFill>
+                          <a:latin typeface="Arial"/>
+                        </a:rPr>
+                        <a:t>converges</a:t>
+                      </a:r>
+                    </a:p>
+                  </a:txBody>
+                  <a:tcPr marL="54864" marR="54864" marT="18288" marB="18288">
+                    <a:solidFill>
+                      <a:srgbClr val="ECF1F6"/>
+                    </a:solidFill>
+                  </a:tcPr>
+                </a:tc>
+                <a:tc>
+                  <a:txBody>
+                    <a:bodyPr wrap="square"/>
+                    <a:lstStyle/>
+                    <a:p>
+                      <a:r>
+                        <a:rPr sz="1100" b="0">
+                          <a:solidFill>
+                            <a:srgbClr val="282828"/>
+                          </a:solidFill>
+                          <a:latin typeface="Arial"/>
+                        </a:rPr>
+                        <a:t>stalls</a:t>
+                      </a:r>
+                    </a:p>
+                  </a:txBody>
+                  <a:tcPr marL="54864" marR="54864" marT="18288" marB="18288">
+                    <a:solidFill>
+                      <a:srgbClr val="ECF1F6"/>
+                    </a:solidFill>
+                  </a:tcPr>
+                </a:tc>
+              </a:tr>
+              <a:tr h="468630">
+                <a:tc>
+                  <a:txBody>
+                    <a:bodyPr wrap="square"/>
+                    <a:lstStyle/>
+                    <a:p>
+                      <a:r>
+                        <a:rPr sz="1100" b="0">
+                          <a:solidFill>
+                            <a:srgbClr val="282828"/>
+                          </a:solidFill>
+                          <a:latin typeface="Arial"/>
+                        </a:rPr>
+                        <a:t>alignment: 10 µrad tilt of a mirror</a:t>
+                      </a:r>
+                    </a:p>
+                  </a:txBody>
+                  <a:tcPr marL="54864" marR="54864" marT="18288" marB="18288">
+                    <a:solidFill>
+                      <a:srgbClr val="FFFFFF"/>
+                    </a:solidFill>
+                  </a:tcPr>
+                </a:tc>
+                <a:tc>
+                  <a:txBody>
+                    <a:bodyPr wrap="square"/>
+                    <a:lstStyle/>
+                    <a:p>
+                      <a:r>
+                        <a:rPr sz="1100" b="0">
+                          <a:solidFill>
+                            <a:srgbClr val="282828"/>
+                          </a:solidFill>
+                          <a:latin typeface="Arial"/>
+                        </a:rPr>
+                        <a:t>—</a:t>
+                      </a:r>
+                    </a:p>
+                  </a:txBody>
+                  <a:tcPr marL="54864" marR="54864" marT="18288" marB="18288">
+                    <a:solidFill>
+                      <a:srgbClr val="FFFFFF"/>
+                    </a:solidFill>
+                  </a:tcPr>
+                </a:tc>
+                <a:tc>
+                  <a:txBody>
+                    <a:bodyPr wrap="square"/>
+                    <a:lstStyle/>
+                    <a:p>
+                      <a:r>
+                        <a:rPr sz="1100" b="0">
+                          <a:solidFill>
+                            <a:srgbClr val="282828"/>
+                          </a:solidFill>
+                          <a:latin typeface="Arial"/>
+                        </a:rPr>
+                        <a:t>95-103 nm of null shift</a:t>
+                      </a:r>
+                    </a:p>
+                  </a:txBody>
+                  <a:tcPr marL="54864" marR="54864" marT="18288" marB="18288">
+                    <a:solidFill>
+                      <a:srgbClr val="FFFFFF"/>
+                    </a:solidFill>
+                  </a:tcPr>
+                </a:tc>
+              </a:tr>
+              <a:tr h="468630">
+                <a:tc>
+                  <a:txBody>
+                    <a:bodyPr wrap="square"/>
+                    <a:lstStyle/>
+                    <a:p>
+                      <a:r>
+                        <a:rPr sz="1100" b="0">
+                          <a:solidFill>
+                            <a:srgbClr val="282828"/>
+                          </a:solidFill>
+                          <a:latin typeface="Arial"/>
+                        </a:rPr>
+                        <a:t>Zernike stepped, 10 nm on one actuator</a:t>
+                      </a:r>
+                    </a:p>
+                  </a:txBody>
+                  <a:tcPr marL="54864" marR="54864" marT="18288" marB="18288">
+                    <a:solidFill>
+                      <a:srgbClr val="ECF1F6"/>
+                    </a:solidFill>
+                  </a:tcPr>
+                </a:tc>
+                <a:tc>
+                  <a:txBody>
+                    <a:bodyPr wrap="square"/>
+                    <a:lstStyle/>
+                    <a:p>
+                      <a:r>
+                        <a:rPr sz="1100" b="0">
+                          <a:solidFill>
+                            <a:srgbClr val="282828"/>
+                          </a:solidFill>
+                          <a:latin typeface="Arial"/>
+                        </a:rPr>
+                        <a:t>0.989 / 5 pm</a:t>
+                      </a:r>
+                    </a:p>
+                  </a:txBody>
+                  <a:tcPr marL="54864" marR="54864" marT="18288" marB="18288">
+                    <a:solidFill>
+                      <a:srgbClr val="ECF1F6"/>
+                    </a:solidFill>
+                  </a:tcPr>
+                </a:tc>
+                <a:tc>
+                  <a:txBody>
+                    <a:bodyPr wrap="square"/>
+                    <a:lstStyle/>
+                    <a:p>
+                      <a:r>
+                        <a:rPr sz="1100" b="0">
+                          <a:solidFill>
+                            <a:srgbClr val="282828"/>
+                          </a:solidFill>
+                          <a:latin typeface="Arial"/>
+                        </a:rPr>
+                        <a:t>1.000 / 4 pm; 47 sites 0.967</a:t>
+                      </a:r>
+                    </a:p>
+                  </a:txBody>
+                  <a:tcPr marL="54864" marR="54864" marT="18288" marB="18288">
+                    <a:solidFill>
+                      <a:srgbClr val="ECF1F6"/>
+                    </a:solidFill>
+                  </a:tcPr>
+                </a:tc>
+              </a:tr>
+              <a:tr h="280035">
+                <a:tc>
+                  <a:txBody>
+                    <a:bodyPr wrap="square"/>
+                    <a:lstStyle/>
+                    <a:p>
+                      <a:r>
+                        <a:rPr sz="1100" b="0">
+                          <a:solidFill>
+                            <a:srgbClr val="282828"/>
+                          </a:solidFill>
+                          <a:latin typeface="Arial"/>
+                        </a:rPr>
+                        <a:t>vector Zernike, 100 nm pokes</a:t>
+                      </a:r>
+                    </a:p>
+                  </a:txBody>
+                  <a:tcPr marL="54864" marR="54864" marT="18288" marB="18288">
+                    <a:solidFill>
+                      <a:srgbClr val="FFFFFF"/>
+                    </a:solidFill>
+                  </a:tcPr>
+                </a:tc>
+                <a:tc>
+                  <a:txBody>
+                    <a:bodyPr wrap="square"/>
+                    <a:lstStyle/>
+                    <a:p>
+                      <a:r>
+                        <a:rPr sz="1100" b="0">
+                          <a:solidFill>
+                            <a:srgbClr val="282828"/>
+                          </a:solidFill>
+                          <a:latin typeface="Arial"/>
+                        </a:rPr>
+                        <a:t>0.05 pm</a:t>
+                      </a:r>
+                    </a:p>
+                  </a:txBody>
+                  <a:tcPr marL="54864" marR="54864" marT="18288" marB="18288">
+                    <a:solidFill>
+                      <a:srgbClr val="FFFFFF"/>
+                    </a:solidFill>
+                  </a:tcPr>
+                </a:tc>
+                <a:tc>
+                  <a:txBody>
+                    <a:bodyPr wrap="square"/>
+                    <a:lstStyle/>
+                    <a:p>
+                      <a:r>
+                        <a:rPr sz="1100" b="0">
+                          <a:solidFill>
+                            <a:srgbClr val="282828"/>
+                          </a:solidFill>
+                          <a:latin typeface="Arial"/>
+                        </a:rPr>
+                        <a:t>19.6 pm: fails its gate</a:t>
+                      </a:r>
+                    </a:p>
+                  </a:txBody>
+                  <a:tcPr marL="54864" marR="54864" marT="18288" marB="18288">
+                    <a:solidFill>
+                      <a:srgbClr val="FFFFFF"/>
+                    </a:solidFill>
+                  </a:tcPr>
+                </a:tc>
+              </a:tr>
+              <a:tr h="280035">
+                <a:tc>
+                  <a:txBody>
+                    <a:bodyPr wrap="square"/>
+                    <a:lstStyle/>
+                    <a:p>
+                      <a:r>
+                        <a:rPr sz="1100" b="0">
+                          <a:solidFill>
+                            <a:srgbClr val="282828"/>
+                          </a:solidFill>
+                          <a:latin typeface="Arial"/>
+                        </a:rPr>
+                        <a:t>stepped pinhole, 100 nm pokes</a:t>
+                      </a:r>
+                    </a:p>
+                  </a:txBody>
+                  <a:tcPr marL="54864" marR="54864" marT="18288" marB="18288">
+                    <a:solidFill>
+                      <a:srgbClr val="ECF1F6"/>
+                    </a:solidFill>
+                  </a:tcPr>
+                </a:tc>
+                <a:tc>
+                  <a:txBody>
+                    <a:bodyPr wrap="square"/>
+                    <a:lstStyle/>
+                    <a:p>
+                      <a:r>
+                        <a:rPr sz="1100" b="0">
+                          <a:solidFill>
+                            <a:srgbClr val="282828"/>
+                          </a:solidFill>
+                          <a:latin typeface="Arial"/>
+                        </a:rPr>
+                        <a:t>1.9 pm</a:t>
+                      </a:r>
+                    </a:p>
+                  </a:txBody>
+                  <a:tcPr marL="54864" marR="54864" marT="18288" marB="18288">
+                    <a:solidFill>
+                      <a:srgbClr val="ECF1F6"/>
+                    </a:solidFill>
+                  </a:tcPr>
+                </a:tc>
+                <a:tc>
+                  <a:txBody>
+                    <a:bodyPr wrap="square"/>
+                    <a:lstStyle/>
+                    <a:p>
+                      <a:r>
+                        <a:rPr sz="1100" b="0">
+                          <a:solidFill>
+                            <a:srgbClr val="282828"/>
+                          </a:solidFill>
+                          <a:latin typeface="Arial"/>
+                        </a:rPr>
+                        <a:t>94 pm: fails its gate</a:t>
+                      </a:r>
+                    </a:p>
+                  </a:txBody>
+                  <a:tcPr marL="54864" marR="54864" marT="18288" marB="18288">
+                    <a:solidFill>
+                      <a:srgbClr val="ECF1F6"/>
+                    </a:solidFill>
+                  </a:tcPr>
+                </a:tc>
+              </a:tr>
+            </a:tbl>
+          </a:graphicData>
+        </a:graphic>
+      </p:graphicFrame>
       <p:sp>
         <p:nvSpPr>
-          <p:cNvPr id="4" name="TextBox 3"/>
+          <p:cNvPr id="5" name="TextBox 4"/>
           <p:cNvSpPr txBox="1"/>
           <p:nvPr/>
         </p:nvSpPr>
         <p:spPr>
           <a:xfrm>
-            <a:off x="411480" y="1298448"/>
-            <a:ext cx="5806440" cy="274320"/>
+            <a:off x="6400800" y="1298448"/>
+            <a:ext cx="5394960" cy="274320"/>
           </a:xfrm>
           <a:prstGeom prst="rect">
             <a:avLst/>
@@ -15374,7 +17119,7 @@
                 </a:solidFill>
                 <a:latin typeface="Arial"/>
               </a:rPr>
-              <a:t>•  The DM: 96×96 actuators on a 1 mm pitch, 96 mm across.  On orbit its surface must stay constant to well under 10 pm, measured often and held by a closed loop.  Every test runs on a random 30 nm rms working surface, not a flat: the gauge never operates at null.</a:t>
+              <a:t>•  What the record saw: residual astigmatism and coma leaking between the mirror's modes; open-loop rows tolerated it, a servo did not.  At the mask seat the blur was 1.1 λF/D once the seat was refocused by a 6.1 mm trim, and the more focus-critical the mask feature, the worse: the 2 λF/D dimple survived, the polarized dimple degraded, the pinhole broke.</a:t>
             </a:r>
           </a:p>
           <a:p>
@@ -15390,7 +17135,7 @@
                 </a:solidFill>
                 <a:latin typeface="Arial"/>
               </a:rPr>
-              <a:t>•  Job 1, measure: read a change of 10 nm on one actuator, of 1 nm on 47 actuators, and a dense random 10 nm pattern, on the 30 nm surface with the response matrix measured on it; and keep that accuracy as the surface moves away from the calibration (capture range).</a:t>
+              <a:t>•  What it was: the collimator fed 25 mm inside its focus, a 926 µrad residual the fold turns into coma, linear in the angle; the 6.1 mm trim is that error refocused.  Fed at its focus the blur is zero at every fold angle.</a:t>
             </a:r>
           </a:p>
           <a:p>
@@ -15406,421 +17151,11 @@
                 </a:solidFill>
                 <a:latin typeface="Arial"/>
               </a:rPr>
-              <a:t>•  Job 2, capture: bring the largest possible starting surface, 100-200 nm of wavefront, down to the servo's floor; every phase reading wraps at ±158 nm of surface (±π at 632.8 nm, double pass), so this is a wrapping problem before it is a noise problem.</a:t>
-            </a:r>
-          </a:p>
-          <a:p>
-            <a:pPr>
-              <a:spcAft>
-                <a:spcPts val="600"/>
-              </a:spcAft>
-            </a:pPr>
-            <a:r>
-              <a:rPr sz="1200" b="0">
-                <a:solidFill>
-                  <a:srgbClr val="282828"/>
-                </a:solidFill>
-                <a:latin typeface="Arial"/>
-              </a:rPr>
-              <a:t>•  Job 3, hold: the servo at picometers on the 30 nm rms working surface, its set point: the light per cycle that holds changes about it to 3 pm rms under a 2 pm per-cycle random walk, and whether the reading leaves a fixed error.</a:t>
+              <a:t>•  Coatings do not rescue it: bare and protected aluminum give the same rows; the retardance variation they add is 0.5 mrad, a floor.</a:t>
             </a:r>
           </a:p>
         </p:txBody>
       </p:sp>
-      <p:graphicFrame>
-        <p:nvGraphicFramePr>
-          <p:cNvPr id="5" name="Table 4"/>
-          <p:cNvGraphicFramePr>
-            <a:graphicFrameLocks noGrp="1"/>
-          </p:cNvGraphicFramePr>
-          <p:nvPr/>
-        </p:nvGraphicFramePr>
-        <p:xfrm>
-          <a:off x="6400800" y="1298448"/>
-          <a:ext cx="5394959" cy="2788920"/>
-        </p:xfrm>
-        <a:graphic>
-          <a:graphicData uri="http://schemas.openxmlformats.org/drawingml/2006/table">
-            <a:tbl>
-              <a:tblPr firstRow="1" bandRow="1">
-                <a:tableStyleId>{5C22544A-7EE6-4342-B048-85BDC9FD1C3A}</a:tableStyleId>
-              </a:tblPr>
-              <a:tblGrid>
-                <a:gridCol w="844109"/>
-                <a:gridCol w="4550850"/>
-              </a:tblGrid>
-              <a:tr h="262890">
-                <a:tc>
-                  <a:txBody>
-                    <a:bodyPr wrap="square"/>
-                    <a:lstStyle/>
-                    <a:p>
-                      <a:r>
-                        <a:rPr sz="1000" b="1">
-                          <a:solidFill>
-                            <a:srgbClr val="FFFFFF"/>
-                          </a:solidFill>
-                          <a:latin typeface="Arial"/>
-                        </a:rPr>
-                        <a:t>score</a:t>
-                      </a:r>
-                    </a:p>
-                  </a:txBody>
-                  <a:tcPr marL="54864" marR="54864" marT="18288" marB="18288">
-                    <a:solidFill>
-                      <a:srgbClr val="1F4E79"/>
-                    </a:solidFill>
-                  </a:tcPr>
-                </a:tc>
-                <a:tc>
-                  <a:txBody>
-                    <a:bodyPr wrap="square"/>
-                    <a:lstStyle/>
-                    <a:p>
-                      <a:r>
-                        <a:rPr sz="1000" b="1">
-                          <a:solidFill>
-                            <a:srgbClr val="FFFFFF"/>
-                          </a:solidFill>
-                          <a:latin typeface="Arial"/>
-                        </a:rPr>
-                        <a:t>meaning</a:t>
-                      </a:r>
-                    </a:p>
-                  </a:txBody>
-                  <a:tcPr marL="54864" marR="54864" marT="18288" marB="18288">
-                    <a:solidFill>
-                      <a:srgbClr val="1F4E79"/>
-                    </a:solidFill>
-                  </a:tcPr>
-                </a:tc>
-              </a:tr>
-              <a:tr h="434340">
-                <a:tc>
-                  <a:txBody>
-                    <a:bodyPr wrap="square"/>
-                    <a:lstStyle/>
-                    <a:p>
-                      <a:r>
-                        <a:rPr sz="1000" b="0">
-                          <a:solidFill>
-                            <a:srgbClr val="282828"/>
-                          </a:solidFill>
-                          <a:latin typeface="Arial"/>
-                        </a:rPr>
-                        <a:t>gain</a:t>
-                      </a:r>
-                    </a:p>
-                  </a:txBody>
-                  <a:tcPr marL="54864" marR="54864" marT="18288" marB="18288">
-                    <a:solidFill>
-                      <a:srgbClr val="FFFFFF"/>
-                    </a:solidFill>
-                  </a:tcPr>
-                </a:tc>
-                <a:tc>
-                  <a:txBody>
-                    <a:bodyPr wrap="square"/>
-                    <a:lstStyle/>
-                    <a:p>
-                      <a:r>
-                        <a:rPr sz="1000" b="0">
-                          <a:solidFill>
-                            <a:srgbClr val="282828"/>
-                          </a:solidFill>
-                          <a:latin typeface="Arial"/>
-                        </a:rPr>
-                        <a:t>recovered change ÷ true change; 1.0 is perfect; quoted after calibration</a:t>
-                      </a:r>
-                    </a:p>
-                  </a:txBody>
-                  <a:tcPr marL="54864" marR="54864" marT="18288" marB="18288">
-                    <a:solidFill>
-                      <a:srgbClr val="FFFFFF"/>
-                    </a:solidFill>
-                  </a:tcPr>
-                </a:tc>
-              </a:tr>
-              <a:tr h="262890">
-                <a:tc>
-                  <a:txBody>
-                    <a:bodyPr wrap="square"/>
-                    <a:lstStyle/>
-                    <a:p>
-                      <a:r>
-                        <a:rPr sz="1000" b="0">
-                          <a:solidFill>
-                            <a:srgbClr val="282828"/>
-                          </a:solidFill>
-                          <a:latin typeface="Arial"/>
-                        </a:rPr>
-                        <a:t>floor</a:t>
-                      </a:r>
-                    </a:p>
-                  </a:txBody>
-                  <a:tcPr marL="54864" marR="54864" marT="18288" marB="18288">
-                    <a:solidFill>
-                      <a:srgbClr val="ECF1F6"/>
-                    </a:solidFill>
-                  </a:tcPr>
-                </a:tc>
-                <a:tc>
-                  <a:txBody>
-                    <a:bodyPr wrap="square"/>
-                    <a:lstStyle/>
-                    <a:p>
-                      <a:r>
-                        <a:rPr sz="1000" b="0">
-                          <a:solidFill>
-                            <a:srgbClr val="282828"/>
-                          </a:solidFill>
-                          <a:latin typeface="Arial"/>
-                        </a:rPr>
-                        <a:t>rms of the actuators that were not changed, in picometers</a:t>
-                      </a:r>
-                    </a:p>
-                  </a:txBody>
-                  <a:tcPr marL="54864" marR="54864" marT="18288" marB="18288">
-                    <a:solidFill>
-                      <a:srgbClr val="ECF1F6"/>
-                    </a:solidFill>
-                  </a:tcPr>
-                </a:tc>
-              </a:tr>
-              <a:tr h="262890">
-                <a:tc>
-                  <a:txBody>
-                    <a:bodyPr wrap="square"/>
-                    <a:lstStyle/>
-                    <a:p>
-                      <a:r>
-                        <a:rPr sz="1000" b="0">
-                          <a:solidFill>
-                            <a:srgbClr val="282828"/>
-                          </a:solidFill>
-                          <a:latin typeface="Arial"/>
-                        </a:rPr>
-                        <a:t>SNR</a:t>
-                      </a:r>
-                    </a:p>
-                  </a:txBody>
-                  <a:tcPr marL="54864" marR="54864" marT="18288" marB="18288">
-                    <a:solidFill>
-                      <a:srgbClr val="FFFFFF"/>
-                    </a:solidFill>
-                  </a:tcPr>
-                </a:tc>
-                <a:tc>
-                  <a:txBody>
-                    <a:bodyPr wrap="square"/>
-                    <a:lstStyle/>
-                    <a:p>
-                      <a:r>
-                        <a:rPr sz="1000" b="0">
-                          <a:solidFill>
-                            <a:srgbClr val="282828"/>
-                          </a:solidFill>
-                          <a:latin typeface="Arial"/>
-                        </a:rPr>
-                        <a:t>recovered change ÷ floor; above 5 counts as detected</a:t>
-                      </a:r>
-                    </a:p>
-                  </a:txBody>
-                  <a:tcPr marL="54864" marR="54864" marT="18288" marB="18288">
-                    <a:solidFill>
-                      <a:srgbClr val="FFFFFF"/>
-                    </a:solidFill>
-                  </a:tcPr>
-                </a:tc>
-              </a:tr>
-              <a:tr h="434340">
-                <a:tc>
-                  <a:txBody>
-                    <a:bodyPr wrap="square"/>
-                    <a:lstStyle/>
-                    <a:p>
-                      <a:r>
-                        <a:rPr sz="1000" b="0">
-                          <a:solidFill>
-                            <a:srgbClr val="282828"/>
-                          </a:solidFill>
-                          <a:latin typeface="Arial"/>
-                        </a:rPr>
-                        <a:t>photons per measurement</a:t>
-                      </a:r>
-                    </a:p>
-                  </a:txBody>
-                  <a:tcPr marL="54864" marR="54864" marT="18288" marB="18288">
-                    <a:solidFill>
-                      <a:srgbClr val="ECF1F6"/>
-                    </a:solidFill>
-                  </a:tcPr>
-                </a:tc>
-                <a:tc>
-                  <a:txBody>
-                    <a:bodyPr wrap="square"/>
-                    <a:lstStyle/>
-                    <a:p>
-                      <a:r>
-                        <a:rPr sz="1000" b="0">
-                          <a:solidFill>
-                            <a:srgbClr val="282828"/>
-                          </a:solidFill>
-                          <a:latin typeface="Arial"/>
-                        </a:rPr>
-                        <a:t>all frames of one measurement summed; 1e14 photons at 633 nm = 31 µJ = 0.13 s of a 1 mW laser at 25% throughput</a:t>
-                      </a:r>
-                    </a:p>
-                  </a:txBody>
-                  <a:tcPr marL="54864" marR="54864" marT="18288" marB="18288">
-                    <a:solidFill>
-                      <a:srgbClr val="ECF1F6"/>
-                    </a:solidFill>
-                  </a:tcPr>
-                </a:tc>
-              </a:tr>
-              <a:tr h="434340">
-                <a:tc>
-                  <a:txBody>
-                    <a:bodyPr wrap="square"/>
-                    <a:lstStyle/>
-                    <a:p>
-                      <a:r>
-                        <a:rPr sz="1000" b="0">
-                          <a:solidFill>
-                            <a:srgbClr val="282828"/>
-                          </a:solidFill>
-                          <a:latin typeface="Arial"/>
-                        </a:rPr>
-                        <a:t>capture range to 10%</a:t>
-                      </a:r>
-                    </a:p>
-                  </a:txBody>
-                  <a:tcPr marL="54864" marR="54864" marT="18288" marB="18288">
-                    <a:solidFill>
-                      <a:srgbClr val="FFFFFF"/>
-                    </a:solidFill>
-                  </a:tcPr>
-                </a:tc>
-                <a:tc>
-                  <a:txBody>
-                    <a:bodyPr wrap="square"/>
-                    <a:lstStyle/>
-                    <a:p>
-                      <a:r>
-                        <a:rPr sz="1000" b="0">
-                          <a:solidFill>
-                            <a:srgbClr val="282828"/>
-                          </a:solidFill>
-                          <a:latin typeface="Arial"/>
-                        </a:rPr>
-                        <a:t>the largest working surface at which a 10 nm change on the 47 sites reads within 10%, the matrix left as calibrated at 30 nm</a:t>
-                      </a:r>
-                    </a:p>
-                  </a:txBody>
-                  <a:tcPr marL="54864" marR="54864" marT="18288" marB="18288">
-                    <a:solidFill>
-                      <a:srgbClr val="FFFFFF"/>
-                    </a:solidFill>
-                  </a:tcPr>
-                </a:tc>
-              </a:tr>
-              <a:tr h="262890">
-                <a:tc>
-                  <a:txBody>
-                    <a:bodyPr wrap="square"/>
-                    <a:lstStyle/>
-                    <a:p>
-                      <a:r>
-                        <a:rPr sz="1000" b="0">
-                          <a:solidFill>
-                            <a:srgbClr val="282828"/>
-                          </a:solidFill>
-                          <a:latin typeface="Arial"/>
-                        </a:rPr>
-                        <a:t>capture</a:t>
-                      </a:r>
-                    </a:p>
-                  </a:txBody>
-                  <a:tcPr marL="54864" marR="54864" marT="18288" marB="18288">
-                    <a:solidFill>
-                      <a:srgbClr val="ECF1F6"/>
-                    </a:solidFill>
-                  </a:tcPr>
-                </a:tc>
-                <a:tc>
-                  <a:txBody>
-                    <a:bodyPr wrap="square"/>
-                    <a:lstStyle/>
-                    <a:p>
-                      <a:r>
-                        <a:rPr sz="1000" b="0">
-                          <a:solidFill>
-                            <a:srgbClr val="282828"/>
-                          </a:solidFill>
-                          <a:latin typeface="Arial"/>
-                        </a:rPr>
-                        <a:t>the largest starting surface the servo brings to 3 pm</a:t>
-                      </a:r>
-                    </a:p>
-                  </a:txBody>
-                  <a:tcPr marL="54864" marR="54864" marT="18288" marB="18288">
-                    <a:solidFill>
-                      <a:srgbClr val="ECF1F6"/>
-                    </a:solidFill>
-                  </a:tcPr>
-                </a:tc>
-              </a:tr>
-              <a:tr h="434340">
-                <a:tc>
-                  <a:txBody>
-                    <a:bodyPr wrap="square"/>
-                    <a:lstStyle/>
-                    <a:p>
-                      <a:r>
-                        <a:rPr sz="1000" b="0">
-                          <a:solidFill>
-                            <a:srgbClr val="282828"/>
-                          </a:solidFill>
-                          <a:latin typeface="Arial"/>
-                        </a:rPr>
-                        <a:t>hold, one number</a:t>
-                      </a:r>
-                    </a:p>
-                  </a:txBody>
-                  <a:tcPr marL="54864" marR="54864" marT="18288" marB="18288">
-                    <a:solidFill>
-                      <a:srgbClr val="FFFFFF"/>
-                    </a:solidFill>
-                  </a:tcPr>
-                </a:tc>
-                <a:tc>
-                  <a:txBody>
-                    <a:bodyPr wrap="square"/>
-                    <a:lstStyle/>
-                    <a:p>
-                      <a:r>
-                        <a:rPr sz="1000" b="0">
-                          <a:solidFill>
-                            <a:srgbClr val="282828"/>
-                          </a:solidFill>
-                          <a:latin typeface="Arial"/>
-                        </a:rPr>
-                        <a:t>photons per cycle that hold 3 pm rms in a 60-cycle loop at gain 0.5</a:t>
-                      </a:r>
-                    </a:p>
-                  </a:txBody>
-                  <a:tcPr marL="54864" marR="54864" marT="18288" marB="18288">
-                    <a:solidFill>
-                      <a:srgbClr val="FFFFFF"/>
-                    </a:solidFill>
-                  </a:tcPr>
-                </a:tc>
-              </a:tr>
-            </a:tbl>
-          </a:graphicData>
-        </a:graphic>
-      </p:graphicFrame>
       <p:sp>
         <p:nvSpPr>
           <p:cNvPr id="6" name="TextBox 5"/>
@@ -15829,7 +17164,7 @@
         </p:nvSpPr>
         <p:spPr>
           <a:xfrm>
-            <a:off x="6400800" y="4233672"/>
+            <a:off x="6400800" y="4133087"/>
             <a:ext cx="5394960" cy="274320"/>
           </a:xfrm>
           <a:prstGeom prst="rect">
@@ -15855,7 +17190,7 @@
                 </a:solidFill>
                 <a:latin typeface="Arial"/>
               </a:rPr>
-              <a:t>Measuring a change costs two measurements.  The 96×96 at 385 detector pixels per pupil is the flight-like sampling; most rows here are at 193 pixels, which the sampling study showed reads the same numbers.</a:t>
+              <a:t>Run tags oap_deck, loop_oap, descent_oap, zoap (all on the 7° rig with the 25 mm conjugate error; the seat-trim solve is in tg_psi_dm96_oap/REPORT_gauge_ifo.md section 4).  These rows stand as the record of what a misfed collimator costs; the redesigned rig's measurements are on the next slide.</a:t>
             </a:r>
           </a:p>
         </p:txBody>
@@ -15868,7 +17203,7 @@
 </p:sld>
 </file>
 
-<file path=ppt/slides/slide30.xml><?xml version="1.0" encoding="utf-8"?>
+<file path=ppt/slides/slide31.xml><?xml version="1.0" encoding="utf-8"?>
 <p:sld xmlns:a="http://schemas.openxmlformats.org/drawingml/2006/main" xmlns:p="http://schemas.openxmlformats.org/presentationml/2006/main" xmlns:r="http://schemas.openxmlformats.org/officeDocument/2006/relationships">
   <p:cSld>
     <p:spTree>
@@ -16567,7 +17902,7 @@
 </p:sld>
 </file>
 
-<file path=ppt/slides/slide31.xml><?xml version="1.0" encoding="utf-8"?>
+<file path=ppt/slides/slide32.xml><?xml version="1.0" encoding="utf-8"?>
 <p:sld xmlns:a="http://schemas.openxmlformats.org/drawingml/2006/main" xmlns:p="http://schemas.openxmlformats.org/presentationml/2006/main" xmlns:r="http://schemas.openxmlformats.org/officeDocument/2006/relationships">
   <p:cSld>
     <p:spTree>
@@ -17606,7 +18941,7 @@
 </p:sld>
 </file>
 
-<file path=ppt/slides/slide32.xml><?xml version="1.0" encoding="utf-8"?>
+<file path=ppt/slides/slide33.xml><?xml version="1.0" encoding="utf-8"?>
 <p:sld xmlns:a="http://schemas.openxmlformats.org/drawingml/2006/main" xmlns:p="http://schemas.openxmlformats.org/presentationml/2006/main" xmlns:r="http://schemas.openxmlformats.org/officeDocument/2006/relationships">
   <p:cSld>
     <p:spTree>
@@ -18780,7 +20115,7 @@
 </p:sld>
 </file>
 
-<file path=ppt/slides/slide33.xml><?xml version="1.0" encoding="utf-8"?>
+<file path=ppt/slides/slide34.xml><?xml version="1.0" encoding="utf-8"?>
 <p:sld xmlns:a="http://schemas.openxmlformats.org/drawingml/2006/main" xmlns:p="http://schemas.openxmlformats.org/presentationml/2006/main" xmlns:r="http://schemas.openxmlformats.org/officeDocument/2006/relationships">
   <p:cSld>
     <p:spTree>
@@ -19062,7 +20397,7 @@
 </p:sld>
 </file>
 
-<file path=ppt/slides/slide34.xml><?xml version="1.0" encoding="utf-8"?>
+<file path=ppt/slides/slide35.xml><?xml version="1.0" encoding="utf-8"?>
 <p:sld xmlns:a="http://schemas.openxmlformats.org/drawingml/2006/main" xmlns:p="http://schemas.openxmlformats.org/presentationml/2006/main" xmlns:r="http://schemas.openxmlformats.org/officeDocument/2006/relationships">
   <p:cSld>
     <p:spTree>
@@ -19281,7 +20616,7 @@
 </p:sld>
 </file>
 
-<file path=ppt/slides/slide35.xml><?xml version="1.0" encoding="utf-8"?>
+<file path=ppt/slides/slide36.xml><?xml version="1.0" encoding="utf-8"?>
 <p:sld xmlns:a="http://schemas.openxmlformats.org/drawingml/2006/main" xmlns:p="http://schemas.openxmlformats.org/presentationml/2006/main" xmlns:r="http://schemas.openxmlformats.org/officeDocument/2006/relationships">
   <p:cSld>
     <p:spTree>
@@ -19927,7 +21262,7 @@
 </p:sld>
 </file>
 
-<file path=ppt/slides/slide36.xml><?xml version="1.0" encoding="utf-8"?>
+<file path=ppt/slides/slide37.xml><?xml version="1.0" encoding="utf-8"?>
 <p:sld xmlns:a="http://schemas.openxmlformats.org/drawingml/2006/main" xmlns:p="http://schemas.openxmlformats.org/presentationml/2006/main" xmlns:r="http://schemas.openxmlformats.org/officeDocument/2006/relationships">
   <p:cSld>
     <p:spTree>
@@ -20146,7 +21481,7 @@
 </p:sld>
 </file>
 
-<file path=ppt/slides/slide37.xml><?xml version="1.0" encoding="utf-8"?>
+<file path=ppt/slides/slide38.xml><?xml version="1.0" encoding="utf-8"?>
 <p:sld xmlns:a="http://schemas.openxmlformats.org/drawingml/2006/main" xmlns:p="http://schemas.openxmlformats.org/presentationml/2006/main" xmlns:r="http://schemas.openxmlformats.org/officeDocument/2006/relationships">
   <p:cSld>
     <p:spTree>
@@ -20671,7 +22006,7 @@
 </p:sld>
 </file>
 
-<file path=ppt/slides/slide38.xml><?xml version="1.0" encoding="utf-8"?>
+<file path=ppt/slides/slide39.xml><?xml version="1.0" encoding="utf-8"?>
 <p:sld xmlns:a="http://schemas.openxmlformats.org/drawingml/2006/main" xmlns:p="http://schemas.openxmlformats.org/presentationml/2006/main" xmlns:r="http://schemas.openxmlformats.org/officeDocument/2006/relationships">
   <p:cSld>
     <p:spTree>
@@ -20911,265 +22246,6 @@
                 <a:latin typeface="Arial"/>
               </a:rPr>
               <a:t>•  Direct actuator metrology (capacitive, optical): a coarse reference the optical gauge is calibrated against.</a:t>
-            </a:r>
-          </a:p>
-        </p:txBody>
-      </p:sp>
-    </p:spTree>
-  </p:cSld>
-  <p:clrMapOvr>
-    <a:masterClrMapping/>
-  </p:clrMapOvr>
-</p:sld>
-</file>
-
-<file path=ppt/slides/slide39.xml><?xml version="1.0" encoding="utf-8"?>
-<p:sld xmlns:a="http://schemas.openxmlformats.org/drawingml/2006/main" xmlns:p="http://schemas.openxmlformats.org/presentationml/2006/main" xmlns:r="http://schemas.openxmlformats.org/officeDocument/2006/relationships">
-  <p:cSld>
-    <p:spTree>
-      <p:nvGrpSpPr>
-        <p:cNvPr id="1" name=""/>
-        <p:cNvGrpSpPr/>
-        <p:nvPr/>
-      </p:nvGrpSpPr>
-      <p:grpSpPr/>
-      <p:sp>
-        <p:nvSpPr>
-          <p:cNvPr id="2" name="TextBox 1"/>
-          <p:cNvSpPr txBox="1"/>
-          <p:nvPr/>
-        </p:nvSpPr>
-        <p:spPr>
-          <a:xfrm>
-            <a:off x="411480" y="201168"/>
-            <a:ext cx="11368735" cy="914400"/>
-          </a:xfrm>
-          <a:prstGeom prst="rect">
-            <a:avLst/>
-          </a:prstGeom>
-          <a:noFill/>
-        </p:spPr>
-        <p:txBody>
-          <a:bodyPr wrap="square">
-            <a:spAutoFit/>
-          </a:bodyPr>
-          <a:lstStyle/>
-          <a:p>
-            <a:pPr>
-              <a:spcAft>
-                <a:spcPts val="400"/>
-              </a:spcAft>
-            </a:pPr>
-            <a:r>
-              <a:rPr sz="2400" b="1">
-                <a:solidFill>
-                  <a:srgbClr val="1F4E79"/>
-                </a:solidFill>
-                <a:latin typeface="Arial"/>
-              </a:rPr>
-              <a:t>Future work: from this model to as-built performance</a:t>
-            </a:r>
-          </a:p>
-          <a:p>
-            <a:pPr>
-              <a:spcAft>
-                <a:spcPts val="0"/>
-              </a:spcAft>
-            </a:pPr>
-            <a:r>
-              <a:rPr sz="1250" b="0">
-                <a:solidFill>
-                  <a:srgbClr val="6E6E6E"/>
-                </a:solidFill>
-                <a:latin typeface="Arial"/>
-              </a:rPr>
-              <a:t>The model today has ideal optics, a perfect camera, photon noise, and mirror and camera drift; five additions, in the order they are likely to matter</a:t>
-            </a:r>
-          </a:p>
-        </p:txBody>
-      </p:sp>
-      <p:sp>
-        <p:nvSpPr>
-          <p:cNvPr id="3" name="Rectangle 2"/>
-          <p:cNvSpPr/>
-          <p:nvPr/>
-        </p:nvSpPr>
-        <p:spPr>
-          <a:xfrm>
-            <a:off x="411480" y="1133856"/>
-            <a:ext cx="11368735" cy="20320"/>
-          </a:xfrm>
-          <a:prstGeom prst="rect">
-            <a:avLst/>
-          </a:prstGeom>
-          <a:solidFill>
-            <a:srgbClr val="B8C6D4"/>
-          </a:solidFill>
-          <a:ln>
-            <a:noFill/>
-          </a:ln>
-          <a:effectLst/>
-        </p:spPr>
-        <p:style>
-          <a:lnRef idx="1">
-            <a:schemeClr val="accent1"/>
-          </a:lnRef>
-          <a:fillRef idx="3">
-            <a:schemeClr val="accent1"/>
-          </a:fillRef>
-          <a:effectRef idx="2">
-            <a:schemeClr val="accent1"/>
-          </a:effectRef>
-          <a:fontRef idx="minor">
-            <a:schemeClr val="lt1"/>
-          </a:fontRef>
-        </p:style>
-        <p:txBody>
-          <a:bodyPr rtlCol="0" anchor="ctr"/>
-          <a:lstStyle/>
-          <a:p>
-            <a:pPr algn="ctr"/>
-          </a:p>
-        </p:txBody>
-      </p:sp>
-      <p:sp>
-        <p:nvSpPr>
-          <p:cNvPr id="4" name="TextBox 3"/>
-          <p:cNvSpPr txBox="1"/>
-          <p:nvPr/>
-        </p:nvSpPr>
-        <p:spPr>
-          <a:xfrm>
-            <a:off x="411480" y="1298448"/>
-            <a:ext cx="11368735" cy="274320"/>
-          </a:xfrm>
-          <a:prstGeom prst="rect">
-            <a:avLst/>
-          </a:prstGeom>
-          <a:noFill/>
-        </p:spPr>
-        <p:txBody>
-          <a:bodyPr wrap="square">
-            <a:spAutoFit/>
-          </a:bodyPr>
-          <a:lstStyle/>
-          <a:p>
-            <a:pPr>
-              <a:spcAft>
-                <a:spcPts val="600"/>
-              </a:spcAft>
-            </a:pPr>
-            <a:r>
-              <a:rPr sz="1500" b="0">
-                <a:solidFill>
-                  <a:srgbClr val="282828"/>
-                </a:solidFill>
-                <a:latin typeface="Arial"/>
-              </a:rPr>
-              <a:t>•  The camera sets the measurement time, not the laser: 1e14 photons over 1e5 pupil pixels is 1e9 electrons per pixel; with a 1e5-electron well that is 1e4 co-added frames, 100 s at 100 frames per second, against 0.13 s of laser.  Price well depth, frame rate, read noise (as the square root of the frame count), bit depth, gain nonlinearity, pixel-response nonuniformity, persistence between the stepped frames.</a:t>
-            </a:r>
-          </a:p>
-          <a:p>
-            <a:pPr>
-              <a:spcAft>
-                <a:spcPts val="600"/>
-              </a:spcAft>
-            </a:pPr>
-            <a:r>
-              <a:rPr sz="1500" b="0">
-                <a:solidFill>
-                  <a:srgbClr val="282828"/>
-                </a:solidFill>
-                <a:latin typeface="Arial"/>
-              </a:rPr>
-              <a:t>•  Optical surface errors: every lens, mirror, plate and the mask substrate with a typical figure (λ/10 to λ/20, a 1/f² spectrum) on the element; the sensors' reference core sees the low orders (0.16 wave of defocus moved every number in the early model); the dimple's etch depth and the mask's flatness.</a:t>
-            </a:r>
-          </a:p>
-          <a:p>
-            <a:pPr>
-              <a:spcAft>
-                <a:spcPts val="600"/>
-              </a:spcAft>
-            </a:pPr>
-            <a:r>
-              <a:rPr sz="1500" b="0">
-                <a:solidFill>
-                  <a:srgbClr val="282828"/>
-                </a:solidFill>
-                <a:latin typeface="Arial"/>
-              </a:rPr>
-              <a:t>•  Alignment and stability: the sensitivities exist (10 µm, 10 µrad); add the mask's centering drift on the focal spot, the bench's thermal expansion, source pointing and wavelength drift, laser polarization angle, and the two-arm instruments' non-common-path air and mounts.</a:t>
-            </a:r>
-          </a:p>
-          <a:p>
-            <a:pPr>
-              <a:spcAft>
-                <a:spcPts val="600"/>
-              </a:spcAft>
-            </a:pPr>
-            <a:r>
-              <a:rPr sz="1500" b="0">
-                <a:solidFill>
-                  <a:srgbClr val="282828"/>
-                </a:solidFill>
-                <a:latin typeface="Arial"/>
-              </a:rPr>
-              <a:t>•  More drift in the loop: actuator hysteresis and creep, command quantization (14-16 bits: 0.1-0.5 nm steps as a floor), influence-function error, vibration within a stepped scan.</a:t>
-            </a:r>
-          </a:p>
-          <a:p>
-            <a:pPr>
-              <a:spcAft>
-                <a:spcPts val="600"/>
-              </a:spcAft>
-            </a:pPr>
-            <a:r>
-              <a:rPr sz="1500" b="0">
-                <a:solidFill>
-                  <a:srgbClr val="282828"/>
-                </a:solidFill>
-                <a:latin typeface="Arial"/>
-              </a:rPr>
-              <a:t>•  The error budget in the JPL form: per reading, fixed terms after calibration, drift terms weighted by the servo bandwidth, noise terms in quadrature, to a held error at a stated light and time.  This deck's comparison table is its first column.</a:t>
-            </a:r>
-          </a:p>
-        </p:txBody>
-      </p:sp>
-      <p:sp>
-        <p:nvSpPr>
-          <p:cNvPr id="5" name="TextBox 4"/>
-          <p:cNvSpPr txBox="1"/>
-          <p:nvPr/>
-        </p:nvSpPr>
-        <p:spPr>
-          <a:xfrm>
-            <a:off x="411480" y="5750814"/>
-            <a:ext cx="11368735" cy="274320"/>
-          </a:xfrm>
-          <a:prstGeom prst="rect">
-            <a:avLst/>
-          </a:prstGeom>
-          <a:noFill/>
-        </p:spPr>
-        <p:txBody>
-          <a:bodyPr wrap="square">
-            <a:spAutoFit/>
-          </a:bodyPr>
-          <a:lstStyle/>
-          <a:p>
-            <a:pPr>
-              <a:spcAft>
-                <a:spcPts val="600"/>
-              </a:spcAft>
-            </a:pPr>
-            <a:r>
-              <a:rPr sz="1050" b="0">
-                <a:solidFill>
-                  <a:srgbClr val="6E6E6E"/>
-                </a:solidFill>
-                <a:latin typeface="Arial"/>
-              </a:rPr>
-              <a:t>The telescope-level version of this (an allocation table rolled through the sensitivity model, then the closed-loop predictor) is being planned separately; it is a later add to this deck.</a:t>
             </a:r>
           </a:p>
         </p:txBody>
@@ -21797,7 +22873,7 @@
                 </a:solidFill>
                 <a:latin typeface="Arial"/>
               </a:rPr>
-              <a:t>How every configuration was analyzed</a:t>
+              <a:t>Future work: from this model to as-built performance</a:t>
             </a:r>
           </a:p>
           <a:p>
@@ -21813,7 +22889,7 @@
                 </a:solidFill>
                 <a:latin typeface="Arial"/>
               </a:rPr>
-              <a:t>One repeatable path, ten steps, the same for all four approaches: a new sensor is a new reading class in the shared runner plus its gate, then steps 4 to 10 unchanged</a:t>
+              <a:t>The model today has ideal optics, a perfect camera, photon noise, and mirror and camera drift; five additions, in the order they are likely to matter</a:t>
             </a:r>
           </a:p>
         </p:txBody>
@@ -21862,886 +22938,119 @@
           </a:p>
         </p:txBody>
       </p:sp>
-      <p:graphicFrame>
-        <p:nvGraphicFramePr>
-          <p:cNvPr id="4" name="Table 3"/>
-          <p:cNvGraphicFramePr>
-            <a:graphicFrameLocks noGrp="1"/>
-          </p:cNvGraphicFramePr>
-          <p:nvPr/>
-        </p:nvGraphicFramePr>
-        <p:xfrm>
-          <a:off x="411480" y="1298448"/>
-          <a:ext cx="5806439" cy="3188970"/>
-        </p:xfrm>
-        <a:graphic>
-          <a:graphicData uri="http://schemas.openxmlformats.org/drawingml/2006/table">
-            <a:tbl>
-              <a:tblPr firstRow="1" bandRow="1">
-                <a:tableStyleId>{5C22544A-7EE6-4342-B048-85BDC9FD1C3A}</a:tableStyleId>
-              </a:tblPr>
-              <a:tblGrid>
-                <a:gridCol w="436880"/>
-                <a:gridCol w="2963389"/>
-                <a:gridCol w="2406170"/>
-              </a:tblGrid>
-              <a:tr h="280035">
-                <a:tc>
-                  <a:txBody>
-                    <a:bodyPr wrap="square"/>
-                    <a:lstStyle/>
-                    <a:p>
-                      <a:r>
-                        <a:rPr sz="1100" b="1">
-                          <a:solidFill>
-                            <a:srgbClr val="FFFFFF"/>
-                          </a:solidFill>
-                          <a:latin typeface="Arial"/>
-                        </a:rPr>
-                        <a:t>step</a:t>
-                      </a:r>
-                    </a:p>
-                  </a:txBody>
-                  <a:tcPr marL="54864" marR="54864" marT="18288" marB="18288">
-                    <a:solidFill>
-                      <a:srgbClr val="1F4E79"/>
-                    </a:solidFill>
-                  </a:tcPr>
-                </a:tc>
-                <a:tc>
-                  <a:txBody>
-                    <a:bodyPr wrap="square"/>
-                    <a:lstStyle/>
-                    <a:p>
-                      <a:r>
-                        <a:rPr sz="1100" b="1">
-                          <a:solidFill>
-                            <a:srgbClr val="FFFFFF"/>
-                          </a:solidFill>
-                          <a:latin typeface="Arial"/>
-                        </a:rPr>
-                        <a:t>what</a:t>
-                      </a:r>
-                    </a:p>
-                  </a:txBody>
-                  <a:tcPr marL="54864" marR="54864" marT="18288" marB="18288">
-                    <a:solidFill>
-                      <a:srgbClr val="1F4E79"/>
-                    </a:solidFill>
-                  </a:tcPr>
-                </a:tc>
-                <a:tc>
-                  <a:txBody>
-                    <a:bodyPr wrap="square"/>
-                    <a:lstStyle/>
-                    <a:p>
-                      <a:r>
-                        <a:rPr sz="1100" b="1">
-                          <a:solidFill>
-                            <a:srgbClr val="FFFFFF"/>
-                          </a:solidFill>
-                          <a:latin typeface="Arial"/>
-                        </a:rPr>
-                        <a:t>gate or output</a:t>
-                      </a:r>
-                    </a:p>
-                  </a:txBody>
-                  <a:tcPr marL="54864" marR="54864" marT="18288" marB="18288">
-                    <a:solidFill>
-                      <a:srgbClr val="1F4E79"/>
-                    </a:solidFill>
-                  </a:tcPr>
-                </a:tc>
-              </a:tr>
-              <a:tr h="468630">
-                <a:tc>
-                  <a:txBody>
-                    <a:bodyPr wrap="square"/>
-                    <a:lstStyle/>
-                    <a:p>
-                      <a:r>
-                        <a:rPr sz="1100" b="0">
-                          <a:solidFill>
-                            <a:srgbClr val="282828"/>
-                          </a:solidFill>
-                          <a:latin typeface="Arial"/>
-                        </a:rPr>
-                        <a:t>1</a:t>
-                      </a:r>
-                    </a:p>
-                  </a:txBody>
-                  <a:tcPr marL="54864" marR="54864" marT="18288" marB="18288">
-                    <a:solidFill>
-                      <a:srgbClr val="FFFFFF"/>
-                    </a:solidFill>
-                  </a:tcPr>
-                </a:tc>
-                <a:tc>
-                  <a:txBody>
-                    <a:bodyPr wrap="square"/>
-                    <a:lstStyle/>
-                    <a:p>
-                      <a:r>
-                        <a:rPr sz="1100" b="0">
-                          <a:solidFill>
-                            <a:srgbClr val="282828"/>
-                          </a:solidFill>
-                          <a:latin typeface="Arial"/>
-                        </a:rPr>
-                        <a:t>one parameter sheet and one runner per approach; batch wrappers</a:t>
-                      </a:r>
-                    </a:p>
-                  </a:txBody>
-                  <a:tcPr marL="54864" marR="54864" marT="18288" marB="18288">
-                    <a:solidFill>
-                      <a:srgbClr val="FFFFFF"/>
-                    </a:solidFill>
-                  </a:tcPr>
-                </a:tc>
-                <a:tc>
-                  <a:txBody>
-                    <a:bodyPr wrap="square"/>
-                    <a:lstStyle/>
-                    <a:p>
-                      <a:r>
-                        <a:rPr sz="1100" b="0">
-                          <a:solidFill>
-                            <a:srgbClr val="282828"/>
-                          </a:solidFill>
-                          <a:latin typeface="Arial"/>
-                        </a:rPr>
-                        <a:t>every number has a run tag</a:t>
-                      </a:r>
-                    </a:p>
-                  </a:txBody>
-                  <a:tcPr marL="54864" marR="54864" marT="18288" marB="18288">
-                    <a:solidFill>
-                      <a:srgbClr val="FFFFFF"/>
-                    </a:solidFill>
-                  </a:tcPr>
-                </a:tc>
-              </a:tr>
-              <a:tr h="657225">
-                <a:tc>
-                  <a:txBody>
-                    <a:bodyPr wrap="square"/>
-                    <a:lstStyle/>
-                    <a:p>
-                      <a:r>
-                        <a:rPr sz="1100" b="0">
-                          <a:solidFill>
-                            <a:srgbClr val="282828"/>
-                          </a:solidFill>
-                          <a:latin typeface="Arial"/>
-                        </a:rPr>
-                        <a:t>2</a:t>
-                      </a:r>
-                    </a:p>
-                  </a:txBody>
-                  <a:tcPr marL="54864" marR="54864" marT="18288" marB="18288">
-                    <a:solidFill>
-                      <a:srgbClr val="ECF1F6"/>
-                    </a:solidFill>
-                  </a:tcPr>
-                </a:tc>
-                <a:tc>
-                  <a:txBody>
-                    <a:bodyPr wrap="square"/>
-                    <a:lstStyle/>
-                    <a:p>
-                      <a:r>
-                        <a:rPr sz="1100" b="0">
-                          <a:solidFill>
-                            <a:srgbClr val="282828"/>
-                          </a:solidFill>
-                          <a:latin typeface="Arial"/>
-                        </a:rPr>
-                        <a:t>build the bench from the sheet, trace it; clearance of end bodies and node parts; detector-leg focus; sampling budget</a:t>
-                      </a:r>
-                    </a:p>
-                  </a:txBody>
-                  <a:tcPr marL="54864" marR="54864" marT="18288" marB="18288">
-                    <a:solidFill>
-                      <a:srgbClr val="ECF1F6"/>
-                    </a:solidFill>
-                  </a:tcPr>
-                </a:tc>
-                <a:tc>
-                  <a:txBody>
-                    <a:bodyPr wrap="square"/>
-                    <a:lstStyle/>
-                    <a:p>
-                      <a:r>
-                        <a:rPr sz="1100" b="0">
-                          <a:solidFill>
-                            <a:srgbClr val="282828"/>
-                          </a:solidFill>
-                          <a:latin typeface="Arial"/>
-                        </a:rPr>
-                        <a:t>every part clears by 25 mm; 6 pixels across the mask feature</a:t>
-                      </a:r>
-                    </a:p>
-                  </a:txBody>
-                  <a:tcPr marL="54864" marR="54864" marT="18288" marB="18288">
-                    <a:solidFill>
-                      <a:srgbClr val="ECF1F6"/>
-                    </a:solidFill>
-                  </a:tcPr>
-                </a:tc>
-              </a:tr>
-              <a:tr h="657225">
-                <a:tc>
-                  <a:txBody>
-                    <a:bodyPr wrap="square"/>
-                    <a:lstStyle/>
-                    <a:p>
-                      <a:r>
-                        <a:rPr sz="1100" b="0">
-                          <a:solidFill>
-                            <a:srgbClr val="282828"/>
-                          </a:solidFill>
-                          <a:latin typeface="Arial"/>
-                        </a:rPr>
-                        <a:t>3</a:t>
-                      </a:r>
-                    </a:p>
-                  </a:txBody>
-                  <a:tcPr marL="54864" marR="54864" marT="18288" marB="18288">
-                    <a:solidFill>
-                      <a:srgbClr val="FFFFFF"/>
-                    </a:solidFill>
-                  </a:tcPr>
-                </a:tc>
-                <a:tc>
-                  <a:txBody>
-                    <a:bodyPr wrap="square"/>
-                    <a:lstStyle/>
-                    <a:p>
-                      <a:r>
-                        <a:rPr sz="1100" b="0">
-                          <a:solidFill>
-                            <a:srgbClr val="282828"/>
-                          </a:solidFill>
-                          <a:latin typeface="Arial"/>
-                        </a:rPr>
-                        <a:t>model gates before any number</a:t>
-                      </a:r>
-                    </a:p>
-                  </a:txBody>
-                  <a:tcPr marL="54864" marR="54864" marT="18288" marB="18288">
-                    <a:solidFill>
-                      <a:srgbClr val="FFFFFF"/>
-                    </a:solidFill>
-                  </a:tcPr>
-                </a:tc>
-                <a:tc>
-                  <a:txBody>
-                    <a:bodyPr wrap="square"/>
-                    <a:lstStyle/>
-                    <a:p>
-                      <a:r>
-                        <a:rPr sz="1100" b="0">
-                          <a:solidFill>
-                            <a:srgbClr val="282828"/>
-                          </a:solidFill>
-                          <a:latin typeface="Arial"/>
-                        </a:rPr>
-                        <a:t>mask round trip, reference-wave surrogate, working-state amplitude, the reading on 100 nm pokes</a:t>
-                      </a:r>
-                    </a:p>
-                  </a:txBody>
-                  <a:tcPr marL="54864" marR="54864" marT="18288" marB="18288">
-                    <a:solidFill>
-                      <a:srgbClr val="FFFFFF"/>
-                    </a:solidFill>
-                  </a:tcPr>
-                </a:tc>
-              </a:tr>
-              <a:tr h="657225">
-                <a:tc>
-                  <a:txBody>
-                    <a:bodyPr wrap="square"/>
-                    <a:lstStyle/>
-                    <a:p>
-                      <a:r>
-                        <a:rPr sz="1100" b="0">
-                          <a:solidFill>
-                            <a:srgbClr val="282828"/>
-                          </a:solidFill>
-                          <a:latin typeface="Arial"/>
-                        </a:rPr>
-                        <a:t>4</a:t>
-                      </a:r>
-                    </a:p>
-                  </a:txBody>
-                  <a:tcPr marL="54864" marR="54864" marT="18288" marB="18288">
-                    <a:solidFill>
-                      <a:srgbClr val="ECF1F6"/>
-                    </a:solidFill>
-                  </a:tcPr>
-                </a:tc>
-                <a:tc>
-                  <a:txBody>
-                    <a:bodyPr wrap="square"/>
-                    <a:lstStyle/>
-                    <a:p>
-                      <a:r>
-                        <a:rPr sz="1100" b="0">
-                          <a:solidFill>
-                            <a:srgbClr val="282828"/>
-                          </a:solidFill>
-                          <a:latin typeface="Arial"/>
-                        </a:rPr>
-                        <a:t>calibration: the response matrix measured through the sensor, on the 30 nm working surface</a:t>
-                      </a:r>
-                    </a:p>
-                  </a:txBody>
-                  <a:tcPr marL="54864" marR="54864" marT="18288" marB="18288">
-                    <a:solidFill>
-                      <a:srgbClr val="ECF1F6"/>
-                    </a:solidFill>
-                  </a:tcPr>
-                </a:tc>
-                <a:tc>
-                  <a:txBody>
-                    <a:bodyPr wrap="square"/>
-                    <a:lstStyle/>
-                    <a:p>
-                      <a:r>
-                        <a:rPr sz="1100" b="0">
-                          <a:solidFill>
-                            <a:srgbClr val="282828"/>
-                          </a:solidFill>
-                          <a:latin typeface="Arial"/>
-                        </a:rPr>
-                        <a:t>piston null carried; stencil-site fit</a:t>
-                      </a:r>
-                    </a:p>
-                  </a:txBody>
-                  <a:tcPr marL="54864" marR="54864" marT="18288" marB="18288">
-                    <a:solidFill>
-                      <a:srgbClr val="ECF1F6"/>
-                    </a:solidFill>
-                  </a:tcPr>
-                </a:tc>
-              </a:tr>
-              <a:tr h="468630">
-                <a:tc>
-                  <a:txBody>
-                    <a:bodyPr wrap="square"/>
-                    <a:lstStyle/>
-                    <a:p>
-                      <a:r>
-                        <a:rPr sz="1100" b="0">
-                          <a:solidFill>
-                            <a:srgbClr val="282828"/>
-                          </a:solidFill>
-                          <a:latin typeface="Arial"/>
-                        </a:rPr>
-                        <a:t>5</a:t>
-                      </a:r>
-                    </a:p>
-                  </a:txBody>
-                  <a:tcPr marL="54864" marR="54864" marT="18288" marB="18288">
-                    <a:solidFill>
-                      <a:srgbClr val="FFFFFF"/>
-                    </a:solidFill>
-                  </a:tcPr>
-                </a:tc>
-                <a:tc>
-                  <a:txBody>
-                    <a:bodyPr wrap="square"/>
-                    <a:lstStyle/>
-                    <a:p>
-                      <a:r>
-                        <a:rPr sz="1100" b="0">
-                          <a:solidFill>
-                            <a:srgbClr val="282828"/>
-                          </a:solidFill>
-                          <a:latin typeface="Arial"/>
-                        </a:rPr>
-                        <a:t>rows on the working surface: 10 nm on one actuator; 1 nm on 47 sites; dense 10 nm</a:t>
-                      </a:r>
-                    </a:p>
-                  </a:txBody>
-                  <a:tcPr marL="54864" marR="54864" marT="18288" marB="18288">
-                    <a:solidFill>
-                      <a:srgbClr val="FFFFFF"/>
-                    </a:solidFill>
-                  </a:tcPr>
-                </a:tc>
-                <a:tc>
-                  <a:txBody>
-                    <a:bodyPr wrap="square"/>
-                    <a:lstStyle/>
-                    <a:p>
-                      <a:r>
-                        <a:rPr sz="1100" b="0">
-                          <a:solidFill>
-                            <a:srgbClr val="282828"/>
-                          </a:solidFill>
-                          <a:latin typeface="Arial"/>
-                        </a:rPr>
-                        <a:t>gain, floor, SNR</a:t>
-                      </a:r>
-                    </a:p>
-                  </a:txBody>
-                  <a:tcPr marL="54864" marR="54864" marT="18288" marB="18288">
-                    <a:solidFill>
-                      <a:srgbClr val="FFFFFF"/>
-                    </a:solidFill>
-                  </a:tcPr>
-                </a:tc>
-              </a:tr>
-            </a:tbl>
-          </a:graphicData>
-        </a:graphic>
-      </p:graphicFrame>
-      <p:graphicFrame>
-        <p:nvGraphicFramePr>
-          <p:cNvPr id="5" name="Table 4"/>
-          <p:cNvGraphicFramePr>
-            <a:graphicFrameLocks noGrp="1"/>
-          </p:cNvGraphicFramePr>
-          <p:nvPr/>
-        </p:nvGraphicFramePr>
-        <p:xfrm>
-          <a:off x="6400800" y="1298448"/>
-          <a:ext cx="5394959" cy="2777490"/>
-        </p:xfrm>
-        <a:graphic>
-          <a:graphicData uri="http://schemas.openxmlformats.org/drawingml/2006/table">
-            <a:tbl>
-              <a:tblPr firstRow="1" bandRow="1">
-                <a:tableStyleId>{5C22544A-7EE6-4342-B048-85BDC9FD1C3A}</a:tableStyleId>
-              </a:tblPr>
-              <a:tblGrid>
-                <a:gridCol w="410464"/>
-                <a:gridCol w="3846730"/>
-                <a:gridCol w="1137765"/>
-              </a:tblGrid>
-              <a:tr h="262890">
-                <a:tc>
-                  <a:txBody>
-                    <a:bodyPr wrap="square"/>
-                    <a:lstStyle/>
-                    <a:p>
-                      <a:r>
-                        <a:rPr sz="1000" b="1">
-                          <a:solidFill>
-                            <a:srgbClr val="FFFFFF"/>
-                          </a:solidFill>
-                          <a:latin typeface="Arial"/>
-                        </a:rPr>
-                        <a:t>step</a:t>
-                      </a:r>
-                    </a:p>
-                  </a:txBody>
-                  <a:tcPr marL="54864" marR="54864" marT="18288" marB="18288">
-                    <a:solidFill>
-                      <a:srgbClr val="1F4E79"/>
-                    </a:solidFill>
-                  </a:tcPr>
-                </a:tc>
-                <a:tc>
-                  <a:txBody>
-                    <a:bodyPr wrap="square"/>
-                    <a:lstStyle/>
-                    <a:p>
-                      <a:r>
-                        <a:rPr sz="1000" b="1">
-                          <a:solidFill>
-                            <a:srgbClr val="FFFFFF"/>
-                          </a:solidFill>
-                          <a:latin typeface="Arial"/>
-                        </a:rPr>
-                        <a:t>what</a:t>
-                      </a:r>
-                    </a:p>
-                  </a:txBody>
-                  <a:tcPr marL="54864" marR="54864" marT="18288" marB="18288">
-                    <a:solidFill>
-                      <a:srgbClr val="1F4E79"/>
-                    </a:solidFill>
-                  </a:tcPr>
-                </a:tc>
-                <a:tc>
-                  <a:txBody>
-                    <a:bodyPr wrap="square"/>
-                    <a:lstStyle/>
-                    <a:p>
-                      <a:r>
-                        <a:rPr sz="1000" b="1">
-                          <a:solidFill>
-                            <a:srgbClr val="FFFFFF"/>
-                          </a:solidFill>
-                          <a:latin typeface="Arial"/>
-                        </a:rPr>
-                        <a:t>gate or output</a:t>
-                      </a:r>
-                    </a:p>
-                  </a:txBody>
-                  <a:tcPr marL="54864" marR="54864" marT="18288" marB="18288">
-                    <a:solidFill>
-                      <a:srgbClr val="1F4E79"/>
-                    </a:solidFill>
-                  </a:tcPr>
-                </a:tc>
-              </a:tr>
-              <a:tr h="434340">
-                <a:tc>
-                  <a:txBody>
-                    <a:bodyPr wrap="square"/>
-                    <a:lstStyle/>
-                    <a:p>
-                      <a:r>
-                        <a:rPr sz="1000" b="0">
-                          <a:solidFill>
-                            <a:srgbClr val="282828"/>
-                          </a:solidFill>
-                          <a:latin typeface="Arial"/>
-                        </a:rPr>
-                        <a:t>6</a:t>
-                      </a:r>
-                    </a:p>
-                  </a:txBody>
-                  <a:tcPr marL="54864" marR="54864" marT="18288" marB="18288">
-                    <a:solidFill>
-                      <a:srgbClr val="FFFFFF"/>
-                    </a:solidFill>
-                  </a:tcPr>
-                </a:tc>
-                <a:tc>
-                  <a:txBody>
-                    <a:bodyPr wrap="square"/>
-                    <a:lstStyle/>
-                    <a:p>
-                      <a:r>
-                        <a:rPr sz="1000" b="0">
-                          <a:solidFill>
-                            <a:srgbClr val="282828"/>
-                          </a:solidFill>
-                          <a:latin typeface="Arial"/>
-                        </a:rPr>
-                        <a:t>capture range: the aging ladder to 10%; the matrix re-measured at 60 to 160 nm with its photon cost</a:t>
-                      </a:r>
-                    </a:p>
-                  </a:txBody>
-                  <a:tcPr marL="54864" marR="54864" marT="18288" marB="18288">
-                    <a:solidFill>
-                      <a:srgbClr val="FFFFFF"/>
-                    </a:solidFill>
-                  </a:tcPr>
-                </a:tc>
-                <a:tc>
-                  <a:txBody>
-                    <a:bodyPr wrap="square"/>
-                    <a:lstStyle/>
-                    <a:p>
-                      <a:r>
-                        <a:rPr sz="1000" b="0">
-                          <a:solidFill>
-                            <a:srgbClr val="282828"/>
-                          </a:solidFill>
-                          <a:latin typeface="Arial"/>
-                        </a:rPr>
-                        <a:t>range in nm; photons per rung</a:t>
-                      </a:r>
-                    </a:p>
-                  </a:txBody>
-                  <a:tcPr marL="54864" marR="54864" marT="18288" marB="18288">
-                    <a:solidFill>
-                      <a:srgbClr val="FFFFFF"/>
-                    </a:solidFill>
-                  </a:tcPr>
-                </a:tc>
-              </a:tr>
-              <a:tr h="434340">
-                <a:tc>
-                  <a:txBody>
-                    <a:bodyPr wrap="square"/>
-                    <a:lstStyle/>
-                    <a:p>
-                      <a:r>
-                        <a:rPr sz="1000" b="0">
-                          <a:solidFill>
-                            <a:srgbClr val="282828"/>
-                          </a:solidFill>
-                          <a:latin typeface="Arial"/>
-                        </a:rPr>
-                        <a:t>7</a:t>
-                      </a:r>
-                    </a:p>
-                  </a:txBody>
-                  <a:tcPr marL="54864" marR="54864" marT="18288" marB="18288">
-                    <a:solidFill>
-                      <a:srgbClr val="ECF1F6"/>
-                    </a:solidFill>
-                  </a:tcPr>
-                </a:tc>
-                <a:tc>
-                  <a:txBody>
-                    <a:bodyPr wrap="square"/>
-                    <a:lstStyle/>
-                    <a:p>
-                      <a:r>
-                        <a:rPr sz="1000" b="0">
-                          <a:solidFill>
-                            <a:srgbClr val="282828"/>
-                          </a:solidFill>
-                          <a:latin typeface="Arial"/>
-                        </a:rPr>
-                        <a:t>photons: noise fit over 1e8 to 1e14 per measurement, flat and on-surface matrix</a:t>
-                      </a:r>
-                    </a:p>
-                  </a:txBody>
-                  <a:tcPr marL="54864" marR="54864" marT="18288" marB="18288">
-                    <a:solidFill>
-                      <a:srgbClr val="ECF1F6"/>
-                    </a:solidFill>
-                  </a:tcPr>
-                </a:tc>
-                <a:tc>
-                  <a:txBody>
-                    <a:bodyPr wrap="square"/>
-                    <a:lstStyle/>
-                    <a:p>
-                      <a:r>
-                        <a:rPr sz="1000" b="0">
-                          <a:solidFill>
-                            <a:srgbClr val="282828"/>
-                          </a:solidFill>
-                          <a:latin typeface="Arial"/>
-                        </a:rPr>
-                        <a:t>photons for 1 pm</a:t>
-                      </a:r>
-                    </a:p>
-                  </a:txBody>
-                  <a:tcPr marL="54864" marR="54864" marT="18288" marB="18288">
-                    <a:solidFill>
-                      <a:srgbClr val="ECF1F6"/>
-                    </a:solidFill>
-                  </a:tcPr>
-                </a:tc>
-              </a:tr>
-              <a:tr h="605790">
-                <a:tc>
-                  <a:txBody>
-                    <a:bodyPr wrap="square"/>
-                    <a:lstStyle/>
-                    <a:p>
-                      <a:r>
-                        <a:rPr sz="1000" b="0">
-                          <a:solidFill>
-                            <a:srgbClr val="282828"/>
-                          </a:solidFill>
-                          <a:latin typeface="Arial"/>
-                        </a:rPr>
-                        <a:t>8</a:t>
-                      </a:r>
-                    </a:p>
-                  </a:txBody>
-                  <a:tcPr marL="54864" marR="54864" marT="18288" marB="18288">
-                    <a:solidFill>
-                      <a:srgbClr val="FFFFFF"/>
-                    </a:solidFill>
-                  </a:tcPr>
-                </a:tc>
-                <a:tc>
-                  <a:txBody>
-                    <a:bodyPr wrap="square"/>
-                    <a:lstStyle/>
-                    <a:p>
-                      <a:r>
-                        <a:rPr sz="1000" b="0">
-                          <a:solidFill>
-                            <a:srgbClr val="282828"/>
-                          </a:solidFill>
-                          <a:latin typeface="Arial"/>
-                        </a:rPr>
-                        <a:t>closed loop in the shared loop code: noise, walk, ramp; noiseless step; within-scan drift</a:t>
-                      </a:r>
-                    </a:p>
-                  </a:txBody>
-                  <a:tcPr marL="54864" marR="54864" marT="18288" marB="18288">
-                    <a:solidFill>
-                      <a:srgbClr val="FFFFFF"/>
-                    </a:solidFill>
-                  </a:tcPr>
-                </a:tc>
-                <a:tc>
-                  <a:txBody>
-                    <a:bodyPr wrap="square"/>
-                    <a:lstStyle/>
-                    <a:p>
-                      <a:r>
-                        <a:rPr sz="1000" b="0">
-                          <a:solidFill>
-                            <a:srgbClr val="282828"/>
-                          </a:solidFill>
-                          <a:latin typeface="Arial"/>
-                        </a:rPr>
-                        <a:t>photons per cycle for 3 pm; fixed error</a:t>
-                      </a:r>
-                    </a:p>
-                  </a:txBody>
-                  <a:tcPr marL="54864" marR="54864" marT="18288" marB="18288">
-                    <a:solidFill>
-                      <a:srgbClr val="FFFFFF"/>
-                    </a:solidFill>
-                  </a:tcPr>
-                </a:tc>
-              </a:tr>
-              <a:tr h="434340">
-                <a:tc>
-                  <a:txBody>
-                    <a:bodyPr wrap="square"/>
-                    <a:lstStyle/>
-                    <a:p>
-                      <a:r>
-                        <a:rPr sz="1000" b="0">
-                          <a:solidFill>
-                            <a:srgbClr val="282828"/>
-                          </a:solidFill>
-                          <a:latin typeface="Arial"/>
-                        </a:rPr>
-                        <a:t>9</a:t>
-                      </a:r>
-                    </a:p>
-                  </a:txBody>
-                  <a:tcPr marL="54864" marR="54864" marT="18288" marB="18288">
-                    <a:solidFill>
-                      <a:srgbClr val="ECF1F6"/>
-                    </a:solidFill>
-                  </a:tcPr>
-                </a:tc>
-                <a:tc>
-                  <a:txBody>
-                    <a:bodyPr wrap="square"/>
-                    <a:lstStyle/>
-                    <a:p>
-                      <a:r>
-                        <a:rPr sz="1000" b="0">
-                          <a:solidFill>
-                            <a:srgbClr val="282828"/>
-                          </a:solidFill>
-                          <a:latin typeface="Arial"/>
-                        </a:rPr>
-                        <a:t>descent: the start ladder with unwrapping and recalibration on and off</a:t>
-                      </a:r>
-                    </a:p>
-                  </a:txBody>
-                  <a:tcPr marL="54864" marR="54864" marT="18288" marB="18288">
-                    <a:solidFill>
-                      <a:srgbClr val="ECF1F6"/>
-                    </a:solidFill>
-                  </a:tcPr>
-                </a:tc>
-                <a:tc>
-                  <a:txBody>
-                    <a:bodyPr wrap="square"/>
-                    <a:lstStyle/>
-                    <a:p>
-                      <a:r>
-                        <a:rPr sz="1000" b="0">
-                          <a:solidFill>
-                            <a:srgbClr val="282828"/>
-                          </a:solidFill>
-                          <a:latin typeface="Arial"/>
-                        </a:rPr>
-                        <a:t>largest start brought to 3 pm</a:t>
-                      </a:r>
-                    </a:p>
-                  </a:txBody>
-                  <a:tcPr marL="54864" marR="54864" marT="18288" marB="18288">
-                    <a:solidFill>
-                      <a:srgbClr val="ECF1F6"/>
-                    </a:solidFill>
-                  </a:tcPr>
-                </a:tc>
-              </a:tr>
-              <a:tr h="605790">
-                <a:tc>
-                  <a:txBody>
-                    <a:bodyPr wrap="square"/>
-                    <a:lstStyle/>
-                    <a:p>
-                      <a:r>
-                        <a:rPr sz="1000" b="0">
-                          <a:solidFill>
-                            <a:srgbClr val="282828"/>
-                          </a:solidFill>
-                          <a:latin typeface="Arial"/>
-                        </a:rPr>
-                        <a:t>10</a:t>
-                      </a:r>
-                    </a:p>
-                  </a:txBody>
-                  <a:tcPr marL="54864" marR="54864" marT="18288" marB="18288">
-                    <a:solidFill>
-                      <a:srgbClr val="FFFFFF"/>
-                    </a:solidFill>
-                  </a:tcPr>
-                </a:tc>
-                <a:tc>
-                  <a:txBody>
-                    <a:bodyPr wrap="square"/>
-                    <a:lstStyle/>
-                    <a:p>
-                      <a:r>
-                        <a:rPr sz="1000" b="0">
-                          <a:solidFill>
-                            <a:srgbClr val="282828"/>
-                          </a:solidFill>
-                          <a:latin typeface="Arial"/>
-                        </a:rPr>
-                        <a:t>systematics one at a time, uncalibrated and through the matrix; layout drawn from the emitted deck; parts from the sheet; report numbers first</a:t>
-                      </a:r>
-                    </a:p>
-                  </a:txBody>
-                  <a:tcPr marL="54864" marR="54864" marT="18288" marB="18288">
-                    <a:solidFill>
-                      <a:srgbClr val="FFFFFF"/>
-                    </a:solidFill>
-                  </a:tcPr>
-                </a:tc>
-                <a:tc>
-                  <a:txBody>
-                    <a:bodyPr wrap="square"/>
-                    <a:lstStyle/>
-                    <a:p>
-                      <a:r>
-                        <a:rPr sz="1000" b="0">
-                          <a:solidFill>
-                            <a:srgbClr val="282828"/>
-                          </a:solidFill>
-                          <a:latin typeface="Arial"/>
-                        </a:rPr>
-                        <a:t>one line per term on the systematics slide</a:t>
-                      </a:r>
-                    </a:p>
-                  </a:txBody>
-                  <a:tcPr marL="54864" marR="54864" marT="18288" marB="18288">
-                    <a:solidFill>
-                      <a:srgbClr val="FFFFFF"/>
-                    </a:solidFill>
-                  </a:tcPr>
-                </a:tc>
-              </a:tr>
-            </a:tbl>
-          </a:graphicData>
-        </a:graphic>
-      </p:graphicFrame>
       <p:sp>
         <p:nvSpPr>
-          <p:cNvPr id="6" name="TextBox 5"/>
+          <p:cNvPr id="4" name="TextBox 3"/>
           <p:cNvSpPr txBox="1"/>
           <p:nvPr/>
         </p:nvSpPr>
         <p:spPr>
           <a:xfrm>
-            <a:off x="6400800" y="4222242"/>
-            <a:ext cx="5394960" cy="274320"/>
+            <a:off x="411480" y="1298448"/>
+            <a:ext cx="11368735" cy="274320"/>
+          </a:xfrm>
+          <a:prstGeom prst="rect">
+            <a:avLst/>
+          </a:prstGeom>
+          <a:noFill/>
+        </p:spPr>
+        <p:txBody>
+          <a:bodyPr wrap="square">
+            <a:spAutoFit/>
+          </a:bodyPr>
+          <a:lstStyle/>
+          <a:p>
+            <a:pPr>
+              <a:spcAft>
+                <a:spcPts val="600"/>
+              </a:spcAft>
+            </a:pPr>
+            <a:r>
+              <a:rPr sz="1500" b="0">
+                <a:solidFill>
+                  <a:srgbClr val="282828"/>
+                </a:solidFill>
+                <a:latin typeface="Arial"/>
+              </a:rPr>
+              <a:t>•  The camera sets the measurement time, not the laser: 1e14 photons over 1e5 pupil pixels is 1e9 electrons per pixel; with a 1e5-electron well that is 1e4 co-added frames, 100 s at 100 frames per second, against 0.13 s of laser.  Price well depth, frame rate, read noise (as the square root of the frame count), bit depth, gain nonlinearity, pixel-response nonuniformity, persistence between the stepped frames.</a:t>
+            </a:r>
+          </a:p>
+          <a:p>
+            <a:pPr>
+              <a:spcAft>
+                <a:spcPts val="600"/>
+              </a:spcAft>
+            </a:pPr>
+            <a:r>
+              <a:rPr sz="1500" b="0">
+                <a:solidFill>
+                  <a:srgbClr val="282828"/>
+                </a:solidFill>
+                <a:latin typeface="Arial"/>
+              </a:rPr>
+              <a:t>•  Optical surface errors: every lens, mirror, plate and the mask substrate with a typical figure (λ/10 to λ/20, a 1/f² spectrum) on the element; the sensors' reference core sees the low orders (0.16 wave of defocus moved every number in the early model); the dimple's etch depth and the mask's flatness.</a:t>
+            </a:r>
+          </a:p>
+          <a:p>
+            <a:pPr>
+              <a:spcAft>
+                <a:spcPts val="600"/>
+              </a:spcAft>
+            </a:pPr>
+            <a:r>
+              <a:rPr sz="1500" b="0">
+                <a:solidFill>
+                  <a:srgbClr val="282828"/>
+                </a:solidFill>
+                <a:latin typeface="Arial"/>
+              </a:rPr>
+              <a:t>•  Alignment and stability: the sensitivities exist (10 µm, 10 µrad); add the mask's centering drift on the focal spot, the bench's thermal expansion, source pointing and wavelength drift, laser polarization angle, and the two-arm instruments' non-common-path air and mounts.</a:t>
+            </a:r>
+          </a:p>
+          <a:p>
+            <a:pPr>
+              <a:spcAft>
+                <a:spcPts val="600"/>
+              </a:spcAft>
+            </a:pPr>
+            <a:r>
+              <a:rPr sz="1500" b="0">
+                <a:solidFill>
+                  <a:srgbClr val="282828"/>
+                </a:solidFill>
+                <a:latin typeface="Arial"/>
+              </a:rPr>
+              <a:t>•  More drift in the loop: actuator hysteresis and creep, command quantization (14-16 bits: 0.1-0.5 nm steps as a floor), influence-function error, vibration within a stepped scan.</a:t>
+            </a:r>
+          </a:p>
+          <a:p>
+            <a:pPr>
+              <a:spcAft>
+                <a:spcPts val="600"/>
+              </a:spcAft>
+            </a:pPr>
+            <a:r>
+              <a:rPr sz="1500" b="0">
+                <a:solidFill>
+                  <a:srgbClr val="282828"/>
+                </a:solidFill>
+                <a:latin typeface="Arial"/>
+              </a:rPr>
+              <a:t>•  The error budget in the JPL form: per reading, fixed terms after calibration, drift terms weighted by the servo bandwidth, noise terms in quadrature, to a held error at a stated light and time.  This deck's comparison table is its first column.</a:t>
+            </a:r>
+          </a:p>
+        </p:txBody>
+      </p:sp>
+      <p:sp>
+        <p:nvSpPr>
+          <p:cNvPr id="5" name="TextBox 4"/>
+          <p:cNvSpPr txBox="1"/>
+          <p:nvPr/>
+        </p:nvSpPr>
+        <p:spPr>
+          <a:xfrm>
+            <a:off x="411480" y="5750814"/>
+            <a:ext cx="11368735" cy="274320"/>
           </a:xfrm>
           <a:prstGeom prst="rect">
             <a:avLst/>
@@ -22766,7 +23075,7 @@
                 </a:solidFill>
                 <a:latin typeface="Arial"/>
               </a:rPr>
-              <a:t>The scoring library (the loop, the unwrapper, the arm and analyzer maps, the clearance check) is shared by the three lanes; nothing is copied between them.  The path is recorded as reference memory so the next configuration follows it in a day.</a:t>
+              <a:t>The telescope-level version of this (an allocation table rolled through the sensitivity model, then the closed-loop predictor) is being planned separately; it is a later add to this deck.</a:t>
             </a:r>
           </a:p>
         </p:txBody>
@@ -22823,7 +23132,7 @@
                 </a:solidFill>
                 <a:latin typeface="Arial"/>
               </a:rPr>
-              <a:t>Run it yourself</a:t>
+              <a:t>How every configuration was analyzed</a:t>
             </a:r>
           </a:p>
           <a:p>
@@ -22839,7 +23148,7 @@
                 </a:solidFill>
                 <a:latin typeface="Arial"/>
               </a:rPr>
-              <a:t>One parameter sheet and one runner per approach, shared code underneath; every number here is reproduced by the commands below</a:t>
+              <a:t>One repeatable path, ten steps, the same for all four approaches: a new sensor is a new reading class in the shared runner plus its gate, then steps 4 to 10 unchanged</a:t>
             </a:r>
           </a:p>
         </p:txBody>
@@ -22888,102 +23197,885 @@
           </a:p>
         </p:txBody>
       </p:sp>
+      <p:graphicFrame>
+        <p:nvGraphicFramePr>
+          <p:cNvPr id="4" name="Table 3"/>
+          <p:cNvGraphicFramePr>
+            <a:graphicFrameLocks noGrp="1"/>
+          </p:cNvGraphicFramePr>
+          <p:nvPr/>
+        </p:nvGraphicFramePr>
+        <p:xfrm>
+          <a:off x="411480" y="1298448"/>
+          <a:ext cx="5806439" cy="3188970"/>
+        </p:xfrm>
+        <a:graphic>
+          <a:graphicData uri="http://schemas.openxmlformats.org/drawingml/2006/table">
+            <a:tbl>
+              <a:tblPr firstRow="1" bandRow="1">
+                <a:tableStyleId>{5C22544A-7EE6-4342-B048-85BDC9FD1C3A}</a:tableStyleId>
+              </a:tblPr>
+              <a:tblGrid>
+                <a:gridCol w="436880"/>
+                <a:gridCol w="2963389"/>
+                <a:gridCol w="2406170"/>
+              </a:tblGrid>
+              <a:tr h="280035">
+                <a:tc>
+                  <a:txBody>
+                    <a:bodyPr wrap="square"/>
+                    <a:lstStyle/>
+                    <a:p>
+                      <a:r>
+                        <a:rPr sz="1100" b="1">
+                          <a:solidFill>
+                            <a:srgbClr val="FFFFFF"/>
+                          </a:solidFill>
+                          <a:latin typeface="Arial"/>
+                        </a:rPr>
+                        <a:t>step</a:t>
+                      </a:r>
+                    </a:p>
+                  </a:txBody>
+                  <a:tcPr marL="54864" marR="54864" marT="18288" marB="18288">
+                    <a:solidFill>
+                      <a:srgbClr val="1F4E79"/>
+                    </a:solidFill>
+                  </a:tcPr>
+                </a:tc>
+                <a:tc>
+                  <a:txBody>
+                    <a:bodyPr wrap="square"/>
+                    <a:lstStyle/>
+                    <a:p>
+                      <a:r>
+                        <a:rPr sz="1100" b="1">
+                          <a:solidFill>
+                            <a:srgbClr val="FFFFFF"/>
+                          </a:solidFill>
+                          <a:latin typeface="Arial"/>
+                        </a:rPr>
+                        <a:t>what</a:t>
+                      </a:r>
+                    </a:p>
+                  </a:txBody>
+                  <a:tcPr marL="54864" marR="54864" marT="18288" marB="18288">
+                    <a:solidFill>
+                      <a:srgbClr val="1F4E79"/>
+                    </a:solidFill>
+                  </a:tcPr>
+                </a:tc>
+                <a:tc>
+                  <a:txBody>
+                    <a:bodyPr wrap="square"/>
+                    <a:lstStyle/>
+                    <a:p>
+                      <a:r>
+                        <a:rPr sz="1100" b="1">
+                          <a:solidFill>
+                            <a:srgbClr val="FFFFFF"/>
+                          </a:solidFill>
+                          <a:latin typeface="Arial"/>
+                        </a:rPr>
+                        <a:t>gate or output</a:t>
+                      </a:r>
+                    </a:p>
+                  </a:txBody>
+                  <a:tcPr marL="54864" marR="54864" marT="18288" marB="18288">
+                    <a:solidFill>
+                      <a:srgbClr val="1F4E79"/>
+                    </a:solidFill>
+                  </a:tcPr>
+                </a:tc>
+              </a:tr>
+              <a:tr h="468630">
+                <a:tc>
+                  <a:txBody>
+                    <a:bodyPr wrap="square"/>
+                    <a:lstStyle/>
+                    <a:p>
+                      <a:r>
+                        <a:rPr sz="1100" b="0">
+                          <a:solidFill>
+                            <a:srgbClr val="282828"/>
+                          </a:solidFill>
+                          <a:latin typeface="Arial"/>
+                        </a:rPr>
+                        <a:t>1</a:t>
+                      </a:r>
+                    </a:p>
+                  </a:txBody>
+                  <a:tcPr marL="54864" marR="54864" marT="18288" marB="18288">
+                    <a:solidFill>
+                      <a:srgbClr val="FFFFFF"/>
+                    </a:solidFill>
+                  </a:tcPr>
+                </a:tc>
+                <a:tc>
+                  <a:txBody>
+                    <a:bodyPr wrap="square"/>
+                    <a:lstStyle/>
+                    <a:p>
+                      <a:r>
+                        <a:rPr sz="1100" b="0">
+                          <a:solidFill>
+                            <a:srgbClr val="282828"/>
+                          </a:solidFill>
+                          <a:latin typeface="Arial"/>
+                        </a:rPr>
+                        <a:t>one parameter sheet and one runner per approach; batch wrappers</a:t>
+                      </a:r>
+                    </a:p>
+                  </a:txBody>
+                  <a:tcPr marL="54864" marR="54864" marT="18288" marB="18288">
+                    <a:solidFill>
+                      <a:srgbClr val="FFFFFF"/>
+                    </a:solidFill>
+                  </a:tcPr>
+                </a:tc>
+                <a:tc>
+                  <a:txBody>
+                    <a:bodyPr wrap="square"/>
+                    <a:lstStyle/>
+                    <a:p>
+                      <a:r>
+                        <a:rPr sz="1100" b="0">
+                          <a:solidFill>
+                            <a:srgbClr val="282828"/>
+                          </a:solidFill>
+                          <a:latin typeface="Arial"/>
+                        </a:rPr>
+                        <a:t>every number has a run tag</a:t>
+                      </a:r>
+                    </a:p>
+                  </a:txBody>
+                  <a:tcPr marL="54864" marR="54864" marT="18288" marB="18288">
+                    <a:solidFill>
+                      <a:srgbClr val="FFFFFF"/>
+                    </a:solidFill>
+                  </a:tcPr>
+                </a:tc>
+              </a:tr>
+              <a:tr h="657225">
+                <a:tc>
+                  <a:txBody>
+                    <a:bodyPr wrap="square"/>
+                    <a:lstStyle/>
+                    <a:p>
+                      <a:r>
+                        <a:rPr sz="1100" b="0">
+                          <a:solidFill>
+                            <a:srgbClr val="282828"/>
+                          </a:solidFill>
+                          <a:latin typeface="Arial"/>
+                        </a:rPr>
+                        <a:t>2</a:t>
+                      </a:r>
+                    </a:p>
+                  </a:txBody>
+                  <a:tcPr marL="54864" marR="54864" marT="18288" marB="18288">
+                    <a:solidFill>
+                      <a:srgbClr val="ECF1F6"/>
+                    </a:solidFill>
+                  </a:tcPr>
+                </a:tc>
+                <a:tc>
+                  <a:txBody>
+                    <a:bodyPr wrap="square"/>
+                    <a:lstStyle/>
+                    <a:p>
+                      <a:r>
+                        <a:rPr sz="1100" b="0">
+                          <a:solidFill>
+                            <a:srgbClr val="282828"/>
+                          </a:solidFill>
+                          <a:latin typeface="Arial"/>
+                        </a:rPr>
+                        <a:t>build the bench from the sheet, trace it; clearance of end bodies and node parts; detector-leg focus; sampling budget</a:t>
+                      </a:r>
+                    </a:p>
+                  </a:txBody>
+                  <a:tcPr marL="54864" marR="54864" marT="18288" marB="18288">
+                    <a:solidFill>
+                      <a:srgbClr val="ECF1F6"/>
+                    </a:solidFill>
+                  </a:tcPr>
+                </a:tc>
+                <a:tc>
+                  <a:txBody>
+                    <a:bodyPr wrap="square"/>
+                    <a:lstStyle/>
+                    <a:p>
+                      <a:r>
+                        <a:rPr sz="1100" b="0">
+                          <a:solidFill>
+                            <a:srgbClr val="282828"/>
+                          </a:solidFill>
+                          <a:latin typeface="Arial"/>
+                        </a:rPr>
+                        <a:t>every part clears by 25 mm; 6 pixels across the mask feature</a:t>
+                      </a:r>
+                    </a:p>
+                  </a:txBody>
+                  <a:tcPr marL="54864" marR="54864" marT="18288" marB="18288">
+                    <a:solidFill>
+                      <a:srgbClr val="ECF1F6"/>
+                    </a:solidFill>
+                  </a:tcPr>
+                </a:tc>
+              </a:tr>
+              <a:tr h="657225">
+                <a:tc>
+                  <a:txBody>
+                    <a:bodyPr wrap="square"/>
+                    <a:lstStyle/>
+                    <a:p>
+                      <a:r>
+                        <a:rPr sz="1100" b="0">
+                          <a:solidFill>
+                            <a:srgbClr val="282828"/>
+                          </a:solidFill>
+                          <a:latin typeface="Arial"/>
+                        </a:rPr>
+                        <a:t>3</a:t>
+                      </a:r>
+                    </a:p>
+                  </a:txBody>
+                  <a:tcPr marL="54864" marR="54864" marT="18288" marB="18288">
+                    <a:solidFill>
+                      <a:srgbClr val="FFFFFF"/>
+                    </a:solidFill>
+                  </a:tcPr>
+                </a:tc>
+                <a:tc>
+                  <a:txBody>
+                    <a:bodyPr wrap="square"/>
+                    <a:lstStyle/>
+                    <a:p>
+                      <a:r>
+                        <a:rPr sz="1100" b="0">
+                          <a:solidFill>
+                            <a:srgbClr val="282828"/>
+                          </a:solidFill>
+                          <a:latin typeface="Arial"/>
+                        </a:rPr>
+                        <a:t>model gates before any number</a:t>
+                      </a:r>
+                    </a:p>
+                  </a:txBody>
+                  <a:tcPr marL="54864" marR="54864" marT="18288" marB="18288">
+                    <a:solidFill>
+                      <a:srgbClr val="FFFFFF"/>
+                    </a:solidFill>
+                  </a:tcPr>
+                </a:tc>
+                <a:tc>
+                  <a:txBody>
+                    <a:bodyPr wrap="square"/>
+                    <a:lstStyle/>
+                    <a:p>
+                      <a:r>
+                        <a:rPr sz="1100" b="0">
+                          <a:solidFill>
+                            <a:srgbClr val="282828"/>
+                          </a:solidFill>
+                          <a:latin typeface="Arial"/>
+                        </a:rPr>
+                        <a:t>mask round trip, reference-wave surrogate, working-state amplitude, the reading on 100 nm pokes</a:t>
+                      </a:r>
+                    </a:p>
+                  </a:txBody>
+                  <a:tcPr marL="54864" marR="54864" marT="18288" marB="18288">
+                    <a:solidFill>
+                      <a:srgbClr val="FFFFFF"/>
+                    </a:solidFill>
+                  </a:tcPr>
+                </a:tc>
+              </a:tr>
+              <a:tr h="657225">
+                <a:tc>
+                  <a:txBody>
+                    <a:bodyPr wrap="square"/>
+                    <a:lstStyle/>
+                    <a:p>
+                      <a:r>
+                        <a:rPr sz="1100" b="0">
+                          <a:solidFill>
+                            <a:srgbClr val="282828"/>
+                          </a:solidFill>
+                          <a:latin typeface="Arial"/>
+                        </a:rPr>
+                        <a:t>4</a:t>
+                      </a:r>
+                    </a:p>
+                  </a:txBody>
+                  <a:tcPr marL="54864" marR="54864" marT="18288" marB="18288">
+                    <a:solidFill>
+                      <a:srgbClr val="ECF1F6"/>
+                    </a:solidFill>
+                  </a:tcPr>
+                </a:tc>
+                <a:tc>
+                  <a:txBody>
+                    <a:bodyPr wrap="square"/>
+                    <a:lstStyle/>
+                    <a:p>
+                      <a:r>
+                        <a:rPr sz="1100" b="0">
+                          <a:solidFill>
+                            <a:srgbClr val="282828"/>
+                          </a:solidFill>
+                          <a:latin typeface="Arial"/>
+                        </a:rPr>
+                        <a:t>calibration: the response matrix measured through the sensor, on the 30 nm working surface</a:t>
+                      </a:r>
+                    </a:p>
+                  </a:txBody>
+                  <a:tcPr marL="54864" marR="54864" marT="18288" marB="18288">
+                    <a:solidFill>
+                      <a:srgbClr val="ECF1F6"/>
+                    </a:solidFill>
+                  </a:tcPr>
+                </a:tc>
+                <a:tc>
+                  <a:txBody>
+                    <a:bodyPr wrap="square"/>
+                    <a:lstStyle/>
+                    <a:p>
+                      <a:r>
+                        <a:rPr sz="1100" b="0">
+                          <a:solidFill>
+                            <a:srgbClr val="282828"/>
+                          </a:solidFill>
+                          <a:latin typeface="Arial"/>
+                        </a:rPr>
+                        <a:t>piston null carried; stencil-site fit</a:t>
+                      </a:r>
+                    </a:p>
+                  </a:txBody>
+                  <a:tcPr marL="54864" marR="54864" marT="18288" marB="18288">
+                    <a:solidFill>
+                      <a:srgbClr val="ECF1F6"/>
+                    </a:solidFill>
+                  </a:tcPr>
+                </a:tc>
+              </a:tr>
+              <a:tr h="468630">
+                <a:tc>
+                  <a:txBody>
+                    <a:bodyPr wrap="square"/>
+                    <a:lstStyle/>
+                    <a:p>
+                      <a:r>
+                        <a:rPr sz="1100" b="0">
+                          <a:solidFill>
+                            <a:srgbClr val="282828"/>
+                          </a:solidFill>
+                          <a:latin typeface="Arial"/>
+                        </a:rPr>
+                        <a:t>5</a:t>
+                      </a:r>
+                    </a:p>
+                  </a:txBody>
+                  <a:tcPr marL="54864" marR="54864" marT="18288" marB="18288">
+                    <a:solidFill>
+                      <a:srgbClr val="FFFFFF"/>
+                    </a:solidFill>
+                  </a:tcPr>
+                </a:tc>
+                <a:tc>
+                  <a:txBody>
+                    <a:bodyPr wrap="square"/>
+                    <a:lstStyle/>
+                    <a:p>
+                      <a:r>
+                        <a:rPr sz="1100" b="0">
+                          <a:solidFill>
+                            <a:srgbClr val="282828"/>
+                          </a:solidFill>
+                          <a:latin typeface="Arial"/>
+                        </a:rPr>
+                        <a:t>rows on the working surface: 10 nm on one actuator; 1 nm on 47 sites; dense 10 nm</a:t>
+                      </a:r>
+                    </a:p>
+                  </a:txBody>
+                  <a:tcPr marL="54864" marR="54864" marT="18288" marB="18288">
+                    <a:solidFill>
+                      <a:srgbClr val="FFFFFF"/>
+                    </a:solidFill>
+                  </a:tcPr>
+                </a:tc>
+                <a:tc>
+                  <a:txBody>
+                    <a:bodyPr wrap="square"/>
+                    <a:lstStyle/>
+                    <a:p>
+                      <a:r>
+                        <a:rPr sz="1100" b="0">
+                          <a:solidFill>
+                            <a:srgbClr val="282828"/>
+                          </a:solidFill>
+                          <a:latin typeface="Arial"/>
+                        </a:rPr>
+                        <a:t>gain, floor, SNR</a:t>
+                      </a:r>
+                    </a:p>
+                  </a:txBody>
+                  <a:tcPr marL="54864" marR="54864" marT="18288" marB="18288">
+                    <a:solidFill>
+                      <a:srgbClr val="FFFFFF"/>
+                    </a:solidFill>
+                  </a:tcPr>
+                </a:tc>
+              </a:tr>
+            </a:tbl>
+          </a:graphicData>
+        </a:graphic>
+      </p:graphicFrame>
+      <p:graphicFrame>
+        <p:nvGraphicFramePr>
+          <p:cNvPr id="5" name="Table 4"/>
+          <p:cNvGraphicFramePr>
+            <a:graphicFrameLocks noGrp="1"/>
+          </p:cNvGraphicFramePr>
+          <p:nvPr/>
+        </p:nvGraphicFramePr>
+        <p:xfrm>
+          <a:off x="6400800" y="1298448"/>
+          <a:ext cx="5394959" cy="2777490"/>
+        </p:xfrm>
+        <a:graphic>
+          <a:graphicData uri="http://schemas.openxmlformats.org/drawingml/2006/table">
+            <a:tbl>
+              <a:tblPr firstRow="1" bandRow="1">
+                <a:tableStyleId>{5C22544A-7EE6-4342-B048-85BDC9FD1C3A}</a:tableStyleId>
+              </a:tblPr>
+              <a:tblGrid>
+                <a:gridCol w="410464"/>
+                <a:gridCol w="3846730"/>
+                <a:gridCol w="1137765"/>
+              </a:tblGrid>
+              <a:tr h="262890">
+                <a:tc>
+                  <a:txBody>
+                    <a:bodyPr wrap="square"/>
+                    <a:lstStyle/>
+                    <a:p>
+                      <a:r>
+                        <a:rPr sz="1000" b="1">
+                          <a:solidFill>
+                            <a:srgbClr val="FFFFFF"/>
+                          </a:solidFill>
+                          <a:latin typeface="Arial"/>
+                        </a:rPr>
+                        <a:t>step</a:t>
+                      </a:r>
+                    </a:p>
+                  </a:txBody>
+                  <a:tcPr marL="54864" marR="54864" marT="18288" marB="18288">
+                    <a:solidFill>
+                      <a:srgbClr val="1F4E79"/>
+                    </a:solidFill>
+                  </a:tcPr>
+                </a:tc>
+                <a:tc>
+                  <a:txBody>
+                    <a:bodyPr wrap="square"/>
+                    <a:lstStyle/>
+                    <a:p>
+                      <a:r>
+                        <a:rPr sz="1000" b="1">
+                          <a:solidFill>
+                            <a:srgbClr val="FFFFFF"/>
+                          </a:solidFill>
+                          <a:latin typeface="Arial"/>
+                        </a:rPr>
+                        <a:t>what</a:t>
+                      </a:r>
+                    </a:p>
+                  </a:txBody>
+                  <a:tcPr marL="54864" marR="54864" marT="18288" marB="18288">
+                    <a:solidFill>
+                      <a:srgbClr val="1F4E79"/>
+                    </a:solidFill>
+                  </a:tcPr>
+                </a:tc>
+                <a:tc>
+                  <a:txBody>
+                    <a:bodyPr wrap="square"/>
+                    <a:lstStyle/>
+                    <a:p>
+                      <a:r>
+                        <a:rPr sz="1000" b="1">
+                          <a:solidFill>
+                            <a:srgbClr val="FFFFFF"/>
+                          </a:solidFill>
+                          <a:latin typeface="Arial"/>
+                        </a:rPr>
+                        <a:t>gate or output</a:t>
+                      </a:r>
+                    </a:p>
+                  </a:txBody>
+                  <a:tcPr marL="54864" marR="54864" marT="18288" marB="18288">
+                    <a:solidFill>
+                      <a:srgbClr val="1F4E79"/>
+                    </a:solidFill>
+                  </a:tcPr>
+                </a:tc>
+              </a:tr>
+              <a:tr h="434340">
+                <a:tc>
+                  <a:txBody>
+                    <a:bodyPr wrap="square"/>
+                    <a:lstStyle/>
+                    <a:p>
+                      <a:r>
+                        <a:rPr sz="1000" b="0">
+                          <a:solidFill>
+                            <a:srgbClr val="282828"/>
+                          </a:solidFill>
+                          <a:latin typeface="Arial"/>
+                        </a:rPr>
+                        <a:t>6</a:t>
+                      </a:r>
+                    </a:p>
+                  </a:txBody>
+                  <a:tcPr marL="54864" marR="54864" marT="18288" marB="18288">
+                    <a:solidFill>
+                      <a:srgbClr val="FFFFFF"/>
+                    </a:solidFill>
+                  </a:tcPr>
+                </a:tc>
+                <a:tc>
+                  <a:txBody>
+                    <a:bodyPr wrap="square"/>
+                    <a:lstStyle/>
+                    <a:p>
+                      <a:r>
+                        <a:rPr sz="1000" b="0">
+                          <a:solidFill>
+                            <a:srgbClr val="282828"/>
+                          </a:solidFill>
+                          <a:latin typeface="Arial"/>
+                        </a:rPr>
+                        <a:t>capture range: the aging ladder to 10%; the matrix re-measured at 60 to 160 nm with its photon cost</a:t>
+                      </a:r>
+                    </a:p>
+                  </a:txBody>
+                  <a:tcPr marL="54864" marR="54864" marT="18288" marB="18288">
+                    <a:solidFill>
+                      <a:srgbClr val="FFFFFF"/>
+                    </a:solidFill>
+                  </a:tcPr>
+                </a:tc>
+                <a:tc>
+                  <a:txBody>
+                    <a:bodyPr wrap="square"/>
+                    <a:lstStyle/>
+                    <a:p>
+                      <a:r>
+                        <a:rPr sz="1000" b="0">
+                          <a:solidFill>
+                            <a:srgbClr val="282828"/>
+                          </a:solidFill>
+                          <a:latin typeface="Arial"/>
+                        </a:rPr>
+                        <a:t>range in nm; photons per rung</a:t>
+                      </a:r>
+                    </a:p>
+                  </a:txBody>
+                  <a:tcPr marL="54864" marR="54864" marT="18288" marB="18288">
+                    <a:solidFill>
+                      <a:srgbClr val="FFFFFF"/>
+                    </a:solidFill>
+                  </a:tcPr>
+                </a:tc>
+              </a:tr>
+              <a:tr h="434340">
+                <a:tc>
+                  <a:txBody>
+                    <a:bodyPr wrap="square"/>
+                    <a:lstStyle/>
+                    <a:p>
+                      <a:r>
+                        <a:rPr sz="1000" b="0">
+                          <a:solidFill>
+                            <a:srgbClr val="282828"/>
+                          </a:solidFill>
+                          <a:latin typeface="Arial"/>
+                        </a:rPr>
+                        <a:t>7</a:t>
+                      </a:r>
+                    </a:p>
+                  </a:txBody>
+                  <a:tcPr marL="54864" marR="54864" marT="18288" marB="18288">
+                    <a:solidFill>
+                      <a:srgbClr val="ECF1F6"/>
+                    </a:solidFill>
+                  </a:tcPr>
+                </a:tc>
+                <a:tc>
+                  <a:txBody>
+                    <a:bodyPr wrap="square"/>
+                    <a:lstStyle/>
+                    <a:p>
+                      <a:r>
+                        <a:rPr sz="1000" b="0">
+                          <a:solidFill>
+                            <a:srgbClr val="282828"/>
+                          </a:solidFill>
+                          <a:latin typeface="Arial"/>
+                        </a:rPr>
+                        <a:t>photons: noise fit over 1e8 to 1e14 per measurement, flat and on-surface matrix</a:t>
+                      </a:r>
+                    </a:p>
+                  </a:txBody>
+                  <a:tcPr marL="54864" marR="54864" marT="18288" marB="18288">
+                    <a:solidFill>
+                      <a:srgbClr val="ECF1F6"/>
+                    </a:solidFill>
+                  </a:tcPr>
+                </a:tc>
+                <a:tc>
+                  <a:txBody>
+                    <a:bodyPr wrap="square"/>
+                    <a:lstStyle/>
+                    <a:p>
+                      <a:r>
+                        <a:rPr sz="1000" b="0">
+                          <a:solidFill>
+                            <a:srgbClr val="282828"/>
+                          </a:solidFill>
+                          <a:latin typeface="Arial"/>
+                        </a:rPr>
+                        <a:t>photons for 1 pm</a:t>
+                      </a:r>
+                    </a:p>
+                  </a:txBody>
+                  <a:tcPr marL="54864" marR="54864" marT="18288" marB="18288">
+                    <a:solidFill>
+                      <a:srgbClr val="ECF1F6"/>
+                    </a:solidFill>
+                  </a:tcPr>
+                </a:tc>
+              </a:tr>
+              <a:tr h="605790">
+                <a:tc>
+                  <a:txBody>
+                    <a:bodyPr wrap="square"/>
+                    <a:lstStyle/>
+                    <a:p>
+                      <a:r>
+                        <a:rPr sz="1000" b="0">
+                          <a:solidFill>
+                            <a:srgbClr val="282828"/>
+                          </a:solidFill>
+                          <a:latin typeface="Arial"/>
+                        </a:rPr>
+                        <a:t>8</a:t>
+                      </a:r>
+                    </a:p>
+                  </a:txBody>
+                  <a:tcPr marL="54864" marR="54864" marT="18288" marB="18288">
+                    <a:solidFill>
+                      <a:srgbClr val="FFFFFF"/>
+                    </a:solidFill>
+                  </a:tcPr>
+                </a:tc>
+                <a:tc>
+                  <a:txBody>
+                    <a:bodyPr wrap="square"/>
+                    <a:lstStyle/>
+                    <a:p>
+                      <a:r>
+                        <a:rPr sz="1000" b="0">
+                          <a:solidFill>
+                            <a:srgbClr val="282828"/>
+                          </a:solidFill>
+                          <a:latin typeface="Arial"/>
+                        </a:rPr>
+                        <a:t>closed loop in the shared loop code: noise, walk, ramp; noiseless step; within-scan drift</a:t>
+                      </a:r>
+                    </a:p>
+                  </a:txBody>
+                  <a:tcPr marL="54864" marR="54864" marT="18288" marB="18288">
+                    <a:solidFill>
+                      <a:srgbClr val="FFFFFF"/>
+                    </a:solidFill>
+                  </a:tcPr>
+                </a:tc>
+                <a:tc>
+                  <a:txBody>
+                    <a:bodyPr wrap="square"/>
+                    <a:lstStyle/>
+                    <a:p>
+                      <a:r>
+                        <a:rPr sz="1000" b="0">
+                          <a:solidFill>
+                            <a:srgbClr val="282828"/>
+                          </a:solidFill>
+                          <a:latin typeface="Arial"/>
+                        </a:rPr>
+                        <a:t>photons per cycle for 3 pm; fixed error</a:t>
+                      </a:r>
+                    </a:p>
+                  </a:txBody>
+                  <a:tcPr marL="54864" marR="54864" marT="18288" marB="18288">
+                    <a:solidFill>
+                      <a:srgbClr val="FFFFFF"/>
+                    </a:solidFill>
+                  </a:tcPr>
+                </a:tc>
+              </a:tr>
+              <a:tr h="434340">
+                <a:tc>
+                  <a:txBody>
+                    <a:bodyPr wrap="square"/>
+                    <a:lstStyle/>
+                    <a:p>
+                      <a:r>
+                        <a:rPr sz="1000" b="0">
+                          <a:solidFill>
+                            <a:srgbClr val="282828"/>
+                          </a:solidFill>
+                          <a:latin typeface="Arial"/>
+                        </a:rPr>
+                        <a:t>9</a:t>
+                      </a:r>
+                    </a:p>
+                  </a:txBody>
+                  <a:tcPr marL="54864" marR="54864" marT="18288" marB="18288">
+                    <a:solidFill>
+                      <a:srgbClr val="ECF1F6"/>
+                    </a:solidFill>
+                  </a:tcPr>
+                </a:tc>
+                <a:tc>
+                  <a:txBody>
+                    <a:bodyPr wrap="square"/>
+                    <a:lstStyle/>
+                    <a:p>
+                      <a:r>
+                        <a:rPr sz="1000" b="0">
+                          <a:solidFill>
+                            <a:srgbClr val="282828"/>
+                          </a:solidFill>
+                          <a:latin typeface="Arial"/>
+                        </a:rPr>
+                        <a:t>descent: the start ladder with unwrapping and recalibration on and off</a:t>
+                      </a:r>
+                    </a:p>
+                  </a:txBody>
+                  <a:tcPr marL="54864" marR="54864" marT="18288" marB="18288">
+                    <a:solidFill>
+                      <a:srgbClr val="ECF1F6"/>
+                    </a:solidFill>
+                  </a:tcPr>
+                </a:tc>
+                <a:tc>
+                  <a:txBody>
+                    <a:bodyPr wrap="square"/>
+                    <a:lstStyle/>
+                    <a:p>
+                      <a:r>
+                        <a:rPr sz="1000" b="0">
+                          <a:solidFill>
+                            <a:srgbClr val="282828"/>
+                          </a:solidFill>
+                          <a:latin typeface="Arial"/>
+                        </a:rPr>
+                        <a:t>largest start brought to 3 pm</a:t>
+                      </a:r>
+                    </a:p>
+                  </a:txBody>
+                  <a:tcPr marL="54864" marR="54864" marT="18288" marB="18288">
+                    <a:solidFill>
+                      <a:srgbClr val="ECF1F6"/>
+                    </a:solidFill>
+                  </a:tcPr>
+                </a:tc>
+              </a:tr>
+              <a:tr h="605790">
+                <a:tc>
+                  <a:txBody>
+                    <a:bodyPr wrap="square"/>
+                    <a:lstStyle/>
+                    <a:p>
+                      <a:r>
+                        <a:rPr sz="1000" b="0">
+                          <a:solidFill>
+                            <a:srgbClr val="282828"/>
+                          </a:solidFill>
+                          <a:latin typeface="Arial"/>
+                        </a:rPr>
+                        <a:t>10</a:t>
+                      </a:r>
+                    </a:p>
+                  </a:txBody>
+                  <a:tcPr marL="54864" marR="54864" marT="18288" marB="18288">
+                    <a:solidFill>
+                      <a:srgbClr val="FFFFFF"/>
+                    </a:solidFill>
+                  </a:tcPr>
+                </a:tc>
+                <a:tc>
+                  <a:txBody>
+                    <a:bodyPr wrap="square"/>
+                    <a:lstStyle/>
+                    <a:p>
+                      <a:r>
+                        <a:rPr sz="1000" b="0">
+                          <a:solidFill>
+                            <a:srgbClr val="282828"/>
+                          </a:solidFill>
+                          <a:latin typeface="Arial"/>
+                        </a:rPr>
+                        <a:t>systematics one at a time, uncalibrated and through the matrix; layout drawn from the emitted deck; parts from the sheet; report numbers first</a:t>
+                      </a:r>
+                    </a:p>
+                  </a:txBody>
+                  <a:tcPr marL="54864" marR="54864" marT="18288" marB="18288">
+                    <a:solidFill>
+                      <a:srgbClr val="FFFFFF"/>
+                    </a:solidFill>
+                  </a:tcPr>
+                </a:tc>
+                <a:tc>
+                  <a:txBody>
+                    <a:bodyPr wrap="square"/>
+                    <a:lstStyle/>
+                    <a:p>
+                      <a:r>
+                        <a:rPr sz="1000" b="0">
+                          <a:solidFill>
+                            <a:srgbClr val="282828"/>
+                          </a:solidFill>
+                          <a:latin typeface="Arial"/>
+                        </a:rPr>
+                        <a:t>one line per term on the systematics slide</a:t>
+                      </a:r>
+                    </a:p>
+                  </a:txBody>
+                  <a:tcPr marL="54864" marR="54864" marT="18288" marB="18288">
+                    <a:solidFill>
+                      <a:srgbClr val="FFFFFF"/>
+                    </a:solidFill>
+                  </a:tcPr>
+                </a:tc>
+              </a:tr>
+            </a:tbl>
+          </a:graphicData>
+        </a:graphic>
+      </p:graphicFrame>
       <p:sp>
         <p:nvSpPr>
-          <p:cNvPr id="4" name="TextBox 3"/>
+          <p:cNvPr id="6" name="TextBox 5"/>
           <p:cNvSpPr txBox="1"/>
           <p:nvPr/>
         </p:nvSpPr>
         <p:spPr>
           <a:xfrm>
-            <a:off x="411480" y="1298448"/>
-            <a:ext cx="5806440" cy="274320"/>
-          </a:xfrm>
-          <a:prstGeom prst="rect">
-            <a:avLst/>
-          </a:prstGeom>
-          <a:noFill/>
-        </p:spPr>
-        <p:txBody>
-          <a:bodyPr wrap="square">
-            <a:spAutoFit/>
-          </a:bodyPr>
-          <a:lstStyle/>
-          <a:p>
-            <a:pPr>
-              <a:spcAft>
-                <a:spcPts val="600"/>
-              </a:spcAft>
-            </a:pPr>
-            <a:r>
-              <a:rPr sz="1200" b="0">
-                <a:solidFill>
-                  <a:srgbClr val="282828"/>
-                </a:solidFill>
-                <a:latin typeface="Arial"/>
-              </a:rPr>
-              <a:t>•  Interferometer (tg_psi_dm96_oap): tg96_run for the lens rig; tg96_run('bench.optics','oap','tag','oap') for the mirror rig; ./tg96_batch.sh lens_deck "'stages',{'bench','deck'},'battery.noise',true"; ./tg96_batch.sh loop_lens "'stages',{'bench','loop','figs'}".</a:t>
-            </a:r>
-          </a:p>
-          <a:p>
-            <a:pPr>
-              <a:spcAft>
-                <a:spcPts val="600"/>
-              </a:spcAft>
-            </a:pPr>
-            <a:r>
-              <a:rPr sz="1200" b="0">
-                <a:solidFill>
-                  <a:srgbClr val="282828"/>
-                </a:solidFill>
-                <a:latin typeface="Arial"/>
-              </a:rPr>
-              <a:t>•  Pupil image (tg_psi_dm96_oap): tg96_pupilq('rig','lens'), tg96_pupilsim('rig','oap'); both tools, both rigs: ./tg96_pupil_batch.sh both (knobs: P.pupil in tg96_params).</a:t>
-            </a:r>
-          </a:p>
-          <a:p>
-            <a:pPr>
-              <a:spcAft>
-                <a:spcPts val="600"/>
-              </a:spcAft>
-            </a:pPr>
-            <a:r>
-              <a:rPr sz="1200" b="0">
-                <a:solidFill>
-                  <a:srgbClr val="282828"/>
-                </a:solidFill>
-                <a:latin typeface="Arial"/>
-              </a:rPr>
-              <a:t>•  Zernike sensors (zwfs_dm96): out = zwfs_run; (bench + battery + figures); zwfs_run('tag','ng385','NGRID',385); zwfs_run('MODEL',2048,'NGRID',385,'param_file','macos_param_2048.txt'); ./zwfs_batch.sh loop193 "'stages',{'bench','loop','figs'}".</a:t>
-            </a:r>
-          </a:p>
-          <a:p>
-            <a:pPr>
-              <a:spcAft>
-                <a:spcPts val="600"/>
-              </a:spcAft>
-            </a:pPr>
-            <a:r>
-              <a:rPr sz="1200" b="0">
-                <a:solidFill>
-                  <a:srgbClr val="282828"/>
-                </a:solidFill>
-                <a:latin typeface="Arial"/>
-              </a:rPr>
-              <a:t>•  Point-diffraction (pdi_dm96): P = pdi_params; out = pdi_run(P);; pdi_run('pdi.DIA_LAMD',1.0,'stages',{'bench','battery','figs'}); ./pdi_batch.sh TAG "pdi_params, 'stages',{'bench','loop','figs'}".</a:t>
-            </a:r>
-          </a:p>
-        </p:txBody>
-      </p:sp>
-      <p:sp>
-        <p:nvSpPr>
-          <p:cNvPr id="5" name="TextBox 4"/>
-          <p:cNvSpPr txBox="1"/>
-          <p:nvPr/>
-        </p:nvSpPr>
-        <p:spPr>
-          <a:xfrm>
-            <a:off x="6400800" y="1298448"/>
+            <a:off x="6400800" y="4222242"/>
             <a:ext cx="5394960" cy="274320"/>
           </a:xfrm>
           <a:prstGeom prst="rect">
@@ -23003,84 +24095,13 @@
               </a:spcAft>
             </a:pPr>
             <a:r>
-              <a:rPr sz="1200" b="0">
-                <a:solidFill>
-                  <a:srgbClr val="282828"/>
-                </a:solidFill>
-                <a:latin typeface="Arial"/>
-              </a:rPr>
-              <a:t>•  The other gauges on the mirror rig: zwfs_run('bench.optics','oap','bench.coat_oap','bareAl','readings',{'L','S','V','P','PF'},'stages',{'bench','battery','noise','loop'},'mask.v_arm','engine').</a:t>
-            </a:r>
-          </a:p>
-          <a:p>
-            <a:pPr>
-              <a:spcAft>
-                <a:spcPts val="600"/>
-              </a:spcAft>
-            </a:pPr>
-            <a:r>
-              <a:rPr sz="1200" b="0">
-                <a:solidFill>
-                  <a:srgbClr val="282828"/>
-                </a:solidFill>
-                <a:latin typeface="Arial"/>
-              </a:rPr>
-              <a:t>•  Where: MACOS_resources/mmacos/templates/40_benches/{tg_psi_dm96_oap, zwfs_dm96, pdi_dm96}, the shared scoring library dm_gauge_lib, branch dev-candidate.  A model-1024 run needs about 11 GB; the batch wrappers run one at a time.</a:t>
-            </a:r>
-          </a:p>
-          <a:p>
-            <a:pPr>
-              <a:spcAft>
-                <a:spcPts val="600"/>
-              </a:spcAft>
-            </a:pPr>
-            <a:r>
-              <a:rPr sz="1200" b="0">
-                <a:solidFill>
-                  <a:srgbClr val="282828"/>
-                </a:solidFill>
-                <a:latin typeface="Arial"/>
-              </a:rPr>
-              <a:t>•  Gates: every stage asserts its own gates (the mask round trip, the reference-wave surrogate, the fold, the pinhole, the analyzer); tDmgLoop 15/15; the mmacos fast suite 481/0.</a:t>
-            </a:r>
-          </a:p>
-        </p:txBody>
-      </p:sp>
-      <p:sp>
-        <p:nvSpPr>
-          <p:cNvPr id="6" name="TextBox 5"/>
-          <p:cNvSpPr txBox="1"/>
-          <p:nvPr/>
-        </p:nvSpPr>
-        <p:spPr>
-          <a:xfrm>
-            <a:off x="6400800" y="3736848"/>
-            <a:ext cx="5394960" cy="274320"/>
-          </a:xfrm>
-          <a:prstGeom prst="rect">
-            <a:avLst/>
-          </a:prstGeom>
-          <a:noFill/>
-        </p:spPr>
-        <p:txBody>
-          <a:bodyPr wrap="square">
-            <a:spAutoFit/>
-          </a:bodyPr>
-          <a:lstStyle/>
-          <a:p>
-            <a:pPr>
-              <a:spcAft>
-                <a:spcPts val="600"/>
-              </a:spcAft>
-            </a:pPr>
-            <a:r>
               <a:rPr sz="1050" b="0">
                 <a:solidFill>
                   <a:srgbClr val="6E6E6E"/>
                 </a:solidFill>
                 <a:latin typeface="Arial"/>
               </a:rPr>
-              <a:t>Each directory's README carries the full command list and the run-tag index.</a:t>
+              <a:t>The scoring library (the loop, the unwrapper, the arm and analyzer maps, the clearance check) is shared by the three lanes; nothing is copied between them.  The path is recorded as reference memory so the next configuration follows it in a day.</a:t>
             </a:r>
           </a:p>
         </p:txBody>
@@ -23137,7 +24158,7 @@
                 </a:solidFill>
                 <a:latin typeface="Arial"/>
               </a:rPr>
-              <a:t>Backup: the interferometer's three phase-shift forms</a:t>
+              <a:t>Run it yourself</a:t>
             </a:r>
           </a:p>
           <a:p>
@@ -23153,7 +24174,7 @@
                 </a:solidFill>
                 <a:latin typeface="Arial"/>
               </a:rPr>
-              <a:t>The four frames are the same in the model; the forms differ in what they get wrong</a:t>
+              <a:t>One parameter sheet and one runner per approach, shared code underneath; every number here is reproduced by the commands below</a:t>
             </a:r>
           </a:p>
         </p:txBody>
@@ -23202,6 +24223,320 @@
           </a:p>
         </p:txBody>
       </p:sp>
+      <p:sp>
+        <p:nvSpPr>
+          <p:cNvPr id="4" name="TextBox 3"/>
+          <p:cNvSpPr txBox="1"/>
+          <p:nvPr/>
+        </p:nvSpPr>
+        <p:spPr>
+          <a:xfrm>
+            <a:off x="411480" y="1298448"/>
+            <a:ext cx="5806440" cy="274320"/>
+          </a:xfrm>
+          <a:prstGeom prst="rect">
+            <a:avLst/>
+          </a:prstGeom>
+          <a:noFill/>
+        </p:spPr>
+        <p:txBody>
+          <a:bodyPr wrap="square">
+            <a:spAutoFit/>
+          </a:bodyPr>
+          <a:lstStyle/>
+          <a:p>
+            <a:pPr>
+              <a:spcAft>
+                <a:spcPts val="600"/>
+              </a:spcAft>
+            </a:pPr>
+            <a:r>
+              <a:rPr sz="1200" b="0">
+                <a:solidFill>
+                  <a:srgbClr val="282828"/>
+                </a:solidFill>
+                <a:latin typeface="Arial"/>
+              </a:rPr>
+              <a:t>•  Interferometer (tg_psi_dm96_oap): tg96_run for the lens rig; tg96_run('bench.optics','oap','tag','oap') for the mirror rig; ./tg96_batch.sh lens_deck "'stages',{'bench','deck'},'battery.noise',true"; ./tg96_batch.sh loop_lens "'stages',{'bench','loop','figs'}".</a:t>
+            </a:r>
+          </a:p>
+          <a:p>
+            <a:pPr>
+              <a:spcAft>
+                <a:spcPts val="600"/>
+              </a:spcAft>
+            </a:pPr>
+            <a:r>
+              <a:rPr sz="1200" b="0">
+                <a:solidFill>
+                  <a:srgbClr val="282828"/>
+                </a:solidFill>
+                <a:latin typeface="Arial"/>
+              </a:rPr>
+              <a:t>•  Pupil image (tg_psi_dm96_oap): tg96_pupilq('rig','lens'), tg96_pupilsim('rig','oap'); both tools, both rigs: ./tg96_pupil_batch.sh both (knobs: P.pupil in tg96_params).</a:t>
+            </a:r>
+          </a:p>
+          <a:p>
+            <a:pPr>
+              <a:spcAft>
+                <a:spcPts val="600"/>
+              </a:spcAft>
+            </a:pPr>
+            <a:r>
+              <a:rPr sz="1200" b="0">
+                <a:solidFill>
+                  <a:srgbClr val="282828"/>
+                </a:solidFill>
+                <a:latin typeface="Arial"/>
+              </a:rPr>
+              <a:t>•  Zernike sensors (zwfs_dm96): out = zwfs_run; (bench + battery + figures); zwfs_run('tag','ng385','NGRID',385); zwfs_run('MODEL',2048,'NGRID',385,'param_file','macos_param_2048.txt'); ./zwfs_batch.sh loop193 "'stages',{'bench','loop','figs'}".</a:t>
+            </a:r>
+          </a:p>
+          <a:p>
+            <a:pPr>
+              <a:spcAft>
+                <a:spcPts val="600"/>
+              </a:spcAft>
+            </a:pPr>
+            <a:r>
+              <a:rPr sz="1200" b="0">
+                <a:solidFill>
+                  <a:srgbClr val="282828"/>
+                </a:solidFill>
+                <a:latin typeface="Arial"/>
+              </a:rPr>
+              <a:t>•  Point-diffraction (pdi_dm96): P = pdi_params; out = pdi_run(P);; pdi_run('pdi.DIA_LAMD',1.0,'stages',{'bench','battery','figs'}); ./pdi_batch.sh TAG "pdi_params, 'stages',{'bench','loop','figs'}".</a:t>
+            </a:r>
+          </a:p>
+        </p:txBody>
+      </p:sp>
+      <p:sp>
+        <p:nvSpPr>
+          <p:cNvPr id="5" name="TextBox 4"/>
+          <p:cNvSpPr txBox="1"/>
+          <p:nvPr/>
+        </p:nvSpPr>
+        <p:spPr>
+          <a:xfrm>
+            <a:off x="6400800" y="1298448"/>
+            <a:ext cx="5394960" cy="274320"/>
+          </a:xfrm>
+          <a:prstGeom prst="rect">
+            <a:avLst/>
+          </a:prstGeom>
+          <a:noFill/>
+        </p:spPr>
+        <p:txBody>
+          <a:bodyPr wrap="square">
+            <a:spAutoFit/>
+          </a:bodyPr>
+          <a:lstStyle/>
+          <a:p>
+            <a:pPr>
+              <a:spcAft>
+                <a:spcPts val="600"/>
+              </a:spcAft>
+            </a:pPr>
+            <a:r>
+              <a:rPr sz="1200" b="0">
+                <a:solidFill>
+                  <a:srgbClr val="282828"/>
+                </a:solidFill>
+                <a:latin typeface="Arial"/>
+              </a:rPr>
+              <a:t>•  The other gauges on the mirror rig: zwfs_run('bench.optics','oap','bench.coat_oap','bareAl','readings',{'L','S','V','P','PF'},'stages',{'bench','battery','noise','loop'},'mask.v_arm','engine').</a:t>
+            </a:r>
+          </a:p>
+          <a:p>
+            <a:pPr>
+              <a:spcAft>
+                <a:spcPts val="600"/>
+              </a:spcAft>
+            </a:pPr>
+            <a:r>
+              <a:rPr sz="1200" b="0">
+                <a:solidFill>
+                  <a:srgbClr val="282828"/>
+                </a:solidFill>
+                <a:latin typeface="Arial"/>
+              </a:rPr>
+              <a:t>•  Where: MACOS_resources/mmacos/templates/40_benches/{tg_psi_dm96_oap, zwfs_dm96, pdi_dm96}, the shared scoring library dm_gauge_lib, branch dev-candidate.  A model-1024 run needs about 11 GB; the batch wrappers run one at a time.</a:t>
+            </a:r>
+          </a:p>
+          <a:p>
+            <a:pPr>
+              <a:spcAft>
+                <a:spcPts val="600"/>
+              </a:spcAft>
+            </a:pPr>
+            <a:r>
+              <a:rPr sz="1200" b="0">
+                <a:solidFill>
+                  <a:srgbClr val="282828"/>
+                </a:solidFill>
+                <a:latin typeface="Arial"/>
+              </a:rPr>
+              <a:t>•  Gates: every stage asserts its own gates (the mask round trip, the reference-wave surrogate, the fold, the pinhole, the analyzer); tDmgLoop 15/15; the mmacos fast suite 481/0.</a:t>
+            </a:r>
+          </a:p>
+        </p:txBody>
+      </p:sp>
+      <p:sp>
+        <p:nvSpPr>
+          <p:cNvPr id="6" name="TextBox 5"/>
+          <p:cNvSpPr txBox="1"/>
+          <p:nvPr/>
+        </p:nvSpPr>
+        <p:spPr>
+          <a:xfrm>
+            <a:off x="6400800" y="3736848"/>
+            <a:ext cx="5394960" cy="274320"/>
+          </a:xfrm>
+          <a:prstGeom prst="rect">
+            <a:avLst/>
+          </a:prstGeom>
+          <a:noFill/>
+        </p:spPr>
+        <p:txBody>
+          <a:bodyPr wrap="square">
+            <a:spAutoFit/>
+          </a:bodyPr>
+          <a:lstStyle/>
+          <a:p>
+            <a:pPr>
+              <a:spcAft>
+                <a:spcPts val="600"/>
+              </a:spcAft>
+            </a:pPr>
+            <a:r>
+              <a:rPr sz="1050" b="0">
+                <a:solidFill>
+                  <a:srgbClr val="6E6E6E"/>
+                </a:solidFill>
+                <a:latin typeface="Arial"/>
+              </a:rPr>
+              <a:t>Each directory's README carries the full command list and the run-tag index.</a:t>
+            </a:r>
+          </a:p>
+        </p:txBody>
+      </p:sp>
+    </p:spTree>
+  </p:cSld>
+  <p:clrMapOvr>
+    <a:masterClrMapping/>
+  </p:clrMapOvr>
+</p:sld>
+</file>
+
+<file path=ppt/slides/slide43.xml><?xml version="1.0" encoding="utf-8"?>
+<p:sld xmlns:a="http://schemas.openxmlformats.org/drawingml/2006/main" xmlns:p="http://schemas.openxmlformats.org/presentationml/2006/main" xmlns:r="http://schemas.openxmlformats.org/officeDocument/2006/relationships">
+  <p:cSld>
+    <p:spTree>
+      <p:nvGrpSpPr>
+        <p:cNvPr id="1" name=""/>
+        <p:cNvGrpSpPr/>
+        <p:nvPr/>
+      </p:nvGrpSpPr>
+      <p:grpSpPr/>
+      <p:sp>
+        <p:nvSpPr>
+          <p:cNvPr id="2" name="TextBox 1"/>
+          <p:cNvSpPr txBox="1"/>
+          <p:nvPr/>
+        </p:nvSpPr>
+        <p:spPr>
+          <a:xfrm>
+            <a:off x="411480" y="201168"/>
+            <a:ext cx="11368735" cy="914400"/>
+          </a:xfrm>
+          <a:prstGeom prst="rect">
+            <a:avLst/>
+          </a:prstGeom>
+          <a:noFill/>
+        </p:spPr>
+        <p:txBody>
+          <a:bodyPr wrap="square">
+            <a:spAutoFit/>
+          </a:bodyPr>
+          <a:lstStyle/>
+          <a:p>
+            <a:pPr>
+              <a:spcAft>
+                <a:spcPts val="400"/>
+              </a:spcAft>
+            </a:pPr>
+            <a:r>
+              <a:rPr sz="2400" b="1">
+                <a:solidFill>
+                  <a:srgbClr val="1F4E79"/>
+                </a:solidFill>
+                <a:latin typeface="Arial"/>
+              </a:rPr>
+              <a:t>Backup: the interferometer's three phase-shift forms</a:t>
+            </a:r>
+          </a:p>
+          <a:p>
+            <a:pPr>
+              <a:spcAft>
+                <a:spcPts val="0"/>
+              </a:spcAft>
+            </a:pPr>
+            <a:r>
+              <a:rPr sz="1250" b="0">
+                <a:solidFill>
+                  <a:srgbClr val="6E6E6E"/>
+                </a:solidFill>
+                <a:latin typeface="Arial"/>
+              </a:rPr>
+              <a:t>The four frames are the same in the model; the forms differ in what they get wrong</a:t>
+            </a:r>
+          </a:p>
+        </p:txBody>
+      </p:sp>
+      <p:sp>
+        <p:nvSpPr>
+          <p:cNvPr id="3" name="Rectangle 2"/>
+          <p:cNvSpPr/>
+          <p:nvPr/>
+        </p:nvSpPr>
+        <p:spPr>
+          <a:xfrm>
+            <a:off x="411480" y="1133856"/>
+            <a:ext cx="11368735" cy="20320"/>
+          </a:xfrm>
+          <a:prstGeom prst="rect">
+            <a:avLst/>
+          </a:prstGeom>
+          <a:solidFill>
+            <a:srgbClr val="B8C6D4"/>
+          </a:solidFill>
+          <a:ln>
+            <a:noFill/>
+          </a:ln>
+          <a:effectLst/>
+        </p:spPr>
+        <p:style>
+          <a:lnRef idx="1">
+            <a:schemeClr val="accent1"/>
+          </a:lnRef>
+          <a:fillRef idx="3">
+            <a:schemeClr val="accent1"/>
+          </a:fillRef>
+          <a:effectRef idx="2">
+            <a:schemeClr val="accent1"/>
+          </a:effectRef>
+          <a:fontRef idx="minor">
+            <a:schemeClr val="lt1"/>
+          </a:fontRef>
+        </p:style>
+        <p:txBody>
+          <a:bodyPr rtlCol="0" anchor="ctr"/>
+          <a:lstStyle/>
+          <a:p>
+            <a:pPr algn="ctr"/>
+          </a:p>
+        </p:txBody>
+      </p:sp>
       <p:graphicFrame>
         <p:nvGraphicFramePr>
           <p:cNvPr id="4" name="Table 3"/>
@@ -23637,7 +24972,7 @@
 </p:sld>
 </file>
 
-<file path=ppt/slides/slide43.xml><?xml version="1.0" encoding="utf-8"?>
+<file path=ppt/slides/slide44.xml><?xml version="1.0" encoding="utf-8"?>
 <p:sld xmlns:a="http://schemas.openxmlformats.org/drawingml/2006/main" xmlns:p="http://schemas.openxmlformats.org/presentationml/2006/main" xmlns:r="http://schemas.openxmlformats.org/officeDocument/2006/relationships">
   <p:cSld>
     <p:spTree>
@@ -24485,7 +25820,7 @@
 </p:sld>
 </file>
 
-<file path=ppt/slides/slide44.xml><?xml version="1.0" encoding="utf-8"?>
+<file path=ppt/slides/slide45.xml><?xml version="1.0" encoding="utf-8"?>
 <p:sld xmlns:a="http://schemas.openxmlformats.org/drawingml/2006/main" xmlns:p="http://schemas.openxmlformats.org/presentationml/2006/main" xmlns:r="http://schemas.openxmlformats.org/officeDocument/2006/relationships">
   <p:cSld>
     <p:spTree>
@@ -24775,7 +26110,7 @@
 </p:sld>
 </file>
 
-<file path=ppt/slides/slide45.xml><?xml version="1.0" encoding="utf-8"?>
+<file path=ppt/slides/slide46.xml><?xml version="1.0" encoding="utf-8"?>
 <p:sld xmlns:a="http://schemas.openxmlformats.org/drawingml/2006/main" xmlns:p="http://schemas.openxmlformats.org/presentationml/2006/main" xmlns:r="http://schemas.openxmlformats.org/officeDocument/2006/relationships">
   <p:cSld>
     <p:spTree>
@@ -25631,7 +26966,7 @@
 </p:sld>
 </file>
 
-<file path=ppt/slides/slide46.xml><?xml version="1.0" encoding="utf-8"?>
+<file path=ppt/slides/slide47.xml><?xml version="1.0" encoding="utf-8"?>
 <p:sld xmlns:a="http://schemas.openxmlformats.org/drawingml/2006/main" xmlns:p="http://schemas.openxmlformats.org/presentationml/2006/main" xmlns:r="http://schemas.openxmlformats.org/officeDocument/2006/relationships">
   <p:cSld>
     <p:spTree>
@@ -26692,7 +28027,7 @@
 </p:sld>
 </file>
 
-<file path=ppt/slides/slide47.xml><?xml version="1.0" encoding="utf-8"?>
+<file path=ppt/slides/slide48.xml><?xml version="1.0" encoding="utf-8"?>
 <p:sld xmlns:a="http://schemas.openxmlformats.org/drawingml/2006/main" xmlns:p="http://schemas.openxmlformats.org/presentationml/2006/main" xmlns:r="http://schemas.openxmlformats.org/officeDocument/2006/relationships">
   <p:cSld>
     <p:spTree>
@@ -27354,7 +28689,7 @@
 </p:sld>
 </file>
 
-<file path=ppt/slides/slide48.xml><?xml version="1.0" encoding="utf-8"?>
+<file path=ppt/slides/slide49.xml><?xml version="1.0" encoding="utf-8"?>
 <p:sld xmlns:a="http://schemas.openxmlformats.org/drawingml/2006/main" xmlns:p="http://schemas.openxmlformats.org/presentationml/2006/main" xmlns:r="http://schemas.openxmlformats.org/officeDocument/2006/relationships">
   <p:cSld>
     <p:spTree>
@@ -27644,7 +28979,974 @@
 </p:sld>
 </file>
 
-<file path=ppt/slides/slide49.xml><?xml version="1.0" encoding="utf-8"?>
+<file path=ppt/slides/slide5.xml><?xml version="1.0" encoding="utf-8"?>
+<p:sld xmlns:a="http://schemas.openxmlformats.org/drawingml/2006/main" xmlns:p="http://schemas.openxmlformats.org/presentationml/2006/main" xmlns:r="http://schemas.openxmlformats.org/officeDocument/2006/relationships">
+  <p:cSld>
+    <p:spTree>
+      <p:nvGrpSpPr>
+        <p:cNvPr id="1" name=""/>
+        <p:cNvGrpSpPr/>
+        <p:nvPr/>
+      </p:nvGrpSpPr>
+      <p:grpSpPr/>
+      <p:sp>
+        <p:nvSpPr>
+          <p:cNvPr id="2" name="TextBox 1"/>
+          <p:cNvSpPr txBox="1"/>
+          <p:nvPr/>
+        </p:nvSpPr>
+        <p:spPr>
+          <a:xfrm>
+            <a:off x="411480" y="201168"/>
+            <a:ext cx="11368735" cy="914400"/>
+          </a:xfrm>
+          <a:prstGeom prst="rect">
+            <a:avLst/>
+          </a:prstGeom>
+          <a:noFill/>
+        </p:spPr>
+        <p:txBody>
+          <a:bodyPr wrap="square">
+            <a:spAutoFit/>
+          </a:bodyPr>
+          <a:lstStyle/>
+          <a:p>
+            <a:pPr>
+              <a:spcAft>
+                <a:spcPts val="400"/>
+              </a:spcAft>
+            </a:pPr>
+            <a:r>
+              <a:rPr sz="2400" b="1">
+                <a:solidFill>
+                  <a:srgbClr val="1F4E79"/>
+                </a:solidFill>
+                <a:latin typeface="Arial"/>
+              </a:rPr>
+              <a:t>The splitter angle: three options</a:t>
+            </a:r>
+          </a:p>
+          <a:p>
+            <a:pPr>
+              <a:spcAft>
+                <a:spcPts val="0"/>
+              </a:spcAft>
+            </a:pPr>
+            <a:r>
+              <a:rPr sz="1250" b="0">
+                <a:solidFill>
+                  <a:srgbClr val="6E6E6E"/>
+                </a:solidFill>
+                <a:latin typeface="Arial"/>
+              </a:rPr>
+              <a:t>The record's 7° cannot be built; 22.5° clears every part and is the choice; 30° adds margin at the price of a wider bench and more plate polarization</a:t>
+            </a:r>
+          </a:p>
+        </p:txBody>
+      </p:sp>
+      <p:sp>
+        <p:nvSpPr>
+          <p:cNvPr id="3" name="Rectangle 2"/>
+          <p:cNvSpPr/>
+          <p:nvPr/>
+        </p:nvSpPr>
+        <p:spPr>
+          <a:xfrm>
+            <a:off x="411480" y="1133856"/>
+            <a:ext cx="11368735" cy="20320"/>
+          </a:xfrm>
+          <a:prstGeom prst="rect">
+            <a:avLst/>
+          </a:prstGeom>
+          <a:solidFill>
+            <a:srgbClr val="B8C6D4"/>
+          </a:solidFill>
+          <a:ln>
+            <a:noFill/>
+          </a:ln>
+          <a:effectLst/>
+        </p:spPr>
+        <p:style>
+          <a:lnRef idx="1">
+            <a:schemeClr val="accent1"/>
+          </a:lnRef>
+          <a:fillRef idx="3">
+            <a:schemeClr val="accent1"/>
+          </a:fillRef>
+          <a:effectRef idx="2">
+            <a:schemeClr val="accent1"/>
+          </a:effectRef>
+          <a:fontRef idx="minor">
+            <a:schemeClr val="lt1"/>
+          </a:fontRef>
+        </p:style>
+        <p:txBody>
+          <a:bodyPr rtlCol="0" anchor="ctr"/>
+          <a:lstStyle/>
+          <a:p>
+            <a:pPr algn="ctr"/>
+          </a:p>
+        </p:txBody>
+      </p:sp>
+      <p:pic>
+        <p:nvPicPr>
+          <p:cNvPr id="4" name="Picture 3" descr="bench_three_nodes.png"/>
+          <p:cNvPicPr>
+            <a:picLocks noChangeAspect="1"/>
+          </p:cNvPicPr>
+          <p:nvPr/>
+        </p:nvPicPr>
+        <p:blipFill>
+          <a:blip r:embed="rId2"/>
+          <a:stretch>
+            <a:fillRect/>
+          </a:stretch>
+        </p:blipFill>
+        <p:spPr>
+          <a:xfrm>
+            <a:off x="2242989" y="1298448"/>
+            <a:ext cx="7705716" cy="1434592"/>
+          </a:xfrm>
+          <a:prstGeom prst="rect">
+            <a:avLst/>
+          </a:prstGeom>
+        </p:spPr>
+      </p:pic>
+      <p:sp>
+        <p:nvSpPr>
+          <p:cNvPr id="5" name="TextBox 4"/>
+          <p:cNvSpPr txBox="1"/>
+          <p:nvPr/>
+        </p:nvSpPr>
+        <p:spPr>
+          <a:xfrm>
+            <a:off x="411480" y="2751328"/>
+            <a:ext cx="11368735" cy="394208"/>
+          </a:xfrm>
+          <a:prstGeom prst="rect">
+            <a:avLst/>
+          </a:prstGeom>
+          <a:noFill/>
+        </p:spPr>
+        <p:txBody>
+          <a:bodyPr wrap="square">
+            <a:spAutoFit/>
+          </a:bodyPr>
+          <a:lstStyle/>
+          <a:p>
+            <a:pPr algn="ctr">
+              <a:spcAft>
+                <a:spcPts val="0"/>
+              </a:spcAft>
+            </a:pPr>
+            <a:r>
+              <a:rPr sz="1000" b="0">
+                <a:solidFill>
+                  <a:srgbClr val="6E6E6E"/>
+                </a:solidFill>
+                <a:latin typeface="Arial"/>
+              </a:rPr>
+              <a:t>The node at 7° (left, the record: eight parts in another beam), 22.5° (middle, the choice: every part clears, the compensator by 16 mm) and 30° (right: the compensator by 57 mm); the output plate and analyzer moved to 160 mm behind the splitter in the last two.  The three panels are the tool's own node drawings, placed side by side.</a:t>
+            </a:r>
+          </a:p>
+        </p:txBody>
+      </p:sp>
+      <p:graphicFrame>
+        <p:nvGraphicFramePr>
+          <p:cNvPr id="6" name="Table 5"/>
+          <p:cNvGraphicFramePr>
+            <a:graphicFrameLocks noGrp="1"/>
+          </p:cNvGraphicFramePr>
+          <p:nvPr/>
+        </p:nvGraphicFramePr>
+        <p:xfrm>
+          <a:off x="411480" y="3182112"/>
+          <a:ext cx="11368734" cy="3183255"/>
+        </p:xfrm>
+        <a:graphic>
+          <a:graphicData uri="http://schemas.openxmlformats.org/drawingml/2006/table">
+            <a:tbl>
+              <a:tblPr firstRow="1" bandRow="1">
+                <a:tableStyleId>{5C22544A-7EE6-4342-B048-85BDC9FD1C3A}</a:tableStyleId>
+              </a:tblPr>
+              <a:tblGrid>
+                <a:gridCol w="3410620"/>
+                <a:gridCol w="2273747"/>
+                <a:gridCol w="3284301"/>
+                <a:gridCol w="2400066"/>
+              </a:tblGrid>
+              <a:tr h="280035">
+                <a:tc>
+                  <a:txBody>
+                    <a:bodyPr wrap="square"/>
+                    <a:lstStyle/>
+                    <a:p>
+                      <a:r>
+                        <a:rPr sz="1100" b="1">
+                          <a:solidFill>
+                            <a:srgbClr val="FFFFFF"/>
+                          </a:solidFill>
+                          <a:latin typeface="Arial"/>
+                        </a:rPr>
+                        <a:t>impact</a:t>
+                      </a:r>
+                    </a:p>
+                  </a:txBody>
+                  <a:tcPr marL="54864" marR="54864" marT="18288" marB="18288">
+                    <a:solidFill>
+                      <a:srgbClr val="1F4E79"/>
+                    </a:solidFill>
+                  </a:tcPr>
+                </a:tc>
+                <a:tc>
+                  <a:txBody>
+                    <a:bodyPr wrap="square"/>
+                    <a:lstStyle/>
+                    <a:p>
+                      <a:r>
+                        <a:rPr sz="1100" b="1">
+                          <a:solidFill>
+                            <a:srgbClr val="FFFFFF"/>
+                          </a:solidFill>
+                          <a:latin typeface="Arial"/>
+                        </a:rPr>
+                        <a:t>7° (record)</a:t>
+                      </a:r>
+                    </a:p>
+                  </a:txBody>
+                  <a:tcPr marL="54864" marR="54864" marT="18288" marB="18288">
+                    <a:solidFill>
+                      <a:srgbClr val="1F4E79"/>
+                    </a:solidFill>
+                  </a:tcPr>
+                </a:tc>
+                <a:tc>
+                  <a:txBody>
+                    <a:bodyPr wrap="square"/>
+                    <a:lstStyle/>
+                    <a:p>
+                      <a:r>
+                        <a:rPr sz="1100" b="1">
+                          <a:solidFill>
+                            <a:srgbClr val="FFFFFF"/>
+                          </a:solidFill>
+                          <a:latin typeface="Arial"/>
+                        </a:rPr>
+                        <a:t>22.5° (choice)</a:t>
+                      </a:r>
+                    </a:p>
+                  </a:txBody>
+                  <a:tcPr marL="54864" marR="54864" marT="18288" marB="18288">
+                    <a:solidFill>
+                      <a:srgbClr val="1F4E79"/>
+                    </a:solidFill>
+                  </a:tcPr>
+                </a:tc>
+                <a:tc>
+                  <a:txBody>
+                    <a:bodyPr wrap="square"/>
+                    <a:lstStyle/>
+                    <a:p>
+                      <a:r>
+                        <a:rPr sz="1100" b="1">
+                          <a:solidFill>
+                            <a:srgbClr val="FFFFFF"/>
+                          </a:solidFill>
+                          <a:latin typeface="Arial"/>
+                        </a:rPr>
+                        <a:t>30°</a:t>
+                      </a:r>
+                    </a:p>
+                  </a:txBody>
+                  <a:tcPr marL="54864" marR="54864" marT="18288" marB="18288">
+                    <a:solidFill>
+                      <a:srgbClr val="1F4E79"/>
+                    </a:solidFill>
+                  </a:tcPr>
+                </a:tc>
+              </a:tr>
+              <a:tr h="468630">
+                <a:tc>
+                  <a:txBody>
+                    <a:bodyPr wrap="square"/>
+                    <a:lstStyle/>
+                    <a:p>
+                      <a:r>
+                        <a:rPr sz="1100" b="0">
+                          <a:solidFill>
+                            <a:srgbClr val="282828"/>
+                          </a:solidFill>
+                          <a:latin typeface="Arial"/>
+                        </a:rPr>
+                        <a:t>node clearance, worst part</a:t>
+                      </a:r>
+                    </a:p>
+                  </a:txBody>
+                  <a:tcPr marL="54864" marR="54864" marT="18288" marB="18288">
+                    <a:solidFill>
+                      <a:srgbClr val="FFFFFF"/>
+                    </a:solidFill>
+                  </a:tcPr>
+                </a:tc>
+                <a:tc>
+                  <a:txBody>
+                    <a:bodyPr wrap="square"/>
+                    <a:lstStyle/>
+                    <a:p>
+                      <a:r>
+                        <a:rPr sz="1100" b="0">
+                          <a:solidFill>
+                            <a:srgbClr val="282828"/>
+                          </a:solidFill>
+                          <a:latin typeface="Arial"/>
+                        </a:rPr>
+                        <a:t>−109 mm: not buildable</a:t>
+                      </a:r>
+                    </a:p>
+                  </a:txBody>
+                  <a:tcPr marL="54864" marR="54864" marT="18288" marB="18288">
+                    <a:solidFill>
+                      <a:srgbClr val="FFFFFF"/>
+                    </a:solidFill>
+                  </a:tcPr>
+                </a:tc>
+                <a:tc>
+                  <a:txBody>
+                    <a:bodyPr wrap="square"/>
+                    <a:lstStyle/>
+                    <a:p>
+                      <a:r>
+                        <a:rPr sz="1100" b="0">
+                          <a:solidFill>
+                            <a:srgbClr val="282828"/>
+                          </a:solidFill>
+                          <a:latin typeface="Arial"/>
+                        </a:rPr>
+                        <a:t>compensator +16 mm; output optics +55 / +65; L2 +100</a:t>
+                      </a:r>
+                    </a:p>
+                  </a:txBody>
+                  <a:tcPr marL="54864" marR="54864" marT="18288" marB="18288">
+                    <a:solidFill>
+                      <a:srgbClr val="FFFFFF"/>
+                    </a:solidFill>
+                  </a:tcPr>
+                </a:tc>
+                <a:tc>
+                  <a:txBody>
+                    <a:bodyPr wrap="square"/>
+                    <a:lstStyle/>
+                    <a:p>
+                      <a:r>
+                        <a:rPr sz="1100" b="0">
+                          <a:solidFill>
+                            <a:srgbClr val="282828"/>
+                          </a:solidFill>
+                          <a:latin typeface="Arial"/>
+                        </a:rPr>
+                        <a:t>compensator +57; the rest +178 or more</a:t>
+                      </a:r>
+                    </a:p>
+                  </a:txBody>
+                  <a:tcPr marL="54864" marR="54864" marT="18288" marB="18288">
+                    <a:solidFill>
+                      <a:srgbClr val="FFFFFF"/>
+                    </a:solidFill>
+                  </a:tcPr>
+                </a:tc>
+              </a:tr>
+              <a:tr h="468630">
+                <a:tc>
+                  <a:txBody>
+                    <a:bodyPr wrap="square"/>
+                    <a:lstStyle/>
+                    <a:p>
+                      <a:r>
+                        <a:rPr sz="1100" b="0">
+                          <a:solidFill>
+                            <a:srgbClr val="282828"/>
+                          </a:solidFill>
+                          <a:latin typeface="Arial"/>
+                        </a:rPr>
+                        <a:t>bench shape</a:t>
+                      </a:r>
+                    </a:p>
+                  </a:txBody>
+                  <a:tcPr marL="54864" marR="54864" marT="18288" marB="18288">
+                    <a:solidFill>
+                      <a:srgbClr val="ECF1F6"/>
+                    </a:solidFill>
+                  </a:tcPr>
+                </a:tc>
+                <a:tc>
+                  <a:txBody>
+                    <a:bodyPr wrap="square"/>
+                    <a:lstStyle/>
+                    <a:p>
+                      <a:r>
+                        <a:rPr sz="1100" b="0">
+                          <a:solidFill>
+                            <a:srgbClr val="282828"/>
+                          </a:solidFill>
+                          <a:latin typeface="Arial"/>
+                        </a:rPr>
+                        <a:t>all four legs within 14° of one line</a:t>
+                      </a:r>
+                    </a:p>
+                  </a:txBody>
+                  <a:tcPr marL="54864" marR="54864" marT="18288" marB="18288">
+                    <a:solidFill>
+                      <a:srgbClr val="ECF1F6"/>
+                    </a:solidFill>
+                  </a:tcPr>
+                </a:tc>
+                <a:tc>
+                  <a:txBody>
+                    <a:bodyPr wrap="square"/>
+                    <a:lstStyle/>
+                    <a:p>
+                      <a:r>
+                        <a:rPr sz="1100" b="0">
+                          <a:solidFill>
+                            <a:srgbClr val="282828"/>
+                          </a:solidFill>
+                          <a:latin typeface="Arial"/>
+                        </a:rPr>
+                        <a:t>mirror leg at 45° to the source leg</a:t>
+                      </a:r>
+                    </a:p>
+                  </a:txBody>
+                  <a:tcPr marL="54864" marR="54864" marT="18288" marB="18288">
+                    <a:solidFill>
+                      <a:srgbClr val="ECF1F6"/>
+                    </a:solidFill>
+                  </a:tcPr>
+                </a:tc>
+                <a:tc>
+                  <a:txBody>
+                    <a:bodyPr wrap="square"/>
+                    <a:lstStyle/>
+                    <a:p>
+                      <a:r>
+                        <a:rPr sz="1100" b="0">
+                          <a:solidFill>
+                            <a:srgbClr val="282828"/>
+                          </a:solidFill>
+                          <a:latin typeface="Arial"/>
+                        </a:rPr>
+                        <a:t>mirror leg at 60°</a:t>
+                      </a:r>
+                    </a:p>
+                  </a:txBody>
+                  <a:tcPr marL="54864" marR="54864" marT="18288" marB="18288">
+                    <a:solidFill>
+                      <a:srgbClr val="ECF1F6"/>
+                    </a:solidFill>
+                  </a:tcPr>
+                </a:tc>
+              </a:tr>
+              <a:tr h="468630">
+                <a:tc>
+                  <a:txBody>
+                    <a:bodyPr wrap="square"/>
+                    <a:lstStyle/>
+                    <a:p>
+                      <a:r>
+                        <a:rPr sz="1100" b="0">
+                          <a:solidFill>
+                            <a:srgbClr val="282828"/>
+                          </a:solidFill>
+                          <a:latin typeface="Arial"/>
+                        </a:rPr>
+                        <a:t>plate's polarization (mean diattenuation, uniform)</a:t>
+                      </a:r>
+                    </a:p>
+                  </a:txBody>
+                  <a:tcPr marL="54864" marR="54864" marT="18288" marB="18288">
+                    <a:solidFill>
+                      <a:srgbClr val="FFFFFF"/>
+                    </a:solidFill>
+                  </a:tcPr>
+                </a:tc>
+                <a:tc>
+                  <a:txBody>
+                    <a:bodyPr wrap="square"/>
+                    <a:lstStyle/>
+                    <a:p>
+                      <a:r>
+                        <a:rPr sz="1100" b="0">
+                          <a:solidFill>
+                            <a:srgbClr val="282828"/>
+                          </a:solidFill>
+                          <a:latin typeface="Arial"/>
+                        </a:rPr>
+                        <a:t>0.5%</a:t>
+                      </a:r>
+                    </a:p>
+                  </a:txBody>
+                  <a:tcPr marL="54864" marR="54864" marT="18288" marB="18288">
+                    <a:solidFill>
+                      <a:srgbClr val="FFFFFF"/>
+                    </a:solidFill>
+                  </a:tcPr>
+                </a:tc>
+                <a:tc>
+                  <a:txBody>
+                    <a:bodyPr wrap="square"/>
+                    <a:lstStyle/>
+                    <a:p>
+                      <a:r>
+                        <a:rPr sz="1100" b="0">
+                          <a:solidFill>
+                            <a:srgbClr val="282828"/>
+                          </a:solidFill>
+                          <a:latin typeface="Arial"/>
+                        </a:rPr>
+                        <a:t>5.5%</a:t>
+                      </a:r>
+                    </a:p>
+                  </a:txBody>
+                  <a:tcPr marL="54864" marR="54864" marT="18288" marB="18288">
+                    <a:solidFill>
+                      <a:srgbClr val="FFFFFF"/>
+                    </a:solidFill>
+                  </a:tcPr>
+                </a:tc>
+                <a:tc>
+                  <a:txBody>
+                    <a:bodyPr wrap="square"/>
+                    <a:lstStyle/>
+                    <a:p>
+                      <a:r>
+                        <a:rPr sz="1100" b="0">
+                          <a:solidFill>
+                            <a:srgbClr val="282828"/>
+                          </a:solidFill>
+                          <a:latin typeface="Arial"/>
+                        </a:rPr>
+                        <a:t>10%</a:t>
+                      </a:r>
+                    </a:p>
+                  </a:txBody>
+                  <a:tcPr marL="54864" marR="54864" marT="18288" marB="18288">
+                    <a:solidFill>
+                      <a:srgbClr val="FFFFFF"/>
+                    </a:solidFill>
+                  </a:tcPr>
+                </a:tc>
+              </a:tr>
+              <a:tr h="468630">
+                <a:tc>
+                  <a:txBody>
+                    <a:bodyPr wrap="square"/>
+                    <a:lstStyle/>
+                    <a:p>
+                      <a:r>
+                        <a:rPr sz="1100" b="0">
+                          <a:solidFill>
+                            <a:srgbClr val="282828"/>
+                          </a:solidFill>
+                          <a:latin typeface="Arial"/>
+                        </a:rPr>
+                        <a:t>pupil-varying part (the lenses; what the sensors feel)</a:t>
+                      </a:r>
+                    </a:p>
+                  </a:txBody>
+                  <a:tcPr marL="54864" marR="54864" marT="18288" marB="18288">
+                    <a:solidFill>
+                      <a:srgbClr val="ECF1F6"/>
+                    </a:solidFill>
+                  </a:tcPr>
+                </a:tc>
+                <a:tc>
+                  <a:txBody>
+                    <a:bodyPr wrap="square"/>
+                    <a:lstStyle/>
+                    <a:p>
+                      <a:r>
+                        <a:rPr sz="1100" b="0">
+                          <a:solidFill>
+                            <a:srgbClr val="282828"/>
+                          </a:solidFill>
+                          <a:latin typeface="Arial"/>
+                        </a:rPr>
+                        <a:t>1.1e-3 rms</a:t>
+                      </a:r>
+                    </a:p>
+                  </a:txBody>
+                  <a:tcPr marL="54864" marR="54864" marT="18288" marB="18288">
+                    <a:solidFill>
+                      <a:srgbClr val="ECF1F6"/>
+                    </a:solidFill>
+                  </a:tcPr>
+                </a:tc>
+                <a:tc>
+                  <a:txBody>
+                    <a:bodyPr wrap="square"/>
+                    <a:lstStyle/>
+                    <a:p>
+                      <a:r>
+                        <a:rPr sz="1100" b="0">
+                          <a:solidFill>
+                            <a:srgbClr val="282828"/>
+                          </a:solidFill>
+                          <a:latin typeface="Arial"/>
+                        </a:rPr>
+                        <a:t>1.1e-3 rms</a:t>
+                      </a:r>
+                    </a:p>
+                  </a:txBody>
+                  <a:tcPr marL="54864" marR="54864" marT="18288" marB="18288">
+                    <a:solidFill>
+                      <a:srgbClr val="ECF1F6"/>
+                    </a:solidFill>
+                  </a:tcPr>
+                </a:tc>
+                <a:tc>
+                  <a:txBody>
+                    <a:bodyPr wrap="square"/>
+                    <a:lstStyle/>
+                    <a:p>
+                      <a:r>
+                        <a:rPr sz="1100" b="0">
+                          <a:solidFill>
+                            <a:srgbClr val="282828"/>
+                          </a:solidFill>
+                          <a:latin typeface="Arial"/>
+                        </a:rPr>
+                        <a:t>1.1e-3 rms</a:t>
+                      </a:r>
+                    </a:p>
+                  </a:txBody>
+                  <a:tcPr marL="54864" marR="54864" marT="18288" marB="18288">
+                    <a:solidFill>
+                      <a:srgbClr val="ECF1F6"/>
+                    </a:solidFill>
+                  </a:tcPr>
+                </a:tc>
+              </a:tr>
+              <a:tr h="468630">
+                <a:tc>
+                  <a:txBody>
+                    <a:bodyPr wrap="square"/>
+                    <a:lstStyle/>
+                    <a:p>
+                      <a:r>
+                        <a:rPr sz="1100" b="0">
+                          <a:solidFill>
+                            <a:srgbClr val="282828"/>
+                          </a:solidFill>
+                          <a:latin typeface="Arial"/>
+                        </a:rPr>
+                        <a:t>vector sensor, channel phase difference / 100 nm pokes</a:t>
+                      </a:r>
+                    </a:p>
+                  </a:txBody>
+                  <a:tcPr marL="54864" marR="54864" marT="18288" marB="18288">
+                    <a:solidFill>
+                      <a:srgbClr val="FFFFFF"/>
+                    </a:solidFill>
+                  </a:tcPr>
+                </a:tc>
+                <a:tc>
+                  <a:txBody>
+                    <a:bodyPr wrap="square"/>
+                    <a:lstStyle/>
+                    <a:p>
+                      <a:r>
+                        <a:rPr sz="1100" b="0">
+                          <a:solidFill>
+                            <a:srgbClr val="282828"/>
+                          </a:solidFill>
+                          <a:latin typeface="Arial"/>
+                        </a:rPr>
+                        <a:t>1.63 mrad / 9.0 pm</a:t>
+                      </a:r>
+                    </a:p>
+                  </a:txBody>
+                  <a:tcPr marL="54864" marR="54864" marT="18288" marB="18288">
+                    <a:solidFill>
+                      <a:srgbClr val="FFFFFF"/>
+                    </a:solidFill>
+                  </a:tcPr>
+                </a:tc>
+                <a:tc>
+                  <a:txBody>
+                    <a:bodyPr wrap="square"/>
+                    <a:lstStyle/>
+                    <a:p>
+                      <a:r>
+                        <a:rPr sz="1100" b="0">
+                          <a:solidFill>
+                            <a:srgbClr val="282828"/>
+                          </a:solidFill>
+                          <a:latin typeface="Arial"/>
+                        </a:rPr>
+                        <a:t>1.66 mrad / 8.8 pm</a:t>
+                      </a:r>
+                    </a:p>
+                  </a:txBody>
+                  <a:tcPr marL="54864" marR="54864" marT="18288" marB="18288">
+                    <a:solidFill>
+                      <a:srgbClr val="FFFFFF"/>
+                    </a:solidFill>
+                  </a:tcPr>
+                </a:tc>
+                <a:tc>
+                  <a:txBody>
+                    <a:bodyPr wrap="square"/>
+                    <a:lstStyle/>
+                    <a:p>
+                      <a:r>
+                        <a:rPr sz="1100" b="0">
+                          <a:solidFill>
+                            <a:srgbClr val="282828"/>
+                          </a:solidFill>
+                          <a:latin typeface="Arial"/>
+                        </a:rPr>
+                        <a:t>1.69 mrad / 9.1 pm</a:t>
+                      </a:r>
+                    </a:p>
+                  </a:txBody>
+                  <a:tcPr marL="54864" marR="54864" marT="18288" marB="18288">
+                    <a:solidFill>
+                      <a:srgbClr val="FFFFFF"/>
+                    </a:solidFill>
+                  </a:tcPr>
+                </a:tc>
+              </a:tr>
+              <a:tr h="280035">
+                <a:tc>
+                  <a:txBody>
+                    <a:bodyPr wrap="square"/>
+                    <a:lstStyle/>
+                    <a:p>
+                      <a:r>
+                        <a:rPr sz="1100" b="0">
+                          <a:solidFill>
+                            <a:srgbClr val="282828"/>
+                          </a:solidFill>
+                          <a:latin typeface="Arial"/>
+                        </a:rPr>
+                        <a:t>transmitted beam shift in the 2.6 mm plate</a:t>
+                      </a:r>
+                    </a:p>
+                  </a:txBody>
+                  <a:tcPr marL="54864" marR="54864" marT="18288" marB="18288">
+                    <a:solidFill>
+                      <a:srgbClr val="ECF1F6"/>
+                    </a:solidFill>
+                  </a:tcPr>
+                </a:tc>
+                <a:tc>
+                  <a:txBody>
+                    <a:bodyPr wrap="square"/>
+                    <a:lstStyle/>
+                    <a:p>
+                      <a:r>
+                        <a:rPr sz="1100" b="0">
+                          <a:solidFill>
+                            <a:srgbClr val="282828"/>
+                          </a:solidFill>
+                          <a:latin typeface="Arial"/>
+                        </a:rPr>
+                        <a:t>0.1 mm</a:t>
+                      </a:r>
+                    </a:p>
+                  </a:txBody>
+                  <a:tcPr marL="54864" marR="54864" marT="18288" marB="18288">
+                    <a:solidFill>
+                      <a:srgbClr val="ECF1F6"/>
+                    </a:solidFill>
+                  </a:tcPr>
+                </a:tc>
+                <a:tc>
+                  <a:txBody>
+                    <a:bodyPr wrap="square"/>
+                    <a:lstStyle/>
+                    <a:p>
+                      <a:r>
+                        <a:rPr sz="1100" b="0">
+                          <a:solidFill>
+                            <a:srgbClr val="282828"/>
+                          </a:solidFill>
+                          <a:latin typeface="Arial"/>
+                        </a:rPr>
+                        <a:t>0.36 mm (1.4 at 10 mm)</a:t>
+                      </a:r>
+                    </a:p>
+                  </a:txBody>
+                  <a:tcPr marL="54864" marR="54864" marT="18288" marB="18288">
+                    <a:solidFill>
+                      <a:srgbClr val="ECF1F6"/>
+                    </a:solidFill>
+                  </a:tcPr>
+                </a:tc>
+                <a:tc>
+                  <a:txBody>
+                    <a:bodyPr wrap="square"/>
+                    <a:lstStyle/>
+                    <a:p>
+                      <a:r>
+                        <a:rPr sz="1100" b="0">
+                          <a:solidFill>
+                            <a:srgbClr val="282828"/>
+                          </a:solidFill>
+                          <a:latin typeface="Arial"/>
+                        </a:rPr>
+                        <a:t>0.50 mm</a:t>
+                      </a:r>
+                    </a:p>
+                  </a:txBody>
+                  <a:tcPr marL="54864" marR="54864" marT="18288" marB="18288">
+                    <a:solidFill>
+                      <a:srgbClr val="ECF1F6"/>
+                    </a:solidFill>
+                  </a:tcPr>
+                </a:tc>
+              </a:tr>
+              <a:tr h="280035">
+                <a:tc>
+                  <a:txBody>
+                    <a:bodyPr wrap="square"/>
+                    <a:lstStyle/>
+                    <a:p>
+                      <a:r>
+                        <a:rPr sz="1100" b="0">
+                          <a:solidFill>
+                            <a:srgbClr val="282828"/>
+                          </a:solidFill>
+                          <a:latin typeface="Arial"/>
+                        </a:rPr>
+                        <a:t>interferometer snapshot form</a:t>
+                      </a:r>
+                    </a:p>
+                  </a:txBody>
+                  <a:tcPr marL="54864" marR="54864" marT="18288" marB="18288">
+                    <a:solidFill>
+                      <a:srgbClr val="FFFFFF"/>
+                    </a:solidFill>
+                  </a:tcPr>
+                </a:tc>
+                <a:tc>
+                  <a:txBody>
+                    <a:bodyPr wrap="square"/>
+                    <a:lstStyle/>
+                    <a:p>
+                      <a:r>
+                        <a:rPr sz="1100" b="0">
+                          <a:solidFill>
+                            <a:srgbClr val="282828"/>
+                          </a:solidFill>
+                          <a:latin typeface="Arial"/>
+                        </a:rPr>
+                        <a:t>the small-angle case</a:t>
+                      </a:r>
+                    </a:p>
+                  </a:txBody>
+                  <a:tcPr marL="54864" marR="54864" marT="18288" marB="18288">
+                    <a:solidFill>
+                      <a:srgbClr val="FFFFFF"/>
+                    </a:solidFill>
+                  </a:tcPr>
+                </a:tc>
+                <a:tc>
+                  <a:txBody>
+                    <a:bodyPr wrap="square"/>
+                    <a:lstStyle/>
+                    <a:p>
+                      <a:r>
+                        <a:rPr sz="1100" b="0">
+                          <a:solidFill>
+                            <a:srgbClr val="282828"/>
+                          </a:solidFill>
+                          <a:latin typeface="Arial"/>
+                        </a:rPr>
+                        <a:t>its plate systematics re-run at this angle</a:t>
+                      </a:r>
+                    </a:p>
+                  </a:txBody>
+                  <a:tcPr marL="54864" marR="54864" marT="18288" marB="18288">
+                    <a:solidFill>
+                      <a:srgbClr val="FFFFFF"/>
+                    </a:solidFill>
+                  </a:tcPr>
+                </a:tc>
+                <a:tc>
+                  <a:txBody>
+                    <a:bodyPr wrap="square"/>
+                    <a:lstStyle/>
+                    <a:p>
+                      <a:r>
+                        <a:rPr sz="1100" b="0">
+                          <a:solidFill>
+                            <a:srgbClr val="282828"/>
+                          </a:solidFill>
+                          <a:latin typeface="Arial"/>
+                        </a:rPr>
+                        <a:t>larger</a:t>
+                      </a:r>
+                    </a:p>
+                  </a:txBody>
+                  <a:tcPr marL="54864" marR="54864" marT="18288" marB="18288">
+                    <a:solidFill>
+                      <a:srgbClr val="FFFFFF"/>
+                    </a:solidFill>
+                  </a:tcPr>
+                </a:tc>
+              </a:tr>
+            </a:tbl>
+          </a:graphicData>
+        </a:graphic>
+      </p:graphicFrame>
+      <p:sp>
+        <p:nvSpPr>
+          <p:cNvPr id="7" name="TextBox 6"/>
+          <p:cNvSpPr txBox="1"/>
+          <p:nvPr/>
+        </p:nvSpPr>
+        <p:spPr>
+          <a:xfrm>
+            <a:off x="411480" y="6511671"/>
+            <a:ext cx="11368735" cy="274320"/>
+          </a:xfrm>
+          <a:prstGeom prst="rect">
+            <a:avLst/>
+          </a:prstGeom>
+          <a:noFill/>
+        </p:spPr>
+        <p:txBody>
+          <a:bodyPr wrap="square">
+            <a:spAutoFit/>
+          </a:bodyPr>
+          <a:lstStyle/>
+          <a:p>
+            <a:pPr>
+              <a:spcAft>
+                <a:spcPts val="600"/>
+              </a:spcAft>
+            </a:pPr>
+            <a:r>
+              <a:rPr sz="1050" b="0">
+                <a:solidFill>
+                  <a:srgbClr val="6E6E6E"/>
+                </a:solidFill>
+                <a:latin typeface="Arial"/>
+              </a:rPr>
+              <a:t>The sensors reproduce their rows at every angle; the interferometer's snapshot form is the one thing the angle changes, through the plate's polarization, and the cube form is built for 45°.  Run tags bs22_dev, bs30_dev; the panels at 7° and 30° are on the backup clearance slide.</a:t>
+            </a:r>
+          </a:p>
+        </p:txBody>
+      </p:sp>
+    </p:spTree>
+  </p:cSld>
+  <p:clrMapOvr>
+    <a:masterClrMapping/>
+  </p:clrMapOvr>
+</p:sld>
+</file>
+
+<file path=ppt/slides/slide50.xml><?xml version="1.0" encoding="utf-8"?>
 <p:sld xmlns:a="http://schemas.openxmlformats.org/drawingml/2006/main" xmlns:p="http://schemas.openxmlformats.org/presentationml/2006/main" xmlns:r="http://schemas.openxmlformats.org/officeDocument/2006/relationships">
   <p:cSld>
     <p:spTree>
@@ -28348,7 +30650,7 @@
 </p:sld>
 </file>
 
-<file path=ppt/slides/slide5.xml><?xml version="1.0" encoding="utf-8"?>
+<file path=ppt/slides/slide51.xml><?xml version="1.0" encoding="utf-8"?>
 <p:sld xmlns:a="http://schemas.openxmlformats.org/drawingml/2006/main" xmlns:p="http://schemas.openxmlformats.org/presentationml/2006/main" xmlns:r="http://schemas.openxmlformats.org/officeDocument/2006/relationships">
   <p:cSld>
     <p:spTree>
@@ -28392,7 +30694,7 @@
                 </a:solidFill>
                 <a:latin typeface="Arial"/>
               </a:rPr>
-              <a:t>The splitter angle: three options</a:t>
+              <a:t>Backup: the path per configuration</a:t>
             </a:r>
           </a:p>
           <a:p>
@@ -28408,7 +30710,7 @@
                 </a:solidFill>
                 <a:latin typeface="Arial"/>
               </a:rPr>
-              <a:t>The record's 7° cannot be built; 22.5° clears every part and is the choice; 30° adds margin at the price of a wider bench and more plate polarization</a:t>
+              <a:t>The runner stages and knobs each approach went through, in the order they ran</a:t>
             </a:r>
           </a:p>
         </p:txBody>
@@ -28457,973 +30759,6 @@
           </a:p>
         </p:txBody>
       </p:sp>
-      <p:pic>
-        <p:nvPicPr>
-          <p:cNvPr id="4" name="Picture 3" descr="bench_three_nodes.png"/>
-          <p:cNvPicPr>
-            <a:picLocks noChangeAspect="1"/>
-          </p:cNvPicPr>
-          <p:nvPr/>
-        </p:nvPicPr>
-        <p:blipFill>
-          <a:blip r:embed="rId2"/>
-          <a:stretch>
-            <a:fillRect/>
-          </a:stretch>
-        </p:blipFill>
-        <p:spPr>
-          <a:xfrm>
-            <a:off x="2242989" y="1298448"/>
-            <a:ext cx="7705716" cy="1434592"/>
-          </a:xfrm>
-          <a:prstGeom prst="rect">
-            <a:avLst/>
-          </a:prstGeom>
-        </p:spPr>
-      </p:pic>
-      <p:sp>
-        <p:nvSpPr>
-          <p:cNvPr id="5" name="TextBox 4"/>
-          <p:cNvSpPr txBox="1"/>
-          <p:nvPr/>
-        </p:nvSpPr>
-        <p:spPr>
-          <a:xfrm>
-            <a:off x="411480" y="2751328"/>
-            <a:ext cx="11368735" cy="394208"/>
-          </a:xfrm>
-          <a:prstGeom prst="rect">
-            <a:avLst/>
-          </a:prstGeom>
-          <a:noFill/>
-        </p:spPr>
-        <p:txBody>
-          <a:bodyPr wrap="square">
-            <a:spAutoFit/>
-          </a:bodyPr>
-          <a:lstStyle/>
-          <a:p>
-            <a:pPr algn="ctr">
-              <a:spcAft>
-                <a:spcPts val="0"/>
-              </a:spcAft>
-            </a:pPr>
-            <a:r>
-              <a:rPr sz="1000" b="0">
-                <a:solidFill>
-                  <a:srgbClr val="6E6E6E"/>
-                </a:solidFill>
-                <a:latin typeface="Arial"/>
-              </a:rPr>
-              <a:t>The node at 7° (left, the record: eight parts in another beam), 22.5° (middle, the choice: every part clears, the compensator by 16 mm) and 30° (right: the compensator by 57 mm); the output plate and analyzer moved to 160 mm behind the splitter in the last two.  The three panels are the tool's own node drawings, placed side by side.</a:t>
-            </a:r>
-          </a:p>
-        </p:txBody>
-      </p:sp>
-      <p:graphicFrame>
-        <p:nvGraphicFramePr>
-          <p:cNvPr id="6" name="Table 5"/>
-          <p:cNvGraphicFramePr>
-            <a:graphicFrameLocks noGrp="1"/>
-          </p:cNvGraphicFramePr>
-          <p:nvPr/>
-        </p:nvGraphicFramePr>
-        <p:xfrm>
-          <a:off x="411480" y="3182112"/>
-          <a:ext cx="11368734" cy="3183255"/>
-        </p:xfrm>
-        <a:graphic>
-          <a:graphicData uri="http://schemas.openxmlformats.org/drawingml/2006/table">
-            <a:tbl>
-              <a:tblPr firstRow="1" bandRow="1">
-                <a:tableStyleId>{5C22544A-7EE6-4342-B048-85BDC9FD1C3A}</a:tableStyleId>
-              </a:tblPr>
-              <a:tblGrid>
-                <a:gridCol w="3410620"/>
-                <a:gridCol w="2273747"/>
-                <a:gridCol w="3284301"/>
-                <a:gridCol w="2400066"/>
-              </a:tblGrid>
-              <a:tr h="280035">
-                <a:tc>
-                  <a:txBody>
-                    <a:bodyPr wrap="square"/>
-                    <a:lstStyle/>
-                    <a:p>
-                      <a:r>
-                        <a:rPr sz="1100" b="1">
-                          <a:solidFill>
-                            <a:srgbClr val="FFFFFF"/>
-                          </a:solidFill>
-                          <a:latin typeface="Arial"/>
-                        </a:rPr>
-                        <a:t>impact</a:t>
-                      </a:r>
-                    </a:p>
-                  </a:txBody>
-                  <a:tcPr marL="54864" marR="54864" marT="18288" marB="18288">
-                    <a:solidFill>
-                      <a:srgbClr val="1F4E79"/>
-                    </a:solidFill>
-                  </a:tcPr>
-                </a:tc>
-                <a:tc>
-                  <a:txBody>
-                    <a:bodyPr wrap="square"/>
-                    <a:lstStyle/>
-                    <a:p>
-                      <a:r>
-                        <a:rPr sz="1100" b="1">
-                          <a:solidFill>
-                            <a:srgbClr val="FFFFFF"/>
-                          </a:solidFill>
-                          <a:latin typeface="Arial"/>
-                        </a:rPr>
-                        <a:t>7° (record)</a:t>
-                      </a:r>
-                    </a:p>
-                  </a:txBody>
-                  <a:tcPr marL="54864" marR="54864" marT="18288" marB="18288">
-                    <a:solidFill>
-                      <a:srgbClr val="1F4E79"/>
-                    </a:solidFill>
-                  </a:tcPr>
-                </a:tc>
-                <a:tc>
-                  <a:txBody>
-                    <a:bodyPr wrap="square"/>
-                    <a:lstStyle/>
-                    <a:p>
-                      <a:r>
-                        <a:rPr sz="1100" b="1">
-                          <a:solidFill>
-                            <a:srgbClr val="FFFFFF"/>
-                          </a:solidFill>
-                          <a:latin typeface="Arial"/>
-                        </a:rPr>
-                        <a:t>22.5° (choice)</a:t>
-                      </a:r>
-                    </a:p>
-                  </a:txBody>
-                  <a:tcPr marL="54864" marR="54864" marT="18288" marB="18288">
-                    <a:solidFill>
-                      <a:srgbClr val="1F4E79"/>
-                    </a:solidFill>
-                  </a:tcPr>
-                </a:tc>
-                <a:tc>
-                  <a:txBody>
-                    <a:bodyPr wrap="square"/>
-                    <a:lstStyle/>
-                    <a:p>
-                      <a:r>
-                        <a:rPr sz="1100" b="1">
-                          <a:solidFill>
-                            <a:srgbClr val="FFFFFF"/>
-                          </a:solidFill>
-                          <a:latin typeface="Arial"/>
-                        </a:rPr>
-                        <a:t>30°</a:t>
-                      </a:r>
-                    </a:p>
-                  </a:txBody>
-                  <a:tcPr marL="54864" marR="54864" marT="18288" marB="18288">
-                    <a:solidFill>
-                      <a:srgbClr val="1F4E79"/>
-                    </a:solidFill>
-                  </a:tcPr>
-                </a:tc>
-              </a:tr>
-              <a:tr h="468630">
-                <a:tc>
-                  <a:txBody>
-                    <a:bodyPr wrap="square"/>
-                    <a:lstStyle/>
-                    <a:p>
-                      <a:r>
-                        <a:rPr sz="1100" b="0">
-                          <a:solidFill>
-                            <a:srgbClr val="282828"/>
-                          </a:solidFill>
-                          <a:latin typeface="Arial"/>
-                        </a:rPr>
-                        <a:t>node clearance, worst part</a:t>
-                      </a:r>
-                    </a:p>
-                  </a:txBody>
-                  <a:tcPr marL="54864" marR="54864" marT="18288" marB="18288">
-                    <a:solidFill>
-                      <a:srgbClr val="FFFFFF"/>
-                    </a:solidFill>
-                  </a:tcPr>
-                </a:tc>
-                <a:tc>
-                  <a:txBody>
-                    <a:bodyPr wrap="square"/>
-                    <a:lstStyle/>
-                    <a:p>
-                      <a:r>
-                        <a:rPr sz="1100" b="0">
-                          <a:solidFill>
-                            <a:srgbClr val="282828"/>
-                          </a:solidFill>
-                          <a:latin typeface="Arial"/>
-                        </a:rPr>
-                        <a:t>−109 mm: not buildable</a:t>
-                      </a:r>
-                    </a:p>
-                  </a:txBody>
-                  <a:tcPr marL="54864" marR="54864" marT="18288" marB="18288">
-                    <a:solidFill>
-                      <a:srgbClr val="FFFFFF"/>
-                    </a:solidFill>
-                  </a:tcPr>
-                </a:tc>
-                <a:tc>
-                  <a:txBody>
-                    <a:bodyPr wrap="square"/>
-                    <a:lstStyle/>
-                    <a:p>
-                      <a:r>
-                        <a:rPr sz="1100" b="0">
-                          <a:solidFill>
-                            <a:srgbClr val="282828"/>
-                          </a:solidFill>
-                          <a:latin typeface="Arial"/>
-                        </a:rPr>
-                        <a:t>compensator +16 mm; output optics +55 / +65; L2 +100</a:t>
-                      </a:r>
-                    </a:p>
-                  </a:txBody>
-                  <a:tcPr marL="54864" marR="54864" marT="18288" marB="18288">
-                    <a:solidFill>
-                      <a:srgbClr val="FFFFFF"/>
-                    </a:solidFill>
-                  </a:tcPr>
-                </a:tc>
-                <a:tc>
-                  <a:txBody>
-                    <a:bodyPr wrap="square"/>
-                    <a:lstStyle/>
-                    <a:p>
-                      <a:r>
-                        <a:rPr sz="1100" b="0">
-                          <a:solidFill>
-                            <a:srgbClr val="282828"/>
-                          </a:solidFill>
-                          <a:latin typeface="Arial"/>
-                        </a:rPr>
-                        <a:t>compensator +57; the rest +178 or more</a:t>
-                      </a:r>
-                    </a:p>
-                  </a:txBody>
-                  <a:tcPr marL="54864" marR="54864" marT="18288" marB="18288">
-                    <a:solidFill>
-                      <a:srgbClr val="FFFFFF"/>
-                    </a:solidFill>
-                  </a:tcPr>
-                </a:tc>
-              </a:tr>
-              <a:tr h="468630">
-                <a:tc>
-                  <a:txBody>
-                    <a:bodyPr wrap="square"/>
-                    <a:lstStyle/>
-                    <a:p>
-                      <a:r>
-                        <a:rPr sz="1100" b="0">
-                          <a:solidFill>
-                            <a:srgbClr val="282828"/>
-                          </a:solidFill>
-                          <a:latin typeface="Arial"/>
-                        </a:rPr>
-                        <a:t>bench shape</a:t>
-                      </a:r>
-                    </a:p>
-                  </a:txBody>
-                  <a:tcPr marL="54864" marR="54864" marT="18288" marB="18288">
-                    <a:solidFill>
-                      <a:srgbClr val="ECF1F6"/>
-                    </a:solidFill>
-                  </a:tcPr>
-                </a:tc>
-                <a:tc>
-                  <a:txBody>
-                    <a:bodyPr wrap="square"/>
-                    <a:lstStyle/>
-                    <a:p>
-                      <a:r>
-                        <a:rPr sz="1100" b="0">
-                          <a:solidFill>
-                            <a:srgbClr val="282828"/>
-                          </a:solidFill>
-                          <a:latin typeface="Arial"/>
-                        </a:rPr>
-                        <a:t>all four legs within 14° of one line</a:t>
-                      </a:r>
-                    </a:p>
-                  </a:txBody>
-                  <a:tcPr marL="54864" marR="54864" marT="18288" marB="18288">
-                    <a:solidFill>
-                      <a:srgbClr val="ECF1F6"/>
-                    </a:solidFill>
-                  </a:tcPr>
-                </a:tc>
-                <a:tc>
-                  <a:txBody>
-                    <a:bodyPr wrap="square"/>
-                    <a:lstStyle/>
-                    <a:p>
-                      <a:r>
-                        <a:rPr sz="1100" b="0">
-                          <a:solidFill>
-                            <a:srgbClr val="282828"/>
-                          </a:solidFill>
-                          <a:latin typeface="Arial"/>
-                        </a:rPr>
-                        <a:t>mirror leg at 45° to the source leg</a:t>
-                      </a:r>
-                    </a:p>
-                  </a:txBody>
-                  <a:tcPr marL="54864" marR="54864" marT="18288" marB="18288">
-                    <a:solidFill>
-                      <a:srgbClr val="ECF1F6"/>
-                    </a:solidFill>
-                  </a:tcPr>
-                </a:tc>
-                <a:tc>
-                  <a:txBody>
-                    <a:bodyPr wrap="square"/>
-                    <a:lstStyle/>
-                    <a:p>
-                      <a:r>
-                        <a:rPr sz="1100" b="0">
-                          <a:solidFill>
-                            <a:srgbClr val="282828"/>
-                          </a:solidFill>
-                          <a:latin typeface="Arial"/>
-                        </a:rPr>
-                        <a:t>mirror leg at 60°</a:t>
-                      </a:r>
-                    </a:p>
-                  </a:txBody>
-                  <a:tcPr marL="54864" marR="54864" marT="18288" marB="18288">
-                    <a:solidFill>
-                      <a:srgbClr val="ECF1F6"/>
-                    </a:solidFill>
-                  </a:tcPr>
-                </a:tc>
-              </a:tr>
-              <a:tr h="468630">
-                <a:tc>
-                  <a:txBody>
-                    <a:bodyPr wrap="square"/>
-                    <a:lstStyle/>
-                    <a:p>
-                      <a:r>
-                        <a:rPr sz="1100" b="0">
-                          <a:solidFill>
-                            <a:srgbClr val="282828"/>
-                          </a:solidFill>
-                          <a:latin typeface="Arial"/>
-                        </a:rPr>
-                        <a:t>plate's polarization (mean diattenuation, uniform)</a:t>
-                      </a:r>
-                    </a:p>
-                  </a:txBody>
-                  <a:tcPr marL="54864" marR="54864" marT="18288" marB="18288">
-                    <a:solidFill>
-                      <a:srgbClr val="FFFFFF"/>
-                    </a:solidFill>
-                  </a:tcPr>
-                </a:tc>
-                <a:tc>
-                  <a:txBody>
-                    <a:bodyPr wrap="square"/>
-                    <a:lstStyle/>
-                    <a:p>
-                      <a:r>
-                        <a:rPr sz="1100" b="0">
-                          <a:solidFill>
-                            <a:srgbClr val="282828"/>
-                          </a:solidFill>
-                          <a:latin typeface="Arial"/>
-                        </a:rPr>
-                        <a:t>0.5%</a:t>
-                      </a:r>
-                    </a:p>
-                  </a:txBody>
-                  <a:tcPr marL="54864" marR="54864" marT="18288" marB="18288">
-                    <a:solidFill>
-                      <a:srgbClr val="FFFFFF"/>
-                    </a:solidFill>
-                  </a:tcPr>
-                </a:tc>
-                <a:tc>
-                  <a:txBody>
-                    <a:bodyPr wrap="square"/>
-                    <a:lstStyle/>
-                    <a:p>
-                      <a:r>
-                        <a:rPr sz="1100" b="0">
-                          <a:solidFill>
-                            <a:srgbClr val="282828"/>
-                          </a:solidFill>
-                          <a:latin typeface="Arial"/>
-                        </a:rPr>
-                        <a:t>5.5%</a:t>
-                      </a:r>
-                    </a:p>
-                  </a:txBody>
-                  <a:tcPr marL="54864" marR="54864" marT="18288" marB="18288">
-                    <a:solidFill>
-                      <a:srgbClr val="FFFFFF"/>
-                    </a:solidFill>
-                  </a:tcPr>
-                </a:tc>
-                <a:tc>
-                  <a:txBody>
-                    <a:bodyPr wrap="square"/>
-                    <a:lstStyle/>
-                    <a:p>
-                      <a:r>
-                        <a:rPr sz="1100" b="0">
-                          <a:solidFill>
-                            <a:srgbClr val="282828"/>
-                          </a:solidFill>
-                          <a:latin typeface="Arial"/>
-                        </a:rPr>
-                        <a:t>10%</a:t>
-                      </a:r>
-                    </a:p>
-                  </a:txBody>
-                  <a:tcPr marL="54864" marR="54864" marT="18288" marB="18288">
-                    <a:solidFill>
-                      <a:srgbClr val="FFFFFF"/>
-                    </a:solidFill>
-                  </a:tcPr>
-                </a:tc>
-              </a:tr>
-              <a:tr h="468630">
-                <a:tc>
-                  <a:txBody>
-                    <a:bodyPr wrap="square"/>
-                    <a:lstStyle/>
-                    <a:p>
-                      <a:r>
-                        <a:rPr sz="1100" b="0">
-                          <a:solidFill>
-                            <a:srgbClr val="282828"/>
-                          </a:solidFill>
-                          <a:latin typeface="Arial"/>
-                        </a:rPr>
-                        <a:t>pupil-varying part (the lenses; what the sensors feel)</a:t>
-                      </a:r>
-                    </a:p>
-                  </a:txBody>
-                  <a:tcPr marL="54864" marR="54864" marT="18288" marB="18288">
-                    <a:solidFill>
-                      <a:srgbClr val="ECF1F6"/>
-                    </a:solidFill>
-                  </a:tcPr>
-                </a:tc>
-                <a:tc>
-                  <a:txBody>
-                    <a:bodyPr wrap="square"/>
-                    <a:lstStyle/>
-                    <a:p>
-                      <a:r>
-                        <a:rPr sz="1100" b="0">
-                          <a:solidFill>
-                            <a:srgbClr val="282828"/>
-                          </a:solidFill>
-                          <a:latin typeface="Arial"/>
-                        </a:rPr>
-                        <a:t>1.1e-3 rms</a:t>
-                      </a:r>
-                    </a:p>
-                  </a:txBody>
-                  <a:tcPr marL="54864" marR="54864" marT="18288" marB="18288">
-                    <a:solidFill>
-                      <a:srgbClr val="ECF1F6"/>
-                    </a:solidFill>
-                  </a:tcPr>
-                </a:tc>
-                <a:tc>
-                  <a:txBody>
-                    <a:bodyPr wrap="square"/>
-                    <a:lstStyle/>
-                    <a:p>
-                      <a:r>
-                        <a:rPr sz="1100" b="0">
-                          <a:solidFill>
-                            <a:srgbClr val="282828"/>
-                          </a:solidFill>
-                          <a:latin typeface="Arial"/>
-                        </a:rPr>
-                        <a:t>1.1e-3 rms</a:t>
-                      </a:r>
-                    </a:p>
-                  </a:txBody>
-                  <a:tcPr marL="54864" marR="54864" marT="18288" marB="18288">
-                    <a:solidFill>
-                      <a:srgbClr val="ECF1F6"/>
-                    </a:solidFill>
-                  </a:tcPr>
-                </a:tc>
-                <a:tc>
-                  <a:txBody>
-                    <a:bodyPr wrap="square"/>
-                    <a:lstStyle/>
-                    <a:p>
-                      <a:r>
-                        <a:rPr sz="1100" b="0">
-                          <a:solidFill>
-                            <a:srgbClr val="282828"/>
-                          </a:solidFill>
-                          <a:latin typeface="Arial"/>
-                        </a:rPr>
-                        <a:t>1.1e-3 rms</a:t>
-                      </a:r>
-                    </a:p>
-                  </a:txBody>
-                  <a:tcPr marL="54864" marR="54864" marT="18288" marB="18288">
-                    <a:solidFill>
-                      <a:srgbClr val="ECF1F6"/>
-                    </a:solidFill>
-                  </a:tcPr>
-                </a:tc>
-              </a:tr>
-              <a:tr h="468630">
-                <a:tc>
-                  <a:txBody>
-                    <a:bodyPr wrap="square"/>
-                    <a:lstStyle/>
-                    <a:p>
-                      <a:r>
-                        <a:rPr sz="1100" b="0">
-                          <a:solidFill>
-                            <a:srgbClr val="282828"/>
-                          </a:solidFill>
-                          <a:latin typeface="Arial"/>
-                        </a:rPr>
-                        <a:t>vector sensor, channel phase difference / 100 nm pokes</a:t>
-                      </a:r>
-                    </a:p>
-                  </a:txBody>
-                  <a:tcPr marL="54864" marR="54864" marT="18288" marB="18288">
-                    <a:solidFill>
-                      <a:srgbClr val="FFFFFF"/>
-                    </a:solidFill>
-                  </a:tcPr>
-                </a:tc>
-                <a:tc>
-                  <a:txBody>
-                    <a:bodyPr wrap="square"/>
-                    <a:lstStyle/>
-                    <a:p>
-                      <a:r>
-                        <a:rPr sz="1100" b="0">
-                          <a:solidFill>
-                            <a:srgbClr val="282828"/>
-                          </a:solidFill>
-                          <a:latin typeface="Arial"/>
-                        </a:rPr>
-                        <a:t>1.63 mrad / 9.0 pm</a:t>
-                      </a:r>
-                    </a:p>
-                  </a:txBody>
-                  <a:tcPr marL="54864" marR="54864" marT="18288" marB="18288">
-                    <a:solidFill>
-                      <a:srgbClr val="FFFFFF"/>
-                    </a:solidFill>
-                  </a:tcPr>
-                </a:tc>
-                <a:tc>
-                  <a:txBody>
-                    <a:bodyPr wrap="square"/>
-                    <a:lstStyle/>
-                    <a:p>
-                      <a:r>
-                        <a:rPr sz="1100" b="0">
-                          <a:solidFill>
-                            <a:srgbClr val="282828"/>
-                          </a:solidFill>
-                          <a:latin typeface="Arial"/>
-                        </a:rPr>
-                        <a:t>1.66 mrad / 8.8 pm</a:t>
-                      </a:r>
-                    </a:p>
-                  </a:txBody>
-                  <a:tcPr marL="54864" marR="54864" marT="18288" marB="18288">
-                    <a:solidFill>
-                      <a:srgbClr val="FFFFFF"/>
-                    </a:solidFill>
-                  </a:tcPr>
-                </a:tc>
-                <a:tc>
-                  <a:txBody>
-                    <a:bodyPr wrap="square"/>
-                    <a:lstStyle/>
-                    <a:p>
-                      <a:r>
-                        <a:rPr sz="1100" b="0">
-                          <a:solidFill>
-                            <a:srgbClr val="282828"/>
-                          </a:solidFill>
-                          <a:latin typeface="Arial"/>
-                        </a:rPr>
-                        <a:t>1.69 mrad / 9.1 pm</a:t>
-                      </a:r>
-                    </a:p>
-                  </a:txBody>
-                  <a:tcPr marL="54864" marR="54864" marT="18288" marB="18288">
-                    <a:solidFill>
-                      <a:srgbClr val="FFFFFF"/>
-                    </a:solidFill>
-                  </a:tcPr>
-                </a:tc>
-              </a:tr>
-              <a:tr h="280035">
-                <a:tc>
-                  <a:txBody>
-                    <a:bodyPr wrap="square"/>
-                    <a:lstStyle/>
-                    <a:p>
-                      <a:r>
-                        <a:rPr sz="1100" b="0">
-                          <a:solidFill>
-                            <a:srgbClr val="282828"/>
-                          </a:solidFill>
-                          <a:latin typeface="Arial"/>
-                        </a:rPr>
-                        <a:t>transmitted beam shift in the 2.6 mm plate</a:t>
-                      </a:r>
-                    </a:p>
-                  </a:txBody>
-                  <a:tcPr marL="54864" marR="54864" marT="18288" marB="18288">
-                    <a:solidFill>
-                      <a:srgbClr val="ECF1F6"/>
-                    </a:solidFill>
-                  </a:tcPr>
-                </a:tc>
-                <a:tc>
-                  <a:txBody>
-                    <a:bodyPr wrap="square"/>
-                    <a:lstStyle/>
-                    <a:p>
-                      <a:r>
-                        <a:rPr sz="1100" b="0">
-                          <a:solidFill>
-                            <a:srgbClr val="282828"/>
-                          </a:solidFill>
-                          <a:latin typeface="Arial"/>
-                        </a:rPr>
-                        <a:t>0.1 mm</a:t>
-                      </a:r>
-                    </a:p>
-                  </a:txBody>
-                  <a:tcPr marL="54864" marR="54864" marT="18288" marB="18288">
-                    <a:solidFill>
-                      <a:srgbClr val="ECF1F6"/>
-                    </a:solidFill>
-                  </a:tcPr>
-                </a:tc>
-                <a:tc>
-                  <a:txBody>
-                    <a:bodyPr wrap="square"/>
-                    <a:lstStyle/>
-                    <a:p>
-                      <a:r>
-                        <a:rPr sz="1100" b="0">
-                          <a:solidFill>
-                            <a:srgbClr val="282828"/>
-                          </a:solidFill>
-                          <a:latin typeface="Arial"/>
-                        </a:rPr>
-                        <a:t>0.36 mm (1.4 at 10 mm)</a:t>
-                      </a:r>
-                    </a:p>
-                  </a:txBody>
-                  <a:tcPr marL="54864" marR="54864" marT="18288" marB="18288">
-                    <a:solidFill>
-                      <a:srgbClr val="ECF1F6"/>
-                    </a:solidFill>
-                  </a:tcPr>
-                </a:tc>
-                <a:tc>
-                  <a:txBody>
-                    <a:bodyPr wrap="square"/>
-                    <a:lstStyle/>
-                    <a:p>
-                      <a:r>
-                        <a:rPr sz="1100" b="0">
-                          <a:solidFill>
-                            <a:srgbClr val="282828"/>
-                          </a:solidFill>
-                          <a:latin typeface="Arial"/>
-                        </a:rPr>
-                        <a:t>0.50 mm</a:t>
-                      </a:r>
-                    </a:p>
-                  </a:txBody>
-                  <a:tcPr marL="54864" marR="54864" marT="18288" marB="18288">
-                    <a:solidFill>
-                      <a:srgbClr val="ECF1F6"/>
-                    </a:solidFill>
-                  </a:tcPr>
-                </a:tc>
-              </a:tr>
-              <a:tr h="280035">
-                <a:tc>
-                  <a:txBody>
-                    <a:bodyPr wrap="square"/>
-                    <a:lstStyle/>
-                    <a:p>
-                      <a:r>
-                        <a:rPr sz="1100" b="0">
-                          <a:solidFill>
-                            <a:srgbClr val="282828"/>
-                          </a:solidFill>
-                          <a:latin typeface="Arial"/>
-                        </a:rPr>
-                        <a:t>interferometer snapshot form</a:t>
-                      </a:r>
-                    </a:p>
-                  </a:txBody>
-                  <a:tcPr marL="54864" marR="54864" marT="18288" marB="18288">
-                    <a:solidFill>
-                      <a:srgbClr val="FFFFFF"/>
-                    </a:solidFill>
-                  </a:tcPr>
-                </a:tc>
-                <a:tc>
-                  <a:txBody>
-                    <a:bodyPr wrap="square"/>
-                    <a:lstStyle/>
-                    <a:p>
-                      <a:r>
-                        <a:rPr sz="1100" b="0">
-                          <a:solidFill>
-                            <a:srgbClr val="282828"/>
-                          </a:solidFill>
-                          <a:latin typeface="Arial"/>
-                        </a:rPr>
-                        <a:t>the small-angle case</a:t>
-                      </a:r>
-                    </a:p>
-                  </a:txBody>
-                  <a:tcPr marL="54864" marR="54864" marT="18288" marB="18288">
-                    <a:solidFill>
-                      <a:srgbClr val="FFFFFF"/>
-                    </a:solidFill>
-                  </a:tcPr>
-                </a:tc>
-                <a:tc>
-                  <a:txBody>
-                    <a:bodyPr wrap="square"/>
-                    <a:lstStyle/>
-                    <a:p>
-                      <a:r>
-                        <a:rPr sz="1100" b="0">
-                          <a:solidFill>
-                            <a:srgbClr val="282828"/>
-                          </a:solidFill>
-                          <a:latin typeface="Arial"/>
-                        </a:rPr>
-                        <a:t>its plate systematics re-run at this angle</a:t>
-                      </a:r>
-                    </a:p>
-                  </a:txBody>
-                  <a:tcPr marL="54864" marR="54864" marT="18288" marB="18288">
-                    <a:solidFill>
-                      <a:srgbClr val="FFFFFF"/>
-                    </a:solidFill>
-                  </a:tcPr>
-                </a:tc>
-                <a:tc>
-                  <a:txBody>
-                    <a:bodyPr wrap="square"/>
-                    <a:lstStyle/>
-                    <a:p>
-                      <a:r>
-                        <a:rPr sz="1100" b="0">
-                          <a:solidFill>
-                            <a:srgbClr val="282828"/>
-                          </a:solidFill>
-                          <a:latin typeface="Arial"/>
-                        </a:rPr>
-                        <a:t>larger</a:t>
-                      </a:r>
-                    </a:p>
-                  </a:txBody>
-                  <a:tcPr marL="54864" marR="54864" marT="18288" marB="18288">
-                    <a:solidFill>
-                      <a:srgbClr val="FFFFFF"/>
-                    </a:solidFill>
-                  </a:tcPr>
-                </a:tc>
-              </a:tr>
-            </a:tbl>
-          </a:graphicData>
-        </a:graphic>
-      </p:graphicFrame>
-      <p:sp>
-        <p:nvSpPr>
-          <p:cNvPr id="7" name="TextBox 6"/>
-          <p:cNvSpPr txBox="1"/>
-          <p:nvPr/>
-        </p:nvSpPr>
-        <p:spPr>
-          <a:xfrm>
-            <a:off x="411480" y="6511671"/>
-            <a:ext cx="11368735" cy="274320"/>
-          </a:xfrm>
-          <a:prstGeom prst="rect">
-            <a:avLst/>
-          </a:prstGeom>
-          <a:noFill/>
-        </p:spPr>
-        <p:txBody>
-          <a:bodyPr wrap="square">
-            <a:spAutoFit/>
-          </a:bodyPr>
-          <a:lstStyle/>
-          <a:p>
-            <a:pPr>
-              <a:spcAft>
-                <a:spcPts val="600"/>
-              </a:spcAft>
-            </a:pPr>
-            <a:r>
-              <a:rPr sz="1050" b="0">
-                <a:solidFill>
-                  <a:srgbClr val="6E6E6E"/>
-                </a:solidFill>
-                <a:latin typeface="Arial"/>
-              </a:rPr>
-              <a:t>The sensors reproduce their rows at every angle; the interferometer's snapshot form is the one thing the angle changes, through the plate's polarization, and the cube form is built for 45°.  Run tags bs22_dev, bs30_dev; the panels at 7° and 30° are on the backup clearance slide.</a:t>
-            </a:r>
-          </a:p>
-        </p:txBody>
-      </p:sp>
-    </p:spTree>
-  </p:cSld>
-  <p:clrMapOvr>
-    <a:masterClrMapping/>
-  </p:clrMapOvr>
-</p:sld>
-</file>
-
-<file path=ppt/slides/slide50.xml><?xml version="1.0" encoding="utf-8"?>
-<p:sld xmlns:a="http://schemas.openxmlformats.org/drawingml/2006/main" xmlns:p="http://schemas.openxmlformats.org/presentationml/2006/main" xmlns:r="http://schemas.openxmlformats.org/officeDocument/2006/relationships">
-  <p:cSld>
-    <p:spTree>
-      <p:nvGrpSpPr>
-        <p:cNvPr id="1" name=""/>
-        <p:cNvGrpSpPr/>
-        <p:nvPr/>
-      </p:nvGrpSpPr>
-      <p:grpSpPr/>
-      <p:sp>
-        <p:nvSpPr>
-          <p:cNvPr id="2" name="TextBox 1"/>
-          <p:cNvSpPr txBox="1"/>
-          <p:nvPr/>
-        </p:nvSpPr>
-        <p:spPr>
-          <a:xfrm>
-            <a:off x="411480" y="201168"/>
-            <a:ext cx="11368735" cy="914400"/>
-          </a:xfrm>
-          <a:prstGeom prst="rect">
-            <a:avLst/>
-          </a:prstGeom>
-          <a:noFill/>
-        </p:spPr>
-        <p:txBody>
-          <a:bodyPr wrap="square">
-            <a:spAutoFit/>
-          </a:bodyPr>
-          <a:lstStyle/>
-          <a:p>
-            <a:pPr>
-              <a:spcAft>
-                <a:spcPts val="400"/>
-              </a:spcAft>
-            </a:pPr>
-            <a:r>
-              <a:rPr sz="2400" b="1">
-                <a:solidFill>
-                  <a:srgbClr val="1F4E79"/>
-                </a:solidFill>
-                <a:latin typeface="Arial"/>
-              </a:rPr>
-              <a:t>Backup: the path per configuration</a:t>
-            </a:r>
-          </a:p>
-          <a:p>
-            <a:pPr>
-              <a:spcAft>
-                <a:spcPts val="0"/>
-              </a:spcAft>
-            </a:pPr>
-            <a:r>
-              <a:rPr sz="1250" b="0">
-                <a:solidFill>
-                  <a:srgbClr val="6E6E6E"/>
-                </a:solidFill>
-                <a:latin typeface="Arial"/>
-              </a:rPr>
-              <a:t>The runner stages and knobs each approach went through, in the order they ran</a:t>
-            </a:r>
-          </a:p>
-        </p:txBody>
-      </p:sp>
-      <p:sp>
-        <p:nvSpPr>
-          <p:cNvPr id="3" name="Rectangle 2"/>
-          <p:cNvSpPr/>
-          <p:nvPr/>
-        </p:nvSpPr>
-        <p:spPr>
-          <a:xfrm>
-            <a:off x="411480" y="1133856"/>
-            <a:ext cx="11368735" cy="20320"/>
-          </a:xfrm>
-          <a:prstGeom prst="rect">
-            <a:avLst/>
-          </a:prstGeom>
-          <a:solidFill>
-            <a:srgbClr val="B8C6D4"/>
-          </a:solidFill>
-          <a:ln>
-            <a:noFill/>
-          </a:ln>
-          <a:effectLst/>
-        </p:spPr>
-        <p:style>
-          <a:lnRef idx="1">
-            <a:schemeClr val="accent1"/>
-          </a:lnRef>
-          <a:fillRef idx="3">
-            <a:schemeClr val="accent1"/>
-          </a:fillRef>
-          <a:effectRef idx="2">
-            <a:schemeClr val="accent1"/>
-          </a:effectRef>
-          <a:fontRef idx="minor">
-            <a:schemeClr val="lt1"/>
-          </a:fontRef>
-        </p:style>
-        <p:txBody>
-          <a:bodyPr rtlCol="0" anchor="ctr"/>
-          <a:lstStyle/>
-          <a:p>
-            <a:pPr algn="ctr"/>
-          </a:p>
-        </p:txBody>
-      </p:sp>
       <p:graphicFrame>
         <p:nvGraphicFramePr>
           <p:cNvPr id="4" name="Table 3"/>
@@ -30309,7 +31644,7 @@
 </p:sld>
 </file>
 
-<file path=ppt/slides/slide51.xml><?xml version="1.0" encoding="utf-8"?>
+<file path=ppt/slides/slide52.xml><?xml version="1.0" encoding="utf-8"?>
 <p:sld xmlns:a="http://schemas.openxmlformats.org/drawingml/2006/main" xmlns:p="http://schemas.openxmlformats.org/presentationml/2006/main" xmlns:r="http://schemas.openxmlformats.org/officeDocument/2006/relationships">
   <p:cSld>
     <p:spTree>

--- a/demo_session/deck_gauges.pptx
+++ b/demo_session/deck_gauges.pptx
@@ -8413,7 +8413,7 @@
                 </a:solidFill>
                 <a:latin typeface="Arial"/>
               </a:rPr>
-              <a:t>•  36 Complex amplitude</a:t>
+              <a:t>•  36 Measuring the complex amplitude</a:t>
             </a:r>
           </a:p>
           <a:p>

--- a/demo_session/deck_gauges.pptx
+++ b/demo_session/deck_gauges.pptx
@@ -57,6 +57,7 @@
     <p:sldId id="305" r:id="rId56"/>
     <p:sldId id="306" r:id="rId57"/>
     <p:sldId id="307" r:id="rId58"/>
+    <p:sldId id="308" r:id="rId59"/>
   </p:sldIdLst>
   <p:sldSz cx="12191695" cy="6858000" type="screen4x3"/>
   <p:notesSz cx="6858000" cy="9144000"/>
@@ -8445,7 +8446,7 @@
                 </a:solidFill>
                 <a:latin typeface="Arial"/>
               </a:rPr>
-              <a:t>•  42 Run it yourself</a:t>
+              <a:t>•  43 Run it yourself</a:t>
             </a:r>
           </a:p>
           <a:p>
@@ -8461,7 +8462,7 @@
                 </a:solidFill>
                 <a:latin typeface="Arial"/>
               </a:rPr>
-              <a:t>•  43 Backup</a:t>
+              <a:t>•  44 Backup</a:t>
             </a:r>
           </a:p>
         </p:txBody>
@@ -10876,7 +10877,7 @@
         </p:nvGraphicFramePr>
         <p:xfrm>
           <a:off x="411480" y="1298448"/>
-          <a:ext cx="5806439" cy="2708910"/>
+          <a:ext cx="5806439" cy="3743325"/>
         </p:xfrm>
         <a:graphic>
           <a:graphicData uri="http://schemas.openxmlformats.org/drawingml/2006/table">
@@ -10885,10 +10886,10 @@
                 <a:tableStyleId>{5C22544A-7EE6-4342-B048-85BDC9FD1C3A}</a:tableStyleId>
               </a:tblPr>
               <a:tblGrid>
-                <a:gridCol w="1912709"/>
-                <a:gridCol w="3893730"/>
+                <a:gridCol w="3279973"/>
+                <a:gridCol w="2526466"/>
               </a:tblGrid>
-              <a:tr h="280035">
+              <a:tr h="468630">
                 <a:tc>
                   <a:txBody>
                     <a:bodyPr wrap="square"/>
@@ -11210,7 +11211,7 @@
                   </a:tcPr>
                 </a:tc>
               </a:tr>
-              <a:tr h="280035">
+              <a:tr h="468630">
                 <a:tc>
                   <a:txBody>
                     <a:bodyPr wrap="square"/>
@@ -11256,7 +11257,7 @@
                   </a:tcPr>
                 </a:tc>
               </a:tr>
-              <a:tr h="280035">
+              <a:tr h="468630">
                 <a:tc>
                   <a:txBody>
                     <a:bodyPr wrap="square"/>
@@ -11298,6 +11299,52 @@
                   <a:tcPr marL="54864" marR="54864" marT="18288" marB="18288">
                     <a:solidFill>
                       <a:srgbClr val="ECF1F6"/>
+                    </a:solidFill>
+                  </a:tcPr>
+                </a:tc>
+              </a:tr>
+              <a:tr h="468630">
+                <a:tc>
+                  <a:txBody>
+                    <a:bodyPr wrap="square"/>
+                    <a:lstStyle/>
+                    <a:p>
+                      <a:r>
+                        <a:rPr sz="1100" b="0">
+                          <a:solidFill>
+                            <a:srgbClr val="282828"/>
+                          </a:solidFill>
+                          <a:latin typeface="Arial"/>
+                        </a:rPr>
+                        <a:t>the sensors on the mirror rig, 385 px (Zernike stepped / vector / pinhole)</a:t>
+                      </a:r>
+                    </a:p>
+                  </a:txBody>
+                  <a:tcPr marL="54864" marR="54864" marT="18288" marB="18288">
+                    <a:solidFill>
+                      <a:srgbClr val="FFFFFF"/>
+                    </a:solidFill>
+                  </a:tcPr>
+                </a:tc>
+                <a:tc>
+                  <a:txBody>
+                    <a:bodyPr wrap="square"/>
+                    <a:lstStyle/>
+                    <a:p>
+                      <a:r>
+                        <a:rPr sz="1100" b="0">
+                          <a:solidFill>
+                            <a:srgbClr val="282828"/>
+                          </a:solidFill>
+                          <a:latin typeface="Arial"/>
+                        </a:rPr>
+                        <a:t>36 / 59 / 52 nm: the lens rig's numbers</a:t>
+                      </a:r>
+                    </a:p>
+                  </a:txBody>
+                  <a:tcPr marL="54864" marR="54864" marT="18288" marB="18288">
+                    <a:solidFill>
+                      <a:srgbClr val="FFFFFF"/>
                     </a:solidFill>
                   </a:tcPr>
                 </a:tc>
@@ -11411,7 +11458,7 @@
                 </a:solidFill>
                 <a:latin typeface="Arial"/>
               </a:rPr>
-              <a:t>Run tags cap385, cap385p, pdi193state, lens_deck, oap_deck; 385 pixels per pupil, 47 sites (52 for the interferometer).</a:t>
+              <a:t>Run tags cap385, cap385p, pdi193state, lens_deck, oap_deck, oapsens385 (the mirror rig at 385 px, the Mac); 385 pixels per pupil, 47 sites (52 for the interferometer).</a:t>
             </a:r>
           </a:p>
         </p:txBody>
@@ -18021,7 +18068,7 @@
         </p:nvGraphicFramePr>
         <p:xfrm>
           <a:off x="411480" y="1298448"/>
-          <a:ext cx="11368735" cy="2520315"/>
+          <a:ext cx="11368734" cy="3931920"/>
         </p:xfrm>
         <a:graphic>
           <a:graphicData uri="http://schemas.openxmlformats.org/drawingml/2006/table">
@@ -18030,9 +18077,9 @@
                 <a:tableStyleId>{5C22544A-7EE6-4342-B048-85BDC9FD1C3A}</a:tableStyleId>
               </a:tblPr>
               <a:tblGrid>
-                <a:gridCol w="4350344"/>
+                <a:gridCol w="2369815"/>
                 <a:gridCol w="1889760"/>
-                <a:gridCol w="2875651"/>
+                <a:gridCol w="4856179"/>
                 <a:gridCol w="2252980"/>
               </a:tblGrid>
               <a:tr h="280035">
@@ -18115,7 +18162,7 @@
                   </a:tcPr>
                 </a:tc>
               </a:tr>
-              <a:tr h="280035">
+              <a:tr h="468630">
                 <a:tc>
                   <a:txBody>
                     <a:bodyPr wrap="square"/>
@@ -18201,6 +18248,96 @@
                   <a:tcPr marL="54864" marR="54864" marT="18288" marB="18288">
                     <a:solidFill>
                       <a:srgbClr val="FFFFFF"/>
+                    </a:solidFill>
+                  </a:tcPr>
+                </a:tc>
+              </a:tr>
+              <a:tr h="468630">
+                <a:tc>
+                  <a:txBody>
+                    <a:bodyPr wrap="square"/>
+                    <a:lstStyle/>
+                    <a:p>
+                      <a:r>
+                        <a:rPr sz="1100" b="0">
+                          <a:solidFill>
+                            <a:srgbClr val="282828"/>
+                          </a:solidFill>
+                          <a:latin typeface="Arial"/>
+                        </a:rPr>
+                        <a:t>interferometer, dense random 10 nm</a:t>
+                      </a:r>
+                    </a:p>
+                  </a:txBody>
+                  <a:tcPr marL="54864" marR="54864" marT="18288" marB="18288">
+                    <a:solidFill>
+                      <a:srgbClr val="ECF1F6"/>
+                    </a:solidFill>
+                  </a:tcPr>
+                </a:tc>
+                <a:tc>
+                  <a:txBody>
+                    <a:bodyPr wrap="square"/>
+                    <a:lstStyle/>
+                    <a:p>
+                      <a:r>
+                        <a:rPr sz="1100" b="0">
+                          <a:solidFill>
+                            <a:srgbClr val="282828"/>
+                          </a:solidFill>
+                          <a:latin typeface="Arial"/>
+                        </a:rPr>
+                        <a:t>0.749 / 4.8 nm</a:t>
+                      </a:r>
+                    </a:p>
+                  </a:txBody>
+                  <a:tcPr marL="54864" marR="54864" marT="18288" marB="18288">
+                    <a:solidFill>
+                      <a:srgbClr val="ECF1F6"/>
+                    </a:solidFill>
+                  </a:tcPr>
+                </a:tc>
+                <a:tc>
+                  <a:txBody>
+                    <a:bodyPr wrap="square"/>
+                    <a:lstStyle/>
+                    <a:p>
+                      <a:r>
+                        <a:rPr sz="1100" b="0">
+                          <a:solidFill>
+                            <a:srgbClr val="282828"/>
+                          </a:solidFill>
+                          <a:latin typeface="Arial"/>
+                        </a:rPr>
+                        <a:t>0.991 / 161 pm</a:t>
+                      </a:r>
+                    </a:p>
+                  </a:txBody>
+                  <a:tcPr marL="54864" marR="54864" marT="18288" marB="18288">
+                    <a:solidFill>
+                      <a:srgbClr val="ECF1F6"/>
+                    </a:solidFill>
+                  </a:tcPr>
+                </a:tc>
+                <a:tc>
+                  <a:txBody>
+                    <a:bodyPr wrap="square"/>
+                    <a:lstStyle/>
+                    <a:p>
+                      <a:r>
+                        <a:rPr sz="1100" b="0">
+                          <a:solidFill>
+                            <a:srgbClr val="282828"/>
+                          </a:solidFill>
+                          <a:latin typeface="Arial"/>
+                        </a:rPr>
+                        <a:t>0.989 / 168 pm</a:t>
+                      </a:r>
+                    </a:p>
+                  </a:txBody>
+                  <a:tcPr marL="54864" marR="54864" marT="18288" marB="18288">
+                    <a:solidFill>
+                      <a:srgbClr val="ECF1F6"/>
                     </a:solidFill>
                   </a:tcPr>
                 </a:tc>
@@ -18218,7 +18355,97 @@
                           </a:solidFill>
                           <a:latin typeface="Arial"/>
                         </a:rPr>
-                        <a:t>interferometer, dense random 10 nm</a:t>
+                        <a:t>mode-to-mode cross-talk</a:t>
+                      </a:r>
+                    </a:p>
+                  </a:txBody>
+                  <a:tcPr marL="54864" marR="54864" marT="18288" marB="18288">
+                    <a:solidFill>
+                      <a:srgbClr val="FFFFFF"/>
+                    </a:solidFill>
+                  </a:tcPr>
+                </a:tc>
+                <a:tc>
+                  <a:txBody>
+                    <a:bodyPr wrap="square"/>
+                    <a:lstStyle/>
+                    <a:p>
+                      <a:r>
+                        <a:rPr sz="1100" b="0">
+                          <a:solidFill>
+                            <a:srgbClr val="282828"/>
+                          </a:solidFill>
+                          <a:latin typeface="Arial"/>
+                        </a:rPr>
+                        <a:t>0.22-0.48</a:t>
+                      </a:r>
+                    </a:p>
+                  </a:txBody>
+                  <a:tcPr marL="54864" marR="54864" marT="18288" marB="18288">
+                    <a:solidFill>
+                      <a:srgbClr val="FFFFFF"/>
+                    </a:solidFill>
+                  </a:tcPr>
+                </a:tc>
+                <a:tc>
+                  <a:txBody>
+                    <a:bodyPr wrap="square"/>
+                    <a:lstStyle/>
+                    <a:p>
+                      <a:r>
+                        <a:rPr sz="1100" b="0">
+                          <a:solidFill>
+                            <a:srgbClr val="282828"/>
+                          </a:solidFill>
+                          <a:latin typeface="Arial"/>
+                        </a:rPr>
+                        <a:t>0.006-0.02</a:t>
+                      </a:r>
+                    </a:p>
+                  </a:txBody>
+                  <a:tcPr marL="54864" marR="54864" marT="18288" marB="18288">
+                    <a:solidFill>
+                      <a:srgbClr val="FFFFFF"/>
+                    </a:solidFill>
+                  </a:tcPr>
+                </a:tc>
+                <a:tc>
+                  <a:txBody>
+                    <a:bodyPr wrap="square"/>
+                    <a:lstStyle/>
+                    <a:p>
+                      <a:r>
+                        <a:rPr sz="1100" b="0">
+                          <a:solidFill>
+                            <a:srgbClr val="282828"/>
+                          </a:solidFill>
+                          <a:latin typeface="Arial"/>
+                        </a:rPr>
+                        <a:t>0.005-0.03</a:t>
+                      </a:r>
+                    </a:p>
+                  </a:txBody>
+                  <a:tcPr marL="54864" marR="54864" marT="18288" marB="18288">
+                    <a:solidFill>
+                      <a:srgbClr val="FFFFFF"/>
+                    </a:solidFill>
+                  </a:tcPr>
+                </a:tc>
+              </a:tr>
+              <a:tr h="468630">
+                <a:tc>
+                  <a:txBody>
+                    <a:bodyPr wrap="square"/>
+                    <a:lstStyle/>
+                    <a:p>
+                      <a:r>
+                        <a:rPr sz="1100" b="0">
+                          <a:solidFill>
+                            <a:srgbClr val="282828"/>
+                          </a:solidFill>
+                          <a:latin typeface="Arial"/>
+                        </a:rPr>
+                        <a:t>interferometer servo: 3 pm noise only / under the 2 pm walk</a:t>
                       </a:r>
                     </a:p>
                   </a:txBody>
@@ -18240,7 +18467,7 @@
                           </a:solidFill>
                           <a:latin typeface="Arial"/>
                         </a:rPr>
-                        <a:t>0.749 / 4.8 nm</a:t>
+                        <a:t>3.4e13 / never</a:t>
                       </a:r>
                     </a:p>
                   </a:txBody>
@@ -18262,7 +18489,7 @@
                           </a:solidFill>
                           <a:latin typeface="Arial"/>
                         </a:rPr>
-                        <a:t>0.991 / 161 pm</a:t>
+                        <a:t>5.4e12 / 1.7e13</a:t>
                       </a:r>
                     </a:p>
                   </a:txBody>
@@ -18284,13 +18511,103 @@
                           </a:solidFill>
                           <a:latin typeface="Arial"/>
                         </a:rPr>
-                        <a:t>0.989 / 168 pm</a:t>
+                        <a:t>5.5e12 / 2.0e13</a:t>
                       </a:r>
                     </a:p>
                   </a:txBody>
                   <a:tcPr marL="54864" marR="54864" marT="18288" marB="18288">
                     <a:solidFill>
                       <a:srgbClr val="ECF1F6"/>
+                    </a:solidFill>
+                  </a:tcPr>
+                </a:tc>
+              </a:tr>
+              <a:tr h="468630">
+                <a:tc>
+                  <a:txBody>
+                    <a:bodyPr wrap="square"/>
+                    <a:lstStyle/>
+                    <a:p>
+                      <a:r>
+                        <a:rPr sz="1100" b="0">
+                          <a:solidFill>
+                            <a:srgbClr val="282828"/>
+                          </a:solidFill>
+                          <a:latin typeface="Arial"/>
+                        </a:rPr>
+                        <a:t>sensors' servo under the walk: vector / pinhole / stepped</a:t>
+                      </a:r>
+                    </a:p>
+                  </a:txBody>
+                  <a:tcPr marL="54864" marR="54864" marT="18288" marB="18288">
+                    <a:solidFill>
+                      <a:srgbClr val="FFFFFF"/>
+                    </a:solidFill>
+                  </a:tcPr>
+                </a:tc>
+                <a:tc>
+                  <a:txBody>
+                    <a:bodyPr wrap="square"/>
+                    <a:lstStyle/>
+                    <a:p>
+                      <a:r>
+                        <a:rPr sz="1100" b="0">
+                          <a:solidFill>
+                            <a:srgbClr val="282828"/>
+                          </a:solidFill>
+                          <a:latin typeface="Arial"/>
+                        </a:rPr>
+                        <a:t>—</a:t>
+                      </a:r>
+                    </a:p>
+                  </a:txBody>
+                  <a:tcPr marL="54864" marR="54864" marT="18288" marB="18288">
+                    <a:solidFill>
+                      <a:srgbClr val="FFFFFF"/>
+                    </a:solidFill>
+                  </a:tcPr>
+                </a:tc>
+                <a:tc>
+                  <a:txBody>
+                    <a:bodyPr wrap="square"/>
+                    <a:lstStyle/>
+                    <a:p>
+                      <a:r>
+                        <a:rPr sz="1100" b="0">
+                          <a:solidFill>
+                            <a:srgbClr val="282828"/>
+                          </a:solidFill>
+                          <a:latin typeface="Arial"/>
+                        </a:rPr>
+                        <a:t>5.7e12 / 7.4e12 / 7.9e12</a:t>
+                      </a:r>
+                    </a:p>
+                  </a:txBody>
+                  <a:tcPr marL="54864" marR="54864" marT="18288" marB="18288">
+                    <a:solidFill>
+                      <a:srgbClr val="FFFFFF"/>
+                    </a:solidFill>
+                  </a:tcPr>
+                </a:tc>
+                <a:tc>
+                  <a:txBody>
+                    <a:bodyPr wrap="square"/>
+                    <a:lstStyle/>
+                    <a:p>
+                      <a:r>
+                        <a:rPr sz="1100" b="0">
+                          <a:solidFill>
+                            <a:srgbClr val="282828"/>
+                          </a:solidFill>
+                          <a:latin typeface="Arial"/>
+                        </a:rPr>
+                        <a:t>5.3e12 / 7.0e12 / 7.5e12</a:t>
+                      </a:r>
+                    </a:p>
+                  </a:txBody>
+                  <a:tcPr marL="54864" marR="54864" marT="18288" marB="18288">
+                    <a:solidFill>
+                      <a:srgbClr val="FFFFFF"/>
                     </a:solidFill>
                   </a:tcPr>
                 </a:tc>
@@ -18308,73 +18625,163 @@
                           </a:solidFill>
                           <a:latin typeface="Arial"/>
                         </a:rPr>
-                        <a:t>mode-to-mode cross-talk</a:t>
-                      </a:r>
-                    </a:p>
-                  </a:txBody>
-                  <a:tcPr marL="54864" marR="54864" marT="18288" marB="18288">
-                    <a:solidFill>
-                      <a:srgbClr val="FFFFFF"/>
-                    </a:solidFill>
-                  </a:tcPr>
-                </a:tc>
-                <a:tc>
-                  <a:txBody>
-                    <a:bodyPr wrap="square"/>
-                    <a:lstStyle/>
-                    <a:p>
-                      <a:r>
-                        <a:rPr sz="1100" b="0">
-                          <a:solidFill>
-                            <a:srgbClr val="282828"/>
-                          </a:solidFill>
-                          <a:latin typeface="Arial"/>
-                        </a:rPr>
-                        <a:t>0.22-0.48</a:t>
-                      </a:r>
-                    </a:p>
-                  </a:txBody>
-                  <a:tcPr marL="54864" marR="54864" marT="18288" marB="18288">
-                    <a:solidFill>
-                      <a:srgbClr val="FFFFFF"/>
-                    </a:solidFill>
-                  </a:tcPr>
-                </a:tc>
-                <a:tc>
-                  <a:txBody>
-                    <a:bodyPr wrap="square"/>
-                    <a:lstStyle/>
-                    <a:p>
-                      <a:r>
-                        <a:rPr sz="1100" b="0">
-                          <a:solidFill>
-                            <a:srgbClr val="282828"/>
-                          </a:solidFill>
-                          <a:latin typeface="Arial"/>
-                        </a:rPr>
-                        <a:t>0.006-0.02</a:t>
-                      </a:r>
-                    </a:p>
-                  </a:txBody>
-                  <a:tcPr marL="54864" marR="54864" marT="18288" marB="18288">
-                    <a:solidFill>
-                      <a:srgbClr val="FFFFFF"/>
-                    </a:solidFill>
-                  </a:tcPr>
-                </a:tc>
-                <a:tc>
-                  <a:txBody>
-                    <a:bodyPr wrap="square"/>
-                    <a:lstStyle/>
-                    <a:p>
-                      <a:r>
-                        <a:rPr sz="1100" b="0">
-                          <a:solidFill>
-                            <a:srgbClr val="282828"/>
-                          </a:solidFill>
-                          <a:latin typeface="Arial"/>
-                        </a:rPr>
-                        <a:t>0.005-0.03</a:t>
+                        <a:t>capture with unwrapping</a:t>
+                      </a:r>
+                    </a:p>
+                  </a:txBody>
+                  <a:tcPr marL="54864" marR="54864" marT="18288" marB="18288">
+                    <a:solidFill>
+                      <a:srgbClr val="ECF1F6"/>
+                    </a:solidFill>
+                  </a:tcPr>
+                </a:tc>
+                <a:tc>
+                  <a:txBody>
+                    <a:bodyPr wrap="square"/>
+                    <a:lstStyle/>
+                    <a:p>
+                      <a:r>
+                        <a:rPr sz="1100" b="0">
+                          <a:solidFill>
+                            <a:srgbClr val="282828"/>
+                          </a:solidFill>
+                          <a:latin typeface="Arial"/>
+                        </a:rPr>
+                        <a:t>stalls from 60 nm</a:t>
+                      </a:r>
+                    </a:p>
+                  </a:txBody>
+                  <a:tcPr marL="54864" marR="54864" marT="18288" marB="18288">
+                    <a:solidFill>
+                      <a:srgbClr val="ECF1F6"/>
+                    </a:solidFill>
+                  </a:tcPr>
+                </a:tc>
+                <a:tc>
+                  <a:txBody>
+                    <a:bodyPr wrap="square"/>
+                    <a:lstStyle/>
+                    <a:p>
+                      <a:r>
+                        <a:rPr sz="1100" b="0">
+                          <a:solidFill>
+                            <a:srgbClr val="282828"/>
+                          </a:solidFill>
+                          <a:latin typeface="Arial"/>
+                        </a:rPr>
+                        <a:t>3 pm from 200 nm in 19 cycles</a:t>
+                      </a:r>
+                    </a:p>
+                  </a:txBody>
+                  <a:tcPr marL="54864" marR="54864" marT="18288" marB="18288">
+                    <a:solidFill>
+                      <a:srgbClr val="ECF1F6"/>
+                    </a:solidFill>
+                  </a:tcPr>
+                </a:tc>
+                <a:tc>
+                  <a:txBody>
+                    <a:bodyPr wrap="square"/>
+                    <a:lstStyle/>
+                    <a:p>
+                      <a:r>
+                        <a:rPr sz="1100" b="0">
+                          <a:solidFill>
+                            <a:srgbClr val="282828"/>
+                          </a:solidFill>
+                          <a:latin typeface="Arial"/>
+                        </a:rPr>
+                        <a:t>3 pm from 300 nm in 43 cycles</a:t>
+                      </a:r>
+                    </a:p>
+                  </a:txBody>
+                  <a:tcPr marL="54864" marR="54864" marT="18288" marB="18288">
+                    <a:solidFill>
+                      <a:srgbClr val="ECF1F6"/>
+                    </a:solidFill>
+                  </a:tcPr>
+                </a:tc>
+              </a:tr>
+              <a:tr h="468630">
+                <a:tc>
+                  <a:txBody>
+                    <a:bodyPr wrap="square"/>
+                    <a:lstStyle/>
+                    <a:p>
+                      <a:r>
+                        <a:rPr sz="1100" b="0">
+                          <a:solidFill>
+                            <a:srgbClr val="282828"/>
+                          </a:solidFill>
+                          <a:latin typeface="Arial"/>
+                        </a:rPr>
+                        <a:t>vector Zernike, 100 nm pokes (fold gate)</a:t>
+                      </a:r>
+                    </a:p>
+                  </a:txBody>
+                  <a:tcPr marL="54864" marR="54864" marT="18288" marB="18288">
+                    <a:solidFill>
+                      <a:srgbClr val="FFFFFF"/>
+                    </a:solidFill>
+                  </a:tcPr>
+                </a:tc>
+                <a:tc>
+                  <a:txBody>
+                    <a:bodyPr wrap="square"/>
+                    <a:lstStyle/>
+                    <a:p>
+                      <a:r>
+                        <a:rPr sz="1100" b="0">
+                          <a:solidFill>
+                            <a:srgbClr val="282828"/>
+                          </a:solidFill>
+                          <a:latin typeface="Arial"/>
+                        </a:rPr>
+                        <a:t>19.6 pm, fails</a:t>
+                      </a:r>
+                    </a:p>
+                  </a:txBody>
+                  <a:tcPr marL="54864" marR="54864" marT="18288" marB="18288">
+                    <a:solidFill>
+                      <a:srgbClr val="FFFFFF"/>
+                    </a:solidFill>
+                  </a:tcPr>
+                </a:tc>
+                <a:tc>
+                  <a:txBody>
+                    <a:bodyPr wrap="square"/>
+                    <a:lstStyle/>
+                    <a:p>
+                      <a:r>
+                        <a:rPr sz="1100" b="0">
+                          <a:solidFill>
+                            <a:srgbClr val="282828"/>
+                          </a:solidFill>
+                          <a:latin typeface="Arial"/>
+                        </a:rPr>
+                        <a:t>634 pm raw; 0.054 pm calibrated: passes</a:t>
+                      </a:r>
+                    </a:p>
+                  </a:txBody>
+                  <a:tcPr marL="54864" marR="54864" marT="18288" marB="18288">
+                    <a:solidFill>
+                      <a:srgbClr val="FFFFFF"/>
+                    </a:solidFill>
+                  </a:tcPr>
+                </a:tc>
+                <a:tc>
+                  <a:txBody>
+                    <a:bodyPr wrap="square"/>
+                    <a:lstStyle/>
+                    <a:p>
+                      <a:r>
+                        <a:rPr sz="1100" b="0">
+                          <a:solidFill>
+                            <a:srgbClr val="282828"/>
+                          </a:solidFill>
+                          <a:latin typeface="Arial"/>
+                        </a:rPr>
+                        <a:t>0.05 pm</a:t>
                       </a:r>
                     </a:p>
                   </a:txBody>
@@ -18398,7 +18805,7 @@
                           </a:solidFill>
                           <a:latin typeface="Arial"/>
                         </a:rPr>
-                        <a:t>interferometer servo: 3 pm noise only / under the 2 pm walk</a:t>
+                        <a:t>stepped pinhole, 100 nm pokes</a:t>
                       </a:r>
                     </a:p>
                   </a:txBody>
@@ -18420,7 +18827,7 @@
                           </a:solidFill>
                           <a:latin typeface="Arial"/>
                         </a:rPr>
-                        <a:t>3.4e13 / never</a:t>
+                        <a:t>94 pm, fails</a:t>
                       </a:r>
                     </a:p>
                   </a:txBody>
@@ -18442,7 +18849,7 @@
                           </a:solidFill>
                           <a:latin typeface="Arial"/>
                         </a:rPr>
-                        <a:t>5.4e12 / 1.7e13</a:t>
+                        <a:t>0.27 pm: passes</a:t>
                       </a:r>
                     </a:p>
                   </a:txBody>
@@ -18464,7 +18871,7 @@
                           </a:solidFill>
                           <a:latin typeface="Arial"/>
                         </a:rPr>
-                        <a:t>5.5e12 / 2.0e13</a:t>
+                        <a:t>1.9 pm</a:t>
                       </a:r>
                     </a:p>
                   </a:txBody>
@@ -18475,20 +18882,20 @@
                   </a:tcPr>
                 </a:tc>
               </a:tr>
-              <a:tr h="280035">
-                <a:tc>
-                  <a:txBody>
-                    <a:bodyPr wrap="square"/>
-                    <a:lstStyle/>
-                    <a:p>
-                      <a:r>
-                        <a:rPr sz="1100" b="0">
-                          <a:solidFill>
-                            <a:srgbClr val="282828"/>
-                          </a:solidFill>
-                          <a:latin typeface="Arial"/>
-                        </a:rPr>
-                        <a:t>sensors' servo under the walk: vector / pinhole / stepped</a:t>
+              <a:tr h="468630">
+                <a:tc>
+                  <a:txBody>
+                    <a:bodyPr wrap="square"/>
+                    <a:lstStyle/>
+                    <a:p>
+                      <a:r>
+                        <a:rPr sz="1100" b="0">
+                          <a:solidFill>
+                            <a:srgbClr val="282828"/>
+                          </a:solidFill>
+                          <a:latin typeface="Arial"/>
+                        </a:rPr>
+                        <a:t>sensors' capture with unwrapping (vector / pinhole / stepped)</a:t>
                       </a:r>
                     </a:p>
                   </a:txBody>
@@ -18532,305 +18939,35 @@
                           </a:solidFill>
                           <a:latin typeface="Arial"/>
                         </a:rPr>
-                        <a:t>5.7e12 / 7.4e12 / 7.9e12</a:t>
-                      </a:r>
-                    </a:p>
-                  </a:txBody>
-                  <a:tcPr marL="54864" marR="54864" marT="18288" marB="18288">
-                    <a:solidFill>
-                      <a:srgbClr val="FFFFFF"/>
-                    </a:solidFill>
-                  </a:tcPr>
-                </a:tc>
-                <a:tc>
-                  <a:txBody>
-                    <a:bodyPr wrap="square"/>
-                    <a:lstStyle/>
-                    <a:p>
-                      <a:r>
-                        <a:rPr sz="1100" b="0">
-                          <a:solidFill>
-                            <a:srgbClr val="282828"/>
-                          </a:solidFill>
-                          <a:latin typeface="Arial"/>
-                        </a:rPr>
-                        <a:t>5.3e12 / 7.0e12 / 7.5e12</a:t>
-                      </a:r>
-                    </a:p>
-                  </a:txBody>
-                  <a:tcPr marL="54864" marR="54864" marT="18288" marB="18288">
-                    <a:solidFill>
-                      <a:srgbClr val="FFFFFF"/>
-                    </a:solidFill>
-                  </a:tcPr>
-                </a:tc>
-              </a:tr>
-              <a:tr h="280035">
-                <a:tc>
-                  <a:txBody>
-                    <a:bodyPr wrap="square"/>
-                    <a:lstStyle/>
-                    <a:p>
-                      <a:r>
-                        <a:rPr sz="1100" b="0">
-                          <a:solidFill>
-                            <a:srgbClr val="282828"/>
-                          </a:solidFill>
-                          <a:latin typeface="Arial"/>
-                        </a:rPr>
-                        <a:t>capture with unwrapping</a:t>
-                      </a:r>
-                    </a:p>
-                  </a:txBody>
-                  <a:tcPr marL="54864" marR="54864" marT="18288" marB="18288">
-                    <a:solidFill>
-                      <a:srgbClr val="ECF1F6"/>
-                    </a:solidFill>
-                  </a:tcPr>
-                </a:tc>
-                <a:tc>
-                  <a:txBody>
-                    <a:bodyPr wrap="square"/>
-                    <a:lstStyle/>
-                    <a:p>
-                      <a:r>
-                        <a:rPr sz="1100" b="0">
-                          <a:solidFill>
-                            <a:srgbClr val="282828"/>
-                          </a:solidFill>
-                          <a:latin typeface="Arial"/>
-                        </a:rPr>
-                        <a:t>stalls from 60 nm</a:t>
-                      </a:r>
-                    </a:p>
-                  </a:txBody>
-                  <a:tcPr marL="54864" marR="54864" marT="18288" marB="18288">
-                    <a:solidFill>
-                      <a:srgbClr val="ECF1F6"/>
-                    </a:solidFill>
-                  </a:tcPr>
-                </a:tc>
-                <a:tc>
-                  <a:txBody>
-                    <a:bodyPr wrap="square"/>
-                    <a:lstStyle/>
-                    <a:p>
-                      <a:r>
-                        <a:rPr sz="1100" b="0">
-                          <a:solidFill>
-                            <a:srgbClr val="282828"/>
-                          </a:solidFill>
-                          <a:latin typeface="Arial"/>
-                        </a:rPr>
-                        <a:t>3 pm from 200 nm in 19 cycles</a:t>
-                      </a:r>
-                    </a:p>
-                  </a:txBody>
-                  <a:tcPr marL="54864" marR="54864" marT="18288" marB="18288">
-                    <a:solidFill>
-                      <a:srgbClr val="ECF1F6"/>
-                    </a:solidFill>
-                  </a:tcPr>
-                </a:tc>
-                <a:tc>
-                  <a:txBody>
-                    <a:bodyPr wrap="square"/>
-                    <a:lstStyle/>
-                    <a:p>
-                      <a:r>
-                        <a:rPr sz="1100" b="0">
-                          <a:solidFill>
-                            <a:srgbClr val="282828"/>
-                          </a:solidFill>
-                          <a:latin typeface="Arial"/>
-                        </a:rPr>
-                        <a:t>3 pm from 300 nm in 43 cycles</a:t>
-                      </a:r>
-                    </a:p>
-                  </a:txBody>
-                  <a:tcPr marL="54864" marR="54864" marT="18288" marB="18288">
-                    <a:solidFill>
-                      <a:srgbClr val="ECF1F6"/>
-                    </a:solidFill>
-                  </a:tcPr>
-                </a:tc>
-              </a:tr>
-              <a:tr h="280035">
-                <a:tc>
-                  <a:txBody>
-                    <a:bodyPr wrap="square"/>
-                    <a:lstStyle/>
-                    <a:p>
-                      <a:r>
-                        <a:rPr sz="1100" b="0">
-                          <a:solidFill>
-                            <a:srgbClr val="282828"/>
-                          </a:solidFill>
-                          <a:latin typeface="Arial"/>
-                        </a:rPr>
-                        <a:t>vector Zernike, 100 nm pokes (fold gate)</a:t>
-                      </a:r>
-                    </a:p>
-                  </a:txBody>
-                  <a:tcPr marL="54864" marR="54864" marT="18288" marB="18288">
-                    <a:solidFill>
-                      <a:srgbClr val="FFFFFF"/>
-                    </a:solidFill>
-                  </a:tcPr>
-                </a:tc>
-                <a:tc>
-                  <a:txBody>
-                    <a:bodyPr wrap="square"/>
-                    <a:lstStyle/>
-                    <a:p>
-                      <a:r>
-                        <a:rPr sz="1100" b="0">
-                          <a:solidFill>
-                            <a:srgbClr val="282828"/>
-                          </a:solidFill>
-                          <a:latin typeface="Arial"/>
-                        </a:rPr>
-                        <a:t>19.6 pm, fails</a:t>
-                      </a:r>
-                    </a:p>
-                  </a:txBody>
-                  <a:tcPr marL="54864" marR="54864" marT="18288" marB="18288">
-                    <a:solidFill>
-                      <a:srgbClr val="FFFFFF"/>
-                    </a:solidFill>
-                  </a:tcPr>
-                </a:tc>
-                <a:tc>
-                  <a:txBody>
-                    <a:bodyPr wrap="square"/>
-                    <a:lstStyle/>
-                    <a:p>
-                      <a:r>
-                        <a:rPr sz="1100" b="0">
-                          <a:solidFill>
-                            <a:srgbClr val="282828"/>
-                          </a:solidFill>
-                          <a:latin typeface="Arial"/>
-                        </a:rPr>
-                        <a:t>634 pm raw; 0.054 pm calibrated: passes</a:t>
-                      </a:r>
-                    </a:p>
-                  </a:txBody>
-                  <a:tcPr marL="54864" marR="54864" marT="18288" marB="18288">
-                    <a:solidFill>
-                      <a:srgbClr val="FFFFFF"/>
-                    </a:solidFill>
-                  </a:tcPr>
-                </a:tc>
-                <a:tc>
-                  <a:txBody>
-                    <a:bodyPr wrap="square"/>
-                    <a:lstStyle/>
-                    <a:p>
-                      <a:r>
-                        <a:rPr sz="1100" b="0">
-                          <a:solidFill>
-                            <a:srgbClr val="282828"/>
-                          </a:solidFill>
-                          <a:latin typeface="Arial"/>
-                        </a:rPr>
-                        <a:t>0.05 pm</a:t>
-                      </a:r>
-                    </a:p>
-                  </a:txBody>
-                  <a:tcPr marL="54864" marR="54864" marT="18288" marB="18288">
-                    <a:solidFill>
-                      <a:srgbClr val="FFFFFF"/>
-                    </a:solidFill>
-                  </a:tcPr>
-                </a:tc>
-              </a:tr>
-              <a:tr h="280035">
-                <a:tc>
-                  <a:txBody>
-                    <a:bodyPr wrap="square"/>
-                    <a:lstStyle/>
-                    <a:p>
-                      <a:r>
-                        <a:rPr sz="1100" b="0">
-                          <a:solidFill>
-                            <a:srgbClr val="282828"/>
-                          </a:solidFill>
-                          <a:latin typeface="Arial"/>
-                        </a:rPr>
-                        <a:t>stepped pinhole, 100 nm pokes</a:t>
-                      </a:r>
-                    </a:p>
-                  </a:txBody>
-                  <a:tcPr marL="54864" marR="54864" marT="18288" marB="18288">
-                    <a:solidFill>
-                      <a:srgbClr val="ECF1F6"/>
-                    </a:solidFill>
-                  </a:tcPr>
-                </a:tc>
-                <a:tc>
-                  <a:txBody>
-                    <a:bodyPr wrap="square"/>
-                    <a:lstStyle/>
-                    <a:p>
-                      <a:r>
-                        <a:rPr sz="1100" b="0">
-                          <a:solidFill>
-                            <a:srgbClr val="282828"/>
-                          </a:solidFill>
-                          <a:latin typeface="Arial"/>
-                        </a:rPr>
-                        <a:t>94 pm, fails</a:t>
-                      </a:r>
-                    </a:p>
-                  </a:txBody>
-                  <a:tcPr marL="54864" marR="54864" marT="18288" marB="18288">
-                    <a:solidFill>
-                      <a:srgbClr val="ECF1F6"/>
-                    </a:solidFill>
-                  </a:tcPr>
-                </a:tc>
-                <a:tc>
-                  <a:txBody>
-                    <a:bodyPr wrap="square"/>
-                    <a:lstStyle/>
-                    <a:p>
-                      <a:r>
-                        <a:rPr sz="1100" b="0">
-                          <a:solidFill>
-                            <a:srgbClr val="282828"/>
-                          </a:solidFill>
-                          <a:latin typeface="Arial"/>
-                        </a:rPr>
-                        <a:t>0.27 pm: passes</a:t>
-                      </a:r>
-                    </a:p>
-                  </a:txBody>
-                  <a:tcPr marL="54864" marR="54864" marT="18288" marB="18288">
-                    <a:solidFill>
-                      <a:srgbClr val="ECF1F6"/>
-                    </a:solidFill>
-                  </a:tcPr>
-                </a:tc>
-                <a:tc>
-                  <a:txBody>
-                    <a:bodyPr wrap="square"/>
-                    <a:lstStyle/>
-                    <a:p>
-                      <a:r>
-                        <a:rPr sz="1100" b="0">
-                          <a:solidFill>
-                            <a:srgbClr val="282828"/>
-                          </a:solidFill>
-                          <a:latin typeface="Arial"/>
-                        </a:rPr>
-                        <a:t>1.9 pm</a:t>
-                      </a:r>
-                    </a:p>
-                  </a:txBody>
-                  <a:tcPr marL="54864" marR="54864" marT="18288" marB="18288">
-                    <a:solidFill>
-                      <a:srgbClr val="ECF1F6"/>
+                        <a:t>3 pm from 60 nm in 21 / 19 cycles; from 100 nm both diverge; the stepped reading never (its one-frame estimate past the fold)</a:t>
+                      </a:r>
+                    </a:p>
+                  </a:txBody>
+                  <a:tcPr marL="54864" marR="54864" marT="18288" marB="18288">
+                    <a:solidFill>
+                      <a:srgbClr val="FFFFFF"/>
+                    </a:solidFill>
+                  </a:tcPr>
+                </a:tc>
+                <a:tc>
+                  <a:txBody>
+                    <a:bodyPr wrap="square"/>
+                    <a:lstStyle/>
+                    <a:p>
+                      <a:r>
+                        <a:rPr sz="1100" b="0">
+                          <a:solidFill>
+                            <a:srgbClr val="282828"/>
+                          </a:solidFill>
+                          <a:latin typeface="Arial"/>
+                        </a:rPr>
+                        <a:t>—</a:t>
+                      </a:r>
+                    </a:p>
+                  </a:txBody>
+                  <a:tcPr marL="54864" marR="54864" marT="18288" marB="18288">
+                    <a:solidFill>
+                      <a:srgbClr val="FFFFFF"/>
                     </a:solidFill>
                   </a:tcPr>
                 </a:tc>
@@ -18847,7 +18984,7 @@
         </p:nvSpPr>
         <p:spPr>
           <a:xfrm>
-            <a:off x="411480" y="3965066"/>
+            <a:off x="411480" y="5376672"/>
             <a:ext cx="11368735" cy="274320"/>
           </a:xfrm>
           <a:prstGeom prst="rect">
@@ -18902,7 +19039,7 @@
         </p:nvSpPr>
         <p:spPr>
           <a:xfrm>
-            <a:off x="411480" y="6015608"/>
+            <a:off x="411480" y="7427214"/>
             <a:ext cx="11368735" cy="274320"/>
           </a:xfrm>
           <a:prstGeom prst="rect">
@@ -18928,7 +19065,7 @@
                 </a:solidFill>
                 <a:latin typeface="Arial"/>
               </a:rPr>
-              <a:t>Run tags oapifo2, oapifol2, oapdesc2, oapsens22, vqw22, vmap22, oapuw2, lensuw2, oaploop22; tg_psi_dm96_oap/REPORT_reflective.md (TO, 2026-09-16).</a:t>
+              <a:t>Run tags oapifo2, oapifol2, oapdesc2, oapsens22, vqw22, vmap22, oapuw2, lensuw2, oaploop22, oapcap22 and oapsens385 (the Mac, 2026-09-16); tg_psi_dm96_oap/REPORT_reflective.md (TO, 2026-09-16).</a:t>
             </a:r>
           </a:p>
         </p:txBody>
@@ -23132,7 +23269,7 @@
                 </a:solidFill>
                 <a:latin typeface="Arial"/>
               </a:rPr>
-              <a:t>How every configuration was analyzed</a:t>
+              <a:t>Next: the interferometer redone on the improved bench</a:t>
             </a:r>
           </a:p>
           <a:p>
@@ -23148,7 +23285,7 @@
                 </a:solidFill>
                 <a:latin typeface="Arial"/>
               </a:rPr>
-              <a:t>One repeatable path, ten steps, the same for all four approaches: a new sensor is a new reading class in the shared runner plus its gate, then steps 4 to 10 unchanged</a:t>
+              <a:t>Three defects of the modeled bench were found and fixed on 2026-09-17: the record's numbers describe a bench we will not build, so they are being redone on the one we will</a:t>
             </a:r>
           </a:p>
         </p:txBody>
@@ -23197,885 +23334,102 @@
           </a:p>
         </p:txBody>
       </p:sp>
-      <p:graphicFrame>
-        <p:nvGraphicFramePr>
-          <p:cNvPr id="4" name="Table 3"/>
-          <p:cNvGraphicFramePr>
-            <a:graphicFrameLocks noGrp="1"/>
-          </p:cNvGraphicFramePr>
-          <p:nvPr/>
-        </p:nvGraphicFramePr>
-        <p:xfrm>
-          <a:off x="411480" y="1298448"/>
-          <a:ext cx="5806439" cy="3188970"/>
-        </p:xfrm>
-        <a:graphic>
-          <a:graphicData uri="http://schemas.openxmlformats.org/drawingml/2006/table">
-            <a:tbl>
-              <a:tblPr firstRow="1" bandRow="1">
-                <a:tableStyleId>{5C22544A-7EE6-4342-B048-85BDC9FD1C3A}</a:tableStyleId>
-              </a:tblPr>
-              <a:tblGrid>
-                <a:gridCol w="436880"/>
-                <a:gridCol w="2963389"/>
-                <a:gridCol w="2406170"/>
-              </a:tblGrid>
-              <a:tr h="280035">
-                <a:tc>
-                  <a:txBody>
-                    <a:bodyPr wrap="square"/>
-                    <a:lstStyle/>
-                    <a:p>
-                      <a:r>
-                        <a:rPr sz="1100" b="1">
-                          <a:solidFill>
-                            <a:srgbClr val="FFFFFF"/>
-                          </a:solidFill>
-                          <a:latin typeface="Arial"/>
-                        </a:rPr>
-                        <a:t>step</a:t>
-                      </a:r>
-                    </a:p>
-                  </a:txBody>
-                  <a:tcPr marL="54864" marR="54864" marT="18288" marB="18288">
-                    <a:solidFill>
-                      <a:srgbClr val="1F4E79"/>
-                    </a:solidFill>
-                  </a:tcPr>
-                </a:tc>
-                <a:tc>
-                  <a:txBody>
-                    <a:bodyPr wrap="square"/>
-                    <a:lstStyle/>
-                    <a:p>
-                      <a:r>
-                        <a:rPr sz="1100" b="1">
-                          <a:solidFill>
-                            <a:srgbClr val="FFFFFF"/>
-                          </a:solidFill>
-                          <a:latin typeface="Arial"/>
-                        </a:rPr>
-                        <a:t>what</a:t>
-                      </a:r>
-                    </a:p>
-                  </a:txBody>
-                  <a:tcPr marL="54864" marR="54864" marT="18288" marB="18288">
-                    <a:solidFill>
-                      <a:srgbClr val="1F4E79"/>
-                    </a:solidFill>
-                  </a:tcPr>
-                </a:tc>
-                <a:tc>
-                  <a:txBody>
-                    <a:bodyPr wrap="square"/>
-                    <a:lstStyle/>
-                    <a:p>
-                      <a:r>
-                        <a:rPr sz="1100" b="1">
-                          <a:solidFill>
-                            <a:srgbClr val="FFFFFF"/>
-                          </a:solidFill>
-                          <a:latin typeface="Arial"/>
-                        </a:rPr>
-                        <a:t>gate or output</a:t>
-                      </a:r>
-                    </a:p>
-                  </a:txBody>
-                  <a:tcPr marL="54864" marR="54864" marT="18288" marB="18288">
-                    <a:solidFill>
-                      <a:srgbClr val="1F4E79"/>
-                    </a:solidFill>
-                  </a:tcPr>
-                </a:tc>
-              </a:tr>
-              <a:tr h="468630">
-                <a:tc>
-                  <a:txBody>
-                    <a:bodyPr wrap="square"/>
-                    <a:lstStyle/>
-                    <a:p>
-                      <a:r>
-                        <a:rPr sz="1100" b="0">
-                          <a:solidFill>
-                            <a:srgbClr val="282828"/>
-                          </a:solidFill>
-                          <a:latin typeface="Arial"/>
-                        </a:rPr>
-                        <a:t>1</a:t>
-                      </a:r>
-                    </a:p>
-                  </a:txBody>
-                  <a:tcPr marL="54864" marR="54864" marT="18288" marB="18288">
-                    <a:solidFill>
-                      <a:srgbClr val="FFFFFF"/>
-                    </a:solidFill>
-                  </a:tcPr>
-                </a:tc>
-                <a:tc>
-                  <a:txBody>
-                    <a:bodyPr wrap="square"/>
-                    <a:lstStyle/>
-                    <a:p>
-                      <a:r>
-                        <a:rPr sz="1100" b="0">
-                          <a:solidFill>
-                            <a:srgbClr val="282828"/>
-                          </a:solidFill>
-                          <a:latin typeface="Arial"/>
-                        </a:rPr>
-                        <a:t>one parameter sheet and one runner per approach; batch wrappers</a:t>
-                      </a:r>
-                    </a:p>
-                  </a:txBody>
-                  <a:tcPr marL="54864" marR="54864" marT="18288" marB="18288">
-                    <a:solidFill>
-                      <a:srgbClr val="FFFFFF"/>
-                    </a:solidFill>
-                  </a:tcPr>
-                </a:tc>
-                <a:tc>
-                  <a:txBody>
-                    <a:bodyPr wrap="square"/>
-                    <a:lstStyle/>
-                    <a:p>
-                      <a:r>
-                        <a:rPr sz="1100" b="0">
-                          <a:solidFill>
-                            <a:srgbClr val="282828"/>
-                          </a:solidFill>
-                          <a:latin typeface="Arial"/>
-                        </a:rPr>
-                        <a:t>every number has a run tag</a:t>
-                      </a:r>
-                    </a:p>
-                  </a:txBody>
-                  <a:tcPr marL="54864" marR="54864" marT="18288" marB="18288">
-                    <a:solidFill>
-                      <a:srgbClr val="FFFFFF"/>
-                    </a:solidFill>
-                  </a:tcPr>
-                </a:tc>
-              </a:tr>
-              <a:tr h="657225">
-                <a:tc>
-                  <a:txBody>
-                    <a:bodyPr wrap="square"/>
-                    <a:lstStyle/>
-                    <a:p>
-                      <a:r>
-                        <a:rPr sz="1100" b="0">
-                          <a:solidFill>
-                            <a:srgbClr val="282828"/>
-                          </a:solidFill>
-                          <a:latin typeface="Arial"/>
-                        </a:rPr>
-                        <a:t>2</a:t>
-                      </a:r>
-                    </a:p>
-                  </a:txBody>
-                  <a:tcPr marL="54864" marR="54864" marT="18288" marB="18288">
-                    <a:solidFill>
-                      <a:srgbClr val="ECF1F6"/>
-                    </a:solidFill>
-                  </a:tcPr>
-                </a:tc>
-                <a:tc>
-                  <a:txBody>
-                    <a:bodyPr wrap="square"/>
-                    <a:lstStyle/>
-                    <a:p>
-                      <a:r>
-                        <a:rPr sz="1100" b="0">
-                          <a:solidFill>
-                            <a:srgbClr val="282828"/>
-                          </a:solidFill>
-                          <a:latin typeface="Arial"/>
-                        </a:rPr>
-                        <a:t>build the bench from the sheet, trace it; clearance of end bodies and node parts; detector-leg focus; sampling budget</a:t>
-                      </a:r>
-                    </a:p>
-                  </a:txBody>
-                  <a:tcPr marL="54864" marR="54864" marT="18288" marB="18288">
-                    <a:solidFill>
-                      <a:srgbClr val="ECF1F6"/>
-                    </a:solidFill>
-                  </a:tcPr>
-                </a:tc>
-                <a:tc>
-                  <a:txBody>
-                    <a:bodyPr wrap="square"/>
-                    <a:lstStyle/>
-                    <a:p>
-                      <a:r>
-                        <a:rPr sz="1100" b="0">
-                          <a:solidFill>
-                            <a:srgbClr val="282828"/>
-                          </a:solidFill>
-                          <a:latin typeface="Arial"/>
-                        </a:rPr>
-                        <a:t>every part clears by 25 mm; 6 pixels across the mask feature</a:t>
-                      </a:r>
-                    </a:p>
-                  </a:txBody>
-                  <a:tcPr marL="54864" marR="54864" marT="18288" marB="18288">
-                    <a:solidFill>
-                      <a:srgbClr val="ECF1F6"/>
-                    </a:solidFill>
-                  </a:tcPr>
-                </a:tc>
-              </a:tr>
-              <a:tr h="657225">
-                <a:tc>
-                  <a:txBody>
-                    <a:bodyPr wrap="square"/>
-                    <a:lstStyle/>
-                    <a:p>
-                      <a:r>
-                        <a:rPr sz="1100" b="0">
-                          <a:solidFill>
-                            <a:srgbClr val="282828"/>
-                          </a:solidFill>
-                          <a:latin typeface="Arial"/>
-                        </a:rPr>
-                        <a:t>3</a:t>
-                      </a:r>
-                    </a:p>
-                  </a:txBody>
-                  <a:tcPr marL="54864" marR="54864" marT="18288" marB="18288">
-                    <a:solidFill>
-                      <a:srgbClr val="FFFFFF"/>
-                    </a:solidFill>
-                  </a:tcPr>
-                </a:tc>
-                <a:tc>
-                  <a:txBody>
-                    <a:bodyPr wrap="square"/>
-                    <a:lstStyle/>
-                    <a:p>
-                      <a:r>
-                        <a:rPr sz="1100" b="0">
-                          <a:solidFill>
-                            <a:srgbClr val="282828"/>
-                          </a:solidFill>
-                          <a:latin typeface="Arial"/>
-                        </a:rPr>
-                        <a:t>model gates before any number</a:t>
-                      </a:r>
-                    </a:p>
-                  </a:txBody>
-                  <a:tcPr marL="54864" marR="54864" marT="18288" marB="18288">
-                    <a:solidFill>
-                      <a:srgbClr val="FFFFFF"/>
-                    </a:solidFill>
-                  </a:tcPr>
-                </a:tc>
-                <a:tc>
-                  <a:txBody>
-                    <a:bodyPr wrap="square"/>
-                    <a:lstStyle/>
-                    <a:p>
-                      <a:r>
-                        <a:rPr sz="1100" b="0">
-                          <a:solidFill>
-                            <a:srgbClr val="282828"/>
-                          </a:solidFill>
-                          <a:latin typeface="Arial"/>
-                        </a:rPr>
-                        <a:t>mask round trip, reference-wave surrogate, working-state amplitude, the reading on 100 nm pokes</a:t>
-                      </a:r>
-                    </a:p>
-                  </a:txBody>
-                  <a:tcPr marL="54864" marR="54864" marT="18288" marB="18288">
-                    <a:solidFill>
-                      <a:srgbClr val="FFFFFF"/>
-                    </a:solidFill>
-                  </a:tcPr>
-                </a:tc>
-              </a:tr>
-              <a:tr h="657225">
-                <a:tc>
-                  <a:txBody>
-                    <a:bodyPr wrap="square"/>
-                    <a:lstStyle/>
-                    <a:p>
-                      <a:r>
-                        <a:rPr sz="1100" b="0">
-                          <a:solidFill>
-                            <a:srgbClr val="282828"/>
-                          </a:solidFill>
-                          <a:latin typeface="Arial"/>
-                        </a:rPr>
-                        <a:t>4</a:t>
-                      </a:r>
-                    </a:p>
-                  </a:txBody>
-                  <a:tcPr marL="54864" marR="54864" marT="18288" marB="18288">
-                    <a:solidFill>
-                      <a:srgbClr val="ECF1F6"/>
-                    </a:solidFill>
-                  </a:tcPr>
-                </a:tc>
-                <a:tc>
-                  <a:txBody>
-                    <a:bodyPr wrap="square"/>
-                    <a:lstStyle/>
-                    <a:p>
-                      <a:r>
-                        <a:rPr sz="1100" b="0">
-                          <a:solidFill>
-                            <a:srgbClr val="282828"/>
-                          </a:solidFill>
-                          <a:latin typeface="Arial"/>
-                        </a:rPr>
-                        <a:t>calibration: the response matrix measured through the sensor, on the 30 nm working surface</a:t>
-                      </a:r>
-                    </a:p>
-                  </a:txBody>
-                  <a:tcPr marL="54864" marR="54864" marT="18288" marB="18288">
-                    <a:solidFill>
-                      <a:srgbClr val="ECF1F6"/>
-                    </a:solidFill>
-                  </a:tcPr>
-                </a:tc>
-                <a:tc>
-                  <a:txBody>
-                    <a:bodyPr wrap="square"/>
-                    <a:lstStyle/>
-                    <a:p>
-                      <a:r>
-                        <a:rPr sz="1100" b="0">
-                          <a:solidFill>
-                            <a:srgbClr val="282828"/>
-                          </a:solidFill>
-                          <a:latin typeface="Arial"/>
-                        </a:rPr>
-                        <a:t>piston null carried; stencil-site fit</a:t>
-                      </a:r>
-                    </a:p>
-                  </a:txBody>
-                  <a:tcPr marL="54864" marR="54864" marT="18288" marB="18288">
-                    <a:solidFill>
-                      <a:srgbClr val="ECF1F6"/>
-                    </a:solidFill>
-                  </a:tcPr>
-                </a:tc>
-              </a:tr>
-              <a:tr h="468630">
-                <a:tc>
-                  <a:txBody>
-                    <a:bodyPr wrap="square"/>
-                    <a:lstStyle/>
-                    <a:p>
-                      <a:r>
-                        <a:rPr sz="1100" b="0">
-                          <a:solidFill>
-                            <a:srgbClr val="282828"/>
-                          </a:solidFill>
-                          <a:latin typeface="Arial"/>
-                        </a:rPr>
-                        <a:t>5</a:t>
-                      </a:r>
-                    </a:p>
-                  </a:txBody>
-                  <a:tcPr marL="54864" marR="54864" marT="18288" marB="18288">
-                    <a:solidFill>
-                      <a:srgbClr val="FFFFFF"/>
-                    </a:solidFill>
-                  </a:tcPr>
-                </a:tc>
-                <a:tc>
-                  <a:txBody>
-                    <a:bodyPr wrap="square"/>
-                    <a:lstStyle/>
-                    <a:p>
-                      <a:r>
-                        <a:rPr sz="1100" b="0">
-                          <a:solidFill>
-                            <a:srgbClr val="282828"/>
-                          </a:solidFill>
-                          <a:latin typeface="Arial"/>
-                        </a:rPr>
-                        <a:t>rows on the working surface: 10 nm on one actuator; 1 nm on 47 sites; dense 10 nm</a:t>
-                      </a:r>
-                    </a:p>
-                  </a:txBody>
-                  <a:tcPr marL="54864" marR="54864" marT="18288" marB="18288">
-                    <a:solidFill>
-                      <a:srgbClr val="FFFFFF"/>
-                    </a:solidFill>
-                  </a:tcPr>
-                </a:tc>
-                <a:tc>
-                  <a:txBody>
-                    <a:bodyPr wrap="square"/>
-                    <a:lstStyle/>
-                    <a:p>
-                      <a:r>
-                        <a:rPr sz="1100" b="0">
-                          <a:solidFill>
-                            <a:srgbClr val="282828"/>
-                          </a:solidFill>
-                          <a:latin typeface="Arial"/>
-                        </a:rPr>
-                        <a:t>gain, floor, SNR</a:t>
-                      </a:r>
-                    </a:p>
-                  </a:txBody>
-                  <a:tcPr marL="54864" marR="54864" marT="18288" marB="18288">
-                    <a:solidFill>
-                      <a:srgbClr val="FFFFFF"/>
-                    </a:solidFill>
-                  </a:tcPr>
-                </a:tc>
-              </a:tr>
-            </a:tbl>
-          </a:graphicData>
-        </a:graphic>
-      </p:graphicFrame>
-      <p:graphicFrame>
-        <p:nvGraphicFramePr>
-          <p:cNvPr id="5" name="Table 4"/>
-          <p:cNvGraphicFramePr>
-            <a:graphicFrameLocks noGrp="1"/>
-          </p:cNvGraphicFramePr>
-          <p:nvPr/>
-        </p:nvGraphicFramePr>
-        <p:xfrm>
-          <a:off x="6400800" y="1298448"/>
-          <a:ext cx="5394959" cy="2777490"/>
-        </p:xfrm>
-        <a:graphic>
-          <a:graphicData uri="http://schemas.openxmlformats.org/drawingml/2006/table">
-            <a:tbl>
-              <a:tblPr firstRow="1" bandRow="1">
-                <a:tableStyleId>{5C22544A-7EE6-4342-B048-85BDC9FD1C3A}</a:tableStyleId>
-              </a:tblPr>
-              <a:tblGrid>
-                <a:gridCol w="410464"/>
-                <a:gridCol w="3846730"/>
-                <a:gridCol w="1137765"/>
-              </a:tblGrid>
-              <a:tr h="262890">
-                <a:tc>
-                  <a:txBody>
-                    <a:bodyPr wrap="square"/>
-                    <a:lstStyle/>
-                    <a:p>
-                      <a:r>
-                        <a:rPr sz="1000" b="1">
-                          <a:solidFill>
-                            <a:srgbClr val="FFFFFF"/>
-                          </a:solidFill>
-                          <a:latin typeface="Arial"/>
-                        </a:rPr>
-                        <a:t>step</a:t>
-                      </a:r>
-                    </a:p>
-                  </a:txBody>
-                  <a:tcPr marL="54864" marR="54864" marT="18288" marB="18288">
-                    <a:solidFill>
-                      <a:srgbClr val="1F4E79"/>
-                    </a:solidFill>
-                  </a:tcPr>
-                </a:tc>
-                <a:tc>
-                  <a:txBody>
-                    <a:bodyPr wrap="square"/>
-                    <a:lstStyle/>
-                    <a:p>
-                      <a:r>
-                        <a:rPr sz="1000" b="1">
-                          <a:solidFill>
-                            <a:srgbClr val="FFFFFF"/>
-                          </a:solidFill>
-                          <a:latin typeface="Arial"/>
-                        </a:rPr>
-                        <a:t>what</a:t>
-                      </a:r>
-                    </a:p>
-                  </a:txBody>
-                  <a:tcPr marL="54864" marR="54864" marT="18288" marB="18288">
-                    <a:solidFill>
-                      <a:srgbClr val="1F4E79"/>
-                    </a:solidFill>
-                  </a:tcPr>
-                </a:tc>
-                <a:tc>
-                  <a:txBody>
-                    <a:bodyPr wrap="square"/>
-                    <a:lstStyle/>
-                    <a:p>
-                      <a:r>
-                        <a:rPr sz="1000" b="1">
-                          <a:solidFill>
-                            <a:srgbClr val="FFFFFF"/>
-                          </a:solidFill>
-                          <a:latin typeface="Arial"/>
-                        </a:rPr>
-                        <a:t>gate or output</a:t>
-                      </a:r>
-                    </a:p>
-                  </a:txBody>
-                  <a:tcPr marL="54864" marR="54864" marT="18288" marB="18288">
-                    <a:solidFill>
-                      <a:srgbClr val="1F4E79"/>
-                    </a:solidFill>
-                  </a:tcPr>
-                </a:tc>
-              </a:tr>
-              <a:tr h="434340">
-                <a:tc>
-                  <a:txBody>
-                    <a:bodyPr wrap="square"/>
-                    <a:lstStyle/>
-                    <a:p>
-                      <a:r>
-                        <a:rPr sz="1000" b="0">
-                          <a:solidFill>
-                            <a:srgbClr val="282828"/>
-                          </a:solidFill>
-                          <a:latin typeface="Arial"/>
-                        </a:rPr>
-                        <a:t>6</a:t>
-                      </a:r>
-                    </a:p>
-                  </a:txBody>
-                  <a:tcPr marL="54864" marR="54864" marT="18288" marB="18288">
-                    <a:solidFill>
-                      <a:srgbClr val="FFFFFF"/>
-                    </a:solidFill>
-                  </a:tcPr>
-                </a:tc>
-                <a:tc>
-                  <a:txBody>
-                    <a:bodyPr wrap="square"/>
-                    <a:lstStyle/>
-                    <a:p>
-                      <a:r>
-                        <a:rPr sz="1000" b="0">
-                          <a:solidFill>
-                            <a:srgbClr val="282828"/>
-                          </a:solidFill>
-                          <a:latin typeface="Arial"/>
-                        </a:rPr>
-                        <a:t>capture range: the aging ladder to 10%; the matrix re-measured at 60 to 160 nm with its photon cost</a:t>
-                      </a:r>
-                    </a:p>
-                  </a:txBody>
-                  <a:tcPr marL="54864" marR="54864" marT="18288" marB="18288">
-                    <a:solidFill>
-                      <a:srgbClr val="FFFFFF"/>
-                    </a:solidFill>
-                  </a:tcPr>
-                </a:tc>
-                <a:tc>
-                  <a:txBody>
-                    <a:bodyPr wrap="square"/>
-                    <a:lstStyle/>
-                    <a:p>
-                      <a:r>
-                        <a:rPr sz="1000" b="0">
-                          <a:solidFill>
-                            <a:srgbClr val="282828"/>
-                          </a:solidFill>
-                          <a:latin typeface="Arial"/>
-                        </a:rPr>
-                        <a:t>range in nm; photons per rung</a:t>
-                      </a:r>
-                    </a:p>
-                  </a:txBody>
-                  <a:tcPr marL="54864" marR="54864" marT="18288" marB="18288">
-                    <a:solidFill>
-                      <a:srgbClr val="FFFFFF"/>
-                    </a:solidFill>
-                  </a:tcPr>
-                </a:tc>
-              </a:tr>
-              <a:tr h="434340">
-                <a:tc>
-                  <a:txBody>
-                    <a:bodyPr wrap="square"/>
-                    <a:lstStyle/>
-                    <a:p>
-                      <a:r>
-                        <a:rPr sz="1000" b="0">
-                          <a:solidFill>
-                            <a:srgbClr val="282828"/>
-                          </a:solidFill>
-                          <a:latin typeface="Arial"/>
-                        </a:rPr>
-                        <a:t>7</a:t>
-                      </a:r>
-                    </a:p>
-                  </a:txBody>
-                  <a:tcPr marL="54864" marR="54864" marT="18288" marB="18288">
-                    <a:solidFill>
-                      <a:srgbClr val="ECF1F6"/>
-                    </a:solidFill>
-                  </a:tcPr>
-                </a:tc>
-                <a:tc>
-                  <a:txBody>
-                    <a:bodyPr wrap="square"/>
-                    <a:lstStyle/>
-                    <a:p>
-                      <a:r>
-                        <a:rPr sz="1000" b="0">
-                          <a:solidFill>
-                            <a:srgbClr val="282828"/>
-                          </a:solidFill>
-                          <a:latin typeface="Arial"/>
-                        </a:rPr>
-                        <a:t>photons: noise fit over 1e8 to 1e14 per measurement, flat and on-surface matrix</a:t>
-                      </a:r>
-                    </a:p>
-                  </a:txBody>
-                  <a:tcPr marL="54864" marR="54864" marT="18288" marB="18288">
-                    <a:solidFill>
-                      <a:srgbClr val="ECF1F6"/>
-                    </a:solidFill>
-                  </a:tcPr>
-                </a:tc>
-                <a:tc>
-                  <a:txBody>
-                    <a:bodyPr wrap="square"/>
-                    <a:lstStyle/>
-                    <a:p>
-                      <a:r>
-                        <a:rPr sz="1000" b="0">
-                          <a:solidFill>
-                            <a:srgbClr val="282828"/>
-                          </a:solidFill>
-                          <a:latin typeface="Arial"/>
-                        </a:rPr>
-                        <a:t>photons for 1 pm</a:t>
-                      </a:r>
-                    </a:p>
-                  </a:txBody>
-                  <a:tcPr marL="54864" marR="54864" marT="18288" marB="18288">
-                    <a:solidFill>
-                      <a:srgbClr val="ECF1F6"/>
-                    </a:solidFill>
-                  </a:tcPr>
-                </a:tc>
-              </a:tr>
-              <a:tr h="605790">
-                <a:tc>
-                  <a:txBody>
-                    <a:bodyPr wrap="square"/>
-                    <a:lstStyle/>
-                    <a:p>
-                      <a:r>
-                        <a:rPr sz="1000" b="0">
-                          <a:solidFill>
-                            <a:srgbClr val="282828"/>
-                          </a:solidFill>
-                          <a:latin typeface="Arial"/>
-                        </a:rPr>
-                        <a:t>8</a:t>
-                      </a:r>
-                    </a:p>
-                  </a:txBody>
-                  <a:tcPr marL="54864" marR="54864" marT="18288" marB="18288">
-                    <a:solidFill>
-                      <a:srgbClr val="FFFFFF"/>
-                    </a:solidFill>
-                  </a:tcPr>
-                </a:tc>
-                <a:tc>
-                  <a:txBody>
-                    <a:bodyPr wrap="square"/>
-                    <a:lstStyle/>
-                    <a:p>
-                      <a:r>
-                        <a:rPr sz="1000" b="0">
-                          <a:solidFill>
-                            <a:srgbClr val="282828"/>
-                          </a:solidFill>
-                          <a:latin typeface="Arial"/>
-                        </a:rPr>
-                        <a:t>closed loop in the shared loop code: noise, walk, ramp; noiseless step; within-scan drift</a:t>
-                      </a:r>
-                    </a:p>
-                  </a:txBody>
-                  <a:tcPr marL="54864" marR="54864" marT="18288" marB="18288">
-                    <a:solidFill>
-                      <a:srgbClr val="FFFFFF"/>
-                    </a:solidFill>
-                  </a:tcPr>
-                </a:tc>
-                <a:tc>
-                  <a:txBody>
-                    <a:bodyPr wrap="square"/>
-                    <a:lstStyle/>
-                    <a:p>
-                      <a:r>
-                        <a:rPr sz="1000" b="0">
-                          <a:solidFill>
-                            <a:srgbClr val="282828"/>
-                          </a:solidFill>
-                          <a:latin typeface="Arial"/>
-                        </a:rPr>
-                        <a:t>photons per cycle for 3 pm; fixed error</a:t>
-                      </a:r>
-                    </a:p>
-                  </a:txBody>
-                  <a:tcPr marL="54864" marR="54864" marT="18288" marB="18288">
-                    <a:solidFill>
-                      <a:srgbClr val="FFFFFF"/>
-                    </a:solidFill>
-                  </a:tcPr>
-                </a:tc>
-              </a:tr>
-              <a:tr h="434340">
-                <a:tc>
-                  <a:txBody>
-                    <a:bodyPr wrap="square"/>
-                    <a:lstStyle/>
-                    <a:p>
-                      <a:r>
-                        <a:rPr sz="1000" b="0">
-                          <a:solidFill>
-                            <a:srgbClr val="282828"/>
-                          </a:solidFill>
-                          <a:latin typeface="Arial"/>
-                        </a:rPr>
-                        <a:t>9</a:t>
-                      </a:r>
-                    </a:p>
-                  </a:txBody>
-                  <a:tcPr marL="54864" marR="54864" marT="18288" marB="18288">
-                    <a:solidFill>
-                      <a:srgbClr val="ECF1F6"/>
-                    </a:solidFill>
-                  </a:tcPr>
-                </a:tc>
-                <a:tc>
-                  <a:txBody>
-                    <a:bodyPr wrap="square"/>
-                    <a:lstStyle/>
-                    <a:p>
-                      <a:r>
-                        <a:rPr sz="1000" b="0">
-                          <a:solidFill>
-                            <a:srgbClr val="282828"/>
-                          </a:solidFill>
-                          <a:latin typeface="Arial"/>
-                        </a:rPr>
-                        <a:t>descent: the start ladder with unwrapping and recalibration on and off</a:t>
-                      </a:r>
-                    </a:p>
-                  </a:txBody>
-                  <a:tcPr marL="54864" marR="54864" marT="18288" marB="18288">
-                    <a:solidFill>
-                      <a:srgbClr val="ECF1F6"/>
-                    </a:solidFill>
-                  </a:tcPr>
-                </a:tc>
-                <a:tc>
-                  <a:txBody>
-                    <a:bodyPr wrap="square"/>
-                    <a:lstStyle/>
-                    <a:p>
-                      <a:r>
-                        <a:rPr sz="1000" b="0">
-                          <a:solidFill>
-                            <a:srgbClr val="282828"/>
-                          </a:solidFill>
-                          <a:latin typeface="Arial"/>
-                        </a:rPr>
-                        <a:t>largest start brought to 3 pm</a:t>
-                      </a:r>
-                    </a:p>
-                  </a:txBody>
-                  <a:tcPr marL="54864" marR="54864" marT="18288" marB="18288">
-                    <a:solidFill>
-                      <a:srgbClr val="ECF1F6"/>
-                    </a:solidFill>
-                  </a:tcPr>
-                </a:tc>
-              </a:tr>
-              <a:tr h="605790">
-                <a:tc>
-                  <a:txBody>
-                    <a:bodyPr wrap="square"/>
-                    <a:lstStyle/>
-                    <a:p>
-                      <a:r>
-                        <a:rPr sz="1000" b="0">
-                          <a:solidFill>
-                            <a:srgbClr val="282828"/>
-                          </a:solidFill>
-                          <a:latin typeface="Arial"/>
-                        </a:rPr>
-                        <a:t>10</a:t>
-                      </a:r>
-                    </a:p>
-                  </a:txBody>
-                  <a:tcPr marL="54864" marR="54864" marT="18288" marB="18288">
-                    <a:solidFill>
-                      <a:srgbClr val="FFFFFF"/>
-                    </a:solidFill>
-                  </a:tcPr>
-                </a:tc>
-                <a:tc>
-                  <a:txBody>
-                    <a:bodyPr wrap="square"/>
-                    <a:lstStyle/>
-                    <a:p>
-                      <a:r>
-                        <a:rPr sz="1000" b="0">
-                          <a:solidFill>
-                            <a:srgbClr val="282828"/>
-                          </a:solidFill>
-                          <a:latin typeface="Arial"/>
-                        </a:rPr>
-                        <a:t>systematics one at a time, uncalibrated and through the matrix; layout drawn from the emitted deck; parts from the sheet; report numbers first</a:t>
-                      </a:r>
-                    </a:p>
-                  </a:txBody>
-                  <a:tcPr marL="54864" marR="54864" marT="18288" marB="18288">
-                    <a:solidFill>
-                      <a:srgbClr val="FFFFFF"/>
-                    </a:solidFill>
-                  </a:tcPr>
-                </a:tc>
-                <a:tc>
-                  <a:txBody>
-                    <a:bodyPr wrap="square"/>
-                    <a:lstStyle/>
-                    <a:p>
-                      <a:r>
-                        <a:rPr sz="1000" b="0">
-                          <a:solidFill>
-                            <a:srgbClr val="282828"/>
-                          </a:solidFill>
-                          <a:latin typeface="Arial"/>
-                        </a:rPr>
-                        <a:t>one line per term on the systematics slide</a:t>
-                      </a:r>
-                    </a:p>
-                  </a:txBody>
-                  <a:tcPr marL="54864" marR="54864" marT="18288" marB="18288">
-                    <a:solidFill>
-                      <a:srgbClr val="FFFFFF"/>
-                    </a:solidFill>
-                  </a:tcPr>
-                </a:tc>
-              </a:tr>
-            </a:tbl>
-          </a:graphicData>
-        </a:graphic>
-      </p:graphicFrame>
       <p:sp>
         <p:nvSpPr>
-          <p:cNvPr id="6" name="TextBox 5"/>
+          <p:cNvPr id="4" name="TextBox 3"/>
           <p:cNvSpPr txBox="1"/>
           <p:nvPr/>
         </p:nvSpPr>
         <p:spPr>
           <a:xfrm>
-            <a:off x="6400800" y="4222242"/>
+            <a:off x="411480" y="1298448"/>
+            <a:ext cx="5806440" cy="274320"/>
+          </a:xfrm>
+          <a:prstGeom prst="rect">
+            <a:avLst/>
+          </a:prstGeom>
+          <a:noFill/>
+        </p:spPr>
+        <p:txBody>
+          <a:bodyPr wrap="square">
+            <a:spAutoFit/>
+          </a:bodyPr>
+          <a:lstStyle/>
+          <a:p>
+            <a:pPr>
+              <a:spcAft>
+                <a:spcPts val="600"/>
+              </a:spcAft>
+            </a:pPr>
+            <a:r>
+              <a:rPr sz="1200" b="0">
+                <a:solidFill>
+                  <a:srgbClr val="282828"/>
+                </a:solidFill>
+                <a:latin typeface="Arial"/>
+              </a:rPr>
+              <a:t>•  The beam is the DM now: the record's beam was the source cone, 77 mm on lenses and 82 on mirrors on a 96 mm mirror, the outer actuator rings unlit; the baffle is opened and the aperture sits on the DM.</a:t>
+            </a:r>
+          </a:p>
+          <a:p>
+            <a:pPr>
+              <a:spcAft>
+                <a:spcPts val="600"/>
+              </a:spcAft>
+            </a:pPr>
+            <a:r>
+              <a:rPr sz="1200" b="0">
+                <a:solidFill>
+                  <a:srgbClr val="282828"/>
+                </a:solidFill>
+                <a:latin typeface="Arial"/>
+              </a:rPr>
+              <a:t>•  The lens rig is collimated for real: the record's source sits 14 mm inside its collimator's focus (41 waves of curvature across the beam); the source moves to the focus and both lens figures are re-solved.</a:t>
+            </a:r>
+          </a:p>
+          <a:p>
+            <a:pPr>
+              <a:spcAft>
+                <a:spcPts val="600"/>
+              </a:spcAft>
+            </a:pPr>
+            <a:r>
+              <a:rPr sz="1200" b="0">
+                <a:solidFill>
+                  <a:srgbClr val="282828"/>
+                </a:solidFill>
+                <a:latin typeface="Arial"/>
+              </a:rPr>
+              <a:t>•  The detector leg keeps its pupil image: the field lens stays at the seed station, its figure and the camera trim tuned on the interferometer's own reading (the recovered surface), not on the flat-mirror null; the camera at the image surface's mean.</a:t>
+            </a:r>
+          </a:p>
+          <a:p>
+            <a:pPr>
+              <a:spcAft>
+                <a:spcPts val="600"/>
+              </a:spcAft>
+            </a:pPr>
+            <a:r>
+              <a:rPr sz="1200" b="0">
+                <a:solidFill>
+                  <a:srgbClr val="282828"/>
+                </a:solidFill>
+                <a:latin typeface="Arial"/>
+              </a:rPr>
+              <a:t>•  Substrates in every deck (previous slides), a larger-pixel camera priced.</a:t>
+            </a:r>
+          </a:p>
+        </p:txBody>
+      </p:sp>
+      <p:sp>
+        <p:nvSpPr>
+          <p:cNvPr id="5" name="TextBox 4"/>
+          <p:cNvSpPr txBox="1"/>
+          <p:nvPr/>
+        </p:nvSpPr>
+        <p:spPr>
+          <a:xfrm>
+            <a:off x="6400800" y="1298448"/>
             <a:ext cx="5394960" cy="274320"/>
           </a:xfrm>
           <a:prstGeom prst="rect">
@@ -24095,13 +23449,100 @@
               </a:spcAft>
             </a:pPr>
             <a:r>
+              <a:rPr sz="1200" b="0">
+                <a:solidFill>
+                  <a:srgbClr val="282828"/>
+                </a:solidFill>
+                <a:latin typeface="Arial"/>
+              </a:rPr>
+              <a:t>•  Redone on both rigs, the Mac carrying the mirror rig: rows on the 30 nm surface, station figures, pupil image, capture ladders and their photon price, photons for 1 pm, servo, descent, window placement, alignment sensitivities, the plates and the polarization at the built angle, the vector pair; each gated against the record.</a:t>
+            </a:r>
+          </a:p>
+          <a:p>
+            <a:pPr>
+              <a:spcAft>
+                <a:spcPts val="600"/>
+              </a:spcAft>
+            </a:pPr>
+            <a:r>
+              <a:rPr sz="1200" b="0">
+                <a:solidFill>
+                  <a:srgbClr val="282828"/>
+                </a:solidFill>
+                <a:latin typeface="Arial"/>
+              </a:rPr>
+              <a:t>•  The engine's own plane-to-plane propagation of the detector leg (the coronagraph model's reference surfaces, every leg propagated) validated leg by leg on the collimated bench, then set beside the zone-PSF model on the pupil slides; once it holds it is the full physical model for the sensors' legs too.</a:t>
+            </a:r>
+          </a:p>
+          <a:p>
+            <a:pPr>
+              <a:spcAft>
+                <a:spcPts val="600"/>
+              </a:spcAft>
+            </a:pPr>
+            <a:r>
+              <a:rPr sz="1200" b="0">
+                <a:solidFill>
+                  <a:srgbClr val="282828"/>
+                </a:solidFill>
+                <a:latin typeface="Arial"/>
+              </a:rPr>
+              <a:t>•  The coronagraph field servo resumes after this (its prescription step corrected twice; the next steps unchanged).</a:t>
+            </a:r>
+          </a:p>
+          <a:p>
+            <a:pPr>
+              <a:spcAft>
+                <a:spcPts val="600"/>
+              </a:spcAft>
+            </a:pPr>
+            <a:r>
+              <a:rPr sz="1200" b="0">
+                <a:solidFill>
+                  <a:srgbClr val="282828"/>
+                </a:solidFill>
+                <a:latin typeface="Arial"/>
+              </a:rPr>
+              <a:t>•  Expected movement: the lens rig's rows and station figure improve; the pupil image grows to 9.8 mm; all 96×96 actuators in the lit set; the mirror rig's rows move only with the beam.</a:t>
+            </a:r>
+          </a:p>
+        </p:txBody>
+      </p:sp>
+      <p:sp>
+        <p:nvSpPr>
+          <p:cNvPr id="6" name="TextBox 5"/>
+          <p:cNvSpPr txBox="1"/>
+          <p:nvPr/>
+        </p:nvSpPr>
+        <p:spPr>
+          <a:xfrm>
+            <a:off x="6400800" y="4867656"/>
+            <a:ext cx="5394960" cy="274320"/>
+          </a:xfrm>
+          <a:prstGeom prst="rect">
+            <a:avLst/>
+          </a:prstGeom>
+          <a:noFill/>
+        </p:spPr>
+        <p:txBody>
+          <a:bodyPr wrap="square">
+            <a:spAutoFit/>
+          </a:bodyPr>
+          <a:lstStyle/>
+          <a:p>
+            <a:pPr>
+              <a:spcAft>
+                <a:spcPts val="600"/>
+              </a:spcAft>
+            </a:pPr>
+            <a:r>
               <a:rPr sz="1050" b="0">
                 <a:solidFill>
                   <a:srgbClr val="6E6E6E"/>
                 </a:solidFill>
                 <a:latin typeface="Arial"/>
               </a:rPr>
-              <a:t>The scoring library (the loop, the unwrapper, the arm and analyzer maps, the clearance check) is shared by the three lanes; nothing is copied between them.  The path is recorded as reference memory so the next configuration follows it in a day.</a:t>
+              <a:t>The interim report of 2026-09-18 carries the current record, labeled; the redo lands in its next revision.  Plan: BRIEF_to_tg_redo.md (packages A0, A, B, C); tools tg96_pupilsim, tg96_pupil_options, tg96_pupil_s2s.</a:t>
             </a:r>
           </a:p>
         </p:txBody>
@@ -24158,7 +23599,7 @@
                 </a:solidFill>
                 <a:latin typeface="Arial"/>
               </a:rPr>
-              <a:t>Run it yourself</a:t>
+              <a:t>How every configuration was analyzed</a:t>
             </a:r>
           </a:p>
           <a:p>
@@ -24174,7 +23615,7 @@
                 </a:solidFill>
                 <a:latin typeface="Arial"/>
               </a:rPr>
-              <a:t>One parameter sheet and one runner per approach, shared code underneath; every number here is reproduced by the commands below</a:t>
+              <a:t>One repeatable path, ten steps, the same for all four approaches: a new sensor is a new reading class in the shared runner plus its gate, then steps 4 to 10 unchanged</a:t>
             </a:r>
           </a:p>
         </p:txBody>
@@ -24223,102 +23664,885 @@
           </a:p>
         </p:txBody>
       </p:sp>
+      <p:graphicFrame>
+        <p:nvGraphicFramePr>
+          <p:cNvPr id="4" name="Table 3"/>
+          <p:cNvGraphicFramePr>
+            <a:graphicFrameLocks noGrp="1"/>
+          </p:cNvGraphicFramePr>
+          <p:nvPr/>
+        </p:nvGraphicFramePr>
+        <p:xfrm>
+          <a:off x="411480" y="1298448"/>
+          <a:ext cx="5806439" cy="3188970"/>
+        </p:xfrm>
+        <a:graphic>
+          <a:graphicData uri="http://schemas.openxmlformats.org/drawingml/2006/table">
+            <a:tbl>
+              <a:tblPr firstRow="1" bandRow="1">
+                <a:tableStyleId>{5C22544A-7EE6-4342-B048-85BDC9FD1C3A}</a:tableStyleId>
+              </a:tblPr>
+              <a:tblGrid>
+                <a:gridCol w="436880"/>
+                <a:gridCol w="2963389"/>
+                <a:gridCol w="2406170"/>
+              </a:tblGrid>
+              <a:tr h="280035">
+                <a:tc>
+                  <a:txBody>
+                    <a:bodyPr wrap="square"/>
+                    <a:lstStyle/>
+                    <a:p>
+                      <a:r>
+                        <a:rPr sz="1100" b="1">
+                          <a:solidFill>
+                            <a:srgbClr val="FFFFFF"/>
+                          </a:solidFill>
+                          <a:latin typeface="Arial"/>
+                        </a:rPr>
+                        <a:t>step</a:t>
+                      </a:r>
+                    </a:p>
+                  </a:txBody>
+                  <a:tcPr marL="54864" marR="54864" marT="18288" marB="18288">
+                    <a:solidFill>
+                      <a:srgbClr val="1F4E79"/>
+                    </a:solidFill>
+                  </a:tcPr>
+                </a:tc>
+                <a:tc>
+                  <a:txBody>
+                    <a:bodyPr wrap="square"/>
+                    <a:lstStyle/>
+                    <a:p>
+                      <a:r>
+                        <a:rPr sz="1100" b="1">
+                          <a:solidFill>
+                            <a:srgbClr val="FFFFFF"/>
+                          </a:solidFill>
+                          <a:latin typeface="Arial"/>
+                        </a:rPr>
+                        <a:t>what</a:t>
+                      </a:r>
+                    </a:p>
+                  </a:txBody>
+                  <a:tcPr marL="54864" marR="54864" marT="18288" marB="18288">
+                    <a:solidFill>
+                      <a:srgbClr val="1F4E79"/>
+                    </a:solidFill>
+                  </a:tcPr>
+                </a:tc>
+                <a:tc>
+                  <a:txBody>
+                    <a:bodyPr wrap="square"/>
+                    <a:lstStyle/>
+                    <a:p>
+                      <a:r>
+                        <a:rPr sz="1100" b="1">
+                          <a:solidFill>
+                            <a:srgbClr val="FFFFFF"/>
+                          </a:solidFill>
+                          <a:latin typeface="Arial"/>
+                        </a:rPr>
+                        <a:t>gate or output</a:t>
+                      </a:r>
+                    </a:p>
+                  </a:txBody>
+                  <a:tcPr marL="54864" marR="54864" marT="18288" marB="18288">
+                    <a:solidFill>
+                      <a:srgbClr val="1F4E79"/>
+                    </a:solidFill>
+                  </a:tcPr>
+                </a:tc>
+              </a:tr>
+              <a:tr h="468630">
+                <a:tc>
+                  <a:txBody>
+                    <a:bodyPr wrap="square"/>
+                    <a:lstStyle/>
+                    <a:p>
+                      <a:r>
+                        <a:rPr sz="1100" b="0">
+                          <a:solidFill>
+                            <a:srgbClr val="282828"/>
+                          </a:solidFill>
+                          <a:latin typeface="Arial"/>
+                        </a:rPr>
+                        <a:t>1</a:t>
+                      </a:r>
+                    </a:p>
+                  </a:txBody>
+                  <a:tcPr marL="54864" marR="54864" marT="18288" marB="18288">
+                    <a:solidFill>
+                      <a:srgbClr val="FFFFFF"/>
+                    </a:solidFill>
+                  </a:tcPr>
+                </a:tc>
+                <a:tc>
+                  <a:txBody>
+                    <a:bodyPr wrap="square"/>
+                    <a:lstStyle/>
+                    <a:p>
+                      <a:r>
+                        <a:rPr sz="1100" b="0">
+                          <a:solidFill>
+                            <a:srgbClr val="282828"/>
+                          </a:solidFill>
+                          <a:latin typeface="Arial"/>
+                        </a:rPr>
+                        <a:t>one parameter sheet and one runner per approach; batch wrappers</a:t>
+                      </a:r>
+                    </a:p>
+                  </a:txBody>
+                  <a:tcPr marL="54864" marR="54864" marT="18288" marB="18288">
+                    <a:solidFill>
+                      <a:srgbClr val="FFFFFF"/>
+                    </a:solidFill>
+                  </a:tcPr>
+                </a:tc>
+                <a:tc>
+                  <a:txBody>
+                    <a:bodyPr wrap="square"/>
+                    <a:lstStyle/>
+                    <a:p>
+                      <a:r>
+                        <a:rPr sz="1100" b="0">
+                          <a:solidFill>
+                            <a:srgbClr val="282828"/>
+                          </a:solidFill>
+                          <a:latin typeface="Arial"/>
+                        </a:rPr>
+                        <a:t>every number has a run tag</a:t>
+                      </a:r>
+                    </a:p>
+                  </a:txBody>
+                  <a:tcPr marL="54864" marR="54864" marT="18288" marB="18288">
+                    <a:solidFill>
+                      <a:srgbClr val="FFFFFF"/>
+                    </a:solidFill>
+                  </a:tcPr>
+                </a:tc>
+              </a:tr>
+              <a:tr h="657225">
+                <a:tc>
+                  <a:txBody>
+                    <a:bodyPr wrap="square"/>
+                    <a:lstStyle/>
+                    <a:p>
+                      <a:r>
+                        <a:rPr sz="1100" b="0">
+                          <a:solidFill>
+                            <a:srgbClr val="282828"/>
+                          </a:solidFill>
+                          <a:latin typeface="Arial"/>
+                        </a:rPr>
+                        <a:t>2</a:t>
+                      </a:r>
+                    </a:p>
+                  </a:txBody>
+                  <a:tcPr marL="54864" marR="54864" marT="18288" marB="18288">
+                    <a:solidFill>
+                      <a:srgbClr val="ECF1F6"/>
+                    </a:solidFill>
+                  </a:tcPr>
+                </a:tc>
+                <a:tc>
+                  <a:txBody>
+                    <a:bodyPr wrap="square"/>
+                    <a:lstStyle/>
+                    <a:p>
+                      <a:r>
+                        <a:rPr sz="1100" b="0">
+                          <a:solidFill>
+                            <a:srgbClr val="282828"/>
+                          </a:solidFill>
+                          <a:latin typeface="Arial"/>
+                        </a:rPr>
+                        <a:t>build the bench from the sheet, trace it; clearance of end bodies and node parts; detector-leg focus; sampling budget</a:t>
+                      </a:r>
+                    </a:p>
+                  </a:txBody>
+                  <a:tcPr marL="54864" marR="54864" marT="18288" marB="18288">
+                    <a:solidFill>
+                      <a:srgbClr val="ECF1F6"/>
+                    </a:solidFill>
+                  </a:tcPr>
+                </a:tc>
+                <a:tc>
+                  <a:txBody>
+                    <a:bodyPr wrap="square"/>
+                    <a:lstStyle/>
+                    <a:p>
+                      <a:r>
+                        <a:rPr sz="1100" b="0">
+                          <a:solidFill>
+                            <a:srgbClr val="282828"/>
+                          </a:solidFill>
+                          <a:latin typeface="Arial"/>
+                        </a:rPr>
+                        <a:t>every part clears by 25 mm; 6 pixels across the mask feature</a:t>
+                      </a:r>
+                    </a:p>
+                  </a:txBody>
+                  <a:tcPr marL="54864" marR="54864" marT="18288" marB="18288">
+                    <a:solidFill>
+                      <a:srgbClr val="ECF1F6"/>
+                    </a:solidFill>
+                  </a:tcPr>
+                </a:tc>
+              </a:tr>
+              <a:tr h="657225">
+                <a:tc>
+                  <a:txBody>
+                    <a:bodyPr wrap="square"/>
+                    <a:lstStyle/>
+                    <a:p>
+                      <a:r>
+                        <a:rPr sz="1100" b="0">
+                          <a:solidFill>
+                            <a:srgbClr val="282828"/>
+                          </a:solidFill>
+                          <a:latin typeface="Arial"/>
+                        </a:rPr>
+                        <a:t>3</a:t>
+                      </a:r>
+                    </a:p>
+                  </a:txBody>
+                  <a:tcPr marL="54864" marR="54864" marT="18288" marB="18288">
+                    <a:solidFill>
+                      <a:srgbClr val="FFFFFF"/>
+                    </a:solidFill>
+                  </a:tcPr>
+                </a:tc>
+                <a:tc>
+                  <a:txBody>
+                    <a:bodyPr wrap="square"/>
+                    <a:lstStyle/>
+                    <a:p>
+                      <a:r>
+                        <a:rPr sz="1100" b="0">
+                          <a:solidFill>
+                            <a:srgbClr val="282828"/>
+                          </a:solidFill>
+                          <a:latin typeface="Arial"/>
+                        </a:rPr>
+                        <a:t>model gates before any number</a:t>
+                      </a:r>
+                    </a:p>
+                  </a:txBody>
+                  <a:tcPr marL="54864" marR="54864" marT="18288" marB="18288">
+                    <a:solidFill>
+                      <a:srgbClr val="FFFFFF"/>
+                    </a:solidFill>
+                  </a:tcPr>
+                </a:tc>
+                <a:tc>
+                  <a:txBody>
+                    <a:bodyPr wrap="square"/>
+                    <a:lstStyle/>
+                    <a:p>
+                      <a:r>
+                        <a:rPr sz="1100" b="0">
+                          <a:solidFill>
+                            <a:srgbClr val="282828"/>
+                          </a:solidFill>
+                          <a:latin typeface="Arial"/>
+                        </a:rPr>
+                        <a:t>mask round trip, reference-wave surrogate, working-state amplitude, the reading on 100 nm pokes</a:t>
+                      </a:r>
+                    </a:p>
+                  </a:txBody>
+                  <a:tcPr marL="54864" marR="54864" marT="18288" marB="18288">
+                    <a:solidFill>
+                      <a:srgbClr val="FFFFFF"/>
+                    </a:solidFill>
+                  </a:tcPr>
+                </a:tc>
+              </a:tr>
+              <a:tr h="657225">
+                <a:tc>
+                  <a:txBody>
+                    <a:bodyPr wrap="square"/>
+                    <a:lstStyle/>
+                    <a:p>
+                      <a:r>
+                        <a:rPr sz="1100" b="0">
+                          <a:solidFill>
+                            <a:srgbClr val="282828"/>
+                          </a:solidFill>
+                          <a:latin typeface="Arial"/>
+                        </a:rPr>
+                        <a:t>4</a:t>
+                      </a:r>
+                    </a:p>
+                  </a:txBody>
+                  <a:tcPr marL="54864" marR="54864" marT="18288" marB="18288">
+                    <a:solidFill>
+                      <a:srgbClr val="ECF1F6"/>
+                    </a:solidFill>
+                  </a:tcPr>
+                </a:tc>
+                <a:tc>
+                  <a:txBody>
+                    <a:bodyPr wrap="square"/>
+                    <a:lstStyle/>
+                    <a:p>
+                      <a:r>
+                        <a:rPr sz="1100" b="0">
+                          <a:solidFill>
+                            <a:srgbClr val="282828"/>
+                          </a:solidFill>
+                          <a:latin typeface="Arial"/>
+                        </a:rPr>
+                        <a:t>calibration: the response matrix measured through the sensor, on the 30 nm working surface</a:t>
+                      </a:r>
+                    </a:p>
+                  </a:txBody>
+                  <a:tcPr marL="54864" marR="54864" marT="18288" marB="18288">
+                    <a:solidFill>
+                      <a:srgbClr val="ECF1F6"/>
+                    </a:solidFill>
+                  </a:tcPr>
+                </a:tc>
+                <a:tc>
+                  <a:txBody>
+                    <a:bodyPr wrap="square"/>
+                    <a:lstStyle/>
+                    <a:p>
+                      <a:r>
+                        <a:rPr sz="1100" b="0">
+                          <a:solidFill>
+                            <a:srgbClr val="282828"/>
+                          </a:solidFill>
+                          <a:latin typeface="Arial"/>
+                        </a:rPr>
+                        <a:t>piston null carried; stencil-site fit</a:t>
+                      </a:r>
+                    </a:p>
+                  </a:txBody>
+                  <a:tcPr marL="54864" marR="54864" marT="18288" marB="18288">
+                    <a:solidFill>
+                      <a:srgbClr val="ECF1F6"/>
+                    </a:solidFill>
+                  </a:tcPr>
+                </a:tc>
+              </a:tr>
+              <a:tr h="468630">
+                <a:tc>
+                  <a:txBody>
+                    <a:bodyPr wrap="square"/>
+                    <a:lstStyle/>
+                    <a:p>
+                      <a:r>
+                        <a:rPr sz="1100" b="0">
+                          <a:solidFill>
+                            <a:srgbClr val="282828"/>
+                          </a:solidFill>
+                          <a:latin typeface="Arial"/>
+                        </a:rPr>
+                        <a:t>5</a:t>
+                      </a:r>
+                    </a:p>
+                  </a:txBody>
+                  <a:tcPr marL="54864" marR="54864" marT="18288" marB="18288">
+                    <a:solidFill>
+                      <a:srgbClr val="FFFFFF"/>
+                    </a:solidFill>
+                  </a:tcPr>
+                </a:tc>
+                <a:tc>
+                  <a:txBody>
+                    <a:bodyPr wrap="square"/>
+                    <a:lstStyle/>
+                    <a:p>
+                      <a:r>
+                        <a:rPr sz="1100" b="0">
+                          <a:solidFill>
+                            <a:srgbClr val="282828"/>
+                          </a:solidFill>
+                          <a:latin typeface="Arial"/>
+                        </a:rPr>
+                        <a:t>rows on the working surface: 10 nm on one actuator; 1 nm on 47 sites; dense 10 nm</a:t>
+                      </a:r>
+                    </a:p>
+                  </a:txBody>
+                  <a:tcPr marL="54864" marR="54864" marT="18288" marB="18288">
+                    <a:solidFill>
+                      <a:srgbClr val="FFFFFF"/>
+                    </a:solidFill>
+                  </a:tcPr>
+                </a:tc>
+                <a:tc>
+                  <a:txBody>
+                    <a:bodyPr wrap="square"/>
+                    <a:lstStyle/>
+                    <a:p>
+                      <a:r>
+                        <a:rPr sz="1100" b="0">
+                          <a:solidFill>
+                            <a:srgbClr val="282828"/>
+                          </a:solidFill>
+                          <a:latin typeface="Arial"/>
+                        </a:rPr>
+                        <a:t>gain, floor, SNR</a:t>
+                      </a:r>
+                    </a:p>
+                  </a:txBody>
+                  <a:tcPr marL="54864" marR="54864" marT="18288" marB="18288">
+                    <a:solidFill>
+                      <a:srgbClr val="FFFFFF"/>
+                    </a:solidFill>
+                  </a:tcPr>
+                </a:tc>
+              </a:tr>
+            </a:tbl>
+          </a:graphicData>
+        </a:graphic>
+      </p:graphicFrame>
+      <p:graphicFrame>
+        <p:nvGraphicFramePr>
+          <p:cNvPr id="5" name="Table 4"/>
+          <p:cNvGraphicFramePr>
+            <a:graphicFrameLocks noGrp="1"/>
+          </p:cNvGraphicFramePr>
+          <p:nvPr/>
+        </p:nvGraphicFramePr>
+        <p:xfrm>
+          <a:off x="6400800" y="1298448"/>
+          <a:ext cx="5394959" cy="2777490"/>
+        </p:xfrm>
+        <a:graphic>
+          <a:graphicData uri="http://schemas.openxmlformats.org/drawingml/2006/table">
+            <a:tbl>
+              <a:tblPr firstRow="1" bandRow="1">
+                <a:tableStyleId>{5C22544A-7EE6-4342-B048-85BDC9FD1C3A}</a:tableStyleId>
+              </a:tblPr>
+              <a:tblGrid>
+                <a:gridCol w="410464"/>
+                <a:gridCol w="3846730"/>
+                <a:gridCol w="1137765"/>
+              </a:tblGrid>
+              <a:tr h="262890">
+                <a:tc>
+                  <a:txBody>
+                    <a:bodyPr wrap="square"/>
+                    <a:lstStyle/>
+                    <a:p>
+                      <a:r>
+                        <a:rPr sz="1000" b="1">
+                          <a:solidFill>
+                            <a:srgbClr val="FFFFFF"/>
+                          </a:solidFill>
+                          <a:latin typeface="Arial"/>
+                        </a:rPr>
+                        <a:t>step</a:t>
+                      </a:r>
+                    </a:p>
+                  </a:txBody>
+                  <a:tcPr marL="54864" marR="54864" marT="18288" marB="18288">
+                    <a:solidFill>
+                      <a:srgbClr val="1F4E79"/>
+                    </a:solidFill>
+                  </a:tcPr>
+                </a:tc>
+                <a:tc>
+                  <a:txBody>
+                    <a:bodyPr wrap="square"/>
+                    <a:lstStyle/>
+                    <a:p>
+                      <a:r>
+                        <a:rPr sz="1000" b="1">
+                          <a:solidFill>
+                            <a:srgbClr val="FFFFFF"/>
+                          </a:solidFill>
+                          <a:latin typeface="Arial"/>
+                        </a:rPr>
+                        <a:t>what</a:t>
+                      </a:r>
+                    </a:p>
+                  </a:txBody>
+                  <a:tcPr marL="54864" marR="54864" marT="18288" marB="18288">
+                    <a:solidFill>
+                      <a:srgbClr val="1F4E79"/>
+                    </a:solidFill>
+                  </a:tcPr>
+                </a:tc>
+                <a:tc>
+                  <a:txBody>
+                    <a:bodyPr wrap="square"/>
+                    <a:lstStyle/>
+                    <a:p>
+                      <a:r>
+                        <a:rPr sz="1000" b="1">
+                          <a:solidFill>
+                            <a:srgbClr val="FFFFFF"/>
+                          </a:solidFill>
+                          <a:latin typeface="Arial"/>
+                        </a:rPr>
+                        <a:t>gate or output</a:t>
+                      </a:r>
+                    </a:p>
+                  </a:txBody>
+                  <a:tcPr marL="54864" marR="54864" marT="18288" marB="18288">
+                    <a:solidFill>
+                      <a:srgbClr val="1F4E79"/>
+                    </a:solidFill>
+                  </a:tcPr>
+                </a:tc>
+              </a:tr>
+              <a:tr h="434340">
+                <a:tc>
+                  <a:txBody>
+                    <a:bodyPr wrap="square"/>
+                    <a:lstStyle/>
+                    <a:p>
+                      <a:r>
+                        <a:rPr sz="1000" b="0">
+                          <a:solidFill>
+                            <a:srgbClr val="282828"/>
+                          </a:solidFill>
+                          <a:latin typeface="Arial"/>
+                        </a:rPr>
+                        <a:t>6</a:t>
+                      </a:r>
+                    </a:p>
+                  </a:txBody>
+                  <a:tcPr marL="54864" marR="54864" marT="18288" marB="18288">
+                    <a:solidFill>
+                      <a:srgbClr val="FFFFFF"/>
+                    </a:solidFill>
+                  </a:tcPr>
+                </a:tc>
+                <a:tc>
+                  <a:txBody>
+                    <a:bodyPr wrap="square"/>
+                    <a:lstStyle/>
+                    <a:p>
+                      <a:r>
+                        <a:rPr sz="1000" b="0">
+                          <a:solidFill>
+                            <a:srgbClr val="282828"/>
+                          </a:solidFill>
+                          <a:latin typeface="Arial"/>
+                        </a:rPr>
+                        <a:t>capture range: the aging ladder to 10%; the matrix re-measured at 60 to 160 nm with its photon cost</a:t>
+                      </a:r>
+                    </a:p>
+                  </a:txBody>
+                  <a:tcPr marL="54864" marR="54864" marT="18288" marB="18288">
+                    <a:solidFill>
+                      <a:srgbClr val="FFFFFF"/>
+                    </a:solidFill>
+                  </a:tcPr>
+                </a:tc>
+                <a:tc>
+                  <a:txBody>
+                    <a:bodyPr wrap="square"/>
+                    <a:lstStyle/>
+                    <a:p>
+                      <a:r>
+                        <a:rPr sz="1000" b="0">
+                          <a:solidFill>
+                            <a:srgbClr val="282828"/>
+                          </a:solidFill>
+                          <a:latin typeface="Arial"/>
+                        </a:rPr>
+                        <a:t>range in nm; photons per rung</a:t>
+                      </a:r>
+                    </a:p>
+                  </a:txBody>
+                  <a:tcPr marL="54864" marR="54864" marT="18288" marB="18288">
+                    <a:solidFill>
+                      <a:srgbClr val="FFFFFF"/>
+                    </a:solidFill>
+                  </a:tcPr>
+                </a:tc>
+              </a:tr>
+              <a:tr h="434340">
+                <a:tc>
+                  <a:txBody>
+                    <a:bodyPr wrap="square"/>
+                    <a:lstStyle/>
+                    <a:p>
+                      <a:r>
+                        <a:rPr sz="1000" b="0">
+                          <a:solidFill>
+                            <a:srgbClr val="282828"/>
+                          </a:solidFill>
+                          <a:latin typeface="Arial"/>
+                        </a:rPr>
+                        <a:t>7</a:t>
+                      </a:r>
+                    </a:p>
+                  </a:txBody>
+                  <a:tcPr marL="54864" marR="54864" marT="18288" marB="18288">
+                    <a:solidFill>
+                      <a:srgbClr val="ECF1F6"/>
+                    </a:solidFill>
+                  </a:tcPr>
+                </a:tc>
+                <a:tc>
+                  <a:txBody>
+                    <a:bodyPr wrap="square"/>
+                    <a:lstStyle/>
+                    <a:p>
+                      <a:r>
+                        <a:rPr sz="1000" b="0">
+                          <a:solidFill>
+                            <a:srgbClr val="282828"/>
+                          </a:solidFill>
+                          <a:latin typeface="Arial"/>
+                        </a:rPr>
+                        <a:t>photons: noise fit over 1e8 to 1e14 per measurement, flat and on-surface matrix</a:t>
+                      </a:r>
+                    </a:p>
+                  </a:txBody>
+                  <a:tcPr marL="54864" marR="54864" marT="18288" marB="18288">
+                    <a:solidFill>
+                      <a:srgbClr val="ECF1F6"/>
+                    </a:solidFill>
+                  </a:tcPr>
+                </a:tc>
+                <a:tc>
+                  <a:txBody>
+                    <a:bodyPr wrap="square"/>
+                    <a:lstStyle/>
+                    <a:p>
+                      <a:r>
+                        <a:rPr sz="1000" b="0">
+                          <a:solidFill>
+                            <a:srgbClr val="282828"/>
+                          </a:solidFill>
+                          <a:latin typeface="Arial"/>
+                        </a:rPr>
+                        <a:t>photons for 1 pm</a:t>
+                      </a:r>
+                    </a:p>
+                  </a:txBody>
+                  <a:tcPr marL="54864" marR="54864" marT="18288" marB="18288">
+                    <a:solidFill>
+                      <a:srgbClr val="ECF1F6"/>
+                    </a:solidFill>
+                  </a:tcPr>
+                </a:tc>
+              </a:tr>
+              <a:tr h="605790">
+                <a:tc>
+                  <a:txBody>
+                    <a:bodyPr wrap="square"/>
+                    <a:lstStyle/>
+                    <a:p>
+                      <a:r>
+                        <a:rPr sz="1000" b="0">
+                          <a:solidFill>
+                            <a:srgbClr val="282828"/>
+                          </a:solidFill>
+                          <a:latin typeface="Arial"/>
+                        </a:rPr>
+                        <a:t>8</a:t>
+                      </a:r>
+                    </a:p>
+                  </a:txBody>
+                  <a:tcPr marL="54864" marR="54864" marT="18288" marB="18288">
+                    <a:solidFill>
+                      <a:srgbClr val="FFFFFF"/>
+                    </a:solidFill>
+                  </a:tcPr>
+                </a:tc>
+                <a:tc>
+                  <a:txBody>
+                    <a:bodyPr wrap="square"/>
+                    <a:lstStyle/>
+                    <a:p>
+                      <a:r>
+                        <a:rPr sz="1000" b="0">
+                          <a:solidFill>
+                            <a:srgbClr val="282828"/>
+                          </a:solidFill>
+                          <a:latin typeface="Arial"/>
+                        </a:rPr>
+                        <a:t>closed loop in the shared loop code: noise, walk, ramp; noiseless step; within-scan drift</a:t>
+                      </a:r>
+                    </a:p>
+                  </a:txBody>
+                  <a:tcPr marL="54864" marR="54864" marT="18288" marB="18288">
+                    <a:solidFill>
+                      <a:srgbClr val="FFFFFF"/>
+                    </a:solidFill>
+                  </a:tcPr>
+                </a:tc>
+                <a:tc>
+                  <a:txBody>
+                    <a:bodyPr wrap="square"/>
+                    <a:lstStyle/>
+                    <a:p>
+                      <a:r>
+                        <a:rPr sz="1000" b="0">
+                          <a:solidFill>
+                            <a:srgbClr val="282828"/>
+                          </a:solidFill>
+                          <a:latin typeface="Arial"/>
+                        </a:rPr>
+                        <a:t>photons per cycle for 3 pm; fixed error</a:t>
+                      </a:r>
+                    </a:p>
+                  </a:txBody>
+                  <a:tcPr marL="54864" marR="54864" marT="18288" marB="18288">
+                    <a:solidFill>
+                      <a:srgbClr val="FFFFFF"/>
+                    </a:solidFill>
+                  </a:tcPr>
+                </a:tc>
+              </a:tr>
+              <a:tr h="434340">
+                <a:tc>
+                  <a:txBody>
+                    <a:bodyPr wrap="square"/>
+                    <a:lstStyle/>
+                    <a:p>
+                      <a:r>
+                        <a:rPr sz="1000" b="0">
+                          <a:solidFill>
+                            <a:srgbClr val="282828"/>
+                          </a:solidFill>
+                          <a:latin typeface="Arial"/>
+                        </a:rPr>
+                        <a:t>9</a:t>
+                      </a:r>
+                    </a:p>
+                  </a:txBody>
+                  <a:tcPr marL="54864" marR="54864" marT="18288" marB="18288">
+                    <a:solidFill>
+                      <a:srgbClr val="ECF1F6"/>
+                    </a:solidFill>
+                  </a:tcPr>
+                </a:tc>
+                <a:tc>
+                  <a:txBody>
+                    <a:bodyPr wrap="square"/>
+                    <a:lstStyle/>
+                    <a:p>
+                      <a:r>
+                        <a:rPr sz="1000" b="0">
+                          <a:solidFill>
+                            <a:srgbClr val="282828"/>
+                          </a:solidFill>
+                          <a:latin typeface="Arial"/>
+                        </a:rPr>
+                        <a:t>descent: the start ladder with unwrapping and recalibration on and off</a:t>
+                      </a:r>
+                    </a:p>
+                  </a:txBody>
+                  <a:tcPr marL="54864" marR="54864" marT="18288" marB="18288">
+                    <a:solidFill>
+                      <a:srgbClr val="ECF1F6"/>
+                    </a:solidFill>
+                  </a:tcPr>
+                </a:tc>
+                <a:tc>
+                  <a:txBody>
+                    <a:bodyPr wrap="square"/>
+                    <a:lstStyle/>
+                    <a:p>
+                      <a:r>
+                        <a:rPr sz="1000" b="0">
+                          <a:solidFill>
+                            <a:srgbClr val="282828"/>
+                          </a:solidFill>
+                          <a:latin typeface="Arial"/>
+                        </a:rPr>
+                        <a:t>largest start brought to 3 pm</a:t>
+                      </a:r>
+                    </a:p>
+                  </a:txBody>
+                  <a:tcPr marL="54864" marR="54864" marT="18288" marB="18288">
+                    <a:solidFill>
+                      <a:srgbClr val="ECF1F6"/>
+                    </a:solidFill>
+                  </a:tcPr>
+                </a:tc>
+              </a:tr>
+              <a:tr h="605790">
+                <a:tc>
+                  <a:txBody>
+                    <a:bodyPr wrap="square"/>
+                    <a:lstStyle/>
+                    <a:p>
+                      <a:r>
+                        <a:rPr sz="1000" b="0">
+                          <a:solidFill>
+                            <a:srgbClr val="282828"/>
+                          </a:solidFill>
+                          <a:latin typeface="Arial"/>
+                        </a:rPr>
+                        <a:t>10</a:t>
+                      </a:r>
+                    </a:p>
+                  </a:txBody>
+                  <a:tcPr marL="54864" marR="54864" marT="18288" marB="18288">
+                    <a:solidFill>
+                      <a:srgbClr val="FFFFFF"/>
+                    </a:solidFill>
+                  </a:tcPr>
+                </a:tc>
+                <a:tc>
+                  <a:txBody>
+                    <a:bodyPr wrap="square"/>
+                    <a:lstStyle/>
+                    <a:p>
+                      <a:r>
+                        <a:rPr sz="1000" b="0">
+                          <a:solidFill>
+                            <a:srgbClr val="282828"/>
+                          </a:solidFill>
+                          <a:latin typeface="Arial"/>
+                        </a:rPr>
+                        <a:t>systematics one at a time, uncalibrated and through the matrix; layout drawn from the emitted deck; parts from the sheet; report numbers first</a:t>
+                      </a:r>
+                    </a:p>
+                  </a:txBody>
+                  <a:tcPr marL="54864" marR="54864" marT="18288" marB="18288">
+                    <a:solidFill>
+                      <a:srgbClr val="FFFFFF"/>
+                    </a:solidFill>
+                  </a:tcPr>
+                </a:tc>
+                <a:tc>
+                  <a:txBody>
+                    <a:bodyPr wrap="square"/>
+                    <a:lstStyle/>
+                    <a:p>
+                      <a:r>
+                        <a:rPr sz="1000" b="0">
+                          <a:solidFill>
+                            <a:srgbClr val="282828"/>
+                          </a:solidFill>
+                          <a:latin typeface="Arial"/>
+                        </a:rPr>
+                        <a:t>one line per term on the systematics slide</a:t>
+                      </a:r>
+                    </a:p>
+                  </a:txBody>
+                  <a:tcPr marL="54864" marR="54864" marT="18288" marB="18288">
+                    <a:solidFill>
+                      <a:srgbClr val="FFFFFF"/>
+                    </a:solidFill>
+                  </a:tcPr>
+                </a:tc>
+              </a:tr>
+            </a:tbl>
+          </a:graphicData>
+        </a:graphic>
+      </p:graphicFrame>
       <p:sp>
         <p:nvSpPr>
-          <p:cNvPr id="4" name="TextBox 3"/>
+          <p:cNvPr id="6" name="TextBox 5"/>
           <p:cNvSpPr txBox="1"/>
           <p:nvPr/>
         </p:nvSpPr>
         <p:spPr>
           <a:xfrm>
-            <a:off x="411480" y="1298448"/>
-            <a:ext cx="5806440" cy="274320"/>
-          </a:xfrm>
-          <a:prstGeom prst="rect">
-            <a:avLst/>
-          </a:prstGeom>
-          <a:noFill/>
-        </p:spPr>
-        <p:txBody>
-          <a:bodyPr wrap="square">
-            <a:spAutoFit/>
-          </a:bodyPr>
-          <a:lstStyle/>
-          <a:p>
-            <a:pPr>
-              <a:spcAft>
-                <a:spcPts val="600"/>
-              </a:spcAft>
-            </a:pPr>
-            <a:r>
-              <a:rPr sz="1200" b="0">
-                <a:solidFill>
-                  <a:srgbClr val="282828"/>
-                </a:solidFill>
-                <a:latin typeface="Arial"/>
-              </a:rPr>
-              <a:t>•  Interferometer (tg_psi_dm96_oap): tg96_run for the lens rig; tg96_run('bench.optics','oap','tag','oap') for the mirror rig; ./tg96_batch.sh lens_deck "'stages',{'bench','deck'},'battery.noise',true"; ./tg96_batch.sh loop_lens "'stages',{'bench','loop','figs'}".</a:t>
-            </a:r>
-          </a:p>
-          <a:p>
-            <a:pPr>
-              <a:spcAft>
-                <a:spcPts val="600"/>
-              </a:spcAft>
-            </a:pPr>
-            <a:r>
-              <a:rPr sz="1200" b="0">
-                <a:solidFill>
-                  <a:srgbClr val="282828"/>
-                </a:solidFill>
-                <a:latin typeface="Arial"/>
-              </a:rPr>
-              <a:t>•  Pupil image (tg_psi_dm96_oap): tg96_pupilq('rig','lens'), tg96_pupilsim('rig','oap'); both tools, both rigs: ./tg96_pupil_batch.sh both (knobs: P.pupil in tg96_params).</a:t>
-            </a:r>
-          </a:p>
-          <a:p>
-            <a:pPr>
-              <a:spcAft>
-                <a:spcPts val="600"/>
-              </a:spcAft>
-            </a:pPr>
-            <a:r>
-              <a:rPr sz="1200" b="0">
-                <a:solidFill>
-                  <a:srgbClr val="282828"/>
-                </a:solidFill>
-                <a:latin typeface="Arial"/>
-              </a:rPr>
-              <a:t>•  Zernike sensors (zwfs_dm96): out = zwfs_run; (bench + battery + figures); zwfs_run('tag','ng385','NGRID',385); zwfs_run('MODEL',2048,'NGRID',385,'param_file','macos_param_2048.txt'); ./zwfs_batch.sh loop193 "'stages',{'bench','loop','figs'}".</a:t>
-            </a:r>
-          </a:p>
-          <a:p>
-            <a:pPr>
-              <a:spcAft>
-                <a:spcPts val="600"/>
-              </a:spcAft>
-            </a:pPr>
-            <a:r>
-              <a:rPr sz="1200" b="0">
-                <a:solidFill>
-                  <a:srgbClr val="282828"/>
-                </a:solidFill>
-                <a:latin typeface="Arial"/>
-              </a:rPr>
-              <a:t>•  Point-diffraction (pdi_dm96): P = pdi_params; out = pdi_run(P);; pdi_run('pdi.DIA_LAMD',1.0,'stages',{'bench','battery','figs'}); ./pdi_batch.sh TAG "pdi_params, 'stages',{'bench','loop','figs'}".</a:t>
-            </a:r>
-          </a:p>
-        </p:txBody>
-      </p:sp>
-      <p:sp>
-        <p:nvSpPr>
-          <p:cNvPr id="5" name="TextBox 4"/>
-          <p:cNvSpPr txBox="1"/>
-          <p:nvPr/>
-        </p:nvSpPr>
-        <p:spPr>
-          <a:xfrm>
-            <a:off x="6400800" y="1298448"/>
+            <a:off x="6400800" y="4222242"/>
             <a:ext cx="5394960" cy="274320"/>
           </a:xfrm>
           <a:prstGeom prst="rect">
@@ -24338,84 +24562,13 @@
               </a:spcAft>
             </a:pPr>
             <a:r>
-              <a:rPr sz="1200" b="0">
-                <a:solidFill>
-                  <a:srgbClr val="282828"/>
-                </a:solidFill>
-                <a:latin typeface="Arial"/>
-              </a:rPr>
-              <a:t>•  The other gauges on the mirror rig: zwfs_run('bench.optics','oap','bench.coat_oap','bareAl','readings',{'L','S','V','P','PF'},'stages',{'bench','battery','noise','loop'},'mask.v_arm','engine').</a:t>
-            </a:r>
-          </a:p>
-          <a:p>
-            <a:pPr>
-              <a:spcAft>
-                <a:spcPts val="600"/>
-              </a:spcAft>
-            </a:pPr>
-            <a:r>
-              <a:rPr sz="1200" b="0">
-                <a:solidFill>
-                  <a:srgbClr val="282828"/>
-                </a:solidFill>
-                <a:latin typeface="Arial"/>
-              </a:rPr>
-              <a:t>•  Where: MACOS_resources/mmacos/templates/40_benches/{tg_psi_dm96_oap, zwfs_dm96, pdi_dm96}, the shared scoring library dm_gauge_lib, branch dev-candidate.  A model-1024 run needs about 11 GB; the batch wrappers run one at a time.</a:t>
-            </a:r>
-          </a:p>
-          <a:p>
-            <a:pPr>
-              <a:spcAft>
-                <a:spcPts val="600"/>
-              </a:spcAft>
-            </a:pPr>
-            <a:r>
-              <a:rPr sz="1200" b="0">
-                <a:solidFill>
-                  <a:srgbClr val="282828"/>
-                </a:solidFill>
-                <a:latin typeface="Arial"/>
-              </a:rPr>
-              <a:t>•  Gates: every stage asserts its own gates (the mask round trip, the reference-wave surrogate, the fold, the pinhole, the analyzer); tDmgLoop 15/15; the mmacos fast suite 481/0.</a:t>
-            </a:r>
-          </a:p>
-        </p:txBody>
-      </p:sp>
-      <p:sp>
-        <p:nvSpPr>
-          <p:cNvPr id="6" name="TextBox 5"/>
-          <p:cNvSpPr txBox="1"/>
-          <p:nvPr/>
-        </p:nvSpPr>
-        <p:spPr>
-          <a:xfrm>
-            <a:off x="6400800" y="3736848"/>
-            <a:ext cx="5394960" cy="274320"/>
-          </a:xfrm>
-          <a:prstGeom prst="rect">
-            <a:avLst/>
-          </a:prstGeom>
-          <a:noFill/>
-        </p:spPr>
-        <p:txBody>
-          <a:bodyPr wrap="square">
-            <a:spAutoFit/>
-          </a:bodyPr>
-          <a:lstStyle/>
-          <a:p>
-            <a:pPr>
-              <a:spcAft>
-                <a:spcPts val="600"/>
-              </a:spcAft>
-            </a:pPr>
-            <a:r>
               <a:rPr sz="1050" b="0">
                 <a:solidFill>
                   <a:srgbClr val="6E6E6E"/>
                 </a:solidFill>
                 <a:latin typeface="Arial"/>
               </a:rPr>
-              <a:t>Each directory's README carries the full command list and the run-tag index.</a:t>
+              <a:t>The scoring library (the loop, the unwrapper, the arm and analyzer maps, the clearance check) is shared by the three lanes; nothing is copied between them.  The path is recorded as reference memory so the next configuration follows it in a day.</a:t>
             </a:r>
           </a:p>
         </p:txBody>
@@ -24472,7 +24625,7 @@
                 </a:solidFill>
                 <a:latin typeface="Arial"/>
               </a:rPr>
-              <a:t>Backup: the interferometer's three phase-shift forms</a:t>
+              <a:t>Run it yourself</a:t>
             </a:r>
           </a:p>
           <a:p>
@@ -24488,7 +24641,7 @@
                 </a:solidFill>
                 <a:latin typeface="Arial"/>
               </a:rPr>
-              <a:t>The four frames are the same in the model; the forms differ in what they get wrong</a:t>
+              <a:t>One parameter sheet and one runner per approach, shared code underneath; every number here is reproduced by the commands below</a:t>
             </a:r>
           </a:p>
         </p:txBody>
@@ -24537,6 +24690,320 @@
           </a:p>
         </p:txBody>
       </p:sp>
+      <p:sp>
+        <p:nvSpPr>
+          <p:cNvPr id="4" name="TextBox 3"/>
+          <p:cNvSpPr txBox="1"/>
+          <p:nvPr/>
+        </p:nvSpPr>
+        <p:spPr>
+          <a:xfrm>
+            <a:off x="411480" y="1298448"/>
+            <a:ext cx="5806440" cy="274320"/>
+          </a:xfrm>
+          <a:prstGeom prst="rect">
+            <a:avLst/>
+          </a:prstGeom>
+          <a:noFill/>
+        </p:spPr>
+        <p:txBody>
+          <a:bodyPr wrap="square">
+            <a:spAutoFit/>
+          </a:bodyPr>
+          <a:lstStyle/>
+          <a:p>
+            <a:pPr>
+              <a:spcAft>
+                <a:spcPts val="600"/>
+              </a:spcAft>
+            </a:pPr>
+            <a:r>
+              <a:rPr sz="1200" b="0">
+                <a:solidFill>
+                  <a:srgbClr val="282828"/>
+                </a:solidFill>
+                <a:latin typeface="Arial"/>
+              </a:rPr>
+              <a:t>•  Interferometer (tg_psi_dm96_oap): tg96_run for the lens rig; tg96_run('bench.optics','oap','tag','oap') for the mirror rig; ./tg96_batch.sh lens_deck "'stages',{'bench','deck'},'battery.noise',true"; ./tg96_batch.sh loop_lens "'stages',{'bench','loop','figs'}".</a:t>
+            </a:r>
+          </a:p>
+          <a:p>
+            <a:pPr>
+              <a:spcAft>
+                <a:spcPts val="600"/>
+              </a:spcAft>
+            </a:pPr>
+            <a:r>
+              <a:rPr sz="1200" b="0">
+                <a:solidFill>
+                  <a:srgbClr val="282828"/>
+                </a:solidFill>
+                <a:latin typeface="Arial"/>
+              </a:rPr>
+              <a:t>•  Pupil image (tg_psi_dm96_oap): tg96_pupilq('rig','lens'), tg96_pupilsim('rig','oap'); both tools, both rigs: ./tg96_pupil_batch.sh both (knobs: P.pupil in tg96_params).</a:t>
+            </a:r>
+          </a:p>
+          <a:p>
+            <a:pPr>
+              <a:spcAft>
+                <a:spcPts val="600"/>
+              </a:spcAft>
+            </a:pPr>
+            <a:r>
+              <a:rPr sz="1200" b="0">
+                <a:solidFill>
+                  <a:srgbClr val="282828"/>
+                </a:solidFill>
+                <a:latin typeface="Arial"/>
+              </a:rPr>
+              <a:t>•  Zernike sensors (zwfs_dm96): out = zwfs_run; (bench + battery + figures); zwfs_run('tag','ng385','NGRID',385); zwfs_run('MODEL',2048,'NGRID',385,'param_file','macos_param_2048.txt'); ./zwfs_batch.sh loop193 "'stages',{'bench','loop','figs'}".</a:t>
+            </a:r>
+          </a:p>
+          <a:p>
+            <a:pPr>
+              <a:spcAft>
+                <a:spcPts val="600"/>
+              </a:spcAft>
+            </a:pPr>
+            <a:r>
+              <a:rPr sz="1200" b="0">
+                <a:solidFill>
+                  <a:srgbClr val="282828"/>
+                </a:solidFill>
+                <a:latin typeface="Arial"/>
+              </a:rPr>
+              <a:t>•  Point-diffraction (pdi_dm96): P = pdi_params; out = pdi_run(P);; pdi_run('pdi.DIA_LAMD',1.0,'stages',{'bench','battery','figs'}); ./pdi_batch.sh TAG "pdi_params, 'stages',{'bench','loop','figs'}".</a:t>
+            </a:r>
+          </a:p>
+        </p:txBody>
+      </p:sp>
+      <p:sp>
+        <p:nvSpPr>
+          <p:cNvPr id="5" name="TextBox 4"/>
+          <p:cNvSpPr txBox="1"/>
+          <p:nvPr/>
+        </p:nvSpPr>
+        <p:spPr>
+          <a:xfrm>
+            <a:off x="6400800" y="1298448"/>
+            <a:ext cx="5394960" cy="274320"/>
+          </a:xfrm>
+          <a:prstGeom prst="rect">
+            <a:avLst/>
+          </a:prstGeom>
+          <a:noFill/>
+        </p:spPr>
+        <p:txBody>
+          <a:bodyPr wrap="square">
+            <a:spAutoFit/>
+          </a:bodyPr>
+          <a:lstStyle/>
+          <a:p>
+            <a:pPr>
+              <a:spcAft>
+                <a:spcPts val="600"/>
+              </a:spcAft>
+            </a:pPr>
+            <a:r>
+              <a:rPr sz="1200" b="0">
+                <a:solidFill>
+                  <a:srgbClr val="282828"/>
+                </a:solidFill>
+                <a:latin typeface="Arial"/>
+              </a:rPr>
+              <a:t>•  The other gauges on the mirror rig: zwfs_run('bench.optics','oap','bench.coat_oap','bareAl','readings',{'L','S','V','P','PF'},'stages',{'bench','battery','noise','loop'},'mask.v_arm','engine').</a:t>
+            </a:r>
+          </a:p>
+          <a:p>
+            <a:pPr>
+              <a:spcAft>
+                <a:spcPts val="600"/>
+              </a:spcAft>
+            </a:pPr>
+            <a:r>
+              <a:rPr sz="1200" b="0">
+                <a:solidFill>
+                  <a:srgbClr val="282828"/>
+                </a:solidFill>
+                <a:latin typeface="Arial"/>
+              </a:rPr>
+              <a:t>•  Where: MACOS_resources/mmacos/templates/40_benches/{tg_psi_dm96_oap, zwfs_dm96, pdi_dm96}, the shared scoring library dm_gauge_lib, branch dev-candidate.  A model-1024 run needs about 11 GB; the batch wrappers run one at a time.</a:t>
+            </a:r>
+          </a:p>
+          <a:p>
+            <a:pPr>
+              <a:spcAft>
+                <a:spcPts val="600"/>
+              </a:spcAft>
+            </a:pPr>
+            <a:r>
+              <a:rPr sz="1200" b="0">
+                <a:solidFill>
+                  <a:srgbClr val="282828"/>
+                </a:solidFill>
+                <a:latin typeface="Arial"/>
+              </a:rPr>
+              <a:t>•  Gates: every stage asserts its own gates (the mask round trip, the reference-wave surrogate, the fold, the pinhole, the analyzer); tDmgLoop 15/15; the mmacos fast suite 481/0.</a:t>
+            </a:r>
+          </a:p>
+        </p:txBody>
+      </p:sp>
+      <p:sp>
+        <p:nvSpPr>
+          <p:cNvPr id="6" name="TextBox 5"/>
+          <p:cNvSpPr txBox="1"/>
+          <p:nvPr/>
+        </p:nvSpPr>
+        <p:spPr>
+          <a:xfrm>
+            <a:off x="6400800" y="3736848"/>
+            <a:ext cx="5394960" cy="274320"/>
+          </a:xfrm>
+          <a:prstGeom prst="rect">
+            <a:avLst/>
+          </a:prstGeom>
+          <a:noFill/>
+        </p:spPr>
+        <p:txBody>
+          <a:bodyPr wrap="square">
+            <a:spAutoFit/>
+          </a:bodyPr>
+          <a:lstStyle/>
+          <a:p>
+            <a:pPr>
+              <a:spcAft>
+                <a:spcPts val="600"/>
+              </a:spcAft>
+            </a:pPr>
+            <a:r>
+              <a:rPr sz="1050" b="0">
+                <a:solidFill>
+                  <a:srgbClr val="6E6E6E"/>
+                </a:solidFill>
+                <a:latin typeface="Arial"/>
+              </a:rPr>
+              <a:t>Each directory's README carries the full command list and the run-tag index.</a:t>
+            </a:r>
+          </a:p>
+        </p:txBody>
+      </p:sp>
+    </p:spTree>
+  </p:cSld>
+  <p:clrMapOvr>
+    <a:masterClrMapping/>
+  </p:clrMapOvr>
+</p:sld>
+</file>
+
+<file path=ppt/slides/slide44.xml><?xml version="1.0" encoding="utf-8"?>
+<p:sld xmlns:a="http://schemas.openxmlformats.org/drawingml/2006/main" xmlns:p="http://schemas.openxmlformats.org/presentationml/2006/main" xmlns:r="http://schemas.openxmlformats.org/officeDocument/2006/relationships">
+  <p:cSld>
+    <p:spTree>
+      <p:nvGrpSpPr>
+        <p:cNvPr id="1" name=""/>
+        <p:cNvGrpSpPr/>
+        <p:nvPr/>
+      </p:nvGrpSpPr>
+      <p:grpSpPr/>
+      <p:sp>
+        <p:nvSpPr>
+          <p:cNvPr id="2" name="TextBox 1"/>
+          <p:cNvSpPr txBox="1"/>
+          <p:nvPr/>
+        </p:nvSpPr>
+        <p:spPr>
+          <a:xfrm>
+            <a:off x="411480" y="201168"/>
+            <a:ext cx="11368735" cy="914400"/>
+          </a:xfrm>
+          <a:prstGeom prst="rect">
+            <a:avLst/>
+          </a:prstGeom>
+          <a:noFill/>
+        </p:spPr>
+        <p:txBody>
+          <a:bodyPr wrap="square">
+            <a:spAutoFit/>
+          </a:bodyPr>
+          <a:lstStyle/>
+          <a:p>
+            <a:pPr>
+              <a:spcAft>
+                <a:spcPts val="400"/>
+              </a:spcAft>
+            </a:pPr>
+            <a:r>
+              <a:rPr sz="2400" b="1">
+                <a:solidFill>
+                  <a:srgbClr val="1F4E79"/>
+                </a:solidFill>
+                <a:latin typeface="Arial"/>
+              </a:rPr>
+              <a:t>Backup: the interferometer's three phase-shift forms</a:t>
+            </a:r>
+          </a:p>
+          <a:p>
+            <a:pPr>
+              <a:spcAft>
+                <a:spcPts val="0"/>
+              </a:spcAft>
+            </a:pPr>
+            <a:r>
+              <a:rPr sz="1250" b="0">
+                <a:solidFill>
+                  <a:srgbClr val="6E6E6E"/>
+                </a:solidFill>
+                <a:latin typeface="Arial"/>
+              </a:rPr>
+              <a:t>The four frames are the same in the model; the forms differ in what they get wrong</a:t>
+            </a:r>
+          </a:p>
+        </p:txBody>
+      </p:sp>
+      <p:sp>
+        <p:nvSpPr>
+          <p:cNvPr id="3" name="Rectangle 2"/>
+          <p:cNvSpPr/>
+          <p:nvPr/>
+        </p:nvSpPr>
+        <p:spPr>
+          <a:xfrm>
+            <a:off x="411480" y="1133856"/>
+            <a:ext cx="11368735" cy="20320"/>
+          </a:xfrm>
+          <a:prstGeom prst="rect">
+            <a:avLst/>
+          </a:prstGeom>
+          <a:solidFill>
+            <a:srgbClr val="B8C6D4"/>
+          </a:solidFill>
+          <a:ln>
+            <a:noFill/>
+          </a:ln>
+          <a:effectLst/>
+        </p:spPr>
+        <p:style>
+          <a:lnRef idx="1">
+            <a:schemeClr val="accent1"/>
+          </a:lnRef>
+          <a:fillRef idx="3">
+            <a:schemeClr val="accent1"/>
+          </a:fillRef>
+          <a:effectRef idx="2">
+            <a:schemeClr val="accent1"/>
+          </a:effectRef>
+          <a:fontRef idx="minor">
+            <a:schemeClr val="lt1"/>
+          </a:fontRef>
+        </p:style>
+        <p:txBody>
+          <a:bodyPr rtlCol="0" anchor="ctr"/>
+          <a:lstStyle/>
+          <a:p>
+            <a:pPr algn="ctr"/>
+          </a:p>
+        </p:txBody>
+      </p:sp>
       <p:graphicFrame>
         <p:nvGraphicFramePr>
           <p:cNvPr id="4" name="Table 3"/>
@@ -24972,7 +25439,7 @@
 </p:sld>
 </file>
 
-<file path=ppt/slides/slide44.xml><?xml version="1.0" encoding="utf-8"?>
+<file path=ppt/slides/slide45.xml><?xml version="1.0" encoding="utf-8"?>
 <p:sld xmlns:a="http://schemas.openxmlformats.org/drawingml/2006/main" xmlns:p="http://schemas.openxmlformats.org/presentationml/2006/main" xmlns:r="http://schemas.openxmlformats.org/officeDocument/2006/relationships">
   <p:cSld>
     <p:spTree>
@@ -25820,7 +26287,7 @@
 </p:sld>
 </file>
 
-<file path=ppt/slides/slide45.xml><?xml version="1.0" encoding="utf-8"?>
+<file path=ppt/slides/slide46.xml><?xml version="1.0" encoding="utf-8"?>
 <p:sld xmlns:a="http://schemas.openxmlformats.org/drawingml/2006/main" xmlns:p="http://schemas.openxmlformats.org/presentationml/2006/main" xmlns:r="http://schemas.openxmlformats.org/officeDocument/2006/relationships">
   <p:cSld>
     <p:spTree>
@@ -26110,7 +26577,7 @@
 </p:sld>
 </file>
 
-<file path=ppt/slides/slide46.xml><?xml version="1.0" encoding="utf-8"?>
+<file path=ppt/slides/slide47.xml><?xml version="1.0" encoding="utf-8"?>
 <p:sld xmlns:a="http://schemas.openxmlformats.org/drawingml/2006/main" xmlns:p="http://schemas.openxmlformats.org/presentationml/2006/main" xmlns:r="http://schemas.openxmlformats.org/officeDocument/2006/relationships">
   <p:cSld>
     <p:spTree>
@@ -26966,7 +27433,7 @@
 </p:sld>
 </file>
 
-<file path=ppt/slides/slide47.xml><?xml version="1.0" encoding="utf-8"?>
+<file path=ppt/slides/slide48.xml><?xml version="1.0" encoding="utf-8"?>
 <p:sld xmlns:a="http://schemas.openxmlformats.org/drawingml/2006/main" xmlns:p="http://schemas.openxmlformats.org/presentationml/2006/main" xmlns:r="http://schemas.openxmlformats.org/officeDocument/2006/relationships">
   <p:cSld>
     <p:spTree>
@@ -28027,7 +28494,7 @@
 </p:sld>
 </file>
 
-<file path=ppt/slides/slide48.xml><?xml version="1.0" encoding="utf-8"?>
+<file path=ppt/slides/slide49.xml><?xml version="1.0" encoding="utf-8"?>
 <p:sld xmlns:a="http://schemas.openxmlformats.org/drawingml/2006/main" xmlns:p="http://schemas.openxmlformats.org/presentationml/2006/main" xmlns:r="http://schemas.openxmlformats.org/officeDocument/2006/relationships">
   <p:cSld>
     <p:spTree>
@@ -28689,7 +29156,974 @@
 </p:sld>
 </file>
 
-<file path=ppt/slides/slide49.xml><?xml version="1.0" encoding="utf-8"?>
+<file path=ppt/slides/slide5.xml><?xml version="1.0" encoding="utf-8"?>
+<p:sld xmlns:a="http://schemas.openxmlformats.org/drawingml/2006/main" xmlns:p="http://schemas.openxmlformats.org/presentationml/2006/main" xmlns:r="http://schemas.openxmlformats.org/officeDocument/2006/relationships">
+  <p:cSld>
+    <p:spTree>
+      <p:nvGrpSpPr>
+        <p:cNvPr id="1" name=""/>
+        <p:cNvGrpSpPr/>
+        <p:nvPr/>
+      </p:nvGrpSpPr>
+      <p:grpSpPr/>
+      <p:sp>
+        <p:nvSpPr>
+          <p:cNvPr id="2" name="TextBox 1"/>
+          <p:cNvSpPr txBox="1"/>
+          <p:nvPr/>
+        </p:nvSpPr>
+        <p:spPr>
+          <a:xfrm>
+            <a:off x="411480" y="201168"/>
+            <a:ext cx="11368735" cy="914400"/>
+          </a:xfrm>
+          <a:prstGeom prst="rect">
+            <a:avLst/>
+          </a:prstGeom>
+          <a:noFill/>
+        </p:spPr>
+        <p:txBody>
+          <a:bodyPr wrap="square">
+            <a:spAutoFit/>
+          </a:bodyPr>
+          <a:lstStyle/>
+          <a:p>
+            <a:pPr>
+              <a:spcAft>
+                <a:spcPts val="400"/>
+              </a:spcAft>
+            </a:pPr>
+            <a:r>
+              <a:rPr sz="2400" b="1">
+                <a:solidFill>
+                  <a:srgbClr val="1F4E79"/>
+                </a:solidFill>
+                <a:latin typeface="Arial"/>
+              </a:rPr>
+              <a:t>The splitter angle: three options</a:t>
+            </a:r>
+          </a:p>
+          <a:p>
+            <a:pPr>
+              <a:spcAft>
+                <a:spcPts val="0"/>
+              </a:spcAft>
+            </a:pPr>
+            <a:r>
+              <a:rPr sz="1250" b="0">
+                <a:solidFill>
+                  <a:srgbClr val="6E6E6E"/>
+                </a:solidFill>
+                <a:latin typeface="Arial"/>
+              </a:rPr>
+              <a:t>The record's 7° cannot be built; 22.5° clears every part and is the choice; 30° adds margin at the price of a wider bench and more plate polarization</a:t>
+            </a:r>
+          </a:p>
+        </p:txBody>
+      </p:sp>
+      <p:sp>
+        <p:nvSpPr>
+          <p:cNvPr id="3" name="Rectangle 2"/>
+          <p:cNvSpPr/>
+          <p:nvPr/>
+        </p:nvSpPr>
+        <p:spPr>
+          <a:xfrm>
+            <a:off x="411480" y="1133856"/>
+            <a:ext cx="11368735" cy="20320"/>
+          </a:xfrm>
+          <a:prstGeom prst="rect">
+            <a:avLst/>
+          </a:prstGeom>
+          <a:solidFill>
+            <a:srgbClr val="B8C6D4"/>
+          </a:solidFill>
+          <a:ln>
+            <a:noFill/>
+          </a:ln>
+          <a:effectLst/>
+        </p:spPr>
+        <p:style>
+          <a:lnRef idx="1">
+            <a:schemeClr val="accent1"/>
+          </a:lnRef>
+          <a:fillRef idx="3">
+            <a:schemeClr val="accent1"/>
+          </a:fillRef>
+          <a:effectRef idx="2">
+            <a:schemeClr val="accent1"/>
+          </a:effectRef>
+          <a:fontRef idx="minor">
+            <a:schemeClr val="lt1"/>
+          </a:fontRef>
+        </p:style>
+        <p:txBody>
+          <a:bodyPr rtlCol="0" anchor="ctr"/>
+          <a:lstStyle/>
+          <a:p>
+            <a:pPr algn="ctr"/>
+          </a:p>
+        </p:txBody>
+      </p:sp>
+      <p:pic>
+        <p:nvPicPr>
+          <p:cNvPr id="4" name="Picture 3" descr="bench_three_nodes.png"/>
+          <p:cNvPicPr>
+            <a:picLocks noChangeAspect="1"/>
+          </p:cNvPicPr>
+          <p:nvPr/>
+        </p:nvPicPr>
+        <p:blipFill>
+          <a:blip r:embed="rId2"/>
+          <a:stretch>
+            <a:fillRect/>
+          </a:stretch>
+        </p:blipFill>
+        <p:spPr>
+          <a:xfrm>
+            <a:off x="2242989" y="1298448"/>
+            <a:ext cx="7705716" cy="1434592"/>
+          </a:xfrm>
+          <a:prstGeom prst="rect">
+            <a:avLst/>
+          </a:prstGeom>
+        </p:spPr>
+      </p:pic>
+      <p:sp>
+        <p:nvSpPr>
+          <p:cNvPr id="5" name="TextBox 4"/>
+          <p:cNvSpPr txBox="1"/>
+          <p:nvPr/>
+        </p:nvSpPr>
+        <p:spPr>
+          <a:xfrm>
+            <a:off x="411480" y="2751328"/>
+            <a:ext cx="11368735" cy="394208"/>
+          </a:xfrm>
+          <a:prstGeom prst="rect">
+            <a:avLst/>
+          </a:prstGeom>
+          <a:noFill/>
+        </p:spPr>
+        <p:txBody>
+          <a:bodyPr wrap="square">
+            <a:spAutoFit/>
+          </a:bodyPr>
+          <a:lstStyle/>
+          <a:p>
+            <a:pPr algn="ctr">
+              <a:spcAft>
+                <a:spcPts val="0"/>
+              </a:spcAft>
+            </a:pPr>
+            <a:r>
+              <a:rPr sz="1000" b="0">
+                <a:solidFill>
+                  <a:srgbClr val="6E6E6E"/>
+                </a:solidFill>
+                <a:latin typeface="Arial"/>
+              </a:rPr>
+              <a:t>The node at 7° (left, the record: eight parts in another beam), 22.5° (middle, the choice: every part clears, the compensator by 16 mm) and 30° (right: the compensator by 57 mm); the output plate and analyzer moved to 160 mm behind the splitter in the last two.  The three panels are the tool's own node drawings, placed side by side.</a:t>
+            </a:r>
+          </a:p>
+        </p:txBody>
+      </p:sp>
+      <p:graphicFrame>
+        <p:nvGraphicFramePr>
+          <p:cNvPr id="6" name="Table 5"/>
+          <p:cNvGraphicFramePr>
+            <a:graphicFrameLocks noGrp="1"/>
+          </p:cNvGraphicFramePr>
+          <p:nvPr/>
+        </p:nvGraphicFramePr>
+        <p:xfrm>
+          <a:off x="411480" y="3182112"/>
+          <a:ext cx="11368734" cy="3183255"/>
+        </p:xfrm>
+        <a:graphic>
+          <a:graphicData uri="http://schemas.openxmlformats.org/drawingml/2006/table">
+            <a:tbl>
+              <a:tblPr firstRow="1" bandRow="1">
+                <a:tableStyleId>{5C22544A-7EE6-4342-B048-85BDC9FD1C3A}</a:tableStyleId>
+              </a:tblPr>
+              <a:tblGrid>
+                <a:gridCol w="3410620"/>
+                <a:gridCol w="2273747"/>
+                <a:gridCol w="3284301"/>
+                <a:gridCol w="2400066"/>
+              </a:tblGrid>
+              <a:tr h="280035">
+                <a:tc>
+                  <a:txBody>
+                    <a:bodyPr wrap="square"/>
+                    <a:lstStyle/>
+                    <a:p>
+                      <a:r>
+                        <a:rPr sz="1100" b="1">
+                          <a:solidFill>
+                            <a:srgbClr val="FFFFFF"/>
+                          </a:solidFill>
+                          <a:latin typeface="Arial"/>
+                        </a:rPr>
+                        <a:t>impact</a:t>
+                      </a:r>
+                    </a:p>
+                  </a:txBody>
+                  <a:tcPr marL="54864" marR="54864" marT="18288" marB="18288">
+                    <a:solidFill>
+                      <a:srgbClr val="1F4E79"/>
+                    </a:solidFill>
+                  </a:tcPr>
+                </a:tc>
+                <a:tc>
+                  <a:txBody>
+                    <a:bodyPr wrap="square"/>
+                    <a:lstStyle/>
+                    <a:p>
+                      <a:r>
+                        <a:rPr sz="1100" b="1">
+                          <a:solidFill>
+                            <a:srgbClr val="FFFFFF"/>
+                          </a:solidFill>
+                          <a:latin typeface="Arial"/>
+                        </a:rPr>
+                        <a:t>7° (record)</a:t>
+                      </a:r>
+                    </a:p>
+                  </a:txBody>
+                  <a:tcPr marL="54864" marR="54864" marT="18288" marB="18288">
+                    <a:solidFill>
+                      <a:srgbClr val="1F4E79"/>
+                    </a:solidFill>
+                  </a:tcPr>
+                </a:tc>
+                <a:tc>
+                  <a:txBody>
+                    <a:bodyPr wrap="square"/>
+                    <a:lstStyle/>
+                    <a:p>
+                      <a:r>
+                        <a:rPr sz="1100" b="1">
+                          <a:solidFill>
+                            <a:srgbClr val="FFFFFF"/>
+                          </a:solidFill>
+                          <a:latin typeface="Arial"/>
+                        </a:rPr>
+                        <a:t>22.5° (choice)</a:t>
+                      </a:r>
+                    </a:p>
+                  </a:txBody>
+                  <a:tcPr marL="54864" marR="54864" marT="18288" marB="18288">
+                    <a:solidFill>
+                      <a:srgbClr val="1F4E79"/>
+                    </a:solidFill>
+                  </a:tcPr>
+                </a:tc>
+                <a:tc>
+                  <a:txBody>
+                    <a:bodyPr wrap="square"/>
+                    <a:lstStyle/>
+                    <a:p>
+                      <a:r>
+                        <a:rPr sz="1100" b="1">
+                          <a:solidFill>
+                            <a:srgbClr val="FFFFFF"/>
+                          </a:solidFill>
+                          <a:latin typeface="Arial"/>
+                        </a:rPr>
+                        <a:t>30°</a:t>
+                      </a:r>
+                    </a:p>
+                  </a:txBody>
+                  <a:tcPr marL="54864" marR="54864" marT="18288" marB="18288">
+                    <a:solidFill>
+                      <a:srgbClr val="1F4E79"/>
+                    </a:solidFill>
+                  </a:tcPr>
+                </a:tc>
+              </a:tr>
+              <a:tr h="468630">
+                <a:tc>
+                  <a:txBody>
+                    <a:bodyPr wrap="square"/>
+                    <a:lstStyle/>
+                    <a:p>
+                      <a:r>
+                        <a:rPr sz="1100" b="0">
+                          <a:solidFill>
+                            <a:srgbClr val="282828"/>
+                          </a:solidFill>
+                          <a:latin typeface="Arial"/>
+                        </a:rPr>
+                        <a:t>node clearance, worst part</a:t>
+                      </a:r>
+                    </a:p>
+                  </a:txBody>
+                  <a:tcPr marL="54864" marR="54864" marT="18288" marB="18288">
+                    <a:solidFill>
+                      <a:srgbClr val="FFFFFF"/>
+                    </a:solidFill>
+                  </a:tcPr>
+                </a:tc>
+                <a:tc>
+                  <a:txBody>
+                    <a:bodyPr wrap="square"/>
+                    <a:lstStyle/>
+                    <a:p>
+                      <a:r>
+                        <a:rPr sz="1100" b="0">
+                          <a:solidFill>
+                            <a:srgbClr val="282828"/>
+                          </a:solidFill>
+                          <a:latin typeface="Arial"/>
+                        </a:rPr>
+                        <a:t>−109 mm: not buildable</a:t>
+                      </a:r>
+                    </a:p>
+                  </a:txBody>
+                  <a:tcPr marL="54864" marR="54864" marT="18288" marB="18288">
+                    <a:solidFill>
+                      <a:srgbClr val="FFFFFF"/>
+                    </a:solidFill>
+                  </a:tcPr>
+                </a:tc>
+                <a:tc>
+                  <a:txBody>
+                    <a:bodyPr wrap="square"/>
+                    <a:lstStyle/>
+                    <a:p>
+                      <a:r>
+                        <a:rPr sz="1100" b="0">
+                          <a:solidFill>
+                            <a:srgbClr val="282828"/>
+                          </a:solidFill>
+                          <a:latin typeface="Arial"/>
+                        </a:rPr>
+                        <a:t>compensator +16 mm; output optics +55 / +65; L2 +100</a:t>
+                      </a:r>
+                    </a:p>
+                  </a:txBody>
+                  <a:tcPr marL="54864" marR="54864" marT="18288" marB="18288">
+                    <a:solidFill>
+                      <a:srgbClr val="FFFFFF"/>
+                    </a:solidFill>
+                  </a:tcPr>
+                </a:tc>
+                <a:tc>
+                  <a:txBody>
+                    <a:bodyPr wrap="square"/>
+                    <a:lstStyle/>
+                    <a:p>
+                      <a:r>
+                        <a:rPr sz="1100" b="0">
+                          <a:solidFill>
+                            <a:srgbClr val="282828"/>
+                          </a:solidFill>
+                          <a:latin typeface="Arial"/>
+                        </a:rPr>
+                        <a:t>compensator +57; the rest +178 or more</a:t>
+                      </a:r>
+                    </a:p>
+                  </a:txBody>
+                  <a:tcPr marL="54864" marR="54864" marT="18288" marB="18288">
+                    <a:solidFill>
+                      <a:srgbClr val="FFFFFF"/>
+                    </a:solidFill>
+                  </a:tcPr>
+                </a:tc>
+              </a:tr>
+              <a:tr h="468630">
+                <a:tc>
+                  <a:txBody>
+                    <a:bodyPr wrap="square"/>
+                    <a:lstStyle/>
+                    <a:p>
+                      <a:r>
+                        <a:rPr sz="1100" b="0">
+                          <a:solidFill>
+                            <a:srgbClr val="282828"/>
+                          </a:solidFill>
+                          <a:latin typeface="Arial"/>
+                        </a:rPr>
+                        <a:t>bench shape</a:t>
+                      </a:r>
+                    </a:p>
+                  </a:txBody>
+                  <a:tcPr marL="54864" marR="54864" marT="18288" marB="18288">
+                    <a:solidFill>
+                      <a:srgbClr val="ECF1F6"/>
+                    </a:solidFill>
+                  </a:tcPr>
+                </a:tc>
+                <a:tc>
+                  <a:txBody>
+                    <a:bodyPr wrap="square"/>
+                    <a:lstStyle/>
+                    <a:p>
+                      <a:r>
+                        <a:rPr sz="1100" b="0">
+                          <a:solidFill>
+                            <a:srgbClr val="282828"/>
+                          </a:solidFill>
+                          <a:latin typeface="Arial"/>
+                        </a:rPr>
+                        <a:t>all four legs within 14° of one line</a:t>
+                      </a:r>
+                    </a:p>
+                  </a:txBody>
+                  <a:tcPr marL="54864" marR="54864" marT="18288" marB="18288">
+                    <a:solidFill>
+                      <a:srgbClr val="ECF1F6"/>
+                    </a:solidFill>
+                  </a:tcPr>
+                </a:tc>
+                <a:tc>
+                  <a:txBody>
+                    <a:bodyPr wrap="square"/>
+                    <a:lstStyle/>
+                    <a:p>
+                      <a:r>
+                        <a:rPr sz="1100" b="0">
+                          <a:solidFill>
+                            <a:srgbClr val="282828"/>
+                          </a:solidFill>
+                          <a:latin typeface="Arial"/>
+                        </a:rPr>
+                        <a:t>mirror leg at 45° to the source leg</a:t>
+                      </a:r>
+                    </a:p>
+                  </a:txBody>
+                  <a:tcPr marL="54864" marR="54864" marT="18288" marB="18288">
+                    <a:solidFill>
+                      <a:srgbClr val="ECF1F6"/>
+                    </a:solidFill>
+                  </a:tcPr>
+                </a:tc>
+                <a:tc>
+                  <a:txBody>
+                    <a:bodyPr wrap="square"/>
+                    <a:lstStyle/>
+                    <a:p>
+                      <a:r>
+                        <a:rPr sz="1100" b="0">
+                          <a:solidFill>
+                            <a:srgbClr val="282828"/>
+                          </a:solidFill>
+                          <a:latin typeface="Arial"/>
+                        </a:rPr>
+                        <a:t>mirror leg at 60°</a:t>
+                      </a:r>
+                    </a:p>
+                  </a:txBody>
+                  <a:tcPr marL="54864" marR="54864" marT="18288" marB="18288">
+                    <a:solidFill>
+                      <a:srgbClr val="ECF1F6"/>
+                    </a:solidFill>
+                  </a:tcPr>
+                </a:tc>
+              </a:tr>
+              <a:tr h="468630">
+                <a:tc>
+                  <a:txBody>
+                    <a:bodyPr wrap="square"/>
+                    <a:lstStyle/>
+                    <a:p>
+                      <a:r>
+                        <a:rPr sz="1100" b="0">
+                          <a:solidFill>
+                            <a:srgbClr val="282828"/>
+                          </a:solidFill>
+                          <a:latin typeface="Arial"/>
+                        </a:rPr>
+                        <a:t>plate's polarization (mean diattenuation, uniform)</a:t>
+                      </a:r>
+                    </a:p>
+                  </a:txBody>
+                  <a:tcPr marL="54864" marR="54864" marT="18288" marB="18288">
+                    <a:solidFill>
+                      <a:srgbClr val="FFFFFF"/>
+                    </a:solidFill>
+                  </a:tcPr>
+                </a:tc>
+                <a:tc>
+                  <a:txBody>
+                    <a:bodyPr wrap="square"/>
+                    <a:lstStyle/>
+                    <a:p>
+                      <a:r>
+                        <a:rPr sz="1100" b="0">
+                          <a:solidFill>
+                            <a:srgbClr val="282828"/>
+                          </a:solidFill>
+                          <a:latin typeface="Arial"/>
+                        </a:rPr>
+                        <a:t>0.5%</a:t>
+                      </a:r>
+                    </a:p>
+                  </a:txBody>
+                  <a:tcPr marL="54864" marR="54864" marT="18288" marB="18288">
+                    <a:solidFill>
+                      <a:srgbClr val="FFFFFF"/>
+                    </a:solidFill>
+                  </a:tcPr>
+                </a:tc>
+                <a:tc>
+                  <a:txBody>
+                    <a:bodyPr wrap="square"/>
+                    <a:lstStyle/>
+                    <a:p>
+                      <a:r>
+                        <a:rPr sz="1100" b="0">
+                          <a:solidFill>
+                            <a:srgbClr val="282828"/>
+                          </a:solidFill>
+                          <a:latin typeface="Arial"/>
+                        </a:rPr>
+                        <a:t>5.5%</a:t>
+                      </a:r>
+                    </a:p>
+                  </a:txBody>
+                  <a:tcPr marL="54864" marR="54864" marT="18288" marB="18288">
+                    <a:solidFill>
+                      <a:srgbClr val="FFFFFF"/>
+                    </a:solidFill>
+                  </a:tcPr>
+                </a:tc>
+                <a:tc>
+                  <a:txBody>
+                    <a:bodyPr wrap="square"/>
+                    <a:lstStyle/>
+                    <a:p>
+                      <a:r>
+                        <a:rPr sz="1100" b="0">
+                          <a:solidFill>
+                            <a:srgbClr val="282828"/>
+                          </a:solidFill>
+                          <a:latin typeface="Arial"/>
+                        </a:rPr>
+                        <a:t>10%</a:t>
+                      </a:r>
+                    </a:p>
+                  </a:txBody>
+                  <a:tcPr marL="54864" marR="54864" marT="18288" marB="18288">
+                    <a:solidFill>
+                      <a:srgbClr val="FFFFFF"/>
+                    </a:solidFill>
+                  </a:tcPr>
+                </a:tc>
+              </a:tr>
+              <a:tr h="468630">
+                <a:tc>
+                  <a:txBody>
+                    <a:bodyPr wrap="square"/>
+                    <a:lstStyle/>
+                    <a:p>
+                      <a:r>
+                        <a:rPr sz="1100" b="0">
+                          <a:solidFill>
+                            <a:srgbClr val="282828"/>
+                          </a:solidFill>
+                          <a:latin typeface="Arial"/>
+                        </a:rPr>
+                        <a:t>pupil-varying part (the lenses; what the sensors feel)</a:t>
+                      </a:r>
+                    </a:p>
+                  </a:txBody>
+                  <a:tcPr marL="54864" marR="54864" marT="18288" marB="18288">
+                    <a:solidFill>
+                      <a:srgbClr val="ECF1F6"/>
+                    </a:solidFill>
+                  </a:tcPr>
+                </a:tc>
+                <a:tc>
+                  <a:txBody>
+                    <a:bodyPr wrap="square"/>
+                    <a:lstStyle/>
+                    <a:p>
+                      <a:r>
+                        <a:rPr sz="1100" b="0">
+                          <a:solidFill>
+                            <a:srgbClr val="282828"/>
+                          </a:solidFill>
+                          <a:latin typeface="Arial"/>
+                        </a:rPr>
+                        <a:t>1.1e-3 rms</a:t>
+                      </a:r>
+                    </a:p>
+                  </a:txBody>
+                  <a:tcPr marL="54864" marR="54864" marT="18288" marB="18288">
+                    <a:solidFill>
+                      <a:srgbClr val="ECF1F6"/>
+                    </a:solidFill>
+                  </a:tcPr>
+                </a:tc>
+                <a:tc>
+                  <a:txBody>
+                    <a:bodyPr wrap="square"/>
+                    <a:lstStyle/>
+                    <a:p>
+                      <a:r>
+                        <a:rPr sz="1100" b="0">
+                          <a:solidFill>
+                            <a:srgbClr val="282828"/>
+                          </a:solidFill>
+                          <a:latin typeface="Arial"/>
+                        </a:rPr>
+                        <a:t>1.1e-3 rms</a:t>
+                      </a:r>
+                    </a:p>
+                  </a:txBody>
+                  <a:tcPr marL="54864" marR="54864" marT="18288" marB="18288">
+                    <a:solidFill>
+                      <a:srgbClr val="ECF1F6"/>
+                    </a:solidFill>
+                  </a:tcPr>
+                </a:tc>
+                <a:tc>
+                  <a:txBody>
+                    <a:bodyPr wrap="square"/>
+                    <a:lstStyle/>
+                    <a:p>
+                      <a:r>
+                        <a:rPr sz="1100" b="0">
+                          <a:solidFill>
+                            <a:srgbClr val="282828"/>
+                          </a:solidFill>
+                          <a:latin typeface="Arial"/>
+                        </a:rPr>
+                        <a:t>1.1e-3 rms</a:t>
+                      </a:r>
+                    </a:p>
+                  </a:txBody>
+                  <a:tcPr marL="54864" marR="54864" marT="18288" marB="18288">
+                    <a:solidFill>
+                      <a:srgbClr val="ECF1F6"/>
+                    </a:solidFill>
+                  </a:tcPr>
+                </a:tc>
+              </a:tr>
+              <a:tr h="468630">
+                <a:tc>
+                  <a:txBody>
+                    <a:bodyPr wrap="square"/>
+                    <a:lstStyle/>
+                    <a:p>
+                      <a:r>
+                        <a:rPr sz="1100" b="0">
+                          <a:solidFill>
+                            <a:srgbClr val="282828"/>
+                          </a:solidFill>
+                          <a:latin typeface="Arial"/>
+                        </a:rPr>
+                        <a:t>vector sensor, channel phase difference / 100 nm pokes</a:t>
+                      </a:r>
+                    </a:p>
+                  </a:txBody>
+                  <a:tcPr marL="54864" marR="54864" marT="18288" marB="18288">
+                    <a:solidFill>
+                      <a:srgbClr val="FFFFFF"/>
+                    </a:solidFill>
+                  </a:tcPr>
+                </a:tc>
+                <a:tc>
+                  <a:txBody>
+                    <a:bodyPr wrap="square"/>
+                    <a:lstStyle/>
+                    <a:p>
+                      <a:r>
+                        <a:rPr sz="1100" b="0">
+                          <a:solidFill>
+                            <a:srgbClr val="282828"/>
+                          </a:solidFill>
+                          <a:latin typeface="Arial"/>
+                        </a:rPr>
+                        <a:t>1.63 mrad / 9.0 pm</a:t>
+                      </a:r>
+                    </a:p>
+                  </a:txBody>
+                  <a:tcPr marL="54864" marR="54864" marT="18288" marB="18288">
+                    <a:solidFill>
+                      <a:srgbClr val="FFFFFF"/>
+                    </a:solidFill>
+                  </a:tcPr>
+                </a:tc>
+                <a:tc>
+                  <a:txBody>
+                    <a:bodyPr wrap="square"/>
+                    <a:lstStyle/>
+                    <a:p>
+                      <a:r>
+                        <a:rPr sz="1100" b="0">
+                          <a:solidFill>
+                            <a:srgbClr val="282828"/>
+                          </a:solidFill>
+                          <a:latin typeface="Arial"/>
+                        </a:rPr>
+                        <a:t>1.66 mrad / 8.8 pm</a:t>
+                      </a:r>
+                    </a:p>
+                  </a:txBody>
+                  <a:tcPr marL="54864" marR="54864" marT="18288" marB="18288">
+                    <a:solidFill>
+                      <a:srgbClr val="FFFFFF"/>
+                    </a:solidFill>
+                  </a:tcPr>
+                </a:tc>
+                <a:tc>
+                  <a:txBody>
+                    <a:bodyPr wrap="square"/>
+                    <a:lstStyle/>
+                    <a:p>
+                      <a:r>
+                        <a:rPr sz="1100" b="0">
+                          <a:solidFill>
+                            <a:srgbClr val="282828"/>
+                          </a:solidFill>
+                          <a:latin typeface="Arial"/>
+                        </a:rPr>
+                        <a:t>1.69 mrad / 9.1 pm</a:t>
+                      </a:r>
+                    </a:p>
+                  </a:txBody>
+                  <a:tcPr marL="54864" marR="54864" marT="18288" marB="18288">
+                    <a:solidFill>
+                      <a:srgbClr val="FFFFFF"/>
+                    </a:solidFill>
+                  </a:tcPr>
+                </a:tc>
+              </a:tr>
+              <a:tr h="280035">
+                <a:tc>
+                  <a:txBody>
+                    <a:bodyPr wrap="square"/>
+                    <a:lstStyle/>
+                    <a:p>
+                      <a:r>
+                        <a:rPr sz="1100" b="0">
+                          <a:solidFill>
+                            <a:srgbClr val="282828"/>
+                          </a:solidFill>
+                          <a:latin typeface="Arial"/>
+                        </a:rPr>
+                        <a:t>transmitted beam shift in the 2.6 mm plate</a:t>
+                      </a:r>
+                    </a:p>
+                  </a:txBody>
+                  <a:tcPr marL="54864" marR="54864" marT="18288" marB="18288">
+                    <a:solidFill>
+                      <a:srgbClr val="ECF1F6"/>
+                    </a:solidFill>
+                  </a:tcPr>
+                </a:tc>
+                <a:tc>
+                  <a:txBody>
+                    <a:bodyPr wrap="square"/>
+                    <a:lstStyle/>
+                    <a:p>
+                      <a:r>
+                        <a:rPr sz="1100" b="0">
+                          <a:solidFill>
+                            <a:srgbClr val="282828"/>
+                          </a:solidFill>
+                          <a:latin typeface="Arial"/>
+                        </a:rPr>
+                        <a:t>0.1 mm</a:t>
+                      </a:r>
+                    </a:p>
+                  </a:txBody>
+                  <a:tcPr marL="54864" marR="54864" marT="18288" marB="18288">
+                    <a:solidFill>
+                      <a:srgbClr val="ECF1F6"/>
+                    </a:solidFill>
+                  </a:tcPr>
+                </a:tc>
+                <a:tc>
+                  <a:txBody>
+                    <a:bodyPr wrap="square"/>
+                    <a:lstStyle/>
+                    <a:p>
+                      <a:r>
+                        <a:rPr sz="1100" b="0">
+                          <a:solidFill>
+                            <a:srgbClr val="282828"/>
+                          </a:solidFill>
+                          <a:latin typeface="Arial"/>
+                        </a:rPr>
+                        <a:t>0.36 mm (1.4 at 10 mm)</a:t>
+                      </a:r>
+                    </a:p>
+                  </a:txBody>
+                  <a:tcPr marL="54864" marR="54864" marT="18288" marB="18288">
+                    <a:solidFill>
+                      <a:srgbClr val="ECF1F6"/>
+                    </a:solidFill>
+                  </a:tcPr>
+                </a:tc>
+                <a:tc>
+                  <a:txBody>
+                    <a:bodyPr wrap="square"/>
+                    <a:lstStyle/>
+                    <a:p>
+                      <a:r>
+                        <a:rPr sz="1100" b="0">
+                          <a:solidFill>
+                            <a:srgbClr val="282828"/>
+                          </a:solidFill>
+                          <a:latin typeface="Arial"/>
+                        </a:rPr>
+                        <a:t>0.50 mm</a:t>
+                      </a:r>
+                    </a:p>
+                  </a:txBody>
+                  <a:tcPr marL="54864" marR="54864" marT="18288" marB="18288">
+                    <a:solidFill>
+                      <a:srgbClr val="ECF1F6"/>
+                    </a:solidFill>
+                  </a:tcPr>
+                </a:tc>
+              </a:tr>
+              <a:tr h="280035">
+                <a:tc>
+                  <a:txBody>
+                    <a:bodyPr wrap="square"/>
+                    <a:lstStyle/>
+                    <a:p>
+                      <a:r>
+                        <a:rPr sz="1100" b="0">
+                          <a:solidFill>
+                            <a:srgbClr val="282828"/>
+                          </a:solidFill>
+                          <a:latin typeface="Arial"/>
+                        </a:rPr>
+                        <a:t>interferometer snapshot form</a:t>
+                      </a:r>
+                    </a:p>
+                  </a:txBody>
+                  <a:tcPr marL="54864" marR="54864" marT="18288" marB="18288">
+                    <a:solidFill>
+                      <a:srgbClr val="FFFFFF"/>
+                    </a:solidFill>
+                  </a:tcPr>
+                </a:tc>
+                <a:tc>
+                  <a:txBody>
+                    <a:bodyPr wrap="square"/>
+                    <a:lstStyle/>
+                    <a:p>
+                      <a:r>
+                        <a:rPr sz="1100" b="0">
+                          <a:solidFill>
+                            <a:srgbClr val="282828"/>
+                          </a:solidFill>
+                          <a:latin typeface="Arial"/>
+                        </a:rPr>
+                        <a:t>the small-angle case</a:t>
+                      </a:r>
+                    </a:p>
+                  </a:txBody>
+                  <a:tcPr marL="54864" marR="54864" marT="18288" marB="18288">
+                    <a:solidFill>
+                      <a:srgbClr val="FFFFFF"/>
+                    </a:solidFill>
+                  </a:tcPr>
+                </a:tc>
+                <a:tc>
+                  <a:txBody>
+                    <a:bodyPr wrap="square"/>
+                    <a:lstStyle/>
+                    <a:p>
+                      <a:r>
+                        <a:rPr sz="1100" b="0">
+                          <a:solidFill>
+                            <a:srgbClr val="282828"/>
+                          </a:solidFill>
+                          <a:latin typeface="Arial"/>
+                        </a:rPr>
+                        <a:t>its plate systematics re-run at this angle</a:t>
+                      </a:r>
+                    </a:p>
+                  </a:txBody>
+                  <a:tcPr marL="54864" marR="54864" marT="18288" marB="18288">
+                    <a:solidFill>
+                      <a:srgbClr val="FFFFFF"/>
+                    </a:solidFill>
+                  </a:tcPr>
+                </a:tc>
+                <a:tc>
+                  <a:txBody>
+                    <a:bodyPr wrap="square"/>
+                    <a:lstStyle/>
+                    <a:p>
+                      <a:r>
+                        <a:rPr sz="1100" b="0">
+                          <a:solidFill>
+                            <a:srgbClr val="282828"/>
+                          </a:solidFill>
+                          <a:latin typeface="Arial"/>
+                        </a:rPr>
+                        <a:t>larger</a:t>
+                      </a:r>
+                    </a:p>
+                  </a:txBody>
+                  <a:tcPr marL="54864" marR="54864" marT="18288" marB="18288">
+                    <a:solidFill>
+                      <a:srgbClr val="FFFFFF"/>
+                    </a:solidFill>
+                  </a:tcPr>
+                </a:tc>
+              </a:tr>
+            </a:tbl>
+          </a:graphicData>
+        </a:graphic>
+      </p:graphicFrame>
+      <p:sp>
+        <p:nvSpPr>
+          <p:cNvPr id="7" name="TextBox 6"/>
+          <p:cNvSpPr txBox="1"/>
+          <p:nvPr/>
+        </p:nvSpPr>
+        <p:spPr>
+          <a:xfrm>
+            <a:off x="411480" y="6511671"/>
+            <a:ext cx="11368735" cy="274320"/>
+          </a:xfrm>
+          <a:prstGeom prst="rect">
+            <a:avLst/>
+          </a:prstGeom>
+          <a:noFill/>
+        </p:spPr>
+        <p:txBody>
+          <a:bodyPr wrap="square">
+            <a:spAutoFit/>
+          </a:bodyPr>
+          <a:lstStyle/>
+          <a:p>
+            <a:pPr>
+              <a:spcAft>
+                <a:spcPts val="600"/>
+              </a:spcAft>
+            </a:pPr>
+            <a:r>
+              <a:rPr sz="1050" b="0">
+                <a:solidFill>
+                  <a:srgbClr val="6E6E6E"/>
+                </a:solidFill>
+                <a:latin typeface="Arial"/>
+              </a:rPr>
+              <a:t>The sensors reproduce their rows at every angle; the interferometer's snapshot form is the one thing the angle changes, through the plate's polarization, and the cube form is built for 45°.  Run tags bs22_dev, bs30_dev; the panels at 7° and 30° are on the backup clearance slide.</a:t>
+            </a:r>
+          </a:p>
+        </p:txBody>
+      </p:sp>
+    </p:spTree>
+  </p:cSld>
+  <p:clrMapOvr>
+    <a:masterClrMapping/>
+  </p:clrMapOvr>
+</p:sld>
+</file>
+
+<file path=ppt/slides/slide50.xml><?xml version="1.0" encoding="utf-8"?>
 <p:sld xmlns:a="http://schemas.openxmlformats.org/drawingml/2006/main" xmlns:p="http://schemas.openxmlformats.org/presentationml/2006/main" xmlns:r="http://schemas.openxmlformats.org/officeDocument/2006/relationships">
   <p:cSld>
     <p:spTree>
@@ -28979,974 +30413,7 @@
 </p:sld>
 </file>
 
-<file path=ppt/slides/slide5.xml><?xml version="1.0" encoding="utf-8"?>
-<p:sld xmlns:a="http://schemas.openxmlformats.org/drawingml/2006/main" xmlns:p="http://schemas.openxmlformats.org/presentationml/2006/main" xmlns:r="http://schemas.openxmlformats.org/officeDocument/2006/relationships">
-  <p:cSld>
-    <p:spTree>
-      <p:nvGrpSpPr>
-        <p:cNvPr id="1" name=""/>
-        <p:cNvGrpSpPr/>
-        <p:nvPr/>
-      </p:nvGrpSpPr>
-      <p:grpSpPr/>
-      <p:sp>
-        <p:nvSpPr>
-          <p:cNvPr id="2" name="TextBox 1"/>
-          <p:cNvSpPr txBox="1"/>
-          <p:nvPr/>
-        </p:nvSpPr>
-        <p:spPr>
-          <a:xfrm>
-            <a:off x="411480" y="201168"/>
-            <a:ext cx="11368735" cy="914400"/>
-          </a:xfrm>
-          <a:prstGeom prst="rect">
-            <a:avLst/>
-          </a:prstGeom>
-          <a:noFill/>
-        </p:spPr>
-        <p:txBody>
-          <a:bodyPr wrap="square">
-            <a:spAutoFit/>
-          </a:bodyPr>
-          <a:lstStyle/>
-          <a:p>
-            <a:pPr>
-              <a:spcAft>
-                <a:spcPts val="400"/>
-              </a:spcAft>
-            </a:pPr>
-            <a:r>
-              <a:rPr sz="2400" b="1">
-                <a:solidFill>
-                  <a:srgbClr val="1F4E79"/>
-                </a:solidFill>
-                <a:latin typeface="Arial"/>
-              </a:rPr>
-              <a:t>The splitter angle: three options</a:t>
-            </a:r>
-          </a:p>
-          <a:p>
-            <a:pPr>
-              <a:spcAft>
-                <a:spcPts val="0"/>
-              </a:spcAft>
-            </a:pPr>
-            <a:r>
-              <a:rPr sz="1250" b="0">
-                <a:solidFill>
-                  <a:srgbClr val="6E6E6E"/>
-                </a:solidFill>
-                <a:latin typeface="Arial"/>
-              </a:rPr>
-              <a:t>The record's 7° cannot be built; 22.5° clears every part and is the choice; 30° adds margin at the price of a wider bench and more plate polarization</a:t>
-            </a:r>
-          </a:p>
-        </p:txBody>
-      </p:sp>
-      <p:sp>
-        <p:nvSpPr>
-          <p:cNvPr id="3" name="Rectangle 2"/>
-          <p:cNvSpPr/>
-          <p:nvPr/>
-        </p:nvSpPr>
-        <p:spPr>
-          <a:xfrm>
-            <a:off x="411480" y="1133856"/>
-            <a:ext cx="11368735" cy="20320"/>
-          </a:xfrm>
-          <a:prstGeom prst="rect">
-            <a:avLst/>
-          </a:prstGeom>
-          <a:solidFill>
-            <a:srgbClr val="B8C6D4"/>
-          </a:solidFill>
-          <a:ln>
-            <a:noFill/>
-          </a:ln>
-          <a:effectLst/>
-        </p:spPr>
-        <p:style>
-          <a:lnRef idx="1">
-            <a:schemeClr val="accent1"/>
-          </a:lnRef>
-          <a:fillRef idx="3">
-            <a:schemeClr val="accent1"/>
-          </a:fillRef>
-          <a:effectRef idx="2">
-            <a:schemeClr val="accent1"/>
-          </a:effectRef>
-          <a:fontRef idx="minor">
-            <a:schemeClr val="lt1"/>
-          </a:fontRef>
-        </p:style>
-        <p:txBody>
-          <a:bodyPr rtlCol="0" anchor="ctr"/>
-          <a:lstStyle/>
-          <a:p>
-            <a:pPr algn="ctr"/>
-          </a:p>
-        </p:txBody>
-      </p:sp>
-      <p:pic>
-        <p:nvPicPr>
-          <p:cNvPr id="4" name="Picture 3" descr="bench_three_nodes.png"/>
-          <p:cNvPicPr>
-            <a:picLocks noChangeAspect="1"/>
-          </p:cNvPicPr>
-          <p:nvPr/>
-        </p:nvPicPr>
-        <p:blipFill>
-          <a:blip r:embed="rId2"/>
-          <a:stretch>
-            <a:fillRect/>
-          </a:stretch>
-        </p:blipFill>
-        <p:spPr>
-          <a:xfrm>
-            <a:off x="2242989" y="1298448"/>
-            <a:ext cx="7705716" cy="1434592"/>
-          </a:xfrm>
-          <a:prstGeom prst="rect">
-            <a:avLst/>
-          </a:prstGeom>
-        </p:spPr>
-      </p:pic>
-      <p:sp>
-        <p:nvSpPr>
-          <p:cNvPr id="5" name="TextBox 4"/>
-          <p:cNvSpPr txBox="1"/>
-          <p:nvPr/>
-        </p:nvSpPr>
-        <p:spPr>
-          <a:xfrm>
-            <a:off x="411480" y="2751328"/>
-            <a:ext cx="11368735" cy="394208"/>
-          </a:xfrm>
-          <a:prstGeom prst="rect">
-            <a:avLst/>
-          </a:prstGeom>
-          <a:noFill/>
-        </p:spPr>
-        <p:txBody>
-          <a:bodyPr wrap="square">
-            <a:spAutoFit/>
-          </a:bodyPr>
-          <a:lstStyle/>
-          <a:p>
-            <a:pPr algn="ctr">
-              <a:spcAft>
-                <a:spcPts val="0"/>
-              </a:spcAft>
-            </a:pPr>
-            <a:r>
-              <a:rPr sz="1000" b="0">
-                <a:solidFill>
-                  <a:srgbClr val="6E6E6E"/>
-                </a:solidFill>
-                <a:latin typeface="Arial"/>
-              </a:rPr>
-              <a:t>The node at 7° (left, the record: eight parts in another beam), 22.5° (middle, the choice: every part clears, the compensator by 16 mm) and 30° (right: the compensator by 57 mm); the output plate and analyzer moved to 160 mm behind the splitter in the last two.  The three panels are the tool's own node drawings, placed side by side.</a:t>
-            </a:r>
-          </a:p>
-        </p:txBody>
-      </p:sp>
-      <p:graphicFrame>
-        <p:nvGraphicFramePr>
-          <p:cNvPr id="6" name="Table 5"/>
-          <p:cNvGraphicFramePr>
-            <a:graphicFrameLocks noGrp="1"/>
-          </p:cNvGraphicFramePr>
-          <p:nvPr/>
-        </p:nvGraphicFramePr>
-        <p:xfrm>
-          <a:off x="411480" y="3182112"/>
-          <a:ext cx="11368734" cy="3183255"/>
-        </p:xfrm>
-        <a:graphic>
-          <a:graphicData uri="http://schemas.openxmlformats.org/drawingml/2006/table">
-            <a:tbl>
-              <a:tblPr firstRow="1" bandRow="1">
-                <a:tableStyleId>{5C22544A-7EE6-4342-B048-85BDC9FD1C3A}</a:tableStyleId>
-              </a:tblPr>
-              <a:tblGrid>
-                <a:gridCol w="3410620"/>
-                <a:gridCol w="2273747"/>
-                <a:gridCol w="3284301"/>
-                <a:gridCol w="2400066"/>
-              </a:tblGrid>
-              <a:tr h="280035">
-                <a:tc>
-                  <a:txBody>
-                    <a:bodyPr wrap="square"/>
-                    <a:lstStyle/>
-                    <a:p>
-                      <a:r>
-                        <a:rPr sz="1100" b="1">
-                          <a:solidFill>
-                            <a:srgbClr val="FFFFFF"/>
-                          </a:solidFill>
-                          <a:latin typeface="Arial"/>
-                        </a:rPr>
-                        <a:t>impact</a:t>
-                      </a:r>
-                    </a:p>
-                  </a:txBody>
-                  <a:tcPr marL="54864" marR="54864" marT="18288" marB="18288">
-                    <a:solidFill>
-                      <a:srgbClr val="1F4E79"/>
-                    </a:solidFill>
-                  </a:tcPr>
-                </a:tc>
-                <a:tc>
-                  <a:txBody>
-                    <a:bodyPr wrap="square"/>
-                    <a:lstStyle/>
-                    <a:p>
-                      <a:r>
-                        <a:rPr sz="1100" b="1">
-                          <a:solidFill>
-                            <a:srgbClr val="FFFFFF"/>
-                          </a:solidFill>
-                          <a:latin typeface="Arial"/>
-                        </a:rPr>
-                        <a:t>7° (record)</a:t>
-                      </a:r>
-                    </a:p>
-                  </a:txBody>
-                  <a:tcPr marL="54864" marR="54864" marT="18288" marB="18288">
-                    <a:solidFill>
-                      <a:srgbClr val="1F4E79"/>
-                    </a:solidFill>
-                  </a:tcPr>
-                </a:tc>
-                <a:tc>
-                  <a:txBody>
-                    <a:bodyPr wrap="square"/>
-                    <a:lstStyle/>
-                    <a:p>
-                      <a:r>
-                        <a:rPr sz="1100" b="1">
-                          <a:solidFill>
-                            <a:srgbClr val="FFFFFF"/>
-                          </a:solidFill>
-                          <a:latin typeface="Arial"/>
-                        </a:rPr>
-                        <a:t>22.5° (choice)</a:t>
-                      </a:r>
-                    </a:p>
-                  </a:txBody>
-                  <a:tcPr marL="54864" marR="54864" marT="18288" marB="18288">
-                    <a:solidFill>
-                      <a:srgbClr val="1F4E79"/>
-                    </a:solidFill>
-                  </a:tcPr>
-                </a:tc>
-                <a:tc>
-                  <a:txBody>
-                    <a:bodyPr wrap="square"/>
-                    <a:lstStyle/>
-                    <a:p>
-                      <a:r>
-                        <a:rPr sz="1100" b="1">
-                          <a:solidFill>
-                            <a:srgbClr val="FFFFFF"/>
-                          </a:solidFill>
-                          <a:latin typeface="Arial"/>
-                        </a:rPr>
-                        <a:t>30°</a:t>
-                      </a:r>
-                    </a:p>
-                  </a:txBody>
-                  <a:tcPr marL="54864" marR="54864" marT="18288" marB="18288">
-                    <a:solidFill>
-                      <a:srgbClr val="1F4E79"/>
-                    </a:solidFill>
-                  </a:tcPr>
-                </a:tc>
-              </a:tr>
-              <a:tr h="468630">
-                <a:tc>
-                  <a:txBody>
-                    <a:bodyPr wrap="square"/>
-                    <a:lstStyle/>
-                    <a:p>
-                      <a:r>
-                        <a:rPr sz="1100" b="0">
-                          <a:solidFill>
-                            <a:srgbClr val="282828"/>
-                          </a:solidFill>
-                          <a:latin typeface="Arial"/>
-                        </a:rPr>
-                        <a:t>node clearance, worst part</a:t>
-                      </a:r>
-                    </a:p>
-                  </a:txBody>
-                  <a:tcPr marL="54864" marR="54864" marT="18288" marB="18288">
-                    <a:solidFill>
-                      <a:srgbClr val="FFFFFF"/>
-                    </a:solidFill>
-                  </a:tcPr>
-                </a:tc>
-                <a:tc>
-                  <a:txBody>
-                    <a:bodyPr wrap="square"/>
-                    <a:lstStyle/>
-                    <a:p>
-                      <a:r>
-                        <a:rPr sz="1100" b="0">
-                          <a:solidFill>
-                            <a:srgbClr val="282828"/>
-                          </a:solidFill>
-                          <a:latin typeface="Arial"/>
-                        </a:rPr>
-                        <a:t>−109 mm: not buildable</a:t>
-                      </a:r>
-                    </a:p>
-                  </a:txBody>
-                  <a:tcPr marL="54864" marR="54864" marT="18288" marB="18288">
-                    <a:solidFill>
-                      <a:srgbClr val="FFFFFF"/>
-                    </a:solidFill>
-                  </a:tcPr>
-                </a:tc>
-                <a:tc>
-                  <a:txBody>
-                    <a:bodyPr wrap="square"/>
-                    <a:lstStyle/>
-                    <a:p>
-                      <a:r>
-                        <a:rPr sz="1100" b="0">
-                          <a:solidFill>
-                            <a:srgbClr val="282828"/>
-                          </a:solidFill>
-                          <a:latin typeface="Arial"/>
-                        </a:rPr>
-                        <a:t>compensator +16 mm; output optics +55 / +65; L2 +100</a:t>
-                      </a:r>
-                    </a:p>
-                  </a:txBody>
-                  <a:tcPr marL="54864" marR="54864" marT="18288" marB="18288">
-                    <a:solidFill>
-                      <a:srgbClr val="FFFFFF"/>
-                    </a:solidFill>
-                  </a:tcPr>
-                </a:tc>
-                <a:tc>
-                  <a:txBody>
-                    <a:bodyPr wrap="square"/>
-                    <a:lstStyle/>
-                    <a:p>
-                      <a:r>
-                        <a:rPr sz="1100" b="0">
-                          <a:solidFill>
-                            <a:srgbClr val="282828"/>
-                          </a:solidFill>
-                          <a:latin typeface="Arial"/>
-                        </a:rPr>
-                        <a:t>compensator +57; the rest +178 or more</a:t>
-                      </a:r>
-                    </a:p>
-                  </a:txBody>
-                  <a:tcPr marL="54864" marR="54864" marT="18288" marB="18288">
-                    <a:solidFill>
-                      <a:srgbClr val="FFFFFF"/>
-                    </a:solidFill>
-                  </a:tcPr>
-                </a:tc>
-              </a:tr>
-              <a:tr h="468630">
-                <a:tc>
-                  <a:txBody>
-                    <a:bodyPr wrap="square"/>
-                    <a:lstStyle/>
-                    <a:p>
-                      <a:r>
-                        <a:rPr sz="1100" b="0">
-                          <a:solidFill>
-                            <a:srgbClr val="282828"/>
-                          </a:solidFill>
-                          <a:latin typeface="Arial"/>
-                        </a:rPr>
-                        <a:t>bench shape</a:t>
-                      </a:r>
-                    </a:p>
-                  </a:txBody>
-                  <a:tcPr marL="54864" marR="54864" marT="18288" marB="18288">
-                    <a:solidFill>
-                      <a:srgbClr val="ECF1F6"/>
-                    </a:solidFill>
-                  </a:tcPr>
-                </a:tc>
-                <a:tc>
-                  <a:txBody>
-                    <a:bodyPr wrap="square"/>
-                    <a:lstStyle/>
-                    <a:p>
-                      <a:r>
-                        <a:rPr sz="1100" b="0">
-                          <a:solidFill>
-                            <a:srgbClr val="282828"/>
-                          </a:solidFill>
-                          <a:latin typeface="Arial"/>
-                        </a:rPr>
-                        <a:t>all four legs within 14° of one line</a:t>
-                      </a:r>
-                    </a:p>
-                  </a:txBody>
-                  <a:tcPr marL="54864" marR="54864" marT="18288" marB="18288">
-                    <a:solidFill>
-                      <a:srgbClr val="ECF1F6"/>
-                    </a:solidFill>
-                  </a:tcPr>
-                </a:tc>
-                <a:tc>
-                  <a:txBody>
-                    <a:bodyPr wrap="square"/>
-                    <a:lstStyle/>
-                    <a:p>
-                      <a:r>
-                        <a:rPr sz="1100" b="0">
-                          <a:solidFill>
-                            <a:srgbClr val="282828"/>
-                          </a:solidFill>
-                          <a:latin typeface="Arial"/>
-                        </a:rPr>
-                        <a:t>mirror leg at 45° to the source leg</a:t>
-                      </a:r>
-                    </a:p>
-                  </a:txBody>
-                  <a:tcPr marL="54864" marR="54864" marT="18288" marB="18288">
-                    <a:solidFill>
-                      <a:srgbClr val="ECF1F6"/>
-                    </a:solidFill>
-                  </a:tcPr>
-                </a:tc>
-                <a:tc>
-                  <a:txBody>
-                    <a:bodyPr wrap="square"/>
-                    <a:lstStyle/>
-                    <a:p>
-                      <a:r>
-                        <a:rPr sz="1100" b="0">
-                          <a:solidFill>
-                            <a:srgbClr val="282828"/>
-                          </a:solidFill>
-                          <a:latin typeface="Arial"/>
-                        </a:rPr>
-                        <a:t>mirror leg at 60°</a:t>
-                      </a:r>
-                    </a:p>
-                  </a:txBody>
-                  <a:tcPr marL="54864" marR="54864" marT="18288" marB="18288">
-                    <a:solidFill>
-                      <a:srgbClr val="ECF1F6"/>
-                    </a:solidFill>
-                  </a:tcPr>
-                </a:tc>
-              </a:tr>
-              <a:tr h="468630">
-                <a:tc>
-                  <a:txBody>
-                    <a:bodyPr wrap="square"/>
-                    <a:lstStyle/>
-                    <a:p>
-                      <a:r>
-                        <a:rPr sz="1100" b="0">
-                          <a:solidFill>
-                            <a:srgbClr val="282828"/>
-                          </a:solidFill>
-                          <a:latin typeface="Arial"/>
-                        </a:rPr>
-                        <a:t>plate's polarization (mean diattenuation, uniform)</a:t>
-                      </a:r>
-                    </a:p>
-                  </a:txBody>
-                  <a:tcPr marL="54864" marR="54864" marT="18288" marB="18288">
-                    <a:solidFill>
-                      <a:srgbClr val="FFFFFF"/>
-                    </a:solidFill>
-                  </a:tcPr>
-                </a:tc>
-                <a:tc>
-                  <a:txBody>
-                    <a:bodyPr wrap="square"/>
-                    <a:lstStyle/>
-                    <a:p>
-                      <a:r>
-                        <a:rPr sz="1100" b="0">
-                          <a:solidFill>
-                            <a:srgbClr val="282828"/>
-                          </a:solidFill>
-                          <a:latin typeface="Arial"/>
-                        </a:rPr>
-                        <a:t>0.5%</a:t>
-                      </a:r>
-                    </a:p>
-                  </a:txBody>
-                  <a:tcPr marL="54864" marR="54864" marT="18288" marB="18288">
-                    <a:solidFill>
-                      <a:srgbClr val="FFFFFF"/>
-                    </a:solidFill>
-                  </a:tcPr>
-                </a:tc>
-                <a:tc>
-                  <a:txBody>
-                    <a:bodyPr wrap="square"/>
-                    <a:lstStyle/>
-                    <a:p>
-                      <a:r>
-                        <a:rPr sz="1100" b="0">
-                          <a:solidFill>
-                            <a:srgbClr val="282828"/>
-                          </a:solidFill>
-                          <a:latin typeface="Arial"/>
-                        </a:rPr>
-                        <a:t>5.5%</a:t>
-                      </a:r>
-                    </a:p>
-                  </a:txBody>
-                  <a:tcPr marL="54864" marR="54864" marT="18288" marB="18288">
-                    <a:solidFill>
-                      <a:srgbClr val="FFFFFF"/>
-                    </a:solidFill>
-                  </a:tcPr>
-                </a:tc>
-                <a:tc>
-                  <a:txBody>
-                    <a:bodyPr wrap="square"/>
-                    <a:lstStyle/>
-                    <a:p>
-                      <a:r>
-                        <a:rPr sz="1100" b="0">
-                          <a:solidFill>
-                            <a:srgbClr val="282828"/>
-                          </a:solidFill>
-                          <a:latin typeface="Arial"/>
-                        </a:rPr>
-                        <a:t>10%</a:t>
-                      </a:r>
-                    </a:p>
-                  </a:txBody>
-                  <a:tcPr marL="54864" marR="54864" marT="18288" marB="18288">
-                    <a:solidFill>
-                      <a:srgbClr val="FFFFFF"/>
-                    </a:solidFill>
-                  </a:tcPr>
-                </a:tc>
-              </a:tr>
-              <a:tr h="468630">
-                <a:tc>
-                  <a:txBody>
-                    <a:bodyPr wrap="square"/>
-                    <a:lstStyle/>
-                    <a:p>
-                      <a:r>
-                        <a:rPr sz="1100" b="0">
-                          <a:solidFill>
-                            <a:srgbClr val="282828"/>
-                          </a:solidFill>
-                          <a:latin typeface="Arial"/>
-                        </a:rPr>
-                        <a:t>pupil-varying part (the lenses; what the sensors feel)</a:t>
-                      </a:r>
-                    </a:p>
-                  </a:txBody>
-                  <a:tcPr marL="54864" marR="54864" marT="18288" marB="18288">
-                    <a:solidFill>
-                      <a:srgbClr val="ECF1F6"/>
-                    </a:solidFill>
-                  </a:tcPr>
-                </a:tc>
-                <a:tc>
-                  <a:txBody>
-                    <a:bodyPr wrap="square"/>
-                    <a:lstStyle/>
-                    <a:p>
-                      <a:r>
-                        <a:rPr sz="1100" b="0">
-                          <a:solidFill>
-                            <a:srgbClr val="282828"/>
-                          </a:solidFill>
-                          <a:latin typeface="Arial"/>
-                        </a:rPr>
-                        <a:t>1.1e-3 rms</a:t>
-                      </a:r>
-                    </a:p>
-                  </a:txBody>
-                  <a:tcPr marL="54864" marR="54864" marT="18288" marB="18288">
-                    <a:solidFill>
-                      <a:srgbClr val="ECF1F6"/>
-                    </a:solidFill>
-                  </a:tcPr>
-                </a:tc>
-                <a:tc>
-                  <a:txBody>
-                    <a:bodyPr wrap="square"/>
-                    <a:lstStyle/>
-                    <a:p>
-                      <a:r>
-                        <a:rPr sz="1100" b="0">
-                          <a:solidFill>
-                            <a:srgbClr val="282828"/>
-                          </a:solidFill>
-                          <a:latin typeface="Arial"/>
-                        </a:rPr>
-                        <a:t>1.1e-3 rms</a:t>
-                      </a:r>
-                    </a:p>
-                  </a:txBody>
-                  <a:tcPr marL="54864" marR="54864" marT="18288" marB="18288">
-                    <a:solidFill>
-                      <a:srgbClr val="ECF1F6"/>
-                    </a:solidFill>
-                  </a:tcPr>
-                </a:tc>
-                <a:tc>
-                  <a:txBody>
-                    <a:bodyPr wrap="square"/>
-                    <a:lstStyle/>
-                    <a:p>
-                      <a:r>
-                        <a:rPr sz="1100" b="0">
-                          <a:solidFill>
-                            <a:srgbClr val="282828"/>
-                          </a:solidFill>
-                          <a:latin typeface="Arial"/>
-                        </a:rPr>
-                        <a:t>1.1e-3 rms</a:t>
-                      </a:r>
-                    </a:p>
-                  </a:txBody>
-                  <a:tcPr marL="54864" marR="54864" marT="18288" marB="18288">
-                    <a:solidFill>
-                      <a:srgbClr val="ECF1F6"/>
-                    </a:solidFill>
-                  </a:tcPr>
-                </a:tc>
-              </a:tr>
-              <a:tr h="468630">
-                <a:tc>
-                  <a:txBody>
-                    <a:bodyPr wrap="square"/>
-                    <a:lstStyle/>
-                    <a:p>
-                      <a:r>
-                        <a:rPr sz="1100" b="0">
-                          <a:solidFill>
-                            <a:srgbClr val="282828"/>
-                          </a:solidFill>
-                          <a:latin typeface="Arial"/>
-                        </a:rPr>
-                        <a:t>vector sensor, channel phase difference / 100 nm pokes</a:t>
-                      </a:r>
-                    </a:p>
-                  </a:txBody>
-                  <a:tcPr marL="54864" marR="54864" marT="18288" marB="18288">
-                    <a:solidFill>
-                      <a:srgbClr val="FFFFFF"/>
-                    </a:solidFill>
-                  </a:tcPr>
-                </a:tc>
-                <a:tc>
-                  <a:txBody>
-                    <a:bodyPr wrap="square"/>
-                    <a:lstStyle/>
-                    <a:p>
-                      <a:r>
-                        <a:rPr sz="1100" b="0">
-                          <a:solidFill>
-                            <a:srgbClr val="282828"/>
-                          </a:solidFill>
-                          <a:latin typeface="Arial"/>
-                        </a:rPr>
-                        <a:t>1.63 mrad / 9.0 pm</a:t>
-                      </a:r>
-                    </a:p>
-                  </a:txBody>
-                  <a:tcPr marL="54864" marR="54864" marT="18288" marB="18288">
-                    <a:solidFill>
-                      <a:srgbClr val="FFFFFF"/>
-                    </a:solidFill>
-                  </a:tcPr>
-                </a:tc>
-                <a:tc>
-                  <a:txBody>
-                    <a:bodyPr wrap="square"/>
-                    <a:lstStyle/>
-                    <a:p>
-                      <a:r>
-                        <a:rPr sz="1100" b="0">
-                          <a:solidFill>
-                            <a:srgbClr val="282828"/>
-                          </a:solidFill>
-                          <a:latin typeface="Arial"/>
-                        </a:rPr>
-                        <a:t>1.66 mrad / 8.8 pm</a:t>
-                      </a:r>
-                    </a:p>
-                  </a:txBody>
-                  <a:tcPr marL="54864" marR="54864" marT="18288" marB="18288">
-                    <a:solidFill>
-                      <a:srgbClr val="FFFFFF"/>
-                    </a:solidFill>
-                  </a:tcPr>
-                </a:tc>
-                <a:tc>
-                  <a:txBody>
-                    <a:bodyPr wrap="square"/>
-                    <a:lstStyle/>
-                    <a:p>
-                      <a:r>
-                        <a:rPr sz="1100" b="0">
-                          <a:solidFill>
-                            <a:srgbClr val="282828"/>
-                          </a:solidFill>
-                          <a:latin typeface="Arial"/>
-                        </a:rPr>
-                        <a:t>1.69 mrad / 9.1 pm</a:t>
-                      </a:r>
-                    </a:p>
-                  </a:txBody>
-                  <a:tcPr marL="54864" marR="54864" marT="18288" marB="18288">
-                    <a:solidFill>
-                      <a:srgbClr val="FFFFFF"/>
-                    </a:solidFill>
-                  </a:tcPr>
-                </a:tc>
-              </a:tr>
-              <a:tr h="280035">
-                <a:tc>
-                  <a:txBody>
-                    <a:bodyPr wrap="square"/>
-                    <a:lstStyle/>
-                    <a:p>
-                      <a:r>
-                        <a:rPr sz="1100" b="0">
-                          <a:solidFill>
-                            <a:srgbClr val="282828"/>
-                          </a:solidFill>
-                          <a:latin typeface="Arial"/>
-                        </a:rPr>
-                        <a:t>transmitted beam shift in the 2.6 mm plate</a:t>
-                      </a:r>
-                    </a:p>
-                  </a:txBody>
-                  <a:tcPr marL="54864" marR="54864" marT="18288" marB="18288">
-                    <a:solidFill>
-                      <a:srgbClr val="ECF1F6"/>
-                    </a:solidFill>
-                  </a:tcPr>
-                </a:tc>
-                <a:tc>
-                  <a:txBody>
-                    <a:bodyPr wrap="square"/>
-                    <a:lstStyle/>
-                    <a:p>
-                      <a:r>
-                        <a:rPr sz="1100" b="0">
-                          <a:solidFill>
-                            <a:srgbClr val="282828"/>
-                          </a:solidFill>
-                          <a:latin typeface="Arial"/>
-                        </a:rPr>
-                        <a:t>0.1 mm</a:t>
-                      </a:r>
-                    </a:p>
-                  </a:txBody>
-                  <a:tcPr marL="54864" marR="54864" marT="18288" marB="18288">
-                    <a:solidFill>
-                      <a:srgbClr val="ECF1F6"/>
-                    </a:solidFill>
-                  </a:tcPr>
-                </a:tc>
-                <a:tc>
-                  <a:txBody>
-                    <a:bodyPr wrap="square"/>
-                    <a:lstStyle/>
-                    <a:p>
-                      <a:r>
-                        <a:rPr sz="1100" b="0">
-                          <a:solidFill>
-                            <a:srgbClr val="282828"/>
-                          </a:solidFill>
-                          <a:latin typeface="Arial"/>
-                        </a:rPr>
-                        <a:t>0.36 mm (1.4 at 10 mm)</a:t>
-                      </a:r>
-                    </a:p>
-                  </a:txBody>
-                  <a:tcPr marL="54864" marR="54864" marT="18288" marB="18288">
-                    <a:solidFill>
-                      <a:srgbClr val="ECF1F6"/>
-                    </a:solidFill>
-                  </a:tcPr>
-                </a:tc>
-                <a:tc>
-                  <a:txBody>
-                    <a:bodyPr wrap="square"/>
-                    <a:lstStyle/>
-                    <a:p>
-                      <a:r>
-                        <a:rPr sz="1100" b="0">
-                          <a:solidFill>
-                            <a:srgbClr val="282828"/>
-                          </a:solidFill>
-                          <a:latin typeface="Arial"/>
-                        </a:rPr>
-                        <a:t>0.50 mm</a:t>
-                      </a:r>
-                    </a:p>
-                  </a:txBody>
-                  <a:tcPr marL="54864" marR="54864" marT="18288" marB="18288">
-                    <a:solidFill>
-                      <a:srgbClr val="ECF1F6"/>
-                    </a:solidFill>
-                  </a:tcPr>
-                </a:tc>
-              </a:tr>
-              <a:tr h="280035">
-                <a:tc>
-                  <a:txBody>
-                    <a:bodyPr wrap="square"/>
-                    <a:lstStyle/>
-                    <a:p>
-                      <a:r>
-                        <a:rPr sz="1100" b="0">
-                          <a:solidFill>
-                            <a:srgbClr val="282828"/>
-                          </a:solidFill>
-                          <a:latin typeface="Arial"/>
-                        </a:rPr>
-                        <a:t>interferometer snapshot form</a:t>
-                      </a:r>
-                    </a:p>
-                  </a:txBody>
-                  <a:tcPr marL="54864" marR="54864" marT="18288" marB="18288">
-                    <a:solidFill>
-                      <a:srgbClr val="FFFFFF"/>
-                    </a:solidFill>
-                  </a:tcPr>
-                </a:tc>
-                <a:tc>
-                  <a:txBody>
-                    <a:bodyPr wrap="square"/>
-                    <a:lstStyle/>
-                    <a:p>
-                      <a:r>
-                        <a:rPr sz="1100" b="0">
-                          <a:solidFill>
-                            <a:srgbClr val="282828"/>
-                          </a:solidFill>
-                          <a:latin typeface="Arial"/>
-                        </a:rPr>
-                        <a:t>the small-angle case</a:t>
-                      </a:r>
-                    </a:p>
-                  </a:txBody>
-                  <a:tcPr marL="54864" marR="54864" marT="18288" marB="18288">
-                    <a:solidFill>
-                      <a:srgbClr val="FFFFFF"/>
-                    </a:solidFill>
-                  </a:tcPr>
-                </a:tc>
-                <a:tc>
-                  <a:txBody>
-                    <a:bodyPr wrap="square"/>
-                    <a:lstStyle/>
-                    <a:p>
-                      <a:r>
-                        <a:rPr sz="1100" b="0">
-                          <a:solidFill>
-                            <a:srgbClr val="282828"/>
-                          </a:solidFill>
-                          <a:latin typeface="Arial"/>
-                        </a:rPr>
-                        <a:t>its plate systematics re-run at this angle</a:t>
-                      </a:r>
-                    </a:p>
-                  </a:txBody>
-                  <a:tcPr marL="54864" marR="54864" marT="18288" marB="18288">
-                    <a:solidFill>
-                      <a:srgbClr val="FFFFFF"/>
-                    </a:solidFill>
-                  </a:tcPr>
-                </a:tc>
-                <a:tc>
-                  <a:txBody>
-                    <a:bodyPr wrap="square"/>
-                    <a:lstStyle/>
-                    <a:p>
-                      <a:r>
-                        <a:rPr sz="1100" b="0">
-                          <a:solidFill>
-                            <a:srgbClr val="282828"/>
-                          </a:solidFill>
-                          <a:latin typeface="Arial"/>
-                        </a:rPr>
-                        <a:t>larger</a:t>
-                      </a:r>
-                    </a:p>
-                  </a:txBody>
-                  <a:tcPr marL="54864" marR="54864" marT="18288" marB="18288">
-                    <a:solidFill>
-                      <a:srgbClr val="FFFFFF"/>
-                    </a:solidFill>
-                  </a:tcPr>
-                </a:tc>
-              </a:tr>
-            </a:tbl>
-          </a:graphicData>
-        </a:graphic>
-      </p:graphicFrame>
-      <p:sp>
-        <p:nvSpPr>
-          <p:cNvPr id="7" name="TextBox 6"/>
-          <p:cNvSpPr txBox="1"/>
-          <p:nvPr/>
-        </p:nvSpPr>
-        <p:spPr>
-          <a:xfrm>
-            <a:off x="411480" y="6511671"/>
-            <a:ext cx="11368735" cy="274320"/>
-          </a:xfrm>
-          <a:prstGeom prst="rect">
-            <a:avLst/>
-          </a:prstGeom>
-          <a:noFill/>
-        </p:spPr>
-        <p:txBody>
-          <a:bodyPr wrap="square">
-            <a:spAutoFit/>
-          </a:bodyPr>
-          <a:lstStyle/>
-          <a:p>
-            <a:pPr>
-              <a:spcAft>
-                <a:spcPts val="600"/>
-              </a:spcAft>
-            </a:pPr>
-            <a:r>
-              <a:rPr sz="1050" b="0">
-                <a:solidFill>
-                  <a:srgbClr val="6E6E6E"/>
-                </a:solidFill>
-                <a:latin typeface="Arial"/>
-              </a:rPr>
-              <a:t>The sensors reproduce their rows at every angle; the interferometer's snapshot form is the one thing the angle changes, through the plate's polarization, and the cube form is built for 45°.  Run tags bs22_dev, bs30_dev; the panels at 7° and 30° are on the backup clearance slide.</a:t>
-            </a:r>
-          </a:p>
-        </p:txBody>
-      </p:sp>
-    </p:spTree>
-  </p:cSld>
-  <p:clrMapOvr>
-    <a:masterClrMapping/>
-  </p:clrMapOvr>
-</p:sld>
-</file>
-
-<file path=ppt/slides/slide50.xml><?xml version="1.0" encoding="utf-8"?>
+<file path=ppt/slides/slide51.xml><?xml version="1.0" encoding="utf-8"?>
 <p:sld xmlns:a="http://schemas.openxmlformats.org/drawingml/2006/main" xmlns:p="http://schemas.openxmlformats.org/presentationml/2006/main" xmlns:r="http://schemas.openxmlformats.org/officeDocument/2006/relationships">
   <p:cSld>
     <p:spTree>
@@ -30650,7 +31117,7 @@
 </p:sld>
 </file>
 
-<file path=ppt/slides/slide51.xml><?xml version="1.0" encoding="utf-8"?>
+<file path=ppt/slides/slide52.xml><?xml version="1.0" encoding="utf-8"?>
 <p:sld xmlns:a="http://schemas.openxmlformats.org/drawingml/2006/main" xmlns:p="http://schemas.openxmlformats.org/presentationml/2006/main" xmlns:r="http://schemas.openxmlformats.org/officeDocument/2006/relationships">
   <p:cSld>
     <p:spTree>
@@ -31644,7 +32111,7 @@
 </p:sld>
 </file>
 
-<file path=ppt/slides/slide52.xml><?xml version="1.0" encoding="utf-8"?>
+<file path=ppt/slides/slide53.xml><?xml version="1.0" encoding="utf-8"?>
 <p:sld xmlns:a="http://schemas.openxmlformats.org/drawingml/2006/main" xmlns:p="http://schemas.openxmlformats.org/presentationml/2006/main" xmlns:r="http://schemas.openxmlformats.org/officeDocument/2006/relationships">
   <p:cSld>
     <p:spTree>
@@ -31963,7 +32430,7 @@
                 </a:solidFill>
                 <a:latin typeface="Arial"/>
               </a:rPr>
-              <a:t>The front end and the detector leg, from the parameter sheet; thicknesses are the scaled model's and are being made real</a:t>
+              <a:t>The front end and the detector leg, from the parameter sheet; the substrates are now decided (10 mm splitter and compensator, 2 mm fused-silica plates under every polarizing element, a 2 mm mask plate, 4 mm lens edges) and go into every deck from here</a:t>
             </a:r>
           </a:p>
         </p:txBody>
@@ -32022,7 +32489,7 @@
         </p:nvGraphicFramePr>
         <p:xfrm>
           <a:off x="411480" y="1298448"/>
-          <a:ext cx="11368734" cy="8549640"/>
+          <a:ext cx="11368734" cy="7229475"/>
         </p:xfrm>
         <a:graphic>
           <a:graphicData uri="http://schemas.openxmlformats.org/drawingml/2006/table">
@@ -32032,10 +32499,10 @@
               </a:tblPr>
               <a:tblGrid>
                 <a:gridCol w="1962404"/>
-                <a:gridCol w="5700809"/>
+                <a:gridCol w="5148308"/>
                 <a:gridCol w="2180336"/>
                 <a:gridCol w="509524"/>
-                <a:gridCol w="1015661"/>
+                <a:gridCol w="1568162"/>
               </a:tblGrid>
               <a:tr h="280035">
                 <a:tc>
@@ -32149,7 +32616,7 @@
                   </a:tcPr>
                 </a:tc>
               </a:tr>
-              <a:tr h="845820">
+              <a:tr h="657225">
                 <a:tc>
                   <a:txBody>
                     <a:bodyPr wrap="square"/>
@@ -32485,7 +32952,7 @@
                   </a:tcPr>
                 </a:tc>
               </a:tr>
-              <a:tr h="845820">
+              <a:tr h="657225">
                 <a:tc>
                   <a:txBody>
                     <a:bodyPr wrap="square"/>
@@ -32597,7 +33064,7 @@
                   </a:tcPr>
                 </a:tc>
               </a:tr>
-              <a:tr h="845820">
+              <a:tr h="657225">
                 <a:tc>
                   <a:txBody>
                     <a:bodyPr wrap="square"/>
@@ -32709,7 +33176,7 @@
                   </a:tcPr>
                 </a:tc>
               </a:tr>
-              <a:tr h="845820">
+              <a:tr h="657225">
                 <a:tc>
                   <a:txBody>
                     <a:bodyPr wrap="square"/>
@@ -32817,6 +33284,118 @@
                   <a:tcPr marL="54864" marR="54864" marT="18288" marB="18288">
                     <a:solidFill>
                       <a:srgbClr val="ECF1F6"/>
+                    </a:solidFill>
+                  </a:tcPr>
+                </a:tc>
+              </a:tr>
+              <a:tr h="657225">
+                <a:tc>
+                  <a:txBody>
+                    <a:bodyPr wrap="square"/>
+                    <a:lstStyle/>
+                    <a:p>
+                      <a:r>
+                        <a:rPr sz="1100" b="0">
+                          <a:solidFill>
+                            <a:srgbClr val="282828"/>
+                          </a:solidFill>
+                          <a:latin typeface="Arial"/>
+                        </a:rPr>
+                        <a:t>mask seat</a:t>
+                      </a:r>
+                    </a:p>
+                  </a:txBody>
+                  <a:tcPr marL="54864" marR="54864" marT="18288" marB="18288">
+                    <a:solidFill>
+                      <a:srgbClr val="FFFFFF"/>
+                    </a:solidFill>
+                  </a:tcPr>
+                </a:tc>
+                <a:tc>
+                  <a:txBody>
+                    <a:bodyPr wrap="square"/>
+                    <a:lstStyle/>
+                    <a:p>
+                      <a:r>
+                        <a:rPr sz="1100" b="0">
+                          <a:solidFill>
+                            <a:srgbClr val="282828"/>
+                          </a:solidFill>
+                          <a:latin typeface="Arial"/>
+                        </a:rPr>
+                        <a:t>translation stage at the internal focus</a:t>
+                      </a:r>
+                    </a:p>
+                  </a:txBody>
+                  <a:tcPr marL="54864" marR="54864" marT="18288" marB="18288">
+                    <a:solidFill>
+                      <a:srgbClr val="FFFFFF"/>
+                    </a:solidFill>
+                  </a:tcPr>
+                </a:tc>
+                <a:tc>
+                  <a:txBody>
+                    <a:bodyPr wrap="square"/>
+                    <a:lstStyle/>
+                    <a:p>
+                      <a:r>
+                        <a:rPr sz="1100" b="0">
+                          <a:solidFill>
+                            <a:srgbClr val="282828"/>
+                          </a:solidFill>
+                          <a:latin typeface="Arial"/>
+                        </a:rPr>
+                        <a:t>—</a:t>
+                      </a:r>
+                    </a:p>
+                  </a:txBody>
+                  <a:tcPr marL="54864" marR="54864" marT="18288" marB="18288">
+                    <a:solidFill>
+                      <a:srgbClr val="FFFFFF"/>
+                    </a:solidFill>
+                  </a:tcPr>
+                </a:tc>
+                <a:tc>
+                  <a:txBody>
+                    <a:bodyPr wrap="square"/>
+                    <a:lstStyle/>
+                    <a:p>
+                      <a:r>
+                        <a:rPr sz="1100" b="0">
+                          <a:solidFill>
+                            <a:srgbClr val="282828"/>
+                          </a:solidFill>
+                          <a:latin typeface="Arial"/>
+                        </a:rPr>
+                        <a:t>1</a:t>
+                      </a:r>
+                    </a:p>
+                  </a:txBody>
+                  <a:tcPr marL="54864" marR="54864" marT="18288" marB="18288">
+                    <a:solidFill>
+                      <a:srgbClr val="FFFFFF"/>
+                    </a:solidFill>
+                  </a:tcPr>
+                </a:tc>
+                <a:tc>
+                  <a:txBody>
+                    <a:bodyPr wrap="square"/>
+                    <a:lstStyle/>
+                    <a:p>
+                      <a:r>
+                        <a:rPr sz="1100" b="0">
+                          <a:solidFill>
+                            <a:srgbClr val="282828"/>
+                          </a:solidFill>
+                          <a:latin typeface="Arial"/>
+                        </a:rPr>
+                        <a:t>selects the sensor: clear window, dimple, metasurface, pinhole</a:t>
+                      </a:r>
+                    </a:p>
+                  </a:txBody>
+                  <a:tcPr marL="54864" marR="54864" marT="18288" marB="18288">
+                    <a:solidFill>
+                      <a:srgbClr val="FFFFFF"/>
                     </a:solidFill>
                   </a:tcPr>
                 </a:tc>
@@ -32834,57 +33413,57 @@
                           </a:solidFill>
                           <a:latin typeface="Arial"/>
                         </a:rPr>
-                        <a:t>mask seat</a:t>
-                      </a:r>
-                    </a:p>
-                  </a:txBody>
-                  <a:tcPr marL="54864" marR="54864" marT="18288" marB="18288">
-                    <a:solidFill>
-                      <a:srgbClr val="FFFFFF"/>
-                    </a:solidFill>
-                  </a:tcPr>
-                </a:tc>
-                <a:tc>
-                  <a:txBody>
-                    <a:bodyPr wrap="square"/>
-                    <a:lstStyle/>
-                    <a:p>
-                      <a:r>
-                        <a:rPr sz="1100" b="0">
-                          <a:solidFill>
-                            <a:srgbClr val="282828"/>
-                          </a:solidFill>
-                          <a:latin typeface="Arial"/>
-                        </a:rPr>
-                        <a:t>translation stage at the internal focus</a:t>
-                      </a:r>
-                    </a:p>
-                  </a:txBody>
-                  <a:tcPr marL="54864" marR="54864" marT="18288" marB="18288">
-                    <a:solidFill>
-                      <a:srgbClr val="FFFFFF"/>
-                    </a:solidFill>
-                  </a:tcPr>
-                </a:tc>
-                <a:tc>
-                  <a:txBody>
-                    <a:bodyPr wrap="square"/>
-                    <a:lstStyle/>
-                    <a:p>
-                      <a:r>